--- a/slides/m100_agent_final_deck.pptx
+++ b/slides/m100_agent_final_deck.pptx
@@ -4659,6 +4659,2982 @@
       <p:sp>
         <p:nvSpPr>
           <p:cNvPr id="5" name="TextBox 4"/>
+          <p:cNvSpPr txBox="1"/>
+          <p:nvPr/>
+        </p:nvSpPr>
+        <p:spPr>
+          <a:xfrm>
+            <a:off x="566928" y="859536"/>
+            <a:ext cx="9592056" cy="310896"/>
+          </a:xfrm>
+          <a:prstGeom prst="rect">
+            <a:avLst/>
+          </a:prstGeom>
+          <a:noFill/>
+        </p:spPr>
+        <p:txBody>
+          <a:bodyPr wrap="square" anchor="ctr" lIns="0" tIns="0" rIns="0" bIns="0">
+            <a:noAutofit/>
+          </a:bodyPr>
+          <a:lstStyle/>
+          <a:p>
+            <a:pPr algn="l" latinLnBrk="0">
+              <a:lnSpc>
+                <a:spcPct val="100000"/>
+              </a:lnSpc>
+              <a:spcBef>
+                <a:spcPts val="0"/>
+              </a:spcBef>
+              <a:spcAft>
+                <a:spcPts val="0"/>
+              </a:spcAft>
+            </a:pPr>
+            <a:r>
+              <a:rPr sz="1250" b="0">
+                <a:solidFill>
+                  <a:srgbClr val="1B4D69"/>
+                </a:solidFill>
+                <a:latin typeface="Microsoft YaHei"/>
+                <a:ea typeface="Microsoft YaHei"/>
+                <a:cs typeface="Microsoft YaHei"/>
+              </a:rPr>
+              <a:t>目标态：算子 · 计算图 · 引擎三层协同；目标由约束推导，判决仍交给真机实测</a:t>
+            </a:r>
+          </a:p>
+        </p:txBody>
+      </p:sp>
+      <p:sp>
+        <p:nvSpPr>
+          <p:cNvPr id="6" name="Rectangle 5"/>
+          <p:cNvSpPr/>
+          <p:nvPr/>
+        </p:nvSpPr>
+        <p:spPr>
+          <a:xfrm>
+            <a:off x="950976" y="1243584"/>
+            <a:ext cx="10692079" cy="914400"/>
+          </a:xfrm>
+          <a:prstGeom prst="rect">
+            <a:avLst/>
+          </a:prstGeom>
+          <a:solidFill>
+            <a:srgbClr val="F2F8FD"/>
+          </a:solidFill>
+          <a:ln>
+            <a:noFill/>
+          </a:ln>
+        </p:spPr>
+        <p:txBody>
+          <a:bodyPr rtlCol="0" anchor="ctr"/>
+          <a:lstStyle/>
+          <a:p>
+            <a:pPr algn="ctr"/>
+          </a:p>
+        </p:txBody>
+      </p:sp>
+      <p:sp>
+        <p:nvSpPr>
+          <p:cNvPr id="7" name="Rectangle 6"/>
+          <p:cNvSpPr/>
+          <p:nvPr/>
+        </p:nvSpPr>
+        <p:spPr>
+          <a:xfrm>
+            <a:off x="950976" y="1243584"/>
+            <a:ext cx="64008" cy="914400"/>
+          </a:xfrm>
+          <a:prstGeom prst="rect">
+            <a:avLst/>
+          </a:prstGeom>
+          <a:solidFill>
+            <a:srgbClr val="0F62CE"/>
+          </a:solidFill>
+          <a:ln>
+            <a:noFill/>
+          </a:ln>
+        </p:spPr>
+        <p:txBody>
+          <a:bodyPr rtlCol="0" anchor="ctr"/>
+          <a:lstStyle/>
+          <a:p>
+            <a:pPr algn="ctr"/>
+          </a:p>
+        </p:txBody>
+      </p:sp>
+      <p:sp>
+        <p:nvSpPr>
+          <p:cNvPr id="8" name="TextBox 7"/>
+          <p:cNvSpPr txBox="1"/>
+          <p:nvPr/>
+        </p:nvSpPr>
+        <p:spPr>
+          <a:xfrm>
+            <a:off x="1170432" y="1316736"/>
+            <a:ext cx="1188720" cy="768096"/>
+          </a:xfrm>
+          <a:prstGeom prst="rect">
+            <a:avLst/>
+          </a:prstGeom>
+          <a:noFill/>
+        </p:spPr>
+        <p:txBody>
+          <a:bodyPr wrap="square" anchor="ctr" lIns="0" tIns="0" rIns="0" bIns="0">
+            <a:noAutofit/>
+          </a:bodyPr>
+          <a:lstStyle/>
+          <a:p>
+            <a:pPr algn="l" latinLnBrk="0">
+              <a:lnSpc>
+                <a:spcPct val="100000"/>
+              </a:lnSpc>
+              <a:spcBef>
+                <a:spcPts val="0"/>
+              </a:spcBef>
+              <a:spcAft>
+                <a:spcPts val="300"/>
+              </a:spcAft>
+            </a:pPr>
+            <a:r>
+              <a:rPr sz="1400" b="1">
+                <a:solidFill>
+                  <a:srgbClr val="0A2B45"/>
+                </a:solidFill>
+                <a:latin typeface="Microsoft YaHei"/>
+                <a:ea typeface="Microsoft YaHei"/>
+                <a:cs typeface="Microsoft YaHei"/>
+              </a:rPr>
+              <a:t>目标层</a:t>
+            </a:r>
+          </a:p>
+          <a:p>
+            <a:pPr algn="l" latinLnBrk="0">
+              <a:lnSpc>
+                <a:spcPct val="100000"/>
+              </a:lnSpc>
+              <a:spcBef>
+                <a:spcPts val="0"/>
+              </a:spcBef>
+              <a:spcAft>
+                <a:spcPts val="0"/>
+              </a:spcAft>
+            </a:pPr>
+            <a:r>
+              <a:rPr sz="900" b="0">
+                <a:solidFill>
+                  <a:srgbClr val="40708B"/>
+                </a:solidFill>
+                <a:latin typeface="Microsoft YaHei"/>
+                <a:ea typeface="Microsoft YaHei"/>
+                <a:cs typeface="Microsoft YaHei"/>
+              </a:rPr>
+              <a:t>定靶子 · 拆差距</a:t>
+            </a:r>
+          </a:p>
+        </p:txBody>
+      </p:sp>
+      <p:sp>
+        <p:nvSpPr>
+          <p:cNvPr id="9" name="Rectangle 8"/>
+          <p:cNvSpPr/>
+          <p:nvPr/>
+        </p:nvSpPr>
+        <p:spPr>
+          <a:xfrm>
+            <a:off x="2578608" y="1335024"/>
+            <a:ext cx="1737360" cy="731520"/>
+          </a:xfrm>
+          <a:prstGeom prst="rect">
+            <a:avLst/>
+          </a:prstGeom>
+          <a:solidFill>
+            <a:srgbClr val="FFFFFF"/>
+          </a:solidFill>
+          <a:ln w="9525">
+            <a:solidFill>
+              <a:srgbClr val="CFE3F0"/>
+            </a:solidFill>
+          </a:ln>
+        </p:spPr>
+        <p:txBody>
+          <a:bodyPr rtlCol="0" anchor="ctr"/>
+          <a:lstStyle/>
+          <a:p>
+            <a:pPr algn="ctr"/>
+          </a:p>
+        </p:txBody>
+      </p:sp>
+      <p:sp>
+        <p:nvSpPr>
+          <p:cNvPr id="10" name="TextBox 9"/>
+          <p:cNvSpPr txBox="1"/>
+          <p:nvPr/>
+        </p:nvSpPr>
+        <p:spPr>
+          <a:xfrm>
+            <a:off x="2779776" y="1389888"/>
+            <a:ext cx="1371600" cy="621792"/>
+          </a:xfrm>
+          <a:prstGeom prst="rect">
+            <a:avLst/>
+          </a:prstGeom>
+          <a:noFill/>
+        </p:spPr>
+        <p:txBody>
+          <a:bodyPr wrap="square" anchor="ctr" lIns="0" tIns="0" rIns="0" bIns="0">
+            <a:noAutofit/>
+          </a:bodyPr>
+          <a:lstStyle/>
+          <a:p>
+            <a:pPr algn="l" latinLnBrk="0">
+              <a:lnSpc>
+                <a:spcPct val="100000"/>
+              </a:lnSpc>
+              <a:spcBef>
+                <a:spcPts val="0"/>
+              </a:spcBef>
+              <a:spcAft>
+                <a:spcPts val="400"/>
+              </a:spcAft>
+            </a:pPr>
+            <a:r>
+              <a:rPr sz="1150" b="1">
+                <a:solidFill>
+                  <a:srgbClr val="0A2B45"/>
+                </a:solidFill>
+                <a:latin typeface="Microsoft YaHei"/>
+                <a:ea typeface="Microsoft YaHei"/>
+                <a:cs typeface="Microsoft YaHei"/>
+              </a:rPr>
+              <a:t>人</a:t>
+            </a:r>
+          </a:p>
+          <a:p>
+            <a:pPr algn="l" latinLnBrk="0">
+              <a:lnSpc>
+                <a:spcPct val="100000"/>
+              </a:lnSpc>
+              <a:spcBef>
+                <a:spcPts val="0"/>
+              </a:spcBef>
+              <a:spcAft>
+                <a:spcPts val="200"/>
+              </a:spcAft>
+            </a:pPr>
+            <a:r>
+              <a:rPr sz="950" b="0">
+                <a:solidFill>
+                  <a:srgbClr val="1B4D69"/>
+                </a:solidFill>
+                <a:latin typeface="Microsoft YaHei"/>
+                <a:ea typeface="Microsoft YaHei"/>
+                <a:cs typeface="Microsoft YaHei"/>
+              </a:rPr>
+              <a:t>流量画像</a:t>
+            </a:r>
+          </a:p>
+          <a:p>
+            <a:pPr algn="l" latinLnBrk="0">
+              <a:lnSpc>
+                <a:spcPct val="100000"/>
+              </a:lnSpc>
+              <a:spcBef>
+                <a:spcPts val="0"/>
+              </a:spcBef>
+              <a:spcAft>
+                <a:spcPts val="200"/>
+              </a:spcAft>
+            </a:pPr>
+            <a:r>
+              <a:rPr sz="950" b="0">
+                <a:solidFill>
+                  <a:srgbClr val="1B4D69"/>
+                </a:solidFill>
+                <a:latin typeface="Microsoft YaHei"/>
+                <a:ea typeface="Microsoft YaHei"/>
+                <a:cs typeface="Microsoft YaHei"/>
+              </a:rPr>
+              <a:t>时延约束</a:t>
+            </a:r>
+          </a:p>
+        </p:txBody>
+      </p:sp>
+      <p:cxnSp>
+        <p:nvCxnSpPr>
+          <p:cNvPr id="11" name="Connector 10"/>
+          <p:cNvCxnSpPr/>
+          <p:nvPr/>
+        </p:nvCxnSpPr>
+        <p:spPr>
+          <a:xfrm>
+            <a:off x="4389120" y="1700784"/>
+            <a:ext cx="237744" cy="0"/>
+          </a:xfrm>
+          <a:prstGeom prst="line">
+            <a:avLst/>
+          </a:prstGeom>
+          <a:ln w="15875">
+            <a:solidFill>
+              <a:srgbClr val="0F62CE"/>
+            </a:solidFill>
+            <a:tailEnd type="triangle" w="med" len="med"/>
+          </a:ln>
+        </p:spPr>
+      </p:cxnSp>
+      <p:sp>
+        <p:nvSpPr>
+          <p:cNvPr id="12" name="Rectangle 11"/>
+          <p:cNvSpPr/>
+          <p:nvPr/>
+        </p:nvSpPr>
+        <p:spPr>
+          <a:xfrm>
+            <a:off x="4681728" y="1335024"/>
+            <a:ext cx="3246120" cy="731520"/>
+          </a:xfrm>
+          <a:prstGeom prst="rect">
+            <a:avLst/>
+          </a:prstGeom>
+          <a:solidFill>
+            <a:srgbClr val="FFFFFF"/>
+          </a:solidFill>
+          <a:ln w="9525">
+            <a:solidFill>
+              <a:srgbClr val="CFE3F0"/>
+            </a:solidFill>
+          </a:ln>
+        </p:spPr>
+        <p:txBody>
+          <a:bodyPr rtlCol="0" anchor="ctr"/>
+          <a:lstStyle/>
+          <a:p>
+            <a:pPr algn="ctr"/>
+          </a:p>
+        </p:txBody>
+      </p:sp>
+      <p:sp>
+        <p:nvSpPr>
+          <p:cNvPr id="13" name="TextBox 12"/>
+          <p:cNvSpPr txBox="1"/>
+          <p:nvPr/>
+        </p:nvSpPr>
+        <p:spPr>
+          <a:xfrm>
+            <a:off x="4882896" y="1389888"/>
+            <a:ext cx="2880360" cy="621792"/>
+          </a:xfrm>
+          <a:prstGeom prst="rect">
+            <a:avLst/>
+          </a:prstGeom>
+          <a:noFill/>
+        </p:spPr>
+        <p:txBody>
+          <a:bodyPr wrap="square" anchor="ctr" lIns="0" tIns="0" rIns="0" bIns="0">
+            <a:noAutofit/>
+          </a:bodyPr>
+          <a:lstStyle/>
+          <a:p>
+            <a:pPr algn="l" latinLnBrk="0">
+              <a:lnSpc>
+                <a:spcPct val="100000"/>
+              </a:lnSpc>
+              <a:spcBef>
+                <a:spcPts val="0"/>
+              </a:spcBef>
+              <a:spcAft>
+                <a:spcPts val="400"/>
+              </a:spcAft>
+            </a:pPr>
+            <a:r>
+              <a:rPr sz="1150" b="1">
+                <a:solidFill>
+                  <a:srgbClr val="0A2B45"/>
+                </a:solidFill>
+                <a:latin typeface="Microsoft YaHei"/>
+                <a:ea typeface="Microsoft YaHei"/>
+                <a:cs typeface="Microsoft YaHei"/>
+              </a:rPr>
+              <a:t>上限核算器 · 无模型</a:t>
+            </a:r>
+          </a:p>
+          <a:p>
+            <a:pPr algn="l" latinLnBrk="0">
+              <a:lnSpc>
+                <a:spcPct val="100000"/>
+              </a:lnSpc>
+              <a:spcBef>
+                <a:spcPts val="0"/>
+              </a:spcBef>
+              <a:spcAft>
+                <a:spcPts val="200"/>
+              </a:spcAft>
+            </a:pPr>
+            <a:r>
+              <a:rPr sz="950" b="0">
+                <a:solidFill>
+                  <a:srgbClr val="1B4D69"/>
+                </a:solidFill>
+                <a:latin typeface="Microsoft YaHei"/>
+                <a:ea typeface="Microsoft YaHei"/>
+                <a:cs typeface="Microsoft YaHei"/>
+              </a:rPr>
+              <a:t>只用模型配置 + 硬件规格</a:t>
+            </a:r>
+          </a:p>
+          <a:p>
+            <a:pPr algn="l" latinLnBrk="0">
+              <a:lnSpc>
+                <a:spcPct val="100000"/>
+              </a:lnSpc>
+              <a:spcBef>
+                <a:spcPts val="0"/>
+              </a:spcBef>
+              <a:spcAft>
+                <a:spcPts val="200"/>
+              </a:spcAft>
+            </a:pPr>
+            <a:r>
+              <a:rPr sz="950" b="0">
+                <a:solidFill>
+                  <a:srgbClr val="1B4D69"/>
+                </a:solidFill>
+                <a:latin typeface="Microsoft YaHei"/>
+                <a:ea typeface="Microsoft YaHei"/>
+                <a:cs typeface="Microsoft YaHei"/>
+              </a:rPr>
+              <a:t>上限不用实测去凑</a:t>
+            </a:r>
+          </a:p>
+        </p:txBody>
+      </p:sp>
+      <p:cxnSp>
+        <p:nvCxnSpPr>
+          <p:cNvPr id="14" name="Connector 13"/>
+          <p:cNvCxnSpPr/>
+          <p:nvPr/>
+        </p:nvCxnSpPr>
+        <p:spPr>
+          <a:xfrm>
+            <a:off x="8001000" y="1700784"/>
+            <a:ext cx="237744" cy="0"/>
+          </a:xfrm>
+          <a:prstGeom prst="line">
+            <a:avLst/>
+          </a:prstGeom>
+          <a:ln w="15875">
+            <a:solidFill>
+              <a:srgbClr val="0F62CE"/>
+            </a:solidFill>
+            <a:tailEnd type="triangle" w="med" len="med"/>
+          </a:ln>
+        </p:spPr>
+      </p:cxnSp>
+      <p:sp>
+        <p:nvSpPr>
+          <p:cNvPr id="15" name="Rectangle 14"/>
+          <p:cNvSpPr/>
+          <p:nvPr/>
+        </p:nvSpPr>
+        <p:spPr>
+          <a:xfrm>
+            <a:off x="8293608" y="1335024"/>
+            <a:ext cx="3346704" cy="731520"/>
+          </a:xfrm>
+          <a:prstGeom prst="rect">
+            <a:avLst/>
+          </a:prstGeom>
+          <a:solidFill>
+            <a:srgbClr val="FFFFFF"/>
+          </a:solidFill>
+          <a:ln w="9525">
+            <a:solidFill>
+              <a:srgbClr val="CFE3F0"/>
+            </a:solidFill>
+          </a:ln>
+        </p:spPr>
+        <p:txBody>
+          <a:bodyPr rtlCol="0" anchor="ctr"/>
+          <a:lstStyle/>
+          <a:p>
+            <a:pPr algn="ctr"/>
+          </a:p>
+        </p:txBody>
+      </p:sp>
+      <p:sp>
+        <p:nvSpPr>
+          <p:cNvPr id="16" name="TextBox 15"/>
+          <p:cNvSpPr txBox="1"/>
+          <p:nvPr/>
+        </p:nvSpPr>
+        <p:spPr>
+          <a:xfrm>
+            <a:off x="8494776" y="1389888"/>
+            <a:ext cx="2980944" cy="621792"/>
+          </a:xfrm>
+          <a:prstGeom prst="rect">
+            <a:avLst/>
+          </a:prstGeom>
+          <a:noFill/>
+        </p:spPr>
+        <p:txBody>
+          <a:bodyPr wrap="square" anchor="ctr" lIns="0" tIns="0" rIns="0" bIns="0">
+            <a:noAutofit/>
+          </a:bodyPr>
+          <a:lstStyle/>
+          <a:p>
+            <a:pPr algn="l" latinLnBrk="0">
+              <a:lnSpc>
+                <a:spcPct val="100000"/>
+              </a:lnSpc>
+              <a:spcBef>
+                <a:spcPts val="0"/>
+              </a:spcBef>
+              <a:spcAft>
+                <a:spcPts val="400"/>
+              </a:spcAft>
+            </a:pPr>
+            <a:r>
+              <a:rPr sz="1150" b="1">
+                <a:solidFill>
+                  <a:srgbClr val="0A2B45"/>
+                </a:solidFill>
+                <a:latin typeface="Microsoft YaHei"/>
+                <a:ea typeface="Microsoft YaHei"/>
+                <a:cs typeface="Microsoft YaHei"/>
+              </a:rPr>
+              <a:t>总差距拆成三项</a:t>
+            </a:r>
+          </a:p>
+          <a:p>
+            <a:pPr algn="l" latinLnBrk="0">
+              <a:lnSpc>
+                <a:spcPct val="100000"/>
+              </a:lnSpc>
+              <a:spcBef>
+                <a:spcPts val="0"/>
+              </a:spcBef>
+              <a:spcAft>
+                <a:spcPts val="200"/>
+              </a:spcAft>
+            </a:pPr>
+            <a:r>
+              <a:rPr sz="950" b="0">
+                <a:solidFill>
+                  <a:srgbClr val="1B4D69"/>
+                </a:solidFill>
+                <a:latin typeface="Microsoft YaHei"/>
+                <a:ea typeface="Microsoft YaHei"/>
+                <a:cs typeface="Microsoft YaHei"/>
+              </a:rPr>
+              <a:t>工作点 × 单步 × 步间</a:t>
+            </a:r>
+          </a:p>
+          <a:p>
+            <a:pPr algn="l" latinLnBrk="0">
+              <a:lnSpc>
+                <a:spcPct val="100000"/>
+              </a:lnSpc>
+              <a:spcBef>
+                <a:spcPts val="0"/>
+              </a:spcBef>
+              <a:spcAft>
+                <a:spcPts val="200"/>
+              </a:spcAft>
+            </a:pPr>
+            <a:r>
+              <a:rPr sz="950" b="0">
+                <a:solidFill>
+                  <a:srgbClr val="1B4D69"/>
+                </a:solidFill>
+                <a:latin typeface="Microsoft YaHei"/>
+                <a:ea typeface="Microsoft YaHei"/>
+                <a:cs typeface="Microsoft YaHei"/>
+              </a:rPr>
+              <a:t>每一项都有明确的主人</a:t>
+            </a:r>
+          </a:p>
+        </p:txBody>
+      </p:sp>
+      <p:cxnSp>
+        <p:nvCxnSpPr>
+          <p:cNvPr id="17" name="Connector 16"/>
+          <p:cNvCxnSpPr/>
+          <p:nvPr/>
+        </p:nvCxnSpPr>
+        <p:spPr>
+          <a:xfrm>
+            <a:off x="2578608" y="2331720"/>
+            <a:ext cx="9064447" cy="0"/>
+          </a:xfrm>
+          <a:prstGeom prst="line">
+            <a:avLst/>
+          </a:prstGeom>
+          <a:ln w="9525">
+            <a:solidFill>
+              <a:srgbClr val="AFCEE1"/>
+            </a:solidFill>
+            <a:prstDash val="dash"/>
+          </a:ln>
+        </p:spPr>
+      </p:cxnSp>
+      <p:sp>
+        <p:nvSpPr>
+          <p:cNvPr id="18" name="Rectangle 17"/>
+          <p:cNvSpPr/>
+          <p:nvPr/>
+        </p:nvSpPr>
+        <p:spPr>
+          <a:xfrm>
+            <a:off x="2578608" y="2212848"/>
+            <a:ext cx="2651760" cy="237744"/>
+          </a:xfrm>
+          <a:prstGeom prst="rect">
+            <a:avLst/>
+          </a:prstGeom>
+          <a:solidFill>
+            <a:srgbClr val="F2F8FD"/>
+          </a:solidFill>
+          <a:ln>
+            <a:noFill/>
+          </a:ln>
+        </p:spPr>
+        <p:txBody>
+          <a:bodyPr rtlCol="0" anchor="ctr"/>
+          <a:lstStyle/>
+          <a:p>
+            <a:pPr algn="ctr"/>
+          </a:p>
+        </p:txBody>
+      </p:sp>
+      <p:sp>
+        <p:nvSpPr>
+          <p:cNvPr id="19" name="TextBox 18"/>
+          <p:cNvSpPr txBox="1"/>
+          <p:nvPr/>
+        </p:nvSpPr>
+        <p:spPr>
+          <a:xfrm>
+            <a:off x="2578608" y="2212848"/>
+            <a:ext cx="2651760" cy="237744"/>
+          </a:xfrm>
+          <a:prstGeom prst="rect">
+            <a:avLst/>
+          </a:prstGeom>
+          <a:noFill/>
+        </p:spPr>
+        <p:txBody>
+          <a:bodyPr wrap="square" anchor="ctr" lIns="0" tIns="0" rIns="0" bIns="0">
+            <a:noAutofit/>
+          </a:bodyPr>
+          <a:lstStyle/>
+          <a:p>
+            <a:pPr algn="ctr" latinLnBrk="0">
+              <a:lnSpc>
+                <a:spcPct val="100000"/>
+              </a:lnSpc>
+              <a:spcBef>
+                <a:spcPts val="0"/>
+              </a:spcBef>
+              <a:spcAft>
+                <a:spcPts val="0"/>
+              </a:spcAft>
+            </a:pPr>
+            <a:r>
+              <a:rPr sz="950" b="0">
+                <a:solidFill>
+                  <a:srgbClr val="40708B"/>
+                </a:solidFill>
+                <a:latin typeface="Microsoft YaHei"/>
+                <a:ea typeface="Microsoft YaHei"/>
+                <a:cs typeface="Microsoft YaHei"/>
+              </a:rPr>
+              <a:t>↓　派单：按差距排序，标明归属尺度</a:t>
+            </a:r>
+          </a:p>
+        </p:txBody>
+      </p:sp>
+      <p:sp>
+        <p:nvSpPr>
+          <p:cNvPr id="20" name="Rectangle 19"/>
+          <p:cNvSpPr/>
+          <p:nvPr/>
+        </p:nvSpPr>
+        <p:spPr>
+          <a:xfrm>
+            <a:off x="950976" y="2505456"/>
+            <a:ext cx="10692079" cy="1993392"/>
+          </a:xfrm>
+          <a:prstGeom prst="rect">
+            <a:avLst/>
+          </a:prstGeom>
+          <a:solidFill>
+            <a:srgbClr val="F2F8FD"/>
+          </a:solidFill>
+          <a:ln>
+            <a:noFill/>
+          </a:ln>
+        </p:spPr>
+        <p:txBody>
+          <a:bodyPr rtlCol="0" anchor="ctr"/>
+          <a:lstStyle/>
+          <a:p>
+            <a:pPr algn="ctr"/>
+          </a:p>
+        </p:txBody>
+      </p:sp>
+      <p:sp>
+        <p:nvSpPr>
+          <p:cNvPr id="21" name="Rectangle 20"/>
+          <p:cNvSpPr/>
+          <p:nvPr/>
+        </p:nvSpPr>
+        <p:spPr>
+          <a:xfrm>
+            <a:off x="950976" y="2505456"/>
+            <a:ext cx="64008" cy="1993392"/>
+          </a:xfrm>
+          <a:prstGeom prst="rect">
+            <a:avLst/>
+          </a:prstGeom>
+          <a:solidFill>
+            <a:srgbClr val="D2690C"/>
+          </a:solidFill>
+          <a:ln>
+            <a:noFill/>
+          </a:ln>
+        </p:spPr>
+        <p:txBody>
+          <a:bodyPr rtlCol="0" anchor="ctr"/>
+          <a:lstStyle/>
+          <a:p>
+            <a:pPr algn="ctr"/>
+          </a:p>
+        </p:txBody>
+      </p:sp>
+      <p:sp>
+        <p:nvSpPr>
+          <p:cNvPr id="22" name="TextBox 21"/>
+          <p:cNvSpPr txBox="1"/>
+          <p:nvPr/>
+        </p:nvSpPr>
+        <p:spPr>
+          <a:xfrm>
+            <a:off x="1170432" y="2578608"/>
+            <a:ext cx="1188720" cy="1847088"/>
+          </a:xfrm>
+          <a:prstGeom prst="rect">
+            <a:avLst/>
+          </a:prstGeom>
+          <a:noFill/>
+        </p:spPr>
+        <p:txBody>
+          <a:bodyPr wrap="square" anchor="ctr" lIns="0" tIns="0" rIns="0" bIns="0">
+            <a:noAutofit/>
+          </a:bodyPr>
+          <a:lstStyle/>
+          <a:p>
+            <a:pPr algn="l" latinLnBrk="0">
+              <a:lnSpc>
+                <a:spcPct val="100000"/>
+              </a:lnSpc>
+              <a:spcBef>
+                <a:spcPts val="0"/>
+              </a:spcBef>
+              <a:spcAft>
+                <a:spcPts val="300"/>
+              </a:spcAft>
+            </a:pPr>
+            <a:r>
+              <a:rPr sz="1400" b="1">
+                <a:solidFill>
+                  <a:srgbClr val="0A2B45"/>
+                </a:solidFill>
+                <a:latin typeface="Microsoft YaHei"/>
+                <a:ea typeface="Microsoft YaHei"/>
+                <a:cs typeface="Microsoft YaHei"/>
+              </a:rPr>
+              <a:t>规划层</a:t>
+            </a:r>
+          </a:p>
+          <a:p>
+            <a:pPr algn="l" latinLnBrk="0">
+              <a:lnSpc>
+                <a:spcPct val="100000"/>
+              </a:lnSpc>
+              <a:spcBef>
+                <a:spcPts val="0"/>
+              </a:spcBef>
+              <a:spcAft>
+                <a:spcPts val="0"/>
+              </a:spcAft>
+            </a:pPr>
+            <a:r>
+              <a:rPr sz="900" b="0">
+                <a:solidFill>
+                  <a:srgbClr val="40708B"/>
+                </a:solidFill>
+                <a:latin typeface="Microsoft YaHei"/>
+                <a:ea typeface="Microsoft YaHei"/>
+                <a:cs typeface="Microsoft YaHei"/>
+              </a:rPr>
+              <a:t>外环定工作点 · 内环逼近屋顶</a:t>
+            </a:r>
+          </a:p>
+        </p:txBody>
+      </p:sp>
+      <p:sp>
+        <p:nvSpPr>
+          <p:cNvPr id="23" name="Rectangle 22"/>
+          <p:cNvSpPr/>
+          <p:nvPr/>
+        </p:nvSpPr>
+        <p:spPr>
+          <a:xfrm>
+            <a:off x="2578608" y="2578608"/>
+            <a:ext cx="9064447" cy="676656"/>
+          </a:xfrm>
+          <a:prstGeom prst="rect">
+            <a:avLst/>
+          </a:prstGeom>
+          <a:solidFill>
+            <a:srgbClr val="FFFFFF"/>
+          </a:solidFill>
+          <a:ln w="9525">
+            <a:solidFill>
+              <a:srgbClr val="CFE3F0"/>
+            </a:solidFill>
+          </a:ln>
+        </p:spPr>
+        <p:txBody>
+          <a:bodyPr rtlCol="0" anchor="ctr"/>
+          <a:lstStyle/>
+          <a:p>
+            <a:pPr algn="ctr"/>
+          </a:p>
+        </p:txBody>
+      </p:sp>
+      <p:sp>
+        <p:nvSpPr>
+          <p:cNvPr id="24" name="TextBox 23"/>
+          <p:cNvSpPr txBox="1"/>
+          <p:nvPr/>
+        </p:nvSpPr>
+        <p:spPr>
+          <a:xfrm>
+            <a:off x="2779776" y="2615184"/>
+            <a:ext cx="1828800" cy="237744"/>
+          </a:xfrm>
+          <a:prstGeom prst="rect">
+            <a:avLst/>
+          </a:prstGeom>
+          <a:noFill/>
+        </p:spPr>
+        <p:txBody>
+          <a:bodyPr wrap="square" anchor="ctr" lIns="0" tIns="0" rIns="0" bIns="0">
+            <a:noAutofit/>
+          </a:bodyPr>
+          <a:lstStyle/>
+          <a:p>
+            <a:pPr algn="l" latinLnBrk="0">
+              <a:lnSpc>
+                <a:spcPct val="100000"/>
+              </a:lnSpc>
+              <a:spcBef>
+                <a:spcPts val="0"/>
+              </a:spcBef>
+              <a:spcAft>
+                <a:spcPts val="0"/>
+              </a:spcAft>
+            </a:pPr>
+            <a:r>
+              <a:rPr sz="1100" b="1">
+                <a:solidFill>
+                  <a:srgbClr val="0A2B45"/>
+                </a:solidFill>
+                <a:latin typeface="Microsoft YaHei"/>
+                <a:ea typeface="Microsoft YaHei"/>
+                <a:cs typeface="Microsoft YaHei"/>
+              </a:rPr>
+              <a:t>外环 · 引擎</a:t>
+            </a:r>
+          </a:p>
+        </p:txBody>
+      </p:sp>
+      <p:sp>
+        <p:nvSpPr>
+          <p:cNvPr id="25" name="Rounded Rectangle 24"/>
+          <p:cNvSpPr/>
+          <p:nvPr/>
+        </p:nvSpPr>
+        <p:spPr>
+          <a:xfrm>
+            <a:off x="4645152" y="2633472"/>
+            <a:ext cx="658368" cy="201168"/>
+          </a:xfrm>
+          <a:prstGeom prst="roundRect">
+            <a:avLst>
+              <a:gd name="adj" fmla="val 50000"/>
+            </a:avLst>
+          </a:prstGeom>
+          <a:solidFill>
+            <a:srgbClr val="FBE6D4"/>
+          </a:solidFill>
+          <a:ln>
+            <a:noFill/>
+          </a:ln>
+        </p:spPr>
+        <p:txBody>
+          <a:bodyPr rtlCol="0" anchor="ctr" wrap="square" lIns="18288" tIns="0" rIns="18288" bIns="0">
+            <a:noAutofit/>
+          </a:bodyPr>
+          <a:lstStyle/>
+          <a:p>
+            <a:pPr algn="ctr" latinLnBrk="0">
+              <a:lnSpc>
+                <a:spcPct val="100000"/>
+              </a:lnSpc>
+              <a:spcBef>
+                <a:spcPts val="0"/>
+              </a:spcBef>
+              <a:spcAft>
+                <a:spcPts val="0"/>
+              </a:spcAft>
+            </a:pPr>
+            <a:r>
+              <a:rPr sz="850" b="1">
+                <a:solidFill>
+                  <a:srgbClr val="C2570A"/>
+                </a:solidFill>
+                <a:latin typeface="Microsoft YaHei"/>
+                <a:ea typeface="Microsoft YaHei"/>
+                <a:cs typeface="Microsoft YaHei"/>
+              </a:rPr>
+              <a:t>种子</a:t>
+            </a:r>
+          </a:p>
+        </p:txBody>
+      </p:sp>
+      <p:sp>
+        <p:nvSpPr>
+          <p:cNvPr id="26" name="TextBox 25"/>
+          <p:cNvSpPr txBox="1"/>
+          <p:nvPr/>
+        </p:nvSpPr>
+        <p:spPr>
+          <a:xfrm>
+            <a:off x="2779776" y="2871216"/>
+            <a:ext cx="7875727" cy="201168"/>
+          </a:xfrm>
+          <a:prstGeom prst="rect">
+            <a:avLst/>
+          </a:prstGeom>
+          <a:noFill/>
+        </p:spPr>
+        <p:txBody>
+          <a:bodyPr wrap="square" anchor="ctr" lIns="0" tIns="0" rIns="0" bIns="0">
+            <a:noAutofit/>
+          </a:bodyPr>
+          <a:lstStyle/>
+          <a:p>
+            <a:pPr algn="l" latinLnBrk="0">
+              <a:lnSpc>
+                <a:spcPct val="100000"/>
+              </a:lnSpc>
+              <a:spcBef>
+                <a:spcPts val="0"/>
+              </a:spcBef>
+              <a:spcAft>
+                <a:spcPts val="0"/>
+              </a:spcAft>
+            </a:pPr>
+            <a:r>
+              <a:rPr sz="950" b="1">
+                <a:solidFill>
+                  <a:srgbClr val="C2570A"/>
+                </a:solidFill>
+                <a:latin typeface="Microsoft YaHei"/>
+                <a:ea typeface="Microsoft YaHei"/>
+                <a:cs typeface="Microsoft YaHei"/>
+              </a:rPr>
+              <a:t>工作点：</a:t>
+            </a:r>
+            <a:r>
+              <a:rPr sz="950" b="0">
+                <a:solidFill>
+                  <a:srgbClr val="1B4D69"/>
+                </a:solidFill>
+                <a:latin typeface="Microsoft YaHei"/>
+                <a:ea typeface="Microsoft YaHei"/>
+                <a:cs typeface="Microsoft YaHei"/>
+              </a:rPr>
+              <a:t>显存切分 · 每步请求数 · 投机解码</a:t>
+            </a:r>
+          </a:p>
+        </p:txBody>
+      </p:sp>
+      <p:sp>
+        <p:nvSpPr>
+          <p:cNvPr id="27" name="Rounded Rectangle 26"/>
+          <p:cNvSpPr/>
+          <p:nvPr/>
+        </p:nvSpPr>
+        <p:spPr>
+          <a:xfrm>
+            <a:off x="10783519" y="2880360"/>
+            <a:ext cx="658368" cy="182880"/>
+          </a:xfrm>
+          <a:prstGeom prst="roundRect">
+            <a:avLst>
+              <a:gd name="adj" fmla="val 50000"/>
+            </a:avLst>
+          </a:prstGeom>
+          <a:solidFill>
+            <a:srgbClr val="E6F0FC"/>
+          </a:solidFill>
+          <a:ln>
+            <a:noFill/>
+          </a:ln>
+        </p:spPr>
+        <p:txBody>
+          <a:bodyPr rtlCol="0" anchor="ctr" wrap="square" lIns="18288" tIns="0" rIns="18288" bIns="0">
+            <a:noAutofit/>
+          </a:bodyPr>
+          <a:lstStyle/>
+          <a:p>
+            <a:pPr algn="ctr" latinLnBrk="0">
+              <a:lnSpc>
+                <a:spcPct val="100000"/>
+              </a:lnSpc>
+              <a:spcBef>
+                <a:spcPts val="0"/>
+              </a:spcBef>
+              <a:spcAft>
+                <a:spcPts val="0"/>
+              </a:spcAft>
+            </a:pPr>
+            <a:r>
+              <a:rPr sz="900" b="1">
+                <a:solidFill>
+                  <a:srgbClr val="0F62CE"/>
+                </a:solidFill>
+                <a:latin typeface="Microsoft YaHei"/>
+                <a:ea typeface="Microsoft YaHei"/>
+                <a:cs typeface="Microsoft YaHei"/>
+              </a:rPr>
+              <a:t>工作点</a:t>
+            </a:r>
+          </a:p>
+        </p:txBody>
+      </p:sp>
+      <p:sp>
+        <p:nvSpPr>
+          <p:cNvPr id="28" name="TextBox 27"/>
+          <p:cNvSpPr txBox="1"/>
+          <p:nvPr/>
+        </p:nvSpPr>
+        <p:spPr>
+          <a:xfrm>
+            <a:off x="2779776" y="3072384"/>
+            <a:ext cx="7875727" cy="201168"/>
+          </a:xfrm>
+          <a:prstGeom prst="rect">
+            <a:avLst/>
+          </a:prstGeom>
+          <a:noFill/>
+        </p:spPr>
+        <p:txBody>
+          <a:bodyPr wrap="square" anchor="ctr" lIns="0" tIns="0" rIns="0" bIns="0">
+            <a:noAutofit/>
+          </a:bodyPr>
+          <a:lstStyle/>
+          <a:p>
+            <a:pPr algn="l" latinLnBrk="0">
+              <a:lnSpc>
+                <a:spcPct val="100000"/>
+              </a:lnSpc>
+              <a:spcBef>
+                <a:spcPts val="0"/>
+              </a:spcBef>
+              <a:spcAft>
+                <a:spcPts val="0"/>
+              </a:spcAft>
+            </a:pPr>
+            <a:r>
+              <a:rPr sz="950" b="1">
+                <a:solidFill>
+                  <a:srgbClr val="C2570A"/>
+                </a:solidFill>
+                <a:latin typeface="Microsoft YaHei"/>
+                <a:ea typeface="Microsoft YaHei"/>
+                <a:cs typeface="Microsoft YaHei"/>
+              </a:rPr>
+              <a:t>步间：</a:t>
+            </a:r>
+            <a:r>
+              <a:rPr sz="950" b="0">
+                <a:solidFill>
+                  <a:srgbClr val="1B4D69"/>
+                </a:solidFill>
+                <a:latin typeface="Microsoft YaHei"/>
+                <a:ea typeface="Microsoft YaHei"/>
+                <a:cs typeface="Microsoft YaHei"/>
+              </a:rPr>
+              <a:t>overlap 调度 · chunk 与混跑 · 前缀缓存 · PD</a:t>
+            </a:r>
+          </a:p>
+        </p:txBody>
+      </p:sp>
+      <p:sp>
+        <p:nvSpPr>
+          <p:cNvPr id="29" name="Rounded Rectangle 28"/>
+          <p:cNvSpPr/>
+          <p:nvPr/>
+        </p:nvSpPr>
+        <p:spPr>
+          <a:xfrm>
+            <a:off x="10783519" y="3081528"/>
+            <a:ext cx="658368" cy="182880"/>
+          </a:xfrm>
+          <a:prstGeom prst="roundRect">
+            <a:avLst>
+              <a:gd name="adj" fmla="val 50000"/>
+            </a:avLst>
+          </a:prstGeom>
+          <a:solidFill>
+            <a:srgbClr val="E6F0FC"/>
+          </a:solidFill>
+          <a:ln>
+            <a:noFill/>
+          </a:ln>
+        </p:spPr>
+        <p:txBody>
+          <a:bodyPr rtlCol="0" anchor="ctr" wrap="square" lIns="18288" tIns="0" rIns="18288" bIns="0">
+            <a:noAutofit/>
+          </a:bodyPr>
+          <a:lstStyle/>
+          <a:p>
+            <a:pPr algn="ctr" latinLnBrk="0">
+              <a:lnSpc>
+                <a:spcPct val="100000"/>
+              </a:lnSpc>
+              <a:spcBef>
+                <a:spcPts val="0"/>
+              </a:spcBef>
+              <a:spcAft>
+                <a:spcPts val="0"/>
+              </a:spcAft>
+            </a:pPr>
+            <a:r>
+              <a:rPr sz="900" b="1">
+                <a:solidFill>
+                  <a:srgbClr val="0F62CE"/>
+                </a:solidFill>
+                <a:latin typeface="Microsoft YaHei"/>
+                <a:ea typeface="Microsoft YaHei"/>
+                <a:cs typeface="Microsoft YaHei"/>
+              </a:rPr>
+              <a:t>步间</a:t>
+            </a:r>
+          </a:p>
+        </p:txBody>
+      </p:sp>
+      <p:sp>
+        <p:nvSpPr>
+          <p:cNvPr id="30" name="TextBox 29"/>
+          <p:cNvSpPr txBox="1"/>
+          <p:nvPr/>
+        </p:nvSpPr>
+        <p:spPr>
+          <a:xfrm>
+            <a:off x="2779776" y="3273552"/>
+            <a:ext cx="2834640" cy="201168"/>
+          </a:xfrm>
+          <a:prstGeom prst="rect">
+            <a:avLst/>
+          </a:prstGeom>
+          <a:noFill/>
+        </p:spPr>
+        <p:txBody>
+          <a:bodyPr wrap="square" anchor="ctr" lIns="0" tIns="0" rIns="0" bIns="0">
+            <a:noAutofit/>
+          </a:bodyPr>
+          <a:lstStyle/>
+          <a:p>
+            <a:pPr algn="l" latinLnBrk="0">
+              <a:lnSpc>
+                <a:spcPct val="100000"/>
+              </a:lnSpc>
+              <a:spcBef>
+                <a:spcPts val="0"/>
+              </a:spcBef>
+              <a:spcAft>
+                <a:spcPts val="0"/>
+              </a:spcAft>
+            </a:pPr>
+            <a:r>
+              <a:rPr sz="900" b="0">
+                <a:solidFill>
+                  <a:srgbClr val="40708B"/>
+                </a:solidFill>
+                <a:latin typeface="Microsoft YaHei"/>
+                <a:ea typeface="Microsoft YaHei"/>
+                <a:cs typeface="Microsoft YaHei"/>
+              </a:rPr>
+              <a:t>↓　形状分布 + 新算子需求</a:t>
+            </a:r>
+          </a:p>
+        </p:txBody>
+      </p:sp>
+      <p:sp>
+        <p:nvSpPr>
+          <p:cNvPr id="31" name="TextBox 30"/>
+          <p:cNvSpPr txBox="1"/>
+          <p:nvPr/>
+        </p:nvSpPr>
+        <p:spPr>
+          <a:xfrm>
+            <a:off x="5797296" y="3273552"/>
+            <a:ext cx="2834640" cy="201168"/>
+          </a:xfrm>
+          <a:prstGeom prst="rect">
+            <a:avLst/>
+          </a:prstGeom>
+          <a:noFill/>
+        </p:spPr>
+        <p:txBody>
+          <a:bodyPr wrap="square" anchor="ctr" lIns="0" tIns="0" rIns="0" bIns="0">
+            <a:noAutofit/>
+          </a:bodyPr>
+          <a:lstStyle/>
+          <a:p>
+            <a:pPr algn="l" latinLnBrk="0">
+              <a:lnSpc>
+                <a:spcPct val="100000"/>
+              </a:lnSpc>
+              <a:spcBef>
+                <a:spcPts val="0"/>
+              </a:spcBef>
+              <a:spcAft>
+                <a:spcPts val="0"/>
+              </a:spcAft>
+            </a:pPr>
+            <a:r>
+              <a:rPr sz="900" b="0">
+                <a:solidFill>
+                  <a:srgbClr val="40708B"/>
+                </a:solidFill>
+                <a:latin typeface="Microsoft YaHei"/>
+                <a:ea typeface="Microsoft YaHei"/>
+                <a:cs typeface="Microsoft YaHei"/>
+              </a:rPr>
+              <a:t>↑　单步代价曲线 + 时延余量</a:t>
+            </a:r>
+          </a:p>
+        </p:txBody>
+      </p:sp>
+      <p:sp>
+        <p:nvSpPr>
+          <p:cNvPr id="32" name="Rectangle 31"/>
+          <p:cNvSpPr/>
+          <p:nvPr/>
+        </p:nvSpPr>
+        <p:spPr>
+          <a:xfrm>
+            <a:off x="2578608" y="3493008"/>
+            <a:ext cx="9064447" cy="932688"/>
+          </a:xfrm>
+          <a:prstGeom prst="rect">
+            <a:avLst/>
+          </a:prstGeom>
+          <a:solidFill>
+            <a:srgbClr val="FFFFFF"/>
+          </a:solidFill>
+          <a:ln w="15875">
+            <a:solidFill>
+              <a:srgbClr val="D2690C"/>
+            </a:solidFill>
+          </a:ln>
+        </p:spPr>
+        <p:txBody>
+          <a:bodyPr rtlCol="0" anchor="ctr"/>
+          <a:lstStyle/>
+          <a:p>
+            <a:pPr algn="ctr"/>
+          </a:p>
+        </p:txBody>
+      </p:sp>
+      <p:sp>
+        <p:nvSpPr>
+          <p:cNvPr id="33" name="TextBox 32"/>
+          <p:cNvSpPr txBox="1"/>
+          <p:nvPr/>
+        </p:nvSpPr>
+        <p:spPr>
+          <a:xfrm>
+            <a:off x="2779776" y="3529584"/>
+            <a:ext cx="4206240" cy="237744"/>
+          </a:xfrm>
+          <a:prstGeom prst="rect">
+            <a:avLst/>
+          </a:prstGeom>
+          <a:noFill/>
+        </p:spPr>
+        <p:txBody>
+          <a:bodyPr wrap="square" anchor="ctr" lIns="0" tIns="0" rIns="0" bIns="0">
+            <a:noAutofit/>
+          </a:bodyPr>
+          <a:lstStyle/>
+          <a:p>
+            <a:pPr algn="l" latinLnBrk="0">
+              <a:lnSpc>
+                <a:spcPct val="100000"/>
+              </a:lnSpc>
+              <a:spcBef>
+                <a:spcPts val="0"/>
+              </a:spcBef>
+              <a:spcAft>
+                <a:spcPts val="0"/>
+              </a:spcAft>
+            </a:pPr>
+            <a:r>
+              <a:rPr sz="1100" b="1">
+                <a:solidFill>
+                  <a:srgbClr val="0A2B45"/>
+                </a:solidFill>
+                <a:latin typeface="Microsoft YaHei"/>
+                <a:ea typeface="Microsoft YaHei"/>
+                <a:cs typeface="Microsoft YaHei"/>
+              </a:rPr>
+              <a:t>内环 · 图 + 算子：在工作点上逼近屋顶</a:t>
+            </a:r>
+          </a:p>
+        </p:txBody>
+      </p:sp>
+      <p:sp>
+        <p:nvSpPr>
+          <p:cNvPr id="34" name="Rounded Rectangle 33"/>
+          <p:cNvSpPr/>
+          <p:nvPr/>
+        </p:nvSpPr>
+        <p:spPr>
+          <a:xfrm>
+            <a:off x="10783519" y="3557016"/>
+            <a:ext cx="658368" cy="182880"/>
+          </a:xfrm>
+          <a:prstGeom prst="roundRect">
+            <a:avLst>
+              <a:gd name="adj" fmla="val 50000"/>
+            </a:avLst>
+          </a:prstGeom>
+          <a:solidFill>
+            <a:srgbClr val="E6F0FC"/>
+          </a:solidFill>
+          <a:ln>
+            <a:noFill/>
+          </a:ln>
+        </p:spPr>
+        <p:txBody>
+          <a:bodyPr rtlCol="0" anchor="ctr" wrap="square" lIns="18288" tIns="0" rIns="18288" bIns="0">
+            <a:noAutofit/>
+          </a:bodyPr>
+          <a:lstStyle/>
+          <a:p>
+            <a:pPr algn="ctr" latinLnBrk="0">
+              <a:lnSpc>
+                <a:spcPct val="100000"/>
+              </a:lnSpc>
+              <a:spcBef>
+                <a:spcPts val="0"/>
+              </a:spcBef>
+              <a:spcAft>
+                <a:spcPts val="0"/>
+              </a:spcAft>
+            </a:pPr>
+            <a:r>
+              <a:rPr sz="900" b="1">
+                <a:solidFill>
+                  <a:srgbClr val="0F62CE"/>
+                </a:solidFill>
+                <a:latin typeface="Microsoft YaHei"/>
+                <a:ea typeface="Microsoft YaHei"/>
+                <a:cs typeface="Microsoft YaHei"/>
+              </a:rPr>
+              <a:t>单步</a:t>
+            </a:r>
+          </a:p>
+        </p:txBody>
+      </p:sp>
+      <p:sp>
+        <p:nvSpPr>
+          <p:cNvPr id="35" name="TextBox 34"/>
+          <p:cNvSpPr txBox="1"/>
+          <p:nvPr/>
+        </p:nvSpPr>
+        <p:spPr>
+          <a:xfrm>
+            <a:off x="2779776" y="3785616"/>
+            <a:ext cx="548640" cy="201168"/>
+          </a:xfrm>
+          <a:prstGeom prst="rect">
+            <a:avLst/>
+          </a:prstGeom>
+          <a:noFill/>
+        </p:spPr>
+        <p:txBody>
+          <a:bodyPr wrap="square" anchor="ctr" lIns="0" tIns="0" rIns="0" bIns="0">
+            <a:noAutofit/>
+          </a:bodyPr>
+          <a:lstStyle/>
+          <a:p>
+            <a:pPr algn="l" latinLnBrk="0">
+              <a:lnSpc>
+                <a:spcPct val="100000"/>
+              </a:lnSpc>
+              <a:spcBef>
+                <a:spcPts val="0"/>
+              </a:spcBef>
+              <a:spcAft>
+                <a:spcPts val="0"/>
+              </a:spcAft>
+            </a:pPr>
+            <a:r>
+              <a:rPr sz="950" b="1">
+                <a:solidFill>
+                  <a:srgbClr val="C2570A"/>
+                </a:solidFill>
+                <a:latin typeface="Microsoft YaHei"/>
+                <a:ea typeface="Microsoft YaHei"/>
+                <a:cs typeface="Microsoft YaHei"/>
+              </a:rPr>
+              <a:t>图</a:t>
+            </a:r>
+          </a:p>
+        </p:txBody>
+      </p:sp>
+      <p:sp>
+        <p:nvSpPr>
+          <p:cNvPr id="36" name="Rounded Rectangle 35"/>
+          <p:cNvSpPr/>
+          <p:nvPr/>
+        </p:nvSpPr>
+        <p:spPr>
+          <a:xfrm>
+            <a:off x="3346704" y="3794760"/>
+            <a:ext cx="786384" cy="182880"/>
+          </a:xfrm>
+          <a:prstGeom prst="roundRect">
+            <a:avLst>
+              <a:gd name="adj" fmla="val 50000"/>
+            </a:avLst>
+          </a:prstGeom>
+          <a:solidFill>
+            <a:srgbClr val="DEEDFA"/>
+          </a:solidFill>
+          <a:ln>
+            <a:noFill/>
+          </a:ln>
+        </p:spPr>
+        <p:txBody>
+          <a:bodyPr rtlCol="0" anchor="ctr" wrap="square" lIns="18288" tIns="0" rIns="18288" bIns="0">
+            <a:noAutofit/>
+          </a:bodyPr>
+          <a:lstStyle/>
+          <a:p>
+            <a:pPr algn="ctr" latinLnBrk="0">
+              <a:lnSpc>
+                <a:spcPct val="100000"/>
+              </a:lnSpc>
+              <a:spcBef>
+                <a:spcPts val="0"/>
+              </a:spcBef>
+              <a:spcAft>
+                <a:spcPts val="0"/>
+              </a:spcAft>
+            </a:pPr>
+            <a:r>
+              <a:rPr sz="850" b="1">
+                <a:solidFill>
+                  <a:srgbClr val="40708B"/>
+                </a:solidFill>
+                <a:latin typeface="Microsoft YaHei"/>
+                <a:ea typeface="Microsoft YaHei"/>
+                <a:cs typeface="Microsoft YaHei"/>
+              </a:rPr>
+              <a:t>部分已有</a:t>
+            </a:r>
+          </a:p>
+        </p:txBody>
+      </p:sp>
+      <p:sp>
+        <p:nvSpPr>
+          <p:cNvPr id="37" name="TextBox 36"/>
+          <p:cNvSpPr txBox="1"/>
+          <p:nvPr/>
+        </p:nvSpPr>
+        <p:spPr>
+          <a:xfrm>
+            <a:off x="4242816" y="3785616"/>
+            <a:ext cx="6412687" cy="201168"/>
+          </a:xfrm>
+          <a:prstGeom prst="rect">
+            <a:avLst/>
+          </a:prstGeom>
+          <a:noFill/>
+        </p:spPr>
+        <p:txBody>
+          <a:bodyPr wrap="square" anchor="ctr" lIns="0" tIns="0" rIns="0" bIns="0">
+            <a:noAutofit/>
+          </a:bodyPr>
+          <a:lstStyle/>
+          <a:p>
+            <a:pPr algn="l" latinLnBrk="0">
+              <a:lnSpc>
+                <a:spcPct val="100000"/>
+              </a:lnSpc>
+              <a:spcBef>
+                <a:spcPts val="0"/>
+              </a:spcBef>
+              <a:spcAft>
+                <a:spcPts val="0"/>
+              </a:spcAft>
+            </a:pPr>
+            <a:r>
+              <a:rPr sz="950" b="0">
+                <a:solidFill>
+                  <a:srgbClr val="1B4D69"/>
+                </a:solidFill>
+                <a:latin typeface="Microsoft YaHei"/>
+                <a:ea typeface="Microsoft YaHei"/>
+                <a:cs typeface="Microsoft YaHei"/>
+              </a:rPr>
+              <a:t>融合 · 多流并发 · 通信窗口预取</a:t>
+            </a:r>
+          </a:p>
+        </p:txBody>
+      </p:sp>
+      <p:sp>
+        <p:nvSpPr>
+          <p:cNvPr id="38" name="TextBox 37"/>
+          <p:cNvSpPr txBox="1"/>
+          <p:nvPr/>
+        </p:nvSpPr>
+        <p:spPr>
+          <a:xfrm>
+            <a:off x="2779776" y="4206240"/>
+            <a:ext cx="548640" cy="201168"/>
+          </a:xfrm>
+          <a:prstGeom prst="rect">
+            <a:avLst/>
+          </a:prstGeom>
+          <a:noFill/>
+        </p:spPr>
+        <p:txBody>
+          <a:bodyPr wrap="square" anchor="ctr" lIns="0" tIns="0" rIns="0" bIns="0">
+            <a:noAutofit/>
+          </a:bodyPr>
+          <a:lstStyle/>
+          <a:p>
+            <a:pPr algn="l" latinLnBrk="0">
+              <a:lnSpc>
+                <a:spcPct val="100000"/>
+              </a:lnSpc>
+              <a:spcBef>
+                <a:spcPts val="0"/>
+              </a:spcBef>
+              <a:spcAft>
+                <a:spcPts val="0"/>
+              </a:spcAft>
+            </a:pPr>
+            <a:r>
+              <a:rPr sz="950" b="1">
+                <a:solidFill>
+                  <a:srgbClr val="C2570A"/>
+                </a:solidFill>
+                <a:latin typeface="Microsoft YaHei"/>
+                <a:ea typeface="Microsoft YaHei"/>
+                <a:cs typeface="Microsoft YaHei"/>
+              </a:rPr>
+              <a:t>算子</a:t>
+            </a:r>
+          </a:p>
+        </p:txBody>
+      </p:sp>
+      <p:sp>
+        <p:nvSpPr>
+          <p:cNvPr id="39" name="Rounded Rectangle 38"/>
+          <p:cNvSpPr/>
+          <p:nvPr/>
+        </p:nvSpPr>
+        <p:spPr>
+          <a:xfrm>
+            <a:off x="3346704" y="4215384"/>
+            <a:ext cx="786384" cy="182880"/>
+          </a:xfrm>
+          <a:prstGeom prst="roundRect">
+            <a:avLst>
+              <a:gd name="adj" fmla="val 50000"/>
+            </a:avLst>
+          </a:prstGeom>
+          <a:solidFill>
+            <a:srgbClr val="DEEDFA"/>
+          </a:solidFill>
+          <a:ln>
+            <a:noFill/>
+          </a:ln>
+        </p:spPr>
+        <p:txBody>
+          <a:bodyPr rtlCol="0" anchor="ctr" wrap="square" lIns="18288" tIns="0" rIns="18288" bIns="0">
+            <a:noAutofit/>
+          </a:bodyPr>
+          <a:lstStyle/>
+          <a:p>
+            <a:pPr algn="ctr" latinLnBrk="0">
+              <a:lnSpc>
+                <a:spcPct val="100000"/>
+              </a:lnSpc>
+              <a:spcBef>
+                <a:spcPts val="0"/>
+              </a:spcBef>
+              <a:spcAft>
+                <a:spcPts val="0"/>
+              </a:spcAft>
+            </a:pPr>
+            <a:r>
+              <a:rPr sz="850" b="1">
+                <a:solidFill>
+                  <a:srgbClr val="40708B"/>
+                </a:solidFill>
+                <a:latin typeface="Microsoft YaHei"/>
+                <a:ea typeface="Microsoft YaHei"/>
+                <a:cs typeface="Microsoft YaHei"/>
+              </a:rPr>
+              <a:t>已有</a:t>
+            </a:r>
+          </a:p>
+        </p:txBody>
+      </p:sp>
+      <p:sp>
+        <p:nvSpPr>
+          <p:cNvPr id="40" name="TextBox 39"/>
+          <p:cNvSpPr txBox="1"/>
+          <p:nvPr/>
+        </p:nvSpPr>
+        <p:spPr>
+          <a:xfrm>
+            <a:off x="4242816" y="4206240"/>
+            <a:ext cx="6412687" cy="201168"/>
+          </a:xfrm>
+          <a:prstGeom prst="rect">
+            <a:avLst/>
+          </a:prstGeom>
+          <a:noFill/>
+        </p:spPr>
+        <p:txBody>
+          <a:bodyPr wrap="square" anchor="ctr" lIns="0" tIns="0" rIns="0" bIns="0">
+            <a:noAutofit/>
+          </a:bodyPr>
+          <a:lstStyle/>
+          <a:p>
+            <a:pPr algn="l" latinLnBrk="0">
+              <a:lnSpc>
+                <a:spcPct val="100000"/>
+              </a:lnSpc>
+              <a:spcBef>
+                <a:spcPts val="0"/>
+              </a:spcBef>
+              <a:spcAft>
+                <a:spcPts val="0"/>
+              </a:spcAft>
+            </a:pPr>
+            <a:r>
+              <a:rPr sz="950" b="0">
+                <a:solidFill>
+                  <a:srgbClr val="1B4D69"/>
+                </a:solidFill>
+                <a:latin typeface="Microsoft YaHei"/>
+                <a:ea typeface="Microsoft YaHei"/>
+                <a:cs typeface="Microsoft YaHei"/>
+              </a:rPr>
+              <a:t>一个 kernel 怎么写</a:t>
+            </a:r>
+          </a:p>
+        </p:txBody>
+      </p:sp>
+      <p:sp>
+        <p:nvSpPr>
+          <p:cNvPr id="41" name="TextBox 40"/>
+          <p:cNvSpPr txBox="1"/>
+          <p:nvPr/>
+        </p:nvSpPr>
+        <p:spPr>
+          <a:xfrm>
+            <a:off x="4242816" y="4005072"/>
+            <a:ext cx="1920240" cy="182880"/>
+          </a:xfrm>
+          <a:prstGeom prst="rect">
+            <a:avLst/>
+          </a:prstGeom>
+          <a:noFill/>
+        </p:spPr>
+        <p:txBody>
+          <a:bodyPr wrap="square" anchor="ctr" lIns="0" tIns="0" rIns="0" bIns="0">
+            <a:noAutofit/>
+          </a:bodyPr>
+          <a:lstStyle/>
+          <a:p>
+            <a:pPr algn="l" latinLnBrk="0">
+              <a:lnSpc>
+                <a:spcPct val="100000"/>
+              </a:lnSpc>
+              <a:spcBef>
+                <a:spcPts val="0"/>
+              </a:spcBef>
+              <a:spcAft>
+                <a:spcPts val="0"/>
+              </a:spcAft>
+            </a:pPr>
+            <a:r>
+              <a:rPr sz="850" b="0">
+                <a:solidFill>
+                  <a:srgbClr val="40708B"/>
+                </a:solidFill>
+                <a:latin typeface="Microsoft YaHei"/>
+                <a:ea typeface="Microsoft YaHei"/>
+                <a:cs typeface="Microsoft YaHei"/>
+              </a:rPr>
+              <a:t>↓　融合契约</a:t>
+            </a:r>
+          </a:p>
+        </p:txBody>
+      </p:sp>
+      <p:sp>
+        <p:nvSpPr>
+          <p:cNvPr id="42" name="TextBox 41"/>
+          <p:cNvSpPr txBox="1"/>
+          <p:nvPr/>
+        </p:nvSpPr>
+        <p:spPr>
+          <a:xfrm>
+            <a:off x="6254496" y="4005072"/>
+            <a:ext cx="1920240" cy="182880"/>
+          </a:xfrm>
+          <a:prstGeom prst="rect">
+            <a:avLst/>
+          </a:prstGeom>
+          <a:noFill/>
+        </p:spPr>
+        <p:txBody>
+          <a:bodyPr wrap="square" anchor="ctr" lIns="0" tIns="0" rIns="0" bIns="0">
+            <a:noAutofit/>
+          </a:bodyPr>
+          <a:lstStyle/>
+          <a:p>
+            <a:pPr algn="l" latinLnBrk="0">
+              <a:lnSpc>
+                <a:spcPct val="100000"/>
+              </a:lnSpc>
+              <a:spcBef>
+                <a:spcPts val="0"/>
+              </a:spcBef>
+              <a:spcAft>
+                <a:spcPts val="0"/>
+              </a:spcAft>
+            </a:pPr>
+            <a:r>
+              <a:rPr sz="850" b="0">
+                <a:solidFill>
+                  <a:srgbClr val="40708B"/>
+                </a:solidFill>
+                <a:latin typeface="Microsoft YaHei"/>
+                <a:ea typeface="Microsoft YaHei"/>
+                <a:cs typeface="Microsoft YaHei"/>
+              </a:rPr>
+              <a:t>↑　新内核 + 实测代价</a:t>
+            </a:r>
+          </a:p>
+        </p:txBody>
+      </p:sp>
+      <p:cxnSp>
+        <p:nvCxnSpPr>
+          <p:cNvPr id="43" name="Connector 42"/>
+          <p:cNvCxnSpPr/>
+          <p:nvPr/>
+        </p:nvCxnSpPr>
+        <p:spPr>
+          <a:xfrm>
+            <a:off x="2578608" y="4654296"/>
+            <a:ext cx="9064447" cy="0"/>
+          </a:xfrm>
+          <a:prstGeom prst="line">
+            <a:avLst/>
+          </a:prstGeom>
+          <a:ln w="9525">
+            <a:solidFill>
+              <a:srgbClr val="AFCEE1"/>
+            </a:solidFill>
+            <a:prstDash val="dash"/>
+          </a:ln>
+        </p:spPr>
+      </p:cxnSp>
+      <p:sp>
+        <p:nvSpPr>
+          <p:cNvPr id="44" name="Rectangle 43"/>
+          <p:cNvSpPr/>
+          <p:nvPr/>
+        </p:nvSpPr>
+        <p:spPr>
+          <a:xfrm>
+            <a:off x="2578608" y="4535424"/>
+            <a:ext cx="2651760" cy="237744"/>
+          </a:xfrm>
+          <a:prstGeom prst="rect">
+            <a:avLst/>
+          </a:prstGeom>
+          <a:solidFill>
+            <a:srgbClr val="F2F8FD"/>
+          </a:solidFill>
+          <a:ln>
+            <a:noFill/>
+          </a:ln>
+        </p:spPr>
+        <p:txBody>
+          <a:bodyPr rtlCol="0" anchor="ctr"/>
+          <a:lstStyle/>
+          <a:p>
+            <a:pPr algn="ctr"/>
+          </a:p>
+        </p:txBody>
+      </p:sp>
+      <p:sp>
+        <p:nvSpPr>
+          <p:cNvPr id="45" name="TextBox 44"/>
+          <p:cNvSpPr txBox="1"/>
+          <p:nvPr/>
+        </p:nvSpPr>
+        <p:spPr>
+          <a:xfrm>
+            <a:off x="2578608" y="4535424"/>
+            <a:ext cx="2651760" cy="237744"/>
+          </a:xfrm>
+          <a:prstGeom prst="rect">
+            <a:avLst/>
+          </a:prstGeom>
+          <a:noFill/>
+        </p:spPr>
+        <p:txBody>
+          <a:bodyPr wrap="square" anchor="ctr" lIns="0" tIns="0" rIns="0" bIns="0">
+            <a:noAutofit/>
+          </a:bodyPr>
+          <a:lstStyle/>
+          <a:p>
+            <a:pPr algn="ctr" latinLnBrk="0">
+              <a:lnSpc>
+                <a:spcPct val="100000"/>
+              </a:lnSpc>
+              <a:spcBef>
+                <a:spcPts val="0"/>
+              </a:spcBef>
+              <a:spcAft>
+                <a:spcPts val="0"/>
+              </a:spcAft>
+            </a:pPr>
+            <a:r>
+              <a:rPr sz="950" b="0">
+                <a:solidFill>
+                  <a:srgbClr val="40708B"/>
+                </a:solidFill>
+                <a:latin typeface="Microsoft YaHei"/>
+                <a:ea typeface="Microsoft YaHei"/>
+                <a:cs typeface="Microsoft YaHei"/>
+              </a:rPr>
+              <a:t>↓　候选（带尺度标签）</a:t>
+            </a:r>
+          </a:p>
+        </p:txBody>
+      </p:sp>
+      <p:sp>
+        <p:nvSpPr>
+          <p:cNvPr id="46" name="Rectangle 45"/>
+          <p:cNvSpPr/>
+          <p:nvPr/>
+        </p:nvSpPr>
+        <p:spPr>
+          <a:xfrm>
+            <a:off x="5596128" y="4535424"/>
+            <a:ext cx="2651760" cy="237744"/>
+          </a:xfrm>
+          <a:prstGeom prst="rect">
+            <a:avLst/>
+          </a:prstGeom>
+          <a:solidFill>
+            <a:srgbClr val="F2F8FD"/>
+          </a:solidFill>
+          <a:ln>
+            <a:noFill/>
+          </a:ln>
+        </p:spPr>
+        <p:txBody>
+          <a:bodyPr rtlCol="0" anchor="ctr"/>
+          <a:lstStyle/>
+          <a:p>
+            <a:pPr algn="ctr"/>
+          </a:p>
+        </p:txBody>
+      </p:sp>
+      <p:sp>
+        <p:nvSpPr>
+          <p:cNvPr id="47" name="TextBox 46"/>
+          <p:cNvSpPr txBox="1"/>
+          <p:nvPr/>
+        </p:nvSpPr>
+        <p:spPr>
+          <a:xfrm>
+            <a:off x="5596128" y="4535424"/>
+            <a:ext cx="2651760" cy="237744"/>
+          </a:xfrm>
+          <a:prstGeom prst="rect">
+            <a:avLst/>
+          </a:prstGeom>
+          <a:noFill/>
+        </p:spPr>
+        <p:txBody>
+          <a:bodyPr wrap="square" anchor="ctr" lIns="0" tIns="0" rIns="0" bIns="0">
+            <a:noAutofit/>
+          </a:bodyPr>
+          <a:lstStyle/>
+          <a:p>
+            <a:pPr algn="ctr" latinLnBrk="0">
+              <a:lnSpc>
+                <a:spcPct val="100000"/>
+              </a:lnSpc>
+              <a:spcBef>
+                <a:spcPts val="0"/>
+              </a:spcBef>
+              <a:spcAft>
+                <a:spcPts val="0"/>
+              </a:spcAft>
+            </a:pPr>
+            <a:r>
+              <a:rPr sz="950" b="0">
+                <a:solidFill>
+                  <a:srgbClr val="40708B"/>
+                </a:solidFill>
+                <a:latin typeface="Microsoft YaHei"/>
+                <a:ea typeface="Microsoft YaHei"/>
+                <a:cs typeface="Microsoft YaHei"/>
+              </a:rPr>
+              <a:t>↑　淘汰：带原因退回</a:t>
+            </a:r>
+          </a:p>
+        </p:txBody>
+      </p:sp>
+      <p:sp>
+        <p:nvSpPr>
+          <p:cNvPr id="48" name="Rectangle 47"/>
+          <p:cNvSpPr/>
+          <p:nvPr/>
+        </p:nvSpPr>
+        <p:spPr>
+          <a:xfrm>
+            <a:off x="950976" y="4809744"/>
+            <a:ext cx="10692079" cy="1207008"/>
+          </a:xfrm>
+          <a:prstGeom prst="rect">
+            <a:avLst/>
+          </a:prstGeom>
+          <a:solidFill>
+            <a:srgbClr val="F2F8FD"/>
+          </a:solidFill>
+          <a:ln>
+            <a:noFill/>
+          </a:ln>
+        </p:spPr>
+        <p:txBody>
+          <a:bodyPr rtlCol="0" anchor="ctr"/>
+          <a:lstStyle/>
+          <a:p>
+            <a:pPr algn="ctr"/>
+          </a:p>
+        </p:txBody>
+      </p:sp>
+      <p:sp>
+        <p:nvSpPr>
+          <p:cNvPr id="49" name="Rectangle 48"/>
+          <p:cNvSpPr/>
+          <p:nvPr/>
+        </p:nvSpPr>
+        <p:spPr>
+          <a:xfrm>
+            <a:off x="950976" y="4809744"/>
+            <a:ext cx="64008" cy="1207008"/>
+          </a:xfrm>
+          <a:prstGeom prst="rect">
+            <a:avLst/>
+          </a:prstGeom>
+          <a:solidFill>
+            <a:srgbClr val="0F62CE"/>
+          </a:solidFill>
+          <a:ln>
+            <a:noFill/>
+          </a:ln>
+        </p:spPr>
+        <p:txBody>
+          <a:bodyPr rtlCol="0" anchor="ctr"/>
+          <a:lstStyle/>
+          <a:p>
+            <a:pPr algn="ctr"/>
+          </a:p>
+        </p:txBody>
+      </p:sp>
+      <p:sp>
+        <p:nvSpPr>
+          <p:cNvPr id="50" name="TextBox 49"/>
+          <p:cNvSpPr txBox="1"/>
+          <p:nvPr/>
+        </p:nvSpPr>
+        <p:spPr>
+          <a:xfrm>
+            <a:off x="1170432" y="4882896"/>
+            <a:ext cx="1188720" cy="1060704"/>
+          </a:xfrm>
+          <a:prstGeom prst="rect">
+            <a:avLst/>
+          </a:prstGeom>
+          <a:noFill/>
+        </p:spPr>
+        <p:txBody>
+          <a:bodyPr wrap="square" anchor="ctr" lIns="0" tIns="0" rIns="0" bIns="0">
+            <a:noAutofit/>
+          </a:bodyPr>
+          <a:lstStyle/>
+          <a:p>
+            <a:pPr algn="l" latinLnBrk="0">
+              <a:lnSpc>
+                <a:spcPct val="100000"/>
+              </a:lnSpc>
+              <a:spcBef>
+                <a:spcPts val="0"/>
+              </a:spcBef>
+              <a:spcAft>
+                <a:spcPts val="300"/>
+              </a:spcAft>
+            </a:pPr>
+            <a:r>
+              <a:rPr sz="1400" b="1">
+                <a:solidFill>
+                  <a:srgbClr val="0A2B45"/>
+                </a:solidFill>
+                <a:latin typeface="Microsoft YaHei"/>
+                <a:ea typeface="Microsoft YaHei"/>
+                <a:cs typeface="Microsoft YaHei"/>
+              </a:rPr>
+              <a:t>判决层</a:t>
+            </a:r>
+          </a:p>
+          <a:p>
+            <a:pPr algn="l" latinLnBrk="0">
+              <a:lnSpc>
+                <a:spcPct val="100000"/>
+              </a:lnSpc>
+              <a:spcBef>
+                <a:spcPts val="0"/>
+              </a:spcBef>
+              <a:spcAft>
+                <a:spcPts val="0"/>
+              </a:spcAft>
+            </a:pPr>
+            <a:r>
+              <a:rPr sz="900" b="0">
+                <a:solidFill>
+                  <a:srgbClr val="40708B"/>
+                </a:solidFill>
+                <a:latin typeface="Microsoft YaHei"/>
+                <a:ea typeface="Microsoft YaHei"/>
+                <a:cs typeface="Microsoft YaHei"/>
+              </a:rPr>
+              <a:t>不含模型 · 真机实测</a:t>
+            </a:r>
+          </a:p>
+        </p:txBody>
+      </p:sp>
+      <p:sp>
+        <p:nvSpPr>
+          <p:cNvPr id="51" name="Rectangle 50"/>
+          <p:cNvSpPr/>
+          <p:nvPr/>
+        </p:nvSpPr>
+        <p:spPr>
+          <a:xfrm>
+            <a:off x="2578608" y="4901183"/>
+            <a:ext cx="2377440" cy="1024128"/>
+          </a:xfrm>
+          <a:prstGeom prst="rect">
+            <a:avLst/>
+          </a:prstGeom>
+          <a:solidFill>
+            <a:srgbClr val="FFFFFF"/>
+          </a:solidFill>
+          <a:ln w="9525">
+            <a:solidFill>
+              <a:srgbClr val="CFE3F0"/>
+            </a:solidFill>
+          </a:ln>
+        </p:spPr>
+        <p:txBody>
+          <a:bodyPr rtlCol="0" anchor="ctr"/>
+          <a:lstStyle/>
+          <a:p>
+            <a:pPr algn="ctr"/>
+          </a:p>
+        </p:txBody>
+      </p:sp>
+      <p:sp>
+        <p:nvSpPr>
+          <p:cNvPr id="52" name="TextBox 51"/>
+          <p:cNvSpPr txBox="1"/>
+          <p:nvPr/>
+        </p:nvSpPr>
+        <p:spPr>
+          <a:xfrm>
+            <a:off x="2761488" y="4956047"/>
+            <a:ext cx="2048256" cy="914400"/>
+          </a:xfrm>
+          <a:prstGeom prst="rect">
+            <a:avLst/>
+          </a:prstGeom>
+          <a:noFill/>
+        </p:spPr>
+        <p:txBody>
+          <a:bodyPr wrap="square" anchor="ctr" lIns="0" tIns="0" rIns="0" bIns="0">
+            <a:noAutofit/>
+          </a:bodyPr>
+          <a:lstStyle/>
+          <a:p>
+            <a:pPr algn="l" latinLnBrk="0">
+              <a:lnSpc>
+                <a:spcPct val="100000"/>
+              </a:lnSpc>
+              <a:spcBef>
+                <a:spcPts val="0"/>
+              </a:spcBef>
+              <a:spcAft>
+                <a:spcPts val="400"/>
+              </a:spcAft>
+            </a:pPr>
+            <a:r>
+              <a:rPr sz="1050" b="1">
+                <a:solidFill>
+                  <a:srgbClr val="0A2B45"/>
+                </a:solidFill>
+                <a:latin typeface="Microsoft YaHei"/>
+                <a:ea typeface="Microsoft YaHei"/>
+                <a:cs typeface="Microsoft YaHei"/>
+              </a:rPr>
+              <a:t>仿真 · 只淘汰不放行</a:t>
+            </a:r>
+          </a:p>
+          <a:p>
+            <a:pPr algn="l" latinLnBrk="0">
+              <a:lnSpc>
+                <a:spcPct val="100000"/>
+              </a:lnSpc>
+              <a:spcBef>
+                <a:spcPts val="0"/>
+              </a:spcBef>
+              <a:spcAft>
+                <a:spcPts val="200"/>
+              </a:spcAft>
+            </a:pPr>
+            <a:r>
+              <a:rPr sz="900" b="0">
+                <a:solidFill>
+                  <a:srgbClr val="1B4D69"/>
+                </a:solidFill>
+                <a:latin typeface="Microsoft YaHei"/>
+                <a:ea typeface="Microsoft YaHei"/>
+                <a:cs typeface="Microsoft YaHei"/>
+              </a:rPr>
+              <a:t>筛掉明显差的候选</a:t>
+            </a:r>
+          </a:p>
+          <a:p>
+            <a:pPr algn="l" latinLnBrk="0">
+              <a:lnSpc>
+                <a:spcPct val="100000"/>
+              </a:lnSpc>
+              <a:spcBef>
+                <a:spcPts val="0"/>
+              </a:spcBef>
+              <a:spcAft>
+                <a:spcPts val="200"/>
+              </a:spcAft>
+            </a:pPr>
+            <a:r>
+              <a:rPr sz="900" b="0">
+                <a:solidFill>
+                  <a:srgbClr val="1B4D69"/>
+                </a:solidFill>
+                <a:latin typeface="Microsoft YaHei"/>
+                <a:ea typeface="Microsoft YaHei"/>
+                <a:cs typeface="Microsoft YaHei"/>
+              </a:rPr>
+              <a:t>（主要用于引擎候选）</a:t>
+            </a:r>
+          </a:p>
+        </p:txBody>
+      </p:sp>
+      <p:sp>
+        <p:nvSpPr>
+          <p:cNvPr id="53" name="TextBox 52"/>
+          <p:cNvSpPr txBox="1"/>
+          <p:nvPr/>
+        </p:nvSpPr>
+        <p:spPr>
+          <a:xfrm>
+            <a:off x="4956048" y="5193792"/>
+            <a:ext cx="768096" cy="219456"/>
+          </a:xfrm>
+          <a:prstGeom prst="rect">
+            <a:avLst/>
+          </a:prstGeom>
+          <a:noFill/>
+        </p:spPr>
+        <p:txBody>
+          <a:bodyPr wrap="square" anchor="ctr" lIns="0" tIns="0" rIns="0" bIns="0">
+            <a:noAutofit/>
+          </a:bodyPr>
+          <a:lstStyle/>
+          <a:p>
+            <a:pPr algn="ctr" latinLnBrk="0">
+              <a:lnSpc>
+                <a:spcPct val="100000"/>
+              </a:lnSpc>
+              <a:spcBef>
+                <a:spcPts val="0"/>
+              </a:spcBef>
+              <a:spcAft>
+                <a:spcPts val="0"/>
+              </a:spcAft>
+            </a:pPr>
+            <a:r>
+              <a:rPr sz="850" b="0">
+                <a:solidFill>
+                  <a:srgbClr val="40708B"/>
+                </a:solidFill>
+                <a:latin typeface="Microsoft YaHei"/>
+                <a:ea typeface="Microsoft YaHei"/>
+                <a:cs typeface="Microsoft YaHei"/>
+              </a:rPr>
+              <a:t>──→　送测</a:t>
+            </a:r>
+          </a:p>
+        </p:txBody>
+      </p:sp>
+      <p:sp>
+        <p:nvSpPr>
+          <p:cNvPr id="54" name="TextBox 53"/>
+          <p:cNvSpPr txBox="1"/>
+          <p:nvPr/>
+        </p:nvSpPr>
+        <p:spPr>
+          <a:xfrm>
+            <a:off x="4956048" y="5431536"/>
+            <a:ext cx="768096" cy="219456"/>
+          </a:xfrm>
+          <a:prstGeom prst="rect">
+            <a:avLst/>
+          </a:prstGeom>
+          <a:noFill/>
+        </p:spPr>
+        <p:txBody>
+          <a:bodyPr wrap="square" anchor="ctr" lIns="0" tIns="0" rIns="0" bIns="0">
+            <a:noAutofit/>
+          </a:bodyPr>
+          <a:lstStyle/>
+          <a:p>
+            <a:pPr algn="ctr" latinLnBrk="0">
+              <a:lnSpc>
+                <a:spcPct val="100000"/>
+              </a:lnSpc>
+              <a:spcBef>
+                <a:spcPts val="0"/>
+              </a:spcBef>
+              <a:spcAft>
+                <a:spcPts val="0"/>
+              </a:spcAft>
+            </a:pPr>
+            <a:r>
+              <a:rPr sz="850" b="0">
+                <a:solidFill>
+                  <a:srgbClr val="40708B"/>
+                </a:solidFill>
+                <a:latin typeface="Microsoft YaHei"/>
+                <a:ea typeface="Microsoft YaHei"/>
+                <a:cs typeface="Microsoft YaHei"/>
+              </a:rPr>
+              <a:t>←──　校准</a:t>
+            </a:r>
+          </a:p>
+        </p:txBody>
+      </p:sp>
+      <p:sp>
+        <p:nvSpPr>
+          <p:cNvPr id="55" name="Rectangle 54"/>
+          <p:cNvSpPr/>
+          <p:nvPr/>
+        </p:nvSpPr>
+        <p:spPr>
+          <a:xfrm>
+            <a:off x="5724144" y="4901183"/>
+            <a:ext cx="5918911" cy="1024128"/>
+          </a:xfrm>
+          <a:prstGeom prst="rect">
+            <a:avLst/>
+          </a:prstGeom>
+          <a:solidFill>
+            <a:srgbClr val="FFFFFF"/>
+          </a:solidFill>
+          <a:ln w="15875">
+            <a:solidFill>
+              <a:srgbClr val="0F62CE"/>
+            </a:solidFill>
+          </a:ln>
+        </p:spPr>
+        <p:txBody>
+          <a:bodyPr rtlCol="0" anchor="ctr"/>
+          <a:lstStyle/>
+          <a:p>
+            <a:pPr algn="ctr"/>
+          </a:p>
+        </p:txBody>
+      </p:sp>
+      <p:sp>
+        <p:nvSpPr>
+          <p:cNvPr id="56" name="TextBox 55"/>
+          <p:cNvSpPr txBox="1"/>
+          <p:nvPr/>
+        </p:nvSpPr>
+        <p:spPr>
+          <a:xfrm>
+            <a:off x="5925312" y="4937759"/>
+            <a:ext cx="5553151" cy="219456"/>
+          </a:xfrm>
+          <a:prstGeom prst="rect">
+            <a:avLst/>
+          </a:prstGeom>
+          <a:noFill/>
+        </p:spPr>
+        <p:txBody>
+          <a:bodyPr wrap="square" anchor="ctr" lIns="0" tIns="0" rIns="0" bIns="0">
+            <a:noAutofit/>
+          </a:bodyPr>
+          <a:lstStyle/>
+          <a:p>
+            <a:pPr algn="l" latinLnBrk="0">
+              <a:lnSpc>
+                <a:spcPct val="100000"/>
+              </a:lnSpc>
+              <a:spcBef>
+                <a:spcPts val="0"/>
+              </a:spcBef>
+              <a:spcAft>
+                <a:spcPts val="0"/>
+              </a:spcAft>
+            </a:pPr>
+            <a:r>
+              <a:rPr sz="1050" b="1">
+                <a:solidFill>
+                  <a:srgbClr val="0A2B45"/>
+                </a:solidFill>
+                <a:latin typeface="Microsoft YaHei"/>
+                <a:ea typeface="Microsoft YaHei"/>
+                <a:cs typeface="Microsoft YaHei"/>
+              </a:rPr>
+              <a:t>真机 · 唯一的判决</a:t>
+            </a:r>
+          </a:p>
+        </p:txBody>
+      </p:sp>
+      <p:sp>
+        <p:nvSpPr>
+          <p:cNvPr id="57" name="TextBox 56"/>
+          <p:cNvSpPr txBox="1"/>
+          <p:nvPr/>
+        </p:nvSpPr>
+        <p:spPr>
+          <a:xfrm>
+            <a:off x="5925312" y="5175503"/>
+            <a:ext cx="713232" cy="201168"/>
+          </a:xfrm>
+          <a:prstGeom prst="rect">
+            <a:avLst/>
+          </a:prstGeom>
+          <a:noFill/>
+        </p:spPr>
+        <p:txBody>
+          <a:bodyPr wrap="square" anchor="ctr" lIns="0" tIns="0" rIns="0" bIns="0">
+            <a:noAutofit/>
+          </a:bodyPr>
+          <a:lstStyle/>
+          <a:p>
+            <a:pPr algn="l" latinLnBrk="0">
+              <a:lnSpc>
+                <a:spcPct val="100000"/>
+              </a:lnSpc>
+              <a:spcBef>
+                <a:spcPts val="0"/>
+              </a:spcBef>
+              <a:spcAft>
+                <a:spcPts val="0"/>
+              </a:spcAft>
+            </a:pPr>
+            <a:r>
+              <a:rPr sz="900" b="1">
+                <a:solidFill>
+                  <a:srgbClr val="0F62CE"/>
+                </a:solidFill>
+                <a:latin typeface="Consolas"/>
+                <a:ea typeface="Microsoft YaHei"/>
+                <a:cs typeface="Microsoft YaHei"/>
+              </a:rPr>
+              <a:t>算子</a:t>
+            </a:r>
+          </a:p>
+        </p:txBody>
+      </p:sp>
+      <p:sp>
+        <p:nvSpPr>
+          <p:cNvPr id="58" name="TextBox 57"/>
+          <p:cNvSpPr txBox="1"/>
+          <p:nvPr/>
+        </p:nvSpPr>
+        <p:spPr>
+          <a:xfrm>
+            <a:off x="6638544" y="5175503"/>
+            <a:ext cx="4803343" cy="201168"/>
+          </a:xfrm>
+          <a:prstGeom prst="rect">
+            <a:avLst/>
+          </a:prstGeom>
+          <a:noFill/>
+        </p:spPr>
+        <p:txBody>
+          <a:bodyPr wrap="square" anchor="ctr" lIns="0" tIns="0" rIns="0" bIns="0">
+            <a:noAutofit/>
+          </a:bodyPr>
+          <a:lstStyle/>
+          <a:p>
+            <a:pPr algn="l" latinLnBrk="0">
+              <a:lnSpc>
+                <a:spcPct val="100000"/>
+              </a:lnSpc>
+              <a:spcBef>
+                <a:spcPts val="0"/>
+              </a:spcBef>
+              <a:spcAft>
+                <a:spcPts val="0"/>
+              </a:spcAft>
+            </a:pPr>
+            <a:r>
+              <a:rPr sz="900" b="0">
+                <a:solidFill>
+                  <a:srgbClr val="1B4D69"/>
+                </a:solidFill>
+                <a:latin typeface="Microsoft YaHei"/>
+                <a:ea typeface="Microsoft YaHei"/>
+                <a:cs typeface="Microsoft YaHei"/>
+              </a:rPr>
+              <a:t>L0 / L1 / Bench，按引擎给的形状测</a:t>
+            </a:r>
+          </a:p>
+        </p:txBody>
+      </p:sp>
+      <p:sp>
+        <p:nvSpPr>
+          <p:cNvPr id="59" name="TextBox 58"/>
+          <p:cNvSpPr txBox="1"/>
+          <p:nvPr/>
+        </p:nvSpPr>
+        <p:spPr>
+          <a:xfrm>
+            <a:off x="5925312" y="5358383"/>
+            <a:ext cx="713232" cy="201168"/>
+          </a:xfrm>
+          <a:prstGeom prst="rect">
+            <a:avLst/>
+          </a:prstGeom>
+          <a:noFill/>
+        </p:spPr>
+        <p:txBody>
+          <a:bodyPr wrap="square" anchor="ctr" lIns="0" tIns="0" rIns="0" bIns="0">
+            <a:noAutofit/>
+          </a:bodyPr>
+          <a:lstStyle/>
+          <a:p>
+            <a:pPr algn="l" latinLnBrk="0">
+              <a:lnSpc>
+                <a:spcPct val="100000"/>
+              </a:lnSpc>
+              <a:spcBef>
+                <a:spcPts val="0"/>
+              </a:spcBef>
+              <a:spcAft>
+                <a:spcPts val="0"/>
+              </a:spcAft>
+            </a:pPr>
+            <a:r>
+              <a:rPr sz="900" b="1">
+                <a:solidFill>
+                  <a:srgbClr val="0F62CE"/>
+                </a:solidFill>
+                <a:latin typeface="Consolas"/>
+                <a:ea typeface="Microsoft YaHei"/>
+                <a:cs typeface="Microsoft YaHei"/>
+              </a:rPr>
+              <a:t>图</a:t>
+            </a:r>
+          </a:p>
+        </p:txBody>
+      </p:sp>
+      <p:sp>
+        <p:nvSpPr>
+          <p:cNvPr id="60" name="TextBox 59"/>
+          <p:cNvSpPr txBox="1"/>
+          <p:nvPr/>
+        </p:nvSpPr>
+        <p:spPr>
+          <a:xfrm>
+            <a:off x="6638544" y="5358383"/>
+            <a:ext cx="4803343" cy="201168"/>
+          </a:xfrm>
+          <a:prstGeom prst="rect">
+            <a:avLst/>
+          </a:prstGeom>
+          <a:noFill/>
+        </p:spPr>
+        <p:txBody>
+          <a:bodyPr wrap="square" anchor="ctr" lIns="0" tIns="0" rIns="0" bIns="0">
+            <a:noAutofit/>
+          </a:bodyPr>
+          <a:lstStyle/>
+          <a:p>
+            <a:pPr algn="l" latinLnBrk="0">
+              <a:lnSpc>
+                <a:spcPct val="100000"/>
+              </a:lnSpc>
+              <a:spcBef>
+                <a:spcPts val="0"/>
+              </a:spcBef>
+              <a:spcAft>
+                <a:spcPts val="0"/>
+              </a:spcAft>
+            </a:pPr>
+            <a:r>
+              <a:rPr sz="900" b="0">
+                <a:solidFill>
+                  <a:srgbClr val="1B4D69"/>
+                </a:solidFill>
+                <a:latin typeface="Microsoft YaHei"/>
+                <a:ea typeface="Microsoft YaHei"/>
+                <a:cs typeface="Microsoft YaHei"/>
+              </a:rPr>
+              <a:t>整模型 A/B + 质量评测</a:t>
+            </a:r>
+          </a:p>
+        </p:txBody>
+      </p:sp>
+      <p:sp>
+        <p:nvSpPr>
+          <p:cNvPr id="61" name="TextBox 60"/>
+          <p:cNvSpPr txBox="1"/>
+          <p:nvPr/>
+        </p:nvSpPr>
+        <p:spPr>
+          <a:xfrm>
+            <a:off x="5925312" y="5541264"/>
+            <a:ext cx="713232" cy="201168"/>
+          </a:xfrm>
+          <a:prstGeom prst="rect">
+            <a:avLst/>
+          </a:prstGeom>
+          <a:noFill/>
+        </p:spPr>
+        <p:txBody>
+          <a:bodyPr wrap="square" anchor="ctr" lIns="0" tIns="0" rIns="0" bIns="0">
+            <a:noAutofit/>
+          </a:bodyPr>
+          <a:lstStyle/>
+          <a:p>
+            <a:pPr algn="l" latinLnBrk="0">
+              <a:lnSpc>
+                <a:spcPct val="100000"/>
+              </a:lnSpc>
+              <a:spcBef>
+                <a:spcPts val="0"/>
+              </a:spcBef>
+              <a:spcAft>
+                <a:spcPts val="0"/>
+              </a:spcAft>
+            </a:pPr>
+            <a:r>
+              <a:rPr sz="900" b="1">
+                <a:solidFill>
+                  <a:srgbClr val="0F62CE"/>
+                </a:solidFill>
+                <a:latin typeface="Consolas"/>
+                <a:ea typeface="Microsoft YaHei"/>
+                <a:cs typeface="Microsoft YaHei"/>
+              </a:rPr>
+              <a:t>引擎</a:t>
+            </a:r>
+          </a:p>
+        </p:txBody>
+      </p:sp>
+      <p:sp>
+        <p:nvSpPr>
+          <p:cNvPr id="62" name="TextBox 61"/>
+          <p:cNvSpPr txBox="1"/>
+          <p:nvPr/>
+        </p:nvSpPr>
+        <p:spPr>
+          <a:xfrm>
+            <a:off x="6638544" y="5541264"/>
+            <a:ext cx="4803343" cy="201168"/>
+          </a:xfrm>
+          <a:prstGeom prst="rect">
+            <a:avLst/>
+          </a:prstGeom>
+          <a:noFill/>
+        </p:spPr>
+        <p:txBody>
+          <a:bodyPr wrap="square" anchor="ctr" lIns="0" tIns="0" rIns="0" bIns="0">
+            <a:noAutofit/>
+          </a:bodyPr>
+          <a:lstStyle/>
+          <a:p>
+            <a:pPr algn="l" latinLnBrk="0">
+              <a:lnSpc>
+                <a:spcPct val="100000"/>
+              </a:lnSpc>
+              <a:spcBef>
+                <a:spcPts val="0"/>
+              </a:spcBef>
+              <a:spcAft>
+                <a:spcPts val="0"/>
+              </a:spcAft>
+            </a:pPr>
+            <a:r>
+              <a:rPr sz="900" b="0">
+                <a:solidFill>
+                  <a:srgbClr val="1B4D69"/>
+                </a:solidFill>
+                <a:latin typeface="Microsoft YaHei"/>
+                <a:ea typeface="Microsoft YaHei"/>
+                <a:cs typeface="Microsoft YaHei"/>
+              </a:rPr>
+              <a:t>流量回放 · 约束下吞吐与 p99 · 实测接受长度 · OOM 与抢占 · 长稳 · 多画像不退化</a:t>
+            </a:r>
+          </a:p>
+        </p:txBody>
+      </p:sp>
+      <p:sp>
+        <p:nvSpPr>
+          <p:cNvPr id="63" name="TextBox 62"/>
+          <p:cNvSpPr txBox="1"/>
+          <p:nvPr/>
+        </p:nvSpPr>
+        <p:spPr>
+          <a:xfrm>
+            <a:off x="5925312" y="5724144"/>
+            <a:ext cx="713232" cy="201168"/>
+          </a:xfrm>
+          <a:prstGeom prst="rect">
+            <a:avLst/>
+          </a:prstGeom>
+          <a:noFill/>
+        </p:spPr>
+        <p:txBody>
+          <a:bodyPr wrap="square" anchor="ctr" lIns="0" tIns="0" rIns="0" bIns="0">
+            <a:noAutofit/>
+          </a:bodyPr>
+          <a:lstStyle/>
+          <a:p>
+            <a:pPr algn="l" latinLnBrk="0">
+              <a:lnSpc>
+                <a:spcPct val="100000"/>
+              </a:lnSpc>
+              <a:spcBef>
+                <a:spcPts val="0"/>
+              </a:spcBef>
+              <a:spcAft>
+                <a:spcPts val="0"/>
+              </a:spcAft>
+            </a:pPr>
+            <a:r>
+              <a:rPr sz="900" b="1">
+                <a:solidFill>
+                  <a:srgbClr val="0F62CE"/>
+                </a:solidFill>
+                <a:latin typeface="Consolas"/>
+                <a:ea typeface="Microsoft YaHei"/>
+                <a:cs typeface="Microsoft YaHei"/>
+              </a:rPr>
+              <a:t>overlap</a:t>
+            </a:r>
+          </a:p>
+        </p:txBody>
+      </p:sp>
+      <p:sp>
+        <p:nvSpPr>
+          <p:cNvPr id="64" name="TextBox 63"/>
+          <p:cNvSpPr txBox="1"/>
+          <p:nvPr/>
+        </p:nvSpPr>
+        <p:spPr>
+          <a:xfrm>
+            <a:off x="6638544" y="5724144"/>
+            <a:ext cx="4803343" cy="201168"/>
+          </a:xfrm>
+          <a:prstGeom prst="rect">
+            <a:avLst/>
+          </a:prstGeom>
+          <a:noFill/>
+        </p:spPr>
+        <p:txBody>
+          <a:bodyPr wrap="square" anchor="ctr" lIns="0" tIns="0" rIns="0" bIns="0">
+            <a:noAutofit/>
+          </a:bodyPr>
+          <a:lstStyle/>
+          <a:p>
+            <a:pPr algn="l" latinLnBrk="0">
+              <a:lnSpc>
+                <a:spcPct val="100000"/>
+              </a:lnSpc>
+              <a:spcBef>
+                <a:spcPts val="0"/>
+              </a:spcBef>
+              <a:spcAft>
+                <a:spcPts val="0"/>
+              </a:spcAft>
+            </a:pPr>
+            <a:r>
+              <a:rPr sz="900" b="0">
+                <a:solidFill>
+                  <a:srgbClr val="1B4D69"/>
+                </a:solidFill>
+                <a:latin typeface="Microsoft YaHei"/>
+                <a:ea typeface="Microsoft YaHei"/>
+                <a:cs typeface="Microsoft YaHei"/>
+              </a:rPr>
+              <a:t>与关闭时输出一致 · 长压测抓竞态</a:t>
+            </a:r>
+          </a:p>
+        </p:txBody>
+      </p:sp>
+      <p:sp>
+        <p:nvSpPr>
+          <p:cNvPr id="65" name="Rectangle 64"/>
+          <p:cNvSpPr/>
+          <p:nvPr/>
+        </p:nvSpPr>
+        <p:spPr>
+          <a:xfrm>
+            <a:off x="950976" y="6071616"/>
+            <a:ext cx="10692079" cy="329184"/>
+          </a:xfrm>
+          <a:prstGeom prst="rect">
+            <a:avLst/>
+          </a:prstGeom>
+          <a:solidFill>
+            <a:srgbClr val="E6F0FC"/>
+          </a:solidFill>
+          <a:ln>
+            <a:noFill/>
+          </a:ln>
+        </p:spPr>
+        <p:txBody>
+          <a:bodyPr rtlCol="0" anchor="ctr"/>
+          <a:lstStyle/>
+          <a:p>
+            <a:pPr algn="ctr"/>
+          </a:p>
+        </p:txBody>
+      </p:sp>
+      <p:sp>
+        <p:nvSpPr>
+          <p:cNvPr id="66" name="TextBox 65"/>
+          <p:cNvSpPr txBox="1"/>
+          <p:nvPr/>
+        </p:nvSpPr>
+        <p:spPr>
+          <a:xfrm>
+            <a:off x="1225296" y="6071616"/>
+            <a:ext cx="10234879" cy="329184"/>
+          </a:xfrm>
+          <a:prstGeom prst="rect">
+            <a:avLst/>
+          </a:prstGeom>
+          <a:noFill/>
+        </p:spPr>
+        <p:txBody>
+          <a:bodyPr wrap="square" anchor="ctr" lIns="0" tIns="0" rIns="0" bIns="0">
+            <a:noAutofit/>
+          </a:bodyPr>
+          <a:lstStyle/>
+          <a:p>
+            <a:pPr algn="l" latinLnBrk="0">
+              <a:lnSpc>
+                <a:spcPct val="100000"/>
+              </a:lnSpc>
+              <a:spcBef>
+                <a:spcPts val="0"/>
+              </a:spcBef>
+              <a:spcAft>
+                <a:spcPts val="0"/>
+              </a:spcAft>
+            </a:pPr>
+            <a:r>
+              <a:rPr sz="1100" b="1">
+                <a:solidFill>
+                  <a:srgbClr val="0F62CE"/>
+                </a:solidFill>
+                <a:latin typeface="Microsoft YaHei"/>
+                <a:ea typeface="Microsoft YaHei"/>
+                <a:cs typeface="Microsoft YaHei"/>
+              </a:rPr>
+              <a:t>通</a:t>
+            </a:r>
+            <a:r>
+              <a:rPr sz="1100" b="1">
+                <a:solidFill>
+                  <a:srgbClr val="0A2B45"/>
+                </a:solidFill>
+                <a:latin typeface="Microsoft YaHei"/>
+                <a:ea typeface="Microsoft YaHei"/>
+                <a:cs typeface="Microsoft YaHei"/>
+              </a:rPr>
+              <a:t>过：成为新基线，回目标层重算差距　·　提不出跨过噪声门槛的候选即收敛</a:t>
+            </a:r>
+          </a:p>
+        </p:txBody>
+      </p:sp>
+      <p:sp>
+        <p:nvSpPr>
+          <p:cNvPr id="67" name="Freeform 66"/>
+          <p:cNvSpPr/>
+          <p:nvPr/>
+        </p:nvSpPr>
+        <p:spPr>
+          <a:xfrm>
+            <a:off x="640080" y="1645920"/>
+            <a:ext cx="310896" cy="4590287"/>
+          </a:xfrm>
+          <a:custGeom>
+            <a:avLst/>
+            <a:gdLst/>
+            <a:ahLst/>
+            <a:cxnLst/>
+            <a:rect l="l" t="t" r="r" b="b"/>
+            <a:pathLst>
+              <a:path w="310896" h="4590287">
+                <a:moveTo>
+                  <a:pt x="310896" y="4590287"/>
+                </a:moveTo>
+                <a:lnTo>
+                  <a:pt x="0" y="4590287"/>
+                </a:lnTo>
+                <a:lnTo>
+                  <a:pt x="0" y="0"/>
+                </a:lnTo>
+              </a:path>
+            </a:pathLst>
+          </a:custGeom>
+          <a:noFill/>
+          <a:ln w="19050">
+            <a:solidFill>
+              <a:srgbClr val="0F62CE"/>
+            </a:solidFill>
+          </a:ln>
+        </p:spPr>
+        <p:txBody>
+          <a:bodyPr rtlCol="0" anchor="ctr"/>
+          <a:lstStyle/>
+          <a:p>
+            <a:pPr algn="ctr"/>
+          </a:p>
+        </p:txBody>
+      </p:sp>
+      <p:cxnSp>
+        <p:nvCxnSpPr>
+          <p:cNvPr id="68" name="Connector 67"/>
+          <p:cNvCxnSpPr/>
+          <p:nvPr/>
+        </p:nvCxnSpPr>
+        <p:spPr>
+          <a:xfrm>
+            <a:off x="640080" y="1645920"/>
+            <a:ext cx="292608" cy="0"/>
+          </a:xfrm>
+          <a:prstGeom prst="line">
+            <a:avLst/>
+          </a:prstGeom>
+          <a:ln w="19050">
+            <a:solidFill>
+              <a:srgbClr val="0F62CE"/>
+            </a:solidFill>
+            <a:tailEnd type="triangle" w="med" len="med"/>
+          </a:ln>
+        </p:spPr>
+      </p:cxnSp>
+      <p:sp>
+        <p:nvSpPr>
+          <p:cNvPr id="69" name="TextBox 68"/>
+          <p:cNvSpPr txBox="1"/>
+          <p:nvPr/>
+        </p:nvSpPr>
+        <p:spPr>
+          <a:xfrm>
+            <a:off x="548640" y="6455664"/>
+            <a:ext cx="8595360" cy="256032"/>
+          </a:xfrm>
+          <a:prstGeom prst="rect">
+            <a:avLst/>
+          </a:prstGeom>
+          <a:noFill/>
+        </p:spPr>
+        <p:txBody>
+          <a:bodyPr wrap="square" anchor="ctr" lIns="0" tIns="0" rIns="0" bIns="0">
+            <a:noAutofit/>
+          </a:bodyPr>
+          <a:lstStyle/>
+          <a:p>
+            <a:pPr algn="l" latinLnBrk="0">
+              <a:lnSpc>
+                <a:spcPct val="100000"/>
+              </a:lnSpc>
+              <a:spcBef>
+                <a:spcPts val="0"/>
+              </a:spcBef>
+              <a:spcAft>
+                <a:spcPts val="0"/>
+              </a:spcAft>
+            </a:pPr>
+            <a:r>
+              <a:rPr sz="900" b="0">
+                <a:solidFill>
+                  <a:srgbClr val="40708B"/>
+                </a:solidFill>
+                <a:latin typeface="Microsoft YaHei"/>
+                <a:ea typeface="Microsoft YaHei"/>
+                <a:cs typeface="Microsoft YaHei"/>
+              </a:rPr>
+              <a:t>第 7 页是单步口径（ms/步），本页是服务口径（约束下的吞吐），两页的数不能直接对齐</a:t>
+            </a:r>
+          </a:p>
+        </p:txBody>
+      </p:sp>
+      <p:sp>
+        <p:nvSpPr>
+          <p:cNvPr id="70" name="TextBox 69"/>
           <p:cNvSpPr txBox="1"/>
           <p:nvPr/>
         </p:nvSpPr>

--- a/slides/m100_agent_final_deck.pptx
+++ b/slides/m100_agent_final_deck.pptx
@@ -4651,7 +4651,7 @@
                 <a:ea typeface="Microsoft YaHei"/>
                 <a:cs typeface="Microsoft YaHei"/>
               </a:rPr>
-              <a:t>M100 Agent：模型Roofline</a:t>
+              <a:t>M100 Agent：全栈模型 Roofline 协同优化体系</a:t>
             </a:r>
           </a:p>
         </p:txBody>
@@ -4690,7 +4690,7 @@
               </a:spcAft>
             </a:pPr>
             <a:r>
-              <a:rPr sz="1250" b="0">
+              <a:rPr sz="1150" b="0">
                 <a:solidFill>
                   <a:srgbClr val="1B4D69"/>
                 </a:solidFill>
@@ -4698,7 +4698,7 @@
                 <a:ea typeface="Microsoft YaHei"/>
                 <a:cs typeface="Microsoft YaHei"/>
               </a:rPr>
-              <a:t>目标态：算子 · 计算图 · 引擎三层协同；目标由约束推导，判决仍交给真机实测</a:t>
+              <a:t>演进目标（Target State）：算子 · 计算图 · 引擎三层协同寻优；优化目标由约束条件正向推导，最终准入交由真机实测一锤定音</a:t>
             </a:r>
           </a:p>
         </p:txBody>
@@ -4711,8 +4711,8 @@
         </p:nvSpPr>
         <p:spPr>
           <a:xfrm>
-            <a:off x="950976" y="1243584"/>
-            <a:ext cx="10692079" cy="914400"/>
+            <a:off x="804672" y="1261872"/>
+            <a:ext cx="10838383" cy="786384"/>
           </a:xfrm>
           <a:prstGeom prst="rect">
             <a:avLst/>
@@ -4740,8 +4740,8 @@
         </p:nvSpPr>
         <p:spPr>
           <a:xfrm>
-            <a:off x="950976" y="1243584"/>
-            <a:ext cx="64008" cy="914400"/>
+            <a:off x="804672" y="1261872"/>
+            <a:ext cx="54864" cy="786384"/>
           </a:xfrm>
           <a:prstGeom prst="rect">
             <a:avLst/>
@@ -4763,22 +4763,29 @@
       </p:sp>
       <p:sp>
         <p:nvSpPr>
-          <p:cNvPr id="8" name="TextBox 7"/>
-          <p:cNvSpPr txBox="1"/>
-          <p:nvPr/>
-        </p:nvSpPr>
-        <p:spPr>
-          <a:xfrm>
-            <a:off x="1170432" y="1316736"/>
-            <a:ext cx="1188720" cy="768096"/>
-          </a:xfrm>
-          <a:prstGeom prst="rect">
-            <a:avLst/>
-          </a:prstGeom>
-          <a:noFill/>
-        </p:spPr>
-        <p:txBody>
-          <a:bodyPr wrap="square" anchor="ctr" lIns="0" tIns="0" rIns="0" bIns="0">
+          <p:cNvPr id="8" name="Rounded Rectangle 7"/>
+          <p:cNvSpPr/>
+          <p:nvPr/>
+        </p:nvSpPr>
+        <p:spPr>
+          <a:xfrm>
+            <a:off x="987552" y="1143000"/>
+            <a:ext cx="2047453" cy="237744"/>
+          </a:xfrm>
+          <a:prstGeom prst="roundRect">
+            <a:avLst>
+              <a:gd name="adj" fmla="val 50000"/>
+            </a:avLst>
+          </a:prstGeom>
+          <a:solidFill>
+            <a:srgbClr val="0F62CE"/>
+          </a:solidFill>
+          <a:ln>
+            <a:noFill/>
+          </a:ln>
+        </p:spPr>
+        <p:txBody>
+          <a:bodyPr rtlCol="0" anchor="ctr" wrap="square" lIns="146304" tIns="0" rIns="109728" bIns="0">
             <a:noAutofit/>
           </a:bodyPr>
           <a:lstStyle/>
@@ -4791,13 +4798,13 @@
                 <a:spcPts val="0"/>
               </a:spcBef>
               <a:spcAft>
-                <a:spcPts val="300"/>
-              </a:spcAft>
-            </a:pPr>
-            <a:r>
-              <a:rPr sz="1400" b="1">
-                <a:solidFill>
-                  <a:srgbClr val="0A2B45"/>
+                <a:spcPts val="0"/>
+              </a:spcAft>
+            </a:pPr>
+            <a:r>
+              <a:rPr sz="1100" b="1">
+                <a:solidFill>
+                  <a:srgbClr val="FFFFFF"/>
                 </a:solidFill>
                 <a:latin typeface="Microsoft YaHei"/>
                 <a:ea typeface="Microsoft YaHei"/>
@@ -4805,29 +4812,16 @@
               </a:rPr>
               <a:t>目标层</a:t>
             </a:r>
-          </a:p>
-          <a:p>
-            <a:pPr algn="l" latinLnBrk="0">
-              <a:lnSpc>
-                <a:spcPct val="100000"/>
-              </a:lnSpc>
-              <a:spcBef>
-                <a:spcPts val="0"/>
-              </a:spcBef>
-              <a:spcAft>
-                <a:spcPts val="0"/>
-              </a:spcAft>
-            </a:pPr>
-            <a:r>
-              <a:rPr sz="900" b="0">
-                <a:solidFill>
-                  <a:srgbClr val="40708B"/>
-                </a:solidFill>
-                <a:latin typeface="Microsoft YaHei"/>
-                <a:ea typeface="Microsoft YaHei"/>
-                <a:cs typeface="Microsoft YaHei"/>
-              </a:rPr>
-              <a:t>定靶子 · 拆差距</a:t>
+            <a:r>
+              <a:rPr sz="950" b="0">
+                <a:solidFill>
+                  <a:srgbClr val="F2F8FD"/>
+                </a:solidFill>
+                <a:latin typeface="Microsoft YaHei"/>
+                <a:ea typeface="Microsoft YaHei"/>
+                <a:cs typeface="Microsoft YaHei"/>
+              </a:rPr>
+              <a:t>　锚定上限 · 拆解差距</a:t>
             </a:r>
           </a:p>
         </p:txBody>
@@ -4840,8 +4834,8 @@
         </p:nvSpPr>
         <p:spPr>
           <a:xfrm>
-            <a:off x="2578608" y="1335024"/>
-            <a:ext cx="1737360" cy="731520"/>
+            <a:off x="987552" y="1389888"/>
+            <a:ext cx="2103120" cy="640080"/>
           </a:xfrm>
           <a:prstGeom prst="rect">
             <a:avLst/>
@@ -4871,8 +4865,8 @@
         </p:nvSpPr>
         <p:spPr>
           <a:xfrm>
-            <a:off x="2779776" y="1389888"/>
-            <a:ext cx="1371600" cy="621792"/>
+            <a:off x="1188720" y="1426464"/>
+            <a:ext cx="1737360" cy="566928"/>
           </a:xfrm>
           <a:prstGeom prst="rect">
             <a:avLst/>
@@ -4905,7 +4899,7 @@
                 <a:ea typeface="Microsoft YaHei"/>
                 <a:cs typeface="Microsoft YaHei"/>
               </a:rPr>
-              <a:t>人</a:t>
+              <a:t>人（输入约束）</a:t>
             </a:r>
           </a:p>
           <a:p>
@@ -4921,7 +4915,7 @@
               </a:spcAft>
             </a:pPr>
             <a:r>
-              <a:rPr sz="950" b="0">
+              <a:rPr sz="900" b="0">
                 <a:solidFill>
                   <a:srgbClr val="1B4D69"/>
                 </a:solidFill>
@@ -4929,7 +4923,7 @@
                 <a:ea typeface="Microsoft YaHei"/>
                 <a:cs typeface="Microsoft YaHei"/>
               </a:rPr>
-              <a:t>流量画像</a:t>
+              <a:t>业务流量画像</a:t>
             </a:r>
           </a:p>
           <a:p>
@@ -4945,7 +4939,7 @@
               </a:spcAft>
             </a:pPr>
             <a:r>
-              <a:rPr sz="950" b="0">
+              <a:rPr sz="900" b="0">
                 <a:solidFill>
                   <a:srgbClr val="1B4D69"/>
                 </a:solidFill>
@@ -4953,7 +4947,7 @@
                 <a:ea typeface="Microsoft YaHei"/>
                 <a:cs typeface="Microsoft YaHei"/>
               </a:rPr>
-              <a:t>时延约束</a:t>
+              <a:t>服务时延约束（SLO）</a:t>
             </a:r>
           </a:p>
         </p:txBody>
@@ -4966,8 +4960,8 @@
         </p:nvCxnSpPr>
         <p:spPr>
           <a:xfrm>
-            <a:off x="4389120" y="1700784"/>
-            <a:ext cx="237744" cy="0"/>
+            <a:off x="3136391" y="1655063"/>
+            <a:ext cx="237745" cy="0"/>
           </a:xfrm>
           <a:prstGeom prst="line">
             <a:avLst/>
@@ -4988,8 +4982,8 @@
         </p:nvSpPr>
         <p:spPr>
           <a:xfrm>
-            <a:off x="4681728" y="1335024"/>
-            <a:ext cx="3246120" cy="731520"/>
+            <a:off x="3419856" y="1389888"/>
+            <a:ext cx="4023360" cy="640080"/>
           </a:xfrm>
           <a:prstGeom prst="rect">
             <a:avLst/>
@@ -5019,8 +5013,8 @@
         </p:nvSpPr>
         <p:spPr>
           <a:xfrm>
-            <a:off x="4882896" y="1389888"/>
-            <a:ext cx="2880360" cy="621792"/>
+            <a:off x="3621024" y="1426464"/>
+            <a:ext cx="3657600" cy="566928"/>
           </a:xfrm>
           <a:prstGeom prst="rect">
             <a:avLst/>
@@ -5053,7 +5047,7 @@
                 <a:ea typeface="Microsoft YaHei"/>
                 <a:cs typeface="Microsoft YaHei"/>
               </a:rPr>
-              <a:t>上限核算器 · 无模型</a:t>
+              <a:t>上限核算器 · 纯理论推导（无模型）</a:t>
             </a:r>
           </a:p>
           <a:p>
@@ -5069,7 +5063,7 @@
               </a:spcAft>
             </a:pPr>
             <a:r>
-              <a:rPr sz="950" b="0">
+              <a:rPr sz="900" b="0">
                 <a:solidFill>
                   <a:srgbClr val="1B4D69"/>
                 </a:solidFill>
@@ -5077,7 +5071,7 @@
                 <a:ea typeface="Microsoft YaHei"/>
                 <a:cs typeface="Microsoft YaHei"/>
               </a:rPr>
-              <a:t>只用模型配置 + 硬件规格</a:t>
+              <a:t>仅依据模型配置与硬件物理规格直接推算</a:t>
             </a:r>
           </a:p>
           <a:p>
@@ -5093,7 +5087,7 @@
               </a:spcAft>
             </a:pPr>
             <a:r>
-              <a:rPr sz="950" b="0">
+              <a:rPr sz="900" b="0">
                 <a:solidFill>
                   <a:srgbClr val="1B4D69"/>
                 </a:solidFill>
@@ -5101,7 +5095,7 @@
                 <a:ea typeface="Microsoft YaHei"/>
                 <a:cs typeface="Microsoft YaHei"/>
               </a:rPr>
-              <a:t>上限不用实测去凑</a:t>
+              <a:t>理论上限不含实测校准项，不靠实测数据反向拼凑</a:t>
             </a:r>
           </a:p>
         </p:txBody>
@@ -5114,7 +5108,7 @@
         </p:nvCxnSpPr>
         <p:spPr>
           <a:xfrm>
-            <a:off x="8001000" y="1700784"/>
+            <a:off x="7488936" y="1655063"/>
             <a:ext cx="237744" cy="0"/>
           </a:xfrm>
           <a:prstGeom prst="line">
@@ -5136,8 +5130,8 @@
         </p:nvSpPr>
         <p:spPr>
           <a:xfrm>
-            <a:off x="8293608" y="1335024"/>
-            <a:ext cx="3346704" cy="731520"/>
+            <a:off x="7772400" y="1389888"/>
+            <a:ext cx="3867912" cy="640080"/>
           </a:xfrm>
           <a:prstGeom prst="rect">
             <a:avLst/>
@@ -5167,8 +5161,8 @@
         </p:nvSpPr>
         <p:spPr>
           <a:xfrm>
-            <a:off x="8494776" y="1389888"/>
-            <a:ext cx="2980944" cy="621792"/>
+            <a:off x="7973568" y="1426464"/>
+            <a:ext cx="3502152" cy="201168"/>
           </a:xfrm>
           <a:prstGeom prst="rect">
             <a:avLst/>
@@ -5189,7 +5183,7 @@
                 <a:spcPts val="0"/>
               </a:spcBef>
               <a:spcAft>
-                <a:spcPts val="400"/>
+                <a:spcPts val="0"/>
               </a:spcAft>
             </a:pPr>
             <a:r>
@@ -5201,9 +5195,299 @@
                 <a:ea typeface="Microsoft YaHei"/>
                 <a:cs typeface="Microsoft YaHei"/>
               </a:rPr>
-              <a:t>总差距拆成三项</a:t>
-            </a:r>
-          </a:p>
+              <a:t>总差距拆解为三个维度</a:t>
+            </a:r>
+            <a:r>
+              <a:rPr sz="850" b="0">
+                <a:solidFill>
+                  <a:srgbClr val="40708B"/>
+                </a:solidFill>
+                <a:latin typeface="Microsoft YaHei"/>
+                <a:ea typeface="Microsoft YaHei"/>
+                <a:cs typeface="Microsoft YaHei"/>
+              </a:rPr>
+              <a:t>（三个倍率相乘，不是耗时相加）</a:t>
+            </a:r>
+          </a:p>
+        </p:txBody>
+      </p:sp>
+      <p:sp>
+        <p:nvSpPr>
+          <p:cNvPr id="17" name="Rounded Rectangle 16"/>
+          <p:cNvSpPr/>
+          <p:nvPr/>
+        </p:nvSpPr>
+        <p:spPr>
+          <a:xfrm>
+            <a:off x="7973568" y="1636776"/>
+            <a:ext cx="562115" cy="182880"/>
+          </a:xfrm>
+          <a:prstGeom prst="roundRect">
+            <a:avLst>
+              <a:gd name="adj" fmla="val 50000"/>
+            </a:avLst>
+          </a:prstGeom>
+          <a:solidFill>
+            <a:srgbClr val="E6F0FC"/>
+          </a:solidFill>
+          <a:ln>
+            <a:noFill/>
+          </a:ln>
+        </p:spPr>
+        <p:txBody>
+          <a:bodyPr rtlCol="0" anchor="ctr" wrap="square" lIns="18288" tIns="0" rIns="18288" bIns="0">
+            <a:noAutofit/>
+          </a:bodyPr>
+          <a:lstStyle/>
+          <a:p>
+            <a:pPr algn="ctr" latinLnBrk="0">
+              <a:lnSpc>
+                <a:spcPct val="100000"/>
+              </a:lnSpc>
+              <a:spcBef>
+                <a:spcPts val="0"/>
+              </a:spcBef>
+              <a:spcAft>
+                <a:spcPts val="0"/>
+              </a:spcAft>
+            </a:pPr>
+            <a:r>
+              <a:rPr sz="900" b="1">
+                <a:solidFill>
+                  <a:srgbClr val="0F62CE"/>
+                </a:solidFill>
+                <a:latin typeface="Microsoft YaHei"/>
+                <a:ea typeface="Microsoft YaHei"/>
+                <a:cs typeface="Microsoft YaHei"/>
+              </a:rPr>
+              <a:t>工作点</a:t>
+            </a:r>
+          </a:p>
+        </p:txBody>
+      </p:sp>
+      <p:sp>
+        <p:nvSpPr>
+          <p:cNvPr id="18" name="TextBox 17"/>
+          <p:cNvSpPr txBox="1"/>
+          <p:nvPr/>
+        </p:nvSpPr>
+        <p:spPr>
+          <a:xfrm>
+            <a:off x="8535683" y="1627632"/>
+            <a:ext cx="201168" cy="201168"/>
+          </a:xfrm>
+          <a:prstGeom prst="rect">
+            <a:avLst/>
+          </a:prstGeom>
+          <a:noFill/>
+        </p:spPr>
+        <p:txBody>
+          <a:bodyPr wrap="square" anchor="ctr" lIns="0" tIns="0" rIns="0" bIns="0">
+            <a:noAutofit/>
+          </a:bodyPr>
+          <a:lstStyle/>
+          <a:p>
+            <a:pPr algn="ctr" latinLnBrk="0">
+              <a:lnSpc>
+                <a:spcPct val="100000"/>
+              </a:lnSpc>
+              <a:spcBef>
+                <a:spcPts val="0"/>
+              </a:spcBef>
+              <a:spcAft>
+                <a:spcPts val="0"/>
+              </a:spcAft>
+            </a:pPr>
+            <a:r>
+              <a:rPr sz="1000" b="0">
+                <a:solidFill>
+                  <a:srgbClr val="40708B"/>
+                </a:solidFill>
+                <a:latin typeface="Microsoft YaHei"/>
+                <a:ea typeface="Microsoft YaHei"/>
+                <a:cs typeface="Microsoft YaHei"/>
+              </a:rPr>
+              <a:t>×</a:t>
+            </a:r>
+          </a:p>
+        </p:txBody>
+      </p:sp>
+      <p:sp>
+        <p:nvSpPr>
+          <p:cNvPr id="19" name="Rounded Rectangle 18"/>
+          <p:cNvSpPr/>
+          <p:nvPr/>
+        </p:nvSpPr>
+        <p:spPr>
+          <a:xfrm>
+            <a:off x="8736851" y="1636776"/>
+            <a:ext cx="682431" cy="182880"/>
+          </a:xfrm>
+          <a:prstGeom prst="roundRect">
+            <a:avLst>
+              <a:gd name="adj" fmla="val 50000"/>
+            </a:avLst>
+          </a:prstGeom>
+          <a:solidFill>
+            <a:srgbClr val="E6F0FC"/>
+          </a:solidFill>
+          <a:ln>
+            <a:noFill/>
+          </a:ln>
+        </p:spPr>
+        <p:txBody>
+          <a:bodyPr rtlCol="0" anchor="ctr" wrap="square" lIns="18288" tIns="0" rIns="18288" bIns="0">
+            <a:noAutofit/>
+          </a:bodyPr>
+          <a:lstStyle/>
+          <a:p>
+            <a:pPr algn="ctr" latinLnBrk="0">
+              <a:lnSpc>
+                <a:spcPct val="100000"/>
+              </a:lnSpc>
+              <a:spcBef>
+                <a:spcPts val="0"/>
+              </a:spcBef>
+              <a:spcAft>
+                <a:spcPts val="0"/>
+              </a:spcAft>
+            </a:pPr>
+            <a:r>
+              <a:rPr sz="900" b="1">
+                <a:solidFill>
+                  <a:srgbClr val="0F62CE"/>
+                </a:solidFill>
+                <a:latin typeface="Microsoft YaHei"/>
+                <a:ea typeface="Microsoft YaHei"/>
+                <a:cs typeface="Microsoft YaHei"/>
+              </a:rPr>
+              <a:t>步间调度</a:t>
+            </a:r>
+          </a:p>
+        </p:txBody>
+      </p:sp>
+      <p:sp>
+        <p:nvSpPr>
+          <p:cNvPr id="20" name="TextBox 19"/>
+          <p:cNvSpPr txBox="1"/>
+          <p:nvPr/>
+        </p:nvSpPr>
+        <p:spPr>
+          <a:xfrm>
+            <a:off x="9419282" y="1627632"/>
+            <a:ext cx="201168" cy="201168"/>
+          </a:xfrm>
+          <a:prstGeom prst="rect">
+            <a:avLst/>
+          </a:prstGeom>
+          <a:noFill/>
+        </p:spPr>
+        <p:txBody>
+          <a:bodyPr wrap="square" anchor="ctr" lIns="0" tIns="0" rIns="0" bIns="0">
+            <a:noAutofit/>
+          </a:bodyPr>
+          <a:lstStyle/>
+          <a:p>
+            <a:pPr algn="ctr" latinLnBrk="0">
+              <a:lnSpc>
+                <a:spcPct val="100000"/>
+              </a:lnSpc>
+              <a:spcBef>
+                <a:spcPts val="0"/>
+              </a:spcBef>
+              <a:spcAft>
+                <a:spcPts val="0"/>
+              </a:spcAft>
+            </a:pPr>
+            <a:r>
+              <a:rPr sz="1000" b="0">
+                <a:solidFill>
+                  <a:srgbClr val="40708B"/>
+                </a:solidFill>
+                <a:latin typeface="Microsoft YaHei"/>
+                <a:ea typeface="Microsoft YaHei"/>
+                <a:cs typeface="Microsoft YaHei"/>
+              </a:rPr>
+              <a:t>×</a:t>
+            </a:r>
+          </a:p>
+        </p:txBody>
+      </p:sp>
+      <p:sp>
+        <p:nvSpPr>
+          <p:cNvPr id="21" name="Rounded Rectangle 20"/>
+          <p:cNvSpPr/>
+          <p:nvPr/>
+        </p:nvSpPr>
+        <p:spPr>
+          <a:xfrm>
+            <a:off x="9620450" y="1636776"/>
+            <a:ext cx="682431" cy="182880"/>
+          </a:xfrm>
+          <a:prstGeom prst="roundRect">
+            <a:avLst>
+              <a:gd name="adj" fmla="val 50000"/>
+            </a:avLst>
+          </a:prstGeom>
+          <a:solidFill>
+            <a:srgbClr val="E6F0FC"/>
+          </a:solidFill>
+          <a:ln>
+            <a:noFill/>
+          </a:ln>
+        </p:spPr>
+        <p:txBody>
+          <a:bodyPr rtlCol="0" anchor="ctr" wrap="square" lIns="18288" tIns="0" rIns="18288" bIns="0">
+            <a:noAutofit/>
+          </a:bodyPr>
+          <a:lstStyle/>
+          <a:p>
+            <a:pPr algn="ctr" latinLnBrk="0">
+              <a:lnSpc>
+                <a:spcPct val="100000"/>
+              </a:lnSpc>
+              <a:spcBef>
+                <a:spcPts val="0"/>
+              </a:spcBef>
+              <a:spcAft>
+                <a:spcPts val="0"/>
+              </a:spcAft>
+            </a:pPr>
+            <a:r>
+              <a:rPr sz="900" b="1">
+                <a:solidFill>
+                  <a:srgbClr val="0F62CE"/>
+                </a:solidFill>
+                <a:latin typeface="Microsoft YaHei"/>
+                <a:ea typeface="Microsoft YaHei"/>
+                <a:cs typeface="Microsoft YaHei"/>
+              </a:rPr>
+              <a:t>单步执行</a:t>
+            </a:r>
+          </a:p>
+        </p:txBody>
+      </p:sp>
+      <p:sp>
+        <p:nvSpPr>
+          <p:cNvPr id="22" name="TextBox 21"/>
+          <p:cNvSpPr txBox="1"/>
+          <p:nvPr/>
+        </p:nvSpPr>
+        <p:spPr>
+          <a:xfrm>
+            <a:off x="7973568" y="1847088"/>
+            <a:ext cx="3502152" cy="182880"/>
+          </a:xfrm>
+          <a:prstGeom prst="rect">
+            <a:avLst/>
+          </a:prstGeom>
+          <a:noFill/>
+        </p:spPr>
+        <p:txBody>
+          <a:bodyPr wrap="square" anchor="ctr" lIns="0" tIns="0" rIns="0" bIns="0">
+            <a:noAutofit/>
+          </a:bodyPr>
+          <a:lstStyle/>
           <a:p>
             <a:pPr algn="l" latinLnBrk="0">
               <a:lnSpc>
@@ -5213,11 +5497,11 @@
                 <a:spcPts val="0"/>
               </a:spcBef>
               <a:spcAft>
-                <a:spcPts val="200"/>
-              </a:spcAft>
-            </a:pPr>
-            <a:r>
-              <a:rPr sz="950" b="0">
+                <a:spcPts val="0"/>
+              </a:spcAft>
+            </a:pPr>
+            <a:r>
+              <a:rPr sz="900" b="0">
                 <a:solidFill>
                   <a:srgbClr val="1B4D69"/>
                 </a:solidFill>
@@ -5225,45 +5509,21 @@
                 <a:ea typeface="Microsoft YaHei"/>
                 <a:cs typeface="Microsoft YaHei"/>
               </a:rPr>
-              <a:t>工作点 × 单步 × 步间</a:t>
-            </a:r>
-          </a:p>
-          <a:p>
-            <a:pPr algn="l" latinLnBrk="0">
-              <a:lnSpc>
-                <a:spcPct val="100000"/>
-              </a:lnSpc>
-              <a:spcBef>
-                <a:spcPts val="0"/>
-              </a:spcBef>
-              <a:spcAft>
-                <a:spcPts val="200"/>
-              </a:spcAft>
-            </a:pPr>
-            <a:r>
-              <a:rPr sz="950" b="0">
-                <a:solidFill>
-                  <a:srgbClr val="1B4D69"/>
-                </a:solidFill>
-                <a:latin typeface="Microsoft YaHei"/>
-                <a:ea typeface="Microsoft YaHei"/>
-                <a:cs typeface="Microsoft YaHei"/>
-              </a:rPr>
-              <a:t>每一项都有明确的主人</a:t>
+              <a:t>责任到层，每一项差距均有明确的优化归属</a:t>
             </a:r>
           </a:p>
         </p:txBody>
       </p:sp>
       <p:cxnSp>
         <p:nvCxnSpPr>
-          <p:cNvPr id="17" name="Connector 16"/>
+          <p:cNvPr id="23" name="Connector 22"/>
           <p:cNvCxnSpPr/>
           <p:nvPr/>
         </p:nvCxnSpPr>
         <p:spPr>
           <a:xfrm>
-            <a:off x="2578608" y="2331720"/>
-            <a:ext cx="9064447" cy="0"/>
+            <a:off x="987552" y="2185415"/>
+            <a:ext cx="10655503" cy="0"/>
           </a:xfrm>
           <a:prstGeom prst="line">
             <a:avLst/>
@@ -5278,14 +5538,14 @@
       </p:cxnSp>
       <p:sp>
         <p:nvSpPr>
-          <p:cNvPr id="18" name="Rectangle 17"/>
+          <p:cNvPr id="24" name="Rectangle 23"/>
           <p:cNvSpPr/>
           <p:nvPr/>
         </p:nvSpPr>
         <p:spPr>
           <a:xfrm>
-            <a:off x="2578608" y="2212848"/>
-            <a:ext cx="2651760" cy="237744"/>
+            <a:off x="987552" y="2084831"/>
+            <a:ext cx="3540760" cy="201168"/>
           </a:xfrm>
           <a:prstGeom prst="rect">
             <a:avLst/>
@@ -5307,14 +5567,14 @@
       </p:sp>
       <p:sp>
         <p:nvSpPr>
-          <p:cNvPr id="19" name="TextBox 18"/>
-          <p:cNvSpPr txBox="1"/>
-          <p:nvPr/>
-        </p:nvSpPr>
-        <p:spPr>
-          <a:xfrm>
-            <a:off x="2578608" y="2212848"/>
-            <a:ext cx="2651760" cy="237744"/>
+          <p:cNvPr id="25" name="TextBox 24"/>
+          <p:cNvSpPr txBox="1"/>
+          <p:nvPr/>
+        </p:nvSpPr>
+        <p:spPr>
+          <a:xfrm>
+            <a:off x="987552" y="2084831"/>
+            <a:ext cx="3540760" cy="201168"/>
           </a:xfrm>
           <a:prstGeom prst="rect">
             <a:avLst/>
@@ -5347,21 +5607,21 @@
                 <a:ea typeface="Microsoft YaHei"/>
                 <a:cs typeface="Microsoft YaHei"/>
               </a:rPr>
-              <a:t>↓　派单：按差距排序，标明归属尺度</a:t>
-            </a:r>
-          </a:p>
-        </p:txBody>
-      </p:sp>
-      <p:sp>
-        <p:nvSpPr>
-          <p:cNvPr id="20" name="Rectangle 19"/>
+              <a:t>↓　任务派发：按理论差距大小排序，明确标注归属层级</a:t>
+            </a:r>
+          </a:p>
+        </p:txBody>
+      </p:sp>
+      <p:sp>
+        <p:nvSpPr>
+          <p:cNvPr id="26" name="Rectangle 25"/>
           <p:cNvSpPr/>
           <p:nvPr/>
         </p:nvSpPr>
         <p:spPr>
           <a:xfrm>
-            <a:off x="950976" y="2505456"/>
-            <a:ext cx="10692079" cy="1993392"/>
+            <a:off x="804672" y="2450592"/>
+            <a:ext cx="10838383" cy="1847088"/>
           </a:xfrm>
           <a:prstGeom prst="rect">
             <a:avLst/>
@@ -5383,14 +5643,14 @@
       </p:sp>
       <p:sp>
         <p:nvSpPr>
-          <p:cNvPr id="21" name="Rectangle 20"/>
+          <p:cNvPr id="27" name="Rectangle 26"/>
           <p:cNvSpPr/>
           <p:nvPr/>
         </p:nvSpPr>
         <p:spPr>
           <a:xfrm>
-            <a:off x="950976" y="2505456"/>
-            <a:ext cx="64008" cy="1993392"/>
+            <a:off x="804672" y="2450592"/>
+            <a:ext cx="54864" cy="1847088"/>
           </a:xfrm>
           <a:prstGeom prst="rect">
             <a:avLst/>
@@ -5412,22 +5672,29 @@
       </p:sp>
       <p:sp>
         <p:nvSpPr>
-          <p:cNvPr id="22" name="TextBox 21"/>
-          <p:cNvSpPr txBox="1"/>
-          <p:nvPr/>
-        </p:nvSpPr>
-        <p:spPr>
-          <a:xfrm>
-            <a:off x="1170432" y="2578608"/>
-            <a:ext cx="1188720" cy="1847088"/>
-          </a:xfrm>
-          <a:prstGeom prst="rect">
-            <a:avLst/>
-          </a:prstGeom>
-          <a:noFill/>
-        </p:spPr>
-        <p:txBody>
-          <a:bodyPr wrap="square" anchor="ctr" lIns="0" tIns="0" rIns="0" bIns="0">
+          <p:cNvPr id="28" name="Rounded Rectangle 27"/>
+          <p:cNvSpPr/>
+          <p:nvPr/>
+        </p:nvSpPr>
+        <p:spPr>
+          <a:xfrm>
+            <a:off x="987552" y="2331720"/>
+            <a:ext cx="2936453" cy="237744"/>
+          </a:xfrm>
+          <a:prstGeom prst="roundRect">
+            <a:avLst>
+              <a:gd name="adj" fmla="val 50000"/>
+            </a:avLst>
+          </a:prstGeom>
+          <a:solidFill>
+            <a:srgbClr val="D2690C"/>
+          </a:solidFill>
+          <a:ln>
+            <a:noFill/>
+          </a:ln>
+        </p:spPr>
+        <p:txBody>
+          <a:bodyPr rtlCol="0" anchor="ctr" wrap="square" lIns="146304" tIns="0" rIns="109728" bIns="0">
             <a:noAutofit/>
           </a:bodyPr>
           <a:lstStyle/>
@@ -5440,13 +5707,13 @@
                 <a:spcPts val="0"/>
               </a:spcBef>
               <a:spcAft>
-                <a:spcPts val="300"/>
-              </a:spcAft>
-            </a:pPr>
-            <a:r>
-              <a:rPr sz="1400" b="1">
-                <a:solidFill>
-                  <a:srgbClr val="0A2B45"/>
+                <a:spcPts val="0"/>
+              </a:spcAft>
+            </a:pPr>
+            <a:r>
+              <a:rPr sz="1100" b="1">
+                <a:solidFill>
+                  <a:srgbClr val="FFFFFF"/>
                 </a:solidFill>
                 <a:latin typeface="Microsoft YaHei"/>
                 <a:ea typeface="Microsoft YaHei"/>
@@ -5454,21 +5721,84 @@
               </a:rPr>
               <a:t>规划层</a:t>
             </a:r>
-          </a:p>
-          <a:p>
-            <a:pPr algn="l" latinLnBrk="0">
-              <a:lnSpc>
-                <a:spcPct val="100000"/>
-              </a:lnSpc>
-              <a:spcBef>
-                <a:spcPts val="0"/>
-              </a:spcBef>
-              <a:spcAft>
-                <a:spcPts val="0"/>
-              </a:spcAft>
-            </a:pPr>
-            <a:r>
-              <a:rPr sz="900" b="0">
+            <a:r>
+              <a:rPr sz="950" b="0">
+                <a:solidFill>
+                  <a:srgbClr val="F2F8FD"/>
+                </a:solidFill>
+                <a:latin typeface="Microsoft YaHei"/>
+                <a:ea typeface="Microsoft YaHei"/>
+                <a:cs typeface="Microsoft YaHei"/>
+              </a:rPr>
+              <a:t>　外环寻优工作点 · 内环逼近硬件上限</a:t>
+            </a:r>
+          </a:p>
+        </p:txBody>
+      </p:sp>
+      <p:sp>
+        <p:nvSpPr>
+          <p:cNvPr id="29" name="Rectangle 28"/>
+          <p:cNvSpPr/>
+          <p:nvPr/>
+        </p:nvSpPr>
+        <p:spPr>
+          <a:xfrm>
+            <a:off x="9871472" y="2331720"/>
+            <a:ext cx="1771583" cy="237744"/>
+          </a:xfrm>
+          <a:prstGeom prst="rect">
+            <a:avLst/>
+          </a:prstGeom>
+          <a:solidFill>
+            <a:srgbClr val="F2F8FD"/>
+          </a:solidFill>
+          <a:ln>
+            <a:noFill/>
+          </a:ln>
+        </p:spPr>
+        <p:txBody>
+          <a:bodyPr rtlCol="0" anchor="ctr"/>
+          <a:lstStyle/>
+          <a:p>
+            <a:pPr algn="ctr"/>
+          </a:p>
+        </p:txBody>
+      </p:sp>
+      <p:sp>
+        <p:nvSpPr>
+          <p:cNvPr id="30" name="TextBox 29"/>
+          <p:cNvSpPr txBox="1"/>
+          <p:nvPr/>
+        </p:nvSpPr>
+        <p:spPr>
+          <a:xfrm>
+            <a:off x="9871472" y="2331720"/>
+            <a:ext cx="1771583" cy="237744"/>
+          </a:xfrm>
+          <a:prstGeom prst="rect">
+            <a:avLst/>
+          </a:prstGeom>
+          <a:noFill/>
+        </p:spPr>
+        <p:txBody>
+          <a:bodyPr wrap="square" anchor="ctr" lIns="0" tIns="0" rIns="0" bIns="0">
+            <a:noAutofit/>
+          </a:bodyPr>
+          <a:lstStyle/>
+          <a:p>
+            <a:pPr algn="ctr" latinLnBrk="0">
+              <a:lnSpc>
+                <a:spcPct val="100000"/>
+              </a:lnSpc>
+              <a:spcBef>
+                <a:spcPts val="0"/>
+              </a:spcBef>
+              <a:spcAft>
+                <a:spcPts val="0"/>
+              </a:spcAft>
+            </a:pPr>
+            <a:r>
+              <a:rPr sz="800" b="0">
                 <a:solidFill>
                   <a:srgbClr val="40708B"/>
                 </a:solidFill>
@@ -5476,21 +5806,21 @@
                 <a:ea typeface="Microsoft YaHei"/>
                 <a:cs typeface="Microsoft YaHei"/>
               </a:rPr>
-              <a:t>外环定工作点 · 内环逼近屋顶</a:t>
-            </a:r>
-          </a:p>
-        </p:txBody>
-      </p:sp>
-      <p:sp>
-        <p:nvSpPr>
-          <p:cNvPr id="23" name="Rectangle 22"/>
+              <a:t>方括号标签表示当前能力成熟度</a:t>
+            </a:r>
+          </a:p>
+        </p:txBody>
+      </p:sp>
+      <p:sp>
+        <p:nvSpPr>
+          <p:cNvPr id="31" name="Rectangle 30"/>
           <p:cNvSpPr/>
           <p:nvPr/>
         </p:nvSpPr>
         <p:spPr>
           <a:xfrm>
-            <a:off x="2578608" y="2578608"/>
-            <a:ext cx="9064447" cy="676656"/>
+            <a:off x="987552" y="2578608"/>
+            <a:ext cx="10655503" cy="585216"/>
           </a:xfrm>
           <a:prstGeom prst="rect">
             <a:avLst/>
@@ -5514,14 +5844,14 @@
       </p:sp>
       <p:sp>
         <p:nvSpPr>
-          <p:cNvPr id="24" name="TextBox 23"/>
-          <p:cNvSpPr txBox="1"/>
-          <p:nvPr/>
-        </p:nvSpPr>
-        <p:spPr>
-          <a:xfrm>
-            <a:off x="2779776" y="2615184"/>
-            <a:ext cx="1828800" cy="237744"/>
+          <p:cNvPr id="32" name="TextBox 31"/>
+          <p:cNvSpPr txBox="1"/>
+          <p:nvPr/>
+        </p:nvSpPr>
+        <p:spPr>
+          <a:xfrm>
+            <a:off x="1188720" y="2606040"/>
+            <a:ext cx="1150218" cy="201168"/>
           </a:xfrm>
           <a:prstGeom prst="rect">
             <a:avLst/>
@@ -5554,21 +5884,21 @@
                 <a:ea typeface="Microsoft YaHei"/>
                 <a:cs typeface="Microsoft YaHei"/>
               </a:rPr>
-              <a:t>外环 · 引擎</a:t>
-            </a:r>
-          </a:p>
-        </p:txBody>
-      </p:sp>
-      <p:sp>
-        <p:nvSpPr>
-          <p:cNvPr id="25" name="Rounded Rectangle 24"/>
+              <a:t>外环 · 推理引擎</a:t>
+            </a:r>
+          </a:p>
+        </p:txBody>
+      </p:sp>
+      <p:sp>
+        <p:nvSpPr>
+          <p:cNvPr id="33" name="Rounded Rectangle 32"/>
           <p:cNvSpPr/>
           <p:nvPr/>
         </p:nvSpPr>
         <p:spPr>
           <a:xfrm>
-            <a:off x="4645152" y="2633472"/>
-            <a:ext cx="658368" cy="201168"/>
+            <a:off x="2412090" y="2615184"/>
+            <a:ext cx="731520" cy="182880"/>
           </a:xfrm>
           <a:prstGeom prst="roundRect">
             <a:avLst>
@@ -5608,79 +5938,21 @@
                 <a:ea typeface="Microsoft YaHei"/>
                 <a:cs typeface="Microsoft YaHei"/>
               </a:rPr>
-              <a:t>种子</a:t>
-            </a:r>
-          </a:p>
-        </p:txBody>
-      </p:sp>
-      <p:sp>
-        <p:nvSpPr>
-          <p:cNvPr id="26" name="TextBox 25"/>
-          <p:cNvSpPr txBox="1"/>
-          <p:nvPr/>
-        </p:nvSpPr>
-        <p:spPr>
-          <a:xfrm>
-            <a:off x="2779776" y="2871216"/>
-            <a:ext cx="7875727" cy="201168"/>
-          </a:xfrm>
-          <a:prstGeom prst="rect">
-            <a:avLst/>
-          </a:prstGeom>
-          <a:noFill/>
-        </p:spPr>
-        <p:txBody>
-          <a:bodyPr wrap="square" anchor="ctr" lIns="0" tIns="0" rIns="0" bIns="0">
-            <a:noAutofit/>
-          </a:bodyPr>
-          <a:lstStyle/>
-          <a:p>
-            <a:pPr algn="l" latinLnBrk="0">
-              <a:lnSpc>
-                <a:spcPct val="100000"/>
-              </a:lnSpc>
-              <a:spcBef>
-                <a:spcPts val="0"/>
-              </a:spcBef>
-              <a:spcAft>
-                <a:spcPts val="0"/>
-              </a:spcAft>
-            </a:pPr>
-            <a:r>
-              <a:rPr sz="950" b="1">
-                <a:solidFill>
-                  <a:srgbClr val="C2570A"/>
-                </a:solidFill>
-                <a:latin typeface="Microsoft YaHei"/>
-                <a:ea typeface="Microsoft YaHei"/>
-                <a:cs typeface="Microsoft YaHei"/>
-              </a:rPr>
-              <a:t>工作点：</a:t>
-            </a:r>
-            <a:r>
-              <a:rPr sz="950" b="0">
-                <a:solidFill>
-                  <a:srgbClr val="1B4D69"/>
-                </a:solidFill>
-                <a:latin typeface="Microsoft YaHei"/>
-                <a:ea typeface="Microsoft YaHei"/>
-                <a:cs typeface="Microsoft YaHei"/>
-              </a:rPr>
-              <a:t>显存切分 · 每步请求数 · 投机解码</a:t>
-            </a:r>
-          </a:p>
-        </p:txBody>
-      </p:sp>
-      <p:sp>
-        <p:nvSpPr>
-          <p:cNvPr id="27" name="Rounded Rectangle 26"/>
+              <a:t>[ 探索中 ]</a:t>
+            </a:r>
+          </a:p>
+        </p:txBody>
+      </p:sp>
+      <p:sp>
+        <p:nvSpPr>
+          <p:cNvPr id="34" name="Rounded Rectangle 33"/>
           <p:cNvSpPr/>
           <p:nvPr/>
         </p:nvSpPr>
         <p:spPr>
           <a:xfrm>
-            <a:off x="10783519" y="2880360"/>
-            <a:ext cx="658368" cy="182880"/>
+            <a:off x="1188720" y="2807208"/>
+            <a:ext cx="768096" cy="164592"/>
           </a:xfrm>
           <a:prstGeom prst="roundRect">
             <a:avLst>
@@ -5712,7 +5984,7 @@
               </a:spcAft>
             </a:pPr>
             <a:r>
-              <a:rPr sz="900" b="1">
+              <a:rPr sz="850" b="1">
                 <a:solidFill>
                   <a:srgbClr val="0F62CE"/>
                 </a:solidFill>
@@ -5727,14 +5999,14 @@
       </p:sp>
       <p:sp>
         <p:nvSpPr>
-          <p:cNvPr id="28" name="TextBox 27"/>
-          <p:cNvSpPr txBox="1"/>
-          <p:nvPr/>
-        </p:nvSpPr>
-        <p:spPr>
-          <a:xfrm>
-            <a:off x="2779776" y="3072384"/>
-            <a:ext cx="7875727" cy="201168"/>
+          <p:cNvPr id="35" name="TextBox 34"/>
+          <p:cNvSpPr txBox="1"/>
+          <p:nvPr/>
+        </p:nvSpPr>
+        <p:spPr>
+          <a:xfrm>
+            <a:off x="2048256" y="2807208"/>
+            <a:ext cx="9393631" cy="164592"/>
           </a:xfrm>
           <a:prstGeom prst="rect">
             <a:avLst/>
@@ -5759,18 +6031,7 @@
               </a:spcAft>
             </a:pPr>
             <a:r>
-              <a:rPr sz="950" b="1">
-                <a:solidFill>
-                  <a:srgbClr val="C2570A"/>
-                </a:solidFill>
-                <a:latin typeface="Microsoft YaHei"/>
-                <a:ea typeface="Microsoft YaHei"/>
-                <a:cs typeface="Microsoft YaHei"/>
-              </a:rPr>
-              <a:t>步间：</a:t>
-            </a:r>
-            <a:r>
-              <a:rPr sz="950" b="0">
+              <a:rPr sz="900" b="0">
                 <a:solidFill>
                   <a:srgbClr val="1B4D69"/>
                 </a:solidFill>
@@ -5778,21 +6039,21 @@
                 <a:ea typeface="Microsoft YaHei"/>
                 <a:cs typeface="Microsoft YaHei"/>
               </a:rPr>
-              <a:t>overlap 调度 · chunk 与混跑 · 前缀缓存 · PD</a:t>
-            </a:r>
-          </a:p>
-        </p:txBody>
-      </p:sp>
-      <p:sp>
-        <p:nvSpPr>
-          <p:cNvPr id="29" name="Rounded Rectangle 28"/>
+              <a:t>显存切分策略 · 单步批大小（Batch Size） · 投机解码（Speculative Decoding）</a:t>
+            </a:r>
+          </a:p>
+        </p:txBody>
+      </p:sp>
+      <p:sp>
+        <p:nvSpPr>
+          <p:cNvPr id="36" name="Rounded Rectangle 35"/>
           <p:cNvSpPr/>
           <p:nvPr/>
         </p:nvSpPr>
         <p:spPr>
           <a:xfrm>
-            <a:off x="10783519" y="3081528"/>
-            <a:ext cx="658368" cy="182880"/>
+            <a:off x="1188720" y="2990088"/>
+            <a:ext cx="768096" cy="164592"/>
           </a:xfrm>
           <a:prstGeom prst="roundRect">
             <a:avLst>
@@ -5824,7 +6085,7 @@
               </a:spcAft>
             </a:pPr>
             <a:r>
-              <a:rPr sz="900" b="1">
+              <a:rPr sz="850" b="1">
                 <a:solidFill>
                   <a:srgbClr val="0F62CE"/>
                 </a:solidFill>
@@ -5832,21 +6093,21 @@
                 <a:ea typeface="Microsoft YaHei"/>
                 <a:cs typeface="Microsoft YaHei"/>
               </a:rPr>
-              <a:t>步间</a:t>
-            </a:r>
-          </a:p>
-        </p:txBody>
-      </p:sp>
-      <p:sp>
-        <p:nvSpPr>
-          <p:cNvPr id="30" name="TextBox 29"/>
-          <p:cNvSpPr txBox="1"/>
-          <p:nvPr/>
-        </p:nvSpPr>
-        <p:spPr>
-          <a:xfrm>
-            <a:off x="2779776" y="3273552"/>
-            <a:ext cx="2834640" cy="201168"/>
+              <a:t>步间调度</a:t>
+            </a:r>
+          </a:p>
+        </p:txBody>
+      </p:sp>
+      <p:sp>
+        <p:nvSpPr>
+          <p:cNvPr id="37" name="TextBox 36"/>
+          <p:cNvSpPr txBox="1"/>
+          <p:nvPr/>
+        </p:nvSpPr>
+        <p:spPr>
+          <a:xfrm>
+            <a:off x="2048256" y="2990088"/>
+            <a:ext cx="9393631" cy="164592"/>
           </a:xfrm>
           <a:prstGeom prst="rect">
             <a:avLst/>
@@ -5873,74 +6134,135 @@
             <a:r>
               <a:rPr sz="900" b="0">
                 <a:solidFill>
+                  <a:srgbClr val="1B4D69"/>
+                </a:solidFill>
+                <a:latin typeface="Microsoft YaHei"/>
+                <a:ea typeface="Microsoft YaHei"/>
+                <a:cs typeface="Microsoft YaHei"/>
+              </a:rPr>
+              <a:t>调度与执行重叠（Overlap Scheduler） · 分块预填充（Chunked Prefill）与混跑 · 前缀缓存 · PD 分离部署</a:t>
+            </a:r>
+          </a:p>
+        </p:txBody>
+      </p:sp>
+      <p:sp>
+        <p:nvSpPr>
+          <p:cNvPr id="38" name="Rounded Rectangle 37"/>
+          <p:cNvSpPr/>
+          <p:nvPr/>
+        </p:nvSpPr>
+        <p:spPr>
+          <a:xfrm>
+            <a:off x="1188720" y="3182112"/>
+            <a:ext cx="3096447" cy="201168"/>
+          </a:xfrm>
+          <a:prstGeom prst="roundRect">
+            <a:avLst>
+              <a:gd name="adj" fmla="val 50000"/>
+            </a:avLst>
+          </a:prstGeom>
+          <a:solidFill>
+            <a:srgbClr val="FBE6D4"/>
+          </a:solidFill>
+          <a:ln>
+            <a:noFill/>
+          </a:ln>
+        </p:spPr>
+        <p:txBody>
+          <a:bodyPr rtlCol="0" anchor="ctr" wrap="square" lIns="36576" tIns="0" rIns="36576" bIns="0">
+            <a:noAutofit/>
+          </a:bodyPr>
+          <a:lstStyle/>
+          <a:p>
+            <a:pPr algn="ctr" latinLnBrk="0">
+              <a:lnSpc>
+                <a:spcPct val="100000"/>
+              </a:lnSpc>
+              <a:spcBef>
+                <a:spcPts val="0"/>
+              </a:spcBef>
+              <a:spcAft>
+                <a:spcPts val="0"/>
+              </a:spcAft>
+            </a:pPr>
+            <a:r>
+              <a:rPr sz="900" b="0">
+                <a:solidFill>
+                  <a:srgbClr val="C2570A"/>
+                </a:solidFill>
+                <a:latin typeface="Microsoft YaHei"/>
+                <a:ea typeface="Microsoft YaHei"/>
+                <a:cs typeface="Microsoft YaHei"/>
+              </a:rPr>
+              <a:t>↓　下发：张量形状（Shape）分布 + 新算子需求</a:t>
+            </a:r>
+          </a:p>
+        </p:txBody>
+      </p:sp>
+      <p:sp>
+        <p:nvSpPr>
+          <p:cNvPr id="39" name="Rounded Rectangle 38"/>
+          <p:cNvSpPr/>
+          <p:nvPr/>
+        </p:nvSpPr>
+        <p:spPr>
+          <a:xfrm>
+            <a:off x="4522911" y="3182112"/>
+            <a:ext cx="3260076" cy="201168"/>
+          </a:xfrm>
+          <a:prstGeom prst="roundRect">
+            <a:avLst>
+              <a:gd name="adj" fmla="val 50000"/>
+            </a:avLst>
+          </a:prstGeom>
+          <a:solidFill>
+            <a:srgbClr val="DEEDFA"/>
+          </a:solidFill>
+          <a:ln>
+            <a:noFill/>
+          </a:ln>
+        </p:spPr>
+        <p:txBody>
+          <a:bodyPr rtlCol="0" anchor="ctr" wrap="square" lIns="36576" tIns="0" rIns="36576" bIns="0">
+            <a:noAutofit/>
+          </a:bodyPr>
+          <a:lstStyle/>
+          <a:p>
+            <a:pPr algn="ctr" latinLnBrk="0">
+              <a:lnSpc>
+                <a:spcPct val="100000"/>
+              </a:lnSpc>
+              <a:spcBef>
+                <a:spcPts val="0"/>
+              </a:spcBef>
+              <a:spcAft>
+                <a:spcPts val="0"/>
+              </a:spcAft>
+            </a:pPr>
+            <a:r>
+              <a:rPr sz="900" b="0">
+                <a:solidFill>
                   <a:srgbClr val="40708B"/>
                 </a:solidFill>
                 <a:latin typeface="Microsoft YaHei"/>
                 <a:ea typeface="Microsoft YaHei"/>
                 <a:cs typeface="Microsoft YaHei"/>
               </a:rPr>
-              <a:t>↓　形状分布 + 新算子需求</a:t>
-            </a:r>
-          </a:p>
-        </p:txBody>
-      </p:sp>
-      <p:sp>
-        <p:nvSpPr>
-          <p:cNvPr id="31" name="TextBox 30"/>
-          <p:cNvSpPr txBox="1"/>
-          <p:nvPr/>
-        </p:nvSpPr>
-        <p:spPr>
-          <a:xfrm>
-            <a:off x="5797296" y="3273552"/>
-            <a:ext cx="2834640" cy="201168"/>
-          </a:xfrm>
-          <a:prstGeom prst="rect">
-            <a:avLst/>
-          </a:prstGeom>
-          <a:noFill/>
-        </p:spPr>
-        <p:txBody>
-          <a:bodyPr wrap="square" anchor="ctr" lIns="0" tIns="0" rIns="0" bIns="0">
-            <a:noAutofit/>
-          </a:bodyPr>
-          <a:lstStyle/>
-          <a:p>
-            <a:pPr algn="l" latinLnBrk="0">
-              <a:lnSpc>
-                <a:spcPct val="100000"/>
-              </a:lnSpc>
-              <a:spcBef>
-                <a:spcPts val="0"/>
-              </a:spcBef>
-              <a:spcAft>
-                <a:spcPts val="0"/>
-              </a:spcAft>
-            </a:pPr>
-            <a:r>
-              <a:rPr sz="900" b="0">
-                <a:solidFill>
-                  <a:srgbClr val="40708B"/>
-                </a:solidFill>
-                <a:latin typeface="Microsoft YaHei"/>
-                <a:ea typeface="Microsoft YaHei"/>
-                <a:cs typeface="Microsoft YaHei"/>
-              </a:rPr>
-              <a:t>↑　单步代价曲线 + 时延余量</a:t>
-            </a:r>
-          </a:p>
-        </p:txBody>
-      </p:sp>
-      <p:sp>
-        <p:nvSpPr>
-          <p:cNvPr id="32" name="Rectangle 31"/>
+              <a:t>↑　反馈：单步耗时代价曲线 + 时延余量（Budget）</a:t>
+            </a:r>
+          </a:p>
+        </p:txBody>
+      </p:sp>
+      <p:sp>
+        <p:nvSpPr>
+          <p:cNvPr id="40" name="Rectangle 39"/>
           <p:cNvSpPr/>
           <p:nvPr/>
         </p:nvSpPr>
         <p:spPr>
           <a:xfrm>
-            <a:off x="2578608" y="3493008"/>
-            <a:ext cx="9064447" cy="932688"/>
+            <a:off x="987552" y="3419856"/>
+            <a:ext cx="10655503" cy="841248"/>
           </a:xfrm>
           <a:prstGeom prst="rect">
             <a:avLst/>
@@ -5964,14 +6286,14 @@
       </p:sp>
       <p:sp>
         <p:nvSpPr>
-          <p:cNvPr id="33" name="TextBox 32"/>
-          <p:cNvSpPr txBox="1"/>
-          <p:nvPr/>
-        </p:nvSpPr>
-        <p:spPr>
-          <a:xfrm>
-            <a:off x="2779776" y="3529584"/>
-            <a:ext cx="4206240" cy="237744"/>
+          <p:cNvPr id="41" name="TextBox 40"/>
+          <p:cNvSpPr txBox="1"/>
+          <p:nvPr/>
+        </p:nvSpPr>
+        <p:spPr>
+          <a:xfrm>
+            <a:off x="1188720" y="3447288"/>
+            <a:ext cx="5120640" cy="201168"/>
           </a:xfrm>
           <a:prstGeom prst="rect">
             <a:avLst/>
@@ -6004,21 +6326,21 @@
                 <a:ea typeface="Microsoft YaHei"/>
                 <a:cs typeface="Microsoft YaHei"/>
               </a:rPr>
-              <a:t>内环 · 图 + 算子：在工作点上逼近屋顶</a:t>
-            </a:r>
-          </a:p>
-        </p:txBody>
-      </p:sp>
-      <p:sp>
-        <p:nvSpPr>
-          <p:cNvPr id="34" name="Rounded Rectangle 33"/>
+              <a:t>内环 · 计算图 + 算子：在锁定工作点上逼近硬件极限</a:t>
+            </a:r>
+          </a:p>
+        </p:txBody>
+      </p:sp>
+      <p:sp>
+        <p:nvSpPr>
+          <p:cNvPr id="42" name="Rounded Rectangle 41"/>
           <p:cNvSpPr/>
           <p:nvPr/>
         </p:nvSpPr>
         <p:spPr>
           <a:xfrm>
-            <a:off x="10783519" y="3557016"/>
-            <a:ext cx="658368" cy="182880"/>
+            <a:off x="10759456" y="3456432"/>
+            <a:ext cx="682431" cy="182880"/>
           </a:xfrm>
           <a:prstGeom prst="roundRect">
             <a:avLst>
@@ -6058,21 +6380,21 @@
                 <a:ea typeface="Microsoft YaHei"/>
                 <a:cs typeface="Microsoft YaHei"/>
               </a:rPr>
-              <a:t>单步</a:t>
-            </a:r>
-          </a:p>
-        </p:txBody>
-      </p:sp>
-      <p:sp>
-        <p:nvSpPr>
-          <p:cNvPr id="35" name="TextBox 34"/>
-          <p:cNvSpPr txBox="1"/>
-          <p:nvPr/>
-        </p:nvSpPr>
-        <p:spPr>
-          <a:xfrm>
-            <a:off x="2779776" y="3785616"/>
-            <a:ext cx="548640" cy="201168"/>
+              <a:t>单步执行</a:t>
+            </a:r>
+          </a:p>
+        </p:txBody>
+      </p:sp>
+      <p:sp>
+        <p:nvSpPr>
+          <p:cNvPr id="43" name="TextBox 42"/>
+          <p:cNvSpPr txBox="1"/>
+          <p:nvPr/>
+        </p:nvSpPr>
+        <p:spPr>
+          <a:xfrm>
+            <a:off x="1188720" y="3657600"/>
+            <a:ext cx="768096" cy="182880"/>
           </a:xfrm>
           <a:prstGeom prst="rect">
             <a:avLst/>
@@ -6105,21 +6427,21 @@
                 <a:ea typeface="Microsoft YaHei"/>
                 <a:cs typeface="Microsoft YaHei"/>
               </a:rPr>
-              <a:t>图</a:t>
-            </a:r>
-          </a:p>
-        </p:txBody>
-      </p:sp>
-      <p:sp>
-        <p:nvSpPr>
-          <p:cNvPr id="36" name="Rounded Rectangle 35"/>
+              <a:t>计算图</a:t>
+            </a:r>
+          </a:p>
+        </p:txBody>
+      </p:sp>
+      <p:sp>
+        <p:nvSpPr>
+          <p:cNvPr id="44" name="Rounded Rectangle 43"/>
           <p:cNvSpPr/>
           <p:nvPr/>
         </p:nvSpPr>
         <p:spPr>
           <a:xfrm>
-            <a:off x="3346704" y="3794760"/>
-            <a:ext cx="786384" cy="182880"/>
+            <a:off x="1975104" y="3666744"/>
+            <a:ext cx="804672" cy="164592"/>
           </a:xfrm>
           <a:prstGeom prst="roundRect">
             <a:avLst>
@@ -6151,7 +6473,7 @@
               </a:spcAft>
             </a:pPr>
             <a:r>
-              <a:rPr sz="850" b="1">
+              <a:rPr sz="850" b="0">
                 <a:solidFill>
                   <a:srgbClr val="40708B"/>
                 </a:solidFill>
@@ -6159,21 +6481,21 @@
                 <a:ea typeface="Microsoft YaHei"/>
                 <a:cs typeface="Microsoft YaHei"/>
               </a:rPr>
-              <a:t>部分已有</a:t>
-            </a:r>
-          </a:p>
-        </p:txBody>
-      </p:sp>
-      <p:sp>
-        <p:nvSpPr>
-          <p:cNvPr id="37" name="TextBox 36"/>
-          <p:cNvSpPr txBox="1"/>
-          <p:nvPr/>
-        </p:nvSpPr>
-        <p:spPr>
-          <a:xfrm>
-            <a:off x="4242816" y="3785616"/>
-            <a:ext cx="6412687" cy="201168"/>
+              <a:t>[ 部分就绪 ]</a:t>
+            </a:r>
+          </a:p>
+        </p:txBody>
+      </p:sp>
+      <p:sp>
+        <p:nvSpPr>
+          <p:cNvPr id="45" name="TextBox 44"/>
+          <p:cNvSpPr txBox="1"/>
+          <p:nvPr/>
+        </p:nvSpPr>
+        <p:spPr>
+          <a:xfrm>
+            <a:off x="2871216" y="3657600"/>
+            <a:ext cx="8570671" cy="182880"/>
           </a:xfrm>
           <a:prstGeom prst="rect">
             <a:avLst/>
@@ -6198,7 +6520,7 @@
               </a:spcAft>
             </a:pPr>
             <a:r>
-              <a:rPr sz="950" b="0">
+              <a:rPr sz="900" b="0">
                 <a:solidFill>
                   <a:srgbClr val="1B4D69"/>
                 </a:solidFill>
@@ -6206,21 +6528,21 @@
                 <a:ea typeface="Microsoft YaHei"/>
                 <a:cs typeface="Microsoft YaHei"/>
               </a:rPr>
-              <a:t>融合 · 多流并发 · 通信窗口预取</a:t>
-            </a:r>
-          </a:p>
-        </p:txBody>
-      </p:sp>
-      <p:sp>
-        <p:nvSpPr>
-          <p:cNvPr id="38" name="TextBox 37"/>
-          <p:cNvSpPr txBox="1"/>
-          <p:nvPr/>
-        </p:nvSpPr>
-        <p:spPr>
-          <a:xfrm>
-            <a:off x="2779776" y="4206240"/>
-            <a:ext cx="548640" cy="201168"/>
+              <a:t>算子融合 · 多流并发（Multi-Stream） · 通信窗口预取</a:t>
+            </a:r>
+          </a:p>
+        </p:txBody>
+      </p:sp>
+      <p:sp>
+        <p:nvSpPr>
+          <p:cNvPr id="46" name="TextBox 45"/>
+          <p:cNvSpPr txBox="1"/>
+          <p:nvPr/>
+        </p:nvSpPr>
+        <p:spPr>
+          <a:xfrm>
+            <a:off x="1188720" y="4041648"/>
+            <a:ext cx="768096" cy="182880"/>
           </a:xfrm>
           <a:prstGeom prst="rect">
             <a:avLst/>
@@ -6260,14 +6582,14 @@
       </p:sp>
       <p:sp>
         <p:nvSpPr>
-          <p:cNvPr id="39" name="Rounded Rectangle 38"/>
+          <p:cNvPr id="47" name="Rounded Rectangle 46"/>
           <p:cNvSpPr/>
           <p:nvPr/>
         </p:nvSpPr>
         <p:spPr>
           <a:xfrm>
-            <a:off x="3346704" y="4215384"/>
-            <a:ext cx="786384" cy="182880"/>
+            <a:off x="1975104" y="4050791"/>
+            <a:ext cx="804672" cy="164592"/>
           </a:xfrm>
           <a:prstGeom prst="roundRect">
             <a:avLst>
@@ -6299,7 +6621,7 @@
               </a:spcAft>
             </a:pPr>
             <a:r>
-              <a:rPr sz="850" b="1">
+              <a:rPr sz="850" b="0">
                 <a:solidFill>
                   <a:srgbClr val="40708B"/>
                 </a:solidFill>
@@ -6307,21 +6629,21 @@
                 <a:ea typeface="Microsoft YaHei"/>
                 <a:cs typeface="Microsoft YaHei"/>
               </a:rPr>
-              <a:t>已有</a:t>
-            </a:r>
-          </a:p>
-        </p:txBody>
-      </p:sp>
-      <p:sp>
-        <p:nvSpPr>
-          <p:cNvPr id="40" name="TextBox 39"/>
-          <p:cNvSpPr txBox="1"/>
-          <p:nvPr/>
-        </p:nvSpPr>
-        <p:spPr>
-          <a:xfrm>
-            <a:off x="4242816" y="4206240"/>
-            <a:ext cx="6412687" cy="201168"/>
+              <a:t>[ 已就绪 ]</a:t>
+            </a:r>
+          </a:p>
+        </p:txBody>
+      </p:sp>
+      <p:sp>
+        <p:nvSpPr>
+          <p:cNvPr id="48" name="TextBox 47"/>
+          <p:cNvSpPr txBox="1"/>
+          <p:nvPr/>
+        </p:nvSpPr>
+        <p:spPr>
+          <a:xfrm>
+            <a:off x="2871216" y="4041648"/>
+            <a:ext cx="8570671" cy="182880"/>
           </a:xfrm>
           <a:prstGeom prst="rect">
             <a:avLst/>
@@ -6346,7 +6668,7 @@
               </a:spcAft>
             </a:pPr>
             <a:r>
-              <a:rPr sz="950" b="0">
+              <a:rPr sz="900" b="0">
                 <a:solidFill>
                   <a:srgbClr val="1B4D69"/>
                 </a:solidFill>
@@ -6354,34 +6676,41 @@
                 <a:ea typeface="Microsoft YaHei"/>
                 <a:cs typeface="Microsoft YaHei"/>
               </a:rPr>
-              <a:t>一个 kernel 怎么写</a:t>
-            </a:r>
-          </a:p>
-        </p:txBody>
-      </p:sp>
-      <p:sp>
-        <p:nvSpPr>
-          <p:cNvPr id="41" name="TextBox 40"/>
-          <p:cNvSpPr txBox="1"/>
-          <p:nvPr/>
-        </p:nvSpPr>
-        <p:spPr>
-          <a:xfrm>
-            <a:off x="4242816" y="4005072"/>
-            <a:ext cx="1920240" cy="182880"/>
-          </a:xfrm>
-          <a:prstGeom prst="rect">
-            <a:avLst/>
-          </a:prstGeom>
-          <a:noFill/>
-        </p:spPr>
-        <p:txBody>
-          <a:bodyPr wrap="square" anchor="ctr" lIns="0" tIns="0" rIns="0" bIns="0">
-            <a:noAutofit/>
-          </a:bodyPr>
-          <a:lstStyle/>
-          <a:p>
-            <a:pPr algn="l" latinLnBrk="0">
+              <a:t>聚焦单个算子内核（Kernel）的极致代码实现</a:t>
+            </a:r>
+          </a:p>
+        </p:txBody>
+      </p:sp>
+      <p:sp>
+        <p:nvSpPr>
+          <p:cNvPr id="49" name="Rounded Rectangle 48"/>
+          <p:cNvSpPr/>
+          <p:nvPr/>
+        </p:nvSpPr>
+        <p:spPr>
+          <a:xfrm>
+            <a:off x="1188720" y="3858768"/>
+            <a:ext cx="2125097" cy="164592"/>
+          </a:xfrm>
+          <a:prstGeom prst="roundRect">
+            <a:avLst>
+              <a:gd name="adj" fmla="val 50000"/>
+            </a:avLst>
+          </a:prstGeom>
+          <a:solidFill>
+            <a:srgbClr val="FBE6D4"/>
+          </a:solidFill>
+          <a:ln>
+            <a:noFill/>
+          </a:ln>
+        </p:spPr>
+        <p:txBody>
+          <a:bodyPr rtlCol="0" anchor="ctr" wrap="square" lIns="36576" tIns="0" rIns="36576" bIns="0">
+            <a:noAutofit/>
+          </a:bodyPr>
+          <a:lstStyle/>
+          <a:p>
+            <a:pPr algn="ctr" latinLnBrk="0">
               <a:lnSpc>
                 <a:spcPct val="100000"/>
               </a:lnSpc>
@@ -6395,74 +6724,81 @@
             <a:r>
               <a:rPr sz="850" b="0">
                 <a:solidFill>
+                  <a:srgbClr val="C2570A"/>
+                </a:solidFill>
+                <a:latin typeface="Microsoft YaHei"/>
+                <a:ea typeface="Microsoft YaHei"/>
+                <a:cs typeface="Microsoft YaHei"/>
+              </a:rPr>
+              <a:t>↓　下发：算子融合规范（契约）</a:t>
+            </a:r>
+          </a:p>
+        </p:txBody>
+      </p:sp>
+      <p:sp>
+        <p:nvSpPr>
+          <p:cNvPr id="50" name="Rounded Rectangle 49"/>
+          <p:cNvSpPr/>
+          <p:nvPr/>
+        </p:nvSpPr>
+        <p:spPr>
+          <a:xfrm>
+            <a:off x="3551561" y="3858768"/>
+            <a:ext cx="2150096" cy="164592"/>
+          </a:xfrm>
+          <a:prstGeom prst="roundRect">
+            <a:avLst>
+              <a:gd name="adj" fmla="val 50000"/>
+            </a:avLst>
+          </a:prstGeom>
+          <a:solidFill>
+            <a:srgbClr val="DEEDFA"/>
+          </a:solidFill>
+          <a:ln>
+            <a:noFill/>
+          </a:ln>
+        </p:spPr>
+        <p:txBody>
+          <a:bodyPr rtlCol="0" anchor="ctr" wrap="square" lIns="36576" tIns="0" rIns="36576" bIns="0">
+            <a:noAutofit/>
+          </a:bodyPr>
+          <a:lstStyle/>
+          <a:p>
+            <a:pPr algn="ctr" latinLnBrk="0">
+              <a:lnSpc>
+                <a:spcPct val="100000"/>
+              </a:lnSpc>
+              <a:spcBef>
+                <a:spcPts val="0"/>
+              </a:spcBef>
+              <a:spcAft>
+                <a:spcPts val="0"/>
+              </a:spcAft>
+            </a:pPr>
+            <a:r>
+              <a:rPr sz="850" b="0">
+                <a:solidFill>
                   <a:srgbClr val="40708B"/>
                 </a:solidFill>
                 <a:latin typeface="Microsoft YaHei"/>
                 <a:ea typeface="Microsoft YaHei"/>
                 <a:cs typeface="Microsoft YaHei"/>
               </a:rPr>
-              <a:t>↓　融合契约</a:t>
-            </a:r>
-          </a:p>
-        </p:txBody>
-      </p:sp>
-      <p:sp>
-        <p:nvSpPr>
-          <p:cNvPr id="42" name="TextBox 41"/>
-          <p:cNvSpPr txBox="1"/>
-          <p:nvPr/>
-        </p:nvSpPr>
-        <p:spPr>
-          <a:xfrm>
-            <a:off x="6254496" y="4005072"/>
-            <a:ext cx="1920240" cy="182880"/>
-          </a:xfrm>
-          <a:prstGeom prst="rect">
-            <a:avLst/>
-          </a:prstGeom>
-          <a:noFill/>
-        </p:spPr>
-        <p:txBody>
-          <a:bodyPr wrap="square" anchor="ctr" lIns="0" tIns="0" rIns="0" bIns="0">
-            <a:noAutofit/>
-          </a:bodyPr>
-          <a:lstStyle/>
-          <a:p>
-            <a:pPr algn="l" latinLnBrk="0">
-              <a:lnSpc>
-                <a:spcPct val="100000"/>
-              </a:lnSpc>
-              <a:spcBef>
-                <a:spcPts val="0"/>
-              </a:spcBef>
-              <a:spcAft>
-                <a:spcPts val="0"/>
-              </a:spcAft>
-            </a:pPr>
-            <a:r>
-              <a:rPr sz="850" b="0">
-                <a:solidFill>
-                  <a:srgbClr val="40708B"/>
-                </a:solidFill>
-                <a:latin typeface="Microsoft YaHei"/>
-                <a:ea typeface="Microsoft YaHei"/>
-                <a:cs typeface="Microsoft YaHei"/>
-              </a:rPr>
-              <a:t>↑　新内核 + 实测代价</a:t>
+              <a:t>↑　反馈：新算子内核 + 实测耗时</a:t>
             </a:r>
           </a:p>
         </p:txBody>
       </p:sp>
       <p:cxnSp>
         <p:nvCxnSpPr>
-          <p:cNvPr id="43" name="Connector 42"/>
+          <p:cNvPr id="51" name="Connector 50"/>
           <p:cNvCxnSpPr/>
           <p:nvPr/>
         </p:nvCxnSpPr>
         <p:spPr>
           <a:xfrm>
-            <a:off x="2578608" y="4654296"/>
-            <a:ext cx="9064447" cy="0"/>
+            <a:off x="987552" y="4434840"/>
+            <a:ext cx="10655503" cy="0"/>
           </a:xfrm>
           <a:prstGeom prst="line">
             <a:avLst/>
@@ -6477,14 +6813,14 @@
       </p:cxnSp>
       <p:sp>
         <p:nvSpPr>
-          <p:cNvPr id="44" name="Rectangle 43"/>
+          <p:cNvPr id="52" name="Rectangle 51"/>
           <p:cNvSpPr/>
           <p:nvPr/>
         </p:nvSpPr>
         <p:spPr>
           <a:xfrm>
-            <a:off x="2578608" y="4535424"/>
-            <a:ext cx="2651760" cy="237744"/>
+            <a:off x="987552" y="4334256"/>
+            <a:ext cx="2397760" cy="201168"/>
           </a:xfrm>
           <a:prstGeom prst="rect">
             <a:avLst/>
@@ -6506,14 +6842,14 @@
       </p:sp>
       <p:sp>
         <p:nvSpPr>
-          <p:cNvPr id="45" name="TextBox 44"/>
-          <p:cNvSpPr txBox="1"/>
-          <p:nvPr/>
-        </p:nvSpPr>
-        <p:spPr>
-          <a:xfrm>
-            <a:off x="2578608" y="4535424"/>
-            <a:ext cx="2651760" cy="237744"/>
+          <p:cNvPr id="53" name="TextBox 52"/>
+          <p:cNvSpPr txBox="1"/>
+          <p:nvPr/>
+        </p:nvSpPr>
+        <p:spPr>
+          <a:xfrm>
+            <a:off x="987552" y="4334256"/>
+            <a:ext cx="2397760" cy="201168"/>
           </a:xfrm>
           <a:prstGeom prst="rect">
             <a:avLst/>
@@ -6546,21 +6882,21 @@
                 <a:ea typeface="Microsoft YaHei"/>
                 <a:cs typeface="Microsoft YaHei"/>
               </a:rPr>
-              <a:t>↓　候选（带尺度标签）</a:t>
-            </a:r>
-          </a:p>
-        </p:txBody>
-      </p:sp>
-      <p:sp>
-        <p:nvSpPr>
-          <p:cNvPr id="46" name="Rectangle 45"/>
+              <a:t>↓　提交候选方案（附带层级标签）</a:t>
+            </a:r>
+          </a:p>
+        </p:txBody>
+      </p:sp>
+      <p:sp>
+        <p:nvSpPr>
+          <p:cNvPr id="54" name="Rectangle 53"/>
           <p:cNvSpPr/>
           <p:nvPr/>
         </p:nvSpPr>
         <p:spPr>
           <a:xfrm>
-            <a:off x="5596128" y="4535424"/>
-            <a:ext cx="2651760" cy="237744"/>
+            <a:off x="5010912" y="4334256"/>
+            <a:ext cx="2524760" cy="201168"/>
           </a:xfrm>
           <a:prstGeom prst="rect">
             <a:avLst/>
@@ -6582,14 +6918,14 @@
       </p:sp>
       <p:sp>
         <p:nvSpPr>
-          <p:cNvPr id="47" name="TextBox 46"/>
-          <p:cNvSpPr txBox="1"/>
-          <p:nvPr/>
-        </p:nvSpPr>
-        <p:spPr>
-          <a:xfrm>
-            <a:off x="5596128" y="4535424"/>
-            <a:ext cx="2651760" cy="237744"/>
+          <p:cNvPr id="55" name="TextBox 54"/>
+          <p:cNvSpPr txBox="1"/>
+          <p:nvPr/>
+        </p:nvSpPr>
+        <p:spPr>
+          <a:xfrm>
+            <a:off x="5010912" y="4334256"/>
+            <a:ext cx="2524760" cy="201168"/>
           </a:xfrm>
           <a:prstGeom prst="rect">
             <a:avLst/>
@@ -6622,21 +6958,21 @@
                 <a:ea typeface="Microsoft YaHei"/>
                 <a:cs typeface="Microsoft YaHei"/>
               </a:rPr>
-              <a:t>↑　淘汰：带原因退回</a:t>
-            </a:r>
-          </a:p>
-        </p:txBody>
-      </p:sp>
-      <p:sp>
-        <p:nvSpPr>
-          <p:cNvPr id="48" name="Rectangle 47"/>
+              <a:t>↑　淘汰打回：附带失败原因退回重改</a:t>
+            </a:r>
+          </a:p>
+        </p:txBody>
+      </p:sp>
+      <p:sp>
+        <p:nvSpPr>
+          <p:cNvPr id="56" name="Rectangle 55"/>
           <p:cNvSpPr/>
           <p:nvPr/>
         </p:nvSpPr>
         <p:spPr>
           <a:xfrm>
-            <a:off x="950976" y="4809744"/>
-            <a:ext cx="10692079" cy="1207008"/>
+            <a:off x="804672" y="4700016"/>
+            <a:ext cx="10838383" cy="1335024"/>
           </a:xfrm>
           <a:prstGeom prst="rect">
             <a:avLst/>
@@ -6658,14 +6994,14 @@
       </p:sp>
       <p:sp>
         <p:nvSpPr>
-          <p:cNvPr id="49" name="Rectangle 48"/>
+          <p:cNvPr id="57" name="Rectangle 56"/>
           <p:cNvSpPr/>
           <p:nvPr/>
         </p:nvSpPr>
         <p:spPr>
           <a:xfrm>
-            <a:off x="950976" y="4809744"/>
-            <a:ext cx="64008" cy="1207008"/>
+            <a:off x="804672" y="4700016"/>
+            <a:ext cx="54864" cy="1335024"/>
           </a:xfrm>
           <a:prstGeom prst="rect">
             <a:avLst/>
@@ -6687,22 +7023,29 @@
       </p:sp>
       <p:sp>
         <p:nvSpPr>
-          <p:cNvPr id="50" name="TextBox 49"/>
-          <p:cNvSpPr txBox="1"/>
-          <p:nvPr/>
-        </p:nvSpPr>
-        <p:spPr>
-          <a:xfrm>
-            <a:off x="1170432" y="4882896"/>
-            <a:ext cx="1188720" cy="1060704"/>
-          </a:xfrm>
-          <a:prstGeom prst="rect">
-            <a:avLst/>
-          </a:prstGeom>
-          <a:noFill/>
-        </p:spPr>
-        <p:txBody>
-          <a:bodyPr wrap="square" anchor="ctr" lIns="0" tIns="0" rIns="0" bIns="0">
+          <p:cNvPr id="58" name="Rounded Rectangle 57"/>
+          <p:cNvSpPr/>
+          <p:nvPr/>
+        </p:nvSpPr>
+        <p:spPr>
+          <a:xfrm>
+            <a:off x="987552" y="4581144"/>
+            <a:ext cx="3063453" cy="237744"/>
+          </a:xfrm>
+          <a:prstGeom prst="roundRect">
+            <a:avLst>
+              <a:gd name="adj" fmla="val 50000"/>
+            </a:avLst>
+          </a:prstGeom>
+          <a:solidFill>
+            <a:srgbClr val="0F62CE"/>
+          </a:solidFill>
+          <a:ln>
+            <a:noFill/>
+          </a:ln>
+        </p:spPr>
+        <p:txBody>
+          <a:bodyPr rtlCol="0" anchor="ctr" wrap="square" lIns="146304" tIns="0" rIns="109728" bIns="0">
             <a:noAutofit/>
           </a:bodyPr>
           <a:lstStyle/>
@@ -6715,13 +7058,13 @@
                 <a:spcPts val="0"/>
               </a:spcBef>
               <a:spcAft>
-                <a:spcPts val="300"/>
-              </a:spcAft>
-            </a:pPr>
-            <a:r>
-              <a:rPr sz="1400" b="1">
-                <a:solidFill>
-                  <a:srgbClr val="0A2B45"/>
+                <a:spcPts val="0"/>
+              </a:spcAft>
+            </a:pPr>
+            <a:r>
+              <a:rPr sz="1100" b="1">
+                <a:solidFill>
+                  <a:srgbClr val="FFFFFF"/>
                 </a:solidFill>
                 <a:latin typeface="Microsoft YaHei"/>
                 <a:ea typeface="Microsoft YaHei"/>
@@ -6729,43 +7072,30 @@
               </a:rPr>
               <a:t>判决层</a:t>
             </a:r>
-          </a:p>
-          <a:p>
-            <a:pPr algn="l" latinLnBrk="0">
-              <a:lnSpc>
-                <a:spcPct val="100000"/>
-              </a:lnSpc>
-              <a:spcBef>
-                <a:spcPts val="0"/>
-              </a:spcBef>
-              <a:spcAft>
-                <a:spcPts val="0"/>
-              </a:spcAft>
-            </a:pPr>
-            <a:r>
-              <a:rPr sz="900" b="0">
-                <a:solidFill>
-                  <a:srgbClr val="40708B"/>
-                </a:solidFill>
-                <a:latin typeface="Microsoft YaHei"/>
-                <a:ea typeface="Microsoft YaHei"/>
-                <a:cs typeface="Microsoft YaHei"/>
-              </a:rPr>
-              <a:t>不含模型 · 真机实测</a:t>
-            </a:r>
-          </a:p>
-        </p:txBody>
-      </p:sp>
-      <p:sp>
-        <p:nvSpPr>
-          <p:cNvPr id="51" name="Rectangle 50"/>
+            <a:r>
+              <a:rPr sz="950" b="0">
+                <a:solidFill>
+                  <a:srgbClr val="F2F8FD"/>
+                </a:solidFill>
+                <a:latin typeface="Microsoft YaHei"/>
+                <a:ea typeface="Microsoft YaHei"/>
+                <a:cs typeface="Microsoft YaHei"/>
+              </a:rPr>
+              <a:t>　规则驱动（无大模型） · 真机实测终审</a:t>
+            </a:r>
+          </a:p>
+        </p:txBody>
+      </p:sp>
+      <p:sp>
+        <p:nvSpPr>
+          <p:cNvPr id="59" name="Rectangle 58"/>
           <p:cNvSpPr/>
           <p:nvPr/>
         </p:nvSpPr>
         <p:spPr>
           <a:xfrm>
-            <a:off x="2578608" y="4901183"/>
-            <a:ext cx="2377440" cy="1024128"/>
+            <a:off x="987552" y="4828031"/>
+            <a:ext cx="3454191" cy="1170432"/>
           </a:xfrm>
           <a:prstGeom prst="rect">
             <a:avLst/>
@@ -6789,14 +7119,14 @@
       </p:sp>
       <p:sp>
         <p:nvSpPr>
-          <p:cNvPr id="52" name="TextBox 51"/>
-          <p:cNvSpPr txBox="1"/>
-          <p:nvPr/>
-        </p:nvSpPr>
-        <p:spPr>
-          <a:xfrm>
-            <a:off x="2761488" y="4956047"/>
-            <a:ext cx="2048256" cy="914400"/>
+          <p:cNvPr id="60" name="TextBox 59"/>
+          <p:cNvSpPr txBox="1"/>
+          <p:nvPr/>
+        </p:nvSpPr>
+        <p:spPr>
+          <a:xfrm>
+            <a:off x="1188720" y="4882895"/>
+            <a:ext cx="3088431" cy="1060704"/>
           </a:xfrm>
           <a:prstGeom prst="rect">
             <a:avLst/>
@@ -6817,7 +7147,7 @@
                 <a:spcPts val="0"/>
               </a:spcBef>
               <a:spcAft>
-                <a:spcPts val="400"/>
+                <a:spcPts val="500"/>
               </a:spcAft>
             </a:pPr>
             <a:r>
@@ -6829,7 +7159,7 @@
                 <a:ea typeface="Microsoft YaHei"/>
                 <a:cs typeface="Microsoft YaHei"/>
               </a:rPr>
-              <a:t>仿真 · 只淘汰不放行</a:t>
+              <a:t>仿真器 · 仅做初筛淘汰，不作准入放行</a:t>
             </a:r>
           </a:p>
           <a:p>
@@ -6853,7 +7183,7 @@
                 <a:ea typeface="Microsoft YaHei"/>
                 <a:cs typeface="Microsoft YaHei"/>
               </a:rPr>
-              <a:t>筛掉明显差的候选</a:t>
+              <a:t>快速筛除明显劣化的候选方案</a:t>
             </a:r>
           </a:p>
           <a:p>
@@ -6877,21 +7207,21 @@
                 <a:ea typeface="Microsoft YaHei"/>
                 <a:cs typeface="Microsoft YaHei"/>
               </a:rPr>
-              <a:t>（主要用于引擎候选）</a:t>
-            </a:r>
-          </a:p>
-        </p:txBody>
-      </p:sp>
-      <p:sp>
-        <p:nvSpPr>
-          <p:cNvPr id="53" name="TextBox 52"/>
-          <p:cNvSpPr txBox="1"/>
-          <p:nvPr/>
-        </p:nvSpPr>
-        <p:spPr>
-          <a:xfrm>
-            <a:off x="4956048" y="5193792"/>
-            <a:ext cx="768096" cy="219456"/>
+              <a:t>（主要用于引擎层策略初筛）</a:t>
+            </a:r>
+          </a:p>
+        </p:txBody>
+      </p:sp>
+      <p:sp>
+        <p:nvSpPr>
+          <p:cNvPr id="61" name="TextBox 60"/>
+          <p:cNvSpPr txBox="1"/>
+          <p:nvPr/>
+        </p:nvSpPr>
+        <p:spPr>
+          <a:xfrm>
+            <a:off x="4441743" y="5193792"/>
+            <a:ext cx="786384" cy="219456"/>
           </a:xfrm>
           <a:prstGeom prst="rect">
             <a:avLst/>
@@ -6924,21 +7254,21 @@
                 <a:ea typeface="Microsoft YaHei"/>
                 <a:cs typeface="Microsoft YaHei"/>
               </a:rPr>
-              <a:t>──→　送测</a:t>
-            </a:r>
-          </a:p>
-        </p:txBody>
-      </p:sp>
-      <p:sp>
-        <p:nvSpPr>
-          <p:cNvPr id="54" name="TextBox 53"/>
-          <p:cNvSpPr txBox="1"/>
-          <p:nvPr/>
-        </p:nvSpPr>
-        <p:spPr>
-          <a:xfrm>
-            <a:off x="4956048" y="5431536"/>
-            <a:ext cx="768096" cy="219456"/>
+              <a:t>→　初筛送测</a:t>
+            </a:r>
+          </a:p>
+        </p:txBody>
+      </p:sp>
+      <p:sp>
+        <p:nvSpPr>
+          <p:cNvPr id="62" name="TextBox 61"/>
+          <p:cNvSpPr txBox="1"/>
+          <p:nvPr/>
+        </p:nvSpPr>
+        <p:spPr>
+          <a:xfrm>
+            <a:off x="4441743" y="5431536"/>
+            <a:ext cx="786384" cy="219456"/>
           </a:xfrm>
           <a:prstGeom prst="rect">
             <a:avLst/>
@@ -6971,21 +7301,21 @@
                 <a:ea typeface="Microsoft YaHei"/>
                 <a:cs typeface="Microsoft YaHei"/>
               </a:rPr>
-              <a:t>←──　校准</a:t>
-            </a:r>
-          </a:p>
-        </p:txBody>
-      </p:sp>
-      <p:sp>
-        <p:nvSpPr>
-          <p:cNvPr id="55" name="Rectangle 54"/>
+              <a:t>←　实测校准</a:t>
+            </a:r>
+          </a:p>
+        </p:txBody>
+      </p:sp>
+      <p:sp>
+        <p:nvSpPr>
+          <p:cNvPr id="63" name="Rectangle 62"/>
           <p:cNvSpPr/>
           <p:nvPr/>
         </p:nvSpPr>
         <p:spPr>
           <a:xfrm>
-            <a:off x="5724144" y="4901183"/>
-            <a:ext cx="5918911" cy="1024128"/>
+            <a:off x="5228127" y="4828031"/>
+            <a:ext cx="6414927" cy="1170432"/>
           </a:xfrm>
           <a:prstGeom prst="rect">
             <a:avLst/>
@@ -7009,14 +7339,14 @@
       </p:sp>
       <p:sp>
         <p:nvSpPr>
-          <p:cNvPr id="56" name="TextBox 55"/>
-          <p:cNvSpPr txBox="1"/>
-          <p:nvPr/>
-        </p:nvSpPr>
-        <p:spPr>
-          <a:xfrm>
-            <a:off x="5925312" y="4937759"/>
-            <a:ext cx="5553151" cy="219456"/>
+          <p:cNvPr id="64" name="TextBox 63"/>
+          <p:cNvSpPr txBox="1"/>
+          <p:nvPr/>
+        </p:nvSpPr>
+        <p:spPr>
+          <a:xfrm>
+            <a:off x="5429295" y="4864607"/>
+            <a:ext cx="6049167" cy="201168"/>
           </a:xfrm>
           <a:prstGeom prst="rect">
             <a:avLst/>
@@ -7049,21 +7379,21 @@
                 <a:ea typeface="Microsoft YaHei"/>
                 <a:cs typeface="Microsoft YaHei"/>
               </a:rPr>
-              <a:t>真机 · 唯一的判决</a:t>
-            </a:r>
-          </a:p>
-        </p:txBody>
-      </p:sp>
-      <p:sp>
-        <p:nvSpPr>
-          <p:cNvPr id="57" name="TextBox 56"/>
-          <p:cNvSpPr txBox="1"/>
-          <p:nvPr/>
-        </p:nvSpPr>
-        <p:spPr>
-          <a:xfrm>
-            <a:off x="5925312" y="5175503"/>
-            <a:ext cx="713232" cy="201168"/>
+              <a:t>真机实测 · 唯一准入终审（一票否决）</a:t>
+            </a:r>
+          </a:p>
+        </p:txBody>
+      </p:sp>
+      <p:sp>
+        <p:nvSpPr>
+          <p:cNvPr id="65" name="TextBox 64"/>
+          <p:cNvSpPr txBox="1"/>
+          <p:nvPr/>
+        </p:nvSpPr>
+        <p:spPr>
+          <a:xfrm>
+            <a:off x="5429295" y="5065775"/>
+            <a:ext cx="859536" cy="182880"/>
           </a:xfrm>
           <a:prstGeom prst="rect">
             <a:avLst/>
@@ -7092,25 +7422,25 @@
                 <a:solidFill>
                   <a:srgbClr val="0F62CE"/>
                 </a:solidFill>
-                <a:latin typeface="Consolas"/>
-                <a:ea typeface="Microsoft YaHei"/>
-                <a:cs typeface="Microsoft YaHei"/>
-              </a:rPr>
-              <a:t>算子</a:t>
-            </a:r>
-          </a:p>
-        </p:txBody>
-      </p:sp>
-      <p:sp>
-        <p:nvSpPr>
-          <p:cNvPr id="58" name="TextBox 57"/>
-          <p:cNvSpPr txBox="1"/>
-          <p:nvPr/>
-        </p:nvSpPr>
-        <p:spPr>
-          <a:xfrm>
-            <a:off x="6638544" y="5175503"/>
-            <a:ext cx="4803343" cy="201168"/>
+                <a:latin typeface="Microsoft YaHei"/>
+                <a:ea typeface="Microsoft YaHei"/>
+                <a:cs typeface="Microsoft YaHei"/>
+              </a:rPr>
+              <a:t>算子级</a:t>
+            </a:r>
+          </a:p>
+        </p:txBody>
+      </p:sp>
+      <p:sp>
+        <p:nvSpPr>
+          <p:cNvPr id="66" name="TextBox 65"/>
+          <p:cNvSpPr txBox="1"/>
+          <p:nvPr/>
+        </p:nvSpPr>
+        <p:spPr>
+          <a:xfrm>
+            <a:off x="6325407" y="5065775"/>
+            <a:ext cx="5116479" cy="182880"/>
           </a:xfrm>
           <a:prstGeom prst="rect">
             <a:avLst/>
@@ -7143,21 +7473,21 @@
                 <a:ea typeface="Microsoft YaHei"/>
                 <a:cs typeface="Microsoft YaHei"/>
               </a:rPr>
-              <a:t>L0 / L1 / Bench，按引擎给的形状测</a:t>
-            </a:r>
-          </a:p>
-        </p:txBody>
-      </p:sp>
-      <p:sp>
-        <p:nvSpPr>
-          <p:cNvPr id="59" name="TextBox 58"/>
-          <p:cNvSpPr txBox="1"/>
-          <p:nvPr/>
-        </p:nvSpPr>
-        <p:spPr>
-          <a:xfrm>
-            <a:off x="5925312" y="5358383"/>
-            <a:ext cx="713232" cy="201168"/>
+              <a:t>L0（编译）/ L1（精度）/ Bench（测速），严格按引擎下发的真实 Shape 评测</a:t>
+            </a:r>
+          </a:p>
+        </p:txBody>
+      </p:sp>
+      <p:sp>
+        <p:nvSpPr>
+          <p:cNvPr id="67" name="TextBox 66"/>
+          <p:cNvSpPr txBox="1"/>
+          <p:nvPr/>
+        </p:nvSpPr>
+        <p:spPr>
+          <a:xfrm>
+            <a:off x="5429295" y="5248655"/>
+            <a:ext cx="859536" cy="182880"/>
           </a:xfrm>
           <a:prstGeom prst="rect">
             <a:avLst/>
@@ -7186,25 +7516,25 @@
                 <a:solidFill>
                   <a:srgbClr val="0F62CE"/>
                 </a:solidFill>
-                <a:latin typeface="Consolas"/>
-                <a:ea typeface="Microsoft YaHei"/>
-                <a:cs typeface="Microsoft YaHei"/>
-              </a:rPr>
-              <a:t>图</a:t>
-            </a:r>
-          </a:p>
-        </p:txBody>
-      </p:sp>
-      <p:sp>
-        <p:nvSpPr>
-          <p:cNvPr id="60" name="TextBox 59"/>
-          <p:cNvSpPr txBox="1"/>
-          <p:nvPr/>
-        </p:nvSpPr>
-        <p:spPr>
-          <a:xfrm>
-            <a:off x="6638544" y="5358383"/>
-            <a:ext cx="4803343" cy="201168"/>
+                <a:latin typeface="Microsoft YaHei"/>
+                <a:ea typeface="Microsoft YaHei"/>
+                <a:cs typeface="Microsoft YaHei"/>
+              </a:rPr>
+              <a:t>计算图级</a:t>
+            </a:r>
+          </a:p>
+        </p:txBody>
+      </p:sp>
+      <p:sp>
+        <p:nvSpPr>
+          <p:cNvPr id="68" name="TextBox 67"/>
+          <p:cNvSpPr txBox="1"/>
+          <p:nvPr/>
+        </p:nvSpPr>
+        <p:spPr>
+          <a:xfrm>
+            <a:off x="6325407" y="5248655"/>
+            <a:ext cx="5116479" cy="182880"/>
           </a:xfrm>
           <a:prstGeom prst="rect">
             <a:avLst/>
@@ -7237,21 +7567,21 @@
                 <a:ea typeface="Microsoft YaHei"/>
                 <a:cs typeface="Microsoft YaHei"/>
               </a:rPr>
-              <a:t>整模型 A/B + 质量评测</a:t>
-            </a:r>
-          </a:p>
-        </p:txBody>
-      </p:sp>
-      <p:sp>
-        <p:nvSpPr>
-          <p:cNvPr id="61" name="TextBox 60"/>
-          <p:cNvSpPr txBox="1"/>
-          <p:nvPr/>
-        </p:nvSpPr>
-        <p:spPr>
-          <a:xfrm>
-            <a:off x="5925312" y="5541264"/>
-            <a:ext cx="713232" cy="201168"/>
+              <a:t>整模型端到端 A/B 性能压测 + 生成质量门禁评测</a:t>
+            </a:r>
+          </a:p>
+        </p:txBody>
+      </p:sp>
+      <p:sp>
+        <p:nvSpPr>
+          <p:cNvPr id="69" name="TextBox 68"/>
+          <p:cNvSpPr txBox="1"/>
+          <p:nvPr/>
+        </p:nvSpPr>
+        <p:spPr>
+          <a:xfrm>
+            <a:off x="5429295" y="5431536"/>
+            <a:ext cx="859536" cy="182880"/>
           </a:xfrm>
           <a:prstGeom prst="rect">
             <a:avLst/>
@@ -7280,25 +7610,25 @@
                 <a:solidFill>
                   <a:srgbClr val="0F62CE"/>
                 </a:solidFill>
-                <a:latin typeface="Consolas"/>
-                <a:ea typeface="Microsoft YaHei"/>
-                <a:cs typeface="Microsoft YaHei"/>
-              </a:rPr>
-              <a:t>引擎</a:t>
-            </a:r>
-          </a:p>
-        </p:txBody>
-      </p:sp>
-      <p:sp>
-        <p:nvSpPr>
-          <p:cNvPr id="62" name="TextBox 61"/>
-          <p:cNvSpPr txBox="1"/>
-          <p:nvPr/>
-        </p:nvSpPr>
-        <p:spPr>
-          <a:xfrm>
-            <a:off x="6638544" y="5541264"/>
-            <a:ext cx="4803343" cy="201168"/>
+                <a:latin typeface="Microsoft YaHei"/>
+                <a:ea typeface="Microsoft YaHei"/>
+                <a:cs typeface="Microsoft YaHei"/>
+              </a:rPr>
+              <a:t>引擎级</a:t>
+            </a:r>
+          </a:p>
+        </p:txBody>
+      </p:sp>
+      <p:sp>
+        <p:nvSpPr>
+          <p:cNvPr id="70" name="TextBox 69"/>
+          <p:cNvSpPr txBox="1"/>
+          <p:nvPr/>
+        </p:nvSpPr>
+        <p:spPr>
+          <a:xfrm>
+            <a:off x="6325407" y="5431536"/>
+            <a:ext cx="5116479" cy="548640"/>
           </a:xfrm>
           <a:prstGeom prst="rect">
             <a:avLst/>
@@ -7331,32 +7661,9 @@
                 <a:ea typeface="Microsoft YaHei"/>
                 <a:cs typeface="Microsoft YaHei"/>
               </a:rPr>
-              <a:t>流量回放 · 约束下吞吐与 p99 · 实测接受长度 · OOM 与抢占 · 长稳 · 多画像不退化</a:t>
-            </a:r>
-          </a:p>
-        </p:txBody>
-      </p:sp>
-      <p:sp>
-        <p:nvSpPr>
-          <p:cNvPr id="63" name="TextBox 62"/>
-          <p:cNvSpPr txBox="1"/>
-          <p:nvPr/>
-        </p:nvSpPr>
-        <p:spPr>
-          <a:xfrm>
-            <a:off x="5925312" y="5724144"/>
-            <a:ext cx="713232" cy="201168"/>
-          </a:xfrm>
-          <a:prstGeom prst="rect">
-            <a:avLst/>
-          </a:prstGeom>
-          <a:noFill/>
-        </p:spPr>
-        <p:txBody>
-          <a:bodyPr wrap="square" anchor="ctr" lIns="0" tIns="0" rIns="0" bIns="0">
-            <a:noAutofit/>
-          </a:bodyPr>
-          <a:lstStyle/>
+              <a:t>真实流量回放 · 约束下的吞吐与 P99 · 实测接受长度 · OOM 与抢占 · 长稳 · 多画像不退化</a:t>
+            </a:r>
+          </a:p>
           <a:p>
             <a:pPr algn="l" latinLnBrk="0">
               <a:lnSpc>
@@ -7370,40 +7677,17 @@
               </a:spcAft>
             </a:pPr>
             <a:r>
-              <a:rPr sz="900" b="1">
-                <a:solidFill>
-                  <a:srgbClr val="0F62CE"/>
-                </a:solidFill>
-                <a:latin typeface="Consolas"/>
-                <a:ea typeface="Microsoft YaHei"/>
-                <a:cs typeface="Microsoft YaHei"/>
-              </a:rPr>
-              <a:t>overlap</a:t>
-            </a:r>
-          </a:p>
-        </p:txBody>
-      </p:sp>
-      <p:sp>
-        <p:nvSpPr>
-          <p:cNvPr id="64" name="TextBox 63"/>
-          <p:cNvSpPr txBox="1"/>
-          <p:nvPr/>
-        </p:nvSpPr>
-        <p:spPr>
-          <a:xfrm>
-            <a:off x="6638544" y="5724144"/>
-            <a:ext cx="4803343" cy="201168"/>
-          </a:xfrm>
-          <a:prstGeom prst="rect">
-            <a:avLst/>
-          </a:prstGeom>
-          <a:noFill/>
-        </p:spPr>
-        <p:txBody>
-          <a:bodyPr wrap="square" anchor="ctr" lIns="0" tIns="0" rIns="0" bIns="0">
-            <a:noAutofit/>
-          </a:bodyPr>
-          <a:lstStyle/>
+              <a:rPr sz="900" b="0">
+                <a:solidFill>
+                  <a:srgbClr val="1B4D69"/>
+                </a:solidFill>
+                <a:latin typeface="Microsoft YaHei"/>
+                <a:ea typeface="Microsoft YaHei"/>
+                <a:cs typeface="Microsoft YaHei"/>
+              </a:rPr>
+              <a:t>重叠开关前后一致性校验：固定批次逐位一致，混合负载按质量门禁容差判定；</a:t>
+            </a:r>
+          </a:p>
           <a:p>
             <a:pPr algn="l" latinLnBrk="0">
               <a:lnSpc>
@@ -7425,21 +7709,21 @@
                 <a:ea typeface="Microsoft YaHei"/>
                 <a:cs typeface="Microsoft YaHei"/>
               </a:rPr>
-              <a:t>与关闭时输出一致 · 长压测抓竞态</a:t>
-            </a:r>
-          </a:p>
-        </p:txBody>
-      </p:sp>
-      <p:sp>
-        <p:nvSpPr>
-          <p:cNvPr id="65" name="Rectangle 64"/>
+              <a:t>高负载长稳压测排查并发竞态（Race Condition）</a:t>
+            </a:r>
+          </a:p>
+        </p:txBody>
+      </p:sp>
+      <p:sp>
+        <p:nvSpPr>
+          <p:cNvPr id="71" name="Rectangle 70"/>
           <p:cNvSpPr/>
           <p:nvPr/>
         </p:nvSpPr>
         <p:spPr>
           <a:xfrm>
-            <a:off x="950976" y="6071616"/>
-            <a:ext cx="10692079" cy="329184"/>
+            <a:off x="804672" y="6071616"/>
+            <a:ext cx="10838383" cy="310896"/>
           </a:xfrm>
           <a:prstGeom prst="rect">
             <a:avLst/>
@@ -7461,14 +7745,64 @@
       </p:sp>
       <p:sp>
         <p:nvSpPr>
-          <p:cNvPr id="66" name="TextBox 65"/>
-          <p:cNvSpPr txBox="1"/>
-          <p:nvPr/>
-        </p:nvSpPr>
-        <p:spPr>
-          <a:xfrm>
-            <a:off x="1225296" y="6071616"/>
-            <a:ext cx="10234879" cy="329184"/>
+          <p:cNvPr id="72" name="Rectangle 71"/>
+          <p:cNvSpPr/>
+          <p:nvPr/>
+        </p:nvSpPr>
+        <p:spPr>
+          <a:xfrm>
+            <a:off x="804672" y="6071616"/>
+            <a:ext cx="54864" cy="310896"/>
+          </a:xfrm>
+          <a:prstGeom prst="rect">
+            <a:avLst/>
+          </a:prstGeom>
+          <a:solidFill>
+            <a:srgbClr val="0F62CE"/>
+          </a:solidFill>
+          <a:ln>
+            <a:noFill/>
+          </a:ln>
+        </p:spPr>
+        <p:txBody>
+          <a:bodyPr rtlCol="0" anchor="ctr"/>
+          <a:lstStyle/>
+          <a:p>
+            <a:pPr algn="ctr"/>
+          </a:p>
+        </p:txBody>
+      </p:sp>
+      <p:cxnSp>
+        <p:nvCxnSpPr>
+          <p:cNvPr id="73" name="Connector 72"/>
+          <p:cNvCxnSpPr/>
+          <p:nvPr/>
+        </p:nvCxnSpPr>
+        <p:spPr>
+          <a:xfrm>
+            <a:off x="6223863" y="6126479"/>
+            <a:ext cx="0" cy="201169"/>
+          </a:xfrm>
+          <a:prstGeom prst="line">
+            <a:avLst/>
+          </a:prstGeom>
+          <a:ln w="9525">
+            <a:solidFill>
+              <a:srgbClr val="AFCEE1"/>
+            </a:solidFill>
+          </a:ln>
+        </p:spPr>
+      </p:cxnSp>
+      <p:sp>
+        <p:nvSpPr>
+          <p:cNvPr id="74" name="TextBox 73"/>
+          <p:cNvSpPr txBox="1"/>
+          <p:nvPr/>
+        </p:nvSpPr>
+        <p:spPr>
+          <a:xfrm>
+            <a:off x="1024128" y="6071616"/>
+            <a:ext cx="5144871" cy="310896"/>
           </a:xfrm>
           <a:prstGeom prst="rect">
             <a:avLst/>
@@ -7501,32 +7835,90 @@
                 <a:ea typeface="Microsoft YaHei"/>
                 <a:cs typeface="Microsoft YaHei"/>
               </a:rPr>
-              <a:t>通</a:t>
-            </a:r>
+              <a:t>闭环演进　</a:t>
+            </a:r>
+            <a:r>
+              <a:rPr sz="1050" b="0">
+                <a:solidFill>
+                  <a:srgbClr val="0A2B45"/>
+                </a:solidFill>
+                <a:latin typeface="Microsoft YaHei"/>
+                <a:ea typeface="Microsoft YaHei"/>
+                <a:cs typeface="Microsoft YaHei"/>
+              </a:rPr>
+              <a:t>验证通过即晋升为最新基线，回流目标层重新核算差距</a:t>
+            </a:r>
+          </a:p>
+        </p:txBody>
+      </p:sp>
+      <p:sp>
+        <p:nvSpPr>
+          <p:cNvPr id="75" name="TextBox 74"/>
+          <p:cNvSpPr txBox="1"/>
+          <p:nvPr/>
+        </p:nvSpPr>
+        <p:spPr>
+          <a:xfrm>
+            <a:off x="6443319" y="6071616"/>
+            <a:ext cx="5144871" cy="310896"/>
+          </a:xfrm>
+          <a:prstGeom prst="rect">
+            <a:avLst/>
+          </a:prstGeom>
+          <a:noFill/>
+        </p:spPr>
+        <p:txBody>
+          <a:bodyPr wrap="square" anchor="ctr" lIns="0" tIns="0" rIns="0" bIns="0">
+            <a:noAutofit/>
+          </a:bodyPr>
+          <a:lstStyle/>
+          <a:p>
+            <a:pPr algn="l" latinLnBrk="0">
+              <a:lnSpc>
+                <a:spcPct val="100000"/>
+              </a:lnSpc>
+              <a:spcBef>
+                <a:spcPts val="0"/>
+              </a:spcBef>
+              <a:spcAft>
+                <a:spcPts val="0"/>
+              </a:spcAft>
+            </a:pPr>
             <a:r>
               <a:rPr sz="1100" b="1">
                 <a:solidFill>
+                  <a:srgbClr val="0F62CE"/>
+                </a:solidFill>
+                <a:latin typeface="Microsoft YaHei"/>
+                <a:ea typeface="Microsoft YaHei"/>
+                <a:cs typeface="Microsoft YaHei"/>
+              </a:rPr>
+              <a:t>收敛条件　</a:t>
+            </a:r>
+            <a:r>
+              <a:rPr sz="1050" b="0">
+                <a:solidFill>
                   <a:srgbClr val="0A2B45"/>
                 </a:solidFill>
                 <a:latin typeface="Microsoft YaHei"/>
                 <a:ea typeface="Microsoft YaHei"/>
                 <a:cs typeface="Microsoft YaHei"/>
               </a:rPr>
-              <a:t>过：成为新基线，回目标层重算差距　·　提不出跨过噪声门槛的候选即收敛</a:t>
-            </a:r>
-          </a:p>
-        </p:txBody>
-      </p:sp>
-      <p:sp>
-        <p:nvSpPr>
-          <p:cNvPr id="67" name="Freeform 66"/>
+              <a:t>候选收益无法跨越系统噪声门限时，迭代自动收敛终止</a:t>
+            </a:r>
+          </a:p>
+        </p:txBody>
+      </p:sp>
+      <p:sp>
+        <p:nvSpPr>
+          <p:cNvPr id="76" name="Freeform 75"/>
           <p:cNvSpPr/>
           <p:nvPr/>
         </p:nvSpPr>
         <p:spPr>
           <a:xfrm>
-            <a:off x="640080" y="1645920"/>
-            <a:ext cx="310896" cy="4590287"/>
+            <a:off x="603504" y="1664207"/>
+            <a:ext cx="201168" cy="4562857"/>
           </a:xfrm>
           <a:custGeom>
             <a:avLst/>
@@ -7535,12 +7927,12 @@
             <a:cxnLst/>
             <a:rect l="l" t="t" r="r" b="b"/>
             <a:pathLst>
-              <a:path w="310896" h="4590287">
+              <a:path w="201168" h="4562857">
                 <a:moveTo>
-                  <a:pt x="310896" y="4590287"/>
+                  <a:pt x="201168" y="4562857"/>
                 </a:moveTo>
                 <a:lnTo>
-                  <a:pt x="0" y="4590287"/>
+                  <a:pt x="0" y="4562857"/>
                 </a:lnTo>
                 <a:lnTo>
                   <a:pt x="0" y="0"/>
@@ -7565,14 +7957,14 @@
       </p:sp>
       <p:cxnSp>
         <p:nvCxnSpPr>
-          <p:cNvPr id="68" name="Connector 67"/>
+          <p:cNvPr id="77" name="Connector 76"/>
           <p:cNvCxnSpPr/>
           <p:nvPr/>
         </p:nvCxnSpPr>
         <p:spPr>
           <a:xfrm>
-            <a:off x="640080" y="1645920"/>
-            <a:ext cx="292608" cy="0"/>
+            <a:off x="603504" y="1664207"/>
+            <a:ext cx="182880" cy="0"/>
           </a:xfrm>
           <a:prstGeom prst="line">
             <a:avLst/>
@@ -7587,13 +7979,13 @@
       </p:cxnSp>
       <p:sp>
         <p:nvSpPr>
-          <p:cNvPr id="69" name="TextBox 68"/>
-          <p:cNvSpPr txBox="1"/>
-          <p:nvPr/>
-        </p:nvSpPr>
-        <p:spPr>
-          <a:xfrm>
-            <a:off x="548640" y="6455664"/>
+          <p:cNvPr id="78" name="TextBox 77"/>
+          <p:cNvSpPr txBox="1"/>
+          <p:nvPr/>
+        </p:nvSpPr>
+        <p:spPr>
+          <a:xfrm>
+            <a:off x="548640" y="6419088"/>
             <a:ext cx="8595360" cy="256032"/>
           </a:xfrm>
           <a:prstGeom prst="rect">
@@ -7634,7 +8026,7 @@
       </p:sp>
       <p:sp>
         <p:nvSpPr>
-          <p:cNvPr id="70" name="TextBox 69"/>
+          <p:cNvPr id="79" name="TextBox 78"/>
           <p:cNvSpPr txBox="1"/>
           <p:nvPr/>
         </p:nvSpPr>

--- a/slides/m100_agent_final_deck.pptx
+++ b/slides/m100_agent_final_deck.pptx
@@ -13006,7 +13006,7 @@
                 <a:ea typeface="Microsoft YaHei"/>
                 <a:cs typeface="Microsoft YaHei"/>
               </a:rPr>
-              <a:t>M100 Agent： 总体方案</a:t>
+              <a:t>M100 Agent： 总体方案（写判分离 · 双层同构 · 跨层闭环）</a:t>
             </a:r>
           </a:p>
         </p:txBody>
@@ -13066,8 +13066,691 @@
         </p:nvSpPr>
         <p:spPr>
           <a:xfrm>
-            <a:off x="548640" y="1335024"/>
-            <a:ext cx="11094415" cy="2011680"/>
+            <a:off x="548640" y="1225296"/>
+            <a:ext cx="1554480" cy="475488"/>
+          </a:xfrm>
+          <a:prstGeom prst="rect">
+            <a:avLst/>
+          </a:prstGeom>
+          <a:solidFill>
+            <a:srgbClr val="F2F8FD"/>
+          </a:solidFill>
+          <a:ln>
+            <a:noFill/>
+          </a:ln>
+        </p:spPr>
+        <p:txBody>
+          <a:bodyPr rtlCol="0" anchor="ctr"/>
+          <a:lstStyle/>
+          <a:p>
+            <a:pPr algn="ctr"/>
+          </a:p>
+        </p:txBody>
+      </p:sp>
+      <p:sp>
+        <p:nvSpPr>
+          <p:cNvPr id="7" name="TextBox 6"/>
+          <p:cNvSpPr txBox="1"/>
+          <p:nvPr/>
+        </p:nvSpPr>
+        <p:spPr>
+          <a:xfrm>
+            <a:off x="694944" y="1261872"/>
+            <a:ext cx="1280160" cy="402336"/>
+          </a:xfrm>
+          <a:prstGeom prst="rect">
+            <a:avLst/>
+          </a:prstGeom>
+          <a:noFill/>
+        </p:spPr>
+        <p:txBody>
+          <a:bodyPr wrap="square" anchor="ctr" lIns="0" tIns="0" rIns="0" bIns="0">
+            <a:noAutofit/>
+          </a:bodyPr>
+          <a:lstStyle/>
+          <a:p>
+            <a:pPr algn="ctr" latinLnBrk="0">
+              <a:lnSpc>
+                <a:spcPct val="100000"/>
+              </a:lnSpc>
+              <a:spcBef>
+                <a:spcPts val="0"/>
+              </a:spcBef>
+              <a:spcAft>
+                <a:spcPts val="200"/>
+              </a:spcAft>
+            </a:pPr>
+            <a:r>
+              <a:rPr sz="1100" b="1">
+                <a:solidFill>
+                  <a:srgbClr val="0A2B45"/>
+                </a:solidFill>
+                <a:latin typeface="Microsoft YaHei"/>
+                <a:ea typeface="Microsoft YaHei"/>
+                <a:cs typeface="Microsoft YaHei"/>
+              </a:rPr>
+              <a:t>层级定位</a:t>
+            </a:r>
+          </a:p>
+        </p:txBody>
+      </p:sp>
+      <p:sp>
+        <p:nvSpPr>
+          <p:cNvPr id="8" name="Rectangle 7"/>
+          <p:cNvSpPr/>
+          <p:nvPr/>
+        </p:nvSpPr>
+        <p:spPr>
+          <a:xfrm>
+            <a:off x="2212848" y="1225296"/>
+            <a:ext cx="1792224" cy="475488"/>
+          </a:xfrm>
+          <a:prstGeom prst="rect">
+            <a:avLst/>
+          </a:prstGeom>
+          <a:solidFill>
+            <a:srgbClr val="F2F8FD"/>
+          </a:solidFill>
+          <a:ln>
+            <a:noFill/>
+          </a:ln>
+        </p:spPr>
+        <p:txBody>
+          <a:bodyPr rtlCol="0" anchor="ctr"/>
+          <a:lstStyle/>
+          <a:p>
+            <a:pPr algn="ctr"/>
+          </a:p>
+        </p:txBody>
+      </p:sp>
+      <p:sp>
+        <p:nvSpPr>
+          <p:cNvPr id="9" name="TextBox 8"/>
+          <p:cNvSpPr txBox="1"/>
+          <p:nvPr/>
+        </p:nvSpPr>
+        <p:spPr>
+          <a:xfrm>
+            <a:off x="2359152" y="1261872"/>
+            <a:ext cx="1517904" cy="402336"/>
+          </a:xfrm>
+          <a:prstGeom prst="rect">
+            <a:avLst/>
+          </a:prstGeom>
+          <a:noFill/>
+        </p:spPr>
+        <p:txBody>
+          <a:bodyPr wrap="square" anchor="ctr" lIns="0" tIns="0" rIns="0" bIns="0">
+            <a:noAutofit/>
+          </a:bodyPr>
+          <a:lstStyle/>
+          <a:p>
+            <a:pPr algn="ctr" latinLnBrk="0">
+              <a:lnSpc>
+                <a:spcPct val="100000"/>
+              </a:lnSpc>
+              <a:spcBef>
+                <a:spcPts val="0"/>
+              </a:spcBef>
+              <a:spcAft>
+                <a:spcPts val="200"/>
+              </a:spcAft>
+            </a:pPr>
+            <a:r>
+              <a:rPr sz="1100" b="1">
+                <a:solidFill>
+                  <a:srgbClr val="1B4D69"/>
+                </a:solidFill>
+                <a:latin typeface="Microsoft YaHei"/>
+                <a:ea typeface="Microsoft YaHei"/>
+                <a:cs typeface="Microsoft YaHei"/>
+              </a:rPr>
+              <a:t>① </a:t>
+            </a:r>
+            <a:r>
+              <a:rPr sz="1100" b="1">
+                <a:solidFill>
+                  <a:srgbClr val="0A2B45"/>
+                </a:solidFill>
+                <a:latin typeface="Microsoft YaHei"/>
+                <a:ea typeface="Microsoft YaHei"/>
+                <a:cs typeface="Microsoft YaHei"/>
+              </a:rPr>
+              <a:t>任务输入</a:t>
+            </a:r>
+          </a:p>
+        </p:txBody>
+      </p:sp>
+      <p:sp>
+        <p:nvSpPr>
+          <p:cNvPr id="10" name="Rectangle 9"/>
+          <p:cNvSpPr/>
+          <p:nvPr/>
+        </p:nvSpPr>
+        <p:spPr>
+          <a:xfrm>
+            <a:off x="4242816" y="1225296"/>
+            <a:ext cx="2670048" cy="475488"/>
+          </a:xfrm>
+          <a:prstGeom prst="rect">
+            <a:avLst/>
+          </a:prstGeom>
+          <a:solidFill>
+            <a:srgbClr val="FBE6D4"/>
+          </a:solidFill>
+          <a:ln>
+            <a:noFill/>
+          </a:ln>
+        </p:spPr>
+        <p:txBody>
+          <a:bodyPr rtlCol="0" anchor="ctr"/>
+          <a:lstStyle/>
+          <a:p>
+            <a:pPr algn="ctr"/>
+          </a:p>
+        </p:txBody>
+      </p:sp>
+      <p:sp>
+        <p:nvSpPr>
+          <p:cNvPr id="11" name="Rectangle 10"/>
+          <p:cNvSpPr/>
+          <p:nvPr/>
+        </p:nvSpPr>
+        <p:spPr>
+          <a:xfrm>
+            <a:off x="4242816" y="1225296"/>
+            <a:ext cx="2670048" cy="45720"/>
+          </a:xfrm>
+          <a:prstGeom prst="rect">
+            <a:avLst/>
+          </a:prstGeom>
+          <a:solidFill>
+            <a:srgbClr val="C2570A"/>
+          </a:solidFill>
+          <a:ln>
+            <a:noFill/>
+          </a:ln>
+        </p:spPr>
+        <p:txBody>
+          <a:bodyPr rtlCol="0" anchor="ctr"/>
+          <a:lstStyle/>
+          <a:p>
+            <a:pPr algn="ctr"/>
+          </a:p>
+        </p:txBody>
+      </p:sp>
+      <p:sp>
+        <p:nvSpPr>
+          <p:cNvPr id="12" name="TextBox 11"/>
+          <p:cNvSpPr txBox="1"/>
+          <p:nvPr/>
+        </p:nvSpPr>
+        <p:spPr>
+          <a:xfrm>
+            <a:off x="4389120" y="1261872"/>
+            <a:ext cx="2395728" cy="402336"/>
+          </a:xfrm>
+          <a:prstGeom prst="rect">
+            <a:avLst/>
+          </a:prstGeom>
+          <a:noFill/>
+        </p:spPr>
+        <p:txBody>
+          <a:bodyPr wrap="square" anchor="ctr" lIns="0" tIns="0" rIns="0" bIns="0">
+            <a:noAutofit/>
+          </a:bodyPr>
+          <a:lstStyle/>
+          <a:p>
+            <a:pPr algn="ctr" latinLnBrk="0">
+              <a:lnSpc>
+                <a:spcPct val="100000"/>
+              </a:lnSpc>
+              <a:spcBef>
+                <a:spcPts val="0"/>
+              </a:spcBef>
+              <a:spcAft>
+                <a:spcPts val="200"/>
+              </a:spcAft>
+            </a:pPr>
+            <a:r>
+              <a:rPr sz="1100" b="1">
+                <a:solidFill>
+                  <a:srgbClr val="C2570A"/>
+                </a:solidFill>
+                <a:latin typeface="Microsoft YaHei"/>
+                <a:ea typeface="Microsoft YaHei"/>
+                <a:cs typeface="Microsoft YaHei"/>
+              </a:rPr>
+              <a:t>② </a:t>
+            </a:r>
+            <a:r>
+              <a:rPr sz="1100" b="1">
+                <a:solidFill>
+                  <a:srgbClr val="0A2B45"/>
+                </a:solidFill>
+                <a:latin typeface="Microsoft YaHei"/>
+                <a:ea typeface="Microsoft YaHei"/>
+                <a:cs typeface="Microsoft YaHei"/>
+              </a:rPr>
+              <a:t>AI 生成侧（写）</a:t>
+            </a:r>
+          </a:p>
+          <a:p>
+            <a:pPr algn="ctr" latinLnBrk="0">
+              <a:lnSpc>
+                <a:spcPct val="100000"/>
+              </a:lnSpc>
+              <a:spcBef>
+                <a:spcPts val="0"/>
+              </a:spcBef>
+              <a:spcAft>
+                <a:spcPts val="0"/>
+              </a:spcAft>
+            </a:pPr>
+            <a:r>
+              <a:rPr sz="900" b="0">
+                <a:solidFill>
+                  <a:srgbClr val="C2570A"/>
+                </a:solidFill>
+                <a:latin typeface="Microsoft YaHei"/>
+                <a:ea typeface="Microsoft YaHei"/>
+                <a:cs typeface="Microsoft YaHei"/>
+              </a:rPr>
+              <a:t>唯一引入大模型的位置</a:t>
+            </a:r>
+          </a:p>
+        </p:txBody>
+      </p:sp>
+      <p:sp>
+        <p:nvSpPr>
+          <p:cNvPr id="13" name="Rectangle 12"/>
+          <p:cNvSpPr/>
+          <p:nvPr/>
+        </p:nvSpPr>
+        <p:spPr>
+          <a:xfrm>
+            <a:off x="7150608" y="1225296"/>
+            <a:ext cx="2852928" cy="475488"/>
+          </a:xfrm>
+          <a:prstGeom prst="rect">
+            <a:avLst/>
+          </a:prstGeom>
+          <a:solidFill>
+            <a:srgbClr val="E6F0FC"/>
+          </a:solidFill>
+          <a:ln>
+            <a:noFill/>
+          </a:ln>
+        </p:spPr>
+        <p:txBody>
+          <a:bodyPr rtlCol="0" anchor="ctr"/>
+          <a:lstStyle/>
+          <a:p>
+            <a:pPr algn="ctr"/>
+          </a:p>
+        </p:txBody>
+      </p:sp>
+      <p:sp>
+        <p:nvSpPr>
+          <p:cNvPr id="14" name="Rectangle 13"/>
+          <p:cNvSpPr/>
+          <p:nvPr/>
+        </p:nvSpPr>
+        <p:spPr>
+          <a:xfrm>
+            <a:off x="7150608" y="1225296"/>
+            <a:ext cx="2852928" cy="45720"/>
+          </a:xfrm>
+          <a:prstGeom prst="rect">
+            <a:avLst/>
+          </a:prstGeom>
+          <a:solidFill>
+            <a:srgbClr val="0F62CE"/>
+          </a:solidFill>
+          <a:ln>
+            <a:noFill/>
+          </a:ln>
+        </p:spPr>
+        <p:txBody>
+          <a:bodyPr rtlCol="0" anchor="ctr"/>
+          <a:lstStyle/>
+          <a:p>
+            <a:pPr algn="ctr"/>
+          </a:p>
+        </p:txBody>
+      </p:sp>
+      <p:sp>
+        <p:nvSpPr>
+          <p:cNvPr id="15" name="TextBox 14"/>
+          <p:cNvSpPr txBox="1"/>
+          <p:nvPr/>
+        </p:nvSpPr>
+        <p:spPr>
+          <a:xfrm>
+            <a:off x="7296912" y="1261872"/>
+            <a:ext cx="2578608" cy="402336"/>
+          </a:xfrm>
+          <a:prstGeom prst="rect">
+            <a:avLst/>
+          </a:prstGeom>
+          <a:noFill/>
+        </p:spPr>
+        <p:txBody>
+          <a:bodyPr wrap="square" anchor="ctr" lIns="0" tIns="0" rIns="0" bIns="0">
+            <a:noAutofit/>
+          </a:bodyPr>
+          <a:lstStyle/>
+          <a:p>
+            <a:pPr algn="ctr" latinLnBrk="0">
+              <a:lnSpc>
+                <a:spcPct val="100000"/>
+              </a:lnSpc>
+              <a:spcBef>
+                <a:spcPts val="0"/>
+              </a:spcBef>
+              <a:spcAft>
+                <a:spcPts val="200"/>
+              </a:spcAft>
+            </a:pPr>
+            <a:r>
+              <a:rPr sz="1100" b="1">
+                <a:solidFill>
+                  <a:srgbClr val="0F62CE"/>
+                </a:solidFill>
+                <a:latin typeface="Microsoft YaHei"/>
+                <a:ea typeface="Microsoft YaHei"/>
+                <a:cs typeface="Microsoft YaHei"/>
+              </a:rPr>
+              <a:t>③ </a:t>
+            </a:r>
+            <a:r>
+              <a:rPr sz="1100" b="1">
+                <a:solidFill>
+                  <a:srgbClr val="0A2B45"/>
+                </a:solidFill>
+                <a:latin typeface="Microsoft YaHei"/>
+                <a:ea typeface="Microsoft YaHei"/>
+                <a:cs typeface="Microsoft YaHei"/>
+              </a:rPr>
+              <a:t>确定性验证侧（判）</a:t>
+            </a:r>
+          </a:p>
+          <a:p>
+            <a:pPr algn="ctr" latinLnBrk="0">
+              <a:lnSpc>
+                <a:spcPct val="100000"/>
+              </a:lnSpc>
+              <a:spcBef>
+                <a:spcPts val="0"/>
+              </a:spcBef>
+              <a:spcAft>
+                <a:spcPts val="0"/>
+              </a:spcAft>
+            </a:pPr>
+            <a:r>
+              <a:rPr sz="900" b="0">
+                <a:solidFill>
+                  <a:srgbClr val="0F62CE"/>
+                </a:solidFill>
+                <a:latin typeface="Microsoft YaHei"/>
+                <a:ea typeface="Microsoft YaHei"/>
+                <a:cs typeface="Microsoft YaHei"/>
+              </a:rPr>
+              <a:t>纯规则驱动 · 真机实测</a:t>
+            </a:r>
+          </a:p>
+        </p:txBody>
+      </p:sp>
+      <p:sp>
+        <p:nvSpPr>
+          <p:cNvPr id="16" name="Rectangle 15"/>
+          <p:cNvSpPr/>
+          <p:nvPr/>
+        </p:nvSpPr>
+        <p:spPr>
+          <a:xfrm>
+            <a:off x="10241280" y="1225296"/>
+            <a:ext cx="1389888" cy="475488"/>
+          </a:xfrm>
+          <a:prstGeom prst="rect">
+            <a:avLst/>
+          </a:prstGeom>
+          <a:solidFill>
+            <a:srgbClr val="F2F8FD"/>
+          </a:solidFill>
+          <a:ln>
+            <a:noFill/>
+          </a:ln>
+        </p:spPr>
+        <p:txBody>
+          <a:bodyPr rtlCol="0" anchor="ctr"/>
+          <a:lstStyle/>
+          <a:p>
+            <a:pPr algn="ctr"/>
+          </a:p>
+        </p:txBody>
+      </p:sp>
+      <p:sp>
+        <p:nvSpPr>
+          <p:cNvPr id="17" name="TextBox 16"/>
+          <p:cNvSpPr txBox="1"/>
+          <p:nvPr/>
+        </p:nvSpPr>
+        <p:spPr>
+          <a:xfrm>
+            <a:off x="10387584" y="1261872"/>
+            <a:ext cx="1115568" cy="402336"/>
+          </a:xfrm>
+          <a:prstGeom prst="rect">
+            <a:avLst/>
+          </a:prstGeom>
+          <a:noFill/>
+        </p:spPr>
+        <p:txBody>
+          <a:bodyPr wrap="square" anchor="ctr" lIns="0" tIns="0" rIns="0" bIns="0">
+            <a:noAutofit/>
+          </a:bodyPr>
+          <a:lstStyle/>
+          <a:p>
+            <a:pPr algn="ctr" latinLnBrk="0">
+              <a:lnSpc>
+                <a:spcPct val="100000"/>
+              </a:lnSpc>
+              <a:spcBef>
+                <a:spcPts val="0"/>
+              </a:spcBef>
+              <a:spcAft>
+                <a:spcPts val="200"/>
+              </a:spcAft>
+            </a:pPr>
+            <a:r>
+              <a:rPr sz="1100" b="1">
+                <a:solidFill>
+                  <a:srgbClr val="1B4D69"/>
+                </a:solidFill>
+                <a:latin typeface="Microsoft YaHei"/>
+                <a:ea typeface="Microsoft YaHei"/>
+                <a:cs typeface="Microsoft YaHei"/>
+              </a:rPr>
+              <a:t>④ </a:t>
+            </a:r>
+            <a:r>
+              <a:rPr sz="1100" b="1">
+                <a:solidFill>
+                  <a:srgbClr val="0A2B45"/>
+                </a:solidFill>
+                <a:latin typeface="Microsoft YaHei"/>
+                <a:ea typeface="Microsoft YaHei"/>
+                <a:cs typeface="Microsoft YaHei"/>
+              </a:rPr>
+              <a:t>准入出口</a:t>
+            </a:r>
+          </a:p>
+        </p:txBody>
+      </p:sp>
+      <p:sp>
+        <p:nvSpPr>
+          <p:cNvPr id="18" name="Rectangle 17"/>
+          <p:cNvSpPr/>
+          <p:nvPr/>
+        </p:nvSpPr>
+        <p:spPr>
+          <a:xfrm>
+            <a:off x="548640" y="1755648"/>
+            <a:ext cx="11094415" cy="1481328"/>
+          </a:xfrm>
+          <a:prstGeom prst="rect">
+            <a:avLst/>
+          </a:prstGeom>
+          <a:solidFill>
+            <a:srgbClr val="F2F8FD"/>
+          </a:solidFill>
+          <a:ln>
+            <a:noFill/>
+          </a:ln>
+        </p:spPr>
+        <p:txBody>
+          <a:bodyPr rtlCol="0" anchor="ctr"/>
+          <a:lstStyle/>
+          <a:p>
+            <a:pPr algn="ctr"/>
+          </a:p>
+        </p:txBody>
+      </p:sp>
+      <p:sp>
+        <p:nvSpPr>
+          <p:cNvPr id="19" name="Rectangle 18"/>
+          <p:cNvSpPr/>
+          <p:nvPr/>
+        </p:nvSpPr>
+        <p:spPr>
+          <a:xfrm>
+            <a:off x="548640" y="1755648"/>
+            <a:ext cx="64008" cy="1481328"/>
+          </a:xfrm>
+          <a:prstGeom prst="rect">
+            <a:avLst/>
+          </a:prstGeom>
+          <a:solidFill>
+            <a:srgbClr val="D2690C"/>
+          </a:solidFill>
+          <a:ln>
+            <a:noFill/>
+          </a:ln>
+        </p:spPr>
+        <p:txBody>
+          <a:bodyPr rtlCol="0" anchor="ctr"/>
+          <a:lstStyle/>
+          <a:p>
+            <a:pPr algn="ctr"/>
+          </a:p>
+        </p:txBody>
+      </p:sp>
+      <p:sp>
+        <p:nvSpPr>
+          <p:cNvPr id="20" name="TextBox 19"/>
+          <p:cNvSpPr txBox="1"/>
+          <p:nvPr/>
+        </p:nvSpPr>
+        <p:spPr>
+          <a:xfrm>
+            <a:off x="749808" y="2029967"/>
+            <a:ext cx="1225295" cy="932688"/>
+          </a:xfrm>
+          <a:prstGeom prst="rect">
+            <a:avLst/>
+          </a:prstGeom>
+          <a:noFill/>
+        </p:spPr>
+        <p:txBody>
+          <a:bodyPr wrap="square" anchor="t" lIns="0" tIns="0" rIns="0" bIns="0">
+            <a:noAutofit/>
+          </a:bodyPr>
+          <a:lstStyle/>
+          <a:p>
+            <a:pPr algn="l" latinLnBrk="0">
+              <a:lnSpc>
+                <a:spcPct val="100000"/>
+              </a:lnSpc>
+              <a:spcBef>
+                <a:spcPts val="0"/>
+              </a:spcBef>
+              <a:spcAft>
+                <a:spcPts val="300"/>
+              </a:spcAft>
+            </a:pPr>
+            <a:r>
+              <a:rPr sz="1300" b="1">
+                <a:solidFill>
+                  <a:srgbClr val="0A2B45"/>
+                </a:solidFill>
+                <a:latin typeface="Microsoft YaHei"/>
+                <a:ea typeface="Microsoft YaHei"/>
+                <a:cs typeface="Microsoft YaHei"/>
+              </a:rPr>
+              <a:t>【模型层】</a:t>
+            </a:r>
+          </a:p>
+          <a:p>
+            <a:pPr algn="l" latinLnBrk="0">
+              <a:lnSpc>
+                <a:spcPct val="100000"/>
+              </a:lnSpc>
+              <a:spcBef>
+                <a:spcPts val="0"/>
+              </a:spcBef>
+              <a:spcAft>
+                <a:spcPts val="400"/>
+              </a:spcAft>
+            </a:pPr>
+            <a:r>
+              <a:rPr sz="1000" b="1">
+                <a:solidFill>
+                  <a:srgbClr val="C2570A"/>
+                </a:solidFill>
+                <a:latin typeface="Consolas"/>
+                <a:ea typeface="Microsoft YaHei"/>
+                <a:cs typeface="Microsoft YaHei"/>
+              </a:rPr>
+              <a:t>model-agent</a:t>
+            </a:r>
+          </a:p>
+          <a:p>
+            <a:pPr algn="l" latinLnBrk="0">
+              <a:lnSpc>
+                <a:spcPct val="100000"/>
+              </a:lnSpc>
+              <a:spcBef>
+                <a:spcPts val="0"/>
+              </a:spcBef>
+              <a:spcAft>
+                <a:spcPts val="0"/>
+              </a:spcAft>
+            </a:pPr>
+            <a:r>
+              <a:rPr sz="800" b="0">
+                <a:solidFill>
+                  <a:srgbClr val="40708B"/>
+                </a:solidFill>
+                <a:latin typeface="Microsoft YaHei"/>
+                <a:ea typeface="Microsoft YaHei"/>
+                <a:cs typeface="Microsoft YaHei"/>
+              </a:rPr>
+              <a:t>模型接入与性能调优</a:t>
+            </a:r>
+          </a:p>
+        </p:txBody>
+      </p:sp>
+      <p:sp>
+        <p:nvSpPr>
+          <p:cNvPr id="21" name="Rectangle 20"/>
+          <p:cNvSpPr/>
+          <p:nvPr/>
+        </p:nvSpPr>
+        <p:spPr>
+          <a:xfrm>
+            <a:off x="2212848" y="2103120"/>
+            <a:ext cx="1792224" cy="1060704"/>
           </a:xfrm>
           <a:prstGeom prst="rect">
             <a:avLst/>
@@ -13091,225 +13774,107 @@
       </p:sp>
       <p:sp>
         <p:nvSpPr>
-          <p:cNvPr id="7" name="Rectangle 6"/>
+          <p:cNvPr id="22" name="TextBox 21"/>
+          <p:cNvSpPr txBox="1"/>
+          <p:nvPr/>
+        </p:nvSpPr>
+        <p:spPr>
+          <a:xfrm>
+            <a:off x="2359152" y="2157984"/>
+            <a:ext cx="1426464" cy="950976"/>
+          </a:xfrm>
+          <a:prstGeom prst="rect">
+            <a:avLst/>
+          </a:prstGeom>
+          <a:noFill/>
+        </p:spPr>
+        <p:txBody>
+          <a:bodyPr wrap="square" anchor="ctr" lIns="0" tIns="0" rIns="0" bIns="0">
+            <a:noAutofit/>
+          </a:bodyPr>
+          <a:lstStyle/>
+          <a:p>
+            <a:pPr algn="l" latinLnBrk="0">
+              <a:lnSpc>
+                <a:spcPct val="100000"/>
+              </a:lnSpc>
+              <a:spcBef>
+                <a:spcPts val="0"/>
+              </a:spcBef>
+              <a:spcAft>
+                <a:spcPts val="400"/>
+              </a:spcAft>
+            </a:pPr>
+            <a:r>
+              <a:rPr sz="1100" b="1">
+                <a:solidFill>
+                  <a:srgbClr val="0A2B45"/>
+                </a:solidFill>
+                <a:latin typeface="Microsoft YaHei"/>
+                <a:ea typeface="Microsoft YaHei"/>
+                <a:cs typeface="Microsoft YaHei"/>
+              </a:rPr>
+              <a:t>人：定目标与边界</a:t>
+            </a:r>
+          </a:p>
+          <a:p>
+            <a:pPr algn="l" latinLnBrk="0">
+              <a:lnSpc>
+                <a:spcPct val="100000"/>
+              </a:lnSpc>
+              <a:spcBef>
+                <a:spcPts val="0"/>
+              </a:spcBef>
+              <a:spcAft>
+                <a:spcPts val="0"/>
+              </a:spcAft>
+            </a:pPr>
+            <a:r>
+              <a:rPr sz="900" b="0">
+                <a:solidFill>
+                  <a:srgbClr val="1B4D69"/>
+                </a:solidFill>
+                <a:latin typeface="Microsoft YaHei"/>
+                <a:ea typeface="Microsoft YaHei"/>
+                <a:cs typeface="Microsoft YaHei"/>
+              </a:rPr>
+              <a:t>负载 / 精度 / 预算</a:t>
+            </a:r>
+          </a:p>
+        </p:txBody>
+      </p:sp>
+      <p:cxnSp>
+        <p:nvCxnSpPr>
+          <p:cNvPr id="23" name="Connector 22"/>
+          <p:cNvCxnSpPr/>
+          <p:nvPr/>
+        </p:nvCxnSpPr>
+        <p:spPr>
+          <a:xfrm>
+            <a:off x="4050791" y="2633472"/>
+            <a:ext cx="146305" cy="0"/>
+          </a:xfrm>
+          <a:prstGeom prst="line">
+            <a:avLst/>
+          </a:prstGeom>
+          <a:ln w="19050">
+            <a:solidFill>
+              <a:srgbClr val="40708B"/>
+            </a:solidFill>
+            <a:tailEnd type="triangle" w="med" len="med"/>
+          </a:ln>
+        </p:spPr>
+      </p:cxnSp>
+      <p:sp>
+        <p:nvSpPr>
+          <p:cNvPr id="24" name="Rectangle 23"/>
           <p:cNvSpPr/>
           <p:nvPr/>
         </p:nvSpPr>
         <p:spPr>
           <a:xfrm>
-            <a:off x="548640" y="1335024"/>
-            <a:ext cx="11094415" cy="45720"/>
-          </a:xfrm>
-          <a:prstGeom prst="rect">
-            <a:avLst/>
-          </a:prstGeom>
-          <a:solidFill>
-            <a:srgbClr val="D2690C"/>
-          </a:solidFill>
-          <a:ln>
-            <a:noFill/>
-          </a:ln>
-        </p:spPr>
-        <p:txBody>
-          <a:bodyPr rtlCol="0" anchor="ctr"/>
-          <a:lstStyle/>
-          <a:p>
-            <a:pPr algn="ctr"/>
-          </a:p>
-        </p:txBody>
-      </p:sp>
-      <p:sp>
-        <p:nvSpPr>
-          <p:cNvPr id="8" name="TextBox 7"/>
-          <p:cNvSpPr txBox="1"/>
-          <p:nvPr/>
-        </p:nvSpPr>
-        <p:spPr>
-          <a:xfrm>
-            <a:off x="749808" y="1426464"/>
-            <a:ext cx="10692079" cy="292608"/>
-          </a:xfrm>
-          <a:prstGeom prst="rect">
-            <a:avLst/>
-          </a:prstGeom>
-          <a:noFill/>
-        </p:spPr>
-        <p:txBody>
-          <a:bodyPr wrap="square" anchor="ctr" lIns="0" tIns="0" rIns="0" bIns="0">
-            <a:noAutofit/>
-          </a:bodyPr>
-          <a:lstStyle/>
-          <a:p>
-            <a:pPr algn="l" latinLnBrk="0">
-              <a:lnSpc>
-                <a:spcPct val="100000"/>
-              </a:lnSpc>
-              <a:spcBef>
-                <a:spcPts val="0"/>
-              </a:spcBef>
-              <a:spcAft>
-                <a:spcPts val="0"/>
-              </a:spcAft>
-            </a:pPr>
-            <a:r>
-              <a:rPr sz="1100" b="1">
-                <a:solidFill>
-                  <a:srgbClr val="C2570A"/>
-                </a:solidFill>
-                <a:latin typeface="Consolas"/>
-                <a:ea typeface="Microsoft YaHei"/>
-                <a:cs typeface="Microsoft YaHei"/>
-              </a:rPr>
-              <a:t>model-agent</a:t>
-            </a:r>
-            <a:r>
-              <a:rPr sz="1100" b="0">
-                <a:solidFill>
-                  <a:srgbClr val="AFCEE1"/>
-                </a:solidFill>
-                <a:latin typeface="Microsoft YaHei"/>
-                <a:ea typeface="Microsoft YaHei"/>
-                <a:cs typeface="Microsoft YaHei"/>
-              </a:rPr>
-              <a:t>　｜　</a:t>
-            </a:r>
-            <a:r>
-              <a:rPr sz="1300" b="1">
-                <a:solidFill>
-                  <a:srgbClr val="0A2B45"/>
-                </a:solidFill>
-                <a:latin typeface="Microsoft YaHei"/>
-                <a:ea typeface="Microsoft YaHei"/>
-                <a:cs typeface="Microsoft YaHei"/>
-              </a:rPr>
-              <a:t>模型层</a:t>
-            </a:r>
-            <a:r>
-              <a:rPr sz="1050" b="0">
-                <a:solidFill>
-                  <a:srgbClr val="40708B"/>
-                </a:solidFill>
-                <a:latin typeface="Microsoft YaHei"/>
-                <a:ea typeface="Microsoft YaHei"/>
-                <a:cs typeface="Microsoft YaHei"/>
-              </a:rPr>
-              <a:t>　模型接入与性能调优</a:t>
-            </a:r>
-          </a:p>
-        </p:txBody>
-      </p:sp>
-      <p:sp>
-        <p:nvSpPr>
-          <p:cNvPr id="9" name="Rectangle 8"/>
-          <p:cNvSpPr/>
-          <p:nvPr/>
-        </p:nvSpPr>
-        <p:spPr>
-          <a:xfrm>
-            <a:off x="731520" y="2066543"/>
-            <a:ext cx="1463040" cy="987552"/>
-          </a:xfrm>
-          <a:prstGeom prst="rect">
-            <a:avLst/>
-          </a:prstGeom>
-          <a:solidFill>
-            <a:srgbClr val="F2F8FD"/>
-          </a:solidFill>
-          <a:ln w="9525">
-            <a:solidFill>
-              <a:srgbClr val="CFE3F0"/>
-            </a:solidFill>
-          </a:ln>
-        </p:spPr>
-        <p:txBody>
-          <a:bodyPr rtlCol="0" anchor="ctr"/>
-          <a:lstStyle/>
-          <a:p>
-            <a:pPr algn="ctr"/>
-          </a:p>
-        </p:txBody>
-      </p:sp>
-      <p:sp>
-        <p:nvSpPr>
-          <p:cNvPr id="10" name="TextBox 9"/>
-          <p:cNvSpPr txBox="1"/>
-          <p:nvPr/>
-        </p:nvSpPr>
-        <p:spPr>
-          <a:xfrm>
-            <a:off x="822960" y="2066543"/>
-            <a:ext cx="1280160" cy="987552"/>
-          </a:xfrm>
-          <a:prstGeom prst="rect">
-            <a:avLst/>
-          </a:prstGeom>
-          <a:noFill/>
-        </p:spPr>
-        <p:txBody>
-          <a:bodyPr wrap="square" anchor="ctr" lIns="0" tIns="0" rIns="0" bIns="0">
-            <a:noAutofit/>
-          </a:bodyPr>
-          <a:lstStyle/>
-          <a:p>
-            <a:pPr algn="ctr" latinLnBrk="0">
-              <a:lnSpc>
-                <a:spcPct val="100000"/>
-              </a:lnSpc>
-              <a:spcBef>
-                <a:spcPts val="0"/>
-              </a:spcBef>
-              <a:spcAft>
-                <a:spcPts val="200"/>
-              </a:spcAft>
-            </a:pPr>
-            <a:r>
-              <a:rPr sz="1300" b="1">
-                <a:solidFill>
-                  <a:srgbClr val="0A2B45"/>
-                </a:solidFill>
-                <a:latin typeface="Microsoft YaHei"/>
-                <a:ea typeface="Microsoft YaHei"/>
-                <a:cs typeface="Microsoft YaHei"/>
-              </a:rPr>
-              <a:t>人</a:t>
-            </a:r>
-          </a:p>
-          <a:p>
-            <a:pPr algn="ctr" latinLnBrk="0">
-              <a:lnSpc>
-                <a:spcPct val="100000"/>
-              </a:lnSpc>
-              <a:spcBef>
-                <a:spcPts val="0"/>
-              </a:spcBef>
-              <a:spcAft>
-                <a:spcPts val="0"/>
-              </a:spcAft>
-            </a:pPr>
-            <a:r>
-              <a:rPr sz="950" b="0">
-                <a:solidFill>
-                  <a:srgbClr val="40708B"/>
-                </a:solidFill>
-                <a:latin typeface="Microsoft YaHei"/>
-                <a:ea typeface="Microsoft YaHei"/>
-                <a:cs typeface="Microsoft YaHei"/>
-              </a:rPr>
-              <a:t>定目标与边界</a:t>
-            </a:r>
-          </a:p>
-        </p:txBody>
-      </p:sp>
-      <p:sp>
-        <p:nvSpPr>
-          <p:cNvPr id="11" name="Rectangle 10"/>
-          <p:cNvSpPr/>
-          <p:nvPr/>
-        </p:nvSpPr>
-        <p:spPr>
-          <a:xfrm>
-            <a:off x="2560320" y="2066543"/>
-            <a:ext cx="3200400" cy="987552"/>
+            <a:off x="4242816" y="2103120"/>
+            <a:ext cx="2670048" cy="1060704"/>
           </a:xfrm>
           <a:prstGeom prst="rect">
             <a:avLst/>
@@ -13333,14 +13898,14 @@
       </p:sp>
       <p:sp>
         <p:nvSpPr>
-          <p:cNvPr id="12" name="Rectangle 11"/>
+          <p:cNvPr id="25" name="Rectangle 24"/>
           <p:cNvSpPr/>
           <p:nvPr/>
         </p:nvSpPr>
         <p:spPr>
           <a:xfrm>
-            <a:off x="2560320" y="2066543"/>
-            <a:ext cx="64008" cy="987552"/>
+            <a:off x="4242816" y="2103120"/>
+            <a:ext cx="64008" cy="1060704"/>
           </a:xfrm>
           <a:prstGeom prst="rect">
             <a:avLst/>
@@ -13362,14 +13927,14 @@
       </p:sp>
       <p:sp>
         <p:nvSpPr>
-          <p:cNvPr id="13" name="TextBox 12"/>
-          <p:cNvSpPr txBox="1"/>
-          <p:nvPr/>
-        </p:nvSpPr>
-        <p:spPr>
-          <a:xfrm>
-            <a:off x="2779776" y="2103120"/>
-            <a:ext cx="2834640" cy="914400"/>
+          <p:cNvPr id="26" name="TextBox 25"/>
+          <p:cNvSpPr txBox="1"/>
+          <p:nvPr/>
+        </p:nvSpPr>
+        <p:spPr>
+          <a:xfrm>
+            <a:off x="4462272" y="2157984"/>
+            <a:ext cx="2304288" cy="950976"/>
           </a:xfrm>
           <a:prstGeom prst="rect">
             <a:avLst/>
@@ -13390,11 +13955,11 @@
                 <a:spcPts val="0"/>
               </a:spcBef>
               <a:spcAft>
-                <a:spcPts val="300"/>
-              </a:spcAft>
-            </a:pPr>
-            <a:r>
-              <a:rPr sz="1300" b="1">
+                <a:spcPts val="400"/>
+              </a:spcAft>
+            </a:pPr>
+            <a:r>
+              <a:rPr sz="1100" b="1">
                 <a:solidFill>
                   <a:srgbClr val="0A2B45"/>
                 </a:solidFill>
@@ -13405,18 +13970,64 @@
               <a:t>Agent 生成接入、优化方案</a:t>
             </a:r>
           </a:p>
-        </p:txBody>
-      </p:sp>
-      <p:sp>
-        <p:nvSpPr>
-          <p:cNvPr id="14" name="Rectangle 13"/>
+          <a:p>
+            <a:pPr algn="l" latinLnBrk="0">
+              <a:lnSpc>
+                <a:spcPct val="100000"/>
+              </a:lnSpc>
+              <a:spcBef>
+                <a:spcPts val="0"/>
+              </a:spcBef>
+              <a:spcAft>
+                <a:spcPts val="0"/>
+              </a:spcAft>
+            </a:pPr>
+            <a:r>
+              <a:rPr sz="900" b="0">
+                <a:solidFill>
+                  <a:srgbClr val="1B4D69"/>
+                </a:solidFill>
+                <a:latin typeface="Microsoft YaHei"/>
+                <a:ea typeface="Microsoft YaHei"/>
+                <a:cs typeface="Microsoft YaHei"/>
+              </a:rPr>
+              <a:t>服务配置与图融合补丁</a:t>
+            </a:r>
+          </a:p>
+        </p:txBody>
+      </p:sp>
+      <p:cxnSp>
+        <p:nvCxnSpPr>
+          <p:cNvPr id="27" name="Connector 26"/>
+          <p:cNvCxnSpPr/>
+          <p:nvPr/>
+        </p:nvCxnSpPr>
+        <p:spPr>
+          <a:xfrm>
+            <a:off x="6958583" y="2633472"/>
+            <a:ext cx="146305" cy="0"/>
+          </a:xfrm>
+          <a:prstGeom prst="line">
+            <a:avLst/>
+          </a:prstGeom>
+          <a:ln w="19050">
+            <a:solidFill>
+              <a:srgbClr val="40708B"/>
+            </a:solidFill>
+            <a:tailEnd type="triangle" w="med" len="med"/>
+          </a:ln>
+        </p:spPr>
+      </p:cxnSp>
+      <p:sp>
+        <p:nvSpPr>
+          <p:cNvPr id="28" name="Rectangle 27"/>
           <p:cNvSpPr/>
           <p:nvPr/>
         </p:nvSpPr>
         <p:spPr>
           <a:xfrm>
-            <a:off x="6217920" y="2066543"/>
-            <a:ext cx="3749039" cy="987552"/>
+            <a:off x="7150608" y="2103120"/>
+            <a:ext cx="2852928" cy="1060704"/>
           </a:xfrm>
           <a:prstGeom prst="rect">
             <a:avLst/>
@@ -13440,14 +14051,14 @@
       </p:sp>
       <p:sp>
         <p:nvSpPr>
-          <p:cNvPr id="15" name="Rectangle 14"/>
+          <p:cNvPr id="29" name="Rectangle 28"/>
           <p:cNvSpPr/>
           <p:nvPr/>
         </p:nvSpPr>
         <p:spPr>
           <a:xfrm>
-            <a:off x="6217920" y="2066543"/>
-            <a:ext cx="64008" cy="987552"/>
+            <a:off x="7150608" y="2103120"/>
+            <a:ext cx="64008" cy="1060704"/>
           </a:xfrm>
           <a:prstGeom prst="rect">
             <a:avLst/>
@@ -13469,14 +14080,14 @@
       </p:sp>
       <p:sp>
         <p:nvSpPr>
-          <p:cNvPr id="16" name="TextBox 15"/>
-          <p:cNvSpPr txBox="1"/>
-          <p:nvPr/>
-        </p:nvSpPr>
-        <p:spPr>
-          <a:xfrm>
-            <a:off x="6437376" y="2103120"/>
-            <a:ext cx="3383279" cy="914400"/>
+          <p:cNvPr id="30" name="TextBox 29"/>
+          <p:cNvSpPr txBox="1"/>
+          <p:nvPr/>
+        </p:nvSpPr>
+        <p:spPr>
+          <a:xfrm>
+            <a:off x="7370064" y="2157984"/>
+            <a:ext cx="2487168" cy="950976"/>
           </a:xfrm>
           <a:prstGeom prst="rect">
             <a:avLst/>
@@ -13497,11 +14108,11 @@
                 <a:spcPts val="0"/>
               </a:spcBef>
               <a:spcAft>
-                <a:spcPts val="300"/>
-              </a:spcAft>
-            </a:pPr>
-            <a:r>
-              <a:rPr sz="1300" b="1">
+                <a:spcPts val="400"/>
+              </a:spcAft>
+            </a:pPr>
+            <a:r>
+              <a:rPr sz="1100" b="1">
                 <a:solidFill>
                   <a:srgbClr val="0A2B45"/>
                 </a:solidFill>
@@ -13509,7 +14120,7 @@
                 <a:ea typeface="Microsoft YaHei"/>
                 <a:cs typeface="Microsoft YaHei"/>
               </a:rPr>
-              <a:t>规则验收 + 真机实测</a:t>
+              <a:t>整模型真机端到端验收</a:t>
             </a:r>
           </a:p>
           <a:p>
@@ -13525,7 +14136,7 @@
               </a:spcAft>
             </a:pPr>
             <a:r>
-              <a:rPr sz="1000" b="0">
+              <a:rPr sz="900" b="0">
                 <a:solidFill>
                   <a:srgbClr val="1B4D69"/>
                 </a:solidFill>
@@ -13533,147 +14144,21 @@
                 <a:ea typeface="Microsoft YaHei"/>
                 <a:cs typeface="Microsoft YaHei"/>
               </a:rPr>
-              <a:t>整模型端到端</a:t>
-            </a:r>
-          </a:p>
-          <a:p>
-            <a:pPr algn="l" latinLnBrk="0">
-              <a:lnSpc>
-                <a:spcPct val="100000"/>
-              </a:lnSpc>
-              <a:spcBef>
-                <a:spcPts val="0"/>
-              </a:spcBef>
-              <a:spcAft>
-                <a:spcPts val="0"/>
-              </a:spcAft>
-            </a:pPr>
-            <a:r>
-              <a:rPr sz="1000" b="0">
-                <a:solidFill>
-                  <a:srgbClr val="1B4D69"/>
-                </a:solidFill>
-                <a:latin typeface="Microsoft YaHei"/>
-                <a:ea typeface="Microsoft YaHei"/>
-                <a:cs typeface="Microsoft YaHei"/>
-              </a:rPr>
-              <a:t>真实服务 + 固定评测集</a:t>
-            </a:r>
-          </a:p>
-        </p:txBody>
-      </p:sp>
-      <p:sp>
-        <p:nvSpPr>
-          <p:cNvPr id="17" name="Rectangle 16"/>
-          <p:cNvSpPr/>
-          <p:nvPr/>
-        </p:nvSpPr>
-        <p:spPr>
-          <a:xfrm>
-            <a:off x="10332720" y="2066543"/>
-            <a:ext cx="1188720" cy="987552"/>
-          </a:xfrm>
-          <a:prstGeom prst="rect">
-            <a:avLst/>
-          </a:prstGeom>
-          <a:solidFill>
-            <a:srgbClr val="F2F8FD"/>
-          </a:solidFill>
-          <a:ln w="9525">
-            <a:solidFill>
-              <a:srgbClr val="CFE3F0"/>
-            </a:solidFill>
-          </a:ln>
-        </p:spPr>
-        <p:txBody>
-          <a:bodyPr rtlCol="0" anchor="ctr"/>
-          <a:lstStyle/>
-          <a:p>
-            <a:pPr algn="ctr"/>
-          </a:p>
-        </p:txBody>
-      </p:sp>
-      <p:sp>
-        <p:nvSpPr>
-          <p:cNvPr id="18" name="TextBox 17"/>
-          <p:cNvSpPr txBox="1"/>
-          <p:nvPr/>
-        </p:nvSpPr>
-        <p:spPr>
-          <a:xfrm>
-            <a:off x="10424160" y="2066543"/>
-            <a:ext cx="1005840" cy="987552"/>
-          </a:xfrm>
-          <a:prstGeom prst="rect">
-            <a:avLst/>
-          </a:prstGeom>
-          <a:noFill/>
-        </p:spPr>
-        <p:txBody>
-          <a:bodyPr wrap="square" anchor="ctr" lIns="0" tIns="0" rIns="0" bIns="0">
-            <a:noAutofit/>
-          </a:bodyPr>
-          <a:lstStyle/>
-          <a:p>
-            <a:pPr algn="ctr" latinLnBrk="0">
-              <a:lnSpc>
-                <a:spcPct val="100000"/>
-              </a:lnSpc>
-              <a:spcBef>
-                <a:spcPts val="0"/>
-              </a:spcBef>
-              <a:spcAft>
-                <a:spcPts val="200"/>
-              </a:spcAft>
-            </a:pPr>
-            <a:r>
-              <a:rPr sz="1300" b="1">
-                <a:solidFill>
-                  <a:srgbClr val="0A2B45"/>
-                </a:solidFill>
-                <a:latin typeface="Microsoft YaHei"/>
-                <a:ea typeface="Microsoft YaHei"/>
-                <a:cs typeface="Microsoft YaHei"/>
-              </a:rPr>
-              <a:t>人</a:t>
-            </a:r>
-          </a:p>
-          <a:p>
-            <a:pPr algn="ctr" latinLnBrk="0">
-              <a:lnSpc>
-                <a:spcPct val="100000"/>
-              </a:lnSpc>
-              <a:spcBef>
-                <a:spcPts val="0"/>
-              </a:spcBef>
-              <a:spcAft>
-                <a:spcPts val="0"/>
-              </a:spcAft>
-            </a:pPr>
-            <a:r>
-              <a:rPr sz="950" b="0">
-                <a:solidFill>
-                  <a:srgbClr val="40708B"/>
-                </a:solidFill>
-                <a:latin typeface="Microsoft YaHei"/>
-                <a:ea typeface="Microsoft YaHei"/>
-                <a:cs typeface="Microsoft YaHei"/>
-              </a:rPr>
-              <a:t>判断交付</a:t>
+              <a:t>输出对齐 · 质量不降 · 吞吐提升</a:t>
             </a:r>
           </a:p>
         </p:txBody>
       </p:sp>
       <p:cxnSp>
         <p:nvCxnSpPr>
-          <p:cNvPr id="19" name="Connector 18"/>
+          <p:cNvPr id="31" name="Connector 30"/>
           <p:cNvCxnSpPr/>
           <p:nvPr/>
         </p:nvCxnSpPr>
         <p:spPr>
           <a:xfrm>
-            <a:off x="2249424" y="2560320"/>
-            <a:ext cx="256032" cy="0"/>
+            <a:off x="10049256" y="2633472"/>
+            <a:ext cx="146303" cy="0"/>
           </a:xfrm>
           <a:prstGeom prst="line">
             <a:avLst/>
@@ -13686,175 +14171,16 @@
           </a:ln>
         </p:spPr>
       </p:cxnSp>
-      <p:cxnSp>
-        <p:nvCxnSpPr>
-          <p:cNvPr id="20" name="Connector 19"/>
-          <p:cNvCxnSpPr/>
-          <p:nvPr/>
-        </p:nvCxnSpPr>
-        <p:spPr>
-          <a:xfrm>
-            <a:off x="5815583" y="2560320"/>
-            <a:ext cx="347473" cy="0"/>
-          </a:xfrm>
-          <a:prstGeom prst="line">
-            <a:avLst/>
-          </a:prstGeom>
-          <a:ln w="19050">
-            <a:solidFill>
-              <a:srgbClr val="40708B"/>
-            </a:solidFill>
-            <a:tailEnd type="triangle" w="med" len="med"/>
-          </a:ln>
-        </p:spPr>
-      </p:cxnSp>
-      <p:cxnSp>
-        <p:nvCxnSpPr>
-          <p:cNvPr id="21" name="Connector 20"/>
-          <p:cNvCxnSpPr/>
-          <p:nvPr/>
-        </p:nvCxnSpPr>
-        <p:spPr>
-          <a:xfrm>
-            <a:off x="10021824" y="2560320"/>
-            <a:ext cx="256032" cy="0"/>
-          </a:xfrm>
-          <a:prstGeom prst="line">
-            <a:avLst/>
-          </a:prstGeom>
-          <a:ln w="19050">
-            <a:solidFill>
-              <a:srgbClr val="40708B"/>
-            </a:solidFill>
-            <a:tailEnd type="triangle" w="med" len="med"/>
-          </a:ln>
-        </p:spPr>
-      </p:cxnSp>
-      <p:sp>
-        <p:nvSpPr>
-          <p:cNvPr id="22" name="Freeform 21"/>
+      <p:sp>
+        <p:nvSpPr>
+          <p:cNvPr id="32" name="Rectangle 31"/>
           <p:cNvSpPr/>
           <p:nvPr/>
         </p:nvSpPr>
         <p:spPr>
           <a:xfrm>
-            <a:off x="4160520" y="1901952"/>
-            <a:ext cx="3931920" cy="164591"/>
-          </a:xfrm>
-          <a:custGeom>
-            <a:avLst/>
-            <a:gdLst/>
-            <a:ahLst/>
-            <a:cxnLst/>
-            <a:rect l="l" t="t" r="r" b="b"/>
-            <a:pathLst>
-              <a:path w="3931920" h="164591">
-                <a:moveTo>
-                  <a:pt x="3931920" y="164591"/>
-                </a:moveTo>
-                <a:lnTo>
-                  <a:pt x="3931920" y="0"/>
-                </a:lnTo>
-                <a:lnTo>
-                  <a:pt x="0" y="0"/>
-                </a:lnTo>
-              </a:path>
-            </a:pathLst>
-          </a:custGeom>
-          <a:noFill/>
-          <a:ln w="15875">
-            <a:solidFill>
-              <a:srgbClr val="D2690C"/>
-            </a:solidFill>
-          </a:ln>
-        </p:spPr>
-        <p:txBody>
-          <a:bodyPr rtlCol="0" anchor="ctr"/>
-          <a:lstStyle/>
-          <a:p>
-            <a:pPr algn="ctr"/>
-          </a:p>
-        </p:txBody>
-      </p:sp>
-      <p:cxnSp>
-        <p:nvCxnSpPr>
-          <p:cNvPr id="23" name="Connector 22"/>
-          <p:cNvCxnSpPr/>
-          <p:nvPr/>
-        </p:nvCxnSpPr>
-        <p:spPr>
-          <a:xfrm>
-            <a:off x="4160520" y="1901952"/>
-            <a:ext cx="0" cy="146303"/>
-          </a:xfrm>
-          <a:prstGeom prst="line">
-            <a:avLst/>
-          </a:prstGeom>
-          <a:ln w="15875">
-            <a:solidFill>
-              <a:srgbClr val="D2690C"/>
-            </a:solidFill>
-            <a:tailEnd type="triangle" w="med" len="med"/>
-          </a:ln>
-        </p:spPr>
-      </p:cxnSp>
-      <p:sp>
-        <p:nvSpPr>
-          <p:cNvPr id="24" name="TextBox 23"/>
-          <p:cNvSpPr txBox="1"/>
-          <p:nvPr/>
-        </p:nvSpPr>
-        <p:spPr>
-          <a:xfrm>
-            <a:off x="4754879" y="1609344"/>
-            <a:ext cx="2743200" cy="256032"/>
-          </a:xfrm>
-          <a:prstGeom prst="rect">
-            <a:avLst/>
-          </a:prstGeom>
-          <a:noFill/>
-        </p:spPr>
-        <p:txBody>
-          <a:bodyPr wrap="square" anchor="ctr" lIns="0" tIns="0" rIns="0" bIns="0">
-            <a:noAutofit/>
-          </a:bodyPr>
-          <a:lstStyle/>
-          <a:p>
-            <a:pPr algn="ctr" latinLnBrk="0">
-              <a:lnSpc>
-                <a:spcPct val="100000"/>
-              </a:lnSpc>
-              <a:spcBef>
-                <a:spcPts val="0"/>
-              </a:spcBef>
-              <a:spcAft>
-                <a:spcPts val="0"/>
-              </a:spcAft>
-            </a:pPr>
-            <a:r>
-              <a:rPr sz="950" b="0">
-                <a:solidFill>
-                  <a:srgbClr val="C2570A"/>
-                </a:solidFill>
-                <a:latin typeface="Microsoft YaHei"/>
-                <a:ea typeface="Microsoft YaHei"/>
-                <a:cs typeface="Microsoft YaHei"/>
-              </a:rPr>
-              <a:t>不过即回退，带着原因退回</a:t>
-            </a:r>
-          </a:p>
-        </p:txBody>
-      </p:sp>
-      <p:sp>
-        <p:nvSpPr>
-          <p:cNvPr id="25" name="Rectangle 24"/>
-          <p:cNvSpPr/>
-          <p:nvPr/>
-        </p:nvSpPr>
-        <p:spPr>
-          <a:xfrm>
-            <a:off x="548640" y="3895344"/>
-            <a:ext cx="11094415" cy="2011680"/>
+            <a:off x="10241280" y="2103120"/>
+            <a:ext cx="1389888" cy="1060704"/>
           </a:xfrm>
           <a:prstGeom prst="rect">
             <a:avLst/>
@@ -13878,14 +14204,229 @@
       </p:sp>
       <p:sp>
         <p:nvSpPr>
-          <p:cNvPr id="26" name="Rectangle 25"/>
+          <p:cNvPr id="33" name="TextBox 32"/>
+          <p:cNvSpPr txBox="1"/>
+          <p:nvPr/>
+        </p:nvSpPr>
+        <p:spPr>
+          <a:xfrm>
+            <a:off x="10387584" y="2157984"/>
+            <a:ext cx="1024128" cy="950976"/>
+          </a:xfrm>
+          <a:prstGeom prst="rect">
+            <a:avLst/>
+          </a:prstGeom>
+          <a:noFill/>
+        </p:spPr>
+        <p:txBody>
+          <a:bodyPr wrap="square" anchor="ctr" lIns="0" tIns="0" rIns="0" bIns="0">
+            <a:noAutofit/>
+          </a:bodyPr>
+          <a:lstStyle/>
+          <a:p>
+            <a:pPr algn="l" latinLnBrk="0">
+              <a:lnSpc>
+                <a:spcPct val="100000"/>
+              </a:lnSpc>
+              <a:spcBef>
+                <a:spcPts val="0"/>
+              </a:spcBef>
+              <a:spcAft>
+                <a:spcPts val="400"/>
+              </a:spcAft>
+            </a:pPr>
+            <a:r>
+              <a:rPr sz="1100" b="1">
+                <a:solidFill>
+                  <a:srgbClr val="0A2B45"/>
+                </a:solidFill>
+                <a:latin typeface="Microsoft YaHei"/>
+                <a:ea typeface="Microsoft YaHei"/>
+                <a:cs typeface="Microsoft YaHei"/>
+              </a:rPr>
+              <a:t>人</a:t>
+            </a:r>
+          </a:p>
+          <a:p>
+            <a:pPr algn="l" latinLnBrk="0">
+              <a:lnSpc>
+                <a:spcPct val="100000"/>
+              </a:lnSpc>
+              <a:spcBef>
+                <a:spcPts val="0"/>
+              </a:spcBef>
+              <a:spcAft>
+                <a:spcPts val="0"/>
+              </a:spcAft>
+            </a:pPr>
+            <a:r>
+              <a:rPr sz="900" b="0">
+                <a:solidFill>
+                  <a:srgbClr val="1B4D69"/>
+                </a:solidFill>
+                <a:latin typeface="Microsoft YaHei"/>
+                <a:ea typeface="Microsoft YaHei"/>
+                <a:cs typeface="Microsoft YaHei"/>
+              </a:rPr>
+              <a:t>判断交付</a:t>
+            </a:r>
+          </a:p>
+        </p:txBody>
+      </p:sp>
+      <p:sp>
+        <p:nvSpPr>
+          <p:cNvPr id="34" name="Freeform 33"/>
           <p:cNvSpPr/>
           <p:nvPr/>
         </p:nvSpPr>
         <p:spPr>
           <a:xfrm>
-            <a:off x="548640" y="3895344"/>
-            <a:ext cx="11094415" cy="45720"/>
+            <a:off x="5577840" y="2011680"/>
+            <a:ext cx="2999232" cy="91440"/>
+          </a:xfrm>
+          <a:custGeom>
+            <a:avLst/>
+            <a:gdLst/>
+            <a:ahLst/>
+            <a:cxnLst/>
+            <a:rect l="l" t="t" r="r" b="b"/>
+            <a:pathLst>
+              <a:path w="2999232" h="91440">
+                <a:moveTo>
+                  <a:pt x="2999232" y="91440"/>
+                </a:moveTo>
+                <a:lnTo>
+                  <a:pt x="2999232" y="0"/>
+                </a:lnTo>
+                <a:lnTo>
+                  <a:pt x="0" y="0"/>
+                </a:lnTo>
+              </a:path>
+            </a:pathLst>
+          </a:custGeom>
+          <a:noFill/>
+          <a:ln w="15875">
+            <a:solidFill>
+              <a:srgbClr val="D2690C"/>
+            </a:solidFill>
+          </a:ln>
+        </p:spPr>
+        <p:txBody>
+          <a:bodyPr rtlCol="0" anchor="ctr"/>
+          <a:lstStyle/>
+          <a:p>
+            <a:pPr algn="ctr"/>
+          </a:p>
+        </p:txBody>
+      </p:sp>
+      <p:cxnSp>
+        <p:nvCxnSpPr>
+          <p:cNvPr id="35" name="Connector 34"/>
+          <p:cNvCxnSpPr/>
+          <p:nvPr/>
+        </p:nvCxnSpPr>
+        <p:spPr>
+          <a:xfrm>
+            <a:off x="5577840" y="2011680"/>
+            <a:ext cx="0" cy="73151"/>
+          </a:xfrm>
+          <a:prstGeom prst="line">
+            <a:avLst/>
+          </a:prstGeom>
+          <a:ln w="15875">
+            <a:solidFill>
+              <a:srgbClr val="D2690C"/>
+            </a:solidFill>
+            <a:tailEnd type="triangle" w="med" len="med"/>
+          </a:ln>
+        </p:spPr>
+      </p:cxnSp>
+      <p:sp>
+        <p:nvSpPr>
+          <p:cNvPr id="36" name="TextBox 35"/>
+          <p:cNvSpPr txBox="1"/>
+          <p:nvPr/>
+        </p:nvSpPr>
+        <p:spPr>
+          <a:xfrm>
+            <a:off x="5614416" y="1783080"/>
+            <a:ext cx="2926080" cy="219456"/>
+          </a:xfrm>
+          <a:prstGeom prst="rect">
+            <a:avLst/>
+          </a:prstGeom>
+          <a:noFill/>
+        </p:spPr>
+        <p:txBody>
+          <a:bodyPr wrap="square" anchor="ctr" lIns="0" tIns="0" rIns="0" bIns="0">
+            <a:noAutofit/>
+          </a:bodyPr>
+          <a:lstStyle/>
+          <a:p>
+            <a:pPr algn="ctr" latinLnBrk="0">
+              <a:lnSpc>
+                <a:spcPct val="100000"/>
+              </a:lnSpc>
+              <a:spcBef>
+                <a:spcPts val="0"/>
+              </a:spcBef>
+              <a:spcAft>
+                <a:spcPts val="0"/>
+              </a:spcAft>
+            </a:pPr>
+            <a:r>
+              <a:rPr sz="950" b="0">
+                <a:solidFill>
+                  <a:srgbClr val="C2570A"/>
+                </a:solidFill>
+                <a:latin typeface="Microsoft YaHei"/>
+                <a:ea typeface="Microsoft YaHei"/>
+                <a:cs typeface="Microsoft YaHei"/>
+              </a:rPr>
+              <a:t>✕　不过即回退，带着原因退回</a:t>
+            </a:r>
+          </a:p>
+        </p:txBody>
+      </p:sp>
+      <p:sp>
+        <p:nvSpPr>
+          <p:cNvPr id="37" name="Rectangle 36"/>
+          <p:cNvSpPr/>
+          <p:nvPr/>
+        </p:nvSpPr>
+        <p:spPr>
+          <a:xfrm>
+            <a:off x="548640" y="4114800"/>
+            <a:ext cx="11094415" cy="1481328"/>
+          </a:xfrm>
+          <a:prstGeom prst="rect">
+            <a:avLst/>
+          </a:prstGeom>
+          <a:solidFill>
+            <a:srgbClr val="F2F8FD"/>
+          </a:solidFill>
+          <a:ln>
+            <a:noFill/>
+          </a:ln>
+        </p:spPr>
+        <p:txBody>
+          <a:bodyPr rtlCol="0" anchor="ctr"/>
+          <a:lstStyle/>
+          <a:p>
+            <a:pPr algn="ctr"/>
+          </a:p>
+        </p:txBody>
+      </p:sp>
+      <p:sp>
+        <p:nvSpPr>
+          <p:cNvPr id="38" name="Rectangle 37"/>
+          <p:cNvSpPr/>
+          <p:nvPr/>
+        </p:nvSpPr>
+        <p:spPr>
+          <a:xfrm>
+            <a:off x="548640" y="4114800"/>
+            <a:ext cx="64008" cy="1481328"/>
           </a:xfrm>
           <a:prstGeom prst="rect">
             <a:avLst/>
@@ -13907,22 +14448,22 @@
       </p:sp>
       <p:sp>
         <p:nvSpPr>
-          <p:cNvPr id="27" name="TextBox 26"/>
-          <p:cNvSpPr txBox="1"/>
-          <p:nvPr/>
-        </p:nvSpPr>
-        <p:spPr>
-          <a:xfrm>
-            <a:off x="749808" y="3986783"/>
-            <a:ext cx="10692079" cy="292608"/>
-          </a:xfrm>
-          <a:prstGeom prst="rect">
-            <a:avLst/>
-          </a:prstGeom>
-          <a:noFill/>
-        </p:spPr>
-        <p:txBody>
-          <a:bodyPr wrap="square" anchor="ctr" lIns="0" tIns="0" rIns="0" bIns="0">
+          <p:cNvPr id="39" name="TextBox 38"/>
+          <p:cNvSpPr txBox="1"/>
+          <p:nvPr/>
+        </p:nvSpPr>
+        <p:spPr>
+          <a:xfrm>
+            <a:off x="749808" y="4389120"/>
+            <a:ext cx="1225295" cy="932688"/>
+          </a:xfrm>
+          <a:prstGeom prst="rect">
+            <a:avLst/>
+          </a:prstGeom>
+          <a:noFill/>
+        </p:spPr>
+        <p:txBody>
+          <a:bodyPr wrap="square" anchor="t" lIns="0" tIns="0" rIns="0" bIns="0">
             <a:noAutofit/>
           </a:bodyPr>
           <a:lstStyle/>
@@ -13935,11 +14476,35 @@
                 <a:spcPts val="0"/>
               </a:spcBef>
               <a:spcAft>
-                <a:spcPts val="0"/>
-              </a:spcAft>
-            </a:pPr>
-            <a:r>
-              <a:rPr sz="1100" b="1">
+                <a:spcPts val="300"/>
+              </a:spcAft>
+            </a:pPr>
+            <a:r>
+              <a:rPr sz="1300" b="1">
+                <a:solidFill>
+                  <a:srgbClr val="0A2B45"/>
+                </a:solidFill>
+                <a:latin typeface="Microsoft YaHei"/>
+                <a:ea typeface="Microsoft YaHei"/>
+                <a:cs typeface="Microsoft YaHei"/>
+              </a:rPr>
+              <a:t>【算子层】</a:t>
+            </a:r>
+          </a:p>
+          <a:p>
+            <a:pPr algn="l" latinLnBrk="0">
+              <a:lnSpc>
+                <a:spcPct val="100000"/>
+              </a:lnSpc>
+              <a:spcBef>
+                <a:spcPts val="0"/>
+              </a:spcBef>
+              <a:spcAft>
+                <a:spcPts val="400"/>
+              </a:spcAft>
+            </a:pPr>
+            <a:r>
+              <a:rPr sz="1000" b="1">
                 <a:solidFill>
                   <a:srgbClr val="C2570A"/>
                 </a:solidFill>
@@ -13949,30 +14514,21 @@
               </a:rPr>
               <a:t>xpugen</a:t>
             </a:r>
-            <a:r>
-              <a:rPr sz="1100" b="0">
-                <a:solidFill>
-                  <a:srgbClr val="AFCEE1"/>
-                </a:solidFill>
-                <a:latin typeface="Microsoft YaHei"/>
-                <a:ea typeface="Microsoft YaHei"/>
-                <a:cs typeface="Microsoft YaHei"/>
-              </a:rPr>
-              <a:t>　｜　</a:t>
-            </a:r>
-            <a:r>
-              <a:rPr sz="1300" b="1">
-                <a:solidFill>
-                  <a:srgbClr val="0A2B45"/>
-                </a:solidFill>
-                <a:latin typeface="Microsoft YaHei"/>
-                <a:ea typeface="Microsoft YaHei"/>
-                <a:cs typeface="Microsoft YaHei"/>
-              </a:rPr>
-              <a:t>算子层</a:t>
-            </a:r>
-            <a:r>
-              <a:rPr sz="1050" b="0">
+          </a:p>
+          <a:p>
+            <a:pPr algn="l" latinLnBrk="0">
+              <a:lnSpc>
+                <a:spcPct val="100000"/>
+              </a:lnSpc>
+              <a:spcBef>
+                <a:spcPts val="0"/>
+              </a:spcBef>
+              <a:spcAft>
+                <a:spcPts val="0"/>
+              </a:spcAft>
+            </a:pPr>
+            <a:r>
+              <a:rPr sz="800" b="0">
                 <a:solidFill>
                   <a:srgbClr val="40708B"/>
                 </a:solidFill>
@@ -13980,123 +14536,21 @@
                 <a:ea typeface="Microsoft YaHei"/>
                 <a:cs typeface="Microsoft YaHei"/>
               </a:rPr>
-              <a:t>　面向 M100 自动生成算子实现并调优，提升aten算子的覆盖泛化</a:t>
-            </a:r>
-          </a:p>
-        </p:txBody>
-      </p:sp>
-      <p:sp>
-        <p:nvSpPr>
-          <p:cNvPr id="28" name="Rectangle 27"/>
+              <a:t>面向 M100 自动生成算子实现并调优，提升aten算子的覆盖泛化</a:t>
+            </a:r>
+          </a:p>
+        </p:txBody>
+      </p:sp>
+      <p:sp>
+        <p:nvSpPr>
+          <p:cNvPr id="40" name="Rectangle 39"/>
           <p:cNvSpPr/>
           <p:nvPr/>
         </p:nvSpPr>
         <p:spPr>
           <a:xfrm>
-            <a:off x="731520" y="4626864"/>
-            <a:ext cx="1463040" cy="987552"/>
-          </a:xfrm>
-          <a:prstGeom prst="rect">
-            <a:avLst/>
-          </a:prstGeom>
-          <a:solidFill>
-            <a:srgbClr val="F2F8FD"/>
-          </a:solidFill>
-          <a:ln w="9525">
-            <a:solidFill>
-              <a:srgbClr val="CFE3F0"/>
-            </a:solidFill>
-          </a:ln>
-        </p:spPr>
-        <p:txBody>
-          <a:bodyPr rtlCol="0" anchor="ctr"/>
-          <a:lstStyle/>
-          <a:p>
-            <a:pPr algn="ctr"/>
-          </a:p>
-        </p:txBody>
-      </p:sp>
-      <p:sp>
-        <p:nvSpPr>
-          <p:cNvPr id="29" name="TextBox 28"/>
-          <p:cNvSpPr txBox="1"/>
-          <p:nvPr/>
-        </p:nvSpPr>
-        <p:spPr>
-          <a:xfrm>
-            <a:off x="822960" y="4626864"/>
-            <a:ext cx="1280160" cy="987552"/>
-          </a:xfrm>
-          <a:prstGeom prst="rect">
-            <a:avLst/>
-          </a:prstGeom>
-          <a:noFill/>
-        </p:spPr>
-        <p:txBody>
-          <a:bodyPr wrap="square" anchor="ctr" lIns="0" tIns="0" rIns="0" bIns="0">
-            <a:noAutofit/>
-          </a:bodyPr>
-          <a:lstStyle/>
-          <a:p>
-            <a:pPr algn="ctr" latinLnBrk="0">
-              <a:lnSpc>
-                <a:spcPct val="100000"/>
-              </a:lnSpc>
-              <a:spcBef>
-                <a:spcPts val="0"/>
-              </a:spcBef>
-              <a:spcAft>
-                <a:spcPts val="200"/>
-              </a:spcAft>
-            </a:pPr>
-            <a:r>
-              <a:rPr sz="1300" b="1">
-                <a:solidFill>
-                  <a:srgbClr val="0A2B45"/>
-                </a:solidFill>
-                <a:latin typeface="Microsoft YaHei"/>
-                <a:ea typeface="Microsoft YaHei"/>
-                <a:cs typeface="Microsoft YaHei"/>
-              </a:rPr>
-              <a:t>需求</a:t>
-            </a:r>
-          </a:p>
-          <a:p>
-            <a:pPr algn="ctr" latinLnBrk="0">
-              <a:lnSpc>
-                <a:spcPct val="100000"/>
-              </a:lnSpc>
-              <a:spcBef>
-                <a:spcPts val="0"/>
-              </a:spcBef>
-              <a:spcAft>
-                <a:spcPts val="0"/>
-              </a:spcAft>
-            </a:pPr>
-            <a:r>
-              <a:rPr sz="950" b="0">
-                <a:solidFill>
-                  <a:srgbClr val="40708B"/>
-                </a:solidFill>
-                <a:latin typeface="Microsoft YaHei"/>
-                <a:ea typeface="Microsoft YaHei"/>
-                <a:cs typeface="Microsoft YaHei"/>
-              </a:rPr>
-              <a:t>输入规格与约束</a:t>
-            </a:r>
-          </a:p>
-        </p:txBody>
-      </p:sp>
-      <p:sp>
-        <p:nvSpPr>
-          <p:cNvPr id="30" name="Rectangle 29"/>
-          <p:cNvSpPr/>
-          <p:nvPr/>
-        </p:nvSpPr>
-        <p:spPr>
-          <a:xfrm>
-            <a:off x="2560320" y="4626864"/>
-            <a:ext cx="3200400" cy="987552"/>
+            <a:off x="2212848" y="4462272"/>
+            <a:ext cx="1792224" cy="1060704"/>
           </a:xfrm>
           <a:prstGeom prst="rect">
             <a:avLst/>
@@ -14120,90 +14574,107 @@
       </p:sp>
       <p:sp>
         <p:nvSpPr>
-          <p:cNvPr id="31" name="Rectangle 30"/>
+          <p:cNvPr id="41" name="TextBox 40"/>
+          <p:cNvSpPr txBox="1"/>
+          <p:nvPr/>
+        </p:nvSpPr>
+        <p:spPr>
+          <a:xfrm>
+            <a:off x="2359152" y="4517136"/>
+            <a:ext cx="1426464" cy="950976"/>
+          </a:xfrm>
+          <a:prstGeom prst="rect">
+            <a:avLst/>
+          </a:prstGeom>
+          <a:noFill/>
+        </p:spPr>
+        <p:txBody>
+          <a:bodyPr wrap="square" anchor="ctr" lIns="0" tIns="0" rIns="0" bIns="0">
+            <a:noAutofit/>
+          </a:bodyPr>
+          <a:lstStyle/>
+          <a:p>
+            <a:pPr algn="l" latinLnBrk="0">
+              <a:lnSpc>
+                <a:spcPct val="100000"/>
+              </a:lnSpc>
+              <a:spcBef>
+                <a:spcPts val="0"/>
+              </a:spcBef>
+              <a:spcAft>
+                <a:spcPts val="400"/>
+              </a:spcAft>
+            </a:pPr>
+            <a:r>
+              <a:rPr sz="1100" b="1">
+                <a:solidFill>
+                  <a:srgbClr val="0A2B45"/>
+                </a:solidFill>
+                <a:latin typeface="Microsoft YaHei"/>
+                <a:ea typeface="Microsoft YaHei"/>
+                <a:cs typeface="Microsoft YaHei"/>
+              </a:rPr>
+              <a:t>算子规格与约束</a:t>
+            </a:r>
+          </a:p>
+          <a:p>
+            <a:pPr algn="l" latinLnBrk="0">
+              <a:lnSpc>
+                <a:spcPct val="100000"/>
+              </a:lnSpc>
+              <a:spcBef>
+                <a:spcPts val="0"/>
+              </a:spcBef>
+              <a:spcAft>
+                <a:spcPts val="0"/>
+              </a:spcAft>
+            </a:pPr>
+            <a:r>
+              <a:rPr sz="900" b="0">
+                <a:solidFill>
+                  <a:srgbClr val="1B4D69"/>
+                </a:solidFill>
+                <a:latin typeface="Microsoft YaHei"/>
+                <a:ea typeface="Microsoft YaHei"/>
+                <a:cs typeface="Microsoft YaHei"/>
+              </a:rPr>
+              <a:t>目标 Shape 与硬件规格</a:t>
+            </a:r>
+          </a:p>
+        </p:txBody>
+      </p:sp>
+      <p:cxnSp>
+        <p:nvCxnSpPr>
+          <p:cNvPr id="42" name="Connector 41"/>
+          <p:cNvCxnSpPr/>
+          <p:nvPr/>
+        </p:nvCxnSpPr>
+        <p:spPr>
+          <a:xfrm>
+            <a:off x="4050791" y="4992624"/>
+            <a:ext cx="146305" cy="0"/>
+          </a:xfrm>
+          <a:prstGeom prst="line">
+            <a:avLst/>
+          </a:prstGeom>
+          <a:ln w="19050">
+            <a:solidFill>
+              <a:srgbClr val="40708B"/>
+            </a:solidFill>
+            <a:tailEnd type="triangle" w="med" len="med"/>
+          </a:ln>
+        </p:spPr>
+      </p:cxnSp>
+      <p:sp>
+        <p:nvSpPr>
+          <p:cNvPr id="43" name="Rectangle 42"/>
           <p:cNvSpPr/>
           <p:nvPr/>
         </p:nvSpPr>
         <p:spPr>
           <a:xfrm>
-            <a:off x="2560320" y="4626864"/>
-            <a:ext cx="64008" cy="987552"/>
-          </a:xfrm>
-          <a:prstGeom prst="rect">
-            <a:avLst/>
-          </a:prstGeom>
-          <a:solidFill>
-            <a:srgbClr val="D2690C"/>
-          </a:solidFill>
-          <a:ln>
-            <a:noFill/>
-          </a:ln>
-        </p:spPr>
-        <p:txBody>
-          <a:bodyPr rtlCol="0" anchor="ctr"/>
-          <a:lstStyle/>
-          <a:p>
-            <a:pPr algn="ctr"/>
-          </a:p>
-        </p:txBody>
-      </p:sp>
-      <p:sp>
-        <p:nvSpPr>
-          <p:cNvPr id="32" name="TextBox 31"/>
-          <p:cNvSpPr txBox="1"/>
-          <p:nvPr/>
-        </p:nvSpPr>
-        <p:spPr>
-          <a:xfrm>
-            <a:off x="2779776" y="4663440"/>
-            <a:ext cx="2834640" cy="914400"/>
-          </a:xfrm>
-          <a:prstGeom prst="rect">
-            <a:avLst/>
-          </a:prstGeom>
-          <a:noFill/>
-        </p:spPr>
-        <p:txBody>
-          <a:bodyPr wrap="square" anchor="ctr" lIns="0" tIns="0" rIns="0" bIns="0">
-            <a:noAutofit/>
-          </a:bodyPr>
-          <a:lstStyle/>
-          <a:p>
-            <a:pPr algn="l" latinLnBrk="0">
-              <a:lnSpc>
-                <a:spcPct val="100000"/>
-              </a:lnSpc>
-              <a:spcBef>
-                <a:spcPts val="0"/>
-              </a:spcBef>
-              <a:spcAft>
-                <a:spcPts val="300"/>
-              </a:spcAft>
-            </a:pPr>
-            <a:r>
-              <a:rPr sz="1300" b="1">
-                <a:solidFill>
-                  <a:srgbClr val="0A2B45"/>
-                </a:solidFill>
-                <a:latin typeface="Microsoft YaHei"/>
-                <a:ea typeface="Microsoft YaHei"/>
-                <a:cs typeface="Microsoft YaHei"/>
-              </a:rPr>
-              <a:t>Agent 基于已有skills优化算子</a:t>
-            </a:r>
-          </a:p>
-        </p:txBody>
-      </p:sp>
-      <p:sp>
-        <p:nvSpPr>
-          <p:cNvPr id="33" name="Rectangle 32"/>
-          <p:cNvSpPr/>
-          <p:nvPr/>
-        </p:nvSpPr>
-        <p:spPr>
-          <a:xfrm>
-            <a:off x="6217920" y="4626864"/>
-            <a:ext cx="3749039" cy="987552"/>
+            <a:off x="4242816" y="4462272"/>
+            <a:ext cx="2670048" cy="1060704"/>
           </a:xfrm>
           <a:prstGeom prst="rect">
             <a:avLst/>
@@ -14227,14 +14698,167 @@
       </p:sp>
       <p:sp>
         <p:nvSpPr>
-          <p:cNvPr id="34" name="Rectangle 33"/>
+          <p:cNvPr id="44" name="Rectangle 43"/>
           <p:cNvSpPr/>
           <p:nvPr/>
         </p:nvSpPr>
         <p:spPr>
           <a:xfrm>
-            <a:off x="6217920" y="4626864"/>
-            <a:ext cx="64008" cy="987552"/>
+            <a:off x="4242816" y="4462272"/>
+            <a:ext cx="64008" cy="1060704"/>
+          </a:xfrm>
+          <a:prstGeom prst="rect">
+            <a:avLst/>
+          </a:prstGeom>
+          <a:solidFill>
+            <a:srgbClr val="D2690C"/>
+          </a:solidFill>
+          <a:ln>
+            <a:noFill/>
+          </a:ln>
+        </p:spPr>
+        <p:txBody>
+          <a:bodyPr rtlCol="0" anchor="ctr"/>
+          <a:lstStyle/>
+          <a:p>
+            <a:pPr algn="ctr"/>
+          </a:p>
+        </p:txBody>
+      </p:sp>
+      <p:sp>
+        <p:nvSpPr>
+          <p:cNvPr id="45" name="TextBox 44"/>
+          <p:cNvSpPr txBox="1"/>
+          <p:nvPr/>
+        </p:nvSpPr>
+        <p:spPr>
+          <a:xfrm>
+            <a:off x="4462272" y="4517136"/>
+            <a:ext cx="2304288" cy="950976"/>
+          </a:xfrm>
+          <a:prstGeom prst="rect">
+            <a:avLst/>
+          </a:prstGeom>
+          <a:noFill/>
+        </p:spPr>
+        <p:txBody>
+          <a:bodyPr wrap="square" anchor="ctr" lIns="0" tIns="0" rIns="0" bIns="0">
+            <a:noAutofit/>
+          </a:bodyPr>
+          <a:lstStyle/>
+          <a:p>
+            <a:pPr algn="l" latinLnBrk="0">
+              <a:lnSpc>
+                <a:spcPct val="100000"/>
+              </a:lnSpc>
+              <a:spcBef>
+                <a:spcPts val="0"/>
+              </a:spcBef>
+              <a:spcAft>
+                <a:spcPts val="400"/>
+              </a:spcAft>
+            </a:pPr>
+            <a:r>
+              <a:rPr sz="1100" b="1">
+                <a:solidFill>
+                  <a:srgbClr val="0A2B45"/>
+                </a:solidFill>
+                <a:latin typeface="Microsoft YaHei"/>
+                <a:ea typeface="Microsoft YaHei"/>
+                <a:cs typeface="Microsoft YaHei"/>
+              </a:rPr>
+              <a:t>Agent 基于已有skills优化算子</a:t>
+            </a:r>
+          </a:p>
+          <a:p>
+            <a:pPr algn="l" latinLnBrk="0">
+              <a:lnSpc>
+                <a:spcPct val="100000"/>
+              </a:lnSpc>
+              <a:spcBef>
+                <a:spcPts val="0"/>
+              </a:spcBef>
+              <a:spcAft>
+                <a:spcPts val="0"/>
+              </a:spcAft>
+            </a:pPr>
+            <a:r>
+              <a:rPr sz="900" b="0">
+                <a:solidFill>
+                  <a:srgbClr val="1B4D69"/>
+                </a:solidFill>
+                <a:latin typeface="Microsoft YaHei"/>
+                <a:ea typeface="Microsoft YaHei"/>
+                <a:cs typeface="Microsoft YaHei"/>
+              </a:rPr>
+              <a:t>生成并调优 Kernel 代码</a:t>
+            </a:r>
+          </a:p>
+        </p:txBody>
+      </p:sp>
+      <p:cxnSp>
+        <p:nvCxnSpPr>
+          <p:cNvPr id="46" name="Connector 45"/>
+          <p:cNvCxnSpPr/>
+          <p:nvPr/>
+        </p:nvCxnSpPr>
+        <p:spPr>
+          <a:xfrm>
+            <a:off x="6958583" y="4992624"/>
+            <a:ext cx="146305" cy="0"/>
+          </a:xfrm>
+          <a:prstGeom prst="line">
+            <a:avLst/>
+          </a:prstGeom>
+          <a:ln w="19050">
+            <a:solidFill>
+              <a:srgbClr val="40708B"/>
+            </a:solidFill>
+            <a:tailEnd type="triangle" w="med" len="med"/>
+          </a:ln>
+        </p:spPr>
+      </p:cxnSp>
+      <p:sp>
+        <p:nvSpPr>
+          <p:cNvPr id="47" name="Rectangle 46"/>
+          <p:cNvSpPr/>
+          <p:nvPr/>
+        </p:nvSpPr>
+        <p:spPr>
+          <a:xfrm>
+            <a:off x="7150608" y="4462272"/>
+            <a:ext cx="2852928" cy="1060704"/>
+          </a:xfrm>
+          <a:prstGeom prst="rect">
+            <a:avLst/>
+          </a:prstGeom>
+          <a:solidFill>
+            <a:srgbClr val="FFFFFF"/>
+          </a:solidFill>
+          <a:ln w="9525">
+            <a:solidFill>
+              <a:srgbClr val="CFE3F0"/>
+            </a:solidFill>
+          </a:ln>
+        </p:spPr>
+        <p:txBody>
+          <a:bodyPr rtlCol="0" anchor="ctr"/>
+          <a:lstStyle/>
+          <a:p>
+            <a:pPr algn="ctr"/>
+          </a:p>
+        </p:txBody>
+      </p:sp>
+      <p:sp>
+        <p:nvSpPr>
+          <p:cNvPr id="48" name="Rectangle 47"/>
+          <p:cNvSpPr/>
+          <p:nvPr/>
+        </p:nvSpPr>
+        <p:spPr>
+          <a:xfrm>
+            <a:off x="7150608" y="4462272"/>
+            <a:ext cx="64008" cy="1060704"/>
           </a:xfrm>
           <a:prstGeom prst="rect">
             <a:avLst/>
@@ -14256,14 +14880,14 @@
       </p:sp>
       <p:sp>
         <p:nvSpPr>
-          <p:cNvPr id="35" name="TextBox 34"/>
-          <p:cNvSpPr txBox="1"/>
-          <p:nvPr/>
-        </p:nvSpPr>
-        <p:spPr>
-          <a:xfrm>
-            <a:off x="6437376" y="4663440"/>
-            <a:ext cx="3383279" cy="914400"/>
+          <p:cNvPr id="49" name="TextBox 48"/>
+          <p:cNvSpPr txBox="1"/>
+          <p:nvPr/>
+        </p:nvSpPr>
+        <p:spPr>
+          <a:xfrm>
+            <a:off x="7370064" y="4517136"/>
+            <a:ext cx="2487168" cy="950976"/>
           </a:xfrm>
           <a:prstGeom prst="rect">
             <a:avLst/>
@@ -14284,11 +14908,11 @@
                 <a:spcPts val="0"/>
               </a:spcBef>
               <a:spcAft>
-                <a:spcPts val="300"/>
-              </a:spcAft>
-            </a:pPr>
-            <a:r>
-              <a:rPr sz="1300" b="1">
+                <a:spcPts val="400"/>
+              </a:spcAft>
+            </a:pPr>
+            <a:r>
+              <a:rPr sz="1100" b="1">
                 <a:solidFill>
                   <a:srgbClr val="0A2B45"/>
                 </a:solidFill>
@@ -14296,7 +14920,7 @@
                 <a:ea typeface="Microsoft YaHei"/>
                 <a:cs typeface="Microsoft YaHei"/>
               </a:rPr>
-              <a:t>Harness 判算子</a:t>
+              <a:t>Harness 单算子评测</a:t>
             </a:r>
           </a:p>
           <a:p>
@@ -14312,7 +14936,7 @@
               </a:spcAft>
             </a:pPr>
             <a:r>
-              <a:rPr sz="1000" b="0">
+              <a:rPr sz="900" b="0">
                 <a:solidFill>
                   <a:srgbClr val="1B4D69"/>
                 </a:solidFill>
@@ -14320,51 +14944,49 @@
                 <a:ea typeface="Microsoft YaHei"/>
                 <a:cs typeface="Microsoft YaHei"/>
               </a:rPr>
-              <a:t>规则驱动</a:t>
-            </a:r>
-          </a:p>
-          <a:p>
-            <a:pPr algn="l" latinLnBrk="0">
-              <a:lnSpc>
-                <a:spcPct val="100000"/>
-              </a:lnSpc>
-              <a:spcBef>
-                <a:spcPts val="0"/>
-              </a:spcBef>
-              <a:spcAft>
-                <a:spcPts val="0"/>
-              </a:spcAft>
-            </a:pPr>
-            <a:r>
-              <a:rPr sz="1000" b="0">
-                <a:solidFill>
-                  <a:srgbClr val="1B4D69"/>
-                </a:solidFill>
-                <a:latin typeface="Microsoft YaHei"/>
-                <a:ea typeface="Microsoft YaHei"/>
-                <a:cs typeface="Microsoft YaHei"/>
-              </a:rPr>
-              <a:t>单算子、多 Shape，与 Golden 对齐</a:t>
-            </a:r>
-          </a:p>
-        </p:txBody>
-      </p:sp>
-      <p:sp>
-        <p:nvSpPr>
-          <p:cNvPr id="36" name="Rectangle 35"/>
+              <a:t>编译通过 · Golden 对齐 · 真机实测更快</a:t>
+            </a:r>
+          </a:p>
+        </p:txBody>
+      </p:sp>
+      <p:cxnSp>
+        <p:nvCxnSpPr>
+          <p:cNvPr id="50" name="Connector 49"/>
+          <p:cNvCxnSpPr/>
+          <p:nvPr/>
+        </p:nvCxnSpPr>
+        <p:spPr>
+          <a:xfrm>
+            <a:off x="10049256" y="4992624"/>
+            <a:ext cx="146303" cy="0"/>
+          </a:xfrm>
+          <a:prstGeom prst="line">
+            <a:avLst/>
+          </a:prstGeom>
+          <a:ln w="19050">
+            <a:solidFill>
+              <a:srgbClr val="40708B"/>
+            </a:solidFill>
+            <a:tailEnd type="triangle" w="med" len="med"/>
+          </a:ln>
+        </p:spPr>
+      </p:cxnSp>
+      <p:sp>
+        <p:nvSpPr>
+          <p:cNvPr id="51" name="Rectangle 50"/>
           <p:cNvSpPr/>
           <p:nvPr/>
         </p:nvSpPr>
         <p:spPr>
           <a:xfrm>
-            <a:off x="10332720" y="4626864"/>
-            <a:ext cx="1188720" cy="987552"/>
+            <a:off x="10241280" y="4462272"/>
+            <a:ext cx="1389888" cy="1060704"/>
           </a:xfrm>
           <a:prstGeom prst="rect">
             <a:avLst/>
           </a:prstGeom>
           <a:solidFill>
-            <a:srgbClr val="F2F8FD"/>
+            <a:srgbClr val="FFFFFF"/>
           </a:solidFill>
           <a:ln w="9525">
             <a:solidFill>
@@ -14382,14 +15004,14 @@
       </p:sp>
       <p:sp>
         <p:nvSpPr>
-          <p:cNvPr id="37" name="TextBox 36"/>
-          <p:cNvSpPr txBox="1"/>
-          <p:nvPr/>
-        </p:nvSpPr>
-        <p:spPr>
-          <a:xfrm>
-            <a:off x="10424160" y="4626864"/>
-            <a:ext cx="1005840" cy="987552"/>
+          <p:cNvPr id="52" name="TextBox 51"/>
+          <p:cNvSpPr txBox="1"/>
+          <p:nvPr/>
+        </p:nvSpPr>
+        <p:spPr>
+          <a:xfrm>
+            <a:off x="10387584" y="4517136"/>
+            <a:ext cx="1024128" cy="950976"/>
           </a:xfrm>
           <a:prstGeom prst="rect">
             <a:avLst/>
@@ -14402,19 +15024,19 @@
           </a:bodyPr>
           <a:lstStyle/>
           <a:p>
-            <a:pPr algn="ctr" latinLnBrk="0">
-              <a:lnSpc>
-                <a:spcPct val="100000"/>
-              </a:lnSpc>
-              <a:spcBef>
-                <a:spcPts val="0"/>
-              </a:spcBef>
-              <a:spcAft>
-                <a:spcPts val="200"/>
-              </a:spcAft>
-            </a:pPr>
-            <a:r>
-              <a:rPr sz="1300" b="1">
+            <a:pPr algn="l" latinLnBrk="0">
+              <a:lnSpc>
+                <a:spcPct val="100000"/>
+              </a:lnSpc>
+              <a:spcBef>
+                <a:spcPts val="0"/>
+              </a:spcBef>
+              <a:spcAft>
+                <a:spcPts val="400"/>
+              </a:spcAft>
+            </a:pPr>
+            <a:r>
+              <a:rPr sz="1100" b="1">
                 <a:solidFill>
                   <a:srgbClr val="0A2B45"/>
                 </a:solidFill>
@@ -14422,25 +15044,25 @@
                 <a:ea typeface="Microsoft YaHei"/>
                 <a:cs typeface="Microsoft YaHei"/>
               </a:rPr>
-              <a:t>候选</a:t>
-            </a:r>
-          </a:p>
-          <a:p>
-            <a:pPr algn="ctr" latinLnBrk="0">
-              <a:lnSpc>
-                <a:spcPct val="100000"/>
-              </a:lnSpc>
-              <a:spcBef>
-                <a:spcPts val="0"/>
-              </a:spcBef>
-              <a:spcAft>
-                <a:spcPts val="0"/>
-              </a:spcAft>
-            </a:pPr>
-            <a:r>
-              <a:rPr sz="950" b="0">
-                <a:solidFill>
-                  <a:srgbClr val="40708B"/>
+              <a:t>候选库</a:t>
+            </a:r>
+          </a:p>
+          <a:p>
+            <a:pPr algn="l" latinLnBrk="0">
+              <a:lnSpc>
+                <a:spcPct val="100000"/>
+              </a:lnSpc>
+              <a:spcBef>
+                <a:spcPts val="0"/>
+              </a:spcBef>
+              <a:spcAft>
+                <a:spcPts val="0"/>
+              </a:spcAft>
+            </a:pPr>
+            <a:r>
+              <a:rPr sz="900" b="0">
+                <a:solidFill>
+                  <a:srgbClr val="1B4D69"/>
                 </a:solidFill>
                 <a:latin typeface="Microsoft YaHei"/>
                 <a:ea typeface="Microsoft YaHei"/>
@@ -14451,82 +15073,16 @@
           </a:p>
         </p:txBody>
       </p:sp>
-      <p:cxnSp>
-        <p:nvCxnSpPr>
-          <p:cNvPr id="38" name="Connector 37"/>
-          <p:cNvCxnSpPr/>
-          <p:nvPr/>
-        </p:nvCxnSpPr>
-        <p:spPr>
-          <a:xfrm>
-            <a:off x="2249424" y="5120640"/>
-            <a:ext cx="256032" cy="0"/>
-          </a:xfrm>
-          <a:prstGeom prst="line">
-            <a:avLst/>
-          </a:prstGeom>
-          <a:ln w="19050">
-            <a:solidFill>
-              <a:srgbClr val="40708B"/>
-            </a:solidFill>
-            <a:tailEnd type="triangle" w="med" len="med"/>
-          </a:ln>
-        </p:spPr>
-      </p:cxnSp>
-      <p:cxnSp>
-        <p:nvCxnSpPr>
-          <p:cNvPr id="39" name="Connector 38"/>
-          <p:cNvCxnSpPr/>
-          <p:nvPr/>
-        </p:nvCxnSpPr>
-        <p:spPr>
-          <a:xfrm>
-            <a:off x="5815583" y="5120640"/>
-            <a:ext cx="347473" cy="0"/>
-          </a:xfrm>
-          <a:prstGeom prst="line">
-            <a:avLst/>
-          </a:prstGeom>
-          <a:ln w="19050">
-            <a:solidFill>
-              <a:srgbClr val="40708B"/>
-            </a:solidFill>
-            <a:tailEnd type="triangle" w="med" len="med"/>
-          </a:ln>
-        </p:spPr>
-      </p:cxnSp>
-      <p:cxnSp>
-        <p:nvCxnSpPr>
-          <p:cNvPr id="40" name="Connector 39"/>
-          <p:cNvCxnSpPr/>
-          <p:nvPr/>
-        </p:nvCxnSpPr>
-        <p:spPr>
-          <a:xfrm>
-            <a:off x="10021824" y="5120640"/>
-            <a:ext cx="256032" cy="0"/>
-          </a:xfrm>
-          <a:prstGeom prst="line">
-            <a:avLst/>
-          </a:prstGeom>
-          <a:ln w="19050">
-            <a:solidFill>
-              <a:srgbClr val="40708B"/>
-            </a:solidFill>
-            <a:tailEnd type="triangle" w="med" len="med"/>
-          </a:ln>
-        </p:spPr>
-      </p:cxnSp>
-      <p:sp>
-        <p:nvSpPr>
-          <p:cNvPr id="41" name="Freeform 40"/>
+      <p:sp>
+        <p:nvSpPr>
+          <p:cNvPr id="53" name="Freeform 52"/>
           <p:cNvSpPr/>
           <p:nvPr/>
         </p:nvSpPr>
         <p:spPr>
           <a:xfrm>
-            <a:off x="4160520" y="4462272"/>
-            <a:ext cx="3931920" cy="164592"/>
+            <a:off x="5577840" y="4370832"/>
+            <a:ext cx="2999232" cy="91440"/>
           </a:xfrm>
           <a:custGeom>
             <a:avLst/>
@@ -14535,12 +15091,12 @@
             <a:cxnLst/>
             <a:rect l="l" t="t" r="r" b="b"/>
             <a:pathLst>
-              <a:path w="3931920" h="164592">
+              <a:path w="2999232" h="91440">
                 <a:moveTo>
-                  <a:pt x="3931920" y="164592"/>
+                  <a:pt x="2999232" y="91440"/>
                 </a:moveTo>
                 <a:lnTo>
-                  <a:pt x="3931920" y="0"/>
+                  <a:pt x="2999232" y="0"/>
                 </a:lnTo>
                 <a:lnTo>
                   <a:pt x="0" y="0"/>
@@ -14565,14 +15121,14 @@
       </p:sp>
       <p:cxnSp>
         <p:nvCxnSpPr>
-          <p:cNvPr id="42" name="Connector 41"/>
+          <p:cNvPr id="54" name="Connector 53"/>
           <p:cNvCxnSpPr/>
           <p:nvPr/>
         </p:nvCxnSpPr>
         <p:spPr>
           <a:xfrm>
-            <a:off x="4160520" y="4462272"/>
-            <a:ext cx="0" cy="146304"/>
+            <a:off x="5577840" y="4370832"/>
+            <a:ext cx="0" cy="73152"/>
           </a:xfrm>
           <a:prstGeom prst="line">
             <a:avLst/>
@@ -14587,14 +15143,14 @@
       </p:cxnSp>
       <p:sp>
         <p:nvSpPr>
-          <p:cNvPr id="43" name="TextBox 42"/>
-          <p:cNvSpPr txBox="1"/>
-          <p:nvPr/>
-        </p:nvSpPr>
-        <p:spPr>
-          <a:xfrm>
-            <a:off x="4754879" y="4169663"/>
-            <a:ext cx="2743200" cy="256032"/>
+          <p:cNvPr id="55" name="TextBox 54"/>
+          <p:cNvSpPr txBox="1"/>
+          <p:nvPr/>
+        </p:nvSpPr>
+        <p:spPr>
+          <a:xfrm>
+            <a:off x="5614416" y="4142232"/>
+            <a:ext cx="2926080" cy="219456"/>
           </a:xfrm>
           <a:prstGeom prst="rect">
             <a:avLst/>
@@ -14627,21 +15183,21 @@
                 <a:ea typeface="Microsoft YaHei"/>
                 <a:cs typeface="Microsoft YaHei"/>
               </a:rPr>
-              <a:t>不过即淘汰，带着证据退回</a:t>
-            </a:r>
-          </a:p>
-        </p:txBody>
-      </p:sp>
-      <p:sp>
-        <p:nvSpPr>
-          <p:cNvPr id="44" name="Rectangle 43"/>
+              <a:t>✕　不过即淘汰，带着证据退回</a:t>
+            </a:r>
+          </a:p>
+        </p:txBody>
+      </p:sp>
+      <p:sp>
+        <p:nvSpPr>
+          <p:cNvPr id="56" name="Rectangle 55"/>
           <p:cNvSpPr/>
           <p:nvPr/>
         </p:nvSpPr>
         <p:spPr>
           <a:xfrm>
-            <a:off x="548640" y="3236976"/>
-            <a:ext cx="11094415" cy="548640"/>
+            <a:off x="548640" y="3310128"/>
+            <a:ext cx="11094415" cy="731520"/>
           </a:xfrm>
           <a:prstGeom prst="rect">
             <a:avLst/>
@@ -14663,19 +15219,19 @@
       </p:sp>
       <p:cxnSp>
         <p:nvCxnSpPr>
-          <p:cNvPr id="45" name="Connector 44"/>
+          <p:cNvPr id="57" name="Connector 56"/>
           <p:cNvCxnSpPr/>
           <p:nvPr/>
         </p:nvCxnSpPr>
         <p:spPr>
-          <a:xfrm>
-            <a:off x="960120" y="3346704"/>
-            <a:ext cx="0" cy="329183"/>
+          <a:xfrm flipV="1">
+            <a:off x="5577840" y="3401568"/>
+            <a:ext cx="0" cy="548640"/>
           </a:xfrm>
           <a:prstGeom prst="line">
             <a:avLst/>
           </a:prstGeom>
-          <a:ln w="19050">
+          <a:ln w="22225">
             <a:solidFill>
               <a:srgbClr val="D2690C"/>
             </a:solidFill>
@@ -14685,14 +15241,14 @@
       </p:cxnSp>
       <p:sp>
         <p:nvSpPr>
-          <p:cNvPr id="46" name="TextBox 45"/>
-          <p:cNvSpPr txBox="1"/>
-          <p:nvPr/>
-        </p:nvSpPr>
-        <p:spPr>
-          <a:xfrm>
-            <a:off x="1143000" y="3236976"/>
-            <a:ext cx="5120640" cy="548640"/>
+          <p:cNvPr id="58" name="TextBox 57"/>
+          <p:cNvSpPr txBox="1"/>
+          <p:nvPr/>
+        </p:nvSpPr>
+        <p:spPr>
+          <a:xfrm>
+            <a:off x="2212848" y="3310128"/>
+            <a:ext cx="3182111" cy="731520"/>
           </a:xfrm>
           <a:prstGeom prst="rect">
             <a:avLst/>
@@ -14705,19 +15261,19 @@
           </a:bodyPr>
           <a:lstStyle/>
           <a:p>
-            <a:pPr algn="l" latinLnBrk="0">
-              <a:lnSpc>
-                <a:spcPct val="100000"/>
-              </a:lnSpc>
-              <a:spcBef>
-                <a:spcPts val="0"/>
-              </a:spcBef>
-              <a:spcAft>
-                <a:spcPts val="0"/>
-              </a:spcAft>
-            </a:pPr>
-            <a:r>
-              <a:rPr sz="1000" b="1">
+            <a:pPr algn="r" latinLnBrk="0">
+              <a:lnSpc>
+                <a:spcPct val="100000"/>
+              </a:lnSpc>
+              <a:spcBef>
+                <a:spcPts val="0"/>
+              </a:spcBef>
+              <a:spcAft>
+                <a:spcPts val="300"/>
+              </a:spcAft>
+            </a:pPr>
+            <a:r>
+              <a:rPr sz="1050" b="1">
                 <a:solidFill>
                   <a:srgbClr val="C2570A"/>
                 </a:solidFill>
@@ -14725,10 +15281,34 @@
                 <a:ea typeface="Microsoft YaHei"/>
                 <a:cs typeface="Microsoft YaHei"/>
               </a:rPr>
-              <a:t>模型层 → 算子层　</a:t>
-            </a:r>
-            <a:r>
-              <a:rPr sz="1050" b="0">
+              <a:t>② </a:t>
+            </a:r>
+            <a:r>
+              <a:rPr sz="1050" b="1">
+                <a:solidFill>
+                  <a:srgbClr val="0A2B45"/>
+                </a:solidFill>
+                <a:latin typeface="Microsoft YaHei"/>
+                <a:ea typeface="Microsoft YaHei"/>
+                <a:cs typeface="Microsoft YaHei"/>
+              </a:rPr>
+              <a:t>算子层 → 模型层</a:t>
+            </a:r>
+          </a:p>
+          <a:p>
+            <a:pPr algn="r" latinLnBrk="0">
+              <a:lnSpc>
+                <a:spcPct val="100000"/>
+              </a:lnSpc>
+              <a:spcBef>
+                <a:spcPts val="0"/>
+              </a:spcBef>
+              <a:spcAft>
+                <a:spcPts val="0"/>
+              </a:spcAft>
+            </a:pPr>
+            <a:r>
+              <a:rPr sz="950" b="0">
                 <a:solidFill>
                   <a:srgbClr val="1B4D69"/>
                 </a:solidFill>
@@ -14736,26 +15316,26 @@
                 <a:ea typeface="Microsoft YaHei"/>
                 <a:cs typeface="Microsoft YaHei"/>
               </a:rPr>
-              <a:t>Trace 定位的瓶颈算子，转成带输入规格的算子请求</a:t>
+              <a:t>交付新算子内核，合入候选分支重跑整模型复验</a:t>
             </a:r>
           </a:p>
         </p:txBody>
       </p:sp>
       <p:cxnSp>
         <p:nvCxnSpPr>
-          <p:cNvPr id="47" name="Connector 46"/>
+          <p:cNvPr id="59" name="Connector 58"/>
           <p:cNvCxnSpPr/>
           <p:nvPr/>
         </p:nvCxnSpPr>
         <p:spPr>
-          <a:xfrm flipV="1">
-            <a:off x="6446520" y="3346704"/>
-            <a:ext cx="0" cy="329183"/>
+          <a:xfrm>
+            <a:off x="8577072" y="3401568"/>
+            <a:ext cx="0" cy="548640"/>
           </a:xfrm>
           <a:prstGeom prst="line">
             <a:avLst/>
           </a:prstGeom>
-          <a:ln w="19050">
+          <a:ln w="22225">
             <a:solidFill>
               <a:srgbClr val="D2690C"/>
             </a:solidFill>
@@ -14765,14 +15345,14 @@
       </p:cxnSp>
       <p:sp>
         <p:nvSpPr>
-          <p:cNvPr id="48" name="TextBox 47"/>
-          <p:cNvSpPr txBox="1"/>
-          <p:nvPr/>
-        </p:nvSpPr>
-        <p:spPr>
-          <a:xfrm>
-            <a:off x="6629400" y="3236976"/>
-            <a:ext cx="5120640" cy="548640"/>
+          <p:cNvPr id="60" name="TextBox 59"/>
+          <p:cNvSpPr txBox="1"/>
+          <p:nvPr/>
+        </p:nvSpPr>
+        <p:spPr>
+          <a:xfrm>
+            <a:off x="8759952" y="3310128"/>
+            <a:ext cx="2883103" cy="731520"/>
           </a:xfrm>
           <a:prstGeom prst="rect">
             <a:avLst/>
@@ -14793,11 +15373,11 @@
                 <a:spcPts val="0"/>
               </a:spcBef>
               <a:spcAft>
-                <a:spcPts val="0"/>
-              </a:spcAft>
-            </a:pPr>
-            <a:r>
-              <a:rPr sz="1000" b="1">
+                <a:spcPts val="300"/>
+              </a:spcAft>
+            </a:pPr>
+            <a:r>
+              <a:rPr sz="1050" b="1">
                 <a:solidFill>
                   <a:srgbClr val="C2570A"/>
                 </a:solidFill>
@@ -14805,10 +15385,34 @@
                 <a:ea typeface="Microsoft YaHei"/>
                 <a:cs typeface="Microsoft YaHei"/>
               </a:rPr>
-              <a:t>算子层 → 模型层　</a:t>
-            </a:r>
-            <a:r>
-              <a:rPr sz="1050" b="0">
+              <a:t>① </a:t>
+            </a:r>
+            <a:r>
+              <a:rPr sz="1050" b="1">
+                <a:solidFill>
+                  <a:srgbClr val="0A2B45"/>
+                </a:solidFill>
+                <a:latin typeface="Microsoft YaHei"/>
+                <a:ea typeface="Microsoft YaHei"/>
+                <a:cs typeface="Microsoft YaHei"/>
+              </a:rPr>
+              <a:t>模型层 → 算子层</a:t>
+            </a:r>
+          </a:p>
+          <a:p>
+            <a:pPr algn="l" latinLnBrk="0">
+              <a:lnSpc>
+                <a:spcPct val="100000"/>
+              </a:lnSpc>
+              <a:spcBef>
+                <a:spcPts val="0"/>
+              </a:spcBef>
+              <a:spcAft>
+                <a:spcPts val="0"/>
+              </a:spcAft>
+            </a:pPr>
+            <a:r>
+              <a:rPr sz="950" b="0">
                 <a:solidFill>
                   <a:srgbClr val="1B4D69"/>
                 </a:solidFill>
@@ -14816,21 +15420,21 @@
                 <a:ea typeface="Microsoft YaHei"/>
                 <a:cs typeface="Microsoft YaHei"/>
               </a:rPr>
-              <a:t>新内核合入候选分支，重新执行模型层验收</a:t>
-            </a:r>
-          </a:p>
-        </p:txBody>
-      </p:sp>
-      <p:sp>
-        <p:nvSpPr>
-          <p:cNvPr id="49" name="Rectangle 48"/>
+              <a:t>Trace 定位瓶颈算子，下发 Shape 规格</a:t>
+            </a:r>
+          </a:p>
+        </p:txBody>
+      </p:sp>
+      <p:sp>
+        <p:nvSpPr>
+          <p:cNvPr id="61" name="Rectangle 60"/>
           <p:cNvSpPr/>
           <p:nvPr/>
         </p:nvSpPr>
         <p:spPr>
           <a:xfrm>
-            <a:off x="548640" y="5998464"/>
-            <a:ext cx="11094415" cy="658368"/>
+            <a:off x="548640" y="5705856"/>
+            <a:ext cx="11094415" cy="621792"/>
           </a:xfrm>
           <a:prstGeom prst="rect">
             <a:avLst/>
@@ -14852,14 +15456,14 @@
       </p:sp>
       <p:sp>
         <p:nvSpPr>
-          <p:cNvPr id="50" name="Rectangle 49"/>
+          <p:cNvPr id="62" name="Rectangle 61"/>
           <p:cNvSpPr/>
           <p:nvPr/>
         </p:nvSpPr>
         <p:spPr>
           <a:xfrm>
-            <a:off x="548640" y="5998464"/>
-            <a:ext cx="73152" cy="658368"/>
+            <a:off x="548640" y="5705856"/>
+            <a:ext cx="73152" cy="621792"/>
           </a:xfrm>
           <a:prstGeom prst="rect">
             <a:avLst/>
@@ -14881,13 +15485,13 @@
       </p:sp>
       <p:sp>
         <p:nvSpPr>
-          <p:cNvPr id="51" name="TextBox 50"/>
-          <p:cNvSpPr txBox="1"/>
-          <p:nvPr/>
-        </p:nvSpPr>
-        <p:spPr>
-          <a:xfrm>
-            <a:off x="877824" y="6089903"/>
+          <p:cNvPr id="63" name="TextBox 62"/>
+          <p:cNvSpPr txBox="1"/>
+          <p:nvPr/>
+        </p:nvSpPr>
+        <p:spPr>
+          <a:xfrm>
+            <a:off x="877824" y="5797296"/>
             <a:ext cx="10436047" cy="384048"/>
           </a:xfrm>
           <a:prstGeom prst="rect">
@@ -14921,10 +15525,10 @@
                 <a:ea typeface="Microsoft YaHei"/>
                 <a:cs typeface="Microsoft YaHei"/>
               </a:rPr>
-              <a:t>关键：　</a:t>
-            </a:r>
-            <a:r>
-              <a:rPr sz="1400" b="1">
+              <a:t>核心原则：　</a:t>
+            </a:r>
+            <a:r>
+              <a:rPr sz="1350" b="1">
                 <a:solidFill>
                   <a:srgbClr val="0A2B45"/>
                 </a:solidFill>
@@ -14932,20 +15536,20 @@
                 <a:ea typeface="Microsoft YaHei"/>
                 <a:cs typeface="Microsoft YaHei"/>
               </a:rPr>
-              <a:t>算子kernel优化既要通过算子验收，更要通过整模型复验</a:t>
-            </a:r>
-          </a:p>
-        </p:txBody>
-      </p:sp>
-      <p:sp>
-        <p:nvSpPr>
-          <p:cNvPr id="52" name="TextBox 51"/>
-          <p:cNvSpPr txBox="1"/>
-          <p:nvPr/>
-        </p:nvSpPr>
-        <p:spPr>
-          <a:xfrm>
-            <a:off x="877824" y="6309359"/>
+              <a:t>算子局部加速 ≠ 整模型收益；任何算子优化必须回流通过整模型真机复验方可交付</a:t>
+            </a:r>
+          </a:p>
+        </p:txBody>
+      </p:sp>
+      <p:sp>
+        <p:nvSpPr>
+          <p:cNvPr id="64" name="TextBox 63"/>
+          <p:cNvSpPr txBox="1"/>
+          <p:nvPr/>
+        </p:nvSpPr>
+        <p:spPr>
+          <a:xfrm>
+            <a:off x="877824" y="5980176"/>
             <a:ext cx="10436047" cy="292608"/>
           </a:xfrm>
           <a:prstGeom prst="rect">
@@ -14986,7 +15590,7 @@
       </p:sp>
       <p:sp>
         <p:nvSpPr>
-          <p:cNvPr id="53" name="TextBox 52"/>
+          <p:cNvPr id="65" name="TextBox 64"/>
           <p:cNvSpPr txBox="1"/>
           <p:nvPr/>
         </p:nvSpPr>

--- a/slides/m100_agent_final_deck.pptx
+++ b/slides/m100_agent_final_deck.pptx
@@ -9379,27 +9379,48 @@
                 <a:ea typeface="Microsoft YaHei"/>
                 <a:cs typeface="Microsoft YaHei"/>
               </a:rPr>
-              <a:t>两层 Agent 由同一套组件拼成：记忆 → 观察 → 思考 → 行动；差别只在订阅哪些消息、调用哪些工具、由谁判决</a:t>
-            </a:r>
-          </a:p>
-        </p:txBody>
-      </p:sp>
-      <p:sp>
-        <p:nvSpPr>
-          <p:cNvPr id="6" name="Rectangle 5"/>
+              <a:t>两层 Agent 同构：同一套内部组件，差别只在订阅哪些消息、调用哪些工具</a:t>
+            </a:r>
+          </a:p>
+        </p:txBody>
+      </p:sp>
+      <p:cxnSp>
+        <p:nvCxnSpPr>
+          <p:cNvPr id="6" name="Connector 5"/>
+          <p:cNvCxnSpPr/>
+          <p:nvPr/>
+        </p:nvCxnSpPr>
+        <p:spPr>
+          <a:xfrm>
+            <a:off x="1060704" y="1536192"/>
+            <a:ext cx="0" cy="100584"/>
+          </a:xfrm>
+          <a:prstGeom prst="line">
+            <a:avLst/>
+          </a:prstGeom>
+          <a:ln w="15875">
+            <a:solidFill>
+              <a:srgbClr val="40708B"/>
+            </a:solidFill>
+          </a:ln>
+        </p:spPr>
+      </p:cxnSp>
+      <p:sp>
+        <p:nvSpPr>
+          <p:cNvPr id="7" name="Oval 6"/>
           <p:cNvSpPr/>
           <p:nvPr/>
         </p:nvSpPr>
         <p:spPr>
           <a:xfrm>
-            <a:off x="548640" y="1207008"/>
-            <a:ext cx="2615184" cy="4626864"/>
-          </a:xfrm>
-          <a:prstGeom prst="rect">
+            <a:off x="1010412" y="1435608"/>
+            <a:ext cx="100584" cy="100584"/>
+          </a:xfrm>
+          <a:prstGeom prst="ellipse">
             <a:avLst/>
           </a:prstGeom>
           <a:solidFill>
-            <a:srgbClr val="E6F0FC"/>
+            <a:srgbClr val="40708B"/>
           </a:solidFill>
           <a:ln>
             <a:noFill/>
@@ -9415,20 +9436,53 @@
       </p:sp>
       <p:sp>
         <p:nvSpPr>
-          <p:cNvPr id="7" name="Rectangle 6"/>
+          <p:cNvPr id="8" name="Rounded Rectangle 7"/>
           <p:cNvSpPr/>
           <p:nvPr/>
         </p:nvSpPr>
         <p:spPr>
           <a:xfrm>
-            <a:off x="548640" y="1207008"/>
-            <a:ext cx="2615184" cy="54864"/>
-          </a:xfrm>
-          <a:prstGeom prst="rect">
-            <a:avLst/>
+            <a:off x="813815" y="1645920"/>
+            <a:ext cx="493776" cy="402336"/>
+          </a:xfrm>
+          <a:prstGeom prst="roundRect">
+            <a:avLst>
+              <a:gd name="adj" fmla="val 24000"/>
+            </a:avLst>
           </a:prstGeom>
           <a:solidFill>
-            <a:srgbClr val="0F62CE"/>
+            <a:srgbClr val="FFFFFF"/>
+          </a:solidFill>
+          <a:ln w="19050">
+            <a:solidFill>
+              <a:srgbClr val="40708B"/>
+            </a:solidFill>
+          </a:ln>
+        </p:spPr>
+        <p:txBody>
+          <a:bodyPr rtlCol="0" anchor="ctr"/>
+          <a:lstStyle/>
+          <a:p>
+            <a:pPr algn="ctr"/>
+          </a:p>
+        </p:txBody>
+      </p:sp>
+      <p:sp>
+        <p:nvSpPr>
+          <p:cNvPr id="9" name="Oval 8"/>
+          <p:cNvSpPr/>
+          <p:nvPr/>
+        </p:nvSpPr>
+        <p:spPr>
+          <a:xfrm>
+            <a:off x="928115" y="1773936"/>
+            <a:ext cx="82296" cy="82296"/>
+          </a:xfrm>
+          <a:prstGeom prst="ellipse">
+            <a:avLst/>
+          </a:prstGeom>
+          <a:solidFill>
+            <a:srgbClr val="40708B"/>
           </a:solidFill>
           <a:ln>
             <a:noFill/>
@@ -9444,97 +9498,411 @@
       </p:sp>
       <p:sp>
         <p:nvSpPr>
-          <p:cNvPr id="8" name="TextBox 7"/>
-          <p:cNvSpPr txBox="1"/>
-          <p:nvPr/>
-        </p:nvSpPr>
-        <p:spPr>
-          <a:xfrm>
-            <a:off x="713232" y="1298448"/>
-            <a:ext cx="2322576" cy="237744"/>
-          </a:xfrm>
-          <a:prstGeom prst="rect">
-            <a:avLst/>
-          </a:prstGeom>
-          <a:noFill/>
-        </p:spPr>
-        <p:txBody>
-          <a:bodyPr wrap="square" anchor="ctr" lIns="0" tIns="0" rIns="0" bIns="0">
-            <a:noAutofit/>
-          </a:bodyPr>
-          <a:lstStyle/>
-          <a:p>
-            <a:pPr algn="l" latinLnBrk="0">
-              <a:lnSpc>
-                <a:spcPct val="100000"/>
-              </a:lnSpc>
-              <a:spcBef>
-                <a:spcPts val="0"/>
-              </a:spcBef>
-              <a:spcAft>
-                <a:spcPts val="0"/>
-              </a:spcAft>
-            </a:pPr>
-            <a:r>
-              <a:rPr sz="1150" b="1">
-                <a:solidFill>
-                  <a:srgbClr val="0F62CE"/>
-                </a:solidFill>
-                <a:latin typeface="Microsoft YaHei"/>
-                <a:ea typeface="Microsoft YaHei"/>
-                <a:cs typeface="Microsoft YaHei"/>
-              </a:rPr>
-              <a:t>环境（Environment）</a:t>
-            </a:r>
+          <p:cNvPr id="10" name="Oval 9"/>
+          <p:cNvSpPr/>
+          <p:nvPr/>
+        </p:nvSpPr>
+        <p:spPr>
+          <a:xfrm>
+            <a:off x="1110996" y="1773936"/>
+            <a:ext cx="82296" cy="82296"/>
+          </a:xfrm>
+          <a:prstGeom prst="ellipse">
+            <a:avLst/>
+          </a:prstGeom>
+          <a:solidFill>
+            <a:srgbClr val="40708B"/>
+          </a:solidFill>
+          <a:ln>
+            <a:noFill/>
+          </a:ln>
+        </p:spPr>
+        <p:txBody>
+          <a:bodyPr rtlCol="0" anchor="ctr"/>
+          <a:lstStyle/>
+          <a:p>
+            <a:pPr algn="ctr"/>
+          </a:p>
+        </p:txBody>
+      </p:sp>
+      <p:sp>
+        <p:nvSpPr>
+          <p:cNvPr id="11" name="Rounded Rectangle 10"/>
+          <p:cNvSpPr/>
+          <p:nvPr/>
+        </p:nvSpPr>
+        <p:spPr>
+          <a:xfrm>
+            <a:off x="758951" y="2093976"/>
+            <a:ext cx="603504" cy="100584"/>
+          </a:xfrm>
+          <a:prstGeom prst="roundRect">
+            <a:avLst>
+              <a:gd name="adj" fmla="val 50000"/>
+            </a:avLst>
+          </a:prstGeom>
+          <a:solidFill>
+            <a:srgbClr val="40708B"/>
+          </a:solidFill>
+          <a:ln>
+            <a:noFill/>
+          </a:ln>
+        </p:spPr>
+        <p:txBody>
+          <a:bodyPr rtlCol="0" anchor="ctr"/>
+          <a:lstStyle/>
+          <a:p>
+            <a:pPr algn="ctr"/>
+          </a:p>
+        </p:txBody>
+      </p:sp>
+      <p:sp>
+        <p:nvSpPr>
+          <p:cNvPr id="12" name="TextBox 11"/>
+          <p:cNvSpPr txBox="1"/>
+          <p:nvPr/>
+        </p:nvSpPr>
+        <p:spPr>
+          <a:xfrm>
+            <a:off x="402335" y="2267712"/>
+            <a:ext cx="1316736" cy="201168"/>
+          </a:xfrm>
+          <a:prstGeom prst="rect">
+            <a:avLst/>
+          </a:prstGeom>
+          <a:noFill/>
+        </p:spPr>
+        <p:txBody>
+          <a:bodyPr wrap="square" anchor="ctr" lIns="0" tIns="0" rIns="0" bIns="0">
+            <a:noAutofit/>
+          </a:bodyPr>
+          <a:lstStyle/>
+          <a:p>
+            <a:pPr algn="ctr" latinLnBrk="0">
+              <a:lnSpc>
+                <a:spcPct val="100000"/>
+              </a:lnSpc>
+              <a:spcBef>
+                <a:spcPts val="0"/>
+              </a:spcBef>
+              <a:spcAft>
+                <a:spcPts val="0"/>
+              </a:spcAft>
+            </a:pPr>
             <a:r>
               <a:rPr sz="950" b="1">
                 <a:solidFill>
-                  <a:srgbClr val="1B4D69"/>
-                </a:solidFill>
-                <a:latin typeface="Microsoft YaHei"/>
-                <a:ea typeface="Microsoft YaHei"/>
-                <a:cs typeface="Microsoft YaHei"/>
-              </a:rPr>
-              <a:t>　消息总线</a:t>
-            </a:r>
-          </a:p>
-        </p:txBody>
-      </p:sp>
-      <p:sp>
-        <p:nvSpPr>
-          <p:cNvPr id="9" name="TextBox 8"/>
-          <p:cNvSpPr txBox="1"/>
-          <p:nvPr/>
-        </p:nvSpPr>
-        <p:spPr>
-          <a:xfrm>
-            <a:off x="713232" y="1536192"/>
-            <a:ext cx="2322576" cy="201168"/>
-          </a:xfrm>
-          <a:prstGeom prst="rect">
-            <a:avLst/>
-          </a:prstGeom>
-          <a:noFill/>
-        </p:spPr>
-        <p:txBody>
-          <a:bodyPr wrap="square" anchor="ctr" lIns="0" tIns="0" rIns="0" bIns="0">
-            <a:noAutofit/>
-          </a:bodyPr>
-          <a:lstStyle/>
-          <a:p>
-            <a:pPr algn="l" latinLnBrk="0">
-              <a:lnSpc>
-                <a:spcPct val="100000"/>
-              </a:lnSpc>
-              <a:spcBef>
-                <a:spcPts val="0"/>
-              </a:spcBef>
-              <a:spcAft>
-                <a:spcPts val="0"/>
-              </a:spcAft>
-            </a:pPr>
-            <a:r>
-              <a:rPr sz="850" b="0">
+                  <a:srgbClr val="123C5B"/>
+                </a:solidFill>
+                <a:latin typeface="Microsoft YaHei"/>
+                <a:ea typeface="Microsoft YaHei"/>
+                <a:cs typeface="Microsoft YaHei"/>
+              </a:rPr>
+              <a:t>模型层 Agent</a:t>
+            </a:r>
+          </a:p>
+        </p:txBody>
+      </p:sp>
+      <p:cxnSp>
+        <p:nvCxnSpPr>
+          <p:cNvPr id="13" name="Connector 12"/>
+          <p:cNvCxnSpPr/>
+          <p:nvPr/>
+        </p:nvCxnSpPr>
+        <p:spPr>
+          <a:xfrm>
+            <a:off x="1344168" y="1847088"/>
+            <a:ext cx="374904" cy="0"/>
+          </a:xfrm>
+          <a:prstGeom prst="line">
+            <a:avLst/>
+          </a:prstGeom>
+          <a:ln w="15875">
+            <a:solidFill>
+              <a:srgbClr val="40708B"/>
+            </a:solidFill>
+            <a:headEnd type="triangle" w="med" len="med"/>
+            <a:tailEnd type="triangle" w="med" len="med"/>
+          </a:ln>
+        </p:spPr>
+      </p:cxnSp>
+      <p:cxnSp>
+        <p:nvCxnSpPr>
+          <p:cNvPr id="14" name="Connector 13"/>
+          <p:cNvCxnSpPr/>
+          <p:nvPr/>
+        </p:nvCxnSpPr>
+        <p:spPr>
+          <a:xfrm>
+            <a:off x="1060704" y="3547872"/>
+            <a:ext cx="0" cy="100584"/>
+          </a:xfrm>
+          <a:prstGeom prst="line">
+            <a:avLst/>
+          </a:prstGeom>
+          <a:ln w="15875">
+            <a:solidFill>
+              <a:srgbClr val="40708B"/>
+            </a:solidFill>
+          </a:ln>
+        </p:spPr>
+      </p:cxnSp>
+      <p:sp>
+        <p:nvSpPr>
+          <p:cNvPr id="15" name="Oval 14"/>
+          <p:cNvSpPr/>
+          <p:nvPr/>
+        </p:nvSpPr>
+        <p:spPr>
+          <a:xfrm>
+            <a:off x="1010412" y="3447287"/>
+            <a:ext cx="100584" cy="100584"/>
+          </a:xfrm>
+          <a:prstGeom prst="ellipse">
+            <a:avLst/>
+          </a:prstGeom>
+          <a:solidFill>
+            <a:srgbClr val="40708B"/>
+          </a:solidFill>
+          <a:ln>
+            <a:noFill/>
+          </a:ln>
+        </p:spPr>
+        <p:txBody>
+          <a:bodyPr rtlCol="0" anchor="ctr"/>
+          <a:lstStyle/>
+          <a:p>
+            <a:pPr algn="ctr"/>
+          </a:p>
+        </p:txBody>
+      </p:sp>
+      <p:sp>
+        <p:nvSpPr>
+          <p:cNvPr id="16" name="Rounded Rectangle 15"/>
+          <p:cNvSpPr/>
+          <p:nvPr/>
+        </p:nvSpPr>
+        <p:spPr>
+          <a:xfrm>
+            <a:off x="813815" y="3657600"/>
+            <a:ext cx="493776" cy="402336"/>
+          </a:xfrm>
+          <a:prstGeom prst="roundRect">
+            <a:avLst>
+              <a:gd name="adj" fmla="val 24000"/>
+            </a:avLst>
+          </a:prstGeom>
+          <a:solidFill>
+            <a:srgbClr val="FFFFFF"/>
+          </a:solidFill>
+          <a:ln w="19050">
+            <a:solidFill>
+              <a:srgbClr val="40708B"/>
+            </a:solidFill>
+          </a:ln>
+        </p:spPr>
+        <p:txBody>
+          <a:bodyPr rtlCol="0" anchor="ctr"/>
+          <a:lstStyle/>
+          <a:p>
+            <a:pPr algn="ctr"/>
+          </a:p>
+        </p:txBody>
+      </p:sp>
+      <p:sp>
+        <p:nvSpPr>
+          <p:cNvPr id="17" name="Oval 16"/>
+          <p:cNvSpPr/>
+          <p:nvPr/>
+        </p:nvSpPr>
+        <p:spPr>
+          <a:xfrm>
+            <a:off x="928115" y="3785615"/>
+            <a:ext cx="82296" cy="82296"/>
+          </a:xfrm>
+          <a:prstGeom prst="ellipse">
+            <a:avLst/>
+          </a:prstGeom>
+          <a:solidFill>
+            <a:srgbClr val="40708B"/>
+          </a:solidFill>
+          <a:ln>
+            <a:noFill/>
+          </a:ln>
+        </p:spPr>
+        <p:txBody>
+          <a:bodyPr rtlCol="0" anchor="ctr"/>
+          <a:lstStyle/>
+          <a:p>
+            <a:pPr algn="ctr"/>
+          </a:p>
+        </p:txBody>
+      </p:sp>
+      <p:sp>
+        <p:nvSpPr>
+          <p:cNvPr id="18" name="Oval 17"/>
+          <p:cNvSpPr/>
+          <p:nvPr/>
+        </p:nvSpPr>
+        <p:spPr>
+          <a:xfrm>
+            <a:off x="1110996" y="3785615"/>
+            <a:ext cx="82296" cy="82296"/>
+          </a:xfrm>
+          <a:prstGeom prst="ellipse">
+            <a:avLst/>
+          </a:prstGeom>
+          <a:solidFill>
+            <a:srgbClr val="40708B"/>
+          </a:solidFill>
+          <a:ln>
+            <a:noFill/>
+          </a:ln>
+        </p:spPr>
+        <p:txBody>
+          <a:bodyPr rtlCol="0" anchor="ctr"/>
+          <a:lstStyle/>
+          <a:p>
+            <a:pPr algn="ctr"/>
+          </a:p>
+        </p:txBody>
+      </p:sp>
+      <p:sp>
+        <p:nvSpPr>
+          <p:cNvPr id="19" name="Rounded Rectangle 18"/>
+          <p:cNvSpPr/>
+          <p:nvPr/>
+        </p:nvSpPr>
+        <p:spPr>
+          <a:xfrm>
+            <a:off x="758951" y="4105656"/>
+            <a:ext cx="603504" cy="100584"/>
+          </a:xfrm>
+          <a:prstGeom prst="roundRect">
+            <a:avLst>
+              <a:gd name="adj" fmla="val 50000"/>
+            </a:avLst>
+          </a:prstGeom>
+          <a:solidFill>
+            <a:srgbClr val="40708B"/>
+          </a:solidFill>
+          <a:ln>
+            <a:noFill/>
+          </a:ln>
+        </p:spPr>
+        <p:txBody>
+          <a:bodyPr rtlCol="0" anchor="ctr"/>
+          <a:lstStyle/>
+          <a:p>
+            <a:pPr algn="ctr"/>
+          </a:p>
+        </p:txBody>
+      </p:sp>
+      <p:sp>
+        <p:nvSpPr>
+          <p:cNvPr id="20" name="TextBox 19"/>
+          <p:cNvSpPr txBox="1"/>
+          <p:nvPr/>
+        </p:nvSpPr>
+        <p:spPr>
+          <a:xfrm>
+            <a:off x="402335" y="4279392"/>
+            <a:ext cx="1316736" cy="201168"/>
+          </a:xfrm>
+          <a:prstGeom prst="rect">
+            <a:avLst/>
+          </a:prstGeom>
+          <a:noFill/>
+        </p:spPr>
+        <p:txBody>
+          <a:bodyPr wrap="square" anchor="ctr" lIns="0" tIns="0" rIns="0" bIns="0">
+            <a:noAutofit/>
+          </a:bodyPr>
+          <a:lstStyle/>
+          <a:p>
+            <a:pPr algn="ctr" latinLnBrk="0">
+              <a:lnSpc>
+                <a:spcPct val="100000"/>
+              </a:lnSpc>
+              <a:spcBef>
+                <a:spcPts val="0"/>
+              </a:spcBef>
+              <a:spcAft>
+                <a:spcPts val="0"/>
+              </a:spcAft>
+            </a:pPr>
+            <a:r>
+              <a:rPr sz="950" b="1">
+                <a:solidFill>
+                  <a:srgbClr val="123C5B"/>
+                </a:solidFill>
+                <a:latin typeface="Microsoft YaHei"/>
+                <a:ea typeface="Microsoft YaHei"/>
+                <a:cs typeface="Microsoft YaHei"/>
+              </a:rPr>
+              <a:t>算子层 Agent</a:t>
+            </a:r>
+          </a:p>
+        </p:txBody>
+      </p:sp>
+      <p:cxnSp>
+        <p:nvCxnSpPr>
+          <p:cNvPr id="21" name="Connector 20"/>
+          <p:cNvCxnSpPr/>
+          <p:nvPr/>
+        </p:nvCxnSpPr>
+        <p:spPr>
+          <a:xfrm>
+            <a:off x="1344168" y="3858768"/>
+            <a:ext cx="374904" cy="0"/>
+          </a:xfrm>
+          <a:prstGeom prst="line">
+            <a:avLst/>
+          </a:prstGeom>
+          <a:ln w="15875">
+            <a:solidFill>
+              <a:srgbClr val="40708B"/>
+            </a:solidFill>
+            <a:headEnd type="triangle" w="med" len="med"/>
+            <a:tailEnd type="triangle" w="med" len="med"/>
+          </a:ln>
+        </p:spPr>
+      </p:cxnSp>
+      <p:sp>
+        <p:nvSpPr>
+          <p:cNvPr id="22" name="TextBox 21"/>
+          <p:cNvSpPr txBox="1"/>
+          <p:nvPr/>
+        </p:nvSpPr>
+        <p:spPr>
+          <a:xfrm>
+            <a:off x="530352" y="1225296"/>
+            <a:ext cx="1060704" cy="201168"/>
+          </a:xfrm>
+          <a:prstGeom prst="rect">
+            <a:avLst/>
+          </a:prstGeom>
+          <a:noFill/>
+        </p:spPr>
+        <p:txBody>
+          <a:bodyPr wrap="square" anchor="ctr" lIns="0" tIns="0" rIns="0" bIns="0">
+            <a:noAutofit/>
+          </a:bodyPr>
+          <a:lstStyle/>
+          <a:p>
+            <a:pPr algn="ctr" latinLnBrk="0">
+              <a:lnSpc>
+                <a:spcPct val="100000"/>
+              </a:lnSpc>
+              <a:spcBef>
+                <a:spcPts val="0"/>
+              </a:spcBef>
+              <a:spcAft>
+                <a:spcPts val="0"/>
+              </a:spcAft>
+            </a:pPr>
+            <a:r>
+              <a:rPr sz="850" b="1">
                 <a:solidFill>
                   <a:srgbClr val="40708B"/>
                 </a:solidFill>
@@ -9542,21 +9910,21 @@
                 <a:ea typeface="Microsoft YaHei"/>
                 <a:cs typeface="Microsoft YaHei"/>
               </a:rPr>
-              <a:t>源码工作区 · 设备锁 · Trial 逐次落盘</a:t>
-            </a:r>
-          </a:p>
-        </p:txBody>
-      </p:sp>
-      <p:sp>
-        <p:nvSpPr>
-          <p:cNvPr id="10" name="Rectangle 9"/>
+              <a:t>发布 ⇄ 订阅</a:t>
+            </a:r>
+          </a:p>
+        </p:txBody>
+      </p:sp>
+      <p:sp>
+        <p:nvSpPr>
+          <p:cNvPr id="23" name="Rectangle 22"/>
           <p:cNvSpPr/>
           <p:nvPr/>
         </p:nvSpPr>
         <p:spPr>
           <a:xfrm>
-            <a:off x="713232" y="1792224"/>
-            <a:ext cx="2286000" cy="566928"/>
+            <a:off x="1755648" y="1225296"/>
+            <a:ext cx="2706624" cy="4572000"/>
           </a:xfrm>
           <a:prstGeom prst="rect">
             <a:avLst/>
@@ -9566,7 +9934,7 @@
           </a:solidFill>
           <a:ln w="9525">
             <a:solidFill>
-              <a:srgbClr val="CFE3F0"/>
+              <a:srgbClr val="AFCEE1"/>
             </a:solidFill>
           </a:ln>
         </p:spPr>
@@ -9580,39 +9948,39 @@
       </p:sp>
       <p:sp>
         <p:nvSpPr>
-          <p:cNvPr id="11" name="TextBox 10"/>
-          <p:cNvSpPr txBox="1"/>
-          <p:nvPr/>
-        </p:nvSpPr>
-        <p:spPr>
-          <a:xfrm>
-            <a:off x="822959" y="1828800"/>
-            <a:ext cx="2066543" cy="493776"/>
-          </a:xfrm>
-          <a:prstGeom prst="rect">
-            <a:avLst/>
-          </a:prstGeom>
-          <a:noFill/>
-        </p:spPr>
-        <p:txBody>
-          <a:bodyPr wrap="square" anchor="ctr" lIns="0" tIns="0" rIns="0" bIns="0">
-            <a:noAutofit/>
-          </a:bodyPr>
-          <a:lstStyle/>
-          <a:p>
-            <a:pPr algn="l" latinLnBrk="0">
-              <a:lnSpc>
-                <a:spcPct val="100000"/>
-              </a:lnSpc>
-              <a:spcBef>
-                <a:spcPts val="0"/>
-              </a:spcBef>
-              <a:spcAft>
-                <a:spcPts val="200"/>
-              </a:spcAft>
-            </a:pPr>
-            <a:r>
-              <a:rPr sz="950" b="1">
+          <p:cNvPr id="24" name="TextBox 23"/>
+          <p:cNvSpPr txBox="1"/>
+          <p:nvPr/>
+        </p:nvSpPr>
+        <p:spPr>
+          <a:xfrm>
+            <a:off x="1892807" y="1298448"/>
+            <a:ext cx="2432304" cy="237744"/>
+          </a:xfrm>
+          <a:prstGeom prst="rect">
+            <a:avLst/>
+          </a:prstGeom>
+          <a:noFill/>
+        </p:spPr>
+        <p:txBody>
+          <a:bodyPr wrap="square" anchor="ctr" lIns="0" tIns="0" rIns="0" bIns="0">
+            <a:noAutofit/>
+          </a:bodyPr>
+          <a:lstStyle/>
+          <a:p>
+            <a:pPr algn="ctr" latinLnBrk="0">
+              <a:lnSpc>
+                <a:spcPct val="100000"/>
+              </a:lnSpc>
+              <a:spcBef>
+                <a:spcPts val="0"/>
+              </a:spcBef>
+              <a:spcAft>
+                <a:spcPts val="0"/>
+              </a:spcAft>
+            </a:pPr>
+            <a:r>
+              <a:rPr sz="1150" b="1">
                 <a:solidFill>
                   <a:srgbClr val="0A2B45"/>
                 </a:solidFill>
@@ -9620,25 +9988,182 @@
                 <a:ea typeface="Microsoft YaHei"/>
                 <a:cs typeface="Microsoft YaHei"/>
               </a:rPr>
+              <a:t>环境（Environment）</a:t>
+            </a:r>
+          </a:p>
+        </p:txBody>
+      </p:sp>
+      <p:sp>
+        <p:nvSpPr>
+          <p:cNvPr id="25" name="TextBox 24"/>
+          <p:cNvSpPr txBox="1"/>
+          <p:nvPr/>
+        </p:nvSpPr>
+        <p:spPr>
+          <a:xfrm>
+            <a:off x="1892807" y="1536192"/>
+            <a:ext cx="2432304" cy="182880"/>
+          </a:xfrm>
+          <a:prstGeom prst="rect">
+            <a:avLst/>
+          </a:prstGeom>
+          <a:noFill/>
+        </p:spPr>
+        <p:txBody>
+          <a:bodyPr wrap="square" anchor="ctr" lIns="0" tIns="0" rIns="0" bIns="0">
+            <a:noAutofit/>
+          </a:bodyPr>
+          <a:lstStyle/>
+          <a:p>
+            <a:pPr algn="ctr" latinLnBrk="0">
+              <a:lnSpc>
+                <a:spcPct val="100000"/>
+              </a:lnSpc>
+              <a:spcBef>
+                <a:spcPts val="0"/>
+              </a:spcBef>
+              <a:spcAft>
+                <a:spcPts val="0"/>
+              </a:spcAft>
+            </a:pPr>
+            <a:r>
+              <a:rPr sz="800" b="0">
+                <a:solidFill>
+                  <a:srgbClr val="40708B"/>
+                </a:solidFill>
+                <a:latin typeface="Microsoft YaHei"/>
+                <a:ea typeface="Microsoft YaHei"/>
+                <a:cs typeface="Microsoft YaHei"/>
+              </a:rPr>
+              <a:t>两层 Agent 在此发布与订阅</a:t>
+            </a:r>
+          </a:p>
+        </p:txBody>
+      </p:sp>
+      <p:sp>
+        <p:nvSpPr>
+          <p:cNvPr id="26" name="Document 25"/>
+          <p:cNvSpPr/>
+          <p:nvPr/>
+        </p:nvSpPr>
+        <p:spPr>
+          <a:xfrm>
+            <a:off x="1938528" y="1828800"/>
+            <a:ext cx="2340864" cy="530352"/>
+          </a:xfrm>
+          <a:prstGeom prst="flowChartDocument">
+            <a:avLst/>
+          </a:prstGeom>
+          <a:solidFill>
+            <a:srgbClr val="E6F0FC"/>
+          </a:solidFill>
+          <a:ln w="9525">
+            <a:solidFill>
+              <a:srgbClr val="0F62CE"/>
+            </a:solidFill>
+          </a:ln>
+        </p:spPr>
+        <p:txBody>
+          <a:bodyPr rtlCol="0" anchor="ctr" wrap="square" lIns="54864" tIns="18288" rIns="54864" bIns="91440">
+            <a:noAutofit/>
+          </a:bodyPr>
+          <a:lstStyle/>
+          <a:p>
+            <a:pPr algn="ctr" latinLnBrk="0">
+              <a:lnSpc>
+                <a:spcPct val="100000"/>
+              </a:lnSpc>
+              <a:spcBef>
+                <a:spcPts val="0"/>
+              </a:spcBef>
+              <a:spcAft>
+                <a:spcPts val="100"/>
+              </a:spcAft>
+            </a:pPr>
+            <a:r>
+              <a:rPr sz="1000" b="1">
+                <a:solidFill>
+                  <a:srgbClr val="0A2B45"/>
+                </a:solidFill>
+                <a:latin typeface="Microsoft YaHei"/>
+                <a:ea typeface="Microsoft YaHei"/>
+                <a:cs typeface="Microsoft YaHei"/>
+              </a:rPr>
+              <a:t>Trace 与耗时归因</a:t>
+            </a:r>
+          </a:p>
+        </p:txBody>
+      </p:sp>
+      <p:sp>
+        <p:nvSpPr>
+          <p:cNvPr id="27" name="Rounded Rectangle 26"/>
+          <p:cNvSpPr/>
+          <p:nvPr/>
+        </p:nvSpPr>
+        <p:spPr>
+          <a:xfrm>
+            <a:off x="1938528" y="2596896"/>
+            <a:ext cx="2340864" cy="530352"/>
+          </a:xfrm>
+          <a:prstGeom prst="roundRect">
+            <a:avLst>
+              <a:gd name="adj" fmla="val 40000"/>
+            </a:avLst>
+          </a:prstGeom>
+          <a:solidFill>
+            <a:srgbClr val="FBE6D4"/>
+          </a:solidFill>
+          <a:ln w="9525">
+            <a:solidFill>
+              <a:srgbClr val="C2570A"/>
+            </a:solidFill>
+          </a:ln>
+        </p:spPr>
+        <p:txBody>
+          <a:bodyPr rtlCol="0" anchor="ctr" wrap="square" lIns="54864" tIns="18288" rIns="54864" bIns="18288">
+            <a:noAutofit/>
+          </a:bodyPr>
+          <a:lstStyle/>
+          <a:p>
+            <a:pPr algn="ctr" latinLnBrk="0">
+              <a:lnSpc>
+                <a:spcPct val="100000"/>
+              </a:lnSpc>
+              <a:spcBef>
+                <a:spcPts val="0"/>
+              </a:spcBef>
+              <a:spcAft>
+                <a:spcPts val="100"/>
+              </a:spcAft>
+            </a:pPr>
+            <a:r>
+              <a:rPr sz="1000" b="1">
+                <a:solidFill>
+                  <a:srgbClr val="0A2B45"/>
+                </a:solidFill>
+                <a:latin typeface="Microsoft YaHei"/>
+                <a:ea typeface="Microsoft YaHei"/>
+                <a:cs typeface="Microsoft YaHei"/>
+              </a:rPr>
               <a:t>瓶颈算子 + Shape 规格</a:t>
             </a:r>
           </a:p>
           <a:p>
-            <a:pPr algn="l" latinLnBrk="0">
-              <a:lnSpc>
-                <a:spcPct val="100000"/>
-              </a:lnSpc>
-              <a:spcBef>
-                <a:spcPts val="0"/>
-              </a:spcBef>
-              <a:spcAft>
-                <a:spcPts val="0"/>
-              </a:spcAft>
-            </a:pPr>
-            <a:r>
-              <a:rPr sz="800" b="0">
-                <a:solidFill>
-                  <a:srgbClr val="40708B"/>
+            <a:pPr algn="ctr" latinLnBrk="0">
+              <a:lnSpc>
+                <a:spcPct val="100000"/>
+              </a:lnSpc>
+              <a:spcBef>
+                <a:spcPts val="0"/>
+              </a:spcBef>
+              <a:spcAft>
+                <a:spcPts val="0"/>
+              </a:spcAft>
+            </a:pPr>
+            <a:r>
+              <a:rPr sz="750" b="0">
+                <a:solidFill>
+                  <a:srgbClr val="C2570A"/>
                 </a:solidFill>
                 <a:latin typeface="Consolas"/>
                 <a:ea typeface="Microsoft YaHei"/>
@@ -9651,14 +10176,202 @@
       </p:sp>
       <p:sp>
         <p:nvSpPr>
-          <p:cNvPr id="12" name="Rectangle 11"/>
+          <p:cNvPr id="28" name="Document 27"/>
           <p:cNvSpPr/>
           <p:nvPr/>
         </p:nvSpPr>
         <p:spPr>
           <a:xfrm>
-            <a:off x="713232" y="2450591"/>
-            <a:ext cx="2286000" cy="566928"/>
+            <a:off x="1938528" y="3364991"/>
+            <a:ext cx="2340864" cy="530352"/>
+          </a:xfrm>
+          <a:prstGeom prst="flowChartDocument">
+            <a:avLst/>
+          </a:prstGeom>
+          <a:solidFill>
+            <a:srgbClr val="FBE6D4"/>
+          </a:solidFill>
+          <a:ln w="9525">
+            <a:solidFill>
+              <a:srgbClr val="C2570A"/>
+            </a:solidFill>
+          </a:ln>
+        </p:spPr>
+        <p:txBody>
+          <a:bodyPr rtlCol="0" anchor="ctr" wrap="square" lIns="54864" tIns="18288" rIns="54864" bIns="91440">
+            <a:noAutofit/>
+          </a:bodyPr>
+          <a:lstStyle/>
+          <a:p>
+            <a:pPr algn="ctr" latinLnBrk="0">
+              <a:lnSpc>
+                <a:spcPct val="100000"/>
+              </a:lnSpc>
+              <a:spcBef>
+                <a:spcPts val="0"/>
+              </a:spcBef>
+              <a:spcAft>
+                <a:spcPts val="100"/>
+              </a:spcAft>
+            </a:pPr>
+            <a:r>
+              <a:rPr sz="1000" b="1">
+                <a:solidFill>
+                  <a:srgbClr val="0A2B45"/>
+                </a:solidFill>
+                <a:latin typeface="Microsoft YaHei"/>
+                <a:ea typeface="Microsoft YaHei"/>
+                <a:cs typeface="Microsoft YaHei"/>
+              </a:rPr>
+              <a:t>新算子内核</a:t>
+            </a:r>
+          </a:p>
+          <a:p>
+            <a:pPr algn="ctr" latinLnBrk="0">
+              <a:lnSpc>
+                <a:spcPct val="100000"/>
+              </a:lnSpc>
+              <a:spcBef>
+                <a:spcPts val="0"/>
+              </a:spcBef>
+              <a:spcAft>
+                <a:spcPts val="0"/>
+              </a:spcAft>
+            </a:pPr>
+            <a:r>
+              <a:rPr sz="750" b="0">
+                <a:solidFill>
+                  <a:srgbClr val="C2570A"/>
+                </a:solidFill>
+                <a:latin typeface="Consolas"/>
+                <a:ea typeface="Microsoft YaHei"/>
+                <a:cs typeface="Microsoft YaHei"/>
+              </a:rPr>
+              <a:t>算子层 → 模型层</a:t>
+            </a:r>
+          </a:p>
+        </p:txBody>
+      </p:sp>
+      <p:sp>
+        <p:nvSpPr>
+          <p:cNvPr id="29" name="Document 28"/>
+          <p:cNvSpPr/>
+          <p:nvPr/>
+        </p:nvSpPr>
+        <p:spPr>
+          <a:xfrm>
+            <a:off x="1938528" y="4133087"/>
+            <a:ext cx="2340864" cy="530352"/>
+          </a:xfrm>
+          <a:prstGeom prst="flowChartDocument">
+            <a:avLst/>
+          </a:prstGeom>
+          <a:solidFill>
+            <a:srgbClr val="E6F0FC"/>
+          </a:solidFill>
+          <a:ln w="9525">
+            <a:solidFill>
+              <a:srgbClr val="0F62CE"/>
+            </a:solidFill>
+          </a:ln>
+        </p:spPr>
+        <p:txBody>
+          <a:bodyPr rtlCol="0" anchor="ctr" wrap="square" lIns="54864" tIns="18288" rIns="54864" bIns="91440">
+            <a:noAutofit/>
+          </a:bodyPr>
+          <a:lstStyle/>
+          <a:p>
+            <a:pPr algn="ctr" latinLnBrk="0">
+              <a:lnSpc>
+                <a:spcPct val="100000"/>
+              </a:lnSpc>
+              <a:spcBef>
+                <a:spcPts val="0"/>
+              </a:spcBef>
+              <a:spcAft>
+                <a:spcPts val="100"/>
+              </a:spcAft>
+            </a:pPr>
+            <a:r>
+              <a:rPr sz="1000" b="1">
+                <a:solidFill>
+                  <a:srgbClr val="0A2B45"/>
+                </a:solidFill>
+                <a:latin typeface="Microsoft YaHei"/>
+                <a:ea typeface="Microsoft YaHei"/>
+                <a:cs typeface="Microsoft YaHei"/>
+              </a:rPr>
+              <a:t>评测报告与判定</a:t>
+            </a:r>
+          </a:p>
+        </p:txBody>
+      </p:sp>
+      <p:sp>
+        <p:nvSpPr>
+          <p:cNvPr id="30" name="Rounded Rectangle 29"/>
+          <p:cNvSpPr/>
+          <p:nvPr/>
+        </p:nvSpPr>
+        <p:spPr>
+          <a:xfrm>
+            <a:off x="1938528" y="4901183"/>
+            <a:ext cx="2340864" cy="530352"/>
+          </a:xfrm>
+          <a:prstGeom prst="roundRect">
+            <a:avLst>
+              <a:gd name="adj" fmla="val 40000"/>
+            </a:avLst>
+          </a:prstGeom>
+          <a:solidFill>
+            <a:srgbClr val="E6F0FC"/>
+          </a:solidFill>
+          <a:ln w="9525">
+            <a:solidFill>
+              <a:srgbClr val="0F62CE"/>
+            </a:solidFill>
+          </a:ln>
+        </p:spPr>
+        <p:txBody>
+          <a:bodyPr rtlCol="0" anchor="ctr" wrap="square" lIns="54864" tIns="18288" rIns="54864" bIns="18288">
+            <a:noAutofit/>
+          </a:bodyPr>
+          <a:lstStyle/>
+          <a:p>
+            <a:pPr algn="ctr" latinLnBrk="0">
+              <a:lnSpc>
+                <a:spcPct val="100000"/>
+              </a:lnSpc>
+              <a:spcBef>
+                <a:spcPts val="0"/>
+              </a:spcBef>
+              <a:spcAft>
+                <a:spcPts val="100"/>
+              </a:spcAft>
+            </a:pPr>
+            <a:r>
+              <a:rPr sz="1000" b="1">
+                <a:solidFill>
+                  <a:srgbClr val="0A2B45"/>
+                </a:solidFill>
+                <a:latin typeface="Microsoft YaHei"/>
+                <a:ea typeface="Microsoft YaHei"/>
+                <a:cs typeface="Microsoft YaHei"/>
+              </a:rPr>
+              <a:t>新基线</a:t>
+            </a:r>
+          </a:p>
+        </p:txBody>
+      </p:sp>
+      <p:sp>
+        <p:nvSpPr>
+          <p:cNvPr id="31" name="Rectangle 30"/>
+          <p:cNvSpPr/>
+          <p:nvPr/>
+        </p:nvSpPr>
+        <p:spPr>
+          <a:xfrm>
+            <a:off x="5321808" y="1225296"/>
+            <a:ext cx="3200400" cy="3767328"/>
           </a:xfrm>
           <a:prstGeom prst="rect">
             <a:avLst/>
@@ -9668,7 +10381,7 @@
           </a:solidFill>
           <a:ln w="9525">
             <a:solidFill>
-              <a:srgbClr val="CFE3F0"/>
+              <a:srgbClr val="AFCEE1"/>
             </a:solidFill>
           </a:ln>
         </p:spPr>
@@ -9682,39 +10395,39 @@
       </p:sp>
       <p:sp>
         <p:nvSpPr>
-          <p:cNvPr id="13" name="TextBox 12"/>
-          <p:cNvSpPr txBox="1"/>
-          <p:nvPr/>
-        </p:nvSpPr>
-        <p:spPr>
-          <a:xfrm>
-            <a:off x="822959" y="2487168"/>
-            <a:ext cx="2066543" cy="493776"/>
-          </a:xfrm>
-          <a:prstGeom prst="rect">
-            <a:avLst/>
-          </a:prstGeom>
-          <a:noFill/>
-        </p:spPr>
-        <p:txBody>
-          <a:bodyPr wrap="square" anchor="ctr" lIns="0" tIns="0" rIns="0" bIns="0">
-            <a:noAutofit/>
-          </a:bodyPr>
-          <a:lstStyle/>
-          <a:p>
-            <a:pPr algn="l" latinLnBrk="0">
-              <a:lnSpc>
-                <a:spcPct val="100000"/>
-              </a:lnSpc>
-              <a:spcBef>
-                <a:spcPts val="0"/>
-              </a:spcBef>
-              <a:spcAft>
-                <a:spcPts val="200"/>
-              </a:spcAft>
-            </a:pPr>
-            <a:r>
-              <a:rPr sz="950" b="1">
+          <p:cNvPr id="32" name="TextBox 31"/>
+          <p:cNvSpPr txBox="1"/>
+          <p:nvPr/>
+        </p:nvSpPr>
+        <p:spPr>
+          <a:xfrm>
+            <a:off x="5458968" y="1298448"/>
+            <a:ext cx="2926080" cy="237744"/>
+          </a:xfrm>
+          <a:prstGeom prst="rect">
+            <a:avLst/>
+          </a:prstGeom>
+          <a:noFill/>
+        </p:spPr>
+        <p:txBody>
+          <a:bodyPr wrap="square" anchor="ctr" lIns="0" tIns="0" rIns="0" bIns="0">
+            <a:noAutofit/>
+          </a:bodyPr>
+          <a:lstStyle/>
+          <a:p>
+            <a:pPr algn="ctr" latinLnBrk="0">
+              <a:lnSpc>
+                <a:spcPct val="100000"/>
+              </a:lnSpc>
+              <a:spcBef>
+                <a:spcPts val="0"/>
+              </a:spcBef>
+              <a:spcAft>
+                <a:spcPts val="0"/>
+              </a:spcAft>
+            </a:pPr>
+            <a:r>
+              <a:rPr sz="1150" b="1">
                 <a:solidFill>
                   <a:srgbClr val="0A2B45"/>
                 </a:solidFill>
@@ -9722,101 +10435,446 @@
                 <a:ea typeface="Microsoft YaHei"/>
                 <a:cs typeface="Microsoft YaHei"/>
               </a:rPr>
-              <a:t>新算子内核</a:t>
-            </a:r>
-          </a:p>
-          <a:p>
-            <a:pPr algn="l" latinLnBrk="0">
-              <a:lnSpc>
-                <a:spcPct val="100000"/>
-              </a:lnSpc>
-              <a:spcBef>
-                <a:spcPts val="0"/>
-              </a:spcBef>
-              <a:spcAft>
-                <a:spcPts val="0"/>
-              </a:spcAft>
-            </a:pPr>
-            <a:r>
-              <a:rPr sz="800" b="0">
-                <a:solidFill>
-                  <a:srgbClr val="40708B"/>
+              <a:t>Agent（两层同构）</a:t>
+            </a:r>
+          </a:p>
+        </p:txBody>
+      </p:sp>
+      <p:sp>
+        <p:nvSpPr>
+          <p:cNvPr id="33" name="Rounded Rectangle 32"/>
+          <p:cNvSpPr/>
+          <p:nvPr/>
+        </p:nvSpPr>
+        <p:spPr>
+          <a:xfrm>
+            <a:off x="6053328" y="1682496"/>
+            <a:ext cx="1737360" cy="566928"/>
+          </a:xfrm>
+          <a:prstGeom prst="roundRect">
+            <a:avLst>
+              <a:gd name="adj" fmla="val 18000"/>
+            </a:avLst>
+          </a:prstGeom>
+          <a:solidFill>
+            <a:srgbClr val="E6F0FC"/>
+          </a:solidFill>
+          <a:ln w="9525">
+            <a:solidFill>
+              <a:srgbClr val="0F62CE"/>
+            </a:solidFill>
+          </a:ln>
+        </p:spPr>
+        <p:txBody>
+          <a:bodyPr rtlCol="0" anchor="ctr" wrap="square" tIns="36576" bIns="36576">
+            <a:noAutofit/>
+          </a:bodyPr>
+          <a:lstStyle/>
+          <a:p>
+            <a:pPr algn="ctr" latinLnBrk="0">
+              <a:lnSpc>
+                <a:spcPct val="100000"/>
+              </a:lnSpc>
+              <a:spcBef>
+                <a:spcPts val="0"/>
+              </a:spcBef>
+              <a:spcAft>
+                <a:spcPts val="0"/>
+              </a:spcAft>
+            </a:pPr>
+            <a:r>
+              <a:rPr sz="1100" b="1">
+                <a:solidFill>
+                  <a:srgbClr val="0A2B45"/>
+                </a:solidFill>
+                <a:latin typeface="Microsoft YaHei"/>
+                <a:ea typeface="Microsoft YaHei"/>
+                <a:cs typeface="Microsoft YaHei"/>
+              </a:rPr>
+              <a:t>记忆</a:t>
+            </a:r>
+            <a:r>
+              <a:rPr sz="900" b="1">
+                <a:solidFill>
+                  <a:srgbClr val="0F62CE"/>
                 </a:solidFill>
                 <a:latin typeface="Consolas"/>
                 <a:ea typeface="Microsoft YaHei"/>
                 <a:cs typeface="Microsoft YaHei"/>
               </a:rPr>
-              <a:t>算子层 → 模型层</a:t>
-            </a:r>
-          </a:p>
-        </p:txBody>
-      </p:sp>
-      <p:sp>
-        <p:nvSpPr>
-          <p:cNvPr id="14" name="Rectangle 13"/>
+              <a:t>　Memory</a:t>
+            </a:r>
+          </a:p>
+        </p:txBody>
+      </p:sp>
+      <p:sp>
+        <p:nvSpPr>
+          <p:cNvPr id="34" name="Rounded Rectangle 33"/>
           <p:cNvSpPr/>
           <p:nvPr/>
         </p:nvSpPr>
         <p:spPr>
           <a:xfrm>
-            <a:off x="713232" y="3108960"/>
-            <a:ext cx="2286000" cy="566928"/>
-          </a:xfrm>
-          <a:prstGeom prst="rect">
-            <a:avLst/>
+            <a:off x="6053328" y="2450592"/>
+            <a:ext cx="1737360" cy="566928"/>
+          </a:xfrm>
+          <a:prstGeom prst="roundRect">
+            <a:avLst>
+              <a:gd name="adj" fmla="val 18000"/>
+            </a:avLst>
+          </a:prstGeom>
+          <a:solidFill>
+            <a:srgbClr val="E6F0FC"/>
+          </a:solidFill>
+          <a:ln w="9525">
+            <a:solidFill>
+              <a:srgbClr val="0F62CE"/>
+            </a:solidFill>
+          </a:ln>
+        </p:spPr>
+        <p:txBody>
+          <a:bodyPr rtlCol="0" anchor="ctr" wrap="square" tIns="36576" bIns="36576">
+            <a:noAutofit/>
+          </a:bodyPr>
+          <a:lstStyle/>
+          <a:p>
+            <a:pPr algn="ctr" latinLnBrk="0">
+              <a:lnSpc>
+                <a:spcPct val="100000"/>
+              </a:lnSpc>
+              <a:spcBef>
+                <a:spcPts val="0"/>
+              </a:spcBef>
+              <a:spcAft>
+                <a:spcPts val="0"/>
+              </a:spcAft>
+            </a:pPr>
+            <a:r>
+              <a:rPr sz="1100" b="1">
+                <a:solidFill>
+                  <a:srgbClr val="0A2B45"/>
+                </a:solidFill>
+                <a:latin typeface="Microsoft YaHei"/>
+                <a:ea typeface="Microsoft YaHei"/>
+                <a:cs typeface="Microsoft YaHei"/>
+              </a:rPr>
+              <a:t>观察</a:t>
+            </a:r>
+            <a:r>
+              <a:rPr sz="900" b="1">
+                <a:solidFill>
+                  <a:srgbClr val="0F62CE"/>
+                </a:solidFill>
+                <a:latin typeface="Consolas"/>
+                <a:ea typeface="Microsoft YaHei"/>
+                <a:cs typeface="Microsoft YaHei"/>
+              </a:rPr>
+              <a:t>　Observation</a:t>
+            </a:r>
+          </a:p>
+        </p:txBody>
+      </p:sp>
+      <p:cxnSp>
+        <p:nvCxnSpPr>
+          <p:cNvPr id="35" name="Connector 34"/>
+          <p:cNvCxnSpPr/>
+          <p:nvPr/>
+        </p:nvCxnSpPr>
+        <p:spPr>
+          <a:xfrm>
+            <a:off x="6922008" y="2258568"/>
+            <a:ext cx="0" cy="182880"/>
+          </a:xfrm>
+          <a:prstGeom prst="line">
+            <a:avLst/>
+          </a:prstGeom>
+          <a:ln w="19050">
+            <a:solidFill>
+              <a:srgbClr val="0F62CE"/>
+            </a:solidFill>
+            <a:tailEnd type="triangle" w="med" len="med"/>
+          </a:ln>
+        </p:spPr>
+      </p:cxnSp>
+      <p:sp>
+        <p:nvSpPr>
+          <p:cNvPr id="36" name="Rounded Rectangle 35"/>
+          <p:cNvSpPr/>
+          <p:nvPr/>
+        </p:nvSpPr>
+        <p:spPr>
+          <a:xfrm>
+            <a:off x="6053328" y="3218688"/>
+            <a:ext cx="1737360" cy="566928"/>
+          </a:xfrm>
+          <a:prstGeom prst="roundRect">
+            <a:avLst>
+              <a:gd name="adj" fmla="val 18000"/>
+            </a:avLst>
+          </a:prstGeom>
+          <a:solidFill>
+            <a:srgbClr val="E6F0FC"/>
+          </a:solidFill>
+          <a:ln w="9525">
+            <a:solidFill>
+              <a:srgbClr val="0F62CE"/>
+            </a:solidFill>
+          </a:ln>
+        </p:spPr>
+        <p:txBody>
+          <a:bodyPr rtlCol="0" anchor="ctr" wrap="square" tIns="36576" bIns="36576">
+            <a:noAutofit/>
+          </a:bodyPr>
+          <a:lstStyle/>
+          <a:p>
+            <a:pPr algn="ctr" latinLnBrk="0">
+              <a:lnSpc>
+                <a:spcPct val="100000"/>
+              </a:lnSpc>
+              <a:spcBef>
+                <a:spcPts val="0"/>
+              </a:spcBef>
+              <a:spcAft>
+                <a:spcPts val="0"/>
+              </a:spcAft>
+            </a:pPr>
+            <a:r>
+              <a:rPr sz="1100" b="1">
+                <a:solidFill>
+                  <a:srgbClr val="0A2B45"/>
+                </a:solidFill>
+                <a:latin typeface="Microsoft YaHei"/>
+                <a:ea typeface="Microsoft YaHei"/>
+                <a:cs typeface="Microsoft YaHei"/>
+              </a:rPr>
+              <a:t>思考</a:t>
+            </a:r>
+            <a:r>
+              <a:rPr sz="900" b="1">
+                <a:solidFill>
+                  <a:srgbClr val="0F62CE"/>
+                </a:solidFill>
+                <a:latin typeface="Consolas"/>
+                <a:ea typeface="Microsoft YaHei"/>
+                <a:cs typeface="Microsoft YaHei"/>
+              </a:rPr>
+              <a:t>　Thought</a:t>
+            </a:r>
+          </a:p>
+        </p:txBody>
+      </p:sp>
+      <p:cxnSp>
+        <p:nvCxnSpPr>
+          <p:cNvPr id="37" name="Connector 36"/>
+          <p:cNvCxnSpPr/>
+          <p:nvPr/>
+        </p:nvCxnSpPr>
+        <p:spPr>
+          <a:xfrm>
+            <a:off x="6922008" y="3026664"/>
+            <a:ext cx="0" cy="182880"/>
+          </a:xfrm>
+          <a:prstGeom prst="line">
+            <a:avLst/>
+          </a:prstGeom>
+          <a:ln w="19050">
+            <a:solidFill>
+              <a:srgbClr val="0F62CE"/>
+            </a:solidFill>
+            <a:tailEnd type="triangle" w="med" len="med"/>
+          </a:ln>
+        </p:spPr>
+      </p:cxnSp>
+      <p:sp>
+        <p:nvSpPr>
+          <p:cNvPr id="38" name="Rounded Rectangle 37"/>
+          <p:cNvSpPr/>
+          <p:nvPr/>
+        </p:nvSpPr>
+        <p:spPr>
+          <a:xfrm>
+            <a:off x="6053328" y="3986784"/>
+            <a:ext cx="1737360" cy="566928"/>
+          </a:xfrm>
+          <a:prstGeom prst="roundRect">
+            <a:avLst>
+              <a:gd name="adj" fmla="val 18000"/>
+            </a:avLst>
+          </a:prstGeom>
+          <a:solidFill>
+            <a:srgbClr val="E6F0FC"/>
+          </a:solidFill>
+          <a:ln w="9525">
+            <a:solidFill>
+              <a:srgbClr val="0F62CE"/>
+            </a:solidFill>
+          </a:ln>
+        </p:spPr>
+        <p:txBody>
+          <a:bodyPr rtlCol="0" anchor="ctr" wrap="square" tIns="36576" bIns="36576">
+            <a:noAutofit/>
+          </a:bodyPr>
+          <a:lstStyle/>
+          <a:p>
+            <a:pPr algn="ctr" latinLnBrk="0">
+              <a:lnSpc>
+                <a:spcPct val="100000"/>
+              </a:lnSpc>
+              <a:spcBef>
+                <a:spcPts val="0"/>
+              </a:spcBef>
+              <a:spcAft>
+                <a:spcPts val="0"/>
+              </a:spcAft>
+            </a:pPr>
+            <a:r>
+              <a:rPr sz="1100" b="1">
+                <a:solidFill>
+                  <a:srgbClr val="0A2B45"/>
+                </a:solidFill>
+                <a:latin typeface="Microsoft YaHei"/>
+                <a:ea typeface="Microsoft YaHei"/>
+                <a:cs typeface="Microsoft YaHei"/>
+              </a:rPr>
+              <a:t>行动</a:t>
+            </a:r>
+            <a:r>
+              <a:rPr sz="900" b="1">
+                <a:solidFill>
+                  <a:srgbClr val="0F62CE"/>
+                </a:solidFill>
+                <a:latin typeface="Consolas"/>
+                <a:ea typeface="Microsoft YaHei"/>
+                <a:cs typeface="Microsoft YaHei"/>
+              </a:rPr>
+              <a:t>　Action</a:t>
+            </a:r>
+          </a:p>
+        </p:txBody>
+      </p:sp>
+      <p:cxnSp>
+        <p:nvCxnSpPr>
+          <p:cNvPr id="39" name="Connector 38"/>
+          <p:cNvCxnSpPr/>
+          <p:nvPr/>
+        </p:nvCxnSpPr>
+        <p:spPr>
+          <a:xfrm>
+            <a:off x="6922008" y="3794760"/>
+            <a:ext cx="0" cy="182880"/>
+          </a:xfrm>
+          <a:prstGeom prst="line">
+            <a:avLst/>
+          </a:prstGeom>
+          <a:ln w="19050">
+            <a:solidFill>
+              <a:srgbClr val="0F62CE"/>
+            </a:solidFill>
+            <a:tailEnd type="triangle" w="med" len="med"/>
+          </a:ln>
+        </p:spPr>
+      </p:cxnSp>
+      <p:sp>
+        <p:nvSpPr>
+          <p:cNvPr id="40" name="Rounded Rectangle 39"/>
+          <p:cNvSpPr/>
+          <p:nvPr/>
+        </p:nvSpPr>
+        <p:spPr>
+          <a:xfrm>
+            <a:off x="9144000" y="2450592"/>
+            <a:ext cx="2499055" cy="512064"/>
+          </a:xfrm>
+          <a:prstGeom prst="roundRect">
+            <a:avLst>
+              <a:gd name="adj" fmla="val 30000"/>
+            </a:avLst>
           </a:prstGeom>
           <a:solidFill>
             <a:srgbClr val="FFFFFF"/>
           </a:solidFill>
           <a:ln w="9525">
             <a:solidFill>
-              <a:srgbClr val="CFE3F0"/>
+              <a:srgbClr val="7FA4BA"/>
+            </a:solidFill>
+            <a:prstDash val="dash"/>
+          </a:ln>
+        </p:spPr>
+        <p:txBody>
+          <a:bodyPr rtlCol="0" anchor="ctr" wrap="square" tIns="36576" bIns="36576">
+            <a:noAutofit/>
+          </a:bodyPr>
+          <a:lstStyle/>
+          <a:p>
+            <a:pPr algn="ctr" latinLnBrk="0">
+              <a:lnSpc>
+                <a:spcPct val="100000"/>
+              </a:lnSpc>
+              <a:spcBef>
+                <a:spcPts val="0"/>
+              </a:spcBef>
+              <a:spcAft>
+                <a:spcPts val="0"/>
+              </a:spcAft>
+            </a:pPr>
+            <a:r>
+              <a:rPr sz="1050" b="1">
+                <a:solidFill>
+                  <a:srgbClr val="123C5B"/>
+                </a:solidFill>
+                <a:latin typeface="Microsoft YaHei"/>
+                <a:ea typeface="Microsoft YaHei"/>
+                <a:cs typeface="Microsoft YaHei"/>
+              </a:rPr>
+              <a:t>人 · 按需介入</a:t>
+            </a:r>
+          </a:p>
+        </p:txBody>
+      </p:sp>
+      <p:sp>
+        <p:nvSpPr>
+          <p:cNvPr id="41" name="Rounded Rectangle 40"/>
+          <p:cNvSpPr/>
+          <p:nvPr/>
+        </p:nvSpPr>
+        <p:spPr>
+          <a:xfrm>
+            <a:off x="9144000" y="3163824"/>
+            <a:ext cx="2499055" cy="640080"/>
+          </a:xfrm>
+          <a:prstGeom prst="roundRect">
+            <a:avLst>
+              <a:gd name="adj" fmla="val 30000"/>
+            </a:avLst>
+          </a:prstGeom>
+          <a:solidFill>
+            <a:srgbClr val="FBE6D4"/>
+          </a:solidFill>
+          <a:ln w="9525">
+            <a:solidFill>
+              <a:srgbClr val="D2690C"/>
             </a:solidFill>
           </a:ln>
         </p:spPr>
         <p:txBody>
-          <a:bodyPr rtlCol="0" anchor="ctr"/>
-          <a:lstStyle/>
-          <a:p>
-            <a:pPr algn="ctr"/>
-          </a:p>
-        </p:txBody>
-      </p:sp>
-      <p:sp>
-        <p:nvSpPr>
-          <p:cNvPr id="15" name="TextBox 14"/>
-          <p:cNvSpPr txBox="1"/>
-          <p:nvPr/>
-        </p:nvSpPr>
-        <p:spPr>
-          <a:xfrm>
-            <a:off x="822959" y="3145536"/>
-            <a:ext cx="2066543" cy="493776"/>
-          </a:xfrm>
-          <a:prstGeom prst="rect">
-            <a:avLst/>
-          </a:prstGeom>
-          <a:noFill/>
-        </p:spPr>
-        <p:txBody>
-          <a:bodyPr wrap="square" anchor="ctr" lIns="0" tIns="0" rIns="0" bIns="0">
-            <a:noAutofit/>
-          </a:bodyPr>
-          <a:lstStyle/>
-          <a:p>
-            <a:pPr algn="l" latinLnBrk="0">
-              <a:lnSpc>
-                <a:spcPct val="100000"/>
-              </a:lnSpc>
-              <a:spcBef>
-                <a:spcPts val="0"/>
-              </a:spcBef>
-              <a:spcAft>
-                <a:spcPts val="200"/>
-              </a:spcAft>
-            </a:pPr>
-            <a:r>
-              <a:rPr sz="950" b="1">
+          <a:bodyPr rtlCol="0" anchor="ctr" wrap="square" tIns="36576" bIns="36576">
+            <a:noAutofit/>
+          </a:bodyPr>
+          <a:lstStyle/>
+          <a:p>
+            <a:pPr algn="ctr" latinLnBrk="0">
+              <a:lnSpc>
+                <a:spcPct val="100000"/>
+              </a:lnSpc>
+              <a:spcBef>
+                <a:spcPts val="0"/>
+              </a:spcBef>
+              <a:spcAft>
+                <a:spcPts val="100"/>
+              </a:spcAft>
+            </a:pPr>
+            <a:r>
+              <a:rPr sz="1200" b="1">
                 <a:solidFill>
                   <a:srgbClr val="0A2B45"/>
                 </a:solidFill>
@@ -9824,45 +10882,45 @@
                 <a:ea typeface="Microsoft YaHei"/>
                 <a:cs typeface="Microsoft YaHei"/>
               </a:rPr>
-              <a:t>Trace 与耗时归因</a:t>
-            </a:r>
-          </a:p>
-          <a:p>
-            <a:pPr algn="l" latinLnBrk="0">
-              <a:lnSpc>
-                <a:spcPct val="100000"/>
-              </a:lnSpc>
-              <a:spcBef>
-                <a:spcPts val="0"/>
-              </a:spcBef>
-              <a:spcAft>
-                <a:spcPts val="0"/>
-              </a:spcAft>
-            </a:pPr>
-            <a:r>
-              <a:rPr sz="800" b="0">
-                <a:solidFill>
-                  <a:srgbClr val="40708B"/>
-                </a:solidFill>
-                <a:latin typeface="Consolas"/>
-                <a:ea typeface="Microsoft YaHei"/>
-                <a:cs typeface="Microsoft YaHei"/>
-              </a:rPr>
-              <a:t>工具 → 本层</a:t>
-            </a:r>
-          </a:p>
-        </p:txBody>
-      </p:sp>
-      <p:sp>
-        <p:nvSpPr>
-          <p:cNvPr id="16" name="Rectangle 15"/>
+              <a:t>大模型</a:t>
+            </a:r>
+          </a:p>
+          <a:p>
+            <a:pPr algn="ctr" latinLnBrk="0">
+              <a:lnSpc>
+                <a:spcPct val="100000"/>
+              </a:lnSpc>
+              <a:spcBef>
+                <a:spcPts val="0"/>
+              </a:spcBef>
+              <a:spcAft>
+                <a:spcPts val="0"/>
+              </a:spcAft>
+            </a:pPr>
+            <a:r>
+              <a:rPr sz="850" b="1">
+                <a:solidFill>
+                  <a:srgbClr val="C2570A"/>
+                </a:solidFill>
+                <a:latin typeface="Microsoft YaHei"/>
+                <a:ea typeface="Microsoft YaHei"/>
+                <a:cs typeface="Microsoft YaHei"/>
+              </a:rPr>
+              <a:t>全流程唯一</a:t>
+            </a:r>
+          </a:p>
+        </p:txBody>
+      </p:sp>
+      <p:sp>
+        <p:nvSpPr>
+          <p:cNvPr id="42" name="Rectangle 41"/>
           <p:cNvSpPr/>
           <p:nvPr/>
         </p:nvSpPr>
         <p:spPr>
           <a:xfrm>
-            <a:off x="713232" y="3767328"/>
-            <a:ext cx="2286000" cy="566928"/>
+            <a:off x="9144000" y="3931920"/>
+            <a:ext cx="2499055" cy="713232"/>
           </a:xfrm>
           <a:prstGeom prst="rect">
             <a:avLst/>
@@ -9872,41 +10930,18 @@
           </a:solidFill>
           <a:ln w="9525">
             <a:solidFill>
-              <a:srgbClr val="CFE3F0"/>
+              <a:srgbClr val="40708B"/>
             </a:solidFill>
+            <a:prstDash val="dash"/>
           </a:ln>
         </p:spPr>
         <p:txBody>
-          <a:bodyPr rtlCol="0" anchor="ctr"/>
-          <a:lstStyle/>
-          <a:p>
-            <a:pPr algn="ctr"/>
-          </a:p>
-        </p:txBody>
-      </p:sp>
-      <p:sp>
-        <p:nvSpPr>
-          <p:cNvPr id="17" name="TextBox 16"/>
-          <p:cNvSpPr txBox="1"/>
-          <p:nvPr/>
-        </p:nvSpPr>
-        <p:spPr>
-          <a:xfrm>
-            <a:off x="822959" y="3803904"/>
-            <a:ext cx="2066543" cy="493776"/>
-          </a:xfrm>
-          <a:prstGeom prst="rect">
-            <a:avLst/>
-          </a:prstGeom>
-          <a:noFill/>
-        </p:spPr>
-        <p:txBody>
-          <a:bodyPr wrap="square" anchor="ctr" lIns="0" tIns="0" rIns="0" bIns="0">
-            <a:noAutofit/>
-          </a:bodyPr>
-          <a:lstStyle/>
-          <a:p>
-            <a:pPr algn="l" latinLnBrk="0">
+          <a:bodyPr rtlCol="0" anchor="ctr" wrap="square" tIns="36576" bIns="36576">
+            <a:noAutofit/>
+          </a:bodyPr>
+          <a:lstStyle/>
+          <a:p>
+            <a:pPr algn="ctr" latinLnBrk="0">
               <a:lnSpc>
                 <a:spcPct val="100000"/>
               </a:lnSpc>
@@ -9918,7 +10953,7 @@
               </a:spcAft>
             </a:pPr>
             <a:r>
-              <a:rPr sz="950" b="1">
+              <a:rPr sz="1100" b="1">
                 <a:solidFill>
                   <a:srgbClr val="0A2B45"/>
                 </a:solidFill>
@@ -9926,1582 +10961,45 @@
                 <a:ea typeface="Microsoft YaHei"/>
                 <a:cs typeface="Microsoft YaHei"/>
               </a:rPr>
-              <a:t>评测报告与判定结论</a:t>
-            </a:r>
-          </a:p>
-          <a:p>
-            <a:pPr algn="l" latinLnBrk="0">
-              <a:lnSpc>
-                <a:spcPct val="100000"/>
-              </a:lnSpc>
-              <a:spcBef>
-                <a:spcPts val="0"/>
-              </a:spcBef>
-              <a:spcAft>
-                <a:spcPts val="0"/>
-              </a:spcAft>
-            </a:pPr>
-            <a:r>
-              <a:rPr sz="800" b="0">
-                <a:solidFill>
-                  <a:srgbClr val="40708B"/>
-                </a:solidFill>
-                <a:latin typeface="Consolas"/>
-                <a:ea typeface="Microsoft YaHei"/>
-                <a:cs typeface="Microsoft YaHei"/>
-              </a:rPr>
-              <a:t>判决侧 → 两层</a:t>
-            </a:r>
-          </a:p>
-        </p:txBody>
-      </p:sp>
-      <p:sp>
-        <p:nvSpPr>
-          <p:cNvPr id="18" name="Rectangle 17"/>
+              <a:t>工具</a:t>
+            </a:r>
+          </a:p>
+          <a:p>
+            <a:pPr algn="ctr" latinLnBrk="0">
+              <a:lnSpc>
+                <a:spcPct val="100000"/>
+              </a:lnSpc>
+              <a:spcBef>
+                <a:spcPts val="0"/>
+              </a:spcBef>
+              <a:spcAft>
+                <a:spcPts val="0"/>
+              </a:spcAft>
+            </a:pPr>
+            <a:r>
+              <a:rPr sz="850" b="0">
+                <a:solidFill>
+                  <a:srgbClr val="1B4D69"/>
+                </a:solidFill>
+                <a:latin typeface="Microsoft YaHei"/>
+                <a:ea typeface="Microsoft YaHei"/>
+                <a:cs typeface="Microsoft YaHei"/>
+              </a:rPr>
+              <a:t>编译 · 运行 · 采集 · 比对 · 仿真</a:t>
+            </a:r>
+          </a:p>
+        </p:txBody>
+      </p:sp>
+      <p:sp>
+        <p:nvSpPr>
+          <p:cNvPr id="43" name="Rectangle 42"/>
           <p:cNvSpPr/>
           <p:nvPr/>
         </p:nvSpPr>
         <p:spPr>
           <a:xfrm>
-            <a:off x="713232" y="4425696"/>
-            <a:ext cx="2286000" cy="566928"/>
-          </a:xfrm>
-          <a:prstGeom prst="rect">
-            <a:avLst/>
-          </a:prstGeom>
-          <a:solidFill>
-            <a:srgbClr val="FFFFFF"/>
-          </a:solidFill>
-          <a:ln w="9525">
-            <a:solidFill>
-              <a:srgbClr val="CFE3F0"/>
-            </a:solidFill>
-          </a:ln>
-        </p:spPr>
-        <p:txBody>
-          <a:bodyPr rtlCol="0" anchor="ctr"/>
-          <a:lstStyle/>
-          <a:p>
-            <a:pPr algn="ctr"/>
-          </a:p>
-        </p:txBody>
-      </p:sp>
-      <p:sp>
-        <p:nvSpPr>
-          <p:cNvPr id="19" name="TextBox 18"/>
-          <p:cNvSpPr txBox="1"/>
-          <p:nvPr/>
-        </p:nvSpPr>
-        <p:spPr>
-          <a:xfrm>
-            <a:off x="822959" y="4462272"/>
-            <a:ext cx="2066543" cy="493776"/>
-          </a:xfrm>
-          <a:prstGeom prst="rect">
-            <a:avLst/>
-          </a:prstGeom>
-          <a:noFill/>
-        </p:spPr>
-        <p:txBody>
-          <a:bodyPr wrap="square" anchor="ctr" lIns="0" tIns="0" rIns="0" bIns="0">
-            <a:noAutofit/>
-          </a:bodyPr>
-          <a:lstStyle/>
-          <a:p>
-            <a:pPr algn="l" latinLnBrk="0">
-              <a:lnSpc>
-                <a:spcPct val="100000"/>
-              </a:lnSpc>
-              <a:spcBef>
-                <a:spcPts val="0"/>
-              </a:spcBef>
-              <a:spcAft>
-                <a:spcPts val="200"/>
-              </a:spcAft>
-            </a:pPr>
-            <a:r>
-              <a:rPr sz="950" b="1">
-                <a:solidFill>
-                  <a:srgbClr val="0A2B45"/>
-                </a:solidFill>
-                <a:latin typeface="Microsoft YaHei"/>
-                <a:ea typeface="Microsoft YaHei"/>
-                <a:cs typeface="Microsoft YaHei"/>
-              </a:rPr>
-              <a:t>新基线</a:t>
-            </a:r>
-          </a:p>
-          <a:p>
-            <a:pPr algn="l" latinLnBrk="0">
-              <a:lnSpc>
-                <a:spcPct val="100000"/>
-              </a:lnSpc>
-              <a:spcBef>
-                <a:spcPts val="0"/>
-              </a:spcBef>
-              <a:spcAft>
-                <a:spcPts val="0"/>
-              </a:spcAft>
-            </a:pPr>
-            <a:r>
-              <a:rPr sz="800" b="0">
-                <a:solidFill>
-                  <a:srgbClr val="40708B"/>
-                </a:solidFill>
-                <a:latin typeface="Consolas"/>
-                <a:ea typeface="Microsoft YaHei"/>
-                <a:cs typeface="Microsoft YaHei"/>
-              </a:rPr>
-              <a:t>判定通过后整体更新</a:t>
-            </a:r>
-          </a:p>
-        </p:txBody>
-      </p:sp>
-      <p:sp>
-        <p:nvSpPr>
-          <p:cNvPr id="20" name="TextBox 19"/>
-          <p:cNvSpPr txBox="1"/>
-          <p:nvPr/>
-        </p:nvSpPr>
-        <p:spPr>
-          <a:xfrm>
-            <a:off x="713232" y="5248656"/>
-            <a:ext cx="2286000" cy="475488"/>
-          </a:xfrm>
-          <a:prstGeom prst="rect">
-            <a:avLst/>
-          </a:prstGeom>
-          <a:noFill/>
-        </p:spPr>
-        <p:txBody>
-          <a:bodyPr wrap="square" anchor="t" lIns="0" tIns="0" rIns="0" bIns="0">
-            <a:noAutofit/>
-          </a:bodyPr>
-          <a:lstStyle/>
-          <a:p>
-            <a:pPr algn="l" latinLnBrk="0">
-              <a:lnSpc>
-                <a:spcPct val="100000"/>
-              </a:lnSpc>
-              <a:spcBef>
-                <a:spcPts val="0"/>
-              </a:spcBef>
-              <a:spcAft>
-                <a:spcPts val="0"/>
-              </a:spcAft>
-            </a:pPr>
-            <a:r>
-              <a:rPr sz="850" b="0">
-                <a:solidFill>
-                  <a:srgbClr val="40708B"/>
-                </a:solidFill>
-                <a:latin typeface="Microsoft YaHei"/>
-                <a:ea typeface="Microsoft YaHei"/>
-                <a:cs typeface="Microsoft YaHei"/>
-              </a:rPr>
-              <a:t>两层 Agent 都挂在这条总线上，</a:t>
-            </a:r>
-          </a:p>
-          <a:p>
-            <a:pPr algn="l" latinLnBrk="0">
-              <a:lnSpc>
-                <a:spcPct val="100000"/>
-              </a:lnSpc>
-              <a:spcBef>
-                <a:spcPts val="0"/>
-              </a:spcBef>
-              <a:spcAft>
-                <a:spcPts val="0"/>
-              </a:spcAft>
-            </a:pPr>
-            <a:r>
-              <a:rPr sz="850" b="0">
-                <a:solidFill>
-                  <a:srgbClr val="40708B"/>
-                </a:solidFill>
-                <a:latin typeface="Microsoft YaHei"/>
-                <a:ea typeface="Microsoft YaHei"/>
-                <a:cs typeface="Microsoft YaHei"/>
-              </a:rPr>
-              <a:t>各自订阅自己关心的消息类型</a:t>
-            </a:r>
-          </a:p>
-        </p:txBody>
-      </p:sp>
-      <p:sp>
-        <p:nvSpPr>
-          <p:cNvPr id="21" name="TextBox 20"/>
-          <p:cNvSpPr txBox="1"/>
-          <p:nvPr/>
-        </p:nvSpPr>
-        <p:spPr>
-          <a:xfrm>
-            <a:off x="3584448" y="1207008"/>
-            <a:ext cx="3968496" cy="219456"/>
-          </a:xfrm>
-          <a:prstGeom prst="rect">
-            <a:avLst/>
-          </a:prstGeom>
-          <a:noFill/>
-        </p:spPr>
-        <p:txBody>
-          <a:bodyPr wrap="square" anchor="ctr" lIns="0" tIns="0" rIns="0" bIns="0">
-            <a:noAutofit/>
-          </a:bodyPr>
-          <a:lstStyle/>
-          <a:p>
-            <a:pPr algn="l" latinLnBrk="0">
-              <a:lnSpc>
-                <a:spcPct val="100000"/>
-              </a:lnSpc>
-              <a:spcBef>
-                <a:spcPts val="0"/>
-              </a:spcBef>
-              <a:spcAft>
-                <a:spcPts val="0"/>
-              </a:spcAft>
-            </a:pPr>
-            <a:r>
-              <a:rPr sz="1000" b="1">
-                <a:solidFill>
-                  <a:srgbClr val="40708B"/>
-                </a:solidFill>
-                <a:latin typeface="Microsoft YaHei"/>
-                <a:ea typeface="Microsoft YaHei"/>
-                <a:cs typeface="Microsoft YaHei"/>
-              </a:rPr>
-              <a:t>Agent 内部组件</a:t>
-            </a:r>
-          </a:p>
-        </p:txBody>
-      </p:sp>
-      <p:sp>
-        <p:nvSpPr>
-          <p:cNvPr id="22" name="TextBox 21"/>
-          <p:cNvSpPr txBox="1"/>
-          <p:nvPr/>
-        </p:nvSpPr>
-        <p:spPr>
-          <a:xfrm>
-            <a:off x="7827264" y="1207008"/>
-            <a:ext cx="3815791" cy="219456"/>
-          </a:xfrm>
-          <a:prstGeom prst="rect">
-            <a:avLst/>
-          </a:prstGeom>
-          <a:noFill/>
-        </p:spPr>
-        <p:txBody>
-          <a:bodyPr wrap="square" anchor="ctr" lIns="0" tIns="0" rIns="0" bIns="0">
-            <a:noAutofit/>
-          </a:bodyPr>
-          <a:lstStyle/>
-          <a:p>
-            <a:pPr algn="l" latinLnBrk="0">
-              <a:lnSpc>
-                <a:spcPct val="100000"/>
-              </a:lnSpc>
-              <a:spcBef>
-                <a:spcPts val="0"/>
-              </a:spcBef>
-              <a:spcAft>
-                <a:spcPts val="0"/>
-              </a:spcAft>
-            </a:pPr>
-            <a:r>
-              <a:rPr sz="1000" b="1">
-                <a:solidFill>
-                  <a:srgbClr val="40708B"/>
-                </a:solidFill>
-                <a:latin typeface="Microsoft YaHei"/>
-                <a:ea typeface="Microsoft YaHei"/>
-                <a:cs typeface="Microsoft YaHei"/>
-              </a:rPr>
-              <a:t>外部对接</a:t>
-            </a:r>
-          </a:p>
-        </p:txBody>
-      </p:sp>
-      <p:sp>
-        <p:nvSpPr>
-          <p:cNvPr id="23" name="Rectangle 22"/>
-          <p:cNvSpPr/>
-          <p:nvPr/>
-        </p:nvSpPr>
-        <p:spPr>
-          <a:xfrm>
-            <a:off x="3584448" y="1444752"/>
-            <a:ext cx="3968496" cy="749808"/>
-          </a:xfrm>
-          <a:prstGeom prst="rect">
-            <a:avLst/>
-          </a:prstGeom>
-          <a:solidFill>
-            <a:srgbClr val="FFFFFF"/>
-          </a:solidFill>
-          <a:ln w="9525">
-            <a:solidFill>
-              <a:srgbClr val="CFE3F0"/>
-            </a:solidFill>
-          </a:ln>
-        </p:spPr>
-        <p:txBody>
-          <a:bodyPr rtlCol="0" anchor="ctr"/>
-          <a:lstStyle/>
-          <a:p>
-            <a:pPr algn="ctr"/>
-          </a:p>
-        </p:txBody>
-      </p:sp>
-      <p:sp>
-        <p:nvSpPr>
-          <p:cNvPr id="24" name="Rectangle 23"/>
-          <p:cNvSpPr/>
-          <p:nvPr/>
-        </p:nvSpPr>
-        <p:spPr>
-          <a:xfrm>
-            <a:off x="3584448" y="1444752"/>
-            <a:ext cx="64008" cy="749808"/>
-          </a:xfrm>
-          <a:prstGeom prst="rect">
-            <a:avLst/>
-          </a:prstGeom>
-          <a:solidFill>
-            <a:srgbClr val="D2690C"/>
-          </a:solidFill>
-          <a:ln>
-            <a:noFill/>
-          </a:ln>
-        </p:spPr>
-        <p:txBody>
-          <a:bodyPr rtlCol="0" anchor="ctr"/>
-          <a:lstStyle/>
-          <a:p>
-            <a:pPr algn="ctr"/>
-          </a:p>
-        </p:txBody>
-      </p:sp>
-      <p:sp>
-        <p:nvSpPr>
-          <p:cNvPr id="25" name="TextBox 24"/>
-          <p:cNvSpPr txBox="1"/>
-          <p:nvPr/>
-        </p:nvSpPr>
-        <p:spPr>
-          <a:xfrm>
-            <a:off x="3785615" y="1490472"/>
-            <a:ext cx="3602736" cy="658368"/>
-          </a:xfrm>
-          <a:prstGeom prst="rect">
-            <a:avLst/>
-          </a:prstGeom>
-          <a:noFill/>
-        </p:spPr>
-        <p:txBody>
-          <a:bodyPr wrap="square" anchor="ctr" lIns="0" tIns="0" rIns="0" bIns="0">
-            <a:noAutofit/>
-          </a:bodyPr>
-          <a:lstStyle/>
-          <a:p>
-            <a:pPr algn="l" latinLnBrk="0">
-              <a:lnSpc>
-                <a:spcPct val="100000"/>
-              </a:lnSpc>
-              <a:spcBef>
-                <a:spcPts val="0"/>
-              </a:spcBef>
-              <a:spcAft>
-                <a:spcPts val="200"/>
-              </a:spcAft>
-            </a:pPr>
-            <a:r>
-              <a:rPr sz="1250" b="1">
-                <a:solidFill>
-                  <a:srgbClr val="0A2B45"/>
-                </a:solidFill>
-                <a:latin typeface="Microsoft YaHei"/>
-                <a:ea typeface="Microsoft YaHei"/>
-                <a:cs typeface="Microsoft YaHei"/>
-              </a:rPr>
-              <a:t>记忆</a:t>
-            </a:r>
-            <a:r>
-              <a:rPr sz="950" b="1">
-                <a:solidFill>
-                  <a:srgbClr val="C2570A"/>
-                </a:solidFill>
-                <a:latin typeface="Consolas"/>
-                <a:ea typeface="Microsoft YaHei"/>
-                <a:cs typeface="Microsoft YaHei"/>
-              </a:rPr>
-              <a:t>　Memory</a:t>
-            </a:r>
-            <a:r>
-              <a:rPr sz="950" b="0">
-                <a:solidFill>
-                  <a:srgbClr val="1B4D69"/>
-                </a:solidFill>
-                <a:latin typeface="Microsoft YaHei"/>
-                <a:ea typeface="Microsoft YaHei"/>
-                <a:cs typeface="Microsoft YaHei"/>
-              </a:rPr>
-              <a:t>　把任务约束与历史带进每一轮</a:t>
-            </a:r>
-          </a:p>
-          <a:p>
-            <a:pPr algn="l" latinLnBrk="0">
-              <a:lnSpc>
-                <a:spcPct val="100000"/>
-              </a:lnSpc>
-              <a:spcBef>
-                <a:spcPts val="0"/>
-              </a:spcBef>
-              <a:spcAft>
-                <a:spcPts val="0"/>
-              </a:spcAft>
-            </a:pPr>
-            <a:r>
-              <a:rPr sz="900" b="0">
-                <a:solidFill>
-                  <a:srgbClr val="40708B"/>
-                </a:solidFill>
-                <a:latin typeface="Microsoft YaHei"/>
-                <a:ea typeface="Microsoft YaHei"/>
-                <a:cs typeface="Microsoft YaHei"/>
-              </a:rPr>
-              <a:t>契约锁定评测条件；被拒原因与历次 Trial 逐轮回灌</a:t>
-            </a:r>
-          </a:p>
-        </p:txBody>
-      </p:sp>
-      <p:sp>
-        <p:nvSpPr>
-          <p:cNvPr id="26" name="Rectangle 25"/>
-          <p:cNvSpPr/>
-          <p:nvPr/>
-        </p:nvSpPr>
-        <p:spPr>
-          <a:xfrm>
-            <a:off x="7827264" y="1444752"/>
-            <a:ext cx="3815791" cy="749808"/>
-          </a:xfrm>
-          <a:prstGeom prst="rect">
-            <a:avLst/>
-          </a:prstGeom>
-          <a:solidFill>
-            <a:srgbClr val="F2F8FD"/>
-          </a:solidFill>
-          <a:ln w="9525">
-            <a:solidFill>
-              <a:srgbClr val="CFE3F0"/>
-            </a:solidFill>
-          </a:ln>
-        </p:spPr>
-        <p:txBody>
-          <a:bodyPr rtlCol="0" anchor="ctr"/>
-          <a:lstStyle/>
-          <a:p>
-            <a:pPr algn="ctr"/>
-          </a:p>
-        </p:txBody>
-      </p:sp>
-      <p:sp>
-        <p:nvSpPr>
-          <p:cNvPr id="27" name="TextBox 26"/>
-          <p:cNvSpPr txBox="1"/>
-          <p:nvPr/>
-        </p:nvSpPr>
-        <p:spPr>
-          <a:xfrm>
-            <a:off x="7991856" y="1490472"/>
-            <a:ext cx="3486607" cy="658368"/>
-          </a:xfrm>
-          <a:prstGeom prst="rect">
-            <a:avLst/>
-          </a:prstGeom>
-          <a:noFill/>
-        </p:spPr>
-        <p:txBody>
-          <a:bodyPr wrap="square" anchor="ctr" lIns="0" tIns="0" rIns="0" bIns="0">
-            <a:noAutofit/>
-          </a:bodyPr>
-          <a:lstStyle/>
-          <a:p>
-            <a:pPr algn="l" latinLnBrk="0">
-              <a:lnSpc>
-                <a:spcPct val="100000"/>
-              </a:lnSpc>
-              <a:spcBef>
-                <a:spcPts val="0"/>
-              </a:spcBef>
-              <a:spcAft>
-                <a:spcPts val="200"/>
-              </a:spcAft>
-            </a:pPr>
-            <a:r>
-              <a:rPr sz="1050" b="1">
-                <a:solidFill>
-                  <a:srgbClr val="123C5B"/>
-                </a:solidFill>
-                <a:latin typeface="Microsoft YaHei"/>
-                <a:ea typeface="Microsoft YaHei"/>
-                <a:cs typeface="Microsoft YaHei"/>
-              </a:rPr>
-              <a:t>任务契约与知识库</a:t>
-            </a:r>
-          </a:p>
-          <a:p>
-            <a:pPr algn="l" latinLnBrk="0">
-              <a:lnSpc>
-                <a:spcPct val="100000"/>
-              </a:lnSpc>
-              <a:spcBef>
-                <a:spcPts val="0"/>
-              </a:spcBef>
-              <a:spcAft>
-                <a:spcPts val="0"/>
-              </a:spcAft>
-            </a:pPr>
-            <a:r>
-              <a:rPr sz="850" b="0">
-                <a:solidFill>
-                  <a:srgbClr val="1B4D69"/>
-                </a:solidFill>
-                <a:latin typeface="Microsoft YaHei"/>
-                <a:ea typeface="Microsoft YaHei"/>
-                <a:cs typeface="Microsoft YaHei"/>
-              </a:rPr>
-              <a:t>optimization-task.json 锁定模型、精度、负载、准入门槛</a:t>
-            </a:r>
-          </a:p>
-          <a:p>
-            <a:pPr algn="l" latinLnBrk="0">
-              <a:lnSpc>
-                <a:spcPct val="100000"/>
-              </a:lnSpc>
-              <a:spcBef>
-                <a:spcPts val="0"/>
-              </a:spcBef>
-              <a:spcAft>
-                <a:spcPts val="0"/>
-              </a:spcAft>
-            </a:pPr>
-            <a:r>
-              <a:rPr sz="850" b="0">
-                <a:solidFill>
-                  <a:srgbClr val="1B4D69"/>
-                </a:solidFill>
-                <a:latin typeface="Microsoft YaHei"/>
-                <a:ea typeface="Microsoft YaHei"/>
-                <a:cs typeface="Microsoft YaHei"/>
-              </a:rPr>
-              <a:t>调优知识库与 Skills：只读目录索引，每轮最多调取 2 份</a:t>
-            </a:r>
-          </a:p>
-        </p:txBody>
-      </p:sp>
-      <p:cxnSp>
-        <p:nvCxnSpPr>
-          <p:cNvPr id="28" name="Connector 27"/>
-          <p:cNvCxnSpPr/>
-          <p:nvPr/>
-        </p:nvCxnSpPr>
-        <p:spPr>
-          <a:xfrm flipH="1">
-            <a:off x="7589519" y="1819656"/>
-            <a:ext cx="201169" cy="0"/>
-          </a:xfrm>
-          <a:prstGeom prst="line">
-            <a:avLst/>
-          </a:prstGeom>
-          <a:ln w="15875">
-            <a:solidFill>
-              <a:srgbClr val="7FA4BA"/>
-            </a:solidFill>
-            <a:tailEnd type="triangle" w="med" len="med"/>
-          </a:ln>
-        </p:spPr>
-      </p:cxnSp>
-      <p:sp>
-        <p:nvSpPr>
-          <p:cNvPr id="29" name="Rectangle 28"/>
-          <p:cNvSpPr/>
-          <p:nvPr/>
-        </p:nvSpPr>
-        <p:spPr>
-          <a:xfrm>
-            <a:off x="3584448" y="2322576"/>
-            <a:ext cx="3968496" cy="749808"/>
-          </a:xfrm>
-          <a:prstGeom prst="rect">
-            <a:avLst/>
-          </a:prstGeom>
-          <a:solidFill>
-            <a:srgbClr val="FFFFFF"/>
-          </a:solidFill>
-          <a:ln w="9525">
-            <a:solidFill>
-              <a:srgbClr val="CFE3F0"/>
-            </a:solidFill>
-          </a:ln>
-        </p:spPr>
-        <p:txBody>
-          <a:bodyPr rtlCol="0" anchor="ctr"/>
-          <a:lstStyle/>
-          <a:p>
-            <a:pPr algn="ctr"/>
-          </a:p>
-        </p:txBody>
-      </p:sp>
-      <p:sp>
-        <p:nvSpPr>
-          <p:cNvPr id="30" name="Rectangle 29"/>
-          <p:cNvSpPr/>
-          <p:nvPr/>
-        </p:nvSpPr>
-        <p:spPr>
-          <a:xfrm>
-            <a:off x="3584448" y="2322576"/>
-            <a:ext cx="64008" cy="749808"/>
-          </a:xfrm>
-          <a:prstGeom prst="rect">
-            <a:avLst/>
-          </a:prstGeom>
-          <a:solidFill>
-            <a:srgbClr val="D2690C"/>
-          </a:solidFill>
-          <a:ln>
-            <a:noFill/>
-          </a:ln>
-        </p:spPr>
-        <p:txBody>
-          <a:bodyPr rtlCol="0" anchor="ctr"/>
-          <a:lstStyle/>
-          <a:p>
-            <a:pPr algn="ctr"/>
-          </a:p>
-        </p:txBody>
-      </p:sp>
-      <p:sp>
-        <p:nvSpPr>
-          <p:cNvPr id="31" name="TextBox 30"/>
-          <p:cNvSpPr txBox="1"/>
-          <p:nvPr/>
-        </p:nvSpPr>
-        <p:spPr>
-          <a:xfrm>
-            <a:off x="3785615" y="2368296"/>
-            <a:ext cx="3602736" cy="658368"/>
-          </a:xfrm>
-          <a:prstGeom prst="rect">
-            <a:avLst/>
-          </a:prstGeom>
-          <a:noFill/>
-        </p:spPr>
-        <p:txBody>
-          <a:bodyPr wrap="square" anchor="ctr" lIns="0" tIns="0" rIns="0" bIns="0">
-            <a:noAutofit/>
-          </a:bodyPr>
-          <a:lstStyle/>
-          <a:p>
-            <a:pPr algn="l" latinLnBrk="0">
-              <a:lnSpc>
-                <a:spcPct val="100000"/>
-              </a:lnSpc>
-              <a:spcBef>
-                <a:spcPts val="0"/>
-              </a:spcBef>
-              <a:spcAft>
-                <a:spcPts val="200"/>
-              </a:spcAft>
-            </a:pPr>
-            <a:r>
-              <a:rPr sz="1250" b="1">
-                <a:solidFill>
-                  <a:srgbClr val="0A2B45"/>
-                </a:solidFill>
-                <a:latin typeface="Microsoft YaHei"/>
-                <a:ea typeface="Microsoft YaHei"/>
-                <a:cs typeface="Microsoft YaHei"/>
-              </a:rPr>
-              <a:t>观察</a:t>
-            </a:r>
-            <a:r>
-              <a:rPr sz="950" b="1">
-                <a:solidFill>
-                  <a:srgbClr val="C2570A"/>
-                </a:solidFill>
-                <a:latin typeface="Consolas"/>
-                <a:ea typeface="Microsoft YaHei"/>
-                <a:cs typeface="Microsoft YaHei"/>
-              </a:rPr>
-              <a:t>　Observation</a:t>
-            </a:r>
-            <a:r>
-              <a:rPr sz="950" b="0">
-                <a:solidFill>
-                  <a:srgbClr val="1B4D69"/>
-                </a:solidFill>
-                <a:latin typeface="Microsoft YaHei"/>
-                <a:ea typeface="Microsoft YaHei"/>
-                <a:cs typeface="Microsoft YaHei"/>
-              </a:rPr>
-              <a:t>　只接收消息与证据，不自行解释成败</a:t>
-            </a:r>
-          </a:p>
-          <a:p>
-            <a:pPr algn="l" latinLnBrk="0">
-              <a:lnSpc>
-                <a:spcPct val="100000"/>
-              </a:lnSpc>
-              <a:spcBef>
-                <a:spcPts val="0"/>
-              </a:spcBef>
-              <a:spcAft>
-                <a:spcPts val="0"/>
-              </a:spcAft>
-            </a:pPr>
-            <a:r>
-              <a:rPr sz="900" b="0">
-                <a:solidFill>
-                  <a:srgbClr val="40708B"/>
-                </a:solidFill>
-                <a:latin typeface="Microsoft YaHei"/>
-                <a:ea typeface="Microsoft YaHei"/>
-                <a:cs typeface="Microsoft YaHei"/>
-              </a:rPr>
-              <a:t>订阅本层关心的消息：Trace 归因、评测报告、Shape 规格</a:t>
-            </a:r>
-          </a:p>
-        </p:txBody>
-      </p:sp>
-      <p:sp>
-        <p:nvSpPr>
-          <p:cNvPr id="32" name="Rectangle 31"/>
-          <p:cNvSpPr/>
-          <p:nvPr/>
-        </p:nvSpPr>
-        <p:spPr>
-          <a:xfrm>
-            <a:off x="7827264" y="2322576"/>
-            <a:ext cx="3815791" cy="749808"/>
-          </a:xfrm>
-          <a:prstGeom prst="rect">
-            <a:avLst/>
-          </a:prstGeom>
-          <a:solidFill>
-            <a:srgbClr val="F2F8FD"/>
-          </a:solidFill>
-          <a:ln w="9525">
-            <a:solidFill>
-              <a:srgbClr val="CFE3F0"/>
-            </a:solidFill>
-          </a:ln>
-        </p:spPr>
-        <p:txBody>
-          <a:bodyPr rtlCol="0" anchor="ctr"/>
-          <a:lstStyle/>
-          <a:p>
-            <a:pPr algn="ctr"/>
-          </a:p>
-        </p:txBody>
-      </p:sp>
-      <p:sp>
-        <p:nvSpPr>
-          <p:cNvPr id="33" name="TextBox 32"/>
-          <p:cNvSpPr txBox="1"/>
-          <p:nvPr/>
-        </p:nvSpPr>
-        <p:spPr>
-          <a:xfrm>
-            <a:off x="7991856" y="2368296"/>
-            <a:ext cx="3486607" cy="658368"/>
-          </a:xfrm>
-          <a:prstGeom prst="rect">
-            <a:avLst/>
-          </a:prstGeom>
-          <a:noFill/>
-        </p:spPr>
-        <p:txBody>
-          <a:bodyPr wrap="square" anchor="ctr" lIns="0" tIns="0" rIns="0" bIns="0">
-            <a:noAutofit/>
-          </a:bodyPr>
-          <a:lstStyle/>
-          <a:p>
-            <a:pPr algn="l" latinLnBrk="0">
-              <a:lnSpc>
-                <a:spcPct val="100000"/>
-              </a:lnSpc>
-              <a:spcBef>
-                <a:spcPts val="0"/>
-              </a:spcBef>
-              <a:spcAft>
-                <a:spcPts val="200"/>
-              </a:spcAft>
-            </a:pPr>
-            <a:r>
-              <a:rPr sz="1050" b="1">
-                <a:solidFill>
-                  <a:srgbClr val="123C5B"/>
-                </a:solidFill>
-                <a:latin typeface="Microsoft YaHei"/>
-                <a:ea typeface="Microsoft YaHei"/>
-                <a:cs typeface="Microsoft YaHei"/>
-              </a:rPr>
-              <a:t>工具采集的证据</a:t>
-            </a:r>
-          </a:p>
-          <a:p>
-            <a:pPr algn="l" latinLnBrk="0">
-              <a:lnSpc>
-                <a:spcPct val="100000"/>
-              </a:lnSpc>
-              <a:spcBef>
-                <a:spcPts val="0"/>
-              </a:spcBef>
-              <a:spcAft>
-                <a:spcPts val="0"/>
-              </a:spcAft>
-            </a:pPr>
-            <a:r>
-              <a:rPr sz="850" b="0">
-                <a:solidFill>
-                  <a:srgbClr val="1B4D69"/>
-                </a:solidFill>
-                <a:latin typeface="Microsoft YaHei"/>
-                <a:ea typeface="Microsoft YaHei"/>
-                <a:cs typeface="Microsoft YaHei"/>
-              </a:rPr>
-              <a:t>profile 接口采 Trace，golden 比对数值，真机重复计时</a:t>
-            </a:r>
-          </a:p>
-          <a:p>
-            <a:pPr algn="l" latinLnBrk="0">
-              <a:lnSpc>
-                <a:spcPct val="100000"/>
-              </a:lnSpc>
-              <a:spcBef>
-                <a:spcPts val="0"/>
-              </a:spcBef>
-              <a:spcAft>
-                <a:spcPts val="0"/>
-              </a:spcAft>
-            </a:pPr>
-            <a:r>
-              <a:rPr sz="850" b="0">
-                <a:solidFill>
-                  <a:srgbClr val="1B4D69"/>
-                </a:solidFill>
-                <a:latin typeface="Microsoft YaHei"/>
-                <a:ea typeface="Microsoft YaHei"/>
-                <a:cs typeface="Microsoft YaHei"/>
-              </a:rPr>
-              <a:t>证据先锁定再进入下一环，观察环节不改写证据</a:t>
-            </a:r>
-          </a:p>
-        </p:txBody>
-      </p:sp>
-      <p:cxnSp>
-        <p:nvCxnSpPr>
-          <p:cNvPr id="34" name="Connector 33"/>
-          <p:cNvCxnSpPr/>
-          <p:nvPr/>
-        </p:nvCxnSpPr>
-        <p:spPr>
-          <a:xfrm flipH="1">
-            <a:off x="7589519" y="2697480"/>
-            <a:ext cx="201169" cy="0"/>
-          </a:xfrm>
-          <a:prstGeom prst="line">
-            <a:avLst/>
-          </a:prstGeom>
-          <a:ln w="15875">
-            <a:solidFill>
-              <a:srgbClr val="7FA4BA"/>
-            </a:solidFill>
-            <a:tailEnd type="triangle" w="med" len="med"/>
-          </a:ln>
-        </p:spPr>
-      </p:cxnSp>
-      <p:sp>
-        <p:nvSpPr>
-          <p:cNvPr id="35" name="Rectangle 34"/>
-          <p:cNvSpPr/>
-          <p:nvPr/>
-        </p:nvSpPr>
-        <p:spPr>
-          <a:xfrm>
-            <a:off x="3584448" y="3200400"/>
-            <a:ext cx="3968496" cy="749808"/>
-          </a:xfrm>
-          <a:prstGeom prst="rect">
-            <a:avLst/>
-          </a:prstGeom>
-          <a:solidFill>
-            <a:srgbClr val="FFFFFF"/>
-          </a:solidFill>
-          <a:ln w="9525">
-            <a:solidFill>
-              <a:srgbClr val="CFE3F0"/>
-            </a:solidFill>
-          </a:ln>
-        </p:spPr>
-        <p:txBody>
-          <a:bodyPr rtlCol="0" anchor="ctr"/>
-          <a:lstStyle/>
-          <a:p>
-            <a:pPr algn="ctr"/>
-          </a:p>
-        </p:txBody>
-      </p:sp>
-      <p:sp>
-        <p:nvSpPr>
-          <p:cNvPr id="36" name="Rectangle 35"/>
-          <p:cNvSpPr/>
-          <p:nvPr/>
-        </p:nvSpPr>
-        <p:spPr>
-          <a:xfrm>
-            <a:off x="3584448" y="3200400"/>
-            <a:ext cx="64008" cy="749808"/>
-          </a:xfrm>
-          <a:prstGeom prst="rect">
-            <a:avLst/>
-          </a:prstGeom>
-          <a:solidFill>
-            <a:srgbClr val="D2690C"/>
-          </a:solidFill>
-          <a:ln>
-            <a:noFill/>
-          </a:ln>
-        </p:spPr>
-        <p:txBody>
-          <a:bodyPr rtlCol="0" anchor="ctr"/>
-          <a:lstStyle/>
-          <a:p>
-            <a:pPr algn="ctr"/>
-          </a:p>
-        </p:txBody>
-      </p:sp>
-      <p:sp>
-        <p:nvSpPr>
-          <p:cNvPr id="37" name="TextBox 36"/>
-          <p:cNvSpPr txBox="1"/>
-          <p:nvPr/>
-        </p:nvSpPr>
-        <p:spPr>
-          <a:xfrm>
-            <a:off x="3785615" y="3246120"/>
-            <a:ext cx="3602736" cy="658368"/>
-          </a:xfrm>
-          <a:prstGeom prst="rect">
-            <a:avLst/>
-          </a:prstGeom>
-          <a:noFill/>
-        </p:spPr>
-        <p:txBody>
-          <a:bodyPr wrap="square" anchor="ctr" lIns="0" tIns="0" rIns="0" bIns="0">
-            <a:noAutofit/>
-          </a:bodyPr>
-          <a:lstStyle/>
-          <a:p>
-            <a:pPr algn="l" latinLnBrk="0">
-              <a:lnSpc>
-                <a:spcPct val="100000"/>
-              </a:lnSpc>
-              <a:spcBef>
-                <a:spcPts val="0"/>
-              </a:spcBef>
-              <a:spcAft>
-                <a:spcPts val="200"/>
-              </a:spcAft>
-            </a:pPr>
-            <a:r>
-              <a:rPr sz="1250" b="1">
-                <a:solidFill>
-                  <a:srgbClr val="0A2B45"/>
-                </a:solidFill>
-                <a:latin typeface="Microsoft YaHei"/>
-                <a:ea typeface="Microsoft YaHei"/>
-                <a:cs typeface="Microsoft YaHei"/>
-              </a:rPr>
-              <a:t>思考</a:t>
-            </a:r>
-            <a:r>
-              <a:rPr sz="950" b="1">
-                <a:solidFill>
-                  <a:srgbClr val="C2570A"/>
-                </a:solidFill>
-                <a:latin typeface="Consolas"/>
-                <a:ea typeface="Microsoft YaHei"/>
-                <a:cs typeface="Microsoft YaHei"/>
-              </a:rPr>
-              <a:t>　Thought</a:t>
-            </a:r>
-            <a:r>
-              <a:rPr sz="950" b="0">
-                <a:solidFill>
-                  <a:srgbClr val="1B4D69"/>
-                </a:solidFill>
-                <a:latin typeface="Microsoft YaHei"/>
-                <a:ea typeface="Microsoft YaHei"/>
-                <a:cs typeface="Microsoft YaHei"/>
-              </a:rPr>
-              <a:t>　全流程唯一调用模型的环节</a:t>
-            </a:r>
-          </a:p>
-          <a:p>
-            <a:pPr algn="l" latinLnBrk="0">
-              <a:lnSpc>
-                <a:spcPct val="100000"/>
-              </a:lnSpc>
-              <a:spcBef>
-                <a:spcPts val="0"/>
-              </a:spcBef>
-              <a:spcAft>
-                <a:spcPts val="0"/>
-              </a:spcAft>
-            </a:pPr>
-            <a:r>
-              <a:rPr sz="900" b="0">
-                <a:solidFill>
-                  <a:srgbClr val="40708B"/>
-                </a:solidFill>
-                <a:latin typeface="Microsoft YaHei"/>
-                <a:ea typeface="Microsoft YaHei"/>
-                <a:cs typeface="Microsoft YaHei"/>
-              </a:rPr>
-              <a:t>看证据写代码：结合源码与锁定证据提出优化假设</a:t>
-            </a:r>
-          </a:p>
-        </p:txBody>
-      </p:sp>
-      <p:sp>
-        <p:nvSpPr>
-          <p:cNvPr id="38" name="Rectangle 37"/>
-          <p:cNvSpPr/>
-          <p:nvPr/>
-        </p:nvSpPr>
-        <p:spPr>
-          <a:xfrm>
-            <a:off x="7827264" y="3200400"/>
-            <a:ext cx="3815791" cy="749808"/>
-          </a:xfrm>
-          <a:prstGeom prst="rect">
-            <a:avLst/>
-          </a:prstGeom>
-          <a:solidFill>
-            <a:srgbClr val="F2F8FD"/>
-          </a:solidFill>
-          <a:ln w="9525">
-            <a:solidFill>
-              <a:srgbClr val="CFE3F0"/>
-            </a:solidFill>
-          </a:ln>
-        </p:spPr>
-        <p:txBody>
-          <a:bodyPr rtlCol="0" anchor="ctr"/>
-          <a:lstStyle/>
-          <a:p>
-            <a:pPr algn="ctr"/>
-          </a:p>
-        </p:txBody>
-      </p:sp>
-      <p:sp>
-        <p:nvSpPr>
-          <p:cNvPr id="39" name="TextBox 38"/>
-          <p:cNvSpPr txBox="1"/>
-          <p:nvPr/>
-        </p:nvSpPr>
-        <p:spPr>
-          <a:xfrm>
-            <a:off x="7991856" y="3246120"/>
-            <a:ext cx="3486607" cy="658368"/>
-          </a:xfrm>
-          <a:prstGeom prst="rect">
-            <a:avLst/>
-          </a:prstGeom>
-          <a:noFill/>
-        </p:spPr>
-        <p:txBody>
-          <a:bodyPr wrap="square" anchor="ctr" lIns="0" tIns="0" rIns="0" bIns="0">
-            <a:noAutofit/>
-          </a:bodyPr>
-          <a:lstStyle/>
-          <a:p>
-            <a:pPr algn="l" latinLnBrk="0">
-              <a:lnSpc>
-                <a:spcPct val="100000"/>
-              </a:lnSpc>
-              <a:spcBef>
-                <a:spcPts val="0"/>
-              </a:spcBef>
-              <a:spcAft>
-                <a:spcPts val="200"/>
-              </a:spcAft>
-            </a:pPr>
-            <a:r>
-              <a:rPr sz="1050" b="1">
-                <a:solidFill>
-                  <a:srgbClr val="123C5B"/>
-                </a:solidFill>
-                <a:latin typeface="Microsoft YaHei"/>
-                <a:ea typeface="Microsoft YaHei"/>
-                <a:cs typeface="Microsoft YaHei"/>
-              </a:rPr>
-              <a:t>大模型 + 人按需介入</a:t>
-            </a:r>
-          </a:p>
-          <a:p>
-            <a:pPr algn="l" latinLnBrk="0">
-              <a:lnSpc>
-                <a:spcPct val="100000"/>
-              </a:lnSpc>
-              <a:spcBef>
-                <a:spcPts val="0"/>
-              </a:spcBef>
-              <a:spcAft>
-                <a:spcPts val="0"/>
-              </a:spcAft>
-            </a:pPr>
-            <a:r>
-              <a:rPr sz="850" b="0">
-                <a:solidFill>
-                  <a:srgbClr val="1B4D69"/>
-                </a:solidFill>
-                <a:latin typeface="Microsoft YaHei"/>
-                <a:ea typeface="Microsoft YaHei"/>
-                <a:cs typeface="Microsoft YaHei"/>
-              </a:rPr>
-              <a:t>全流程唯一的模型；复杂场景由人直接改或与之协同</a:t>
-            </a:r>
-          </a:p>
-          <a:p>
-            <a:pPr algn="l" latinLnBrk="0">
-              <a:lnSpc>
-                <a:spcPct val="100000"/>
-              </a:lnSpc>
-              <a:spcBef>
-                <a:spcPts val="0"/>
-              </a:spcBef>
-              <a:spcAft>
-                <a:spcPts val="0"/>
-              </a:spcAft>
-            </a:pPr>
-            <a:r>
-              <a:rPr sz="850" b="0">
-                <a:solidFill>
-                  <a:srgbClr val="1B4D69"/>
-                </a:solidFill>
-                <a:latin typeface="Microsoft YaHei"/>
-                <a:ea typeface="Microsoft YaHei"/>
-                <a:cs typeface="Microsoft YaHei"/>
-              </a:rPr>
-              <a:t>人工介入同样走下方那道判定，不另开通道</a:t>
-            </a:r>
-          </a:p>
-        </p:txBody>
-      </p:sp>
-      <p:cxnSp>
-        <p:nvCxnSpPr>
-          <p:cNvPr id="40" name="Connector 39"/>
-          <p:cNvCxnSpPr/>
-          <p:nvPr/>
-        </p:nvCxnSpPr>
-        <p:spPr>
-          <a:xfrm flipH="1">
-            <a:off x="7589519" y="3575304"/>
-            <a:ext cx="201169" cy="0"/>
-          </a:xfrm>
-          <a:prstGeom prst="line">
-            <a:avLst/>
-          </a:prstGeom>
-          <a:ln w="15875">
-            <a:solidFill>
-              <a:srgbClr val="7FA4BA"/>
-            </a:solidFill>
-            <a:tailEnd type="triangle" w="med" len="med"/>
-          </a:ln>
-        </p:spPr>
-      </p:cxnSp>
-      <p:sp>
-        <p:nvSpPr>
-          <p:cNvPr id="41" name="Rectangle 40"/>
-          <p:cNvSpPr/>
-          <p:nvPr/>
-        </p:nvSpPr>
-        <p:spPr>
-          <a:xfrm>
-            <a:off x="3584448" y="4078224"/>
-            <a:ext cx="3968496" cy="749808"/>
-          </a:xfrm>
-          <a:prstGeom prst="rect">
-            <a:avLst/>
-          </a:prstGeom>
-          <a:solidFill>
-            <a:srgbClr val="FFFFFF"/>
-          </a:solidFill>
-          <a:ln w="9525">
-            <a:solidFill>
-              <a:srgbClr val="CFE3F0"/>
-            </a:solidFill>
-          </a:ln>
-        </p:spPr>
-        <p:txBody>
-          <a:bodyPr rtlCol="0" anchor="ctr"/>
-          <a:lstStyle/>
-          <a:p>
-            <a:pPr algn="ctr"/>
-          </a:p>
-        </p:txBody>
-      </p:sp>
-      <p:sp>
-        <p:nvSpPr>
-          <p:cNvPr id="42" name="Rectangle 41"/>
-          <p:cNvSpPr/>
-          <p:nvPr/>
-        </p:nvSpPr>
-        <p:spPr>
-          <a:xfrm>
-            <a:off x="3584448" y="4078224"/>
-            <a:ext cx="64008" cy="749808"/>
-          </a:xfrm>
-          <a:prstGeom prst="rect">
-            <a:avLst/>
-          </a:prstGeom>
-          <a:solidFill>
-            <a:srgbClr val="D2690C"/>
-          </a:solidFill>
-          <a:ln>
-            <a:noFill/>
-          </a:ln>
-        </p:spPr>
-        <p:txBody>
-          <a:bodyPr rtlCol="0" anchor="ctr"/>
-          <a:lstStyle/>
-          <a:p>
-            <a:pPr algn="ctr"/>
-          </a:p>
-        </p:txBody>
-      </p:sp>
-      <p:sp>
-        <p:nvSpPr>
-          <p:cNvPr id="43" name="TextBox 42"/>
-          <p:cNvSpPr txBox="1"/>
-          <p:nvPr/>
-        </p:nvSpPr>
-        <p:spPr>
-          <a:xfrm>
-            <a:off x="3785615" y="4123944"/>
-            <a:ext cx="3602736" cy="658368"/>
-          </a:xfrm>
-          <a:prstGeom prst="rect">
-            <a:avLst/>
-          </a:prstGeom>
-          <a:noFill/>
-        </p:spPr>
-        <p:txBody>
-          <a:bodyPr wrap="square" anchor="ctr" lIns="0" tIns="0" rIns="0" bIns="0">
-            <a:noAutofit/>
-          </a:bodyPr>
-          <a:lstStyle/>
-          <a:p>
-            <a:pPr algn="l" latinLnBrk="0">
-              <a:lnSpc>
-                <a:spcPct val="100000"/>
-              </a:lnSpc>
-              <a:spcBef>
-                <a:spcPts val="0"/>
-              </a:spcBef>
-              <a:spcAft>
-                <a:spcPts val="200"/>
-              </a:spcAft>
-            </a:pPr>
-            <a:r>
-              <a:rPr sz="1250" b="1">
-                <a:solidFill>
-                  <a:srgbClr val="0A2B45"/>
-                </a:solidFill>
-                <a:latin typeface="Microsoft YaHei"/>
-                <a:ea typeface="Microsoft YaHei"/>
-                <a:cs typeface="Microsoft YaHei"/>
-              </a:rPr>
-              <a:t>行动</a:t>
-            </a:r>
-            <a:r>
-              <a:rPr sz="950" b="1">
-                <a:solidFill>
-                  <a:srgbClr val="C2570A"/>
-                </a:solidFill>
-                <a:latin typeface="Consolas"/>
-                <a:ea typeface="Microsoft YaHei"/>
-                <a:cs typeface="Microsoft YaHei"/>
-              </a:rPr>
-              <a:t>　Action</a:t>
-            </a:r>
-            <a:r>
-              <a:rPr sz="950" b="0">
-                <a:solidFill>
-                  <a:srgbClr val="1B4D69"/>
-                </a:solidFill>
-                <a:latin typeface="Microsoft YaHei"/>
-                <a:ea typeface="Microsoft YaHei"/>
-                <a:cs typeface="Microsoft YaHei"/>
-              </a:rPr>
-              <a:t>　产出一律是候选，不是结论</a:t>
-            </a:r>
-          </a:p>
-          <a:p>
-            <a:pPr algn="l" latinLnBrk="0">
-              <a:lnSpc>
-                <a:spcPct val="100000"/>
-              </a:lnSpc>
-              <a:spcBef>
-                <a:spcPts val="0"/>
-              </a:spcBef>
-              <a:spcAft>
-                <a:spcPts val="0"/>
-              </a:spcAft>
-            </a:pPr>
-            <a:r>
-              <a:rPr sz="900" b="0">
-                <a:solidFill>
-                  <a:srgbClr val="40708B"/>
-                </a:solidFill>
-                <a:latin typeface="Microsoft YaHei"/>
-                <a:ea typeface="Microsoft YaHei"/>
-                <a:cs typeface="Microsoft YaHei"/>
-              </a:rPr>
-              <a:t>模型层出代码补丁；算子层出算子实现（显式规划 DMA 与流水）</a:t>
-            </a:r>
-          </a:p>
-        </p:txBody>
-      </p:sp>
-      <p:sp>
-        <p:nvSpPr>
-          <p:cNvPr id="44" name="Rectangle 43"/>
-          <p:cNvSpPr/>
-          <p:nvPr/>
-        </p:nvSpPr>
-        <p:spPr>
-          <a:xfrm>
-            <a:off x="7827264" y="4078224"/>
-            <a:ext cx="3815791" cy="749808"/>
-          </a:xfrm>
-          <a:prstGeom prst="rect">
-            <a:avLst/>
-          </a:prstGeom>
-          <a:solidFill>
-            <a:srgbClr val="F2F8FD"/>
-          </a:solidFill>
-          <a:ln w="9525">
-            <a:solidFill>
-              <a:srgbClr val="CFE3F0"/>
-            </a:solidFill>
-          </a:ln>
-        </p:spPr>
-        <p:txBody>
-          <a:bodyPr rtlCol="0" anchor="ctr"/>
-          <a:lstStyle/>
-          <a:p>
-            <a:pPr algn="ctr"/>
-          </a:p>
-        </p:txBody>
-      </p:sp>
-      <p:sp>
-        <p:nvSpPr>
-          <p:cNvPr id="45" name="TextBox 44"/>
-          <p:cNvSpPr txBox="1"/>
-          <p:nvPr/>
-        </p:nvSpPr>
-        <p:spPr>
-          <a:xfrm>
-            <a:off x="7991856" y="4123944"/>
-            <a:ext cx="3486607" cy="658368"/>
-          </a:xfrm>
-          <a:prstGeom prst="rect">
-            <a:avLst/>
-          </a:prstGeom>
-          <a:noFill/>
-        </p:spPr>
-        <p:txBody>
-          <a:bodyPr wrap="square" anchor="ctr" lIns="0" tIns="0" rIns="0" bIns="0">
-            <a:noAutofit/>
-          </a:bodyPr>
-          <a:lstStyle/>
-          <a:p>
-            <a:pPr algn="l" latinLnBrk="0">
-              <a:lnSpc>
-                <a:spcPct val="100000"/>
-              </a:lnSpc>
-              <a:spcBef>
-                <a:spcPts val="0"/>
-              </a:spcBef>
-              <a:spcAft>
-                <a:spcPts val="200"/>
-              </a:spcAft>
-            </a:pPr>
-            <a:r>
-              <a:rPr sz="1050" b="1">
-                <a:solidFill>
-                  <a:srgbClr val="123C5B"/>
-                </a:solidFill>
-                <a:latin typeface="Microsoft YaHei"/>
-                <a:ea typeface="Microsoft YaHei"/>
-                <a:cs typeface="Microsoft YaHei"/>
-              </a:rPr>
-              <a:t>工具（Tools）</a:t>
-            </a:r>
-          </a:p>
-          <a:p>
-            <a:pPr algn="l" latinLnBrk="0">
-              <a:lnSpc>
-                <a:spcPct val="100000"/>
-              </a:lnSpc>
-              <a:spcBef>
-                <a:spcPts val="0"/>
-              </a:spcBef>
-              <a:spcAft>
-                <a:spcPts val="0"/>
-              </a:spcAft>
-            </a:pPr>
-            <a:r>
-              <a:rPr sz="850" b="0">
-                <a:solidFill>
-                  <a:srgbClr val="1B4D69"/>
-                </a:solidFill>
-                <a:latin typeface="Microsoft YaHei"/>
-                <a:ea typeface="Microsoft YaHei"/>
-                <a:cs typeface="Microsoft YaHei"/>
-              </a:rPr>
-              <a:t>编译构建 · 运行 · 性能采集 · 数值比对 · 模拟器定位</a:t>
-            </a:r>
-          </a:p>
-          <a:p>
-            <a:pPr algn="l" latinLnBrk="0">
-              <a:lnSpc>
-                <a:spcPct val="100000"/>
-              </a:lnSpc>
-              <a:spcBef>
-                <a:spcPts val="0"/>
-              </a:spcBef>
-              <a:spcAft>
-                <a:spcPts val="0"/>
-              </a:spcAft>
-            </a:pPr>
-            <a:r>
-              <a:rPr sz="850" b="0">
-                <a:solidFill>
-                  <a:srgbClr val="1B4D69"/>
-                </a:solidFill>
-                <a:latin typeface="Microsoft YaHei"/>
-                <a:ea typeface="Microsoft YaHei"/>
-                <a:cs typeface="Microsoft YaHei"/>
-              </a:rPr>
-              <a:t>与硬件耦合的只有 backend/ 这一层</a:t>
-            </a:r>
-          </a:p>
-        </p:txBody>
-      </p:sp>
-      <p:cxnSp>
-        <p:nvCxnSpPr>
-          <p:cNvPr id="46" name="Connector 45"/>
-          <p:cNvCxnSpPr/>
-          <p:nvPr/>
-        </p:nvCxnSpPr>
-        <p:spPr>
-          <a:xfrm>
-            <a:off x="7589519" y="4453128"/>
-            <a:ext cx="201169" cy="0"/>
-          </a:xfrm>
-          <a:prstGeom prst="line">
-            <a:avLst/>
-          </a:prstGeom>
-          <a:ln w="15875">
-            <a:solidFill>
-              <a:srgbClr val="D2690C"/>
-            </a:solidFill>
-            <a:tailEnd type="triangle" w="med" len="med"/>
-          </a:ln>
-        </p:spPr>
-      </p:cxnSp>
-      <p:cxnSp>
-        <p:nvCxnSpPr>
-          <p:cNvPr id="47" name="Connector 46"/>
-          <p:cNvCxnSpPr/>
-          <p:nvPr/>
-        </p:nvCxnSpPr>
-        <p:spPr>
-          <a:xfrm>
-            <a:off x="5568696" y="2203703"/>
-            <a:ext cx="0" cy="109729"/>
-          </a:xfrm>
-          <a:prstGeom prst="line">
-            <a:avLst/>
-          </a:prstGeom>
-          <a:ln w="15875">
-            <a:solidFill>
-              <a:srgbClr val="D2690C"/>
-            </a:solidFill>
-            <a:tailEnd type="triangle" w="med" len="med"/>
-          </a:ln>
-        </p:spPr>
-      </p:cxnSp>
-      <p:cxnSp>
-        <p:nvCxnSpPr>
-          <p:cNvPr id="48" name="Connector 47"/>
-          <p:cNvCxnSpPr/>
-          <p:nvPr/>
-        </p:nvCxnSpPr>
-        <p:spPr>
-          <a:xfrm>
-            <a:off x="5568696" y="3081527"/>
-            <a:ext cx="0" cy="109729"/>
-          </a:xfrm>
-          <a:prstGeom prst="line">
-            <a:avLst/>
-          </a:prstGeom>
-          <a:ln w="15875">
-            <a:solidFill>
-              <a:srgbClr val="D2690C"/>
-            </a:solidFill>
-            <a:tailEnd type="triangle" w="med" len="med"/>
-          </a:ln>
-        </p:spPr>
-      </p:cxnSp>
-      <p:cxnSp>
-        <p:nvCxnSpPr>
-          <p:cNvPr id="49" name="Connector 48"/>
-          <p:cNvCxnSpPr/>
-          <p:nvPr/>
-        </p:nvCxnSpPr>
-        <p:spPr>
-          <a:xfrm>
-            <a:off x="5568696" y="3959352"/>
-            <a:ext cx="0" cy="109728"/>
-          </a:xfrm>
-          <a:prstGeom prst="line">
-            <a:avLst/>
-          </a:prstGeom>
-          <a:ln w="15875">
-            <a:solidFill>
-              <a:srgbClr val="D2690C"/>
-            </a:solidFill>
-            <a:tailEnd type="triangle" w="med" len="med"/>
-          </a:ln>
-        </p:spPr>
-      </p:cxnSp>
-      <p:sp>
-        <p:nvSpPr>
-          <p:cNvPr id="50" name="Rectangle 49"/>
-          <p:cNvSpPr/>
-          <p:nvPr/>
-        </p:nvSpPr>
-        <p:spPr>
-          <a:xfrm>
-            <a:off x="3584448" y="5102352"/>
-            <a:ext cx="8058607" cy="749808"/>
+            <a:off x="5321808" y="5230368"/>
+            <a:ext cx="6321247" cy="566928"/>
           </a:xfrm>
           <a:prstGeom prst="rect">
             <a:avLst/>
@@ -11525,14 +11023,14 @@
       </p:sp>
       <p:sp>
         <p:nvSpPr>
-          <p:cNvPr id="51" name="Rectangle 50"/>
+          <p:cNvPr id="44" name="Rectangle 43"/>
           <p:cNvSpPr/>
           <p:nvPr/>
         </p:nvSpPr>
         <p:spPr>
           <a:xfrm>
-            <a:off x="3584448" y="5102352"/>
-            <a:ext cx="73152" cy="749808"/>
+            <a:off x="5321808" y="5230368"/>
+            <a:ext cx="73152" cy="566928"/>
           </a:xfrm>
           <a:prstGeom prst="rect">
             <a:avLst/>
@@ -11554,14 +11052,14 @@
       </p:sp>
       <p:sp>
         <p:nvSpPr>
-          <p:cNvPr id="52" name="TextBox 51"/>
-          <p:cNvSpPr txBox="1"/>
-          <p:nvPr/>
-        </p:nvSpPr>
-        <p:spPr>
-          <a:xfrm>
-            <a:off x="3858768" y="5148072"/>
-            <a:ext cx="7601407" cy="237744"/>
+          <p:cNvPr id="45" name="TextBox 44"/>
+          <p:cNvSpPr txBox="1"/>
+          <p:nvPr/>
+        </p:nvSpPr>
+        <p:spPr>
+          <a:xfrm>
+            <a:off x="5596128" y="5230368"/>
+            <a:ext cx="5864047" cy="566928"/>
           </a:xfrm>
           <a:prstGeom prst="rect">
             <a:avLst/>
@@ -11586,7 +11084,7 @@
               </a:spcAft>
             </a:pPr>
             <a:r>
-              <a:rPr sz="1150" b="1">
+              <a:rPr sz="1250" b="1">
                 <a:solidFill>
                   <a:srgbClr val="0F62CE"/>
                 </a:solidFill>
@@ -11594,7 +11092,7 @@
                 <a:ea typeface="Microsoft YaHei"/>
                 <a:cs typeface="Microsoft YaHei"/>
               </a:rPr>
-              <a:t>判决侧 · 规则驱动，无模型</a:t>
+              <a:t>判决侧</a:t>
             </a:r>
             <a:r>
               <a:rPr sz="1050" b="0">
@@ -11616,115 +11114,339 @@
                 <a:ea typeface="Microsoft YaHei"/>
                 <a:cs typeface="Microsoft YaHei"/>
               </a:rPr>
-              <a:t>Agent 无权自行宣告成功：行动的产出必须先过这里</a:t>
-            </a:r>
-          </a:p>
-        </p:txBody>
-      </p:sp>
-      <p:sp>
-        <p:nvSpPr>
-          <p:cNvPr id="53" name="TextBox 52"/>
-          <p:cNvSpPr txBox="1"/>
-          <p:nvPr/>
-        </p:nvSpPr>
-        <p:spPr>
-          <a:xfrm>
-            <a:off x="3858768" y="5431536"/>
-            <a:ext cx="3754983" cy="347472"/>
-          </a:xfrm>
-          <a:prstGeom prst="rect">
-            <a:avLst/>
-          </a:prstGeom>
-          <a:noFill/>
-        </p:spPr>
-        <p:txBody>
-          <a:bodyPr wrap="square" anchor="ctr" lIns="0" tIns="0" rIns="0" bIns="0">
-            <a:noAutofit/>
-          </a:bodyPr>
-          <a:lstStyle/>
-          <a:p>
-            <a:pPr algn="l" latinLnBrk="0">
-              <a:lnSpc>
-                <a:spcPct val="100000"/>
-              </a:lnSpc>
-              <a:spcBef>
-                <a:spcPts val="0"/>
-              </a:spcBef>
-              <a:spcAft>
-                <a:spcPts val="0"/>
-              </a:spcAft>
-            </a:pPr>
-            <a:r>
-              <a:rPr sz="900" b="0">
-                <a:solidFill>
-                  <a:srgbClr val="1B4D69"/>
-                </a:solidFill>
-                <a:latin typeface="Microsoft YaHei"/>
-                <a:ea typeface="Microsoft YaHei"/>
-                <a:cs typeface="Microsoft YaHei"/>
-              </a:rPr>
-              <a:t>模型层＝控制器：单算子初筛 → 质量评估 → 端到端 A/B</a:t>
-            </a:r>
-          </a:p>
-        </p:txBody>
-      </p:sp>
-      <p:sp>
-        <p:nvSpPr>
-          <p:cNvPr id="54" name="TextBox 53"/>
-          <p:cNvSpPr txBox="1"/>
-          <p:nvPr/>
-        </p:nvSpPr>
-        <p:spPr>
-          <a:xfrm>
-            <a:off x="7613751" y="5431536"/>
-            <a:ext cx="3754983" cy="347472"/>
-          </a:xfrm>
-          <a:prstGeom prst="rect">
-            <a:avLst/>
-          </a:prstGeom>
-          <a:noFill/>
-        </p:spPr>
-        <p:txBody>
-          <a:bodyPr wrap="square" anchor="ctr" lIns="0" tIns="0" rIns="0" bIns="0">
-            <a:noAutofit/>
-          </a:bodyPr>
-          <a:lstStyle/>
-          <a:p>
-            <a:pPr algn="l" latinLnBrk="0">
-              <a:lnSpc>
-                <a:spcPct val="100000"/>
-              </a:lnSpc>
-              <a:spcBef>
-                <a:spcPts val="0"/>
-              </a:spcBef>
-              <a:spcAft>
-                <a:spcPts val="0"/>
-              </a:spcAft>
-            </a:pPr>
-            <a:r>
-              <a:rPr sz="900" b="0">
-                <a:solidFill>
-                  <a:srgbClr val="1B4D69"/>
-                </a:solidFill>
-                <a:latin typeface="Microsoft YaHei"/>
-                <a:ea typeface="Microsoft YaHei"/>
-                <a:cs typeface="Microsoft YaHei"/>
-              </a:rPr>
-              <a:t>算子层＝Harness：L0 编译运行 → L1 数值验证 → Bench 计时</a:t>
+              <a:t>规则驱动 · 无模型</a:t>
+            </a:r>
+            <a:r>
+              <a:rPr sz="1050" b="0">
+                <a:solidFill>
+                  <a:srgbClr val="AFCEE1"/>
+                </a:solidFill>
+                <a:latin typeface="Microsoft YaHei"/>
+                <a:ea typeface="Microsoft YaHei"/>
+                <a:cs typeface="Microsoft YaHei"/>
+              </a:rPr>
+              <a:t>　｜　</a:t>
+            </a:r>
+            <a:r>
+              <a:rPr sz="950" b="0">
+                <a:solidFill>
+                  <a:srgbClr val="40708B"/>
+                </a:solidFill>
+                <a:latin typeface="Microsoft YaHei"/>
+                <a:ea typeface="Microsoft YaHei"/>
+                <a:cs typeface="Microsoft YaHei"/>
+              </a:rPr>
+              <a:t>模型层＝控制器 · 算子层＝Harness</a:t>
             </a:r>
           </a:p>
         </p:txBody>
       </p:sp>
       <p:cxnSp>
         <p:nvCxnSpPr>
-          <p:cNvPr id="55" name="Connector 54"/>
+          <p:cNvPr id="46" name="Connector 45"/>
           <p:cNvCxnSpPr/>
           <p:nvPr/>
         </p:nvCxnSpPr>
         <p:spPr>
           <a:xfrm>
-            <a:off x="3200400" y="2697480"/>
-            <a:ext cx="347472" cy="0"/>
+            <a:off x="4425696" y="2093976"/>
+            <a:ext cx="1591056" cy="640080"/>
+          </a:xfrm>
+          <a:prstGeom prst="line">
+            <a:avLst/>
+          </a:prstGeom>
+          <a:ln w="15875">
+            <a:solidFill>
+              <a:srgbClr val="40708B"/>
+            </a:solidFill>
+            <a:tailEnd type="triangle" w="med" len="med"/>
+          </a:ln>
+        </p:spPr>
+      </p:cxnSp>
+      <p:cxnSp>
+        <p:nvCxnSpPr>
+          <p:cNvPr id="47" name="Connector 46"/>
+          <p:cNvCxnSpPr/>
+          <p:nvPr/>
+        </p:nvCxnSpPr>
+        <p:spPr>
+          <a:xfrm flipV="1">
+            <a:off x="4425696" y="2734056"/>
+            <a:ext cx="1591056" cy="128016"/>
+          </a:xfrm>
+          <a:prstGeom prst="line">
+            <a:avLst/>
+          </a:prstGeom>
+          <a:ln w="15875">
+            <a:solidFill>
+              <a:srgbClr val="40708B"/>
+            </a:solidFill>
+            <a:tailEnd type="triangle" w="med" len="med"/>
+          </a:ln>
+        </p:spPr>
+      </p:cxnSp>
+      <p:cxnSp>
+        <p:nvCxnSpPr>
+          <p:cNvPr id="48" name="Connector 47"/>
+          <p:cNvCxnSpPr/>
+          <p:nvPr/>
+        </p:nvCxnSpPr>
+        <p:spPr>
+          <a:xfrm flipV="1">
+            <a:off x="4425696" y="2734056"/>
+            <a:ext cx="1591056" cy="1664208"/>
+          </a:xfrm>
+          <a:prstGeom prst="line">
+            <a:avLst/>
+          </a:prstGeom>
+          <a:ln w="15875">
+            <a:solidFill>
+              <a:srgbClr val="40708B"/>
+            </a:solidFill>
+            <a:tailEnd type="triangle" w="med" len="med"/>
+          </a:ln>
+        </p:spPr>
+      </p:cxnSp>
+      <p:sp>
+        <p:nvSpPr>
+          <p:cNvPr id="49" name="TextBox 48"/>
+          <p:cNvSpPr txBox="1"/>
+          <p:nvPr/>
+        </p:nvSpPr>
+        <p:spPr>
+          <a:xfrm>
+            <a:off x="4553712" y="2139696"/>
+            <a:ext cx="731520" cy="182880"/>
+          </a:xfrm>
+          <a:prstGeom prst="rect">
+            <a:avLst/>
+          </a:prstGeom>
+          <a:noFill/>
+        </p:spPr>
+        <p:txBody>
+          <a:bodyPr wrap="square" anchor="ctr" lIns="0" tIns="0" rIns="0" bIns="0">
+            <a:noAutofit/>
+          </a:bodyPr>
+          <a:lstStyle/>
+          <a:p>
+            <a:pPr algn="ctr" latinLnBrk="0">
+              <a:lnSpc>
+                <a:spcPct val="100000"/>
+              </a:lnSpc>
+              <a:spcBef>
+                <a:spcPts val="0"/>
+              </a:spcBef>
+              <a:spcAft>
+                <a:spcPts val="0"/>
+              </a:spcAft>
+            </a:pPr>
+            <a:r>
+              <a:rPr sz="850" b="1">
+                <a:solidFill>
+                  <a:srgbClr val="40708B"/>
+                </a:solidFill>
+                <a:latin typeface="Microsoft YaHei"/>
+                <a:ea typeface="Microsoft YaHei"/>
+                <a:cs typeface="Microsoft YaHei"/>
+              </a:rPr>
+              <a:t>订阅</a:t>
+            </a:r>
+          </a:p>
+        </p:txBody>
+      </p:sp>
+      <p:cxnSp>
+        <p:nvCxnSpPr>
+          <p:cNvPr id="50" name="Connector 49"/>
+          <p:cNvCxnSpPr/>
+          <p:nvPr/>
+        </p:nvCxnSpPr>
+        <p:spPr>
+          <a:xfrm flipH="1">
+            <a:off x="7827263" y="2706624"/>
+            <a:ext cx="1280161" cy="667512"/>
+          </a:xfrm>
+          <a:prstGeom prst="line">
+            <a:avLst/>
+          </a:prstGeom>
+          <a:ln w="15875">
+            <a:solidFill>
+              <a:srgbClr val="40708B"/>
+            </a:solidFill>
+            <a:tailEnd type="triangle" w="med" len="med"/>
+          </a:ln>
+        </p:spPr>
+      </p:cxnSp>
+      <p:cxnSp>
+        <p:nvCxnSpPr>
+          <p:cNvPr id="51" name="Connector 50"/>
+          <p:cNvCxnSpPr/>
+          <p:nvPr/>
+        </p:nvCxnSpPr>
+        <p:spPr>
+          <a:xfrm flipH="1">
+            <a:off x="7827263" y="3483864"/>
+            <a:ext cx="1280161" cy="109728"/>
+          </a:xfrm>
+          <a:prstGeom prst="line">
+            <a:avLst/>
+          </a:prstGeom>
+          <a:ln w="19050">
+            <a:solidFill>
+              <a:srgbClr val="D2690C"/>
+            </a:solidFill>
+            <a:tailEnd type="triangle" w="med" len="med"/>
+          </a:ln>
+        </p:spPr>
+      </p:cxnSp>
+      <p:cxnSp>
+        <p:nvCxnSpPr>
+          <p:cNvPr id="52" name="Connector 51"/>
+          <p:cNvCxnSpPr/>
+          <p:nvPr/>
+        </p:nvCxnSpPr>
+        <p:spPr>
+          <a:xfrm>
+            <a:off x="7827263" y="4270248"/>
+            <a:ext cx="1280161" cy="0"/>
+          </a:xfrm>
+          <a:prstGeom prst="line">
+            <a:avLst/>
+          </a:prstGeom>
+          <a:ln w="15875">
+            <a:solidFill>
+              <a:srgbClr val="40708B"/>
+            </a:solidFill>
+            <a:prstDash val="dash"/>
+            <a:tailEnd type="triangle" w="med" len="med"/>
+          </a:ln>
+        </p:spPr>
+      </p:cxnSp>
+      <p:sp>
+        <p:nvSpPr>
+          <p:cNvPr id="53" name="TextBox 52"/>
+          <p:cNvSpPr txBox="1"/>
+          <p:nvPr/>
+        </p:nvSpPr>
+        <p:spPr>
+          <a:xfrm>
+            <a:off x="8229600" y="4032504"/>
+            <a:ext cx="822960" cy="182880"/>
+          </a:xfrm>
+          <a:prstGeom prst="rect">
+            <a:avLst/>
+          </a:prstGeom>
+          <a:noFill/>
+        </p:spPr>
+        <p:txBody>
+          <a:bodyPr wrap="square" anchor="ctr" lIns="0" tIns="0" rIns="0" bIns="0">
+            <a:noAutofit/>
+          </a:bodyPr>
+          <a:lstStyle/>
+          <a:p>
+            <a:pPr algn="ctr" latinLnBrk="0">
+              <a:lnSpc>
+                <a:spcPct val="100000"/>
+              </a:lnSpc>
+              <a:spcBef>
+                <a:spcPts val="0"/>
+              </a:spcBef>
+              <a:spcAft>
+                <a:spcPts val="0"/>
+              </a:spcAft>
+            </a:pPr>
+            <a:r>
+              <a:rPr sz="850" b="1">
+                <a:solidFill>
+                  <a:srgbClr val="40708B"/>
+                </a:solidFill>
+                <a:latin typeface="Microsoft YaHei"/>
+                <a:ea typeface="Microsoft YaHei"/>
+                <a:cs typeface="Microsoft YaHei"/>
+              </a:rPr>
+              <a:t>调用</a:t>
+            </a:r>
+          </a:p>
+        </p:txBody>
+      </p:sp>
+      <p:cxnSp>
+        <p:nvCxnSpPr>
+          <p:cNvPr id="54" name="Connector 53"/>
+          <p:cNvCxnSpPr/>
+          <p:nvPr/>
+        </p:nvCxnSpPr>
+        <p:spPr>
+          <a:xfrm>
+            <a:off x="6922008" y="4562856"/>
+            <a:ext cx="0" cy="658368"/>
+          </a:xfrm>
+          <a:prstGeom prst="line">
+            <a:avLst/>
+          </a:prstGeom>
+          <a:ln w="19050">
+            <a:solidFill>
+              <a:srgbClr val="D2690C"/>
+            </a:solidFill>
+            <a:tailEnd type="triangle" w="med" len="med"/>
+          </a:ln>
+        </p:spPr>
+      </p:cxnSp>
+      <p:sp>
+        <p:nvSpPr>
+          <p:cNvPr id="55" name="TextBox 54"/>
+          <p:cNvSpPr txBox="1"/>
+          <p:nvPr/>
+        </p:nvSpPr>
+        <p:spPr>
+          <a:xfrm>
+            <a:off x="7031736" y="4992624"/>
+            <a:ext cx="1097280" cy="201168"/>
+          </a:xfrm>
+          <a:prstGeom prst="rect">
+            <a:avLst/>
+          </a:prstGeom>
+          <a:noFill/>
+        </p:spPr>
+        <p:txBody>
+          <a:bodyPr wrap="square" anchor="ctr" lIns="0" tIns="0" rIns="0" bIns="0">
+            <a:noAutofit/>
+          </a:bodyPr>
+          <a:lstStyle/>
+          <a:p>
+            <a:pPr algn="l" latinLnBrk="0">
+              <a:lnSpc>
+                <a:spcPct val="100000"/>
+              </a:lnSpc>
+              <a:spcBef>
+                <a:spcPts val="0"/>
+              </a:spcBef>
+              <a:spcAft>
+                <a:spcPts val="0"/>
+              </a:spcAft>
+            </a:pPr>
+            <a:r>
+              <a:rPr sz="850" b="1">
+                <a:solidFill>
+                  <a:srgbClr val="C2570A"/>
+                </a:solidFill>
+                <a:latin typeface="Microsoft YaHei"/>
+                <a:ea typeface="Microsoft YaHei"/>
+                <a:cs typeface="Microsoft YaHei"/>
+              </a:rPr>
+              <a:t>提交候选</a:t>
+            </a:r>
+          </a:p>
+        </p:txBody>
+      </p:sp>
+      <p:cxnSp>
+        <p:nvCxnSpPr>
+          <p:cNvPr id="56" name="Connector 55"/>
+          <p:cNvCxnSpPr/>
+          <p:nvPr/>
+        </p:nvCxnSpPr>
+        <p:spPr>
+          <a:xfrm flipH="1">
+            <a:off x="4498848" y="5513831"/>
+            <a:ext cx="786384" cy="0"/>
           </a:xfrm>
           <a:prstGeom prst="line">
             <a:avLst/>
@@ -11739,14 +11461,14 @@
       </p:cxnSp>
       <p:sp>
         <p:nvSpPr>
-          <p:cNvPr id="56" name="TextBox 55"/>
-          <p:cNvSpPr txBox="1"/>
-          <p:nvPr/>
-        </p:nvSpPr>
-        <p:spPr>
-          <a:xfrm>
-            <a:off x="3200400" y="2478024"/>
-            <a:ext cx="347471" cy="182880"/>
+          <p:cNvPr id="57" name="TextBox 56"/>
+          <p:cNvSpPr txBox="1"/>
+          <p:nvPr/>
+        </p:nvSpPr>
+        <p:spPr>
+          <a:xfrm>
+            <a:off x="4535424" y="5276088"/>
+            <a:ext cx="749808" cy="182880"/>
           </a:xfrm>
           <a:prstGeom prst="rect">
             <a:avLst/>
@@ -11771,7 +11493,7 @@
               </a:spcAft>
             </a:pPr>
             <a:r>
-              <a:rPr sz="800" b="1">
+              <a:rPr sz="850" b="1">
                 <a:solidFill>
                   <a:srgbClr val="0F62CE"/>
                 </a:solidFill>
@@ -11779,152 +11501,14 @@
                 <a:ea typeface="Microsoft YaHei"/>
                 <a:cs typeface="Microsoft YaHei"/>
               </a:rPr>
-              <a:t>订阅</a:t>
-            </a:r>
-          </a:p>
-        </p:txBody>
-      </p:sp>
-      <p:cxnSp>
-        <p:nvCxnSpPr>
-          <p:cNvPr id="57" name="Connector 56"/>
-          <p:cNvCxnSpPr/>
-          <p:nvPr/>
-        </p:nvCxnSpPr>
-        <p:spPr>
-          <a:xfrm flipH="1">
-            <a:off x="3200400" y="5477256"/>
-            <a:ext cx="347472" cy="0"/>
-          </a:xfrm>
-          <a:prstGeom prst="line">
-            <a:avLst/>
-          </a:prstGeom>
-          <a:ln w="19050">
-            <a:solidFill>
-              <a:srgbClr val="0F62CE"/>
-            </a:solidFill>
-            <a:tailEnd type="triangle" w="med" len="med"/>
-          </a:ln>
-        </p:spPr>
-      </p:cxnSp>
-      <p:sp>
-        <p:nvSpPr>
-          <p:cNvPr id="58" name="TextBox 57"/>
-          <p:cNvSpPr txBox="1"/>
-          <p:nvPr/>
-        </p:nvSpPr>
-        <p:spPr>
-          <a:xfrm>
-            <a:off x="3200400" y="5257800"/>
-            <a:ext cx="347471" cy="182880"/>
-          </a:xfrm>
-          <a:prstGeom prst="rect">
-            <a:avLst/>
-          </a:prstGeom>
-          <a:noFill/>
-        </p:spPr>
-        <p:txBody>
-          <a:bodyPr wrap="square" anchor="ctr" lIns="0" tIns="0" rIns="0" bIns="0">
-            <a:noAutofit/>
-          </a:bodyPr>
-          <a:lstStyle/>
-          <a:p>
-            <a:pPr algn="ctr" latinLnBrk="0">
-              <a:lnSpc>
-                <a:spcPct val="100000"/>
-              </a:lnSpc>
-              <a:spcBef>
-                <a:spcPts val="0"/>
-              </a:spcBef>
-              <a:spcAft>
-                <a:spcPts val="0"/>
-              </a:spcAft>
-            </a:pPr>
-            <a:r>
-              <a:rPr sz="800" b="1">
-                <a:solidFill>
-                  <a:srgbClr val="0F62CE"/>
-                </a:solidFill>
-                <a:latin typeface="Microsoft YaHei"/>
-                <a:ea typeface="Microsoft YaHei"/>
-                <a:cs typeface="Microsoft YaHei"/>
-              </a:rPr>
-              <a:t>回写</a:t>
-            </a:r>
-          </a:p>
-        </p:txBody>
-      </p:sp>
-      <p:cxnSp>
-        <p:nvCxnSpPr>
-          <p:cNvPr id="59" name="Connector 58"/>
-          <p:cNvCxnSpPr/>
-          <p:nvPr/>
-        </p:nvCxnSpPr>
-        <p:spPr>
-          <a:xfrm>
-            <a:off x="5568696" y="4837176"/>
-            <a:ext cx="0" cy="256032"/>
-          </a:xfrm>
-          <a:prstGeom prst="line">
-            <a:avLst/>
-          </a:prstGeom>
-          <a:ln w="19050">
-            <a:solidFill>
-              <a:srgbClr val="D2690C"/>
-            </a:solidFill>
-            <a:tailEnd type="triangle" w="med" len="med"/>
-          </a:ln>
-        </p:spPr>
-      </p:cxnSp>
-      <p:sp>
-        <p:nvSpPr>
-          <p:cNvPr id="60" name="TextBox 59"/>
-          <p:cNvSpPr txBox="1"/>
-          <p:nvPr/>
-        </p:nvSpPr>
-        <p:spPr>
-          <a:xfrm>
-            <a:off x="5660136" y="4828032"/>
-            <a:ext cx="1097280" cy="274319"/>
-          </a:xfrm>
-          <a:prstGeom prst="rect">
-            <a:avLst/>
-          </a:prstGeom>
-          <a:noFill/>
-        </p:spPr>
-        <p:txBody>
-          <a:bodyPr wrap="square" anchor="ctr" lIns="0" tIns="0" rIns="0" bIns="0">
-            <a:noAutofit/>
-          </a:bodyPr>
-          <a:lstStyle/>
-          <a:p>
-            <a:pPr algn="l" latinLnBrk="0">
-              <a:lnSpc>
-                <a:spcPct val="100000"/>
-              </a:lnSpc>
-              <a:spcBef>
-                <a:spcPts val="0"/>
-              </a:spcBef>
-              <a:spcAft>
-                <a:spcPts val="0"/>
-              </a:spcAft>
-            </a:pPr>
-            <a:r>
-              <a:rPr sz="800" b="1">
-                <a:solidFill>
-                  <a:srgbClr val="C2570A"/>
-                </a:solidFill>
-                <a:latin typeface="Microsoft YaHei"/>
-                <a:ea typeface="Microsoft YaHei"/>
-                <a:cs typeface="Microsoft YaHei"/>
-              </a:rPr>
-              <a:t>提交候选</a:t>
-            </a:r>
-          </a:p>
-        </p:txBody>
-      </p:sp>
-      <p:sp>
-        <p:nvSpPr>
-          <p:cNvPr id="61" name="Rectangle 60"/>
+              <a:t>判定通过</a:t>
+            </a:r>
+          </a:p>
+        </p:txBody>
+      </p:sp>
+      <p:sp>
+        <p:nvSpPr>
+          <p:cNvPr id="58" name="Rectangle 57"/>
           <p:cNvSpPr/>
           <p:nvPr/>
         </p:nvSpPr>
@@ -11953,7 +11537,7 @@
       </p:sp>
       <p:sp>
         <p:nvSpPr>
-          <p:cNvPr id="62" name="Rectangle 61"/>
+          <p:cNvPr id="59" name="Rectangle 58"/>
           <p:cNvSpPr/>
           <p:nvPr/>
         </p:nvSpPr>
@@ -11982,7 +11566,7 @@
       </p:sp>
       <p:sp>
         <p:nvSpPr>
-          <p:cNvPr id="63" name="TextBox 62"/>
+          <p:cNvPr id="60" name="TextBox 59"/>
           <p:cNvSpPr txBox="1"/>
           <p:nvPr/>
         </p:nvSpPr>
@@ -12051,7 +11635,7 @@
       </p:sp>
       <p:sp>
         <p:nvSpPr>
-          <p:cNvPr id="64" name="TextBox 63"/>
+          <p:cNvPr id="61" name="TextBox 60"/>
           <p:cNvSpPr txBox="1"/>
           <p:nvPr/>
         </p:nvSpPr>

--- a/slides/m100_agent_final_deck.pptx
+++ b/slides/m100_agent_final_deck.pptx
@@ -9332,7 +9332,7 @@
                 <a:ea typeface="Microsoft YaHei"/>
                 <a:cs typeface="Microsoft YaHei"/>
               </a:rPr>
-              <a:t>M100 Agent：Agent 的内部组件与内外交互</a:t>
+              <a:t>M100 Agent：算子层（xpugen）内部组件与交互机制</a:t>
             </a:r>
           </a:p>
         </p:txBody>
@@ -9379,44 +9379,228 @@
                 <a:ea typeface="Microsoft YaHei"/>
                 <a:cs typeface="Microsoft YaHei"/>
               </a:rPr>
-              <a:t>两层 Agent 同构：同一套内部组件，差别只在订阅哪些消息、调用哪些工具</a:t>
-            </a:r>
-          </a:p>
-        </p:txBody>
-      </p:sp>
-      <p:cxnSp>
-        <p:nvCxnSpPr>
-          <p:cNvPr id="6" name="Connector 5"/>
-          <p:cNvCxnSpPr/>
-          <p:nvPr/>
-        </p:nvCxnSpPr>
-        <p:spPr>
-          <a:xfrm>
-            <a:off x="1060704" y="1536192"/>
-            <a:ext cx="0" cy="100584"/>
-          </a:xfrm>
-          <a:prstGeom prst="line">
-            <a:avLst/>
-          </a:prstGeom>
-          <a:ln w="15875">
+              <a:t>基于「环境感知 — 认知推理 — 工具执行」闭环，把专家调优经验（Skills）沉淀为确定性的算子实现</a:t>
+            </a:r>
+          </a:p>
+        </p:txBody>
+      </p:sp>
+      <p:sp>
+        <p:nvSpPr>
+          <p:cNvPr id="6" name="TextBox 5"/>
+          <p:cNvSpPr txBox="1"/>
+          <p:nvPr/>
+        </p:nvSpPr>
+        <p:spPr>
+          <a:xfrm>
+            <a:off x="585216" y="1188720"/>
+            <a:ext cx="2907791" cy="347472"/>
+          </a:xfrm>
+          <a:prstGeom prst="rect">
+            <a:avLst/>
+          </a:prstGeom>
+          <a:noFill/>
+        </p:spPr>
+        <p:txBody>
+          <a:bodyPr wrap="square" anchor="ctr" lIns="0" tIns="0" rIns="0" bIns="0">
+            <a:noAutofit/>
+          </a:bodyPr>
+          <a:lstStyle/>
+          <a:p>
+            <a:pPr algn="l" latinLnBrk="0">
+              <a:lnSpc>
+                <a:spcPct val="100000"/>
+              </a:lnSpc>
+              <a:spcBef>
+                <a:spcPts val="0"/>
+              </a:spcBef>
+              <a:spcAft>
+                <a:spcPts val="0"/>
+              </a:spcAft>
+            </a:pPr>
+            <a:r>
+              <a:rPr sz="1100" b="1">
+                <a:solidFill>
+                  <a:srgbClr val="0A2B45"/>
+                </a:solidFill>
+                <a:latin typeface="Microsoft YaHei"/>
+                <a:ea typeface="Microsoft YaHei"/>
+                <a:cs typeface="Microsoft YaHei"/>
+              </a:rPr>
+              <a:t>任务环境与知识</a:t>
+            </a:r>
+            <a:r>
+              <a:rPr sz="850" b="1">
+                <a:solidFill>
+                  <a:srgbClr val="1B4D69"/>
+                </a:solidFill>
+                <a:latin typeface="Microsoft YaHei"/>
+                <a:ea typeface="Microsoft YaHei"/>
+                <a:cs typeface="Microsoft YaHei"/>
+              </a:rPr>
+              <a:t>　Environment &amp; Context</a:t>
+            </a:r>
+          </a:p>
+        </p:txBody>
+      </p:sp>
+      <p:sp>
+        <p:nvSpPr>
+          <p:cNvPr id="7" name="TextBox 6"/>
+          <p:cNvSpPr txBox="1"/>
+          <p:nvPr/>
+        </p:nvSpPr>
+        <p:spPr>
+          <a:xfrm>
+            <a:off x="4059936" y="1188720"/>
+            <a:ext cx="3182112" cy="347472"/>
+          </a:xfrm>
+          <a:prstGeom prst="rect">
+            <a:avLst/>
+          </a:prstGeom>
+          <a:noFill/>
+        </p:spPr>
+        <p:txBody>
+          <a:bodyPr wrap="square" anchor="ctr" lIns="0" tIns="0" rIns="0" bIns="0">
+            <a:noAutofit/>
+          </a:bodyPr>
+          <a:lstStyle/>
+          <a:p>
+            <a:pPr algn="l" latinLnBrk="0">
+              <a:lnSpc>
+                <a:spcPct val="100000"/>
+              </a:lnSpc>
+              <a:spcBef>
+                <a:spcPts val="0"/>
+              </a:spcBef>
+              <a:spcAft>
+                <a:spcPts val="0"/>
+              </a:spcAft>
+            </a:pPr>
+            <a:r>
+              <a:rPr sz="1100" b="1">
+                <a:solidFill>
+                  <a:srgbClr val="0A2B45"/>
+                </a:solidFill>
+                <a:latin typeface="Microsoft YaHei"/>
+                <a:ea typeface="Microsoft YaHei"/>
+                <a:cs typeface="Microsoft YaHei"/>
+              </a:rPr>
+              <a:t>xpugen Agent 内部</a:t>
+            </a:r>
+            <a:r>
+              <a:rPr sz="850" b="1">
+                <a:solidFill>
+                  <a:srgbClr val="C2570A"/>
+                </a:solidFill>
+                <a:latin typeface="Microsoft YaHei"/>
+                <a:ea typeface="Microsoft YaHei"/>
+                <a:cs typeface="Microsoft YaHei"/>
+              </a:rPr>
+              <a:t>　唯一引入大模型的位置</a:t>
+            </a:r>
+          </a:p>
+        </p:txBody>
+      </p:sp>
+      <p:sp>
+        <p:nvSpPr>
+          <p:cNvPr id="8" name="TextBox 7"/>
+          <p:cNvSpPr txBox="1"/>
+          <p:nvPr/>
+        </p:nvSpPr>
+        <p:spPr>
+          <a:xfrm>
+            <a:off x="8010144" y="1188720"/>
+            <a:ext cx="3596335" cy="347472"/>
+          </a:xfrm>
+          <a:prstGeom prst="rect">
+            <a:avLst/>
+          </a:prstGeom>
+          <a:noFill/>
+        </p:spPr>
+        <p:txBody>
+          <a:bodyPr wrap="square" anchor="ctr" lIns="0" tIns="0" rIns="0" bIns="0">
+            <a:noAutofit/>
+          </a:bodyPr>
+          <a:lstStyle/>
+          <a:p>
+            <a:pPr algn="l" latinLnBrk="0">
+              <a:lnSpc>
+                <a:spcPct val="100000"/>
+              </a:lnSpc>
+              <a:spcBef>
+                <a:spcPts val="0"/>
+              </a:spcBef>
+              <a:spcAft>
+                <a:spcPts val="0"/>
+              </a:spcAft>
+            </a:pPr>
+            <a:r>
+              <a:rPr sz="1100" b="1">
+                <a:solidFill>
+                  <a:srgbClr val="0A2B45"/>
+                </a:solidFill>
+                <a:latin typeface="Microsoft YaHei"/>
+                <a:ea typeface="Microsoft YaHei"/>
+                <a:cs typeface="Microsoft YaHei"/>
+              </a:rPr>
+              <a:t>工具与评测后端</a:t>
+            </a:r>
+            <a:r>
+              <a:rPr sz="850" b="1">
+                <a:solidFill>
+                  <a:srgbClr val="0F62CE"/>
+                </a:solidFill>
+                <a:latin typeface="Microsoft YaHei"/>
+                <a:ea typeface="Microsoft YaHei"/>
+                <a:cs typeface="Microsoft YaHei"/>
+              </a:rPr>
+              <a:t>　确定性执行 · 无模型</a:t>
+            </a:r>
+          </a:p>
+        </p:txBody>
+      </p:sp>
+      <p:sp>
+        <p:nvSpPr>
+          <p:cNvPr id="9" name="Rectangle 8"/>
+          <p:cNvSpPr/>
+          <p:nvPr/>
+        </p:nvSpPr>
+        <p:spPr>
+          <a:xfrm>
+            <a:off x="548640" y="1609344"/>
+            <a:ext cx="2980944" cy="786384"/>
+          </a:xfrm>
+          <a:prstGeom prst="rect">
+            <a:avLst/>
+          </a:prstGeom>
+          <a:solidFill>
+            <a:srgbClr val="FFFFFF"/>
+          </a:solidFill>
+          <a:ln w="9525">
             <a:solidFill>
-              <a:srgbClr val="40708B"/>
+              <a:srgbClr val="CFE3F0"/>
             </a:solidFill>
           </a:ln>
         </p:spPr>
-      </p:cxnSp>
-      <p:sp>
-        <p:nvSpPr>
-          <p:cNvPr id="7" name="Oval 6"/>
+        <p:txBody>
+          <a:bodyPr rtlCol="0" anchor="ctr"/>
+          <a:lstStyle/>
+          <a:p>
+            <a:pPr algn="ctr"/>
+          </a:p>
+        </p:txBody>
+      </p:sp>
+      <p:sp>
+        <p:nvSpPr>
+          <p:cNvPr id="10" name="Rectangle 9"/>
           <p:cNvSpPr/>
           <p:nvPr/>
         </p:nvSpPr>
         <p:spPr>
           <a:xfrm>
-            <a:off x="1010412" y="1435608"/>
-            <a:ext cx="100584" cy="100584"/>
-          </a:xfrm>
-          <a:prstGeom prst="ellipse">
+            <a:off x="548640" y="1609344"/>
+            <a:ext cx="64008" cy="786384"/>
+          </a:xfrm>
+          <a:prstGeom prst="rect">
             <a:avLst/>
           </a:prstGeom>
           <a:solidFill>
@@ -9436,26 +9620,130 @@
       </p:sp>
       <p:sp>
         <p:nvSpPr>
-          <p:cNvPr id="8" name="Rounded Rectangle 7"/>
+          <p:cNvPr id="11" name="TextBox 10"/>
+          <p:cNvSpPr txBox="1"/>
+          <p:nvPr/>
+        </p:nvSpPr>
+        <p:spPr>
+          <a:xfrm>
+            <a:off x="731520" y="1655064"/>
+            <a:ext cx="2651760" cy="694944"/>
+          </a:xfrm>
+          <a:prstGeom prst="rect">
+            <a:avLst/>
+          </a:prstGeom>
+          <a:noFill/>
+        </p:spPr>
+        <p:txBody>
+          <a:bodyPr wrap="square" anchor="ctr" lIns="0" tIns="0" rIns="0" bIns="0">
+            <a:noAutofit/>
+          </a:bodyPr>
+          <a:lstStyle/>
+          <a:p>
+            <a:pPr algn="l" latinLnBrk="0">
+              <a:lnSpc>
+                <a:spcPct val="100000"/>
+              </a:lnSpc>
+              <a:spcBef>
+                <a:spcPts val="0"/>
+              </a:spcBef>
+              <a:spcAft>
+                <a:spcPts val="300"/>
+              </a:spcAft>
+            </a:pPr>
+            <a:r>
+              <a:rPr sz="1050" b="1">
+                <a:solidFill>
+                  <a:srgbClr val="0A2B45"/>
+                </a:solidFill>
+                <a:latin typeface="Microsoft YaHei"/>
+                <a:ea typeface="Microsoft YaHei"/>
+                <a:cs typeface="Microsoft YaHei"/>
+              </a:rPr>
+              <a:t>任务上下文池</a:t>
+            </a:r>
+            <a:r>
+              <a:rPr sz="800" b="1">
+                <a:solidFill>
+                  <a:srgbClr val="40708B"/>
+                </a:solidFill>
+                <a:latin typeface="Consolas"/>
+                <a:ea typeface="Microsoft YaHei"/>
+                <a:cs typeface="Microsoft YaHei"/>
+              </a:rPr>
+              <a:t>　Task Context</a:t>
+            </a:r>
+          </a:p>
+          <a:p>
+            <a:pPr algn="l" latinLnBrk="0">
+              <a:lnSpc>
+                <a:spcPct val="100000"/>
+              </a:lnSpc>
+              <a:spcBef>
+                <a:spcPts val="0"/>
+              </a:spcBef>
+              <a:spcAft>
+                <a:spcPts val="0"/>
+              </a:spcAft>
+            </a:pPr>
+            <a:r>
+              <a:rPr sz="900" b="0">
+                <a:solidFill>
+                  <a:srgbClr val="1B4D69"/>
+                </a:solidFill>
+                <a:latin typeface="Microsoft YaHei"/>
+                <a:ea typeface="Microsoft YaHei"/>
+                <a:cs typeface="Microsoft YaHei"/>
+              </a:rPr>
+              <a:t>·　算子规格与 Shape</a:t>
+            </a:r>
+          </a:p>
+          <a:p>
+            <a:pPr algn="l" latinLnBrk="0">
+              <a:lnSpc>
+                <a:spcPct val="100000"/>
+              </a:lnSpc>
+              <a:spcBef>
+                <a:spcPts val="0"/>
+              </a:spcBef>
+              <a:spcAft>
+                <a:spcPts val="0"/>
+              </a:spcAft>
+            </a:pPr>
+            <a:r>
+              <a:rPr sz="900" b="0">
+                <a:solidFill>
+                  <a:srgbClr val="1B4D69"/>
+                </a:solidFill>
+                <a:latin typeface="Microsoft YaHei"/>
+                <a:ea typeface="Microsoft YaHei"/>
+                <a:cs typeface="Microsoft YaHei"/>
+              </a:rPr>
+              <a:t>·　输入输出语义约束</a:t>
+            </a:r>
+          </a:p>
+        </p:txBody>
+      </p:sp>
+      <p:sp>
+        <p:nvSpPr>
+          <p:cNvPr id="12" name="Rectangle 11"/>
           <p:cNvSpPr/>
           <p:nvPr/>
         </p:nvSpPr>
         <p:spPr>
           <a:xfrm>
-            <a:off x="813815" y="1645920"/>
-            <a:ext cx="493776" cy="402336"/>
-          </a:xfrm>
-          <a:prstGeom prst="roundRect">
-            <a:avLst>
-              <a:gd name="adj" fmla="val 24000"/>
-            </a:avLst>
+            <a:off x="548640" y="2505456"/>
+            <a:ext cx="2980944" cy="786384"/>
+          </a:xfrm>
+          <a:prstGeom prst="rect">
+            <a:avLst/>
           </a:prstGeom>
           <a:solidFill>
             <a:srgbClr val="FFFFFF"/>
           </a:solidFill>
-          <a:ln w="19050">
+          <a:ln w="9525">
             <a:solidFill>
-              <a:srgbClr val="40708B"/>
+              <a:srgbClr val="CFE3F0"/>
             </a:solidFill>
           </a:ln>
         </p:spPr>
@@ -9469,16 +9757,16 @@
       </p:sp>
       <p:sp>
         <p:nvSpPr>
-          <p:cNvPr id="9" name="Oval 8"/>
+          <p:cNvPr id="13" name="Rectangle 12"/>
           <p:cNvSpPr/>
           <p:nvPr/>
         </p:nvSpPr>
         <p:spPr>
           <a:xfrm>
-            <a:off x="928115" y="1773936"/>
-            <a:ext cx="82296" cy="82296"/>
-          </a:xfrm>
-          <a:prstGeom prst="ellipse">
+            <a:off x="548640" y="2505456"/>
+            <a:ext cx="64008" cy="786384"/>
+          </a:xfrm>
+          <a:prstGeom prst="rect">
             <a:avLst/>
           </a:prstGeom>
           <a:solidFill>
@@ -9498,16 +9786,153 @@
       </p:sp>
       <p:sp>
         <p:nvSpPr>
-          <p:cNvPr id="10" name="Oval 9"/>
+          <p:cNvPr id="14" name="TextBox 13"/>
+          <p:cNvSpPr txBox="1"/>
+          <p:nvPr/>
+        </p:nvSpPr>
+        <p:spPr>
+          <a:xfrm>
+            <a:off x="731520" y="2551176"/>
+            <a:ext cx="2651760" cy="694944"/>
+          </a:xfrm>
+          <a:prstGeom prst="rect">
+            <a:avLst/>
+          </a:prstGeom>
+          <a:noFill/>
+        </p:spPr>
+        <p:txBody>
+          <a:bodyPr wrap="square" anchor="ctr" lIns="0" tIns="0" rIns="0" bIns="0">
+            <a:noAutofit/>
+          </a:bodyPr>
+          <a:lstStyle/>
+          <a:p>
+            <a:pPr algn="l" latinLnBrk="0">
+              <a:lnSpc>
+                <a:spcPct val="100000"/>
+              </a:lnSpc>
+              <a:spcBef>
+                <a:spcPts val="0"/>
+              </a:spcBef>
+              <a:spcAft>
+                <a:spcPts val="300"/>
+              </a:spcAft>
+            </a:pPr>
+            <a:r>
+              <a:rPr sz="1050" b="1">
+                <a:solidFill>
+                  <a:srgbClr val="0A2B45"/>
+                </a:solidFill>
+                <a:latin typeface="Microsoft YaHei"/>
+                <a:ea typeface="Microsoft YaHei"/>
+                <a:cs typeface="Microsoft YaHei"/>
+              </a:rPr>
+              <a:t>领域知识挂载</a:t>
+            </a:r>
+            <a:r>
+              <a:rPr sz="800" b="1">
+                <a:solidFill>
+                  <a:srgbClr val="40708B"/>
+                </a:solidFill>
+                <a:latin typeface="Consolas"/>
+                <a:ea typeface="Microsoft YaHei"/>
+                <a:cs typeface="Microsoft YaHei"/>
+              </a:rPr>
+              <a:t>　Domain Knowledge</a:t>
+            </a:r>
+          </a:p>
+          <a:p>
+            <a:pPr algn="l" latinLnBrk="0">
+              <a:lnSpc>
+                <a:spcPct val="100000"/>
+              </a:lnSpc>
+              <a:spcBef>
+                <a:spcPts val="0"/>
+              </a:spcBef>
+              <a:spcAft>
+                <a:spcPts val="0"/>
+              </a:spcAft>
+            </a:pPr>
+            <a:r>
+              <a:rPr sz="900" b="0">
+                <a:solidFill>
+                  <a:srgbClr val="1B4D69"/>
+                </a:solidFill>
+                <a:latin typeface="Microsoft YaHei"/>
+                <a:ea typeface="Microsoft YaHei"/>
+                <a:cs typeface="Microsoft YaHei"/>
+              </a:rPr>
+              <a:t>·　M100 硬件规格卡</a:t>
+            </a:r>
+          </a:p>
+          <a:p>
+            <a:pPr algn="l" latinLnBrk="0">
+              <a:lnSpc>
+                <a:spcPct val="100000"/>
+              </a:lnSpc>
+              <a:spcBef>
+                <a:spcPts val="0"/>
+              </a:spcBef>
+              <a:spcAft>
+                <a:spcPts val="0"/>
+              </a:spcAft>
+            </a:pPr>
+            <a:r>
+              <a:rPr sz="900" b="0">
+                <a:solidFill>
+                  <a:srgbClr val="1B4D69"/>
+                </a:solidFill>
+                <a:latin typeface="Microsoft YaHei"/>
+                <a:ea typeface="Microsoft YaHei"/>
+                <a:cs typeface="Microsoft YaHei"/>
+              </a:rPr>
+              <a:t>·　算子调优 Skills</a:t>
+            </a:r>
+          </a:p>
+        </p:txBody>
+      </p:sp>
+      <p:sp>
+        <p:nvSpPr>
+          <p:cNvPr id="15" name="Rectangle 14"/>
           <p:cNvSpPr/>
           <p:nvPr/>
         </p:nvSpPr>
         <p:spPr>
           <a:xfrm>
-            <a:off x="1110996" y="1773936"/>
-            <a:ext cx="82296" cy="82296"/>
-          </a:xfrm>
-          <a:prstGeom prst="ellipse">
+            <a:off x="548640" y="3401568"/>
+            <a:ext cx="2980944" cy="1005840"/>
+          </a:xfrm>
+          <a:prstGeom prst="rect">
+            <a:avLst/>
+          </a:prstGeom>
+          <a:solidFill>
+            <a:srgbClr val="FFFFFF"/>
+          </a:solidFill>
+          <a:ln w="9525">
+            <a:solidFill>
+              <a:srgbClr val="CFE3F0"/>
+            </a:solidFill>
+          </a:ln>
+        </p:spPr>
+        <p:txBody>
+          <a:bodyPr rtlCol="0" anchor="ctr"/>
+          <a:lstStyle/>
+          <a:p>
+            <a:pPr algn="ctr"/>
+          </a:p>
+        </p:txBody>
+      </p:sp>
+      <p:sp>
+        <p:nvSpPr>
+          <p:cNvPr id="16" name="Rectangle 15"/>
+          <p:cNvSpPr/>
+          <p:nvPr/>
+        </p:nvSpPr>
+        <p:spPr>
+          <a:xfrm>
+            <a:off x="548640" y="3401568"/>
+            <a:ext cx="64008" cy="1005840"/>
+          </a:xfrm>
+          <a:prstGeom prst="rect">
             <a:avLst/>
           </a:prstGeom>
           <a:solidFill>
@@ -9527,404 +9952,246 @@
       </p:sp>
       <p:sp>
         <p:nvSpPr>
-          <p:cNvPr id="11" name="Rounded Rectangle 10"/>
+          <p:cNvPr id="17" name="TextBox 16"/>
+          <p:cNvSpPr txBox="1"/>
+          <p:nvPr/>
+        </p:nvSpPr>
+        <p:spPr>
+          <a:xfrm>
+            <a:off x="731520" y="3447288"/>
+            <a:ext cx="2651760" cy="914400"/>
+          </a:xfrm>
+          <a:prstGeom prst="rect">
+            <a:avLst/>
+          </a:prstGeom>
+          <a:noFill/>
+        </p:spPr>
+        <p:txBody>
+          <a:bodyPr wrap="square" anchor="ctr" lIns="0" tIns="0" rIns="0" bIns="0">
+            <a:noAutofit/>
+          </a:bodyPr>
+          <a:lstStyle/>
+          <a:p>
+            <a:pPr algn="l" latinLnBrk="0">
+              <a:lnSpc>
+                <a:spcPct val="100000"/>
+              </a:lnSpc>
+              <a:spcBef>
+                <a:spcPts val="0"/>
+              </a:spcBef>
+              <a:spcAft>
+                <a:spcPts val="300"/>
+              </a:spcAft>
+            </a:pPr>
+            <a:r>
+              <a:rPr sz="1050" b="1">
+                <a:solidFill>
+                  <a:srgbClr val="0A2B45"/>
+                </a:solidFill>
+                <a:latin typeface="Microsoft YaHei"/>
+                <a:ea typeface="Microsoft YaHei"/>
+                <a:cs typeface="Microsoft YaHei"/>
+              </a:rPr>
+              <a:t>评测反馈黑板</a:t>
+            </a:r>
+            <a:r>
+              <a:rPr sz="800" b="1">
+                <a:solidFill>
+                  <a:srgbClr val="40708B"/>
+                </a:solidFill>
+                <a:latin typeface="Consolas"/>
+                <a:ea typeface="Microsoft YaHei"/>
+                <a:cs typeface="Microsoft YaHei"/>
+              </a:rPr>
+              <a:t>　Feedback Blackboard</a:t>
+            </a:r>
+          </a:p>
+          <a:p>
+            <a:pPr algn="l" latinLnBrk="0">
+              <a:lnSpc>
+                <a:spcPct val="100000"/>
+              </a:lnSpc>
+              <a:spcBef>
+                <a:spcPts val="0"/>
+              </a:spcBef>
+              <a:spcAft>
+                <a:spcPts val="0"/>
+              </a:spcAft>
+            </a:pPr>
+            <a:r>
+              <a:rPr sz="900" b="0">
+                <a:solidFill>
+                  <a:srgbClr val="1B4D69"/>
+                </a:solidFill>
+                <a:latin typeface="Microsoft YaHei"/>
+                <a:ea typeface="Microsoft YaHei"/>
+                <a:cs typeface="Microsoft YaHei"/>
+              </a:rPr>
+              <a:t>·　L0 编译报错日志</a:t>
+            </a:r>
+          </a:p>
+          <a:p>
+            <a:pPr algn="l" latinLnBrk="0">
+              <a:lnSpc>
+                <a:spcPct val="100000"/>
+              </a:lnSpc>
+              <a:spcBef>
+                <a:spcPts val="0"/>
+              </a:spcBef>
+              <a:spcAft>
+                <a:spcPts val="0"/>
+              </a:spcAft>
+            </a:pPr>
+            <a:r>
+              <a:rPr sz="900" b="0">
+                <a:solidFill>
+                  <a:srgbClr val="1B4D69"/>
+                </a:solidFill>
+                <a:latin typeface="Microsoft YaHei"/>
+                <a:ea typeface="Microsoft YaHei"/>
+                <a:cs typeface="Microsoft YaHei"/>
+              </a:rPr>
+              <a:t>·　L1 精度偏差详情</a:t>
+            </a:r>
+          </a:p>
+          <a:p>
+            <a:pPr algn="l" latinLnBrk="0">
+              <a:lnSpc>
+                <a:spcPct val="100000"/>
+              </a:lnSpc>
+              <a:spcBef>
+                <a:spcPts val="0"/>
+              </a:spcBef>
+              <a:spcAft>
+                <a:spcPts val="0"/>
+              </a:spcAft>
+            </a:pPr>
+            <a:r>
+              <a:rPr sz="900" b="0">
+                <a:solidFill>
+                  <a:srgbClr val="1B4D69"/>
+                </a:solidFill>
+                <a:latin typeface="Microsoft YaHei"/>
+                <a:ea typeface="Microsoft YaHei"/>
+                <a:cs typeface="Microsoft YaHei"/>
+              </a:rPr>
+              <a:t>·　Profile 瓶颈证据</a:t>
+            </a:r>
+          </a:p>
+        </p:txBody>
+      </p:sp>
+      <p:sp>
+        <p:nvSpPr>
+          <p:cNvPr id="18" name="Rectangle 17"/>
           <p:cNvSpPr/>
           <p:nvPr/>
         </p:nvSpPr>
         <p:spPr>
           <a:xfrm>
-            <a:off x="758951" y="2093976"/>
-            <a:ext cx="603504" cy="100584"/>
-          </a:xfrm>
-          <a:prstGeom prst="roundRect">
-            <a:avLst>
-              <a:gd name="adj" fmla="val 50000"/>
-            </a:avLst>
+            <a:off x="1133856" y="4608576"/>
+            <a:ext cx="2395728" cy="676656"/>
+          </a:xfrm>
+          <a:prstGeom prst="rect">
+            <a:avLst/>
           </a:prstGeom>
           <a:solidFill>
-            <a:srgbClr val="40708B"/>
+            <a:srgbClr val="E6F0FC"/>
           </a:solidFill>
-          <a:ln>
-            <a:noFill/>
-          </a:ln>
-        </p:spPr>
-        <p:txBody>
-          <a:bodyPr rtlCol="0" anchor="ctr"/>
-          <a:lstStyle/>
-          <a:p>
-            <a:pPr algn="ctr"/>
-          </a:p>
-        </p:txBody>
-      </p:sp>
-      <p:sp>
-        <p:nvSpPr>
-          <p:cNvPr id="12" name="TextBox 11"/>
-          <p:cNvSpPr txBox="1"/>
-          <p:nvPr/>
-        </p:nvSpPr>
-        <p:spPr>
-          <a:xfrm>
-            <a:off x="402335" y="2267712"/>
-            <a:ext cx="1316736" cy="201168"/>
-          </a:xfrm>
-          <a:prstGeom prst="rect">
-            <a:avLst/>
-          </a:prstGeom>
-          <a:noFill/>
-        </p:spPr>
-        <p:txBody>
-          <a:bodyPr wrap="square" anchor="ctr" lIns="0" tIns="0" rIns="0" bIns="0">
-            <a:noAutofit/>
-          </a:bodyPr>
-          <a:lstStyle/>
-          <a:p>
-            <a:pPr algn="ctr" latinLnBrk="0">
-              <a:lnSpc>
-                <a:spcPct val="100000"/>
-              </a:lnSpc>
-              <a:spcBef>
-                <a:spcPts val="0"/>
-              </a:spcBef>
-              <a:spcAft>
-                <a:spcPts val="0"/>
-              </a:spcAft>
-            </a:pPr>
-            <a:r>
-              <a:rPr sz="950" b="1">
-                <a:solidFill>
-                  <a:srgbClr val="123C5B"/>
-                </a:solidFill>
-                <a:latin typeface="Microsoft YaHei"/>
-                <a:ea typeface="Microsoft YaHei"/>
-                <a:cs typeface="Microsoft YaHei"/>
-              </a:rPr>
-              <a:t>模型层 Agent</a:t>
-            </a:r>
-          </a:p>
-        </p:txBody>
-      </p:sp>
-      <p:cxnSp>
-        <p:nvCxnSpPr>
-          <p:cNvPr id="13" name="Connector 12"/>
-          <p:cNvCxnSpPr/>
-          <p:nvPr/>
-        </p:nvCxnSpPr>
-        <p:spPr>
-          <a:xfrm>
-            <a:off x="1344168" y="1847088"/>
-            <a:ext cx="374904" cy="0"/>
-          </a:xfrm>
-          <a:prstGeom prst="line">
-            <a:avLst/>
-          </a:prstGeom>
-          <a:ln w="15875">
+          <a:ln w="9525">
             <a:solidFill>
-              <a:srgbClr val="40708B"/>
-            </a:solidFill>
-            <a:headEnd type="triangle" w="med" len="med"/>
-            <a:tailEnd type="triangle" w="med" len="med"/>
-          </a:ln>
-        </p:spPr>
-      </p:cxnSp>
-      <p:cxnSp>
-        <p:nvCxnSpPr>
-          <p:cNvPr id="14" name="Connector 13"/>
-          <p:cNvCxnSpPr/>
-          <p:nvPr/>
-        </p:nvCxnSpPr>
-        <p:spPr>
-          <a:xfrm>
-            <a:off x="1060704" y="3547872"/>
-            <a:ext cx="0" cy="100584"/>
-          </a:xfrm>
-          <a:prstGeom prst="line">
-            <a:avLst/>
-          </a:prstGeom>
-          <a:ln w="15875">
-            <a:solidFill>
-              <a:srgbClr val="40708B"/>
+              <a:srgbClr val="0F62CE"/>
             </a:solidFill>
           </a:ln>
         </p:spPr>
-      </p:cxnSp>
-      <p:sp>
-        <p:nvSpPr>
-          <p:cNvPr id="15" name="Oval 14"/>
+        <p:txBody>
+          <a:bodyPr rtlCol="0" anchor="ctr"/>
+          <a:lstStyle/>
+          <a:p>
+            <a:pPr algn="ctr"/>
+          </a:p>
+        </p:txBody>
+      </p:sp>
+      <p:sp>
+        <p:nvSpPr>
+          <p:cNvPr id="19" name="TextBox 18"/>
+          <p:cNvSpPr txBox="1"/>
+          <p:nvPr/>
+        </p:nvSpPr>
+        <p:spPr>
+          <a:xfrm>
+            <a:off x="1316736" y="4608576"/>
+            <a:ext cx="2066544" cy="676656"/>
+          </a:xfrm>
+          <a:prstGeom prst="rect">
+            <a:avLst/>
+          </a:prstGeom>
+          <a:noFill/>
+        </p:spPr>
+        <p:txBody>
+          <a:bodyPr wrap="square" anchor="ctr" lIns="0" tIns="0" rIns="0" bIns="0">
+            <a:noAutofit/>
+          </a:bodyPr>
+          <a:lstStyle/>
+          <a:p>
+            <a:pPr algn="l" latinLnBrk="0">
+              <a:lnSpc>
+                <a:spcPct val="100000"/>
+              </a:lnSpc>
+              <a:spcBef>
+                <a:spcPts val="0"/>
+              </a:spcBef>
+              <a:spcAft>
+                <a:spcPts val="300"/>
+              </a:spcAft>
+            </a:pPr>
+            <a:r>
+              <a:rPr sz="1100" b="1">
+                <a:solidFill>
+                  <a:srgbClr val="0F62CE"/>
+                </a:solidFill>
+                <a:latin typeface="Microsoft YaHei"/>
+                <a:ea typeface="Microsoft YaHei"/>
+                <a:cs typeface="Microsoft YaHei"/>
+              </a:rPr>
+              <a:t>达标输出 · 候选库</a:t>
+            </a:r>
+          </a:p>
+          <a:p>
+            <a:pPr algn="l" latinLnBrk="0">
+              <a:lnSpc>
+                <a:spcPct val="100000"/>
+              </a:lnSpc>
+              <a:spcBef>
+                <a:spcPts val="0"/>
+              </a:spcBef>
+              <a:spcAft>
+                <a:spcPts val="0"/>
+              </a:spcAft>
+            </a:pPr>
+            <a:r>
+              <a:rPr sz="900" b="0">
+                <a:solidFill>
+                  <a:srgbClr val="1B4D69"/>
+                </a:solidFill>
+                <a:latin typeface="Microsoft YaHei"/>
+                <a:ea typeface="Microsoft YaHei"/>
+                <a:cs typeface="Microsoft YaHei"/>
+              </a:rPr>
+              <a:t>交付最优 Kernel 代码</a:t>
+            </a:r>
+          </a:p>
+        </p:txBody>
+      </p:sp>
+      <p:sp>
+        <p:nvSpPr>
+          <p:cNvPr id="20" name="Rectangle 19"/>
           <p:cNvSpPr/>
           <p:nvPr/>
         </p:nvSpPr>
         <p:spPr>
           <a:xfrm>
-            <a:off x="1010412" y="3447287"/>
-            <a:ext cx="100584" cy="100584"/>
-          </a:xfrm>
-          <a:prstGeom prst="ellipse">
-            <a:avLst/>
-          </a:prstGeom>
-          <a:solidFill>
-            <a:srgbClr val="40708B"/>
-          </a:solidFill>
-          <a:ln>
-            <a:noFill/>
-          </a:ln>
-        </p:spPr>
-        <p:txBody>
-          <a:bodyPr rtlCol="0" anchor="ctr"/>
-          <a:lstStyle/>
-          <a:p>
-            <a:pPr algn="ctr"/>
-          </a:p>
-        </p:txBody>
-      </p:sp>
-      <p:sp>
-        <p:nvSpPr>
-          <p:cNvPr id="16" name="Rounded Rectangle 15"/>
-          <p:cNvSpPr/>
-          <p:nvPr/>
-        </p:nvSpPr>
-        <p:spPr>
-          <a:xfrm>
-            <a:off x="813815" y="3657600"/>
-            <a:ext cx="493776" cy="402336"/>
-          </a:xfrm>
-          <a:prstGeom prst="roundRect">
-            <a:avLst>
-              <a:gd name="adj" fmla="val 24000"/>
-            </a:avLst>
-          </a:prstGeom>
-          <a:solidFill>
-            <a:srgbClr val="FFFFFF"/>
-          </a:solidFill>
-          <a:ln w="19050">
-            <a:solidFill>
-              <a:srgbClr val="40708B"/>
-            </a:solidFill>
-          </a:ln>
-        </p:spPr>
-        <p:txBody>
-          <a:bodyPr rtlCol="0" anchor="ctr"/>
-          <a:lstStyle/>
-          <a:p>
-            <a:pPr algn="ctr"/>
-          </a:p>
-        </p:txBody>
-      </p:sp>
-      <p:sp>
-        <p:nvSpPr>
-          <p:cNvPr id="17" name="Oval 16"/>
-          <p:cNvSpPr/>
-          <p:nvPr/>
-        </p:nvSpPr>
-        <p:spPr>
-          <a:xfrm>
-            <a:off x="928115" y="3785615"/>
-            <a:ext cx="82296" cy="82296"/>
-          </a:xfrm>
-          <a:prstGeom prst="ellipse">
-            <a:avLst/>
-          </a:prstGeom>
-          <a:solidFill>
-            <a:srgbClr val="40708B"/>
-          </a:solidFill>
-          <a:ln>
-            <a:noFill/>
-          </a:ln>
-        </p:spPr>
-        <p:txBody>
-          <a:bodyPr rtlCol="0" anchor="ctr"/>
-          <a:lstStyle/>
-          <a:p>
-            <a:pPr algn="ctr"/>
-          </a:p>
-        </p:txBody>
-      </p:sp>
-      <p:sp>
-        <p:nvSpPr>
-          <p:cNvPr id="18" name="Oval 17"/>
-          <p:cNvSpPr/>
-          <p:nvPr/>
-        </p:nvSpPr>
-        <p:spPr>
-          <a:xfrm>
-            <a:off x="1110996" y="3785615"/>
-            <a:ext cx="82296" cy="82296"/>
-          </a:xfrm>
-          <a:prstGeom prst="ellipse">
-            <a:avLst/>
-          </a:prstGeom>
-          <a:solidFill>
-            <a:srgbClr val="40708B"/>
-          </a:solidFill>
-          <a:ln>
-            <a:noFill/>
-          </a:ln>
-        </p:spPr>
-        <p:txBody>
-          <a:bodyPr rtlCol="0" anchor="ctr"/>
-          <a:lstStyle/>
-          <a:p>
-            <a:pPr algn="ctr"/>
-          </a:p>
-        </p:txBody>
-      </p:sp>
-      <p:sp>
-        <p:nvSpPr>
-          <p:cNvPr id="19" name="Rounded Rectangle 18"/>
-          <p:cNvSpPr/>
-          <p:nvPr/>
-        </p:nvSpPr>
-        <p:spPr>
-          <a:xfrm>
-            <a:off x="758951" y="4105656"/>
-            <a:ext cx="603504" cy="100584"/>
-          </a:xfrm>
-          <a:prstGeom prst="roundRect">
-            <a:avLst>
-              <a:gd name="adj" fmla="val 50000"/>
-            </a:avLst>
-          </a:prstGeom>
-          <a:solidFill>
-            <a:srgbClr val="40708B"/>
-          </a:solidFill>
-          <a:ln>
-            <a:noFill/>
-          </a:ln>
-        </p:spPr>
-        <p:txBody>
-          <a:bodyPr rtlCol="0" anchor="ctr"/>
-          <a:lstStyle/>
-          <a:p>
-            <a:pPr algn="ctr"/>
-          </a:p>
-        </p:txBody>
-      </p:sp>
-      <p:sp>
-        <p:nvSpPr>
-          <p:cNvPr id="20" name="TextBox 19"/>
-          <p:cNvSpPr txBox="1"/>
-          <p:nvPr/>
-        </p:nvSpPr>
-        <p:spPr>
-          <a:xfrm>
-            <a:off x="402335" y="4279392"/>
-            <a:ext cx="1316736" cy="201168"/>
-          </a:xfrm>
-          <a:prstGeom prst="rect">
-            <a:avLst/>
-          </a:prstGeom>
-          <a:noFill/>
-        </p:spPr>
-        <p:txBody>
-          <a:bodyPr wrap="square" anchor="ctr" lIns="0" tIns="0" rIns="0" bIns="0">
-            <a:noAutofit/>
-          </a:bodyPr>
-          <a:lstStyle/>
-          <a:p>
-            <a:pPr algn="ctr" latinLnBrk="0">
-              <a:lnSpc>
-                <a:spcPct val="100000"/>
-              </a:lnSpc>
-              <a:spcBef>
-                <a:spcPts val="0"/>
-              </a:spcBef>
-              <a:spcAft>
-                <a:spcPts val="0"/>
-              </a:spcAft>
-            </a:pPr>
-            <a:r>
-              <a:rPr sz="950" b="1">
-                <a:solidFill>
-                  <a:srgbClr val="123C5B"/>
-                </a:solidFill>
-                <a:latin typeface="Microsoft YaHei"/>
-                <a:ea typeface="Microsoft YaHei"/>
-                <a:cs typeface="Microsoft YaHei"/>
-              </a:rPr>
-              <a:t>算子层 Agent</a:t>
-            </a:r>
-          </a:p>
-        </p:txBody>
-      </p:sp>
-      <p:cxnSp>
-        <p:nvCxnSpPr>
-          <p:cNvPr id="21" name="Connector 20"/>
-          <p:cNvCxnSpPr/>
-          <p:nvPr/>
-        </p:nvCxnSpPr>
-        <p:spPr>
-          <a:xfrm>
-            <a:off x="1344168" y="3858768"/>
-            <a:ext cx="374904" cy="0"/>
-          </a:xfrm>
-          <a:prstGeom prst="line">
-            <a:avLst/>
-          </a:prstGeom>
-          <a:ln w="15875">
-            <a:solidFill>
-              <a:srgbClr val="40708B"/>
-            </a:solidFill>
-            <a:headEnd type="triangle" w="med" len="med"/>
-            <a:tailEnd type="triangle" w="med" len="med"/>
-          </a:ln>
-        </p:spPr>
-      </p:cxnSp>
-      <p:sp>
-        <p:nvSpPr>
-          <p:cNvPr id="22" name="TextBox 21"/>
-          <p:cNvSpPr txBox="1"/>
-          <p:nvPr/>
-        </p:nvSpPr>
-        <p:spPr>
-          <a:xfrm>
-            <a:off x="530352" y="1225296"/>
-            <a:ext cx="1060704" cy="201168"/>
-          </a:xfrm>
-          <a:prstGeom prst="rect">
-            <a:avLst/>
-          </a:prstGeom>
-          <a:noFill/>
-        </p:spPr>
-        <p:txBody>
-          <a:bodyPr wrap="square" anchor="ctr" lIns="0" tIns="0" rIns="0" bIns="0">
-            <a:noAutofit/>
-          </a:bodyPr>
-          <a:lstStyle/>
-          <a:p>
-            <a:pPr algn="ctr" latinLnBrk="0">
-              <a:lnSpc>
-                <a:spcPct val="100000"/>
-              </a:lnSpc>
-              <a:spcBef>
-                <a:spcPts val="0"/>
-              </a:spcBef>
-              <a:spcAft>
-                <a:spcPts val="0"/>
-              </a:spcAft>
-            </a:pPr>
-            <a:r>
-              <a:rPr sz="850" b="1">
-                <a:solidFill>
-                  <a:srgbClr val="40708B"/>
-                </a:solidFill>
-                <a:latin typeface="Microsoft YaHei"/>
-                <a:ea typeface="Microsoft YaHei"/>
-                <a:cs typeface="Microsoft YaHei"/>
-              </a:rPr>
-              <a:t>发布 ⇄ 订阅</a:t>
-            </a:r>
-          </a:p>
-        </p:txBody>
-      </p:sp>
-      <p:sp>
-        <p:nvSpPr>
-          <p:cNvPr id="23" name="Rectangle 22"/>
-          <p:cNvSpPr/>
-          <p:nvPr/>
-        </p:nvSpPr>
-        <p:spPr>
-          <a:xfrm>
-            <a:off x="1755648" y="1225296"/>
-            <a:ext cx="2706624" cy="4572000"/>
+            <a:off x="4023360" y="1188720"/>
+            <a:ext cx="3255264" cy="4169664"/>
           </a:xfrm>
           <a:prstGeom prst="rect">
             <a:avLst/>
@@ -9948,39 +10215,39 @@
       </p:sp>
       <p:sp>
         <p:nvSpPr>
-          <p:cNvPr id="24" name="TextBox 23"/>
-          <p:cNvSpPr txBox="1"/>
-          <p:nvPr/>
-        </p:nvSpPr>
-        <p:spPr>
-          <a:xfrm>
-            <a:off x="1892807" y="1298448"/>
-            <a:ext cx="2432304" cy="237744"/>
-          </a:xfrm>
-          <a:prstGeom prst="rect">
-            <a:avLst/>
-          </a:prstGeom>
-          <a:noFill/>
-        </p:spPr>
-        <p:txBody>
-          <a:bodyPr wrap="square" anchor="ctr" lIns="0" tIns="0" rIns="0" bIns="0">
-            <a:noAutofit/>
-          </a:bodyPr>
-          <a:lstStyle/>
-          <a:p>
-            <a:pPr algn="ctr" latinLnBrk="0">
-              <a:lnSpc>
-                <a:spcPct val="100000"/>
-              </a:lnSpc>
-              <a:spcBef>
-                <a:spcPts val="0"/>
-              </a:spcBef>
-              <a:spcAft>
-                <a:spcPts val="0"/>
-              </a:spcAft>
-            </a:pPr>
-            <a:r>
-              <a:rPr sz="1150" b="1">
+          <p:cNvPr id="21" name="TextBox 20"/>
+          <p:cNvSpPr txBox="1"/>
+          <p:nvPr/>
+        </p:nvSpPr>
+        <p:spPr>
+          <a:xfrm>
+            <a:off x="4059936" y="1188720"/>
+            <a:ext cx="3182112" cy="347472"/>
+          </a:xfrm>
+          <a:prstGeom prst="rect">
+            <a:avLst/>
+          </a:prstGeom>
+          <a:noFill/>
+        </p:spPr>
+        <p:txBody>
+          <a:bodyPr wrap="square" anchor="ctr" lIns="0" tIns="0" rIns="0" bIns="0">
+            <a:noAutofit/>
+          </a:bodyPr>
+          <a:lstStyle/>
+          <a:p>
+            <a:pPr algn="l" latinLnBrk="0">
+              <a:lnSpc>
+                <a:spcPct val="100000"/>
+              </a:lnSpc>
+              <a:spcBef>
+                <a:spcPts val="0"/>
+              </a:spcBef>
+              <a:spcAft>
+                <a:spcPts val="0"/>
+              </a:spcAft>
+            </a:pPr>
+            <a:r>
+              <a:rPr sz="1100" b="1">
                 <a:solidFill>
                   <a:srgbClr val="0A2B45"/>
                 </a:solidFill>
@@ -9988,71 +10255,37 @@
                 <a:ea typeface="Microsoft YaHei"/>
                 <a:cs typeface="Microsoft YaHei"/>
               </a:rPr>
-              <a:t>环境（Environment）</a:t>
-            </a:r>
-          </a:p>
-        </p:txBody>
-      </p:sp>
-      <p:sp>
-        <p:nvSpPr>
-          <p:cNvPr id="25" name="TextBox 24"/>
-          <p:cNvSpPr txBox="1"/>
-          <p:nvPr/>
-        </p:nvSpPr>
-        <p:spPr>
-          <a:xfrm>
-            <a:off x="1892807" y="1536192"/>
-            <a:ext cx="2432304" cy="182880"/>
-          </a:xfrm>
-          <a:prstGeom prst="rect">
-            <a:avLst/>
-          </a:prstGeom>
-          <a:noFill/>
-        </p:spPr>
-        <p:txBody>
-          <a:bodyPr wrap="square" anchor="ctr" lIns="0" tIns="0" rIns="0" bIns="0">
-            <a:noAutofit/>
-          </a:bodyPr>
-          <a:lstStyle/>
-          <a:p>
-            <a:pPr algn="ctr" latinLnBrk="0">
-              <a:lnSpc>
-                <a:spcPct val="100000"/>
-              </a:lnSpc>
-              <a:spcBef>
-                <a:spcPts val="0"/>
-              </a:spcBef>
-              <a:spcAft>
-                <a:spcPts val="0"/>
-              </a:spcAft>
-            </a:pPr>
-            <a:r>
-              <a:rPr sz="800" b="0">
-                <a:solidFill>
-                  <a:srgbClr val="40708B"/>
-                </a:solidFill>
-                <a:latin typeface="Microsoft YaHei"/>
-                <a:ea typeface="Microsoft YaHei"/>
-                <a:cs typeface="Microsoft YaHei"/>
-              </a:rPr>
-              <a:t>两层 Agent 在此发布与订阅</a:t>
-            </a:r>
-          </a:p>
-        </p:txBody>
-      </p:sp>
-      <p:sp>
-        <p:nvSpPr>
-          <p:cNvPr id="26" name="Document 25"/>
+              <a:t>xpugen Agent 内部</a:t>
+            </a:r>
+            <a:r>
+              <a:rPr sz="850" b="1">
+                <a:solidFill>
+                  <a:srgbClr val="C2570A"/>
+                </a:solidFill>
+                <a:latin typeface="Microsoft YaHei"/>
+                <a:ea typeface="Microsoft YaHei"/>
+                <a:cs typeface="Microsoft YaHei"/>
+              </a:rPr>
+              <a:t>　唯一引入大模型的位置</a:t>
+            </a:r>
+          </a:p>
+        </p:txBody>
+      </p:sp>
+      <p:sp>
+        <p:nvSpPr>
+          <p:cNvPr id="22" name="Rounded Rectangle 21"/>
           <p:cNvSpPr/>
           <p:nvPr/>
         </p:nvSpPr>
         <p:spPr>
           <a:xfrm>
-            <a:off x="1938528" y="1828800"/>
-            <a:ext cx="2340864" cy="530352"/>
-          </a:xfrm>
-          <a:prstGeom prst="flowChartDocument">
-            <a:avLst/>
+            <a:off x="4169664" y="1609344"/>
+            <a:ext cx="2962656" cy="694944"/>
+          </a:xfrm>
+          <a:prstGeom prst="roundRect">
+            <a:avLst>
+              <a:gd name="adj" fmla="val 12000"/>
+            </a:avLst>
           </a:prstGeom>
           <a:solidFill>
             <a:srgbClr val="E6F0FC"/>
@@ -10064,7 +10297,7 @@
           </a:ln>
         </p:spPr>
         <p:txBody>
-          <a:bodyPr rtlCol="0" anchor="ctr" wrap="square" lIns="54864" tIns="18288" rIns="54864" bIns="91440">
+          <a:bodyPr rtlCol="0" anchor="ctr" wrap="square" tIns="36576" bIns="36576">
             <a:noAutofit/>
           </a:bodyPr>
           <a:lstStyle/>
@@ -10077,11 +10310,11 @@
                 <a:spcPts val="0"/>
               </a:spcBef>
               <a:spcAft>
-                <a:spcPts val="100"/>
-              </a:spcAft>
-            </a:pPr>
-            <a:r>
-              <a:rPr sz="1000" b="1">
+                <a:spcPts val="200"/>
+              </a:spcAft>
+            </a:pPr>
+            <a:r>
+              <a:rPr sz="1100" b="1">
                 <a:solidFill>
                   <a:srgbClr val="0A2B45"/>
                 </a:solidFill>
@@ -10089,182 +10322,61 @@
                 <a:ea typeface="Microsoft YaHei"/>
                 <a:cs typeface="Microsoft YaHei"/>
               </a:rPr>
-              <a:t>Trace 与耗时归因</a:t>
-            </a:r>
-          </a:p>
-        </p:txBody>
-      </p:sp>
-      <p:sp>
-        <p:nvSpPr>
-          <p:cNvPr id="27" name="Rounded Rectangle 26"/>
+              <a:t>迭代记忆库</a:t>
+            </a:r>
+            <a:r>
+              <a:rPr sz="850" b="1">
+                <a:solidFill>
+                  <a:srgbClr val="0F62CE"/>
+                </a:solidFill>
+                <a:latin typeface="Consolas"/>
+                <a:ea typeface="Microsoft YaHei"/>
+                <a:cs typeface="Microsoft YaHei"/>
+              </a:rPr>
+              <a:t>　Memory</a:t>
+            </a:r>
+          </a:p>
+          <a:p>
+            <a:pPr algn="ctr" latinLnBrk="0">
+              <a:lnSpc>
+                <a:spcPct val="100000"/>
+              </a:lnSpc>
+              <a:spcBef>
+                <a:spcPts val="0"/>
+              </a:spcBef>
+              <a:spcAft>
+                <a:spcPts val="0"/>
+              </a:spcAft>
+            </a:pPr>
+            <a:r>
+              <a:rPr sz="850" b="0">
+                <a:solidFill>
+                  <a:srgbClr val="1B4D69"/>
+                </a:solidFill>
+                <a:latin typeface="Microsoft YaHei"/>
+                <a:ea typeface="Microsoft YaHei"/>
+                <a:cs typeface="Microsoft YaHei"/>
+              </a:rPr>
+              <a:t>历史补丁与失败避坑</a:t>
+            </a:r>
+          </a:p>
+        </p:txBody>
+      </p:sp>
+      <p:sp>
+        <p:nvSpPr>
+          <p:cNvPr id="23" name="Rounded Rectangle 22"/>
           <p:cNvSpPr/>
           <p:nvPr/>
         </p:nvSpPr>
         <p:spPr>
           <a:xfrm>
-            <a:off x="1938528" y="2596896"/>
-            <a:ext cx="2340864" cy="530352"/>
+            <a:off x="4169664" y="2505456"/>
+            <a:ext cx="2962656" cy="786384"/>
           </a:xfrm>
           <a:prstGeom prst="roundRect">
             <a:avLst>
-              <a:gd name="adj" fmla="val 40000"/>
+              <a:gd name="adj" fmla="val 12000"/>
             </a:avLst>
-          </a:prstGeom>
-          <a:solidFill>
-            <a:srgbClr val="FBE6D4"/>
-          </a:solidFill>
-          <a:ln w="9525">
-            <a:solidFill>
-              <a:srgbClr val="C2570A"/>
-            </a:solidFill>
-          </a:ln>
-        </p:spPr>
-        <p:txBody>
-          <a:bodyPr rtlCol="0" anchor="ctr" wrap="square" lIns="54864" tIns="18288" rIns="54864" bIns="18288">
-            <a:noAutofit/>
-          </a:bodyPr>
-          <a:lstStyle/>
-          <a:p>
-            <a:pPr algn="ctr" latinLnBrk="0">
-              <a:lnSpc>
-                <a:spcPct val="100000"/>
-              </a:lnSpc>
-              <a:spcBef>
-                <a:spcPts val="0"/>
-              </a:spcBef>
-              <a:spcAft>
-                <a:spcPts val="100"/>
-              </a:spcAft>
-            </a:pPr>
-            <a:r>
-              <a:rPr sz="1000" b="1">
-                <a:solidFill>
-                  <a:srgbClr val="0A2B45"/>
-                </a:solidFill>
-                <a:latin typeface="Microsoft YaHei"/>
-                <a:ea typeface="Microsoft YaHei"/>
-                <a:cs typeface="Microsoft YaHei"/>
-              </a:rPr>
-              <a:t>瓶颈算子 + Shape 规格</a:t>
-            </a:r>
-          </a:p>
-          <a:p>
-            <a:pPr algn="ctr" latinLnBrk="0">
-              <a:lnSpc>
-                <a:spcPct val="100000"/>
-              </a:lnSpc>
-              <a:spcBef>
-                <a:spcPts val="0"/>
-              </a:spcBef>
-              <a:spcAft>
-                <a:spcPts val="0"/>
-              </a:spcAft>
-            </a:pPr>
-            <a:r>
-              <a:rPr sz="750" b="0">
-                <a:solidFill>
-                  <a:srgbClr val="C2570A"/>
-                </a:solidFill>
-                <a:latin typeface="Consolas"/>
-                <a:ea typeface="Microsoft YaHei"/>
-                <a:cs typeface="Microsoft YaHei"/>
-              </a:rPr>
-              <a:t>模型层 → 算子层</a:t>
-            </a:r>
-          </a:p>
-        </p:txBody>
-      </p:sp>
-      <p:sp>
-        <p:nvSpPr>
-          <p:cNvPr id="28" name="Document 27"/>
-          <p:cNvSpPr/>
-          <p:nvPr/>
-        </p:nvSpPr>
-        <p:spPr>
-          <a:xfrm>
-            <a:off x="1938528" y="3364991"/>
-            <a:ext cx="2340864" cy="530352"/>
-          </a:xfrm>
-          <a:prstGeom prst="flowChartDocument">
-            <a:avLst/>
-          </a:prstGeom>
-          <a:solidFill>
-            <a:srgbClr val="FBE6D4"/>
-          </a:solidFill>
-          <a:ln w="9525">
-            <a:solidFill>
-              <a:srgbClr val="C2570A"/>
-            </a:solidFill>
-          </a:ln>
-        </p:spPr>
-        <p:txBody>
-          <a:bodyPr rtlCol="0" anchor="ctr" wrap="square" lIns="54864" tIns="18288" rIns="54864" bIns="91440">
-            <a:noAutofit/>
-          </a:bodyPr>
-          <a:lstStyle/>
-          <a:p>
-            <a:pPr algn="ctr" latinLnBrk="0">
-              <a:lnSpc>
-                <a:spcPct val="100000"/>
-              </a:lnSpc>
-              <a:spcBef>
-                <a:spcPts val="0"/>
-              </a:spcBef>
-              <a:spcAft>
-                <a:spcPts val="100"/>
-              </a:spcAft>
-            </a:pPr>
-            <a:r>
-              <a:rPr sz="1000" b="1">
-                <a:solidFill>
-                  <a:srgbClr val="0A2B45"/>
-                </a:solidFill>
-                <a:latin typeface="Microsoft YaHei"/>
-                <a:ea typeface="Microsoft YaHei"/>
-                <a:cs typeface="Microsoft YaHei"/>
-              </a:rPr>
-              <a:t>新算子内核</a:t>
-            </a:r>
-          </a:p>
-          <a:p>
-            <a:pPr algn="ctr" latinLnBrk="0">
-              <a:lnSpc>
-                <a:spcPct val="100000"/>
-              </a:lnSpc>
-              <a:spcBef>
-                <a:spcPts val="0"/>
-              </a:spcBef>
-              <a:spcAft>
-                <a:spcPts val="0"/>
-              </a:spcAft>
-            </a:pPr>
-            <a:r>
-              <a:rPr sz="750" b="0">
-                <a:solidFill>
-                  <a:srgbClr val="C2570A"/>
-                </a:solidFill>
-                <a:latin typeface="Consolas"/>
-                <a:ea typeface="Microsoft YaHei"/>
-                <a:cs typeface="Microsoft YaHei"/>
-              </a:rPr>
-              <a:t>算子层 → 模型层</a:t>
-            </a:r>
-          </a:p>
-        </p:txBody>
-      </p:sp>
-      <p:sp>
-        <p:nvSpPr>
-          <p:cNvPr id="29" name="Document 28"/>
-          <p:cNvSpPr/>
-          <p:nvPr/>
-        </p:nvSpPr>
-        <p:spPr>
-          <a:xfrm>
-            <a:off x="1938528" y="4133087"/>
-            <a:ext cx="2340864" cy="530352"/>
-          </a:xfrm>
-          <a:prstGeom prst="flowChartDocument">
-            <a:avLst/>
           </a:prstGeom>
           <a:solidFill>
             <a:srgbClr val="E6F0FC"/>
@@ -10276,7 +10388,7 @@
           </a:ln>
         </p:spPr>
         <p:txBody>
-          <a:bodyPr rtlCol="0" anchor="ctr" wrap="square" lIns="54864" tIns="18288" rIns="54864" bIns="91440">
+          <a:bodyPr rtlCol="0" anchor="ctr" wrap="square" tIns="36576" bIns="36576">
             <a:noAutofit/>
           </a:bodyPr>
           <a:lstStyle/>
@@ -10289,11 +10401,11 @@
                 <a:spcPts val="0"/>
               </a:spcBef>
               <a:spcAft>
-                <a:spcPts val="100"/>
-              </a:spcAft>
-            </a:pPr>
-            <a:r>
-              <a:rPr sz="1000" b="1">
+                <a:spcPts val="200"/>
+              </a:spcAft>
+            </a:pPr>
+            <a:r>
+              <a:rPr sz="1100" b="1">
                 <a:solidFill>
                   <a:srgbClr val="0A2B45"/>
                 </a:solidFill>
@@ -10301,25 +10413,219 @@
                 <a:ea typeface="Microsoft YaHei"/>
                 <a:cs typeface="Microsoft YaHei"/>
               </a:rPr>
-              <a:t>评测报告与判定</a:t>
-            </a:r>
-          </a:p>
-        </p:txBody>
-      </p:sp>
-      <p:sp>
-        <p:nvSpPr>
-          <p:cNvPr id="30" name="Rounded Rectangle 29"/>
+              <a:t>状态感知</a:t>
+            </a:r>
+            <a:r>
+              <a:rPr sz="850" b="1">
+                <a:solidFill>
+                  <a:srgbClr val="0F62CE"/>
+                </a:solidFill>
+                <a:latin typeface="Consolas"/>
+                <a:ea typeface="Microsoft YaHei"/>
+                <a:cs typeface="Microsoft YaHei"/>
+              </a:rPr>
+              <a:t>　Observation</a:t>
+            </a:r>
+          </a:p>
+          <a:p>
+            <a:pPr algn="ctr" latinLnBrk="0">
+              <a:lnSpc>
+                <a:spcPct val="100000"/>
+              </a:lnSpc>
+              <a:spcBef>
+                <a:spcPts val="0"/>
+              </a:spcBef>
+              <a:spcAft>
+                <a:spcPts val="0"/>
+              </a:spcAft>
+            </a:pPr>
+            <a:r>
+              <a:rPr sz="850" b="0">
+                <a:solidFill>
+                  <a:srgbClr val="1B4D69"/>
+                </a:solidFill>
+                <a:latin typeface="Microsoft YaHei"/>
+                <a:ea typeface="Microsoft YaHei"/>
+                <a:cs typeface="Microsoft YaHei"/>
+              </a:rPr>
+              <a:t>汇总需求 + 报错 + 瓶颈</a:t>
+            </a:r>
+          </a:p>
+        </p:txBody>
+      </p:sp>
+      <p:cxnSp>
+        <p:nvCxnSpPr>
+          <p:cNvPr id="24" name="Connector 23"/>
+          <p:cNvCxnSpPr/>
+          <p:nvPr/>
+        </p:nvCxnSpPr>
+        <p:spPr>
+          <a:xfrm>
+            <a:off x="5650992" y="2313432"/>
+            <a:ext cx="0" cy="182880"/>
+          </a:xfrm>
+          <a:prstGeom prst="line">
+            <a:avLst/>
+          </a:prstGeom>
+          <a:ln w="19050">
+            <a:solidFill>
+              <a:srgbClr val="0F62CE"/>
+            </a:solidFill>
+            <a:tailEnd type="triangle" w="med" len="med"/>
+          </a:ln>
+        </p:spPr>
+      </p:cxnSp>
+      <p:sp>
+        <p:nvSpPr>
+          <p:cNvPr id="25" name="Rounded Rectangle 24"/>
           <p:cNvSpPr/>
           <p:nvPr/>
         </p:nvSpPr>
         <p:spPr>
           <a:xfrm>
-            <a:off x="1938528" y="4901183"/>
-            <a:ext cx="2340864" cy="530352"/>
+            <a:off x="4169664" y="3493008"/>
+            <a:ext cx="1920240" cy="914400"/>
           </a:xfrm>
           <a:prstGeom prst="roundRect">
             <a:avLst>
-              <a:gd name="adj" fmla="val 40000"/>
+              <a:gd name="adj" fmla="val 12000"/>
+            </a:avLst>
+          </a:prstGeom>
+          <a:solidFill>
+            <a:srgbClr val="FBE6D4"/>
+          </a:solidFill>
+          <a:ln w="9525">
+            <a:solidFill>
+              <a:srgbClr val="D2690C"/>
+            </a:solidFill>
+          </a:ln>
+        </p:spPr>
+        <p:txBody>
+          <a:bodyPr rtlCol="0" anchor="ctr" wrap="square" tIns="36576" bIns="36576">
+            <a:noAutofit/>
+          </a:bodyPr>
+          <a:lstStyle/>
+          <a:p>
+            <a:pPr algn="ctr" latinLnBrk="0">
+              <a:lnSpc>
+                <a:spcPct val="100000"/>
+              </a:lnSpc>
+              <a:spcBef>
+                <a:spcPts val="0"/>
+              </a:spcBef>
+              <a:spcAft>
+                <a:spcPts val="200"/>
+              </a:spcAft>
+            </a:pPr>
+            <a:r>
+              <a:rPr sz="1100" b="1">
+                <a:solidFill>
+                  <a:srgbClr val="0A2B45"/>
+                </a:solidFill>
+                <a:latin typeface="Microsoft YaHei"/>
+                <a:ea typeface="Microsoft YaHei"/>
+                <a:cs typeface="Microsoft YaHei"/>
+              </a:rPr>
+              <a:t>策略推演</a:t>
+            </a:r>
+            <a:r>
+              <a:rPr sz="850" b="1">
+                <a:solidFill>
+                  <a:srgbClr val="C2570A"/>
+                </a:solidFill>
+                <a:latin typeface="Consolas"/>
+                <a:ea typeface="Microsoft YaHei"/>
+                <a:cs typeface="Microsoft YaHei"/>
+              </a:rPr>
+              <a:t>　Thought</a:t>
+            </a:r>
+          </a:p>
+          <a:p>
+            <a:pPr algn="ctr" latinLnBrk="0">
+              <a:lnSpc>
+                <a:spcPct val="100000"/>
+              </a:lnSpc>
+              <a:spcBef>
+                <a:spcPts val="0"/>
+              </a:spcBef>
+              <a:spcAft>
+                <a:spcPts val="0"/>
+              </a:spcAft>
+            </a:pPr>
+            <a:r>
+              <a:rPr sz="850" b="0">
+                <a:solidFill>
+                  <a:srgbClr val="1B4D69"/>
+                </a:solidFill>
+                <a:latin typeface="Microsoft YaHei"/>
+                <a:ea typeface="Microsoft YaHei"/>
+                <a:cs typeface="Microsoft YaHei"/>
+              </a:rPr>
+              <a:t>规划 DMA 搬运 / 计算流水</a:t>
+            </a:r>
+          </a:p>
+          <a:p>
+            <a:pPr algn="ctr" latinLnBrk="0">
+              <a:lnSpc>
+                <a:spcPct val="100000"/>
+              </a:lnSpc>
+              <a:spcBef>
+                <a:spcPts val="0"/>
+              </a:spcBef>
+              <a:spcAft>
+                <a:spcPts val="0"/>
+              </a:spcAft>
+            </a:pPr>
+            <a:r>
+              <a:rPr sz="850" b="0">
+                <a:solidFill>
+                  <a:srgbClr val="1B4D69"/>
+                </a:solidFill>
+                <a:latin typeface="Microsoft YaHei"/>
+                <a:ea typeface="Microsoft YaHei"/>
+                <a:cs typeface="Microsoft YaHei"/>
+              </a:rPr>
+              <a:t>寄存器分配与指令替换</a:t>
+            </a:r>
+          </a:p>
+        </p:txBody>
+      </p:sp>
+      <p:cxnSp>
+        <p:nvCxnSpPr>
+          <p:cNvPr id="26" name="Connector 25"/>
+          <p:cNvCxnSpPr/>
+          <p:nvPr/>
+        </p:nvCxnSpPr>
+        <p:spPr>
+          <a:xfrm>
+            <a:off x="5650992" y="3300984"/>
+            <a:ext cx="0" cy="182880"/>
+          </a:xfrm>
+          <a:prstGeom prst="line">
+            <a:avLst/>
+          </a:prstGeom>
+          <a:ln w="19050">
+            <a:solidFill>
+              <a:srgbClr val="0F62CE"/>
+            </a:solidFill>
+            <a:tailEnd type="triangle" w="med" len="med"/>
+          </a:ln>
+        </p:spPr>
+      </p:cxnSp>
+      <p:sp>
+        <p:nvSpPr>
+          <p:cNvPr id="27" name="Rounded Rectangle 26"/>
+          <p:cNvSpPr/>
+          <p:nvPr/>
+        </p:nvSpPr>
+        <p:spPr>
+          <a:xfrm>
+            <a:off x="4169664" y="4608576"/>
+            <a:ext cx="2962656" cy="676656"/>
+          </a:xfrm>
+          <a:prstGeom prst="roundRect">
+            <a:avLst>
+              <a:gd name="adj" fmla="val 12000"/>
             </a:avLst>
           </a:prstGeom>
           <a:solidFill>
@@ -10332,7 +10638,7 @@
           </a:ln>
         </p:spPr>
         <p:txBody>
-          <a:bodyPr rtlCol="0" anchor="ctr" wrap="square" lIns="54864" tIns="18288" rIns="54864" bIns="18288">
+          <a:bodyPr rtlCol="0" anchor="ctr" wrap="square" tIns="36576" bIns="36576">
             <a:noAutofit/>
           </a:bodyPr>
           <a:lstStyle/>
@@ -10345,11 +10651,11 @@
                 <a:spcPts val="0"/>
               </a:spcBef>
               <a:spcAft>
-                <a:spcPts val="100"/>
-              </a:spcAft>
-            </a:pPr>
-            <a:r>
-              <a:rPr sz="1000" b="1">
+                <a:spcPts val="200"/>
+              </a:spcAft>
+            </a:pPr>
+            <a:r>
+              <a:rPr sz="1100" b="1">
                 <a:solidFill>
                   <a:srgbClr val="0A2B45"/>
                 </a:solidFill>
@@ -10357,63 +10663,20 @@
                 <a:ea typeface="Microsoft YaHei"/>
                 <a:cs typeface="Microsoft YaHei"/>
               </a:rPr>
-              <a:t>新基线</a:t>
-            </a:r>
-          </a:p>
-        </p:txBody>
-      </p:sp>
-      <p:sp>
-        <p:nvSpPr>
-          <p:cNvPr id="31" name="Rectangle 30"/>
-          <p:cNvSpPr/>
-          <p:nvPr/>
-        </p:nvSpPr>
-        <p:spPr>
-          <a:xfrm>
-            <a:off x="5321808" y="1225296"/>
-            <a:ext cx="3200400" cy="3767328"/>
-          </a:xfrm>
-          <a:prstGeom prst="rect">
-            <a:avLst/>
-          </a:prstGeom>
-          <a:solidFill>
-            <a:srgbClr val="FFFFFF"/>
-          </a:solidFill>
-          <a:ln w="9525">
-            <a:solidFill>
-              <a:srgbClr val="AFCEE1"/>
-            </a:solidFill>
-          </a:ln>
-        </p:spPr>
-        <p:txBody>
-          <a:bodyPr rtlCol="0" anchor="ctr"/>
-          <a:lstStyle/>
-          <a:p>
-            <a:pPr algn="ctr"/>
-          </a:p>
-        </p:txBody>
-      </p:sp>
-      <p:sp>
-        <p:nvSpPr>
-          <p:cNvPr id="32" name="TextBox 31"/>
-          <p:cNvSpPr txBox="1"/>
-          <p:nvPr/>
-        </p:nvSpPr>
-        <p:spPr>
-          <a:xfrm>
-            <a:off x="5458968" y="1298448"/>
-            <a:ext cx="2926080" cy="237744"/>
-          </a:xfrm>
-          <a:prstGeom prst="rect">
-            <a:avLst/>
-          </a:prstGeom>
-          <a:noFill/>
-        </p:spPr>
-        <p:txBody>
-          <a:bodyPr wrap="square" anchor="ctr" lIns="0" tIns="0" rIns="0" bIns="0">
-            <a:noAutofit/>
-          </a:bodyPr>
-          <a:lstStyle/>
+              <a:t>动作执行</a:t>
+            </a:r>
+            <a:r>
+              <a:rPr sz="850" b="1">
+                <a:solidFill>
+                  <a:srgbClr val="0F62CE"/>
+                </a:solidFill>
+                <a:latin typeface="Consolas"/>
+                <a:ea typeface="Microsoft YaHei"/>
+                <a:cs typeface="Microsoft YaHei"/>
+              </a:rPr>
+              <a:t>　Action</a:t>
+            </a:r>
+          </a:p>
           <a:p>
             <a:pPr algn="ctr" latinLnBrk="0">
               <a:lnSpc>
@@ -10427,162 +10690,28 @@
               </a:spcAft>
             </a:pPr>
             <a:r>
-              <a:rPr sz="1150" b="1">
-                <a:solidFill>
-                  <a:srgbClr val="0A2B45"/>
-                </a:solidFill>
-                <a:latin typeface="Microsoft YaHei"/>
-                <a:ea typeface="Microsoft YaHei"/>
-                <a:cs typeface="Microsoft YaHei"/>
-              </a:rPr>
-              <a:t>Agent（两层同构）</a:t>
-            </a:r>
-          </a:p>
-        </p:txBody>
-      </p:sp>
-      <p:sp>
-        <p:nvSpPr>
-          <p:cNvPr id="33" name="Rounded Rectangle 32"/>
-          <p:cNvSpPr/>
-          <p:nvPr/>
-        </p:nvSpPr>
-        <p:spPr>
-          <a:xfrm>
-            <a:off x="6053328" y="1682496"/>
-            <a:ext cx="1737360" cy="566928"/>
-          </a:xfrm>
-          <a:prstGeom prst="roundRect">
-            <a:avLst>
-              <a:gd name="adj" fmla="val 18000"/>
-            </a:avLst>
-          </a:prstGeom>
-          <a:solidFill>
-            <a:srgbClr val="E6F0FC"/>
-          </a:solidFill>
-          <a:ln w="9525">
-            <a:solidFill>
-              <a:srgbClr val="0F62CE"/>
-            </a:solidFill>
-          </a:ln>
-        </p:spPr>
-        <p:txBody>
-          <a:bodyPr rtlCol="0" anchor="ctr" wrap="square" tIns="36576" bIns="36576">
-            <a:noAutofit/>
-          </a:bodyPr>
-          <a:lstStyle/>
-          <a:p>
-            <a:pPr algn="ctr" latinLnBrk="0">
-              <a:lnSpc>
-                <a:spcPct val="100000"/>
-              </a:lnSpc>
-              <a:spcBef>
-                <a:spcPts val="0"/>
-              </a:spcBef>
-              <a:spcAft>
-                <a:spcPts val="0"/>
-              </a:spcAft>
-            </a:pPr>
-            <a:r>
-              <a:rPr sz="1100" b="1">
-                <a:solidFill>
-                  <a:srgbClr val="0A2B45"/>
-                </a:solidFill>
-                <a:latin typeface="Microsoft YaHei"/>
-                <a:ea typeface="Microsoft YaHei"/>
-                <a:cs typeface="Microsoft YaHei"/>
-              </a:rPr>
-              <a:t>记忆</a:t>
-            </a:r>
-            <a:r>
-              <a:rPr sz="900" b="1">
-                <a:solidFill>
-                  <a:srgbClr val="0F62CE"/>
-                </a:solidFill>
-                <a:latin typeface="Consolas"/>
-                <a:ea typeface="Microsoft YaHei"/>
-                <a:cs typeface="Microsoft YaHei"/>
-              </a:rPr>
-              <a:t>　Memory</a:t>
-            </a:r>
-          </a:p>
-        </p:txBody>
-      </p:sp>
-      <p:sp>
-        <p:nvSpPr>
-          <p:cNvPr id="34" name="Rounded Rectangle 33"/>
-          <p:cNvSpPr/>
-          <p:nvPr/>
-        </p:nvSpPr>
-        <p:spPr>
-          <a:xfrm>
-            <a:off x="6053328" y="2450592"/>
-            <a:ext cx="1737360" cy="566928"/>
-          </a:xfrm>
-          <a:prstGeom prst="roundRect">
-            <a:avLst>
-              <a:gd name="adj" fmla="val 18000"/>
-            </a:avLst>
-          </a:prstGeom>
-          <a:solidFill>
-            <a:srgbClr val="E6F0FC"/>
-          </a:solidFill>
-          <a:ln w="9525">
-            <a:solidFill>
-              <a:srgbClr val="0F62CE"/>
-            </a:solidFill>
-          </a:ln>
-        </p:spPr>
-        <p:txBody>
-          <a:bodyPr rtlCol="0" anchor="ctr" wrap="square" tIns="36576" bIns="36576">
-            <a:noAutofit/>
-          </a:bodyPr>
-          <a:lstStyle/>
-          <a:p>
-            <a:pPr algn="ctr" latinLnBrk="0">
-              <a:lnSpc>
-                <a:spcPct val="100000"/>
-              </a:lnSpc>
-              <a:spcBef>
-                <a:spcPts val="0"/>
-              </a:spcBef>
-              <a:spcAft>
-                <a:spcPts val="0"/>
-              </a:spcAft>
-            </a:pPr>
-            <a:r>
-              <a:rPr sz="1100" b="1">
-                <a:solidFill>
-                  <a:srgbClr val="0A2B45"/>
-                </a:solidFill>
-                <a:latin typeface="Microsoft YaHei"/>
-                <a:ea typeface="Microsoft YaHei"/>
-                <a:cs typeface="Microsoft YaHei"/>
-              </a:rPr>
-              <a:t>观察</a:t>
-            </a:r>
-            <a:r>
-              <a:rPr sz="900" b="1">
-                <a:solidFill>
-                  <a:srgbClr val="0F62CE"/>
-                </a:solidFill>
-                <a:latin typeface="Consolas"/>
-                <a:ea typeface="Microsoft YaHei"/>
-                <a:cs typeface="Microsoft YaHei"/>
-              </a:rPr>
-              <a:t>　Observation</a:t>
+              <a:rPr sz="850" b="0">
+                <a:solidFill>
+                  <a:srgbClr val="1B4D69"/>
+                </a:solidFill>
+                <a:latin typeface="Microsoft YaHei"/>
+                <a:ea typeface="Microsoft YaHei"/>
+                <a:cs typeface="Microsoft YaHei"/>
+              </a:rPr>
+              <a:t>生成补丁，触发编译与评测</a:t>
             </a:r>
           </a:p>
         </p:txBody>
       </p:sp>
       <p:cxnSp>
         <p:nvCxnSpPr>
-          <p:cNvPr id="35" name="Connector 34"/>
+          <p:cNvPr id="28" name="Connector 27"/>
           <p:cNvCxnSpPr/>
           <p:nvPr/>
         </p:nvCxnSpPr>
         <p:spPr>
           <a:xfrm>
-            <a:off x="6922008" y="2258568"/>
+            <a:off x="5650992" y="4416552"/>
             <a:ext cx="0" cy="182880"/>
           </a:xfrm>
           <a:prstGeom prst="line">
@@ -10598,48 +10727,222 @@
       </p:cxnSp>
       <p:sp>
         <p:nvSpPr>
-          <p:cNvPr id="36" name="Rounded Rectangle 35"/>
+          <p:cNvPr id="29" name="Rounded Rectangle 28"/>
           <p:cNvSpPr/>
           <p:nvPr/>
         </p:nvSpPr>
         <p:spPr>
           <a:xfrm>
-            <a:off x="6053328" y="3218688"/>
-            <a:ext cx="1737360" cy="566928"/>
+            <a:off x="6291072" y="3749039"/>
+            <a:ext cx="841248" cy="402336"/>
           </a:xfrm>
           <a:prstGeom prst="roundRect">
             <a:avLst>
-              <a:gd name="adj" fmla="val 18000"/>
+              <a:gd name="adj" fmla="val 50000"/>
             </a:avLst>
           </a:prstGeom>
           <a:solidFill>
-            <a:srgbClr val="E6F0FC"/>
+            <a:srgbClr val="D2690C"/>
+          </a:solidFill>
+          <a:ln>
+            <a:noFill/>
+          </a:ln>
+        </p:spPr>
+        <p:txBody>
+          <a:bodyPr rtlCol="0" anchor="ctr" wrap="square" lIns="27432" tIns="0" rIns="27432" bIns="0">
+            <a:noAutofit/>
+          </a:bodyPr>
+          <a:lstStyle/>
+          <a:p>
+            <a:pPr algn="ctr" latinLnBrk="0">
+              <a:lnSpc>
+                <a:spcPct val="100000"/>
+              </a:lnSpc>
+              <a:spcBef>
+                <a:spcPts val="0"/>
+              </a:spcBef>
+              <a:spcAft>
+                <a:spcPts val="0"/>
+              </a:spcAft>
+            </a:pPr>
+            <a:r>
+              <a:rPr sz="950" b="1">
+                <a:solidFill>
+                  <a:srgbClr val="FFFFFF"/>
+                </a:solidFill>
+                <a:latin typeface="Microsoft YaHei"/>
+                <a:ea typeface="Microsoft YaHei"/>
+                <a:cs typeface="Microsoft YaHei"/>
+              </a:rPr>
+              <a:t>大模型</a:t>
+            </a:r>
+          </a:p>
+        </p:txBody>
+      </p:sp>
+      <p:cxnSp>
+        <p:nvCxnSpPr>
+          <p:cNvPr id="30" name="Connector 29"/>
+          <p:cNvCxnSpPr/>
+          <p:nvPr/>
+        </p:nvCxnSpPr>
+        <p:spPr>
+          <a:xfrm flipH="1">
+            <a:off x="6126480" y="3950208"/>
+            <a:ext cx="128016" cy="0"/>
+          </a:xfrm>
+          <a:prstGeom prst="line">
+            <a:avLst/>
+          </a:prstGeom>
+          <a:ln w="19050">
+            <a:solidFill>
+              <a:srgbClr val="D2690C"/>
+            </a:solidFill>
+            <a:tailEnd type="triangle" w="med" len="med"/>
+          </a:ln>
+        </p:spPr>
+      </p:cxnSp>
+      <p:sp>
+        <p:nvSpPr>
+          <p:cNvPr id="31" name="TextBox 30"/>
+          <p:cNvSpPr txBox="1"/>
+          <p:nvPr/>
+        </p:nvSpPr>
+        <p:spPr>
+          <a:xfrm>
+            <a:off x="6236208" y="3511296"/>
+            <a:ext cx="914400" cy="182880"/>
+          </a:xfrm>
+          <a:prstGeom prst="rect">
+            <a:avLst/>
+          </a:prstGeom>
+          <a:noFill/>
+        </p:spPr>
+        <p:txBody>
+          <a:bodyPr wrap="square" anchor="ctr" lIns="0" tIns="0" rIns="0" bIns="0">
+            <a:noAutofit/>
+          </a:bodyPr>
+          <a:lstStyle/>
+          <a:p>
+            <a:pPr algn="ctr" latinLnBrk="0">
+              <a:lnSpc>
+                <a:spcPct val="100000"/>
+              </a:lnSpc>
+              <a:spcBef>
+                <a:spcPts val="0"/>
+              </a:spcBef>
+              <a:spcAft>
+                <a:spcPts val="0"/>
+              </a:spcAft>
+            </a:pPr>
+            <a:r>
+              <a:rPr sz="750" b="1">
+                <a:solidFill>
+                  <a:srgbClr val="C2570A"/>
+                </a:solidFill>
+                <a:latin typeface="Microsoft YaHei"/>
+                <a:ea typeface="Microsoft YaHei"/>
+                <a:cs typeface="Microsoft YaHei"/>
+              </a:rPr>
+              <a:t>LLM 推理</a:t>
+            </a:r>
+          </a:p>
+        </p:txBody>
+      </p:sp>
+      <p:sp>
+        <p:nvSpPr>
+          <p:cNvPr id="32" name="Rectangle 31"/>
+          <p:cNvSpPr/>
+          <p:nvPr/>
+        </p:nvSpPr>
+        <p:spPr>
+          <a:xfrm>
+            <a:off x="7973568" y="1609344"/>
+            <a:ext cx="3669487" cy="1097280"/>
+          </a:xfrm>
+          <a:prstGeom prst="rect">
+            <a:avLst/>
+          </a:prstGeom>
+          <a:solidFill>
+            <a:srgbClr val="F2F8FD"/>
           </a:solidFill>
           <a:ln w="9525">
             <a:solidFill>
-              <a:srgbClr val="0F62CE"/>
+              <a:srgbClr val="CFE3F0"/>
             </a:solidFill>
           </a:ln>
         </p:spPr>
         <p:txBody>
-          <a:bodyPr rtlCol="0" anchor="ctr" wrap="square" tIns="36576" bIns="36576">
-            <a:noAutofit/>
-          </a:bodyPr>
-          <a:lstStyle/>
-          <a:p>
-            <a:pPr algn="ctr" latinLnBrk="0">
-              <a:lnSpc>
-                <a:spcPct val="100000"/>
-              </a:lnSpc>
-              <a:spcBef>
-                <a:spcPts val="0"/>
-              </a:spcBef>
-              <a:spcAft>
-                <a:spcPts val="0"/>
-              </a:spcAft>
-            </a:pPr>
-            <a:r>
-              <a:rPr sz="1100" b="1">
+          <a:bodyPr rtlCol="0" anchor="ctr"/>
+          <a:lstStyle/>
+          <a:p>
+            <a:pPr algn="ctr"/>
+          </a:p>
+        </p:txBody>
+      </p:sp>
+      <p:sp>
+        <p:nvSpPr>
+          <p:cNvPr id="33" name="Rectangle 32"/>
+          <p:cNvSpPr/>
+          <p:nvPr/>
+        </p:nvSpPr>
+        <p:spPr>
+          <a:xfrm>
+            <a:off x="7973568" y="1609344"/>
+            <a:ext cx="64008" cy="1097280"/>
+          </a:xfrm>
+          <a:prstGeom prst="rect">
+            <a:avLst/>
+          </a:prstGeom>
+          <a:solidFill>
+            <a:srgbClr val="0F62CE"/>
+          </a:solidFill>
+          <a:ln>
+            <a:noFill/>
+          </a:ln>
+        </p:spPr>
+        <p:txBody>
+          <a:bodyPr rtlCol="0" anchor="ctr"/>
+          <a:lstStyle/>
+          <a:p>
+            <a:pPr algn="ctr"/>
+          </a:p>
+        </p:txBody>
+      </p:sp>
+      <p:sp>
+        <p:nvSpPr>
+          <p:cNvPr id="34" name="TextBox 33"/>
+          <p:cNvSpPr txBox="1"/>
+          <p:nvPr/>
+        </p:nvSpPr>
+        <p:spPr>
+          <a:xfrm>
+            <a:off x="8156448" y="1655064"/>
+            <a:ext cx="3340303" cy="1005839"/>
+          </a:xfrm>
+          <a:prstGeom prst="rect">
+            <a:avLst/>
+          </a:prstGeom>
+          <a:noFill/>
+        </p:spPr>
+        <p:txBody>
+          <a:bodyPr wrap="square" anchor="ctr" lIns="0" tIns="0" rIns="0" bIns="0">
+            <a:noAutofit/>
+          </a:bodyPr>
+          <a:lstStyle/>
+          <a:p>
+            <a:pPr algn="l" latinLnBrk="0">
+              <a:lnSpc>
+                <a:spcPct val="100000"/>
+              </a:lnSpc>
+              <a:spcBef>
+                <a:spcPts val="0"/>
+              </a:spcBef>
+              <a:spcAft>
+                <a:spcPts val="300"/>
+              </a:spcAft>
+            </a:pPr>
+            <a:r>
+              <a:rPr sz="1050" b="1">
                 <a:solidFill>
                   <a:srgbClr val="0A2B45"/>
                 </a:solidFill>
@@ -10647,10 +10950,10 @@
                 <a:ea typeface="Microsoft YaHei"/>
                 <a:cs typeface="Microsoft YaHei"/>
               </a:rPr>
-              <a:t>思考</a:t>
-            </a:r>
-            <a:r>
-              <a:rPr sz="900" b="1">
+              <a:t>源码与检索工具</a:t>
+            </a:r>
+            <a:r>
+              <a:rPr sz="800" b="1">
                 <a:solidFill>
                   <a:srgbClr val="0F62CE"/>
                 </a:solidFill>
@@ -10658,21 +10961,651 @@
                 <a:ea typeface="Microsoft YaHei"/>
                 <a:cs typeface="Microsoft YaHei"/>
               </a:rPr>
-              <a:t>　Thought</a:t>
+              <a:t>　Source &amp; Retrieval</a:t>
+            </a:r>
+          </a:p>
+          <a:p>
+            <a:pPr algn="l" latinLnBrk="0">
+              <a:lnSpc>
+                <a:spcPct val="100000"/>
+              </a:lnSpc>
+              <a:spcBef>
+                <a:spcPts val="0"/>
+              </a:spcBef>
+              <a:spcAft>
+                <a:spcPts val="0"/>
+              </a:spcAft>
+            </a:pPr>
+            <a:r>
+              <a:rPr sz="900" b="0">
+                <a:solidFill>
+                  <a:srgbClr val="1B4D69"/>
+                </a:solidFill>
+                <a:latin typeface="Microsoft YaHei"/>
+                <a:ea typeface="Microsoft YaHei"/>
+                <a:cs typeface="Microsoft YaHei"/>
+              </a:rPr>
+              <a:t>·　算子模板读取</a:t>
+            </a:r>
+          </a:p>
+          <a:p>
+            <a:pPr algn="l" latinLnBrk="0">
+              <a:lnSpc>
+                <a:spcPct val="100000"/>
+              </a:lnSpc>
+              <a:spcBef>
+                <a:spcPts val="0"/>
+              </a:spcBef>
+              <a:spcAft>
+                <a:spcPts val="0"/>
+              </a:spcAft>
+            </a:pPr>
+            <a:r>
+              <a:rPr sz="900" b="0">
+                <a:solidFill>
+                  <a:srgbClr val="1B4D69"/>
+                </a:solidFill>
+                <a:latin typeface="Microsoft YaHei"/>
+                <a:ea typeface="Microsoft YaHei"/>
+                <a:cs typeface="Microsoft YaHei"/>
+              </a:rPr>
+              <a:t>·　AST 语法树检查</a:t>
+            </a:r>
+          </a:p>
+          <a:p>
+            <a:pPr algn="l" latinLnBrk="0">
+              <a:lnSpc>
+                <a:spcPct val="100000"/>
+              </a:lnSpc>
+              <a:spcBef>
+                <a:spcPts val="0"/>
+              </a:spcBef>
+              <a:spcAft>
+                <a:spcPts val="0"/>
+              </a:spcAft>
+            </a:pPr>
+            <a:r>
+              <a:rPr sz="900" b="0">
+                <a:solidFill>
+                  <a:srgbClr val="1B4D69"/>
+                </a:solidFill>
+                <a:latin typeface="Microsoft YaHei"/>
+                <a:ea typeface="Microsoft YaHei"/>
+                <a:cs typeface="Microsoft YaHei"/>
+              </a:rPr>
+              <a:t>·　代码补丁生成</a:t>
+            </a:r>
+          </a:p>
+        </p:txBody>
+      </p:sp>
+      <p:sp>
+        <p:nvSpPr>
+          <p:cNvPr id="35" name="Rectangle 34"/>
+          <p:cNvSpPr/>
+          <p:nvPr/>
+        </p:nvSpPr>
+        <p:spPr>
+          <a:xfrm>
+            <a:off x="7973568" y="3017520"/>
+            <a:ext cx="3669487" cy="1645920"/>
+          </a:xfrm>
+          <a:prstGeom prst="rect">
+            <a:avLst/>
+          </a:prstGeom>
+          <a:solidFill>
+            <a:srgbClr val="F2F8FD"/>
+          </a:solidFill>
+          <a:ln w="9525">
+            <a:solidFill>
+              <a:srgbClr val="CFE3F0"/>
+            </a:solidFill>
+          </a:ln>
+        </p:spPr>
+        <p:txBody>
+          <a:bodyPr rtlCol="0" anchor="ctr"/>
+          <a:lstStyle/>
+          <a:p>
+            <a:pPr algn="ctr"/>
+          </a:p>
+        </p:txBody>
+      </p:sp>
+      <p:sp>
+        <p:nvSpPr>
+          <p:cNvPr id="36" name="Rectangle 35"/>
+          <p:cNvSpPr/>
+          <p:nvPr/>
+        </p:nvSpPr>
+        <p:spPr>
+          <a:xfrm>
+            <a:off x="7973568" y="3017520"/>
+            <a:ext cx="64008" cy="1645920"/>
+          </a:xfrm>
+          <a:prstGeom prst="rect">
+            <a:avLst/>
+          </a:prstGeom>
+          <a:solidFill>
+            <a:srgbClr val="0F62CE"/>
+          </a:solidFill>
+          <a:ln>
+            <a:noFill/>
+          </a:ln>
+        </p:spPr>
+        <p:txBody>
+          <a:bodyPr rtlCol="0" anchor="ctr"/>
+          <a:lstStyle/>
+          <a:p>
+            <a:pPr algn="ctr"/>
+          </a:p>
+        </p:txBody>
+      </p:sp>
+      <p:sp>
+        <p:nvSpPr>
+          <p:cNvPr id="37" name="TextBox 36"/>
+          <p:cNvSpPr txBox="1"/>
+          <p:nvPr/>
+        </p:nvSpPr>
+        <p:spPr>
+          <a:xfrm>
+            <a:off x="8156448" y="3063239"/>
+            <a:ext cx="3340303" cy="1554480"/>
+          </a:xfrm>
+          <a:prstGeom prst="rect">
+            <a:avLst/>
+          </a:prstGeom>
+          <a:noFill/>
+        </p:spPr>
+        <p:txBody>
+          <a:bodyPr wrap="square" anchor="ctr" lIns="0" tIns="0" rIns="0" bIns="0">
+            <a:noAutofit/>
+          </a:bodyPr>
+          <a:lstStyle/>
+          <a:p>
+            <a:pPr algn="l" latinLnBrk="0">
+              <a:lnSpc>
+                <a:spcPct val="100000"/>
+              </a:lnSpc>
+              <a:spcBef>
+                <a:spcPts val="0"/>
+              </a:spcBef>
+              <a:spcAft>
+                <a:spcPts val="300"/>
+              </a:spcAft>
+            </a:pPr>
+            <a:r>
+              <a:rPr sz="1050" b="1">
+                <a:solidFill>
+                  <a:srgbClr val="0A2B45"/>
+                </a:solidFill>
+                <a:latin typeface="Microsoft YaHei"/>
+                <a:ea typeface="Microsoft YaHei"/>
+                <a:cs typeface="Microsoft YaHei"/>
+              </a:rPr>
+              <a:t>Harness &amp; 后端</a:t>
+            </a:r>
+            <a:r>
+              <a:rPr sz="800" b="1">
+                <a:solidFill>
+                  <a:srgbClr val="0F62CE"/>
+                </a:solidFill>
+                <a:latin typeface="Consolas"/>
+                <a:ea typeface="Microsoft YaHei"/>
+                <a:cs typeface="Microsoft YaHei"/>
+              </a:rPr>
+              <a:t>　backend/ 耦合</a:t>
+            </a:r>
+          </a:p>
+          <a:p>
+            <a:pPr algn="l" latinLnBrk="0">
+              <a:lnSpc>
+                <a:spcPct val="100000"/>
+              </a:lnSpc>
+              <a:spcBef>
+                <a:spcPts val="0"/>
+              </a:spcBef>
+              <a:spcAft>
+                <a:spcPts val="0"/>
+              </a:spcAft>
+            </a:pPr>
+            <a:r>
+              <a:rPr sz="900" b="0">
+                <a:solidFill>
+                  <a:srgbClr val="1B4D69"/>
+                </a:solidFill>
+                <a:latin typeface="Microsoft YaHei"/>
+                <a:ea typeface="Microsoft YaHei"/>
+                <a:cs typeface="Microsoft YaHei"/>
+              </a:rPr>
+              <a:t>·　L0 交叉编译运行</a:t>
+            </a:r>
+          </a:p>
+          <a:p>
+            <a:pPr algn="l" latinLnBrk="0">
+              <a:lnSpc>
+                <a:spcPct val="100000"/>
+              </a:lnSpc>
+              <a:spcBef>
+                <a:spcPts val="0"/>
+              </a:spcBef>
+              <a:spcAft>
+                <a:spcPts val="0"/>
+              </a:spcAft>
+            </a:pPr>
+            <a:r>
+              <a:rPr sz="900" b="0">
+                <a:solidFill>
+                  <a:srgbClr val="1B4D69"/>
+                </a:solidFill>
+                <a:latin typeface="Microsoft YaHei"/>
+                <a:ea typeface="Microsoft YaHei"/>
+                <a:cs typeface="Microsoft YaHei"/>
+              </a:rPr>
+              <a:t>·　L1 Golden 精度对齐</a:t>
+            </a:r>
+          </a:p>
+          <a:p>
+            <a:pPr algn="l" latinLnBrk="0">
+              <a:lnSpc>
+                <a:spcPct val="100000"/>
+              </a:lnSpc>
+              <a:spcBef>
+                <a:spcPts val="0"/>
+              </a:spcBef>
+              <a:spcAft>
+                <a:spcPts val="0"/>
+              </a:spcAft>
+            </a:pPr>
+            <a:r>
+              <a:rPr sz="900" b="0">
+                <a:solidFill>
+                  <a:srgbClr val="1B4D69"/>
+                </a:solidFill>
+                <a:latin typeface="Microsoft YaHei"/>
+                <a:ea typeface="Microsoft YaHei"/>
+                <a:cs typeface="Microsoft YaHei"/>
+              </a:rPr>
+              <a:t>·　Bench 真机微秒计时</a:t>
+            </a:r>
+          </a:p>
+          <a:p>
+            <a:pPr algn="l" latinLnBrk="0">
+              <a:lnSpc>
+                <a:spcPct val="100000"/>
+              </a:lnSpc>
+              <a:spcBef>
+                <a:spcPts val="0"/>
+              </a:spcBef>
+              <a:spcAft>
+                <a:spcPts val="0"/>
+              </a:spcAft>
+            </a:pPr>
+            <a:r>
+              <a:rPr sz="900" b="0">
+                <a:solidFill>
+                  <a:srgbClr val="1B4D69"/>
+                </a:solidFill>
+                <a:latin typeface="Microsoft YaHei"/>
+                <a:ea typeface="Microsoft YaHei"/>
+                <a:cs typeface="Microsoft YaHei"/>
+              </a:rPr>
+              <a:t>·　Profile 模拟器分析</a:t>
             </a:r>
           </a:p>
         </p:txBody>
       </p:sp>
       <p:cxnSp>
         <p:nvCxnSpPr>
-          <p:cNvPr id="37" name="Connector 36"/>
+          <p:cNvPr id="38" name="Connector 37"/>
           <p:cNvCxnSpPr/>
           <p:nvPr/>
         </p:nvCxnSpPr>
         <p:spPr>
           <a:xfrm>
-            <a:off x="6922008" y="3026664"/>
-            <a:ext cx="0" cy="182880"/>
+            <a:off x="3566160" y="2002536"/>
+            <a:ext cx="566928" cy="786384"/>
+          </a:xfrm>
+          <a:prstGeom prst="line">
+            <a:avLst/>
+          </a:prstGeom>
+          <a:ln w="15875">
+            <a:solidFill>
+              <a:srgbClr val="40708B"/>
+            </a:solidFill>
+            <a:tailEnd type="triangle" w="med" len="med"/>
+          </a:ln>
+        </p:spPr>
+      </p:cxnSp>
+      <p:cxnSp>
+        <p:nvCxnSpPr>
+          <p:cNvPr id="39" name="Connector 38"/>
+          <p:cNvCxnSpPr/>
+          <p:nvPr/>
+        </p:nvCxnSpPr>
+        <p:spPr>
+          <a:xfrm>
+            <a:off x="3566160" y="2898648"/>
+            <a:ext cx="566928" cy="0"/>
+          </a:xfrm>
+          <a:prstGeom prst="line">
+            <a:avLst/>
+          </a:prstGeom>
+          <a:ln w="15875">
+            <a:solidFill>
+              <a:srgbClr val="40708B"/>
+            </a:solidFill>
+            <a:tailEnd type="triangle" w="med" len="med"/>
+          </a:ln>
+        </p:spPr>
+      </p:cxnSp>
+      <p:cxnSp>
+        <p:nvCxnSpPr>
+          <p:cNvPr id="40" name="Connector 39"/>
+          <p:cNvCxnSpPr/>
+          <p:nvPr/>
+        </p:nvCxnSpPr>
+        <p:spPr>
+          <a:xfrm>
+            <a:off x="3566160" y="3904487"/>
+            <a:ext cx="566928" cy="0"/>
+          </a:xfrm>
+          <a:prstGeom prst="line">
+            <a:avLst/>
+          </a:prstGeom>
+          <a:ln w="15875">
+            <a:solidFill>
+              <a:srgbClr val="40708B"/>
+            </a:solidFill>
+            <a:tailEnd type="triangle" w="med" len="med"/>
+          </a:ln>
+        </p:spPr>
+      </p:cxnSp>
+      <p:sp>
+        <p:nvSpPr>
+          <p:cNvPr id="41" name="TextBox 40"/>
+          <p:cNvSpPr txBox="1"/>
+          <p:nvPr/>
+        </p:nvSpPr>
+        <p:spPr>
+          <a:xfrm>
+            <a:off x="3566160" y="2651760"/>
+            <a:ext cx="566928" cy="182880"/>
+          </a:xfrm>
+          <a:prstGeom prst="rect">
+            <a:avLst/>
+          </a:prstGeom>
+          <a:noFill/>
+        </p:spPr>
+        <p:txBody>
+          <a:bodyPr wrap="square" anchor="ctr" lIns="0" tIns="0" rIns="0" bIns="0">
+            <a:noAutofit/>
+          </a:bodyPr>
+          <a:lstStyle/>
+          <a:p>
+            <a:pPr algn="ctr" latinLnBrk="0">
+              <a:lnSpc>
+                <a:spcPct val="100000"/>
+              </a:lnSpc>
+              <a:spcBef>
+                <a:spcPts val="0"/>
+              </a:spcBef>
+              <a:spcAft>
+                <a:spcPts val="0"/>
+              </a:spcAft>
+            </a:pPr>
+            <a:r>
+              <a:rPr sz="800" b="1">
+                <a:solidFill>
+                  <a:srgbClr val="40708B"/>
+                </a:solidFill>
+                <a:latin typeface="Microsoft YaHei"/>
+                <a:ea typeface="Microsoft YaHei"/>
+                <a:cs typeface="Microsoft YaHei"/>
+              </a:rPr>
+              <a:t>观察</a:t>
+            </a:r>
+          </a:p>
+        </p:txBody>
+      </p:sp>
+      <p:sp>
+        <p:nvSpPr>
+          <p:cNvPr id="42" name="TextBox 41"/>
+          <p:cNvSpPr txBox="1"/>
+          <p:nvPr/>
+        </p:nvSpPr>
+        <p:spPr>
+          <a:xfrm>
+            <a:off x="3566160" y="3657600"/>
+            <a:ext cx="566928" cy="182880"/>
+          </a:xfrm>
+          <a:prstGeom prst="rect">
+            <a:avLst/>
+          </a:prstGeom>
+          <a:noFill/>
+        </p:spPr>
+        <p:txBody>
+          <a:bodyPr wrap="square" anchor="ctr" lIns="0" tIns="0" rIns="0" bIns="0">
+            <a:noAutofit/>
+          </a:bodyPr>
+          <a:lstStyle/>
+          <a:p>
+            <a:pPr algn="ctr" latinLnBrk="0">
+              <a:lnSpc>
+                <a:spcPct val="100000"/>
+              </a:lnSpc>
+              <a:spcBef>
+                <a:spcPts val="0"/>
+              </a:spcBef>
+              <a:spcAft>
+                <a:spcPts val="0"/>
+              </a:spcAft>
+            </a:pPr>
+            <a:r>
+              <a:rPr sz="800" b="1">
+                <a:solidFill>
+                  <a:srgbClr val="40708B"/>
+                </a:solidFill>
+                <a:latin typeface="Microsoft YaHei"/>
+                <a:ea typeface="Microsoft YaHei"/>
+                <a:cs typeface="Microsoft YaHei"/>
+              </a:rPr>
+              <a:t>观察</a:t>
+            </a:r>
+          </a:p>
+        </p:txBody>
+      </p:sp>
+      <p:sp>
+        <p:nvSpPr>
+          <p:cNvPr id="43" name="Freeform 42"/>
+          <p:cNvSpPr/>
+          <p:nvPr/>
+        </p:nvSpPr>
+        <p:spPr>
+          <a:xfrm>
+            <a:off x="7168896" y="2157984"/>
+            <a:ext cx="457200" cy="2788920"/>
+          </a:xfrm>
+          <a:custGeom>
+            <a:avLst/>
+            <a:gdLst/>
+            <a:ahLst/>
+            <a:cxnLst/>
+            <a:rect l="l" t="t" r="r" b="b"/>
+            <a:pathLst>
+              <a:path w="457200" h="2788920">
+                <a:moveTo>
+                  <a:pt x="0" y="2788920"/>
+                </a:moveTo>
+                <a:lnTo>
+                  <a:pt x="457200" y="2788920"/>
+                </a:lnTo>
+                <a:lnTo>
+                  <a:pt x="457200" y="0"/>
+                </a:lnTo>
+              </a:path>
+            </a:pathLst>
+          </a:custGeom>
+          <a:noFill/>
+          <a:ln w="19050">
+            <a:solidFill>
+              <a:srgbClr val="D2690C"/>
+            </a:solidFill>
+          </a:ln>
+        </p:spPr>
+        <p:txBody>
+          <a:bodyPr rtlCol="0" anchor="ctr"/>
+          <a:lstStyle/>
+          <a:p>
+            <a:pPr algn="ctr"/>
+          </a:p>
+        </p:txBody>
+      </p:sp>
+      <p:cxnSp>
+        <p:nvCxnSpPr>
+          <p:cNvPr id="44" name="Connector 43"/>
+          <p:cNvCxnSpPr/>
+          <p:nvPr/>
+        </p:nvCxnSpPr>
+        <p:spPr>
+          <a:xfrm>
+            <a:off x="7626096" y="2157984"/>
+            <a:ext cx="310896" cy="0"/>
+          </a:xfrm>
+          <a:prstGeom prst="line">
+            <a:avLst/>
+          </a:prstGeom>
+          <a:ln w="19050">
+            <a:solidFill>
+              <a:srgbClr val="D2690C"/>
+            </a:solidFill>
+            <a:tailEnd type="triangle" w="med" len="med"/>
+          </a:ln>
+        </p:spPr>
+      </p:cxnSp>
+      <p:sp>
+        <p:nvSpPr>
+          <p:cNvPr id="45" name="TextBox 44"/>
+          <p:cNvSpPr txBox="1"/>
+          <p:nvPr/>
+        </p:nvSpPr>
+        <p:spPr>
+          <a:xfrm>
+            <a:off x="7644383" y="1956815"/>
+            <a:ext cx="292608" cy="182880"/>
+          </a:xfrm>
+          <a:prstGeom prst="rect">
+            <a:avLst/>
+          </a:prstGeom>
+          <a:noFill/>
+        </p:spPr>
+        <p:txBody>
+          <a:bodyPr wrap="square" anchor="ctr" lIns="0" tIns="0" rIns="0" bIns="0">
+            <a:noAutofit/>
+          </a:bodyPr>
+          <a:lstStyle/>
+          <a:p>
+            <a:pPr algn="ctr" latinLnBrk="0">
+              <a:lnSpc>
+                <a:spcPct val="100000"/>
+              </a:lnSpc>
+              <a:spcBef>
+                <a:spcPts val="0"/>
+              </a:spcBef>
+              <a:spcAft>
+                <a:spcPts val="0"/>
+              </a:spcAft>
+            </a:pPr>
+            <a:r>
+              <a:rPr sz="800" b="1">
+                <a:solidFill>
+                  <a:srgbClr val="C2570A"/>
+                </a:solidFill>
+                <a:latin typeface="Microsoft YaHei"/>
+                <a:ea typeface="Microsoft YaHei"/>
+                <a:cs typeface="Microsoft YaHei"/>
+              </a:rPr>
+              <a:t>调用</a:t>
+            </a:r>
+          </a:p>
+        </p:txBody>
+      </p:sp>
+      <p:cxnSp>
+        <p:nvCxnSpPr>
+          <p:cNvPr id="46" name="Connector 45"/>
+          <p:cNvCxnSpPr/>
+          <p:nvPr/>
+        </p:nvCxnSpPr>
+        <p:spPr>
+          <a:xfrm>
+            <a:off x="7626096" y="3840480"/>
+            <a:ext cx="310896" cy="0"/>
+          </a:xfrm>
+          <a:prstGeom prst="line">
+            <a:avLst/>
+          </a:prstGeom>
+          <a:ln w="19050">
+            <a:solidFill>
+              <a:srgbClr val="D2690C"/>
+            </a:solidFill>
+            <a:tailEnd type="triangle" w="med" len="med"/>
+          </a:ln>
+        </p:spPr>
+      </p:cxnSp>
+      <p:sp>
+        <p:nvSpPr>
+          <p:cNvPr id="47" name="TextBox 46"/>
+          <p:cNvSpPr txBox="1"/>
+          <p:nvPr/>
+        </p:nvSpPr>
+        <p:spPr>
+          <a:xfrm>
+            <a:off x="7644383" y="3639312"/>
+            <a:ext cx="292608" cy="182880"/>
+          </a:xfrm>
+          <a:prstGeom prst="rect">
+            <a:avLst/>
+          </a:prstGeom>
+          <a:noFill/>
+        </p:spPr>
+        <p:txBody>
+          <a:bodyPr wrap="square" anchor="ctr" lIns="0" tIns="0" rIns="0" bIns="0">
+            <a:noAutofit/>
+          </a:bodyPr>
+          <a:lstStyle/>
+          <a:p>
+            <a:pPr algn="ctr" latinLnBrk="0">
+              <a:lnSpc>
+                <a:spcPct val="100000"/>
+              </a:lnSpc>
+              <a:spcBef>
+                <a:spcPts val="0"/>
+              </a:spcBef>
+              <a:spcAft>
+                <a:spcPts val="0"/>
+              </a:spcAft>
+            </a:pPr>
+            <a:r>
+              <a:rPr sz="800" b="1">
+                <a:solidFill>
+                  <a:srgbClr val="C2570A"/>
+                </a:solidFill>
+                <a:latin typeface="Microsoft YaHei"/>
+                <a:ea typeface="Microsoft YaHei"/>
+                <a:cs typeface="Microsoft YaHei"/>
+              </a:rPr>
+              <a:t>触发</a:t>
+            </a:r>
+          </a:p>
+        </p:txBody>
+      </p:sp>
+      <p:cxnSp>
+        <p:nvCxnSpPr>
+          <p:cNvPr id="48" name="Connector 47"/>
+          <p:cNvCxnSpPr/>
+          <p:nvPr/>
+        </p:nvCxnSpPr>
+        <p:spPr>
+          <a:xfrm flipH="1">
+            <a:off x="3566160" y="4946904"/>
+            <a:ext cx="566928" cy="0"/>
           </a:xfrm>
           <a:prstGeom prst="line">
             <a:avLst/>
@@ -10687,88 +11620,114 @@
       </p:cxnSp>
       <p:sp>
         <p:nvSpPr>
-          <p:cNvPr id="38" name="Rounded Rectangle 37"/>
+          <p:cNvPr id="49" name="TextBox 48"/>
+          <p:cNvSpPr txBox="1"/>
+          <p:nvPr/>
+        </p:nvSpPr>
+        <p:spPr>
+          <a:xfrm>
+            <a:off x="3566160" y="4700016"/>
+            <a:ext cx="566928" cy="182880"/>
+          </a:xfrm>
+          <a:prstGeom prst="rect">
+            <a:avLst/>
+          </a:prstGeom>
+          <a:noFill/>
+        </p:spPr>
+        <p:txBody>
+          <a:bodyPr wrap="square" anchor="ctr" lIns="0" tIns="0" rIns="0" bIns="0">
+            <a:noAutofit/>
+          </a:bodyPr>
+          <a:lstStyle/>
+          <a:p>
+            <a:pPr algn="ctr" latinLnBrk="0">
+              <a:lnSpc>
+                <a:spcPct val="100000"/>
+              </a:lnSpc>
+              <a:spcBef>
+                <a:spcPts val="0"/>
+              </a:spcBef>
+              <a:spcAft>
+                <a:spcPts val="0"/>
+              </a:spcAft>
+            </a:pPr>
+            <a:r>
+              <a:rPr sz="800" b="1">
+                <a:solidFill>
+                  <a:srgbClr val="0F62CE"/>
+                </a:solidFill>
+                <a:latin typeface="Microsoft YaHei"/>
+                <a:ea typeface="Microsoft YaHei"/>
+                <a:cs typeface="Microsoft YaHei"/>
+              </a:rPr>
+              <a:t>发布</a:t>
+            </a:r>
+          </a:p>
+        </p:txBody>
+      </p:sp>
+      <p:sp>
+        <p:nvSpPr>
+          <p:cNvPr id="50" name="Freeform 49"/>
           <p:cNvSpPr/>
           <p:nvPr/>
         </p:nvSpPr>
         <p:spPr>
           <a:xfrm>
-            <a:off x="6053328" y="3986784"/>
-            <a:ext cx="1737360" cy="566928"/>
-          </a:xfrm>
-          <a:prstGeom prst="roundRect">
-            <a:avLst>
-              <a:gd name="adj" fmla="val 18000"/>
-            </a:avLst>
-          </a:prstGeom>
-          <a:solidFill>
-            <a:srgbClr val="E6F0FC"/>
-          </a:solidFill>
-          <a:ln w="9525">
+            <a:off x="786384" y="4700016"/>
+            <a:ext cx="9021927" cy="914400"/>
+          </a:xfrm>
+          <a:custGeom>
+            <a:avLst/>
+            <a:gdLst/>
+            <a:ahLst/>
+            <a:cxnLst/>
+            <a:rect l="l" t="t" r="r" b="b"/>
+            <a:pathLst>
+              <a:path w="9021927" h="914400">
+                <a:moveTo>
+                  <a:pt x="9021927" y="0"/>
+                </a:moveTo>
+                <a:lnTo>
+                  <a:pt x="9021927" y="914400"/>
+                </a:lnTo>
+                <a:lnTo>
+                  <a:pt x="0" y="914400"/>
+                </a:lnTo>
+              </a:path>
+            </a:pathLst>
+          </a:custGeom>
+          <a:noFill/>
+          <a:ln w="15875">
             <a:solidFill>
-              <a:srgbClr val="0F62CE"/>
+              <a:srgbClr val="40708B"/>
             </a:solidFill>
           </a:ln>
         </p:spPr>
         <p:txBody>
-          <a:bodyPr rtlCol="0" anchor="ctr" wrap="square" tIns="36576" bIns="36576">
-            <a:noAutofit/>
-          </a:bodyPr>
-          <a:lstStyle/>
-          <a:p>
-            <a:pPr algn="ctr" latinLnBrk="0">
-              <a:lnSpc>
-                <a:spcPct val="100000"/>
-              </a:lnSpc>
-              <a:spcBef>
-                <a:spcPts val="0"/>
-              </a:spcBef>
-              <a:spcAft>
-                <a:spcPts val="0"/>
-              </a:spcAft>
-            </a:pPr>
-            <a:r>
-              <a:rPr sz="1100" b="1">
-                <a:solidFill>
-                  <a:srgbClr val="0A2B45"/>
-                </a:solidFill>
-                <a:latin typeface="Microsoft YaHei"/>
-                <a:ea typeface="Microsoft YaHei"/>
-                <a:cs typeface="Microsoft YaHei"/>
-              </a:rPr>
-              <a:t>行动</a:t>
-            </a:r>
-            <a:r>
-              <a:rPr sz="900" b="1">
-                <a:solidFill>
-                  <a:srgbClr val="0F62CE"/>
-                </a:solidFill>
-                <a:latin typeface="Consolas"/>
-                <a:ea typeface="Microsoft YaHei"/>
-                <a:cs typeface="Microsoft YaHei"/>
-              </a:rPr>
-              <a:t>　Action</a:t>
-            </a:r>
+          <a:bodyPr rtlCol="0" anchor="ctr"/>
+          <a:lstStyle/>
+          <a:p>
+            <a:pPr algn="ctr"/>
           </a:p>
         </p:txBody>
       </p:sp>
       <p:cxnSp>
         <p:nvCxnSpPr>
-          <p:cNvPr id="39" name="Connector 38"/>
+          <p:cNvPr id="51" name="Connector 50"/>
           <p:cNvCxnSpPr/>
           <p:nvPr/>
         </p:nvCxnSpPr>
         <p:spPr>
-          <a:xfrm>
-            <a:off x="6922008" y="3794760"/>
-            <a:ext cx="0" cy="182880"/>
+          <a:xfrm flipV="1">
+            <a:off x="786384" y="4443984"/>
+            <a:ext cx="0" cy="1170432"/>
           </a:xfrm>
           <a:prstGeom prst="line">
             <a:avLst/>
           </a:prstGeom>
-          <a:ln w="19050">
+          <a:ln w="15875">
             <a:solidFill>
-              <a:srgbClr val="0F62CE"/>
+              <a:srgbClr val="40708B"/>
             </a:solidFill>
             <a:tailEnd type="triangle" w="med" len="med"/>
           </a:ln>
@@ -10776,261 +11735,90 @@
       </p:cxnSp>
       <p:sp>
         <p:nvSpPr>
-          <p:cNvPr id="40" name="Rounded Rectangle 39"/>
+          <p:cNvPr id="52" name="TextBox 51"/>
+          <p:cNvSpPr txBox="1"/>
+          <p:nvPr/>
+        </p:nvSpPr>
+        <p:spPr>
+          <a:xfrm>
+            <a:off x="4206240" y="5394959"/>
+            <a:ext cx="3108960" cy="182880"/>
+          </a:xfrm>
+          <a:prstGeom prst="rect">
+            <a:avLst/>
+          </a:prstGeom>
+          <a:noFill/>
+        </p:spPr>
+        <p:txBody>
+          <a:bodyPr wrap="square" anchor="ctr" lIns="0" tIns="0" rIns="0" bIns="0">
+            <a:noAutofit/>
+          </a:bodyPr>
+          <a:lstStyle/>
+          <a:p>
+            <a:pPr algn="ctr" latinLnBrk="0">
+              <a:lnSpc>
+                <a:spcPct val="100000"/>
+              </a:lnSpc>
+              <a:spcBef>
+                <a:spcPts val="0"/>
+              </a:spcBef>
+              <a:spcAft>
+                <a:spcPts val="0"/>
+              </a:spcAft>
+            </a:pPr>
+            <a:r>
+              <a:rPr sz="800" b="0">
+                <a:solidFill>
+                  <a:srgbClr val="40708B"/>
+                </a:solidFill>
+                <a:latin typeface="Microsoft YaHei"/>
+                <a:ea typeface="Microsoft YaHei"/>
+                <a:cs typeface="Microsoft YaHei"/>
+              </a:rPr>
+              <a:t>回写：编译报错 · 精度偏差 · 瓶颈证据</a:t>
+            </a:r>
+          </a:p>
+        </p:txBody>
+      </p:sp>
+      <p:sp>
+        <p:nvSpPr>
+          <p:cNvPr id="53" name="Rectangle 52"/>
           <p:cNvSpPr/>
           <p:nvPr/>
         </p:nvSpPr>
         <p:spPr>
           <a:xfrm>
-            <a:off x="9144000" y="2450592"/>
-            <a:ext cx="2499055" cy="512064"/>
-          </a:xfrm>
-          <a:prstGeom prst="roundRect">
-            <a:avLst>
-              <a:gd name="adj" fmla="val 30000"/>
-            </a:avLst>
+            <a:off x="548640" y="5907024"/>
+            <a:ext cx="11094415" cy="530352"/>
+          </a:xfrm>
+          <a:prstGeom prst="rect">
+            <a:avLst/>
           </a:prstGeom>
           <a:solidFill>
-            <a:srgbClr val="FFFFFF"/>
+            <a:srgbClr val="C9E1FC"/>
           </a:solidFill>
-          <a:ln w="9525">
-            <a:solidFill>
-              <a:srgbClr val="7FA4BA"/>
-            </a:solidFill>
-            <a:prstDash val="dash"/>
+          <a:ln>
+            <a:noFill/>
           </a:ln>
         </p:spPr>
         <p:txBody>
-          <a:bodyPr rtlCol="0" anchor="ctr" wrap="square" tIns="36576" bIns="36576">
-            <a:noAutofit/>
-          </a:bodyPr>
-          <a:lstStyle/>
-          <a:p>
-            <a:pPr algn="ctr" latinLnBrk="0">
-              <a:lnSpc>
-                <a:spcPct val="100000"/>
-              </a:lnSpc>
-              <a:spcBef>
-                <a:spcPts val="0"/>
-              </a:spcBef>
-              <a:spcAft>
-                <a:spcPts val="0"/>
-              </a:spcAft>
-            </a:pPr>
-            <a:r>
-              <a:rPr sz="1050" b="1">
-                <a:solidFill>
-                  <a:srgbClr val="123C5B"/>
-                </a:solidFill>
-                <a:latin typeface="Microsoft YaHei"/>
-                <a:ea typeface="Microsoft YaHei"/>
-                <a:cs typeface="Microsoft YaHei"/>
-              </a:rPr>
-              <a:t>人 · 按需介入</a:t>
-            </a:r>
-          </a:p>
-        </p:txBody>
-      </p:sp>
-      <p:sp>
-        <p:nvSpPr>
-          <p:cNvPr id="41" name="Rounded Rectangle 40"/>
+          <a:bodyPr rtlCol="0" anchor="ctr"/>
+          <a:lstStyle/>
+          <a:p>
+            <a:pPr algn="ctr"/>
+          </a:p>
+        </p:txBody>
+      </p:sp>
+      <p:sp>
+        <p:nvSpPr>
+          <p:cNvPr id="54" name="Rectangle 53"/>
           <p:cNvSpPr/>
           <p:nvPr/>
         </p:nvSpPr>
         <p:spPr>
           <a:xfrm>
-            <a:off x="9144000" y="3163824"/>
-            <a:ext cx="2499055" cy="640080"/>
-          </a:xfrm>
-          <a:prstGeom prst="roundRect">
-            <a:avLst>
-              <a:gd name="adj" fmla="val 30000"/>
-            </a:avLst>
-          </a:prstGeom>
-          <a:solidFill>
-            <a:srgbClr val="FBE6D4"/>
-          </a:solidFill>
-          <a:ln w="9525">
-            <a:solidFill>
-              <a:srgbClr val="D2690C"/>
-            </a:solidFill>
-          </a:ln>
-        </p:spPr>
-        <p:txBody>
-          <a:bodyPr rtlCol="0" anchor="ctr" wrap="square" tIns="36576" bIns="36576">
-            <a:noAutofit/>
-          </a:bodyPr>
-          <a:lstStyle/>
-          <a:p>
-            <a:pPr algn="ctr" latinLnBrk="0">
-              <a:lnSpc>
-                <a:spcPct val="100000"/>
-              </a:lnSpc>
-              <a:spcBef>
-                <a:spcPts val="0"/>
-              </a:spcBef>
-              <a:spcAft>
-                <a:spcPts val="100"/>
-              </a:spcAft>
-            </a:pPr>
-            <a:r>
-              <a:rPr sz="1200" b="1">
-                <a:solidFill>
-                  <a:srgbClr val="0A2B45"/>
-                </a:solidFill>
-                <a:latin typeface="Microsoft YaHei"/>
-                <a:ea typeface="Microsoft YaHei"/>
-                <a:cs typeface="Microsoft YaHei"/>
-              </a:rPr>
-              <a:t>大模型</a:t>
-            </a:r>
-          </a:p>
-          <a:p>
-            <a:pPr algn="ctr" latinLnBrk="0">
-              <a:lnSpc>
-                <a:spcPct val="100000"/>
-              </a:lnSpc>
-              <a:spcBef>
-                <a:spcPts val="0"/>
-              </a:spcBef>
-              <a:spcAft>
-                <a:spcPts val="0"/>
-              </a:spcAft>
-            </a:pPr>
-            <a:r>
-              <a:rPr sz="850" b="1">
-                <a:solidFill>
-                  <a:srgbClr val="C2570A"/>
-                </a:solidFill>
-                <a:latin typeface="Microsoft YaHei"/>
-                <a:ea typeface="Microsoft YaHei"/>
-                <a:cs typeface="Microsoft YaHei"/>
-              </a:rPr>
-              <a:t>全流程唯一</a:t>
-            </a:r>
-          </a:p>
-        </p:txBody>
-      </p:sp>
-      <p:sp>
-        <p:nvSpPr>
-          <p:cNvPr id="42" name="Rectangle 41"/>
-          <p:cNvSpPr/>
-          <p:nvPr/>
-        </p:nvSpPr>
-        <p:spPr>
-          <a:xfrm>
-            <a:off x="9144000" y="3931920"/>
-            <a:ext cx="2499055" cy="713232"/>
-          </a:xfrm>
-          <a:prstGeom prst="rect">
-            <a:avLst/>
-          </a:prstGeom>
-          <a:solidFill>
-            <a:srgbClr val="FFFFFF"/>
-          </a:solidFill>
-          <a:ln w="9525">
-            <a:solidFill>
-              <a:srgbClr val="40708B"/>
-            </a:solidFill>
-            <a:prstDash val="dash"/>
-          </a:ln>
-        </p:spPr>
-        <p:txBody>
-          <a:bodyPr rtlCol="0" anchor="ctr" wrap="square" tIns="36576" bIns="36576">
-            <a:noAutofit/>
-          </a:bodyPr>
-          <a:lstStyle/>
-          <a:p>
-            <a:pPr algn="ctr" latinLnBrk="0">
-              <a:lnSpc>
-                <a:spcPct val="100000"/>
-              </a:lnSpc>
-              <a:spcBef>
-                <a:spcPts val="0"/>
-              </a:spcBef>
-              <a:spcAft>
-                <a:spcPts val="200"/>
-              </a:spcAft>
-            </a:pPr>
-            <a:r>
-              <a:rPr sz="1100" b="1">
-                <a:solidFill>
-                  <a:srgbClr val="0A2B45"/>
-                </a:solidFill>
-                <a:latin typeface="Microsoft YaHei"/>
-                <a:ea typeface="Microsoft YaHei"/>
-                <a:cs typeface="Microsoft YaHei"/>
-              </a:rPr>
-              <a:t>工具</a:t>
-            </a:r>
-          </a:p>
-          <a:p>
-            <a:pPr algn="ctr" latinLnBrk="0">
-              <a:lnSpc>
-                <a:spcPct val="100000"/>
-              </a:lnSpc>
-              <a:spcBef>
-                <a:spcPts val="0"/>
-              </a:spcBef>
-              <a:spcAft>
-                <a:spcPts val="0"/>
-              </a:spcAft>
-            </a:pPr>
-            <a:r>
-              <a:rPr sz="850" b="0">
-                <a:solidFill>
-                  <a:srgbClr val="1B4D69"/>
-                </a:solidFill>
-                <a:latin typeface="Microsoft YaHei"/>
-                <a:ea typeface="Microsoft YaHei"/>
-                <a:cs typeface="Microsoft YaHei"/>
-              </a:rPr>
-              <a:t>编译 · 运行 · 采集 · 比对 · 仿真</a:t>
-            </a:r>
-          </a:p>
-        </p:txBody>
-      </p:sp>
-      <p:sp>
-        <p:nvSpPr>
-          <p:cNvPr id="43" name="Rectangle 42"/>
-          <p:cNvSpPr/>
-          <p:nvPr/>
-        </p:nvSpPr>
-        <p:spPr>
-          <a:xfrm>
-            <a:off x="5321808" y="5230368"/>
-            <a:ext cx="6321247" cy="566928"/>
-          </a:xfrm>
-          <a:prstGeom prst="rect">
-            <a:avLst/>
-          </a:prstGeom>
-          <a:solidFill>
-            <a:srgbClr val="FFFFFF"/>
-          </a:solidFill>
-          <a:ln w="19050">
-            <a:solidFill>
-              <a:srgbClr val="0F62CE"/>
-            </a:solidFill>
-          </a:ln>
-        </p:spPr>
-        <p:txBody>
-          <a:bodyPr rtlCol="0" anchor="ctr"/>
-          <a:lstStyle/>
-          <a:p>
-            <a:pPr algn="ctr"/>
-          </a:p>
-        </p:txBody>
-      </p:sp>
-      <p:sp>
-        <p:nvSpPr>
-          <p:cNvPr id="44" name="Rectangle 43"/>
-          <p:cNvSpPr/>
-          <p:nvPr/>
-        </p:nvSpPr>
-        <p:spPr>
-          <a:xfrm>
-            <a:off x="5321808" y="5230368"/>
-            <a:ext cx="73152" cy="566928"/>
+            <a:off x="548640" y="5907024"/>
+            <a:ext cx="73152" cy="530352"/>
           </a:xfrm>
           <a:prstGeom prst="rect">
             <a:avLst/>
@@ -11052,14 +11840,14 @@
       </p:sp>
       <p:sp>
         <p:nvSpPr>
-          <p:cNvPr id="45" name="TextBox 44"/>
-          <p:cNvSpPr txBox="1"/>
-          <p:nvPr/>
-        </p:nvSpPr>
-        <p:spPr>
-          <a:xfrm>
-            <a:off x="5596128" y="5230368"/>
-            <a:ext cx="5864047" cy="566928"/>
+          <p:cNvPr id="55" name="TextBox 54"/>
+          <p:cNvSpPr txBox="1"/>
+          <p:nvPr/>
+        </p:nvSpPr>
+        <p:spPr>
+          <a:xfrm>
+            <a:off x="877824" y="5907024"/>
+            <a:ext cx="10436047" cy="530352"/>
           </a:xfrm>
           <a:prstGeom prst="rect">
             <a:avLst/>
@@ -11084,7 +11872,7 @@
               </a:spcAft>
             </a:pPr>
             <a:r>
-              <a:rPr sz="1250" b="1">
+              <a:rPr sz="1200" b="1">
                 <a:solidFill>
                   <a:srgbClr val="0F62CE"/>
                 </a:solidFill>
@@ -11092,12 +11880,12 @@
                 <a:ea typeface="Microsoft YaHei"/>
                 <a:cs typeface="Microsoft YaHei"/>
               </a:rPr>
-              <a:t>判决侧</a:t>
-            </a:r>
-            <a:r>
-              <a:rPr sz="1050" b="0">
-                <a:solidFill>
-                  <a:srgbClr val="AFCEE1"/>
+              <a:t>核心设计</a:t>
+            </a:r>
+            <a:r>
+              <a:rPr sz="1200" b="0">
+                <a:solidFill>
+                  <a:srgbClr val="7FA4BA"/>
                 </a:solidFill>
                 <a:latin typeface="Microsoft YaHei"/>
                 <a:ea typeface="Microsoft YaHei"/>
@@ -11106,7 +11894,7 @@
               <a:t>　｜　</a:t>
             </a:r>
             <a:r>
-              <a:rPr sz="1050" b="1">
+              <a:rPr sz="1300" b="1">
                 <a:solidFill>
                   <a:srgbClr val="0A2B45"/>
                 </a:solidFill>
@@ -11114,528 +11902,14 @@
                 <a:ea typeface="Microsoft YaHei"/>
                 <a:cs typeface="Microsoft YaHei"/>
               </a:rPr>
-              <a:t>规则驱动 · 无模型</a:t>
-            </a:r>
-            <a:r>
-              <a:rPr sz="1050" b="0">
-                <a:solidFill>
-                  <a:srgbClr val="AFCEE1"/>
-                </a:solidFill>
-                <a:latin typeface="Microsoft YaHei"/>
-                <a:ea typeface="Microsoft YaHei"/>
-                <a:cs typeface="Microsoft YaHei"/>
-              </a:rPr>
-              <a:t>　｜　</a:t>
-            </a:r>
-            <a:r>
-              <a:rPr sz="950" b="0">
-                <a:solidFill>
-                  <a:srgbClr val="40708B"/>
-                </a:solidFill>
-                <a:latin typeface="Microsoft YaHei"/>
-                <a:ea typeface="Microsoft YaHei"/>
-                <a:cs typeface="Microsoft YaHei"/>
-              </a:rPr>
-              <a:t>模型层＝控制器 · 算子层＝Harness</a:t>
-            </a:r>
-          </a:p>
-        </p:txBody>
-      </p:sp>
-      <p:cxnSp>
-        <p:nvCxnSpPr>
-          <p:cNvPr id="46" name="Connector 45"/>
-          <p:cNvCxnSpPr/>
-          <p:nvPr/>
-        </p:nvCxnSpPr>
-        <p:spPr>
-          <a:xfrm>
-            <a:off x="4425696" y="2093976"/>
-            <a:ext cx="1591056" cy="640080"/>
-          </a:xfrm>
-          <a:prstGeom prst="line">
-            <a:avLst/>
-          </a:prstGeom>
-          <a:ln w="15875">
-            <a:solidFill>
-              <a:srgbClr val="40708B"/>
-            </a:solidFill>
-            <a:tailEnd type="triangle" w="med" len="med"/>
-          </a:ln>
-        </p:spPr>
-      </p:cxnSp>
-      <p:cxnSp>
-        <p:nvCxnSpPr>
-          <p:cNvPr id="47" name="Connector 46"/>
-          <p:cNvCxnSpPr/>
-          <p:nvPr/>
-        </p:nvCxnSpPr>
-        <p:spPr>
-          <a:xfrm flipV="1">
-            <a:off x="4425696" y="2734056"/>
-            <a:ext cx="1591056" cy="128016"/>
-          </a:xfrm>
-          <a:prstGeom prst="line">
-            <a:avLst/>
-          </a:prstGeom>
-          <a:ln w="15875">
-            <a:solidFill>
-              <a:srgbClr val="40708B"/>
-            </a:solidFill>
-            <a:tailEnd type="triangle" w="med" len="med"/>
-          </a:ln>
-        </p:spPr>
-      </p:cxnSp>
-      <p:cxnSp>
-        <p:nvCxnSpPr>
-          <p:cNvPr id="48" name="Connector 47"/>
-          <p:cNvCxnSpPr/>
-          <p:nvPr/>
-        </p:nvCxnSpPr>
-        <p:spPr>
-          <a:xfrm flipV="1">
-            <a:off x="4425696" y="2734056"/>
-            <a:ext cx="1591056" cy="1664208"/>
-          </a:xfrm>
-          <a:prstGeom prst="line">
-            <a:avLst/>
-          </a:prstGeom>
-          <a:ln w="15875">
-            <a:solidFill>
-              <a:srgbClr val="40708B"/>
-            </a:solidFill>
-            <a:tailEnd type="triangle" w="med" len="med"/>
-          </a:ln>
-        </p:spPr>
-      </p:cxnSp>
-      <p:sp>
-        <p:nvSpPr>
-          <p:cNvPr id="49" name="TextBox 48"/>
-          <p:cNvSpPr txBox="1"/>
-          <p:nvPr/>
-        </p:nvSpPr>
-        <p:spPr>
-          <a:xfrm>
-            <a:off x="4553712" y="2139696"/>
-            <a:ext cx="731520" cy="182880"/>
-          </a:xfrm>
-          <a:prstGeom prst="rect">
-            <a:avLst/>
-          </a:prstGeom>
-          <a:noFill/>
-        </p:spPr>
-        <p:txBody>
-          <a:bodyPr wrap="square" anchor="ctr" lIns="0" tIns="0" rIns="0" bIns="0">
-            <a:noAutofit/>
-          </a:bodyPr>
-          <a:lstStyle/>
-          <a:p>
-            <a:pPr algn="ctr" latinLnBrk="0">
-              <a:lnSpc>
-                <a:spcPct val="100000"/>
-              </a:lnSpc>
-              <a:spcBef>
-                <a:spcPts val="0"/>
-              </a:spcBef>
-              <a:spcAft>
-                <a:spcPts val="0"/>
-              </a:spcAft>
-            </a:pPr>
-            <a:r>
-              <a:rPr sz="850" b="1">
-                <a:solidFill>
-                  <a:srgbClr val="40708B"/>
-                </a:solidFill>
-                <a:latin typeface="Microsoft YaHei"/>
-                <a:ea typeface="Microsoft YaHei"/>
-                <a:cs typeface="Microsoft YaHei"/>
-              </a:rPr>
-              <a:t>订阅</a:t>
-            </a:r>
-          </a:p>
-        </p:txBody>
-      </p:sp>
-      <p:cxnSp>
-        <p:nvCxnSpPr>
-          <p:cNvPr id="50" name="Connector 49"/>
-          <p:cNvCxnSpPr/>
-          <p:nvPr/>
-        </p:nvCxnSpPr>
-        <p:spPr>
-          <a:xfrm flipH="1">
-            <a:off x="7827263" y="2706624"/>
-            <a:ext cx="1280161" cy="667512"/>
-          </a:xfrm>
-          <a:prstGeom prst="line">
-            <a:avLst/>
-          </a:prstGeom>
-          <a:ln w="15875">
-            <a:solidFill>
-              <a:srgbClr val="40708B"/>
-            </a:solidFill>
-            <a:tailEnd type="triangle" w="med" len="med"/>
-          </a:ln>
-        </p:spPr>
-      </p:cxnSp>
-      <p:cxnSp>
-        <p:nvCxnSpPr>
-          <p:cNvPr id="51" name="Connector 50"/>
-          <p:cNvCxnSpPr/>
-          <p:nvPr/>
-        </p:nvCxnSpPr>
-        <p:spPr>
-          <a:xfrm flipH="1">
-            <a:off x="7827263" y="3483864"/>
-            <a:ext cx="1280161" cy="109728"/>
-          </a:xfrm>
-          <a:prstGeom prst="line">
-            <a:avLst/>
-          </a:prstGeom>
-          <a:ln w="19050">
-            <a:solidFill>
-              <a:srgbClr val="D2690C"/>
-            </a:solidFill>
-            <a:tailEnd type="triangle" w="med" len="med"/>
-          </a:ln>
-        </p:spPr>
-      </p:cxnSp>
-      <p:cxnSp>
-        <p:nvCxnSpPr>
-          <p:cNvPr id="52" name="Connector 51"/>
-          <p:cNvCxnSpPr/>
-          <p:nvPr/>
-        </p:nvCxnSpPr>
-        <p:spPr>
-          <a:xfrm>
-            <a:off x="7827263" y="4270248"/>
-            <a:ext cx="1280161" cy="0"/>
-          </a:xfrm>
-          <a:prstGeom prst="line">
-            <a:avLst/>
-          </a:prstGeom>
-          <a:ln w="15875">
-            <a:solidFill>
-              <a:srgbClr val="40708B"/>
-            </a:solidFill>
-            <a:prstDash val="dash"/>
-            <a:tailEnd type="triangle" w="med" len="med"/>
-          </a:ln>
-        </p:spPr>
-      </p:cxnSp>
-      <p:sp>
-        <p:nvSpPr>
-          <p:cNvPr id="53" name="TextBox 52"/>
-          <p:cNvSpPr txBox="1"/>
-          <p:nvPr/>
-        </p:nvSpPr>
-        <p:spPr>
-          <a:xfrm>
-            <a:off x="8229600" y="4032504"/>
-            <a:ext cx="822960" cy="182880"/>
-          </a:xfrm>
-          <a:prstGeom prst="rect">
-            <a:avLst/>
-          </a:prstGeom>
-          <a:noFill/>
-        </p:spPr>
-        <p:txBody>
-          <a:bodyPr wrap="square" anchor="ctr" lIns="0" tIns="0" rIns="0" bIns="0">
-            <a:noAutofit/>
-          </a:bodyPr>
-          <a:lstStyle/>
-          <a:p>
-            <a:pPr algn="ctr" latinLnBrk="0">
-              <a:lnSpc>
-                <a:spcPct val="100000"/>
-              </a:lnSpc>
-              <a:spcBef>
-                <a:spcPts val="0"/>
-              </a:spcBef>
-              <a:spcAft>
-                <a:spcPts val="0"/>
-              </a:spcAft>
-            </a:pPr>
-            <a:r>
-              <a:rPr sz="850" b="1">
-                <a:solidFill>
-                  <a:srgbClr val="40708B"/>
-                </a:solidFill>
-                <a:latin typeface="Microsoft YaHei"/>
-                <a:ea typeface="Microsoft YaHei"/>
-                <a:cs typeface="Microsoft YaHei"/>
-              </a:rPr>
-              <a:t>调用</a:t>
-            </a:r>
-          </a:p>
-        </p:txBody>
-      </p:sp>
-      <p:cxnSp>
-        <p:nvCxnSpPr>
-          <p:cNvPr id="54" name="Connector 53"/>
-          <p:cNvCxnSpPr/>
-          <p:nvPr/>
-        </p:nvCxnSpPr>
-        <p:spPr>
-          <a:xfrm>
-            <a:off x="6922008" y="4562856"/>
-            <a:ext cx="0" cy="658368"/>
-          </a:xfrm>
-          <a:prstGeom prst="line">
-            <a:avLst/>
-          </a:prstGeom>
-          <a:ln w="19050">
-            <a:solidFill>
-              <a:srgbClr val="D2690C"/>
-            </a:solidFill>
-            <a:tailEnd type="triangle" w="med" len="med"/>
-          </a:ln>
-        </p:spPr>
-      </p:cxnSp>
-      <p:sp>
-        <p:nvSpPr>
-          <p:cNvPr id="55" name="TextBox 54"/>
-          <p:cNvSpPr txBox="1"/>
-          <p:nvPr/>
-        </p:nvSpPr>
-        <p:spPr>
-          <a:xfrm>
-            <a:off x="7031736" y="4992624"/>
-            <a:ext cx="1097280" cy="201168"/>
-          </a:xfrm>
-          <a:prstGeom prst="rect">
-            <a:avLst/>
-          </a:prstGeom>
-          <a:noFill/>
-        </p:spPr>
-        <p:txBody>
-          <a:bodyPr wrap="square" anchor="ctr" lIns="0" tIns="0" rIns="0" bIns="0">
-            <a:noAutofit/>
-          </a:bodyPr>
-          <a:lstStyle/>
-          <a:p>
-            <a:pPr algn="l" latinLnBrk="0">
-              <a:lnSpc>
-                <a:spcPct val="100000"/>
-              </a:lnSpc>
-              <a:spcBef>
-                <a:spcPts val="0"/>
-              </a:spcBef>
-              <a:spcAft>
-                <a:spcPts val="0"/>
-              </a:spcAft>
-            </a:pPr>
-            <a:r>
-              <a:rPr sz="850" b="1">
-                <a:solidFill>
-                  <a:srgbClr val="C2570A"/>
-                </a:solidFill>
-                <a:latin typeface="Microsoft YaHei"/>
-                <a:ea typeface="Microsoft YaHei"/>
-                <a:cs typeface="Microsoft YaHei"/>
-              </a:rPr>
-              <a:t>提交候选</a:t>
-            </a:r>
-          </a:p>
-        </p:txBody>
-      </p:sp>
-      <p:cxnSp>
-        <p:nvCxnSpPr>
-          <p:cNvPr id="56" name="Connector 55"/>
-          <p:cNvCxnSpPr/>
-          <p:nvPr/>
-        </p:nvCxnSpPr>
-        <p:spPr>
-          <a:xfrm flipH="1">
-            <a:off x="4498848" y="5513831"/>
-            <a:ext cx="786384" cy="0"/>
-          </a:xfrm>
-          <a:prstGeom prst="line">
-            <a:avLst/>
-          </a:prstGeom>
-          <a:ln w="19050">
-            <a:solidFill>
-              <a:srgbClr val="0F62CE"/>
-            </a:solidFill>
-            <a:tailEnd type="triangle" w="med" len="med"/>
-          </a:ln>
-        </p:spPr>
-      </p:cxnSp>
-      <p:sp>
-        <p:nvSpPr>
-          <p:cNvPr id="57" name="TextBox 56"/>
-          <p:cNvSpPr txBox="1"/>
-          <p:nvPr/>
-        </p:nvSpPr>
-        <p:spPr>
-          <a:xfrm>
-            <a:off x="4535424" y="5276088"/>
-            <a:ext cx="749808" cy="182880"/>
-          </a:xfrm>
-          <a:prstGeom prst="rect">
-            <a:avLst/>
-          </a:prstGeom>
-          <a:noFill/>
-        </p:spPr>
-        <p:txBody>
-          <a:bodyPr wrap="square" anchor="ctr" lIns="0" tIns="0" rIns="0" bIns="0">
-            <a:noAutofit/>
-          </a:bodyPr>
-          <a:lstStyle/>
-          <a:p>
-            <a:pPr algn="ctr" latinLnBrk="0">
-              <a:lnSpc>
-                <a:spcPct val="100000"/>
-              </a:lnSpc>
-              <a:spcBef>
-                <a:spcPts val="0"/>
-              </a:spcBef>
-              <a:spcAft>
-                <a:spcPts val="0"/>
-              </a:spcAft>
-            </a:pPr>
-            <a:r>
-              <a:rPr sz="850" b="1">
-                <a:solidFill>
-                  <a:srgbClr val="0F62CE"/>
-                </a:solidFill>
-                <a:latin typeface="Microsoft YaHei"/>
-                <a:ea typeface="Microsoft YaHei"/>
-                <a:cs typeface="Microsoft YaHei"/>
-              </a:rPr>
-              <a:t>判定通过</a:t>
-            </a:r>
-          </a:p>
-        </p:txBody>
-      </p:sp>
-      <p:sp>
-        <p:nvSpPr>
-          <p:cNvPr id="58" name="Rectangle 57"/>
-          <p:cNvSpPr/>
-          <p:nvPr/>
-        </p:nvSpPr>
-        <p:spPr>
-          <a:xfrm>
-            <a:off x="548640" y="5925312"/>
-            <a:ext cx="11094415" cy="512064"/>
-          </a:xfrm>
-          <a:prstGeom prst="rect">
-            <a:avLst/>
-          </a:prstGeom>
-          <a:solidFill>
-            <a:srgbClr val="C9E1FC"/>
-          </a:solidFill>
-          <a:ln>
-            <a:noFill/>
-          </a:ln>
-        </p:spPr>
-        <p:txBody>
-          <a:bodyPr rtlCol="0" anchor="ctr"/>
-          <a:lstStyle/>
-          <a:p>
-            <a:pPr algn="ctr"/>
-          </a:p>
-        </p:txBody>
-      </p:sp>
-      <p:sp>
-        <p:nvSpPr>
-          <p:cNvPr id="59" name="Rectangle 58"/>
-          <p:cNvSpPr/>
-          <p:nvPr/>
-        </p:nvSpPr>
-        <p:spPr>
-          <a:xfrm>
-            <a:off x="548640" y="5925312"/>
-            <a:ext cx="73152" cy="512064"/>
-          </a:xfrm>
-          <a:prstGeom prst="rect">
-            <a:avLst/>
-          </a:prstGeom>
-          <a:solidFill>
-            <a:srgbClr val="0F62CE"/>
-          </a:solidFill>
-          <a:ln>
-            <a:noFill/>
-          </a:ln>
-        </p:spPr>
-        <p:txBody>
-          <a:bodyPr rtlCol="0" anchor="ctr"/>
-          <a:lstStyle/>
-          <a:p>
-            <a:pPr algn="ctr"/>
-          </a:p>
-        </p:txBody>
-      </p:sp>
-      <p:sp>
-        <p:nvSpPr>
-          <p:cNvPr id="60" name="TextBox 59"/>
-          <p:cNvSpPr txBox="1"/>
-          <p:nvPr/>
-        </p:nvSpPr>
-        <p:spPr>
-          <a:xfrm>
-            <a:off x="877824" y="5925312"/>
-            <a:ext cx="10436047" cy="512064"/>
-          </a:xfrm>
-          <a:prstGeom prst="rect">
-            <a:avLst/>
-          </a:prstGeom>
-          <a:noFill/>
-        </p:spPr>
-        <p:txBody>
-          <a:bodyPr wrap="square" anchor="ctr" lIns="0" tIns="0" rIns="0" bIns="0">
-            <a:noAutofit/>
-          </a:bodyPr>
-          <a:lstStyle/>
-          <a:p>
-            <a:pPr algn="l" latinLnBrk="0">
-              <a:lnSpc>
-                <a:spcPct val="100000"/>
-              </a:lnSpc>
-              <a:spcBef>
-                <a:spcPts val="0"/>
-              </a:spcBef>
-              <a:spcAft>
-                <a:spcPts val="0"/>
-              </a:spcAft>
-            </a:pPr>
-            <a:r>
-              <a:rPr sz="1200" b="1">
-                <a:solidFill>
-                  <a:srgbClr val="0F62CE"/>
-                </a:solidFill>
-                <a:latin typeface="Microsoft YaHei"/>
-                <a:ea typeface="Microsoft YaHei"/>
-                <a:cs typeface="Microsoft YaHei"/>
-              </a:rPr>
-              <a:t>与通用 Agent 框架的唯一差别</a:t>
-            </a:r>
-            <a:r>
-              <a:rPr sz="1200" b="0">
-                <a:solidFill>
-                  <a:srgbClr val="7FA4BA"/>
-                </a:solidFill>
-                <a:latin typeface="Microsoft YaHei"/>
-                <a:ea typeface="Microsoft YaHei"/>
-                <a:cs typeface="Microsoft YaHei"/>
-              </a:rPr>
-              <a:t>　→　</a:t>
-            </a:r>
-            <a:r>
-              <a:rPr sz="1300" b="1">
-                <a:solidFill>
-                  <a:srgbClr val="0A2B45"/>
-                </a:solidFill>
-                <a:latin typeface="Microsoft YaHei"/>
-                <a:ea typeface="Microsoft YaHei"/>
-                <a:cs typeface="Microsoft YaHei"/>
-              </a:rPr>
-              <a:t>「行动」不能直接产生新消息，必须先过一道确定性判决</a:t>
-            </a:r>
-          </a:p>
-        </p:txBody>
-      </p:sp>
-      <p:sp>
-        <p:nvSpPr>
-          <p:cNvPr id="61" name="TextBox 60"/>
+              <a:t>Agent 只负责消费证据做推演；编译、对精度、测速全部交由右侧确定性工具完成</a:t>
+            </a:r>
+          </a:p>
+        </p:txBody>
+      </p:sp>
+      <p:sp>
+        <p:nvSpPr>
+          <p:cNvPr id="56" name="TextBox 55"/>
           <p:cNvSpPr txBox="1"/>
           <p:nvPr/>
         </p:nvSpPr>

--- a/slides/m100_agent_final_deck.pptx
+++ b/slides/m100_agent_final_deck.pptx
@@ -9386,14 +9386,43 @@
       </p:sp>
       <p:sp>
         <p:nvSpPr>
-          <p:cNvPr id="6" name="TextBox 5"/>
-          <p:cNvSpPr txBox="1"/>
-          <p:nvPr/>
-        </p:nvSpPr>
-        <p:spPr>
-          <a:xfrm>
-            <a:off x="585216" y="1188720"/>
-            <a:ext cx="2907791" cy="347472"/>
+          <p:cNvPr id="6" name="Rectangle 5"/>
+          <p:cNvSpPr/>
+          <p:nvPr/>
+        </p:nvSpPr>
+        <p:spPr>
+          <a:xfrm>
+            <a:off x="548640" y="1234440"/>
+            <a:ext cx="54864" cy="237744"/>
+          </a:xfrm>
+          <a:prstGeom prst="rect">
+            <a:avLst/>
+          </a:prstGeom>
+          <a:solidFill>
+            <a:srgbClr val="40708B"/>
+          </a:solidFill>
+          <a:ln>
+            <a:noFill/>
+          </a:ln>
+        </p:spPr>
+        <p:txBody>
+          <a:bodyPr rtlCol="0" anchor="ctr"/>
+          <a:lstStyle/>
+          <a:p>
+            <a:pPr algn="ctr"/>
+          </a:p>
+        </p:txBody>
+      </p:sp>
+      <p:sp>
+        <p:nvSpPr>
+          <p:cNvPr id="7" name="TextBox 6"/>
+          <p:cNvSpPr txBox="1"/>
+          <p:nvPr/>
+        </p:nvSpPr>
+        <p:spPr>
+          <a:xfrm>
+            <a:off x="694944" y="1207008"/>
+            <a:ext cx="2505456" cy="292608"/>
           </a:xfrm>
           <a:prstGeom prst="rect">
             <a:avLst/>
@@ -9431,7 +9460,7 @@
             <a:r>
               <a:rPr sz="850" b="1">
                 <a:solidFill>
-                  <a:srgbClr val="1B4D69"/>
+                  <a:srgbClr val="40708B"/>
                 </a:solidFill>
                 <a:latin typeface="Microsoft YaHei"/>
                 <a:ea typeface="Microsoft YaHei"/>
@@ -9444,14 +9473,43 @@
       </p:sp>
       <p:sp>
         <p:nvSpPr>
-          <p:cNvPr id="7" name="TextBox 6"/>
-          <p:cNvSpPr txBox="1"/>
-          <p:nvPr/>
-        </p:nvSpPr>
-        <p:spPr>
-          <a:xfrm>
-            <a:off x="4059936" y="1188720"/>
-            <a:ext cx="3182112" cy="347472"/>
+          <p:cNvPr id="8" name="Rectangle 7"/>
+          <p:cNvSpPr/>
+          <p:nvPr/>
+        </p:nvSpPr>
+        <p:spPr>
+          <a:xfrm>
+            <a:off x="4114800" y="1234440"/>
+            <a:ext cx="54864" cy="237744"/>
+          </a:xfrm>
+          <a:prstGeom prst="rect">
+            <a:avLst/>
+          </a:prstGeom>
+          <a:solidFill>
+            <a:srgbClr val="D2690C"/>
+          </a:solidFill>
+          <a:ln>
+            <a:noFill/>
+          </a:ln>
+        </p:spPr>
+        <p:txBody>
+          <a:bodyPr rtlCol="0" anchor="ctr"/>
+          <a:lstStyle/>
+          <a:p>
+            <a:pPr algn="ctr"/>
+          </a:p>
+        </p:txBody>
+      </p:sp>
+      <p:sp>
+        <p:nvSpPr>
+          <p:cNvPr id="9" name="TextBox 8"/>
+          <p:cNvSpPr txBox="1"/>
+          <p:nvPr/>
+        </p:nvSpPr>
+        <p:spPr>
+          <a:xfrm>
+            <a:off x="4261104" y="1207008"/>
+            <a:ext cx="3255264" cy="292608"/>
           </a:xfrm>
           <a:prstGeom prst="rect">
             <a:avLst/>
@@ -9489,7 +9547,7 @@
             <a:r>
               <a:rPr sz="850" b="1">
                 <a:solidFill>
-                  <a:srgbClr val="C2570A"/>
+                  <a:srgbClr val="D2690C"/>
                 </a:solidFill>
                 <a:latin typeface="Microsoft YaHei"/>
                 <a:ea typeface="Microsoft YaHei"/>
@@ -9502,14 +9560,43 @@
       </p:sp>
       <p:sp>
         <p:nvSpPr>
-          <p:cNvPr id="8" name="TextBox 7"/>
-          <p:cNvSpPr txBox="1"/>
-          <p:nvPr/>
-        </p:nvSpPr>
-        <p:spPr>
-          <a:xfrm>
-            <a:off x="8010144" y="1188720"/>
-            <a:ext cx="3596335" cy="347472"/>
+          <p:cNvPr id="10" name="Rectangle 9"/>
+          <p:cNvSpPr/>
+          <p:nvPr/>
+        </p:nvSpPr>
+        <p:spPr>
+          <a:xfrm>
+            <a:off x="8430768" y="1234440"/>
+            <a:ext cx="54864" cy="237744"/>
+          </a:xfrm>
+          <a:prstGeom prst="rect">
+            <a:avLst/>
+          </a:prstGeom>
+          <a:solidFill>
+            <a:srgbClr val="0F62CE"/>
+          </a:solidFill>
+          <a:ln>
+            <a:noFill/>
+          </a:ln>
+        </p:spPr>
+        <p:txBody>
+          <a:bodyPr rtlCol="0" anchor="ctr"/>
+          <a:lstStyle/>
+          <a:p>
+            <a:pPr algn="ctr"/>
+          </a:p>
+        </p:txBody>
+      </p:sp>
+      <p:sp>
+        <p:nvSpPr>
+          <p:cNvPr id="11" name="TextBox 10"/>
+          <p:cNvSpPr txBox="1"/>
+          <p:nvPr/>
+        </p:nvSpPr>
+        <p:spPr>
+          <a:xfrm>
+            <a:off x="8577072" y="1207008"/>
+            <a:ext cx="3065983" cy="292608"/>
           </a:xfrm>
           <a:prstGeom prst="rect">
             <a:avLst/>
@@ -9560,14 +9647,14 @@
       </p:sp>
       <p:sp>
         <p:nvSpPr>
-          <p:cNvPr id="9" name="Rectangle 8"/>
+          <p:cNvPr id="12" name="Rectangle 11"/>
           <p:cNvSpPr/>
           <p:nvPr/>
         </p:nvSpPr>
         <p:spPr>
           <a:xfrm>
-            <a:off x="548640" y="1609344"/>
-            <a:ext cx="2980944" cy="786384"/>
+            <a:off x="548640" y="1572768"/>
+            <a:ext cx="2651760" cy="731520"/>
           </a:xfrm>
           <a:prstGeom prst="rect">
             <a:avLst/>
@@ -9591,14 +9678,14 @@
       </p:sp>
       <p:sp>
         <p:nvSpPr>
-          <p:cNvPr id="10" name="Rectangle 9"/>
+          <p:cNvPr id="13" name="Rectangle 12"/>
           <p:cNvSpPr/>
           <p:nvPr/>
         </p:nvSpPr>
         <p:spPr>
           <a:xfrm>
-            <a:off x="548640" y="1609344"/>
-            <a:ext cx="64008" cy="786384"/>
+            <a:off x="548640" y="1572768"/>
+            <a:ext cx="64008" cy="731520"/>
           </a:xfrm>
           <a:prstGeom prst="rect">
             <a:avLst/>
@@ -9620,14 +9707,14 @@
       </p:sp>
       <p:sp>
         <p:nvSpPr>
-          <p:cNvPr id="11" name="TextBox 10"/>
-          <p:cNvSpPr txBox="1"/>
-          <p:nvPr/>
-        </p:nvSpPr>
-        <p:spPr>
-          <a:xfrm>
-            <a:off x="731520" y="1655064"/>
-            <a:ext cx="2651760" cy="694944"/>
+          <p:cNvPr id="14" name="TextBox 13"/>
+          <p:cNvSpPr txBox="1"/>
+          <p:nvPr/>
+        </p:nvSpPr>
+        <p:spPr>
+          <a:xfrm>
+            <a:off x="731520" y="1618488"/>
+            <a:ext cx="2322576" cy="640080"/>
           </a:xfrm>
           <a:prstGeom prst="rect">
             <a:avLst/>
@@ -9726,14 +9813,14 @@
       </p:sp>
       <p:sp>
         <p:nvSpPr>
-          <p:cNvPr id="12" name="Rectangle 11"/>
+          <p:cNvPr id="15" name="Rectangle 14"/>
           <p:cNvSpPr/>
           <p:nvPr/>
         </p:nvSpPr>
         <p:spPr>
           <a:xfrm>
-            <a:off x="548640" y="2505456"/>
-            <a:ext cx="2980944" cy="786384"/>
+            <a:off x="548640" y="2523744"/>
+            <a:ext cx="2651760" cy="731520"/>
           </a:xfrm>
           <a:prstGeom prst="rect">
             <a:avLst/>
@@ -9757,14 +9844,14 @@
       </p:sp>
       <p:sp>
         <p:nvSpPr>
-          <p:cNvPr id="13" name="Rectangle 12"/>
+          <p:cNvPr id="16" name="Rectangle 15"/>
           <p:cNvSpPr/>
           <p:nvPr/>
         </p:nvSpPr>
         <p:spPr>
           <a:xfrm>
-            <a:off x="548640" y="2505456"/>
-            <a:ext cx="64008" cy="786384"/>
+            <a:off x="548640" y="2523744"/>
+            <a:ext cx="64008" cy="731520"/>
           </a:xfrm>
           <a:prstGeom prst="rect">
             <a:avLst/>
@@ -9786,14 +9873,14 @@
       </p:sp>
       <p:sp>
         <p:nvSpPr>
-          <p:cNvPr id="14" name="TextBox 13"/>
-          <p:cNvSpPr txBox="1"/>
-          <p:nvPr/>
-        </p:nvSpPr>
-        <p:spPr>
-          <a:xfrm>
-            <a:off x="731520" y="2551176"/>
-            <a:ext cx="2651760" cy="694944"/>
+          <p:cNvPr id="17" name="TextBox 16"/>
+          <p:cNvSpPr txBox="1"/>
+          <p:nvPr/>
+        </p:nvSpPr>
+        <p:spPr>
+          <a:xfrm>
+            <a:off x="731520" y="2569463"/>
+            <a:ext cx="2322576" cy="640080"/>
           </a:xfrm>
           <a:prstGeom prst="rect">
             <a:avLst/>
@@ -9892,14 +9979,14 @@
       </p:sp>
       <p:sp>
         <p:nvSpPr>
-          <p:cNvPr id="15" name="Rectangle 14"/>
+          <p:cNvPr id="18" name="Rectangle 17"/>
           <p:cNvSpPr/>
           <p:nvPr/>
         </p:nvSpPr>
         <p:spPr>
           <a:xfrm>
-            <a:off x="548640" y="3401568"/>
-            <a:ext cx="2980944" cy="1005840"/>
+            <a:off x="548640" y="3877056"/>
+            <a:ext cx="2651760" cy="1298448"/>
           </a:xfrm>
           <a:prstGeom prst="rect">
             <a:avLst/>
@@ -9923,14 +10010,14 @@
       </p:sp>
       <p:sp>
         <p:nvSpPr>
-          <p:cNvPr id="16" name="Rectangle 15"/>
+          <p:cNvPr id="19" name="Rectangle 18"/>
           <p:cNvSpPr/>
           <p:nvPr/>
         </p:nvSpPr>
         <p:spPr>
           <a:xfrm>
-            <a:off x="548640" y="3401568"/>
-            <a:ext cx="64008" cy="1005840"/>
+            <a:off x="548640" y="3877056"/>
+            <a:ext cx="64008" cy="1298448"/>
           </a:xfrm>
           <a:prstGeom prst="rect">
             <a:avLst/>
@@ -9952,14 +10039,14 @@
       </p:sp>
       <p:sp>
         <p:nvSpPr>
-          <p:cNvPr id="17" name="TextBox 16"/>
-          <p:cNvSpPr txBox="1"/>
-          <p:nvPr/>
-        </p:nvSpPr>
-        <p:spPr>
-          <a:xfrm>
-            <a:off x="731520" y="3447288"/>
-            <a:ext cx="2651760" cy="914400"/>
+          <p:cNvPr id="20" name="TextBox 19"/>
+          <p:cNvSpPr txBox="1"/>
+          <p:nvPr/>
+        </p:nvSpPr>
+        <p:spPr>
+          <a:xfrm>
+            <a:off x="731520" y="3922776"/>
+            <a:ext cx="2322576" cy="1207007"/>
           </a:xfrm>
           <a:prstGeom prst="rect">
             <a:avLst/>
@@ -10082,17 +10169,454 @@
       </p:sp>
       <p:sp>
         <p:nvSpPr>
-          <p:cNvPr id="18" name="Rectangle 17"/>
+          <p:cNvPr id="21" name="Rectangle 20"/>
           <p:cNvSpPr/>
           <p:nvPr/>
         </p:nvSpPr>
         <p:spPr>
           <a:xfrm>
-            <a:off x="1133856" y="4608576"/>
-            <a:ext cx="2395728" cy="676656"/>
-          </a:xfrm>
-          <a:prstGeom prst="rect">
-            <a:avLst/>
+            <a:off x="8430768" y="1572768"/>
+            <a:ext cx="3212287" cy="1078992"/>
+          </a:xfrm>
+          <a:prstGeom prst="rect">
+            <a:avLst/>
+          </a:prstGeom>
+          <a:solidFill>
+            <a:srgbClr val="FFFFFF"/>
+          </a:solidFill>
+          <a:ln w="9525">
+            <a:solidFill>
+              <a:srgbClr val="CFE3F0"/>
+            </a:solidFill>
+          </a:ln>
+        </p:spPr>
+        <p:txBody>
+          <a:bodyPr rtlCol="0" anchor="ctr"/>
+          <a:lstStyle/>
+          <a:p>
+            <a:pPr algn="ctr"/>
+          </a:p>
+        </p:txBody>
+      </p:sp>
+      <p:sp>
+        <p:nvSpPr>
+          <p:cNvPr id="22" name="Rectangle 21"/>
+          <p:cNvSpPr/>
+          <p:nvPr/>
+        </p:nvSpPr>
+        <p:spPr>
+          <a:xfrm>
+            <a:off x="8430768" y="1572768"/>
+            <a:ext cx="64008" cy="1078992"/>
+          </a:xfrm>
+          <a:prstGeom prst="rect">
+            <a:avLst/>
+          </a:prstGeom>
+          <a:solidFill>
+            <a:srgbClr val="0F62CE"/>
+          </a:solidFill>
+          <a:ln>
+            <a:noFill/>
+          </a:ln>
+        </p:spPr>
+        <p:txBody>
+          <a:bodyPr rtlCol="0" anchor="ctr"/>
+          <a:lstStyle/>
+          <a:p>
+            <a:pPr algn="ctr"/>
+          </a:p>
+        </p:txBody>
+      </p:sp>
+      <p:sp>
+        <p:nvSpPr>
+          <p:cNvPr id="23" name="TextBox 22"/>
+          <p:cNvSpPr txBox="1"/>
+          <p:nvPr/>
+        </p:nvSpPr>
+        <p:spPr>
+          <a:xfrm>
+            <a:off x="8613648" y="1618488"/>
+            <a:ext cx="2883103" cy="987551"/>
+          </a:xfrm>
+          <a:prstGeom prst="rect">
+            <a:avLst/>
+          </a:prstGeom>
+          <a:noFill/>
+        </p:spPr>
+        <p:txBody>
+          <a:bodyPr wrap="square" anchor="ctr" lIns="0" tIns="0" rIns="0" bIns="0">
+            <a:noAutofit/>
+          </a:bodyPr>
+          <a:lstStyle/>
+          <a:p>
+            <a:pPr algn="l" latinLnBrk="0">
+              <a:lnSpc>
+                <a:spcPct val="100000"/>
+              </a:lnSpc>
+              <a:spcBef>
+                <a:spcPts val="0"/>
+              </a:spcBef>
+              <a:spcAft>
+                <a:spcPts val="300"/>
+              </a:spcAft>
+            </a:pPr>
+            <a:r>
+              <a:rPr sz="1050" b="1">
+                <a:solidFill>
+                  <a:srgbClr val="0A2B45"/>
+                </a:solidFill>
+                <a:latin typeface="Microsoft YaHei"/>
+                <a:ea typeface="Microsoft YaHei"/>
+                <a:cs typeface="Microsoft YaHei"/>
+              </a:rPr>
+              <a:t>源码与检索工具</a:t>
+            </a:r>
+            <a:r>
+              <a:rPr sz="800" b="1">
+                <a:solidFill>
+                  <a:srgbClr val="0F62CE"/>
+                </a:solidFill>
+                <a:latin typeface="Consolas"/>
+                <a:ea typeface="Microsoft YaHei"/>
+                <a:cs typeface="Microsoft YaHei"/>
+              </a:rPr>
+              <a:t>　Source &amp; Retrieval</a:t>
+            </a:r>
+          </a:p>
+          <a:p>
+            <a:pPr algn="l" latinLnBrk="0">
+              <a:lnSpc>
+                <a:spcPct val="100000"/>
+              </a:lnSpc>
+              <a:spcBef>
+                <a:spcPts val="0"/>
+              </a:spcBef>
+              <a:spcAft>
+                <a:spcPts val="0"/>
+              </a:spcAft>
+            </a:pPr>
+            <a:r>
+              <a:rPr sz="900" b="0">
+                <a:solidFill>
+                  <a:srgbClr val="1B4D69"/>
+                </a:solidFill>
+                <a:latin typeface="Microsoft YaHei"/>
+                <a:ea typeface="Microsoft YaHei"/>
+                <a:cs typeface="Microsoft YaHei"/>
+              </a:rPr>
+              <a:t>·　算子模板读取</a:t>
+            </a:r>
+          </a:p>
+          <a:p>
+            <a:pPr algn="l" latinLnBrk="0">
+              <a:lnSpc>
+                <a:spcPct val="100000"/>
+              </a:lnSpc>
+              <a:spcBef>
+                <a:spcPts val="0"/>
+              </a:spcBef>
+              <a:spcAft>
+                <a:spcPts val="0"/>
+              </a:spcAft>
+            </a:pPr>
+            <a:r>
+              <a:rPr sz="900" b="0">
+                <a:solidFill>
+                  <a:srgbClr val="1B4D69"/>
+                </a:solidFill>
+                <a:latin typeface="Microsoft YaHei"/>
+                <a:ea typeface="Microsoft YaHei"/>
+                <a:cs typeface="Microsoft YaHei"/>
+              </a:rPr>
+              <a:t>·　AST 语法树检查</a:t>
+            </a:r>
+          </a:p>
+          <a:p>
+            <a:pPr algn="l" latinLnBrk="0">
+              <a:lnSpc>
+                <a:spcPct val="100000"/>
+              </a:lnSpc>
+              <a:spcBef>
+                <a:spcPts val="0"/>
+              </a:spcBef>
+              <a:spcAft>
+                <a:spcPts val="0"/>
+              </a:spcAft>
+            </a:pPr>
+            <a:r>
+              <a:rPr sz="900" b="0">
+                <a:solidFill>
+                  <a:srgbClr val="1B4D69"/>
+                </a:solidFill>
+                <a:latin typeface="Microsoft YaHei"/>
+                <a:ea typeface="Microsoft YaHei"/>
+                <a:cs typeface="Microsoft YaHei"/>
+              </a:rPr>
+              <a:t>·　代码补丁生成</a:t>
+            </a:r>
+          </a:p>
+        </p:txBody>
+      </p:sp>
+      <p:sp>
+        <p:nvSpPr>
+          <p:cNvPr id="24" name="Rectangle 23"/>
+          <p:cNvSpPr/>
+          <p:nvPr/>
+        </p:nvSpPr>
+        <p:spPr>
+          <a:xfrm>
+            <a:off x="8430768" y="3877056"/>
+            <a:ext cx="3212287" cy="1298448"/>
+          </a:xfrm>
+          <a:prstGeom prst="rect">
+            <a:avLst/>
+          </a:prstGeom>
+          <a:solidFill>
+            <a:srgbClr val="FFFFFF"/>
+          </a:solidFill>
+          <a:ln w="9525">
+            <a:solidFill>
+              <a:srgbClr val="CFE3F0"/>
+            </a:solidFill>
+          </a:ln>
+        </p:spPr>
+        <p:txBody>
+          <a:bodyPr rtlCol="0" anchor="ctr"/>
+          <a:lstStyle/>
+          <a:p>
+            <a:pPr algn="ctr"/>
+          </a:p>
+        </p:txBody>
+      </p:sp>
+      <p:sp>
+        <p:nvSpPr>
+          <p:cNvPr id="25" name="Rectangle 24"/>
+          <p:cNvSpPr/>
+          <p:nvPr/>
+        </p:nvSpPr>
+        <p:spPr>
+          <a:xfrm>
+            <a:off x="8430768" y="3877056"/>
+            <a:ext cx="64008" cy="1298448"/>
+          </a:xfrm>
+          <a:prstGeom prst="rect">
+            <a:avLst/>
+          </a:prstGeom>
+          <a:solidFill>
+            <a:srgbClr val="0F62CE"/>
+          </a:solidFill>
+          <a:ln>
+            <a:noFill/>
+          </a:ln>
+        </p:spPr>
+        <p:txBody>
+          <a:bodyPr rtlCol="0" anchor="ctr"/>
+          <a:lstStyle/>
+          <a:p>
+            <a:pPr algn="ctr"/>
+          </a:p>
+        </p:txBody>
+      </p:sp>
+      <p:sp>
+        <p:nvSpPr>
+          <p:cNvPr id="26" name="TextBox 25"/>
+          <p:cNvSpPr txBox="1"/>
+          <p:nvPr/>
+        </p:nvSpPr>
+        <p:spPr>
+          <a:xfrm>
+            <a:off x="8613648" y="3922776"/>
+            <a:ext cx="2883103" cy="1207007"/>
+          </a:xfrm>
+          <a:prstGeom prst="rect">
+            <a:avLst/>
+          </a:prstGeom>
+          <a:noFill/>
+        </p:spPr>
+        <p:txBody>
+          <a:bodyPr wrap="square" anchor="ctr" lIns="0" tIns="0" rIns="0" bIns="0">
+            <a:noAutofit/>
+          </a:bodyPr>
+          <a:lstStyle/>
+          <a:p>
+            <a:pPr algn="l" latinLnBrk="0">
+              <a:lnSpc>
+                <a:spcPct val="100000"/>
+              </a:lnSpc>
+              <a:spcBef>
+                <a:spcPts val="0"/>
+              </a:spcBef>
+              <a:spcAft>
+                <a:spcPts val="300"/>
+              </a:spcAft>
+            </a:pPr>
+            <a:r>
+              <a:rPr sz="1050" b="1">
+                <a:solidFill>
+                  <a:srgbClr val="0A2B45"/>
+                </a:solidFill>
+                <a:latin typeface="Microsoft YaHei"/>
+                <a:ea typeface="Microsoft YaHei"/>
+                <a:cs typeface="Microsoft YaHei"/>
+              </a:rPr>
+              <a:t>Harness &amp; 后端</a:t>
+            </a:r>
+            <a:r>
+              <a:rPr sz="800" b="1">
+                <a:solidFill>
+                  <a:srgbClr val="0F62CE"/>
+                </a:solidFill>
+                <a:latin typeface="Consolas"/>
+                <a:ea typeface="Microsoft YaHei"/>
+                <a:cs typeface="Microsoft YaHei"/>
+              </a:rPr>
+              <a:t>　backend/ 耦合</a:t>
+            </a:r>
+          </a:p>
+          <a:p>
+            <a:pPr algn="l" latinLnBrk="0">
+              <a:lnSpc>
+                <a:spcPct val="100000"/>
+              </a:lnSpc>
+              <a:spcBef>
+                <a:spcPts val="0"/>
+              </a:spcBef>
+              <a:spcAft>
+                <a:spcPts val="0"/>
+              </a:spcAft>
+            </a:pPr>
+            <a:r>
+              <a:rPr sz="900" b="0">
+                <a:solidFill>
+                  <a:srgbClr val="1B4D69"/>
+                </a:solidFill>
+                <a:latin typeface="Microsoft YaHei"/>
+                <a:ea typeface="Microsoft YaHei"/>
+                <a:cs typeface="Microsoft YaHei"/>
+              </a:rPr>
+              <a:t>·　L0 交叉编译运行</a:t>
+            </a:r>
+          </a:p>
+          <a:p>
+            <a:pPr algn="l" latinLnBrk="0">
+              <a:lnSpc>
+                <a:spcPct val="100000"/>
+              </a:lnSpc>
+              <a:spcBef>
+                <a:spcPts val="0"/>
+              </a:spcBef>
+              <a:spcAft>
+                <a:spcPts val="0"/>
+              </a:spcAft>
+            </a:pPr>
+            <a:r>
+              <a:rPr sz="900" b="0">
+                <a:solidFill>
+                  <a:srgbClr val="1B4D69"/>
+                </a:solidFill>
+                <a:latin typeface="Microsoft YaHei"/>
+                <a:ea typeface="Microsoft YaHei"/>
+                <a:cs typeface="Microsoft YaHei"/>
+              </a:rPr>
+              <a:t>·　L1 Golden 精度对齐</a:t>
+            </a:r>
+          </a:p>
+          <a:p>
+            <a:pPr algn="l" latinLnBrk="0">
+              <a:lnSpc>
+                <a:spcPct val="100000"/>
+              </a:lnSpc>
+              <a:spcBef>
+                <a:spcPts val="0"/>
+              </a:spcBef>
+              <a:spcAft>
+                <a:spcPts val="0"/>
+              </a:spcAft>
+            </a:pPr>
+            <a:r>
+              <a:rPr sz="900" b="0">
+                <a:solidFill>
+                  <a:srgbClr val="1B4D69"/>
+                </a:solidFill>
+                <a:latin typeface="Microsoft YaHei"/>
+                <a:ea typeface="Microsoft YaHei"/>
+                <a:cs typeface="Microsoft YaHei"/>
+              </a:rPr>
+              <a:t>·　Bench 真机微秒计时</a:t>
+            </a:r>
+          </a:p>
+          <a:p>
+            <a:pPr algn="l" latinLnBrk="0">
+              <a:lnSpc>
+                <a:spcPct val="100000"/>
+              </a:lnSpc>
+              <a:spcBef>
+                <a:spcPts val="0"/>
+              </a:spcBef>
+              <a:spcAft>
+                <a:spcPts val="0"/>
+              </a:spcAft>
+            </a:pPr>
+            <a:r>
+              <a:rPr sz="900" b="0">
+                <a:solidFill>
+                  <a:srgbClr val="1B4D69"/>
+                </a:solidFill>
+                <a:latin typeface="Microsoft YaHei"/>
+                <a:ea typeface="Microsoft YaHei"/>
+                <a:cs typeface="Microsoft YaHei"/>
+              </a:rPr>
+              <a:t>·　Profile 模拟器分析</a:t>
+            </a:r>
+          </a:p>
+        </p:txBody>
+      </p:sp>
+      <p:sp>
+        <p:nvSpPr>
+          <p:cNvPr id="27" name="Rectangle 26"/>
+          <p:cNvSpPr/>
+          <p:nvPr/>
+        </p:nvSpPr>
+        <p:spPr>
+          <a:xfrm>
+            <a:off x="4114800" y="1517904"/>
+            <a:ext cx="3401568" cy="3986783"/>
+          </a:xfrm>
+          <a:prstGeom prst="rect">
+            <a:avLst/>
+          </a:prstGeom>
+          <a:solidFill>
+            <a:srgbClr val="FFFFFF"/>
+          </a:solidFill>
+          <a:ln w="9525">
+            <a:solidFill>
+              <a:srgbClr val="AFCEE1"/>
+            </a:solidFill>
+          </a:ln>
+        </p:spPr>
+        <p:txBody>
+          <a:bodyPr rtlCol="0" anchor="ctr"/>
+          <a:lstStyle/>
+          <a:p>
+            <a:pPr algn="ctr"/>
+          </a:p>
+        </p:txBody>
+      </p:sp>
+      <p:sp>
+        <p:nvSpPr>
+          <p:cNvPr id="28" name="Rounded Rectangle 27"/>
+          <p:cNvSpPr/>
+          <p:nvPr/>
+        </p:nvSpPr>
+        <p:spPr>
+          <a:xfrm>
+            <a:off x="4318894" y="1572768"/>
+            <a:ext cx="2993379" cy="457200"/>
+          </a:xfrm>
+          <a:prstGeom prst="roundRect">
+            <a:avLst>
+              <a:gd name="adj" fmla="val 16000"/>
+            </a:avLst>
           </a:prstGeom>
           <a:solidFill>
             <a:srgbClr val="E6F0FC"/>
@@ -10104,72 +10628,59 @@
           </a:ln>
         </p:spPr>
         <p:txBody>
-          <a:bodyPr rtlCol="0" anchor="ctr"/>
-          <a:lstStyle/>
-          <a:p>
-            <a:pPr algn="ctr"/>
-          </a:p>
-        </p:txBody>
-      </p:sp>
-      <p:sp>
-        <p:nvSpPr>
-          <p:cNvPr id="19" name="TextBox 18"/>
-          <p:cNvSpPr txBox="1"/>
-          <p:nvPr/>
-        </p:nvSpPr>
-        <p:spPr>
-          <a:xfrm>
-            <a:off x="1316736" y="4608576"/>
-            <a:ext cx="2066544" cy="676656"/>
-          </a:xfrm>
-          <a:prstGeom prst="rect">
-            <a:avLst/>
-          </a:prstGeom>
-          <a:noFill/>
-        </p:spPr>
-        <p:txBody>
-          <a:bodyPr wrap="square" anchor="ctr" lIns="0" tIns="0" rIns="0" bIns="0">
-            <a:noAutofit/>
-          </a:bodyPr>
-          <a:lstStyle/>
-          <a:p>
-            <a:pPr algn="l" latinLnBrk="0">
-              <a:lnSpc>
-                <a:spcPct val="100000"/>
-              </a:lnSpc>
-              <a:spcBef>
-                <a:spcPts val="0"/>
-              </a:spcBef>
-              <a:spcAft>
-                <a:spcPts val="300"/>
+          <a:bodyPr rtlCol="0" anchor="ctr" wrap="square" tIns="36576" bIns="36576">
+            <a:noAutofit/>
+          </a:bodyPr>
+          <a:lstStyle/>
+          <a:p>
+            <a:pPr algn="ctr" latinLnBrk="0">
+              <a:lnSpc>
+                <a:spcPct val="100000"/>
+              </a:lnSpc>
+              <a:spcBef>
+                <a:spcPts val="0"/>
+              </a:spcBef>
+              <a:spcAft>
+                <a:spcPts val="200"/>
               </a:spcAft>
             </a:pPr>
             <a:r>
               <a:rPr sz="1100" b="1">
                 <a:solidFill>
+                  <a:srgbClr val="0A2B45"/>
+                </a:solidFill>
+                <a:latin typeface="Microsoft YaHei"/>
+                <a:ea typeface="Microsoft YaHei"/>
+                <a:cs typeface="Microsoft YaHei"/>
+              </a:rPr>
+              <a:t>迭代记忆库</a:t>
+            </a:r>
+            <a:r>
+              <a:rPr sz="850" b="1">
+                <a:solidFill>
                   <a:srgbClr val="0F62CE"/>
                 </a:solidFill>
-                <a:latin typeface="Microsoft YaHei"/>
-                <a:ea typeface="Microsoft YaHei"/>
-                <a:cs typeface="Microsoft YaHei"/>
-              </a:rPr>
-              <a:t>达标输出 · 候选库</a:t>
-            </a:r>
-          </a:p>
-          <a:p>
-            <a:pPr algn="l" latinLnBrk="0">
-              <a:lnSpc>
-                <a:spcPct val="100000"/>
-              </a:lnSpc>
-              <a:spcBef>
-                <a:spcPts val="0"/>
-              </a:spcBef>
-              <a:spcAft>
-                <a:spcPts val="0"/>
-              </a:spcAft>
-            </a:pPr>
-            <a:r>
-              <a:rPr sz="900" b="0">
+                <a:latin typeface="Consolas"/>
+                <a:ea typeface="Microsoft YaHei"/>
+                <a:cs typeface="Microsoft YaHei"/>
+              </a:rPr>
+              <a:t>　Memory</a:t>
+            </a:r>
+          </a:p>
+          <a:p>
+            <a:pPr algn="ctr" latinLnBrk="0">
+              <a:lnSpc>
+                <a:spcPct val="100000"/>
+              </a:lnSpc>
+              <a:spcBef>
+                <a:spcPts val="0"/>
+              </a:spcBef>
+              <a:spcAft>
+                <a:spcPts val="0"/>
+              </a:spcAft>
+            </a:pPr>
+            <a:r>
+              <a:rPr sz="850" b="0">
                 <a:solidFill>
                   <a:srgbClr val="1B4D69"/>
                 </a:solidFill>
@@ -10177,114 +10688,25 @@
                 <a:ea typeface="Microsoft YaHei"/>
                 <a:cs typeface="Microsoft YaHei"/>
               </a:rPr>
-              <a:t>交付最优 Kernel 代码</a:t>
-            </a:r>
-          </a:p>
-        </p:txBody>
-      </p:sp>
-      <p:sp>
-        <p:nvSpPr>
-          <p:cNvPr id="20" name="Rectangle 19"/>
+              <a:t>历史补丁与失败避坑</a:t>
+            </a:r>
+          </a:p>
+        </p:txBody>
+      </p:sp>
+      <p:sp>
+        <p:nvSpPr>
+          <p:cNvPr id="29" name="Rounded Rectangle 28"/>
           <p:cNvSpPr/>
           <p:nvPr/>
         </p:nvSpPr>
         <p:spPr>
           <a:xfrm>
-            <a:off x="4023360" y="1188720"/>
-            <a:ext cx="3255264" cy="4169664"/>
-          </a:xfrm>
-          <a:prstGeom prst="rect">
-            <a:avLst/>
-          </a:prstGeom>
-          <a:solidFill>
-            <a:srgbClr val="FFFFFF"/>
-          </a:solidFill>
-          <a:ln w="9525">
-            <a:solidFill>
-              <a:srgbClr val="AFCEE1"/>
-            </a:solidFill>
-          </a:ln>
-        </p:spPr>
-        <p:txBody>
-          <a:bodyPr rtlCol="0" anchor="ctr"/>
-          <a:lstStyle/>
-          <a:p>
-            <a:pPr algn="ctr"/>
-          </a:p>
-        </p:txBody>
-      </p:sp>
-      <p:sp>
-        <p:nvSpPr>
-          <p:cNvPr id="21" name="TextBox 20"/>
-          <p:cNvSpPr txBox="1"/>
-          <p:nvPr/>
-        </p:nvSpPr>
-        <p:spPr>
-          <a:xfrm>
-            <a:off x="4059936" y="1188720"/>
-            <a:ext cx="3182112" cy="347472"/>
-          </a:xfrm>
-          <a:prstGeom prst="rect">
-            <a:avLst/>
-          </a:prstGeom>
-          <a:noFill/>
-        </p:spPr>
-        <p:txBody>
-          <a:bodyPr wrap="square" anchor="ctr" lIns="0" tIns="0" rIns="0" bIns="0">
-            <a:noAutofit/>
-          </a:bodyPr>
-          <a:lstStyle/>
-          <a:p>
-            <a:pPr algn="l" latinLnBrk="0">
-              <a:lnSpc>
-                <a:spcPct val="100000"/>
-              </a:lnSpc>
-              <a:spcBef>
-                <a:spcPts val="0"/>
-              </a:spcBef>
-              <a:spcAft>
-                <a:spcPts val="0"/>
-              </a:spcAft>
-            </a:pPr>
-            <a:r>
-              <a:rPr sz="1100" b="1">
-                <a:solidFill>
-                  <a:srgbClr val="0A2B45"/>
-                </a:solidFill>
-                <a:latin typeface="Microsoft YaHei"/>
-                <a:ea typeface="Microsoft YaHei"/>
-                <a:cs typeface="Microsoft YaHei"/>
-              </a:rPr>
-              <a:t>xpugen Agent 内部</a:t>
-            </a:r>
-            <a:r>
-              <a:rPr sz="850" b="1">
-                <a:solidFill>
-                  <a:srgbClr val="C2570A"/>
-                </a:solidFill>
-                <a:latin typeface="Microsoft YaHei"/>
-                <a:ea typeface="Microsoft YaHei"/>
-                <a:cs typeface="Microsoft YaHei"/>
-              </a:rPr>
-              <a:t>　唯一引入大模型的位置</a:t>
-            </a:r>
-          </a:p>
-        </p:txBody>
-      </p:sp>
-      <p:sp>
-        <p:nvSpPr>
-          <p:cNvPr id="22" name="Rounded Rectangle 21"/>
-          <p:cNvSpPr/>
-          <p:nvPr/>
-        </p:nvSpPr>
-        <p:spPr>
-          <a:xfrm>
-            <a:off x="4169664" y="1609344"/>
-            <a:ext cx="2962656" cy="694944"/>
+            <a:off x="4318894" y="2176272"/>
+            <a:ext cx="2993379" cy="475488"/>
           </a:xfrm>
           <a:prstGeom prst="roundRect">
             <a:avLst>
-              <a:gd name="adj" fmla="val 12000"/>
+              <a:gd name="adj" fmla="val 15384"/>
             </a:avLst>
           </a:prstGeom>
           <a:solidFill>
@@ -10322,7 +10744,7 @@
                 <a:ea typeface="Microsoft YaHei"/>
                 <a:cs typeface="Microsoft YaHei"/>
               </a:rPr>
-              <a:t>迭代记忆库</a:t>
+              <a:t>状态感知</a:t>
             </a:r>
             <a:r>
               <a:rPr sz="850" b="1">
@@ -10333,7 +10755,7 @@
                 <a:ea typeface="Microsoft YaHei"/>
                 <a:cs typeface="Microsoft YaHei"/>
               </a:rPr>
-              <a:t>　Memory</a:t>
+              <a:t>　Observation</a:t>
             </a:r>
           </a:p>
           <a:p>
@@ -10357,25 +10779,285 @@
                 <a:ea typeface="Microsoft YaHei"/>
                 <a:cs typeface="Microsoft YaHei"/>
               </a:rPr>
-              <a:t>历史补丁与失败避坑</a:t>
-            </a:r>
-          </a:p>
-        </p:txBody>
-      </p:sp>
-      <p:sp>
-        <p:nvSpPr>
-          <p:cNvPr id="23" name="Rounded Rectangle 22"/>
+              <a:t>汇总需求 + 报错 + 瓶颈</a:t>
+            </a:r>
+          </a:p>
+        </p:txBody>
+      </p:sp>
+      <p:cxnSp>
+        <p:nvCxnSpPr>
+          <p:cNvPr id="30" name="Connector 29"/>
+          <p:cNvCxnSpPr/>
+          <p:nvPr/>
+        </p:nvCxnSpPr>
+        <p:spPr>
+          <a:xfrm>
+            <a:off x="5815584" y="2039111"/>
+            <a:ext cx="0" cy="128017"/>
+          </a:xfrm>
+          <a:prstGeom prst="line">
+            <a:avLst/>
+          </a:prstGeom>
+          <a:ln w="19050">
+            <a:solidFill>
+              <a:srgbClr val="0F62CE"/>
+            </a:solidFill>
+            <a:tailEnd type="triangle" w="med" len="med"/>
+          </a:ln>
+        </p:spPr>
+      </p:cxnSp>
+      <p:sp>
+        <p:nvSpPr>
+          <p:cNvPr id="31" name="Rounded Rectangle 30"/>
           <p:cNvSpPr/>
           <p:nvPr/>
         </p:nvSpPr>
         <p:spPr>
           <a:xfrm>
-            <a:off x="4169664" y="2505456"/>
-            <a:ext cx="2962656" cy="786384"/>
+            <a:off x="4318894" y="2798064"/>
+            <a:ext cx="2993379" cy="1316736"/>
           </a:xfrm>
           <a:prstGeom prst="roundRect">
             <a:avLst>
-              <a:gd name="adj" fmla="val 12000"/>
+              <a:gd name="adj" fmla="val 5555"/>
+            </a:avLst>
+          </a:prstGeom>
+          <a:solidFill>
+            <a:srgbClr val="FBE6D4"/>
+          </a:solidFill>
+          <a:ln w="9525">
+            <a:solidFill>
+              <a:srgbClr val="D2690C"/>
+            </a:solidFill>
+          </a:ln>
+        </p:spPr>
+        <p:txBody>
+          <a:bodyPr rtlCol="0" anchor="ctr"/>
+          <a:lstStyle/>
+          <a:p>
+            <a:pPr algn="ctr"/>
+          </a:p>
+        </p:txBody>
+      </p:sp>
+      <p:sp>
+        <p:nvSpPr>
+          <p:cNvPr id="32" name="TextBox 31"/>
+          <p:cNvSpPr txBox="1"/>
+          <p:nvPr/>
+        </p:nvSpPr>
+        <p:spPr>
+          <a:xfrm>
+            <a:off x="4318894" y="2999232"/>
+            <a:ext cx="2993379" cy="256032"/>
+          </a:xfrm>
+          <a:prstGeom prst="rect">
+            <a:avLst/>
+          </a:prstGeom>
+          <a:noFill/>
+        </p:spPr>
+        <p:txBody>
+          <a:bodyPr wrap="square" anchor="ctr" lIns="0" tIns="0" rIns="0" bIns="0">
+            <a:noAutofit/>
+          </a:bodyPr>
+          <a:lstStyle/>
+          <a:p>
+            <a:pPr algn="ctr" latinLnBrk="0">
+              <a:lnSpc>
+                <a:spcPct val="100000"/>
+              </a:lnSpc>
+              <a:spcBef>
+                <a:spcPts val="0"/>
+              </a:spcBef>
+              <a:spcAft>
+                <a:spcPts val="200"/>
+              </a:spcAft>
+            </a:pPr>
+            <a:r>
+              <a:rPr sz="1150" b="1">
+                <a:solidFill>
+                  <a:srgbClr val="0A2B45"/>
+                </a:solidFill>
+                <a:latin typeface="Microsoft YaHei"/>
+                <a:ea typeface="Microsoft YaHei"/>
+                <a:cs typeface="Microsoft YaHei"/>
+              </a:rPr>
+              <a:t>策略推演</a:t>
+            </a:r>
+            <a:r>
+              <a:rPr sz="850" b="1">
+                <a:solidFill>
+                  <a:srgbClr val="C2570A"/>
+                </a:solidFill>
+                <a:latin typeface="Consolas"/>
+                <a:ea typeface="Microsoft YaHei"/>
+                <a:cs typeface="Microsoft YaHei"/>
+              </a:rPr>
+              <a:t>　Thought</a:t>
+            </a:r>
+          </a:p>
+        </p:txBody>
+      </p:sp>
+      <p:sp>
+        <p:nvSpPr>
+          <p:cNvPr id="33" name="Rounded Rectangle 32"/>
+          <p:cNvSpPr/>
+          <p:nvPr/>
+        </p:nvSpPr>
+        <p:spPr>
+          <a:xfrm>
+            <a:off x="5157216" y="3337560"/>
+            <a:ext cx="1316736" cy="237744"/>
+          </a:xfrm>
+          <a:prstGeom prst="roundRect">
+            <a:avLst>
+              <a:gd name="adj" fmla="val 50000"/>
+            </a:avLst>
+          </a:prstGeom>
+          <a:solidFill>
+            <a:srgbClr val="D2690C"/>
+          </a:solidFill>
+          <a:ln>
+            <a:noFill/>
+          </a:ln>
+        </p:spPr>
+        <p:txBody>
+          <a:bodyPr rtlCol="0" anchor="ctr" wrap="square" lIns="36576" tIns="0" rIns="36576" bIns="0">
+            <a:noAutofit/>
+          </a:bodyPr>
+          <a:lstStyle/>
+          <a:p>
+            <a:pPr algn="ctr" latinLnBrk="0">
+              <a:lnSpc>
+                <a:spcPct val="100000"/>
+              </a:lnSpc>
+              <a:spcBef>
+                <a:spcPts val="0"/>
+              </a:spcBef>
+              <a:spcAft>
+                <a:spcPts val="0"/>
+              </a:spcAft>
+            </a:pPr>
+            <a:r>
+              <a:rPr sz="800" b="1">
+                <a:solidFill>
+                  <a:srgbClr val="FFFFFF"/>
+                </a:solidFill>
+                <a:latin typeface="Microsoft YaHei"/>
+                <a:ea typeface="Microsoft YaHei"/>
+                <a:cs typeface="Microsoft YaHei"/>
+              </a:rPr>
+              <a:t>大模型唯一介入点</a:t>
+            </a:r>
+          </a:p>
+        </p:txBody>
+      </p:sp>
+      <p:sp>
+        <p:nvSpPr>
+          <p:cNvPr id="34" name="TextBox 33"/>
+          <p:cNvSpPr txBox="1"/>
+          <p:nvPr/>
+        </p:nvSpPr>
+        <p:spPr>
+          <a:xfrm>
+            <a:off x="4318894" y="3639312"/>
+            <a:ext cx="2993379" cy="347472"/>
+          </a:xfrm>
+          <a:prstGeom prst="rect">
+            <a:avLst/>
+          </a:prstGeom>
+          <a:noFill/>
+        </p:spPr>
+        <p:txBody>
+          <a:bodyPr wrap="square" anchor="ctr" lIns="0" tIns="0" rIns="0" bIns="0">
+            <a:noAutofit/>
+          </a:bodyPr>
+          <a:lstStyle/>
+          <a:p>
+            <a:pPr algn="ctr" latinLnBrk="0">
+              <a:lnSpc>
+                <a:spcPct val="100000"/>
+              </a:lnSpc>
+              <a:spcBef>
+                <a:spcPts val="0"/>
+              </a:spcBef>
+              <a:spcAft>
+                <a:spcPts val="0"/>
+              </a:spcAft>
+            </a:pPr>
+            <a:r>
+              <a:rPr sz="900" b="0">
+                <a:solidFill>
+                  <a:srgbClr val="1B4D69"/>
+                </a:solidFill>
+                <a:latin typeface="Microsoft YaHei"/>
+                <a:ea typeface="Microsoft YaHei"/>
+                <a:cs typeface="Microsoft YaHei"/>
+              </a:rPr>
+              <a:t>规划 DMA 搬运 / 计算流水</a:t>
+            </a:r>
+          </a:p>
+          <a:p>
+            <a:pPr algn="ctr" latinLnBrk="0">
+              <a:lnSpc>
+                <a:spcPct val="100000"/>
+              </a:lnSpc>
+              <a:spcBef>
+                <a:spcPts val="0"/>
+              </a:spcBef>
+              <a:spcAft>
+                <a:spcPts val="0"/>
+              </a:spcAft>
+            </a:pPr>
+            <a:r>
+              <a:rPr sz="900" b="0">
+                <a:solidFill>
+                  <a:srgbClr val="1B4D69"/>
+                </a:solidFill>
+                <a:latin typeface="Microsoft YaHei"/>
+                <a:ea typeface="Microsoft YaHei"/>
+                <a:cs typeface="Microsoft YaHei"/>
+              </a:rPr>
+              <a:t>寄存器分配与指令替换</a:t>
+            </a:r>
+          </a:p>
+        </p:txBody>
+      </p:sp>
+      <p:cxnSp>
+        <p:nvCxnSpPr>
+          <p:cNvPr id="35" name="Connector 34"/>
+          <p:cNvCxnSpPr/>
+          <p:nvPr/>
+        </p:nvCxnSpPr>
+        <p:spPr>
+          <a:xfrm>
+            <a:off x="5815584" y="2660903"/>
+            <a:ext cx="0" cy="128017"/>
+          </a:xfrm>
+          <a:prstGeom prst="line">
+            <a:avLst/>
+          </a:prstGeom>
+          <a:ln w="19050">
+            <a:solidFill>
+              <a:srgbClr val="0F62CE"/>
+            </a:solidFill>
+            <a:tailEnd type="triangle" w="med" len="med"/>
+          </a:ln>
+        </p:spPr>
+      </p:cxnSp>
+      <p:sp>
+        <p:nvSpPr>
+          <p:cNvPr id="36" name="Rounded Rectangle 35"/>
+          <p:cNvSpPr/>
+          <p:nvPr/>
+        </p:nvSpPr>
+        <p:spPr>
+          <a:xfrm>
+            <a:off x="4318894" y="4261104"/>
+            <a:ext cx="2993379" cy="530352"/>
+          </a:xfrm>
+          <a:prstGeom prst="roundRect">
+            <a:avLst>
+              <a:gd name="adj" fmla="val 13793"/>
             </a:avLst>
           </a:prstGeom>
           <a:solidFill>
@@ -10413,7 +11095,7 @@
                 <a:ea typeface="Microsoft YaHei"/>
                 <a:cs typeface="Microsoft YaHei"/>
               </a:rPr>
-              <a:t>状态感知</a:t>
+              <a:t>动作执行</a:t>
             </a:r>
             <a:r>
               <a:rPr sz="850" b="1">
@@ -10424,7 +11106,7 @@
                 <a:ea typeface="Microsoft YaHei"/>
                 <a:cs typeface="Microsoft YaHei"/>
               </a:rPr>
-              <a:t>　Observation</a:t>
+              <a:t>　Action</a:t>
             </a:r>
           </a:p>
           <a:p>
@@ -10448,21 +11130,21 @@
                 <a:ea typeface="Microsoft YaHei"/>
                 <a:cs typeface="Microsoft YaHei"/>
               </a:rPr>
-              <a:t>汇总需求 + 报错 + 瓶颈</a:t>
+              <a:t>生成补丁，触发编译与评测</a:t>
             </a:r>
           </a:p>
         </p:txBody>
       </p:sp>
       <p:cxnSp>
         <p:nvCxnSpPr>
-          <p:cNvPr id="24" name="Connector 23"/>
+          <p:cNvPr id="37" name="Connector 36"/>
           <p:cNvCxnSpPr/>
           <p:nvPr/>
         </p:nvCxnSpPr>
         <p:spPr>
           <a:xfrm>
-            <a:off x="5650992" y="2313432"/>
-            <a:ext cx="0" cy="182880"/>
+            <a:off x="5815584" y="4123944"/>
+            <a:ext cx="0" cy="128016"/>
           </a:xfrm>
           <a:prstGeom prst="line">
             <a:avLst/>
@@ -10477,155 +11159,18 @@
       </p:cxnSp>
       <p:sp>
         <p:nvSpPr>
-          <p:cNvPr id="25" name="Rounded Rectangle 24"/>
+          <p:cNvPr id="38" name="Rounded Rectangle 37"/>
           <p:cNvSpPr/>
           <p:nvPr/>
         </p:nvSpPr>
         <p:spPr>
           <a:xfrm>
-            <a:off x="4169664" y="3493008"/>
-            <a:ext cx="1920240" cy="914400"/>
+            <a:off x="4318894" y="4974336"/>
+            <a:ext cx="2993379" cy="438912"/>
           </a:xfrm>
           <a:prstGeom prst="roundRect">
             <a:avLst>
-              <a:gd name="adj" fmla="val 12000"/>
-            </a:avLst>
-          </a:prstGeom>
-          <a:solidFill>
-            <a:srgbClr val="FBE6D4"/>
-          </a:solidFill>
-          <a:ln w="9525">
-            <a:solidFill>
-              <a:srgbClr val="D2690C"/>
-            </a:solidFill>
-          </a:ln>
-        </p:spPr>
-        <p:txBody>
-          <a:bodyPr rtlCol="0" anchor="ctr" wrap="square" tIns="36576" bIns="36576">
-            <a:noAutofit/>
-          </a:bodyPr>
-          <a:lstStyle/>
-          <a:p>
-            <a:pPr algn="ctr" latinLnBrk="0">
-              <a:lnSpc>
-                <a:spcPct val="100000"/>
-              </a:lnSpc>
-              <a:spcBef>
-                <a:spcPts val="0"/>
-              </a:spcBef>
-              <a:spcAft>
-                <a:spcPts val="200"/>
-              </a:spcAft>
-            </a:pPr>
-            <a:r>
-              <a:rPr sz="1100" b="1">
-                <a:solidFill>
-                  <a:srgbClr val="0A2B45"/>
-                </a:solidFill>
-                <a:latin typeface="Microsoft YaHei"/>
-                <a:ea typeface="Microsoft YaHei"/>
-                <a:cs typeface="Microsoft YaHei"/>
-              </a:rPr>
-              <a:t>策略推演</a:t>
-            </a:r>
-            <a:r>
-              <a:rPr sz="850" b="1">
-                <a:solidFill>
-                  <a:srgbClr val="C2570A"/>
-                </a:solidFill>
-                <a:latin typeface="Consolas"/>
-                <a:ea typeface="Microsoft YaHei"/>
-                <a:cs typeface="Microsoft YaHei"/>
-              </a:rPr>
-              <a:t>　Thought</a:t>
-            </a:r>
-          </a:p>
-          <a:p>
-            <a:pPr algn="ctr" latinLnBrk="0">
-              <a:lnSpc>
-                <a:spcPct val="100000"/>
-              </a:lnSpc>
-              <a:spcBef>
-                <a:spcPts val="0"/>
-              </a:spcBef>
-              <a:spcAft>
-                <a:spcPts val="0"/>
-              </a:spcAft>
-            </a:pPr>
-            <a:r>
-              <a:rPr sz="850" b="0">
-                <a:solidFill>
-                  <a:srgbClr val="1B4D69"/>
-                </a:solidFill>
-                <a:latin typeface="Microsoft YaHei"/>
-                <a:ea typeface="Microsoft YaHei"/>
-                <a:cs typeface="Microsoft YaHei"/>
-              </a:rPr>
-              <a:t>规划 DMA 搬运 / 计算流水</a:t>
-            </a:r>
-          </a:p>
-          <a:p>
-            <a:pPr algn="ctr" latinLnBrk="0">
-              <a:lnSpc>
-                <a:spcPct val="100000"/>
-              </a:lnSpc>
-              <a:spcBef>
-                <a:spcPts val="0"/>
-              </a:spcBef>
-              <a:spcAft>
-                <a:spcPts val="0"/>
-              </a:spcAft>
-            </a:pPr>
-            <a:r>
-              <a:rPr sz="850" b="0">
-                <a:solidFill>
-                  <a:srgbClr val="1B4D69"/>
-                </a:solidFill>
-                <a:latin typeface="Microsoft YaHei"/>
-                <a:ea typeface="Microsoft YaHei"/>
-                <a:cs typeface="Microsoft YaHei"/>
-              </a:rPr>
-              <a:t>寄存器分配与指令替换</a:t>
-            </a:r>
-          </a:p>
-        </p:txBody>
-      </p:sp>
-      <p:cxnSp>
-        <p:nvCxnSpPr>
-          <p:cNvPr id="26" name="Connector 25"/>
-          <p:cNvCxnSpPr/>
-          <p:nvPr/>
-        </p:nvCxnSpPr>
-        <p:spPr>
-          <a:xfrm>
-            <a:off x="5650992" y="3300984"/>
-            <a:ext cx="0" cy="182880"/>
-          </a:xfrm>
-          <a:prstGeom prst="line">
-            <a:avLst/>
-          </a:prstGeom>
-          <a:ln w="19050">
-            <a:solidFill>
-              <a:srgbClr val="0F62CE"/>
-            </a:solidFill>
-            <a:tailEnd type="triangle" w="med" len="med"/>
-          </a:ln>
-        </p:spPr>
-      </p:cxnSp>
-      <p:sp>
-        <p:nvSpPr>
-          <p:cNvPr id="27" name="Rounded Rectangle 26"/>
-          <p:cNvSpPr/>
-          <p:nvPr/>
-        </p:nvSpPr>
-        <p:spPr>
-          <a:xfrm>
-            <a:off x="4169664" y="4608576"/>
-            <a:ext cx="2962656" cy="676656"/>
-          </a:xfrm>
-          <a:prstGeom prst="roundRect">
-            <a:avLst>
-              <a:gd name="adj" fmla="val 12000"/>
+              <a:gd name="adj" fmla="val 16666"/>
             </a:avLst>
           </a:prstGeom>
           <a:solidFill>
@@ -10651,44 +11196,20 @@
                 <a:spcPts val="0"/>
               </a:spcBef>
               <a:spcAft>
-                <a:spcPts val="200"/>
-              </a:spcAft>
-            </a:pPr>
-            <a:r>
-              <a:rPr sz="1100" b="1">
-                <a:solidFill>
-                  <a:srgbClr val="0A2B45"/>
-                </a:solidFill>
-                <a:latin typeface="Microsoft YaHei"/>
-                <a:ea typeface="Microsoft YaHei"/>
-                <a:cs typeface="Microsoft YaHei"/>
-              </a:rPr>
-              <a:t>动作执行</a:t>
-            </a:r>
-            <a:r>
-              <a:rPr sz="850" b="1">
+                <a:spcPts val="0"/>
+              </a:spcAft>
+            </a:pPr>
+            <a:r>
+              <a:rPr sz="1050" b="1">
                 <a:solidFill>
                   <a:srgbClr val="0F62CE"/>
                 </a:solidFill>
-                <a:latin typeface="Consolas"/>
-                <a:ea typeface="Microsoft YaHei"/>
-                <a:cs typeface="Microsoft YaHei"/>
-              </a:rPr>
-              <a:t>　Action</a:t>
-            </a:r>
-          </a:p>
-          <a:p>
-            <a:pPr algn="ctr" latinLnBrk="0">
-              <a:lnSpc>
-                <a:spcPct val="100000"/>
-              </a:lnSpc>
-              <a:spcBef>
-                <a:spcPts val="0"/>
-              </a:spcBef>
-              <a:spcAft>
-                <a:spcPts val="0"/>
-              </a:spcAft>
-            </a:pPr>
+                <a:latin typeface="Microsoft YaHei"/>
+                <a:ea typeface="Microsoft YaHei"/>
+                <a:cs typeface="Microsoft YaHei"/>
+              </a:rPr>
+              <a:t>达标输出 · 候选库</a:t>
+            </a:r>
             <a:r>
               <a:rPr sz="850" b="0">
                 <a:solidFill>
@@ -10698,21 +11219,21 @@
                 <a:ea typeface="Microsoft YaHei"/>
                 <a:cs typeface="Microsoft YaHei"/>
               </a:rPr>
-              <a:t>生成补丁，触发编译与评测</a:t>
+              <a:t>　交付最优 Kernel 代码</a:t>
             </a:r>
           </a:p>
         </p:txBody>
       </p:sp>
       <p:cxnSp>
         <p:nvCxnSpPr>
-          <p:cNvPr id="28" name="Connector 27"/>
+          <p:cNvPr id="39" name="Connector 38"/>
           <p:cNvCxnSpPr/>
           <p:nvPr/>
         </p:nvCxnSpPr>
         <p:spPr>
           <a:xfrm>
-            <a:off x="5650992" y="4416552"/>
-            <a:ext cx="0" cy="182880"/>
+            <a:off x="5815584" y="4800600"/>
+            <a:ext cx="0" cy="164592"/>
           </a:xfrm>
           <a:prstGeom prst="line">
             <a:avLst/>
@@ -10727,14 +11248,115 @@
       </p:cxnSp>
       <p:sp>
         <p:nvSpPr>
-          <p:cNvPr id="29" name="Rounded Rectangle 28"/>
+          <p:cNvPr id="40" name="TextBox 39"/>
+          <p:cNvSpPr txBox="1"/>
+          <p:nvPr/>
+        </p:nvSpPr>
+        <p:spPr>
+          <a:xfrm>
+            <a:off x="5907024" y="4791456"/>
+            <a:ext cx="1005840" cy="182880"/>
+          </a:xfrm>
+          <a:prstGeom prst="rect">
+            <a:avLst/>
+          </a:prstGeom>
+          <a:noFill/>
+        </p:spPr>
+        <p:txBody>
+          <a:bodyPr wrap="square" anchor="ctr" lIns="0" tIns="0" rIns="0" bIns="0">
+            <a:noAutofit/>
+          </a:bodyPr>
+          <a:lstStyle/>
+          <a:p>
+            <a:pPr algn="l" latinLnBrk="0">
+              <a:lnSpc>
+                <a:spcPct val="100000"/>
+              </a:lnSpc>
+              <a:spcBef>
+                <a:spcPts val="0"/>
+              </a:spcBef>
+              <a:spcAft>
+                <a:spcPts val="0"/>
+              </a:spcAft>
+            </a:pPr>
+            <a:r>
+              <a:rPr sz="750" b="1">
+                <a:solidFill>
+                  <a:srgbClr val="0F62CE"/>
+                </a:solidFill>
+                <a:latin typeface="Microsoft YaHei"/>
+                <a:ea typeface="Microsoft YaHei"/>
+                <a:cs typeface="Microsoft YaHei"/>
+              </a:rPr>
+              <a:t>发布达标实现</a:t>
+            </a:r>
+          </a:p>
+        </p:txBody>
+      </p:sp>
+      <p:sp>
+        <p:nvSpPr>
+          <p:cNvPr id="41" name="Right Brace 40"/>
           <p:cNvSpPr/>
           <p:nvPr/>
         </p:nvSpPr>
         <p:spPr>
           <a:xfrm>
-            <a:off x="6291072" y="3749039"/>
-            <a:ext cx="841248" cy="402336"/>
+            <a:off x="3236976" y="1609344"/>
+            <a:ext cx="146304" cy="1609343"/>
+          </a:xfrm>
+          <a:prstGeom prst="rightBrace">
+            <a:avLst>
+              <a:gd name="adj1" fmla="val 80000"/>
+              <a:gd name="adj2" fmla="val 50000"/>
+            </a:avLst>
+          </a:prstGeom>
+          <a:noFill/>
+          <a:ln w="15875">
+            <a:solidFill>
+              <a:srgbClr val="40708B"/>
+            </a:solidFill>
+          </a:ln>
+        </p:spPr>
+        <p:txBody>
+          <a:bodyPr rtlCol="0" anchor="ctr"/>
+          <a:lstStyle/>
+          <a:p>
+            <a:pPr algn="ctr"/>
+          </a:p>
+        </p:txBody>
+      </p:sp>
+      <p:cxnSp>
+        <p:nvCxnSpPr>
+          <p:cNvPr id="42" name="Connector 41"/>
+          <p:cNvCxnSpPr/>
+          <p:nvPr/>
+        </p:nvCxnSpPr>
+        <p:spPr>
+          <a:xfrm>
+            <a:off x="3410712" y="2414015"/>
+            <a:ext cx="871606" cy="0"/>
+          </a:xfrm>
+          <a:prstGeom prst="line">
+            <a:avLst/>
+          </a:prstGeom>
+          <a:ln w="15875">
+            <a:solidFill>
+              <a:srgbClr val="40708B"/>
+            </a:solidFill>
+            <a:tailEnd type="triangle" w="med" len="med"/>
+          </a:ln>
+        </p:spPr>
+      </p:cxnSp>
+      <p:sp>
+        <p:nvSpPr>
+          <p:cNvPr id="43" name="Rounded Rectangle 42"/>
+          <p:cNvSpPr/>
+          <p:nvPr/>
+        </p:nvSpPr>
+        <p:spPr>
+          <a:xfrm>
+            <a:off x="3401568" y="2157984"/>
+            <a:ext cx="694944" cy="201168"/>
           </a:xfrm>
           <a:prstGeom prst="roundRect">
             <a:avLst>
@@ -10742,14 +11364,16 @@
             </a:avLst>
           </a:prstGeom>
           <a:solidFill>
-            <a:srgbClr val="D2690C"/>
+            <a:srgbClr val="FFFFFF"/>
           </a:solidFill>
-          <a:ln>
-            <a:noFill/>
+          <a:ln w="9525">
+            <a:solidFill>
+              <a:srgbClr val="40708B"/>
+            </a:solidFill>
           </a:ln>
         </p:spPr>
         <p:txBody>
-          <a:bodyPr rtlCol="0" anchor="ctr" wrap="square" lIns="27432" tIns="0" rIns="27432" bIns="0">
+          <a:bodyPr rtlCol="0" anchor="ctr" wrap="square" lIns="18288" tIns="0" rIns="18288" bIns="0">
             <a:noAutofit/>
           </a:bodyPr>
           <a:lstStyle/>
@@ -10766,33 +11390,154 @@
               </a:spcAft>
             </a:pPr>
             <a:r>
-              <a:rPr sz="950" b="1">
-                <a:solidFill>
-                  <a:srgbClr val="FFFFFF"/>
-                </a:solidFill>
-                <a:latin typeface="Microsoft YaHei"/>
-                <a:ea typeface="Microsoft YaHei"/>
-                <a:cs typeface="Microsoft YaHei"/>
-              </a:rPr>
-              <a:t>大模型</a:t>
-            </a:r>
-          </a:p>
-        </p:txBody>
-      </p:sp>
-      <p:cxnSp>
-        <p:nvCxnSpPr>
-          <p:cNvPr id="30" name="Connector 29"/>
-          <p:cNvCxnSpPr/>
-          <p:nvPr/>
-        </p:nvCxnSpPr>
-        <p:spPr>
-          <a:xfrm flipH="1">
-            <a:off x="6126480" y="3950208"/>
-            <a:ext cx="128016" cy="0"/>
-          </a:xfrm>
-          <a:prstGeom prst="line">
-            <a:avLst/>
-          </a:prstGeom>
+              <a:rPr sz="750" b="1">
+                <a:solidFill>
+                  <a:srgbClr val="40708B"/>
+                </a:solidFill>
+                <a:latin typeface="Microsoft YaHei"/>
+                <a:ea typeface="Microsoft YaHei"/>
+                <a:cs typeface="Microsoft YaHei"/>
+              </a:rPr>
+              <a:t>读取 / 感知</a:t>
+            </a:r>
+          </a:p>
+        </p:txBody>
+      </p:sp>
+      <p:sp>
+        <p:nvSpPr>
+          <p:cNvPr id="44" name="Freeform 43"/>
+          <p:cNvSpPr/>
+          <p:nvPr/>
+        </p:nvSpPr>
+        <p:spPr>
+          <a:xfrm>
+            <a:off x="2871216" y="3456432"/>
+            <a:ext cx="1411102" cy="393192"/>
+          </a:xfrm>
+          <a:custGeom>
+            <a:avLst/>
+            <a:gdLst/>
+            <a:ahLst/>
+            <a:cxnLst/>
+            <a:rect l="l" t="t" r="r" b="b"/>
+            <a:pathLst>
+              <a:path w="1411102" h="393192">
+                <a:moveTo>
+                  <a:pt x="0" y="393192"/>
+                </a:moveTo>
+                <a:lnTo>
+                  <a:pt x="0" y="0"/>
+                </a:lnTo>
+                <a:lnTo>
+                  <a:pt x="1411102" y="0"/>
+                </a:lnTo>
+              </a:path>
+            </a:pathLst>
+          </a:custGeom>
+          <a:noFill/>
+          <a:ln w="15875">
+            <a:solidFill>
+              <a:srgbClr val="40708B"/>
+            </a:solidFill>
+            <a:tailEnd type="triangle" w="med" len="med"/>
+          </a:ln>
+        </p:spPr>
+        <p:txBody>
+          <a:bodyPr rtlCol="0" anchor="ctr"/>
+          <a:lstStyle/>
+          <a:p>
+            <a:pPr algn="ctr"/>
+          </a:p>
+        </p:txBody>
+      </p:sp>
+      <p:sp>
+        <p:nvSpPr>
+          <p:cNvPr id="45" name="Rounded Rectangle 44"/>
+          <p:cNvSpPr/>
+          <p:nvPr/>
+        </p:nvSpPr>
+        <p:spPr>
+          <a:xfrm>
+            <a:off x="3538727" y="3200400"/>
+            <a:ext cx="420624" cy="201168"/>
+          </a:xfrm>
+          <a:prstGeom prst="roundRect">
+            <a:avLst>
+              <a:gd name="adj" fmla="val 50000"/>
+            </a:avLst>
+          </a:prstGeom>
+          <a:solidFill>
+            <a:srgbClr val="FFFFFF"/>
+          </a:solidFill>
+          <a:ln w="9525">
+            <a:solidFill>
+              <a:srgbClr val="40708B"/>
+            </a:solidFill>
+          </a:ln>
+        </p:spPr>
+        <p:txBody>
+          <a:bodyPr rtlCol="0" anchor="ctr" wrap="square" lIns="18288" tIns="0" rIns="18288" bIns="0">
+            <a:noAutofit/>
+          </a:bodyPr>
+          <a:lstStyle/>
+          <a:p>
+            <a:pPr algn="ctr" latinLnBrk="0">
+              <a:lnSpc>
+                <a:spcPct val="100000"/>
+              </a:lnSpc>
+              <a:spcBef>
+                <a:spcPts val="0"/>
+              </a:spcBef>
+              <a:spcAft>
+                <a:spcPts val="0"/>
+              </a:spcAft>
+            </a:pPr>
+            <a:r>
+              <a:rPr sz="750" b="1">
+                <a:solidFill>
+                  <a:srgbClr val="40708B"/>
+                </a:solidFill>
+                <a:latin typeface="Microsoft YaHei"/>
+                <a:ea typeface="Microsoft YaHei"/>
+                <a:cs typeface="Microsoft YaHei"/>
+              </a:rPr>
+              <a:t>观察</a:t>
+            </a:r>
+          </a:p>
+        </p:txBody>
+      </p:sp>
+      <p:sp>
+        <p:nvSpPr>
+          <p:cNvPr id="46" name="Freeform 45"/>
+          <p:cNvSpPr/>
+          <p:nvPr/>
+        </p:nvSpPr>
+        <p:spPr>
+          <a:xfrm>
+            <a:off x="7348849" y="2688336"/>
+            <a:ext cx="1411103" cy="768096"/>
+          </a:xfrm>
+          <a:custGeom>
+            <a:avLst/>
+            <a:gdLst/>
+            <a:ahLst/>
+            <a:cxnLst/>
+            <a:rect l="l" t="t" r="r" b="b"/>
+            <a:pathLst>
+              <a:path w="1411103" h="768096">
+                <a:moveTo>
+                  <a:pt x="0" y="768096"/>
+                </a:moveTo>
+                <a:lnTo>
+                  <a:pt x="1411103" y="768096"/>
+                </a:lnTo>
+                <a:lnTo>
+                  <a:pt x="1411103" y="0"/>
+                </a:lnTo>
+              </a:path>
+            </a:pathLst>
+          </a:custGeom>
+          <a:noFill/>
           <a:ln w="19050">
             <a:solidFill>
               <a:srgbClr val="D2690C"/>
@@ -10800,78 +11545,191 @@
             <a:tailEnd type="triangle" w="med" len="med"/>
           </a:ln>
         </p:spPr>
-      </p:cxnSp>
-      <p:sp>
-        <p:nvSpPr>
-          <p:cNvPr id="31" name="TextBox 30"/>
-          <p:cNvSpPr txBox="1"/>
-          <p:nvPr/>
-        </p:nvSpPr>
-        <p:spPr>
-          <a:xfrm>
-            <a:off x="6236208" y="3511296"/>
-            <a:ext cx="914400" cy="182880"/>
-          </a:xfrm>
-          <a:prstGeom prst="rect">
-            <a:avLst/>
-          </a:prstGeom>
-          <a:noFill/>
-        </p:spPr>
-        <p:txBody>
-          <a:bodyPr wrap="square" anchor="ctr" lIns="0" tIns="0" rIns="0" bIns="0">
-            <a:noAutofit/>
-          </a:bodyPr>
-          <a:lstStyle/>
-          <a:p>
-            <a:pPr algn="ctr" latinLnBrk="0">
-              <a:lnSpc>
-                <a:spcPct val="100000"/>
-              </a:lnSpc>
-              <a:spcBef>
-                <a:spcPts val="0"/>
-              </a:spcBef>
-              <a:spcAft>
-                <a:spcPts val="0"/>
-              </a:spcAft>
-            </a:pPr>
-            <a:r>
-              <a:rPr sz="750" b="1">
-                <a:solidFill>
-                  <a:srgbClr val="C2570A"/>
-                </a:solidFill>
-                <a:latin typeface="Microsoft YaHei"/>
-                <a:ea typeface="Microsoft YaHei"/>
-                <a:cs typeface="Microsoft YaHei"/>
-              </a:rPr>
-              <a:t>LLM 推理</a:t>
-            </a:r>
-          </a:p>
-        </p:txBody>
-      </p:sp>
-      <p:sp>
-        <p:nvSpPr>
-          <p:cNvPr id="32" name="Rectangle 31"/>
+        <p:txBody>
+          <a:bodyPr rtlCol="0" anchor="ctr"/>
+          <a:lstStyle/>
+          <a:p>
+            <a:pPr algn="ctr"/>
+          </a:p>
+        </p:txBody>
+      </p:sp>
+      <p:sp>
+        <p:nvSpPr>
+          <p:cNvPr id="47" name="Rounded Rectangle 46"/>
           <p:cNvSpPr/>
           <p:nvPr/>
         </p:nvSpPr>
         <p:spPr>
           <a:xfrm>
-            <a:off x="7973568" y="1609344"/>
-            <a:ext cx="3669487" cy="1097280"/>
-          </a:xfrm>
-          <a:prstGeom prst="rect">
-            <a:avLst/>
+            <a:off x="7671816" y="3200400"/>
+            <a:ext cx="603504" cy="201168"/>
+          </a:xfrm>
+          <a:prstGeom prst="roundRect">
+            <a:avLst>
+              <a:gd name="adj" fmla="val 50000"/>
+            </a:avLst>
           </a:prstGeom>
           <a:solidFill>
-            <a:srgbClr val="F2F8FD"/>
+            <a:srgbClr val="FFFFFF"/>
           </a:solidFill>
           <a:ln w="9525">
             <a:solidFill>
-              <a:srgbClr val="CFE3F0"/>
+              <a:srgbClr val="C2570A"/>
             </a:solidFill>
           </a:ln>
         </p:spPr>
         <p:txBody>
+          <a:bodyPr rtlCol="0" anchor="ctr" wrap="square" lIns="18288" tIns="0" rIns="18288" bIns="0">
+            <a:noAutofit/>
+          </a:bodyPr>
+          <a:lstStyle/>
+          <a:p>
+            <a:pPr algn="ctr" latinLnBrk="0">
+              <a:lnSpc>
+                <a:spcPct val="100000"/>
+              </a:lnSpc>
+              <a:spcBef>
+                <a:spcPts val="0"/>
+              </a:spcBef>
+              <a:spcAft>
+                <a:spcPts val="0"/>
+              </a:spcAft>
+            </a:pPr>
+            <a:r>
+              <a:rPr sz="750" b="1">
+                <a:solidFill>
+                  <a:srgbClr val="C2570A"/>
+                </a:solidFill>
+                <a:latin typeface="Microsoft YaHei"/>
+                <a:ea typeface="Microsoft YaHei"/>
+                <a:cs typeface="Microsoft YaHei"/>
+              </a:rPr>
+              <a:t>按需调用</a:t>
+            </a:r>
+          </a:p>
+        </p:txBody>
+      </p:sp>
+      <p:cxnSp>
+        <p:nvCxnSpPr>
+          <p:cNvPr id="48" name="Connector 47"/>
+          <p:cNvCxnSpPr/>
+          <p:nvPr/>
+        </p:nvCxnSpPr>
+        <p:spPr>
+          <a:xfrm>
+            <a:off x="7348849" y="4526280"/>
+            <a:ext cx="1045343" cy="0"/>
+          </a:xfrm>
+          <a:prstGeom prst="line">
+            <a:avLst/>
+          </a:prstGeom>
+          <a:ln w="19050">
+            <a:solidFill>
+              <a:srgbClr val="D2690C"/>
+            </a:solidFill>
+            <a:tailEnd type="triangle" w="med" len="med"/>
+          </a:ln>
+        </p:spPr>
+      </p:cxnSp>
+      <p:sp>
+        <p:nvSpPr>
+          <p:cNvPr id="49" name="Rounded Rectangle 48"/>
+          <p:cNvSpPr/>
+          <p:nvPr/>
+        </p:nvSpPr>
+        <p:spPr>
+          <a:xfrm>
+            <a:off x="7671816" y="4270248"/>
+            <a:ext cx="603504" cy="201168"/>
+          </a:xfrm>
+          <a:prstGeom prst="roundRect">
+            <a:avLst>
+              <a:gd name="adj" fmla="val 50000"/>
+            </a:avLst>
+          </a:prstGeom>
+          <a:solidFill>
+            <a:srgbClr val="FFFFFF"/>
+          </a:solidFill>
+          <a:ln w="9525">
+            <a:solidFill>
+              <a:srgbClr val="C2570A"/>
+            </a:solidFill>
+          </a:ln>
+        </p:spPr>
+        <p:txBody>
+          <a:bodyPr rtlCol="0" anchor="ctr" wrap="square" lIns="18288" tIns="0" rIns="18288" bIns="0">
+            <a:noAutofit/>
+          </a:bodyPr>
+          <a:lstStyle/>
+          <a:p>
+            <a:pPr algn="ctr" latinLnBrk="0">
+              <a:lnSpc>
+                <a:spcPct val="100000"/>
+              </a:lnSpc>
+              <a:spcBef>
+                <a:spcPts val="0"/>
+              </a:spcBef>
+              <a:spcAft>
+                <a:spcPts val="0"/>
+              </a:spcAft>
+            </a:pPr>
+            <a:r>
+              <a:rPr sz="750" b="1">
+                <a:solidFill>
+                  <a:srgbClr val="C2570A"/>
+                </a:solidFill>
+                <a:latin typeface="Microsoft YaHei"/>
+                <a:ea typeface="Microsoft YaHei"/>
+                <a:cs typeface="Microsoft YaHei"/>
+              </a:rPr>
+              <a:t>触发评测</a:t>
+            </a:r>
+          </a:p>
+        </p:txBody>
+      </p:sp>
+      <p:sp>
+        <p:nvSpPr>
+          <p:cNvPr id="50" name="Freeform 49"/>
+          <p:cNvSpPr/>
+          <p:nvPr/>
+        </p:nvSpPr>
+        <p:spPr>
+          <a:xfrm>
+            <a:off x="1874519" y="5212080"/>
+            <a:ext cx="8162392" cy="493776"/>
+          </a:xfrm>
+          <a:custGeom>
+            <a:avLst/>
+            <a:gdLst/>
+            <a:ahLst/>
+            <a:cxnLst/>
+            <a:rect l="l" t="t" r="r" b="b"/>
+            <a:pathLst>
+              <a:path w="8162392" h="493776">
+                <a:moveTo>
+                  <a:pt x="8162392" y="0"/>
+                </a:moveTo>
+                <a:lnTo>
+                  <a:pt x="8162392" y="493776"/>
+                </a:lnTo>
+                <a:lnTo>
+                  <a:pt x="0" y="493776"/>
+                </a:lnTo>
+                <a:lnTo>
+                  <a:pt x="0" y="0"/>
+                </a:lnTo>
+              </a:path>
+            </a:pathLst>
+          </a:custGeom>
+          <a:noFill/>
+          <a:ln w="15875">
+            <a:solidFill>
+              <a:srgbClr val="40708B"/>
+            </a:solidFill>
+            <a:tailEnd type="triangle" w="med" len="med"/>
+          </a:ln>
+        </p:spPr>
+        <p:txBody>
           <a:bodyPr rtlCol="0" anchor="ctr"/>
           <a:lstStyle/>
           <a:p>
@@ -10881,14 +11739,99 @@
       </p:sp>
       <p:sp>
         <p:nvSpPr>
-          <p:cNvPr id="33" name="Rectangle 32"/>
+          <p:cNvPr id="51" name="Rounded Rectangle 50"/>
           <p:cNvSpPr/>
           <p:nvPr/>
         </p:nvSpPr>
         <p:spPr>
           <a:xfrm>
-            <a:off x="7973568" y="1609344"/>
-            <a:ext cx="64008" cy="1097280"/>
+            <a:off x="4645152" y="5605272"/>
+            <a:ext cx="2340864" cy="201168"/>
+          </a:xfrm>
+          <a:prstGeom prst="roundRect">
+            <a:avLst>
+              <a:gd name="adj" fmla="val 50000"/>
+            </a:avLst>
+          </a:prstGeom>
+          <a:solidFill>
+            <a:srgbClr val="FFFFFF"/>
+          </a:solidFill>
+          <a:ln w="9525">
+            <a:solidFill>
+              <a:srgbClr val="40708B"/>
+            </a:solidFill>
+          </a:ln>
+        </p:spPr>
+        <p:txBody>
+          <a:bodyPr rtlCol="0" anchor="ctr" wrap="square" lIns="18288" tIns="0" rIns="18288" bIns="0">
+            <a:noAutofit/>
+          </a:bodyPr>
+          <a:lstStyle/>
+          <a:p>
+            <a:pPr algn="ctr" latinLnBrk="0">
+              <a:lnSpc>
+                <a:spcPct val="100000"/>
+              </a:lnSpc>
+              <a:spcBef>
+                <a:spcPts val="0"/>
+              </a:spcBef>
+              <a:spcAft>
+                <a:spcPts val="0"/>
+              </a:spcAft>
+            </a:pPr>
+            <a:r>
+              <a:rPr sz="800" b="1">
+                <a:solidFill>
+                  <a:srgbClr val="40708B"/>
+                </a:solidFill>
+                <a:latin typeface="Microsoft YaHei"/>
+                <a:ea typeface="Microsoft YaHei"/>
+                <a:cs typeface="Microsoft YaHei"/>
+              </a:rPr>
+              <a:t>回写：编译报错 · 精度偏差 · 瓶颈证据</a:t>
+            </a:r>
+          </a:p>
+        </p:txBody>
+      </p:sp>
+      <p:sp>
+        <p:nvSpPr>
+          <p:cNvPr id="52" name="Rectangle 51"/>
+          <p:cNvSpPr/>
+          <p:nvPr/>
+        </p:nvSpPr>
+        <p:spPr>
+          <a:xfrm>
+            <a:off x="548640" y="5907024"/>
+            <a:ext cx="11094415" cy="530352"/>
+          </a:xfrm>
+          <a:prstGeom prst="rect">
+            <a:avLst/>
+          </a:prstGeom>
+          <a:solidFill>
+            <a:srgbClr val="C9E1FC"/>
+          </a:solidFill>
+          <a:ln>
+            <a:noFill/>
+          </a:ln>
+        </p:spPr>
+        <p:txBody>
+          <a:bodyPr rtlCol="0" anchor="ctr"/>
+          <a:lstStyle/>
+          <a:p>
+            <a:pPr algn="ctr"/>
+          </a:p>
+        </p:txBody>
+      </p:sp>
+      <p:sp>
+        <p:nvSpPr>
+          <p:cNvPr id="53" name="Rectangle 52"/>
+          <p:cNvSpPr/>
+          <p:nvPr/>
+        </p:nvSpPr>
+        <p:spPr>
+          <a:xfrm>
+            <a:off x="548640" y="5907024"/>
+            <a:ext cx="73152" cy="530352"/>
           </a:xfrm>
           <a:prstGeom prst="rect">
             <a:avLst/>
@@ -10910,937 +11853,7 @@
       </p:sp>
       <p:sp>
         <p:nvSpPr>
-          <p:cNvPr id="34" name="TextBox 33"/>
-          <p:cNvSpPr txBox="1"/>
-          <p:nvPr/>
-        </p:nvSpPr>
-        <p:spPr>
-          <a:xfrm>
-            <a:off x="8156448" y="1655064"/>
-            <a:ext cx="3340303" cy="1005839"/>
-          </a:xfrm>
-          <a:prstGeom prst="rect">
-            <a:avLst/>
-          </a:prstGeom>
-          <a:noFill/>
-        </p:spPr>
-        <p:txBody>
-          <a:bodyPr wrap="square" anchor="ctr" lIns="0" tIns="0" rIns="0" bIns="0">
-            <a:noAutofit/>
-          </a:bodyPr>
-          <a:lstStyle/>
-          <a:p>
-            <a:pPr algn="l" latinLnBrk="0">
-              <a:lnSpc>
-                <a:spcPct val="100000"/>
-              </a:lnSpc>
-              <a:spcBef>
-                <a:spcPts val="0"/>
-              </a:spcBef>
-              <a:spcAft>
-                <a:spcPts val="300"/>
-              </a:spcAft>
-            </a:pPr>
-            <a:r>
-              <a:rPr sz="1050" b="1">
-                <a:solidFill>
-                  <a:srgbClr val="0A2B45"/>
-                </a:solidFill>
-                <a:latin typeface="Microsoft YaHei"/>
-                <a:ea typeface="Microsoft YaHei"/>
-                <a:cs typeface="Microsoft YaHei"/>
-              </a:rPr>
-              <a:t>源码与检索工具</a:t>
-            </a:r>
-            <a:r>
-              <a:rPr sz="800" b="1">
-                <a:solidFill>
-                  <a:srgbClr val="0F62CE"/>
-                </a:solidFill>
-                <a:latin typeface="Consolas"/>
-                <a:ea typeface="Microsoft YaHei"/>
-                <a:cs typeface="Microsoft YaHei"/>
-              </a:rPr>
-              <a:t>　Source &amp; Retrieval</a:t>
-            </a:r>
-          </a:p>
-          <a:p>
-            <a:pPr algn="l" latinLnBrk="0">
-              <a:lnSpc>
-                <a:spcPct val="100000"/>
-              </a:lnSpc>
-              <a:spcBef>
-                <a:spcPts val="0"/>
-              </a:spcBef>
-              <a:spcAft>
-                <a:spcPts val="0"/>
-              </a:spcAft>
-            </a:pPr>
-            <a:r>
-              <a:rPr sz="900" b="0">
-                <a:solidFill>
-                  <a:srgbClr val="1B4D69"/>
-                </a:solidFill>
-                <a:latin typeface="Microsoft YaHei"/>
-                <a:ea typeface="Microsoft YaHei"/>
-                <a:cs typeface="Microsoft YaHei"/>
-              </a:rPr>
-              <a:t>·　算子模板读取</a:t>
-            </a:r>
-          </a:p>
-          <a:p>
-            <a:pPr algn="l" latinLnBrk="0">
-              <a:lnSpc>
-                <a:spcPct val="100000"/>
-              </a:lnSpc>
-              <a:spcBef>
-                <a:spcPts val="0"/>
-              </a:spcBef>
-              <a:spcAft>
-                <a:spcPts val="0"/>
-              </a:spcAft>
-            </a:pPr>
-            <a:r>
-              <a:rPr sz="900" b="0">
-                <a:solidFill>
-                  <a:srgbClr val="1B4D69"/>
-                </a:solidFill>
-                <a:latin typeface="Microsoft YaHei"/>
-                <a:ea typeface="Microsoft YaHei"/>
-                <a:cs typeface="Microsoft YaHei"/>
-              </a:rPr>
-              <a:t>·　AST 语法树检查</a:t>
-            </a:r>
-          </a:p>
-          <a:p>
-            <a:pPr algn="l" latinLnBrk="0">
-              <a:lnSpc>
-                <a:spcPct val="100000"/>
-              </a:lnSpc>
-              <a:spcBef>
-                <a:spcPts val="0"/>
-              </a:spcBef>
-              <a:spcAft>
-                <a:spcPts val="0"/>
-              </a:spcAft>
-            </a:pPr>
-            <a:r>
-              <a:rPr sz="900" b="0">
-                <a:solidFill>
-                  <a:srgbClr val="1B4D69"/>
-                </a:solidFill>
-                <a:latin typeface="Microsoft YaHei"/>
-                <a:ea typeface="Microsoft YaHei"/>
-                <a:cs typeface="Microsoft YaHei"/>
-              </a:rPr>
-              <a:t>·　代码补丁生成</a:t>
-            </a:r>
-          </a:p>
-        </p:txBody>
-      </p:sp>
-      <p:sp>
-        <p:nvSpPr>
-          <p:cNvPr id="35" name="Rectangle 34"/>
-          <p:cNvSpPr/>
-          <p:nvPr/>
-        </p:nvSpPr>
-        <p:spPr>
-          <a:xfrm>
-            <a:off x="7973568" y="3017520"/>
-            <a:ext cx="3669487" cy="1645920"/>
-          </a:xfrm>
-          <a:prstGeom prst="rect">
-            <a:avLst/>
-          </a:prstGeom>
-          <a:solidFill>
-            <a:srgbClr val="F2F8FD"/>
-          </a:solidFill>
-          <a:ln w="9525">
-            <a:solidFill>
-              <a:srgbClr val="CFE3F0"/>
-            </a:solidFill>
-          </a:ln>
-        </p:spPr>
-        <p:txBody>
-          <a:bodyPr rtlCol="0" anchor="ctr"/>
-          <a:lstStyle/>
-          <a:p>
-            <a:pPr algn="ctr"/>
-          </a:p>
-        </p:txBody>
-      </p:sp>
-      <p:sp>
-        <p:nvSpPr>
-          <p:cNvPr id="36" name="Rectangle 35"/>
-          <p:cNvSpPr/>
-          <p:nvPr/>
-        </p:nvSpPr>
-        <p:spPr>
-          <a:xfrm>
-            <a:off x="7973568" y="3017520"/>
-            <a:ext cx="64008" cy="1645920"/>
-          </a:xfrm>
-          <a:prstGeom prst="rect">
-            <a:avLst/>
-          </a:prstGeom>
-          <a:solidFill>
-            <a:srgbClr val="0F62CE"/>
-          </a:solidFill>
-          <a:ln>
-            <a:noFill/>
-          </a:ln>
-        </p:spPr>
-        <p:txBody>
-          <a:bodyPr rtlCol="0" anchor="ctr"/>
-          <a:lstStyle/>
-          <a:p>
-            <a:pPr algn="ctr"/>
-          </a:p>
-        </p:txBody>
-      </p:sp>
-      <p:sp>
-        <p:nvSpPr>
-          <p:cNvPr id="37" name="TextBox 36"/>
-          <p:cNvSpPr txBox="1"/>
-          <p:nvPr/>
-        </p:nvSpPr>
-        <p:spPr>
-          <a:xfrm>
-            <a:off x="8156448" y="3063239"/>
-            <a:ext cx="3340303" cy="1554480"/>
-          </a:xfrm>
-          <a:prstGeom prst="rect">
-            <a:avLst/>
-          </a:prstGeom>
-          <a:noFill/>
-        </p:spPr>
-        <p:txBody>
-          <a:bodyPr wrap="square" anchor="ctr" lIns="0" tIns="0" rIns="0" bIns="0">
-            <a:noAutofit/>
-          </a:bodyPr>
-          <a:lstStyle/>
-          <a:p>
-            <a:pPr algn="l" latinLnBrk="0">
-              <a:lnSpc>
-                <a:spcPct val="100000"/>
-              </a:lnSpc>
-              <a:spcBef>
-                <a:spcPts val="0"/>
-              </a:spcBef>
-              <a:spcAft>
-                <a:spcPts val="300"/>
-              </a:spcAft>
-            </a:pPr>
-            <a:r>
-              <a:rPr sz="1050" b="1">
-                <a:solidFill>
-                  <a:srgbClr val="0A2B45"/>
-                </a:solidFill>
-                <a:latin typeface="Microsoft YaHei"/>
-                <a:ea typeface="Microsoft YaHei"/>
-                <a:cs typeface="Microsoft YaHei"/>
-              </a:rPr>
-              <a:t>Harness &amp; 后端</a:t>
-            </a:r>
-            <a:r>
-              <a:rPr sz="800" b="1">
-                <a:solidFill>
-                  <a:srgbClr val="0F62CE"/>
-                </a:solidFill>
-                <a:latin typeface="Consolas"/>
-                <a:ea typeface="Microsoft YaHei"/>
-                <a:cs typeface="Microsoft YaHei"/>
-              </a:rPr>
-              <a:t>　backend/ 耦合</a:t>
-            </a:r>
-          </a:p>
-          <a:p>
-            <a:pPr algn="l" latinLnBrk="0">
-              <a:lnSpc>
-                <a:spcPct val="100000"/>
-              </a:lnSpc>
-              <a:spcBef>
-                <a:spcPts val="0"/>
-              </a:spcBef>
-              <a:spcAft>
-                <a:spcPts val="0"/>
-              </a:spcAft>
-            </a:pPr>
-            <a:r>
-              <a:rPr sz="900" b="0">
-                <a:solidFill>
-                  <a:srgbClr val="1B4D69"/>
-                </a:solidFill>
-                <a:latin typeface="Microsoft YaHei"/>
-                <a:ea typeface="Microsoft YaHei"/>
-                <a:cs typeface="Microsoft YaHei"/>
-              </a:rPr>
-              <a:t>·　L0 交叉编译运行</a:t>
-            </a:r>
-          </a:p>
-          <a:p>
-            <a:pPr algn="l" latinLnBrk="0">
-              <a:lnSpc>
-                <a:spcPct val="100000"/>
-              </a:lnSpc>
-              <a:spcBef>
-                <a:spcPts val="0"/>
-              </a:spcBef>
-              <a:spcAft>
-                <a:spcPts val="0"/>
-              </a:spcAft>
-            </a:pPr>
-            <a:r>
-              <a:rPr sz="900" b="0">
-                <a:solidFill>
-                  <a:srgbClr val="1B4D69"/>
-                </a:solidFill>
-                <a:latin typeface="Microsoft YaHei"/>
-                <a:ea typeface="Microsoft YaHei"/>
-                <a:cs typeface="Microsoft YaHei"/>
-              </a:rPr>
-              <a:t>·　L1 Golden 精度对齐</a:t>
-            </a:r>
-          </a:p>
-          <a:p>
-            <a:pPr algn="l" latinLnBrk="0">
-              <a:lnSpc>
-                <a:spcPct val="100000"/>
-              </a:lnSpc>
-              <a:spcBef>
-                <a:spcPts val="0"/>
-              </a:spcBef>
-              <a:spcAft>
-                <a:spcPts val="0"/>
-              </a:spcAft>
-            </a:pPr>
-            <a:r>
-              <a:rPr sz="900" b="0">
-                <a:solidFill>
-                  <a:srgbClr val="1B4D69"/>
-                </a:solidFill>
-                <a:latin typeface="Microsoft YaHei"/>
-                <a:ea typeface="Microsoft YaHei"/>
-                <a:cs typeface="Microsoft YaHei"/>
-              </a:rPr>
-              <a:t>·　Bench 真机微秒计时</a:t>
-            </a:r>
-          </a:p>
-          <a:p>
-            <a:pPr algn="l" latinLnBrk="0">
-              <a:lnSpc>
-                <a:spcPct val="100000"/>
-              </a:lnSpc>
-              <a:spcBef>
-                <a:spcPts val="0"/>
-              </a:spcBef>
-              <a:spcAft>
-                <a:spcPts val="0"/>
-              </a:spcAft>
-            </a:pPr>
-            <a:r>
-              <a:rPr sz="900" b="0">
-                <a:solidFill>
-                  <a:srgbClr val="1B4D69"/>
-                </a:solidFill>
-                <a:latin typeface="Microsoft YaHei"/>
-                <a:ea typeface="Microsoft YaHei"/>
-                <a:cs typeface="Microsoft YaHei"/>
-              </a:rPr>
-              <a:t>·　Profile 模拟器分析</a:t>
-            </a:r>
-          </a:p>
-        </p:txBody>
-      </p:sp>
-      <p:cxnSp>
-        <p:nvCxnSpPr>
-          <p:cNvPr id="38" name="Connector 37"/>
-          <p:cNvCxnSpPr/>
-          <p:nvPr/>
-        </p:nvCxnSpPr>
-        <p:spPr>
-          <a:xfrm>
-            <a:off x="3566160" y="2002536"/>
-            <a:ext cx="566928" cy="786384"/>
-          </a:xfrm>
-          <a:prstGeom prst="line">
-            <a:avLst/>
-          </a:prstGeom>
-          <a:ln w="15875">
-            <a:solidFill>
-              <a:srgbClr val="40708B"/>
-            </a:solidFill>
-            <a:tailEnd type="triangle" w="med" len="med"/>
-          </a:ln>
-        </p:spPr>
-      </p:cxnSp>
-      <p:cxnSp>
-        <p:nvCxnSpPr>
-          <p:cNvPr id="39" name="Connector 38"/>
-          <p:cNvCxnSpPr/>
-          <p:nvPr/>
-        </p:nvCxnSpPr>
-        <p:spPr>
-          <a:xfrm>
-            <a:off x="3566160" y="2898648"/>
-            <a:ext cx="566928" cy="0"/>
-          </a:xfrm>
-          <a:prstGeom prst="line">
-            <a:avLst/>
-          </a:prstGeom>
-          <a:ln w="15875">
-            <a:solidFill>
-              <a:srgbClr val="40708B"/>
-            </a:solidFill>
-            <a:tailEnd type="triangle" w="med" len="med"/>
-          </a:ln>
-        </p:spPr>
-      </p:cxnSp>
-      <p:cxnSp>
-        <p:nvCxnSpPr>
-          <p:cNvPr id="40" name="Connector 39"/>
-          <p:cNvCxnSpPr/>
-          <p:nvPr/>
-        </p:nvCxnSpPr>
-        <p:spPr>
-          <a:xfrm>
-            <a:off x="3566160" y="3904487"/>
-            <a:ext cx="566928" cy="0"/>
-          </a:xfrm>
-          <a:prstGeom prst="line">
-            <a:avLst/>
-          </a:prstGeom>
-          <a:ln w="15875">
-            <a:solidFill>
-              <a:srgbClr val="40708B"/>
-            </a:solidFill>
-            <a:tailEnd type="triangle" w="med" len="med"/>
-          </a:ln>
-        </p:spPr>
-      </p:cxnSp>
-      <p:sp>
-        <p:nvSpPr>
-          <p:cNvPr id="41" name="TextBox 40"/>
-          <p:cNvSpPr txBox="1"/>
-          <p:nvPr/>
-        </p:nvSpPr>
-        <p:spPr>
-          <a:xfrm>
-            <a:off x="3566160" y="2651760"/>
-            <a:ext cx="566928" cy="182880"/>
-          </a:xfrm>
-          <a:prstGeom prst="rect">
-            <a:avLst/>
-          </a:prstGeom>
-          <a:noFill/>
-        </p:spPr>
-        <p:txBody>
-          <a:bodyPr wrap="square" anchor="ctr" lIns="0" tIns="0" rIns="0" bIns="0">
-            <a:noAutofit/>
-          </a:bodyPr>
-          <a:lstStyle/>
-          <a:p>
-            <a:pPr algn="ctr" latinLnBrk="0">
-              <a:lnSpc>
-                <a:spcPct val="100000"/>
-              </a:lnSpc>
-              <a:spcBef>
-                <a:spcPts val="0"/>
-              </a:spcBef>
-              <a:spcAft>
-                <a:spcPts val="0"/>
-              </a:spcAft>
-            </a:pPr>
-            <a:r>
-              <a:rPr sz="800" b="1">
-                <a:solidFill>
-                  <a:srgbClr val="40708B"/>
-                </a:solidFill>
-                <a:latin typeface="Microsoft YaHei"/>
-                <a:ea typeface="Microsoft YaHei"/>
-                <a:cs typeface="Microsoft YaHei"/>
-              </a:rPr>
-              <a:t>观察</a:t>
-            </a:r>
-          </a:p>
-        </p:txBody>
-      </p:sp>
-      <p:sp>
-        <p:nvSpPr>
-          <p:cNvPr id="42" name="TextBox 41"/>
-          <p:cNvSpPr txBox="1"/>
-          <p:nvPr/>
-        </p:nvSpPr>
-        <p:spPr>
-          <a:xfrm>
-            <a:off x="3566160" y="3657600"/>
-            <a:ext cx="566928" cy="182880"/>
-          </a:xfrm>
-          <a:prstGeom prst="rect">
-            <a:avLst/>
-          </a:prstGeom>
-          <a:noFill/>
-        </p:spPr>
-        <p:txBody>
-          <a:bodyPr wrap="square" anchor="ctr" lIns="0" tIns="0" rIns="0" bIns="0">
-            <a:noAutofit/>
-          </a:bodyPr>
-          <a:lstStyle/>
-          <a:p>
-            <a:pPr algn="ctr" latinLnBrk="0">
-              <a:lnSpc>
-                <a:spcPct val="100000"/>
-              </a:lnSpc>
-              <a:spcBef>
-                <a:spcPts val="0"/>
-              </a:spcBef>
-              <a:spcAft>
-                <a:spcPts val="0"/>
-              </a:spcAft>
-            </a:pPr>
-            <a:r>
-              <a:rPr sz="800" b="1">
-                <a:solidFill>
-                  <a:srgbClr val="40708B"/>
-                </a:solidFill>
-                <a:latin typeface="Microsoft YaHei"/>
-                <a:ea typeface="Microsoft YaHei"/>
-                <a:cs typeface="Microsoft YaHei"/>
-              </a:rPr>
-              <a:t>观察</a:t>
-            </a:r>
-          </a:p>
-        </p:txBody>
-      </p:sp>
-      <p:sp>
-        <p:nvSpPr>
-          <p:cNvPr id="43" name="Freeform 42"/>
-          <p:cNvSpPr/>
-          <p:nvPr/>
-        </p:nvSpPr>
-        <p:spPr>
-          <a:xfrm>
-            <a:off x="7168896" y="2157984"/>
-            <a:ext cx="457200" cy="2788920"/>
-          </a:xfrm>
-          <a:custGeom>
-            <a:avLst/>
-            <a:gdLst/>
-            <a:ahLst/>
-            <a:cxnLst/>
-            <a:rect l="l" t="t" r="r" b="b"/>
-            <a:pathLst>
-              <a:path w="457200" h="2788920">
-                <a:moveTo>
-                  <a:pt x="0" y="2788920"/>
-                </a:moveTo>
-                <a:lnTo>
-                  <a:pt x="457200" y="2788920"/>
-                </a:lnTo>
-                <a:lnTo>
-                  <a:pt x="457200" y="0"/>
-                </a:lnTo>
-              </a:path>
-            </a:pathLst>
-          </a:custGeom>
-          <a:noFill/>
-          <a:ln w="19050">
-            <a:solidFill>
-              <a:srgbClr val="D2690C"/>
-            </a:solidFill>
-          </a:ln>
-        </p:spPr>
-        <p:txBody>
-          <a:bodyPr rtlCol="0" anchor="ctr"/>
-          <a:lstStyle/>
-          <a:p>
-            <a:pPr algn="ctr"/>
-          </a:p>
-        </p:txBody>
-      </p:sp>
-      <p:cxnSp>
-        <p:nvCxnSpPr>
-          <p:cNvPr id="44" name="Connector 43"/>
-          <p:cNvCxnSpPr/>
-          <p:nvPr/>
-        </p:nvCxnSpPr>
-        <p:spPr>
-          <a:xfrm>
-            <a:off x="7626096" y="2157984"/>
-            <a:ext cx="310896" cy="0"/>
-          </a:xfrm>
-          <a:prstGeom prst="line">
-            <a:avLst/>
-          </a:prstGeom>
-          <a:ln w="19050">
-            <a:solidFill>
-              <a:srgbClr val="D2690C"/>
-            </a:solidFill>
-            <a:tailEnd type="triangle" w="med" len="med"/>
-          </a:ln>
-        </p:spPr>
-      </p:cxnSp>
-      <p:sp>
-        <p:nvSpPr>
-          <p:cNvPr id="45" name="TextBox 44"/>
-          <p:cNvSpPr txBox="1"/>
-          <p:nvPr/>
-        </p:nvSpPr>
-        <p:spPr>
-          <a:xfrm>
-            <a:off x="7644383" y="1956815"/>
-            <a:ext cx="292608" cy="182880"/>
-          </a:xfrm>
-          <a:prstGeom prst="rect">
-            <a:avLst/>
-          </a:prstGeom>
-          <a:noFill/>
-        </p:spPr>
-        <p:txBody>
-          <a:bodyPr wrap="square" anchor="ctr" lIns="0" tIns="0" rIns="0" bIns="0">
-            <a:noAutofit/>
-          </a:bodyPr>
-          <a:lstStyle/>
-          <a:p>
-            <a:pPr algn="ctr" latinLnBrk="0">
-              <a:lnSpc>
-                <a:spcPct val="100000"/>
-              </a:lnSpc>
-              <a:spcBef>
-                <a:spcPts val="0"/>
-              </a:spcBef>
-              <a:spcAft>
-                <a:spcPts val="0"/>
-              </a:spcAft>
-            </a:pPr>
-            <a:r>
-              <a:rPr sz="800" b="1">
-                <a:solidFill>
-                  <a:srgbClr val="C2570A"/>
-                </a:solidFill>
-                <a:latin typeface="Microsoft YaHei"/>
-                <a:ea typeface="Microsoft YaHei"/>
-                <a:cs typeface="Microsoft YaHei"/>
-              </a:rPr>
-              <a:t>调用</a:t>
-            </a:r>
-          </a:p>
-        </p:txBody>
-      </p:sp>
-      <p:cxnSp>
-        <p:nvCxnSpPr>
-          <p:cNvPr id="46" name="Connector 45"/>
-          <p:cNvCxnSpPr/>
-          <p:nvPr/>
-        </p:nvCxnSpPr>
-        <p:spPr>
-          <a:xfrm>
-            <a:off x="7626096" y="3840480"/>
-            <a:ext cx="310896" cy="0"/>
-          </a:xfrm>
-          <a:prstGeom prst="line">
-            <a:avLst/>
-          </a:prstGeom>
-          <a:ln w="19050">
-            <a:solidFill>
-              <a:srgbClr val="D2690C"/>
-            </a:solidFill>
-            <a:tailEnd type="triangle" w="med" len="med"/>
-          </a:ln>
-        </p:spPr>
-      </p:cxnSp>
-      <p:sp>
-        <p:nvSpPr>
-          <p:cNvPr id="47" name="TextBox 46"/>
-          <p:cNvSpPr txBox="1"/>
-          <p:nvPr/>
-        </p:nvSpPr>
-        <p:spPr>
-          <a:xfrm>
-            <a:off x="7644383" y="3639312"/>
-            <a:ext cx="292608" cy="182880"/>
-          </a:xfrm>
-          <a:prstGeom prst="rect">
-            <a:avLst/>
-          </a:prstGeom>
-          <a:noFill/>
-        </p:spPr>
-        <p:txBody>
-          <a:bodyPr wrap="square" anchor="ctr" lIns="0" tIns="0" rIns="0" bIns="0">
-            <a:noAutofit/>
-          </a:bodyPr>
-          <a:lstStyle/>
-          <a:p>
-            <a:pPr algn="ctr" latinLnBrk="0">
-              <a:lnSpc>
-                <a:spcPct val="100000"/>
-              </a:lnSpc>
-              <a:spcBef>
-                <a:spcPts val="0"/>
-              </a:spcBef>
-              <a:spcAft>
-                <a:spcPts val="0"/>
-              </a:spcAft>
-            </a:pPr>
-            <a:r>
-              <a:rPr sz="800" b="1">
-                <a:solidFill>
-                  <a:srgbClr val="C2570A"/>
-                </a:solidFill>
-                <a:latin typeface="Microsoft YaHei"/>
-                <a:ea typeface="Microsoft YaHei"/>
-                <a:cs typeface="Microsoft YaHei"/>
-              </a:rPr>
-              <a:t>触发</a:t>
-            </a:r>
-          </a:p>
-        </p:txBody>
-      </p:sp>
-      <p:cxnSp>
-        <p:nvCxnSpPr>
-          <p:cNvPr id="48" name="Connector 47"/>
-          <p:cNvCxnSpPr/>
-          <p:nvPr/>
-        </p:nvCxnSpPr>
-        <p:spPr>
-          <a:xfrm flipH="1">
-            <a:off x="3566160" y="4946904"/>
-            <a:ext cx="566928" cy="0"/>
-          </a:xfrm>
-          <a:prstGeom prst="line">
-            <a:avLst/>
-          </a:prstGeom>
-          <a:ln w="19050">
-            <a:solidFill>
-              <a:srgbClr val="0F62CE"/>
-            </a:solidFill>
-            <a:tailEnd type="triangle" w="med" len="med"/>
-          </a:ln>
-        </p:spPr>
-      </p:cxnSp>
-      <p:sp>
-        <p:nvSpPr>
-          <p:cNvPr id="49" name="TextBox 48"/>
-          <p:cNvSpPr txBox="1"/>
-          <p:nvPr/>
-        </p:nvSpPr>
-        <p:spPr>
-          <a:xfrm>
-            <a:off x="3566160" y="4700016"/>
-            <a:ext cx="566928" cy="182880"/>
-          </a:xfrm>
-          <a:prstGeom prst="rect">
-            <a:avLst/>
-          </a:prstGeom>
-          <a:noFill/>
-        </p:spPr>
-        <p:txBody>
-          <a:bodyPr wrap="square" anchor="ctr" lIns="0" tIns="0" rIns="0" bIns="0">
-            <a:noAutofit/>
-          </a:bodyPr>
-          <a:lstStyle/>
-          <a:p>
-            <a:pPr algn="ctr" latinLnBrk="0">
-              <a:lnSpc>
-                <a:spcPct val="100000"/>
-              </a:lnSpc>
-              <a:spcBef>
-                <a:spcPts val="0"/>
-              </a:spcBef>
-              <a:spcAft>
-                <a:spcPts val="0"/>
-              </a:spcAft>
-            </a:pPr>
-            <a:r>
-              <a:rPr sz="800" b="1">
-                <a:solidFill>
-                  <a:srgbClr val="0F62CE"/>
-                </a:solidFill>
-                <a:latin typeface="Microsoft YaHei"/>
-                <a:ea typeface="Microsoft YaHei"/>
-                <a:cs typeface="Microsoft YaHei"/>
-              </a:rPr>
-              <a:t>发布</a:t>
-            </a:r>
-          </a:p>
-        </p:txBody>
-      </p:sp>
-      <p:sp>
-        <p:nvSpPr>
-          <p:cNvPr id="50" name="Freeform 49"/>
-          <p:cNvSpPr/>
-          <p:nvPr/>
-        </p:nvSpPr>
-        <p:spPr>
-          <a:xfrm>
-            <a:off x="786384" y="4700016"/>
-            <a:ext cx="9021927" cy="914400"/>
-          </a:xfrm>
-          <a:custGeom>
-            <a:avLst/>
-            <a:gdLst/>
-            <a:ahLst/>
-            <a:cxnLst/>
-            <a:rect l="l" t="t" r="r" b="b"/>
-            <a:pathLst>
-              <a:path w="9021927" h="914400">
-                <a:moveTo>
-                  <a:pt x="9021927" y="0"/>
-                </a:moveTo>
-                <a:lnTo>
-                  <a:pt x="9021927" y="914400"/>
-                </a:lnTo>
-                <a:lnTo>
-                  <a:pt x="0" y="914400"/>
-                </a:lnTo>
-              </a:path>
-            </a:pathLst>
-          </a:custGeom>
-          <a:noFill/>
-          <a:ln w="15875">
-            <a:solidFill>
-              <a:srgbClr val="40708B"/>
-            </a:solidFill>
-          </a:ln>
-        </p:spPr>
-        <p:txBody>
-          <a:bodyPr rtlCol="0" anchor="ctr"/>
-          <a:lstStyle/>
-          <a:p>
-            <a:pPr algn="ctr"/>
-          </a:p>
-        </p:txBody>
-      </p:sp>
-      <p:cxnSp>
-        <p:nvCxnSpPr>
-          <p:cNvPr id="51" name="Connector 50"/>
-          <p:cNvCxnSpPr/>
-          <p:nvPr/>
-        </p:nvCxnSpPr>
-        <p:spPr>
-          <a:xfrm flipV="1">
-            <a:off x="786384" y="4443984"/>
-            <a:ext cx="0" cy="1170432"/>
-          </a:xfrm>
-          <a:prstGeom prst="line">
-            <a:avLst/>
-          </a:prstGeom>
-          <a:ln w="15875">
-            <a:solidFill>
-              <a:srgbClr val="40708B"/>
-            </a:solidFill>
-            <a:tailEnd type="triangle" w="med" len="med"/>
-          </a:ln>
-        </p:spPr>
-      </p:cxnSp>
-      <p:sp>
-        <p:nvSpPr>
-          <p:cNvPr id="52" name="TextBox 51"/>
-          <p:cNvSpPr txBox="1"/>
-          <p:nvPr/>
-        </p:nvSpPr>
-        <p:spPr>
-          <a:xfrm>
-            <a:off x="4206240" y="5394959"/>
-            <a:ext cx="3108960" cy="182880"/>
-          </a:xfrm>
-          <a:prstGeom prst="rect">
-            <a:avLst/>
-          </a:prstGeom>
-          <a:noFill/>
-        </p:spPr>
-        <p:txBody>
-          <a:bodyPr wrap="square" anchor="ctr" lIns="0" tIns="0" rIns="0" bIns="0">
-            <a:noAutofit/>
-          </a:bodyPr>
-          <a:lstStyle/>
-          <a:p>
-            <a:pPr algn="ctr" latinLnBrk="0">
-              <a:lnSpc>
-                <a:spcPct val="100000"/>
-              </a:lnSpc>
-              <a:spcBef>
-                <a:spcPts val="0"/>
-              </a:spcBef>
-              <a:spcAft>
-                <a:spcPts val="0"/>
-              </a:spcAft>
-            </a:pPr>
-            <a:r>
-              <a:rPr sz="800" b="0">
-                <a:solidFill>
-                  <a:srgbClr val="40708B"/>
-                </a:solidFill>
-                <a:latin typeface="Microsoft YaHei"/>
-                <a:ea typeface="Microsoft YaHei"/>
-                <a:cs typeface="Microsoft YaHei"/>
-              </a:rPr>
-              <a:t>回写：编译报错 · 精度偏差 · 瓶颈证据</a:t>
-            </a:r>
-          </a:p>
-        </p:txBody>
-      </p:sp>
-      <p:sp>
-        <p:nvSpPr>
-          <p:cNvPr id="53" name="Rectangle 52"/>
-          <p:cNvSpPr/>
-          <p:nvPr/>
-        </p:nvSpPr>
-        <p:spPr>
-          <a:xfrm>
-            <a:off x="548640" y="5907024"/>
-            <a:ext cx="11094415" cy="530352"/>
-          </a:xfrm>
-          <a:prstGeom prst="rect">
-            <a:avLst/>
-          </a:prstGeom>
-          <a:solidFill>
-            <a:srgbClr val="C9E1FC"/>
-          </a:solidFill>
-          <a:ln>
-            <a:noFill/>
-          </a:ln>
-        </p:spPr>
-        <p:txBody>
-          <a:bodyPr rtlCol="0" anchor="ctr"/>
-          <a:lstStyle/>
-          <a:p>
-            <a:pPr algn="ctr"/>
-          </a:p>
-        </p:txBody>
-      </p:sp>
-      <p:sp>
-        <p:nvSpPr>
-          <p:cNvPr id="54" name="Rectangle 53"/>
-          <p:cNvSpPr/>
-          <p:nvPr/>
-        </p:nvSpPr>
-        <p:spPr>
-          <a:xfrm>
-            <a:off x="548640" y="5907024"/>
-            <a:ext cx="73152" cy="530352"/>
-          </a:xfrm>
-          <a:prstGeom prst="rect">
-            <a:avLst/>
-          </a:prstGeom>
-          <a:solidFill>
-            <a:srgbClr val="0F62CE"/>
-          </a:solidFill>
-          <a:ln>
-            <a:noFill/>
-          </a:ln>
-        </p:spPr>
-        <p:txBody>
-          <a:bodyPr rtlCol="0" anchor="ctr"/>
-          <a:lstStyle/>
-          <a:p>
-            <a:pPr algn="ctr"/>
-          </a:p>
-        </p:txBody>
-      </p:sp>
-      <p:sp>
-        <p:nvSpPr>
-          <p:cNvPr id="55" name="TextBox 54"/>
+          <p:cNvPr id="54" name="TextBox 53"/>
           <p:cNvSpPr txBox="1"/>
           <p:nvPr/>
         </p:nvSpPr>
@@ -11909,7 +11922,7 @@
       </p:sp>
       <p:sp>
         <p:nvSpPr>
-          <p:cNvPr id="56" name="TextBox 55"/>
+          <p:cNvPr id="55" name="TextBox 54"/>
           <p:cNvSpPr txBox="1"/>
           <p:nvPr/>
         </p:nvSpPr>

--- a/slides/m100_agent_final_deck.pptx
+++ b/slides/m100_agent_final_deck.pptx
@@ -30226,7 +30226,7 @@
                 <a:ea typeface="Microsoft YaHei"/>
                 <a:cs typeface="Microsoft YaHei"/>
               </a:rPr>
-              <a:t>M100 Agent：模型层内部组件与交互机制</a:t>
+              <a:t>M100 Agent：模型层内部组件与人机交互机制</a:t>
             </a:r>
           </a:p>
         </p:txBody>
@@ -30273,7 +30273,7 @@
                 <a:ea typeface="Microsoft YaHei"/>
                 <a:cs typeface="Microsoft YaHei"/>
               </a:rPr>
-              <a:t>控制器确定性调度，规划器唯一引入大模型；人只在合同、介入、验收三处与 Agent 交互</a:t>
+              <a:t>控制器确定性调度，规划器唯一引入大模型；人仅在契约下发、协同介入、终审验收三处交互</a:t>
             </a:r>
           </a:p>
         </p:txBody>
@@ -30316,7 +30316,7 @@
         <p:spPr>
           <a:xfrm>
             <a:off x="694944" y="1207008"/>
-            <a:ext cx="2322576" cy="292608"/>
+            <a:ext cx="2231136" cy="292608"/>
           </a:xfrm>
           <a:prstGeom prst="rect">
             <a:avLst/>
@@ -30349,7 +30349,7 @@
                 <a:ea typeface="Microsoft YaHei"/>
                 <a:cs typeface="Microsoft YaHei"/>
               </a:rPr>
-              <a:t>人 · 合同与验收</a:t>
+              <a:t>人机交互边界</a:t>
             </a:r>
             <a:r>
               <a:rPr sz="850" b="1">
@@ -30373,7 +30373,7 @@
         </p:nvSpPr>
         <p:spPr>
           <a:xfrm>
-            <a:off x="3931920" y="1234440"/>
+            <a:off x="3703320" y="1234440"/>
             <a:ext cx="54864" cy="237744"/>
           </a:xfrm>
           <a:prstGeom prst="rect">
@@ -30402,8 +30402,8 @@
         </p:nvSpPr>
         <p:spPr>
           <a:xfrm>
-            <a:off x="4078224" y="1207008"/>
-            <a:ext cx="3877056" cy="292608"/>
+            <a:off x="3849624" y="1207008"/>
+            <a:ext cx="4242816" cy="292608"/>
           </a:xfrm>
           <a:prstGeom prst="rect">
             <a:avLst/>
@@ -30436,7 +30436,7 @@
                 <a:ea typeface="Microsoft YaHei"/>
                 <a:cs typeface="Microsoft YaHei"/>
               </a:rPr>
-              <a:t>模型层 Agent 内部</a:t>
+              <a:t>模型层 Agent 核心架构</a:t>
             </a:r>
             <a:r>
               <a:rPr sz="850" b="1">
@@ -30523,7 +30523,7 @@
                 <a:ea typeface="Microsoft YaHei"/>
                 <a:cs typeface="Microsoft YaHei"/>
               </a:rPr>
-              <a:t>执行与被测系统</a:t>
+              <a:t>被测系统与落盘库</a:t>
             </a:r>
             <a:r>
               <a:rPr sz="850" b="1">
@@ -30534,7 +30534,7 @@
                 <a:ea typeface="Microsoft YaHei"/>
                 <a:cs typeface="Microsoft YaHei"/>
               </a:rPr>
-              <a:t>　确定性执行 · 无模型</a:t>
+              <a:t>　SUT &amp; Local Artifacts</a:t>
             </a:r>
           </a:p>
         </p:txBody>
@@ -30547,8 +30547,8 @@
         </p:nvSpPr>
         <p:spPr>
           <a:xfrm>
-            <a:off x="548640" y="1572768"/>
-            <a:ext cx="2468880" cy="1024128"/>
+            <a:off x="548640" y="1554480"/>
+            <a:ext cx="2377440" cy="1152144"/>
           </a:xfrm>
           <a:prstGeom prst="rect">
             <a:avLst/>
@@ -30578,8 +30578,8 @@
         </p:nvSpPr>
         <p:spPr>
           <a:xfrm>
-            <a:off x="548640" y="1572768"/>
-            <a:ext cx="64008" cy="1024128"/>
+            <a:off x="548640" y="1554480"/>
+            <a:ext cx="64008" cy="1152144"/>
           </a:xfrm>
           <a:prstGeom prst="rect">
             <a:avLst/>
@@ -30607,8 +30607,8 @@
         </p:nvSpPr>
         <p:spPr>
           <a:xfrm>
-            <a:off x="731520" y="1618488"/>
-            <a:ext cx="2139696" cy="932688"/>
+            <a:off x="731520" y="1600200"/>
+            <a:ext cx="2048256" cy="1060704"/>
           </a:xfrm>
           <a:prstGeom prst="rect">
             <a:avLst/>
@@ -30676,7 +30676,7 @@
                 <a:ea typeface="Microsoft YaHei"/>
                 <a:cs typeface="Microsoft YaHei"/>
               </a:rPr>
-              <a:t>·　任务合同：精度 · 负载 · 门限</a:t>
+              <a:t>·　优化配置：模型 · 负载 · 门限</a:t>
             </a:r>
           </a:p>
           <a:p>
@@ -30700,7 +30700,7 @@
                 <a:ea typeface="Microsoft YaHei"/>
                 <a:cs typeface="Microsoft YaHei"/>
               </a:rPr>
-              <a:t>·　质量合同：数值探针 + 评测集</a:t>
+              <a:t>·　质量契约：数值探针 + 评测集</a:t>
             </a:r>
           </a:p>
           <a:p>
@@ -30748,7 +30748,7 @@
                 <a:ea typeface="Microsoft YaHei"/>
                 <a:cs typeface="Microsoft YaHei"/>
               </a:rPr>
-              <a:t>·　授权边界：测哪些 · 跳过哪些</a:t>
+              <a:t>·　授权与跳过边界</a:t>
             </a:r>
           </a:p>
         </p:txBody>
@@ -30761,8 +30761,8 @@
         </p:nvSpPr>
         <p:spPr>
           <a:xfrm>
-            <a:off x="548640" y="2834640"/>
-            <a:ext cx="2468880" cy="1060704"/>
+            <a:off x="548640" y="2852928"/>
+            <a:ext cx="2377440" cy="1152144"/>
           </a:xfrm>
           <a:prstGeom prst="rect">
             <a:avLst/>
@@ -30792,8 +30792,8 @@
         </p:nvSpPr>
         <p:spPr>
           <a:xfrm>
-            <a:off x="548640" y="2834640"/>
-            <a:ext cx="64008" cy="1060704"/>
+            <a:off x="548640" y="2852928"/>
+            <a:ext cx="64008" cy="1152144"/>
           </a:xfrm>
           <a:prstGeom prst="rect">
             <a:avLst/>
@@ -30821,8 +30821,8 @@
         </p:nvSpPr>
         <p:spPr>
           <a:xfrm>
-            <a:off x="731520" y="2880360"/>
-            <a:ext cx="2139696" cy="969263"/>
+            <a:off x="731520" y="2898648"/>
+            <a:ext cx="2048256" cy="1060704"/>
           </a:xfrm>
           <a:prstGeom prst="rect">
             <a:avLst/>
@@ -30914,7 +30914,7 @@
                 <a:ea typeface="Microsoft YaHei"/>
                 <a:cs typeface="Microsoft YaHei"/>
               </a:rPr>
-              <a:t>·　逐轮可溯源的全量证据</a:t>
+              <a:t>·　全量可溯源证据链</a:t>
             </a:r>
           </a:p>
           <a:p>
@@ -30938,7 +30938,7 @@
                 <a:ea typeface="Microsoft YaHei"/>
                 <a:cs typeface="Microsoft YaHei"/>
               </a:rPr>
-              <a:t>·　账本自检异常与失败分类</a:t>
+              <a:t>·　账本自检异常说明</a:t>
             </a:r>
           </a:p>
           <a:p>
@@ -30962,7 +30962,7 @@
                 <a:ea typeface="Microsoft YaHei"/>
                 <a:cs typeface="Microsoft YaHei"/>
               </a:rPr>
-              <a:t>·　结论边界：哪些不能外推</a:t>
+              <a:t>·　结论适用边界声明</a:t>
             </a:r>
           </a:p>
         </p:txBody>
@@ -30975,8 +30975,8 @@
         </p:nvSpPr>
         <p:spPr>
           <a:xfrm>
-            <a:off x="548640" y="4791456"/>
-            <a:ext cx="2468880" cy="713232"/>
+            <a:off x="548640" y="4151376"/>
+            <a:ext cx="2377440" cy="1353312"/>
           </a:xfrm>
           <a:prstGeom prst="rect">
             <a:avLst/>
@@ -31006,14 +31006,14 @@
         </p:nvSpPr>
         <p:spPr>
           <a:xfrm>
-            <a:off x="548640" y="4791456"/>
-            <a:ext cx="64008" cy="713232"/>
+            <a:off x="548640" y="4151376"/>
+            <a:ext cx="64008" cy="1353312"/>
           </a:xfrm>
           <a:prstGeom prst="rect">
             <a:avLst/>
           </a:prstGeom>
           <a:solidFill>
-            <a:srgbClr val="40708B"/>
+            <a:srgbClr val="D2690C"/>
           </a:solidFill>
           <a:ln>
             <a:noFill/>
@@ -31035,8 +31035,8 @@
         </p:nvSpPr>
         <p:spPr>
           <a:xfrm>
-            <a:off x="731520" y="4837176"/>
-            <a:ext cx="2139696" cy="621792"/>
+            <a:off x="731520" y="4197096"/>
+            <a:ext cx="2048256" cy="1261872"/>
           </a:xfrm>
           <a:prstGeom prst="rect">
             <a:avLst/>
@@ -31074,7 +31074,7 @@
             <a:r>
               <a:rPr sz="800" b="1">
                 <a:solidFill>
-                  <a:srgbClr val="40708B"/>
+                  <a:srgbClr val="D2690C"/>
                 </a:solidFill>
                 <a:latin typeface="Consolas"/>
                 <a:ea typeface="Microsoft YaHei"/>
@@ -31104,7 +31104,7 @@
                 <a:ea typeface="Microsoft YaHei"/>
                 <a:cs typeface="Microsoft YaHei"/>
               </a:rPr>
-              <a:t>·　复杂改动由人直接实现</a:t>
+              <a:t>·　复杂改动由人工操刀</a:t>
             </a:r>
           </a:p>
           <a:p>
@@ -31128,7 +31128,55 @@
                 <a:ea typeface="Microsoft YaHei"/>
                 <a:cs typeface="Microsoft YaHei"/>
               </a:rPr>
-              <a:t>·　人工补丁同样走全部门禁</a:t>
+              <a:t>·　与规划器结对写补丁</a:t>
+            </a:r>
+          </a:p>
+          <a:p>
+            <a:pPr algn="l" latinLnBrk="0">
+              <a:lnSpc>
+                <a:spcPct val="100000"/>
+              </a:lnSpc>
+              <a:spcBef>
+                <a:spcPts val="0"/>
+              </a:spcBef>
+              <a:spcAft>
+                <a:spcPts val="0"/>
+              </a:spcAft>
+            </a:pPr>
+            <a:r>
+              <a:rPr sz="900" b="0">
+                <a:solidFill>
+                  <a:srgbClr val="1B4D69"/>
+                </a:solidFill>
+                <a:latin typeface="Microsoft YaHei"/>
+                <a:ea typeface="Microsoft YaHei"/>
+                <a:cs typeface="Microsoft YaHei"/>
+              </a:rPr>
+              <a:t>·　人工补丁同样走四道门禁</a:t>
+            </a:r>
+          </a:p>
+          <a:p>
+            <a:pPr algn="l" latinLnBrk="0">
+              <a:lnSpc>
+                <a:spcPct val="100000"/>
+              </a:lnSpc>
+              <a:spcBef>
+                <a:spcPts val="0"/>
+              </a:spcBef>
+              <a:spcAft>
+                <a:spcPts val="0"/>
+              </a:spcAft>
+            </a:pPr>
+            <a:r>
+              <a:rPr sz="900" b="0">
+                <a:solidFill>
+                  <a:srgbClr val="1B4D69"/>
+                </a:solidFill>
+                <a:latin typeface="Microsoft YaHei"/>
+                <a:ea typeface="Microsoft YaHei"/>
+                <a:cs typeface="Microsoft YaHei"/>
+              </a:rPr>
+              <a:t>·　不改变准入判定路径</a:t>
             </a:r>
           </a:p>
         </p:txBody>
@@ -31141,8 +31189,8 @@
         </p:nvSpPr>
         <p:spPr>
           <a:xfrm>
-            <a:off x="8869680" y="1572768"/>
-            <a:ext cx="2773375" cy="1024128"/>
+            <a:off x="8869680" y="1554480"/>
+            <a:ext cx="2773375" cy="1280160"/>
           </a:xfrm>
           <a:prstGeom prst="rect">
             <a:avLst/>
@@ -31172,8 +31220,8 @@
         </p:nvSpPr>
         <p:spPr>
           <a:xfrm>
-            <a:off x="8869680" y="1572768"/>
-            <a:ext cx="64008" cy="1024128"/>
+            <a:off x="8869680" y="1554480"/>
+            <a:ext cx="64008" cy="1280160"/>
           </a:xfrm>
           <a:prstGeom prst="rect">
             <a:avLst/>
@@ -31201,8 +31249,8 @@
         </p:nvSpPr>
         <p:spPr>
           <a:xfrm>
-            <a:off x="9052559" y="1618488"/>
-            <a:ext cx="2444191" cy="932688"/>
+            <a:off x="9052559" y="1600200"/>
+            <a:ext cx="2444191" cy="1188719"/>
           </a:xfrm>
           <a:prstGeom prst="rect">
             <a:avLst/>
@@ -31235,7 +31283,7 @@
                 <a:ea typeface="Microsoft YaHei"/>
                 <a:cs typeface="Microsoft YaHei"/>
               </a:rPr>
-              <a:t>构建与被测系统</a:t>
+              <a:t>被测系统</a:t>
             </a:r>
             <a:r>
               <a:rPr sz="800" b="1">
@@ -31270,7 +31318,7 @@
                 <a:ea typeface="Microsoft YaHei"/>
                 <a:cs typeface="Microsoft YaHei"/>
               </a:rPr>
-              <a:t>·　原仓库原位建版本，隔离补丁</a:t>
+              <a:t>·　SGLang 原仓库原位建版本</a:t>
             </a:r>
           </a:p>
           <a:p>
@@ -31294,7 +31342,7 @@
                 <a:ea typeface="Microsoft YaHei"/>
                 <a:cs typeface="Microsoft YaHei"/>
               </a:rPr>
-              <a:t>·　只编译登记组件 + 身份校验</a:t>
+              <a:t>·　增量编译登记的算子组件</a:t>
             </a:r>
           </a:p>
           <a:p>
@@ -31318,7 +31366,7 @@
                 <a:ea typeface="Microsoft YaHei"/>
                 <a:cs typeface="Microsoft YaHei"/>
               </a:rPr>
-              <a:t>·　服务启停与孤儿回收</a:t>
+              <a:t>·　M100 物理卡 · 服务启停</a:t>
             </a:r>
           </a:p>
           <a:p>
@@ -31342,7 +31390,7 @@
                 <a:ea typeface="Microsoft YaHei"/>
                 <a:cs typeface="Microsoft YaHei"/>
               </a:rPr>
-              <a:t>·　SGLang · xInfer · M100 物理卡</a:t>
+              <a:t>·　回传 Trace · Logprob · 吞吐</a:t>
             </a:r>
           </a:p>
         </p:txBody>
@@ -31355,8 +31403,8 @@
         </p:nvSpPr>
         <p:spPr>
           <a:xfrm>
-            <a:off x="8869680" y="2834640"/>
-            <a:ext cx="2773375" cy="1060704"/>
+            <a:off x="8869680" y="3456432"/>
+            <a:ext cx="2773375" cy="1609344"/>
           </a:xfrm>
           <a:prstGeom prst="rect">
             <a:avLst/>
@@ -31386,8 +31434,8 @@
         </p:nvSpPr>
         <p:spPr>
           <a:xfrm>
-            <a:off x="8869680" y="2834640"/>
-            <a:ext cx="64008" cy="1060704"/>
+            <a:off x="8869680" y="3456432"/>
+            <a:ext cx="64008" cy="1609344"/>
           </a:xfrm>
           <a:prstGeom prst="rect">
             <a:avLst/>
@@ -31415,8 +31463,8 @@
         </p:nvSpPr>
         <p:spPr>
           <a:xfrm>
-            <a:off x="9052559" y="2880360"/>
-            <a:ext cx="2444191" cy="969263"/>
+            <a:off x="9052559" y="3502151"/>
+            <a:ext cx="2444191" cy="1517904"/>
           </a:xfrm>
           <a:prstGeom prst="rect">
             <a:avLst/>
@@ -31449,7 +31497,7 @@
                 <a:ea typeface="Microsoft YaHei"/>
                 <a:cs typeface="Microsoft YaHei"/>
               </a:rPr>
-              <a:t>四道门禁</a:t>
+              <a:t>证据与产物库</a:t>
             </a:r>
             <a:r>
               <a:rPr sz="800" b="1">
@@ -31460,7 +31508,7 @@
                 <a:ea typeface="Microsoft YaHei"/>
                 <a:cs typeface="Microsoft YaHei"/>
               </a:rPr>
-              <a:t>　由便宜到贵</a:t>
+              <a:t>　Artifacts</a:t>
             </a:r>
           </a:p>
           <a:p>
@@ -31484,7 +31532,7 @@
                 <a:ea typeface="Microsoft YaHei"/>
                 <a:cs typeface="Microsoft YaHei"/>
               </a:rPr>
-              <a:t>·　C 单算子隔离链提速 ≥ 2%</a:t>
+              <a:t>·　35 次 Trial 独立成目录</a:t>
             </a:r>
           </a:p>
           <a:p>
@@ -31508,7 +31556,7 @@
                 <a:ea typeface="Microsoft YaHei"/>
                 <a:cs typeface="Microsoft YaHei"/>
               </a:rPr>
-              <a:t>·　① 数值 |Δlogprob| ≤ 0.03</a:t>
+              <a:t>·　冻结快照与组件 SHA</a:t>
             </a:r>
           </a:p>
           <a:p>
@@ -31532,7 +31580,7 @@
                 <a:ea typeface="Microsoft YaHei"/>
                 <a:cs typeface="Microsoft YaHei"/>
               </a:rPr>
-              <a:t>·　② 冻结评测集正确率不降</a:t>
+              <a:t>·　账本 · Trace · Probe 结果</a:t>
             </a:r>
           </a:p>
           <a:p>
@@ -31556,7 +31604,31 @@
                 <a:ea typeface="Microsoft YaHei"/>
                 <a:cs typeface="Microsoft YaHei"/>
               </a:rPr>
-              <a:t>·　D 整模型三方 A/B 过噪声门</a:t>
+              <a:t>·　规划器往来全量报文</a:t>
+            </a:r>
+          </a:p>
+          <a:p>
+            <a:pPr algn="l" latinLnBrk="0">
+              <a:lnSpc>
+                <a:spcPct val="100000"/>
+              </a:lnSpc>
+              <a:spcBef>
+                <a:spcPts val="0"/>
+              </a:spcBef>
+              <a:spcAft>
+                <a:spcPts val="0"/>
+              </a:spcAft>
+            </a:pPr>
+            <a:r>
+              <a:rPr sz="900" b="0">
+                <a:solidFill>
+                  <a:srgbClr val="1B4D69"/>
+                </a:solidFill>
+                <a:latin typeface="Microsoft YaHei"/>
+                <a:ea typeface="Microsoft YaHei"/>
+                <a:cs typeface="Microsoft YaHei"/>
+              </a:rPr>
+              <a:t>·　完整证据留本地，按需调取</a:t>
             </a:r>
           </a:p>
         </p:txBody>
@@ -31569,8 +31641,155 @@
         </p:nvSpPr>
         <p:spPr>
           <a:xfrm>
-            <a:off x="8869680" y="4133087"/>
-            <a:ext cx="2773375" cy="1371600"/>
+            <a:off x="3703320" y="1517904"/>
+            <a:ext cx="4389120" cy="3986783"/>
+          </a:xfrm>
+          <a:prstGeom prst="rect">
+            <a:avLst/>
+          </a:prstGeom>
+          <a:solidFill>
+            <a:srgbClr val="FFFFFF"/>
+          </a:solidFill>
+          <a:ln w="9525">
+            <a:solidFill>
+              <a:srgbClr val="AFCEE1"/>
+            </a:solidFill>
+          </a:ln>
+        </p:spPr>
+        <p:txBody>
+          <a:bodyPr rtlCol="0" anchor="ctr"/>
+          <a:lstStyle/>
+          <a:p>
+            <a:pPr algn="ctr"/>
+          </a:p>
+        </p:txBody>
+      </p:sp>
+      <p:sp>
+        <p:nvSpPr>
+          <p:cNvPr id="28" name="Rectangle 27"/>
+          <p:cNvSpPr/>
+          <p:nvPr/>
+        </p:nvSpPr>
+        <p:spPr>
+          <a:xfrm>
+            <a:off x="3834993" y="1554480"/>
+            <a:ext cx="4125772" cy="2176272"/>
+          </a:xfrm>
+          <a:prstGeom prst="rect">
+            <a:avLst/>
+          </a:prstGeom>
+          <a:solidFill>
+            <a:srgbClr val="E6F0FC"/>
+          </a:solidFill>
+          <a:ln>
+            <a:noFill/>
+          </a:ln>
+        </p:spPr>
+        <p:txBody>
+          <a:bodyPr rtlCol="0" anchor="ctr"/>
+          <a:lstStyle/>
+          <a:p>
+            <a:pPr algn="ctr"/>
+          </a:p>
+        </p:txBody>
+      </p:sp>
+      <p:sp>
+        <p:nvSpPr>
+          <p:cNvPr id="29" name="Rectangle 28"/>
+          <p:cNvSpPr/>
+          <p:nvPr/>
+        </p:nvSpPr>
+        <p:spPr>
+          <a:xfrm>
+            <a:off x="3834993" y="1554480"/>
+            <a:ext cx="4125772" cy="54864"/>
+          </a:xfrm>
+          <a:prstGeom prst="rect">
+            <a:avLst/>
+          </a:prstGeom>
+          <a:solidFill>
+            <a:srgbClr val="0F62CE"/>
+          </a:solidFill>
+          <a:ln>
+            <a:noFill/>
+          </a:ln>
+        </p:spPr>
+        <p:txBody>
+          <a:bodyPr rtlCol="0" anchor="ctr"/>
+          <a:lstStyle/>
+          <a:p>
+            <a:pPr algn="ctr"/>
+          </a:p>
+        </p:txBody>
+      </p:sp>
+      <p:sp>
+        <p:nvSpPr>
+          <p:cNvPr id="30" name="TextBox 29"/>
+          <p:cNvSpPr txBox="1"/>
+          <p:nvPr/>
+        </p:nvSpPr>
+        <p:spPr>
+          <a:xfrm>
+            <a:off x="3981297" y="1627632"/>
+            <a:ext cx="3833164" cy="237744"/>
+          </a:xfrm>
+          <a:prstGeom prst="rect">
+            <a:avLst/>
+          </a:prstGeom>
+          <a:noFill/>
+        </p:spPr>
+        <p:txBody>
+          <a:bodyPr wrap="square" anchor="ctr" lIns="0" tIns="0" rIns="0" bIns="0">
+            <a:noAutofit/>
+          </a:bodyPr>
+          <a:lstStyle/>
+          <a:p>
+            <a:pPr algn="l" latinLnBrk="0">
+              <a:lnSpc>
+                <a:spcPct val="100000"/>
+              </a:lnSpc>
+              <a:spcBef>
+                <a:spcPts val="0"/>
+              </a:spcBef>
+              <a:spcAft>
+                <a:spcPts val="0"/>
+              </a:spcAft>
+            </a:pPr>
+            <a:r>
+              <a:rPr sz="1150" b="1">
+                <a:solidFill>
+                  <a:srgbClr val="0F62CE"/>
+                </a:solidFill>
+                <a:latin typeface="Microsoft YaHei"/>
+                <a:ea typeface="Microsoft YaHei"/>
+                <a:cs typeface="Microsoft YaHei"/>
+              </a:rPr>
+              <a:t>Python 控制器</a:t>
+            </a:r>
+            <a:r>
+              <a:rPr sz="850" b="0">
+                <a:solidFill>
+                  <a:srgbClr val="1B4D69"/>
+                </a:solidFill>
+                <a:latin typeface="Microsoft YaHei"/>
+                <a:ea typeface="Microsoft YaHei"/>
+                <a:cs typeface="Microsoft YaHei"/>
+              </a:rPr>
+              <a:t>　确定性中枢 · 无模型</a:t>
+            </a:r>
+          </a:p>
+        </p:txBody>
+      </p:sp>
+      <p:sp>
+        <p:nvSpPr>
+          <p:cNvPr id="31" name="Rectangle 30"/>
+          <p:cNvSpPr/>
+          <p:nvPr/>
+        </p:nvSpPr>
+        <p:spPr>
+          <a:xfrm>
+            <a:off x="3981297" y="1901952"/>
+            <a:ext cx="1852574" cy="859536"/>
           </a:xfrm>
           <a:prstGeom prst="rect">
             <a:avLst/>
@@ -31594,368 +31813,144 @@
       </p:sp>
       <p:sp>
         <p:nvSpPr>
-          <p:cNvPr id="28" name="Rectangle 27"/>
+          <p:cNvPr id="32" name="TextBox 31"/>
+          <p:cNvSpPr txBox="1"/>
+          <p:nvPr/>
+        </p:nvSpPr>
+        <p:spPr>
+          <a:xfrm>
+            <a:off x="4109313" y="1947672"/>
+            <a:ext cx="1614830" cy="768096"/>
+          </a:xfrm>
+          <a:prstGeom prst="rect">
+            <a:avLst/>
+          </a:prstGeom>
+          <a:noFill/>
+        </p:spPr>
+        <p:txBody>
+          <a:bodyPr wrap="square" anchor="ctr" lIns="0" tIns="0" rIns="0" bIns="0">
+            <a:noAutofit/>
+          </a:bodyPr>
+          <a:lstStyle/>
+          <a:p>
+            <a:pPr algn="l" latinLnBrk="0">
+              <a:lnSpc>
+                <a:spcPct val="100000"/>
+              </a:lnSpc>
+              <a:spcBef>
+                <a:spcPts val="0"/>
+              </a:spcBef>
+              <a:spcAft>
+                <a:spcPts val="100"/>
+              </a:spcAft>
+            </a:pPr>
+            <a:r>
+              <a:rPr sz="950" b="1">
+                <a:solidFill>
+                  <a:srgbClr val="0F62CE"/>
+                </a:solidFill>
+                <a:latin typeface="Microsoft YaHei"/>
+                <a:ea typeface="Microsoft YaHei"/>
+                <a:cs typeface="Microsoft YaHei"/>
+              </a:rPr>
+              <a:t>① </a:t>
+            </a:r>
+            <a:r>
+              <a:rPr sz="950" b="1">
+                <a:solidFill>
+                  <a:srgbClr val="0A2B45"/>
+                </a:solidFill>
+                <a:latin typeface="Microsoft YaHei"/>
+                <a:ea typeface="Microsoft YaHei"/>
+                <a:cs typeface="Microsoft YaHei"/>
+              </a:rPr>
+              <a:t>状态与工作区</a:t>
+            </a:r>
+          </a:p>
+          <a:p>
+            <a:pPr algn="l" latinLnBrk="0">
+              <a:lnSpc>
+                <a:spcPct val="100000"/>
+              </a:lnSpc>
+              <a:spcBef>
+                <a:spcPts val="0"/>
+              </a:spcBef>
+              <a:spcAft>
+                <a:spcPts val="200"/>
+              </a:spcAft>
+            </a:pPr>
+            <a:r>
+              <a:rPr sz="700" b="0">
+                <a:solidFill>
+                  <a:srgbClr val="0F62CE"/>
+                </a:solidFill>
+                <a:latin typeface="Consolas"/>
+                <a:ea typeface="Microsoft YaHei"/>
+                <a:cs typeface="Microsoft YaHei"/>
+              </a:rPr>
+              <a:t>optimization.py</a:t>
+            </a:r>
+          </a:p>
+          <a:p>
+            <a:pPr algn="l" latinLnBrk="0">
+              <a:lnSpc>
+                <a:spcPct val="100000"/>
+              </a:lnSpc>
+              <a:spcBef>
+                <a:spcPts val="0"/>
+              </a:spcBef>
+              <a:spcAft>
+                <a:spcPts val="0"/>
+              </a:spcAft>
+            </a:pPr>
+            <a:r>
+              <a:rPr sz="800" b="0">
+                <a:solidFill>
+                  <a:srgbClr val="1B4D69"/>
+                </a:solidFill>
+                <a:latin typeface="Microsoft YaHei"/>
+                <a:ea typeface="Microsoft YaHei"/>
+                <a:cs typeface="Microsoft YaHei"/>
+              </a:rPr>
+              <a:t>设备锁 · 状态机 · 恢复</a:t>
+            </a:r>
+          </a:p>
+          <a:p>
+            <a:pPr algn="l" latinLnBrk="0">
+              <a:lnSpc>
+                <a:spcPct val="100000"/>
+              </a:lnSpc>
+              <a:spcBef>
+                <a:spcPts val="0"/>
+              </a:spcBef>
+              <a:spcAft>
+                <a:spcPts val="0"/>
+              </a:spcAft>
+            </a:pPr>
+            <a:r>
+              <a:rPr sz="800" b="0">
+                <a:solidFill>
+                  <a:srgbClr val="1B4D69"/>
+                </a:solidFill>
+                <a:latin typeface="Microsoft YaHei"/>
+                <a:ea typeface="Microsoft YaHei"/>
+                <a:cs typeface="Microsoft YaHei"/>
+              </a:rPr>
+              <a:t>原位构建 · 精确重测</a:t>
+            </a:r>
+          </a:p>
+        </p:txBody>
+      </p:sp>
+      <p:sp>
+        <p:nvSpPr>
+          <p:cNvPr id="33" name="Rectangle 32"/>
           <p:cNvSpPr/>
           <p:nvPr/>
         </p:nvSpPr>
         <p:spPr>
           <a:xfrm>
-            <a:off x="8869680" y="4133087"/>
-            <a:ext cx="64008" cy="1371600"/>
-          </a:xfrm>
-          <a:prstGeom prst="rect">
-            <a:avLst/>
-          </a:prstGeom>
-          <a:solidFill>
-            <a:srgbClr val="0F62CE"/>
-          </a:solidFill>
-          <a:ln>
-            <a:noFill/>
-          </a:ln>
-        </p:spPr>
-        <p:txBody>
-          <a:bodyPr rtlCol="0" anchor="ctr"/>
-          <a:lstStyle/>
-          <a:p>
-            <a:pPr algn="ctr"/>
-          </a:p>
-        </p:txBody>
-      </p:sp>
-      <p:sp>
-        <p:nvSpPr>
-          <p:cNvPr id="29" name="TextBox 28"/>
-          <p:cNvSpPr txBox="1"/>
-          <p:nvPr/>
-        </p:nvSpPr>
-        <p:spPr>
-          <a:xfrm>
-            <a:off x="9052559" y="4178807"/>
-            <a:ext cx="2444191" cy="1280160"/>
-          </a:xfrm>
-          <a:prstGeom prst="rect">
-            <a:avLst/>
-          </a:prstGeom>
-          <a:noFill/>
-        </p:spPr>
-        <p:txBody>
-          <a:bodyPr wrap="square" anchor="ctr" lIns="0" tIns="0" rIns="0" bIns="0">
-            <a:noAutofit/>
-          </a:bodyPr>
-          <a:lstStyle/>
-          <a:p>
-            <a:pPr algn="l" latinLnBrk="0">
-              <a:lnSpc>
-                <a:spcPct val="100000"/>
-              </a:lnSpc>
-              <a:spcBef>
-                <a:spcPts val="0"/>
-              </a:spcBef>
-              <a:spcAft>
-                <a:spcPts val="300"/>
-              </a:spcAft>
-            </a:pPr>
-            <a:r>
-              <a:rPr sz="1050" b="1">
-                <a:solidFill>
-                  <a:srgbClr val="0A2B45"/>
-                </a:solidFill>
-                <a:latin typeface="Microsoft YaHei"/>
-                <a:ea typeface="Microsoft YaHei"/>
-                <a:cs typeface="Microsoft YaHei"/>
-              </a:rPr>
-              <a:t>证据与产物</a:t>
-            </a:r>
-            <a:r>
-              <a:rPr sz="800" b="1">
-                <a:solidFill>
-                  <a:srgbClr val="0F62CE"/>
-                </a:solidFill>
-                <a:latin typeface="Consolas"/>
-                <a:ea typeface="Microsoft YaHei"/>
-                <a:cs typeface="Microsoft YaHei"/>
-              </a:rPr>
-              <a:t>　全部落盘</a:t>
-            </a:r>
-          </a:p>
-          <a:p>
-            <a:pPr algn="l" latinLnBrk="0">
-              <a:lnSpc>
-                <a:spcPct val="100000"/>
-              </a:lnSpc>
-              <a:spcBef>
-                <a:spcPts val="0"/>
-              </a:spcBef>
-              <a:spcAft>
-                <a:spcPts val="0"/>
-              </a:spcAft>
-            </a:pPr>
-            <a:r>
-              <a:rPr sz="900" b="0">
-                <a:solidFill>
-                  <a:srgbClr val="1B4D69"/>
-                </a:solidFill>
-                <a:latin typeface="Microsoft YaHei"/>
-                <a:ea typeface="Microsoft YaHei"/>
-                <a:cs typeface="Microsoft YaHei"/>
-              </a:rPr>
-              <a:t>·　每次 Trial 独立成目录</a:t>
-            </a:r>
-          </a:p>
-          <a:p>
-            <a:pPr algn="l" latinLnBrk="0">
-              <a:lnSpc>
-                <a:spcPct val="100000"/>
-              </a:lnSpc>
-              <a:spcBef>
-                <a:spcPts val="0"/>
-              </a:spcBef>
-              <a:spcAft>
-                <a:spcPts val="0"/>
-              </a:spcAft>
-            </a:pPr>
-            <a:r>
-              <a:rPr sz="900" b="0">
-                <a:solidFill>
-                  <a:srgbClr val="1B4D69"/>
-                </a:solidFill>
-                <a:latin typeface="Microsoft YaHei"/>
-                <a:ea typeface="Microsoft YaHei"/>
-                <a:cs typeface="Microsoft YaHei"/>
-              </a:rPr>
-              <a:t>·　账本 · trace · probe 结果</a:t>
-            </a:r>
-          </a:p>
-          <a:p>
-            <a:pPr algn="l" latinLnBrk="0">
-              <a:lnSpc>
-                <a:spcPct val="100000"/>
-              </a:lnSpc>
-              <a:spcBef>
-                <a:spcPts val="0"/>
-              </a:spcBef>
-              <a:spcAft>
-                <a:spcPts val="0"/>
-              </a:spcAft>
-            </a:pPr>
-            <a:r>
-              <a:rPr sz="900" b="0">
-                <a:solidFill>
-                  <a:srgbClr val="1B4D69"/>
-                </a:solidFill>
-                <a:latin typeface="Microsoft YaHei"/>
-                <a:ea typeface="Microsoft YaHei"/>
-                <a:cs typeface="Microsoft YaHei"/>
-              </a:rPr>
-              <a:t>·　规划器每轮完整往来</a:t>
-            </a:r>
-          </a:p>
-          <a:p>
-            <a:pPr algn="l" latinLnBrk="0">
-              <a:lnSpc>
-                <a:spcPct val="100000"/>
-              </a:lnSpc>
-              <a:spcBef>
-                <a:spcPts val="0"/>
-              </a:spcBef>
-              <a:spcAft>
-                <a:spcPts val="0"/>
-              </a:spcAft>
-            </a:pPr>
-            <a:r>
-              <a:rPr sz="900" b="0">
-                <a:solidFill>
-                  <a:srgbClr val="1B4D69"/>
-                </a:solidFill>
-                <a:latin typeface="Microsoft YaHei"/>
-                <a:ea typeface="Microsoft YaHei"/>
-                <a:cs typeface="Microsoft YaHei"/>
-              </a:rPr>
-              <a:t>·　被拒原因带回下一轮</a:t>
-            </a:r>
-          </a:p>
-          <a:p>
-            <a:pPr algn="l" latinLnBrk="0">
-              <a:lnSpc>
-                <a:spcPct val="100000"/>
-              </a:lnSpc>
-              <a:spcBef>
-                <a:spcPts val="0"/>
-              </a:spcBef>
-              <a:spcAft>
-                <a:spcPts val="0"/>
-              </a:spcAft>
-            </a:pPr>
-            <a:r>
-              <a:rPr sz="900" b="0">
-                <a:solidFill>
-                  <a:srgbClr val="1B4D69"/>
-                </a:solidFill>
-                <a:latin typeface="Microsoft YaHei"/>
-                <a:ea typeface="Microsoft YaHei"/>
-                <a:cs typeface="Microsoft YaHei"/>
-              </a:rPr>
-              <a:t>·　控制器快照防中途换实现</a:t>
-            </a:r>
-          </a:p>
-        </p:txBody>
-      </p:sp>
-      <p:sp>
-        <p:nvSpPr>
-          <p:cNvPr id="30" name="Rectangle 29"/>
-          <p:cNvSpPr/>
-          <p:nvPr/>
-        </p:nvSpPr>
-        <p:spPr>
-          <a:xfrm>
-            <a:off x="3931920" y="1517904"/>
-            <a:ext cx="4023360" cy="3986783"/>
-          </a:xfrm>
-          <a:prstGeom prst="rect">
-            <a:avLst/>
-          </a:prstGeom>
-          <a:solidFill>
-            <a:srgbClr val="FFFFFF"/>
-          </a:solidFill>
-          <a:ln w="9525">
-            <a:solidFill>
-              <a:srgbClr val="AFCEE1"/>
-            </a:solidFill>
-          </a:ln>
-        </p:spPr>
-        <p:txBody>
-          <a:bodyPr rtlCol="0" anchor="ctr"/>
-          <a:lstStyle/>
-          <a:p>
-            <a:pPr algn="ctr"/>
-          </a:p>
-        </p:txBody>
-      </p:sp>
-      <p:sp>
-        <p:nvSpPr>
-          <p:cNvPr id="31" name="Rectangle 30"/>
-          <p:cNvSpPr/>
-          <p:nvPr/>
-        </p:nvSpPr>
-        <p:spPr>
-          <a:xfrm>
-            <a:off x="4052620" y="1554480"/>
-            <a:ext cx="3781958" cy="2340864"/>
-          </a:xfrm>
-          <a:prstGeom prst="rect">
-            <a:avLst/>
-          </a:prstGeom>
-          <a:solidFill>
-            <a:srgbClr val="E6F0FC"/>
-          </a:solidFill>
-          <a:ln>
-            <a:noFill/>
-          </a:ln>
-        </p:spPr>
-        <p:txBody>
-          <a:bodyPr rtlCol="0" anchor="ctr"/>
-          <a:lstStyle/>
-          <a:p>
-            <a:pPr algn="ctr"/>
-          </a:p>
-        </p:txBody>
-      </p:sp>
-      <p:sp>
-        <p:nvSpPr>
-          <p:cNvPr id="32" name="Rectangle 31"/>
-          <p:cNvSpPr/>
-          <p:nvPr/>
-        </p:nvSpPr>
-        <p:spPr>
-          <a:xfrm>
-            <a:off x="4052620" y="1554480"/>
-            <a:ext cx="3781958" cy="54864"/>
-          </a:xfrm>
-          <a:prstGeom prst="rect">
-            <a:avLst/>
-          </a:prstGeom>
-          <a:solidFill>
-            <a:srgbClr val="0F62CE"/>
-          </a:solidFill>
-          <a:ln>
-            <a:noFill/>
-          </a:ln>
-        </p:spPr>
-        <p:txBody>
-          <a:bodyPr rtlCol="0" anchor="ctr"/>
-          <a:lstStyle/>
-          <a:p>
-            <a:pPr algn="ctr"/>
-          </a:p>
-        </p:txBody>
-      </p:sp>
-      <p:sp>
-        <p:nvSpPr>
-          <p:cNvPr id="33" name="TextBox 32"/>
-          <p:cNvSpPr txBox="1"/>
-          <p:nvPr/>
-        </p:nvSpPr>
-        <p:spPr>
-          <a:xfrm>
-            <a:off x="4198924" y="1627632"/>
-            <a:ext cx="3489350" cy="237744"/>
-          </a:xfrm>
-          <a:prstGeom prst="rect">
-            <a:avLst/>
-          </a:prstGeom>
-          <a:noFill/>
-        </p:spPr>
-        <p:txBody>
-          <a:bodyPr wrap="square" anchor="ctr" lIns="0" tIns="0" rIns="0" bIns="0">
-            <a:noAutofit/>
-          </a:bodyPr>
-          <a:lstStyle/>
-          <a:p>
-            <a:pPr algn="l" latinLnBrk="0">
-              <a:lnSpc>
-                <a:spcPct val="100000"/>
-              </a:lnSpc>
-              <a:spcBef>
-                <a:spcPts val="0"/>
-              </a:spcBef>
-              <a:spcAft>
-                <a:spcPts val="0"/>
-              </a:spcAft>
-            </a:pPr>
-            <a:r>
-              <a:rPr sz="1150" b="1">
-                <a:solidFill>
-                  <a:srgbClr val="0F62CE"/>
-                </a:solidFill>
-                <a:latin typeface="Microsoft YaHei"/>
-                <a:ea typeface="Microsoft YaHei"/>
-                <a:cs typeface="Microsoft YaHei"/>
-              </a:rPr>
-              <a:t>控制器</a:t>
-            </a:r>
-            <a:r>
-              <a:rPr sz="850" b="0">
-                <a:solidFill>
-                  <a:srgbClr val="1B4D69"/>
-                </a:solidFill>
-                <a:latin typeface="Microsoft YaHei"/>
-                <a:ea typeface="Microsoft YaHei"/>
-                <a:cs typeface="Microsoft YaHei"/>
-              </a:rPr>
-              <a:t>　Python 确定性调度 · 无模型</a:t>
-            </a:r>
-          </a:p>
-        </p:txBody>
-      </p:sp>
-      <p:sp>
-        <p:nvSpPr>
-          <p:cNvPr id="34" name="Rectangle 33"/>
-          <p:cNvSpPr/>
-          <p:nvPr/>
-        </p:nvSpPr>
-        <p:spPr>
-          <a:xfrm>
-            <a:off x="4198924" y="1883664"/>
-            <a:ext cx="1680667" cy="585216"/>
+            <a:off x="5961888" y="1901952"/>
+            <a:ext cx="1852574" cy="859536"/>
           </a:xfrm>
           <a:prstGeom prst="rect">
             <a:avLst/>
@@ -31979,14 +31974,14 @@
       </p:sp>
       <p:sp>
         <p:nvSpPr>
-          <p:cNvPr id="35" name="TextBox 34"/>
-          <p:cNvSpPr txBox="1"/>
-          <p:nvPr/>
-        </p:nvSpPr>
-        <p:spPr>
-          <a:xfrm>
-            <a:off x="4326940" y="1920240"/>
-            <a:ext cx="1461211" cy="512064"/>
+          <p:cNvPr id="34" name="TextBox 33"/>
+          <p:cNvSpPr txBox="1"/>
+          <p:nvPr/>
+        </p:nvSpPr>
+        <p:spPr>
+          <a:xfrm>
+            <a:off x="6089903" y="1947672"/>
+            <a:ext cx="1614830" cy="768096"/>
           </a:xfrm>
           <a:prstGeom prst="rect">
             <a:avLst/>
@@ -32011,7 +32006,18 @@
               </a:spcAft>
             </a:pPr>
             <a:r>
-              <a:rPr sz="1000" b="1">
+              <a:rPr sz="950" b="1">
+                <a:solidFill>
+                  <a:srgbClr val="0F62CE"/>
+                </a:solidFill>
+                <a:latin typeface="Microsoft YaHei"/>
+                <a:ea typeface="Microsoft YaHei"/>
+                <a:cs typeface="Microsoft YaHei"/>
+              </a:rPr>
+              <a:t>② </a:t>
+            </a:r>
+            <a:r>
+              <a:rPr sz="950" b="1">
                 <a:solidFill>
                   <a:srgbClr val="0A2B45"/>
                 </a:solidFill>
@@ -32019,7 +32025,7 @@
                 <a:ea typeface="Microsoft YaHei"/>
                 <a:cs typeface="Microsoft YaHei"/>
               </a:rPr>
-              <a:t>状态机与恢复</a:t>
+              <a:t>采样与账本</a:t>
             </a:r>
           </a:p>
           <a:p>
@@ -32031,7 +32037,7 @@
                 <a:spcPts val="0"/>
               </a:spcBef>
               <a:spcAft>
-                <a:spcPts val="100"/>
+                <a:spcPts val="200"/>
               </a:spcAft>
             </a:pPr>
             <a:r>
@@ -32043,7 +32049,7 @@
                 <a:ea typeface="Microsoft YaHei"/>
                 <a:cs typeface="Microsoft YaHei"/>
               </a:rPr>
-              <a:t>optimization.py</a:t>
+              <a:t>roofline.py</a:t>
             </a:r>
           </a:p>
           <a:p>
@@ -32067,21 +32073,45 @@
                 <a:ea typeface="Microsoft YaHei"/>
                 <a:cs typeface="Microsoft YaHei"/>
               </a:rPr>
-              <a:t>状态流转 · 中断恢复</a:t>
-            </a:r>
-          </a:p>
-        </p:txBody>
-      </p:sp>
-      <p:sp>
-        <p:nvSpPr>
-          <p:cNvPr id="36" name="Rectangle 35"/>
+              <a:t>一次性服务 Trace 采样</a:t>
+            </a:r>
+          </a:p>
+          <a:p>
+            <a:pPr algn="l" latinLnBrk="0">
+              <a:lnSpc>
+                <a:spcPct val="100000"/>
+              </a:lnSpc>
+              <a:spcBef>
+                <a:spcPts val="0"/>
+              </a:spcBef>
+              <a:spcAft>
+                <a:spcPts val="0"/>
+              </a:spcAft>
+            </a:pPr>
+            <a:r>
+              <a:rPr sz="800" b="0">
+                <a:solidFill>
+                  <a:srgbClr val="1B4D69"/>
+                </a:solidFill>
+                <a:latin typeface="Microsoft YaHei"/>
+                <a:ea typeface="Microsoft YaHei"/>
+                <a:cs typeface="Microsoft YaHei"/>
+              </a:rPr>
+              <a:t>对齐源码 · 下界核算</a:t>
+            </a:r>
+          </a:p>
+        </p:txBody>
+      </p:sp>
+      <p:sp>
+        <p:nvSpPr>
+          <p:cNvPr id="35" name="Rectangle 34"/>
           <p:cNvSpPr/>
           <p:nvPr/>
         </p:nvSpPr>
         <p:spPr>
           <a:xfrm>
-            <a:off x="6007608" y="1883664"/>
-            <a:ext cx="1680667" cy="585216"/>
+            <a:off x="3981297" y="2798064"/>
+            <a:ext cx="1852574" cy="859536"/>
           </a:xfrm>
           <a:prstGeom prst="rect">
             <a:avLst/>
@@ -32105,14 +32135,14 @@
       </p:sp>
       <p:sp>
         <p:nvSpPr>
-          <p:cNvPr id="37" name="TextBox 36"/>
-          <p:cNvSpPr txBox="1"/>
-          <p:nvPr/>
-        </p:nvSpPr>
-        <p:spPr>
-          <a:xfrm>
-            <a:off x="6135624" y="1920240"/>
-            <a:ext cx="1461211" cy="512064"/>
+          <p:cNvPr id="36" name="TextBox 35"/>
+          <p:cNvSpPr txBox="1"/>
+          <p:nvPr/>
+        </p:nvSpPr>
+        <p:spPr>
+          <a:xfrm>
+            <a:off x="4109313" y="2843784"/>
+            <a:ext cx="1614830" cy="768096"/>
           </a:xfrm>
           <a:prstGeom prst="rect">
             <a:avLst/>
@@ -32137,7 +32167,18 @@
               </a:spcAft>
             </a:pPr>
             <a:r>
-              <a:rPr sz="1000" b="1">
+              <a:rPr sz="950" b="1">
+                <a:solidFill>
+                  <a:srgbClr val="0F62CE"/>
+                </a:solidFill>
+                <a:latin typeface="Microsoft YaHei"/>
+                <a:ea typeface="Microsoft YaHei"/>
+                <a:cs typeface="Microsoft YaHei"/>
+              </a:rPr>
+              <a:t>③ </a:t>
+            </a:r>
+            <a:r>
+              <a:rPr sz="950" b="1">
                 <a:solidFill>
                   <a:srgbClr val="0A2B45"/>
                 </a:solidFill>
@@ -32145,7 +32186,7 @@
                 <a:ea typeface="Microsoft YaHei"/>
                 <a:cs typeface="Microsoft YaHei"/>
               </a:rPr>
-              <a:t>账本与 Trace 归因</a:t>
+              <a:t>四道门禁流水</a:t>
             </a:r>
           </a:p>
           <a:p>
@@ -32157,7 +32198,7 @@
                 <a:spcPts val="0"/>
               </a:spcBef>
               <a:spcAft>
-                <a:spcPts val="100"/>
+                <a:spcPts val="200"/>
               </a:spcAft>
             </a:pPr>
             <a:r>
@@ -32169,7 +32210,7 @@
                 <a:ea typeface="Microsoft YaHei"/>
                 <a:cs typeface="Microsoft YaHei"/>
               </a:rPr>
-              <a:t>roofline.py</a:t>
+              <a:t>selfiterate_gates.py</a:t>
             </a:r>
           </a:p>
           <a:p>
@@ -32193,21 +32234,45 @@
                 <a:ea typeface="Microsoft YaHei"/>
                 <a:cs typeface="Microsoft YaHei"/>
               </a:rPr>
-              <a:t>采样 · 归因 · 下界核算</a:t>
-            </a:r>
-          </a:p>
-        </p:txBody>
-      </p:sp>
-      <p:sp>
-        <p:nvSpPr>
-          <p:cNvPr id="38" name="Rectangle 37"/>
+              <a:t>C 算子微测 ≥ 2% · 数值门</a:t>
+            </a:r>
+          </a:p>
+          <a:p>
+            <a:pPr algn="l" latinLnBrk="0">
+              <a:lnSpc>
+                <a:spcPct val="100000"/>
+              </a:lnSpc>
+              <a:spcBef>
+                <a:spcPts val="0"/>
+              </a:spcBef>
+              <a:spcAft>
+                <a:spcPts val="0"/>
+              </a:spcAft>
+            </a:pPr>
+            <a:r>
+              <a:rPr sz="800" b="0">
+                <a:solidFill>
+                  <a:srgbClr val="1B4D69"/>
+                </a:solidFill>
+                <a:latin typeface="Microsoft YaHei"/>
+                <a:ea typeface="Microsoft YaHei"/>
+                <a:cs typeface="Microsoft YaHei"/>
+              </a:rPr>
+              <a:t>评测集不降 · D 三方 A/B</a:t>
+            </a:r>
+          </a:p>
+        </p:txBody>
+      </p:sp>
+      <p:sp>
+        <p:nvSpPr>
+          <p:cNvPr id="37" name="Rectangle 36"/>
           <p:cNvSpPr/>
           <p:nvPr/>
         </p:nvSpPr>
         <p:spPr>
           <a:xfrm>
-            <a:off x="4198924" y="2523744"/>
-            <a:ext cx="1680667" cy="585216"/>
+            <a:off x="5961888" y="2798064"/>
+            <a:ext cx="1852574" cy="859536"/>
           </a:xfrm>
           <a:prstGeom prst="rect">
             <a:avLst/>
@@ -32231,14 +32296,14 @@
       </p:sp>
       <p:sp>
         <p:nvSpPr>
-          <p:cNvPr id="39" name="TextBox 38"/>
-          <p:cNvSpPr txBox="1"/>
-          <p:nvPr/>
-        </p:nvSpPr>
-        <p:spPr>
-          <a:xfrm>
-            <a:off x="4326940" y="2560320"/>
-            <a:ext cx="1461211" cy="512064"/>
+          <p:cNvPr id="38" name="TextBox 37"/>
+          <p:cNvSpPr txBox="1"/>
+          <p:nvPr/>
+        </p:nvSpPr>
+        <p:spPr>
+          <a:xfrm>
+            <a:off x="6089903" y="2843784"/>
+            <a:ext cx="1614830" cy="768096"/>
           </a:xfrm>
           <a:prstGeom prst="rect">
             <a:avLst/>
@@ -32263,7 +32328,18 @@
               </a:spcAft>
             </a:pPr>
             <a:r>
-              <a:rPr sz="1000" b="1">
+              <a:rPr sz="950" b="1">
+                <a:solidFill>
+                  <a:srgbClr val="0F62CE"/>
+                </a:solidFill>
+                <a:latin typeface="Microsoft YaHei"/>
+                <a:ea typeface="Microsoft YaHei"/>
+                <a:cs typeface="Microsoft YaHei"/>
+              </a:rPr>
+              <a:t>④ </a:t>
+            </a:r>
+            <a:r>
+              <a:rPr sz="950" b="1">
                 <a:solidFill>
                   <a:srgbClr val="0A2B45"/>
                 </a:solidFill>
@@ -32271,7 +32347,7 @@
                 <a:ea typeface="Microsoft YaHei"/>
                 <a:cs typeface="Microsoft YaHei"/>
               </a:rPr>
-              <a:t>工作区与构建</a:t>
+              <a:t>有界取证</a:t>
             </a:r>
           </a:p>
           <a:p>
@@ -32283,7 +32359,7 @@
                 <a:spcPts val="0"/>
               </a:spcBef>
               <a:spcAft>
-                <a:spcPts val="100"/>
+                <a:spcPts val="200"/>
               </a:spcAft>
             </a:pPr>
             <a:r>
@@ -32295,7 +32371,7 @@
                 <a:ea typeface="Microsoft YaHei"/>
                 <a:cs typeface="Microsoft YaHei"/>
               </a:rPr>
-              <a:t>git_workspace.py</a:t>
+              <a:t>planner_diagnostics.py</a:t>
             </a:r>
           </a:p>
           <a:p>
@@ -32319,465 +32395,169 @@
                 <a:ea typeface="Microsoft YaHei"/>
                 <a:cs typeface="Microsoft YaHei"/>
               </a:rPr>
-              <a:t>原位版本 · 隔离补丁</a:t>
-            </a:r>
-          </a:p>
-        </p:txBody>
-      </p:sp>
-      <p:sp>
-        <p:nvSpPr>
-          <p:cNvPr id="40" name="Rectangle 39"/>
+              <a:t>独立进程探针 ≤ 64 KiB</a:t>
+            </a:r>
+          </a:p>
+          <a:p>
+            <a:pPr algn="l" latinLnBrk="0">
+              <a:lnSpc>
+                <a:spcPct val="100000"/>
+              </a:lnSpc>
+              <a:spcBef>
+                <a:spcPts val="0"/>
+              </a:spcBef>
+              <a:spcAft>
+                <a:spcPts val="0"/>
+              </a:spcAft>
+            </a:pPr>
+            <a:r>
+              <a:rPr sz="800" b="0">
+                <a:solidFill>
+                  <a:srgbClr val="1B4D69"/>
+                </a:solidFill>
+                <a:latin typeface="Microsoft YaHei"/>
+                <a:ea typeface="Microsoft YaHei"/>
+                <a:cs typeface="Microsoft YaHei"/>
+              </a:rPr>
+              <a:t>账本异常自检与隔离</a:t>
+            </a:r>
+          </a:p>
+        </p:txBody>
+      </p:sp>
+      <p:sp>
+        <p:nvSpPr>
+          <p:cNvPr id="39" name="Rectangle 38"/>
           <p:cNvSpPr/>
           <p:nvPr/>
         </p:nvSpPr>
         <p:spPr>
           <a:xfrm>
-            <a:off x="6007608" y="2523744"/>
-            <a:ext cx="1680667" cy="585216"/>
+            <a:off x="3834993" y="3950208"/>
+            <a:ext cx="4125772" cy="621792"/>
           </a:xfrm>
           <a:prstGeom prst="rect">
             <a:avLst/>
           </a:prstGeom>
           <a:solidFill>
-            <a:srgbClr val="FFFFFF"/>
-          </a:solidFill>
-          <a:ln w="9525">
-            <a:solidFill>
-              <a:srgbClr val="CFE3F0"/>
-            </a:solidFill>
-          </a:ln>
-        </p:spPr>
-        <p:txBody>
-          <a:bodyPr rtlCol="0" anchor="ctr"/>
-          <a:lstStyle/>
-          <a:p>
-            <a:pPr algn="ctr"/>
-          </a:p>
-        </p:txBody>
-      </p:sp>
-      <p:sp>
-        <p:nvSpPr>
-          <p:cNvPr id="41" name="TextBox 40"/>
-          <p:cNvSpPr txBox="1"/>
-          <p:nvPr/>
-        </p:nvSpPr>
-        <p:spPr>
-          <a:xfrm>
-            <a:off x="6135624" y="2560320"/>
-            <a:ext cx="1461211" cy="512064"/>
-          </a:xfrm>
-          <a:prstGeom prst="rect">
-            <a:avLst/>
-          </a:prstGeom>
-          <a:noFill/>
-        </p:spPr>
-        <p:txBody>
-          <a:bodyPr wrap="square" anchor="ctr" lIns="0" tIns="0" rIns="0" bIns="0">
-            <a:noAutofit/>
-          </a:bodyPr>
-          <a:lstStyle/>
-          <a:p>
-            <a:pPr algn="l" latinLnBrk="0">
-              <a:lnSpc>
-                <a:spcPct val="100000"/>
-              </a:lnSpc>
-              <a:spcBef>
-                <a:spcPts val="0"/>
-              </a:spcBef>
-              <a:spcAft>
-                <a:spcPts val="100"/>
-              </a:spcAft>
-            </a:pPr>
-            <a:r>
-              <a:rPr sz="1000" b="1">
-                <a:solidFill>
-                  <a:srgbClr val="0A2B45"/>
-                </a:solidFill>
-                <a:latin typeface="Microsoft YaHei"/>
-                <a:ea typeface="Microsoft YaHei"/>
-                <a:cs typeface="Microsoft YaHei"/>
-              </a:rPr>
-              <a:t>服务与评测</a:t>
-            </a:r>
-          </a:p>
-          <a:p>
-            <a:pPr algn="l" latinLnBrk="0">
-              <a:lnSpc>
-                <a:spcPct val="100000"/>
-              </a:lnSpc>
-              <a:spcBef>
-                <a:spcPts val="0"/>
-              </a:spcBef>
-              <a:spcAft>
-                <a:spcPts val="100"/>
-              </a:spcAft>
-            </a:pPr>
-            <a:r>
-              <a:rPr sz="700" b="0">
-                <a:solidFill>
-                  <a:srgbClr val="0F62CE"/>
-                </a:solidFill>
-                <a:latin typeface="Consolas"/>
-                <a:ea typeface="Microsoft YaHei"/>
-                <a:cs typeface="Microsoft YaHei"/>
-              </a:rPr>
-              <a:t>benchmark.py</a:t>
-            </a:r>
-          </a:p>
-          <a:p>
-            <a:pPr algn="l" latinLnBrk="0">
-              <a:lnSpc>
-                <a:spcPct val="100000"/>
-              </a:lnSpc>
-              <a:spcBef>
-                <a:spcPts val="0"/>
-              </a:spcBef>
-              <a:spcAft>
-                <a:spcPts val="0"/>
-              </a:spcAft>
-            </a:pPr>
-            <a:r>
-              <a:rPr sz="800" b="0">
-                <a:solidFill>
-                  <a:srgbClr val="1B4D69"/>
-                </a:solidFill>
-                <a:latin typeface="Microsoft YaHei"/>
-                <a:ea typeface="Microsoft YaHei"/>
-                <a:cs typeface="Microsoft YaHei"/>
-              </a:rPr>
-              <a:t>启停 · 压测 · 数值与质量</a:t>
-            </a:r>
-          </a:p>
-        </p:txBody>
-      </p:sp>
-      <p:sp>
-        <p:nvSpPr>
-          <p:cNvPr id="42" name="Rectangle 41"/>
-          <p:cNvSpPr/>
-          <p:nvPr/>
-        </p:nvSpPr>
-        <p:spPr>
-          <a:xfrm>
-            <a:off x="4198924" y="3163824"/>
-            <a:ext cx="1680667" cy="585216"/>
-          </a:xfrm>
-          <a:prstGeom prst="rect">
-            <a:avLst/>
-          </a:prstGeom>
-          <a:solidFill>
-            <a:srgbClr val="FFFFFF"/>
-          </a:solidFill>
-          <a:ln w="9525">
-            <a:solidFill>
-              <a:srgbClr val="CFE3F0"/>
-            </a:solidFill>
-          </a:ln>
-        </p:spPr>
-        <p:txBody>
-          <a:bodyPr rtlCol="0" anchor="ctr"/>
-          <a:lstStyle/>
-          <a:p>
-            <a:pPr algn="ctr"/>
-          </a:p>
-        </p:txBody>
-      </p:sp>
-      <p:sp>
-        <p:nvSpPr>
-          <p:cNvPr id="43" name="TextBox 42"/>
-          <p:cNvSpPr txBox="1"/>
-          <p:nvPr/>
-        </p:nvSpPr>
-        <p:spPr>
-          <a:xfrm>
-            <a:off x="4326940" y="3200400"/>
-            <a:ext cx="1461211" cy="512064"/>
-          </a:xfrm>
-          <a:prstGeom prst="rect">
-            <a:avLst/>
-          </a:prstGeom>
-          <a:noFill/>
-        </p:spPr>
-        <p:txBody>
-          <a:bodyPr wrap="square" anchor="ctr" lIns="0" tIns="0" rIns="0" bIns="0">
-            <a:noAutofit/>
-          </a:bodyPr>
-          <a:lstStyle/>
-          <a:p>
-            <a:pPr algn="l" latinLnBrk="0">
-              <a:lnSpc>
-                <a:spcPct val="100000"/>
-              </a:lnSpc>
-              <a:spcBef>
-                <a:spcPts val="0"/>
-              </a:spcBef>
-              <a:spcAft>
-                <a:spcPts val="100"/>
-              </a:spcAft>
-            </a:pPr>
-            <a:r>
-              <a:rPr sz="1000" b="1">
-                <a:solidFill>
-                  <a:srgbClr val="0A2B45"/>
-                </a:solidFill>
-                <a:latin typeface="Microsoft YaHei"/>
-                <a:ea typeface="Microsoft YaHei"/>
-                <a:cs typeface="Microsoft YaHei"/>
-              </a:rPr>
-              <a:t>门禁与晋升</a:t>
-            </a:r>
-          </a:p>
-          <a:p>
-            <a:pPr algn="l" latinLnBrk="0">
-              <a:lnSpc>
-                <a:spcPct val="100000"/>
-              </a:lnSpc>
-              <a:spcBef>
-                <a:spcPts val="0"/>
-              </a:spcBef>
-              <a:spcAft>
-                <a:spcPts val="100"/>
-              </a:spcAft>
-            </a:pPr>
-            <a:r>
-              <a:rPr sz="700" b="0">
-                <a:solidFill>
-                  <a:srgbClr val="0F62CE"/>
-                </a:solidFill>
-                <a:latin typeface="Consolas"/>
-                <a:ea typeface="Microsoft YaHei"/>
-                <a:cs typeface="Microsoft YaHei"/>
-              </a:rPr>
-              <a:t>selfiterate_gates.py</a:t>
-            </a:r>
-          </a:p>
-          <a:p>
-            <a:pPr algn="l" latinLnBrk="0">
-              <a:lnSpc>
-                <a:spcPct val="100000"/>
-              </a:lnSpc>
-              <a:spcBef>
-                <a:spcPts val="0"/>
-              </a:spcBef>
-              <a:spcAft>
-                <a:spcPts val="0"/>
-              </a:spcAft>
-            </a:pPr>
-            <a:r>
-              <a:rPr sz="800" b="0">
-                <a:solidFill>
-                  <a:srgbClr val="1B4D69"/>
-                </a:solidFill>
-                <a:latin typeface="Microsoft YaHei"/>
-                <a:ea typeface="Microsoft YaHei"/>
-                <a:cs typeface="Microsoft YaHei"/>
-              </a:rPr>
-              <a:t>噪声门 · 叠加 · 晋升</a:t>
-            </a:r>
-          </a:p>
-        </p:txBody>
-      </p:sp>
-      <p:sp>
-        <p:nvSpPr>
-          <p:cNvPr id="44" name="Rectangle 43"/>
-          <p:cNvSpPr/>
-          <p:nvPr/>
-        </p:nvSpPr>
-        <p:spPr>
-          <a:xfrm>
-            <a:off x="6007608" y="3163824"/>
-            <a:ext cx="1680667" cy="585216"/>
-          </a:xfrm>
-          <a:prstGeom prst="rect">
-            <a:avLst/>
-          </a:prstGeom>
-          <a:solidFill>
-            <a:srgbClr val="FFFFFF"/>
-          </a:solidFill>
-          <a:ln w="9525">
-            <a:solidFill>
-              <a:srgbClr val="CFE3F0"/>
-            </a:solidFill>
-          </a:ln>
-        </p:spPr>
-        <p:txBody>
-          <a:bodyPr rtlCol="0" anchor="ctr"/>
-          <a:lstStyle/>
-          <a:p>
-            <a:pPr algn="ctr"/>
-          </a:p>
-        </p:txBody>
-      </p:sp>
-      <p:sp>
-        <p:nvSpPr>
-          <p:cNvPr id="45" name="TextBox 44"/>
-          <p:cNvSpPr txBox="1"/>
-          <p:nvPr/>
-        </p:nvSpPr>
-        <p:spPr>
-          <a:xfrm>
-            <a:off x="6135624" y="3200400"/>
-            <a:ext cx="1461211" cy="512064"/>
-          </a:xfrm>
-          <a:prstGeom prst="rect">
-            <a:avLst/>
-          </a:prstGeom>
-          <a:noFill/>
-        </p:spPr>
-        <p:txBody>
-          <a:bodyPr wrap="square" anchor="ctr" lIns="0" tIns="0" rIns="0" bIns="0">
-            <a:noAutofit/>
-          </a:bodyPr>
-          <a:lstStyle/>
-          <a:p>
-            <a:pPr algn="l" latinLnBrk="0">
-              <a:lnSpc>
-                <a:spcPct val="100000"/>
-              </a:lnSpc>
-              <a:spcBef>
-                <a:spcPts val="0"/>
-              </a:spcBef>
-              <a:spcAft>
-                <a:spcPts val="100"/>
-              </a:spcAft>
-            </a:pPr>
-            <a:r>
-              <a:rPr sz="1000" b="1">
-                <a:solidFill>
-                  <a:srgbClr val="0A2B45"/>
-                </a:solidFill>
-                <a:latin typeface="Microsoft YaHei"/>
-                <a:ea typeface="Microsoft YaHei"/>
-                <a:cs typeface="Microsoft YaHei"/>
-              </a:rPr>
-              <a:t>有界取证</a:t>
-            </a:r>
-          </a:p>
-          <a:p>
-            <a:pPr algn="l" latinLnBrk="0">
-              <a:lnSpc>
-                <a:spcPct val="100000"/>
-              </a:lnSpc>
-              <a:spcBef>
-                <a:spcPts val="0"/>
-              </a:spcBef>
-              <a:spcAft>
-                <a:spcPts val="100"/>
-              </a:spcAft>
-            </a:pPr>
-            <a:r>
-              <a:rPr sz="700" b="0">
-                <a:solidFill>
-                  <a:srgbClr val="0F62CE"/>
-                </a:solidFill>
-                <a:latin typeface="Consolas"/>
-                <a:ea typeface="Microsoft YaHei"/>
-                <a:cs typeface="Microsoft YaHei"/>
-              </a:rPr>
-              <a:t>planner_diagnostics.py</a:t>
-            </a:r>
-          </a:p>
-          <a:p>
-            <a:pPr algn="l" latinLnBrk="0">
-              <a:lnSpc>
-                <a:spcPct val="100000"/>
-              </a:lnSpc>
-              <a:spcBef>
-                <a:spcPts val="0"/>
-              </a:spcBef>
-              <a:spcAft>
-                <a:spcPts val="0"/>
-              </a:spcAft>
-            </a:pPr>
-            <a:r>
-              <a:rPr sz="800" b="0">
-                <a:solidFill>
-                  <a:srgbClr val="1B4D69"/>
-                </a:solidFill>
-                <a:latin typeface="Microsoft YaHei"/>
-                <a:ea typeface="Microsoft YaHei"/>
-                <a:cs typeface="Microsoft YaHei"/>
-              </a:rPr>
-              <a:t>独立进程 probe · 有界产物</a:t>
-            </a:r>
-          </a:p>
-        </p:txBody>
-      </p:sp>
-      <p:sp>
-        <p:nvSpPr>
-          <p:cNvPr id="46" name="Rectangle 45"/>
-          <p:cNvSpPr/>
-          <p:nvPr/>
-        </p:nvSpPr>
-        <p:spPr>
-          <a:xfrm>
-            <a:off x="4052620" y="4133087"/>
-            <a:ext cx="3781958" cy="493776"/>
-          </a:xfrm>
-          <a:prstGeom prst="rect">
-            <a:avLst/>
-          </a:prstGeom>
-          <a:solidFill>
-            <a:srgbClr val="F2F8FD"/>
+            <a:srgbClr val="E6F0FC"/>
           </a:solidFill>
           <a:ln w="12700">
             <a:solidFill>
-              <a:srgbClr val="40708B"/>
+              <a:srgbClr val="0F62CE"/>
             </a:solidFill>
             <a:prstDash val="dash"/>
           </a:ln>
         </p:spPr>
         <p:txBody>
-          <a:bodyPr rtlCol="0" anchor="ctr" wrap="square" tIns="36576" bIns="36576">
-            <a:noAutofit/>
-          </a:bodyPr>
-          <a:lstStyle/>
-          <a:p>
-            <a:pPr algn="ctr" latinLnBrk="0">
-              <a:lnSpc>
-                <a:spcPct val="100000"/>
-              </a:lnSpc>
-              <a:spcBef>
-                <a:spcPts val="0"/>
-              </a:spcBef>
-              <a:spcAft>
-                <a:spcPts val="200"/>
+          <a:bodyPr rtlCol="0" anchor="ctr"/>
+          <a:lstStyle/>
+          <a:p>
+            <a:pPr algn="ctr"/>
+          </a:p>
+        </p:txBody>
+      </p:sp>
+      <p:sp>
+        <p:nvSpPr>
+          <p:cNvPr id="40" name="TextBox 39"/>
+          <p:cNvSpPr txBox="1"/>
+          <p:nvPr/>
+        </p:nvSpPr>
+        <p:spPr>
+          <a:xfrm>
+            <a:off x="3981297" y="3986784"/>
+            <a:ext cx="3833164" cy="201168"/>
+          </a:xfrm>
+          <a:prstGeom prst="rect">
+            <a:avLst/>
+          </a:prstGeom>
+          <a:noFill/>
+        </p:spPr>
+        <p:txBody>
+          <a:bodyPr wrap="square" anchor="ctr" lIns="0" tIns="0" rIns="0" bIns="0">
+            <a:noAutofit/>
+          </a:bodyPr>
+          <a:lstStyle/>
+          <a:p>
+            <a:pPr algn="l" latinLnBrk="0">
+              <a:lnSpc>
+                <a:spcPct val="100000"/>
+              </a:lnSpc>
+              <a:spcBef>
+                <a:spcPts val="0"/>
+              </a:spcBef>
+              <a:spcAft>
+                <a:spcPts val="0"/>
               </a:spcAft>
             </a:pPr>
             <a:r>
               <a:rPr sz="1000" b="1">
                 <a:solidFill>
+                  <a:srgbClr val="0F62CE"/>
+                </a:solidFill>
+                <a:latin typeface="Microsoft YaHei"/>
+                <a:ea typeface="Microsoft YaHei"/>
+                <a:cs typeface="Microsoft YaHei"/>
+              </a:rPr>
+              <a:t>可审计通信与记忆层</a:t>
+            </a:r>
+            <a:r>
+              <a:rPr sz="700" b="0">
+                <a:solidFill>
+                  <a:srgbClr val="40708B"/>
+                </a:solidFill>
+                <a:latin typeface="Consolas"/>
+                <a:ea typeface="Microsoft YaHei"/>
+                <a:cs typeface="Microsoft YaHei"/>
+              </a:rPr>
+              <a:t>　planner_mailbox.py · planner_memory.py</a:t>
+            </a:r>
+          </a:p>
+        </p:txBody>
+      </p:sp>
+      <p:sp>
+        <p:nvSpPr>
+          <p:cNvPr id="41" name="TextBox 40"/>
+          <p:cNvSpPr txBox="1"/>
+          <p:nvPr/>
+        </p:nvSpPr>
+        <p:spPr>
+          <a:xfrm>
+            <a:off x="3981297" y="4197096"/>
+            <a:ext cx="3833164" cy="164592"/>
+          </a:xfrm>
+          <a:prstGeom prst="rect">
+            <a:avLst/>
+          </a:prstGeom>
+          <a:noFill/>
+        </p:spPr>
+        <p:txBody>
+          <a:bodyPr wrap="square" anchor="ctr" lIns="0" tIns="0" rIns="0" bIns="0">
+            <a:noAutofit/>
+          </a:bodyPr>
+          <a:lstStyle/>
+          <a:p>
+            <a:pPr algn="l" latinLnBrk="0">
+              <a:lnSpc>
+                <a:spcPct val="100000"/>
+              </a:lnSpc>
+              <a:spcBef>
+                <a:spcPts val="0"/>
+              </a:spcBef>
+              <a:spcAft>
+                <a:spcPts val="0"/>
+              </a:spcAft>
+            </a:pPr>
+            <a:r>
+              <a:rPr sz="800" b="1">
+                <a:solidFill>
                   <a:srgbClr val="0A2B45"/>
                 </a:solidFill>
-                <a:latin typeface="Microsoft YaHei"/>
-                <a:ea typeface="Microsoft YaHei"/>
-                <a:cs typeface="Microsoft YaHei"/>
-              </a:rPr>
-              <a:t>规划器接口 · mailbox</a:t>
-            </a:r>
-            <a:r>
-              <a:rPr sz="750" b="0">
-                <a:solidFill>
-                  <a:srgbClr val="40708B"/>
-                </a:solidFill>
                 <a:latin typeface="Consolas"/>
                 <a:ea typeface="Microsoft YaHei"/>
                 <a:cs typeface="Microsoft YaHei"/>
               </a:rPr>
-              <a:t>　planner_mailbox.py</a:t>
-            </a:r>
-          </a:p>
-          <a:p>
-            <a:pPr algn="ctr" latinLnBrk="0">
-              <a:lnSpc>
-                <a:spcPct val="100000"/>
-              </a:lnSpc>
-              <a:spcBef>
-                <a:spcPts val="0"/>
-              </a:spcBef>
-              <a:spcAft>
-                <a:spcPts val="0"/>
-              </a:spcAft>
-            </a:pPr>
+              <a:t>mailbox</a:t>
+            </a:r>
             <a:r>
               <a:rPr sz="800" b="0">
                 <a:solidFill>
@@ -32787,21 +32567,79 @@
                 <a:ea typeface="Microsoft YaHei"/>
                 <a:cs typeface="Microsoft YaHei"/>
               </a:rPr>
-              <a:t>UUID + 请求 SHA + 动作 schema　·　上下文 ≤ 18 KB　·　往来落盘</a:t>
-            </a:r>
-          </a:p>
-        </p:txBody>
-      </p:sp>
-      <p:sp>
-        <p:nvSpPr>
-          <p:cNvPr id="47" name="Rounded Rectangle 46"/>
+              <a:t>　UUID + 请求 SHA 校验　·　单条消息 ≤ 28 KB</a:t>
+            </a:r>
+          </a:p>
+        </p:txBody>
+      </p:sp>
+      <p:sp>
+        <p:nvSpPr>
+          <p:cNvPr id="42" name="TextBox 41"/>
+          <p:cNvSpPr txBox="1"/>
+          <p:nvPr/>
+        </p:nvSpPr>
+        <p:spPr>
+          <a:xfrm>
+            <a:off x="3981297" y="4361688"/>
+            <a:ext cx="3833164" cy="164592"/>
+          </a:xfrm>
+          <a:prstGeom prst="rect">
+            <a:avLst/>
+          </a:prstGeom>
+          <a:noFill/>
+        </p:spPr>
+        <p:txBody>
+          <a:bodyPr wrap="square" anchor="ctr" lIns="0" tIns="0" rIns="0" bIns="0">
+            <a:noAutofit/>
+          </a:bodyPr>
+          <a:lstStyle/>
+          <a:p>
+            <a:pPr algn="l" latinLnBrk="0">
+              <a:lnSpc>
+                <a:spcPct val="100000"/>
+              </a:lnSpc>
+              <a:spcBef>
+                <a:spcPts val="0"/>
+              </a:spcBef>
+              <a:spcAft>
+                <a:spcPts val="0"/>
+              </a:spcAft>
+            </a:pPr>
+            <a:r>
+              <a:rPr sz="800" b="1">
+                <a:solidFill>
+                  <a:srgbClr val="0A2B45"/>
+                </a:solidFill>
+                <a:latin typeface="Consolas"/>
+                <a:ea typeface="Microsoft YaHei"/>
+                <a:cs typeface="Microsoft YaHei"/>
+              </a:rPr>
+              <a:t>memory</a:t>
+            </a:r>
+            <a:r>
+              <a:rPr sz="800" b="0">
+                <a:solidFill>
+                  <a:srgbClr val="1B4D69"/>
+                </a:solidFill>
+                <a:latin typeface="Microsoft YaHei"/>
+                <a:ea typeface="Microsoft YaHei"/>
+                <a:cs typeface="Microsoft YaHei"/>
+              </a:rPr>
+              <a:t>　滚动压缩：提案摘要 + 修改指纹 + 拒绝原因</a:t>
+            </a:r>
+          </a:p>
+        </p:txBody>
+      </p:sp>
+      <p:sp>
+        <p:nvSpPr>
+          <p:cNvPr id="43" name="Rounded Rectangle 42"/>
           <p:cNvSpPr/>
           <p:nvPr/>
         </p:nvSpPr>
         <p:spPr>
           <a:xfrm>
-            <a:off x="4052620" y="4791456"/>
-            <a:ext cx="3781958" cy="713232"/>
+            <a:off x="3834993" y="4791456"/>
+            <a:ext cx="4125772" cy="713232"/>
           </a:xfrm>
           <a:prstGeom prst="roundRect">
             <a:avLst>
@@ -32827,14 +32665,14 @@
       </p:sp>
       <p:sp>
         <p:nvSpPr>
-          <p:cNvPr id="48" name="TextBox 47"/>
-          <p:cNvSpPr txBox="1"/>
-          <p:nvPr/>
-        </p:nvSpPr>
-        <p:spPr>
-          <a:xfrm>
-            <a:off x="4198924" y="4846320"/>
-            <a:ext cx="2465222" cy="237744"/>
+          <p:cNvPr id="44" name="TextBox 43"/>
+          <p:cNvSpPr txBox="1"/>
+          <p:nvPr/>
+        </p:nvSpPr>
+        <p:spPr>
+          <a:xfrm>
+            <a:off x="3981297" y="4837176"/>
+            <a:ext cx="2260396" cy="237744"/>
           </a:xfrm>
           <a:prstGeom prst="rect">
             <a:avLst/>
@@ -32878,21 +32716,21 @@
                 <a:ea typeface="Microsoft YaHei"/>
                 <a:cs typeface="Microsoft YaHei"/>
               </a:rPr>
-              <a:t>　外部托管会话</a:t>
-            </a:r>
-          </a:p>
-        </p:txBody>
-      </p:sp>
-      <p:sp>
-        <p:nvSpPr>
-          <p:cNvPr id="49" name="Rounded Rectangle 48"/>
+              <a:t>　Codex 外部托管会话</a:t>
+            </a:r>
+          </a:p>
+        </p:txBody>
+      </p:sp>
+      <p:sp>
+        <p:nvSpPr>
+          <p:cNvPr id="45" name="Rounded Rectangle 44"/>
           <p:cNvSpPr/>
           <p:nvPr/>
         </p:nvSpPr>
         <p:spPr>
           <a:xfrm>
-            <a:off x="6590995" y="4873752"/>
-            <a:ext cx="1097280" cy="201168"/>
+            <a:off x="6314846" y="4864608"/>
+            <a:ext cx="1499616" cy="201168"/>
           </a:xfrm>
           <a:prstGeom prst="roundRect">
             <a:avLst>
@@ -32932,21 +32770,21 @@
                 <a:ea typeface="Microsoft YaHei"/>
                 <a:cs typeface="Microsoft YaHei"/>
               </a:rPr>
-              <a:t>不能自行宣告成功</a:t>
-            </a:r>
-          </a:p>
-        </p:txBody>
-      </p:sp>
-      <p:sp>
-        <p:nvSpPr>
-          <p:cNvPr id="50" name="TextBox 49"/>
-          <p:cNvSpPr txBox="1"/>
-          <p:nvPr/>
-        </p:nvSpPr>
-        <p:spPr>
-          <a:xfrm>
-            <a:off x="4198924" y="5102352"/>
-            <a:ext cx="3489350" cy="347472"/>
+              <a:t>硬约束：不能自行宣告成功</a:t>
+            </a:r>
+          </a:p>
+        </p:txBody>
+      </p:sp>
+      <p:sp>
+        <p:nvSpPr>
+          <p:cNvPr id="46" name="TextBox 45"/>
+          <p:cNvSpPr txBox="1"/>
+          <p:nvPr/>
+        </p:nvSpPr>
+        <p:spPr>
+          <a:xfrm>
+            <a:off x="3981297" y="5102352"/>
+            <a:ext cx="3833164" cy="347472"/>
           </a:xfrm>
           <a:prstGeom prst="rect">
             <a:avLst/>
@@ -32979,7 +32817,7 @@
                 <a:ea typeface="Microsoft YaHei"/>
                 <a:cs typeface="Microsoft YaHei"/>
               </a:rPr>
-              <a:t>读模型源码与冻结证据，提出优化假设与补丁</a:t>
+              <a:t>读源码与冻结证据，提假设写补丁</a:t>
             </a:r>
           </a:p>
           <a:p>
@@ -33003,21 +32841,21 @@
                 <a:ea typeface="Microsoft YaHei"/>
                 <a:cs typeface="Microsoft YaHei"/>
               </a:rPr>
-              <a:t>动作受限：read / search / probe / patch / stop</a:t>
+              <a:t>动作受限：read / search / probe / patch</a:t>
             </a:r>
           </a:p>
         </p:txBody>
       </p:sp>
       <p:cxnSp>
         <p:nvCxnSpPr>
-          <p:cNvPr id="51" name="Connector 50"/>
+          <p:cNvPr id="47" name="Connector 46"/>
           <p:cNvCxnSpPr/>
           <p:nvPr/>
         </p:nvCxnSpPr>
         <p:spPr>
           <a:xfrm>
-            <a:off x="4718304" y="3913631"/>
-            <a:ext cx="0" cy="201169"/>
+            <a:off x="4562855" y="3749039"/>
+            <a:ext cx="0" cy="182881"/>
           </a:xfrm>
           <a:prstGeom prst="line">
             <a:avLst/>
@@ -33032,14 +32870,14 @@
       </p:cxnSp>
       <p:cxnSp>
         <p:nvCxnSpPr>
-          <p:cNvPr id="52" name="Connector 51"/>
+          <p:cNvPr id="48" name="Connector 47"/>
           <p:cNvCxnSpPr/>
           <p:nvPr/>
         </p:nvCxnSpPr>
         <p:spPr>
           <a:xfrm>
-            <a:off x="4718304" y="4645151"/>
-            <a:ext cx="0" cy="128017"/>
+            <a:off x="4562855" y="4590288"/>
+            <a:ext cx="0" cy="182880"/>
           </a:xfrm>
           <a:prstGeom prst="line">
             <a:avLst/>
@@ -33054,14 +32892,14 @@
       </p:cxnSp>
       <p:cxnSp>
         <p:nvCxnSpPr>
-          <p:cNvPr id="53" name="Connector 52"/>
+          <p:cNvPr id="49" name="Connector 48"/>
           <p:cNvCxnSpPr/>
           <p:nvPr/>
         </p:nvCxnSpPr>
         <p:spPr>
           <a:xfrm flipV="1">
-            <a:off x="7168896" y="3877056"/>
-            <a:ext cx="0" cy="274319"/>
+            <a:off x="7232903" y="3712464"/>
+            <a:ext cx="0" cy="256032"/>
           </a:xfrm>
           <a:prstGeom prst="line">
             <a:avLst/>
@@ -33076,14 +32914,14 @@
       </p:cxnSp>
       <p:cxnSp>
         <p:nvCxnSpPr>
-          <p:cNvPr id="54" name="Connector 53"/>
+          <p:cNvPr id="50" name="Connector 49"/>
           <p:cNvCxnSpPr/>
           <p:nvPr/>
         </p:nvCxnSpPr>
         <p:spPr>
           <a:xfrm flipV="1">
-            <a:off x="7168896" y="4608576"/>
-            <a:ext cx="0" cy="201168"/>
+            <a:off x="7232903" y="4553712"/>
+            <a:ext cx="0" cy="256032"/>
           </a:xfrm>
           <a:prstGeom prst="line">
             <a:avLst/>
@@ -33098,14 +32936,14 @@
       </p:cxnSp>
       <p:sp>
         <p:nvSpPr>
-          <p:cNvPr id="55" name="TextBox 54"/>
-          <p:cNvSpPr txBox="1"/>
-          <p:nvPr/>
-        </p:nvSpPr>
-        <p:spPr>
-          <a:xfrm>
-            <a:off x="4782312" y="3913631"/>
-            <a:ext cx="1170432" cy="201167"/>
+          <p:cNvPr id="51" name="TextBox 50"/>
+          <p:cNvSpPr txBox="1"/>
+          <p:nvPr/>
+        </p:nvSpPr>
+        <p:spPr>
+          <a:xfrm>
+            <a:off x="4626864" y="3749039"/>
+            <a:ext cx="1243584" cy="182880"/>
           </a:xfrm>
           <a:prstGeom prst="rect">
             <a:avLst/>
@@ -33138,21 +32976,21 @@
                 <a:ea typeface="Microsoft YaHei"/>
                 <a:cs typeface="Microsoft YaHei"/>
               </a:rPr>
-              <a:t>请求：账本 + 最近证据</a:t>
-            </a:r>
-          </a:p>
-        </p:txBody>
-      </p:sp>
-      <p:sp>
-        <p:nvSpPr>
-          <p:cNvPr id="56" name="TextBox 55"/>
-          <p:cNvSpPr txBox="1"/>
-          <p:nvPr/>
-        </p:nvSpPr>
-        <p:spPr>
-          <a:xfrm>
-            <a:off x="5934455" y="3913631"/>
-            <a:ext cx="1170432" cy="201167"/>
+              <a:t>下发：账本 + 被拒记忆</a:t>
+            </a:r>
+          </a:p>
+        </p:txBody>
+      </p:sp>
+      <p:sp>
+        <p:nvSpPr>
+          <p:cNvPr id="52" name="TextBox 51"/>
+          <p:cNvSpPr txBox="1"/>
+          <p:nvPr/>
+        </p:nvSpPr>
+        <p:spPr>
+          <a:xfrm>
+            <a:off x="5925311" y="3749039"/>
+            <a:ext cx="1243584" cy="182880"/>
           </a:xfrm>
           <a:prstGeom prst="rect">
             <a:avLst/>
@@ -33185,21 +33023,21 @@
                 <a:ea typeface="Microsoft YaHei"/>
                 <a:cs typeface="Microsoft YaHei"/>
               </a:rPr>
-              <a:t>提案：假设 + 补丁</a:t>
+              <a:t>提交：假设 + 补丁</a:t>
             </a:r>
           </a:p>
         </p:txBody>
       </p:sp>
       <p:cxnSp>
         <p:nvCxnSpPr>
-          <p:cNvPr id="57" name="Connector 56"/>
+          <p:cNvPr id="53" name="Connector 52"/>
           <p:cNvCxnSpPr/>
           <p:nvPr/>
         </p:nvCxnSpPr>
         <p:spPr>
           <a:xfrm>
-            <a:off x="3054096" y="2084832"/>
-            <a:ext cx="961948" cy="0"/>
+            <a:off x="2962656" y="2130552"/>
+            <a:ext cx="835761" cy="0"/>
           </a:xfrm>
           <a:prstGeom prst="line">
             <a:avLst/>
@@ -33214,14 +33052,14 @@
       </p:cxnSp>
       <p:cxnSp>
         <p:nvCxnSpPr>
-          <p:cNvPr id="58" name="Connector 57"/>
+          <p:cNvPr id="54" name="Connector 53"/>
           <p:cNvCxnSpPr/>
           <p:nvPr/>
         </p:nvCxnSpPr>
         <p:spPr>
           <a:xfrm flipH="1">
-            <a:off x="3054096" y="3364992"/>
-            <a:ext cx="961948" cy="0"/>
+            <a:off x="2962656" y="3429000"/>
+            <a:ext cx="835761" cy="0"/>
           </a:xfrm>
           <a:prstGeom prst="line">
             <a:avLst/>
@@ -33236,14 +33074,14 @@
       </p:cxnSp>
       <p:cxnSp>
         <p:nvCxnSpPr>
-          <p:cNvPr id="59" name="Connector 58"/>
+          <p:cNvPr id="55" name="Connector 54"/>
           <p:cNvCxnSpPr/>
           <p:nvPr/>
         </p:nvCxnSpPr>
         <p:spPr>
           <a:xfrm>
-            <a:off x="3054096" y="5148072"/>
-            <a:ext cx="961948" cy="0"/>
+            <a:off x="2962656" y="5148072"/>
+            <a:ext cx="835761" cy="0"/>
           </a:xfrm>
           <a:prstGeom prst="line">
             <a:avLst/>
@@ -33259,14 +33097,14 @@
       </p:cxnSp>
       <p:sp>
         <p:nvSpPr>
-          <p:cNvPr id="60" name="Rounded Rectangle 59"/>
+          <p:cNvPr id="56" name="Rounded Rectangle 55"/>
           <p:cNvSpPr/>
           <p:nvPr/>
         </p:nvSpPr>
         <p:spPr>
           <a:xfrm>
-            <a:off x="3108960" y="1828800"/>
-            <a:ext cx="731520" cy="201168"/>
+            <a:off x="2958084" y="1874520"/>
+            <a:ext cx="713232" cy="201168"/>
           </a:xfrm>
           <a:prstGeom prst="roundRect">
             <a:avLst>
@@ -33308,21 +33146,21 @@
                 <a:ea typeface="Microsoft YaHei"/>
                 <a:cs typeface="Microsoft YaHei"/>
               </a:rPr>
-              <a:t>合同 · 授权</a:t>
-            </a:r>
-          </a:p>
-        </p:txBody>
-      </p:sp>
-      <p:sp>
-        <p:nvSpPr>
-          <p:cNvPr id="61" name="Rounded Rectangle 60"/>
+              <a:t>契约 · 授权</a:t>
+            </a:r>
+          </a:p>
+        </p:txBody>
+      </p:sp>
+      <p:sp>
+        <p:nvSpPr>
+          <p:cNvPr id="57" name="Rounded Rectangle 56"/>
           <p:cNvSpPr/>
           <p:nvPr/>
         </p:nvSpPr>
         <p:spPr>
           <a:xfrm>
-            <a:off x="3108960" y="3108960"/>
-            <a:ext cx="731520" cy="201168"/>
+            <a:off x="2958084" y="3172968"/>
+            <a:ext cx="713232" cy="201168"/>
           </a:xfrm>
           <a:prstGeom prst="roundRect">
             <a:avLst>
@@ -33371,14 +33209,14 @@
       </p:sp>
       <p:sp>
         <p:nvSpPr>
-          <p:cNvPr id="62" name="Rounded Rectangle 61"/>
+          <p:cNvPr id="58" name="Rounded Rectangle 57"/>
           <p:cNvSpPr/>
           <p:nvPr/>
         </p:nvSpPr>
         <p:spPr>
           <a:xfrm>
-            <a:off x="3163824" y="4892040"/>
-            <a:ext cx="621792" cy="201168"/>
+            <a:off x="2958084" y="4892040"/>
+            <a:ext cx="713232" cy="201168"/>
           </a:xfrm>
           <a:prstGeom prst="roundRect">
             <a:avLst>
@@ -33420,21 +33258,268 @@
                 <a:ea typeface="Microsoft YaHei"/>
                 <a:cs typeface="Microsoft YaHei"/>
               </a:rPr>
-              <a:t>协同实现</a:t>
-            </a:r>
-          </a:p>
-        </p:txBody>
-      </p:sp>
-      <p:sp>
-        <p:nvSpPr>
-          <p:cNvPr id="63" name="Rounded Rectangle 62"/>
+              <a:t>协同写补丁</a:t>
+            </a:r>
+          </a:p>
+        </p:txBody>
+      </p:sp>
+      <p:cxnSp>
+        <p:nvCxnSpPr>
+          <p:cNvPr id="59" name="Connector 58"/>
+          <p:cNvCxnSpPr/>
+          <p:nvPr/>
+        </p:nvCxnSpPr>
+        <p:spPr>
+          <a:xfrm>
+            <a:off x="7997342" y="2029968"/>
+            <a:ext cx="835762" cy="0"/>
+          </a:xfrm>
+          <a:prstGeom prst="line">
+            <a:avLst/>
+          </a:prstGeom>
+          <a:ln w="19050">
+            <a:solidFill>
+              <a:srgbClr val="0F62CE"/>
+            </a:solidFill>
+            <a:tailEnd type="triangle" w="med" len="med"/>
+          </a:ln>
+        </p:spPr>
+      </p:cxnSp>
+      <p:cxnSp>
+        <p:nvCxnSpPr>
+          <p:cNvPr id="60" name="Connector 59"/>
+          <p:cNvCxnSpPr/>
+          <p:nvPr/>
+        </p:nvCxnSpPr>
+        <p:spPr>
+          <a:xfrm flipH="1">
+            <a:off x="7997342" y="2542032"/>
+            <a:ext cx="835762" cy="0"/>
+          </a:xfrm>
+          <a:prstGeom prst="line">
+            <a:avLst/>
+          </a:prstGeom>
+          <a:ln w="19050">
+            <a:solidFill>
+              <a:srgbClr val="0F62CE"/>
+            </a:solidFill>
+            <a:tailEnd type="triangle" w="med" len="med"/>
+          </a:ln>
+        </p:spPr>
+      </p:cxnSp>
+      <p:sp>
+        <p:nvSpPr>
+          <p:cNvPr id="61" name="Rounded Rectangle 60"/>
           <p:cNvSpPr/>
           <p:nvPr/>
         </p:nvSpPr>
         <p:spPr>
           <a:xfrm>
-            <a:off x="8046719" y="1828800"/>
-            <a:ext cx="731520" cy="201168"/>
+            <a:off x="8124443" y="1773936"/>
+            <a:ext cx="713232" cy="201168"/>
+          </a:xfrm>
+          <a:prstGeom prst="roundRect">
+            <a:avLst>
+              <a:gd name="adj" fmla="val 50000"/>
+            </a:avLst>
+          </a:prstGeom>
+          <a:solidFill>
+            <a:srgbClr val="FFFFFF"/>
+          </a:solidFill>
+          <a:ln w="9525">
+            <a:solidFill>
+              <a:srgbClr val="0F62CE"/>
+            </a:solidFill>
+          </a:ln>
+        </p:spPr>
+        <p:txBody>
+          <a:bodyPr rtlCol="0" anchor="ctr" wrap="square" lIns="18288" tIns="0" rIns="18288" bIns="0">
+            <a:noAutofit/>
+          </a:bodyPr>
+          <a:lstStyle/>
+          <a:p>
+            <a:pPr algn="ctr" latinLnBrk="0">
+              <a:lnSpc>
+                <a:spcPct val="100000"/>
+              </a:lnSpc>
+              <a:spcBef>
+                <a:spcPts val="0"/>
+              </a:spcBef>
+              <a:spcAft>
+                <a:spcPts val="0"/>
+              </a:spcAft>
+            </a:pPr>
+            <a:r>
+              <a:rPr sz="750" b="1">
+                <a:solidFill>
+                  <a:srgbClr val="0F62CE"/>
+                </a:solidFill>
+                <a:latin typeface="Microsoft YaHei"/>
+                <a:ea typeface="Microsoft YaHei"/>
+                <a:cs typeface="Microsoft YaHei"/>
+              </a:rPr>
+              <a:t>补丁 · 构建</a:t>
+            </a:r>
+          </a:p>
+        </p:txBody>
+      </p:sp>
+      <p:sp>
+        <p:nvSpPr>
+          <p:cNvPr id="62" name="Rounded Rectangle 61"/>
+          <p:cNvSpPr/>
+          <p:nvPr/>
+        </p:nvSpPr>
+        <p:spPr>
+          <a:xfrm>
+            <a:off x="8170163" y="2286000"/>
+            <a:ext cx="621792" cy="201168"/>
+          </a:xfrm>
+          <a:prstGeom prst="roundRect">
+            <a:avLst>
+              <a:gd name="adj" fmla="val 50000"/>
+            </a:avLst>
+          </a:prstGeom>
+          <a:solidFill>
+            <a:srgbClr val="FFFFFF"/>
+          </a:solidFill>
+          <a:ln w="9525">
+            <a:solidFill>
+              <a:srgbClr val="0F62CE"/>
+            </a:solidFill>
+          </a:ln>
+        </p:spPr>
+        <p:txBody>
+          <a:bodyPr rtlCol="0" anchor="ctr" wrap="square" lIns="18288" tIns="0" rIns="18288" bIns="0">
+            <a:noAutofit/>
+          </a:bodyPr>
+          <a:lstStyle/>
+          <a:p>
+            <a:pPr algn="ctr" latinLnBrk="0">
+              <a:lnSpc>
+                <a:spcPct val="100000"/>
+              </a:lnSpc>
+              <a:spcBef>
+                <a:spcPts val="0"/>
+              </a:spcBef>
+              <a:spcAft>
+                <a:spcPts val="0"/>
+              </a:spcAft>
+            </a:pPr>
+            <a:r>
+              <a:rPr sz="750" b="1">
+                <a:solidFill>
+                  <a:srgbClr val="0F62CE"/>
+                </a:solidFill>
+                <a:latin typeface="Microsoft YaHei"/>
+                <a:ea typeface="Microsoft YaHei"/>
+                <a:cs typeface="Microsoft YaHei"/>
+              </a:rPr>
+              <a:t>实测数据</a:t>
+            </a:r>
+          </a:p>
+        </p:txBody>
+      </p:sp>
+      <p:cxnSp>
+        <p:nvCxnSpPr>
+          <p:cNvPr id="63" name="Connector 62"/>
+          <p:cNvCxnSpPr/>
+          <p:nvPr/>
+        </p:nvCxnSpPr>
+        <p:spPr>
+          <a:xfrm>
+            <a:off x="9326880" y="2852927"/>
+            <a:ext cx="0" cy="585217"/>
+          </a:xfrm>
+          <a:prstGeom prst="line">
+            <a:avLst/>
+          </a:prstGeom>
+          <a:ln w="19050">
+            <a:solidFill>
+              <a:srgbClr val="0F62CE"/>
+            </a:solidFill>
+            <a:tailEnd type="triangle" w="med" len="med"/>
+          </a:ln>
+        </p:spPr>
+      </p:cxnSp>
+      <p:sp>
+        <p:nvSpPr>
+          <p:cNvPr id="64" name="TextBox 63"/>
+          <p:cNvSpPr txBox="1"/>
+          <p:nvPr/>
+        </p:nvSpPr>
+        <p:spPr>
+          <a:xfrm>
+            <a:off x="9436607" y="2834639"/>
+            <a:ext cx="2206447" cy="621792"/>
+          </a:xfrm>
+          <a:prstGeom prst="rect">
+            <a:avLst/>
+          </a:prstGeom>
+          <a:noFill/>
+        </p:spPr>
+        <p:txBody>
+          <a:bodyPr wrap="square" anchor="ctr" lIns="0" tIns="0" rIns="0" bIns="0">
+            <a:noAutofit/>
+          </a:bodyPr>
+          <a:lstStyle/>
+          <a:p>
+            <a:pPr algn="l" latinLnBrk="0">
+              <a:lnSpc>
+                <a:spcPct val="100000"/>
+              </a:lnSpc>
+              <a:spcBef>
+                <a:spcPts val="0"/>
+              </a:spcBef>
+              <a:spcAft>
+                <a:spcPts val="0"/>
+              </a:spcAft>
+            </a:pPr>
+            <a:r>
+              <a:rPr sz="750" b="1">
+                <a:solidFill>
+                  <a:srgbClr val="0F62CE"/>
+                </a:solidFill>
+                <a:latin typeface="Microsoft YaHei"/>
+                <a:ea typeface="Microsoft YaHei"/>
+                <a:cs typeface="Microsoft YaHei"/>
+              </a:rPr>
+              <a:t>结果与报文落盘</a:t>
+            </a:r>
+          </a:p>
+        </p:txBody>
+      </p:sp>
+      <p:cxnSp>
+        <p:nvCxnSpPr>
+          <p:cNvPr id="65" name="Connector 64"/>
+          <p:cNvCxnSpPr/>
+          <p:nvPr/>
+        </p:nvCxnSpPr>
+        <p:spPr>
+          <a:xfrm flipH="1">
+            <a:off x="7997342" y="4261104"/>
+            <a:ext cx="835762" cy="0"/>
+          </a:xfrm>
+          <a:prstGeom prst="line">
+            <a:avLst/>
+          </a:prstGeom>
+          <a:ln w="15875">
+            <a:solidFill>
+              <a:srgbClr val="40708B"/>
+            </a:solidFill>
+            <a:tailEnd type="triangle" w="med" len="med"/>
+          </a:ln>
+        </p:spPr>
+      </p:cxnSp>
+      <p:sp>
+        <p:nvSpPr>
+          <p:cNvPr id="66" name="Rounded Rectangle 65"/>
+          <p:cNvSpPr/>
+          <p:nvPr/>
+        </p:nvSpPr>
+        <p:spPr>
+          <a:xfrm>
+            <a:off x="8170163" y="4005072"/>
+            <a:ext cx="621792" cy="201168"/>
           </a:xfrm>
           <a:prstGeom prst="roundRect">
             <a:avLst>
@@ -33476,280 +33561,14 @@
                 <a:ea typeface="Microsoft YaHei"/>
                 <a:cs typeface="Microsoft YaHei"/>
               </a:rPr>
-              <a:t>补丁 · 构建</a:t>
-            </a:r>
-          </a:p>
-        </p:txBody>
-      </p:sp>
-      <p:sp>
-        <p:nvSpPr>
-          <p:cNvPr id="64" name="Rounded Rectangle 63"/>
-          <p:cNvSpPr/>
-          <p:nvPr/>
-        </p:nvSpPr>
-        <p:spPr>
-          <a:xfrm>
-            <a:off x="8101583" y="3108960"/>
-            <a:ext cx="621792" cy="201168"/>
-          </a:xfrm>
-          <a:prstGeom prst="roundRect">
-            <a:avLst>
-              <a:gd name="adj" fmla="val 50000"/>
-            </a:avLst>
-          </a:prstGeom>
-          <a:solidFill>
-            <a:srgbClr val="FFFFFF"/>
-          </a:solidFill>
-          <a:ln w="9525">
-            <a:solidFill>
-              <a:srgbClr val="40708B"/>
-            </a:solidFill>
-          </a:ln>
-        </p:spPr>
-        <p:txBody>
-          <a:bodyPr rtlCol="0" anchor="ctr" wrap="square" lIns="18288" tIns="0" rIns="18288" bIns="0">
-            <a:noAutofit/>
-          </a:bodyPr>
-          <a:lstStyle/>
-          <a:p>
-            <a:pPr algn="ctr" latinLnBrk="0">
-              <a:lnSpc>
-                <a:spcPct val="100000"/>
-              </a:lnSpc>
-              <a:spcBef>
-                <a:spcPts val="0"/>
-              </a:spcBef>
-              <a:spcAft>
-                <a:spcPts val="0"/>
-              </a:spcAft>
-            </a:pPr>
-            <a:r>
-              <a:rPr sz="750" b="1">
-                <a:solidFill>
-                  <a:srgbClr val="40708B"/>
-                </a:solidFill>
-                <a:latin typeface="Microsoft YaHei"/>
-                <a:ea typeface="Microsoft YaHei"/>
-                <a:cs typeface="Microsoft YaHei"/>
-              </a:rPr>
-              <a:t>判据结果</a:t>
-            </a:r>
-          </a:p>
-        </p:txBody>
-      </p:sp>
-      <p:cxnSp>
-        <p:nvCxnSpPr>
-          <p:cNvPr id="65" name="Connector 64"/>
-          <p:cNvCxnSpPr/>
-          <p:nvPr/>
-        </p:nvCxnSpPr>
-        <p:spPr>
-          <a:xfrm>
-            <a:off x="7871155" y="2084832"/>
-            <a:ext cx="961949" cy="0"/>
-          </a:xfrm>
-          <a:prstGeom prst="line">
-            <a:avLst/>
-          </a:prstGeom>
-          <a:ln w="19050">
-            <a:solidFill>
-              <a:srgbClr val="0F62CE"/>
-            </a:solidFill>
-            <a:tailEnd type="triangle" w="med" len="med"/>
-          </a:ln>
-        </p:spPr>
-      </p:cxnSp>
-      <p:cxnSp>
-        <p:nvCxnSpPr>
-          <p:cNvPr id="66" name="Connector 65"/>
-          <p:cNvCxnSpPr/>
-          <p:nvPr/>
-        </p:nvCxnSpPr>
-        <p:spPr>
-          <a:xfrm flipH="1">
-            <a:off x="7871155" y="3364992"/>
-            <a:ext cx="961949" cy="0"/>
-          </a:xfrm>
-          <a:prstGeom prst="line">
-            <a:avLst/>
-          </a:prstGeom>
-          <a:ln w="19050">
-            <a:solidFill>
-              <a:srgbClr val="0F62CE"/>
-            </a:solidFill>
-            <a:tailEnd type="triangle" w="med" len="med"/>
-          </a:ln>
-        </p:spPr>
-      </p:cxnSp>
-      <p:cxnSp>
-        <p:nvCxnSpPr>
-          <p:cNvPr id="67" name="Connector 66"/>
-          <p:cNvCxnSpPr/>
-          <p:nvPr/>
-        </p:nvCxnSpPr>
-        <p:spPr>
-          <a:xfrm>
-            <a:off x="9326880" y="2615184"/>
-            <a:ext cx="0" cy="201168"/>
-          </a:xfrm>
-          <a:prstGeom prst="line">
-            <a:avLst/>
-          </a:prstGeom>
-          <a:ln w="19050">
-            <a:solidFill>
-              <a:srgbClr val="0F62CE"/>
-            </a:solidFill>
-            <a:tailEnd type="triangle" w="med" len="med"/>
-          </a:ln>
-        </p:spPr>
-      </p:cxnSp>
-      <p:sp>
-        <p:nvSpPr>
-          <p:cNvPr id="68" name="TextBox 67"/>
-          <p:cNvSpPr txBox="1"/>
-          <p:nvPr/>
-        </p:nvSpPr>
-        <p:spPr>
-          <a:xfrm>
-            <a:off x="9436607" y="2596896"/>
-            <a:ext cx="2206447" cy="237744"/>
-          </a:xfrm>
-          <a:prstGeom prst="rect">
-            <a:avLst/>
-          </a:prstGeom>
-          <a:noFill/>
-        </p:spPr>
-        <p:txBody>
-          <a:bodyPr wrap="square" anchor="ctr" lIns="0" tIns="0" rIns="0" bIns="0">
-            <a:noAutofit/>
-          </a:bodyPr>
-          <a:lstStyle/>
-          <a:p>
-            <a:pPr algn="l" latinLnBrk="0">
-              <a:lnSpc>
-                <a:spcPct val="100000"/>
-              </a:lnSpc>
-              <a:spcBef>
-                <a:spcPts val="0"/>
-              </a:spcBef>
-              <a:spcAft>
-                <a:spcPts val="0"/>
-              </a:spcAft>
-            </a:pPr>
-            <a:r>
-              <a:rPr sz="750" b="1">
-                <a:solidFill>
-                  <a:srgbClr val="0F62CE"/>
-                </a:solidFill>
-                <a:latin typeface="Microsoft YaHei"/>
-                <a:ea typeface="Microsoft YaHei"/>
-                <a:cs typeface="Microsoft YaHei"/>
-              </a:rPr>
-              <a:t>trace · 数值 · 质量 · 吞吐</a:t>
-            </a:r>
-          </a:p>
-        </p:txBody>
-      </p:sp>
-      <p:sp>
-        <p:nvSpPr>
-          <p:cNvPr id="69" name="Freeform 68"/>
-          <p:cNvSpPr/>
-          <p:nvPr/>
-        </p:nvSpPr>
-        <p:spPr>
-          <a:xfrm>
-            <a:off x="7871155" y="4379975"/>
-            <a:ext cx="961949" cy="438913"/>
-          </a:xfrm>
-          <a:custGeom>
-            <a:avLst/>
-            <a:gdLst/>
-            <a:ahLst/>
-            <a:cxnLst/>
-            <a:rect l="l" t="t" r="r" b="b"/>
-            <a:pathLst>
-              <a:path w="961949" h="438913">
-                <a:moveTo>
-                  <a:pt x="961949" y="438913"/>
-                </a:moveTo>
-                <a:lnTo>
-                  <a:pt x="212141" y="438913"/>
-                </a:lnTo>
-                <a:lnTo>
-                  <a:pt x="212141" y="0"/>
-                </a:lnTo>
-                <a:lnTo>
-                  <a:pt x="0" y="0"/>
-                </a:lnTo>
-              </a:path>
-            </a:pathLst>
-          </a:custGeom>
-          <a:noFill/>
-          <a:ln w="15875">
-            <a:solidFill>
-              <a:srgbClr val="40708B"/>
-            </a:solidFill>
-            <a:tailEnd type="triangle" w="med" len="med"/>
-          </a:ln>
-        </p:spPr>
-        <p:txBody>
-          <a:bodyPr rtlCol="0" anchor="ctr"/>
-          <a:lstStyle/>
-          <a:p>
-            <a:pPr algn="ctr"/>
-          </a:p>
-        </p:txBody>
-      </p:sp>
-      <p:sp>
-        <p:nvSpPr>
-          <p:cNvPr id="70" name="TextBox 69"/>
-          <p:cNvSpPr txBox="1"/>
-          <p:nvPr/>
-        </p:nvSpPr>
-        <p:spPr>
-          <a:xfrm>
-            <a:off x="8138160" y="4581144"/>
-            <a:ext cx="640080" cy="201168"/>
-          </a:xfrm>
-          <a:prstGeom prst="rect">
-            <a:avLst/>
-          </a:prstGeom>
-          <a:noFill/>
-        </p:spPr>
-        <p:txBody>
-          <a:bodyPr wrap="square" anchor="ctr" lIns="0" tIns="0" rIns="0" bIns="0">
-            <a:noAutofit/>
-          </a:bodyPr>
-          <a:lstStyle/>
-          <a:p>
-            <a:pPr algn="ctr" latinLnBrk="0">
-              <a:lnSpc>
-                <a:spcPct val="100000"/>
-              </a:lnSpc>
-              <a:spcBef>
-                <a:spcPts val="0"/>
-              </a:spcBef>
-              <a:spcAft>
-                <a:spcPts val="0"/>
-              </a:spcAft>
-            </a:pPr>
-            <a:r>
-              <a:rPr sz="750" b="1">
-                <a:solidFill>
-                  <a:srgbClr val="40708B"/>
-                </a:solidFill>
-                <a:latin typeface="Microsoft YaHei"/>
-                <a:ea typeface="Microsoft YaHei"/>
-                <a:cs typeface="Microsoft YaHei"/>
-              </a:rPr>
-              <a:t>账本 · 证据</a:t>
-            </a:r>
-          </a:p>
-        </p:txBody>
-      </p:sp>
-      <p:sp>
-        <p:nvSpPr>
-          <p:cNvPr id="71" name="Rectangle 70"/>
+              <a:t>按需调取</a:t>
+            </a:r>
+          </a:p>
+        </p:txBody>
+      </p:sp>
+      <p:sp>
+        <p:nvSpPr>
+          <p:cNvPr id="67" name="Rectangle 66"/>
           <p:cNvSpPr/>
           <p:nvPr/>
         </p:nvSpPr>
@@ -33778,7 +33597,7 @@
       </p:sp>
       <p:sp>
         <p:nvSpPr>
-          <p:cNvPr id="72" name="Rectangle 71"/>
+          <p:cNvPr id="68" name="Rectangle 67"/>
           <p:cNvSpPr/>
           <p:nvPr/>
         </p:nvSpPr>
@@ -33807,7 +33626,7 @@
       </p:sp>
       <p:sp>
         <p:nvSpPr>
-          <p:cNvPr id="73" name="TextBox 72"/>
+          <p:cNvPr id="69" name="TextBox 68"/>
           <p:cNvSpPr txBox="1"/>
           <p:nvPr/>
         </p:nvSpPr>
@@ -33876,7 +33695,7 @@
       </p:sp>
       <p:sp>
         <p:nvSpPr>
-          <p:cNvPr id="74" name="TextBox 73"/>
+          <p:cNvPr id="70" name="TextBox 69"/>
           <p:cNvSpPr txBox="1"/>
           <p:nvPr/>
         </p:nvSpPr>

--- a/slides/m100_agent_final_deck.pptx
+++ b/slides/m100_agent_final_deck.pptx
@@ -30280,285 +30280,24 @@
       </p:sp>
       <p:sp>
         <p:nvSpPr>
-          <p:cNvPr id="6" name="Rectangle 5"/>
+          <p:cNvPr id="6" name="Oval 5"/>
           <p:cNvSpPr/>
           <p:nvPr/>
         </p:nvSpPr>
         <p:spPr>
           <a:xfrm>
-            <a:off x="548640" y="1234440"/>
-            <a:ext cx="54864" cy="237744"/>
-          </a:xfrm>
-          <a:prstGeom prst="rect">
-            <a:avLst/>
-          </a:prstGeom>
-          <a:solidFill>
-            <a:srgbClr val="40708B"/>
-          </a:solidFill>
-          <a:ln>
-            <a:noFill/>
-          </a:ln>
-        </p:spPr>
-        <p:txBody>
-          <a:bodyPr rtlCol="0" anchor="ctr"/>
-          <a:lstStyle/>
-          <a:p>
-            <a:pPr algn="ctr"/>
-          </a:p>
-        </p:txBody>
-      </p:sp>
-      <p:sp>
-        <p:nvSpPr>
-          <p:cNvPr id="7" name="TextBox 6"/>
-          <p:cNvSpPr txBox="1"/>
-          <p:nvPr/>
-        </p:nvSpPr>
-        <p:spPr>
-          <a:xfrm>
-            <a:off x="694944" y="1207008"/>
-            <a:ext cx="2231136" cy="292608"/>
-          </a:xfrm>
-          <a:prstGeom prst="rect">
-            <a:avLst/>
-          </a:prstGeom>
-          <a:noFill/>
-        </p:spPr>
-        <p:txBody>
-          <a:bodyPr wrap="square" anchor="ctr" lIns="0" tIns="0" rIns="0" bIns="0">
-            <a:noAutofit/>
-          </a:bodyPr>
-          <a:lstStyle/>
-          <a:p>
-            <a:pPr algn="l" latinLnBrk="0">
-              <a:lnSpc>
-                <a:spcPct val="100000"/>
-              </a:lnSpc>
-              <a:spcBef>
-                <a:spcPts val="0"/>
-              </a:spcBef>
-              <a:spcAft>
-                <a:spcPts val="0"/>
-              </a:spcAft>
-            </a:pPr>
-            <a:r>
-              <a:rPr sz="1100" b="1">
-                <a:solidFill>
-                  <a:srgbClr val="0A2B45"/>
-                </a:solidFill>
-                <a:latin typeface="Microsoft YaHei"/>
-                <a:ea typeface="Microsoft YaHei"/>
-                <a:cs typeface="Microsoft YaHei"/>
-              </a:rPr>
-              <a:t>人机交互边界</a:t>
-            </a:r>
-            <a:r>
-              <a:rPr sz="850" b="1">
-                <a:solidFill>
-                  <a:srgbClr val="40708B"/>
-                </a:solidFill>
-                <a:latin typeface="Microsoft YaHei"/>
-                <a:ea typeface="Microsoft YaHei"/>
-                <a:cs typeface="Microsoft YaHei"/>
-              </a:rPr>
-              <a:t>　Human in the Loop</a:t>
-            </a:r>
-          </a:p>
-        </p:txBody>
-      </p:sp>
-      <p:sp>
-        <p:nvSpPr>
-          <p:cNvPr id="8" name="Rectangle 7"/>
-          <p:cNvSpPr/>
-          <p:nvPr/>
-        </p:nvSpPr>
-        <p:spPr>
-          <a:xfrm>
-            <a:off x="3703320" y="1234440"/>
-            <a:ext cx="54864" cy="237744"/>
-          </a:xfrm>
-          <a:prstGeom prst="rect">
-            <a:avLst/>
-          </a:prstGeom>
-          <a:solidFill>
-            <a:srgbClr val="D2690C"/>
-          </a:solidFill>
-          <a:ln>
-            <a:noFill/>
-          </a:ln>
-        </p:spPr>
-        <p:txBody>
-          <a:bodyPr rtlCol="0" anchor="ctr"/>
-          <a:lstStyle/>
-          <a:p>
-            <a:pPr algn="ctr"/>
-          </a:p>
-        </p:txBody>
-      </p:sp>
-      <p:sp>
-        <p:nvSpPr>
-          <p:cNvPr id="9" name="TextBox 8"/>
-          <p:cNvSpPr txBox="1"/>
-          <p:nvPr/>
-        </p:nvSpPr>
-        <p:spPr>
-          <a:xfrm>
-            <a:off x="3849624" y="1207008"/>
-            <a:ext cx="4242816" cy="292608"/>
-          </a:xfrm>
-          <a:prstGeom prst="rect">
-            <a:avLst/>
-          </a:prstGeom>
-          <a:noFill/>
-        </p:spPr>
-        <p:txBody>
-          <a:bodyPr wrap="square" anchor="ctr" lIns="0" tIns="0" rIns="0" bIns="0">
-            <a:noAutofit/>
-          </a:bodyPr>
-          <a:lstStyle/>
-          <a:p>
-            <a:pPr algn="l" latinLnBrk="0">
-              <a:lnSpc>
-                <a:spcPct val="100000"/>
-              </a:lnSpc>
-              <a:spcBef>
-                <a:spcPts val="0"/>
-              </a:spcBef>
-              <a:spcAft>
-                <a:spcPts val="0"/>
-              </a:spcAft>
-            </a:pPr>
-            <a:r>
-              <a:rPr sz="1100" b="1">
-                <a:solidFill>
-                  <a:srgbClr val="0A2B45"/>
-                </a:solidFill>
-                <a:latin typeface="Microsoft YaHei"/>
-                <a:ea typeface="Microsoft YaHei"/>
-                <a:cs typeface="Microsoft YaHei"/>
-              </a:rPr>
-              <a:t>模型层 Agent 核心架构</a:t>
-            </a:r>
-            <a:r>
-              <a:rPr sz="850" b="1">
-                <a:solidFill>
-                  <a:srgbClr val="D2690C"/>
-                </a:solidFill>
-                <a:latin typeface="Microsoft YaHei"/>
-                <a:ea typeface="Microsoft YaHei"/>
-                <a:cs typeface="Microsoft YaHei"/>
-              </a:rPr>
-              <a:t>　控制器定规则 · 规划器出方案</a:t>
-            </a:r>
-          </a:p>
-        </p:txBody>
-      </p:sp>
-      <p:sp>
-        <p:nvSpPr>
-          <p:cNvPr id="10" name="Rectangle 9"/>
-          <p:cNvSpPr/>
-          <p:nvPr/>
-        </p:nvSpPr>
-        <p:spPr>
-          <a:xfrm>
-            <a:off x="8869680" y="1234440"/>
-            <a:ext cx="54864" cy="237744"/>
-          </a:xfrm>
-          <a:prstGeom prst="rect">
-            <a:avLst/>
-          </a:prstGeom>
-          <a:solidFill>
-            <a:srgbClr val="0F62CE"/>
-          </a:solidFill>
-          <a:ln>
-            <a:noFill/>
-          </a:ln>
-        </p:spPr>
-        <p:txBody>
-          <a:bodyPr rtlCol="0" anchor="ctr"/>
-          <a:lstStyle/>
-          <a:p>
-            <a:pPr algn="ctr"/>
-          </a:p>
-        </p:txBody>
-      </p:sp>
-      <p:sp>
-        <p:nvSpPr>
-          <p:cNvPr id="11" name="TextBox 10"/>
-          <p:cNvSpPr txBox="1"/>
-          <p:nvPr/>
-        </p:nvSpPr>
-        <p:spPr>
-          <a:xfrm>
-            <a:off x="9015984" y="1207008"/>
-            <a:ext cx="2627071" cy="292608"/>
-          </a:xfrm>
-          <a:prstGeom prst="rect">
-            <a:avLst/>
-          </a:prstGeom>
-          <a:noFill/>
-        </p:spPr>
-        <p:txBody>
-          <a:bodyPr wrap="square" anchor="ctr" lIns="0" tIns="0" rIns="0" bIns="0">
-            <a:noAutofit/>
-          </a:bodyPr>
-          <a:lstStyle/>
-          <a:p>
-            <a:pPr algn="l" latinLnBrk="0">
-              <a:lnSpc>
-                <a:spcPct val="100000"/>
-              </a:lnSpc>
-              <a:spcBef>
-                <a:spcPts val="0"/>
-              </a:spcBef>
-              <a:spcAft>
-                <a:spcPts val="0"/>
-              </a:spcAft>
-            </a:pPr>
-            <a:r>
-              <a:rPr sz="1100" b="1">
-                <a:solidFill>
-                  <a:srgbClr val="0A2B45"/>
-                </a:solidFill>
-                <a:latin typeface="Microsoft YaHei"/>
-                <a:ea typeface="Microsoft YaHei"/>
-                <a:cs typeface="Microsoft YaHei"/>
-              </a:rPr>
-              <a:t>被测系统与落盘库</a:t>
-            </a:r>
-            <a:r>
-              <a:rPr sz="850" b="1">
-                <a:solidFill>
-                  <a:srgbClr val="0F62CE"/>
-                </a:solidFill>
-                <a:latin typeface="Microsoft YaHei"/>
-                <a:ea typeface="Microsoft YaHei"/>
-                <a:cs typeface="Microsoft YaHei"/>
-              </a:rPr>
-              <a:t>　SUT &amp; Local Artifacts</a:t>
-            </a:r>
-          </a:p>
-        </p:txBody>
-      </p:sp>
-      <p:sp>
-        <p:nvSpPr>
-          <p:cNvPr id="12" name="Rectangle 11"/>
-          <p:cNvSpPr/>
-          <p:nvPr/>
-        </p:nvSpPr>
-        <p:spPr>
-          <a:xfrm>
-            <a:off x="548640" y="1554480"/>
-            <a:ext cx="2377440" cy="1152144"/>
-          </a:xfrm>
-          <a:prstGeom prst="rect">
+            <a:off x="713232" y="1280160"/>
+            <a:ext cx="146304" cy="146304"/>
+          </a:xfrm>
+          <a:prstGeom prst="ellipse">
             <a:avLst/>
           </a:prstGeom>
           <a:solidFill>
             <a:srgbClr val="FFFFFF"/>
           </a:solidFill>
-          <a:ln w="9525">
+          <a:ln w="15875">
             <a:solidFill>
-              <a:srgbClr val="CFE3F0"/>
+              <a:srgbClr val="1B4D69"/>
             </a:solidFill>
           </a:ln>
         </p:spPr>
@@ -30570,1079 +30309,182 @@
           </a:p>
         </p:txBody>
       </p:sp>
-      <p:sp>
-        <p:nvSpPr>
-          <p:cNvPr id="13" name="Rectangle 12"/>
-          <p:cNvSpPr/>
-          <p:nvPr/>
-        </p:nvSpPr>
-        <p:spPr>
-          <a:xfrm>
-            <a:off x="548640" y="1554480"/>
-            <a:ext cx="64008" cy="1152144"/>
-          </a:xfrm>
-          <a:prstGeom prst="rect">
-            <a:avLst/>
-          </a:prstGeom>
-          <a:solidFill>
-            <a:srgbClr val="40708B"/>
-          </a:solidFill>
-          <a:ln>
-            <a:noFill/>
-          </a:ln>
-        </p:spPr>
-        <p:txBody>
-          <a:bodyPr rtlCol="0" anchor="ctr"/>
-          <a:lstStyle/>
-          <a:p>
-            <a:pPr algn="ctr"/>
-          </a:p>
-        </p:txBody>
-      </p:sp>
-      <p:sp>
-        <p:nvSpPr>
-          <p:cNvPr id="14" name="TextBox 13"/>
-          <p:cNvSpPr txBox="1"/>
-          <p:nvPr/>
-        </p:nvSpPr>
-        <p:spPr>
-          <a:xfrm>
-            <a:off x="731520" y="1600200"/>
-            <a:ext cx="2048256" cy="1060704"/>
-          </a:xfrm>
-          <a:prstGeom prst="rect">
-            <a:avLst/>
-          </a:prstGeom>
-          <a:noFill/>
-        </p:spPr>
-        <p:txBody>
-          <a:bodyPr wrap="square" anchor="ctr" lIns="0" tIns="0" rIns="0" bIns="0">
-            <a:noAutofit/>
-          </a:bodyPr>
-          <a:lstStyle/>
-          <a:p>
-            <a:pPr algn="l" latinLnBrk="0">
-              <a:lnSpc>
-                <a:spcPct val="100000"/>
-              </a:lnSpc>
-              <a:spcBef>
-                <a:spcPts val="0"/>
-              </a:spcBef>
-              <a:spcAft>
-                <a:spcPts val="300"/>
-              </a:spcAft>
-            </a:pPr>
-            <a:r>
-              <a:rPr sz="1050" b="1">
-                <a:solidFill>
-                  <a:srgbClr val="0A2B45"/>
-                </a:solidFill>
-                <a:latin typeface="Microsoft YaHei"/>
-                <a:ea typeface="Microsoft YaHei"/>
-                <a:cs typeface="Microsoft YaHei"/>
-              </a:rPr>
-              <a:t>冻结下发</a:t>
-            </a:r>
-            <a:r>
-              <a:rPr sz="800" b="1">
-                <a:solidFill>
-                  <a:srgbClr val="40708B"/>
-                </a:solidFill>
-                <a:latin typeface="Consolas"/>
-                <a:ea typeface="Microsoft YaHei"/>
-                <a:cs typeface="Microsoft YaHei"/>
-              </a:rPr>
-              <a:t>　人 → Agent</a:t>
-            </a:r>
-          </a:p>
-          <a:p>
-            <a:pPr algn="l" latinLnBrk="0">
-              <a:lnSpc>
-                <a:spcPct val="100000"/>
-              </a:lnSpc>
-              <a:spcBef>
-                <a:spcPts val="0"/>
-              </a:spcBef>
-              <a:spcAft>
-                <a:spcPts val="0"/>
-              </a:spcAft>
-            </a:pPr>
-            <a:r>
-              <a:rPr sz="900" b="0">
-                <a:solidFill>
-                  <a:srgbClr val="1B4D69"/>
-                </a:solidFill>
-                <a:latin typeface="Microsoft YaHei"/>
-                <a:ea typeface="Microsoft YaHei"/>
-                <a:cs typeface="Microsoft YaHei"/>
-              </a:rPr>
-              <a:t>·　优化配置：模型 · 负载 · 门限</a:t>
-            </a:r>
-          </a:p>
-          <a:p>
-            <a:pPr algn="l" latinLnBrk="0">
-              <a:lnSpc>
-                <a:spcPct val="100000"/>
-              </a:lnSpc>
-              <a:spcBef>
-                <a:spcPts val="0"/>
-              </a:spcBef>
-              <a:spcAft>
-                <a:spcPts val="0"/>
-              </a:spcAft>
-            </a:pPr>
-            <a:r>
-              <a:rPr sz="900" b="0">
-                <a:solidFill>
-                  <a:srgbClr val="1B4D69"/>
-                </a:solidFill>
-                <a:latin typeface="Microsoft YaHei"/>
-                <a:ea typeface="Microsoft YaHei"/>
-                <a:cs typeface="Microsoft YaHei"/>
-              </a:rPr>
-              <a:t>·　质量契约：数值探针 + 评测集</a:t>
-            </a:r>
-          </a:p>
-          <a:p>
-            <a:pPr algn="l" latinLnBrk="0">
-              <a:lnSpc>
-                <a:spcPct val="100000"/>
-              </a:lnSpc>
-              <a:spcBef>
-                <a:spcPts val="0"/>
-              </a:spcBef>
-              <a:spcAft>
-                <a:spcPts val="0"/>
-              </a:spcAft>
-            </a:pPr>
-            <a:r>
-              <a:rPr sz="900" b="0">
-                <a:solidFill>
-                  <a:srgbClr val="1B4D69"/>
-                </a:solidFill>
-                <a:latin typeface="Microsoft YaHei"/>
-                <a:ea typeface="Microsoft YaHei"/>
-                <a:cs typeface="Microsoft YaHei"/>
-              </a:rPr>
-              <a:t>·　调优知识库：10 份 Skill</a:t>
-            </a:r>
-          </a:p>
-          <a:p>
-            <a:pPr algn="l" latinLnBrk="0">
-              <a:lnSpc>
-                <a:spcPct val="100000"/>
-              </a:lnSpc>
-              <a:spcBef>
-                <a:spcPts val="0"/>
-              </a:spcBef>
-              <a:spcAft>
-                <a:spcPts val="0"/>
-              </a:spcAft>
-            </a:pPr>
-            <a:r>
-              <a:rPr sz="900" b="0">
-                <a:solidFill>
-                  <a:srgbClr val="1B4D69"/>
-                </a:solidFill>
-                <a:latin typeface="Microsoft YaHei"/>
-                <a:ea typeface="Microsoft YaHei"/>
-                <a:cs typeface="Microsoft YaHei"/>
-              </a:rPr>
-              <a:t>·　授权与跳过边界</a:t>
-            </a:r>
-          </a:p>
-        </p:txBody>
-      </p:sp>
-      <p:sp>
-        <p:nvSpPr>
-          <p:cNvPr id="15" name="Rectangle 14"/>
-          <p:cNvSpPr/>
-          <p:nvPr/>
-        </p:nvSpPr>
-        <p:spPr>
-          <a:xfrm>
-            <a:off x="548640" y="2852928"/>
-            <a:ext cx="2377440" cy="1152144"/>
-          </a:xfrm>
-          <a:prstGeom prst="rect">
-            <a:avLst/>
-          </a:prstGeom>
-          <a:solidFill>
-            <a:srgbClr val="FFFFFF"/>
-          </a:solidFill>
-          <a:ln w="9525">
+      <p:cxnSp>
+        <p:nvCxnSpPr>
+          <p:cNvPr id="7" name="Connector 6"/>
+          <p:cNvCxnSpPr/>
+          <p:nvPr/>
+        </p:nvCxnSpPr>
+        <p:spPr>
+          <a:xfrm>
+            <a:off x="786384" y="1426463"/>
+            <a:ext cx="0" cy="182880"/>
+          </a:xfrm>
+          <a:prstGeom prst="line">
+            <a:avLst/>
+          </a:prstGeom>
+          <a:ln w="15875">
             <a:solidFill>
-              <a:srgbClr val="CFE3F0"/>
+              <a:srgbClr val="1B4D69"/>
             </a:solidFill>
           </a:ln>
         </p:spPr>
-        <p:txBody>
-          <a:bodyPr rtlCol="0" anchor="ctr"/>
-          <a:lstStyle/>
-          <a:p>
-            <a:pPr algn="ctr"/>
-          </a:p>
-        </p:txBody>
-      </p:sp>
-      <p:sp>
-        <p:nvSpPr>
-          <p:cNvPr id="16" name="Rectangle 15"/>
-          <p:cNvSpPr/>
-          <p:nvPr/>
-        </p:nvSpPr>
-        <p:spPr>
-          <a:xfrm>
-            <a:off x="548640" y="2852928"/>
-            <a:ext cx="64008" cy="1152144"/>
-          </a:xfrm>
-          <a:prstGeom prst="rect">
-            <a:avLst/>
-          </a:prstGeom>
-          <a:solidFill>
-            <a:srgbClr val="40708B"/>
-          </a:solidFill>
-          <a:ln>
-            <a:noFill/>
-          </a:ln>
-        </p:spPr>
-        <p:txBody>
-          <a:bodyPr rtlCol="0" anchor="ctr"/>
-          <a:lstStyle/>
-          <a:p>
-            <a:pPr algn="ctr"/>
-          </a:p>
-        </p:txBody>
-      </p:sp>
-      <p:sp>
-        <p:nvSpPr>
-          <p:cNvPr id="17" name="TextBox 16"/>
-          <p:cNvSpPr txBox="1"/>
-          <p:nvPr/>
-        </p:nvSpPr>
-        <p:spPr>
-          <a:xfrm>
-            <a:off x="731520" y="2898648"/>
-            <a:ext cx="2048256" cy="1060704"/>
-          </a:xfrm>
-          <a:prstGeom prst="rect">
-            <a:avLst/>
-          </a:prstGeom>
-          <a:noFill/>
-        </p:spPr>
-        <p:txBody>
-          <a:bodyPr wrap="square" anchor="ctr" lIns="0" tIns="0" rIns="0" bIns="0">
-            <a:noAutofit/>
-          </a:bodyPr>
-          <a:lstStyle/>
-          <a:p>
-            <a:pPr algn="l" latinLnBrk="0">
-              <a:lnSpc>
-                <a:spcPct val="100000"/>
-              </a:lnSpc>
-              <a:spcBef>
-                <a:spcPts val="0"/>
-              </a:spcBef>
-              <a:spcAft>
-                <a:spcPts val="300"/>
-              </a:spcAft>
-            </a:pPr>
-            <a:r>
-              <a:rPr sz="1050" b="1">
-                <a:solidFill>
-                  <a:srgbClr val="0A2B45"/>
-                </a:solidFill>
-                <a:latin typeface="Microsoft YaHei"/>
-                <a:ea typeface="Microsoft YaHei"/>
-                <a:cs typeface="Microsoft YaHei"/>
-              </a:rPr>
-              <a:t>判决回报</a:t>
-            </a:r>
-            <a:r>
-              <a:rPr sz="800" b="1">
-                <a:solidFill>
-                  <a:srgbClr val="40708B"/>
-                </a:solidFill>
-                <a:latin typeface="Consolas"/>
-                <a:ea typeface="Microsoft YaHei"/>
-                <a:cs typeface="Microsoft YaHei"/>
-              </a:rPr>
-              <a:t>　Agent → 人</a:t>
-            </a:r>
-          </a:p>
-          <a:p>
-            <a:pPr algn="l" latinLnBrk="0">
-              <a:lnSpc>
-                <a:spcPct val="100000"/>
-              </a:lnSpc>
-              <a:spcBef>
-                <a:spcPts val="0"/>
-              </a:spcBef>
-              <a:spcAft>
-                <a:spcPts val="0"/>
-              </a:spcAft>
-            </a:pPr>
-            <a:r>
-              <a:rPr sz="900" b="0">
-                <a:solidFill>
-                  <a:srgbClr val="1B4D69"/>
-                </a:solidFill>
-                <a:latin typeface="Microsoft YaHei"/>
-                <a:ea typeface="Microsoft YaHei"/>
-                <a:cs typeface="Microsoft YaHei"/>
-              </a:rPr>
-              <a:t>·　最优版本与优化报告</a:t>
-            </a:r>
-          </a:p>
-          <a:p>
-            <a:pPr algn="l" latinLnBrk="0">
-              <a:lnSpc>
-                <a:spcPct val="100000"/>
-              </a:lnSpc>
-              <a:spcBef>
-                <a:spcPts val="0"/>
-              </a:spcBef>
-              <a:spcAft>
-                <a:spcPts val="0"/>
-              </a:spcAft>
-            </a:pPr>
-            <a:r>
-              <a:rPr sz="900" b="0">
-                <a:solidFill>
-                  <a:srgbClr val="1B4D69"/>
-                </a:solidFill>
-                <a:latin typeface="Microsoft YaHei"/>
-                <a:ea typeface="Microsoft YaHei"/>
-                <a:cs typeface="Microsoft YaHei"/>
-              </a:rPr>
-              <a:t>·　全量可溯源证据链</a:t>
-            </a:r>
-          </a:p>
-          <a:p>
-            <a:pPr algn="l" latinLnBrk="0">
-              <a:lnSpc>
-                <a:spcPct val="100000"/>
-              </a:lnSpc>
-              <a:spcBef>
-                <a:spcPts val="0"/>
-              </a:spcBef>
-              <a:spcAft>
-                <a:spcPts val="0"/>
-              </a:spcAft>
-            </a:pPr>
-            <a:r>
-              <a:rPr sz="900" b="0">
-                <a:solidFill>
-                  <a:srgbClr val="1B4D69"/>
-                </a:solidFill>
-                <a:latin typeface="Microsoft YaHei"/>
-                <a:ea typeface="Microsoft YaHei"/>
-                <a:cs typeface="Microsoft YaHei"/>
-              </a:rPr>
-              <a:t>·　账本自检异常说明</a:t>
-            </a:r>
-          </a:p>
-          <a:p>
-            <a:pPr algn="l" latinLnBrk="0">
-              <a:lnSpc>
-                <a:spcPct val="100000"/>
-              </a:lnSpc>
-              <a:spcBef>
-                <a:spcPts val="0"/>
-              </a:spcBef>
-              <a:spcAft>
-                <a:spcPts val="0"/>
-              </a:spcAft>
-            </a:pPr>
-            <a:r>
-              <a:rPr sz="900" b="0">
-                <a:solidFill>
-                  <a:srgbClr val="1B4D69"/>
-                </a:solidFill>
-                <a:latin typeface="Microsoft YaHei"/>
-                <a:ea typeface="Microsoft YaHei"/>
-                <a:cs typeface="Microsoft YaHei"/>
-              </a:rPr>
-              <a:t>·　结论适用边界声明</a:t>
-            </a:r>
-          </a:p>
-        </p:txBody>
-      </p:sp>
-      <p:sp>
-        <p:nvSpPr>
-          <p:cNvPr id="18" name="Rectangle 17"/>
-          <p:cNvSpPr/>
-          <p:nvPr/>
-        </p:nvSpPr>
-        <p:spPr>
-          <a:xfrm>
-            <a:off x="548640" y="4151376"/>
-            <a:ext cx="2377440" cy="1353312"/>
-          </a:xfrm>
-          <a:prstGeom prst="rect">
-            <a:avLst/>
-          </a:prstGeom>
-          <a:solidFill>
-            <a:srgbClr val="FFFFFF"/>
-          </a:solidFill>
-          <a:ln w="9525">
+      </p:cxnSp>
+      <p:cxnSp>
+        <p:nvCxnSpPr>
+          <p:cNvPr id="8" name="Connector 7"/>
+          <p:cNvCxnSpPr/>
+          <p:nvPr/>
+        </p:nvCxnSpPr>
+        <p:spPr>
+          <a:xfrm>
+            <a:off x="649224" y="1490472"/>
+            <a:ext cx="274320" cy="0"/>
+          </a:xfrm>
+          <a:prstGeom prst="line">
+            <a:avLst/>
+          </a:prstGeom>
+          <a:ln w="15875">
             <a:solidFill>
-              <a:srgbClr val="CFE3F0"/>
+              <a:srgbClr val="1B4D69"/>
             </a:solidFill>
           </a:ln>
         </p:spPr>
-        <p:txBody>
-          <a:bodyPr rtlCol="0" anchor="ctr"/>
-          <a:lstStyle/>
-          <a:p>
-            <a:pPr algn="ctr"/>
-          </a:p>
-        </p:txBody>
-      </p:sp>
-      <p:sp>
-        <p:nvSpPr>
-          <p:cNvPr id="19" name="Rectangle 18"/>
-          <p:cNvSpPr/>
-          <p:nvPr/>
-        </p:nvSpPr>
-        <p:spPr>
-          <a:xfrm>
-            <a:off x="548640" y="4151376"/>
-            <a:ext cx="64008" cy="1353312"/>
-          </a:xfrm>
-          <a:prstGeom prst="rect">
-            <a:avLst/>
-          </a:prstGeom>
-          <a:solidFill>
-            <a:srgbClr val="D2690C"/>
-          </a:solidFill>
-          <a:ln>
-            <a:noFill/>
-          </a:ln>
-        </p:spPr>
-        <p:txBody>
-          <a:bodyPr rtlCol="0" anchor="ctr"/>
-          <a:lstStyle/>
-          <a:p>
-            <a:pPr algn="ctr"/>
-          </a:p>
-        </p:txBody>
-      </p:sp>
-      <p:sp>
-        <p:nvSpPr>
-          <p:cNvPr id="20" name="TextBox 19"/>
-          <p:cNvSpPr txBox="1"/>
-          <p:nvPr/>
-        </p:nvSpPr>
-        <p:spPr>
-          <a:xfrm>
-            <a:off x="731520" y="4197096"/>
-            <a:ext cx="2048256" cy="1261872"/>
-          </a:xfrm>
-          <a:prstGeom prst="rect">
-            <a:avLst/>
-          </a:prstGeom>
-          <a:noFill/>
-        </p:spPr>
-        <p:txBody>
-          <a:bodyPr wrap="square" anchor="ctr" lIns="0" tIns="0" rIns="0" bIns="0">
-            <a:noAutofit/>
-          </a:bodyPr>
-          <a:lstStyle/>
-          <a:p>
-            <a:pPr algn="l" latinLnBrk="0">
-              <a:lnSpc>
-                <a:spcPct val="100000"/>
-              </a:lnSpc>
-              <a:spcBef>
-                <a:spcPts val="0"/>
-              </a:spcBef>
-              <a:spcAft>
-                <a:spcPts val="300"/>
-              </a:spcAft>
-            </a:pPr>
-            <a:r>
-              <a:rPr sz="1050" b="1">
-                <a:solidFill>
-                  <a:srgbClr val="0A2B45"/>
-                </a:solidFill>
-                <a:latin typeface="Microsoft YaHei"/>
-                <a:ea typeface="Microsoft YaHei"/>
-                <a:cs typeface="Microsoft YaHei"/>
-              </a:rPr>
-              <a:t>按需介入</a:t>
-            </a:r>
-            <a:r>
-              <a:rPr sz="800" b="1">
-                <a:solidFill>
-                  <a:srgbClr val="D2690C"/>
-                </a:solidFill>
-                <a:latin typeface="Consolas"/>
-                <a:ea typeface="Microsoft YaHei"/>
-                <a:cs typeface="Microsoft YaHei"/>
-              </a:rPr>
-              <a:t>　人 ⇄ 规划器</a:t>
-            </a:r>
-          </a:p>
-          <a:p>
-            <a:pPr algn="l" latinLnBrk="0">
-              <a:lnSpc>
-                <a:spcPct val="100000"/>
-              </a:lnSpc>
-              <a:spcBef>
-                <a:spcPts val="0"/>
-              </a:spcBef>
-              <a:spcAft>
-                <a:spcPts val="0"/>
-              </a:spcAft>
-            </a:pPr>
-            <a:r>
-              <a:rPr sz="900" b="0">
-                <a:solidFill>
-                  <a:srgbClr val="1B4D69"/>
-                </a:solidFill>
-                <a:latin typeface="Microsoft YaHei"/>
-                <a:ea typeface="Microsoft YaHei"/>
-                <a:cs typeface="Microsoft YaHei"/>
-              </a:rPr>
-              <a:t>·　复杂改动由人工操刀</a:t>
-            </a:r>
-          </a:p>
-          <a:p>
-            <a:pPr algn="l" latinLnBrk="0">
-              <a:lnSpc>
-                <a:spcPct val="100000"/>
-              </a:lnSpc>
-              <a:spcBef>
-                <a:spcPts val="0"/>
-              </a:spcBef>
-              <a:spcAft>
-                <a:spcPts val="0"/>
-              </a:spcAft>
-            </a:pPr>
-            <a:r>
-              <a:rPr sz="900" b="0">
-                <a:solidFill>
-                  <a:srgbClr val="1B4D69"/>
-                </a:solidFill>
-                <a:latin typeface="Microsoft YaHei"/>
-                <a:ea typeface="Microsoft YaHei"/>
-                <a:cs typeface="Microsoft YaHei"/>
-              </a:rPr>
-              <a:t>·　与规划器结对写补丁</a:t>
-            </a:r>
-          </a:p>
-          <a:p>
-            <a:pPr algn="l" latinLnBrk="0">
-              <a:lnSpc>
-                <a:spcPct val="100000"/>
-              </a:lnSpc>
-              <a:spcBef>
-                <a:spcPts val="0"/>
-              </a:spcBef>
-              <a:spcAft>
-                <a:spcPts val="0"/>
-              </a:spcAft>
-            </a:pPr>
-            <a:r>
-              <a:rPr sz="900" b="0">
-                <a:solidFill>
-                  <a:srgbClr val="1B4D69"/>
-                </a:solidFill>
-                <a:latin typeface="Microsoft YaHei"/>
-                <a:ea typeface="Microsoft YaHei"/>
-                <a:cs typeface="Microsoft YaHei"/>
-              </a:rPr>
-              <a:t>·　人工补丁同样走四道门禁</a:t>
-            </a:r>
-          </a:p>
-          <a:p>
-            <a:pPr algn="l" latinLnBrk="0">
-              <a:lnSpc>
-                <a:spcPct val="100000"/>
-              </a:lnSpc>
-              <a:spcBef>
-                <a:spcPts val="0"/>
-              </a:spcBef>
-              <a:spcAft>
-                <a:spcPts val="0"/>
-              </a:spcAft>
-            </a:pPr>
-            <a:r>
-              <a:rPr sz="900" b="0">
-                <a:solidFill>
-                  <a:srgbClr val="1B4D69"/>
-                </a:solidFill>
-                <a:latin typeface="Microsoft YaHei"/>
-                <a:ea typeface="Microsoft YaHei"/>
-                <a:cs typeface="Microsoft YaHei"/>
-              </a:rPr>
-              <a:t>·　不改变准入判定路径</a:t>
-            </a:r>
-          </a:p>
-        </p:txBody>
-      </p:sp>
-      <p:sp>
-        <p:nvSpPr>
-          <p:cNvPr id="21" name="Rectangle 20"/>
-          <p:cNvSpPr/>
-          <p:nvPr/>
-        </p:nvSpPr>
-        <p:spPr>
-          <a:xfrm>
-            <a:off x="8869680" y="1554480"/>
-            <a:ext cx="2773375" cy="1280160"/>
-          </a:xfrm>
-          <a:prstGeom prst="rect">
-            <a:avLst/>
-          </a:prstGeom>
-          <a:solidFill>
-            <a:srgbClr val="FFFFFF"/>
-          </a:solidFill>
-          <a:ln w="9525">
+      </p:cxnSp>
+      <p:cxnSp>
+        <p:nvCxnSpPr>
+          <p:cNvPr id="9" name="Connector 8"/>
+          <p:cNvCxnSpPr/>
+          <p:nvPr/>
+        </p:nvCxnSpPr>
+        <p:spPr>
+          <a:xfrm flipH="1">
+            <a:off x="676656" y="1609343"/>
+            <a:ext cx="109728" cy="146305"/>
+          </a:xfrm>
+          <a:prstGeom prst="line">
+            <a:avLst/>
+          </a:prstGeom>
+          <a:ln w="15875">
             <a:solidFill>
-              <a:srgbClr val="CFE3F0"/>
+              <a:srgbClr val="1B4D69"/>
             </a:solidFill>
           </a:ln>
         </p:spPr>
-        <p:txBody>
-          <a:bodyPr rtlCol="0" anchor="ctr"/>
-          <a:lstStyle/>
-          <a:p>
-            <a:pPr algn="ctr"/>
-          </a:p>
-        </p:txBody>
-      </p:sp>
-      <p:sp>
-        <p:nvSpPr>
-          <p:cNvPr id="22" name="Rectangle 21"/>
-          <p:cNvSpPr/>
-          <p:nvPr/>
-        </p:nvSpPr>
-        <p:spPr>
-          <a:xfrm>
-            <a:off x="8869680" y="1554480"/>
-            <a:ext cx="64008" cy="1280160"/>
-          </a:xfrm>
-          <a:prstGeom prst="rect">
-            <a:avLst/>
-          </a:prstGeom>
-          <a:solidFill>
-            <a:srgbClr val="0F62CE"/>
-          </a:solidFill>
-          <a:ln>
-            <a:noFill/>
-          </a:ln>
-        </p:spPr>
-        <p:txBody>
-          <a:bodyPr rtlCol="0" anchor="ctr"/>
-          <a:lstStyle/>
-          <a:p>
-            <a:pPr algn="ctr"/>
-          </a:p>
-        </p:txBody>
-      </p:sp>
-      <p:sp>
-        <p:nvSpPr>
-          <p:cNvPr id="23" name="TextBox 22"/>
-          <p:cNvSpPr txBox="1"/>
-          <p:nvPr/>
-        </p:nvSpPr>
-        <p:spPr>
-          <a:xfrm>
-            <a:off x="9052559" y="1600200"/>
-            <a:ext cx="2444191" cy="1188719"/>
-          </a:xfrm>
-          <a:prstGeom prst="rect">
-            <a:avLst/>
-          </a:prstGeom>
-          <a:noFill/>
-        </p:spPr>
-        <p:txBody>
-          <a:bodyPr wrap="square" anchor="ctr" lIns="0" tIns="0" rIns="0" bIns="0">
-            <a:noAutofit/>
-          </a:bodyPr>
-          <a:lstStyle/>
-          <a:p>
-            <a:pPr algn="l" latinLnBrk="0">
-              <a:lnSpc>
-                <a:spcPct val="100000"/>
-              </a:lnSpc>
-              <a:spcBef>
-                <a:spcPts val="0"/>
-              </a:spcBef>
-              <a:spcAft>
-                <a:spcPts val="300"/>
-              </a:spcAft>
-            </a:pPr>
-            <a:r>
-              <a:rPr sz="1050" b="1">
-                <a:solidFill>
-                  <a:srgbClr val="0A2B45"/>
-                </a:solidFill>
-                <a:latin typeface="Microsoft YaHei"/>
-                <a:ea typeface="Microsoft YaHei"/>
-                <a:cs typeface="Microsoft YaHei"/>
-              </a:rPr>
-              <a:t>被测系统</a:t>
-            </a:r>
-            <a:r>
-              <a:rPr sz="800" b="1">
-                <a:solidFill>
-                  <a:srgbClr val="0F62CE"/>
-                </a:solidFill>
-                <a:latin typeface="Consolas"/>
-                <a:ea typeface="Microsoft YaHei"/>
-                <a:cs typeface="Microsoft YaHei"/>
-              </a:rPr>
-              <a:t>　SUT</a:t>
-            </a:r>
-          </a:p>
-          <a:p>
-            <a:pPr algn="l" latinLnBrk="0">
-              <a:lnSpc>
-                <a:spcPct val="100000"/>
-              </a:lnSpc>
-              <a:spcBef>
-                <a:spcPts val="0"/>
-              </a:spcBef>
-              <a:spcAft>
-                <a:spcPts val="0"/>
-              </a:spcAft>
-            </a:pPr>
-            <a:r>
-              <a:rPr sz="900" b="0">
-                <a:solidFill>
-                  <a:srgbClr val="1B4D69"/>
-                </a:solidFill>
-                <a:latin typeface="Microsoft YaHei"/>
-                <a:ea typeface="Microsoft YaHei"/>
-                <a:cs typeface="Microsoft YaHei"/>
-              </a:rPr>
-              <a:t>·　SGLang 原仓库原位建版本</a:t>
-            </a:r>
-          </a:p>
-          <a:p>
-            <a:pPr algn="l" latinLnBrk="0">
-              <a:lnSpc>
-                <a:spcPct val="100000"/>
-              </a:lnSpc>
-              <a:spcBef>
-                <a:spcPts val="0"/>
-              </a:spcBef>
-              <a:spcAft>
-                <a:spcPts val="0"/>
-              </a:spcAft>
-            </a:pPr>
-            <a:r>
-              <a:rPr sz="900" b="0">
-                <a:solidFill>
-                  <a:srgbClr val="1B4D69"/>
-                </a:solidFill>
-                <a:latin typeface="Microsoft YaHei"/>
-                <a:ea typeface="Microsoft YaHei"/>
-                <a:cs typeface="Microsoft YaHei"/>
-              </a:rPr>
-              <a:t>·　增量编译登记的算子组件</a:t>
-            </a:r>
-          </a:p>
-          <a:p>
-            <a:pPr algn="l" latinLnBrk="0">
-              <a:lnSpc>
-                <a:spcPct val="100000"/>
-              </a:lnSpc>
-              <a:spcBef>
-                <a:spcPts val="0"/>
-              </a:spcBef>
-              <a:spcAft>
-                <a:spcPts val="0"/>
-              </a:spcAft>
-            </a:pPr>
-            <a:r>
-              <a:rPr sz="900" b="0">
-                <a:solidFill>
-                  <a:srgbClr val="1B4D69"/>
-                </a:solidFill>
-                <a:latin typeface="Microsoft YaHei"/>
-                <a:ea typeface="Microsoft YaHei"/>
-                <a:cs typeface="Microsoft YaHei"/>
-              </a:rPr>
-              <a:t>·　M100 物理卡 · 服务启停</a:t>
-            </a:r>
-          </a:p>
-          <a:p>
-            <a:pPr algn="l" latinLnBrk="0">
-              <a:lnSpc>
-                <a:spcPct val="100000"/>
-              </a:lnSpc>
-              <a:spcBef>
-                <a:spcPts val="0"/>
-              </a:spcBef>
-              <a:spcAft>
-                <a:spcPts val="0"/>
-              </a:spcAft>
-            </a:pPr>
-            <a:r>
-              <a:rPr sz="900" b="0">
-                <a:solidFill>
-                  <a:srgbClr val="1B4D69"/>
-                </a:solidFill>
-                <a:latin typeface="Microsoft YaHei"/>
-                <a:ea typeface="Microsoft YaHei"/>
-                <a:cs typeface="Microsoft YaHei"/>
-              </a:rPr>
-              <a:t>·　回传 Trace · Logprob · 吞吐</a:t>
-            </a:r>
-          </a:p>
-        </p:txBody>
-      </p:sp>
-      <p:sp>
-        <p:nvSpPr>
-          <p:cNvPr id="24" name="Rectangle 23"/>
-          <p:cNvSpPr/>
-          <p:nvPr/>
-        </p:nvSpPr>
-        <p:spPr>
-          <a:xfrm>
-            <a:off x="8869680" y="3456432"/>
-            <a:ext cx="2773375" cy="1609344"/>
-          </a:xfrm>
-          <a:prstGeom prst="rect">
-            <a:avLst/>
-          </a:prstGeom>
-          <a:solidFill>
-            <a:srgbClr val="FFFFFF"/>
-          </a:solidFill>
-          <a:ln w="9525">
+      </p:cxnSp>
+      <p:cxnSp>
+        <p:nvCxnSpPr>
+          <p:cNvPr id="10" name="Connector 9"/>
+          <p:cNvCxnSpPr/>
+          <p:nvPr/>
+        </p:nvCxnSpPr>
+        <p:spPr>
+          <a:xfrm>
+            <a:off x="786384" y="1609343"/>
+            <a:ext cx="109728" cy="146305"/>
+          </a:xfrm>
+          <a:prstGeom prst="line">
+            <a:avLst/>
+          </a:prstGeom>
+          <a:ln w="15875">
             <a:solidFill>
-              <a:srgbClr val="CFE3F0"/>
+              <a:srgbClr val="1B4D69"/>
             </a:solidFill>
           </a:ln>
         </p:spPr>
-        <p:txBody>
-          <a:bodyPr rtlCol="0" anchor="ctr"/>
-          <a:lstStyle/>
-          <a:p>
-            <a:pPr algn="ctr"/>
-          </a:p>
-        </p:txBody>
-      </p:sp>
-      <p:sp>
-        <p:nvSpPr>
-          <p:cNvPr id="25" name="Rectangle 24"/>
+      </p:cxnSp>
+      <p:sp>
+        <p:nvSpPr>
+          <p:cNvPr id="11" name="TextBox 10"/>
+          <p:cNvSpPr txBox="1"/>
+          <p:nvPr/>
+        </p:nvSpPr>
+        <p:spPr>
+          <a:xfrm>
+            <a:off x="1060704" y="1261872"/>
+            <a:ext cx="1591055" cy="512064"/>
+          </a:xfrm>
+          <a:prstGeom prst="rect">
+            <a:avLst/>
+          </a:prstGeom>
+          <a:noFill/>
+        </p:spPr>
+        <p:txBody>
+          <a:bodyPr wrap="square" anchor="ctr" lIns="0" tIns="0" rIns="0" bIns="0">
+            <a:noAutofit/>
+          </a:bodyPr>
+          <a:lstStyle/>
+          <a:p>
+            <a:pPr algn="l" latinLnBrk="0">
+              <a:lnSpc>
+                <a:spcPct val="100000"/>
+              </a:lnSpc>
+              <a:spcBef>
+                <a:spcPts val="0"/>
+              </a:spcBef>
+              <a:spcAft>
+                <a:spcPts val="100"/>
+              </a:spcAft>
+            </a:pPr>
+            <a:r>
+              <a:rPr sz="1200" b="1">
+                <a:solidFill>
+                  <a:srgbClr val="0A2B45"/>
+                </a:solidFill>
+                <a:latin typeface="Microsoft YaHei"/>
+                <a:ea typeface="Microsoft YaHei"/>
+                <a:cs typeface="Microsoft YaHei"/>
+              </a:rPr>
+              <a:t>人</a:t>
+            </a:r>
+            <a:r>
+              <a:rPr sz="950" b="0">
+                <a:solidFill>
+                  <a:srgbClr val="1B4D69"/>
+                </a:solidFill>
+                <a:latin typeface="Microsoft YaHei"/>
+                <a:ea typeface="Microsoft YaHei"/>
+                <a:cs typeface="Microsoft YaHei"/>
+              </a:rPr>
+              <a:t>　任务负责人</a:t>
+            </a:r>
+          </a:p>
+          <a:p>
+            <a:pPr algn="l" latinLnBrk="0">
+              <a:lnSpc>
+                <a:spcPct val="100000"/>
+              </a:lnSpc>
+              <a:spcBef>
+                <a:spcPts val="0"/>
+              </a:spcBef>
+              <a:spcAft>
+                <a:spcPts val="0"/>
+              </a:spcAft>
+            </a:pPr>
+            <a:r>
+              <a:rPr sz="750" b="0">
+                <a:solidFill>
+                  <a:srgbClr val="40708B"/>
+                </a:solidFill>
+                <a:latin typeface="Microsoft YaHei"/>
+                <a:ea typeface="Microsoft YaHei"/>
+                <a:cs typeface="Microsoft YaHei"/>
+              </a:rPr>
+              <a:t>«actor»</a:t>
+            </a:r>
+          </a:p>
+        </p:txBody>
+      </p:sp>
+      <p:sp>
+        <p:nvSpPr>
+          <p:cNvPr id="12" name="Rectangle 11"/>
           <p:cNvSpPr/>
           <p:nvPr/>
         </p:nvSpPr>
         <p:spPr>
           <a:xfrm>
-            <a:off x="8869680" y="3456432"/>
-            <a:ext cx="64008" cy="1609344"/>
-          </a:xfrm>
-          <a:prstGeom prst="rect">
-            <a:avLst/>
-          </a:prstGeom>
-          <a:solidFill>
-            <a:srgbClr val="0F62CE"/>
-          </a:solidFill>
-          <a:ln>
-            <a:noFill/>
-          </a:ln>
-        </p:spPr>
-        <p:txBody>
-          <a:bodyPr rtlCol="0" anchor="ctr"/>
-          <a:lstStyle/>
-          <a:p>
-            <a:pPr algn="ctr"/>
-          </a:p>
-        </p:txBody>
-      </p:sp>
-      <p:sp>
-        <p:nvSpPr>
-          <p:cNvPr id="26" name="TextBox 25"/>
-          <p:cNvSpPr txBox="1"/>
-          <p:nvPr/>
-        </p:nvSpPr>
-        <p:spPr>
-          <a:xfrm>
-            <a:off x="9052559" y="3502151"/>
-            <a:ext cx="2444191" cy="1517904"/>
-          </a:xfrm>
-          <a:prstGeom prst="rect">
-            <a:avLst/>
-          </a:prstGeom>
-          <a:noFill/>
-        </p:spPr>
-        <p:txBody>
-          <a:bodyPr wrap="square" anchor="ctr" lIns="0" tIns="0" rIns="0" bIns="0">
-            <a:noAutofit/>
-          </a:bodyPr>
-          <a:lstStyle/>
-          <a:p>
-            <a:pPr algn="l" latinLnBrk="0">
-              <a:lnSpc>
-                <a:spcPct val="100000"/>
-              </a:lnSpc>
-              <a:spcBef>
-                <a:spcPts val="0"/>
-              </a:spcBef>
-              <a:spcAft>
-                <a:spcPts val="300"/>
-              </a:spcAft>
-            </a:pPr>
-            <a:r>
-              <a:rPr sz="1050" b="1">
-                <a:solidFill>
-                  <a:srgbClr val="0A2B45"/>
-                </a:solidFill>
-                <a:latin typeface="Microsoft YaHei"/>
-                <a:ea typeface="Microsoft YaHei"/>
-                <a:cs typeface="Microsoft YaHei"/>
-              </a:rPr>
-              <a:t>证据与产物库</a:t>
-            </a:r>
-            <a:r>
-              <a:rPr sz="800" b="1">
-                <a:solidFill>
-                  <a:srgbClr val="0F62CE"/>
-                </a:solidFill>
-                <a:latin typeface="Consolas"/>
-                <a:ea typeface="Microsoft YaHei"/>
-                <a:cs typeface="Microsoft YaHei"/>
-              </a:rPr>
-              <a:t>　Artifacts</a:t>
-            </a:r>
-          </a:p>
-          <a:p>
-            <a:pPr algn="l" latinLnBrk="0">
-              <a:lnSpc>
-                <a:spcPct val="100000"/>
-              </a:lnSpc>
-              <a:spcBef>
-                <a:spcPts val="0"/>
-              </a:spcBef>
-              <a:spcAft>
-                <a:spcPts val="0"/>
-              </a:spcAft>
-            </a:pPr>
-            <a:r>
-              <a:rPr sz="900" b="0">
-                <a:solidFill>
-                  <a:srgbClr val="1B4D69"/>
-                </a:solidFill>
-                <a:latin typeface="Microsoft YaHei"/>
-                <a:ea typeface="Microsoft YaHei"/>
-                <a:cs typeface="Microsoft YaHei"/>
-              </a:rPr>
-              <a:t>·　35 次 Trial 独立成目录</a:t>
-            </a:r>
-          </a:p>
-          <a:p>
-            <a:pPr algn="l" latinLnBrk="0">
-              <a:lnSpc>
-                <a:spcPct val="100000"/>
-              </a:lnSpc>
-              <a:spcBef>
-                <a:spcPts val="0"/>
-              </a:spcBef>
-              <a:spcAft>
-                <a:spcPts val="0"/>
-              </a:spcAft>
-            </a:pPr>
-            <a:r>
-              <a:rPr sz="900" b="0">
-                <a:solidFill>
-                  <a:srgbClr val="1B4D69"/>
-                </a:solidFill>
-                <a:latin typeface="Microsoft YaHei"/>
-                <a:ea typeface="Microsoft YaHei"/>
-                <a:cs typeface="Microsoft YaHei"/>
-              </a:rPr>
-              <a:t>·　冻结快照与组件 SHA</a:t>
-            </a:r>
-          </a:p>
-          <a:p>
-            <a:pPr algn="l" latinLnBrk="0">
-              <a:lnSpc>
-                <a:spcPct val="100000"/>
-              </a:lnSpc>
-              <a:spcBef>
-                <a:spcPts val="0"/>
-              </a:spcBef>
-              <a:spcAft>
-                <a:spcPts val="0"/>
-              </a:spcAft>
-            </a:pPr>
-            <a:r>
-              <a:rPr sz="900" b="0">
-                <a:solidFill>
-                  <a:srgbClr val="1B4D69"/>
-                </a:solidFill>
-                <a:latin typeface="Microsoft YaHei"/>
-                <a:ea typeface="Microsoft YaHei"/>
-                <a:cs typeface="Microsoft YaHei"/>
-              </a:rPr>
-              <a:t>·　账本 · Trace · Probe 结果</a:t>
-            </a:r>
-          </a:p>
-          <a:p>
-            <a:pPr algn="l" latinLnBrk="0">
-              <a:lnSpc>
-                <a:spcPct val="100000"/>
-              </a:lnSpc>
-              <a:spcBef>
-                <a:spcPts val="0"/>
-              </a:spcBef>
-              <a:spcAft>
-                <a:spcPts val="0"/>
-              </a:spcAft>
-            </a:pPr>
-            <a:r>
-              <a:rPr sz="900" b="0">
-                <a:solidFill>
-                  <a:srgbClr val="1B4D69"/>
-                </a:solidFill>
-                <a:latin typeface="Microsoft YaHei"/>
-                <a:ea typeface="Microsoft YaHei"/>
-                <a:cs typeface="Microsoft YaHei"/>
-              </a:rPr>
-              <a:t>·　规划器往来全量报文</a:t>
-            </a:r>
-          </a:p>
-          <a:p>
-            <a:pPr algn="l" latinLnBrk="0">
-              <a:lnSpc>
-                <a:spcPct val="100000"/>
-              </a:lnSpc>
-              <a:spcBef>
-                <a:spcPts val="0"/>
-              </a:spcBef>
-              <a:spcAft>
-                <a:spcPts val="0"/>
-              </a:spcAft>
-            </a:pPr>
-            <a:r>
-              <a:rPr sz="900" b="0">
-                <a:solidFill>
-                  <a:srgbClr val="1B4D69"/>
-                </a:solidFill>
-                <a:latin typeface="Microsoft YaHei"/>
-                <a:ea typeface="Microsoft YaHei"/>
-                <a:cs typeface="Microsoft YaHei"/>
-              </a:rPr>
-              <a:t>·　完整证据留本地，按需调取</a:t>
-            </a:r>
-          </a:p>
-        </p:txBody>
-      </p:sp>
-      <p:sp>
-        <p:nvSpPr>
-          <p:cNvPr id="27" name="Rectangle 26"/>
-          <p:cNvSpPr/>
-          <p:nvPr/>
-        </p:nvSpPr>
-        <p:spPr>
-          <a:xfrm>
-            <a:off x="3703320" y="1517904"/>
-            <a:ext cx="4389120" cy="3986783"/>
+            <a:off x="548640" y="1883664"/>
+            <a:ext cx="2103120" cy="1133856"/>
           </a:xfrm>
           <a:prstGeom prst="rect">
             <a:avLst/>
@@ -31666,20 +30508,20 @@
       </p:sp>
       <p:sp>
         <p:nvSpPr>
-          <p:cNvPr id="28" name="Rectangle 27"/>
+          <p:cNvPr id="13" name="Rectangle 12"/>
           <p:cNvSpPr/>
           <p:nvPr/>
         </p:nvSpPr>
         <p:spPr>
           <a:xfrm>
-            <a:off x="3834993" y="1554480"/>
-            <a:ext cx="4125772" cy="2176272"/>
+            <a:off x="548640" y="1883664"/>
+            <a:ext cx="54864" cy="1133856"/>
           </a:xfrm>
           <a:prstGeom prst="rect">
             <a:avLst/>
           </a:prstGeom>
           <a:solidFill>
-            <a:srgbClr val="E6F0FC"/>
+            <a:srgbClr val="40708B"/>
           </a:solidFill>
           <a:ln>
             <a:noFill/>
@@ -31695,1422 +30537,42 @@
       </p:sp>
       <p:sp>
         <p:nvSpPr>
-          <p:cNvPr id="29" name="Rectangle 28"/>
+          <p:cNvPr id="14" name="Freeform 13"/>
           <p:cNvSpPr/>
           <p:nvPr/>
         </p:nvSpPr>
         <p:spPr>
           <a:xfrm>
-            <a:off x="3834993" y="1554480"/>
-            <a:ext cx="4125772" cy="54864"/>
-          </a:xfrm>
-          <a:prstGeom prst="rect">
-            <a:avLst/>
-          </a:prstGeom>
-          <a:solidFill>
-            <a:srgbClr val="0F62CE"/>
-          </a:solidFill>
-          <a:ln>
-            <a:noFill/>
-          </a:ln>
-        </p:spPr>
-        <p:txBody>
-          <a:bodyPr rtlCol="0" anchor="ctr"/>
-          <a:lstStyle/>
-          <a:p>
-            <a:pPr algn="ctr"/>
-          </a:p>
-        </p:txBody>
-      </p:sp>
-      <p:sp>
-        <p:nvSpPr>
-          <p:cNvPr id="30" name="TextBox 29"/>
-          <p:cNvSpPr txBox="1"/>
-          <p:nvPr/>
-        </p:nvSpPr>
-        <p:spPr>
-          <a:xfrm>
-            <a:off x="3981297" y="1627632"/>
-            <a:ext cx="3833164" cy="237744"/>
-          </a:xfrm>
-          <a:prstGeom prst="rect">
-            <a:avLst/>
-          </a:prstGeom>
-          <a:noFill/>
-        </p:spPr>
-        <p:txBody>
-          <a:bodyPr wrap="square" anchor="ctr" lIns="0" tIns="0" rIns="0" bIns="0">
-            <a:noAutofit/>
-          </a:bodyPr>
-          <a:lstStyle/>
-          <a:p>
-            <a:pPr algn="l" latinLnBrk="0">
-              <a:lnSpc>
-                <a:spcPct val="100000"/>
-              </a:lnSpc>
-              <a:spcBef>
-                <a:spcPts val="0"/>
-              </a:spcBef>
-              <a:spcAft>
-                <a:spcPts val="0"/>
-              </a:spcAft>
-            </a:pPr>
-            <a:r>
-              <a:rPr sz="1150" b="1">
-                <a:solidFill>
-                  <a:srgbClr val="0F62CE"/>
-                </a:solidFill>
-                <a:latin typeface="Microsoft YaHei"/>
-                <a:ea typeface="Microsoft YaHei"/>
-                <a:cs typeface="Microsoft YaHei"/>
-              </a:rPr>
-              <a:t>Python 控制器</a:t>
-            </a:r>
-            <a:r>
-              <a:rPr sz="850" b="0">
-                <a:solidFill>
-                  <a:srgbClr val="1B4D69"/>
-                </a:solidFill>
-                <a:latin typeface="Microsoft YaHei"/>
-                <a:ea typeface="Microsoft YaHei"/>
-                <a:cs typeface="Microsoft YaHei"/>
-              </a:rPr>
-              <a:t>　确定性中枢 · 无模型</a:t>
-            </a:r>
-          </a:p>
-        </p:txBody>
-      </p:sp>
-      <p:sp>
-        <p:nvSpPr>
-          <p:cNvPr id="31" name="Rectangle 30"/>
-          <p:cNvSpPr/>
-          <p:nvPr/>
-        </p:nvSpPr>
-        <p:spPr>
-          <a:xfrm>
-            <a:off x="3981297" y="1901952"/>
-            <a:ext cx="1852574" cy="859536"/>
-          </a:xfrm>
-          <a:prstGeom prst="rect">
-            <a:avLst/>
-          </a:prstGeom>
-          <a:solidFill>
-            <a:srgbClr val="FFFFFF"/>
-          </a:solidFill>
-          <a:ln w="9525">
-            <a:solidFill>
-              <a:srgbClr val="CFE3F0"/>
-            </a:solidFill>
-          </a:ln>
-        </p:spPr>
-        <p:txBody>
-          <a:bodyPr rtlCol="0" anchor="ctr"/>
-          <a:lstStyle/>
-          <a:p>
-            <a:pPr algn="ctr"/>
-          </a:p>
-        </p:txBody>
-      </p:sp>
-      <p:sp>
-        <p:nvSpPr>
-          <p:cNvPr id="32" name="TextBox 31"/>
-          <p:cNvSpPr txBox="1"/>
-          <p:nvPr/>
-        </p:nvSpPr>
-        <p:spPr>
-          <a:xfrm>
-            <a:off x="4109313" y="1947672"/>
-            <a:ext cx="1614830" cy="768096"/>
-          </a:xfrm>
-          <a:prstGeom prst="rect">
-            <a:avLst/>
-          </a:prstGeom>
-          <a:noFill/>
-        </p:spPr>
-        <p:txBody>
-          <a:bodyPr wrap="square" anchor="ctr" lIns="0" tIns="0" rIns="0" bIns="0">
-            <a:noAutofit/>
-          </a:bodyPr>
-          <a:lstStyle/>
-          <a:p>
-            <a:pPr algn="l" latinLnBrk="0">
-              <a:lnSpc>
-                <a:spcPct val="100000"/>
-              </a:lnSpc>
-              <a:spcBef>
-                <a:spcPts val="0"/>
-              </a:spcBef>
-              <a:spcAft>
-                <a:spcPts val="100"/>
-              </a:spcAft>
-            </a:pPr>
-            <a:r>
-              <a:rPr sz="950" b="1">
-                <a:solidFill>
-                  <a:srgbClr val="0F62CE"/>
-                </a:solidFill>
-                <a:latin typeface="Microsoft YaHei"/>
-                <a:ea typeface="Microsoft YaHei"/>
-                <a:cs typeface="Microsoft YaHei"/>
-              </a:rPr>
-              <a:t>① </a:t>
-            </a:r>
-            <a:r>
-              <a:rPr sz="950" b="1">
-                <a:solidFill>
-                  <a:srgbClr val="0A2B45"/>
-                </a:solidFill>
-                <a:latin typeface="Microsoft YaHei"/>
-                <a:ea typeface="Microsoft YaHei"/>
-                <a:cs typeface="Microsoft YaHei"/>
-              </a:rPr>
-              <a:t>状态与工作区</a:t>
-            </a:r>
-          </a:p>
-          <a:p>
-            <a:pPr algn="l" latinLnBrk="0">
-              <a:lnSpc>
-                <a:spcPct val="100000"/>
-              </a:lnSpc>
-              <a:spcBef>
-                <a:spcPts val="0"/>
-              </a:spcBef>
-              <a:spcAft>
-                <a:spcPts val="200"/>
-              </a:spcAft>
-            </a:pPr>
-            <a:r>
-              <a:rPr sz="700" b="0">
-                <a:solidFill>
-                  <a:srgbClr val="0F62CE"/>
-                </a:solidFill>
-                <a:latin typeface="Consolas"/>
-                <a:ea typeface="Microsoft YaHei"/>
-                <a:cs typeface="Microsoft YaHei"/>
-              </a:rPr>
-              <a:t>optimization.py</a:t>
-            </a:r>
-          </a:p>
-          <a:p>
-            <a:pPr algn="l" latinLnBrk="0">
-              <a:lnSpc>
-                <a:spcPct val="100000"/>
-              </a:lnSpc>
-              <a:spcBef>
-                <a:spcPts val="0"/>
-              </a:spcBef>
-              <a:spcAft>
-                <a:spcPts val="0"/>
-              </a:spcAft>
-            </a:pPr>
-            <a:r>
-              <a:rPr sz="800" b="0">
-                <a:solidFill>
-                  <a:srgbClr val="1B4D69"/>
-                </a:solidFill>
-                <a:latin typeface="Microsoft YaHei"/>
-                <a:ea typeface="Microsoft YaHei"/>
-                <a:cs typeface="Microsoft YaHei"/>
-              </a:rPr>
-              <a:t>设备锁 · 状态机 · 恢复</a:t>
-            </a:r>
-          </a:p>
-          <a:p>
-            <a:pPr algn="l" latinLnBrk="0">
-              <a:lnSpc>
-                <a:spcPct val="100000"/>
-              </a:lnSpc>
-              <a:spcBef>
-                <a:spcPts val="0"/>
-              </a:spcBef>
-              <a:spcAft>
-                <a:spcPts val="0"/>
-              </a:spcAft>
-            </a:pPr>
-            <a:r>
-              <a:rPr sz="800" b="0">
-                <a:solidFill>
-                  <a:srgbClr val="1B4D69"/>
-                </a:solidFill>
-                <a:latin typeface="Microsoft YaHei"/>
-                <a:ea typeface="Microsoft YaHei"/>
-                <a:cs typeface="Microsoft YaHei"/>
-              </a:rPr>
-              <a:t>原位构建 · 精确重测</a:t>
-            </a:r>
-          </a:p>
-        </p:txBody>
-      </p:sp>
-      <p:sp>
-        <p:nvSpPr>
-          <p:cNvPr id="33" name="Rectangle 32"/>
-          <p:cNvSpPr/>
-          <p:nvPr/>
-        </p:nvSpPr>
-        <p:spPr>
-          <a:xfrm>
-            <a:off x="5961888" y="1901952"/>
-            <a:ext cx="1852574" cy="859536"/>
-          </a:xfrm>
-          <a:prstGeom prst="rect">
-            <a:avLst/>
-          </a:prstGeom>
-          <a:solidFill>
-            <a:srgbClr val="FFFFFF"/>
-          </a:solidFill>
-          <a:ln w="9525">
-            <a:solidFill>
-              <a:srgbClr val="CFE3F0"/>
-            </a:solidFill>
-          </a:ln>
-        </p:spPr>
-        <p:txBody>
-          <a:bodyPr rtlCol="0" anchor="ctr"/>
-          <a:lstStyle/>
-          <a:p>
-            <a:pPr algn="ctr"/>
-          </a:p>
-        </p:txBody>
-      </p:sp>
-      <p:sp>
-        <p:nvSpPr>
-          <p:cNvPr id="34" name="TextBox 33"/>
-          <p:cNvSpPr txBox="1"/>
-          <p:nvPr/>
-        </p:nvSpPr>
-        <p:spPr>
-          <a:xfrm>
-            <a:off x="6089903" y="1947672"/>
-            <a:ext cx="1614830" cy="768096"/>
-          </a:xfrm>
-          <a:prstGeom prst="rect">
-            <a:avLst/>
-          </a:prstGeom>
-          <a:noFill/>
-        </p:spPr>
-        <p:txBody>
-          <a:bodyPr wrap="square" anchor="ctr" lIns="0" tIns="0" rIns="0" bIns="0">
-            <a:noAutofit/>
-          </a:bodyPr>
-          <a:lstStyle/>
-          <a:p>
-            <a:pPr algn="l" latinLnBrk="0">
-              <a:lnSpc>
-                <a:spcPct val="100000"/>
-              </a:lnSpc>
-              <a:spcBef>
-                <a:spcPts val="0"/>
-              </a:spcBef>
-              <a:spcAft>
-                <a:spcPts val="100"/>
-              </a:spcAft>
-            </a:pPr>
-            <a:r>
-              <a:rPr sz="950" b="1">
-                <a:solidFill>
-                  <a:srgbClr val="0F62CE"/>
-                </a:solidFill>
-                <a:latin typeface="Microsoft YaHei"/>
-                <a:ea typeface="Microsoft YaHei"/>
-                <a:cs typeface="Microsoft YaHei"/>
-              </a:rPr>
-              <a:t>② </a:t>
-            </a:r>
-            <a:r>
-              <a:rPr sz="950" b="1">
-                <a:solidFill>
-                  <a:srgbClr val="0A2B45"/>
-                </a:solidFill>
-                <a:latin typeface="Microsoft YaHei"/>
-                <a:ea typeface="Microsoft YaHei"/>
-                <a:cs typeface="Microsoft YaHei"/>
-              </a:rPr>
-              <a:t>采样与账本</a:t>
-            </a:r>
-          </a:p>
-          <a:p>
-            <a:pPr algn="l" latinLnBrk="0">
-              <a:lnSpc>
-                <a:spcPct val="100000"/>
-              </a:lnSpc>
-              <a:spcBef>
-                <a:spcPts val="0"/>
-              </a:spcBef>
-              <a:spcAft>
-                <a:spcPts val="200"/>
-              </a:spcAft>
-            </a:pPr>
-            <a:r>
-              <a:rPr sz="700" b="0">
-                <a:solidFill>
-                  <a:srgbClr val="0F62CE"/>
-                </a:solidFill>
-                <a:latin typeface="Consolas"/>
-                <a:ea typeface="Microsoft YaHei"/>
-                <a:cs typeface="Microsoft YaHei"/>
-              </a:rPr>
-              <a:t>roofline.py</a:t>
-            </a:r>
-          </a:p>
-          <a:p>
-            <a:pPr algn="l" latinLnBrk="0">
-              <a:lnSpc>
-                <a:spcPct val="100000"/>
-              </a:lnSpc>
-              <a:spcBef>
-                <a:spcPts val="0"/>
-              </a:spcBef>
-              <a:spcAft>
-                <a:spcPts val="0"/>
-              </a:spcAft>
-            </a:pPr>
-            <a:r>
-              <a:rPr sz="800" b="0">
-                <a:solidFill>
-                  <a:srgbClr val="1B4D69"/>
-                </a:solidFill>
-                <a:latin typeface="Microsoft YaHei"/>
-                <a:ea typeface="Microsoft YaHei"/>
-                <a:cs typeface="Microsoft YaHei"/>
-              </a:rPr>
-              <a:t>一次性服务 Trace 采样</a:t>
-            </a:r>
-          </a:p>
-          <a:p>
-            <a:pPr algn="l" latinLnBrk="0">
-              <a:lnSpc>
-                <a:spcPct val="100000"/>
-              </a:lnSpc>
-              <a:spcBef>
-                <a:spcPts val="0"/>
-              </a:spcBef>
-              <a:spcAft>
-                <a:spcPts val="0"/>
-              </a:spcAft>
-            </a:pPr>
-            <a:r>
-              <a:rPr sz="800" b="0">
-                <a:solidFill>
-                  <a:srgbClr val="1B4D69"/>
-                </a:solidFill>
-                <a:latin typeface="Microsoft YaHei"/>
-                <a:ea typeface="Microsoft YaHei"/>
-                <a:cs typeface="Microsoft YaHei"/>
-              </a:rPr>
-              <a:t>对齐源码 · 下界核算</a:t>
-            </a:r>
-          </a:p>
-        </p:txBody>
-      </p:sp>
-      <p:sp>
-        <p:nvSpPr>
-          <p:cNvPr id="35" name="Rectangle 34"/>
-          <p:cNvSpPr/>
-          <p:nvPr/>
-        </p:nvSpPr>
-        <p:spPr>
-          <a:xfrm>
-            <a:off x="3981297" y="2798064"/>
-            <a:ext cx="1852574" cy="859536"/>
-          </a:xfrm>
-          <a:prstGeom prst="rect">
-            <a:avLst/>
-          </a:prstGeom>
-          <a:solidFill>
-            <a:srgbClr val="FFFFFF"/>
-          </a:solidFill>
-          <a:ln w="9525">
-            <a:solidFill>
-              <a:srgbClr val="CFE3F0"/>
-            </a:solidFill>
-          </a:ln>
-        </p:spPr>
-        <p:txBody>
-          <a:bodyPr rtlCol="0" anchor="ctr"/>
-          <a:lstStyle/>
-          <a:p>
-            <a:pPr algn="ctr"/>
-          </a:p>
-        </p:txBody>
-      </p:sp>
-      <p:sp>
-        <p:nvSpPr>
-          <p:cNvPr id="36" name="TextBox 35"/>
-          <p:cNvSpPr txBox="1"/>
-          <p:nvPr/>
-        </p:nvSpPr>
-        <p:spPr>
-          <a:xfrm>
-            <a:off x="4109313" y="2843784"/>
-            <a:ext cx="1614830" cy="768096"/>
-          </a:xfrm>
-          <a:prstGeom prst="rect">
-            <a:avLst/>
-          </a:prstGeom>
-          <a:noFill/>
-        </p:spPr>
-        <p:txBody>
-          <a:bodyPr wrap="square" anchor="ctr" lIns="0" tIns="0" rIns="0" bIns="0">
-            <a:noAutofit/>
-          </a:bodyPr>
-          <a:lstStyle/>
-          <a:p>
-            <a:pPr algn="l" latinLnBrk="0">
-              <a:lnSpc>
-                <a:spcPct val="100000"/>
-              </a:lnSpc>
-              <a:spcBef>
-                <a:spcPts val="0"/>
-              </a:spcBef>
-              <a:spcAft>
-                <a:spcPts val="100"/>
-              </a:spcAft>
-            </a:pPr>
-            <a:r>
-              <a:rPr sz="950" b="1">
-                <a:solidFill>
-                  <a:srgbClr val="0F62CE"/>
-                </a:solidFill>
-                <a:latin typeface="Microsoft YaHei"/>
-                <a:ea typeface="Microsoft YaHei"/>
-                <a:cs typeface="Microsoft YaHei"/>
-              </a:rPr>
-              <a:t>③ </a:t>
-            </a:r>
-            <a:r>
-              <a:rPr sz="950" b="1">
-                <a:solidFill>
-                  <a:srgbClr val="0A2B45"/>
-                </a:solidFill>
-                <a:latin typeface="Microsoft YaHei"/>
-                <a:ea typeface="Microsoft YaHei"/>
-                <a:cs typeface="Microsoft YaHei"/>
-              </a:rPr>
-              <a:t>四道门禁流水</a:t>
-            </a:r>
-          </a:p>
-          <a:p>
-            <a:pPr algn="l" latinLnBrk="0">
-              <a:lnSpc>
-                <a:spcPct val="100000"/>
-              </a:lnSpc>
-              <a:spcBef>
-                <a:spcPts val="0"/>
-              </a:spcBef>
-              <a:spcAft>
-                <a:spcPts val="200"/>
-              </a:spcAft>
-            </a:pPr>
-            <a:r>
-              <a:rPr sz="700" b="0">
-                <a:solidFill>
-                  <a:srgbClr val="0F62CE"/>
-                </a:solidFill>
-                <a:latin typeface="Consolas"/>
-                <a:ea typeface="Microsoft YaHei"/>
-                <a:cs typeface="Microsoft YaHei"/>
-              </a:rPr>
-              <a:t>selfiterate_gates.py</a:t>
-            </a:r>
-          </a:p>
-          <a:p>
-            <a:pPr algn="l" latinLnBrk="0">
-              <a:lnSpc>
-                <a:spcPct val="100000"/>
-              </a:lnSpc>
-              <a:spcBef>
-                <a:spcPts val="0"/>
-              </a:spcBef>
-              <a:spcAft>
-                <a:spcPts val="0"/>
-              </a:spcAft>
-            </a:pPr>
-            <a:r>
-              <a:rPr sz="800" b="0">
-                <a:solidFill>
-                  <a:srgbClr val="1B4D69"/>
-                </a:solidFill>
-                <a:latin typeface="Microsoft YaHei"/>
-                <a:ea typeface="Microsoft YaHei"/>
-                <a:cs typeface="Microsoft YaHei"/>
-              </a:rPr>
-              <a:t>C 算子微测 ≥ 2% · 数值门</a:t>
-            </a:r>
-          </a:p>
-          <a:p>
-            <a:pPr algn="l" latinLnBrk="0">
-              <a:lnSpc>
-                <a:spcPct val="100000"/>
-              </a:lnSpc>
-              <a:spcBef>
-                <a:spcPts val="0"/>
-              </a:spcBef>
-              <a:spcAft>
-                <a:spcPts val="0"/>
-              </a:spcAft>
-            </a:pPr>
-            <a:r>
-              <a:rPr sz="800" b="0">
-                <a:solidFill>
-                  <a:srgbClr val="1B4D69"/>
-                </a:solidFill>
-                <a:latin typeface="Microsoft YaHei"/>
-                <a:ea typeface="Microsoft YaHei"/>
-                <a:cs typeface="Microsoft YaHei"/>
-              </a:rPr>
-              <a:t>评测集不降 · D 三方 A/B</a:t>
-            </a:r>
-          </a:p>
-        </p:txBody>
-      </p:sp>
-      <p:sp>
-        <p:nvSpPr>
-          <p:cNvPr id="37" name="Rectangle 36"/>
-          <p:cNvSpPr/>
-          <p:nvPr/>
-        </p:nvSpPr>
-        <p:spPr>
-          <a:xfrm>
-            <a:off x="5961888" y="2798064"/>
-            <a:ext cx="1852574" cy="859536"/>
-          </a:xfrm>
-          <a:prstGeom prst="rect">
-            <a:avLst/>
-          </a:prstGeom>
-          <a:solidFill>
-            <a:srgbClr val="FFFFFF"/>
-          </a:solidFill>
-          <a:ln w="9525">
-            <a:solidFill>
-              <a:srgbClr val="CFE3F0"/>
-            </a:solidFill>
-          </a:ln>
-        </p:spPr>
-        <p:txBody>
-          <a:bodyPr rtlCol="0" anchor="ctr"/>
-          <a:lstStyle/>
-          <a:p>
-            <a:pPr algn="ctr"/>
-          </a:p>
-        </p:txBody>
-      </p:sp>
-      <p:sp>
-        <p:nvSpPr>
-          <p:cNvPr id="38" name="TextBox 37"/>
-          <p:cNvSpPr txBox="1"/>
-          <p:nvPr/>
-        </p:nvSpPr>
-        <p:spPr>
-          <a:xfrm>
-            <a:off x="6089903" y="2843784"/>
-            <a:ext cx="1614830" cy="768096"/>
-          </a:xfrm>
-          <a:prstGeom prst="rect">
-            <a:avLst/>
-          </a:prstGeom>
-          <a:noFill/>
-        </p:spPr>
-        <p:txBody>
-          <a:bodyPr wrap="square" anchor="ctr" lIns="0" tIns="0" rIns="0" bIns="0">
-            <a:noAutofit/>
-          </a:bodyPr>
-          <a:lstStyle/>
-          <a:p>
-            <a:pPr algn="l" latinLnBrk="0">
-              <a:lnSpc>
-                <a:spcPct val="100000"/>
-              </a:lnSpc>
-              <a:spcBef>
-                <a:spcPts val="0"/>
-              </a:spcBef>
-              <a:spcAft>
-                <a:spcPts val="100"/>
-              </a:spcAft>
-            </a:pPr>
-            <a:r>
-              <a:rPr sz="950" b="1">
-                <a:solidFill>
-                  <a:srgbClr val="0F62CE"/>
-                </a:solidFill>
-                <a:latin typeface="Microsoft YaHei"/>
-                <a:ea typeface="Microsoft YaHei"/>
-                <a:cs typeface="Microsoft YaHei"/>
-              </a:rPr>
-              <a:t>④ </a:t>
-            </a:r>
-            <a:r>
-              <a:rPr sz="950" b="1">
-                <a:solidFill>
-                  <a:srgbClr val="0A2B45"/>
-                </a:solidFill>
-                <a:latin typeface="Microsoft YaHei"/>
-                <a:ea typeface="Microsoft YaHei"/>
-                <a:cs typeface="Microsoft YaHei"/>
-              </a:rPr>
-              <a:t>有界取证</a:t>
-            </a:r>
-          </a:p>
-          <a:p>
-            <a:pPr algn="l" latinLnBrk="0">
-              <a:lnSpc>
-                <a:spcPct val="100000"/>
-              </a:lnSpc>
-              <a:spcBef>
-                <a:spcPts val="0"/>
-              </a:spcBef>
-              <a:spcAft>
-                <a:spcPts val="200"/>
-              </a:spcAft>
-            </a:pPr>
-            <a:r>
-              <a:rPr sz="700" b="0">
-                <a:solidFill>
-                  <a:srgbClr val="0F62CE"/>
-                </a:solidFill>
-                <a:latin typeface="Consolas"/>
-                <a:ea typeface="Microsoft YaHei"/>
-                <a:cs typeface="Microsoft YaHei"/>
-              </a:rPr>
-              <a:t>planner_diagnostics.py</a:t>
-            </a:r>
-          </a:p>
-          <a:p>
-            <a:pPr algn="l" latinLnBrk="0">
-              <a:lnSpc>
-                <a:spcPct val="100000"/>
-              </a:lnSpc>
-              <a:spcBef>
-                <a:spcPts val="0"/>
-              </a:spcBef>
-              <a:spcAft>
-                <a:spcPts val="0"/>
-              </a:spcAft>
-            </a:pPr>
-            <a:r>
-              <a:rPr sz="800" b="0">
-                <a:solidFill>
-                  <a:srgbClr val="1B4D69"/>
-                </a:solidFill>
-                <a:latin typeface="Microsoft YaHei"/>
-                <a:ea typeface="Microsoft YaHei"/>
-                <a:cs typeface="Microsoft YaHei"/>
-              </a:rPr>
-              <a:t>独立进程探针 ≤ 64 KiB</a:t>
-            </a:r>
-          </a:p>
-          <a:p>
-            <a:pPr algn="l" latinLnBrk="0">
-              <a:lnSpc>
-                <a:spcPct val="100000"/>
-              </a:lnSpc>
-              <a:spcBef>
-                <a:spcPts val="0"/>
-              </a:spcBef>
-              <a:spcAft>
-                <a:spcPts val="0"/>
-              </a:spcAft>
-            </a:pPr>
-            <a:r>
-              <a:rPr sz="800" b="0">
-                <a:solidFill>
-                  <a:srgbClr val="1B4D69"/>
-                </a:solidFill>
-                <a:latin typeface="Microsoft YaHei"/>
-                <a:ea typeface="Microsoft YaHei"/>
-                <a:cs typeface="Microsoft YaHei"/>
-              </a:rPr>
-              <a:t>账本异常自检与隔离</a:t>
-            </a:r>
-          </a:p>
-        </p:txBody>
-      </p:sp>
-      <p:sp>
-        <p:nvSpPr>
-          <p:cNvPr id="39" name="Rectangle 38"/>
-          <p:cNvSpPr/>
-          <p:nvPr/>
-        </p:nvSpPr>
-        <p:spPr>
-          <a:xfrm>
-            <a:off x="3834993" y="3950208"/>
-            <a:ext cx="4125772" cy="621792"/>
-          </a:xfrm>
-          <a:prstGeom prst="rect">
-            <a:avLst/>
-          </a:prstGeom>
-          <a:solidFill>
-            <a:srgbClr val="E6F0FC"/>
-          </a:solidFill>
-          <a:ln w="12700">
-            <a:solidFill>
-              <a:srgbClr val="0F62CE"/>
-            </a:solidFill>
-            <a:prstDash val="dash"/>
-          </a:ln>
-        </p:spPr>
-        <p:txBody>
-          <a:bodyPr rtlCol="0" anchor="ctr"/>
-          <a:lstStyle/>
-          <a:p>
-            <a:pPr algn="ctr"/>
-          </a:p>
-        </p:txBody>
-      </p:sp>
-      <p:sp>
-        <p:nvSpPr>
-          <p:cNvPr id="40" name="TextBox 39"/>
-          <p:cNvSpPr txBox="1"/>
-          <p:nvPr/>
-        </p:nvSpPr>
-        <p:spPr>
-          <a:xfrm>
-            <a:off x="3981297" y="3986784"/>
-            <a:ext cx="3833164" cy="201168"/>
-          </a:xfrm>
-          <a:prstGeom prst="rect">
-            <a:avLst/>
-          </a:prstGeom>
-          <a:noFill/>
-        </p:spPr>
-        <p:txBody>
-          <a:bodyPr wrap="square" anchor="ctr" lIns="0" tIns="0" rIns="0" bIns="0">
-            <a:noAutofit/>
-          </a:bodyPr>
-          <a:lstStyle/>
-          <a:p>
-            <a:pPr algn="l" latinLnBrk="0">
-              <a:lnSpc>
-                <a:spcPct val="100000"/>
-              </a:lnSpc>
-              <a:spcBef>
-                <a:spcPts val="0"/>
-              </a:spcBef>
-              <a:spcAft>
-                <a:spcPts val="0"/>
-              </a:spcAft>
-            </a:pPr>
-            <a:r>
-              <a:rPr sz="1000" b="1">
-                <a:solidFill>
-                  <a:srgbClr val="0F62CE"/>
-                </a:solidFill>
-                <a:latin typeface="Microsoft YaHei"/>
-                <a:ea typeface="Microsoft YaHei"/>
-                <a:cs typeface="Microsoft YaHei"/>
-              </a:rPr>
-              <a:t>可审计通信与记忆层</a:t>
-            </a:r>
-            <a:r>
-              <a:rPr sz="700" b="0">
-                <a:solidFill>
-                  <a:srgbClr val="40708B"/>
-                </a:solidFill>
-                <a:latin typeface="Consolas"/>
-                <a:ea typeface="Microsoft YaHei"/>
-                <a:cs typeface="Microsoft YaHei"/>
-              </a:rPr>
-              <a:t>　planner_mailbox.py · planner_memory.py</a:t>
-            </a:r>
-          </a:p>
-        </p:txBody>
-      </p:sp>
-      <p:sp>
-        <p:nvSpPr>
-          <p:cNvPr id="41" name="TextBox 40"/>
-          <p:cNvSpPr txBox="1"/>
-          <p:nvPr/>
-        </p:nvSpPr>
-        <p:spPr>
-          <a:xfrm>
-            <a:off x="3981297" y="4197096"/>
-            <a:ext cx="3833164" cy="164592"/>
-          </a:xfrm>
-          <a:prstGeom prst="rect">
-            <a:avLst/>
-          </a:prstGeom>
-          <a:noFill/>
-        </p:spPr>
-        <p:txBody>
-          <a:bodyPr wrap="square" anchor="ctr" lIns="0" tIns="0" rIns="0" bIns="0">
-            <a:noAutofit/>
-          </a:bodyPr>
-          <a:lstStyle/>
-          <a:p>
-            <a:pPr algn="l" latinLnBrk="0">
-              <a:lnSpc>
-                <a:spcPct val="100000"/>
-              </a:lnSpc>
-              <a:spcBef>
-                <a:spcPts val="0"/>
-              </a:spcBef>
-              <a:spcAft>
-                <a:spcPts val="0"/>
-              </a:spcAft>
-            </a:pPr>
-            <a:r>
-              <a:rPr sz="800" b="1">
-                <a:solidFill>
-                  <a:srgbClr val="0A2B45"/>
-                </a:solidFill>
-                <a:latin typeface="Consolas"/>
-                <a:ea typeface="Microsoft YaHei"/>
-                <a:cs typeface="Microsoft YaHei"/>
-              </a:rPr>
-              <a:t>mailbox</a:t>
-            </a:r>
-            <a:r>
-              <a:rPr sz="800" b="0">
-                <a:solidFill>
-                  <a:srgbClr val="1B4D69"/>
-                </a:solidFill>
-                <a:latin typeface="Microsoft YaHei"/>
-                <a:ea typeface="Microsoft YaHei"/>
-                <a:cs typeface="Microsoft YaHei"/>
-              </a:rPr>
-              <a:t>　UUID + 请求 SHA 校验　·　单条消息 ≤ 28 KB</a:t>
-            </a:r>
-          </a:p>
-        </p:txBody>
-      </p:sp>
-      <p:sp>
-        <p:nvSpPr>
-          <p:cNvPr id="42" name="TextBox 41"/>
-          <p:cNvSpPr txBox="1"/>
-          <p:nvPr/>
-        </p:nvSpPr>
-        <p:spPr>
-          <a:xfrm>
-            <a:off x="3981297" y="4361688"/>
-            <a:ext cx="3833164" cy="164592"/>
-          </a:xfrm>
-          <a:prstGeom prst="rect">
-            <a:avLst/>
-          </a:prstGeom>
-          <a:noFill/>
-        </p:spPr>
-        <p:txBody>
-          <a:bodyPr wrap="square" anchor="ctr" lIns="0" tIns="0" rIns="0" bIns="0">
-            <a:noAutofit/>
-          </a:bodyPr>
-          <a:lstStyle/>
-          <a:p>
-            <a:pPr algn="l" latinLnBrk="0">
-              <a:lnSpc>
-                <a:spcPct val="100000"/>
-              </a:lnSpc>
-              <a:spcBef>
-                <a:spcPts val="0"/>
-              </a:spcBef>
-              <a:spcAft>
-                <a:spcPts val="0"/>
-              </a:spcAft>
-            </a:pPr>
-            <a:r>
-              <a:rPr sz="800" b="1">
-                <a:solidFill>
-                  <a:srgbClr val="0A2B45"/>
-                </a:solidFill>
-                <a:latin typeface="Consolas"/>
-                <a:ea typeface="Microsoft YaHei"/>
-                <a:cs typeface="Microsoft YaHei"/>
-              </a:rPr>
-              <a:t>memory</a:t>
-            </a:r>
-            <a:r>
-              <a:rPr sz="800" b="0">
-                <a:solidFill>
-                  <a:srgbClr val="1B4D69"/>
-                </a:solidFill>
-                <a:latin typeface="Microsoft YaHei"/>
-                <a:ea typeface="Microsoft YaHei"/>
-                <a:cs typeface="Microsoft YaHei"/>
-              </a:rPr>
-              <a:t>　滚动压缩：提案摘要 + 修改指纹 + 拒绝原因</a:t>
-            </a:r>
-          </a:p>
-        </p:txBody>
-      </p:sp>
-      <p:sp>
-        <p:nvSpPr>
-          <p:cNvPr id="43" name="Rounded Rectangle 42"/>
-          <p:cNvSpPr/>
-          <p:nvPr/>
-        </p:nvSpPr>
-        <p:spPr>
-          <a:xfrm>
-            <a:off x="3834993" y="4791456"/>
-            <a:ext cx="4125772" cy="713232"/>
-          </a:xfrm>
-          <a:prstGeom prst="roundRect">
-            <a:avLst>
-              <a:gd name="adj" fmla="val 10256"/>
-            </a:avLst>
-          </a:prstGeom>
-          <a:solidFill>
-            <a:srgbClr val="FBE6D4"/>
-          </a:solidFill>
-          <a:ln w="9525">
-            <a:solidFill>
-              <a:srgbClr val="D2690C"/>
-            </a:solidFill>
-          </a:ln>
-        </p:spPr>
-        <p:txBody>
-          <a:bodyPr rtlCol="0" anchor="ctr"/>
-          <a:lstStyle/>
-          <a:p>
-            <a:pPr algn="ctr"/>
-          </a:p>
-        </p:txBody>
-      </p:sp>
-      <p:sp>
-        <p:nvSpPr>
-          <p:cNvPr id="44" name="TextBox 43"/>
-          <p:cNvSpPr txBox="1"/>
-          <p:nvPr/>
-        </p:nvSpPr>
-        <p:spPr>
-          <a:xfrm>
-            <a:off x="3981297" y="4837176"/>
-            <a:ext cx="2260396" cy="237744"/>
-          </a:xfrm>
-          <a:prstGeom prst="rect">
-            <a:avLst/>
-          </a:prstGeom>
-          <a:noFill/>
-        </p:spPr>
-        <p:txBody>
-          <a:bodyPr wrap="square" anchor="ctr" lIns="0" tIns="0" rIns="0" bIns="0">
-            <a:noAutofit/>
-          </a:bodyPr>
-          <a:lstStyle/>
-          <a:p>
-            <a:pPr algn="l" latinLnBrk="0">
-              <a:lnSpc>
-                <a:spcPct val="100000"/>
-              </a:lnSpc>
-              <a:spcBef>
-                <a:spcPts val="0"/>
-              </a:spcBef>
-              <a:spcAft>
-                <a:spcPts val="0"/>
-              </a:spcAft>
-            </a:pPr>
-            <a:r>
-              <a:rPr sz="1150" b="1">
-                <a:solidFill>
-                  <a:srgbClr val="0A2B45"/>
-                </a:solidFill>
-                <a:latin typeface="Microsoft YaHei"/>
-                <a:ea typeface="Microsoft YaHei"/>
-                <a:cs typeface="Microsoft YaHei"/>
-              </a:rPr>
-              <a:t>规划器</a:t>
-            </a:r>
-            <a:r>
-              <a:rPr sz="850" b="1">
-                <a:solidFill>
-                  <a:srgbClr val="C2570A"/>
-                </a:solidFill>
-                <a:latin typeface="Consolas"/>
-                <a:ea typeface="Microsoft YaHei"/>
-                <a:cs typeface="Microsoft YaHei"/>
-              </a:rPr>
-              <a:t>　Codex 外部托管会话</a:t>
-            </a:r>
-          </a:p>
-        </p:txBody>
-      </p:sp>
-      <p:sp>
-        <p:nvSpPr>
-          <p:cNvPr id="45" name="Rounded Rectangle 44"/>
-          <p:cNvSpPr/>
-          <p:nvPr/>
-        </p:nvSpPr>
-        <p:spPr>
-          <a:xfrm>
-            <a:off x="6314846" y="4864608"/>
-            <a:ext cx="1499616" cy="201168"/>
-          </a:xfrm>
-          <a:prstGeom prst="roundRect">
-            <a:avLst>
-              <a:gd name="adj" fmla="val 50000"/>
-            </a:avLst>
-          </a:prstGeom>
-          <a:solidFill>
-            <a:srgbClr val="D2690C"/>
-          </a:solidFill>
-          <a:ln>
-            <a:noFill/>
-          </a:ln>
-        </p:spPr>
-        <p:txBody>
-          <a:bodyPr rtlCol="0" anchor="ctr" wrap="square" lIns="36576" tIns="0" rIns="36576" bIns="0">
-            <a:noAutofit/>
-          </a:bodyPr>
-          <a:lstStyle/>
-          <a:p>
-            <a:pPr algn="ctr" latinLnBrk="0">
-              <a:lnSpc>
-                <a:spcPct val="100000"/>
-              </a:lnSpc>
-              <a:spcBef>
-                <a:spcPts val="0"/>
-              </a:spcBef>
-              <a:spcAft>
-                <a:spcPts val="0"/>
-              </a:spcAft>
-            </a:pPr>
-            <a:r>
-              <a:rPr sz="750" b="1">
-                <a:solidFill>
-                  <a:srgbClr val="FFFFFF"/>
-                </a:solidFill>
-                <a:latin typeface="Microsoft YaHei"/>
-                <a:ea typeface="Microsoft YaHei"/>
-                <a:cs typeface="Microsoft YaHei"/>
-              </a:rPr>
-              <a:t>硬约束：不能自行宣告成功</a:t>
-            </a:r>
-          </a:p>
-        </p:txBody>
-      </p:sp>
-      <p:sp>
-        <p:nvSpPr>
-          <p:cNvPr id="46" name="TextBox 45"/>
-          <p:cNvSpPr txBox="1"/>
-          <p:nvPr/>
-        </p:nvSpPr>
-        <p:spPr>
-          <a:xfrm>
-            <a:off x="3981297" y="5102352"/>
-            <a:ext cx="3833164" cy="347472"/>
-          </a:xfrm>
-          <a:prstGeom prst="rect">
-            <a:avLst/>
-          </a:prstGeom>
-          <a:noFill/>
-        </p:spPr>
-        <p:txBody>
-          <a:bodyPr wrap="square" anchor="ctr" lIns="0" tIns="0" rIns="0" bIns="0">
-            <a:noAutofit/>
-          </a:bodyPr>
-          <a:lstStyle/>
-          <a:p>
-            <a:pPr algn="l" latinLnBrk="0">
-              <a:lnSpc>
-                <a:spcPct val="100000"/>
-              </a:lnSpc>
-              <a:spcBef>
-                <a:spcPts val="0"/>
-              </a:spcBef>
-              <a:spcAft>
-                <a:spcPts val="0"/>
-              </a:spcAft>
-            </a:pPr>
-            <a:r>
-              <a:rPr sz="850" b="0">
-                <a:solidFill>
-                  <a:srgbClr val="1B4D69"/>
-                </a:solidFill>
-                <a:latin typeface="Microsoft YaHei"/>
-                <a:ea typeface="Microsoft YaHei"/>
-                <a:cs typeface="Microsoft YaHei"/>
-              </a:rPr>
-              <a:t>读源码与冻结证据，提假设写补丁</a:t>
-            </a:r>
-          </a:p>
-          <a:p>
-            <a:pPr algn="l" latinLnBrk="0">
-              <a:lnSpc>
-                <a:spcPct val="100000"/>
-              </a:lnSpc>
-              <a:spcBef>
-                <a:spcPts val="0"/>
-              </a:spcBef>
-              <a:spcAft>
-                <a:spcPts val="0"/>
-              </a:spcAft>
-            </a:pPr>
-            <a:r>
-              <a:rPr sz="850" b="0">
-                <a:solidFill>
-                  <a:srgbClr val="1B4D69"/>
-                </a:solidFill>
-                <a:latin typeface="Microsoft YaHei"/>
-                <a:ea typeface="Microsoft YaHei"/>
-                <a:cs typeface="Microsoft YaHei"/>
-              </a:rPr>
-              <a:t>动作受限：read / search / probe / patch</a:t>
-            </a:r>
-          </a:p>
-        </p:txBody>
-      </p:sp>
-      <p:cxnSp>
-        <p:nvCxnSpPr>
-          <p:cNvPr id="47" name="Connector 46"/>
-          <p:cNvCxnSpPr/>
-          <p:nvPr/>
-        </p:nvCxnSpPr>
-        <p:spPr>
-          <a:xfrm>
-            <a:off x="4562855" y="3749039"/>
-            <a:ext cx="0" cy="182881"/>
-          </a:xfrm>
-          <a:prstGeom prst="line">
-            <a:avLst/>
-          </a:prstGeom>
-          <a:ln w="19050">
-            <a:solidFill>
-              <a:srgbClr val="D2690C"/>
-            </a:solidFill>
-            <a:tailEnd type="triangle" w="med" len="med"/>
-          </a:ln>
-        </p:spPr>
-      </p:cxnSp>
-      <p:cxnSp>
-        <p:nvCxnSpPr>
-          <p:cNvPr id="48" name="Connector 47"/>
-          <p:cNvCxnSpPr/>
-          <p:nvPr/>
-        </p:nvCxnSpPr>
-        <p:spPr>
-          <a:xfrm>
-            <a:off x="4562855" y="4590288"/>
-            <a:ext cx="0" cy="182880"/>
-          </a:xfrm>
-          <a:prstGeom prst="line">
-            <a:avLst/>
-          </a:prstGeom>
-          <a:ln w="19050">
-            <a:solidFill>
-              <a:srgbClr val="D2690C"/>
-            </a:solidFill>
-            <a:tailEnd type="triangle" w="med" len="med"/>
-          </a:ln>
-        </p:spPr>
-      </p:cxnSp>
-      <p:cxnSp>
-        <p:nvCxnSpPr>
-          <p:cNvPr id="49" name="Connector 48"/>
-          <p:cNvCxnSpPr/>
-          <p:nvPr/>
-        </p:nvCxnSpPr>
-        <p:spPr>
-          <a:xfrm flipV="1">
-            <a:off x="7232903" y="3712464"/>
-            <a:ext cx="0" cy="256032"/>
-          </a:xfrm>
-          <a:prstGeom prst="line">
-            <a:avLst/>
-          </a:prstGeom>
-          <a:ln w="19050">
-            <a:solidFill>
-              <a:srgbClr val="D2690C"/>
-            </a:solidFill>
-            <a:tailEnd type="triangle" w="med" len="med"/>
-          </a:ln>
-        </p:spPr>
-      </p:cxnSp>
-      <p:cxnSp>
-        <p:nvCxnSpPr>
-          <p:cNvPr id="50" name="Connector 49"/>
-          <p:cNvCxnSpPr/>
-          <p:nvPr/>
-        </p:nvCxnSpPr>
-        <p:spPr>
-          <a:xfrm flipV="1">
-            <a:off x="7232903" y="4553712"/>
-            <a:ext cx="0" cy="256032"/>
-          </a:xfrm>
-          <a:prstGeom prst="line">
-            <a:avLst/>
-          </a:prstGeom>
-          <a:ln w="19050">
-            <a:solidFill>
-              <a:srgbClr val="D2690C"/>
-            </a:solidFill>
-            <a:tailEnd type="triangle" w="med" len="med"/>
-          </a:ln>
-        </p:spPr>
-      </p:cxnSp>
-      <p:sp>
-        <p:nvSpPr>
-          <p:cNvPr id="51" name="TextBox 50"/>
-          <p:cNvSpPr txBox="1"/>
-          <p:nvPr/>
-        </p:nvSpPr>
-        <p:spPr>
-          <a:xfrm>
-            <a:off x="4626864" y="3749039"/>
-            <a:ext cx="1243584" cy="182880"/>
-          </a:xfrm>
-          <a:prstGeom prst="rect">
-            <a:avLst/>
-          </a:prstGeom>
-          <a:noFill/>
-        </p:spPr>
-        <p:txBody>
-          <a:bodyPr wrap="square" anchor="ctr" lIns="0" tIns="0" rIns="0" bIns="0">
-            <a:noAutofit/>
-          </a:bodyPr>
-          <a:lstStyle/>
-          <a:p>
-            <a:pPr algn="l" latinLnBrk="0">
-              <a:lnSpc>
-                <a:spcPct val="100000"/>
-              </a:lnSpc>
-              <a:spcBef>
-                <a:spcPts val="0"/>
-              </a:spcBef>
-              <a:spcAft>
-                <a:spcPts val="0"/>
-              </a:spcAft>
-            </a:pPr>
-            <a:r>
-              <a:rPr sz="750" b="1">
-                <a:solidFill>
-                  <a:srgbClr val="C2570A"/>
-                </a:solidFill>
-                <a:latin typeface="Microsoft YaHei"/>
-                <a:ea typeface="Microsoft YaHei"/>
-                <a:cs typeface="Microsoft YaHei"/>
-              </a:rPr>
-              <a:t>下发：账本 + 被拒记忆</a:t>
-            </a:r>
-          </a:p>
-        </p:txBody>
-      </p:sp>
-      <p:sp>
-        <p:nvSpPr>
-          <p:cNvPr id="52" name="TextBox 51"/>
-          <p:cNvSpPr txBox="1"/>
-          <p:nvPr/>
-        </p:nvSpPr>
-        <p:spPr>
-          <a:xfrm>
-            <a:off x="5925311" y="3749039"/>
-            <a:ext cx="1243584" cy="182880"/>
-          </a:xfrm>
-          <a:prstGeom prst="rect">
-            <a:avLst/>
-          </a:prstGeom>
-          <a:noFill/>
-        </p:spPr>
-        <p:txBody>
-          <a:bodyPr wrap="square" anchor="ctr" lIns="0" tIns="0" rIns="0" bIns="0">
-            <a:noAutofit/>
-          </a:bodyPr>
-          <a:lstStyle/>
-          <a:p>
-            <a:pPr algn="r" latinLnBrk="0">
-              <a:lnSpc>
-                <a:spcPct val="100000"/>
-              </a:lnSpc>
-              <a:spcBef>
-                <a:spcPts val="0"/>
-              </a:spcBef>
-              <a:spcAft>
-                <a:spcPts val="0"/>
-              </a:spcAft>
-            </a:pPr>
-            <a:r>
-              <a:rPr sz="750" b="1">
-                <a:solidFill>
-                  <a:srgbClr val="C2570A"/>
-                </a:solidFill>
-                <a:latin typeface="Microsoft YaHei"/>
-                <a:ea typeface="Microsoft YaHei"/>
-                <a:cs typeface="Microsoft YaHei"/>
-              </a:rPr>
-              <a:t>提交：假设 + 补丁</a:t>
-            </a:r>
-          </a:p>
-        </p:txBody>
-      </p:sp>
-      <p:cxnSp>
-        <p:nvCxnSpPr>
-          <p:cNvPr id="53" name="Connector 52"/>
-          <p:cNvCxnSpPr/>
-          <p:nvPr/>
-        </p:nvCxnSpPr>
-        <p:spPr>
-          <a:xfrm>
-            <a:off x="2962656" y="2130552"/>
-            <a:ext cx="835761" cy="0"/>
-          </a:xfrm>
-          <a:prstGeom prst="line">
-            <a:avLst/>
-          </a:prstGeom>
-          <a:ln w="19050">
-            <a:solidFill>
-              <a:srgbClr val="40708B"/>
-            </a:solidFill>
-            <a:tailEnd type="triangle" w="med" len="med"/>
-          </a:ln>
-        </p:spPr>
-      </p:cxnSp>
-      <p:cxnSp>
-        <p:nvCxnSpPr>
-          <p:cNvPr id="54" name="Connector 53"/>
-          <p:cNvCxnSpPr/>
-          <p:nvPr/>
-        </p:nvCxnSpPr>
-        <p:spPr>
-          <a:xfrm flipH="1">
-            <a:off x="2962656" y="3429000"/>
-            <a:ext cx="835761" cy="0"/>
-          </a:xfrm>
-          <a:prstGeom prst="line">
-            <a:avLst/>
-          </a:prstGeom>
-          <a:ln w="19050">
-            <a:solidFill>
-              <a:srgbClr val="40708B"/>
-            </a:solidFill>
-            <a:tailEnd type="triangle" w="med" len="med"/>
-          </a:ln>
-        </p:spPr>
-      </p:cxnSp>
-      <p:cxnSp>
-        <p:nvCxnSpPr>
-          <p:cNvPr id="55" name="Connector 54"/>
-          <p:cNvCxnSpPr/>
-          <p:nvPr/>
-        </p:nvCxnSpPr>
-        <p:spPr>
-          <a:xfrm>
-            <a:off x="2962656" y="5148072"/>
-            <a:ext cx="835761" cy="0"/>
-          </a:xfrm>
-          <a:prstGeom prst="line">
-            <a:avLst/>
-          </a:prstGeom>
-          <a:ln w="19050">
-            <a:solidFill>
-              <a:srgbClr val="D2690C"/>
-            </a:solidFill>
-            <a:headEnd type="triangle" w="med" len="med"/>
-            <a:tailEnd type="triangle" w="med" len="med"/>
-          </a:ln>
-        </p:spPr>
-      </p:cxnSp>
-      <p:sp>
-        <p:nvSpPr>
-          <p:cNvPr id="56" name="Rounded Rectangle 55"/>
-          <p:cNvSpPr/>
-          <p:nvPr/>
-        </p:nvSpPr>
-        <p:spPr>
-          <a:xfrm>
-            <a:off x="2958084" y="1874520"/>
-            <a:ext cx="713232" cy="201168"/>
-          </a:xfrm>
-          <a:prstGeom prst="roundRect">
-            <a:avLst>
-              <a:gd name="adj" fmla="val 50000"/>
-            </a:avLst>
-          </a:prstGeom>
+            <a:off x="2432304" y="1965960"/>
+            <a:ext cx="118872" cy="146304"/>
+          </a:xfrm>
+          <a:custGeom>
+            <a:avLst/>
+            <a:gdLst/>
+            <a:ahLst/>
+            <a:cxnLst/>
+            <a:rect l="l" t="t" r="r" b="b"/>
+            <a:pathLst>
+              <a:path w="118872" h="146304">
+                <a:moveTo>
+                  <a:pt x="0" y="0"/>
+                </a:moveTo>
+                <a:lnTo>
+                  <a:pt x="77724" y="0"/>
+                </a:lnTo>
+                <a:lnTo>
+                  <a:pt x="118872" y="41147"/>
+                </a:lnTo>
+                <a:lnTo>
+                  <a:pt x="118872" y="146304"/>
+                </a:lnTo>
+                <a:lnTo>
+                  <a:pt x="0" y="146304"/>
+                </a:lnTo>
+                <a:close/>
+              </a:path>
+            </a:pathLst>
+          </a:custGeom>
           <a:solidFill>
             <a:srgbClr val="FFFFFF"/>
           </a:solidFill>
@@ -33121,24 +30583,105 @@
           </a:ln>
         </p:spPr>
         <p:txBody>
-          <a:bodyPr rtlCol="0" anchor="ctr" wrap="square" lIns="18288" tIns="0" rIns="18288" bIns="0">
-            <a:noAutofit/>
-          </a:bodyPr>
-          <a:lstStyle/>
-          <a:p>
-            <a:pPr algn="ctr" latinLnBrk="0">
-              <a:lnSpc>
-                <a:spcPct val="100000"/>
-              </a:lnSpc>
-              <a:spcBef>
-                <a:spcPts val="0"/>
-              </a:spcBef>
-              <a:spcAft>
-                <a:spcPts val="0"/>
-              </a:spcAft>
-            </a:pPr>
-            <a:r>
-              <a:rPr sz="750" b="1">
+          <a:bodyPr rtlCol="0" anchor="ctr"/>
+          <a:lstStyle/>
+          <a:p>
+            <a:pPr algn="ctr"/>
+          </a:p>
+        </p:txBody>
+      </p:sp>
+      <p:sp>
+        <p:nvSpPr>
+          <p:cNvPr id="15" name="Freeform 14"/>
+          <p:cNvSpPr/>
+          <p:nvPr/>
+        </p:nvSpPr>
+        <p:spPr>
+          <a:xfrm>
+            <a:off x="2510028" y="1965960"/>
+            <a:ext cx="41148" cy="41147"/>
+          </a:xfrm>
+          <a:custGeom>
+            <a:avLst/>
+            <a:gdLst/>
+            <a:ahLst/>
+            <a:cxnLst/>
+            <a:rect l="l" t="t" r="r" b="b"/>
+            <a:pathLst>
+              <a:path w="41148" h="41147">
+                <a:moveTo>
+                  <a:pt x="0" y="0"/>
+                </a:moveTo>
+                <a:lnTo>
+                  <a:pt x="0" y="41147"/>
+                </a:lnTo>
+                <a:lnTo>
+                  <a:pt x="41148" y="41147"/>
+                </a:lnTo>
+              </a:path>
+            </a:pathLst>
+          </a:custGeom>
+          <a:noFill/>
+          <a:ln w="9525">
+            <a:solidFill>
+              <a:srgbClr val="40708B"/>
+            </a:solidFill>
+          </a:ln>
+        </p:spPr>
+        <p:txBody>
+          <a:bodyPr rtlCol="0" anchor="ctr"/>
+          <a:lstStyle/>
+          <a:p>
+            <a:pPr algn="ctr"/>
+          </a:p>
+        </p:txBody>
+      </p:sp>
+      <p:sp>
+        <p:nvSpPr>
+          <p:cNvPr id="16" name="TextBox 15"/>
+          <p:cNvSpPr txBox="1"/>
+          <p:nvPr/>
+        </p:nvSpPr>
+        <p:spPr>
+          <a:xfrm>
+            <a:off x="731520" y="1938528"/>
+            <a:ext cx="1645919" cy="256032"/>
+          </a:xfrm>
+          <a:prstGeom prst="rect">
+            <a:avLst/>
+          </a:prstGeom>
+          <a:noFill/>
+        </p:spPr>
+        <p:txBody>
+          <a:bodyPr wrap="square" anchor="ctr" lIns="0" tIns="0" rIns="0" bIns="0">
+            <a:noAutofit/>
+          </a:bodyPr>
+          <a:lstStyle/>
+          <a:p>
+            <a:pPr algn="l" latinLnBrk="0">
+              <a:lnSpc>
+                <a:spcPct val="100000"/>
+              </a:lnSpc>
+              <a:spcBef>
+                <a:spcPts val="0"/>
+              </a:spcBef>
+              <a:spcAft>
+                <a:spcPts val="0"/>
+              </a:spcAft>
+            </a:pPr>
+            <a:r>
+              <a:rPr sz="1050" b="1">
+                <a:solidFill>
+                  <a:srgbClr val="0A2B45"/>
+                </a:solidFill>
+                <a:latin typeface="Microsoft YaHei"/>
+                <a:ea typeface="Microsoft YaHei"/>
+                <a:cs typeface="Microsoft YaHei"/>
+              </a:rPr>
+              <a:t>冻结契约</a:t>
+            </a:r>
+            <a:r>
+              <a:rPr sz="800" b="1">
                 <a:solidFill>
                   <a:srgbClr val="40708B"/>
                 </a:solidFill>
@@ -33146,27 +30689,485 @@
                 <a:ea typeface="Microsoft YaHei"/>
                 <a:cs typeface="Microsoft YaHei"/>
               </a:rPr>
-              <a:t>契约 · 授权</a:t>
-            </a:r>
-          </a:p>
-        </p:txBody>
-      </p:sp>
-      <p:sp>
-        <p:nvSpPr>
-          <p:cNvPr id="57" name="Rounded Rectangle 56"/>
+              <a:t>　人 → Agent</a:t>
+            </a:r>
+          </a:p>
+        </p:txBody>
+      </p:sp>
+      <p:sp>
+        <p:nvSpPr>
+          <p:cNvPr id="17" name="TextBox 16"/>
+          <p:cNvSpPr txBox="1"/>
+          <p:nvPr/>
+        </p:nvSpPr>
+        <p:spPr>
+          <a:xfrm>
+            <a:off x="731520" y="2221992"/>
+            <a:ext cx="566928" cy="187452"/>
+          </a:xfrm>
+          <a:prstGeom prst="rect">
+            <a:avLst/>
+          </a:prstGeom>
+          <a:noFill/>
+        </p:spPr>
+        <p:txBody>
+          <a:bodyPr wrap="square" anchor="ctr" lIns="0" tIns="0" rIns="0" bIns="0">
+            <a:noAutofit/>
+          </a:bodyPr>
+          <a:lstStyle/>
+          <a:p>
+            <a:pPr algn="l" latinLnBrk="0">
+              <a:lnSpc>
+                <a:spcPct val="100000"/>
+              </a:lnSpc>
+              <a:spcBef>
+                <a:spcPts val="0"/>
+              </a:spcBef>
+              <a:spcAft>
+                <a:spcPts val="0"/>
+              </a:spcAft>
+            </a:pPr>
+            <a:r>
+              <a:rPr sz="800" b="1">
+                <a:solidFill>
+                  <a:srgbClr val="123C5B"/>
+                </a:solidFill>
+                <a:latin typeface="Microsoft YaHei"/>
+                <a:ea typeface="Microsoft YaHei"/>
+                <a:cs typeface="Microsoft YaHei"/>
+              </a:rPr>
+              <a:t>优化任务</a:t>
+            </a:r>
+          </a:p>
+        </p:txBody>
+      </p:sp>
+      <p:sp>
+        <p:nvSpPr>
+          <p:cNvPr id="18" name="TextBox 17"/>
+          <p:cNvSpPr txBox="1"/>
+          <p:nvPr/>
+        </p:nvSpPr>
+        <p:spPr>
+          <a:xfrm>
+            <a:off x="1316736" y="2221992"/>
+            <a:ext cx="1243584" cy="187452"/>
+          </a:xfrm>
+          <a:prstGeom prst="rect">
+            <a:avLst/>
+          </a:prstGeom>
+          <a:noFill/>
+        </p:spPr>
+        <p:txBody>
+          <a:bodyPr wrap="square" anchor="ctr" lIns="0" tIns="0" rIns="0" bIns="0">
+            <a:noAutofit/>
+          </a:bodyPr>
+          <a:lstStyle/>
+          <a:p>
+            <a:pPr algn="l" latinLnBrk="0">
+              <a:lnSpc>
+                <a:spcPct val="100000"/>
+              </a:lnSpc>
+              <a:spcBef>
+                <a:spcPts val="0"/>
+              </a:spcBef>
+              <a:spcAft>
+                <a:spcPts val="0"/>
+              </a:spcAft>
+            </a:pPr>
+            <a:r>
+              <a:rPr sz="700" b="0">
+                <a:solidFill>
+                  <a:srgbClr val="0F62CE"/>
+                </a:solidFill>
+                <a:latin typeface="Consolas"/>
+                <a:ea typeface="Microsoft YaHei"/>
+                <a:cs typeface="Microsoft YaHei"/>
+              </a:rPr>
+              <a:t>optimization-task.json</a:t>
+            </a:r>
+          </a:p>
+        </p:txBody>
+      </p:sp>
+      <p:sp>
+        <p:nvSpPr>
+          <p:cNvPr id="19" name="TextBox 18"/>
+          <p:cNvSpPr txBox="1"/>
+          <p:nvPr/>
+        </p:nvSpPr>
+        <p:spPr>
+          <a:xfrm>
+            <a:off x="731520" y="2409444"/>
+            <a:ext cx="566928" cy="187452"/>
+          </a:xfrm>
+          <a:prstGeom prst="rect">
+            <a:avLst/>
+          </a:prstGeom>
+          <a:noFill/>
+        </p:spPr>
+        <p:txBody>
+          <a:bodyPr wrap="square" anchor="ctr" lIns="0" tIns="0" rIns="0" bIns="0">
+            <a:noAutofit/>
+          </a:bodyPr>
+          <a:lstStyle/>
+          <a:p>
+            <a:pPr algn="l" latinLnBrk="0">
+              <a:lnSpc>
+                <a:spcPct val="100000"/>
+              </a:lnSpc>
+              <a:spcBef>
+                <a:spcPts val="0"/>
+              </a:spcBef>
+              <a:spcAft>
+                <a:spcPts val="0"/>
+              </a:spcAft>
+            </a:pPr>
+            <a:r>
+              <a:rPr sz="800" b="1">
+                <a:solidFill>
+                  <a:srgbClr val="123C5B"/>
+                </a:solidFill>
+                <a:latin typeface="Microsoft YaHei"/>
+                <a:ea typeface="Microsoft YaHei"/>
+                <a:cs typeface="Microsoft YaHei"/>
+              </a:rPr>
+              <a:t>质量契约</a:t>
+            </a:r>
+          </a:p>
+        </p:txBody>
+      </p:sp>
+      <p:sp>
+        <p:nvSpPr>
+          <p:cNvPr id="20" name="TextBox 19"/>
+          <p:cNvSpPr txBox="1"/>
+          <p:nvPr/>
+        </p:nvSpPr>
+        <p:spPr>
+          <a:xfrm>
+            <a:off x="1316736" y="2409444"/>
+            <a:ext cx="1243584" cy="187452"/>
+          </a:xfrm>
+          <a:prstGeom prst="rect">
+            <a:avLst/>
+          </a:prstGeom>
+          <a:noFill/>
+        </p:spPr>
+        <p:txBody>
+          <a:bodyPr wrap="square" anchor="ctr" lIns="0" tIns="0" rIns="0" bIns="0">
+            <a:noAutofit/>
+          </a:bodyPr>
+          <a:lstStyle/>
+          <a:p>
+            <a:pPr algn="l" latinLnBrk="0">
+              <a:lnSpc>
+                <a:spcPct val="100000"/>
+              </a:lnSpc>
+              <a:spcBef>
+                <a:spcPts val="0"/>
+              </a:spcBef>
+              <a:spcAft>
+                <a:spcPts val="0"/>
+              </a:spcAft>
+            </a:pPr>
+            <a:r>
+              <a:rPr sz="700" b="0">
+                <a:solidFill>
+                  <a:srgbClr val="0F62CE"/>
+                </a:solidFill>
+                <a:latin typeface="Consolas"/>
+                <a:ea typeface="Microsoft YaHei"/>
+                <a:cs typeface="Microsoft YaHei"/>
+              </a:rPr>
+              <a:t>generation-task.json</a:t>
+            </a:r>
+          </a:p>
+        </p:txBody>
+      </p:sp>
+      <p:sp>
+        <p:nvSpPr>
+          <p:cNvPr id="21" name="TextBox 20"/>
+          <p:cNvSpPr txBox="1"/>
+          <p:nvPr/>
+        </p:nvSpPr>
+        <p:spPr>
+          <a:xfrm>
+            <a:off x="731520" y="2596896"/>
+            <a:ext cx="566928" cy="187452"/>
+          </a:xfrm>
+          <a:prstGeom prst="rect">
+            <a:avLst/>
+          </a:prstGeom>
+          <a:noFill/>
+        </p:spPr>
+        <p:txBody>
+          <a:bodyPr wrap="square" anchor="ctr" lIns="0" tIns="0" rIns="0" bIns="0">
+            <a:noAutofit/>
+          </a:bodyPr>
+          <a:lstStyle/>
+          <a:p>
+            <a:pPr algn="l" latinLnBrk="0">
+              <a:lnSpc>
+                <a:spcPct val="100000"/>
+              </a:lnSpc>
+              <a:spcBef>
+                <a:spcPts val="0"/>
+              </a:spcBef>
+              <a:spcAft>
+                <a:spcPts val="0"/>
+              </a:spcAft>
+            </a:pPr>
+            <a:r>
+              <a:rPr sz="800" b="1">
+                <a:solidFill>
+                  <a:srgbClr val="123C5B"/>
+                </a:solidFill>
+                <a:latin typeface="Microsoft YaHei"/>
+                <a:ea typeface="Microsoft YaHei"/>
+                <a:cs typeface="Microsoft YaHei"/>
+              </a:rPr>
+              <a:t>调优知识</a:t>
+            </a:r>
+          </a:p>
+        </p:txBody>
+      </p:sp>
+      <p:sp>
+        <p:nvSpPr>
+          <p:cNvPr id="22" name="TextBox 21"/>
+          <p:cNvSpPr txBox="1"/>
+          <p:nvPr/>
+        </p:nvSpPr>
+        <p:spPr>
+          <a:xfrm>
+            <a:off x="1316736" y="2596896"/>
+            <a:ext cx="1243584" cy="187452"/>
+          </a:xfrm>
+          <a:prstGeom prst="rect">
+            <a:avLst/>
+          </a:prstGeom>
+          <a:noFill/>
+        </p:spPr>
+        <p:txBody>
+          <a:bodyPr wrap="square" anchor="ctr" lIns="0" tIns="0" rIns="0" bIns="0">
+            <a:noAutofit/>
+          </a:bodyPr>
+          <a:lstStyle/>
+          <a:p>
+            <a:pPr algn="l" latinLnBrk="0">
+              <a:lnSpc>
+                <a:spcPct val="100000"/>
+              </a:lnSpc>
+              <a:spcBef>
+                <a:spcPts val="0"/>
+              </a:spcBef>
+              <a:spcAft>
+                <a:spcPts val="0"/>
+              </a:spcAft>
+            </a:pPr>
+            <a:r>
+              <a:rPr sz="700" b="0">
+                <a:solidFill>
+                  <a:srgbClr val="0F62CE"/>
+                </a:solidFill>
+                <a:latin typeface="Consolas"/>
+                <a:ea typeface="Microsoft YaHei"/>
+                <a:cs typeface="Microsoft YaHei"/>
+              </a:rPr>
+              <a:t>planner-skills/ × 10</a:t>
+            </a:r>
+          </a:p>
+        </p:txBody>
+      </p:sp>
+      <p:sp>
+        <p:nvSpPr>
+          <p:cNvPr id="23" name="TextBox 22"/>
+          <p:cNvSpPr txBox="1"/>
+          <p:nvPr/>
+        </p:nvSpPr>
+        <p:spPr>
+          <a:xfrm>
+            <a:off x="731520" y="2784348"/>
+            <a:ext cx="566928" cy="187452"/>
+          </a:xfrm>
+          <a:prstGeom prst="rect">
+            <a:avLst/>
+          </a:prstGeom>
+          <a:noFill/>
+        </p:spPr>
+        <p:txBody>
+          <a:bodyPr wrap="square" anchor="ctr" lIns="0" tIns="0" rIns="0" bIns="0">
+            <a:noAutofit/>
+          </a:bodyPr>
+          <a:lstStyle/>
+          <a:p>
+            <a:pPr algn="l" latinLnBrk="0">
+              <a:lnSpc>
+                <a:spcPct val="100000"/>
+              </a:lnSpc>
+              <a:spcBef>
+                <a:spcPts val="0"/>
+              </a:spcBef>
+              <a:spcAft>
+                <a:spcPts val="0"/>
+              </a:spcAft>
+            </a:pPr>
+            <a:r>
+              <a:rPr sz="800" b="1">
+                <a:solidFill>
+                  <a:srgbClr val="123C5B"/>
+                </a:solidFill>
+                <a:latin typeface="Microsoft YaHei"/>
+                <a:ea typeface="Microsoft YaHei"/>
+                <a:cs typeface="Microsoft YaHei"/>
+              </a:rPr>
+              <a:t>授权边界</a:t>
+            </a:r>
+          </a:p>
+        </p:txBody>
+      </p:sp>
+      <p:sp>
+        <p:nvSpPr>
+          <p:cNvPr id="24" name="TextBox 23"/>
+          <p:cNvSpPr txBox="1"/>
+          <p:nvPr/>
+        </p:nvSpPr>
+        <p:spPr>
+          <a:xfrm>
+            <a:off x="1316736" y="2784348"/>
+            <a:ext cx="1243584" cy="187452"/>
+          </a:xfrm>
+          <a:prstGeom prst="rect">
+            <a:avLst/>
+          </a:prstGeom>
+          <a:noFill/>
+        </p:spPr>
+        <p:txBody>
+          <a:bodyPr wrap="square" anchor="ctr" lIns="0" tIns="0" rIns="0" bIns="0">
+            <a:noAutofit/>
+          </a:bodyPr>
+          <a:lstStyle/>
+          <a:p>
+            <a:pPr algn="l" latinLnBrk="0">
+              <a:lnSpc>
+                <a:spcPct val="100000"/>
+              </a:lnSpc>
+              <a:spcBef>
+                <a:spcPts val="0"/>
+              </a:spcBef>
+              <a:spcAft>
+                <a:spcPts val="0"/>
+              </a:spcAft>
+            </a:pPr>
+            <a:r>
+              <a:rPr sz="800" b="0">
+                <a:solidFill>
+                  <a:srgbClr val="1B4D69"/>
+                </a:solidFill>
+                <a:latin typeface="Microsoft YaHei"/>
+                <a:ea typeface="Microsoft YaHei"/>
+                <a:cs typeface="Microsoft YaHei"/>
+              </a:rPr>
+              <a:t>测试范围 · 可跳过项</a:t>
+            </a:r>
+          </a:p>
+        </p:txBody>
+      </p:sp>
+      <p:sp>
+        <p:nvSpPr>
+          <p:cNvPr id="25" name="Rectangle 24"/>
           <p:cNvSpPr/>
           <p:nvPr/>
         </p:nvSpPr>
         <p:spPr>
           <a:xfrm>
-            <a:off x="2958084" y="3172968"/>
-            <a:ext cx="713232" cy="201168"/>
-          </a:xfrm>
-          <a:prstGeom prst="roundRect">
-            <a:avLst>
-              <a:gd name="adj" fmla="val 50000"/>
-            </a:avLst>
-          </a:prstGeom>
+            <a:off x="548640" y="3108960"/>
+            <a:ext cx="2103120" cy="1133856"/>
+          </a:xfrm>
+          <a:prstGeom prst="rect">
+            <a:avLst/>
+          </a:prstGeom>
+          <a:solidFill>
+            <a:srgbClr val="FFFFFF"/>
+          </a:solidFill>
+          <a:ln w="9525">
+            <a:solidFill>
+              <a:srgbClr val="AFCEE1"/>
+            </a:solidFill>
+          </a:ln>
+        </p:spPr>
+        <p:txBody>
+          <a:bodyPr rtlCol="0" anchor="ctr"/>
+          <a:lstStyle/>
+          <a:p>
+            <a:pPr algn="ctr"/>
+          </a:p>
+        </p:txBody>
+      </p:sp>
+      <p:sp>
+        <p:nvSpPr>
+          <p:cNvPr id="26" name="Rectangle 25"/>
+          <p:cNvSpPr/>
+          <p:nvPr/>
+        </p:nvSpPr>
+        <p:spPr>
+          <a:xfrm>
+            <a:off x="548640" y="3108960"/>
+            <a:ext cx="54864" cy="1133856"/>
+          </a:xfrm>
+          <a:prstGeom prst="rect">
+            <a:avLst/>
+          </a:prstGeom>
+          <a:solidFill>
+            <a:srgbClr val="40708B"/>
+          </a:solidFill>
+          <a:ln>
+            <a:noFill/>
+          </a:ln>
+        </p:spPr>
+        <p:txBody>
+          <a:bodyPr rtlCol="0" anchor="ctr"/>
+          <a:lstStyle/>
+          <a:p>
+            <a:pPr algn="ctr"/>
+          </a:p>
+        </p:txBody>
+      </p:sp>
+      <p:sp>
+        <p:nvSpPr>
+          <p:cNvPr id="27" name="Freeform 26"/>
+          <p:cNvSpPr/>
+          <p:nvPr/>
+        </p:nvSpPr>
+        <p:spPr>
+          <a:xfrm>
+            <a:off x="2432304" y="3191256"/>
+            <a:ext cx="118872" cy="146304"/>
+          </a:xfrm>
+          <a:custGeom>
+            <a:avLst/>
+            <a:gdLst/>
+            <a:ahLst/>
+            <a:cxnLst/>
+            <a:rect l="l" t="t" r="r" b="b"/>
+            <a:pathLst>
+              <a:path w="118872" h="146304">
+                <a:moveTo>
+                  <a:pt x="0" y="0"/>
+                </a:moveTo>
+                <a:lnTo>
+                  <a:pt x="77724" y="0"/>
+                </a:lnTo>
+                <a:lnTo>
+                  <a:pt x="118872" y="41147"/>
+                </a:lnTo>
+                <a:lnTo>
+                  <a:pt x="118872" y="146304"/>
+                </a:lnTo>
+                <a:lnTo>
+                  <a:pt x="0" y="146304"/>
+                </a:lnTo>
+                <a:close/>
+              </a:path>
+            </a:pathLst>
+          </a:custGeom>
           <a:solidFill>
             <a:srgbClr val="FFFFFF"/>
           </a:solidFill>
@@ -33177,6 +31178,5090 @@
           </a:ln>
         </p:spPr>
         <p:txBody>
+          <a:bodyPr rtlCol="0" anchor="ctr"/>
+          <a:lstStyle/>
+          <a:p>
+            <a:pPr algn="ctr"/>
+          </a:p>
+        </p:txBody>
+      </p:sp>
+      <p:sp>
+        <p:nvSpPr>
+          <p:cNvPr id="28" name="Freeform 27"/>
+          <p:cNvSpPr/>
+          <p:nvPr/>
+        </p:nvSpPr>
+        <p:spPr>
+          <a:xfrm>
+            <a:off x="2510028" y="3191256"/>
+            <a:ext cx="41148" cy="41147"/>
+          </a:xfrm>
+          <a:custGeom>
+            <a:avLst/>
+            <a:gdLst/>
+            <a:ahLst/>
+            <a:cxnLst/>
+            <a:rect l="l" t="t" r="r" b="b"/>
+            <a:pathLst>
+              <a:path w="41148" h="41147">
+                <a:moveTo>
+                  <a:pt x="0" y="0"/>
+                </a:moveTo>
+                <a:lnTo>
+                  <a:pt x="0" y="41147"/>
+                </a:lnTo>
+                <a:lnTo>
+                  <a:pt x="41148" y="41147"/>
+                </a:lnTo>
+              </a:path>
+            </a:pathLst>
+          </a:custGeom>
+          <a:noFill/>
+          <a:ln w="9525">
+            <a:solidFill>
+              <a:srgbClr val="40708B"/>
+            </a:solidFill>
+          </a:ln>
+        </p:spPr>
+        <p:txBody>
+          <a:bodyPr rtlCol="0" anchor="ctr"/>
+          <a:lstStyle/>
+          <a:p>
+            <a:pPr algn="ctr"/>
+          </a:p>
+        </p:txBody>
+      </p:sp>
+      <p:sp>
+        <p:nvSpPr>
+          <p:cNvPr id="29" name="TextBox 28"/>
+          <p:cNvSpPr txBox="1"/>
+          <p:nvPr/>
+        </p:nvSpPr>
+        <p:spPr>
+          <a:xfrm>
+            <a:off x="731520" y="3163824"/>
+            <a:ext cx="1645919" cy="256032"/>
+          </a:xfrm>
+          <a:prstGeom prst="rect">
+            <a:avLst/>
+          </a:prstGeom>
+          <a:noFill/>
+        </p:spPr>
+        <p:txBody>
+          <a:bodyPr wrap="square" anchor="ctr" lIns="0" tIns="0" rIns="0" bIns="0">
+            <a:noAutofit/>
+          </a:bodyPr>
+          <a:lstStyle/>
+          <a:p>
+            <a:pPr algn="l" latinLnBrk="0">
+              <a:lnSpc>
+                <a:spcPct val="100000"/>
+              </a:lnSpc>
+              <a:spcBef>
+                <a:spcPts val="0"/>
+              </a:spcBef>
+              <a:spcAft>
+                <a:spcPts val="0"/>
+              </a:spcAft>
+            </a:pPr>
+            <a:r>
+              <a:rPr sz="1050" b="1">
+                <a:solidFill>
+                  <a:srgbClr val="0A2B45"/>
+                </a:solidFill>
+                <a:latin typeface="Microsoft YaHei"/>
+                <a:ea typeface="Microsoft YaHei"/>
+                <a:cs typeface="Microsoft YaHei"/>
+              </a:rPr>
+              <a:t>判决报告</a:t>
+            </a:r>
+            <a:r>
+              <a:rPr sz="800" b="1">
+                <a:solidFill>
+                  <a:srgbClr val="40708B"/>
+                </a:solidFill>
+                <a:latin typeface="Microsoft YaHei"/>
+                <a:ea typeface="Microsoft YaHei"/>
+                <a:cs typeface="Microsoft YaHei"/>
+              </a:rPr>
+              <a:t>　Agent → 人</a:t>
+            </a:r>
+          </a:p>
+        </p:txBody>
+      </p:sp>
+      <p:sp>
+        <p:nvSpPr>
+          <p:cNvPr id="30" name="TextBox 29"/>
+          <p:cNvSpPr txBox="1"/>
+          <p:nvPr/>
+        </p:nvSpPr>
+        <p:spPr>
+          <a:xfrm>
+            <a:off x="731520" y="3447288"/>
+            <a:ext cx="566928" cy="187452"/>
+          </a:xfrm>
+          <a:prstGeom prst="rect">
+            <a:avLst/>
+          </a:prstGeom>
+          <a:noFill/>
+        </p:spPr>
+        <p:txBody>
+          <a:bodyPr wrap="square" anchor="ctr" lIns="0" tIns="0" rIns="0" bIns="0">
+            <a:noAutofit/>
+          </a:bodyPr>
+          <a:lstStyle/>
+          <a:p>
+            <a:pPr algn="l" latinLnBrk="0">
+              <a:lnSpc>
+                <a:spcPct val="100000"/>
+              </a:lnSpc>
+              <a:spcBef>
+                <a:spcPts val="0"/>
+              </a:spcBef>
+              <a:spcAft>
+                <a:spcPts val="0"/>
+              </a:spcAft>
+            </a:pPr>
+            <a:r>
+              <a:rPr sz="800" b="1">
+                <a:solidFill>
+                  <a:srgbClr val="123C5B"/>
+                </a:solidFill>
+                <a:latin typeface="Microsoft YaHei"/>
+                <a:ea typeface="Microsoft YaHei"/>
+                <a:cs typeface="Microsoft YaHei"/>
+              </a:rPr>
+              <a:t>优化报告</a:t>
+            </a:r>
+          </a:p>
+        </p:txBody>
+      </p:sp>
+      <p:sp>
+        <p:nvSpPr>
+          <p:cNvPr id="31" name="TextBox 30"/>
+          <p:cNvSpPr txBox="1"/>
+          <p:nvPr/>
+        </p:nvSpPr>
+        <p:spPr>
+          <a:xfrm>
+            <a:off x="1316736" y="3447288"/>
+            <a:ext cx="1243584" cy="187452"/>
+          </a:xfrm>
+          <a:prstGeom prst="rect">
+            <a:avLst/>
+          </a:prstGeom>
+          <a:noFill/>
+        </p:spPr>
+        <p:txBody>
+          <a:bodyPr wrap="square" anchor="ctr" lIns="0" tIns="0" rIns="0" bIns="0">
+            <a:noAutofit/>
+          </a:bodyPr>
+          <a:lstStyle/>
+          <a:p>
+            <a:pPr algn="l" latinLnBrk="0">
+              <a:lnSpc>
+                <a:spcPct val="100000"/>
+              </a:lnSpc>
+              <a:spcBef>
+                <a:spcPts val="0"/>
+              </a:spcBef>
+              <a:spcAft>
+                <a:spcPts val="0"/>
+              </a:spcAft>
+            </a:pPr>
+            <a:r>
+              <a:rPr sz="700" b="0">
+                <a:solidFill>
+                  <a:srgbClr val="0F62CE"/>
+                </a:solidFill>
+                <a:latin typeface="Consolas"/>
+                <a:ea typeface="Microsoft YaHei"/>
+                <a:cs typeface="Microsoft YaHei"/>
+              </a:rPr>
+              <a:t>optimization-report.md</a:t>
+            </a:r>
+          </a:p>
+        </p:txBody>
+      </p:sp>
+      <p:sp>
+        <p:nvSpPr>
+          <p:cNvPr id="32" name="TextBox 31"/>
+          <p:cNvSpPr txBox="1"/>
+          <p:nvPr/>
+        </p:nvSpPr>
+        <p:spPr>
+          <a:xfrm>
+            <a:off x="731520" y="3634740"/>
+            <a:ext cx="566928" cy="187452"/>
+          </a:xfrm>
+          <a:prstGeom prst="rect">
+            <a:avLst/>
+          </a:prstGeom>
+          <a:noFill/>
+        </p:spPr>
+        <p:txBody>
+          <a:bodyPr wrap="square" anchor="ctr" lIns="0" tIns="0" rIns="0" bIns="0">
+            <a:noAutofit/>
+          </a:bodyPr>
+          <a:lstStyle/>
+          <a:p>
+            <a:pPr algn="l" latinLnBrk="0">
+              <a:lnSpc>
+                <a:spcPct val="100000"/>
+              </a:lnSpc>
+              <a:spcBef>
+                <a:spcPts val="0"/>
+              </a:spcBef>
+              <a:spcAft>
+                <a:spcPts val="0"/>
+              </a:spcAft>
+            </a:pPr>
+            <a:r>
+              <a:rPr sz="800" b="1">
+                <a:solidFill>
+                  <a:srgbClr val="123C5B"/>
+                </a:solidFill>
+                <a:latin typeface="Microsoft YaHei"/>
+                <a:ea typeface="Microsoft YaHei"/>
+                <a:cs typeface="Microsoft YaHei"/>
+              </a:rPr>
+              <a:t>最优版本</a:t>
+            </a:r>
+          </a:p>
+        </p:txBody>
+      </p:sp>
+      <p:sp>
+        <p:nvSpPr>
+          <p:cNvPr id="33" name="TextBox 32"/>
+          <p:cNvSpPr txBox="1"/>
+          <p:nvPr/>
+        </p:nvSpPr>
+        <p:spPr>
+          <a:xfrm>
+            <a:off x="1316736" y="3634740"/>
+            <a:ext cx="1243584" cy="187452"/>
+          </a:xfrm>
+          <a:prstGeom prst="rect">
+            <a:avLst/>
+          </a:prstGeom>
+          <a:noFill/>
+        </p:spPr>
+        <p:txBody>
+          <a:bodyPr wrap="square" anchor="ctr" lIns="0" tIns="0" rIns="0" bIns="0">
+            <a:noAutofit/>
+          </a:bodyPr>
+          <a:lstStyle/>
+          <a:p>
+            <a:pPr algn="l" latinLnBrk="0">
+              <a:lnSpc>
+                <a:spcPct val="100000"/>
+              </a:lnSpc>
+              <a:spcBef>
+                <a:spcPts val="0"/>
+              </a:spcBef>
+              <a:spcAft>
+                <a:spcPts val="0"/>
+              </a:spcAft>
+            </a:pPr>
+            <a:r>
+              <a:rPr sz="700" b="0">
+                <a:solidFill>
+                  <a:srgbClr val="0F62CE"/>
+                </a:solidFill>
+                <a:latin typeface="Consolas"/>
+                <a:ea typeface="Microsoft YaHei"/>
+                <a:cs typeface="Microsoft YaHei"/>
+              </a:rPr>
+              <a:t>best.json</a:t>
+            </a:r>
+          </a:p>
+        </p:txBody>
+      </p:sp>
+      <p:sp>
+        <p:nvSpPr>
+          <p:cNvPr id="34" name="TextBox 33"/>
+          <p:cNvSpPr txBox="1"/>
+          <p:nvPr/>
+        </p:nvSpPr>
+        <p:spPr>
+          <a:xfrm>
+            <a:off x="731520" y="3822191"/>
+            <a:ext cx="566928" cy="187452"/>
+          </a:xfrm>
+          <a:prstGeom prst="rect">
+            <a:avLst/>
+          </a:prstGeom>
+          <a:noFill/>
+        </p:spPr>
+        <p:txBody>
+          <a:bodyPr wrap="square" anchor="ctr" lIns="0" tIns="0" rIns="0" bIns="0">
+            <a:noAutofit/>
+          </a:bodyPr>
+          <a:lstStyle/>
+          <a:p>
+            <a:pPr algn="l" latinLnBrk="0">
+              <a:lnSpc>
+                <a:spcPct val="100000"/>
+              </a:lnSpc>
+              <a:spcBef>
+                <a:spcPts val="0"/>
+              </a:spcBef>
+              <a:spcAft>
+                <a:spcPts val="0"/>
+              </a:spcAft>
+            </a:pPr>
+            <a:r>
+              <a:rPr sz="800" b="1">
+                <a:solidFill>
+                  <a:srgbClr val="123C5B"/>
+                </a:solidFill>
+                <a:latin typeface="Microsoft YaHei"/>
+                <a:ea typeface="Microsoft YaHei"/>
+                <a:cs typeface="Microsoft YaHei"/>
+              </a:rPr>
+              <a:t>证据链</a:t>
+            </a:r>
+          </a:p>
+        </p:txBody>
+      </p:sp>
+      <p:sp>
+        <p:nvSpPr>
+          <p:cNvPr id="35" name="TextBox 34"/>
+          <p:cNvSpPr txBox="1"/>
+          <p:nvPr/>
+        </p:nvSpPr>
+        <p:spPr>
+          <a:xfrm>
+            <a:off x="1316736" y="3822191"/>
+            <a:ext cx="1243584" cy="187452"/>
+          </a:xfrm>
+          <a:prstGeom prst="rect">
+            <a:avLst/>
+          </a:prstGeom>
+          <a:noFill/>
+        </p:spPr>
+        <p:txBody>
+          <a:bodyPr wrap="square" anchor="ctr" lIns="0" tIns="0" rIns="0" bIns="0">
+            <a:noAutofit/>
+          </a:bodyPr>
+          <a:lstStyle/>
+          <a:p>
+            <a:pPr algn="l" latinLnBrk="0">
+              <a:lnSpc>
+                <a:spcPct val="100000"/>
+              </a:lnSpc>
+              <a:spcBef>
+                <a:spcPts val="0"/>
+              </a:spcBef>
+              <a:spcAft>
+                <a:spcPts val="0"/>
+              </a:spcAft>
+            </a:pPr>
+            <a:r>
+              <a:rPr sz="700" b="0">
+                <a:solidFill>
+                  <a:srgbClr val="0F62CE"/>
+                </a:solidFill>
+                <a:latin typeface="Consolas"/>
+                <a:ea typeface="Microsoft YaHei"/>
+                <a:cs typeface="Microsoft YaHei"/>
+              </a:rPr>
+              <a:t>attempts/ · planner/</a:t>
+            </a:r>
+          </a:p>
+        </p:txBody>
+      </p:sp>
+      <p:sp>
+        <p:nvSpPr>
+          <p:cNvPr id="36" name="TextBox 35"/>
+          <p:cNvSpPr txBox="1"/>
+          <p:nvPr/>
+        </p:nvSpPr>
+        <p:spPr>
+          <a:xfrm>
+            <a:off x="731520" y="4009644"/>
+            <a:ext cx="566928" cy="187452"/>
+          </a:xfrm>
+          <a:prstGeom prst="rect">
+            <a:avLst/>
+          </a:prstGeom>
+          <a:noFill/>
+        </p:spPr>
+        <p:txBody>
+          <a:bodyPr wrap="square" anchor="ctr" lIns="0" tIns="0" rIns="0" bIns="0">
+            <a:noAutofit/>
+          </a:bodyPr>
+          <a:lstStyle/>
+          <a:p>
+            <a:pPr algn="l" latinLnBrk="0">
+              <a:lnSpc>
+                <a:spcPct val="100000"/>
+              </a:lnSpc>
+              <a:spcBef>
+                <a:spcPts val="0"/>
+              </a:spcBef>
+              <a:spcAft>
+                <a:spcPts val="0"/>
+              </a:spcAft>
+            </a:pPr>
+            <a:r>
+              <a:rPr sz="800" b="1">
+                <a:solidFill>
+                  <a:srgbClr val="123C5B"/>
+                </a:solidFill>
+                <a:latin typeface="Microsoft YaHei"/>
+                <a:ea typeface="Microsoft YaHei"/>
+                <a:cs typeface="Microsoft YaHei"/>
+              </a:rPr>
+              <a:t>边界声明</a:t>
+            </a:r>
+          </a:p>
+        </p:txBody>
+      </p:sp>
+      <p:sp>
+        <p:nvSpPr>
+          <p:cNvPr id="37" name="TextBox 36"/>
+          <p:cNvSpPr txBox="1"/>
+          <p:nvPr/>
+        </p:nvSpPr>
+        <p:spPr>
+          <a:xfrm>
+            <a:off x="1316736" y="4009644"/>
+            <a:ext cx="1243584" cy="187452"/>
+          </a:xfrm>
+          <a:prstGeom prst="rect">
+            <a:avLst/>
+          </a:prstGeom>
+          <a:noFill/>
+        </p:spPr>
+        <p:txBody>
+          <a:bodyPr wrap="square" anchor="ctr" lIns="0" tIns="0" rIns="0" bIns="0">
+            <a:noAutofit/>
+          </a:bodyPr>
+          <a:lstStyle/>
+          <a:p>
+            <a:pPr algn="l" latinLnBrk="0">
+              <a:lnSpc>
+                <a:spcPct val="100000"/>
+              </a:lnSpc>
+              <a:spcBef>
+                <a:spcPts val="0"/>
+              </a:spcBef>
+              <a:spcAft>
+                <a:spcPts val="0"/>
+              </a:spcAft>
+            </a:pPr>
+            <a:r>
+              <a:rPr sz="800" b="0">
+                <a:solidFill>
+                  <a:srgbClr val="1B4D69"/>
+                </a:solidFill>
+                <a:latin typeface="Microsoft YaHei"/>
+                <a:ea typeface="Microsoft YaHei"/>
+                <a:cs typeface="Microsoft YaHei"/>
+              </a:rPr>
+              <a:t>自检异常 · 适用范围</a:t>
+            </a:r>
+          </a:p>
+        </p:txBody>
+      </p:sp>
+      <p:sp>
+        <p:nvSpPr>
+          <p:cNvPr id="38" name="Rectangle 37"/>
+          <p:cNvSpPr/>
+          <p:nvPr/>
+        </p:nvSpPr>
+        <p:spPr>
+          <a:xfrm>
+            <a:off x="548640" y="4572000"/>
+            <a:ext cx="2103120" cy="969264"/>
+          </a:xfrm>
+          <a:prstGeom prst="rect">
+            <a:avLst/>
+          </a:prstGeom>
+          <a:solidFill>
+            <a:srgbClr val="FFFFFF"/>
+          </a:solidFill>
+          <a:ln w="9525">
+            <a:solidFill>
+              <a:srgbClr val="AFCEE1"/>
+            </a:solidFill>
+          </a:ln>
+        </p:spPr>
+        <p:txBody>
+          <a:bodyPr rtlCol="0" anchor="ctr"/>
+          <a:lstStyle/>
+          <a:p>
+            <a:pPr algn="ctr"/>
+          </a:p>
+        </p:txBody>
+      </p:sp>
+      <p:sp>
+        <p:nvSpPr>
+          <p:cNvPr id="39" name="Rectangle 38"/>
+          <p:cNvSpPr/>
+          <p:nvPr/>
+        </p:nvSpPr>
+        <p:spPr>
+          <a:xfrm>
+            <a:off x="548640" y="4572000"/>
+            <a:ext cx="54864" cy="969264"/>
+          </a:xfrm>
+          <a:prstGeom prst="rect">
+            <a:avLst/>
+          </a:prstGeom>
+          <a:solidFill>
+            <a:srgbClr val="D2690C"/>
+          </a:solidFill>
+          <a:ln>
+            <a:noFill/>
+          </a:ln>
+        </p:spPr>
+        <p:txBody>
+          <a:bodyPr rtlCol="0" anchor="ctr"/>
+          <a:lstStyle/>
+          <a:p>
+            <a:pPr algn="ctr"/>
+          </a:p>
+        </p:txBody>
+      </p:sp>
+      <p:sp>
+        <p:nvSpPr>
+          <p:cNvPr id="40" name="Freeform 39"/>
+          <p:cNvSpPr/>
+          <p:nvPr/>
+        </p:nvSpPr>
+        <p:spPr>
+          <a:xfrm>
+            <a:off x="2432304" y="4654296"/>
+            <a:ext cx="118872" cy="146304"/>
+          </a:xfrm>
+          <a:custGeom>
+            <a:avLst/>
+            <a:gdLst/>
+            <a:ahLst/>
+            <a:cxnLst/>
+            <a:rect l="l" t="t" r="r" b="b"/>
+            <a:pathLst>
+              <a:path w="118872" h="146304">
+                <a:moveTo>
+                  <a:pt x="0" y="0"/>
+                </a:moveTo>
+                <a:lnTo>
+                  <a:pt x="77724" y="0"/>
+                </a:lnTo>
+                <a:lnTo>
+                  <a:pt x="118872" y="41148"/>
+                </a:lnTo>
+                <a:lnTo>
+                  <a:pt x="118872" y="146304"/>
+                </a:lnTo>
+                <a:lnTo>
+                  <a:pt x="0" y="146304"/>
+                </a:lnTo>
+                <a:close/>
+              </a:path>
+            </a:pathLst>
+          </a:custGeom>
+          <a:solidFill>
+            <a:srgbClr val="FFFFFF"/>
+          </a:solidFill>
+          <a:ln w="9525">
+            <a:solidFill>
+              <a:srgbClr val="D2690C"/>
+            </a:solidFill>
+          </a:ln>
+        </p:spPr>
+        <p:txBody>
+          <a:bodyPr rtlCol="0" anchor="ctr"/>
+          <a:lstStyle/>
+          <a:p>
+            <a:pPr algn="ctr"/>
+          </a:p>
+        </p:txBody>
+      </p:sp>
+      <p:sp>
+        <p:nvSpPr>
+          <p:cNvPr id="41" name="Freeform 40"/>
+          <p:cNvSpPr/>
+          <p:nvPr/>
+        </p:nvSpPr>
+        <p:spPr>
+          <a:xfrm>
+            <a:off x="2510028" y="4654296"/>
+            <a:ext cx="41148" cy="41148"/>
+          </a:xfrm>
+          <a:custGeom>
+            <a:avLst/>
+            <a:gdLst/>
+            <a:ahLst/>
+            <a:cxnLst/>
+            <a:rect l="l" t="t" r="r" b="b"/>
+            <a:pathLst>
+              <a:path w="41148" h="41148">
+                <a:moveTo>
+                  <a:pt x="0" y="0"/>
+                </a:moveTo>
+                <a:lnTo>
+                  <a:pt x="0" y="41148"/>
+                </a:lnTo>
+                <a:lnTo>
+                  <a:pt x="41148" y="41148"/>
+                </a:lnTo>
+              </a:path>
+            </a:pathLst>
+          </a:custGeom>
+          <a:noFill/>
+          <a:ln w="9525">
+            <a:solidFill>
+              <a:srgbClr val="D2690C"/>
+            </a:solidFill>
+          </a:ln>
+        </p:spPr>
+        <p:txBody>
+          <a:bodyPr rtlCol="0" anchor="ctr"/>
+          <a:lstStyle/>
+          <a:p>
+            <a:pPr algn="ctr"/>
+          </a:p>
+        </p:txBody>
+      </p:sp>
+      <p:sp>
+        <p:nvSpPr>
+          <p:cNvPr id="42" name="TextBox 41"/>
+          <p:cNvSpPr txBox="1"/>
+          <p:nvPr/>
+        </p:nvSpPr>
+        <p:spPr>
+          <a:xfrm>
+            <a:off x="731520" y="4626864"/>
+            <a:ext cx="1645919" cy="256032"/>
+          </a:xfrm>
+          <a:prstGeom prst="rect">
+            <a:avLst/>
+          </a:prstGeom>
+          <a:noFill/>
+        </p:spPr>
+        <p:txBody>
+          <a:bodyPr wrap="square" anchor="ctr" lIns="0" tIns="0" rIns="0" bIns="0">
+            <a:noAutofit/>
+          </a:bodyPr>
+          <a:lstStyle/>
+          <a:p>
+            <a:pPr algn="l" latinLnBrk="0">
+              <a:lnSpc>
+                <a:spcPct val="100000"/>
+              </a:lnSpc>
+              <a:spcBef>
+                <a:spcPts val="0"/>
+              </a:spcBef>
+              <a:spcAft>
+                <a:spcPts val="0"/>
+              </a:spcAft>
+            </a:pPr>
+            <a:r>
+              <a:rPr sz="1050" b="1">
+                <a:solidFill>
+                  <a:srgbClr val="0A2B45"/>
+                </a:solidFill>
+                <a:latin typeface="Microsoft YaHei"/>
+                <a:ea typeface="Microsoft YaHei"/>
+                <a:cs typeface="Microsoft YaHei"/>
+              </a:rPr>
+              <a:t>协同补丁</a:t>
+            </a:r>
+            <a:r>
+              <a:rPr sz="800" b="1">
+                <a:solidFill>
+                  <a:srgbClr val="D2690C"/>
+                </a:solidFill>
+                <a:latin typeface="Microsoft YaHei"/>
+                <a:ea typeface="Microsoft YaHei"/>
+                <a:cs typeface="Microsoft YaHei"/>
+              </a:rPr>
+              <a:t>　人 ⇄ 规划器</a:t>
+            </a:r>
+          </a:p>
+        </p:txBody>
+      </p:sp>
+      <p:sp>
+        <p:nvSpPr>
+          <p:cNvPr id="43" name="TextBox 42"/>
+          <p:cNvSpPr txBox="1"/>
+          <p:nvPr/>
+        </p:nvSpPr>
+        <p:spPr>
+          <a:xfrm>
+            <a:off x="731520" y="4921758"/>
+            <a:ext cx="566928" cy="187452"/>
+          </a:xfrm>
+          <a:prstGeom prst="rect">
+            <a:avLst/>
+          </a:prstGeom>
+          <a:noFill/>
+        </p:spPr>
+        <p:txBody>
+          <a:bodyPr wrap="square" anchor="ctr" lIns="0" tIns="0" rIns="0" bIns="0">
+            <a:noAutofit/>
+          </a:bodyPr>
+          <a:lstStyle/>
+          <a:p>
+            <a:pPr algn="l" latinLnBrk="0">
+              <a:lnSpc>
+                <a:spcPct val="100000"/>
+              </a:lnSpc>
+              <a:spcBef>
+                <a:spcPts val="0"/>
+              </a:spcBef>
+              <a:spcAft>
+                <a:spcPts val="0"/>
+              </a:spcAft>
+            </a:pPr>
+            <a:r>
+              <a:rPr sz="800" b="1">
+                <a:solidFill>
+                  <a:srgbClr val="123C5B"/>
+                </a:solidFill>
+                <a:latin typeface="Microsoft YaHei"/>
+                <a:ea typeface="Microsoft YaHei"/>
+                <a:cs typeface="Microsoft YaHei"/>
+              </a:rPr>
+              <a:t>结对补丁</a:t>
+            </a:r>
+          </a:p>
+        </p:txBody>
+      </p:sp>
+      <p:sp>
+        <p:nvSpPr>
+          <p:cNvPr id="44" name="TextBox 43"/>
+          <p:cNvSpPr txBox="1"/>
+          <p:nvPr/>
+        </p:nvSpPr>
+        <p:spPr>
+          <a:xfrm>
+            <a:off x="1316736" y="4921758"/>
+            <a:ext cx="1243584" cy="187452"/>
+          </a:xfrm>
+          <a:prstGeom prst="rect">
+            <a:avLst/>
+          </a:prstGeom>
+          <a:noFill/>
+        </p:spPr>
+        <p:txBody>
+          <a:bodyPr wrap="square" anchor="ctr" lIns="0" tIns="0" rIns="0" bIns="0">
+            <a:noAutofit/>
+          </a:bodyPr>
+          <a:lstStyle/>
+          <a:p>
+            <a:pPr algn="l" latinLnBrk="0">
+              <a:lnSpc>
+                <a:spcPct val="100000"/>
+              </a:lnSpc>
+              <a:spcBef>
+                <a:spcPts val="0"/>
+              </a:spcBef>
+              <a:spcAft>
+                <a:spcPts val="0"/>
+              </a:spcAft>
+            </a:pPr>
+            <a:r>
+              <a:rPr sz="700" b="0">
+                <a:solidFill>
+                  <a:srgbClr val="0F62CE"/>
+                </a:solidFill>
+                <a:latin typeface="Consolas"/>
+                <a:ea typeface="Microsoft YaHei"/>
+                <a:cs typeface="Microsoft YaHei"/>
+              </a:rPr>
+              <a:t>changes.patch</a:t>
+            </a:r>
+          </a:p>
+        </p:txBody>
+      </p:sp>
+      <p:sp>
+        <p:nvSpPr>
+          <p:cNvPr id="45" name="TextBox 44"/>
+          <p:cNvSpPr txBox="1"/>
+          <p:nvPr/>
+        </p:nvSpPr>
+        <p:spPr>
+          <a:xfrm>
+            <a:off x="731520" y="5109210"/>
+            <a:ext cx="566928" cy="187452"/>
+          </a:xfrm>
+          <a:prstGeom prst="rect">
+            <a:avLst/>
+          </a:prstGeom>
+          <a:noFill/>
+        </p:spPr>
+        <p:txBody>
+          <a:bodyPr wrap="square" anchor="ctr" lIns="0" tIns="0" rIns="0" bIns="0">
+            <a:noAutofit/>
+          </a:bodyPr>
+          <a:lstStyle/>
+          <a:p>
+            <a:pPr algn="l" latinLnBrk="0">
+              <a:lnSpc>
+                <a:spcPct val="100000"/>
+              </a:lnSpc>
+              <a:spcBef>
+                <a:spcPts val="0"/>
+              </a:spcBef>
+              <a:spcAft>
+                <a:spcPts val="0"/>
+              </a:spcAft>
+            </a:pPr>
+            <a:r>
+              <a:rPr sz="800" b="1">
+                <a:solidFill>
+                  <a:srgbClr val="123C5B"/>
+                </a:solidFill>
+                <a:latin typeface="Microsoft YaHei"/>
+                <a:ea typeface="Microsoft YaHei"/>
+                <a:cs typeface="Microsoft YaHei"/>
+              </a:rPr>
+              <a:t>人工操刀</a:t>
+            </a:r>
+          </a:p>
+        </p:txBody>
+      </p:sp>
+      <p:sp>
+        <p:nvSpPr>
+          <p:cNvPr id="46" name="TextBox 45"/>
+          <p:cNvSpPr txBox="1"/>
+          <p:nvPr/>
+        </p:nvSpPr>
+        <p:spPr>
+          <a:xfrm>
+            <a:off x="1316736" y="5109210"/>
+            <a:ext cx="1243584" cy="187452"/>
+          </a:xfrm>
+          <a:prstGeom prst="rect">
+            <a:avLst/>
+          </a:prstGeom>
+          <a:noFill/>
+        </p:spPr>
+        <p:txBody>
+          <a:bodyPr wrap="square" anchor="ctr" lIns="0" tIns="0" rIns="0" bIns="0">
+            <a:noAutofit/>
+          </a:bodyPr>
+          <a:lstStyle/>
+          <a:p>
+            <a:pPr algn="l" latinLnBrk="0">
+              <a:lnSpc>
+                <a:spcPct val="100000"/>
+              </a:lnSpc>
+              <a:spcBef>
+                <a:spcPts val="0"/>
+              </a:spcBef>
+              <a:spcAft>
+                <a:spcPts val="0"/>
+              </a:spcAft>
+            </a:pPr>
+            <a:r>
+              <a:rPr sz="800" b="0">
+                <a:solidFill>
+                  <a:srgbClr val="1B4D69"/>
+                </a:solidFill>
+                <a:latin typeface="Microsoft YaHei"/>
+                <a:ea typeface="Microsoft YaHei"/>
+                <a:cs typeface="Microsoft YaHei"/>
+              </a:rPr>
+              <a:t>复杂改动由人主导</a:t>
+            </a:r>
+          </a:p>
+        </p:txBody>
+      </p:sp>
+      <p:sp>
+        <p:nvSpPr>
+          <p:cNvPr id="47" name="TextBox 46"/>
+          <p:cNvSpPr txBox="1"/>
+          <p:nvPr/>
+        </p:nvSpPr>
+        <p:spPr>
+          <a:xfrm>
+            <a:off x="731520" y="5296662"/>
+            <a:ext cx="566928" cy="187452"/>
+          </a:xfrm>
+          <a:prstGeom prst="rect">
+            <a:avLst/>
+          </a:prstGeom>
+          <a:noFill/>
+        </p:spPr>
+        <p:txBody>
+          <a:bodyPr wrap="square" anchor="ctr" lIns="0" tIns="0" rIns="0" bIns="0">
+            <a:noAutofit/>
+          </a:bodyPr>
+          <a:lstStyle/>
+          <a:p>
+            <a:pPr algn="l" latinLnBrk="0">
+              <a:lnSpc>
+                <a:spcPct val="100000"/>
+              </a:lnSpc>
+              <a:spcBef>
+                <a:spcPts val="0"/>
+              </a:spcBef>
+              <a:spcAft>
+                <a:spcPts val="0"/>
+              </a:spcAft>
+            </a:pPr>
+            <a:r>
+              <a:rPr sz="800" b="1">
+                <a:solidFill>
+                  <a:srgbClr val="123C5B"/>
+                </a:solidFill>
+                <a:latin typeface="Microsoft YaHei"/>
+                <a:ea typeface="Microsoft YaHei"/>
+                <a:cs typeface="Microsoft YaHei"/>
+              </a:rPr>
+              <a:t>同等准入</a:t>
+            </a:r>
+          </a:p>
+        </p:txBody>
+      </p:sp>
+      <p:sp>
+        <p:nvSpPr>
+          <p:cNvPr id="48" name="TextBox 47"/>
+          <p:cNvSpPr txBox="1"/>
+          <p:nvPr/>
+        </p:nvSpPr>
+        <p:spPr>
+          <a:xfrm>
+            <a:off x="1316736" y="5296662"/>
+            <a:ext cx="1243584" cy="187452"/>
+          </a:xfrm>
+          <a:prstGeom prst="rect">
+            <a:avLst/>
+          </a:prstGeom>
+          <a:noFill/>
+        </p:spPr>
+        <p:txBody>
+          <a:bodyPr wrap="square" anchor="ctr" lIns="0" tIns="0" rIns="0" bIns="0">
+            <a:noAutofit/>
+          </a:bodyPr>
+          <a:lstStyle/>
+          <a:p>
+            <a:pPr algn="l" latinLnBrk="0">
+              <a:lnSpc>
+                <a:spcPct val="100000"/>
+              </a:lnSpc>
+              <a:spcBef>
+                <a:spcPts val="0"/>
+              </a:spcBef>
+              <a:spcAft>
+                <a:spcPts val="0"/>
+              </a:spcAft>
+            </a:pPr>
+            <a:r>
+              <a:rPr sz="800" b="0">
+                <a:solidFill>
+                  <a:srgbClr val="1B4D69"/>
+                </a:solidFill>
+                <a:latin typeface="Microsoft YaHei"/>
+                <a:ea typeface="Microsoft YaHei"/>
+                <a:cs typeface="Microsoft YaHei"/>
+              </a:rPr>
+              <a:t>同样走四道门禁</a:t>
+            </a:r>
+          </a:p>
+        </p:txBody>
+      </p:sp>
+      <p:sp>
+        <p:nvSpPr>
+          <p:cNvPr id="49" name="Rectangle 48"/>
+          <p:cNvSpPr/>
+          <p:nvPr/>
+        </p:nvSpPr>
+        <p:spPr>
+          <a:xfrm>
+            <a:off x="3419856" y="1499616"/>
+            <a:ext cx="5687568" cy="4096512"/>
+          </a:xfrm>
+          <a:prstGeom prst="rect">
+            <a:avLst/>
+          </a:prstGeom>
+          <a:solidFill>
+            <a:srgbClr val="F2F8FD"/>
+          </a:solidFill>
+          <a:ln w="12700">
+            <a:solidFill>
+              <a:srgbClr val="7FA4BA"/>
+            </a:solidFill>
+          </a:ln>
+        </p:spPr>
+        <p:txBody>
+          <a:bodyPr rtlCol="0" anchor="ctr"/>
+          <a:lstStyle/>
+          <a:p>
+            <a:pPr algn="ctr"/>
+          </a:p>
+        </p:txBody>
+      </p:sp>
+      <p:sp>
+        <p:nvSpPr>
+          <p:cNvPr id="50" name="Rectangle 49"/>
+          <p:cNvSpPr/>
+          <p:nvPr/>
+        </p:nvSpPr>
+        <p:spPr>
+          <a:xfrm>
+            <a:off x="3419856" y="1261872"/>
+            <a:ext cx="1920240" cy="237744"/>
+          </a:xfrm>
+          <a:prstGeom prst="rect">
+            <a:avLst/>
+          </a:prstGeom>
+          <a:solidFill>
+            <a:srgbClr val="DEEDFA"/>
+          </a:solidFill>
+          <a:ln w="12700">
+            <a:solidFill>
+              <a:srgbClr val="7FA4BA"/>
+            </a:solidFill>
+          </a:ln>
+        </p:spPr>
+        <p:txBody>
+          <a:bodyPr rtlCol="0" anchor="ctr" wrap="square" lIns="109728" tIns="0" rIns="73152" bIns="0">
+            <a:noAutofit/>
+          </a:bodyPr>
+          <a:lstStyle/>
+          <a:p>
+            <a:pPr algn="l" latinLnBrk="0">
+              <a:lnSpc>
+                <a:spcPct val="100000"/>
+              </a:lnSpc>
+              <a:spcBef>
+                <a:spcPts val="0"/>
+              </a:spcBef>
+              <a:spcAft>
+                <a:spcPts val="0"/>
+              </a:spcAft>
+            </a:pPr>
+            <a:r>
+              <a:rPr sz="1000" b="1">
+                <a:solidFill>
+                  <a:srgbClr val="0A2B45"/>
+                </a:solidFill>
+                <a:latin typeface="Microsoft YaHei"/>
+                <a:ea typeface="Microsoft YaHei"/>
+                <a:cs typeface="Microsoft YaHei"/>
+              </a:rPr>
+              <a:t>模型层 Agent</a:t>
+            </a:r>
+            <a:r>
+              <a:rPr sz="700" b="0">
+                <a:solidFill>
+                  <a:srgbClr val="40708B"/>
+                </a:solidFill>
+                <a:latin typeface="Microsoft YaHei"/>
+                <a:ea typeface="Microsoft YaHei"/>
+                <a:cs typeface="Microsoft YaHei"/>
+              </a:rPr>
+              <a:t>　«subsystem»</a:t>
+            </a:r>
+          </a:p>
+        </p:txBody>
+      </p:sp>
+      <p:sp>
+        <p:nvSpPr>
+          <p:cNvPr id="51" name="Rectangle 50"/>
+          <p:cNvSpPr/>
+          <p:nvPr/>
+        </p:nvSpPr>
+        <p:spPr>
+          <a:xfrm>
+            <a:off x="3566160" y="1627632"/>
+            <a:ext cx="5394959" cy="2688335"/>
+          </a:xfrm>
+          <a:prstGeom prst="rect">
+            <a:avLst/>
+          </a:prstGeom>
+          <a:solidFill>
+            <a:srgbClr val="E6F0FC"/>
+          </a:solidFill>
+          <a:ln w="15875">
+            <a:solidFill>
+              <a:srgbClr val="0F62CE"/>
+            </a:solidFill>
+          </a:ln>
+        </p:spPr>
+        <p:txBody>
+          <a:bodyPr rtlCol="0" anchor="ctr"/>
+          <a:lstStyle/>
+          <a:p>
+            <a:pPr algn="ctr"/>
+          </a:p>
+        </p:txBody>
+      </p:sp>
+      <p:sp>
+        <p:nvSpPr>
+          <p:cNvPr id="52" name="Rectangle 51"/>
+          <p:cNvSpPr/>
+          <p:nvPr/>
+        </p:nvSpPr>
+        <p:spPr>
+          <a:xfrm>
+            <a:off x="8723376" y="1709928"/>
+            <a:ext cx="137160" cy="109728"/>
+          </a:xfrm>
+          <a:prstGeom prst="rect">
+            <a:avLst/>
+          </a:prstGeom>
+          <a:solidFill>
+            <a:srgbClr val="FFFFFF"/>
+          </a:solidFill>
+          <a:ln w="9525">
+            <a:solidFill>
+              <a:srgbClr val="0F62CE"/>
+            </a:solidFill>
+          </a:ln>
+        </p:spPr>
+        <p:txBody>
+          <a:bodyPr rtlCol="0" anchor="ctr"/>
+          <a:lstStyle/>
+          <a:p>
+            <a:pPr algn="ctr"/>
+          </a:p>
+        </p:txBody>
+      </p:sp>
+      <p:sp>
+        <p:nvSpPr>
+          <p:cNvPr id="53" name="Rectangle 52"/>
+          <p:cNvSpPr/>
+          <p:nvPr/>
+        </p:nvSpPr>
+        <p:spPr>
+          <a:xfrm>
+            <a:off x="8691372" y="1728216"/>
+            <a:ext cx="64008" cy="32004"/>
+          </a:xfrm>
+          <a:prstGeom prst="rect">
+            <a:avLst/>
+          </a:prstGeom>
+          <a:solidFill>
+            <a:srgbClr val="FFFFFF"/>
+          </a:solidFill>
+          <a:ln w="9525">
+            <a:solidFill>
+              <a:srgbClr val="0F62CE"/>
+            </a:solidFill>
+          </a:ln>
+        </p:spPr>
+        <p:txBody>
+          <a:bodyPr rtlCol="0" anchor="ctr"/>
+          <a:lstStyle/>
+          <a:p>
+            <a:pPr algn="ctr"/>
+          </a:p>
+        </p:txBody>
+      </p:sp>
+      <p:sp>
+        <p:nvSpPr>
+          <p:cNvPr id="54" name="Rectangle 53"/>
+          <p:cNvSpPr/>
+          <p:nvPr/>
+        </p:nvSpPr>
+        <p:spPr>
+          <a:xfrm>
+            <a:off x="8691372" y="1769364"/>
+            <a:ext cx="64008" cy="32004"/>
+          </a:xfrm>
+          <a:prstGeom prst="rect">
+            <a:avLst/>
+          </a:prstGeom>
+          <a:solidFill>
+            <a:srgbClr val="FFFFFF"/>
+          </a:solidFill>
+          <a:ln w="9525">
+            <a:solidFill>
+              <a:srgbClr val="0F62CE"/>
+            </a:solidFill>
+          </a:ln>
+        </p:spPr>
+        <p:txBody>
+          <a:bodyPr rtlCol="0" anchor="ctr"/>
+          <a:lstStyle/>
+          <a:p>
+            <a:pPr algn="ctr"/>
+          </a:p>
+        </p:txBody>
+      </p:sp>
+      <p:sp>
+        <p:nvSpPr>
+          <p:cNvPr id="55" name="TextBox 54"/>
+          <p:cNvSpPr txBox="1"/>
+          <p:nvPr/>
+        </p:nvSpPr>
+        <p:spPr>
+          <a:xfrm>
+            <a:off x="3694176" y="1664208"/>
+            <a:ext cx="4773167" cy="256032"/>
+          </a:xfrm>
+          <a:prstGeom prst="rect">
+            <a:avLst/>
+          </a:prstGeom>
+          <a:noFill/>
+        </p:spPr>
+        <p:txBody>
+          <a:bodyPr wrap="square" anchor="ctr" lIns="0" tIns="0" rIns="0" bIns="0">
+            <a:noAutofit/>
+          </a:bodyPr>
+          <a:lstStyle/>
+          <a:p>
+            <a:pPr algn="l" latinLnBrk="0">
+              <a:lnSpc>
+                <a:spcPct val="100000"/>
+              </a:lnSpc>
+              <a:spcBef>
+                <a:spcPts val="0"/>
+              </a:spcBef>
+              <a:spcAft>
+                <a:spcPts val="0"/>
+              </a:spcAft>
+            </a:pPr>
+            <a:r>
+              <a:rPr sz="1100" b="1">
+                <a:solidFill>
+                  <a:srgbClr val="0F62CE"/>
+                </a:solidFill>
+                <a:latin typeface="Microsoft YaHei"/>
+                <a:ea typeface="Microsoft YaHei"/>
+                <a:cs typeface="Microsoft YaHei"/>
+              </a:rPr>
+              <a:t>Python 控制器</a:t>
+            </a:r>
+            <a:r>
+              <a:rPr sz="750" b="0">
+                <a:solidFill>
+                  <a:srgbClr val="40708B"/>
+                </a:solidFill>
+                <a:latin typeface="Microsoft YaHei"/>
+                <a:ea typeface="Microsoft YaHei"/>
+                <a:cs typeface="Microsoft YaHei"/>
+              </a:rPr>
+              <a:t>　«component»　</a:t>
+            </a:r>
+            <a:r>
+              <a:rPr sz="750" b="0">
+                <a:solidFill>
+                  <a:srgbClr val="40708B"/>
+                </a:solidFill>
+                <a:latin typeface="Consolas"/>
+                <a:ea typeface="Microsoft YaHei"/>
+                <a:cs typeface="Microsoft YaHei"/>
+              </a:rPr>
+              <a:t>src/m100_model_agent/</a:t>
+            </a:r>
+            <a:r>
+              <a:rPr sz="750" b="0">
+                <a:solidFill>
+                  <a:srgbClr val="40708B"/>
+                </a:solidFill>
+                <a:latin typeface="Microsoft YaHei"/>
+                <a:ea typeface="Microsoft YaHei"/>
+                <a:cs typeface="Microsoft YaHei"/>
+              </a:rPr>
+              <a:t>　·　确定性 · 无模型</a:t>
+            </a:r>
+          </a:p>
+        </p:txBody>
+      </p:sp>
+      <p:sp>
+        <p:nvSpPr>
+          <p:cNvPr id="56" name="Rectangle 55"/>
+          <p:cNvSpPr/>
+          <p:nvPr/>
+        </p:nvSpPr>
+        <p:spPr>
+          <a:xfrm>
+            <a:off x="3694176" y="1938528"/>
+            <a:ext cx="1530095" cy="676656"/>
+          </a:xfrm>
+          <a:prstGeom prst="rect">
+            <a:avLst/>
+          </a:prstGeom>
+          <a:solidFill>
+            <a:srgbClr val="FFFFFF"/>
+          </a:solidFill>
+          <a:ln w="12700">
+            <a:solidFill>
+              <a:srgbClr val="0F62CE"/>
+            </a:solidFill>
+          </a:ln>
+        </p:spPr>
+        <p:txBody>
+          <a:bodyPr rtlCol="0" anchor="ctr"/>
+          <a:lstStyle/>
+          <a:p>
+            <a:pPr algn="ctr"/>
+          </a:p>
+        </p:txBody>
+      </p:sp>
+      <p:sp>
+        <p:nvSpPr>
+          <p:cNvPr id="57" name="Rectangle 56"/>
+          <p:cNvSpPr/>
+          <p:nvPr/>
+        </p:nvSpPr>
+        <p:spPr>
+          <a:xfrm>
+            <a:off x="5023104" y="2011680"/>
+            <a:ext cx="137160" cy="109728"/>
+          </a:xfrm>
+          <a:prstGeom prst="rect">
+            <a:avLst/>
+          </a:prstGeom>
+          <a:solidFill>
+            <a:srgbClr val="FFFFFF"/>
+          </a:solidFill>
+          <a:ln w="9525">
+            <a:solidFill>
+              <a:srgbClr val="0F62CE"/>
+            </a:solidFill>
+          </a:ln>
+        </p:spPr>
+        <p:txBody>
+          <a:bodyPr rtlCol="0" anchor="ctr"/>
+          <a:lstStyle/>
+          <a:p>
+            <a:pPr algn="ctr"/>
+          </a:p>
+        </p:txBody>
+      </p:sp>
+      <p:sp>
+        <p:nvSpPr>
+          <p:cNvPr id="58" name="Rectangle 57"/>
+          <p:cNvSpPr/>
+          <p:nvPr/>
+        </p:nvSpPr>
+        <p:spPr>
+          <a:xfrm>
+            <a:off x="4991100" y="2029968"/>
+            <a:ext cx="64008" cy="32004"/>
+          </a:xfrm>
+          <a:prstGeom prst="rect">
+            <a:avLst/>
+          </a:prstGeom>
+          <a:solidFill>
+            <a:srgbClr val="FFFFFF"/>
+          </a:solidFill>
+          <a:ln w="9525">
+            <a:solidFill>
+              <a:srgbClr val="0F62CE"/>
+            </a:solidFill>
+          </a:ln>
+        </p:spPr>
+        <p:txBody>
+          <a:bodyPr rtlCol="0" anchor="ctr"/>
+          <a:lstStyle/>
+          <a:p>
+            <a:pPr algn="ctr"/>
+          </a:p>
+        </p:txBody>
+      </p:sp>
+      <p:sp>
+        <p:nvSpPr>
+          <p:cNvPr id="59" name="Rectangle 58"/>
+          <p:cNvSpPr/>
+          <p:nvPr/>
+        </p:nvSpPr>
+        <p:spPr>
+          <a:xfrm>
+            <a:off x="4991100" y="2071116"/>
+            <a:ext cx="64008" cy="32004"/>
+          </a:xfrm>
+          <a:prstGeom prst="rect">
+            <a:avLst/>
+          </a:prstGeom>
+          <a:solidFill>
+            <a:srgbClr val="FFFFFF"/>
+          </a:solidFill>
+          <a:ln w="9525">
+            <a:solidFill>
+              <a:srgbClr val="0F62CE"/>
+            </a:solidFill>
+          </a:ln>
+        </p:spPr>
+        <p:txBody>
+          <a:bodyPr rtlCol="0" anchor="ctr"/>
+          <a:lstStyle/>
+          <a:p>
+            <a:pPr algn="ctr"/>
+          </a:p>
+        </p:txBody>
+      </p:sp>
+      <p:sp>
+        <p:nvSpPr>
+          <p:cNvPr id="60" name="TextBox 59"/>
+          <p:cNvSpPr txBox="1"/>
+          <p:nvPr/>
+        </p:nvSpPr>
+        <p:spPr>
+          <a:xfrm>
+            <a:off x="3803904" y="1975104"/>
+            <a:ext cx="1328927" cy="603504"/>
+          </a:xfrm>
+          <a:prstGeom prst="rect">
+            <a:avLst/>
+          </a:prstGeom>
+          <a:noFill/>
+        </p:spPr>
+        <p:txBody>
+          <a:bodyPr wrap="square" anchor="ctr" lIns="0" tIns="0" rIns="0" bIns="0">
+            <a:noAutofit/>
+          </a:bodyPr>
+          <a:lstStyle/>
+          <a:p>
+            <a:pPr algn="l" latinLnBrk="0">
+              <a:lnSpc>
+                <a:spcPct val="100000"/>
+              </a:lnSpc>
+              <a:spcBef>
+                <a:spcPts val="0"/>
+              </a:spcBef>
+              <a:spcAft>
+                <a:spcPts val="100"/>
+              </a:spcAft>
+            </a:pPr>
+            <a:r>
+              <a:rPr sz="950" b="1">
+                <a:solidFill>
+                  <a:srgbClr val="0A2B45"/>
+                </a:solidFill>
+                <a:latin typeface="Microsoft YaHei"/>
+                <a:ea typeface="Microsoft YaHei"/>
+                <a:cs typeface="Microsoft YaHei"/>
+              </a:rPr>
+              <a:t>采样与账本</a:t>
+            </a:r>
+          </a:p>
+          <a:p>
+            <a:pPr algn="l" latinLnBrk="0">
+              <a:lnSpc>
+                <a:spcPct val="100000"/>
+              </a:lnSpc>
+              <a:spcBef>
+                <a:spcPts val="0"/>
+              </a:spcBef>
+              <a:spcAft>
+                <a:spcPts val="200"/>
+              </a:spcAft>
+            </a:pPr>
+            <a:r>
+              <a:rPr sz="700" b="0">
+                <a:solidFill>
+                  <a:srgbClr val="0F62CE"/>
+                </a:solidFill>
+                <a:latin typeface="Consolas"/>
+                <a:ea typeface="Microsoft YaHei"/>
+                <a:cs typeface="Microsoft YaHei"/>
+              </a:rPr>
+              <a:t>roofline.py</a:t>
+            </a:r>
+          </a:p>
+          <a:p>
+            <a:pPr algn="l" latinLnBrk="0">
+              <a:lnSpc>
+                <a:spcPct val="100000"/>
+              </a:lnSpc>
+              <a:spcBef>
+                <a:spcPts val="0"/>
+              </a:spcBef>
+              <a:spcAft>
+                <a:spcPts val="0"/>
+              </a:spcAft>
+            </a:pPr>
+            <a:r>
+              <a:rPr sz="800" b="0">
+                <a:solidFill>
+                  <a:srgbClr val="1B4D69"/>
+                </a:solidFill>
+                <a:latin typeface="Microsoft YaHei"/>
+                <a:ea typeface="Microsoft YaHei"/>
+                <a:cs typeface="Microsoft YaHei"/>
+              </a:rPr>
+              <a:t>一次性服务采 Trace</a:t>
+            </a:r>
+          </a:p>
+          <a:p>
+            <a:pPr algn="l" latinLnBrk="0">
+              <a:lnSpc>
+                <a:spcPct val="100000"/>
+              </a:lnSpc>
+              <a:spcBef>
+                <a:spcPts val="0"/>
+              </a:spcBef>
+              <a:spcAft>
+                <a:spcPts val="0"/>
+              </a:spcAft>
+            </a:pPr>
+            <a:r>
+              <a:rPr sz="800" b="0">
+                <a:solidFill>
+                  <a:srgbClr val="1B4D69"/>
+                </a:solidFill>
+                <a:latin typeface="Microsoft YaHei"/>
+                <a:ea typeface="Microsoft YaHei"/>
+                <a:cs typeface="Microsoft YaHei"/>
+              </a:rPr>
+              <a:t>下界账本 · ratio 自检</a:t>
+            </a:r>
+          </a:p>
+        </p:txBody>
+      </p:sp>
+      <p:cxnSp>
+        <p:nvCxnSpPr>
+          <p:cNvPr id="61" name="Connector 60"/>
+          <p:cNvCxnSpPr/>
+          <p:nvPr/>
+        </p:nvCxnSpPr>
+        <p:spPr>
+          <a:xfrm>
+            <a:off x="4459224" y="2624328"/>
+            <a:ext cx="0" cy="201168"/>
+          </a:xfrm>
+          <a:prstGeom prst="line">
+            <a:avLst/>
+          </a:prstGeom>
+          <a:ln w="12700">
+            <a:solidFill>
+              <a:srgbClr val="0F62CE"/>
+            </a:solidFill>
+            <a:headEnd type="triangle" w="med" len="med"/>
+            <a:tailEnd type="triangle" w="med" len="med"/>
+          </a:ln>
+        </p:spPr>
+      </p:cxnSp>
+      <p:sp>
+        <p:nvSpPr>
+          <p:cNvPr id="62" name="Rectangle 61"/>
+          <p:cNvSpPr/>
+          <p:nvPr/>
+        </p:nvSpPr>
+        <p:spPr>
+          <a:xfrm>
+            <a:off x="5498592" y="1938528"/>
+            <a:ext cx="1530095" cy="676656"/>
+          </a:xfrm>
+          <a:prstGeom prst="rect">
+            <a:avLst/>
+          </a:prstGeom>
+          <a:solidFill>
+            <a:srgbClr val="FFFFFF"/>
+          </a:solidFill>
+          <a:ln w="12700">
+            <a:solidFill>
+              <a:srgbClr val="0F62CE"/>
+            </a:solidFill>
+          </a:ln>
+        </p:spPr>
+        <p:txBody>
+          <a:bodyPr rtlCol="0" anchor="ctr"/>
+          <a:lstStyle/>
+          <a:p>
+            <a:pPr algn="ctr"/>
+          </a:p>
+        </p:txBody>
+      </p:sp>
+      <p:sp>
+        <p:nvSpPr>
+          <p:cNvPr id="63" name="Rectangle 62"/>
+          <p:cNvSpPr/>
+          <p:nvPr/>
+        </p:nvSpPr>
+        <p:spPr>
+          <a:xfrm>
+            <a:off x="6827520" y="2011680"/>
+            <a:ext cx="137160" cy="109728"/>
+          </a:xfrm>
+          <a:prstGeom prst="rect">
+            <a:avLst/>
+          </a:prstGeom>
+          <a:solidFill>
+            <a:srgbClr val="FFFFFF"/>
+          </a:solidFill>
+          <a:ln w="9525">
+            <a:solidFill>
+              <a:srgbClr val="0F62CE"/>
+            </a:solidFill>
+          </a:ln>
+        </p:spPr>
+        <p:txBody>
+          <a:bodyPr rtlCol="0" anchor="ctr"/>
+          <a:lstStyle/>
+          <a:p>
+            <a:pPr algn="ctr"/>
+          </a:p>
+        </p:txBody>
+      </p:sp>
+      <p:sp>
+        <p:nvSpPr>
+          <p:cNvPr id="64" name="Rectangle 63"/>
+          <p:cNvSpPr/>
+          <p:nvPr/>
+        </p:nvSpPr>
+        <p:spPr>
+          <a:xfrm>
+            <a:off x="6795516" y="2029968"/>
+            <a:ext cx="64008" cy="32004"/>
+          </a:xfrm>
+          <a:prstGeom prst="rect">
+            <a:avLst/>
+          </a:prstGeom>
+          <a:solidFill>
+            <a:srgbClr val="FFFFFF"/>
+          </a:solidFill>
+          <a:ln w="9525">
+            <a:solidFill>
+              <a:srgbClr val="0F62CE"/>
+            </a:solidFill>
+          </a:ln>
+        </p:spPr>
+        <p:txBody>
+          <a:bodyPr rtlCol="0" anchor="ctr"/>
+          <a:lstStyle/>
+          <a:p>
+            <a:pPr algn="ctr"/>
+          </a:p>
+        </p:txBody>
+      </p:sp>
+      <p:sp>
+        <p:nvSpPr>
+          <p:cNvPr id="65" name="Rectangle 64"/>
+          <p:cNvSpPr/>
+          <p:nvPr/>
+        </p:nvSpPr>
+        <p:spPr>
+          <a:xfrm>
+            <a:off x="6795516" y="2071116"/>
+            <a:ext cx="64008" cy="32004"/>
+          </a:xfrm>
+          <a:prstGeom prst="rect">
+            <a:avLst/>
+          </a:prstGeom>
+          <a:solidFill>
+            <a:srgbClr val="FFFFFF"/>
+          </a:solidFill>
+          <a:ln w="9525">
+            <a:solidFill>
+              <a:srgbClr val="0F62CE"/>
+            </a:solidFill>
+          </a:ln>
+        </p:spPr>
+        <p:txBody>
+          <a:bodyPr rtlCol="0" anchor="ctr"/>
+          <a:lstStyle/>
+          <a:p>
+            <a:pPr algn="ctr"/>
+          </a:p>
+        </p:txBody>
+      </p:sp>
+      <p:sp>
+        <p:nvSpPr>
+          <p:cNvPr id="66" name="TextBox 65"/>
+          <p:cNvSpPr txBox="1"/>
+          <p:nvPr/>
+        </p:nvSpPr>
+        <p:spPr>
+          <a:xfrm>
+            <a:off x="5608320" y="1975104"/>
+            <a:ext cx="1328927" cy="603504"/>
+          </a:xfrm>
+          <a:prstGeom prst="rect">
+            <a:avLst/>
+          </a:prstGeom>
+          <a:noFill/>
+        </p:spPr>
+        <p:txBody>
+          <a:bodyPr wrap="square" anchor="ctr" lIns="0" tIns="0" rIns="0" bIns="0">
+            <a:noAutofit/>
+          </a:bodyPr>
+          <a:lstStyle/>
+          <a:p>
+            <a:pPr algn="l" latinLnBrk="0">
+              <a:lnSpc>
+                <a:spcPct val="100000"/>
+              </a:lnSpc>
+              <a:spcBef>
+                <a:spcPts val="0"/>
+              </a:spcBef>
+              <a:spcAft>
+                <a:spcPts val="100"/>
+              </a:spcAft>
+            </a:pPr>
+            <a:r>
+              <a:rPr sz="950" b="1">
+                <a:solidFill>
+                  <a:srgbClr val="0A2B45"/>
+                </a:solidFill>
+                <a:latin typeface="Microsoft YaHei"/>
+                <a:ea typeface="Microsoft YaHei"/>
+                <a:cs typeface="Microsoft YaHei"/>
+              </a:rPr>
+              <a:t>四道门禁流水</a:t>
+            </a:r>
+          </a:p>
+          <a:p>
+            <a:pPr algn="l" latinLnBrk="0">
+              <a:lnSpc>
+                <a:spcPct val="100000"/>
+              </a:lnSpc>
+              <a:spcBef>
+                <a:spcPts val="0"/>
+              </a:spcBef>
+              <a:spcAft>
+                <a:spcPts val="200"/>
+              </a:spcAft>
+            </a:pPr>
+            <a:r>
+              <a:rPr sz="700" b="0">
+                <a:solidFill>
+                  <a:srgbClr val="0F62CE"/>
+                </a:solidFill>
+                <a:latin typeface="Consolas"/>
+                <a:ea typeface="Microsoft YaHei"/>
+                <a:cs typeface="Microsoft YaHei"/>
+              </a:rPr>
+              <a:t>selfiterate_gates.py</a:t>
+            </a:r>
+          </a:p>
+          <a:p>
+            <a:pPr algn="l" latinLnBrk="0">
+              <a:lnSpc>
+                <a:spcPct val="100000"/>
+              </a:lnSpc>
+              <a:spcBef>
+                <a:spcPts val="0"/>
+              </a:spcBef>
+              <a:spcAft>
+                <a:spcPts val="0"/>
+              </a:spcAft>
+            </a:pPr>
+            <a:r>
+              <a:rPr sz="800" b="0">
+                <a:solidFill>
+                  <a:srgbClr val="1B4D69"/>
+                </a:solidFill>
+                <a:latin typeface="Microsoft YaHei"/>
+                <a:ea typeface="Microsoft YaHei"/>
+                <a:cs typeface="Microsoft YaHei"/>
+              </a:rPr>
+              <a:t>C 微测 ≥ 2%　数值门</a:t>
+            </a:r>
+          </a:p>
+          <a:p>
+            <a:pPr algn="l" latinLnBrk="0">
+              <a:lnSpc>
+                <a:spcPct val="100000"/>
+              </a:lnSpc>
+              <a:spcBef>
+                <a:spcPts val="0"/>
+              </a:spcBef>
+              <a:spcAft>
+                <a:spcPts val="0"/>
+              </a:spcAft>
+            </a:pPr>
+            <a:r>
+              <a:rPr sz="800" b="0">
+                <a:solidFill>
+                  <a:srgbClr val="1B4D69"/>
+                </a:solidFill>
+                <a:latin typeface="Microsoft YaHei"/>
+                <a:ea typeface="Microsoft YaHei"/>
+                <a:cs typeface="Microsoft YaHei"/>
+              </a:rPr>
+              <a:t>质量门　D 三方 A/B</a:t>
+            </a:r>
+          </a:p>
+        </p:txBody>
+      </p:sp>
+      <p:cxnSp>
+        <p:nvCxnSpPr>
+          <p:cNvPr id="67" name="Connector 66"/>
+          <p:cNvCxnSpPr/>
+          <p:nvPr/>
+        </p:nvCxnSpPr>
+        <p:spPr>
+          <a:xfrm>
+            <a:off x="6263640" y="2624328"/>
+            <a:ext cx="0" cy="201168"/>
+          </a:xfrm>
+          <a:prstGeom prst="line">
+            <a:avLst/>
+          </a:prstGeom>
+          <a:ln w="12700">
+            <a:solidFill>
+              <a:srgbClr val="0F62CE"/>
+            </a:solidFill>
+            <a:headEnd type="triangle" w="med" len="med"/>
+            <a:tailEnd type="triangle" w="med" len="med"/>
+          </a:ln>
+        </p:spPr>
+      </p:cxnSp>
+      <p:sp>
+        <p:nvSpPr>
+          <p:cNvPr id="68" name="Rectangle 67"/>
+          <p:cNvSpPr/>
+          <p:nvPr/>
+        </p:nvSpPr>
+        <p:spPr>
+          <a:xfrm>
+            <a:off x="7303008" y="1938528"/>
+            <a:ext cx="1530095" cy="676656"/>
+          </a:xfrm>
+          <a:prstGeom prst="rect">
+            <a:avLst/>
+          </a:prstGeom>
+          <a:solidFill>
+            <a:srgbClr val="FFFFFF"/>
+          </a:solidFill>
+          <a:ln w="12700">
+            <a:solidFill>
+              <a:srgbClr val="0F62CE"/>
+            </a:solidFill>
+          </a:ln>
+        </p:spPr>
+        <p:txBody>
+          <a:bodyPr rtlCol="0" anchor="ctr"/>
+          <a:lstStyle/>
+          <a:p>
+            <a:pPr algn="ctr"/>
+          </a:p>
+        </p:txBody>
+      </p:sp>
+      <p:sp>
+        <p:nvSpPr>
+          <p:cNvPr id="69" name="Rectangle 68"/>
+          <p:cNvSpPr/>
+          <p:nvPr/>
+        </p:nvSpPr>
+        <p:spPr>
+          <a:xfrm>
+            <a:off x="8631936" y="2011680"/>
+            <a:ext cx="137160" cy="109728"/>
+          </a:xfrm>
+          <a:prstGeom prst="rect">
+            <a:avLst/>
+          </a:prstGeom>
+          <a:solidFill>
+            <a:srgbClr val="FFFFFF"/>
+          </a:solidFill>
+          <a:ln w="9525">
+            <a:solidFill>
+              <a:srgbClr val="0F62CE"/>
+            </a:solidFill>
+          </a:ln>
+        </p:spPr>
+        <p:txBody>
+          <a:bodyPr rtlCol="0" anchor="ctr"/>
+          <a:lstStyle/>
+          <a:p>
+            <a:pPr algn="ctr"/>
+          </a:p>
+        </p:txBody>
+      </p:sp>
+      <p:sp>
+        <p:nvSpPr>
+          <p:cNvPr id="70" name="Rectangle 69"/>
+          <p:cNvSpPr/>
+          <p:nvPr/>
+        </p:nvSpPr>
+        <p:spPr>
+          <a:xfrm>
+            <a:off x="8599932" y="2029968"/>
+            <a:ext cx="64008" cy="32004"/>
+          </a:xfrm>
+          <a:prstGeom prst="rect">
+            <a:avLst/>
+          </a:prstGeom>
+          <a:solidFill>
+            <a:srgbClr val="FFFFFF"/>
+          </a:solidFill>
+          <a:ln w="9525">
+            <a:solidFill>
+              <a:srgbClr val="0F62CE"/>
+            </a:solidFill>
+          </a:ln>
+        </p:spPr>
+        <p:txBody>
+          <a:bodyPr rtlCol="0" anchor="ctr"/>
+          <a:lstStyle/>
+          <a:p>
+            <a:pPr algn="ctr"/>
+          </a:p>
+        </p:txBody>
+      </p:sp>
+      <p:sp>
+        <p:nvSpPr>
+          <p:cNvPr id="71" name="Rectangle 70"/>
+          <p:cNvSpPr/>
+          <p:nvPr/>
+        </p:nvSpPr>
+        <p:spPr>
+          <a:xfrm>
+            <a:off x="8599932" y="2071116"/>
+            <a:ext cx="64008" cy="32004"/>
+          </a:xfrm>
+          <a:prstGeom prst="rect">
+            <a:avLst/>
+          </a:prstGeom>
+          <a:solidFill>
+            <a:srgbClr val="FFFFFF"/>
+          </a:solidFill>
+          <a:ln w="9525">
+            <a:solidFill>
+              <a:srgbClr val="0F62CE"/>
+            </a:solidFill>
+          </a:ln>
+        </p:spPr>
+        <p:txBody>
+          <a:bodyPr rtlCol="0" anchor="ctr"/>
+          <a:lstStyle/>
+          <a:p>
+            <a:pPr algn="ctr"/>
+          </a:p>
+        </p:txBody>
+      </p:sp>
+      <p:sp>
+        <p:nvSpPr>
+          <p:cNvPr id="72" name="TextBox 71"/>
+          <p:cNvSpPr txBox="1"/>
+          <p:nvPr/>
+        </p:nvSpPr>
+        <p:spPr>
+          <a:xfrm>
+            <a:off x="7412735" y="1975104"/>
+            <a:ext cx="1328927" cy="603504"/>
+          </a:xfrm>
+          <a:prstGeom prst="rect">
+            <a:avLst/>
+          </a:prstGeom>
+          <a:noFill/>
+        </p:spPr>
+        <p:txBody>
+          <a:bodyPr wrap="square" anchor="ctr" lIns="0" tIns="0" rIns="0" bIns="0">
+            <a:noAutofit/>
+          </a:bodyPr>
+          <a:lstStyle/>
+          <a:p>
+            <a:pPr algn="l" latinLnBrk="0">
+              <a:lnSpc>
+                <a:spcPct val="100000"/>
+              </a:lnSpc>
+              <a:spcBef>
+                <a:spcPts val="0"/>
+              </a:spcBef>
+              <a:spcAft>
+                <a:spcPts val="100"/>
+              </a:spcAft>
+            </a:pPr>
+            <a:r>
+              <a:rPr sz="950" b="1">
+                <a:solidFill>
+                  <a:srgbClr val="0A2B45"/>
+                </a:solidFill>
+                <a:latin typeface="Microsoft YaHei"/>
+                <a:ea typeface="Microsoft YaHei"/>
+                <a:cs typeface="Microsoft YaHei"/>
+              </a:rPr>
+              <a:t>工作区与构建</a:t>
+            </a:r>
+          </a:p>
+          <a:p>
+            <a:pPr algn="l" latinLnBrk="0">
+              <a:lnSpc>
+                <a:spcPct val="100000"/>
+              </a:lnSpc>
+              <a:spcBef>
+                <a:spcPts val="0"/>
+              </a:spcBef>
+              <a:spcAft>
+                <a:spcPts val="200"/>
+              </a:spcAft>
+            </a:pPr>
+            <a:r>
+              <a:rPr sz="700" b="0">
+                <a:solidFill>
+                  <a:srgbClr val="0F62CE"/>
+                </a:solidFill>
+                <a:latin typeface="Consolas"/>
+                <a:ea typeface="Microsoft YaHei"/>
+                <a:cs typeface="Microsoft YaHei"/>
+              </a:rPr>
+              <a:t>git_workspace.py</a:t>
+            </a:r>
+          </a:p>
+          <a:p>
+            <a:pPr algn="l" latinLnBrk="0">
+              <a:lnSpc>
+                <a:spcPct val="100000"/>
+              </a:lnSpc>
+              <a:spcBef>
+                <a:spcPts val="0"/>
+              </a:spcBef>
+              <a:spcAft>
+                <a:spcPts val="0"/>
+              </a:spcAft>
+            </a:pPr>
+            <a:r>
+              <a:rPr sz="800" b="0">
+                <a:solidFill>
+                  <a:srgbClr val="1B4D69"/>
+                </a:solidFill>
+                <a:latin typeface="Microsoft YaHei"/>
+                <a:ea typeface="Microsoft YaHei"/>
+                <a:cs typeface="Microsoft YaHei"/>
+              </a:rPr>
+              <a:t>原位建版本 · 登记构建</a:t>
+            </a:r>
+          </a:p>
+          <a:p>
+            <a:pPr algn="l" latinLnBrk="0">
+              <a:lnSpc>
+                <a:spcPct val="100000"/>
+              </a:lnSpc>
+              <a:spcBef>
+                <a:spcPts val="0"/>
+              </a:spcBef>
+              <a:spcAft>
+                <a:spcPts val="0"/>
+              </a:spcAft>
+            </a:pPr>
+            <a:r>
+              <a:rPr sz="800" b="0">
+                <a:solidFill>
+                  <a:srgbClr val="1B4D69"/>
+                </a:solidFill>
+                <a:latin typeface="Microsoft YaHei"/>
+                <a:ea typeface="Microsoft YaHei"/>
+                <a:cs typeface="Microsoft YaHei"/>
+              </a:rPr>
+              <a:t>起停服务 · 精确重测</a:t>
+            </a:r>
+          </a:p>
+        </p:txBody>
+      </p:sp>
+      <p:cxnSp>
+        <p:nvCxnSpPr>
+          <p:cNvPr id="73" name="Connector 72"/>
+          <p:cNvCxnSpPr/>
+          <p:nvPr/>
+        </p:nvCxnSpPr>
+        <p:spPr>
+          <a:xfrm>
+            <a:off x="8068055" y="2624328"/>
+            <a:ext cx="0" cy="201168"/>
+          </a:xfrm>
+          <a:prstGeom prst="line">
+            <a:avLst/>
+          </a:prstGeom>
+          <a:ln w="12700">
+            <a:solidFill>
+              <a:srgbClr val="0F62CE"/>
+            </a:solidFill>
+            <a:headEnd type="triangle" w="med" len="med"/>
+            <a:tailEnd type="triangle" w="med" len="med"/>
+          </a:ln>
+        </p:spPr>
+      </p:cxnSp>
+      <p:sp>
+        <p:nvSpPr>
+          <p:cNvPr id="74" name="TextBox 73"/>
+          <p:cNvSpPr txBox="1"/>
+          <p:nvPr/>
+        </p:nvSpPr>
+        <p:spPr>
+          <a:xfrm>
+            <a:off x="4532376" y="2615184"/>
+            <a:ext cx="1097280" cy="219456"/>
+          </a:xfrm>
+          <a:prstGeom prst="rect">
+            <a:avLst/>
+          </a:prstGeom>
+          <a:noFill/>
+        </p:spPr>
+        <p:txBody>
+          <a:bodyPr wrap="square" anchor="ctr" lIns="0" tIns="0" rIns="0" bIns="0">
+            <a:noAutofit/>
+          </a:bodyPr>
+          <a:lstStyle/>
+          <a:p>
+            <a:pPr algn="l" latinLnBrk="0">
+              <a:lnSpc>
+                <a:spcPct val="100000"/>
+              </a:lnSpc>
+              <a:spcBef>
+                <a:spcPts val="0"/>
+              </a:spcBef>
+              <a:spcAft>
+                <a:spcPts val="0"/>
+              </a:spcAft>
+            </a:pPr>
+            <a:r>
+              <a:rPr sz="700" b="1">
+                <a:solidFill>
+                  <a:srgbClr val="0F62CE"/>
+                </a:solidFill>
+                <a:latin typeface="Microsoft YaHei"/>
+                <a:ea typeface="Microsoft YaHei"/>
+                <a:cs typeface="Microsoft YaHei"/>
+              </a:rPr>
+              <a:t>调度 · 回报</a:t>
+            </a:r>
+          </a:p>
+        </p:txBody>
+      </p:sp>
+      <p:sp>
+        <p:nvSpPr>
+          <p:cNvPr id="75" name="Rectangle 74"/>
+          <p:cNvSpPr/>
+          <p:nvPr/>
+        </p:nvSpPr>
+        <p:spPr>
+          <a:xfrm>
+            <a:off x="3694176" y="2834640"/>
+            <a:ext cx="5138927" cy="384048"/>
+          </a:xfrm>
+          <a:prstGeom prst="rect">
+            <a:avLst/>
+          </a:prstGeom>
+          <a:solidFill>
+            <a:srgbClr val="C9E1FC"/>
+          </a:solidFill>
+          <a:ln w="15875">
+            <a:solidFill>
+              <a:srgbClr val="0F62CE"/>
+            </a:solidFill>
+          </a:ln>
+        </p:spPr>
+        <p:txBody>
+          <a:bodyPr rtlCol="0" anchor="ctr"/>
+          <a:lstStyle/>
+          <a:p>
+            <a:pPr algn="ctr"/>
+          </a:p>
+        </p:txBody>
+      </p:sp>
+      <p:sp>
+        <p:nvSpPr>
+          <p:cNvPr id="76" name="Rectangle 75"/>
+          <p:cNvSpPr/>
+          <p:nvPr/>
+        </p:nvSpPr>
+        <p:spPr>
+          <a:xfrm>
+            <a:off x="8613648" y="2889504"/>
+            <a:ext cx="137160" cy="109728"/>
+          </a:xfrm>
+          <a:prstGeom prst="rect">
+            <a:avLst/>
+          </a:prstGeom>
+          <a:solidFill>
+            <a:srgbClr val="FFFFFF"/>
+          </a:solidFill>
+          <a:ln w="9525">
+            <a:solidFill>
+              <a:srgbClr val="0F62CE"/>
+            </a:solidFill>
+          </a:ln>
+        </p:spPr>
+        <p:txBody>
+          <a:bodyPr rtlCol="0" anchor="ctr"/>
+          <a:lstStyle/>
+          <a:p>
+            <a:pPr algn="ctr"/>
+          </a:p>
+        </p:txBody>
+      </p:sp>
+      <p:sp>
+        <p:nvSpPr>
+          <p:cNvPr id="77" name="Rectangle 76"/>
+          <p:cNvSpPr/>
+          <p:nvPr/>
+        </p:nvSpPr>
+        <p:spPr>
+          <a:xfrm>
+            <a:off x="8581644" y="2907792"/>
+            <a:ext cx="64008" cy="32004"/>
+          </a:xfrm>
+          <a:prstGeom prst="rect">
+            <a:avLst/>
+          </a:prstGeom>
+          <a:solidFill>
+            <a:srgbClr val="FFFFFF"/>
+          </a:solidFill>
+          <a:ln w="9525">
+            <a:solidFill>
+              <a:srgbClr val="0F62CE"/>
+            </a:solidFill>
+          </a:ln>
+        </p:spPr>
+        <p:txBody>
+          <a:bodyPr rtlCol="0" anchor="ctr"/>
+          <a:lstStyle/>
+          <a:p>
+            <a:pPr algn="ctr"/>
+          </a:p>
+        </p:txBody>
+      </p:sp>
+      <p:sp>
+        <p:nvSpPr>
+          <p:cNvPr id="78" name="Rectangle 77"/>
+          <p:cNvSpPr/>
+          <p:nvPr/>
+        </p:nvSpPr>
+        <p:spPr>
+          <a:xfrm>
+            <a:off x="8581644" y="2948940"/>
+            <a:ext cx="64008" cy="32004"/>
+          </a:xfrm>
+          <a:prstGeom prst="rect">
+            <a:avLst/>
+          </a:prstGeom>
+          <a:solidFill>
+            <a:srgbClr val="FFFFFF"/>
+          </a:solidFill>
+          <a:ln w="9525">
+            <a:solidFill>
+              <a:srgbClr val="0F62CE"/>
+            </a:solidFill>
+          </a:ln>
+        </p:spPr>
+        <p:txBody>
+          <a:bodyPr rtlCol="0" anchor="ctr"/>
+          <a:lstStyle/>
+          <a:p>
+            <a:pPr algn="ctr"/>
+          </a:p>
+        </p:txBody>
+      </p:sp>
+      <p:sp>
+        <p:nvSpPr>
+          <p:cNvPr id="79" name="TextBox 78"/>
+          <p:cNvSpPr txBox="1"/>
+          <p:nvPr/>
+        </p:nvSpPr>
+        <p:spPr>
+          <a:xfrm>
+            <a:off x="3968496" y="2834640"/>
+            <a:ext cx="4590288" cy="384048"/>
+          </a:xfrm>
+          <a:prstGeom prst="rect">
+            <a:avLst/>
+          </a:prstGeom>
+          <a:noFill/>
+        </p:spPr>
+        <p:txBody>
+          <a:bodyPr wrap="square" anchor="ctr" lIns="0" tIns="0" rIns="0" bIns="0">
+            <a:noAutofit/>
+          </a:bodyPr>
+          <a:lstStyle/>
+          <a:p>
+            <a:pPr algn="ctr" latinLnBrk="0">
+              <a:lnSpc>
+                <a:spcPct val="100000"/>
+              </a:lnSpc>
+              <a:spcBef>
+                <a:spcPts val="0"/>
+              </a:spcBef>
+              <a:spcAft>
+                <a:spcPts val="0"/>
+              </a:spcAft>
+            </a:pPr>
+            <a:r>
+              <a:rPr sz="1050" b="1">
+                <a:solidFill>
+                  <a:srgbClr val="0F62CE"/>
+                </a:solidFill>
+                <a:latin typeface="Microsoft YaHei"/>
+                <a:ea typeface="Microsoft YaHei"/>
+                <a:cs typeface="Microsoft YaHei"/>
+              </a:rPr>
+              <a:t>状态机与编排</a:t>
+            </a:r>
+            <a:r>
+              <a:rPr sz="700" b="0">
+                <a:solidFill>
+                  <a:srgbClr val="40708B"/>
+                </a:solidFill>
+                <a:latin typeface="Consolas"/>
+                <a:ea typeface="Microsoft YaHei"/>
+                <a:cs typeface="Microsoft YaHei"/>
+              </a:rPr>
+              <a:t>　optimization.py · selfiterate.py</a:t>
+            </a:r>
+          </a:p>
+          <a:p>
+            <a:pPr algn="ctr" latinLnBrk="0">
+              <a:lnSpc>
+                <a:spcPct val="100000"/>
+              </a:lnSpc>
+              <a:spcBef>
+                <a:spcPts val="0"/>
+              </a:spcBef>
+              <a:spcAft>
+                <a:spcPts val="0"/>
+              </a:spcAft>
+            </a:pPr>
+            <a:r>
+              <a:rPr sz="800" b="0">
+                <a:solidFill>
+                  <a:srgbClr val="123C5B"/>
+                </a:solidFill>
+                <a:latin typeface="Microsoft YaHei"/>
+                <a:ea typeface="Microsoft YaHei"/>
+                <a:cs typeface="Microsoft YaHei"/>
+              </a:rPr>
+              <a:t>设备锁 · 状态流转 · 中断恢复 · 版本晋升 · 报告生成</a:t>
+            </a:r>
+          </a:p>
+        </p:txBody>
+      </p:sp>
+      <p:sp>
+        <p:nvSpPr>
+          <p:cNvPr id="80" name="Rectangle 79"/>
+          <p:cNvSpPr/>
+          <p:nvPr/>
+        </p:nvSpPr>
+        <p:spPr>
+          <a:xfrm>
+            <a:off x="3694176" y="3529584"/>
+            <a:ext cx="1530095" cy="676656"/>
+          </a:xfrm>
+          <a:prstGeom prst="rect">
+            <a:avLst/>
+          </a:prstGeom>
+          <a:solidFill>
+            <a:srgbClr val="FFFFFF"/>
+          </a:solidFill>
+          <a:ln w="12700">
+            <a:solidFill>
+              <a:srgbClr val="0F62CE"/>
+            </a:solidFill>
+          </a:ln>
+        </p:spPr>
+        <p:txBody>
+          <a:bodyPr rtlCol="0" anchor="ctr"/>
+          <a:lstStyle/>
+          <a:p>
+            <a:pPr algn="ctr"/>
+          </a:p>
+        </p:txBody>
+      </p:sp>
+      <p:sp>
+        <p:nvSpPr>
+          <p:cNvPr id="81" name="Rectangle 80"/>
+          <p:cNvSpPr/>
+          <p:nvPr/>
+        </p:nvSpPr>
+        <p:spPr>
+          <a:xfrm>
+            <a:off x="5023104" y="3602736"/>
+            <a:ext cx="137160" cy="109728"/>
+          </a:xfrm>
+          <a:prstGeom prst="rect">
+            <a:avLst/>
+          </a:prstGeom>
+          <a:solidFill>
+            <a:srgbClr val="FFFFFF"/>
+          </a:solidFill>
+          <a:ln w="9525">
+            <a:solidFill>
+              <a:srgbClr val="0F62CE"/>
+            </a:solidFill>
+          </a:ln>
+        </p:spPr>
+        <p:txBody>
+          <a:bodyPr rtlCol="0" anchor="ctr"/>
+          <a:lstStyle/>
+          <a:p>
+            <a:pPr algn="ctr"/>
+          </a:p>
+        </p:txBody>
+      </p:sp>
+      <p:sp>
+        <p:nvSpPr>
+          <p:cNvPr id="82" name="Rectangle 81"/>
+          <p:cNvSpPr/>
+          <p:nvPr/>
+        </p:nvSpPr>
+        <p:spPr>
+          <a:xfrm>
+            <a:off x="4991100" y="3621024"/>
+            <a:ext cx="64008" cy="32004"/>
+          </a:xfrm>
+          <a:prstGeom prst="rect">
+            <a:avLst/>
+          </a:prstGeom>
+          <a:solidFill>
+            <a:srgbClr val="FFFFFF"/>
+          </a:solidFill>
+          <a:ln w="9525">
+            <a:solidFill>
+              <a:srgbClr val="0F62CE"/>
+            </a:solidFill>
+          </a:ln>
+        </p:spPr>
+        <p:txBody>
+          <a:bodyPr rtlCol="0" anchor="ctr"/>
+          <a:lstStyle/>
+          <a:p>
+            <a:pPr algn="ctr"/>
+          </a:p>
+        </p:txBody>
+      </p:sp>
+      <p:sp>
+        <p:nvSpPr>
+          <p:cNvPr id="83" name="Rectangle 82"/>
+          <p:cNvSpPr/>
+          <p:nvPr/>
+        </p:nvSpPr>
+        <p:spPr>
+          <a:xfrm>
+            <a:off x="4991100" y="3662172"/>
+            <a:ext cx="64008" cy="32004"/>
+          </a:xfrm>
+          <a:prstGeom prst="rect">
+            <a:avLst/>
+          </a:prstGeom>
+          <a:solidFill>
+            <a:srgbClr val="FFFFFF"/>
+          </a:solidFill>
+          <a:ln w="9525">
+            <a:solidFill>
+              <a:srgbClr val="0F62CE"/>
+            </a:solidFill>
+          </a:ln>
+        </p:spPr>
+        <p:txBody>
+          <a:bodyPr rtlCol="0" anchor="ctr"/>
+          <a:lstStyle/>
+          <a:p>
+            <a:pPr algn="ctr"/>
+          </a:p>
+        </p:txBody>
+      </p:sp>
+      <p:sp>
+        <p:nvSpPr>
+          <p:cNvPr id="84" name="TextBox 83"/>
+          <p:cNvSpPr txBox="1"/>
+          <p:nvPr/>
+        </p:nvSpPr>
+        <p:spPr>
+          <a:xfrm>
+            <a:off x="3803904" y="3566160"/>
+            <a:ext cx="1328927" cy="603504"/>
+          </a:xfrm>
+          <a:prstGeom prst="rect">
+            <a:avLst/>
+          </a:prstGeom>
+          <a:noFill/>
+        </p:spPr>
+        <p:txBody>
+          <a:bodyPr wrap="square" anchor="ctr" lIns="0" tIns="0" rIns="0" bIns="0">
+            <a:noAutofit/>
+          </a:bodyPr>
+          <a:lstStyle/>
+          <a:p>
+            <a:pPr algn="l" latinLnBrk="0">
+              <a:lnSpc>
+                <a:spcPct val="100000"/>
+              </a:lnSpc>
+              <a:spcBef>
+                <a:spcPts val="0"/>
+              </a:spcBef>
+              <a:spcAft>
+                <a:spcPts val="100"/>
+              </a:spcAft>
+            </a:pPr>
+            <a:r>
+              <a:rPr sz="950" b="1">
+                <a:solidFill>
+                  <a:srgbClr val="0A2B45"/>
+                </a:solidFill>
+                <a:latin typeface="Microsoft YaHei"/>
+                <a:ea typeface="Microsoft YaHei"/>
+                <a:cs typeface="Microsoft YaHei"/>
+              </a:rPr>
+              <a:t>有界取证</a:t>
+            </a:r>
+          </a:p>
+          <a:p>
+            <a:pPr algn="l" latinLnBrk="0">
+              <a:lnSpc>
+                <a:spcPct val="100000"/>
+              </a:lnSpc>
+              <a:spcBef>
+                <a:spcPts val="0"/>
+              </a:spcBef>
+              <a:spcAft>
+                <a:spcPts val="200"/>
+              </a:spcAft>
+            </a:pPr>
+            <a:r>
+              <a:rPr sz="700" b="0">
+                <a:solidFill>
+                  <a:srgbClr val="0F62CE"/>
+                </a:solidFill>
+                <a:latin typeface="Consolas"/>
+                <a:ea typeface="Microsoft YaHei"/>
+                <a:cs typeface="Microsoft YaHei"/>
+              </a:rPr>
+              <a:t>planner_diagnostics.py</a:t>
+            </a:r>
+          </a:p>
+          <a:p>
+            <a:pPr algn="l" latinLnBrk="0">
+              <a:lnSpc>
+                <a:spcPct val="100000"/>
+              </a:lnSpc>
+              <a:spcBef>
+                <a:spcPts val="0"/>
+              </a:spcBef>
+              <a:spcAft>
+                <a:spcPts val="0"/>
+              </a:spcAft>
+            </a:pPr>
+            <a:r>
+              <a:rPr sz="800" b="0">
+                <a:solidFill>
+                  <a:srgbClr val="1B4D69"/>
+                </a:solidFill>
+                <a:latin typeface="Microsoft YaHei"/>
+                <a:ea typeface="Microsoft YaHei"/>
+                <a:cs typeface="Microsoft YaHei"/>
+              </a:rPr>
+              <a:t>独立进程 probe</a:t>
+            </a:r>
+          </a:p>
+          <a:p>
+            <a:pPr algn="l" latinLnBrk="0">
+              <a:lnSpc>
+                <a:spcPct val="100000"/>
+              </a:lnSpc>
+              <a:spcBef>
+                <a:spcPts val="0"/>
+              </a:spcBef>
+              <a:spcAft>
+                <a:spcPts val="0"/>
+              </a:spcAft>
+            </a:pPr>
+            <a:r>
+              <a:rPr sz="800" b="0">
+                <a:solidFill>
+                  <a:srgbClr val="1B4D69"/>
+                </a:solidFill>
+                <a:latin typeface="Microsoft YaHei"/>
+                <a:ea typeface="Microsoft YaHei"/>
+                <a:cs typeface="Microsoft YaHei"/>
+              </a:rPr>
+              <a:t>产物 ≤ 64 KiB · 落盘</a:t>
+            </a:r>
+          </a:p>
+        </p:txBody>
+      </p:sp>
+      <p:sp>
+        <p:nvSpPr>
+          <p:cNvPr id="85" name="Rectangle 84"/>
+          <p:cNvSpPr/>
+          <p:nvPr/>
+        </p:nvSpPr>
+        <p:spPr>
+          <a:xfrm>
+            <a:off x="5498592" y="3529584"/>
+            <a:ext cx="1530095" cy="676656"/>
+          </a:xfrm>
+          <a:prstGeom prst="rect">
+            <a:avLst/>
+          </a:prstGeom>
+          <a:solidFill>
+            <a:srgbClr val="FFFFFF"/>
+          </a:solidFill>
+          <a:ln w="12700">
+            <a:solidFill>
+              <a:srgbClr val="0F62CE"/>
+            </a:solidFill>
+          </a:ln>
+        </p:spPr>
+        <p:txBody>
+          <a:bodyPr rtlCol="0" anchor="ctr"/>
+          <a:lstStyle/>
+          <a:p>
+            <a:pPr algn="ctr"/>
+          </a:p>
+        </p:txBody>
+      </p:sp>
+      <p:sp>
+        <p:nvSpPr>
+          <p:cNvPr id="86" name="Rectangle 85"/>
+          <p:cNvSpPr/>
+          <p:nvPr/>
+        </p:nvSpPr>
+        <p:spPr>
+          <a:xfrm>
+            <a:off x="6827520" y="3602736"/>
+            <a:ext cx="137160" cy="109728"/>
+          </a:xfrm>
+          <a:prstGeom prst="rect">
+            <a:avLst/>
+          </a:prstGeom>
+          <a:solidFill>
+            <a:srgbClr val="FFFFFF"/>
+          </a:solidFill>
+          <a:ln w="9525">
+            <a:solidFill>
+              <a:srgbClr val="0F62CE"/>
+            </a:solidFill>
+          </a:ln>
+        </p:spPr>
+        <p:txBody>
+          <a:bodyPr rtlCol="0" anchor="ctr"/>
+          <a:lstStyle/>
+          <a:p>
+            <a:pPr algn="ctr"/>
+          </a:p>
+        </p:txBody>
+      </p:sp>
+      <p:sp>
+        <p:nvSpPr>
+          <p:cNvPr id="87" name="Rectangle 86"/>
+          <p:cNvSpPr/>
+          <p:nvPr/>
+        </p:nvSpPr>
+        <p:spPr>
+          <a:xfrm>
+            <a:off x="6795516" y="3621024"/>
+            <a:ext cx="64008" cy="32004"/>
+          </a:xfrm>
+          <a:prstGeom prst="rect">
+            <a:avLst/>
+          </a:prstGeom>
+          <a:solidFill>
+            <a:srgbClr val="FFFFFF"/>
+          </a:solidFill>
+          <a:ln w="9525">
+            <a:solidFill>
+              <a:srgbClr val="0F62CE"/>
+            </a:solidFill>
+          </a:ln>
+        </p:spPr>
+        <p:txBody>
+          <a:bodyPr rtlCol="0" anchor="ctr"/>
+          <a:lstStyle/>
+          <a:p>
+            <a:pPr algn="ctr"/>
+          </a:p>
+        </p:txBody>
+      </p:sp>
+      <p:sp>
+        <p:nvSpPr>
+          <p:cNvPr id="88" name="Rectangle 87"/>
+          <p:cNvSpPr/>
+          <p:nvPr/>
+        </p:nvSpPr>
+        <p:spPr>
+          <a:xfrm>
+            <a:off x="6795516" y="3662172"/>
+            <a:ext cx="64008" cy="32004"/>
+          </a:xfrm>
+          <a:prstGeom prst="rect">
+            <a:avLst/>
+          </a:prstGeom>
+          <a:solidFill>
+            <a:srgbClr val="FFFFFF"/>
+          </a:solidFill>
+          <a:ln w="9525">
+            <a:solidFill>
+              <a:srgbClr val="0F62CE"/>
+            </a:solidFill>
+          </a:ln>
+        </p:spPr>
+        <p:txBody>
+          <a:bodyPr rtlCol="0" anchor="ctr"/>
+          <a:lstStyle/>
+          <a:p>
+            <a:pPr algn="ctr"/>
+          </a:p>
+        </p:txBody>
+      </p:sp>
+      <p:sp>
+        <p:nvSpPr>
+          <p:cNvPr id="89" name="TextBox 88"/>
+          <p:cNvSpPr txBox="1"/>
+          <p:nvPr/>
+        </p:nvSpPr>
+        <p:spPr>
+          <a:xfrm>
+            <a:off x="5608320" y="3566160"/>
+            <a:ext cx="1328927" cy="603504"/>
+          </a:xfrm>
+          <a:prstGeom prst="rect">
+            <a:avLst/>
+          </a:prstGeom>
+          <a:noFill/>
+        </p:spPr>
+        <p:txBody>
+          <a:bodyPr wrap="square" anchor="ctr" lIns="0" tIns="0" rIns="0" bIns="0">
+            <a:noAutofit/>
+          </a:bodyPr>
+          <a:lstStyle/>
+          <a:p>
+            <a:pPr algn="l" latinLnBrk="0">
+              <a:lnSpc>
+                <a:spcPct val="100000"/>
+              </a:lnSpc>
+              <a:spcBef>
+                <a:spcPts val="0"/>
+              </a:spcBef>
+              <a:spcAft>
+                <a:spcPts val="100"/>
+              </a:spcAft>
+            </a:pPr>
+            <a:r>
+              <a:rPr sz="950" b="1">
+                <a:solidFill>
+                  <a:srgbClr val="0A2B45"/>
+                </a:solidFill>
+                <a:latin typeface="Microsoft YaHei"/>
+                <a:ea typeface="Microsoft YaHei"/>
+                <a:cs typeface="Microsoft YaHei"/>
+              </a:rPr>
+              <a:t>通信 mailbox</a:t>
+            </a:r>
+          </a:p>
+          <a:p>
+            <a:pPr algn="l" latinLnBrk="0">
+              <a:lnSpc>
+                <a:spcPct val="100000"/>
+              </a:lnSpc>
+              <a:spcBef>
+                <a:spcPts val="0"/>
+              </a:spcBef>
+              <a:spcAft>
+                <a:spcPts val="200"/>
+              </a:spcAft>
+            </a:pPr>
+            <a:r>
+              <a:rPr sz="700" b="0">
+                <a:solidFill>
+                  <a:srgbClr val="0F62CE"/>
+                </a:solidFill>
+                <a:latin typeface="Consolas"/>
+                <a:ea typeface="Microsoft YaHei"/>
+                <a:cs typeface="Microsoft YaHei"/>
+              </a:rPr>
+              <a:t>planner_mailbox.py</a:t>
+            </a:r>
+          </a:p>
+          <a:p>
+            <a:pPr algn="l" latinLnBrk="0">
+              <a:lnSpc>
+                <a:spcPct val="100000"/>
+              </a:lnSpc>
+              <a:spcBef>
+                <a:spcPts val="0"/>
+              </a:spcBef>
+              <a:spcAft>
+                <a:spcPts val="0"/>
+              </a:spcAft>
+            </a:pPr>
+            <a:r>
+              <a:rPr sz="800" b="0">
+                <a:solidFill>
+                  <a:srgbClr val="1B4D69"/>
+                </a:solidFill>
+                <a:latin typeface="Microsoft YaHei"/>
+                <a:ea typeface="Microsoft YaHei"/>
+                <a:cs typeface="Microsoft YaHei"/>
+              </a:rPr>
+              <a:t>UUID + SHA + schema</a:t>
+            </a:r>
+          </a:p>
+          <a:p>
+            <a:pPr algn="l" latinLnBrk="0">
+              <a:lnSpc>
+                <a:spcPct val="100000"/>
+              </a:lnSpc>
+              <a:spcBef>
+                <a:spcPts val="0"/>
+              </a:spcBef>
+              <a:spcAft>
+                <a:spcPts val="0"/>
+              </a:spcAft>
+            </a:pPr>
+            <a:r>
+              <a:rPr sz="800" b="0">
+                <a:solidFill>
+                  <a:srgbClr val="1B4D69"/>
+                </a:solidFill>
+                <a:latin typeface="Microsoft YaHei"/>
+                <a:ea typeface="Microsoft YaHei"/>
+                <a:cs typeface="Microsoft YaHei"/>
+              </a:rPr>
+              <a:t>消息 ≤ 28 KB · 落盘</a:t>
+            </a:r>
+          </a:p>
+        </p:txBody>
+      </p:sp>
+      <p:sp>
+        <p:nvSpPr>
+          <p:cNvPr id="90" name="Rectangle 89"/>
+          <p:cNvSpPr/>
+          <p:nvPr/>
+        </p:nvSpPr>
+        <p:spPr>
+          <a:xfrm>
+            <a:off x="7303008" y="3529584"/>
+            <a:ext cx="1530095" cy="676656"/>
+          </a:xfrm>
+          <a:prstGeom prst="rect">
+            <a:avLst/>
+          </a:prstGeom>
+          <a:solidFill>
+            <a:srgbClr val="FFFFFF"/>
+          </a:solidFill>
+          <a:ln w="12700">
+            <a:solidFill>
+              <a:srgbClr val="0F62CE"/>
+            </a:solidFill>
+          </a:ln>
+        </p:spPr>
+        <p:txBody>
+          <a:bodyPr rtlCol="0" anchor="ctr"/>
+          <a:lstStyle/>
+          <a:p>
+            <a:pPr algn="ctr"/>
+          </a:p>
+        </p:txBody>
+      </p:sp>
+      <p:sp>
+        <p:nvSpPr>
+          <p:cNvPr id="91" name="Rectangle 90"/>
+          <p:cNvSpPr/>
+          <p:nvPr/>
+        </p:nvSpPr>
+        <p:spPr>
+          <a:xfrm>
+            <a:off x="8631936" y="3602736"/>
+            <a:ext cx="137160" cy="109728"/>
+          </a:xfrm>
+          <a:prstGeom prst="rect">
+            <a:avLst/>
+          </a:prstGeom>
+          <a:solidFill>
+            <a:srgbClr val="FFFFFF"/>
+          </a:solidFill>
+          <a:ln w="9525">
+            <a:solidFill>
+              <a:srgbClr val="0F62CE"/>
+            </a:solidFill>
+          </a:ln>
+        </p:spPr>
+        <p:txBody>
+          <a:bodyPr rtlCol="0" anchor="ctr"/>
+          <a:lstStyle/>
+          <a:p>
+            <a:pPr algn="ctr"/>
+          </a:p>
+        </p:txBody>
+      </p:sp>
+      <p:sp>
+        <p:nvSpPr>
+          <p:cNvPr id="92" name="Rectangle 91"/>
+          <p:cNvSpPr/>
+          <p:nvPr/>
+        </p:nvSpPr>
+        <p:spPr>
+          <a:xfrm>
+            <a:off x="8599932" y="3621024"/>
+            <a:ext cx="64008" cy="32004"/>
+          </a:xfrm>
+          <a:prstGeom prst="rect">
+            <a:avLst/>
+          </a:prstGeom>
+          <a:solidFill>
+            <a:srgbClr val="FFFFFF"/>
+          </a:solidFill>
+          <a:ln w="9525">
+            <a:solidFill>
+              <a:srgbClr val="0F62CE"/>
+            </a:solidFill>
+          </a:ln>
+        </p:spPr>
+        <p:txBody>
+          <a:bodyPr rtlCol="0" anchor="ctr"/>
+          <a:lstStyle/>
+          <a:p>
+            <a:pPr algn="ctr"/>
+          </a:p>
+        </p:txBody>
+      </p:sp>
+      <p:sp>
+        <p:nvSpPr>
+          <p:cNvPr id="93" name="Rectangle 92"/>
+          <p:cNvSpPr/>
+          <p:nvPr/>
+        </p:nvSpPr>
+        <p:spPr>
+          <a:xfrm>
+            <a:off x="8599932" y="3662172"/>
+            <a:ext cx="64008" cy="32004"/>
+          </a:xfrm>
+          <a:prstGeom prst="rect">
+            <a:avLst/>
+          </a:prstGeom>
+          <a:solidFill>
+            <a:srgbClr val="FFFFFF"/>
+          </a:solidFill>
+          <a:ln w="9525">
+            <a:solidFill>
+              <a:srgbClr val="0F62CE"/>
+            </a:solidFill>
+          </a:ln>
+        </p:spPr>
+        <p:txBody>
+          <a:bodyPr rtlCol="0" anchor="ctr"/>
+          <a:lstStyle/>
+          <a:p>
+            <a:pPr algn="ctr"/>
+          </a:p>
+        </p:txBody>
+      </p:sp>
+      <p:sp>
+        <p:nvSpPr>
+          <p:cNvPr id="94" name="TextBox 93"/>
+          <p:cNvSpPr txBox="1"/>
+          <p:nvPr/>
+        </p:nvSpPr>
+        <p:spPr>
+          <a:xfrm>
+            <a:off x="7412735" y="3566160"/>
+            <a:ext cx="1328927" cy="603504"/>
+          </a:xfrm>
+          <a:prstGeom prst="rect">
+            <a:avLst/>
+          </a:prstGeom>
+          <a:noFill/>
+        </p:spPr>
+        <p:txBody>
+          <a:bodyPr wrap="square" anchor="ctr" lIns="0" tIns="0" rIns="0" bIns="0">
+            <a:noAutofit/>
+          </a:bodyPr>
+          <a:lstStyle/>
+          <a:p>
+            <a:pPr algn="l" latinLnBrk="0">
+              <a:lnSpc>
+                <a:spcPct val="100000"/>
+              </a:lnSpc>
+              <a:spcBef>
+                <a:spcPts val="0"/>
+              </a:spcBef>
+              <a:spcAft>
+                <a:spcPts val="100"/>
+              </a:spcAft>
+            </a:pPr>
+            <a:r>
+              <a:rPr sz="950" b="1">
+                <a:solidFill>
+                  <a:srgbClr val="0A2B45"/>
+                </a:solidFill>
+                <a:latin typeface="Microsoft YaHei"/>
+                <a:ea typeface="Microsoft YaHei"/>
+                <a:cs typeface="Microsoft YaHei"/>
+              </a:rPr>
+              <a:t>记忆 memory</a:t>
+            </a:r>
+          </a:p>
+          <a:p>
+            <a:pPr algn="l" latinLnBrk="0">
+              <a:lnSpc>
+                <a:spcPct val="100000"/>
+              </a:lnSpc>
+              <a:spcBef>
+                <a:spcPts val="0"/>
+              </a:spcBef>
+              <a:spcAft>
+                <a:spcPts val="200"/>
+              </a:spcAft>
+            </a:pPr>
+            <a:r>
+              <a:rPr sz="700" b="0">
+                <a:solidFill>
+                  <a:srgbClr val="0F62CE"/>
+                </a:solidFill>
+                <a:latin typeface="Consolas"/>
+                <a:ea typeface="Microsoft YaHei"/>
+                <a:cs typeface="Microsoft YaHei"/>
+              </a:rPr>
+              <a:t>planner_memory.py</a:t>
+            </a:r>
+          </a:p>
+          <a:p>
+            <a:pPr algn="l" latinLnBrk="0">
+              <a:lnSpc>
+                <a:spcPct val="100000"/>
+              </a:lnSpc>
+              <a:spcBef>
+                <a:spcPts val="0"/>
+              </a:spcBef>
+              <a:spcAft>
+                <a:spcPts val="0"/>
+              </a:spcAft>
+            </a:pPr>
+            <a:r>
+              <a:rPr sz="800" b="0">
+                <a:solidFill>
+                  <a:srgbClr val="1B4D69"/>
+                </a:solidFill>
+                <a:latin typeface="Microsoft YaHei"/>
+                <a:ea typeface="Microsoft YaHei"/>
+                <a:cs typeface="Microsoft YaHei"/>
+              </a:rPr>
+              <a:t>摘要 + 指纹 + 拒绝原因</a:t>
+            </a:r>
+          </a:p>
+          <a:p>
+            <a:pPr algn="l" latinLnBrk="0">
+              <a:lnSpc>
+                <a:spcPct val="100000"/>
+              </a:lnSpc>
+              <a:spcBef>
+                <a:spcPts val="0"/>
+              </a:spcBef>
+              <a:spcAft>
+                <a:spcPts val="0"/>
+              </a:spcAft>
+            </a:pPr>
+            <a:r>
+              <a:rPr sz="800" b="0">
+                <a:solidFill>
+                  <a:srgbClr val="1B4D69"/>
+                </a:solidFill>
+                <a:latin typeface="Microsoft YaHei"/>
+                <a:ea typeface="Microsoft YaHei"/>
+                <a:cs typeface="Microsoft YaHei"/>
+              </a:rPr>
+              <a:t>滚动压缩至 ≤ 18 KB</a:t>
+            </a:r>
+          </a:p>
+        </p:txBody>
+      </p:sp>
+      <p:cxnSp>
+        <p:nvCxnSpPr>
+          <p:cNvPr id="95" name="Connector 94"/>
+          <p:cNvCxnSpPr/>
+          <p:nvPr/>
+        </p:nvCxnSpPr>
+        <p:spPr>
+          <a:xfrm>
+            <a:off x="5242559" y="3867911"/>
+            <a:ext cx="237745" cy="0"/>
+          </a:xfrm>
+          <a:prstGeom prst="line">
+            <a:avLst/>
+          </a:prstGeom>
+          <a:ln w="15875">
+            <a:solidFill>
+              <a:srgbClr val="0F62CE"/>
+            </a:solidFill>
+            <a:headEnd type="triangle" w="med" len="med"/>
+            <a:tailEnd type="triangle" w="med" len="med"/>
+          </a:ln>
+        </p:spPr>
+      </p:cxnSp>
+      <p:sp>
+        <p:nvSpPr>
+          <p:cNvPr id="96" name="TextBox 95"/>
+          <p:cNvSpPr txBox="1"/>
+          <p:nvPr/>
+        </p:nvSpPr>
+        <p:spPr>
+          <a:xfrm>
+            <a:off x="5169408" y="3685031"/>
+            <a:ext cx="384048" cy="146304"/>
+          </a:xfrm>
+          <a:prstGeom prst="rect">
+            <a:avLst/>
+          </a:prstGeom>
+          <a:noFill/>
+        </p:spPr>
+        <p:txBody>
+          <a:bodyPr wrap="square" anchor="ctr" lIns="0" tIns="0" rIns="0" bIns="0">
+            <a:noAutofit/>
+          </a:bodyPr>
+          <a:lstStyle/>
+          <a:p>
+            <a:pPr algn="ctr" latinLnBrk="0">
+              <a:lnSpc>
+                <a:spcPct val="100000"/>
+              </a:lnSpc>
+              <a:spcBef>
+                <a:spcPts val="0"/>
+              </a:spcBef>
+              <a:spcAft>
+                <a:spcPts val="0"/>
+              </a:spcAft>
+            </a:pPr>
+            <a:r>
+              <a:rPr sz="700" b="1">
+                <a:solidFill>
+                  <a:srgbClr val="0F62CE"/>
+                </a:solidFill>
+                <a:latin typeface="Microsoft YaHei"/>
+                <a:ea typeface="Microsoft YaHei"/>
+                <a:cs typeface="Microsoft YaHei"/>
+              </a:rPr>
+              <a:t>探针</a:t>
+            </a:r>
+          </a:p>
+        </p:txBody>
+      </p:sp>
+      <p:cxnSp>
+        <p:nvCxnSpPr>
+          <p:cNvPr id="97" name="Connector 96"/>
+          <p:cNvCxnSpPr/>
+          <p:nvPr/>
+        </p:nvCxnSpPr>
+        <p:spPr>
+          <a:xfrm flipH="1">
+            <a:off x="7046975" y="3867911"/>
+            <a:ext cx="237745" cy="0"/>
+          </a:xfrm>
+          <a:prstGeom prst="line">
+            <a:avLst/>
+          </a:prstGeom>
+          <a:ln w="15875">
+            <a:solidFill>
+              <a:srgbClr val="0F62CE"/>
+            </a:solidFill>
+            <a:tailEnd type="triangle" w="med" len="med"/>
+          </a:ln>
+        </p:spPr>
+      </p:cxnSp>
+      <p:sp>
+        <p:nvSpPr>
+          <p:cNvPr id="98" name="TextBox 97"/>
+          <p:cNvSpPr txBox="1"/>
+          <p:nvPr/>
+        </p:nvSpPr>
+        <p:spPr>
+          <a:xfrm>
+            <a:off x="6973824" y="3685031"/>
+            <a:ext cx="384048" cy="146304"/>
+          </a:xfrm>
+          <a:prstGeom prst="rect">
+            <a:avLst/>
+          </a:prstGeom>
+          <a:noFill/>
+        </p:spPr>
+        <p:txBody>
+          <a:bodyPr wrap="square" anchor="ctr" lIns="0" tIns="0" rIns="0" bIns="0">
+            <a:noAutofit/>
+          </a:bodyPr>
+          <a:lstStyle/>
+          <a:p>
+            <a:pPr algn="ctr" latinLnBrk="0">
+              <a:lnSpc>
+                <a:spcPct val="100000"/>
+              </a:lnSpc>
+              <a:spcBef>
+                <a:spcPts val="0"/>
+              </a:spcBef>
+              <a:spcAft>
+                <a:spcPts val="0"/>
+              </a:spcAft>
+            </a:pPr>
+            <a:r>
+              <a:rPr sz="700" b="1">
+                <a:solidFill>
+                  <a:srgbClr val="0F62CE"/>
+                </a:solidFill>
+                <a:latin typeface="Microsoft YaHei"/>
+                <a:ea typeface="Microsoft YaHei"/>
+                <a:cs typeface="Microsoft YaHei"/>
+              </a:rPr>
+              <a:t>压缩</a:t>
+            </a:r>
+          </a:p>
+        </p:txBody>
+      </p:sp>
+      <p:cxnSp>
+        <p:nvCxnSpPr>
+          <p:cNvPr id="99" name="Connector 98"/>
+          <p:cNvCxnSpPr/>
+          <p:nvPr/>
+        </p:nvCxnSpPr>
+        <p:spPr>
+          <a:xfrm>
+            <a:off x="8068055" y="3227832"/>
+            <a:ext cx="0" cy="292608"/>
+          </a:xfrm>
+          <a:prstGeom prst="line">
+            <a:avLst/>
+          </a:prstGeom>
+          <a:ln w="19050">
+            <a:solidFill>
+              <a:srgbClr val="D2690C"/>
+            </a:solidFill>
+            <a:tailEnd type="triangle" w="med" len="med"/>
+          </a:ln>
+        </p:spPr>
+      </p:cxnSp>
+      <p:cxnSp>
+        <p:nvCxnSpPr>
+          <p:cNvPr id="100" name="Connector 99"/>
+          <p:cNvCxnSpPr/>
+          <p:nvPr/>
+        </p:nvCxnSpPr>
+        <p:spPr>
+          <a:xfrm flipV="1">
+            <a:off x="6537960" y="3227832"/>
+            <a:ext cx="0" cy="292608"/>
+          </a:xfrm>
+          <a:prstGeom prst="line">
+            <a:avLst/>
+          </a:prstGeom>
+          <a:ln w="19050">
+            <a:solidFill>
+              <a:srgbClr val="D2690C"/>
+            </a:solidFill>
+            <a:tailEnd type="triangle" w="med" len="med"/>
+          </a:ln>
+        </p:spPr>
+      </p:cxnSp>
+      <p:sp>
+        <p:nvSpPr>
+          <p:cNvPr id="101" name="TextBox 100"/>
+          <p:cNvSpPr txBox="1"/>
+          <p:nvPr/>
+        </p:nvSpPr>
+        <p:spPr>
+          <a:xfrm>
+            <a:off x="5010912" y="3218688"/>
+            <a:ext cx="1463040" cy="310895"/>
+          </a:xfrm>
+          <a:prstGeom prst="rect">
+            <a:avLst/>
+          </a:prstGeom>
+          <a:noFill/>
+        </p:spPr>
+        <p:txBody>
+          <a:bodyPr wrap="square" anchor="ctr" lIns="0" tIns="0" rIns="0" bIns="0">
+            <a:noAutofit/>
+          </a:bodyPr>
+          <a:lstStyle/>
+          <a:p>
+            <a:pPr algn="r" latinLnBrk="0">
+              <a:lnSpc>
+                <a:spcPct val="100000"/>
+              </a:lnSpc>
+              <a:spcBef>
+                <a:spcPts val="0"/>
+              </a:spcBef>
+              <a:spcAft>
+                <a:spcPts val="0"/>
+              </a:spcAft>
+            </a:pPr>
+            <a:r>
+              <a:rPr sz="750" b="1">
+                <a:solidFill>
+                  <a:srgbClr val="C2570A"/>
+                </a:solidFill>
+                <a:latin typeface="Microsoft YaHei"/>
+                <a:ea typeface="Microsoft YaHei"/>
+                <a:cs typeface="Microsoft YaHei"/>
+              </a:rPr>
+              <a:t>提交：假设 + 补丁</a:t>
+            </a:r>
+          </a:p>
+        </p:txBody>
+      </p:sp>
+      <p:sp>
+        <p:nvSpPr>
+          <p:cNvPr id="102" name="TextBox 101"/>
+          <p:cNvSpPr txBox="1"/>
+          <p:nvPr/>
+        </p:nvSpPr>
+        <p:spPr>
+          <a:xfrm>
+            <a:off x="6541007" y="3218688"/>
+            <a:ext cx="1463040" cy="310895"/>
+          </a:xfrm>
+          <a:prstGeom prst="rect">
+            <a:avLst/>
+          </a:prstGeom>
+          <a:noFill/>
+        </p:spPr>
+        <p:txBody>
+          <a:bodyPr wrap="square" anchor="ctr" lIns="0" tIns="0" rIns="0" bIns="0">
+            <a:noAutofit/>
+          </a:bodyPr>
+          <a:lstStyle/>
+          <a:p>
+            <a:pPr algn="r" latinLnBrk="0">
+              <a:lnSpc>
+                <a:spcPct val="100000"/>
+              </a:lnSpc>
+              <a:spcBef>
+                <a:spcPts val="0"/>
+              </a:spcBef>
+              <a:spcAft>
+                <a:spcPts val="0"/>
+              </a:spcAft>
+            </a:pPr>
+            <a:r>
+              <a:rPr sz="750" b="1">
+                <a:solidFill>
+                  <a:srgbClr val="C2570A"/>
+                </a:solidFill>
+                <a:latin typeface="Microsoft YaHei"/>
+                <a:ea typeface="Microsoft YaHei"/>
+                <a:cs typeface="Microsoft YaHei"/>
+              </a:rPr>
+              <a:t>下发：账本 + 被拒记忆</a:t>
+            </a:r>
+          </a:p>
+        </p:txBody>
+      </p:sp>
+      <p:sp>
+        <p:nvSpPr>
+          <p:cNvPr id="103" name="Rectangle 102"/>
+          <p:cNvSpPr/>
+          <p:nvPr/>
+        </p:nvSpPr>
+        <p:spPr>
+          <a:xfrm>
+            <a:off x="3566160" y="4681728"/>
+            <a:ext cx="5394959" cy="786384"/>
+          </a:xfrm>
+          <a:prstGeom prst="rect">
+            <a:avLst/>
+          </a:prstGeom>
+          <a:solidFill>
+            <a:srgbClr val="FBE6D4"/>
+          </a:solidFill>
+          <a:ln w="15875">
+            <a:solidFill>
+              <a:srgbClr val="D2690C"/>
+            </a:solidFill>
+            <a:prstDash val="dash"/>
+          </a:ln>
+        </p:spPr>
+        <p:txBody>
+          <a:bodyPr rtlCol="0" anchor="ctr"/>
+          <a:lstStyle/>
+          <a:p>
+            <a:pPr algn="ctr"/>
+          </a:p>
+        </p:txBody>
+      </p:sp>
+      <p:sp>
+        <p:nvSpPr>
+          <p:cNvPr id="104" name="Rectangle 103"/>
+          <p:cNvSpPr/>
+          <p:nvPr/>
+        </p:nvSpPr>
+        <p:spPr>
+          <a:xfrm>
+            <a:off x="8723376" y="4764024"/>
+            <a:ext cx="137160" cy="109728"/>
+          </a:xfrm>
+          <a:prstGeom prst="rect">
+            <a:avLst/>
+          </a:prstGeom>
+          <a:solidFill>
+            <a:srgbClr val="FFFFFF"/>
+          </a:solidFill>
+          <a:ln w="9525">
+            <a:solidFill>
+              <a:srgbClr val="D2690C"/>
+            </a:solidFill>
+          </a:ln>
+        </p:spPr>
+        <p:txBody>
+          <a:bodyPr rtlCol="0" anchor="ctr"/>
+          <a:lstStyle/>
+          <a:p>
+            <a:pPr algn="ctr"/>
+          </a:p>
+        </p:txBody>
+      </p:sp>
+      <p:sp>
+        <p:nvSpPr>
+          <p:cNvPr id="105" name="Rectangle 104"/>
+          <p:cNvSpPr/>
+          <p:nvPr/>
+        </p:nvSpPr>
+        <p:spPr>
+          <a:xfrm>
+            <a:off x="8691372" y="4782312"/>
+            <a:ext cx="64008" cy="32004"/>
+          </a:xfrm>
+          <a:prstGeom prst="rect">
+            <a:avLst/>
+          </a:prstGeom>
+          <a:solidFill>
+            <a:srgbClr val="FFFFFF"/>
+          </a:solidFill>
+          <a:ln w="9525">
+            <a:solidFill>
+              <a:srgbClr val="D2690C"/>
+            </a:solidFill>
+          </a:ln>
+        </p:spPr>
+        <p:txBody>
+          <a:bodyPr rtlCol="0" anchor="ctr"/>
+          <a:lstStyle/>
+          <a:p>
+            <a:pPr algn="ctr"/>
+          </a:p>
+        </p:txBody>
+      </p:sp>
+      <p:sp>
+        <p:nvSpPr>
+          <p:cNvPr id="106" name="Rectangle 105"/>
+          <p:cNvSpPr/>
+          <p:nvPr/>
+        </p:nvSpPr>
+        <p:spPr>
+          <a:xfrm>
+            <a:off x="8691372" y="4823460"/>
+            <a:ext cx="64008" cy="32004"/>
+          </a:xfrm>
+          <a:prstGeom prst="rect">
+            <a:avLst/>
+          </a:prstGeom>
+          <a:solidFill>
+            <a:srgbClr val="FFFFFF"/>
+          </a:solidFill>
+          <a:ln w="9525">
+            <a:solidFill>
+              <a:srgbClr val="D2690C"/>
+            </a:solidFill>
+          </a:ln>
+        </p:spPr>
+        <p:txBody>
+          <a:bodyPr rtlCol="0" anchor="ctr"/>
+          <a:lstStyle/>
+          <a:p>
+            <a:pPr algn="ctr"/>
+          </a:p>
+        </p:txBody>
+      </p:sp>
+      <p:sp>
+        <p:nvSpPr>
+          <p:cNvPr id="107" name="TextBox 106"/>
+          <p:cNvSpPr txBox="1"/>
+          <p:nvPr/>
+        </p:nvSpPr>
+        <p:spPr>
+          <a:xfrm>
+            <a:off x="3712464" y="4736592"/>
+            <a:ext cx="3163824" cy="256032"/>
+          </a:xfrm>
+          <a:prstGeom prst="rect">
+            <a:avLst/>
+          </a:prstGeom>
+          <a:noFill/>
+        </p:spPr>
+        <p:txBody>
+          <a:bodyPr wrap="square" anchor="ctr" lIns="0" tIns="0" rIns="0" bIns="0">
+            <a:noAutofit/>
+          </a:bodyPr>
+          <a:lstStyle/>
+          <a:p>
+            <a:pPr algn="l" latinLnBrk="0">
+              <a:lnSpc>
+                <a:spcPct val="100000"/>
+              </a:lnSpc>
+              <a:spcBef>
+                <a:spcPts val="0"/>
+              </a:spcBef>
+              <a:spcAft>
+                <a:spcPts val="0"/>
+              </a:spcAft>
+            </a:pPr>
+            <a:r>
+              <a:rPr sz="1150" b="1">
+                <a:solidFill>
+                  <a:srgbClr val="0A2B45"/>
+                </a:solidFill>
+                <a:latin typeface="Microsoft YaHei"/>
+                <a:ea typeface="Microsoft YaHei"/>
+                <a:cs typeface="Microsoft YaHei"/>
+              </a:rPr>
+              <a:t>规划器</a:t>
+            </a:r>
+            <a:r>
+              <a:rPr sz="800" b="1">
+                <a:solidFill>
+                  <a:srgbClr val="C2570A"/>
+                </a:solidFill>
+                <a:latin typeface="Microsoft YaHei"/>
+                <a:ea typeface="Microsoft YaHei"/>
+                <a:cs typeface="Microsoft YaHei"/>
+              </a:rPr>
+              <a:t>　«component»　Codex 外部托管会话</a:t>
+            </a:r>
+          </a:p>
+        </p:txBody>
+      </p:sp>
+      <p:sp>
+        <p:nvSpPr>
+          <p:cNvPr id="108" name="Rounded Rectangle 107"/>
+          <p:cNvSpPr/>
+          <p:nvPr/>
+        </p:nvSpPr>
+        <p:spPr>
+          <a:xfrm>
+            <a:off x="7059168" y="4764024"/>
+            <a:ext cx="1499616" cy="201168"/>
+          </a:xfrm>
+          <a:prstGeom prst="roundRect">
+            <a:avLst>
+              <a:gd name="adj" fmla="val 50000"/>
+            </a:avLst>
+          </a:prstGeom>
+          <a:solidFill>
+            <a:srgbClr val="D2690C"/>
+          </a:solidFill>
+          <a:ln>
+            <a:noFill/>
+          </a:ln>
+        </p:spPr>
+        <p:txBody>
+          <a:bodyPr rtlCol="0" anchor="ctr" wrap="square" lIns="36576" tIns="0" rIns="36576" bIns="0">
+            <a:noAutofit/>
+          </a:bodyPr>
+          <a:lstStyle/>
+          <a:p>
+            <a:pPr algn="ctr" latinLnBrk="0">
+              <a:lnSpc>
+                <a:spcPct val="100000"/>
+              </a:lnSpc>
+              <a:spcBef>
+                <a:spcPts val="0"/>
+              </a:spcBef>
+              <a:spcAft>
+                <a:spcPts val="0"/>
+              </a:spcAft>
+            </a:pPr>
+            <a:r>
+              <a:rPr sz="750" b="1">
+                <a:solidFill>
+                  <a:srgbClr val="FFFFFF"/>
+                </a:solidFill>
+                <a:latin typeface="Microsoft YaHei"/>
+                <a:ea typeface="Microsoft YaHei"/>
+                <a:cs typeface="Microsoft YaHei"/>
+              </a:rPr>
+              <a:t>硬约束：不能自行宣告成功</a:t>
+            </a:r>
+          </a:p>
+        </p:txBody>
+      </p:sp>
+      <p:sp>
+        <p:nvSpPr>
+          <p:cNvPr id="109" name="TextBox 108"/>
+          <p:cNvSpPr txBox="1"/>
+          <p:nvPr/>
+        </p:nvSpPr>
+        <p:spPr>
+          <a:xfrm>
+            <a:off x="3712464" y="5010912"/>
+            <a:ext cx="5102351" cy="402336"/>
+          </a:xfrm>
+          <a:prstGeom prst="rect">
+            <a:avLst/>
+          </a:prstGeom>
+          <a:noFill/>
+        </p:spPr>
+        <p:txBody>
+          <a:bodyPr wrap="square" anchor="ctr" lIns="0" tIns="0" rIns="0" bIns="0">
+            <a:noAutofit/>
+          </a:bodyPr>
+          <a:lstStyle/>
+          <a:p>
+            <a:pPr algn="l" latinLnBrk="0">
+              <a:lnSpc>
+                <a:spcPct val="100000"/>
+              </a:lnSpc>
+              <a:spcBef>
+                <a:spcPts val="0"/>
+              </a:spcBef>
+              <a:spcAft>
+                <a:spcPts val="200"/>
+              </a:spcAft>
+            </a:pPr>
+            <a:r>
+              <a:rPr sz="850" b="0">
+                <a:solidFill>
+                  <a:srgbClr val="1B4D69"/>
+                </a:solidFill>
+                <a:latin typeface="Microsoft YaHei"/>
+                <a:ea typeface="Microsoft YaHei"/>
+                <a:cs typeface="Microsoft YaHei"/>
+              </a:rPr>
+              <a:t>读源码与冻结证据，形成假设，提出结构化动作；Skill 按需检索，每轮 ≤ 2 份</a:t>
+            </a:r>
+          </a:p>
+          <a:p>
+            <a:pPr algn="l" latinLnBrk="0">
+              <a:lnSpc>
+                <a:spcPct val="100000"/>
+              </a:lnSpc>
+              <a:spcBef>
+                <a:spcPts val="0"/>
+              </a:spcBef>
+              <a:spcAft>
+                <a:spcPts val="0"/>
+              </a:spcAft>
+            </a:pPr>
+            <a:r>
+              <a:rPr sz="850" b="0">
+                <a:solidFill>
+                  <a:srgbClr val="1B4D69"/>
+                </a:solidFill>
+                <a:latin typeface="Microsoft YaHei"/>
+                <a:ea typeface="Microsoft YaHei"/>
+                <a:cs typeface="Microsoft YaHei"/>
+              </a:rPr>
+              <a:t>动作限定：</a:t>
+            </a:r>
+            <a:r>
+              <a:rPr sz="800" b="0">
+                <a:solidFill>
+                  <a:srgbClr val="C2570A"/>
+                </a:solidFill>
+                <a:latin typeface="Consolas"/>
+                <a:ea typeface="Microsoft YaHei"/>
+                <a:cs typeface="Microsoft YaHei"/>
+              </a:rPr>
+              <a:t>read · search · list · probe · patch · stop</a:t>
+            </a:r>
+          </a:p>
+        </p:txBody>
+      </p:sp>
+      <p:sp>
+        <p:nvSpPr>
+          <p:cNvPr id="110" name="Cube 109"/>
+          <p:cNvSpPr/>
+          <p:nvPr/>
+        </p:nvSpPr>
+        <p:spPr>
+          <a:xfrm>
+            <a:off x="9875520" y="1627632"/>
+            <a:ext cx="1767535" cy="1682496"/>
+          </a:xfrm>
+          <a:prstGeom prst="cube">
+            <a:avLst>
+              <a:gd name="adj" fmla="val 6521"/>
+            </a:avLst>
+          </a:prstGeom>
+          <a:solidFill>
+            <a:srgbClr val="F2F8FD"/>
+          </a:solidFill>
+          <a:ln w="12700">
+            <a:solidFill>
+              <a:srgbClr val="0F62CE"/>
+            </a:solidFill>
+          </a:ln>
+        </p:spPr>
+        <p:txBody>
+          <a:bodyPr rtlCol="0" anchor="ctr"/>
+          <a:lstStyle/>
+          <a:p>
+            <a:pPr algn="ctr"/>
+          </a:p>
+        </p:txBody>
+      </p:sp>
+      <p:sp>
+        <p:nvSpPr>
+          <p:cNvPr id="111" name="TextBox 110"/>
+          <p:cNvSpPr txBox="1"/>
+          <p:nvPr/>
+        </p:nvSpPr>
+        <p:spPr>
+          <a:xfrm>
+            <a:off x="9985248" y="1773936"/>
+            <a:ext cx="1438351" cy="256032"/>
+          </a:xfrm>
+          <a:prstGeom prst="rect">
+            <a:avLst/>
+          </a:prstGeom>
+          <a:noFill/>
+        </p:spPr>
+        <p:txBody>
+          <a:bodyPr wrap="square" anchor="ctr" lIns="0" tIns="0" rIns="0" bIns="0">
+            <a:noAutofit/>
+          </a:bodyPr>
+          <a:lstStyle/>
+          <a:p>
+            <a:pPr algn="l" latinLnBrk="0">
+              <a:lnSpc>
+                <a:spcPct val="100000"/>
+              </a:lnSpc>
+              <a:spcBef>
+                <a:spcPts val="0"/>
+              </a:spcBef>
+              <a:spcAft>
+                <a:spcPts val="0"/>
+              </a:spcAft>
+            </a:pPr>
+            <a:r>
+              <a:rPr sz="1050" b="1">
+                <a:solidFill>
+                  <a:srgbClr val="0A2B45"/>
+                </a:solidFill>
+                <a:latin typeface="Microsoft YaHei"/>
+                <a:ea typeface="Microsoft YaHei"/>
+                <a:cs typeface="Microsoft YaHei"/>
+              </a:rPr>
+              <a:t>被测系统</a:t>
+            </a:r>
+            <a:r>
+              <a:rPr sz="700" b="0">
+                <a:solidFill>
+                  <a:srgbClr val="40708B"/>
+                </a:solidFill>
+                <a:latin typeface="Microsoft YaHei"/>
+                <a:ea typeface="Microsoft YaHei"/>
+                <a:cs typeface="Microsoft YaHei"/>
+              </a:rPr>
+              <a:t>　«external»</a:t>
+            </a:r>
+          </a:p>
+        </p:txBody>
+      </p:sp>
+      <p:sp>
+        <p:nvSpPr>
+          <p:cNvPr id="112" name="Rectangle 111"/>
+          <p:cNvSpPr/>
+          <p:nvPr/>
+        </p:nvSpPr>
+        <p:spPr>
+          <a:xfrm>
+            <a:off x="9985248" y="2084831"/>
+            <a:ext cx="1438351" cy="228600"/>
+          </a:xfrm>
+          <a:prstGeom prst="rect">
+            <a:avLst/>
+          </a:prstGeom>
+          <a:solidFill>
+            <a:srgbClr val="FFFFFF"/>
+          </a:solidFill>
+          <a:ln w="9525">
+            <a:solidFill>
+              <a:srgbClr val="AFCEE1"/>
+            </a:solidFill>
+          </a:ln>
+        </p:spPr>
+        <p:txBody>
+          <a:bodyPr rtlCol="0" anchor="ctr" wrap="square" lIns="36576" tIns="0" rIns="36576" bIns="0">
+            <a:noAutofit/>
+          </a:bodyPr>
+          <a:lstStyle/>
+          <a:p>
+            <a:pPr algn="ctr" latinLnBrk="0">
+              <a:lnSpc>
+                <a:spcPct val="100000"/>
+              </a:lnSpc>
+              <a:spcBef>
+                <a:spcPts val="0"/>
+              </a:spcBef>
+              <a:spcAft>
+                <a:spcPts val="0"/>
+              </a:spcAft>
+            </a:pPr>
+            <a:r>
+              <a:rPr sz="800" b="0">
+                <a:solidFill>
+                  <a:srgbClr val="123C5B"/>
+                </a:solidFill>
+                <a:latin typeface="Microsoft YaHei"/>
+                <a:ea typeface="Microsoft YaHei"/>
+                <a:cs typeface="Microsoft YaHei"/>
+              </a:rPr>
+              <a:t>SGLang 原仓库</a:t>
+            </a:r>
+          </a:p>
+        </p:txBody>
+      </p:sp>
+      <p:sp>
+        <p:nvSpPr>
+          <p:cNvPr id="113" name="Rectangle 112"/>
+          <p:cNvSpPr/>
+          <p:nvPr/>
+        </p:nvSpPr>
+        <p:spPr>
+          <a:xfrm>
+            <a:off x="9985248" y="2368296"/>
+            <a:ext cx="1438351" cy="228600"/>
+          </a:xfrm>
+          <a:prstGeom prst="rect">
+            <a:avLst/>
+          </a:prstGeom>
+          <a:solidFill>
+            <a:srgbClr val="FFFFFF"/>
+          </a:solidFill>
+          <a:ln w="9525">
+            <a:solidFill>
+              <a:srgbClr val="AFCEE1"/>
+            </a:solidFill>
+          </a:ln>
+        </p:spPr>
+        <p:txBody>
+          <a:bodyPr rtlCol="0" anchor="ctr" wrap="square" lIns="36576" tIns="0" rIns="36576" bIns="0">
+            <a:noAutofit/>
+          </a:bodyPr>
+          <a:lstStyle/>
+          <a:p>
+            <a:pPr algn="ctr" latinLnBrk="0">
+              <a:lnSpc>
+                <a:spcPct val="100000"/>
+              </a:lnSpc>
+              <a:spcBef>
+                <a:spcPts val="0"/>
+              </a:spcBef>
+              <a:spcAft>
+                <a:spcPts val="0"/>
+              </a:spcAft>
+            </a:pPr>
+            <a:r>
+              <a:rPr sz="800" b="0">
+                <a:solidFill>
+                  <a:srgbClr val="123C5B"/>
+                </a:solidFill>
+                <a:latin typeface="Microsoft YaHei"/>
+                <a:ea typeface="Microsoft YaHei"/>
+                <a:cs typeface="Microsoft YaHei"/>
+              </a:rPr>
+              <a:t>xInfer · xtorch_ops</a:t>
+            </a:r>
+          </a:p>
+        </p:txBody>
+      </p:sp>
+      <p:sp>
+        <p:nvSpPr>
+          <p:cNvPr id="114" name="Rectangle 113"/>
+          <p:cNvSpPr/>
+          <p:nvPr/>
+        </p:nvSpPr>
+        <p:spPr>
+          <a:xfrm>
+            <a:off x="9985248" y="2651760"/>
+            <a:ext cx="1438351" cy="228600"/>
+          </a:xfrm>
+          <a:prstGeom prst="rect">
+            <a:avLst/>
+          </a:prstGeom>
+          <a:solidFill>
+            <a:srgbClr val="FFFFFF"/>
+          </a:solidFill>
+          <a:ln w="9525">
+            <a:solidFill>
+              <a:srgbClr val="AFCEE1"/>
+            </a:solidFill>
+          </a:ln>
+        </p:spPr>
+        <p:txBody>
+          <a:bodyPr rtlCol="0" anchor="ctr" wrap="square" lIns="36576" tIns="0" rIns="36576" bIns="0">
+            <a:noAutofit/>
+          </a:bodyPr>
+          <a:lstStyle/>
+          <a:p>
+            <a:pPr algn="ctr" latinLnBrk="0">
+              <a:lnSpc>
+                <a:spcPct val="100000"/>
+              </a:lnSpc>
+              <a:spcBef>
+                <a:spcPts val="0"/>
+              </a:spcBef>
+              <a:spcAft>
+                <a:spcPts val="0"/>
+              </a:spcAft>
+            </a:pPr>
+            <a:r>
+              <a:rPr sz="800" b="0">
+                <a:solidFill>
+                  <a:srgbClr val="123C5B"/>
+                </a:solidFill>
+                <a:latin typeface="Microsoft YaHei"/>
+                <a:ea typeface="Microsoft YaHei"/>
+                <a:cs typeface="Microsoft YaHei"/>
+              </a:rPr>
+              <a:t>登记的算子组件</a:t>
+            </a:r>
+          </a:p>
+        </p:txBody>
+      </p:sp>
+      <p:sp>
+        <p:nvSpPr>
+          <p:cNvPr id="115" name="Rectangle 114"/>
+          <p:cNvSpPr/>
+          <p:nvPr/>
+        </p:nvSpPr>
+        <p:spPr>
+          <a:xfrm>
+            <a:off x="9985248" y="2935224"/>
+            <a:ext cx="1438351" cy="228600"/>
+          </a:xfrm>
+          <a:prstGeom prst="rect">
+            <a:avLst/>
+          </a:prstGeom>
+          <a:solidFill>
+            <a:srgbClr val="FFFFFF"/>
+          </a:solidFill>
+          <a:ln w="9525">
+            <a:solidFill>
+              <a:srgbClr val="AFCEE1"/>
+            </a:solidFill>
+          </a:ln>
+        </p:spPr>
+        <p:txBody>
+          <a:bodyPr rtlCol="0" anchor="ctr" wrap="square" lIns="36576" tIns="0" rIns="36576" bIns="0">
+            <a:noAutofit/>
+          </a:bodyPr>
+          <a:lstStyle/>
+          <a:p>
+            <a:pPr algn="ctr" latinLnBrk="0">
+              <a:lnSpc>
+                <a:spcPct val="100000"/>
+              </a:lnSpc>
+              <a:spcBef>
+                <a:spcPts val="0"/>
+              </a:spcBef>
+              <a:spcAft>
+                <a:spcPts val="0"/>
+              </a:spcAft>
+            </a:pPr>
+            <a:r>
+              <a:rPr sz="800" b="0">
+                <a:solidFill>
+                  <a:srgbClr val="123C5B"/>
+                </a:solidFill>
+                <a:latin typeface="Microsoft YaHei"/>
+                <a:ea typeface="Microsoft YaHei"/>
+                <a:cs typeface="Microsoft YaHei"/>
+              </a:rPr>
+              <a:t>M100 物理卡</a:t>
+            </a:r>
+          </a:p>
+        </p:txBody>
+      </p:sp>
+      <p:sp>
+        <p:nvSpPr>
+          <p:cNvPr id="116" name="Can 115"/>
+          <p:cNvSpPr/>
+          <p:nvPr/>
+        </p:nvSpPr>
+        <p:spPr>
+          <a:xfrm>
+            <a:off x="9875520" y="3621024"/>
+            <a:ext cx="1767535" cy="1847088"/>
+          </a:xfrm>
+          <a:prstGeom prst="can">
+            <a:avLst>
+              <a:gd name="adj" fmla="val 10346"/>
+            </a:avLst>
+          </a:prstGeom>
+          <a:solidFill>
+            <a:srgbClr val="FFFFFF"/>
+          </a:solidFill>
+          <a:ln w="12700">
+            <a:solidFill>
+              <a:srgbClr val="40708B"/>
+            </a:solidFill>
+          </a:ln>
+        </p:spPr>
+        <p:txBody>
+          <a:bodyPr rtlCol="0" anchor="ctr"/>
+          <a:lstStyle/>
+          <a:p>
+            <a:pPr algn="ctr"/>
+          </a:p>
+        </p:txBody>
+      </p:sp>
+      <p:sp>
+        <p:nvSpPr>
+          <p:cNvPr id="117" name="TextBox 116"/>
+          <p:cNvSpPr txBox="1"/>
+          <p:nvPr/>
+        </p:nvSpPr>
+        <p:spPr>
+          <a:xfrm>
+            <a:off x="10003536" y="3840480"/>
+            <a:ext cx="1511503" cy="237744"/>
+          </a:xfrm>
+          <a:prstGeom prst="rect">
+            <a:avLst/>
+          </a:prstGeom>
+          <a:noFill/>
+        </p:spPr>
+        <p:txBody>
+          <a:bodyPr wrap="square" anchor="ctr" lIns="0" tIns="0" rIns="0" bIns="0">
+            <a:noAutofit/>
+          </a:bodyPr>
+          <a:lstStyle/>
+          <a:p>
+            <a:pPr algn="l" latinLnBrk="0">
+              <a:lnSpc>
+                <a:spcPct val="100000"/>
+              </a:lnSpc>
+              <a:spcBef>
+                <a:spcPts val="0"/>
+              </a:spcBef>
+              <a:spcAft>
+                <a:spcPts val="0"/>
+              </a:spcAft>
+            </a:pPr>
+            <a:r>
+              <a:rPr sz="1050" b="1">
+                <a:solidFill>
+                  <a:srgbClr val="0A2B45"/>
+                </a:solidFill>
+                <a:latin typeface="Microsoft YaHei"/>
+                <a:ea typeface="Microsoft YaHei"/>
+                <a:cs typeface="Microsoft YaHei"/>
+              </a:rPr>
+              <a:t>证据产物库</a:t>
+            </a:r>
+            <a:r>
+              <a:rPr sz="700" b="0">
+                <a:solidFill>
+                  <a:srgbClr val="40708B"/>
+                </a:solidFill>
+                <a:latin typeface="Microsoft YaHei"/>
+                <a:ea typeface="Microsoft YaHei"/>
+                <a:cs typeface="Microsoft YaHei"/>
+              </a:rPr>
+              <a:t>　«datastore»</a:t>
+            </a:r>
+          </a:p>
+        </p:txBody>
+      </p:sp>
+      <p:sp>
+        <p:nvSpPr>
+          <p:cNvPr id="118" name="TextBox 117"/>
+          <p:cNvSpPr txBox="1"/>
+          <p:nvPr/>
+        </p:nvSpPr>
+        <p:spPr>
+          <a:xfrm>
+            <a:off x="10003536" y="4169664"/>
+            <a:ext cx="1511503" cy="228600"/>
+          </a:xfrm>
+          <a:prstGeom prst="rect">
+            <a:avLst/>
+          </a:prstGeom>
+          <a:noFill/>
+        </p:spPr>
+        <p:txBody>
+          <a:bodyPr wrap="square" anchor="ctr" lIns="0" tIns="0" rIns="0" bIns="0">
+            <a:noAutofit/>
+          </a:bodyPr>
+          <a:lstStyle/>
+          <a:p>
+            <a:pPr algn="l" latinLnBrk="0">
+              <a:lnSpc>
+                <a:spcPct val="100000"/>
+              </a:lnSpc>
+              <a:spcBef>
+                <a:spcPts val="0"/>
+              </a:spcBef>
+              <a:spcAft>
+                <a:spcPts val="0"/>
+              </a:spcAft>
+            </a:pPr>
+            <a:r>
+              <a:rPr sz="750" b="1">
+                <a:solidFill>
+                  <a:srgbClr val="0F62CE"/>
+                </a:solidFill>
+                <a:latin typeface="Consolas"/>
+                <a:ea typeface="Microsoft YaHei"/>
+                <a:cs typeface="Microsoft YaHei"/>
+              </a:rPr>
+              <a:t>attempts/</a:t>
+            </a:r>
+            <a:r>
+              <a:rPr sz="800" b="0">
+                <a:solidFill>
+                  <a:srgbClr val="1B4D69"/>
+                </a:solidFill>
+                <a:latin typeface="Microsoft YaHei"/>
+                <a:ea typeface="Microsoft YaHei"/>
+                <a:cs typeface="Microsoft YaHei"/>
+              </a:rPr>
+              <a:t>　35 次 trial</a:t>
+            </a:r>
+          </a:p>
+        </p:txBody>
+      </p:sp>
+      <p:sp>
+        <p:nvSpPr>
+          <p:cNvPr id="119" name="TextBox 118"/>
+          <p:cNvSpPr txBox="1"/>
+          <p:nvPr/>
+        </p:nvSpPr>
+        <p:spPr>
+          <a:xfrm>
+            <a:off x="10003536" y="4398264"/>
+            <a:ext cx="1511503" cy="228600"/>
+          </a:xfrm>
+          <a:prstGeom prst="rect">
+            <a:avLst/>
+          </a:prstGeom>
+          <a:noFill/>
+        </p:spPr>
+        <p:txBody>
+          <a:bodyPr wrap="square" anchor="ctr" lIns="0" tIns="0" rIns="0" bIns="0">
+            <a:noAutofit/>
+          </a:bodyPr>
+          <a:lstStyle/>
+          <a:p>
+            <a:pPr algn="l" latinLnBrk="0">
+              <a:lnSpc>
+                <a:spcPct val="100000"/>
+              </a:lnSpc>
+              <a:spcBef>
+                <a:spcPts val="0"/>
+              </a:spcBef>
+              <a:spcAft>
+                <a:spcPts val="0"/>
+              </a:spcAft>
+            </a:pPr>
+            <a:r>
+              <a:rPr sz="750" b="1">
+                <a:solidFill>
+                  <a:srgbClr val="0F62CE"/>
+                </a:solidFill>
+                <a:latin typeface="Consolas"/>
+                <a:ea typeface="Microsoft YaHei"/>
+                <a:cs typeface="Microsoft YaHei"/>
+              </a:rPr>
+              <a:t>planner/</a:t>
+            </a:r>
+            <a:r>
+              <a:rPr sz="800" b="0">
+                <a:solidFill>
+                  <a:srgbClr val="1B4D69"/>
+                </a:solidFill>
+                <a:latin typeface="Microsoft YaHei"/>
+                <a:ea typeface="Microsoft YaHei"/>
+                <a:cs typeface="Microsoft YaHei"/>
+              </a:rPr>
+              <a:t>　往来全量报文</a:t>
+            </a:r>
+          </a:p>
+        </p:txBody>
+      </p:sp>
+      <p:sp>
+        <p:nvSpPr>
+          <p:cNvPr id="120" name="TextBox 119"/>
+          <p:cNvSpPr txBox="1"/>
+          <p:nvPr/>
+        </p:nvSpPr>
+        <p:spPr>
+          <a:xfrm>
+            <a:off x="10003536" y="4626864"/>
+            <a:ext cx="1511503" cy="228600"/>
+          </a:xfrm>
+          <a:prstGeom prst="rect">
+            <a:avLst/>
+          </a:prstGeom>
+          <a:noFill/>
+        </p:spPr>
+        <p:txBody>
+          <a:bodyPr wrap="square" anchor="ctr" lIns="0" tIns="0" rIns="0" bIns="0">
+            <a:noAutofit/>
+          </a:bodyPr>
+          <a:lstStyle/>
+          <a:p>
+            <a:pPr algn="l" latinLnBrk="0">
+              <a:lnSpc>
+                <a:spcPct val="100000"/>
+              </a:lnSpc>
+              <a:spcBef>
+                <a:spcPts val="0"/>
+              </a:spcBef>
+              <a:spcAft>
+                <a:spcPts val="0"/>
+              </a:spcAft>
+            </a:pPr>
+            <a:r>
+              <a:rPr sz="750" b="1">
+                <a:solidFill>
+                  <a:srgbClr val="0F62CE"/>
+                </a:solidFill>
+                <a:latin typeface="Consolas"/>
+                <a:ea typeface="Microsoft YaHei"/>
+                <a:cs typeface="Microsoft YaHei"/>
+              </a:rPr>
+              <a:t>probes/</a:t>
+            </a:r>
+            <a:r>
+              <a:rPr sz="800" b="0">
+                <a:solidFill>
+                  <a:srgbClr val="1B4D69"/>
+                </a:solidFill>
+                <a:latin typeface="Microsoft YaHei"/>
+                <a:ea typeface="Microsoft YaHei"/>
+                <a:cs typeface="Microsoft YaHei"/>
+              </a:rPr>
+              <a:t>　≤ 64 KiB 诊断</a:t>
+            </a:r>
+          </a:p>
+        </p:txBody>
+      </p:sp>
+      <p:sp>
+        <p:nvSpPr>
+          <p:cNvPr id="121" name="TextBox 120"/>
+          <p:cNvSpPr txBox="1"/>
+          <p:nvPr/>
+        </p:nvSpPr>
+        <p:spPr>
+          <a:xfrm>
+            <a:off x="10003536" y="4855464"/>
+            <a:ext cx="1511503" cy="228600"/>
+          </a:xfrm>
+          <a:prstGeom prst="rect">
+            <a:avLst/>
+          </a:prstGeom>
+          <a:noFill/>
+        </p:spPr>
+        <p:txBody>
+          <a:bodyPr wrap="square" anchor="ctr" lIns="0" tIns="0" rIns="0" bIns="0">
+            <a:noAutofit/>
+          </a:bodyPr>
+          <a:lstStyle/>
+          <a:p>
+            <a:pPr algn="l" latinLnBrk="0">
+              <a:lnSpc>
+                <a:spcPct val="100000"/>
+              </a:lnSpc>
+              <a:spcBef>
+                <a:spcPts val="0"/>
+              </a:spcBef>
+              <a:spcAft>
+                <a:spcPts val="0"/>
+              </a:spcAft>
+            </a:pPr>
+            <a:r>
+              <a:rPr sz="750" b="1">
+                <a:solidFill>
+                  <a:srgbClr val="0F62CE"/>
+                </a:solidFill>
+                <a:latin typeface="Consolas"/>
+                <a:ea typeface="Microsoft YaHei"/>
+                <a:cs typeface="Microsoft YaHei"/>
+              </a:rPr>
+              <a:t>backup/</a:t>
+            </a:r>
+            <a:r>
+              <a:rPr sz="800" b="0">
+                <a:solidFill>
+                  <a:srgbClr val="1B4D69"/>
+                </a:solidFill>
+                <a:latin typeface="Microsoft YaHei"/>
+                <a:ea typeface="Microsoft YaHei"/>
+                <a:cs typeface="Microsoft YaHei"/>
+              </a:rPr>
+              <a:t>　冻结快照 + SHA</a:t>
+            </a:r>
+          </a:p>
+        </p:txBody>
+      </p:sp>
+      <p:sp>
+        <p:nvSpPr>
+          <p:cNvPr id="122" name="TextBox 121"/>
+          <p:cNvSpPr txBox="1"/>
+          <p:nvPr/>
+        </p:nvSpPr>
+        <p:spPr>
+          <a:xfrm>
+            <a:off x="10003536" y="5084064"/>
+            <a:ext cx="1511503" cy="228600"/>
+          </a:xfrm>
+          <a:prstGeom prst="rect">
+            <a:avLst/>
+          </a:prstGeom>
+          <a:noFill/>
+        </p:spPr>
+        <p:txBody>
+          <a:bodyPr wrap="square" anchor="ctr" lIns="0" tIns="0" rIns="0" bIns="0">
+            <a:noAutofit/>
+          </a:bodyPr>
+          <a:lstStyle/>
+          <a:p>
+            <a:pPr algn="l" latinLnBrk="0">
+              <a:lnSpc>
+                <a:spcPct val="100000"/>
+              </a:lnSpc>
+              <a:spcBef>
+                <a:spcPts val="0"/>
+              </a:spcBef>
+              <a:spcAft>
+                <a:spcPts val="0"/>
+              </a:spcAft>
+            </a:pPr>
+            <a:r>
+              <a:rPr sz="750" b="1">
+                <a:solidFill>
+                  <a:srgbClr val="0F62CE"/>
+                </a:solidFill>
+                <a:latin typeface="Consolas"/>
+                <a:ea typeface="Microsoft YaHei"/>
+                <a:cs typeface="Microsoft YaHei"/>
+              </a:rPr>
+              <a:t>events.jsonl</a:t>
+            </a:r>
+            <a:r>
+              <a:rPr sz="800" b="0">
+                <a:solidFill>
+                  <a:srgbClr val="1B4D69"/>
+                </a:solidFill>
+                <a:latin typeface="Microsoft YaHei"/>
+                <a:ea typeface="Microsoft YaHei"/>
+                <a:cs typeface="Microsoft YaHei"/>
+              </a:rPr>
+              <a:t>　追加写事件流</a:t>
+            </a:r>
+          </a:p>
+        </p:txBody>
+      </p:sp>
+      <p:sp>
+        <p:nvSpPr>
+          <p:cNvPr id="123" name="Freeform 122"/>
+          <p:cNvSpPr/>
+          <p:nvPr/>
+        </p:nvSpPr>
+        <p:spPr>
+          <a:xfrm>
+            <a:off x="2651760" y="2450592"/>
+            <a:ext cx="1042416" cy="475488"/>
+          </a:xfrm>
+          <a:custGeom>
+            <a:avLst/>
+            <a:gdLst/>
+            <a:ahLst/>
+            <a:cxnLst/>
+            <a:rect l="l" t="t" r="r" b="b"/>
+            <a:pathLst>
+              <a:path w="1042416" h="475488">
+                <a:moveTo>
+                  <a:pt x="0" y="0"/>
+                </a:moveTo>
+                <a:lnTo>
+                  <a:pt x="384048" y="0"/>
+                </a:lnTo>
+                <a:lnTo>
+                  <a:pt x="384048" y="475488"/>
+                </a:lnTo>
+                <a:lnTo>
+                  <a:pt x="1042416" y="475488"/>
+                </a:lnTo>
+              </a:path>
+            </a:pathLst>
+          </a:custGeom>
+          <a:noFill/>
+          <a:ln w="19050">
+            <a:solidFill>
+              <a:srgbClr val="40708B"/>
+            </a:solidFill>
+            <a:tailEnd type="triangle" w="med" len="med"/>
+          </a:ln>
+        </p:spPr>
+        <p:txBody>
+          <a:bodyPr rtlCol="0" anchor="ctr"/>
+          <a:lstStyle/>
+          <a:p>
+            <a:pPr algn="ctr"/>
+          </a:p>
+        </p:txBody>
+      </p:sp>
+      <p:sp>
+        <p:nvSpPr>
+          <p:cNvPr id="124" name="Freeform 123"/>
+          <p:cNvSpPr/>
+          <p:nvPr/>
+        </p:nvSpPr>
+        <p:spPr>
+          <a:xfrm>
+            <a:off x="2660903" y="3127248"/>
+            <a:ext cx="1033273" cy="548639"/>
+          </a:xfrm>
+          <a:custGeom>
+            <a:avLst/>
+            <a:gdLst/>
+            <a:ahLst/>
+            <a:cxnLst/>
+            <a:rect l="l" t="t" r="r" b="b"/>
+            <a:pathLst>
+              <a:path w="1033273" h="548639">
+                <a:moveTo>
+                  <a:pt x="1033273" y="0"/>
+                </a:moveTo>
+                <a:lnTo>
+                  <a:pt x="374905" y="0"/>
+                </a:lnTo>
+                <a:lnTo>
+                  <a:pt x="374905" y="548639"/>
+                </a:lnTo>
+                <a:lnTo>
+                  <a:pt x="0" y="548639"/>
+                </a:lnTo>
+              </a:path>
+            </a:pathLst>
+          </a:custGeom>
+          <a:noFill/>
+          <a:ln w="19050">
+            <a:solidFill>
+              <a:srgbClr val="40708B"/>
+            </a:solidFill>
+            <a:tailEnd type="triangle" w="med" len="med"/>
+          </a:ln>
+        </p:spPr>
+        <p:txBody>
+          <a:bodyPr rtlCol="0" anchor="ctr"/>
+          <a:lstStyle/>
+          <a:p>
+            <a:pPr algn="ctr"/>
+          </a:p>
+        </p:txBody>
+      </p:sp>
+      <p:cxnSp>
+        <p:nvCxnSpPr>
+          <p:cNvPr id="125" name="Connector 124"/>
+          <p:cNvCxnSpPr/>
+          <p:nvPr/>
+        </p:nvCxnSpPr>
+        <p:spPr>
+          <a:xfrm>
+            <a:off x="2660903" y="5056632"/>
+            <a:ext cx="850393" cy="0"/>
+          </a:xfrm>
+          <a:prstGeom prst="line">
+            <a:avLst/>
+          </a:prstGeom>
+          <a:ln w="19050">
+            <a:solidFill>
+              <a:srgbClr val="D2690C"/>
+            </a:solidFill>
+            <a:headEnd type="triangle" w="med" len="med"/>
+            <a:tailEnd type="triangle" w="med" len="med"/>
+          </a:ln>
+        </p:spPr>
+      </p:cxnSp>
+      <p:cxnSp>
+        <p:nvCxnSpPr>
+          <p:cNvPr id="126" name="Connector 125"/>
+          <p:cNvCxnSpPr/>
+          <p:nvPr/>
+        </p:nvCxnSpPr>
+        <p:spPr>
+          <a:xfrm>
+            <a:off x="5989320" y="4215383"/>
+            <a:ext cx="0" cy="411481"/>
+          </a:xfrm>
+          <a:prstGeom prst="line">
+            <a:avLst/>
+          </a:prstGeom>
+          <a:ln w="19050">
+            <a:solidFill>
+              <a:srgbClr val="D2690C"/>
+            </a:solidFill>
+            <a:tailEnd type="triangle" w="med" len="med"/>
+          </a:ln>
+        </p:spPr>
+      </p:cxnSp>
+      <p:cxnSp>
+        <p:nvCxnSpPr>
+          <p:cNvPr id="127" name="Connector 126"/>
+          <p:cNvCxnSpPr/>
+          <p:nvPr/>
+        </p:nvCxnSpPr>
+        <p:spPr>
+          <a:xfrm flipV="1">
+            <a:off x="6537960" y="4215383"/>
+            <a:ext cx="0" cy="457201"/>
+          </a:xfrm>
+          <a:prstGeom prst="line">
+            <a:avLst/>
+          </a:prstGeom>
+          <a:ln w="19050">
+            <a:solidFill>
+              <a:srgbClr val="D2690C"/>
+            </a:solidFill>
+            <a:tailEnd type="triangle" w="med" len="med"/>
+          </a:ln>
+        </p:spPr>
+      </p:cxnSp>
+      <p:sp>
+        <p:nvSpPr>
+          <p:cNvPr id="128" name="TextBox 127"/>
+          <p:cNvSpPr txBox="1"/>
+          <p:nvPr/>
+        </p:nvSpPr>
+        <p:spPr>
+          <a:xfrm>
+            <a:off x="4645152" y="4315968"/>
+            <a:ext cx="1280160" cy="365760"/>
+          </a:xfrm>
+          <a:prstGeom prst="rect">
+            <a:avLst/>
+          </a:prstGeom>
+          <a:noFill/>
+        </p:spPr>
+        <p:txBody>
+          <a:bodyPr wrap="square" anchor="ctr" lIns="0" tIns="0" rIns="0" bIns="0">
+            <a:noAutofit/>
+          </a:bodyPr>
+          <a:lstStyle/>
+          <a:p>
+            <a:pPr algn="r" latinLnBrk="0">
+              <a:lnSpc>
+                <a:spcPct val="100000"/>
+              </a:lnSpc>
+              <a:spcBef>
+                <a:spcPts val="0"/>
+              </a:spcBef>
+              <a:spcAft>
+                <a:spcPts val="0"/>
+              </a:spcAft>
+            </a:pPr>
+            <a:r>
+              <a:rPr sz="750" b="1">
+                <a:solidFill>
+                  <a:srgbClr val="C2570A"/>
+                </a:solidFill>
+                <a:latin typeface="Microsoft YaHei"/>
+                <a:ea typeface="Microsoft YaHei"/>
+                <a:cs typeface="Microsoft YaHei"/>
+              </a:rPr>
+              <a:t>请求 ≤ 28 KB</a:t>
+            </a:r>
+          </a:p>
+        </p:txBody>
+      </p:sp>
+      <p:sp>
+        <p:nvSpPr>
+          <p:cNvPr id="129" name="TextBox 128"/>
+          <p:cNvSpPr txBox="1"/>
+          <p:nvPr/>
+        </p:nvSpPr>
+        <p:spPr>
+          <a:xfrm>
+            <a:off x="6601968" y="4315968"/>
+            <a:ext cx="1280160" cy="365760"/>
+          </a:xfrm>
+          <a:prstGeom prst="rect">
+            <a:avLst/>
+          </a:prstGeom>
+          <a:noFill/>
+        </p:spPr>
+        <p:txBody>
+          <a:bodyPr wrap="square" anchor="ctr" lIns="0" tIns="0" rIns="0" bIns="0">
+            <a:noAutofit/>
+          </a:bodyPr>
+          <a:lstStyle/>
+          <a:p>
+            <a:pPr algn="l" latinLnBrk="0">
+              <a:lnSpc>
+                <a:spcPct val="100000"/>
+              </a:lnSpc>
+              <a:spcBef>
+                <a:spcPts val="0"/>
+              </a:spcBef>
+              <a:spcAft>
+                <a:spcPts val="0"/>
+              </a:spcAft>
+            </a:pPr>
+            <a:r>
+              <a:rPr sz="750" b="1">
+                <a:solidFill>
+                  <a:srgbClr val="C2570A"/>
+                </a:solidFill>
+                <a:latin typeface="Microsoft YaHei"/>
+                <a:ea typeface="Microsoft YaHei"/>
+                <a:cs typeface="Microsoft YaHei"/>
+              </a:rPr>
+              <a:t>提案 + 证据引用</a:t>
+            </a:r>
+          </a:p>
+        </p:txBody>
+      </p:sp>
+      <p:cxnSp>
+        <p:nvCxnSpPr>
+          <p:cNvPr id="130" name="Connector 129"/>
+          <p:cNvCxnSpPr/>
+          <p:nvPr/>
+        </p:nvCxnSpPr>
+        <p:spPr>
+          <a:xfrm>
+            <a:off x="8833104" y="2276856"/>
+            <a:ext cx="1033272" cy="0"/>
+          </a:xfrm>
+          <a:prstGeom prst="line">
+            <a:avLst/>
+          </a:prstGeom>
+          <a:ln w="19050">
+            <a:solidFill>
+              <a:srgbClr val="0F62CE"/>
+            </a:solidFill>
+            <a:tailEnd type="triangle" w="med" len="med"/>
+          </a:ln>
+        </p:spPr>
+      </p:cxnSp>
+      <p:cxnSp>
+        <p:nvCxnSpPr>
+          <p:cNvPr id="131" name="Connector 130"/>
+          <p:cNvCxnSpPr/>
+          <p:nvPr/>
+        </p:nvCxnSpPr>
+        <p:spPr>
+          <a:xfrm flipH="1">
+            <a:off x="8833104" y="3026664"/>
+            <a:ext cx="1033272" cy="0"/>
+          </a:xfrm>
+          <a:prstGeom prst="line">
+            <a:avLst/>
+          </a:prstGeom>
+          <a:ln w="19050">
+            <a:solidFill>
+              <a:srgbClr val="0F62CE"/>
+            </a:solidFill>
+            <a:tailEnd type="triangle" w="med" len="med"/>
+          </a:ln>
+        </p:spPr>
+      </p:cxnSp>
+      <p:cxnSp>
+        <p:nvCxnSpPr>
+          <p:cNvPr id="132" name="Connector 131"/>
+          <p:cNvCxnSpPr/>
+          <p:nvPr/>
+        </p:nvCxnSpPr>
+        <p:spPr>
+          <a:xfrm flipH="1">
+            <a:off x="8833104" y="3867911"/>
+            <a:ext cx="1033272" cy="0"/>
+          </a:xfrm>
+          <a:prstGeom prst="line">
+            <a:avLst/>
+          </a:prstGeom>
+          <a:ln w="15875">
+            <a:solidFill>
+              <a:srgbClr val="40708B"/>
+            </a:solidFill>
+            <a:tailEnd type="triangle" w="med" len="med"/>
+          </a:ln>
+        </p:spPr>
+      </p:cxnSp>
+      <p:cxnSp>
+        <p:nvCxnSpPr>
+          <p:cNvPr id="133" name="Connector 132"/>
+          <p:cNvCxnSpPr/>
+          <p:nvPr/>
+        </p:nvCxnSpPr>
+        <p:spPr>
+          <a:xfrm>
+            <a:off x="10704423" y="3319272"/>
+            <a:ext cx="0" cy="292608"/>
+          </a:xfrm>
+          <a:prstGeom prst="line">
+            <a:avLst/>
+          </a:prstGeom>
+          <a:ln w="19050">
+            <a:solidFill>
+              <a:srgbClr val="0F62CE"/>
+            </a:solidFill>
+            <a:tailEnd type="triangle" w="med" len="med"/>
+          </a:ln>
+        </p:spPr>
+      </p:cxnSp>
+      <p:sp>
+        <p:nvSpPr>
+          <p:cNvPr id="134" name="TextBox 133"/>
+          <p:cNvSpPr txBox="1"/>
+          <p:nvPr/>
+        </p:nvSpPr>
+        <p:spPr>
+          <a:xfrm>
+            <a:off x="10795863" y="3310128"/>
+            <a:ext cx="822960" cy="310895"/>
+          </a:xfrm>
+          <a:prstGeom prst="rect">
+            <a:avLst/>
+          </a:prstGeom>
+          <a:noFill/>
+        </p:spPr>
+        <p:txBody>
+          <a:bodyPr wrap="square" anchor="ctr" lIns="0" tIns="0" rIns="0" bIns="0">
+            <a:noAutofit/>
+          </a:bodyPr>
+          <a:lstStyle/>
+          <a:p>
+            <a:pPr algn="l" latinLnBrk="0">
+              <a:lnSpc>
+                <a:spcPct val="100000"/>
+              </a:lnSpc>
+              <a:spcBef>
+                <a:spcPts val="0"/>
+              </a:spcBef>
+              <a:spcAft>
+                <a:spcPts val="0"/>
+              </a:spcAft>
+            </a:pPr>
+            <a:r>
+              <a:rPr sz="750" b="1">
+                <a:solidFill>
+                  <a:srgbClr val="0F62CE"/>
+                </a:solidFill>
+                <a:latin typeface="Microsoft YaHei"/>
+                <a:ea typeface="Microsoft YaHei"/>
+                <a:cs typeface="Microsoft YaHei"/>
+              </a:rPr>
+              <a:t>结果落盘</a:t>
+            </a:r>
+          </a:p>
+        </p:txBody>
+      </p:sp>
+      <p:sp>
+        <p:nvSpPr>
+          <p:cNvPr id="135" name="Rectangle 134"/>
+          <p:cNvSpPr/>
+          <p:nvPr/>
+        </p:nvSpPr>
+        <p:spPr>
+          <a:xfrm>
+            <a:off x="3520440" y="2880360"/>
+            <a:ext cx="91440" cy="91440"/>
+          </a:xfrm>
+          <a:prstGeom prst="rect">
+            <a:avLst/>
+          </a:prstGeom>
+          <a:solidFill>
+            <a:srgbClr val="FFFFFF"/>
+          </a:solidFill>
+          <a:ln w="12700">
+            <a:solidFill>
+              <a:srgbClr val="40708B"/>
+            </a:solidFill>
+          </a:ln>
+        </p:spPr>
+        <p:txBody>
+          <a:bodyPr rtlCol="0" anchor="ctr"/>
+          <a:lstStyle/>
+          <a:p>
+            <a:pPr algn="ctr"/>
+          </a:p>
+        </p:txBody>
+      </p:sp>
+      <p:sp>
+        <p:nvSpPr>
+          <p:cNvPr id="136" name="Rectangle 135"/>
+          <p:cNvSpPr/>
+          <p:nvPr/>
+        </p:nvSpPr>
+        <p:spPr>
+          <a:xfrm>
+            <a:off x="3520440" y="3081528"/>
+            <a:ext cx="91440" cy="91440"/>
+          </a:xfrm>
+          <a:prstGeom prst="rect">
+            <a:avLst/>
+          </a:prstGeom>
+          <a:solidFill>
+            <a:srgbClr val="FFFFFF"/>
+          </a:solidFill>
+          <a:ln w="12700">
+            <a:solidFill>
+              <a:srgbClr val="40708B"/>
+            </a:solidFill>
+          </a:ln>
+        </p:spPr>
+        <p:txBody>
+          <a:bodyPr rtlCol="0" anchor="ctr"/>
+          <a:lstStyle/>
+          <a:p>
+            <a:pPr algn="ctr"/>
+          </a:p>
+        </p:txBody>
+      </p:sp>
+      <p:sp>
+        <p:nvSpPr>
+          <p:cNvPr id="137" name="Rectangle 136"/>
+          <p:cNvSpPr/>
+          <p:nvPr/>
+        </p:nvSpPr>
+        <p:spPr>
+          <a:xfrm>
+            <a:off x="3520440" y="5010912"/>
+            <a:ext cx="91440" cy="91440"/>
+          </a:xfrm>
+          <a:prstGeom prst="rect">
+            <a:avLst/>
+          </a:prstGeom>
+          <a:solidFill>
+            <a:srgbClr val="FFFFFF"/>
+          </a:solidFill>
+          <a:ln w="12700">
+            <a:solidFill>
+              <a:srgbClr val="D2690C"/>
+            </a:solidFill>
+          </a:ln>
+        </p:spPr>
+        <p:txBody>
+          <a:bodyPr rtlCol="0" anchor="ctr"/>
+          <a:lstStyle/>
+          <a:p>
+            <a:pPr algn="ctr"/>
+          </a:p>
+        </p:txBody>
+      </p:sp>
+      <p:sp>
+        <p:nvSpPr>
+          <p:cNvPr id="138" name="Rectangle 137"/>
+          <p:cNvSpPr/>
+          <p:nvPr/>
+        </p:nvSpPr>
+        <p:spPr>
+          <a:xfrm>
+            <a:off x="8915400" y="2231136"/>
+            <a:ext cx="91440" cy="91440"/>
+          </a:xfrm>
+          <a:prstGeom prst="rect">
+            <a:avLst/>
+          </a:prstGeom>
+          <a:solidFill>
+            <a:srgbClr val="FFFFFF"/>
+          </a:solidFill>
+          <a:ln w="12700">
+            <a:solidFill>
+              <a:srgbClr val="0F62CE"/>
+            </a:solidFill>
+          </a:ln>
+        </p:spPr>
+        <p:txBody>
+          <a:bodyPr rtlCol="0" anchor="ctr"/>
+          <a:lstStyle/>
+          <a:p>
+            <a:pPr algn="ctr"/>
+          </a:p>
+        </p:txBody>
+      </p:sp>
+      <p:sp>
+        <p:nvSpPr>
+          <p:cNvPr id="139" name="Rectangle 138"/>
+          <p:cNvSpPr/>
+          <p:nvPr/>
+        </p:nvSpPr>
+        <p:spPr>
+          <a:xfrm>
+            <a:off x="8915400" y="2980944"/>
+            <a:ext cx="91440" cy="91440"/>
+          </a:xfrm>
+          <a:prstGeom prst="rect">
+            <a:avLst/>
+          </a:prstGeom>
+          <a:solidFill>
+            <a:srgbClr val="FFFFFF"/>
+          </a:solidFill>
+          <a:ln w="12700">
+            <a:solidFill>
+              <a:srgbClr val="0F62CE"/>
+            </a:solidFill>
+          </a:ln>
+        </p:spPr>
+        <p:txBody>
+          <a:bodyPr rtlCol="0" anchor="ctr"/>
+          <a:lstStyle/>
+          <a:p>
+            <a:pPr algn="ctr"/>
+          </a:p>
+        </p:txBody>
+      </p:sp>
+      <p:sp>
+        <p:nvSpPr>
+          <p:cNvPr id="140" name="Rectangle 139"/>
+          <p:cNvSpPr/>
+          <p:nvPr/>
+        </p:nvSpPr>
+        <p:spPr>
+          <a:xfrm>
+            <a:off x="8915400" y="3822191"/>
+            <a:ext cx="91440" cy="91440"/>
+          </a:xfrm>
+          <a:prstGeom prst="rect">
+            <a:avLst/>
+          </a:prstGeom>
+          <a:solidFill>
+            <a:srgbClr val="FFFFFF"/>
+          </a:solidFill>
+          <a:ln w="12700">
+            <a:solidFill>
+              <a:srgbClr val="40708B"/>
+            </a:solidFill>
+          </a:ln>
+        </p:spPr>
+        <p:txBody>
+          <a:bodyPr rtlCol="0" anchor="ctr"/>
+          <a:lstStyle/>
+          <a:p>
+            <a:pPr algn="ctr"/>
+          </a:p>
+        </p:txBody>
+      </p:sp>
+      <p:sp>
+        <p:nvSpPr>
+          <p:cNvPr id="141" name="Rectangle 140"/>
+          <p:cNvSpPr/>
+          <p:nvPr/>
+        </p:nvSpPr>
+        <p:spPr>
+          <a:xfrm>
+            <a:off x="5943600" y="4270248"/>
+            <a:ext cx="91440" cy="91440"/>
+          </a:xfrm>
+          <a:prstGeom prst="rect">
+            <a:avLst/>
+          </a:prstGeom>
+          <a:solidFill>
+            <a:srgbClr val="FFFFFF"/>
+          </a:solidFill>
+          <a:ln w="12700">
+            <a:solidFill>
+              <a:srgbClr val="D2690C"/>
+            </a:solidFill>
+          </a:ln>
+        </p:spPr>
+        <p:txBody>
+          <a:bodyPr rtlCol="0" anchor="ctr"/>
+          <a:lstStyle/>
+          <a:p>
+            <a:pPr algn="ctr"/>
+          </a:p>
+        </p:txBody>
+      </p:sp>
+      <p:sp>
+        <p:nvSpPr>
+          <p:cNvPr id="142" name="Rectangle 141"/>
+          <p:cNvSpPr/>
+          <p:nvPr/>
+        </p:nvSpPr>
+        <p:spPr>
+          <a:xfrm>
+            <a:off x="6492240" y="4270248"/>
+            <a:ext cx="91440" cy="91440"/>
+          </a:xfrm>
+          <a:prstGeom prst="rect">
+            <a:avLst/>
+          </a:prstGeom>
+          <a:solidFill>
+            <a:srgbClr val="FFFFFF"/>
+          </a:solidFill>
+          <a:ln w="12700">
+            <a:solidFill>
+              <a:srgbClr val="D2690C"/>
+            </a:solidFill>
+          </a:ln>
+        </p:spPr>
+        <p:txBody>
+          <a:bodyPr rtlCol="0" anchor="ctr"/>
+          <a:lstStyle/>
+          <a:p>
+            <a:pPr algn="ctr"/>
+          </a:p>
+        </p:txBody>
+      </p:sp>
+      <p:sp>
+        <p:nvSpPr>
+          <p:cNvPr id="143" name="Rectangle 142"/>
+          <p:cNvSpPr/>
+          <p:nvPr/>
+        </p:nvSpPr>
+        <p:spPr>
+          <a:xfrm>
+            <a:off x="5943600" y="4636008"/>
+            <a:ext cx="91440" cy="91440"/>
+          </a:xfrm>
+          <a:prstGeom prst="rect">
+            <a:avLst/>
+          </a:prstGeom>
+          <a:solidFill>
+            <a:srgbClr val="FFFFFF"/>
+          </a:solidFill>
+          <a:ln w="12700">
+            <a:solidFill>
+              <a:srgbClr val="D2690C"/>
+            </a:solidFill>
+          </a:ln>
+        </p:spPr>
+        <p:txBody>
+          <a:bodyPr rtlCol="0" anchor="ctr"/>
+          <a:lstStyle/>
+          <a:p>
+            <a:pPr algn="ctr"/>
+          </a:p>
+        </p:txBody>
+      </p:sp>
+      <p:sp>
+        <p:nvSpPr>
+          <p:cNvPr id="144" name="Rectangle 143"/>
+          <p:cNvSpPr/>
+          <p:nvPr/>
+        </p:nvSpPr>
+        <p:spPr>
+          <a:xfrm>
+            <a:off x="6492240" y="4636008"/>
+            <a:ext cx="91440" cy="91440"/>
+          </a:xfrm>
+          <a:prstGeom prst="rect">
+            <a:avLst/>
+          </a:prstGeom>
+          <a:solidFill>
+            <a:srgbClr val="FFFFFF"/>
+          </a:solidFill>
+          <a:ln w="12700">
+            <a:solidFill>
+              <a:srgbClr val="D2690C"/>
+            </a:solidFill>
+          </a:ln>
+        </p:spPr>
+        <p:txBody>
+          <a:bodyPr rtlCol="0" anchor="ctr"/>
+          <a:lstStyle/>
+          <a:p>
+            <a:pPr algn="ctr"/>
+          </a:p>
+        </p:txBody>
+      </p:sp>
+      <p:sp>
+        <p:nvSpPr>
+          <p:cNvPr id="145" name="Rounded Rectangle 144"/>
+          <p:cNvSpPr/>
+          <p:nvPr/>
+        </p:nvSpPr>
+        <p:spPr>
+          <a:xfrm>
+            <a:off x="2679192" y="2587752"/>
+            <a:ext cx="713232" cy="201168"/>
+          </a:xfrm>
+          <a:prstGeom prst="roundRect">
+            <a:avLst>
+              <a:gd name="adj" fmla="val 50000"/>
+            </a:avLst>
+          </a:prstGeom>
+          <a:solidFill>
+            <a:srgbClr val="FFFFFF"/>
+          </a:solidFill>
+          <a:ln w="9525">
+            <a:solidFill>
+              <a:srgbClr val="40708B"/>
+            </a:solidFill>
+          </a:ln>
+        </p:spPr>
+        <p:txBody>
           <a:bodyPr rtlCol="0" anchor="ctr" wrap="square" lIns="18288" tIns="0" rIns="18288" bIns="0">
             <a:noAutofit/>
           </a:bodyPr>
@@ -33202,6 +36287,62 @@
                 <a:ea typeface="Microsoft YaHei"/>
                 <a:cs typeface="Microsoft YaHei"/>
               </a:rPr>
+              <a:t>契约 · 授权</a:t>
+            </a:r>
+          </a:p>
+        </p:txBody>
+      </p:sp>
+      <p:sp>
+        <p:nvSpPr>
+          <p:cNvPr id="146" name="Rounded Rectangle 145"/>
+          <p:cNvSpPr/>
+          <p:nvPr/>
+        </p:nvSpPr>
+        <p:spPr>
+          <a:xfrm>
+            <a:off x="2679192" y="3300984"/>
+            <a:ext cx="713232" cy="201168"/>
+          </a:xfrm>
+          <a:prstGeom prst="roundRect">
+            <a:avLst>
+              <a:gd name="adj" fmla="val 50000"/>
+            </a:avLst>
+          </a:prstGeom>
+          <a:solidFill>
+            <a:srgbClr val="FFFFFF"/>
+          </a:solidFill>
+          <a:ln w="9525">
+            <a:solidFill>
+              <a:srgbClr val="40708B"/>
+            </a:solidFill>
+          </a:ln>
+        </p:spPr>
+        <p:txBody>
+          <a:bodyPr rtlCol="0" anchor="ctr" wrap="square" lIns="18288" tIns="0" rIns="18288" bIns="0">
+            <a:noAutofit/>
+          </a:bodyPr>
+          <a:lstStyle/>
+          <a:p>
+            <a:pPr algn="ctr" latinLnBrk="0">
+              <a:lnSpc>
+                <a:spcPct val="100000"/>
+              </a:lnSpc>
+              <a:spcBef>
+                <a:spcPts val="0"/>
+              </a:spcBef>
+              <a:spcAft>
+                <a:spcPts val="0"/>
+              </a:spcAft>
+            </a:pPr>
+            <a:r>
+              <a:rPr sz="750" b="1">
+                <a:solidFill>
+                  <a:srgbClr val="40708B"/>
+                </a:solidFill>
+                <a:latin typeface="Microsoft YaHei"/>
+                <a:ea typeface="Microsoft YaHei"/>
+                <a:cs typeface="Microsoft YaHei"/>
+              </a:rPr>
               <a:t>报告 · 证据</a:t>
             </a:r>
           </a:p>
@@ -33209,14 +36350,14 @@
       </p:sp>
       <p:sp>
         <p:nvSpPr>
-          <p:cNvPr id="58" name="Rounded Rectangle 57"/>
+          <p:cNvPr id="147" name="Rounded Rectangle 146"/>
           <p:cNvSpPr/>
           <p:nvPr/>
         </p:nvSpPr>
         <p:spPr>
           <a:xfrm>
-            <a:off x="2958084" y="4892040"/>
-            <a:ext cx="713232" cy="201168"/>
+            <a:off x="2706624" y="4956048"/>
+            <a:ext cx="658368" cy="201168"/>
           </a:xfrm>
           <a:prstGeom prst="roundRect">
             <a:avLst>
@@ -33258,64 +36399,20 @@
                 <a:ea typeface="Microsoft YaHei"/>
                 <a:cs typeface="Microsoft YaHei"/>
               </a:rPr>
-              <a:t>协同写补丁</a:t>
-            </a:r>
-          </a:p>
-        </p:txBody>
-      </p:sp>
-      <p:cxnSp>
-        <p:nvCxnSpPr>
-          <p:cNvPr id="59" name="Connector 58"/>
-          <p:cNvCxnSpPr/>
-          <p:nvPr/>
-        </p:nvCxnSpPr>
-        <p:spPr>
-          <a:xfrm>
-            <a:off x="7997342" y="2029968"/>
-            <a:ext cx="835762" cy="0"/>
-          </a:xfrm>
-          <a:prstGeom prst="line">
-            <a:avLst/>
-          </a:prstGeom>
-          <a:ln w="19050">
-            <a:solidFill>
-              <a:srgbClr val="0F62CE"/>
-            </a:solidFill>
-            <a:tailEnd type="triangle" w="med" len="med"/>
-          </a:ln>
-        </p:spPr>
-      </p:cxnSp>
-      <p:cxnSp>
-        <p:nvCxnSpPr>
-          <p:cNvPr id="60" name="Connector 59"/>
-          <p:cNvCxnSpPr/>
-          <p:nvPr/>
-        </p:nvCxnSpPr>
-        <p:spPr>
-          <a:xfrm flipH="1">
-            <a:off x="7997342" y="2542032"/>
-            <a:ext cx="835762" cy="0"/>
-          </a:xfrm>
-          <a:prstGeom prst="line">
-            <a:avLst/>
-          </a:prstGeom>
-          <a:ln w="19050">
-            <a:solidFill>
-              <a:srgbClr val="0F62CE"/>
-            </a:solidFill>
-            <a:tailEnd type="triangle" w="med" len="med"/>
-          </a:ln>
-        </p:spPr>
-      </p:cxnSp>
-      <p:sp>
-        <p:nvSpPr>
-          <p:cNvPr id="61" name="Rounded Rectangle 60"/>
+              <a:t>结对写补丁</a:t>
+            </a:r>
+          </a:p>
+        </p:txBody>
+      </p:sp>
+      <p:sp>
+        <p:nvSpPr>
+          <p:cNvPr id="148" name="Rounded Rectangle 147"/>
           <p:cNvSpPr/>
           <p:nvPr/>
         </p:nvSpPr>
         <p:spPr>
           <a:xfrm>
-            <a:off x="8124443" y="1773936"/>
+            <a:off x="9134856" y="2176272"/>
             <a:ext cx="713232" cy="201168"/>
           </a:xfrm>
           <a:prstGeom prst="roundRect">
@@ -33365,14 +36462,14 @@
       </p:sp>
       <p:sp>
         <p:nvSpPr>
-          <p:cNvPr id="62" name="Rounded Rectangle 61"/>
+          <p:cNvPr id="149" name="Rounded Rectangle 148"/>
           <p:cNvSpPr/>
           <p:nvPr/>
         </p:nvSpPr>
         <p:spPr>
           <a:xfrm>
-            <a:off x="8170163" y="2286000"/>
-            <a:ext cx="621792" cy="201168"/>
+            <a:off x="9198864" y="2926080"/>
+            <a:ext cx="585216" cy="201168"/>
           </a:xfrm>
           <a:prstGeom prst="roundRect">
             <a:avLst>
@@ -33419,107 +36516,16 @@
           </a:p>
         </p:txBody>
       </p:sp>
-      <p:cxnSp>
-        <p:nvCxnSpPr>
-          <p:cNvPr id="63" name="Connector 62"/>
-          <p:cNvCxnSpPr/>
-          <p:nvPr/>
-        </p:nvCxnSpPr>
-        <p:spPr>
-          <a:xfrm>
-            <a:off x="9326880" y="2852927"/>
-            <a:ext cx="0" cy="585217"/>
-          </a:xfrm>
-          <a:prstGeom prst="line">
-            <a:avLst/>
-          </a:prstGeom>
-          <a:ln w="19050">
-            <a:solidFill>
-              <a:srgbClr val="0F62CE"/>
-            </a:solidFill>
-            <a:tailEnd type="triangle" w="med" len="med"/>
-          </a:ln>
-        </p:spPr>
-      </p:cxnSp>
-      <p:sp>
-        <p:nvSpPr>
-          <p:cNvPr id="64" name="TextBox 63"/>
-          <p:cNvSpPr txBox="1"/>
-          <p:nvPr/>
-        </p:nvSpPr>
-        <p:spPr>
-          <a:xfrm>
-            <a:off x="9436607" y="2834639"/>
-            <a:ext cx="2206447" cy="621792"/>
-          </a:xfrm>
-          <a:prstGeom prst="rect">
-            <a:avLst/>
-          </a:prstGeom>
-          <a:noFill/>
-        </p:spPr>
-        <p:txBody>
-          <a:bodyPr wrap="square" anchor="ctr" lIns="0" tIns="0" rIns="0" bIns="0">
-            <a:noAutofit/>
-          </a:bodyPr>
-          <a:lstStyle/>
-          <a:p>
-            <a:pPr algn="l" latinLnBrk="0">
-              <a:lnSpc>
-                <a:spcPct val="100000"/>
-              </a:lnSpc>
-              <a:spcBef>
-                <a:spcPts val="0"/>
-              </a:spcBef>
-              <a:spcAft>
-                <a:spcPts val="0"/>
-              </a:spcAft>
-            </a:pPr>
-            <a:r>
-              <a:rPr sz="750" b="1">
-                <a:solidFill>
-                  <a:srgbClr val="0F62CE"/>
-                </a:solidFill>
-                <a:latin typeface="Microsoft YaHei"/>
-                <a:ea typeface="Microsoft YaHei"/>
-                <a:cs typeface="Microsoft YaHei"/>
-              </a:rPr>
-              <a:t>结果与报文落盘</a:t>
-            </a:r>
-          </a:p>
-        </p:txBody>
-      </p:sp>
-      <p:cxnSp>
-        <p:nvCxnSpPr>
-          <p:cNvPr id="65" name="Connector 64"/>
-          <p:cNvCxnSpPr/>
-          <p:nvPr/>
-        </p:nvCxnSpPr>
-        <p:spPr>
-          <a:xfrm flipH="1">
-            <a:off x="7997342" y="4261104"/>
-            <a:ext cx="835762" cy="0"/>
-          </a:xfrm>
-          <a:prstGeom prst="line">
-            <a:avLst/>
-          </a:prstGeom>
-          <a:ln w="15875">
-            <a:solidFill>
-              <a:srgbClr val="40708B"/>
-            </a:solidFill>
-            <a:tailEnd type="triangle" w="med" len="med"/>
-          </a:ln>
-        </p:spPr>
-      </p:cxnSp>
-      <p:sp>
-        <p:nvSpPr>
-          <p:cNvPr id="66" name="Rounded Rectangle 65"/>
+      <p:sp>
+        <p:nvSpPr>
+          <p:cNvPr id="150" name="Rounded Rectangle 149"/>
           <p:cNvSpPr/>
           <p:nvPr/>
         </p:nvSpPr>
         <p:spPr>
           <a:xfrm>
-            <a:off x="8170163" y="4005072"/>
-            <a:ext cx="621792" cy="201168"/>
+            <a:off x="9198864" y="3767327"/>
+            <a:ext cx="585216" cy="201168"/>
           </a:xfrm>
           <a:prstGeom prst="roundRect">
             <a:avLst>
@@ -33568,7 +36574,7 @@
       </p:sp>
       <p:sp>
         <p:nvSpPr>
-          <p:cNvPr id="67" name="Rectangle 66"/>
+          <p:cNvPr id="151" name="Rectangle 150"/>
           <p:cNvSpPr/>
           <p:nvPr/>
         </p:nvSpPr>
@@ -33597,7 +36603,7 @@
       </p:sp>
       <p:sp>
         <p:nvSpPr>
-          <p:cNvPr id="68" name="Rectangle 67"/>
+          <p:cNvPr id="152" name="Rectangle 151"/>
           <p:cNvSpPr/>
           <p:nvPr/>
         </p:nvSpPr>
@@ -33626,7 +36632,7 @@
       </p:sp>
       <p:sp>
         <p:nvSpPr>
-          <p:cNvPr id="69" name="TextBox 68"/>
+          <p:cNvPr id="153" name="TextBox 152"/>
           <p:cNvSpPr txBox="1"/>
           <p:nvPr/>
         </p:nvSpPr>
@@ -33695,7 +36701,7 @@
       </p:sp>
       <p:sp>
         <p:nvSpPr>
-          <p:cNvPr id="70" name="TextBox 69"/>
+          <p:cNvPr id="154" name="TextBox 153"/>
           <p:cNvSpPr txBox="1"/>
           <p:nvPr/>
         </p:nvSpPr>

--- a/slides/m100_agent_final_deck.pptx
+++ b/slides/m100_agent_final_deck.pptx
@@ -30273,31 +30273,292 @@
                 <a:ea typeface="Microsoft YaHei"/>
                 <a:cs typeface="Microsoft YaHei"/>
               </a:rPr>
-              <a:t>控制器确定性调度，规划器唯一引入大模型；人仅在契约下发、协同介入、终审验收三处交互</a:t>
-            </a:r>
-          </a:p>
-        </p:txBody>
-      </p:sp>
-      <p:sp>
-        <p:nvSpPr>
-          <p:cNvPr id="6" name="Oval 5"/>
+              <a:t>基于「证据感知 — 假设推演 — 确定性核验」闭环；人只在契约下发、协同介入、终审验收三处交互</a:t>
+            </a:r>
+          </a:p>
+        </p:txBody>
+      </p:sp>
+      <p:sp>
+        <p:nvSpPr>
+          <p:cNvPr id="6" name="Rectangle 5"/>
           <p:cNvSpPr/>
           <p:nvPr/>
         </p:nvSpPr>
         <p:spPr>
           <a:xfrm>
-            <a:off x="713232" y="1280160"/>
-            <a:ext cx="146304" cy="146304"/>
-          </a:xfrm>
-          <a:prstGeom prst="ellipse">
+            <a:off x="548640" y="1234440"/>
+            <a:ext cx="54864" cy="237744"/>
+          </a:xfrm>
+          <a:prstGeom prst="rect">
+            <a:avLst/>
+          </a:prstGeom>
+          <a:solidFill>
+            <a:srgbClr val="40708B"/>
+          </a:solidFill>
+          <a:ln>
+            <a:noFill/>
+          </a:ln>
+        </p:spPr>
+        <p:txBody>
+          <a:bodyPr rtlCol="0" anchor="ctr"/>
+          <a:lstStyle/>
+          <a:p>
+            <a:pPr algn="ctr"/>
+          </a:p>
+        </p:txBody>
+      </p:sp>
+      <p:sp>
+        <p:nvSpPr>
+          <p:cNvPr id="7" name="TextBox 6"/>
+          <p:cNvSpPr txBox="1"/>
+          <p:nvPr/>
+        </p:nvSpPr>
+        <p:spPr>
+          <a:xfrm>
+            <a:off x="694944" y="1207008"/>
+            <a:ext cx="2450591" cy="292608"/>
+          </a:xfrm>
+          <a:prstGeom prst="rect">
+            <a:avLst/>
+          </a:prstGeom>
+          <a:noFill/>
+        </p:spPr>
+        <p:txBody>
+          <a:bodyPr wrap="square" anchor="ctr" lIns="0" tIns="0" rIns="0" bIns="0">
+            <a:noAutofit/>
+          </a:bodyPr>
+          <a:lstStyle/>
+          <a:p>
+            <a:pPr algn="l" latinLnBrk="0">
+              <a:lnSpc>
+                <a:spcPct val="100000"/>
+              </a:lnSpc>
+              <a:spcBef>
+                <a:spcPts val="0"/>
+              </a:spcBef>
+              <a:spcAft>
+                <a:spcPts val="0"/>
+              </a:spcAft>
+            </a:pPr>
+            <a:r>
+              <a:rPr sz="1100" b="1">
+                <a:solidFill>
+                  <a:srgbClr val="0A2B45"/>
+                </a:solidFill>
+                <a:latin typeface="Microsoft YaHei"/>
+                <a:ea typeface="Microsoft YaHei"/>
+                <a:cs typeface="Microsoft YaHei"/>
+              </a:rPr>
+              <a:t>人 · 契约与证据</a:t>
+            </a:r>
+            <a:r>
+              <a:rPr sz="850" b="1">
+                <a:solidFill>
+                  <a:srgbClr val="40708B"/>
+                </a:solidFill>
+                <a:latin typeface="Microsoft YaHei"/>
+                <a:ea typeface="Microsoft YaHei"/>
+                <a:cs typeface="Microsoft YaHei"/>
+              </a:rPr>
+              <a:t>　Human in the Loop</a:t>
+            </a:r>
+          </a:p>
+        </p:txBody>
+      </p:sp>
+      <p:sp>
+        <p:nvSpPr>
+          <p:cNvPr id="8" name="Rectangle 7"/>
+          <p:cNvSpPr/>
+          <p:nvPr/>
+        </p:nvSpPr>
+        <p:spPr>
+          <a:xfrm>
+            <a:off x="4041648" y="1234440"/>
+            <a:ext cx="54864" cy="237744"/>
+          </a:xfrm>
+          <a:prstGeom prst="rect">
+            <a:avLst/>
+          </a:prstGeom>
+          <a:solidFill>
+            <a:srgbClr val="D2690C"/>
+          </a:solidFill>
+          <a:ln>
+            <a:noFill/>
+          </a:ln>
+        </p:spPr>
+        <p:txBody>
+          <a:bodyPr rtlCol="0" anchor="ctr"/>
+          <a:lstStyle/>
+          <a:p>
+            <a:pPr algn="ctr"/>
+          </a:p>
+        </p:txBody>
+      </p:sp>
+      <p:sp>
+        <p:nvSpPr>
+          <p:cNvPr id="9" name="TextBox 8"/>
+          <p:cNvSpPr txBox="1"/>
+          <p:nvPr/>
+        </p:nvSpPr>
+        <p:spPr>
+          <a:xfrm>
+            <a:off x="4187952" y="1207008"/>
+            <a:ext cx="3694176" cy="292608"/>
+          </a:xfrm>
+          <a:prstGeom prst="rect">
+            <a:avLst/>
+          </a:prstGeom>
+          <a:noFill/>
+        </p:spPr>
+        <p:txBody>
+          <a:bodyPr wrap="square" anchor="ctr" lIns="0" tIns="0" rIns="0" bIns="0">
+            <a:noAutofit/>
+          </a:bodyPr>
+          <a:lstStyle/>
+          <a:p>
+            <a:pPr algn="l" latinLnBrk="0">
+              <a:lnSpc>
+                <a:spcPct val="100000"/>
+              </a:lnSpc>
+              <a:spcBef>
+                <a:spcPts val="0"/>
+              </a:spcBef>
+              <a:spcAft>
+                <a:spcPts val="0"/>
+              </a:spcAft>
+            </a:pPr>
+            <a:r>
+              <a:rPr sz="1100" b="1">
+                <a:solidFill>
+                  <a:srgbClr val="0A2B45"/>
+                </a:solidFill>
+                <a:latin typeface="Microsoft YaHei"/>
+                <a:ea typeface="Microsoft YaHei"/>
+                <a:cs typeface="Microsoft YaHei"/>
+              </a:rPr>
+              <a:t>模型层 Agent 内部</a:t>
+            </a:r>
+            <a:r>
+              <a:rPr sz="850" b="1">
+                <a:solidFill>
+                  <a:srgbClr val="D2690C"/>
+                </a:solidFill>
+                <a:latin typeface="Microsoft YaHei"/>
+                <a:ea typeface="Microsoft YaHei"/>
+                <a:cs typeface="Microsoft YaHei"/>
+              </a:rPr>
+              <a:t>　唯一引入大模型的位置</a:t>
+            </a:r>
+          </a:p>
+        </p:txBody>
+      </p:sp>
+      <p:sp>
+        <p:nvSpPr>
+          <p:cNvPr id="10" name="Rectangle 9"/>
+          <p:cNvSpPr/>
+          <p:nvPr/>
+        </p:nvSpPr>
+        <p:spPr>
+          <a:xfrm>
+            <a:off x="8705088" y="1234440"/>
+            <a:ext cx="54864" cy="237744"/>
+          </a:xfrm>
+          <a:prstGeom prst="rect">
+            <a:avLst/>
+          </a:prstGeom>
+          <a:solidFill>
+            <a:srgbClr val="0F62CE"/>
+          </a:solidFill>
+          <a:ln>
+            <a:noFill/>
+          </a:ln>
+        </p:spPr>
+        <p:txBody>
+          <a:bodyPr rtlCol="0" anchor="ctr"/>
+          <a:lstStyle/>
+          <a:p>
+            <a:pPr algn="ctr"/>
+          </a:p>
+        </p:txBody>
+      </p:sp>
+      <p:sp>
+        <p:nvSpPr>
+          <p:cNvPr id="11" name="TextBox 10"/>
+          <p:cNvSpPr txBox="1"/>
+          <p:nvPr/>
+        </p:nvSpPr>
+        <p:spPr>
+          <a:xfrm>
+            <a:off x="8851392" y="1207008"/>
+            <a:ext cx="2791663" cy="292608"/>
+          </a:xfrm>
+          <a:prstGeom prst="rect">
+            <a:avLst/>
+          </a:prstGeom>
+          <a:noFill/>
+        </p:spPr>
+        <p:txBody>
+          <a:bodyPr wrap="square" anchor="ctr" lIns="0" tIns="0" rIns="0" bIns="0">
+            <a:noAutofit/>
+          </a:bodyPr>
+          <a:lstStyle/>
+          <a:p>
+            <a:pPr algn="l" latinLnBrk="0">
+              <a:lnSpc>
+                <a:spcPct val="100000"/>
+              </a:lnSpc>
+              <a:spcBef>
+                <a:spcPts val="0"/>
+              </a:spcBef>
+              <a:spcAft>
+                <a:spcPts val="0"/>
+              </a:spcAft>
+            </a:pPr>
+            <a:r>
+              <a:rPr sz="1100" b="1">
+                <a:solidFill>
+                  <a:srgbClr val="0A2B45"/>
+                </a:solidFill>
+                <a:latin typeface="Microsoft YaHei"/>
+                <a:ea typeface="Microsoft YaHei"/>
+                <a:cs typeface="Microsoft YaHei"/>
+              </a:rPr>
+              <a:t>确定性工具与评测后端</a:t>
+            </a:r>
+            <a:r>
+              <a:rPr sz="850" b="1">
+                <a:solidFill>
+                  <a:srgbClr val="0F62CE"/>
+                </a:solidFill>
+                <a:latin typeface="Microsoft YaHei"/>
+                <a:ea typeface="Microsoft YaHei"/>
+                <a:cs typeface="Microsoft YaHei"/>
+              </a:rPr>
+              <a:t>　确定性执行 · 无模型</a:t>
+            </a:r>
+          </a:p>
+        </p:txBody>
+      </p:sp>
+      <p:sp>
+        <p:nvSpPr>
+          <p:cNvPr id="12" name="Rectangle 11"/>
+          <p:cNvSpPr/>
+          <p:nvPr/>
+        </p:nvSpPr>
+        <p:spPr>
+          <a:xfrm>
+            <a:off x="548640" y="1572768"/>
+            <a:ext cx="2596896" cy="1225296"/>
+          </a:xfrm>
+          <a:prstGeom prst="rect">
             <a:avLst/>
           </a:prstGeom>
           <a:solidFill>
             <a:srgbClr val="FFFFFF"/>
           </a:solidFill>
-          <a:ln w="15875">
+          <a:ln w="9525">
             <a:solidFill>
-              <a:srgbClr val="1B4D69"/>
+              <a:srgbClr val="CFE3F0"/>
             </a:solidFill>
           </a:ln>
         </p:spPr>
@@ -30309,100 +30570,941 @@
           </a:p>
         </p:txBody>
       </p:sp>
-      <p:cxnSp>
-        <p:nvCxnSpPr>
-          <p:cNvPr id="7" name="Connector 6"/>
-          <p:cNvCxnSpPr/>
-          <p:nvPr/>
-        </p:nvCxnSpPr>
-        <p:spPr>
-          <a:xfrm>
-            <a:off x="786384" y="1426463"/>
-            <a:ext cx="0" cy="182880"/>
-          </a:xfrm>
-          <a:prstGeom prst="line">
-            <a:avLst/>
-          </a:prstGeom>
-          <a:ln w="15875">
+      <p:sp>
+        <p:nvSpPr>
+          <p:cNvPr id="13" name="Rectangle 12"/>
+          <p:cNvSpPr/>
+          <p:nvPr/>
+        </p:nvSpPr>
+        <p:spPr>
+          <a:xfrm>
+            <a:off x="548640" y="1572768"/>
+            <a:ext cx="64008" cy="1225296"/>
+          </a:xfrm>
+          <a:prstGeom prst="rect">
+            <a:avLst/>
+          </a:prstGeom>
+          <a:solidFill>
+            <a:srgbClr val="40708B"/>
+          </a:solidFill>
+          <a:ln>
+            <a:noFill/>
+          </a:ln>
+        </p:spPr>
+        <p:txBody>
+          <a:bodyPr rtlCol="0" anchor="ctr"/>
+          <a:lstStyle/>
+          <a:p>
+            <a:pPr algn="ctr"/>
+          </a:p>
+        </p:txBody>
+      </p:sp>
+      <p:sp>
+        <p:nvSpPr>
+          <p:cNvPr id="14" name="TextBox 13"/>
+          <p:cNvSpPr txBox="1"/>
+          <p:nvPr/>
+        </p:nvSpPr>
+        <p:spPr>
+          <a:xfrm>
+            <a:off x="731520" y="1618488"/>
+            <a:ext cx="2267712" cy="1133856"/>
+          </a:xfrm>
+          <a:prstGeom prst="rect">
+            <a:avLst/>
+          </a:prstGeom>
+          <a:noFill/>
+        </p:spPr>
+        <p:txBody>
+          <a:bodyPr wrap="square" anchor="ctr" lIns="0" tIns="0" rIns="0" bIns="0">
+            <a:noAutofit/>
+          </a:bodyPr>
+          <a:lstStyle/>
+          <a:p>
+            <a:pPr algn="l" latinLnBrk="0">
+              <a:lnSpc>
+                <a:spcPct val="100000"/>
+              </a:lnSpc>
+              <a:spcBef>
+                <a:spcPts val="0"/>
+              </a:spcBef>
+              <a:spcAft>
+                <a:spcPts val="300"/>
+              </a:spcAft>
+            </a:pPr>
+            <a:r>
+              <a:rPr sz="1050" b="1">
+                <a:solidFill>
+                  <a:srgbClr val="0A2B45"/>
+                </a:solidFill>
+                <a:latin typeface="Microsoft YaHei"/>
+                <a:ea typeface="Microsoft YaHei"/>
+                <a:cs typeface="Microsoft YaHei"/>
+              </a:rPr>
+              <a:t>冻结契约</a:t>
+            </a:r>
+            <a:r>
+              <a:rPr sz="800" b="1">
+                <a:solidFill>
+                  <a:srgbClr val="40708B"/>
+                </a:solidFill>
+                <a:latin typeface="Consolas"/>
+                <a:ea typeface="Microsoft YaHei"/>
+                <a:cs typeface="Microsoft YaHei"/>
+              </a:rPr>
+              <a:t>　人 → Agent</a:t>
+            </a:r>
+          </a:p>
+          <a:p>
+            <a:pPr algn="l" latinLnBrk="0">
+              <a:lnSpc>
+                <a:spcPct val="100000"/>
+              </a:lnSpc>
+              <a:spcBef>
+                <a:spcPts val="0"/>
+              </a:spcBef>
+              <a:spcAft>
+                <a:spcPts val="0"/>
+              </a:spcAft>
+            </a:pPr>
+            <a:r>
+              <a:rPr sz="900" b="0">
+                <a:solidFill>
+                  <a:srgbClr val="1B4D69"/>
+                </a:solidFill>
+                <a:latin typeface="Microsoft YaHei"/>
+                <a:ea typeface="Microsoft YaHei"/>
+                <a:cs typeface="Microsoft YaHei"/>
+              </a:rPr>
+              <a:t>·　优化任务</a:t>
+            </a:r>
+            <a:r>
+              <a:rPr sz="750" b="0">
+                <a:solidFill>
+                  <a:srgbClr val="0F62CE"/>
+                </a:solidFill>
+                <a:latin typeface="Consolas"/>
+                <a:ea typeface="Microsoft YaHei"/>
+                <a:cs typeface="Microsoft YaHei"/>
+              </a:rPr>
+              <a:t>　optimization-task.json</a:t>
+            </a:r>
+          </a:p>
+          <a:p>
+            <a:pPr algn="l" latinLnBrk="0">
+              <a:lnSpc>
+                <a:spcPct val="100000"/>
+              </a:lnSpc>
+              <a:spcBef>
+                <a:spcPts val="0"/>
+              </a:spcBef>
+              <a:spcAft>
+                <a:spcPts val="0"/>
+              </a:spcAft>
+            </a:pPr>
+            <a:r>
+              <a:rPr sz="900" b="0">
+                <a:solidFill>
+                  <a:srgbClr val="1B4D69"/>
+                </a:solidFill>
+                <a:latin typeface="Microsoft YaHei"/>
+                <a:ea typeface="Microsoft YaHei"/>
+                <a:cs typeface="Microsoft YaHei"/>
+              </a:rPr>
+              <a:t>·　质量契约</a:t>
+            </a:r>
+            <a:r>
+              <a:rPr sz="750" b="0">
+                <a:solidFill>
+                  <a:srgbClr val="0F62CE"/>
+                </a:solidFill>
+                <a:latin typeface="Consolas"/>
+                <a:ea typeface="Microsoft YaHei"/>
+                <a:cs typeface="Microsoft YaHei"/>
+              </a:rPr>
+              <a:t>　generation-task.json</a:t>
+            </a:r>
+          </a:p>
+          <a:p>
+            <a:pPr algn="l" latinLnBrk="0">
+              <a:lnSpc>
+                <a:spcPct val="100000"/>
+              </a:lnSpc>
+              <a:spcBef>
+                <a:spcPts val="0"/>
+              </a:spcBef>
+              <a:spcAft>
+                <a:spcPts val="0"/>
+              </a:spcAft>
+            </a:pPr>
+            <a:r>
+              <a:rPr sz="900" b="0">
+                <a:solidFill>
+                  <a:srgbClr val="1B4D69"/>
+                </a:solidFill>
+                <a:latin typeface="Microsoft YaHei"/>
+                <a:ea typeface="Microsoft YaHei"/>
+                <a:cs typeface="Microsoft YaHei"/>
+              </a:rPr>
+              <a:t>·　调优知识</a:t>
+            </a:r>
+            <a:r>
+              <a:rPr sz="750" b="0">
+                <a:solidFill>
+                  <a:srgbClr val="0F62CE"/>
+                </a:solidFill>
+                <a:latin typeface="Consolas"/>
+                <a:ea typeface="Microsoft YaHei"/>
+                <a:cs typeface="Microsoft YaHei"/>
+              </a:rPr>
+              <a:t>　planner-skills/ × 10</a:t>
+            </a:r>
+          </a:p>
+          <a:p>
+            <a:pPr algn="l" latinLnBrk="0">
+              <a:lnSpc>
+                <a:spcPct val="100000"/>
+              </a:lnSpc>
+              <a:spcBef>
+                <a:spcPts val="0"/>
+              </a:spcBef>
+              <a:spcAft>
+                <a:spcPts val="0"/>
+              </a:spcAft>
+            </a:pPr>
+            <a:r>
+              <a:rPr sz="900" b="0">
+                <a:solidFill>
+                  <a:srgbClr val="1B4D69"/>
+                </a:solidFill>
+                <a:latin typeface="Microsoft YaHei"/>
+                <a:ea typeface="Microsoft YaHei"/>
+                <a:cs typeface="Microsoft YaHei"/>
+              </a:rPr>
+              <a:t>·　授权边界：测试范围 · 可跳过项</a:t>
+            </a:r>
+          </a:p>
+        </p:txBody>
+      </p:sp>
+      <p:sp>
+        <p:nvSpPr>
+          <p:cNvPr id="15" name="Rectangle 14"/>
+          <p:cNvSpPr/>
+          <p:nvPr/>
+        </p:nvSpPr>
+        <p:spPr>
+          <a:xfrm>
+            <a:off x="548640" y="2926080"/>
+            <a:ext cx="2596896" cy="658368"/>
+          </a:xfrm>
+          <a:prstGeom prst="rect">
+            <a:avLst/>
+          </a:prstGeom>
+          <a:solidFill>
+            <a:srgbClr val="FFFFFF"/>
+          </a:solidFill>
+          <a:ln w="9525">
             <a:solidFill>
-              <a:srgbClr val="1B4D69"/>
+              <a:srgbClr val="CFE3F0"/>
             </a:solidFill>
           </a:ln>
         </p:spPr>
-      </p:cxnSp>
-      <p:cxnSp>
-        <p:nvCxnSpPr>
-          <p:cNvPr id="8" name="Connector 7"/>
-          <p:cNvCxnSpPr/>
-          <p:nvPr/>
-        </p:nvCxnSpPr>
-        <p:spPr>
-          <a:xfrm>
-            <a:off x="649224" y="1490472"/>
-            <a:ext cx="274320" cy="0"/>
-          </a:xfrm>
-          <a:prstGeom prst="line">
-            <a:avLst/>
-          </a:prstGeom>
-          <a:ln w="15875">
+        <p:txBody>
+          <a:bodyPr rtlCol="0" anchor="ctr"/>
+          <a:lstStyle/>
+          <a:p>
+            <a:pPr algn="ctr"/>
+          </a:p>
+        </p:txBody>
+      </p:sp>
+      <p:sp>
+        <p:nvSpPr>
+          <p:cNvPr id="16" name="Rectangle 15"/>
+          <p:cNvSpPr/>
+          <p:nvPr/>
+        </p:nvSpPr>
+        <p:spPr>
+          <a:xfrm>
+            <a:off x="548640" y="2926080"/>
+            <a:ext cx="64008" cy="658368"/>
+          </a:xfrm>
+          <a:prstGeom prst="rect">
+            <a:avLst/>
+          </a:prstGeom>
+          <a:solidFill>
+            <a:srgbClr val="D2690C"/>
+          </a:solidFill>
+          <a:ln>
+            <a:noFill/>
+          </a:ln>
+        </p:spPr>
+        <p:txBody>
+          <a:bodyPr rtlCol="0" anchor="ctr"/>
+          <a:lstStyle/>
+          <a:p>
+            <a:pPr algn="ctr"/>
+          </a:p>
+        </p:txBody>
+      </p:sp>
+      <p:sp>
+        <p:nvSpPr>
+          <p:cNvPr id="17" name="TextBox 16"/>
+          <p:cNvSpPr txBox="1"/>
+          <p:nvPr/>
+        </p:nvSpPr>
+        <p:spPr>
+          <a:xfrm>
+            <a:off x="731520" y="2971800"/>
+            <a:ext cx="2267712" cy="566928"/>
+          </a:xfrm>
+          <a:prstGeom prst="rect">
+            <a:avLst/>
+          </a:prstGeom>
+          <a:noFill/>
+        </p:spPr>
+        <p:txBody>
+          <a:bodyPr wrap="square" anchor="ctr" lIns="0" tIns="0" rIns="0" bIns="0">
+            <a:noAutofit/>
+          </a:bodyPr>
+          <a:lstStyle/>
+          <a:p>
+            <a:pPr algn="l" latinLnBrk="0">
+              <a:lnSpc>
+                <a:spcPct val="100000"/>
+              </a:lnSpc>
+              <a:spcBef>
+                <a:spcPts val="0"/>
+              </a:spcBef>
+              <a:spcAft>
+                <a:spcPts val="300"/>
+              </a:spcAft>
+            </a:pPr>
+            <a:r>
+              <a:rPr sz="1050" b="1">
+                <a:solidFill>
+                  <a:srgbClr val="0A2B45"/>
+                </a:solidFill>
+                <a:latin typeface="Microsoft YaHei"/>
+                <a:ea typeface="Microsoft YaHei"/>
+                <a:cs typeface="Microsoft YaHei"/>
+              </a:rPr>
+              <a:t>协同补丁</a:t>
+            </a:r>
+            <a:r>
+              <a:rPr sz="800" b="1">
+                <a:solidFill>
+                  <a:srgbClr val="D2690C"/>
+                </a:solidFill>
+                <a:latin typeface="Consolas"/>
+                <a:ea typeface="Microsoft YaHei"/>
+                <a:cs typeface="Microsoft YaHei"/>
+              </a:rPr>
+              <a:t>　人 ⇄ 规划器</a:t>
+            </a:r>
+          </a:p>
+          <a:p>
+            <a:pPr algn="l" latinLnBrk="0">
+              <a:lnSpc>
+                <a:spcPct val="100000"/>
+              </a:lnSpc>
+              <a:spcBef>
+                <a:spcPts val="0"/>
+              </a:spcBef>
+              <a:spcAft>
+                <a:spcPts val="0"/>
+              </a:spcAft>
+            </a:pPr>
+            <a:r>
+              <a:rPr sz="900" b="0">
+                <a:solidFill>
+                  <a:srgbClr val="1B4D69"/>
+                </a:solidFill>
+                <a:latin typeface="Microsoft YaHei"/>
+                <a:ea typeface="Microsoft YaHei"/>
+                <a:cs typeface="Microsoft YaHei"/>
+              </a:rPr>
+              <a:t>·　结对补丁</a:t>
+            </a:r>
+            <a:r>
+              <a:rPr sz="750" b="0">
+                <a:solidFill>
+                  <a:srgbClr val="0F62CE"/>
+                </a:solidFill>
+                <a:latin typeface="Consolas"/>
+                <a:ea typeface="Microsoft YaHei"/>
+                <a:cs typeface="Microsoft YaHei"/>
+              </a:rPr>
+              <a:t>　changes.patch</a:t>
+            </a:r>
+          </a:p>
+          <a:p>
+            <a:pPr algn="l" latinLnBrk="0">
+              <a:lnSpc>
+                <a:spcPct val="100000"/>
+              </a:lnSpc>
+              <a:spcBef>
+                <a:spcPts val="0"/>
+              </a:spcBef>
+              <a:spcAft>
+                <a:spcPts val="0"/>
+              </a:spcAft>
+            </a:pPr>
+            <a:r>
+              <a:rPr sz="900" b="0">
+                <a:solidFill>
+                  <a:srgbClr val="1B4D69"/>
+                </a:solidFill>
+                <a:latin typeface="Microsoft YaHei"/>
+                <a:ea typeface="Microsoft YaHei"/>
+                <a:cs typeface="Microsoft YaHei"/>
+              </a:rPr>
+              <a:t>·　复杂改动由人主导，同样走四道门禁</a:t>
+            </a:r>
+          </a:p>
+        </p:txBody>
+      </p:sp>
+      <p:sp>
+        <p:nvSpPr>
+          <p:cNvPr id="18" name="Rectangle 17"/>
+          <p:cNvSpPr/>
+          <p:nvPr/>
+        </p:nvSpPr>
+        <p:spPr>
+          <a:xfrm>
+            <a:off x="548640" y="4078224"/>
+            <a:ext cx="2596896" cy="1060704"/>
+          </a:xfrm>
+          <a:prstGeom prst="rect">
+            <a:avLst/>
+          </a:prstGeom>
+          <a:solidFill>
+            <a:srgbClr val="FFFFFF"/>
+          </a:solidFill>
+          <a:ln w="9525">
             <a:solidFill>
-              <a:srgbClr val="1B4D69"/>
+              <a:srgbClr val="CFE3F0"/>
             </a:solidFill>
           </a:ln>
         </p:spPr>
-      </p:cxnSp>
-      <p:cxnSp>
-        <p:nvCxnSpPr>
-          <p:cNvPr id="9" name="Connector 8"/>
-          <p:cNvCxnSpPr/>
-          <p:nvPr/>
-        </p:nvCxnSpPr>
-        <p:spPr>
-          <a:xfrm flipH="1">
-            <a:off x="676656" y="1609343"/>
-            <a:ext cx="109728" cy="146305"/>
-          </a:xfrm>
-          <a:prstGeom prst="line">
-            <a:avLst/>
-          </a:prstGeom>
-          <a:ln w="15875">
+        <p:txBody>
+          <a:bodyPr rtlCol="0" anchor="ctr"/>
+          <a:lstStyle/>
+          <a:p>
+            <a:pPr algn="ctr"/>
+          </a:p>
+        </p:txBody>
+      </p:sp>
+      <p:sp>
+        <p:nvSpPr>
+          <p:cNvPr id="19" name="Rectangle 18"/>
+          <p:cNvSpPr/>
+          <p:nvPr/>
+        </p:nvSpPr>
+        <p:spPr>
+          <a:xfrm>
+            <a:off x="548640" y="4078224"/>
+            <a:ext cx="64008" cy="1060704"/>
+          </a:xfrm>
+          <a:prstGeom prst="rect">
+            <a:avLst/>
+          </a:prstGeom>
+          <a:solidFill>
+            <a:srgbClr val="40708B"/>
+          </a:solidFill>
+          <a:ln>
+            <a:noFill/>
+          </a:ln>
+        </p:spPr>
+        <p:txBody>
+          <a:bodyPr rtlCol="0" anchor="ctr"/>
+          <a:lstStyle/>
+          <a:p>
+            <a:pPr algn="ctr"/>
+          </a:p>
+        </p:txBody>
+      </p:sp>
+      <p:sp>
+        <p:nvSpPr>
+          <p:cNvPr id="20" name="TextBox 19"/>
+          <p:cNvSpPr txBox="1"/>
+          <p:nvPr/>
+        </p:nvSpPr>
+        <p:spPr>
+          <a:xfrm>
+            <a:off x="731520" y="4123944"/>
+            <a:ext cx="2267712" cy="969263"/>
+          </a:xfrm>
+          <a:prstGeom prst="rect">
+            <a:avLst/>
+          </a:prstGeom>
+          <a:noFill/>
+        </p:spPr>
+        <p:txBody>
+          <a:bodyPr wrap="square" anchor="ctr" lIns="0" tIns="0" rIns="0" bIns="0">
+            <a:noAutofit/>
+          </a:bodyPr>
+          <a:lstStyle/>
+          <a:p>
+            <a:pPr algn="l" latinLnBrk="0">
+              <a:lnSpc>
+                <a:spcPct val="100000"/>
+              </a:lnSpc>
+              <a:spcBef>
+                <a:spcPts val="0"/>
+              </a:spcBef>
+              <a:spcAft>
+                <a:spcPts val="300"/>
+              </a:spcAft>
+            </a:pPr>
+            <a:r>
+              <a:rPr sz="1050" b="1">
+                <a:solidFill>
+                  <a:srgbClr val="0A2B45"/>
+                </a:solidFill>
+                <a:latin typeface="Microsoft YaHei"/>
+                <a:ea typeface="Microsoft YaHei"/>
+                <a:cs typeface="Microsoft YaHei"/>
+              </a:rPr>
+              <a:t>判决与证据黑板</a:t>
+            </a:r>
+            <a:r>
+              <a:rPr sz="800" b="1">
+                <a:solidFill>
+                  <a:srgbClr val="40708B"/>
+                </a:solidFill>
+                <a:latin typeface="Consolas"/>
+                <a:ea typeface="Microsoft YaHei"/>
+                <a:cs typeface="Microsoft YaHei"/>
+              </a:rPr>
+              <a:t>　Verdict Blackboard</a:t>
+            </a:r>
+          </a:p>
+          <a:p>
+            <a:pPr algn="l" latinLnBrk="0">
+              <a:lnSpc>
+                <a:spcPct val="100000"/>
+              </a:lnSpc>
+              <a:spcBef>
+                <a:spcPts val="0"/>
+              </a:spcBef>
+              <a:spcAft>
+                <a:spcPts val="0"/>
+              </a:spcAft>
+            </a:pPr>
+            <a:r>
+              <a:rPr sz="900" b="0">
+                <a:solidFill>
+                  <a:srgbClr val="1B4D69"/>
+                </a:solidFill>
+                <a:latin typeface="Microsoft YaHei"/>
+                <a:ea typeface="Microsoft YaHei"/>
+                <a:cs typeface="Microsoft YaHei"/>
+              </a:rPr>
+              <a:t>·　门禁判决与被拒原因</a:t>
+            </a:r>
+          </a:p>
+          <a:p>
+            <a:pPr algn="l" latinLnBrk="0">
+              <a:lnSpc>
+                <a:spcPct val="100000"/>
+              </a:lnSpc>
+              <a:spcBef>
+                <a:spcPts val="0"/>
+              </a:spcBef>
+              <a:spcAft>
+                <a:spcPts val="0"/>
+              </a:spcAft>
+            </a:pPr>
+            <a:r>
+              <a:rPr sz="900" b="0">
+                <a:solidFill>
+                  <a:srgbClr val="1B4D69"/>
+                </a:solidFill>
+                <a:latin typeface="Microsoft YaHei"/>
+                <a:ea typeface="Microsoft YaHei"/>
+                <a:cs typeface="Microsoft YaHei"/>
+              </a:rPr>
+              <a:t>·　数值与质量偏差详情</a:t>
+            </a:r>
+          </a:p>
+          <a:p>
+            <a:pPr algn="l" latinLnBrk="0">
+              <a:lnSpc>
+                <a:spcPct val="100000"/>
+              </a:lnSpc>
+              <a:spcBef>
+                <a:spcPts val="0"/>
+              </a:spcBef>
+              <a:spcAft>
+                <a:spcPts val="0"/>
+              </a:spcAft>
+            </a:pPr>
+            <a:r>
+              <a:rPr sz="900" b="0">
+                <a:solidFill>
+                  <a:srgbClr val="1B4D69"/>
+                </a:solidFill>
+                <a:latin typeface="Microsoft YaHei"/>
+                <a:ea typeface="Microsoft YaHei"/>
+                <a:cs typeface="Microsoft YaHei"/>
+              </a:rPr>
+              <a:t>·　实测耗时与下界差距</a:t>
+            </a:r>
+          </a:p>
+        </p:txBody>
+      </p:sp>
+      <p:sp>
+        <p:nvSpPr>
+          <p:cNvPr id="21" name="Rectangle 20"/>
+          <p:cNvSpPr/>
+          <p:nvPr/>
+        </p:nvSpPr>
+        <p:spPr>
+          <a:xfrm>
+            <a:off x="8705088" y="1572768"/>
+            <a:ext cx="2937967" cy="1316736"/>
+          </a:xfrm>
+          <a:prstGeom prst="rect">
+            <a:avLst/>
+          </a:prstGeom>
+          <a:solidFill>
+            <a:srgbClr val="FFFFFF"/>
+          </a:solidFill>
+          <a:ln w="9525">
             <a:solidFill>
-              <a:srgbClr val="1B4D69"/>
+              <a:srgbClr val="CFE3F0"/>
             </a:solidFill>
           </a:ln>
         </p:spPr>
-      </p:cxnSp>
-      <p:cxnSp>
-        <p:nvCxnSpPr>
-          <p:cNvPr id="10" name="Connector 9"/>
-          <p:cNvCxnSpPr/>
-          <p:nvPr/>
-        </p:nvCxnSpPr>
-        <p:spPr>
-          <a:xfrm>
-            <a:off x="786384" y="1609343"/>
-            <a:ext cx="109728" cy="146305"/>
-          </a:xfrm>
-          <a:prstGeom prst="line">
-            <a:avLst/>
-          </a:prstGeom>
-          <a:ln w="15875">
+        <p:txBody>
+          <a:bodyPr rtlCol="0" anchor="ctr"/>
+          <a:lstStyle/>
+          <a:p>
+            <a:pPr algn="ctr"/>
+          </a:p>
+        </p:txBody>
+      </p:sp>
+      <p:sp>
+        <p:nvSpPr>
+          <p:cNvPr id="22" name="Rectangle 21"/>
+          <p:cNvSpPr/>
+          <p:nvPr/>
+        </p:nvSpPr>
+        <p:spPr>
+          <a:xfrm>
+            <a:off x="8705088" y="1572768"/>
+            <a:ext cx="64008" cy="1316736"/>
+          </a:xfrm>
+          <a:prstGeom prst="rect">
+            <a:avLst/>
+          </a:prstGeom>
+          <a:solidFill>
+            <a:srgbClr val="0F62CE"/>
+          </a:solidFill>
+          <a:ln>
+            <a:noFill/>
+          </a:ln>
+        </p:spPr>
+        <p:txBody>
+          <a:bodyPr rtlCol="0" anchor="ctr"/>
+          <a:lstStyle/>
+          <a:p>
+            <a:pPr algn="ctr"/>
+          </a:p>
+        </p:txBody>
+      </p:sp>
+      <p:sp>
+        <p:nvSpPr>
+          <p:cNvPr id="23" name="TextBox 22"/>
+          <p:cNvSpPr txBox="1"/>
+          <p:nvPr/>
+        </p:nvSpPr>
+        <p:spPr>
+          <a:xfrm>
+            <a:off x="8887967" y="1618488"/>
+            <a:ext cx="2608783" cy="1225295"/>
+          </a:xfrm>
+          <a:prstGeom prst="rect">
+            <a:avLst/>
+          </a:prstGeom>
+          <a:noFill/>
+        </p:spPr>
+        <p:txBody>
+          <a:bodyPr wrap="square" anchor="ctr" lIns="0" tIns="0" rIns="0" bIns="0">
+            <a:noAutofit/>
+          </a:bodyPr>
+          <a:lstStyle/>
+          <a:p>
+            <a:pPr algn="l" latinLnBrk="0">
+              <a:lnSpc>
+                <a:spcPct val="100000"/>
+              </a:lnSpc>
+              <a:spcBef>
+                <a:spcPts val="0"/>
+              </a:spcBef>
+              <a:spcAft>
+                <a:spcPts val="300"/>
+              </a:spcAft>
+            </a:pPr>
+            <a:r>
+              <a:rPr sz="1050" b="1">
+                <a:solidFill>
+                  <a:srgbClr val="0A2B45"/>
+                </a:solidFill>
+                <a:latin typeface="Microsoft YaHei"/>
+                <a:ea typeface="Microsoft YaHei"/>
+                <a:cs typeface="Microsoft YaHei"/>
+              </a:rPr>
+              <a:t>源码与冻结证据</a:t>
+            </a:r>
+            <a:r>
+              <a:rPr sz="800" b="1">
+                <a:solidFill>
+                  <a:srgbClr val="0F62CE"/>
+                </a:solidFill>
+                <a:latin typeface="Consolas"/>
+                <a:ea typeface="Microsoft YaHei"/>
+                <a:cs typeface="Microsoft YaHei"/>
+              </a:rPr>
+              <a:t>　Source &amp; Evidence</a:t>
+            </a:r>
+          </a:p>
+          <a:p>
+            <a:pPr algn="l" latinLnBrk="0">
+              <a:lnSpc>
+                <a:spcPct val="100000"/>
+              </a:lnSpc>
+              <a:spcBef>
+                <a:spcPts val="0"/>
+              </a:spcBef>
+              <a:spcAft>
+                <a:spcPts val="0"/>
+              </a:spcAft>
+            </a:pPr>
+            <a:r>
+              <a:rPr sz="900" b="0">
+                <a:solidFill>
+                  <a:srgbClr val="1B4D69"/>
+                </a:solidFill>
+                <a:latin typeface="Microsoft YaHei"/>
+                <a:ea typeface="Microsoft YaHei"/>
+                <a:cs typeface="Microsoft YaHei"/>
+              </a:rPr>
+              <a:t>·　SGLang 原仓库只读</a:t>
+            </a:r>
+          </a:p>
+          <a:p>
+            <a:pPr algn="l" latinLnBrk="0">
+              <a:lnSpc>
+                <a:spcPct val="100000"/>
+              </a:lnSpc>
+              <a:spcBef>
+                <a:spcPts val="0"/>
+              </a:spcBef>
+              <a:spcAft>
+                <a:spcPts val="0"/>
+              </a:spcAft>
+            </a:pPr>
+            <a:r>
+              <a:rPr sz="900" b="0">
+                <a:solidFill>
+                  <a:srgbClr val="1B4D69"/>
+                </a:solidFill>
+                <a:latin typeface="Microsoft YaHei"/>
+                <a:ea typeface="Microsoft YaHei"/>
+                <a:cs typeface="Microsoft YaHei"/>
+              </a:rPr>
+              <a:t>·　有界探针</a:t>
+            </a:r>
+            <a:r>
+              <a:rPr sz="750" b="0">
+                <a:solidFill>
+                  <a:srgbClr val="0F62CE"/>
+                </a:solidFill>
+                <a:latin typeface="Consolas"/>
+                <a:ea typeface="Microsoft YaHei"/>
+                <a:cs typeface="Microsoft YaHei"/>
+              </a:rPr>
+              <a:t>　planner_diagnostics.py</a:t>
+            </a:r>
+          </a:p>
+          <a:p>
+            <a:pPr algn="l" latinLnBrk="0">
+              <a:lnSpc>
+                <a:spcPct val="100000"/>
+              </a:lnSpc>
+              <a:spcBef>
+                <a:spcPts val="0"/>
+              </a:spcBef>
+              <a:spcAft>
+                <a:spcPts val="0"/>
+              </a:spcAft>
+            </a:pPr>
+            <a:r>
+              <a:rPr sz="900" b="0">
+                <a:solidFill>
+                  <a:srgbClr val="1B4D69"/>
+                </a:solidFill>
+                <a:latin typeface="Microsoft YaHei"/>
+                <a:ea typeface="Microsoft YaHei"/>
+                <a:cs typeface="Microsoft YaHei"/>
+              </a:rPr>
+              <a:t>·　逐次留痕</a:t>
+            </a:r>
+            <a:r>
+              <a:rPr sz="750" b="0">
+                <a:solidFill>
+                  <a:srgbClr val="0F62CE"/>
+                </a:solidFill>
+                <a:latin typeface="Consolas"/>
+                <a:ea typeface="Microsoft YaHei"/>
+                <a:cs typeface="Microsoft YaHei"/>
+              </a:rPr>
+              <a:t>　attempts/ · planner/</a:t>
+            </a:r>
+          </a:p>
+          <a:p>
+            <a:pPr algn="l" latinLnBrk="0">
+              <a:lnSpc>
+                <a:spcPct val="100000"/>
+              </a:lnSpc>
+              <a:spcBef>
+                <a:spcPts val="0"/>
+              </a:spcBef>
+              <a:spcAft>
+                <a:spcPts val="0"/>
+              </a:spcAft>
+            </a:pPr>
+            <a:r>
+              <a:rPr sz="900" b="0">
+                <a:solidFill>
+                  <a:srgbClr val="1B4D69"/>
+                </a:solidFill>
+                <a:latin typeface="Microsoft YaHei"/>
+                <a:ea typeface="Microsoft YaHei"/>
+                <a:cs typeface="Microsoft YaHei"/>
+              </a:rPr>
+              <a:t>·　诊断产物 ≤ 64 KiB</a:t>
+            </a:r>
+            <a:r>
+              <a:rPr sz="750" b="0">
+                <a:solidFill>
+                  <a:srgbClr val="0F62CE"/>
+                </a:solidFill>
+                <a:latin typeface="Consolas"/>
+                <a:ea typeface="Microsoft YaHei"/>
+                <a:cs typeface="Microsoft YaHei"/>
+              </a:rPr>
+              <a:t>　probes/</a:t>
+            </a:r>
+          </a:p>
+          <a:p>
+            <a:pPr algn="l" latinLnBrk="0">
+              <a:lnSpc>
+                <a:spcPct val="100000"/>
+              </a:lnSpc>
+              <a:spcBef>
+                <a:spcPts val="0"/>
+              </a:spcBef>
+              <a:spcAft>
+                <a:spcPts val="0"/>
+              </a:spcAft>
+            </a:pPr>
+            <a:r>
+              <a:rPr sz="900" b="0">
+                <a:solidFill>
+                  <a:srgbClr val="1B4D69"/>
+                </a:solidFill>
+                <a:latin typeface="Microsoft YaHei"/>
+                <a:ea typeface="Microsoft YaHei"/>
+                <a:cs typeface="Microsoft YaHei"/>
+              </a:rPr>
+              <a:t>·　冻结快照 + SHA</a:t>
+            </a:r>
+            <a:r>
+              <a:rPr sz="750" b="0">
+                <a:solidFill>
+                  <a:srgbClr val="0F62CE"/>
+                </a:solidFill>
+                <a:latin typeface="Consolas"/>
+                <a:ea typeface="Microsoft YaHei"/>
+                <a:cs typeface="Microsoft YaHei"/>
+              </a:rPr>
+              <a:t>　backup/</a:t>
+            </a:r>
+          </a:p>
+        </p:txBody>
+      </p:sp>
+      <p:sp>
+        <p:nvSpPr>
+          <p:cNvPr id="24" name="Rectangle 23"/>
+          <p:cNvSpPr/>
+          <p:nvPr/>
+        </p:nvSpPr>
+        <p:spPr>
+          <a:xfrm>
+            <a:off x="8705088" y="3895344"/>
+            <a:ext cx="2937967" cy="1371600"/>
+          </a:xfrm>
+          <a:prstGeom prst="rect">
+            <a:avLst/>
+          </a:prstGeom>
+          <a:solidFill>
+            <a:srgbClr val="FFFFFF"/>
+          </a:solidFill>
+          <a:ln w="9525">
             <a:solidFill>
-              <a:srgbClr val="1B4D69"/>
+              <a:srgbClr val="CFE3F0"/>
             </a:solidFill>
           </a:ln>
         </p:spPr>
-      </p:cxnSp>
-      <p:sp>
-        <p:nvSpPr>
-          <p:cNvPr id="11" name="TextBox 10"/>
-          <p:cNvSpPr txBox="1"/>
-          <p:nvPr/>
-        </p:nvSpPr>
-        <p:spPr>
-          <a:xfrm>
-            <a:off x="1060704" y="1261872"/>
-            <a:ext cx="1591055" cy="512064"/>
+        <p:txBody>
+          <a:bodyPr rtlCol="0" anchor="ctr"/>
+          <a:lstStyle/>
+          <a:p>
+            <a:pPr algn="ctr"/>
+          </a:p>
+        </p:txBody>
+      </p:sp>
+      <p:sp>
+        <p:nvSpPr>
+          <p:cNvPr id="25" name="Rectangle 24"/>
+          <p:cNvSpPr/>
+          <p:nvPr/>
+        </p:nvSpPr>
+        <p:spPr>
+          <a:xfrm>
+            <a:off x="8705088" y="3895344"/>
+            <a:ext cx="64008" cy="1371600"/>
+          </a:xfrm>
+          <a:prstGeom prst="rect">
+            <a:avLst/>
+          </a:prstGeom>
+          <a:solidFill>
+            <a:srgbClr val="0F62CE"/>
+          </a:solidFill>
+          <a:ln>
+            <a:noFill/>
+          </a:ln>
+        </p:spPr>
+        <p:txBody>
+          <a:bodyPr rtlCol="0" anchor="ctr"/>
+          <a:lstStyle/>
+          <a:p>
+            <a:pPr algn="ctr"/>
+          </a:p>
+        </p:txBody>
+      </p:sp>
+      <p:sp>
+        <p:nvSpPr>
+          <p:cNvPr id="26" name="TextBox 25"/>
+          <p:cNvSpPr txBox="1"/>
+          <p:nvPr/>
+        </p:nvSpPr>
+        <p:spPr>
+          <a:xfrm>
+            <a:off x="8887967" y="3941063"/>
+            <a:ext cx="2608783" cy="1280160"/>
           </a:xfrm>
           <a:prstGeom prst="rect">
             <a:avLst/>
@@ -30423,11 +31525,11 @@
                 <a:spcPts val="0"/>
               </a:spcBef>
               <a:spcAft>
-                <a:spcPts val="100"/>
-              </a:spcAft>
-            </a:pPr>
-            <a:r>
-              <a:rPr sz="1200" b="1">
+                <a:spcPts val="300"/>
+              </a:spcAft>
+            </a:pPr>
+            <a:r>
+              <a:rPr sz="1050" b="1">
                 <a:solidFill>
                   <a:srgbClr val="0A2B45"/>
                 </a:solidFill>
@@ -30435,10 +31537,34 @@
                 <a:ea typeface="Microsoft YaHei"/>
                 <a:cs typeface="Microsoft YaHei"/>
               </a:rPr>
-              <a:t>人</a:t>
-            </a:r>
-            <a:r>
-              <a:rPr sz="950" b="0">
+              <a:t>构建与真机评测</a:t>
+            </a:r>
+            <a:r>
+              <a:rPr sz="800" b="1">
+                <a:solidFill>
+                  <a:srgbClr val="0F62CE"/>
+                </a:solidFill>
+                <a:latin typeface="Consolas"/>
+                <a:ea typeface="Microsoft YaHei"/>
+                <a:cs typeface="Microsoft YaHei"/>
+              </a:rPr>
+              <a:t>　Build &amp; Bench</a:t>
+            </a:r>
+          </a:p>
+          <a:p>
+            <a:pPr algn="l" latinLnBrk="0">
+              <a:lnSpc>
+                <a:spcPct val="100000"/>
+              </a:lnSpc>
+              <a:spcBef>
+                <a:spcPts val="0"/>
+              </a:spcBef>
+              <a:spcAft>
+                <a:spcPts val="0"/>
+              </a:spcAft>
+            </a:pPr>
+            <a:r>
+              <a:rPr sz="900" b="0">
                 <a:solidFill>
                   <a:srgbClr val="1B4D69"/>
                 </a:solidFill>
@@ -30446,7 +31572,18 @@
                 <a:ea typeface="Microsoft YaHei"/>
                 <a:cs typeface="Microsoft YaHei"/>
               </a:rPr>
-              <a:t>　任务负责人</a:t>
+              <a:t>·　原位建版本 · 精确重测</a:t>
+            </a:r>
+            <a:r>
+              <a:rPr sz="750" b="0">
+                <a:solidFill>
+                  <a:srgbClr val="0F62CE"/>
+                </a:solidFill>
+                <a:latin typeface="Consolas"/>
+                <a:ea typeface="Microsoft YaHei"/>
+                <a:cs typeface="Microsoft YaHei"/>
+              </a:rPr>
+              <a:t>　git_workspace.py</a:t>
             </a:r>
           </a:p>
           <a:p>
@@ -30462,29 +31599,147 @@
               </a:spcAft>
             </a:pPr>
             <a:r>
+              <a:rPr sz="900" b="0">
+                <a:solidFill>
+                  <a:srgbClr val="1B4D69"/>
+                </a:solidFill>
+                <a:latin typeface="Microsoft YaHei"/>
+                <a:ea typeface="Microsoft YaHei"/>
+                <a:cs typeface="Microsoft YaHei"/>
+              </a:rPr>
+              <a:t>·　四道门禁</a:t>
+            </a:r>
+            <a:r>
               <a:rPr sz="750" b="0">
                 <a:solidFill>
-                  <a:srgbClr val="40708B"/>
-                </a:solidFill>
-                <a:latin typeface="Microsoft YaHei"/>
-                <a:ea typeface="Microsoft YaHei"/>
-                <a:cs typeface="Microsoft YaHei"/>
-              </a:rPr>
-              <a:t>«actor»</a:t>
-            </a:r>
-          </a:p>
-        </p:txBody>
-      </p:sp>
-      <p:sp>
-        <p:nvSpPr>
-          <p:cNvPr id="12" name="Rectangle 11"/>
+                  <a:srgbClr val="0F62CE"/>
+                </a:solidFill>
+                <a:latin typeface="Consolas"/>
+                <a:ea typeface="Microsoft YaHei"/>
+                <a:cs typeface="Microsoft YaHei"/>
+              </a:rPr>
+              <a:t>　selfiterate_gates.py</a:t>
+            </a:r>
+          </a:p>
+          <a:p>
+            <a:pPr algn="l" latinLnBrk="0">
+              <a:lnSpc>
+                <a:spcPct val="100000"/>
+              </a:lnSpc>
+              <a:spcBef>
+                <a:spcPts val="0"/>
+              </a:spcBef>
+              <a:spcAft>
+                <a:spcPts val="0"/>
+              </a:spcAft>
+            </a:pPr>
+            <a:r>
+              <a:rPr sz="900" b="0">
+                <a:solidFill>
+                  <a:srgbClr val="1B4D69"/>
+                </a:solidFill>
+                <a:latin typeface="Microsoft YaHei"/>
+                <a:ea typeface="Microsoft YaHei"/>
+                <a:cs typeface="Microsoft YaHei"/>
+              </a:rPr>
+              <a:t>·　C 设备微测 ≥ 2%　数值门 · 质量门</a:t>
+            </a:r>
+          </a:p>
+          <a:p>
+            <a:pPr algn="l" latinLnBrk="0">
+              <a:lnSpc>
+                <a:spcPct val="100000"/>
+              </a:lnSpc>
+              <a:spcBef>
+                <a:spcPts val="0"/>
+              </a:spcBef>
+              <a:spcAft>
+                <a:spcPts val="0"/>
+              </a:spcAft>
+            </a:pPr>
+            <a:r>
+              <a:rPr sz="900" b="0">
+                <a:solidFill>
+                  <a:srgbClr val="1B4D69"/>
+                </a:solidFill>
+                <a:latin typeface="Microsoft YaHei"/>
+                <a:ea typeface="Microsoft YaHei"/>
+                <a:cs typeface="Microsoft YaHei"/>
+              </a:rPr>
+              <a:t>·　D 整模三方 A/B 过噪声门</a:t>
+            </a:r>
+          </a:p>
+          <a:p>
+            <a:pPr algn="l" latinLnBrk="0">
+              <a:lnSpc>
+                <a:spcPct val="100000"/>
+              </a:lnSpc>
+              <a:spcBef>
+                <a:spcPts val="0"/>
+              </a:spcBef>
+              <a:spcAft>
+                <a:spcPts val="0"/>
+              </a:spcAft>
+            </a:pPr>
+            <a:r>
+              <a:rPr sz="900" b="0">
+                <a:solidFill>
+                  <a:srgbClr val="1B4D69"/>
+                </a:solidFill>
+                <a:latin typeface="Microsoft YaHei"/>
+                <a:ea typeface="Microsoft YaHei"/>
+                <a:cs typeface="Microsoft YaHei"/>
+              </a:rPr>
+              <a:t>·　下界账本 · ratio 自检</a:t>
+            </a:r>
+            <a:r>
+              <a:rPr sz="750" b="0">
+                <a:solidFill>
+                  <a:srgbClr val="0F62CE"/>
+                </a:solidFill>
+                <a:latin typeface="Consolas"/>
+                <a:ea typeface="Microsoft YaHei"/>
+                <a:cs typeface="Microsoft YaHei"/>
+              </a:rPr>
+              <a:t>　roofline.py</a:t>
+            </a:r>
+          </a:p>
+          <a:p>
+            <a:pPr algn="l" latinLnBrk="0">
+              <a:lnSpc>
+                <a:spcPct val="100000"/>
+              </a:lnSpc>
+              <a:spcBef>
+                <a:spcPts val="0"/>
+              </a:spcBef>
+              <a:spcAft>
+                <a:spcPts val="0"/>
+              </a:spcAft>
+            </a:pPr>
+            <a:r>
+              <a:rPr sz="900" b="0">
+                <a:solidFill>
+                  <a:srgbClr val="1B4D69"/>
+                </a:solidFill>
+                <a:latin typeface="Microsoft YaHei"/>
+                <a:ea typeface="Microsoft YaHei"/>
+                <a:cs typeface="Microsoft YaHei"/>
+              </a:rPr>
+              <a:t>·　M100 物理卡真机实测</a:t>
+            </a:r>
+          </a:p>
+        </p:txBody>
+      </p:sp>
+      <p:sp>
+        <p:nvSpPr>
+          <p:cNvPr id="27" name="Rectangle 26"/>
           <p:cNvSpPr/>
           <p:nvPr/>
         </p:nvSpPr>
         <p:spPr>
           <a:xfrm>
-            <a:off x="548640" y="1883664"/>
-            <a:ext cx="2103120" cy="1133856"/>
+            <a:off x="4041648" y="1517904"/>
+            <a:ext cx="3840480" cy="3986783"/>
           </a:xfrm>
           <a:prstGeom prst="rect">
             <a:avLst/>
@@ -30508,71 +31763,793 @@
       </p:sp>
       <p:sp>
         <p:nvSpPr>
-          <p:cNvPr id="13" name="Rectangle 12"/>
+          <p:cNvPr id="28" name="Rounded Rectangle 27"/>
           <p:cNvSpPr/>
           <p:nvPr/>
         </p:nvSpPr>
         <p:spPr>
           <a:xfrm>
-            <a:off x="548640" y="1883664"/>
-            <a:ext cx="54864" cy="1133856"/>
-          </a:xfrm>
-          <a:prstGeom prst="rect">
-            <a:avLst/>
+            <a:off x="4272076" y="1572768"/>
+            <a:ext cx="3379622" cy="493776"/>
+          </a:xfrm>
+          <a:prstGeom prst="roundRect">
+            <a:avLst>
+              <a:gd name="adj" fmla="val 14814"/>
+            </a:avLst>
           </a:prstGeom>
           <a:solidFill>
-            <a:srgbClr val="40708B"/>
+            <a:srgbClr val="E6F0FC"/>
+          </a:solidFill>
+          <a:ln w="9525">
+            <a:solidFill>
+              <a:srgbClr val="0F62CE"/>
+            </a:solidFill>
+          </a:ln>
+        </p:spPr>
+        <p:txBody>
+          <a:bodyPr rtlCol="0" anchor="ctr" wrap="square" tIns="36576" bIns="36576">
+            <a:noAutofit/>
+          </a:bodyPr>
+          <a:lstStyle/>
+          <a:p>
+            <a:pPr algn="ctr" latinLnBrk="0">
+              <a:lnSpc>
+                <a:spcPct val="100000"/>
+              </a:lnSpc>
+              <a:spcBef>
+                <a:spcPts val="0"/>
+              </a:spcBef>
+              <a:spcAft>
+                <a:spcPts val="200"/>
+              </a:spcAft>
+            </a:pPr>
+            <a:r>
+              <a:rPr sz="1100" b="1">
+                <a:solidFill>
+                  <a:srgbClr val="0A2B45"/>
+                </a:solidFill>
+                <a:latin typeface="Microsoft YaHei"/>
+                <a:ea typeface="Microsoft YaHei"/>
+                <a:cs typeface="Microsoft YaHei"/>
+              </a:rPr>
+              <a:t>状态机与编排</a:t>
+            </a:r>
+            <a:r>
+              <a:rPr sz="850" b="1">
+                <a:solidFill>
+                  <a:srgbClr val="0F62CE"/>
+                </a:solidFill>
+                <a:latin typeface="Consolas"/>
+                <a:ea typeface="Microsoft YaHei"/>
+                <a:cs typeface="Microsoft YaHei"/>
+              </a:rPr>
+              <a:t>　Orchestration</a:t>
+            </a:r>
+          </a:p>
+          <a:p>
+            <a:pPr algn="ctr" latinLnBrk="0">
+              <a:lnSpc>
+                <a:spcPct val="100000"/>
+              </a:lnSpc>
+              <a:spcBef>
+                <a:spcPts val="0"/>
+              </a:spcBef>
+              <a:spcAft>
+                <a:spcPts val="0"/>
+              </a:spcAft>
+            </a:pPr>
+            <a:r>
+              <a:rPr sz="850" b="0">
+                <a:solidFill>
+                  <a:srgbClr val="1B4D69"/>
+                </a:solidFill>
+                <a:latin typeface="Microsoft YaHei"/>
+                <a:ea typeface="Microsoft YaHei"/>
+                <a:cs typeface="Microsoft YaHei"/>
+              </a:rPr>
+              <a:t>optimization.py　设备锁 · 状态流转 · 中断恢复</a:t>
+            </a:r>
+          </a:p>
+        </p:txBody>
+      </p:sp>
+      <p:sp>
+        <p:nvSpPr>
+          <p:cNvPr id="29" name="Rounded Rectangle 28"/>
+          <p:cNvSpPr/>
+          <p:nvPr/>
+        </p:nvSpPr>
+        <p:spPr>
+          <a:xfrm>
+            <a:off x="4272076" y="2194560"/>
+            <a:ext cx="3379622" cy="603504"/>
+          </a:xfrm>
+          <a:prstGeom prst="roundRect">
+            <a:avLst>
+              <a:gd name="adj" fmla="val 12121"/>
+            </a:avLst>
+          </a:prstGeom>
+          <a:solidFill>
+            <a:srgbClr val="E6F0FC"/>
+          </a:solidFill>
+          <a:ln w="9525">
+            <a:solidFill>
+              <a:srgbClr val="0F62CE"/>
+            </a:solidFill>
+          </a:ln>
+        </p:spPr>
+        <p:txBody>
+          <a:bodyPr rtlCol="0" anchor="ctr" wrap="square" tIns="36576" bIns="36576">
+            <a:noAutofit/>
+          </a:bodyPr>
+          <a:lstStyle/>
+          <a:p>
+            <a:pPr algn="ctr" latinLnBrk="0">
+              <a:lnSpc>
+                <a:spcPct val="100000"/>
+              </a:lnSpc>
+              <a:spcBef>
+                <a:spcPts val="0"/>
+              </a:spcBef>
+              <a:spcAft>
+                <a:spcPts val="200"/>
+              </a:spcAft>
+            </a:pPr>
+            <a:r>
+              <a:rPr sz="1100" b="1">
+                <a:solidFill>
+                  <a:srgbClr val="0A2B45"/>
+                </a:solidFill>
+                <a:latin typeface="Microsoft YaHei"/>
+                <a:ea typeface="Microsoft YaHei"/>
+                <a:cs typeface="Microsoft YaHei"/>
+              </a:rPr>
+              <a:t>通信与记忆</a:t>
+            </a:r>
+            <a:r>
+              <a:rPr sz="850" b="1">
+                <a:solidFill>
+                  <a:srgbClr val="0F62CE"/>
+                </a:solidFill>
+                <a:latin typeface="Consolas"/>
+                <a:ea typeface="Microsoft YaHei"/>
+                <a:cs typeface="Microsoft YaHei"/>
+              </a:rPr>
+              <a:t>　Mailbox / Memory</a:t>
+            </a:r>
+          </a:p>
+          <a:p>
+            <a:pPr algn="ctr" latinLnBrk="0">
+              <a:lnSpc>
+                <a:spcPct val="100000"/>
+              </a:lnSpc>
+              <a:spcBef>
+                <a:spcPts val="0"/>
+              </a:spcBef>
+              <a:spcAft>
+                <a:spcPts val="0"/>
+              </a:spcAft>
+            </a:pPr>
+            <a:r>
+              <a:rPr sz="850" b="0">
+                <a:solidFill>
+                  <a:srgbClr val="1B4D69"/>
+                </a:solidFill>
+                <a:latin typeface="Microsoft YaHei"/>
+                <a:ea typeface="Microsoft YaHei"/>
+                <a:cs typeface="Microsoft YaHei"/>
+              </a:rPr>
+              <a:t>planner_mailbox.py　UUID + SHA + schema</a:t>
+            </a:r>
+          </a:p>
+          <a:p>
+            <a:pPr algn="ctr" latinLnBrk="0">
+              <a:lnSpc>
+                <a:spcPct val="100000"/>
+              </a:lnSpc>
+              <a:spcBef>
+                <a:spcPts val="0"/>
+              </a:spcBef>
+              <a:spcAft>
+                <a:spcPts val="0"/>
+              </a:spcAft>
+            </a:pPr>
+            <a:r>
+              <a:rPr sz="850" b="0">
+                <a:solidFill>
+                  <a:srgbClr val="1B4D69"/>
+                </a:solidFill>
+                <a:latin typeface="Microsoft YaHei"/>
+                <a:ea typeface="Microsoft YaHei"/>
+                <a:cs typeface="Microsoft YaHei"/>
+              </a:rPr>
+              <a:t>planner_memory.py　摘要 + 被拒原因 ≤ 18 KB</a:t>
+            </a:r>
+          </a:p>
+        </p:txBody>
+      </p:sp>
+      <p:cxnSp>
+        <p:nvCxnSpPr>
+          <p:cNvPr id="30" name="Connector 29"/>
+          <p:cNvCxnSpPr/>
+          <p:nvPr/>
+        </p:nvCxnSpPr>
+        <p:spPr>
+          <a:xfrm>
+            <a:off x="5961888" y="2075687"/>
+            <a:ext cx="0" cy="109729"/>
+          </a:xfrm>
+          <a:prstGeom prst="line">
+            <a:avLst/>
+          </a:prstGeom>
+          <a:ln w="19050">
+            <a:solidFill>
+              <a:srgbClr val="0F62CE"/>
+            </a:solidFill>
+            <a:tailEnd type="triangle" w="med" len="med"/>
+          </a:ln>
+        </p:spPr>
+      </p:cxnSp>
+      <p:sp>
+        <p:nvSpPr>
+          <p:cNvPr id="31" name="Rounded Rectangle 30"/>
+          <p:cNvSpPr/>
+          <p:nvPr/>
+        </p:nvSpPr>
+        <p:spPr>
+          <a:xfrm>
+            <a:off x="4272076" y="2926080"/>
+            <a:ext cx="3379622" cy="1280160"/>
+          </a:xfrm>
+          <a:prstGeom prst="roundRect">
+            <a:avLst>
+              <a:gd name="adj" fmla="val 5714"/>
+            </a:avLst>
+          </a:prstGeom>
+          <a:solidFill>
+            <a:srgbClr val="FBE6D4"/>
+          </a:solidFill>
+          <a:ln w="9525">
+            <a:solidFill>
+              <a:srgbClr val="D2690C"/>
+            </a:solidFill>
+          </a:ln>
+        </p:spPr>
+        <p:txBody>
+          <a:bodyPr rtlCol="0" anchor="ctr"/>
+          <a:lstStyle/>
+          <a:p>
+            <a:pPr algn="ctr"/>
+          </a:p>
+        </p:txBody>
+      </p:sp>
+      <p:sp>
+        <p:nvSpPr>
+          <p:cNvPr id="32" name="TextBox 31"/>
+          <p:cNvSpPr txBox="1"/>
+          <p:nvPr/>
+        </p:nvSpPr>
+        <p:spPr>
+          <a:xfrm>
+            <a:off x="4272076" y="2980944"/>
+            <a:ext cx="3379622" cy="237744"/>
+          </a:xfrm>
+          <a:prstGeom prst="rect">
+            <a:avLst/>
+          </a:prstGeom>
+          <a:noFill/>
+        </p:spPr>
+        <p:txBody>
+          <a:bodyPr wrap="square" anchor="ctr" lIns="0" tIns="0" rIns="0" bIns="0">
+            <a:noAutofit/>
+          </a:bodyPr>
+          <a:lstStyle/>
+          <a:p>
+            <a:pPr algn="ctr" latinLnBrk="0">
+              <a:lnSpc>
+                <a:spcPct val="100000"/>
+              </a:lnSpc>
+              <a:spcBef>
+                <a:spcPts val="0"/>
+              </a:spcBef>
+              <a:spcAft>
+                <a:spcPts val="200"/>
+              </a:spcAft>
+            </a:pPr>
+            <a:r>
+              <a:rPr sz="1150" b="1">
+                <a:solidFill>
+                  <a:srgbClr val="0A2B45"/>
+                </a:solidFill>
+                <a:latin typeface="Microsoft YaHei"/>
+                <a:ea typeface="Microsoft YaHei"/>
+                <a:cs typeface="Microsoft YaHei"/>
+              </a:rPr>
+              <a:t>规划器推演</a:t>
+            </a:r>
+            <a:r>
+              <a:rPr sz="850" b="1">
+                <a:solidFill>
+                  <a:srgbClr val="C2570A"/>
+                </a:solidFill>
+                <a:latin typeface="Consolas"/>
+                <a:ea typeface="Microsoft YaHei"/>
+                <a:cs typeface="Microsoft YaHei"/>
+              </a:rPr>
+              <a:t>　Thought　Codex 外部托管会话</a:t>
+            </a:r>
+          </a:p>
+        </p:txBody>
+      </p:sp>
+      <p:sp>
+        <p:nvSpPr>
+          <p:cNvPr id="33" name="Rounded Rectangle 32"/>
+          <p:cNvSpPr/>
+          <p:nvPr/>
+        </p:nvSpPr>
+        <p:spPr>
+          <a:xfrm>
+            <a:off x="5303520" y="3255264"/>
+            <a:ext cx="1316736" cy="219456"/>
+          </a:xfrm>
+          <a:prstGeom prst="roundRect">
+            <a:avLst>
+              <a:gd name="adj" fmla="val 50000"/>
+            </a:avLst>
+          </a:prstGeom>
+          <a:solidFill>
+            <a:srgbClr val="D2690C"/>
           </a:solidFill>
           <a:ln>
             <a:noFill/>
           </a:ln>
         </p:spPr>
         <p:txBody>
-          <a:bodyPr rtlCol="0" anchor="ctr"/>
-          <a:lstStyle/>
-          <a:p>
-            <a:pPr algn="ctr"/>
-          </a:p>
-        </p:txBody>
-      </p:sp>
-      <p:sp>
-        <p:nvSpPr>
-          <p:cNvPr id="14" name="Freeform 13"/>
+          <a:bodyPr rtlCol="0" anchor="ctr" wrap="square" lIns="36576" tIns="0" rIns="36576" bIns="0">
+            <a:noAutofit/>
+          </a:bodyPr>
+          <a:lstStyle/>
+          <a:p>
+            <a:pPr algn="ctr" latinLnBrk="0">
+              <a:lnSpc>
+                <a:spcPct val="100000"/>
+              </a:lnSpc>
+              <a:spcBef>
+                <a:spcPts val="0"/>
+              </a:spcBef>
+              <a:spcAft>
+                <a:spcPts val="0"/>
+              </a:spcAft>
+            </a:pPr>
+            <a:r>
+              <a:rPr sz="800" b="1">
+                <a:solidFill>
+                  <a:srgbClr val="FFFFFF"/>
+                </a:solidFill>
+                <a:latin typeface="Microsoft YaHei"/>
+                <a:ea typeface="Microsoft YaHei"/>
+                <a:cs typeface="Microsoft YaHei"/>
+              </a:rPr>
+              <a:t>大模型唯一介入点</a:t>
+            </a:r>
+          </a:p>
+        </p:txBody>
+      </p:sp>
+      <p:sp>
+        <p:nvSpPr>
+          <p:cNvPr id="34" name="TextBox 33"/>
+          <p:cNvSpPr txBox="1"/>
+          <p:nvPr/>
+        </p:nvSpPr>
+        <p:spPr>
+          <a:xfrm>
+            <a:off x="4326940" y="3511296"/>
+            <a:ext cx="3269894" cy="640080"/>
+          </a:xfrm>
+          <a:prstGeom prst="rect">
+            <a:avLst/>
+          </a:prstGeom>
+          <a:noFill/>
+        </p:spPr>
+        <p:txBody>
+          <a:bodyPr wrap="square" anchor="ctr" lIns="0" tIns="0" rIns="0" bIns="0">
+            <a:noAutofit/>
+          </a:bodyPr>
+          <a:lstStyle/>
+          <a:p>
+            <a:pPr algn="ctr" latinLnBrk="0">
+              <a:lnSpc>
+                <a:spcPct val="100000"/>
+              </a:lnSpc>
+              <a:spcBef>
+                <a:spcPts val="0"/>
+              </a:spcBef>
+              <a:spcAft>
+                <a:spcPts val="0"/>
+              </a:spcAft>
+            </a:pPr>
+            <a:r>
+              <a:rPr sz="850" b="0">
+                <a:solidFill>
+                  <a:srgbClr val="1B4D69"/>
+                </a:solidFill>
+                <a:latin typeface="Microsoft YaHei"/>
+                <a:ea typeface="Microsoft YaHei"/>
+                <a:cs typeface="Microsoft YaHei"/>
+              </a:rPr>
+              <a:t>读源码与冻结证据，形成假设并提出结构化动作</a:t>
+            </a:r>
+          </a:p>
+          <a:p>
+            <a:pPr algn="ctr" latinLnBrk="0">
+              <a:lnSpc>
+                <a:spcPct val="100000"/>
+              </a:lnSpc>
+              <a:spcBef>
+                <a:spcPts val="0"/>
+              </a:spcBef>
+              <a:spcAft>
+                <a:spcPts val="0"/>
+              </a:spcAft>
+            </a:pPr>
+            <a:r>
+              <a:rPr sz="850" b="0">
+                <a:solidFill>
+                  <a:srgbClr val="1B4D69"/>
+                </a:solidFill>
+                <a:latin typeface="Microsoft YaHei"/>
+                <a:ea typeface="Microsoft YaHei"/>
+                <a:cs typeface="Microsoft YaHei"/>
+              </a:rPr>
+              <a:t>动作限定：</a:t>
+            </a:r>
+            <a:r>
+              <a:rPr sz="750" b="0">
+                <a:solidFill>
+                  <a:srgbClr val="C2570A"/>
+                </a:solidFill>
+                <a:latin typeface="Consolas"/>
+                <a:ea typeface="Microsoft YaHei"/>
+                <a:cs typeface="Microsoft YaHei"/>
+              </a:rPr>
+              <a:t>read · search · list · probe · patch · stop</a:t>
+            </a:r>
+          </a:p>
+          <a:p>
+            <a:pPr algn="ctr" latinLnBrk="0">
+              <a:lnSpc>
+                <a:spcPct val="100000"/>
+              </a:lnSpc>
+              <a:spcBef>
+                <a:spcPts val="0"/>
+              </a:spcBef>
+              <a:spcAft>
+                <a:spcPts val="0"/>
+              </a:spcAft>
+            </a:pPr>
+            <a:r>
+              <a:rPr sz="850" b="1">
+                <a:solidFill>
+                  <a:srgbClr val="C2570A"/>
+                </a:solidFill>
+                <a:latin typeface="Microsoft YaHei"/>
+                <a:ea typeface="Microsoft YaHei"/>
+                <a:cs typeface="Microsoft YaHei"/>
+              </a:rPr>
+              <a:t>硬约束：不能自行宣告成功</a:t>
+            </a:r>
+          </a:p>
+        </p:txBody>
+      </p:sp>
+      <p:cxnSp>
+        <p:nvCxnSpPr>
+          <p:cNvPr id="35" name="Connector 34"/>
+          <p:cNvCxnSpPr/>
+          <p:nvPr/>
+        </p:nvCxnSpPr>
+        <p:spPr>
+          <a:xfrm>
+            <a:off x="5961888" y="2807208"/>
+            <a:ext cx="0" cy="109728"/>
+          </a:xfrm>
+          <a:prstGeom prst="line">
+            <a:avLst/>
+          </a:prstGeom>
+          <a:ln w="19050">
+            <a:solidFill>
+              <a:srgbClr val="D2690C"/>
+            </a:solidFill>
+            <a:headEnd type="triangle" w="med" len="med"/>
+            <a:tailEnd type="triangle" w="med" len="med"/>
+          </a:ln>
+        </p:spPr>
+      </p:cxnSp>
+      <p:sp>
+        <p:nvSpPr>
+          <p:cNvPr id="36" name="Rounded Rectangle 35"/>
           <p:cNvSpPr/>
           <p:nvPr/>
         </p:nvSpPr>
         <p:spPr>
           <a:xfrm>
-            <a:off x="2432304" y="1965960"/>
-            <a:ext cx="118872" cy="146304"/>
-          </a:xfrm>
-          <a:custGeom>
-            <a:avLst/>
-            <a:gdLst/>
-            <a:ahLst/>
-            <a:cxnLst/>
-            <a:rect l="l" t="t" r="r" b="b"/>
-            <a:pathLst>
-              <a:path w="118872" h="146304">
-                <a:moveTo>
-                  <a:pt x="0" y="0"/>
-                </a:moveTo>
-                <a:lnTo>
-                  <a:pt x="77724" y="0"/>
-                </a:lnTo>
-                <a:lnTo>
-                  <a:pt x="118872" y="41147"/>
-                </a:lnTo>
-                <a:lnTo>
-                  <a:pt x="118872" y="146304"/>
-                </a:lnTo>
-                <a:lnTo>
-                  <a:pt x="0" y="146304"/>
-                </a:lnTo>
-                <a:close/>
-              </a:path>
-            </a:pathLst>
-          </a:custGeom>
+            <a:off x="4272076" y="4334256"/>
+            <a:ext cx="3379622" cy="493776"/>
+          </a:xfrm>
+          <a:prstGeom prst="roundRect">
+            <a:avLst>
+              <a:gd name="adj" fmla="val 14814"/>
+            </a:avLst>
+          </a:prstGeom>
+          <a:solidFill>
+            <a:srgbClr val="E6F0FC"/>
+          </a:solidFill>
+          <a:ln w="9525">
+            <a:solidFill>
+              <a:srgbClr val="0F62CE"/>
+            </a:solidFill>
+          </a:ln>
+        </p:spPr>
+        <p:txBody>
+          <a:bodyPr rtlCol="0" anchor="ctr" wrap="square" tIns="36576" bIns="36576">
+            <a:noAutofit/>
+          </a:bodyPr>
+          <a:lstStyle/>
+          <a:p>
+            <a:pPr algn="ctr" latinLnBrk="0">
+              <a:lnSpc>
+                <a:spcPct val="100000"/>
+              </a:lnSpc>
+              <a:spcBef>
+                <a:spcPts val="0"/>
+              </a:spcBef>
+              <a:spcAft>
+                <a:spcPts val="200"/>
+              </a:spcAft>
+            </a:pPr>
+            <a:r>
+              <a:rPr sz="1100" b="1">
+                <a:solidFill>
+                  <a:srgbClr val="0A2B45"/>
+                </a:solidFill>
+                <a:latin typeface="Microsoft YaHei"/>
+                <a:ea typeface="Microsoft YaHei"/>
+                <a:cs typeface="Microsoft YaHei"/>
+              </a:rPr>
+              <a:t>动作执行</a:t>
+            </a:r>
+            <a:r>
+              <a:rPr sz="850" b="1">
+                <a:solidFill>
+                  <a:srgbClr val="0F62CE"/>
+                </a:solidFill>
+                <a:latin typeface="Consolas"/>
+                <a:ea typeface="Microsoft YaHei"/>
+                <a:cs typeface="Microsoft YaHei"/>
+              </a:rPr>
+              <a:t>　Action</a:t>
+            </a:r>
+          </a:p>
+          <a:p>
+            <a:pPr algn="ctr" latinLnBrk="0">
+              <a:lnSpc>
+                <a:spcPct val="100000"/>
+              </a:lnSpc>
+              <a:spcBef>
+                <a:spcPts val="0"/>
+              </a:spcBef>
+              <a:spcAft>
+                <a:spcPts val="0"/>
+              </a:spcAft>
+            </a:pPr>
+            <a:r>
+              <a:rPr sz="850" b="0">
+                <a:solidFill>
+                  <a:srgbClr val="1B4D69"/>
+                </a:solidFill>
+                <a:latin typeface="Microsoft YaHei"/>
+                <a:ea typeface="Microsoft YaHei"/>
+                <a:cs typeface="Microsoft YaHei"/>
+              </a:rPr>
+              <a:t>optimization_staging.py　打包补丁，触发构建与门禁</a:t>
+            </a:r>
+          </a:p>
+        </p:txBody>
+      </p:sp>
+      <p:cxnSp>
+        <p:nvCxnSpPr>
+          <p:cNvPr id="37" name="Connector 36"/>
+          <p:cNvCxnSpPr/>
+          <p:nvPr/>
+        </p:nvCxnSpPr>
+        <p:spPr>
+          <a:xfrm>
+            <a:off x="5961888" y="4215383"/>
+            <a:ext cx="0" cy="109729"/>
+          </a:xfrm>
+          <a:prstGeom prst="line">
+            <a:avLst/>
+          </a:prstGeom>
+          <a:ln w="19050">
+            <a:solidFill>
+              <a:srgbClr val="0F62CE"/>
+            </a:solidFill>
+            <a:tailEnd type="triangle" w="med" len="med"/>
+          </a:ln>
+        </p:spPr>
+      </p:cxnSp>
+      <p:sp>
+        <p:nvSpPr>
+          <p:cNvPr id="38" name="Rounded Rectangle 37"/>
+          <p:cNvSpPr/>
+          <p:nvPr/>
+        </p:nvSpPr>
+        <p:spPr>
+          <a:xfrm>
+            <a:off x="4272076" y="4974336"/>
+            <a:ext cx="3379622" cy="438912"/>
+          </a:xfrm>
+          <a:prstGeom prst="roundRect">
+            <a:avLst>
+              <a:gd name="adj" fmla="val 16666"/>
+            </a:avLst>
+          </a:prstGeom>
+          <a:solidFill>
+            <a:srgbClr val="E6F0FC"/>
+          </a:solidFill>
+          <a:ln w="9525">
+            <a:solidFill>
+              <a:srgbClr val="0F62CE"/>
+            </a:solidFill>
+          </a:ln>
+        </p:spPr>
+        <p:txBody>
+          <a:bodyPr rtlCol="0" anchor="ctr" wrap="square" tIns="36576" bIns="36576">
+            <a:noAutofit/>
+          </a:bodyPr>
+          <a:lstStyle/>
+          <a:p>
+            <a:pPr algn="ctr" latinLnBrk="0">
+              <a:lnSpc>
+                <a:spcPct val="100000"/>
+              </a:lnSpc>
+              <a:spcBef>
+                <a:spcPts val="0"/>
+              </a:spcBef>
+              <a:spcAft>
+                <a:spcPts val="0"/>
+              </a:spcAft>
+            </a:pPr>
+            <a:r>
+              <a:rPr sz="1050" b="1">
+                <a:solidFill>
+                  <a:srgbClr val="0F62CE"/>
+                </a:solidFill>
+                <a:latin typeface="Microsoft YaHei"/>
+                <a:ea typeface="Microsoft YaHei"/>
+                <a:cs typeface="Microsoft YaHei"/>
+              </a:rPr>
+              <a:t>判决报告 → 人</a:t>
+            </a:r>
+            <a:r>
+              <a:rPr sz="750" b="0">
+                <a:solidFill>
+                  <a:srgbClr val="1B4D69"/>
+                </a:solidFill>
+                <a:latin typeface="Consolas"/>
+                <a:ea typeface="Microsoft YaHei"/>
+                <a:cs typeface="Microsoft YaHei"/>
+              </a:rPr>
+              <a:t>　optimization-report.md · best.json</a:t>
+            </a:r>
+          </a:p>
+        </p:txBody>
+      </p:sp>
+      <p:cxnSp>
+        <p:nvCxnSpPr>
+          <p:cNvPr id="39" name="Connector 38"/>
+          <p:cNvCxnSpPr/>
+          <p:nvPr/>
+        </p:nvCxnSpPr>
+        <p:spPr>
+          <a:xfrm>
+            <a:off x="5961888" y="4837176"/>
+            <a:ext cx="0" cy="128016"/>
+          </a:xfrm>
+          <a:prstGeom prst="line">
+            <a:avLst/>
+          </a:prstGeom>
+          <a:ln w="19050">
+            <a:solidFill>
+              <a:srgbClr val="0F62CE"/>
+            </a:solidFill>
+            <a:tailEnd type="triangle" w="med" len="med"/>
+          </a:ln>
+        </p:spPr>
+      </p:cxnSp>
+      <p:sp>
+        <p:nvSpPr>
+          <p:cNvPr id="40" name="TextBox 39"/>
+          <p:cNvSpPr txBox="1"/>
+          <p:nvPr/>
+        </p:nvSpPr>
+        <p:spPr>
+          <a:xfrm>
+            <a:off x="6053327" y="4828032"/>
+            <a:ext cx="1005840" cy="146304"/>
+          </a:xfrm>
+          <a:prstGeom prst="rect">
+            <a:avLst/>
+          </a:prstGeom>
+          <a:noFill/>
+        </p:spPr>
+        <p:txBody>
+          <a:bodyPr wrap="square" anchor="ctr" lIns="0" tIns="0" rIns="0" bIns="0">
+            <a:noAutofit/>
+          </a:bodyPr>
+          <a:lstStyle/>
+          <a:p>
+            <a:pPr algn="l" latinLnBrk="0">
+              <a:lnSpc>
+                <a:spcPct val="100000"/>
+              </a:lnSpc>
+              <a:spcBef>
+                <a:spcPts val="0"/>
+              </a:spcBef>
+              <a:spcAft>
+                <a:spcPts val="0"/>
+              </a:spcAft>
+            </a:pPr>
+            <a:r>
+              <a:rPr sz="750" b="1">
+                <a:solidFill>
+                  <a:srgbClr val="0F62CE"/>
+                </a:solidFill>
+                <a:latin typeface="Microsoft YaHei"/>
+                <a:ea typeface="Microsoft YaHei"/>
+                <a:cs typeface="Microsoft YaHei"/>
+              </a:rPr>
+              <a:t>发布：终审验收</a:t>
+            </a:r>
+          </a:p>
+        </p:txBody>
+      </p:sp>
+      <p:cxnSp>
+        <p:nvCxnSpPr>
+          <p:cNvPr id="41" name="Connector 40"/>
+          <p:cNvCxnSpPr/>
+          <p:nvPr/>
+        </p:nvCxnSpPr>
+        <p:spPr>
+          <a:xfrm>
+            <a:off x="3145536" y="1819656"/>
+            <a:ext cx="1089964" cy="0"/>
+          </a:xfrm>
+          <a:prstGeom prst="line">
+            <a:avLst/>
+          </a:prstGeom>
+          <a:ln w="19050">
+            <a:solidFill>
+              <a:srgbClr val="40708B"/>
+            </a:solidFill>
+            <a:tailEnd type="triangle" w="med" len="med"/>
+          </a:ln>
+        </p:spPr>
+      </p:cxnSp>
+      <p:sp>
+        <p:nvSpPr>
+          <p:cNvPr id="42" name="Rounded Rectangle 41"/>
+          <p:cNvSpPr/>
+          <p:nvPr/>
+        </p:nvSpPr>
+        <p:spPr>
+          <a:xfrm>
+            <a:off x="3236975" y="1719072"/>
+            <a:ext cx="713232" cy="201168"/>
+          </a:xfrm>
+          <a:prstGeom prst="roundRect">
+            <a:avLst>
+              <a:gd name="adj" fmla="val 50000"/>
+            </a:avLst>
+          </a:prstGeom>
           <a:solidFill>
             <a:srgbClr val="FFFFFF"/>
           </a:solidFill>
@@ -30583,23 +32560,125 @@
           </a:ln>
         </p:spPr>
         <p:txBody>
-          <a:bodyPr rtlCol="0" anchor="ctr"/>
-          <a:lstStyle/>
-          <a:p>
-            <a:pPr algn="ctr"/>
-          </a:p>
-        </p:txBody>
-      </p:sp>
-      <p:sp>
-        <p:nvSpPr>
-          <p:cNvPr id="15" name="Freeform 14"/>
+          <a:bodyPr rtlCol="0" anchor="ctr" wrap="square" lIns="18288" tIns="0" rIns="18288" bIns="0">
+            <a:noAutofit/>
+          </a:bodyPr>
+          <a:lstStyle/>
+          <a:p>
+            <a:pPr algn="ctr" latinLnBrk="0">
+              <a:lnSpc>
+                <a:spcPct val="100000"/>
+              </a:lnSpc>
+              <a:spcBef>
+                <a:spcPts val="0"/>
+              </a:spcBef>
+              <a:spcAft>
+                <a:spcPts val="0"/>
+              </a:spcAft>
+            </a:pPr>
+            <a:r>
+              <a:rPr sz="750" b="1">
+                <a:solidFill>
+                  <a:srgbClr val="40708B"/>
+                </a:solidFill>
+                <a:latin typeface="Microsoft YaHei"/>
+                <a:ea typeface="Microsoft YaHei"/>
+                <a:cs typeface="Microsoft YaHei"/>
+              </a:rPr>
+              <a:t>契约 · 授权</a:t>
+            </a:r>
+          </a:p>
+        </p:txBody>
+      </p:sp>
+      <p:cxnSp>
+        <p:nvCxnSpPr>
+          <p:cNvPr id="43" name="Connector 42"/>
+          <p:cNvCxnSpPr/>
+          <p:nvPr/>
+        </p:nvCxnSpPr>
+        <p:spPr>
+          <a:xfrm>
+            <a:off x="3145536" y="3255264"/>
+            <a:ext cx="1089964" cy="0"/>
+          </a:xfrm>
+          <a:prstGeom prst="line">
+            <a:avLst/>
+          </a:prstGeom>
+          <a:ln w="19050">
+            <a:solidFill>
+              <a:srgbClr val="D2690C"/>
+            </a:solidFill>
+            <a:headEnd type="triangle" w="med" len="med"/>
+            <a:tailEnd type="triangle" w="med" len="med"/>
+          </a:ln>
+        </p:spPr>
+      </p:cxnSp>
+      <p:sp>
+        <p:nvSpPr>
+          <p:cNvPr id="44" name="Rounded Rectangle 43"/>
           <p:cNvSpPr/>
           <p:nvPr/>
         </p:nvSpPr>
         <p:spPr>
           <a:xfrm>
-            <a:off x="2510028" y="1965960"/>
-            <a:ext cx="41148" cy="41147"/>
+            <a:off x="3255263" y="3154680"/>
+            <a:ext cx="676656" cy="201168"/>
+          </a:xfrm>
+          <a:prstGeom prst="roundRect">
+            <a:avLst>
+              <a:gd name="adj" fmla="val 50000"/>
+            </a:avLst>
+          </a:prstGeom>
+          <a:solidFill>
+            <a:srgbClr val="FFFFFF"/>
+          </a:solidFill>
+          <a:ln w="9525">
+            <a:solidFill>
+              <a:srgbClr val="C2570A"/>
+            </a:solidFill>
+          </a:ln>
+        </p:spPr>
+        <p:txBody>
+          <a:bodyPr rtlCol="0" anchor="ctr" wrap="square" lIns="18288" tIns="0" rIns="18288" bIns="0">
+            <a:noAutofit/>
+          </a:bodyPr>
+          <a:lstStyle/>
+          <a:p>
+            <a:pPr algn="ctr" latinLnBrk="0">
+              <a:lnSpc>
+                <a:spcPct val="100000"/>
+              </a:lnSpc>
+              <a:spcBef>
+                <a:spcPts val="0"/>
+              </a:spcBef>
+              <a:spcAft>
+                <a:spcPts val="0"/>
+              </a:spcAft>
+            </a:pPr>
+            <a:r>
+              <a:rPr sz="750" b="1">
+                <a:solidFill>
+                  <a:srgbClr val="C2570A"/>
+                </a:solidFill>
+                <a:latin typeface="Microsoft YaHei"/>
+                <a:ea typeface="Microsoft YaHei"/>
+                <a:cs typeface="Microsoft YaHei"/>
+              </a:rPr>
+              <a:t>结对写补丁</a:t>
+            </a:r>
+          </a:p>
+        </p:txBody>
+      </p:sp>
+      <p:sp>
+        <p:nvSpPr>
+          <p:cNvPr id="45" name="Freeform 44"/>
+          <p:cNvSpPr/>
+          <p:nvPr/>
+        </p:nvSpPr>
+        <p:spPr>
+          <a:xfrm>
+            <a:off x="2816352" y="3840480"/>
+            <a:ext cx="1419148" cy="210311"/>
           </a:xfrm>
           <a:custGeom>
             <a:avLst/>
@@ -30608,24 +32687,25 @@
             <a:cxnLst/>
             <a:rect l="l" t="t" r="r" b="b"/>
             <a:pathLst>
-              <a:path w="41148" h="41147">
+              <a:path w="1419148" h="210311">
                 <a:moveTo>
-                  <a:pt x="0" y="0"/>
+                  <a:pt x="0" y="210311"/>
                 </a:moveTo>
                 <a:lnTo>
-                  <a:pt x="0" y="41147"/>
+                  <a:pt x="0" y="0"/>
                 </a:lnTo>
                 <a:lnTo>
-                  <a:pt x="41148" y="41147"/>
+                  <a:pt x="1419148" y="0"/>
                 </a:lnTo>
               </a:path>
             </a:pathLst>
           </a:custGeom>
           <a:noFill/>
-          <a:ln w="9525">
+          <a:ln w="19050">
             <a:solidFill>
               <a:srgbClr val="40708B"/>
             </a:solidFill>
+            <a:tailEnd type="triangle" w="med" len="med"/>
           </a:ln>
         </p:spPr>
         <p:txBody>
@@ -30638,536 +32718,20 @@
       </p:sp>
       <p:sp>
         <p:nvSpPr>
-          <p:cNvPr id="16" name="TextBox 15"/>
-          <p:cNvSpPr txBox="1"/>
-          <p:nvPr/>
-        </p:nvSpPr>
-        <p:spPr>
-          <a:xfrm>
-            <a:off x="731520" y="1938528"/>
-            <a:ext cx="1645919" cy="256032"/>
-          </a:xfrm>
-          <a:prstGeom prst="rect">
-            <a:avLst/>
-          </a:prstGeom>
-          <a:noFill/>
-        </p:spPr>
-        <p:txBody>
-          <a:bodyPr wrap="square" anchor="ctr" lIns="0" tIns="0" rIns="0" bIns="0">
-            <a:noAutofit/>
-          </a:bodyPr>
-          <a:lstStyle/>
-          <a:p>
-            <a:pPr algn="l" latinLnBrk="0">
-              <a:lnSpc>
-                <a:spcPct val="100000"/>
-              </a:lnSpc>
-              <a:spcBef>
-                <a:spcPts val="0"/>
-              </a:spcBef>
-              <a:spcAft>
-                <a:spcPts val="0"/>
-              </a:spcAft>
-            </a:pPr>
-            <a:r>
-              <a:rPr sz="1050" b="1">
-                <a:solidFill>
-                  <a:srgbClr val="0A2B45"/>
-                </a:solidFill>
-                <a:latin typeface="Microsoft YaHei"/>
-                <a:ea typeface="Microsoft YaHei"/>
-                <a:cs typeface="Microsoft YaHei"/>
-              </a:rPr>
-              <a:t>冻结契约</a:t>
-            </a:r>
-            <a:r>
-              <a:rPr sz="800" b="1">
-                <a:solidFill>
-                  <a:srgbClr val="40708B"/>
-                </a:solidFill>
-                <a:latin typeface="Microsoft YaHei"/>
-                <a:ea typeface="Microsoft YaHei"/>
-                <a:cs typeface="Microsoft YaHei"/>
-              </a:rPr>
-              <a:t>　人 → Agent</a:t>
-            </a:r>
-          </a:p>
-        </p:txBody>
-      </p:sp>
-      <p:sp>
-        <p:nvSpPr>
-          <p:cNvPr id="17" name="TextBox 16"/>
-          <p:cNvSpPr txBox="1"/>
-          <p:nvPr/>
-        </p:nvSpPr>
-        <p:spPr>
-          <a:xfrm>
-            <a:off x="731520" y="2221992"/>
-            <a:ext cx="566928" cy="187452"/>
-          </a:xfrm>
-          <a:prstGeom prst="rect">
-            <a:avLst/>
-          </a:prstGeom>
-          <a:noFill/>
-        </p:spPr>
-        <p:txBody>
-          <a:bodyPr wrap="square" anchor="ctr" lIns="0" tIns="0" rIns="0" bIns="0">
-            <a:noAutofit/>
-          </a:bodyPr>
-          <a:lstStyle/>
-          <a:p>
-            <a:pPr algn="l" latinLnBrk="0">
-              <a:lnSpc>
-                <a:spcPct val="100000"/>
-              </a:lnSpc>
-              <a:spcBef>
-                <a:spcPts val="0"/>
-              </a:spcBef>
-              <a:spcAft>
-                <a:spcPts val="0"/>
-              </a:spcAft>
-            </a:pPr>
-            <a:r>
-              <a:rPr sz="800" b="1">
-                <a:solidFill>
-                  <a:srgbClr val="123C5B"/>
-                </a:solidFill>
-                <a:latin typeface="Microsoft YaHei"/>
-                <a:ea typeface="Microsoft YaHei"/>
-                <a:cs typeface="Microsoft YaHei"/>
-              </a:rPr>
-              <a:t>优化任务</a:t>
-            </a:r>
-          </a:p>
-        </p:txBody>
-      </p:sp>
-      <p:sp>
-        <p:nvSpPr>
-          <p:cNvPr id="18" name="TextBox 17"/>
-          <p:cNvSpPr txBox="1"/>
-          <p:nvPr/>
-        </p:nvSpPr>
-        <p:spPr>
-          <a:xfrm>
-            <a:off x="1316736" y="2221992"/>
-            <a:ext cx="1243584" cy="187452"/>
-          </a:xfrm>
-          <a:prstGeom prst="rect">
-            <a:avLst/>
-          </a:prstGeom>
-          <a:noFill/>
-        </p:spPr>
-        <p:txBody>
-          <a:bodyPr wrap="square" anchor="ctr" lIns="0" tIns="0" rIns="0" bIns="0">
-            <a:noAutofit/>
-          </a:bodyPr>
-          <a:lstStyle/>
-          <a:p>
-            <a:pPr algn="l" latinLnBrk="0">
-              <a:lnSpc>
-                <a:spcPct val="100000"/>
-              </a:lnSpc>
-              <a:spcBef>
-                <a:spcPts val="0"/>
-              </a:spcBef>
-              <a:spcAft>
-                <a:spcPts val="0"/>
-              </a:spcAft>
-            </a:pPr>
-            <a:r>
-              <a:rPr sz="700" b="0">
-                <a:solidFill>
-                  <a:srgbClr val="0F62CE"/>
-                </a:solidFill>
-                <a:latin typeface="Consolas"/>
-                <a:ea typeface="Microsoft YaHei"/>
-                <a:cs typeface="Microsoft YaHei"/>
-              </a:rPr>
-              <a:t>optimization-task.json</a:t>
-            </a:r>
-          </a:p>
-        </p:txBody>
-      </p:sp>
-      <p:sp>
-        <p:nvSpPr>
-          <p:cNvPr id="19" name="TextBox 18"/>
-          <p:cNvSpPr txBox="1"/>
-          <p:nvPr/>
-        </p:nvSpPr>
-        <p:spPr>
-          <a:xfrm>
-            <a:off x="731520" y="2409444"/>
-            <a:ext cx="566928" cy="187452"/>
-          </a:xfrm>
-          <a:prstGeom prst="rect">
-            <a:avLst/>
-          </a:prstGeom>
-          <a:noFill/>
-        </p:spPr>
-        <p:txBody>
-          <a:bodyPr wrap="square" anchor="ctr" lIns="0" tIns="0" rIns="0" bIns="0">
-            <a:noAutofit/>
-          </a:bodyPr>
-          <a:lstStyle/>
-          <a:p>
-            <a:pPr algn="l" latinLnBrk="0">
-              <a:lnSpc>
-                <a:spcPct val="100000"/>
-              </a:lnSpc>
-              <a:spcBef>
-                <a:spcPts val="0"/>
-              </a:spcBef>
-              <a:spcAft>
-                <a:spcPts val="0"/>
-              </a:spcAft>
-            </a:pPr>
-            <a:r>
-              <a:rPr sz="800" b="1">
-                <a:solidFill>
-                  <a:srgbClr val="123C5B"/>
-                </a:solidFill>
-                <a:latin typeface="Microsoft YaHei"/>
-                <a:ea typeface="Microsoft YaHei"/>
-                <a:cs typeface="Microsoft YaHei"/>
-              </a:rPr>
-              <a:t>质量契约</a:t>
-            </a:r>
-          </a:p>
-        </p:txBody>
-      </p:sp>
-      <p:sp>
-        <p:nvSpPr>
-          <p:cNvPr id="20" name="TextBox 19"/>
-          <p:cNvSpPr txBox="1"/>
-          <p:nvPr/>
-        </p:nvSpPr>
-        <p:spPr>
-          <a:xfrm>
-            <a:off x="1316736" y="2409444"/>
-            <a:ext cx="1243584" cy="187452"/>
-          </a:xfrm>
-          <a:prstGeom prst="rect">
-            <a:avLst/>
-          </a:prstGeom>
-          <a:noFill/>
-        </p:spPr>
-        <p:txBody>
-          <a:bodyPr wrap="square" anchor="ctr" lIns="0" tIns="0" rIns="0" bIns="0">
-            <a:noAutofit/>
-          </a:bodyPr>
-          <a:lstStyle/>
-          <a:p>
-            <a:pPr algn="l" latinLnBrk="0">
-              <a:lnSpc>
-                <a:spcPct val="100000"/>
-              </a:lnSpc>
-              <a:spcBef>
-                <a:spcPts val="0"/>
-              </a:spcBef>
-              <a:spcAft>
-                <a:spcPts val="0"/>
-              </a:spcAft>
-            </a:pPr>
-            <a:r>
-              <a:rPr sz="700" b="0">
-                <a:solidFill>
-                  <a:srgbClr val="0F62CE"/>
-                </a:solidFill>
-                <a:latin typeface="Consolas"/>
-                <a:ea typeface="Microsoft YaHei"/>
-                <a:cs typeface="Microsoft YaHei"/>
-              </a:rPr>
-              <a:t>generation-task.json</a:t>
-            </a:r>
-          </a:p>
-        </p:txBody>
-      </p:sp>
-      <p:sp>
-        <p:nvSpPr>
-          <p:cNvPr id="21" name="TextBox 20"/>
-          <p:cNvSpPr txBox="1"/>
-          <p:nvPr/>
-        </p:nvSpPr>
-        <p:spPr>
-          <a:xfrm>
-            <a:off x="731520" y="2596896"/>
-            <a:ext cx="566928" cy="187452"/>
-          </a:xfrm>
-          <a:prstGeom prst="rect">
-            <a:avLst/>
-          </a:prstGeom>
-          <a:noFill/>
-        </p:spPr>
-        <p:txBody>
-          <a:bodyPr wrap="square" anchor="ctr" lIns="0" tIns="0" rIns="0" bIns="0">
-            <a:noAutofit/>
-          </a:bodyPr>
-          <a:lstStyle/>
-          <a:p>
-            <a:pPr algn="l" latinLnBrk="0">
-              <a:lnSpc>
-                <a:spcPct val="100000"/>
-              </a:lnSpc>
-              <a:spcBef>
-                <a:spcPts val="0"/>
-              </a:spcBef>
-              <a:spcAft>
-                <a:spcPts val="0"/>
-              </a:spcAft>
-            </a:pPr>
-            <a:r>
-              <a:rPr sz="800" b="1">
-                <a:solidFill>
-                  <a:srgbClr val="123C5B"/>
-                </a:solidFill>
-                <a:latin typeface="Microsoft YaHei"/>
-                <a:ea typeface="Microsoft YaHei"/>
-                <a:cs typeface="Microsoft YaHei"/>
-              </a:rPr>
-              <a:t>调优知识</a:t>
-            </a:r>
-          </a:p>
-        </p:txBody>
-      </p:sp>
-      <p:sp>
-        <p:nvSpPr>
-          <p:cNvPr id="22" name="TextBox 21"/>
-          <p:cNvSpPr txBox="1"/>
-          <p:nvPr/>
-        </p:nvSpPr>
-        <p:spPr>
-          <a:xfrm>
-            <a:off x="1316736" y="2596896"/>
-            <a:ext cx="1243584" cy="187452"/>
-          </a:xfrm>
-          <a:prstGeom prst="rect">
-            <a:avLst/>
-          </a:prstGeom>
-          <a:noFill/>
-        </p:spPr>
-        <p:txBody>
-          <a:bodyPr wrap="square" anchor="ctr" lIns="0" tIns="0" rIns="0" bIns="0">
-            <a:noAutofit/>
-          </a:bodyPr>
-          <a:lstStyle/>
-          <a:p>
-            <a:pPr algn="l" latinLnBrk="0">
-              <a:lnSpc>
-                <a:spcPct val="100000"/>
-              </a:lnSpc>
-              <a:spcBef>
-                <a:spcPts val="0"/>
-              </a:spcBef>
-              <a:spcAft>
-                <a:spcPts val="0"/>
-              </a:spcAft>
-            </a:pPr>
-            <a:r>
-              <a:rPr sz="700" b="0">
-                <a:solidFill>
-                  <a:srgbClr val="0F62CE"/>
-                </a:solidFill>
-                <a:latin typeface="Consolas"/>
-                <a:ea typeface="Microsoft YaHei"/>
-                <a:cs typeface="Microsoft YaHei"/>
-              </a:rPr>
-              <a:t>planner-skills/ × 10</a:t>
-            </a:r>
-          </a:p>
-        </p:txBody>
-      </p:sp>
-      <p:sp>
-        <p:nvSpPr>
-          <p:cNvPr id="23" name="TextBox 22"/>
-          <p:cNvSpPr txBox="1"/>
-          <p:nvPr/>
-        </p:nvSpPr>
-        <p:spPr>
-          <a:xfrm>
-            <a:off x="731520" y="2784348"/>
-            <a:ext cx="566928" cy="187452"/>
-          </a:xfrm>
-          <a:prstGeom prst="rect">
-            <a:avLst/>
-          </a:prstGeom>
-          <a:noFill/>
-        </p:spPr>
-        <p:txBody>
-          <a:bodyPr wrap="square" anchor="ctr" lIns="0" tIns="0" rIns="0" bIns="0">
-            <a:noAutofit/>
-          </a:bodyPr>
-          <a:lstStyle/>
-          <a:p>
-            <a:pPr algn="l" latinLnBrk="0">
-              <a:lnSpc>
-                <a:spcPct val="100000"/>
-              </a:lnSpc>
-              <a:spcBef>
-                <a:spcPts val="0"/>
-              </a:spcBef>
-              <a:spcAft>
-                <a:spcPts val="0"/>
-              </a:spcAft>
-            </a:pPr>
-            <a:r>
-              <a:rPr sz="800" b="1">
-                <a:solidFill>
-                  <a:srgbClr val="123C5B"/>
-                </a:solidFill>
-                <a:latin typeface="Microsoft YaHei"/>
-                <a:ea typeface="Microsoft YaHei"/>
-                <a:cs typeface="Microsoft YaHei"/>
-              </a:rPr>
-              <a:t>授权边界</a:t>
-            </a:r>
-          </a:p>
-        </p:txBody>
-      </p:sp>
-      <p:sp>
-        <p:nvSpPr>
-          <p:cNvPr id="24" name="TextBox 23"/>
-          <p:cNvSpPr txBox="1"/>
-          <p:nvPr/>
-        </p:nvSpPr>
-        <p:spPr>
-          <a:xfrm>
-            <a:off x="1316736" y="2784348"/>
-            <a:ext cx="1243584" cy="187452"/>
-          </a:xfrm>
-          <a:prstGeom prst="rect">
-            <a:avLst/>
-          </a:prstGeom>
-          <a:noFill/>
-        </p:spPr>
-        <p:txBody>
-          <a:bodyPr wrap="square" anchor="ctr" lIns="0" tIns="0" rIns="0" bIns="0">
-            <a:noAutofit/>
-          </a:bodyPr>
-          <a:lstStyle/>
-          <a:p>
-            <a:pPr algn="l" latinLnBrk="0">
-              <a:lnSpc>
-                <a:spcPct val="100000"/>
-              </a:lnSpc>
-              <a:spcBef>
-                <a:spcPts val="0"/>
-              </a:spcBef>
-              <a:spcAft>
-                <a:spcPts val="0"/>
-              </a:spcAft>
-            </a:pPr>
-            <a:r>
-              <a:rPr sz="800" b="0">
-                <a:solidFill>
-                  <a:srgbClr val="1B4D69"/>
-                </a:solidFill>
-                <a:latin typeface="Microsoft YaHei"/>
-                <a:ea typeface="Microsoft YaHei"/>
-                <a:cs typeface="Microsoft YaHei"/>
-              </a:rPr>
-              <a:t>测试范围 · 可跳过项</a:t>
-            </a:r>
-          </a:p>
-        </p:txBody>
-      </p:sp>
-      <p:sp>
-        <p:nvSpPr>
-          <p:cNvPr id="25" name="Rectangle 24"/>
+          <p:cNvPr id="46" name="Rounded Rectangle 45"/>
           <p:cNvSpPr/>
           <p:nvPr/>
         </p:nvSpPr>
         <p:spPr>
           <a:xfrm>
-            <a:off x="548640" y="3108960"/>
-            <a:ext cx="2103120" cy="1133856"/>
-          </a:xfrm>
-          <a:prstGeom prst="rect">
-            <a:avLst/>
-          </a:prstGeom>
-          <a:solidFill>
-            <a:srgbClr val="FFFFFF"/>
-          </a:solidFill>
-          <a:ln w="9525">
-            <a:solidFill>
-              <a:srgbClr val="AFCEE1"/>
-            </a:solidFill>
-          </a:ln>
-        </p:spPr>
-        <p:txBody>
-          <a:bodyPr rtlCol="0" anchor="ctr"/>
-          <a:lstStyle/>
-          <a:p>
-            <a:pPr algn="ctr"/>
-          </a:p>
-        </p:txBody>
-      </p:sp>
-      <p:sp>
-        <p:nvSpPr>
-          <p:cNvPr id="26" name="Rectangle 25"/>
-          <p:cNvSpPr/>
-          <p:nvPr/>
-        </p:nvSpPr>
-        <p:spPr>
-          <a:xfrm>
-            <a:off x="548640" y="3108960"/>
-            <a:ext cx="54864" cy="1133856"/>
-          </a:xfrm>
-          <a:prstGeom prst="rect">
-            <a:avLst/>
-          </a:prstGeom>
-          <a:solidFill>
-            <a:srgbClr val="40708B"/>
-          </a:solidFill>
-          <a:ln>
-            <a:noFill/>
-          </a:ln>
-        </p:spPr>
-        <p:txBody>
-          <a:bodyPr rtlCol="0" anchor="ctr"/>
-          <a:lstStyle/>
-          <a:p>
-            <a:pPr algn="ctr"/>
-          </a:p>
-        </p:txBody>
-      </p:sp>
-      <p:sp>
-        <p:nvSpPr>
-          <p:cNvPr id="27" name="Freeform 26"/>
-          <p:cNvSpPr/>
-          <p:nvPr/>
-        </p:nvSpPr>
-        <p:spPr>
-          <a:xfrm>
-            <a:off x="2432304" y="3191256"/>
-            <a:ext cx="118872" cy="146304"/>
-          </a:xfrm>
-          <a:custGeom>
-            <a:avLst/>
-            <a:gdLst/>
-            <a:ahLst/>
-            <a:cxnLst/>
-            <a:rect l="l" t="t" r="r" b="b"/>
-            <a:pathLst>
-              <a:path w="118872" h="146304">
-                <a:moveTo>
-                  <a:pt x="0" y="0"/>
-                </a:moveTo>
-                <a:lnTo>
-                  <a:pt x="77724" y="0"/>
-                </a:lnTo>
-                <a:lnTo>
-                  <a:pt x="118872" y="41147"/>
-                </a:lnTo>
-                <a:lnTo>
-                  <a:pt x="118872" y="146304"/>
-                </a:lnTo>
-                <a:lnTo>
-                  <a:pt x="0" y="146304"/>
-                </a:lnTo>
-                <a:close/>
-              </a:path>
-            </a:pathLst>
-          </a:custGeom>
+            <a:off x="3383279" y="3739896"/>
+            <a:ext cx="420624" cy="201168"/>
+          </a:xfrm>
+          <a:prstGeom prst="roundRect">
+            <a:avLst>
+              <a:gd name="adj" fmla="val 50000"/>
+            </a:avLst>
+          </a:prstGeom>
           <a:solidFill>
             <a:srgbClr val="FFFFFF"/>
           </a:solidFill>
@@ -31178,23 +32742,46 @@
           </a:ln>
         </p:spPr>
         <p:txBody>
-          <a:bodyPr rtlCol="0" anchor="ctr"/>
-          <a:lstStyle/>
-          <a:p>
-            <a:pPr algn="ctr"/>
-          </a:p>
-        </p:txBody>
-      </p:sp>
-      <p:sp>
-        <p:nvSpPr>
-          <p:cNvPr id="28" name="Freeform 27"/>
+          <a:bodyPr rtlCol="0" anchor="ctr" wrap="square" lIns="18288" tIns="0" rIns="18288" bIns="0">
+            <a:noAutofit/>
+          </a:bodyPr>
+          <a:lstStyle/>
+          <a:p>
+            <a:pPr algn="ctr" latinLnBrk="0">
+              <a:lnSpc>
+                <a:spcPct val="100000"/>
+              </a:lnSpc>
+              <a:spcBef>
+                <a:spcPts val="0"/>
+              </a:spcBef>
+              <a:spcAft>
+                <a:spcPts val="0"/>
+              </a:spcAft>
+            </a:pPr>
+            <a:r>
+              <a:rPr sz="750" b="1">
+                <a:solidFill>
+                  <a:srgbClr val="40708B"/>
+                </a:solidFill>
+                <a:latin typeface="Microsoft YaHei"/>
+                <a:ea typeface="Microsoft YaHei"/>
+                <a:cs typeface="Microsoft YaHei"/>
+              </a:rPr>
+              <a:t>观察</a:t>
+            </a:r>
+          </a:p>
+        </p:txBody>
+      </p:sp>
+      <p:sp>
+        <p:nvSpPr>
+          <p:cNvPr id="47" name="Freeform 46"/>
           <p:cNvSpPr/>
           <p:nvPr/>
         </p:nvSpPr>
         <p:spPr>
           <a:xfrm>
-            <a:off x="2510028" y="3191256"/>
-            <a:ext cx="41148" cy="41147"/>
+            <a:off x="7688275" y="2926080"/>
+            <a:ext cx="1419149" cy="640080"/>
           </a:xfrm>
           <a:custGeom>
             <a:avLst/>
@@ -31203,3202 +32790,20 @@
             <a:cxnLst/>
             <a:rect l="l" t="t" r="r" b="b"/>
             <a:pathLst>
-              <a:path w="41148" h="41147">
+              <a:path w="1419149" h="640080">
                 <a:moveTo>
-                  <a:pt x="0" y="0"/>
+                  <a:pt x="0" y="640080"/>
                 </a:moveTo>
                 <a:lnTo>
-                  <a:pt x="0" y="41147"/>
+                  <a:pt x="1419149" y="640080"/>
                 </a:lnTo>
                 <a:lnTo>
-                  <a:pt x="41148" y="41147"/>
+                  <a:pt x="1419149" y="0"/>
                 </a:lnTo>
               </a:path>
             </a:pathLst>
           </a:custGeom>
           <a:noFill/>
-          <a:ln w="9525">
-            <a:solidFill>
-              <a:srgbClr val="40708B"/>
-            </a:solidFill>
-          </a:ln>
-        </p:spPr>
-        <p:txBody>
-          <a:bodyPr rtlCol="0" anchor="ctr"/>
-          <a:lstStyle/>
-          <a:p>
-            <a:pPr algn="ctr"/>
-          </a:p>
-        </p:txBody>
-      </p:sp>
-      <p:sp>
-        <p:nvSpPr>
-          <p:cNvPr id="29" name="TextBox 28"/>
-          <p:cNvSpPr txBox="1"/>
-          <p:nvPr/>
-        </p:nvSpPr>
-        <p:spPr>
-          <a:xfrm>
-            <a:off x="731520" y="3163824"/>
-            <a:ext cx="1645919" cy="256032"/>
-          </a:xfrm>
-          <a:prstGeom prst="rect">
-            <a:avLst/>
-          </a:prstGeom>
-          <a:noFill/>
-        </p:spPr>
-        <p:txBody>
-          <a:bodyPr wrap="square" anchor="ctr" lIns="0" tIns="0" rIns="0" bIns="0">
-            <a:noAutofit/>
-          </a:bodyPr>
-          <a:lstStyle/>
-          <a:p>
-            <a:pPr algn="l" latinLnBrk="0">
-              <a:lnSpc>
-                <a:spcPct val="100000"/>
-              </a:lnSpc>
-              <a:spcBef>
-                <a:spcPts val="0"/>
-              </a:spcBef>
-              <a:spcAft>
-                <a:spcPts val="0"/>
-              </a:spcAft>
-            </a:pPr>
-            <a:r>
-              <a:rPr sz="1050" b="1">
-                <a:solidFill>
-                  <a:srgbClr val="0A2B45"/>
-                </a:solidFill>
-                <a:latin typeface="Microsoft YaHei"/>
-                <a:ea typeface="Microsoft YaHei"/>
-                <a:cs typeface="Microsoft YaHei"/>
-              </a:rPr>
-              <a:t>判决报告</a:t>
-            </a:r>
-            <a:r>
-              <a:rPr sz="800" b="1">
-                <a:solidFill>
-                  <a:srgbClr val="40708B"/>
-                </a:solidFill>
-                <a:latin typeface="Microsoft YaHei"/>
-                <a:ea typeface="Microsoft YaHei"/>
-                <a:cs typeface="Microsoft YaHei"/>
-              </a:rPr>
-              <a:t>　Agent → 人</a:t>
-            </a:r>
-          </a:p>
-        </p:txBody>
-      </p:sp>
-      <p:sp>
-        <p:nvSpPr>
-          <p:cNvPr id="30" name="TextBox 29"/>
-          <p:cNvSpPr txBox="1"/>
-          <p:nvPr/>
-        </p:nvSpPr>
-        <p:spPr>
-          <a:xfrm>
-            <a:off x="731520" y="3447288"/>
-            <a:ext cx="566928" cy="187452"/>
-          </a:xfrm>
-          <a:prstGeom prst="rect">
-            <a:avLst/>
-          </a:prstGeom>
-          <a:noFill/>
-        </p:spPr>
-        <p:txBody>
-          <a:bodyPr wrap="square" anchor="ctr" lIns="0" tIns="0" rIns="0" bIns="0">
-            <a:noAutofit/>
-          </a:bodyPr>
-          <a:lstStyle/>
-          <a:p>
-            <a:pPr algn="l" latinLnBrk="0">
-              <a:lnSpc>
-                <a:spcPct val="100000"/>
-              </a:lnSpc>
-              <a:spcBef>
-                <a:spcPts val="0"/>
-              </a:spcBef>
-              <a:spcAft>
-                <a:spcPts val="0"/>
-              </a:spcAft>
-            </a:pPr>
-            <a:r>
-              <a:rPr sz="800" b="1">
-                <a:solidFill>
-                  <a:srgbClr val="123C5B"/>
-                </a:solidFill>
-                <a:latin typeface="Microsoft YaHei"/>
-                <a:ea typeface="Microsoft YaHei"/>
-                <a:cs typeface="Microsoft YaHei"/>
-              </a:rPr>
-              <a:t>优化报告</a:t>
-            </a:r>
-          </a:p>
-        </p:txBody>
-      </p:sp>
-      <p:sp>
-        <p:nvSpPr>
-          <p:cNvPr id="31" name="TextBox 30"/>
-          <p:cNvSpPr txBox="1"/>
-          <p:nvPr/>
-        </p:nvSpPr>
-        <p:spPr>
-          <a:xfrm>
-            <a:off x="1316736" y="3447288"/>
-            <a:ext cx="1243584" cy="187452"/>
-          </a:xfrm>
-          <a:prstGeom prst="rect">
-            <a:avLst/>
-          </a:prstGeom>
-          <a:noFill/>
-        </p:spPr>
-        <p:txBody>
-          <a:bodyPr wrap="square" anchor="ctr" lIns="0" tIns="0" rIns="0" bIns="0">
-            <a:noAutofit/>
-          </a:bodyPr>
-          <a:lstStyle/>
-          <a:p>
-            <a:pPr algn="l" latinLnBrk="0">
-              <a:lnSpc>
-                <a:spcPct val="100000"/>
-              </a:lnSpc>
-              <a:spcBef>
-                <a:spcPts val="0"/>
-              </a:spcBef>
-              <a:spcAft>
-                <a:spcPts val="0"/>
-              </a:spcAft>
-            </a:pPr>
-            <a:r>
-              <a:rPr sz="700" b="0">
-                <a:solidFill>
-                  <a:srgbClr val="0F62CE"/>
-                </a:solidFill>
-                <a:latin typeface="Consolas"/>
-                <a:ea typeface="Microsoft YaHei"/>
-                <a:cs typeface="Microsoft YaHei"/>
-              </a:rPr>
-              <a:t>optimization-report.md</a:t>
-            </a:r>
-          </a:p>
-        </p:txBody>
-      </p:sp>
-      <p:sp>
-        <p:nvSpPr>
-          <p:cNvPr id="32" name="TextBox 31"/>
-          <p:cNvSpPr txBox="1"/>
-          <p:nvPr/>
-        </p:nvSpPr>
-        <p:spPr>
-          <a:xfrm>
-            <a:off x="731520" y="3634740"/>
-            <a:ext cx="566928" cy="187452"/>
-          </a:xfrm>
-          <a:prstGeom prst="rect">
-            <a:avLst/>
-          </a:prstGeom>
-          <a:noFill/>
-        </p:spPr>
-        <p:txBody>
-          <a:bodyPr wrap="square" anchor="ctr" lIns="0" tIns="0" rIns="0" bIns="0">
-            <a:noAutofit/>
-          </a:bodyPr>
-          <a:lstStyle/>
-          <a:p>
-            <a:pPr algn="l" latinLnBrk="0">
-              <a:lnSpc>
-                <a:spcPct val="100000"/>
-              </a:lnSpc>
-              <a:spcBef>
-                <a:spcPts val="0"/>
-              </a:spcBef>
-              <a:spcAft>
-                <a:spcPts val="0"/>
-              </a:spcAft>
-            </a:pPr>
-            <a:r>
-              <a:rPr sz="800" b="1">
-                <a:solidFill>
-                  <a:srgbClr val="123C5B"/>
-                </a:solidFill>
-                <a:latin typeface="Microsoft YaHei"/>
-                <a:ea typeface="Microsoft YaHei"/>
-                <a:cs typeface="Microsoft YaHei"/>
-              </a:rPr>
-              <a:t>最优版本</a:t>
-            </a:r>
-          </a:p>
-        </p:txBody>
-      </p:sp>
-      <p:sp>
-        <p:nvSpPr>
-          <p:cNvPr id="33" name="TextBox 32"/>
-          <p:cNvSpPr txBox="1"/>
-          <p:nvPr/>
-        </p:nvSpPr>
-        <p:spPr>
-          <a:xfrm>
-            <a:off x="1316736" y="3634740"/>
-            <a:ext cx="1243584" cy="187452"/>
-          </a:xfrm>
-          <a:prstGeom prst="rect">
-            <a:avLst/>
-          </a:prstGeom>
-          <a:noFill/>
-        </p:spPr>
-        <p:txBody>
-          <a:bodyPr wrap="square" anchor="ctr" lIns="0" tIns="0" rIns="0" bIns="0">
-            <a:noAutofit/>
-          </a:bodyPr>
-          <a:lstStyle/>
-          <a:p>
-            <a:pPr algn="l" latinLnBrk="0">
-              <a:lnSpc>
-                <a:spcPct val="100000"/>
-              </a:lnSpc>
-              <a:spcBef>
-                <a:spcPts val="0"/>
-              </a:spcBef>
-              <a:spcAft>
-                <a:spcPts val="0"/>
-              </a:spcAft>
-            </a:pPr>
-            <a:r>
-              <a:rPr sz="700" b="0">
-                <a:solidFill>
-                  <a:srgbClr val="0F62CE"/>
-                </a:solidFill>
-                <a:latin typeface="Consolas"/>
-                <a:ea typeface="Microsoft YaHei"/>
-                <a:cs typeface="Microsoft YaHei"/>
-              </a:rPr>
-              <a:t>best.json</a:t>
-            </a:r>
-          </a:p>
-        </p:txBody>
-      </p:sp>
-      <p:sp>
-        <p:nvSpPr>
-          <p:cNvPr id="34" name="TextBox 33"/>
-          <p:cNvSpPr txBox="1"/>
-          <p:nvPr/>
-        </p:nvSpPr>
-        <p:spPr>
-          <a:xfrm>
-            <a:off x="731520" y="3822191"/>
-            <a:ext cx="566928" cy="187452"/>
-          </a:xfrm>
-          <a:prstGeom prst="rect">
-            <a:avLst/>
-          </a:prstGeom>
-          <a:noFill/>
-        </p:spPr>
-        <p:txBody>
-          <a:bodyPr wrap="square" anchor="ctr" lIns="0" tIns="0" rIns="0" bIns="0">
-            <a:noAutofit/>
-          </a:bodyPr>
-          <a:lstStyle/>
-          <a:p>
-            <a:pPr algn="l" latinLnBrk="0">
-              <a:lnSpc>
-                <a:spcPct val="100000"/>
-              </a:lnSpc>
-              <a:spcBef>
-                <a:spcPts val="0"/>
-              </a:spcBef>
-              <a:spcAft>
-                <a:spcPts val="0"/>
-              </a:spcAft>
-            </a:pPr>
-            <a:r>
-              <a:rPr sz="800" b="1">
-                <a:solidFill>
-                  <a:srgbClr val="123C5B"/>
-                </a:solidFill>
-                <a:latin typeface="Microsoft YaHei"/>
-                <a:ea typeface="Microsoft YaHei"/>
-                <a:cs typeface="Microsoft YaHei"/>
-              </a:rPr>
-              <a:t>证据链</a:t>
-            </a:r>
-          </a:p>
-        </p:txBody>
-      </p:sp>
-      <p:sp>
-        <p:nvSpPr>
-          <p:cNvPr id="35" name="TextBox 34"/>
-          <p:cNvSpPr txBox="1"/>
-          <p:nvPr/>
-        </p:nvSpPr>
-        <p:spPr>
-          <a:xfrm>
-            <a:off x="1316736" y="3822191"/>
-            <a:ext cx="1243584" cy="187452"/>
-          </a:xfrm>
-          <a:prstGeom prst="rect">
-            <a:avLst/>
-          </a:prstGeom>
-          <a:noFill/>
-        </p:spPr>
-        <p:txBody>
-          <a:bodyPr wrap="square" anchor="ctr" lIns="0" tIns="0" rIns="0" bIns="0">
-            <a:noAutofit/>
-          </a:bodyPr>
-          <a:lstStyle/>
-          <a:p>
-            <a:pPr algn="l" latinLnBrk="0">
-              <a:lnSpc>
-                <a:spcPct val="100000"/>
-              </a:lnSpc>
-              <a:spcBef>
-                <a:spcPts val="0"/>
-              </a:spcBef>
-              <a:spcAft>
-                <a:spcPts val="0"/>
-              </a:spcAft>
-            </a:pPr>
-            <a:r>
-              <a:rPr sz="700" b="0">
-                <a:solidFill>
-                  <a:srgbClr val="0F62CE"/>
-                </a:solidFill>
-                <a:latin typeface="Consolas"/>
-                <a:ea typeface="Microsoft YaHei"/>
-                <a:cs typeface="Microsoft YaHei"/>
-              </a:rPr>
-              <a:t>attempts/ · planner/</a:t>
-            </a:r>
-          </a:p>
-        </p:txBody>
-      </p:sp>
-      <p:sp>
-        <p:nvSpPr>
-          <p:cNvPr id="36" name="TextBox 35"/>
-          <p:cNvSpPr txBox="1"/>
-          <p:nvPr/>
-        </p:nvSpPr>
-        <p:spPr>
-          <a:xfrm>
-            <a:off x="731520" y="4009644"/>
-            <a:ext cx="566928" cy="187452"/>
-          </a:xfrm>
-          <a:prstGeom prst="rect">
-            <a:avLst/>
-          </a:prstGeom>
-          <a:noFill/>
-        </p:spPr>
-        <p:txBody>
-          <a:bodyPr wrap="square" anchor="ctr" lIns="0" tIns="0" rIns="0" bIns="0">
-            <a:noAutofit/>
-          </a:bodyPr>
-          <a:lstStyle/>
-          <a:p>
-            <a:pPr algn="l" latinLnBrk="0">
-              <a:lnSpc>
-                <a:spcPct val="100000"/>
-              </a:lnSpc>
-              <a:spcBef>
-                <a:spcPts val="0"/>
-              </a:spcBef>
-              <a:spcAft>
-                <a:spcPts val="0"/>
-              </a:spcAft>
-            </a:pPr>
-            <a:r>
-              <a:rPr sz="800" b="1">
-                <a:solidFill>
-                  <a:srgbClr val="123C5B"/>
-                </a:solidFill>
-                <a:latin typeface="Microsoft YaHei"/>
-                <a:ea typeface="Microsoft YaHei"/>
-                <a:cs typeface="Microsoft YaHei"/>
-              </a:rPr>
-              <a:t>边界声明</a:t>
-            </a:r>
-          </a:p>
-        </p:txBody>
-      </p:sp>
-      <p:sp>
-        <p:nvSpPr>
-          <p:cNvPr id="37" name="TextBox 36"/>
-          <p:cNvSpPr txBox="1"/>
-          <p:nvPr/>
-        </p:nvSpPr>
-        <p:spPr>
-          <a:xfrm>
-            <a:off x="1316736" y="4009644"/>
-            <a:ext cx="1243584" cy="187452"/>
-          </a:xfrm>
-          <a:prstGeom prst="rect">
-            <a:avLst/>
-          </a:prstGeom>
-          <a:noFill/>
-        </p:spPr>
-        <p:txBody>
-          <a:bodyPr wrap="square" anchor="ctr" lIns="0" tIns="0" rIns="0" bIns="0">
-            <a:noAutofit/>
-          </a:bodyPr>
-          <a:lstStyle/>
-          <a:p>
-            <a:pPr algn="l" latinLnBrk="0">
-              <a:lnSpc>
-                <a:spcPct val="100000"/>
-              </a:lnSpc>
-              <a:spcBef>
-                <a:spcPts val="0"/>
-              </a:spcBef>
-              <a:spcAft>
-                <a:spcPts val="0"/>
-              </a:spcAft>
-            </a:pPr>
-            <a:r>
-              <a:rPr sz="800" b="0">
-                <a:solidFill>
-                  <a:srgbClr val="1B4D69"/>
-                </a:solidFill>
-                <a:latin typeface="Microsoft YaHei"/>
-                <a:ea typeface="Microsoft YaHei"/>
-                <a:cs typeface="Microsoft YaHei"/>
-              </a:rPr>
-              <a:t>自检异常 · 适用范围</a:t>
-            </a:r>
-          </a:p>
-        </p:txBody>
-      </p:sp>
-      <p:sp>
-        <p:nvSpPr>
-          <p:cNvPr id="38" name="Rectangle 37"/>
-          <p:cNvSpPr/>
-          <p:nvPr/>
-        </p:nvSpPr>
-        <p:spPr>
-          <a:xfrm>
-            <a:off x="548640" y="4572000"/>
-            <a:ext cx="2103120" cy="969264"/>
-          </a:xfrm>
-          <a:prstGeom prst="rect">
-            <a:avLst/>
-          </a:prstGeom>
-          <a:solidFill>
-            <a:srgbClr val="FFFFFF"/>
-          </a:solidFill>
-          <a:ln w="9525">
-            <a:solidFill>
-              <a:srgbClr val="AFCEE1"/>
-            </a:solidFill>
-          </a:ln>
-        </p:spPr>
-        <p:txBody>
-          <a:bodyPr rtlCol="0" anchor="ctr"/>
-          <a:lstStyle/>
-          <a:p>
-            <a:pPr algn="ctr"/>
-          </a:p>
-        </p:txBody>
-      </p:sp>
-      <p:sp>
-        <p:nvSpPr>
-          <p:cNvPr id="39" name="Rectangle 38"/>
-          <p:cNvSpPr/>
-          <p:nvPr/>
-        </p:nvSpPr>
-        <p:spPr>
-          <a:xfrm>
-            <a:off x="548640" y="4572000"/>
-            <a:ext cx="54864" cy="969264"/>
-          </a:xfrm>
-          <a:prstGeom prst="rect">
-            <a:avLst/>
-          </a:prstGeom>
-          <a:solidFill>
-            <a:srgbClr val="D2690C"/>
-          </a:solidFill>
-          <a:ln>
-            <a:noFill/>
-          </a:ln>
-        </p:spPr>
-        <p:txBody>
-          <a:bodyPr rtlCol="0" anchor="ctr"/>
-          <a:lstStyle/>
-          <a:p>
-            <a:pPr algn="ctr"/>
-          </a:p>
-        </p:txBody>
-      </p:sp>
-      <p:sp>
-        <p:nvSpPr>
-          <p:cNvPr id="40" name="Freeform 39"/>
-          <p:cNvSpPr/>
-          <p:nvPr/>
-        </p:nvSpPr>
-        <p:spPr>
-          <a:xfrm>
-            <a:off x="2432304" y="4654296"/>
-            <a:ext cx="118872" cy="146304"/>
-          </a:xfrm>
-          <a:custGeom>
-            <a:avLst/>
-            <a:gdLst/>
-            <a:ahLst/>
-            <a:cxnLst/>
-            <a:rect l="l" t="t" r="r" b="b"/>
-            <a:pathLst>
-              <a:path w="118872" h="146304">
-                <a:moveTo>
-                  <a:pt x="0" y="0"/>
-                </a:moveTo>
-                <a:lnTo>
-                  <a:pt x="77724" y="0"/>
-                </a:lnTo>
-                <a:lnTo>
-                  <a:pt x="118872" y="41148"/>
-                </a:lnTo>
-                <a:lnTo>
-                  <a:pt x="118872" y="146304"/>
-                </a:lnTo>
-                <a:lnTo>
-                  <a:pt x="0" y="146304"/>
-                </a:lnTo>
-                <a:close/>
-              </a:path>
-            </a:pathLst>
-          </a:custGeom>
-          <a:solidFill>
-            <a:srgbClr val="FFFFFF"/>
-          </a:solidFill>
-          <a:ln w="9525">
-            <a:solidFill>
-              <a:srgbClr val="D2690C"/>
-            </a:solidFill>
-          </a:ln>
-        </p:spPr>
-        <p:txBody>
-          <a:bodyPr rtlCol="0" anchor="ctr"/>
-          <a:lstStyle/>
-          <a:p>
-            <a:pPr algn="ctr"/>
-          </a:p>
-        </p:txBody>
-      </p:sp>
-      <p:sp>
-        <p:nvSpPr>
-          <p:cNvPr id="41" name="Freeform 40"/>
-          <p:cNvSpPr/>
-          <p:nvPr/>
-        </p:nvSpPr>
-        <p:spPr>
-          <a:xfrm>
-            <a:off x="2510028" y="4654296"/>
-            <a:ext cx="41148" cy="41148"/>
-          </a:xfrm>
-          <a:custGeom>
-            <a:avLst/>
-            <a:gdLst/>
-            <a:ahLst/>
-            <a:cxnLst/>
-            <a:rect l="l" t="t" r="r" b="b"/>
-            <a:pathLst>
-              <a:path w="41148" h="41148">
-                <a:moveTo>
-                  <a:pt x="0" y="0"/>
-                </a:moveTo>
-                <a:lnTo>
-                  <a:pt x="0" y="41148"/>
-                </a:lnTo>
-                <a:lnTo>
-                  <a:pt x="41148" y="41148"/>
-                </a:lnTo>
-              </a:path>
-            </a:pathLst>
-          </a:custGeom>
-          <a:noFill/>
-          <a:ln w="9525">
-            <a:solidFill>
-              <a:srgbClr val="D2690C"/>
-            </a:solidFill>
-          </a:ln>
-        </p:spPr>
-        <p:txBody>
-          <a:bodyPr rtlCol="0" anchor="ctr"/>
-          <a:lstStyle/>
-          <a:p>
-            <a:pPr algn="ctr"/>
-          </a:p>
-        </p:txBody>
-      </p:sp>
-      <p:sp>
-        <p:nvSpPr>
-          <p:cNvPr id="42" name="TextBox 41"/>
-          <p:cNvSpPr txBox="1"/>
-          <p:nvPr/>
-        </p:nvSpPr>
-        <p:spPr>
-          <a:xfrm>
-            <a:off x="731520" y="4626864"/>
-            <a:ext cx="1645919" cy="256032"/>
-          </a:xfrm>
-          <a:prstGeom prst="rect">
-            <a:avLst/>
-          </a:prstGeom>
-          <a:noFill/>
-        </p:spPr>
-        <p:txBody>
-          <a:bodyPr wrap="square" anchor="ctr" lIns="0" tIns="0" rIns="0" bIns="0">
-            <a:noAutofit/>
-          </a:bodyPr>
-          <a:lstStyle/>
-          <a:p>
-            <a:pPr algn="l" latinLnBrk="0">
-              <a:lnSpc>
-                <a:spcPct val="100000"/>
-              </a:lnSpc>
-              <a:spcBef>
-                <a:spcPts val="0"/>
-              </a:spcBef>
-              <a:spcAft>
-                <a:spcPts val="0"/>
-              </a:spcAft>
-            </a:pPr>
-            <a:r>
-              <a:rPr sz="1050" b="1">
-                <a:solidFill>
-                  <a:srgbClr val="0A2B45"/>
-                </a:solidFill>
-                <a:latin typeface="Microsoft YaHei"/>
-                <a:ea typeface="Microsoft YaHei"/>
-                <a:cs typeface="Microsoft YaHei"/>
-              </a:rPr>
-              <a:t>协同补丁</a:t>
-            </a:r>
-            <a:r>
-              <a:rPr sz="800" b="1">
-                <a:solidFill>
-                  <a:srgbClr val="D2690C"/>
-                </a:solidFill>
-                <a:latin typeface="Microsoft YaHei"/>
-                <a:ea typeface="Microsoft YaHei"/>
-                <a:cs typeface="Microsoft YaHei"/>
-              </a:rPr>
-              <a:t>　人 ⇄ 规划器</a:t>
-            </a:r>
-          </a:p>
-        </p:txBody>
-      </p:sp>
-      <p:sp>
-        <p:nvSpPr>
-          <p:cNvPr id="43" name="TextBox 42"/>
-          <p:cNvSpPr txBox="1"/>
-          <p:nvPr/>
-        </p:nvSpPr>
-        <p:spPr>
-          <a:xfrm>
-            <a:off x="731520" y="4921758"/>
-            <a:ext cx="566928" cy="187452"/>
-          </a:xfrm>
-          <a:prstGeom prst="rect">
-            <a:avLst/>
-          </a:prstGeom>
-          <a:noFill/>
-        </p:spPr>
-        <p:txBody>
-          <a:bodyPr wrap="square" anchor="ctr" lIns="0" tIns="0" rIns="0" bIns="0">
-            <a:noAutofit/>
-          </a:bodyPr>
-          <a:lstStyle/>
-          <a:p>
-            <a:pPr algn="l" latinLnBrk="0">
-              <a:lnSpc>
-                <a:spcPct val="100000"/>
-              </a:lnSpc>
-              <a:spcBef>
-                <a:spcPts val="0"/>
-              </a:spcBef>
-              <a:spcAft>
-                <a:spcPts val="0"/>
-              </a:spcAft>
-            </a:pPr>
-            <a:r>
-              <a:rPr sz="800" b="1">
-                <a:solidFill>
-                  <a:srgbClr val="123C5B"/>
-                </a:solidFill>
-                <a:latin typeface="Microsoft YaHei"/>
-                <a:ea typeface="Microsoft YaHei"/>
-                <a:cs typeface="Microsoft YaHei"/>
-              </a:rPr>
-              <a:t>结对补丁</a:t>
-            </a:r>
-          </a:p>
-        </p:txBody>
-      </p:sp>
-      <p:sp>
-        <p:nvSpPr>
-          <p:cNvPr id="44" name="TextBox 43"/>
-          <p:cNvSpPr txBox="1"/>
-          <p:nvPr/>
-        </p:nvSpPr>
-        <p:spPr>
-          <a:xfrm>
-            <a:off x="1316736" y="4921758"/>
-            <a:ext cx="1243584" cy="187452"/>
-          </a:xfrm>
-          <a:prstGeom prst="rect">
-            <a:avLst/>
-          </a:prstGeom>
-          <a:noFill/>
-        </p:spPr>
-        <p:txBody>
-          <a:bodyPr wrap="square" anchor="ctr" lIns="0" tIns="0" rIns="0" bIns="0">
-            <a:noAutofit/>
-          </a:bodyPr>
-          <a:lstStyle/>
-          <a:p>
-            <a:pPr algn="l" latinLnBrk="0">
-              <a:lnSpc>
-                <a:spcPct val="100000"/>
-              </a:lnSpc>
-              <a:spcBef>
-                <a:spcPts val="0"/>
-              </a:spcBef>
-              <a:spcAft>
-                <a:spcPts val="0"/>
-              </a:spcAft>
-            </a:pPr>
-            <a:r>
-              <a:rPr sz="700" b="0">
-                <a:solidFill>
-                  <a:srgbClr val="0F62CE"/>
-                </a:solidFill>
-                <a:latin typeface="Consolas"/>
-                <a:ea typeface="Microsoft YaHei"/>
-                <a:cs typeface="Microsoft YaHei"/>
-              </a:rPr>
-              <a:t>changes.patch</a:t>
-            </a:r>
-          </a:p>
-        </p:txBody>
-      </p:sp>
-      <p:sp>
-        <p:nvSpPr>
-          <p:cNvPr id="45" name="TextBox 44"/>
-          <p:cNvSpPr txBox="1"/>
-          <p:nvPr/>
-        </p:nvSpPr>
-        <p:spPr>
-          <a:xfrm>
-            <a:off x="731520" y="5109210"/>
-            <a:ext cx="566928" cy="187452"/>
-          </a:xfrm>
-          <a:prstGeom prst="rect">
-            <a:avLst/>
-          </a:prstGeom>
-          <a:noFill/>
-        </p:spPr>
-        <p:txBody>
-          <a:bodyPr wrap="square" anchor="ctr" lIns="0" tIns="0" rIns="0" bIns="0">
-            <a:noAutofit/>
-          </a:bodyPr>
-          <a:lstStyle/>
-          <a:p>
-            <a:pPr algn="l" latinLnBrk="0">
-              <a:lnSpc>
-                <a:spcPct val="100000"/>
-              </a:lnSpc>
-              <a:spcBef>
-                <a:spcPts val="0"/>
-              </a:spcBef>
-              <a:spcAft>
-                <a:spcPts val="0"/>
-              </a:spcAft>
-            </a:pPr>
-            <a:r>
-              <a:rPr sz="800" b="1">
-                <a:solidFill>
-                  <a:srgbClr val="123C5B"/>
-                </a:solidFill>
-                <a:latin typeface="Microsoft YaHei"/>
-                <a:ea typeface="Microsoft YaHei"/>
-                <a:cs typeface="Microsoft YaHei"/>
-              </a:rPr>
-              <a:t>人工操刀</a:t>
-            </a:r>
-          </a:p>
-        </p:txBody>
-      </p:sp>
-      <p:sp>
-        <p:nvSpPr>
-          <p:cNvPr id="46" name="TextBox 45"/>
-          <p:cNvSpPr txBox="1"/>
-          <p:nvPr/>
-        </p:nvSpPr>
-        <p:spPr>
-          <a:xfrm>
-            <a:off x="1316736" y="5109210"/>
-            <a:ext cx="1243584" cy="187452"/>
-          </a:xfrm>
-          <a:prstGeom prst="rect">
-            <a:avLst/>
-          </a:prstGeom>
-          <a:noFill/>
-        </p:spPr>
-        <p:txBody>
-          <a:bodyPr wrap="square" anchor="ctr" lIns="0" tIns="0" rIns="0" bIns="0">
-            <a:noAutofit/>
-          </a:bodyPr>
-          <a:lstStyle/>
-          <a:p>
-            <a:pPr algn="l" latinLnBrk="0">
-              <a:lnSpc>
-                <a:spcPct val="100000"/>
-              </a:lnSpc>
-              <a:spcBef>
-                <a:spcPts val="0"/>
-              </a:spcBef>
-              <a:spcAft>
-                <a:spcPts val="0"/>
-              </a:spcAft>
-            </a:pPr>
-            <a:r>
-              <a:rPr sz="800" b="0">
-                <a:solidFill>
-                  <a:srgbClr val="1B4D69"/>
-                </a:solidFill>
-                <a:latin typeface="Microsoft YaHei"/>
-                <a:ea typeface="Microsoft YaHei"/>
-                <a:cs typeface="Microsoft YaHei"/>
-              </a:rPr>
-              <a:t>复杂改动由人主导</a:t>
-            </a:r>
-          </a:p>
-        </p:txBody>
-      </p:sp>
-      <p:sp>
-        <p:nvSpPr>
-          <p:cNvPr id="47" name="TextBox 46"/>
-          <p:cNvSpPr txBox="1"/>
-          <p:nvPr/>
-        </p:nvSpPr>
-        <p:spPr>
-          <a:xfrm>
-            <a:off x="731520" y="5296662"/>
-            <a:ext cx="566928" cy="187452"/>
-          </a:xfrm>
-          <a:prstGeom prst="rect">
-            <a:avLst/>
-          </a:prstGeom>
-          <a:noFill/>
-        </p:spPr>
-        <p:txBody>
-          <a:bodyPr wrap="square" anchor="ctr" lIns="0" tIns="0" rIns="0" bIns="0">
-            <a:noAutofit/>
-          </a:bodyPr>
-          <a:lstStyle/>
-          <a:p>
-            <a:pPr algn="l" latinLnBrk="0">
-              <a:lnSpc>
-                <a:spcPct val="100000"/>
-              </a:lnSpc>
-              <a:spcBef>
-                <a:spcPts val="0"/>
-              </a:spcBef>
-              <a:spcAft>
-                <a:spcPts val="0"/>
-              </a:spcAft>
-            </a:pPr>
-            <a:r>
-              <a:rPr sz="800" b="1">
-                <a:solidFill>
-                  <a:srgbClr val="123C5B"/>
-                </a:solidFill>
-                <a:latin typeface="Microsoft YaHei"/>
-                <a:ea typeface="Microsoft YaHei"/>
-                <a:cs typeface="Microsoft YaHei"/>
-              </a:rPr>
-              <a:t>同等准入</a:t>
-            </a:r>
-          </a:p>
-        </p:txBody>
-      </p:sp>
-      <p:sp>
-        <p:nvSpPr>
-          <p:cNvPr id="48" name="TextBox 47"/>
-          <p:cNvSpPr txBox="1"/>
-          <p:nvPr/>
-        </p:nvSpPr>
-        <p:spPr>
-          <a:xfrm>
-            <a:off x="1316736" y="5296662"/>
-            <a:ext cx="1243584" cy="187452"/>
-          </a:xfrm>
-          <a:prstGeom prst="rect">
-            <a:avLst/>
-          </a:prstGeom>
-          <a:noFill/>
-        </p:spPr>
-        <p:txBody>
-          <a:bodyPr wrap="square" anchor="ctr" lIns="0" tIns="0" rIns="0" bIns="0">
-            <a:noAutofit/>
-          </a:bodyPr>
-          <a:lstStyle/>
-          <a:p>
-            <a:pPr algn="l" latinLnBrk="0">
-              <a:lnSpc>
-                <a:spcPct val="100000"/>
-              </a:lnSpc>
-              <a:spcBef>
-                <a:spcPts val="0"/>
-              </a:spcBef>
-              <a:spcAft>
-                <a:spcPts val="0"/>
-              </a:spcAft>
-            </a:pPr>
-            <a:r>
-              <a:rPr sz="800" b="0">
-                <a:solidFill>
-                  <a:srgbClr val="1B4D69"/>
-                </a:solidFill>
-                <a:latin typeface="Microsoft YaHei"/>
-                <a:ea typeface="Microsoft YaHei"/>
-                <a:cs typeface="Microsoft YaHei"/>
-              </a:rPr>
-              <a:t>同样走四道门禁</a:t>
-            </a:r>
-          </a:p>
-        </p:txBody>
-      </p:sp>
-      <p:sp>
-        <p:nvSpPr>
-          <p:cNvPr id="49" name="Rectangle 48"/>
-          <p:cNvSpPr/>
-          <p:nvPr/>
-        </p:nvSpPr>
-        <p:spPr>
-          <a:xfrm>
-            <a:off x="3419856" y="1499616"/>
-            <a:ext cx="5687568" cy="4096512"/>
-          </a:xfrm>
-          <a:prstGeom prst="rect">
-            <a:avLst/>
-          </a:prstGeom>
-          <a:solidFill>
-            <a:srgbClr val="F2F8FD"/>
-          </a:solidFill>
-          <a:ln w="12700">
-            <a:solidFill>
-              <a:srgbClr val="7FA4BA"/>
-            </a:solidFill>
-          </a:ln>
-        </p:spPr>
-        <p:txBody>
-          <a:bodyPr rtlCol="0" anchor="ctr"/>
-          <a:lstStyle/>
-          <a:p>
-            <a:pPr algn="ctr"/>
-          </a:p>
-        </p:txBody>
-      </p:sp>
-      <p:sp>
-        <p:nvSpPr>
-          <p:cNvPr id="50" name="Rectangle 49"/>
-          <p:cNvSpPr/>
-          <p:nvPr/>
-        </p:nvSpPr>
-        <p:spPr>
-          <a:xfrm>
-            <a:off x="3419856" y="1261872"/>
-            <a:ext cx="1920240" cy="237744"/>
-          </a:xfrm>
-          <a:prstGeom prst="rect">
-            <a:avLst/>
-          </a:prstGeom>
-          <a:solidFill>
-            <a:srgbClr val="DEEDFA"/>
-          </a:solidFill>
-          <a:ln w="12700">
-            <a:solidFill>
-              <a:srgbClr val="7FA4BA"/>
-            </a:solidFill>
-          </a:ln>
-        </p:spPr>
-        <p:txBody>
-          <a:bodyPr rtlCol="0" anchor="ctr" wrap="square" lIns="109728" tIns="0" rIns="73152" bIns="0">
-            <a:noAutofit/>
-          </a:bodyPr>
-          <a:lstStyle/>
-          <a:p>
-            <a:pPr algn="l" latinLnBrk="0">
-              <a:lnSpc>
-                <a:spcPct val="100000"/>
-              </a:lnSpc>
-              <a:spcBef>
-                <a:spcPts val="0"/>
-              </a:spcBef>
-              <a:spcAft>
-                <a:spcPts val="0"/>
-              </a:spcAft>
-            </a:pPr>
-            <a:r>
-              <a:rPr sz="1000" b="1">
-                <a:solidFill>
-                  <a:srgbClr val="0A2B45"/>
-                </a:solidFill>
-                <a:latin typeface="Microsoft YaHei"/>
-                <a:ea typeface="Microsoft YaHei"/>
-                <a:cs typeface="Microsoft YaHei"/>
-              </a:rPr>
-              <a:t>模型层 Agent</a:t>
-            </a:r>
-            <a:r>
-              <a:rPr sz="700" b="0">
-                <a:solidFill>
-                  <a:srgbClr val="40708B"/>
-                </a:solidFill>
-                <a:latin typeface="Microsoft YaHei"/>
-                <a:ea typeface="Microsoft YaHei"/>
-                <a:cs typeface="Microsoft YaHei"/>
-              </a:rPr>
-              <a:t>　«subsystem»</a:t>
-            </a:r>
-          </a:p>
-        </p:txBody>
-      </p:sp>
-      <p:sp>
-        <p:nvSpPr>
-          <p:cNvPr id="51" name="Rectangle 50"/>
-          <p:cNvSpPr/>
-          <p:nvPr/>
-        </p:nvSpPr>
-        <p:spPr>
-          <a:xfrm>
-            <a:off x="3566160" y="1627632"/>
-            <a:ext cx="5394959" cy="2688335"/>
-          </a:xfrm>
-          <a:prstGeom prst="rect">
-            <a:avLst/>
-          </a:prstGeom>
-          <a:solidFill>
-            <a:srgbClr val="E6F0FC"/>
-          </a:solidFill>
-          <a:ln w="15875">
-            <a:solidFill>
-              <a:srgbClr val="0F62CE"/>
-            </a:solidFill>
-          </a:ln>
-        </p:spPr>
-        <p:txBody>
-          <a:bodyPr rtlCol="0" anchor="ctr"/>
-          <a:lstStyle/>
-          <a:p>
-            <a:pPr algn="ctr"/>
-          </a:p>
-        </p:txBody>
-      </p:sp>
-      <p:sp>
-        <p:nvSpPr>
-          <p:cNvPr id="52" name="Rectangle 51"/>
-          <p:cNvSpPr/>
-          <p:nvPr/>
-        </p:nvSpPr>
-        <p:spPr>
-          <a:xfrm>
-            <a:off x="8723376" y="1709928"/>
-            <a:ext cx="137160" cy="109728"/>
-          </a:xfrm>
-          <a:prstGeom prst="rect">
-            <a:avLst/>
-          </a:prstGeom>
-          <a:solidFill>
-            <a:srgbClr val="FFFFFF"/>
-          </a:solidFill>
-          <a:ln w="9525">
-            <a:solidFill>
-              <a:srgbClr val="0F62CE"/>
-            </a:solidFill>
-          </a:ln>
-        </p:spPr>
-        <p:txBody>
-          <a:bodyPr rtlCol="0" anchor="ctr"/>
-          <a:lstStyle/>
-          <a:p>
-            <a:pPr algn="ctr"/>
-          </a:p>
-        </p:txBody>
-      </p:sp>
-      <p:sp>
-        <p:nvSpPr>
-          <p:cNvPr id="53" name="Rectangle 52"/>
-          <p:cNvSpPr/>
-          <p:nvPr/>
-        </p:nvSpPr>
-        <p:spPr>
-          <a:xfrm>
-            <a:off x="8691372" y="1728216"/>
-            <a:ext cx="64008" cy="32004"/>
-          </a:xfrm>
-          <a:prstGeom prst="rect">
-            <a:avLst/>
-          </a:prstGeom>
-          <a:solidFill>
-            <a:srgbClr val="FFFFFF"/>
-          </a:solidFill>
-          <a:ln w="9525">
-            <a:solidFill>
-              <a:srgbClr val="0F62CE"/>
-            </a:solidFill>
-          </a:ln>
-        </p:spPr>
-        <p:txBody>
-          <a:bodyPr rtlCol="0" anchor="ctr"/>
-          <a:lstStyle/>
-          <a:p>
-            <a:pPr algn="ctr"/>
-          </a:p>
-        </p:txBody>
-      </p:sp>
-      <p:sp>
-        <p:nvSpPr>
-          <p:cNvPr id="54" name="Rectangle 53"/>
-          <p:cNvSpPr/>
-          <p:nvPr/>
-        </p:nvSpPr>
-        <p:spPr>
-          <a:xfrm>
-            <a:off x="8691372" y="1769364"/>
-            <a:ext cx="64008" cy="32004"/>
-          </a:xfrm>
-          <a:prstGeom prst="rect">
-            <a:avLst/>
-          </a:prstGeom>
-          <a:solidFill>
-            <a:srgbClr val="FFFFFF"/>
-          </a:solidFill>
-          <a:ln w="9525">
-            <a:solidFill>
-              <a:srgbClr val="0F62CE"/>
-            </a:solidFill>
-          </a:ln>
-        </p:spPr>
-        <p:txBody>
-          <a:bodyPr rtlCol="0" anchor="ctr"/>
-          <a:lstStyle/>
-          <a:p>
-            <a:pPr algn="ctr"/>
-          </a:p>
-        </p:txBody>
-      </p:sp>
-      <p:sp>
-        <p:nvSpPr>
-          <p:cNvPr id="55" name="TextBox 54"/>
-          <p:cNvSpPr txBox="1"/>
-          <p:nvPr/>
-        </p:nvSpPr>
-        <p:spPr>
-          <a:xfrm>
-            <a:off x="3694176" y="1664208"/>
-            <a:ext cx="4773167" cy="256032"/>
-          </a:xfrm>
-          <a:prstGeom prst="rect">
-            <a:avLst/>
-          </a:prstGeom>
-          <a:noFill/>
-        </p:spPr>
-        <p:txBody>
-          <a:bodyPr wrap="square" anchor="ctr" lIns="0" tIns="0" rIns="0" bIns="0">
-            <a:noAutofit/>
-          </a:bodyPr>
-          <a:lstStyle/>
-          <a:p>
-            <a:pPr algn="l" latinLnBrk="0">
-              <a:lnSpc>
-                <a:spcPct val="100000"/>
-              </a:lnSpc>
-              <a:spcBef>
-                <a:spcPts val="0"/>
-              </a:spcBef>
-              <a:spcAft>
-                <a:spcPts val="0"/>
-              </a:spcAft>
-            </a:pPr>
-            <a:r>
-              <a:rPr sz="1100" b="1">
-                <a:solidFill>
-                  <a:srgbClr val="0F62CE"/>
-                </a:solidFill>
-                <a:latin typeface="Microsoft YaHei"/>
-                <a:ea typeface="Microsoft YaHei"/>
-                <a:cs typeface="Microsoft YaHei"/>
-              </a:rPr>
-              <a:t>Python 控制器</a:t>
-            </a:r>
-            <a:r>
-              <a:rPr sz="750" b="0">
-                <a:solidFill>
-                  <a:srgbClr val="40708B"/>
-                </a:solidFill>
-                <a:latin typeface="Microsoft YaHei"/>
-                <a:ea typeface="Microsoft YaHei"/>
-                <a:cs typeface="Microsoft YaHei"/>
-              </a:rPr>
-              <a:t>　«component»　</a:t>
-            </a:r>
-            <a:r>
-              <a:rPr sz="750" b="0">
-                <a:solidFill>
-                  <a:srgbClr val="40708B"/>
-                </a:solidFill>
-                <a:latin typeface="Consolas"/>
-                <a:ea typeface="Microsoft YaHei"/>
-                <a:cs typeface="Microsoft YaHei"/>
-              </a:rPr>
-              <a:t>src/m100_model_agent/</a:t>
-            </a:r>
-            <a:r>
-              <a:rPr sz="750" b="0">
-                <a:solidFill>
-                  <a:srgbClr val="40708B"/>
-                </a:solidFill>
-                <a:latin typeface="Microsoft YaHei"/>
-                <a:ea typeface="Microsoft YaHei"/>
-                <a:cs typeface="Microsoft YaHei"/>
-              </a:rPr>
-              <a:t>　·　确定性 · 无模型</a:t>
-            </a:r>
-          </a:p>
-        </p:txBody>
-      </p:sp>
-      <p:sp>
-        <p:nvSpPr>
-          <p:cNvPr id="56" name="Rectangle 55"/>
-          <p:cNvSpPr/>
-          <p:nvPr/>
-        </p:nvSpPr>
-        <p:spPr>
-          <a:xfrm>
-            <a:off x="3694176" y="1938528"/>
-            <a:ext cx="1530095" cy="676656"/>
-          </a:xfrm>
-          <a:prstGeom prst="rect">
-            <a:avLst/>
-          </a:prstGeom>
-          <a:solidFill>
-            <a:srgbClr val="FFFFFF"/>
-          </a:solidFill>
-          <a:ln w="12700">
-            <a:solidFill>
-              <a:srgbClr val="0F62CE"/>
-            </a:solidFill>
-          </a:ln>
-        </p:spPr>
-        <p:txBody>
-          <a:bodyPr rtlCol="0" anchor="ctr"/>
-          <a:lstStyle/>
-          <a:p>
-            <a:pPr algn="ctr"/>
-          </a:p>
-        </p:txBody>
-      </p:sp>
-      <p:sp>
-        <p:nvSpPr>
-          <p:cNvPr id="57" name="Rectangle 56"/>
-          <p:cNvSpPr/>
-          <p:nvPr/>
-        </p:nvSpPr>
-        <p:spPr>
-          <a:xfrm>
-            <a:off x="5023104" y="2011680"/>
-            <a:ext cx="137160" cy="109728"/>
-          </a:xfrm>
-          <a:prstGeom prst="rect">
-            <a:avLst/>
-          </a:prstGeom>
-          <a:solidFill>
-            <a:srgbClr val="FFFFFF"/>
-          </a:solidFill>
-          <a:ln w="9525">
-            <a:solidFill>
-              <a:srgbClr val="0F62CE"/>
-            </a:solidFill>
-          </a:ln>
-        </p:spPr>
-        <p:txBody>
-          <a:bodyPr rtlCol="0" anchor="ctr"/>
-          <a:lstStyle/>
-          <a:p>
-            <a:pPr algn="ctr"/>
-          </a:p>
-        </p:txBody>
-      </p:sp>
-      <p:sp>
-        <p:nvSpPr>
-          <p:cNvPr id="58" name="Rectangle 57"/>
-          <p:cNvSpPr/>
-          <p:nvPr/>
-        </p:nvSpPr>
-        <p:spPr>
-          <a:xfrm>
-            <a:off x="4991100" y="2029968"/>
-            <a:ext cx="64008" cy="32004"/>
-          </a:xfrm>
-          <a:prstGeom prst="rect">
-            <a:avLst/>
-          </a:prstGeom>
-          <a:solidFill>
-            <a:srgbClr val="FFFFFF"/>
-          </a:solidFill>
-          <a:ln w="9525">
-            <a:solidFill>
-              <a:srgbClr val="0F62CE"/>
-            </a:solidFill>
-          </a:ln>
-        </p:spPr>
-        <p:txBody>
-          <a:bodyPr rtlCol="0" anchor="ctr"/>
-          <a:lstStyle/>
-          <a:p>
-            <a:pPr algn="ctr"/>
-          </a:p>
-        </p:txBody>
-      </p:sp>
-      <p:sp>
-        <p:nvSpPr>
-          <p:cNvPr id="59" name="Rectangle 58"/>
-          <p:cNvSpPr/>
-          <p:nvPr/>
-        </p:nvSpPr>
-        <p:spPr>
-          <a:xfrm>
-            <a:off x="4991100" y="2071116"/>
-            <a:ext cx="64008" cy="32004"/>
-          </a:xfrm>
-          <a:prstGeom prst="rect">
-            <a:avLst/>
-          </a:prstGeom>
-          <a:solidFill>
-            <a:srgbClr val="FFFFFF"/>
-          </a:solidFill>
-          <a:ln w="9525">
-            <a:solidFill>
-              <a:srgbClr val="0F62CE"/>
-            </a:solidFill>
-          </a:ln>
-        </p:spPr>
-        <p:txBody>
-          <a:bodyPr rtlCol="0" anchor="ctr"/>
-          <a:lstStyle/>
-          <a:p>
-            <a:pPr algn="ctr"/>
-          </a:p>
-        </p:txBody>
-      </p:sp>
-      <p:sp>
-        <p:nvSpPr>
-          <p:cNvPr id="60" name="TextBox 59"/>
-          <p:cNvSpPr txBox="1"/>
-          <p:nvPr/>
-        </p:nvSpPr>
-        <p:spPr>
-          <a:xfrm>
-            <a:off x="3803904" y="1975104"/>
-            <a:ext cx="1328927" cy="603504"/>
-          </a:xfrm>
-          <a:prstGeom prst="rect">
-            <a:avLst/>
-          </a:prstGeom>
-          <a:noFill/>
-        </p:spPr>
-        <p:txBody>
-          <a:bodyPr wrap="square" anchor="ctr" lIns="0" tIns="0" rIns="0" bIns="0">
-            <a:noAutofit/>
-          </a:bodyPr>
-          <a:lstStyle/>
-          <a:p>
-            <a:pPr algn="l" latinLnBrk="0">
-              <a:lnSpc>
-                <a:spcPct val="100000"/>
-              </a:lnSpc>
-              <a:spcBef>
-                <a:spcPts val="0"/>
-              </a:spcBef>
-              <a:spcAft>
-                <a:spcPts val="100"/>
-              </a:spcAft>
-            </a:pPr>
-            <a:r>
-              <a:rPr sz="950" b="1">
-                <a:solidFill>
-                  <a:srgbClr val="0A2B45"/>
-                </a:solidFill>
-                <a:latin typeface="Microsoft YaHei"/>
-                <a:ea typeface="Microsoft YaHei"/>
-                <a:cs typeface="Microsoft YaHei"/>
-              </a:rPr>
-              <a:t>采样与账本</a:t>
-            </a:r>
-          </a:p>
-          <a:p>
-            <a:pPr algn="l" latinLnBrk="0">
-              <a:lnSpc>
-                <a:spcPct val="100000"/>
-              </a:lnSpc>
-              <a:spcBef>
-                <a:spcPts val="0"/>
-              </a:spcBef>
-              <a:spcAft>
-                <a:spcPts val="200"/>
-              </a:spcAft>
-            </a:pPr>
-            <a:r>
-              <a:rPr sz="700" b="0">
-                <a:solidFill>
-                  <a:srgbClr val="0F62CE"/>
-                </a:solidFill>
-                <a:latin typeface="Consolas"/>
-                <a:ea typeface="Microsoft YaHei"/>
-                <a:cs typeface="Microsoft YaHei"/>
-              </a:rPr>
-              <a:t>roofline.py</a:t>
-            </a:r>
-          </a:p>
-          <a:p>
-            <a:pPr algn="l" latinLnBrk="0">
-              <a:lnSpc>
-                <a:spcPct val="100000"/>
-              </a:lnSpc>
-              <a:spcBef>
-                <a:spcPts val="0"/>
-              </a:spcBef>
-              <a:spcAft>
-                <a:spcPts val="0"/>
-              </a:spcAft>
-            </a:pPr>
-            <a:r>
-              <a:rPr sz="800" b="0">
-                <a:solidFill>
-                  <a:srgbClr val="1B4D69"/>
-                </a:solidFill>
-                <a:latin typeface="Microsoft YaHei"/>
-                <a:ea typeface="Microsoft YaHei"/>
-                <a:cs typeface="Microsoft YaHei"/>
-              </a:rPr>
-              <a:t>一次性服务采 Trace</a:t>
-            </a:r>
-          </a:p>
-          <a:p>
-            <a:pPr algn="l" latinLnBrk="0">
-              <a:lnSpc>
-                <a:spcPct val="100000"/>
-              </a:lnSpc>
-              <a:spcBef>
-                <a:spcPts val="0"/>
-              </a:spcBef>
-              <a:spcAft>
-                <a:spcPts val="0"/>
-              </a:spcAft>
-            </a:pPr>
-            <a:r>
-              <a:rPr sz="800" b="0">
-                <a:solidFill>
-                  <a:srgbClr val="1B4D69"/>
-                </a:solidFill>
-                <a:latin typeface="Microsoft YaHei"/>
-                <a:ea typeface="Microsoft YaHei"/>
-                <a:cs typeface="Microsoft YaHei"/>
-              </a:rPr>
-              <a:t>下界账本 · ratio 自检</a:t>
-            </a:r>
-          </a:p>
-        </p:txBody>
-      </p:sp>
-      <p:cxnSp>
-        <p:nvCxnSpPr>
-          <p:cNvPr id="61" name="Connector 60"/>
-          <p:cNvCxnSpPr/>
-          <p:nvPr/>
-        </p:nvCxnSpPr>
-        <p:spPr>
-          <a:xfrm>
-            <a:off x="4459224" y="2624328"/>
-            <a:ext cx="0" cy="201168"/>
-          </a:xfrm>
-          <a:prstGeom prst="line">
-            <a:avLst/>
-          </a:prstGeom>
-          <a:ln w="12700">
-            <a:solidFill>
-              <a:srgbClr val="0F62CE"/>
-            </a:solidFill>
-            <a:headEnd type="triangle" w="med" len="med"/>
-            <a:tailEnd type="triangle" w="med" len="med"/>
-          </a:ln>
-        </p:spPr>
-      </p:cxnSp>
-      <p:sp>
-        <p:nvSpPr>
-          <p:cNvPr id="62" name="Rectangle 61"/>
-          <p:cNvSpPr/>
-          <p:nvPr/>
-        </p:nvSpPr>
-        <p:spPr>
-          <a:xfrm>
-            <a:off x="5498592" y="1938528"/>
-            <a:ext cx="1530095" cy="676656"/>
-          </a:xfrm>
-          <a:prstGeom prst="rect">
-            <a:avLst/>
-          </a:prstGeom>
-          <a:solidFill>
-            <a:srgbClr val="FFFFFF"/>
-          </a:solidFill>
-          <a:ln w="12700">
-            <a:solidFill>
-              <a:srgbClr val="0F62CE"/>
-            </a:solidFill>
-          </a:ln>
-        </p:spPr>
-        <p:txBody>
-          <a:bodyPr rtlCol="0" anchor="ctr"/>
-          <a:lstStyle/>
-          <a:p>
-            <a:pPr algn="ctr"/>
-          </a:p>
-        </p:txBody>
-      </p:sp>
-      <p:sp>
-        <p:nvSpPr>
-          <p:cNvPr id="63" name="Rectangle 62"/>
-          <p:cNvSpPr/>
-          <p:nvPr/>
-        </p:nvSpPr>
-        <p:spPr>
-          <a:xfrm>
-            <a:off x="6827520" y="2011680"/>
-            <a:ext cx="137160" cy="109728"/>
-          </a:xfrm>
-          <a:prstGeom prst="rect">
-            <a:avLst/>
-          </a:prstGeom>
-          <a:solidFill>
-            <a:srgbClr val="FFFFFF"/>
-          </a:solidFill>
-          <a:ln w="9525">
-            <a:solidFill>
-              <a:srgbClr val="0F62CE"/>
-            </a:solidFill>
-          </a:ln>
-        </p:spPr>
-        <p:txBody>
-          <a:bodyPr rtlCol="0" anchor="ctr"/>
-          <a:lstStyle/>
-          <a:p>
-            <a:pPr algn="ctr"/>
-          </a:p>
-        </p:txBody>
-      </p:sp>
-      <p:sp>
-        <p:nvSpPr>
-          <p:cNvPr id="64" name="Rectangle 63"/>
-          <p:cNvSpPr/>
-          <p:nvPr/>
-        </p:nvSpPr>
-        <p:spPr>
-          <a:xfrm>
-            <a:off x="6795516" y="2029968"/>
-            <a:ext cx="64008" cy="32004"/>
-          </a:xfrm>
-          <a:prstGeom prst="rect">
-            <a:avLst/>
-          </a:prstGeom>
-          <a:solidFill>
-            <a:srgbClr val="FFFFFF"/>
-          </a:solidFill>
-          <a:ln w="9525">
-            <a:solidFill>
-              <a:srgbClr val="0F62CE"/>
-            </a:solidFill>
-          </a:ln>
-        </p:spPr>
-        <p:txBody>
-          <a:bodyPr rtlCol="0" anchor="ctr"/>
-          <a:lstStyle/>
-          <a:p>
-            <a:pPr algn="ctr"/>
-          </a:p>
-        </p:txBody>
-      </p:sp>
-      <p:sp>
-        <p:nvSpPr>
-          <p:cNvPr id="65" name="Rectangle 64"/>
-          <p:cNvSpPr/>
-          <p:nvPr/>
-        </p:nvSpPr>
-        <p:spPr>
-          <a:xfrm>
-            <a:off x="6795516" y="2071116"/>
-            <a:ext cx="64008" cy="32004"/>
-          </a:xfrm>
-          <a:prstGeom prst="rect">
-            <a:avLst/>
-          </a:prstGeom>
-          <a:solidFill>
-            <a:srgbClr val="FFFFFF"/>
-          </a:solidFill>
-          <a:ln w="9525">
-            <a:solidFill>
-              <a:srgbClr val="0F62CE"/>
-            </a:solidFill>
-          </a:ln>
-        </p:spPr>
-        <p:txBody>
-          <a:bodyPr rtlCol="0" anchor="ctr"/>
-          <a:lstStyle/>
-          <a:p>
-            <a:pPr algn="ctr"/>
-          </a:p>
-        </p:txBody>
-      </p:sp>
-      <p:sp>
-        <p:nvSpPr>
-          <p:cNvPr id="66" name="TextBox 65"/>
-          <p:cNvSpPr txBox="1"/>
-          <p:nvPr/>
-        </p:nvSpPr>
-        <p:spPr>
-          <a:xfrm>
-            <a:off x="5608320" y="1975104"/>
-            <a:ext cx="1328927" cy="603504"/>
-          </a:xfrm>
-          <a:prstGeom prst="rect">
-            <a:avLst/>
-          </a:prstGeom>
-          <a:noFill/>
-        </p:spPr>
-        <p:txBody>
-          <a:bodyPr wrap="square" anchor="ctr" lIns="0" tIns="0" rIns="0" bIns="0">
-            <a:noAutofit/>
-          </a:bodyPr>
-          <a:lstStyle/>
-          <a:p>
-            <a:pPr algn="l" latinLnBrk="0">
-              <a:lnSpc>
-                <a:spcPct val="100000"/>
-              </a:lnSpc>
-              <a:spcBef>
-                <a:spcPts val="0"/>
-              </a:spcBef>
-              <a:spcAft>
-                <a:spcPts val="100"/>
-              </a:spcAft>
-            </a:pPr>
-            <a:r>
-              <a:rPr sz="950" b="1">
-                <a:solidFill>
-                  <a:srgbClr val="0A2B45"/>
-                </a:solidFill>
-                <a:latin typeface="Microsoft YaHei"/>
-                <a:ea typeface="Microsoft YaHei"/>
-                <a:cs typeface="Microsoft YaHei"/>
-              </a:rPr>
-              <a:t>四道门禁流水</a:t>
-            </a:r>
-          </a:p>
-          <a:p>
-            <a:pPr algn="l" latinLnBrk="0">
-              <a:lnSpc>
-                <a:spcPct val="100000"/>
-              </a:lnSpc>
-              <a:spcBef>
-                <a:spcPts val="0"/>
-              </a:spcBef>
-              <a:spcAft>
-                <a:spcPts val="200"/>
-              </a:spcAft>
-            </a:pPr>
-            <a:r>
-              <a:rPr sz="700" b="0">
-                <a:solidFill>
-                  <a:srgbClr val="0F62CE"/>
-                </a:solidFill>
-                <a:latin typeface="Consolas"/>
-                <a:ea typeface="Microsoft YaHei"/>
-                <a:cs typeface="Microsoft YaHei"/>
-              </a:rPr>
-              <a:t>selfiterate_gates.py</a:t>
-            </a:r>
-          </a:p>
-          <a:p>
-            <a:pPr algn="l" latinLnBrk="0">
-              <a:lnSpc>
-                <a:spcPct val="100000"/>
-              </a:lnSpc>
-              <a:spcBef>
-                <a:spcPts val="0"/>
-              </a:spcBef>
-              <a:spcAft>
-                <a:spcPts val="0"/>
-              </a:spcAft>
-            </a:pPr>
-            <a:r>
-              <a:rPr sz="800" b="0">
-                <a:solidFill>
-                  <a:srgbClr val="1B4D69"/>
-                </a:solidFill>
-                <a:latin typeface="Microsoft YaHei"/>
-                <a:ea typeface="Microsoft YaHei"/>
-                <a:cs typeface="Microsoft YaHei"/>
-              </a:rPr>
-              <a:t>C 微测 ≥ 2%　数值门</a:t>
-            </a:r>
-          </a:p>
-          <a:p>
-            <a:pPr algn="l" latinLnBrk="0">
-              <a:lnSpc>
-                <a:spcPct val="100000"/>
-              </a:lnSpc>
-              <a:spcBef>
-                <a:spcPts val="0"/>
-              </a:spcBef>
-              <a:spcAft>
-                <a:spcPts val="0"/>
-              </a:spcAft>
-            </a:pPr>
-            <a:r>
-              <a:rPr sz="800" b="0">
-                <a:solidFill>
-                  <a:srgbClr val="1B4D69"/>
-                </a:solidFill>
-                <a:latin typeface="Microsoft YaHei"/>
-                <a:ea typeface="Microsoft YaHei"/>
-                <a:cs typeface="Microsoft YaHei"/>
-              </a:rPr>
-              <a:t>质量门　D 三方 A/B</a:t>
-            </a:r>
-          </a:p>
-        </p:txBody>
-      </p:sp>
-      <p:cxnSp>
-        <p:nvCxnSpPr>
-          <p:cNvPr id="67" name="Connector 66"/>
-          <p:cNvCxnSpPr/>
-          <p:nvPr/>
-        </p:nvCxnSpPr>
-        <p:spPr>
-          <a:xfrm>
-            <a:off x="6263640" y="2624328"/>
-            <a:ext cx="0" cy="201168"/>
-          </a:xfrm>
-          <a:prstGeom prst="line">
-            <a:avLst/>
-          </a:prstGeom>
-          <a:ln w="12700">
-            <a:solidFill>
-              <a:srgbClr val="0F62CE"/>
-            </a:solidFill>
-            <a:headEnd type="triangle" w="med" len="med"/>
-            <a:tailEnd type="triangle" w="med" len="med"/>
-          </a:ln>
-        </p:spPr>
-      </p:cxnSp>
-      <p:sp>
-        <p:nvSpPr>
-          <p:cNvPr id="68" name="Rectangle 67"/>
-          <p:cNvSpPr/>
-          <p:nvPr/>
-        </p:nvSpPr>
-        <p:spPr>
-          <a:xfrm>
-            <a:off x="7303008" y="1938528"/>
-            <a:ext cx="1530095" cy="676656"/>
-          </a:xfrm>
-          <a:prstGeom prst="rect">
-            <a:avLst/>
-          </a:prstGeom>
-          <a:solidFill>
-            <a:srgbClr val="FFFFFF"/>
-          </a:solidFill>
-          <a:ln w="12700">
-            <a:solidFill>
-              <a:srgbClr val="0F62CE"/>
-            </a:solidFill>
-          </a:ln>
-        </p:spPr>
-        <p:txBody>
-          <a:bodyPr rtlCol="0" anchor="ctr"/>
-          <a:lstStyle/>
-          <a:p>
-            <a:pPr algn="ctr"/>
-          </a:p>
-        </p:txBody>
-      </p:sp>
-      <p:sp>
-        <p:nvSpPr>
-          <p:cNvPr id="69" name="Rectangle 68"/>
-          <p:cNvSpPr/>
-          <p:nvPr/>
-        </p:nvSpPr>
-        <p:spPr>
-          <a:xfrm>
-            <a:off x="8631936" y="2011680"/>
-            <a:ext cx="137160" cy="109728"/>
-          </a:xfrm>
-          <a:prstGeom prst="rect">
-            <a:avLst/>
-          </a:prstGeom>
-          <a:solidFill>
-            <a:srgbClr val="FFFFFF"/>
-          </a:solidFill>
-          <a:ln w="9525">
-            <a:solidFill>
-              <a:srgbClr val="0F62CE"/>
-            </a:solidFill>
-          </a:ln>
-        </p:spPr>
-        <p:txBody>
-          <a:bodyPr rtlCol="0" anchor="ctr"/>
-          <a:lstStyle/>
-          <a:p>
-            <a:pPr algn="ctr"/>
-          </a:p>
-        </p:txBody>
-      </p:sp>
-      <p:sp>
-        <p:nvSpPr>
-          <p:cNvPr id="70" name="Rectangle 69"/>
-          <p:cNvSpPr/>
-          <p:nvPr/>
-        </p:nvSpPr>
-        <p:spPr>
-          <a:xfrm>
-            <a:off x="8599932" y="2029968"/>
-            <a:ext cx="64008" cy="32004"/>
-          </a:xfrm>
-          <a:prstGeom prst="rect">
-            <a:avLst/>
-          </a:prstGeom>
-          <a:solidFill>
-            <a:srgbClr val="FFFFFF"/>
-          </a:solidFill>
-          <a:ln w="9525">
-            <a:solidFill>
-              <a:srgbClr val="0F62CE"/>
-            </a:solidFill>
-          </a:ln>
-        </p:spPr>
-        <p:txBody>
-          <a:bodyPr rtlCol="0" anchor="ctr"/>
-          <a:lstStyle/>
-          <a:p>
-            <a:pPr algn="ctr"/>
-          </a:p>
-        </p:txBody>
-      </p:sp>
-      <p:sp>
-        <p:nvSpPr>
-          <p:cNvPr id="71" name="Rectangle 70"/>
-          <p:cNvSpPr/>
-          <p:nvPr/>
-        </p:nvSpPr>
-        <p:spPr>
-          <a:xfrm>
-            <a:off x="8599932" y="2071116"/>
-            <a:ext cx="64008" cy="32004"/>
-          </a:xfrm>
-          <a:prstGeom prst="rect">
-            <a:avLst/>
-          </a:prstGeom>
-          <a:solidFill>
-            <a:srgbClr val="FFFFFF"/>
-          </a:solidFill>
-          <a:ln w="9525">
-            <a:solidFill>
-              <a:srgbClr val="0F62CE"/>
-            </a:solidFill>
-          </a:ln>
-        </p:spPr>
-        <p:txBody>
-          <a:bodyPr rtlCol="0" anchor="ctr"/>
-          <a:lstStyle/>
-          <a:p>
-            <a:pPr algn="ctr"/>
-          </a:p>
-        </p:txBody>
-      </p:sp>
-      <p:sp>
-        <p:nvSpPr>
-          <p:cNvPr id="72" name="TextBox 71"/>
-          <p:cNvSpPr txBox="1"/>
-          <p:nvPr/>
-        </p:nvSpPr>
-        <p:spPr>
-          <a:xfrm>
-            <a:off x="7412735" y="1975104"/>
-            <a:ext cx="1328927" cy="603504"/>
-          </a:xfrm>
-          <a:prstGeom prst="rect">
-            <a:avLst/>
-          </a:prstGeom>
-          <a:noFill/>
-        </p:spPr>
-        <p:txBody>
-          <a:bodyPr wrap="square" anchor="ctr" lIns="0" tIns="0" rIns="0" bIns="0">
-            <a:noAutofit/>
-          </a:bodyPr>
-          <a:lstStyle/>
-          <a:p>
-            <a:pPr algn="l" latinLnBrk="0">
-              <a:lnSpc>
-                <a:spcPct val="100000"/>
-              </a:lnSpc>
-              <a:spcBef>
-                <a:spcPts val="0"/>
-              </a:spcBef>
-              <a:spcAft>
-                <a:spcPts val="100"/>
-              </a:spcAft>
-            </a:pPr>
-            <a:r>
-              <a:rPr sz="950" b="1">
-                <a:solidFill>
-                  <a:srgbClr val="0A2B45"/>
-                </a:solidFill>
-                <a:latin typeface="Microsoft YaHei"/>
-                <a:ea typeface="Microsoft YaHei"/>
-                <a:cs typeface="Microsoft YaHei"/>
-              </a:rPr>
-              <a:t>工作区与构建</a:t>
-            </a:r>
-          </a:p>
-          <a:p>
-            <a:pPr algn="l" latinLnBrk="0">
-              <a:lnSpc>
-                <a:spcPct val="100000"/>
-              </a:lnSpc>
-              <a:spcBef>
-                <a:spcPts val="0"/>
-              </a:spcBef>
-              <a:spcAft>
-                <a:spcPts val="200"/>
-              </a:spcAft>
-            </a:pPr>
-            <a:r>
-              <a:rPr sz="700" b="0">
-                <a:solidFill>
-                  <a:srgbClr val="0F62CE"/>
-                </a:solidFill>
-                <a:latin typeface="Consolas"/>
-                <a:ea typeface="Microsoft YaHei"/>
-                <a:cs typeface="Microsoft YaHei"/>
-              </a:rPr>
-              <a:t>git_workspace.py</a:t>
-            </a:r>
-          </a:p>
-          <a:p>
-            <a:pPr algn="l" latinLnBrk="0">
-              <a:lnSpc>
-                <a:spcPct val="100000"/>
-              </a:lnSpc>
-              <a:spcBef>
-                <a:spcPts val="0"/>
-              </a:spcBef>
-              <a:spcAft>
-                <a:spcPts val="0"/>
-              </a:spcAft>
-            </a:pPr>
-            <a:r>
-              <a:rPr sz="800" b="0">
-                <a:solidFill>
-                  <a:srgbClr val="1B4D69"/>
-                </a:solidFill>
-                <a:latin typeface="Microsoft YaHei"/>
-                <a:ea typeface="Microsoft YaHei"/>
-                <a:cs typeface="Microsoft YaHei"/>
-              </a:rPr>
-              <a:t>原位建版本 · 登记构建</a:t>
-            </a:r>
-          </a:p>
-          <a:p>
-            <a:pPr algn="l" latinLnBrk="0">
-              <a:lnSpc>
-                <a:spcPct val="100000"/>
-              </a:lnSpc>
-              <a:spcBef>
-                <a:spcPts val="0"/>
-              </a:spcBef>
-              <a:spcAft>
-                <a:spcPts val="0"/>
-              </a:spcAft>
-            </a:pPr>
-            <a:r>
-              <a:rPr sz="800" b="0">
-                <a:solidFill>
-                  <a:srgbClr val="1B4D69"/>
-                </a:solidFill>
-                <a:latin typeface="Microsoft YaHei"/>
-                <a:ea typeface="Microsoft YaHei"/>
-                <a:cs typeface="Microsoft YaHei"/>
-              </a:rPr>
-              <a:t>起停服务 · 精确重测</a:t>
-            </a:r>
-          </a:p>
-        </p:txBody>
-      </p:sp>
-      <p:cxnSp>
-        <p:nvCxnSpPr>
-          <p:cNvPr id="73" name="Connector 72"/>
-          <p:cNvCxnSpPr/>
-          <p:nvPr/>
-        </p:nvCxnSpPr>
-        <p:spPr>
-          <a:xfrm>
-            <a:off x="8068055" y="2624328"/>
-            <a:ext cx="0" cy="201168"/>
-          </a:xfrm>
-          <a:prstGeom prst="line">
-            <a:avLst/>
-          </a:prstGeom>
-          <a:ln w="12700">
-            <a:solidFill>
-              <a:srgbClr val="0F62CE"/>
-            </a:solidFill>
-            <a:headEnd type="triangle" w="med" len="med"/>
-            <a:tailEnd type="triangle" w="med" len="med"/>
-          </a:ln>
-        </p:spPr>
-      </p:cxnSp>
-      <p:sp>
-        <p:nvSpPr>
-          <p:cNvPr id="74" name="TextBox 73"/>
-          <p:cNvSpPr txBox="1"/>
-          <p:nvPr/>
-        </p:nvSpPr>
-        <p:spPr>
-          <a:xfrm>
-            <a:off x="4532376" y="2615184"/>
-            <a:ext cx="1097280" cy="219456"/>
-          </a:xfrm>
-          <a:prstGeom prst="rect">
-            <a:avLst/>
-          </a:prstGeom>
-          <a:noFill/>
-        </p:spPr>
-        <p:txBody>
-          <a:bodyPr wrap="square" anchor="ctr" lIns="0" tIns="0" rIns="0" bIns="0">
-            <a:noAutofit/>
-          </a:bodyPr>
-          <a:lstStyle/>
-          <a:p>
-            <a:pPr algn="l" latinLnBrk="0">
-              <a:lnSpc>
-                <a:spcPct val="100000"/>
-              </a:lnSpc>
-              <a:spcBef>
-                <a:spcPts val="0"/>
-              </a:spcBef>
-              <a:spcAft>
-                <a:spcPts val="0"/>
-              </a:spcAft>
-            </a:pPr>
-            <a:r>
-              <a:rPr sz="700" b="1">
-                <a:solidFill>
-                  <a:srgbClr val="0F62CE"/>
-                </a:solidFill>
-                <a:latin typeface="Microsoft YaHei"/>
-                <a:ea typeface="Microsoft YaHei"/>
-                <a:cs typeface="Microsoft YaHei"/>
-              </a:rPr>
-              <a:t>调度 · 回报</a:t>
-            </a:r>
-          </a:p>
-        </p:txBody>
-      </p:sp>
-      <p:sp>
-        <p:nvSpPr>
-          <p:cNvPr id="75" name="Rectangle 74"/>
-          <p:cNvSpPr/>
-          <p:nvPr/>
-        </p:nvSpPr>
-        <p:spPr>
-          <a:xfrm>
-            <a:off x="3694176" y="2834640"/>
-            <a:ext cx="5138927" cy="384048"/>
-          </a:xfrm>
-          <a:prstGeom prst="rect">
-            <a:avLst/>
-          </a:prstGeom>
-          <a:solidFill>
-            <a:srgbClr val="C9E1FC"/>
-          </a:solidFill>
-          <a:ln w="15875">
-            <a:solidFill>
-              <a:srgbClr val="0F62CE"/>
-            </a:solidFill>
-          </a:ln>
-        </p:spPr>
-        <p:txBody>
-          <a:bodyPr rtlCol="0" anchor="ctr"/>
-          <a:lstStyle/>
-          <a:p>
-            <a:pPr algn="ctr"/>
-          </a:p>
-        </p:txBody>
-      </p:sp>
-      <p:sp>
-        <p:nvSpPr>
-          <p:cNvPr id="76" name="Rectangle 75"/>
-          <p:cNvSpPr/>
-          <p:nvPr/>
-        </p:nvSpPr>
-        <p:spPr>
-          <a:xfrm>
-            <a:off x="8613648" y="2889504"/>
-            <a:ext cx="137160" cy="109728"/>
-          </a:xfrm>
-          <a:prstGeom prst="rect">
-            <a:avLst/>
-          </a:prstGeom>
-          <a:solidFill>
-            <a:srgbClr val="FFFFFF"/>
-          </a:solidFill>
-          <a:ln w="9525">
-            <a:solidFill>
-              <a:srgbClr val="0F62CE"/>
-            </a:solidFill>
-          </a:ln>
-        </p:spPr>
-        <p:txBody>
-          <a:bodyPr rtlCol="0" anchor="ctr"/>
-          <a:lstStyle/>
-          <a:p>
-            <a:pPr algn="ctr"/>
-          </a:p>
-        </p:txBody>
-      </p:sp>
-      <p:sp>
-        <p:nvSpPr>
-          <p:cNvPr id="77" name="Rectangle 76"/>
-          <p:cNvSpPr/>
-          <p:nvPr/>
-        </p:nvSpPr>
-        <p:spPr>
-          <a:xfrm>
-            <a:off x="8581644" y="2907792"/>
-            <a:ext cx="64008" cy="32004"/>
-          </a:xfrm>
-          <a:prstGeom prst="rect">
-            <a:avLst/>
-          </a:prstGeom>
-          <a:solidFill>
-            <a:srgbClr val="FFFFFF"/>
-          </a:solidFill>
-          <a:ln w="9525">
-            <a:solidFill>
-              <a:srgbClr val="0F62CE"/>
-            </a:solidFill>
-          </a:ln>
-        </p:spPr>
-        <p:txBody>
-          <a:bodyPr rtlCol="0" anchor="ctr"/>
-          <a:lstStyle/>
-          <a:p>
-            <a:pPr algn="ctr"/>
-          </a:p>
-        </p:txBody>
-      </p:sp>
-      <p:sp>
-        <p:nvSpPr>
-          <p:cNvPr id="78" name="Rectangle 77"/>
-          <p:cNvSpPr/>
-          <p:nvPr/>
-        </p:nvSpPr>
-        <p:spPr>
-          <a:xfrm>
-            <a:off x="8581644" y="2948940"/>
-            <a:ext cx="64008" cy="32004"/>
-          </a:xfrm>
-          <a:prstGeom prst="rect">
-            <a:avLst/>
-          </a:prstGeom>
-          <a:solidFill>
-            <a:srgbClr val="FFFFFF"/>
-          </a:solidFill>
-          <a:ln w="9525">
-            <a:solidFill>
-              <a:srgbClr val="0F62CE"/>
-            </a:solidFill>
-          </a:ln>
-        </p:spPr>
-        <p:txBody>
-          <a:bodyPr rtlCol="0" anchor="ctr"/>
-          <a:lstStyle/>
-          <a:p>
-            <a:pPr algn="ctr"/>
-          </a:p>
-        </p:txBody>
-      </p:sp>
-      <p:sp>
-        <p:nvSpPr>
-          <p:cNvPr id="79" name="TextBox 78"/>
-          <p:cNvSpPr txBox="1"/>
-          <p:nvPr/>
-        </p:nvSpPr>
-        <p:spPr>
-          <a:xfrm>
-            <a:off x="3968496" y="2834640"/>
-            <a:ext cx="4590288" cy="384048"/>
-          </a:xfrm>
-          <a:prstGeom prst="rect">
-            <a:avLst/>
-          </a:prstGeom>
-          <a:noFill/>
-        </p:spPr>
-        <p:txBody>
-          <a:bodyPr wrap="square" anchor="ctr" lIns="0" tIns="0" rIns="0" bIns="0">
-            <a:noAutofit/>
-          </a:bodyPr>
-          <a:lstStyle/>
-          <a:p>
-            <a:pPr algn="ctr" latinLnBrk="0">
-              <a:lnSpc>
-                <a:spcPct val="100000"/>
-              </a:lnSpc>
-              <a:spcBef>
-                <a:spcPts val="0"/>
-              </a:spcBef>
-              <a:spcAft>
-                <a:spcPts val="0"/>
-              </a:spcAft>
-            </a:pPr>
-            <a:r>
-              <a:rPr sz="1050" b="1">
-                <a:solidFill>
-                  <a:srgbClr val="0F62CE"/>
-                </a:solidFill>
-                <a:latin typeface="Microsoft YaHei"/>
-                <a:ea typeface="Microsoft YaHei"/>
-                <a:cs typeface="Microsoft YaHei"/>
-              </a:rPr>
-              <a:t>状态机与编排</a:t>
-            </a:r>
-            <a:r>
-              <a:rPr sz="700" b="0">
-                <a:solidFill>
-                  <a:srgbClr val="40708B"/>
-                </a:solidFill>
-                <a:latin typeface="Consolas"/>
-                <a:ea typeface="Microsoft YaHei"/>
-                <a:cs typeface="Microsoft YaHei"/>
-              </a:rPr>
-              <a:t>　optimization.py · selfiterate.py</a:t>
-            </a:r>
-          </a:p>
-          <a:p>
-            <a:pPr algn="ctr" latinLnBrk="0">
-              <a:lnSpc>
-                <a:spcPct val="100000"/>
-              </a:lnSpc>
-              <a:spcBef>
-                <a:spcPts val="0"/>
-              </a:spcBef>
-              <a:spcAft>
-                <a:spcPts val="0"/>
-              </a:spcAft>
-            </a:pPr>
-            <a:r>
-              <a:rPr sz="800" b="0">
-                <a:solidFill>
-                  <a:srgbClr val="123C5B"/>
-                </a:solidFill>
-                <a:latin typeface="Microsoft YaHei"/>
-                <a:ea typeface="Microsoft YaHei"/>
-                <a:cs typeface="Microsoft YaHei"/>
-              </a:rPr>
-              <a:t>设备锁 · 状态流转 · 中断恢复 · 版本晋升 · 报告生成</a:t>
-            </a:r>
-          </a:p>
-        </p:txBody>
-      </p:sp>
-      <p:sp>
-        <p:nvSpPr>
-          <p:cNvPr id="80" name="Rectangle 79"/>
-          <p:cNvSpPr/>
-          <p:nvPr/>
-        </p:nvSpPr>
-        <p:spPr>
-          <a:xfrm>
-            <a:off x="3694176" y="3529584"/>
-            <a:ext cx="1530095" cy="676656"/>
-          </a:xfrm>
-          <a:prstGeom prst="rect">
-            <a:avLst/>
-          </a:prstGeom>
-          <a:solidFill>
-            <a:srgbClr val="FFFFFF"/>
-          </a:solidFill>
-          <a:ln w="12700">
-            <a:solidFill>
-              <a:srgbClr val="0F62CE"/>
-            </a:solidFill>
-          </a:ln>
-        </p:spPr>
-        <p:txBody>
-          <a:bodyPr rtlCol="0" anchor="ctr"/>
-          <a:lstStyle/>
-          <a:p>
-            <a:pPr algn="ctr"/>
-          </a:p>
-        </p:txBody>
-      </p:sp>
-      <p:sp>
-        <p:nvSpPr>
-          <p:cNvPr id="81" name="Rectangle 80"/>
-          <p:cNvSpPr/>
-          <p:nvPr/>
-        </p:nvSpPr>
-        <p:spPr>
-          <a:xfrm>
-            <a:off x="5023104" y="3602736"/>
-            <a:ext cx="137160" cy="109728"/>
-          </a:xfrm>
-          <a:prstGeom prst="rect">
-            <a:avLst/>
-          </a:prstGeom>
-          <a:solidFill>
-            <a:srgbClr val="FFFFFF"/>
-          </a:solidFill>
-          <a:ln w="9525">
-            <a:solidFill>
-              <a:srgbClr val="0F62CE"/>
-            </a:solidFill>
-          </a:ln>
-        </p:spPr>
-        <p:txBody>
-          <a:bodyPr rtlCol="0" anchor="ctr"/>
-          <a:lstStyle/>
-          <a:p>
-            <a:pPr algn="ctr"/>
-          </a:p>
-        </p:txBody>
-      </p:sp>
-      <p:sp>
-        <p:nvSpPr>
-          <p:cNvPr id="82" name="Rectangle 81"/>
-          <p:cNvSpPr/>
-          <p:nvPr/>
-        </p:nvSpPr>
-        <p:spPr>
-          <a:xfrm>
-            <a:off x="4991100" y="3621024"/>
-            <a:ext cx="64008" cy="32004"/>
-          </a:xfrm>
-          <a:prstGeom prst="rect">
-            <a:avLst/>
-          </a:prstGeom>
-          <a:solidFill>
-            <a:srgbClr val="FFFFFF"/>
-          </a:solidFill>
-          <a:ln w="9525">
-            <a:solidFill>
-              <a:srgbClr val="0F62CE"/>
-            </a:solidFill>
-          </a:ln>
-        </p:spPr>
-        <p:txBody>
-          <a:bodyPr rtlCol="0" anchor="ctr"/>
-          <a:lstStyle/>
-          <a:p>
-            <a:pPr algn="ctr"/>
-          </a:p>
-        </p:txBody>
-      </p:sp>
-      <p:sp>
-        <p:nvSpPr>
-          <p:cNvPr id="83" name="Rectangle 82"/>
-          <p:cNvSpPr/>
-          <p:nvPr/>
-        </p:nvSpPr>
-        <p:spPr>
-          <a:xfrm>
-            <a:off x="4991100" y="3662172"/>
-            <a:ext cx="64008" cy="32004"/>
-          </a:xfrm>
-          <a:prstGeom prst="rect">
-            <a:avLst/>
-          </a:prstGeom>
-          <a:solidFill>
-            <a:srgbClr val="FFFFFF"/>
-          </a:solidFill>
-          <a:ln w="9525">
-            <a:solidFill>
-              <a:srgbClr val="0F62CE"/>
-            </a:solidFill>
-          </a:ln>
-        </p:spPr>
-        <p:txBody>
-          <a:bodyPr rtlCol="0" anchor="ctr"/>
-          <a:lstStyle/>
-          <a:p>
-            <a:pPr algn="ctr"/>
-          </a:p>
-        </p:txBody>
-      </p:sp>
-      <p:sp>
-        <p:nvSpPr>
-          <p:cNvPr id="84" name="TextBox 83"/>
-          <p:cNvSpPr txBox="1"/>
-          <p:nvPr/>
-        </p:nvSpPr>
-        <p:spPr>
-          <a:xfrm>
-            <a:off x="3803904" y="3566160"/>
-            <a:ext cx="1328927" cy="603504"/>
-          </a:xfrm>
-          <a:prstGeom prst="rect">
-            <a:avLst/>
-          </a:prstGeom>
-          <a:noFill/>
-        </p:spPr>
-        <p:txBody>
-          <a:bodyPr wrap="square" anchor="ctr" lIns="0" tIns="0" rIns="0" bIns="0">
-            <a:noAutofit/>
-          </a:bodyPr>
-          <a:lstStyle/>
-          <a:p>
-            <a:pPr algn="l" latinLnBrk="0">
-              <a:lnSpc>
-                <a:spcPct val="100000"/>
-              </a:lnSpc>
-              <a:spcBef>
-                <a:spcPts val="0"/>
-              </a:spcBef>
-              <a:spcAft>
-                <a:spcPts val="100"/>
-              </a:spcAft>
-            </a:pPr>
-            <a:r>
-              <a:rPr sz="950" b="1">
-                <a:solidFill>
-                  <a:srgbClr val="0A2B45"/>
-                </a:solidFill>
-                <a:latin typeface="Microsoft YaHei"/>
-                <a:ea typeface="Microsoft YaHei"/>
-                <a:cs typeface="Microsoft YaHei"/>
-              </a:rPr>
-              <a:t>有界取证</a:t>
-            </a:r>
-          </a:p>
-          <a:p>
-            <a:pPr algn="l" latinLnBrk="0">
-              <a:lnSpc>
-                <a:spcPct val="100000"/>
-              </a:lnSpc>
-              <a:spcBef>
-                <a:spcPts val="0"/>
-              </a:spcBef>
-              <a:spcAft>
-                <a:spcPts val="200"/>
-              </a:spcAft>
-            </a:pPr>
-            <a:r>
-              <a:rPr sz="700" b="0">
-                <a:solidFill>
-                  <a:srgbClr val="0F62CE"/>
-                </a:solidFill>
-                <a:latin typeface="Consolas"/>
-                <a:ea typeface="Microsoft YaHei"/>
-                <a:cs typeface="Microsoft YaHei"/>
-              </a:rPr>
-              <a:t>planner_diagnostics.py</a:t>
-            </a:r>
-          </a:p>
-          <a:p>
-            <a:pPr algn="l" latinLnBrk="0">
-              <a:lnSpc>
-                <a:spcPct val="100000"/>
-              </a:lnSpc>
-              <a:spcBef>
-                <a:spcPts val="0"/>
-              </a:spcBef>
-              <a:spcAft>
-                <a:spcPts val="0"/>
-              </a:spcAft>
-            </a:pPr>
-            <a:r>
-              <a:rPr sz="800" b="0">
-                <a:solidFill>
-                  <a:srgbClr val="1B4D69"/>
-                </a:solidFill>
-                <a:latin typeface="Microsoft YaHei"/>
-                <a:ea typeface="Microsoft YaHei"/>
-                <a:cs typeface="Microsoft YaHei"/>
-              </a:rPr>
-              <a:t>独立进程 probe</a:t>
-            </a:r>
-          </a:p>
-          <a:p>
-            <a:pPr algn="l" latinLnBrk="0">
-              <a:lnSpc>
-                <a:spcPct val="100000"/>
-              </a:lnSpc>
-              <a:spcBef>
-                <a:spcPts val="0"/>
-              </a:spcBef>
-              <a:spcAft>
-                <a:spcPts val="0"/>
-              </a:spcAft>
-            </a:pPr>
-            <a:r>
-              <a:rPr sz="800" b="0">
-                <a:solidFill>
-                  <a:srgbClr val="1B4D69"/>
-                </a:solidFill>
-                <a:latin typeface="Microsoft YaHei"/>
-                <a:ea typeface="Microsoft YaHei"/>
-                <a:cs typeface="Microsoft YaHei"/>
-              </a:rPr>
-              <a:t>产物 ≤ 64 KiB · 落盘</a:t>
-            </a:r>
-          </a:p>
-        </p:txBody>
-      </p:sp>
-      <p:sp>
-        <p:nvSpPr>
-          <p:cNvPr id="85" name="Rectangle 84"/>
-          <p:cNvSpPr/>
-          <p:nvPr/>
-        </p:nvSpPr>
-        <p:spPr>
-          <a:xfrm>
-            <a:off x="5498592" y="3529584"/>
-            <a:ext cx="1530095" cy="676656"/>
-          </a:xfrm>
-          <a:prstGeom prst="rect">
-            <a:avLst/>
-          </a:prstGeom>
-          <a:solidFill>
-            <a:srgbClr val="FFFFFF"/>
-          </a:solidFill>
-          <a:ln w="12700">
-            <a:solidFill>
-              <a:srgbClr val="0F62CE"/>
-            </a:solidFill>
-          </a:ln>
-        </p:spPr>
-        <p:txBody>
-          <a:bodyPr rtlCol="0" anchor="ctr"/>
-          <a:lstStyle/>
-          <a:p>
-            <a:pPr algn="ctr"/>
-          </a:p>
-        </p:txBody>
-      </p:sp>
-      <p:sp>
-        <p:nvSpPr>
-          <p:cNvPr id="86" name="Rectangle 85"/>
-          <p:cNvSpPr/>
-          <p:nvPr/>
-        </p:nvSpPr>
-        <p:spPr>
-          <a:xfrm>
-            <a:off x="6827520" y="3602736"/>
-            <a:ext cx="137160" cy="109728"/>
-          </a:xfrm>
-          <a:prstGeom prst="rect">
-            <a:avLst/>
-          </a:prstGeom>
-          <a:solidFill>
-            <a:srgbClr val="FFFFFF"/>
-          </a:solidFill>
-          <a:ln w="9525">
-            <a:solidFill>
-              <a:srgbClr val="0F62CE"/>
-            </a:solidFill>
-          </a:ln>
-        </p:spPr>
-        <p:txBody>
-          <a:bodyPr rtlCol="0" anchor="ctr"/>
-          <a:lstStyle/>
-          <a:p>
-            <a:pPr algn="ctr"/>
-          </a:p>
-        </p:txBody>
-      </p:sp>
-      <p:sp>
-        <p:nvSpPr>
-          <p:cNvPr id="87" name="Rectangle 86"/>
-          <p:cNvSpPr/>
-          <p:nvPr/>
-        </p:nvSpPr>
-        <p:spPr>
-          <a:xfrm>
-            <a:off x="6795516" y="3621024"/>
-            <a:ext cx="64008" cy="32004"/>
-          </a:xfrm>
-          <a:prstGeom prst="rect">
-            <a:avLst/>
-          </a:prstGeom>
-          <a:solidFill>
-            <a:srgbClr val="FFFFFF"/>
-          </a:solidFill>
-          <a:ln w="9525">
-            <a:solidFill>
-              <a:srgbClr val="0F62CE"/>
-            </a:solidFill>
-          </a:ln>
-        </p:spPr>
-        <p:txBody>
-          <a:bodyPr rtlCol="0" anchor="ctr"/>
-          <a:lstStyle/>
-          <a:p>
-            <a:pPr algn="ctr"/>
-          </a:p>
-        </p:txBody>
-      </p:sp>
-      <p:sp>
-        <p:nvSpPr>
-          <p:cNvPr id="88" name="Rectangle 87"/>
-          <p:cNvSpPr/>
-          <p:nvPr/>
-        </p:nvSpPr>
-        <p:spPr>
-          <a:xfrm>
-            <a:off x="6795516" y="3662172"/>
-            <a:ext cx="64008" cy="32004"/>
-          </a:xfrm>
-          <a:prstGeom prst="rect">
-            <a:avLst/>
-          </a:prstGeom>
-          <a:solidFill>
-            <a:srgbClr val="FFFFFF"/>
-          </a:solidFill>
-          <a:ln w="9525">
-            <a:solidFill>
-              <a:srgbClr val="0F62CE"/>
-            </a:solidFill>
-          </a:ln>
-        </p:spPr>
-        <p:txBody>
-          <a:bodyPr rtlCol="0" anchor="ctr"/>
-          <a:lstStyle/>
-          <a:p>
-            <a:pPr algn="ctr"/>
-          </a:p>
-        </p:txBody>
-      </p:sp>
-      <p:sp>
-        <p:nvSpPr>
-          <p:cNvPr id="89" name="TextBox 88"/>
-          <p:cNvSpPr txBox="1"/>
-          <p:nvPr/>
-        </p:nvSpPr>
-        <p:spPr>
-          <a:xfrm>
-            <a:off x="5608320" y="3566160"/>
-            <a:ext cx="1328927" cy="603504"/>
-          </a:xfrm>
-          <a:prstGeom prst="rect">
-            <a:avLst/>
-          </a:prstGeom>
-          <a:noFill/>
-        </p:spPr>
-        <p:txBody>
-          <a:bodyPr wrap="square" anchor="ctr" lIns="0" tIns="0" rIns="0" bIns="0">
-            <a:noAutofit/>
-          </a:bodyPr>
-          <a:lstStyle/>
-          <a:p>
-            <a:pPr algn="l" latinLnBrk="0">
-              <a:lnSpc>
-                <a:spcPct val="100000"/>
-              </a:lnSpc>
-              <a:spcBef>
-                <a:spcPts val="0"/>
-              </a:spcBef>
-              <a:spcAft>
-                <a:spcPts val="100"/>
-              </a:spcAft>
-            </a:pPr>
-            <a:r>
-              <a:rPr sz="950" b="1">
-                <a:solidFill>
-                  <a:srgbClr val="0A2B45"/>
-                </a:solidFill>
-                <a:latin typeface="Microsoft YaHei"/>
-                <a:ea typeface="Microsoft YaHei"/>
-                <a:cs typeface="Microsoft YaHei"/>
-              </a:rPr>
-              <a:t>通信 mailbox</a:t>
-            </a:r>
-          </a:p>
-          <a:p>
-            <a:pPr algn="l" latinLnBrk="0">
-              <a:lnSpc>
-                <a:spcPct val="100000"/>
-              </a:lnSpc>
-              <a:spcBef>
-                <a:spcPts val="0"/>
-              </a:spcBef>
-              <a:spcAft>
-                <a:spcPts val="200"/>
-              </a:spcAft>
-            </a:pPr>
-            <a:r>
-              <a:rPr sz="700" b="0">
-                <a:solidFill>
-                  <a:srgbClr val="0F62CE"/>
-                </a:solidFill>
-                <a:latin typeface="Consolas"/>
-                <a:ea typeface="Microsoft YaHei"/>
-                <a:cs typeface="Microsoft YaHei"/>
-              </a:rPr>
-              <a:t>planner_mailbox.py</a:t>
-            </a:r>
-          </a:p>
-          <a:p>
-            <a:pPr algn="l" latinLnBrk="0">
-              <a:lnSpc>
-                <a:spcPct val="100000"/>
-              </a:lnSpc>
-              <a:spcBef>
-                <a:spcPts val="0"/>
-              </a:spcBef>
-              <a:spcAft>
-                <a:spcPts val="0"/>
-              </a:spcAft>
-            </a:pPr>
-            <a:r>
-              <a:rPr sz="800" b="0">
-                <a:solidFill>
-                  <a:srgbClr val="1B4D69"/>
-                </a:solidFill>
-                <a:latin typeface="Microsoft YaHei"/>
-                <a:ea typeface="Microsoft YaHei"/>
-                <a:cs typeface="Microsoft YaHei"/>
-              </a:rPr>
-              <a:t>UUID + SHA + schema</a:t>
-            </a:r>
-          </a:p>
-          <a:p>
-            <a:pPr algn="l" latinLnBrk="0">
-              <a:lnSpc>
-                <a:spcPct val="100000"/>
-              </a:lnSpc>
-              <a:spcBef>
-                <a:spcPts val="0"/>
-              </a:spcBef>
-              <a:spcAft>
-                <a:spcPts val="0"/>
-              </a:spcAft>
-            </a:pPr>
-            <a:r>
-              <a:rPr sz="800" b="0">
-                <a:solidFill>
-                  <a:srgbClr val="1B4D69"/>
-                </a:solidFill>
-                <a:latin typeface="Microsoft YaHei"/>
-                <a:ea typeface="Microsoft YaHei"/>
-                <a:cs typeface="Microsoft YaHei"/>
-              </a:rPr>
-              <a:t>消息 ≤ 28 KB · 落盘</a:t>
-            </a:r>
-          </a:p>
-        </p:txBody>
-      </p:sp>
-      <p:sp>
-        <p:nvSpPr>
-          <p:cNvPr id="90" name="Rectangle 89"/>
-          <p:cNvSpPr/>
-          <p:nvPr/>
-        </p:nvSpPr>
-        <p:spPr>
-          <a:xfrm>
-            <a:off x="7303008" y="3529584"/>
-            <a:ext cx="1530095" cy="676656"/>
-          </a:xfrm>
-          <a:prstGeom prst="rect">
-            <a:avLst/>
-          </a:prstGeom>
-          <a:solidFill>
-            <a:srgbClr val="FFFFFF"/>
-          </a:solidFill>
-          <a:ln w="12700">
-            <a:solidFill>
-              <a:srgbClr val="0F62CE"/>
-            </a:solidFill>
-          </a:ln>
-        </p:spPr>
-        <p:txBody>
-          <a:bodyPr rtlCol="0" anchor="ctr"/>
-          <a:lstStyle/>
-          <a:p>
-            <a:pPr algn="ctr"/>
-          </a:p>
-        </p:txBody>
-      </p:sp>
-      <p:sp>
-        <p:nvSpPr>
-          <p:cNvPr id="91" name="Rectangle 90"/>
-          <p:cNvSpPr/>
-          <p:nvPr/>
-        </p:nvSpPr>
-        <p:spPr>
-          <a:xfrm>
-            <a:off x="8631936" y="3602736"/>
-            <a:ext cx="137160" cy="109728"/>
-          </a:xfrm>
-          <a:prstGeom prst="rect">
-            <a:avLst/>
-          </a:prstGeom>
-          <a:solidFill>
-            <a:srgbClr val="FFFFFF"/>
-          </a:solidFill>
-          <a:ln w="9525">
-            <a:solidFill>
-              <a:srgbClr val="0F62CE"/>
-            </a:solidFill>
-          </a:ln>
-        </p:spPr>
-        <p:txBody>
-          <a:bodyPr rtlCol="0" anchor="ctr"/>
-          <a:lstStyle/>
-          <a:p>
-            <a:pPr algn="ctr"/>
-          </a:p>
-        </p:txBody>
-      </p:sp>
-      <p:sp>
-        <p:nvSpPr>
-          <p:cNvPr id="92" name="Rectangle 91"/>
-          <p:cNvSpPr/>
-          <p:nvPr/>
-        </p:nvSpPr>
-        <p:spPr>
-          <a:xfrm>
-            <a:off x="8599932" y="3621024"/>
-            <a:ext cx="64008" cy="32004"/>
-          </a:xfrm>
-          <a:prstGeom prst="rect">
-            <a:avLst/>
-          </a:prstGeom>
-          <a:solidFill>
-            <a:srgbClr val="FFFFFF"/>
-          </a:solidFill>
-          <a:ln w="9525">
-            <a:solidFill>
-              <a:srgbClr val="0F62CE"/>
-            </a:solidFill>
-          </a:ln>
-        </p:spPr>
-        <p:txBody>
-          <a:bodyPr rtlCol="0" anchor="ctr"/>
-          <a:lstStyle/>
-          <a:p>
-            <a:pPr algn="ctr"/>
-          </a:p>
-        </p:txBody>
-      </p:sp>
-      <p:sp>
-        <p:nvSpPr>
-          <p:cNvPr id="93" name="Rectangle 92"/>
-          <p:cNvSpPr/>
-          <p:nvPr/>
-        </p:nvSpPr>
-        <p:spPr>
-          <a:xfrm>
-            <a:off x="8599932" y="3662172"/>
-            <a:ext cx="64008" cy="32004"/>
-          </a:xfrm>
-          <a:prstGeom prst="rect">
-            <a:avLst/>
-          </a:prstGeom>
-          <a:solidFill>
-            <a:srgbClr val="FFFFFF"/>
-          </a:solidFill>
-          <a:ln w="9525">
-            <a:solidFill>
-              <a:srgbClr val="0F62CE"/>
-            </a:solidFill>
-          </a:ln>
-        </p:spPr>
-        <p:txBody>
-          <a:bodyPr rtlCol="0" anchor="ctr"/>
-          <a:lstStyle/>
-          <a:p>
-            <a:pPr algn="ctr"/>
-          </a:p>
-        </p:txBody>
-      </p:sp>
-      <p:sp>
-        <p:nvSpPr>
-          <p:cNvPr id="94" name="TextBox 93"/>
-          <p:cNvSpPr txBox="1"/>
-          <p:nvPr/>
-        </p:nvSpPr>
-        <p:spPr>
-          <a:xfrm>
-            <a:off x="7412735" y="3566160"/>
-            <a:ext cx="1328927" cy="603504"/>
-          </a:xfrm>
-          <a:prstGeom prst="rect">
-            <a:avLst/>
-          </a:prstGeom>
-          <a:noFill/>
-        </p:spPr>
-        <p:txBody>
-          <a:bodyPr wrap="square" anchor="ctr" lIns="0" tIns="0" rIns="0" bIns="0">
-            <a:noAutofit/>
-          </a:bodyPr>
-          <a:lstStyle/>
-          <a:p>
-            <a:pPr algn="l" latinLnBrk="0">
-              <a:lnSpc>
-                <a:spcPct val="100000"/>
-              </a:lnSpc>
-              <a:spcBef>
-                <a:spcPts val="0"/>
-              </a:spcBef>
-              <a:spcAft>
-                <a:spcPts val="100"/>
-              </a:spcAft>
-            </a:pPr>
-            <a:r>
-              <a:rPr sz="950" b="1">
-                <a:solidFill>
-                  <a:srgbClr val="0A2B45"/>
-                </a:solidFill>
-                <a:latin typeface="Microsoft YaHei"/>
-                <a:ea typeface="Microsoft YaHei"/>
-                <a:cs typeface="Microsoft YaHei"/>
-              </a:rPr>
-              <a:t>记忆 memory</a:t>
-            </a:r>
-          </a:p>
-          <a:p>
-            <a:pPr algn="l" latinLnBrk="0">
-              <a:lnSpc>
-                <a:spcPct val="100000"/>
-              </a:lnSpc>
-              <a:spcBef>
-                <a:spcPts val="0"/>
-              </a:spcBef>
-              <a:spcAft>
-                <a:spcPts val="200"/>
-              </a:spcAft>
-            </a:pPr>
-            <a:r>
-              <a:rPr sz="700" b="0">
-                <a:solidFill>
-                  <a:srgbClr val="0F62CE"/>
-                </a:solidFill>
-                <a:latin typeface="Consolas"/>
-                <a:ea typeface="Microsoft YaHei"/>
-                <a:cs typeface="Microsoft YaHei"/>
-              </a:rPr>
-              <a:t>planner_memory.py</a:t>
-            </a:r>
-          </a:p>
-          <a:p>
-            <a:pPr algn="l" latinLnBrk="0">
-              <a:lnSpc>
-                <a:spcPct val="100000"/>
-              </a:lnSpc>
-              <a:spcBef>
-                <a:spcPts val="0"/>
-              </a:spcBef>
-              <a:spcAft>
-                <a:spcPts val="0"/>
-              </a:spcAft>
-            </a:pPr>
-            <a:r>
-              <a:rPr sz="800" b="0">
-                <a:solidFill>
-                  <a:srgbClr val="1B4D69"/>
-                </a:solidFill>
-                <a:latin typeface="Microsoft YaHei"/>
-                <a:ea typeface="Microsoft YaHei"/>
-                <a:cs typeface="Microsoft YaHei"/>
-              </a:rPr>
-              <a:t>摘要 + 指纹 + 拒绝原因</a:t>
-            </a:r>
-          </a:p>
-          <a:p>
-            <a:pPr algn="l" latinLnBrk="0">
-              <a:lnSpc>
-                <a:spcPct val="100000"/>
-              </a:lnSpc>
-              <a:spcBef>
-                <a:spcPts val="0"/>
-              </a:spcBef>
-              <a:spcAft>
-                <a:spcPts val="0"/>
-              </a:spcAft>
-            </a:pPr>
-            <a:r>
-              <a:rPr sz="800" b="0">
-                <a:solidFill>
-                  <a:srgbClr val="1B4D69"/>
-                </a:solidFill>
-                <a:latin typeface="Microsoft YaHei"/>
-                <a:ea typeface="Microsoft YaHei"/>
-                <a:cs typeface="Microsoft YaHei"/>
-              </a:rPr>
-              <a:t>滚动压缩至 ≤ 18 KB</a:t>
-            </a:r>
-          </a:p>
-        </p:txBody>
-      </p:sp>
-      <p:cxnSp>
-        <p:nvCxnSpPr>
-          <p:cNvPr id="95" name="Connector 94"/>
-          <p:cNvCxnSpPr/>
-          <p:nvPr/>
-        </p:nvCxnSpPr>
-        <p:spPr>
-          <a:xfrm>
-            <a:off x="5242559" y="3867911"/>
-            <a:ext cx="237745" cy="0"/>
-          </a:xfrm>
-          <a:prstGeom prst="line">
-            <a:avLst/>
-          </a:prstGeom>
-          <a:ln w="15875">
-            <a:solidFill>
-              <a:srgbClr val="0F62CE"/>
-            </a:solidFill>
-            <a:headEnd type="triangle" w="med" len="med"/>
-            <a:tailEnd type="triangle" w="med" len="med"/>
-          </a:ln>
-        </p:spPr>
-      </p:cxnSp>
-      <p:sp>
-        <p:nvSpPr>
-          <p:cNvPr id="96" name="TextBox 95"/>
-          <p:cNvSpPr txBox="1"/>
-          <p:nvPr/>
-        </p:nvSpPr>
-        <p:spPr>
-          <a:xfrm>
-            <a:off x="5169408" y="3685031"/>
-            <a:ext cx="384048" cy="146304"/>
-          </a:xfrm>
-          <a:prstGeom prst="rect">
-            <a:avLst/>
-          </a:prstGeom>
-          <a:noFill/>
-        </p:spPr>
-        <p:txBody>
-          <a:bodyPr wrap="square" anchor="ctr" lIns="0" tIns="0" rIns="0" bIns="0">
-            <a:noAutofit/>
-          </a:bodyPr>
-          <a:lstStyle/>
-          <a:p>
-            <a:pPr algn="ctr" latinLnBrk="0">
-              <a:lnSpc>
-                <a:spcPct val="100000"/>
-              </a:lnSpc>
-              <a:spcBef>
-                <a:spcPts val="0"/>
-              </a:spcBef>
-              <a:spcAft>
-                <a:spcPts val="0"/>
-              </a:spcAft>
-            </a:pPr>
-            <a:r>
-              <a:rPr sz="700" b="1">
-                <a:solidFill>
-                  <a:srgbClr val="0F62CE"/>
-                </a:solidFill>
-                <a:latin typeface="Microsoft YaHei"/>
-                <a:ea typeface="Microsoft YaHei"/>
-                <a:cs typeface="Microsoft YaHei"/>
-              </a:rPr>
-              <a:t>探针</a:t>
-            </a:r>
-          </a:p>
-        </p:txBody>
-      </p:sp>
-      <p:cxnSp>
-        <p:nvCxnSpPr>
-          <p:cNvPr id="97" name="Connector 96"/>
-          <p:cNvCxnSpPr/>
-          <p:nvPr/>
-        </p:nvCxnSpPr>
-        <p:spPr>
-          <a:xfrm flipH="1">
-            <a:off x="7046975" y="3867911"/>
-            <a:ext cx="237745" cy="0"/>
-          </a:xfrm>
-          <a:prstGeom prst="line">
-            <a:avLst/>
-          </a:prstGeom>
-          <a:ln w="15875">
-            <a:solidFill>
-              <a:srgbClr val="0F62CE"/>
-            </a:solidFill>
-            <a:tailEnd type="triangle" w="med" len="med"/>
-          </a:ln>
-        </p:spPr>
-      </p:cxnSp>
-      <p:sp>
-        <p:nvSpPr>
-          <p:cNvPr id="98" name="TextBox 97"/>
-          <p:cNvSpPr txBox="1"/>
-          <p:nvPr/>
-        </p:nvSpPr>
-        <p:spPr>
-          <a:xfrm>
-            <a:off x="6973824" y="3685031"/>
-            <a:ext cx="384048" cy="146304"/>
-          </a:xfrm>
-          <a:prstGeom prst="rect">
-            <a:avLst/>
-          </a:prstGeom>
-          <a:noFill/>
-        </p:spPr>
-        <p:txBody>
-          <a:bodyPr wrap="square" anchor="ctr" lIns="0" tIns="0" rIns="0" bIns="0">
-            <a:noAutofit/>
-          </a:bodyPr>
-          <a:lstStyle/>
-          <a:p>
-            <a:pPr algn="ctr" latinLnBrk="0">
-              <a:lnSpc>
-                <a:spcPct val="100000"/>
-              </a:lnSpc>
-              <a:spcBef>
-                <a:spcPts val="0"/>
-              </a:spcBef>
-              <a:spcAft>
-                <a:spcPts val="0"/>
-              </a:spcAft>
-            </a:pPr>
-            <a:r>
-              <a:rPr sz="700" b="1">
-                <a:solidFill>
-                  <a:srgbClr val="0F62CE"/>
-                </a:solidFill>
-                <a:latin typeface="Microsoft YaHei"/>
-                <a:ea typeface="Microsoft YaHei"/>
-                <a:cs typeface="Microsoft YaHei"/>
-              </a:rPr>
-              <a:t>压缩</a:t>
-            </a:r>
-          </a:p>
-        </p:txBody>
-      </p:sp>
-      <p:cxnSp>
-        <p:nvCxnSpPr>
-          <p:cNvPr id="99" name="Connector 98"/>
-          <p:cNvCxnSpPr/>
-          <p:nvPr/>
-        </p:nvCxnSpPr>
-        <p:spPr>
-          <a:xfrm>
-            <a:off x="8068055" y="3227832"/>
-            <a:ext cx="0" cy="292608"/>
-          </a:xfrm>
-          <a:prstGeom prst="line">
-            <a:avLst/>
-          </a:prstGeom>
           <a:ln w="19050">
             <a:solidFill>
               <a:srgbClr val="D2690C"/>
@@ -34406,17 +32811,80 @@
             <a:tailEnd type="triangle" w="med" len="med"/>
           </a:ln>
         </p:spPr>
-      </p:cxnSp>
+        <p:txBody>
+          <a:bodyPr rtlCol="0" anchor="ctr"/>
+          <a:lstStyle/>
+          <a:p>
+            <a:pPr algn="ctr"/>
+          </a:p>
+        </p:txBody>
+      </p:sp>
+      <p:sp>
+        <p:nvSpPr>
+          <p:cNvPr id="48" name="Rounded Rectangle 47"/>
+          <p:cNvSpPr/>
+          <p:nvPr/>
+        </p:nvSpPr>
+        <p:spPr>
+          <a:xfrm>
+            <a:off x="7991856" y="3465576"/>
+            <a:ext cx="603504" cy="201168"/>
+          </a:xfrm>
+          <a:prstGeom prst="roundRect">
+            <a:avLst>
+              <a:gd name="adj" fmla="val 50000"/>
+            </a:avLst>
+          </a:prstGeom>
+          <a:solidFill>
+            <a:srgbClr val="FFFFFF"/>
+          </a:solidFill>
+          <a:ln w="9525">
+            <a:solidFill>
+              <a:srgbClr val="C2570A"/>
+            </a:solidFill>
+          </a:ln>
+        </p:spPr>
+        <p:txBody>
+          <a:bodyPr rtlCol="0" anchor="ctr" wrap="square" lIns="18288" tIns="0" rIns="18288" bIns="0">
+            <a:noAutofit/>
+          </a:bodyPr>
+          <a:lstStyle/>
+          <a:p>
+            <a:pPr algn="ctr" latinLnBrk="0">
+              <a:lnSpc>
+                <a:spcPct val="100000"/>
+              </a:lnSpc>
+              <a:spcBef>
+                <a:spcPts val="0"/>
+              </a:spcBef>
+              <a:spcAft>
+                <a:spcPts val="0"/>
+              </a:spcAft>
+            </a:pPr>
+            <a:r>
+              <a:rPr sz="750" b="1">
+                <a:solidFill>
+                  <a:srgbClr val="C2570A"/>
+                </a:solidFill>
+                <a:latin typeface="Microsoft YaHei"/>
+                <a:ea typeface="Microsoft YaHei"/>
+                <a:cs typeface="Microsoft YaHei"/>
+              </a:rPr>
+              <a:t>按需调取</a:t>
+            </a:r>
+          </a:p>
+        </p:txBody>
+      </p:sp>
       <p:cxnSp>
         <p:nvCxnSpPr>
-          <p:cNvPr id="100" name="Connector 99"/>
+          <p:cNvPr id="49" name="Connector 48"/>
           <p:cNvCxnSpPr/>
           <p:nvPr/>
         </p:nvCxnSpPr>
         <p:spPr>
-          <a:xfrm flipV="1">
-            <a:off x="6537960" y="3227832"/>
-            <a:ext cx="0" cy="292608"/>
+          <a:xfrm>
+            <a:off x="7688275" y="4581144"/>
+            <a:ext cx="980237" cy="0"/>
           </a:xfrm>
           <a:prstGeom prst="line">
             <a:avLst/>
@@ -34431,1115 +32899,70 @@
       </p:cxnSp>
       <p:sp>
         <p:nvSpPr>
-          <p:cNvPr id="101" name="TextBox 100"/>
-          <p:cNvSpPr txBox="1"/>
-          <p:nvPr/>
-        </p:nvSpPr>
-        <p:spPr>
-          <a:xfrm>
-            <a:off x="5010912" y="3218688"/>
-            <a:ext cx="1463040" cy="310895"/>
-          </a:xfrm>
-          <a:prstGeom prst="rect">
-            <a:avLst/>
-          </a:prstGeom>
-          <a:noFill/>
-        </p:spPr>
-        <p:txBody>
-          <a:bodyPr wrap="square" anchor="ctr" lIns="0" tIns="0" rIns="0" bIns="0">
-            <a:noAutofit/>
-          </a:bodyPr>
-          <a:lstStyle/>
-          <a:p>
-            <a:pPr algn="r" latinLnBrk="0">
-              <a:lnSpc>
-                <a:spcPct val="100000"/>
-              </a:lnSpc>
-              <a:spcBef>
-                <a:spcPts val="0"/>
-              </a:spcBef>
-              <a:spcAft>
-                <a:spcPts val="0"/>
-              </a:spcAft>
-            </a:pPr>
-            <a:r>
-              <a:rPr sz="750" b="1">
-                <a:solidFill>
-                  <a:srgbClr val="C2570A"/>
-                </a:solidFill>
-                <a:latin typeface="Microsoft YaHei"/>
-                <a:ea typeface="Microsoft YaHei"/>
-                <a:cs typeface="Microsoft YaHei"/>
-              </a:rPr>
-              <a:t>提交：假设 + 补丁</a:t>
-            </a:r>
-          </a:p>
-        </p:txBody>
-      </p:sp>
-      <p:sp>
-        <p:nvSpPr>
-          <p:cNvPr id="102" name="TextBox 101"/>
-          <p:cNvSpPr txBox="1"/>
-          <p:nvPr/>
-        </p:nvSpPr>
-        <p:spPr>
-          <a:xfrm>
-            <a:off x="6541007" y="3218688"/>
-            <a:ext cx="1463040" cy="310895"/>
-          </a:xfrm>
-          <a:prstGeom prst="rect">
-            <a:avLst/>
-          </a:prstGeom>
-          <a:noFill/>
-        </p:spPr>
-        <p:txBody>
-          <a:bodyPr wrap="square" anchor="ctr" lIns="0" tIns="0" rIns="0" bIns="0">
-            <a:noAutofit/>
-          </a:bodyPr>
-          <a:lstStyle/>
-          <a:p>
-            <a:pPr algn="r" latinLnBrk="0">
-              <a:lnSpc>
-                <a:spcPct val="100000"/>
-              </a:lnSpc>
-              <a:spcBef>
-                <a:spcPts val="0"/>
-              </a:spcBef>
-              <a:spcAft>
-                <a:spcPts val="0"/>
-              </a:spcAft>
-            </a:pPr>
-            <a:r>
-              <a:rPr sz="750" b="1">
-                <a:solidFill>
-                  <a:srgbClr val="C2570A"/>
-                </a:solidFill>
-                <a:latin typeface="Microsoft YaHei"/>
-                <a:ea typeface="Microsoft YaHei"/>
-                <a:cs typeface="Microsoft YaHei"/>
-              </a:rPr>
-              <a:t>下发：账本 + 被拒记忆</a:t>
-            </a:r>
-          </a:p>
-        </p:txBody>
-      </p:sp>
-      <p:sp>
-        <p:nvSpPr>
-          <p:cNvPr id="103" name="Rectangle 102"/>
+          <p:cNvPr id="50" name="Rounded Rectangle 49"/>
           <p:cNvSpPr/>
           <p:nvPr/>
         </p:nvSpPr>
         <p:spPr>
           <a:xfrm>
-            <a:off x="3566160" y="4681728"/>
-            <a:ext cx="5394959" cy="786384"/>
-          </a:xfrm>
-          <a:prstGeom prst="rect">
-            <a:avLst/>
-          </a:prstGeom>
-          <a:solidFill>
-            <a:srgbClr val="FBE6D4"/>
-          </a:solidFill>
-          <a:ln w="15875">
-            <a:solidFill>
-              <a:srgbClr val="D2690C"/>
-            </a:solidFill>
-            <a:prstDash val="dash"/>
-          </a:ln>
-        </p:spPr>
-        <p:txBody>
-          <a:bodyPr rtlCol="0" anchor="ctr"/>
-          <a:lstStyle/>
-          <a:p>
-            <a:pPr algn="ctr"/>
-          </a:p>
-        </p:txBody>
-      </p:sp>
-      <p:sp>
-        <p:nvSpPr>
-          <p:cNvPr id="104" name="Rectangle 103"/>
-          <p:cNvSpPr/>
-          <p:nvPr/>
-        </p:nvSpPr>
-        <p:spPr>
-          <a:xfrm>
-            <a:off x="8723376" y="4764024"/>
-            <a:ext cx="137160" cy="109728"/>
-          </a:xfrm>
-          <a:prstGeom prst="rect">
-            <a:avLst/>
+            <a:off x="7946136" y="4480559"/>
+            <a:ext cx="694944" cy="201168"/>
+          </a:xfrm>
+          <a:prstGeom prst="roundRect">
+            <a:avLst>
+              <a:gd name="adj" fmla="val 50000"/>
+            </a:avLst>
           </a:prstGeom>
           <a:solidFill>
             <a:srgbClr val="FFFFFF"/>
           </a:solidFill>
           <a:ln w="9525">
             <a:solidFill>
-              <a:srgbClr val="D2690C"/>
+              <a:srgbClr val="C2570A"/>
             </a:solidFill>
           </a:ln>
         </p:spPr>
         <p:txBody>
-          <a:bodyPr rtlCol="0" anchor="ctr"/>
-          <a:lstStyle/>
-          <a:p>
-            <a:pPr algn="ctr"/>
-          </a:p>
-        </p:txBody>
-      </p:sp>
-      <p:sp>
-        <p:nvSpPr>
-          <p:cNvPr id="105" name="Rectangle 104"/>
+          <a:bodyPr rtlCol="0" anchor="ctr" wrap="square" lIns="18288" tIns="0" rIns="18288" bIns="0">
+            <a:noAutofit/>
+          </a:bodyPr>
+          <a:lstStyle/>
+          <a:p>
+            <a:pPr algn="ctr" latinLnBrk="0">
+              <a:lnSpc>
+                <a:spcPct val="100000"/>
+              </a:lnSpc>
+              <a:spcBef>
+                <a:spcPts val="0"/>
+              </a:spcBef>
+              <a:spcAft>
+                <a:spcPts val="0"/>
+              </a:spcAft>
+            </a:pPr>
+            <a:r>
+              <a:rPr sz="750" b="1">
+                <a:solidFill>
+                  <a:srgbClr val="C2570A"/>
+                </a:solidFill>
+                <a:latin typeface="Microsoft YaHei"/>
+                <a:ea typeface="Microsoft YaHei"/>
+                <a:cs typeface="Microsoft YaHei"/>
+              </a:rPr>
+              <a:t>构建 · 门禁</a:t>
+            </a:r>
+          </a:p>
+        </p:txBody>
+      </p:sp>
+      <p:sp>
+        <p:nvSpPr>
+          <p:cNvPr id="51" name="Freeform 50"/>
           <p:cNvSpPr/>
           <p:nvPr/>
         </p:nvSpPr>
         <p:spPr>
           <a:xfrm>
-            <a:off x="8691372" y="4782312"/>
-            <a:ext cx="64008" cy="32004"/>
-          </a:xfrm>
-          <a:prstGeom prst="rect">
-            <a:avLst/>
-          </a:prstGeom>
-          <a:solidFill>
-            <a:srgbClr val="FFFFFF"/>
-          </a:solidFill>
-          <a:ln w="9525">
-            <a:solidFill>
-              <a:srgbClr val="D2690C"/>
-            </a:solidFill>
-          </a:ln>
-        </p:spPr>
-        <p:txBody>
-          <a:bodyPr rtlCol="0" anchor="ctr"/>
-          <a:lstStyle/>
-          <a:p>
-            <a:pPr algn="ctr"/>
-          </a:p>
-        </p:txBody>
-      </p:sp>
-      <p:sp>
-        <p:nvSpPr>
-          <p:cNvPr id="106" name="Rectangle 105"/>
-          <p:cNvSpPr/>
-          <p:nvPr/>
-        </p:nvSpPr>
-        <p:spPr>
-          <a:xfrm>
-            <a:off x="8691372" y="4823460"/>
-            <a:ext cx="64008" cy="32004"/>
-          </a:xfrm>
-          <a:prstGeom prst="rect">
-            <a:avLst/>
-          </a:prstGeom>
-          <a:solidFill>
-            <a:srgbClr val="FFFFFF"/>
-          </a:solidFill>
-          <a:ln w="9525">
-            <a:solidFill>
-              <a:srgbClr val="D2690C"/>
-            </a:solidFill>
-          </a:ln>
-        </p:spPr>
-        <p:txBody>
-          <a:bodyPr rtlCol="0" anchor="ctr"/>
-          <a:lstStyle/>
-          <a:p>
-            <a:pPr algn="ctr"/>
-          </a:p>
-        </p:txBody>
-      </p:sp>
-      <p:sp>
-        <p:nvSpPr>
-          <p:cNvPr id="107" name="TextBox 106"/>
-          <p:cNvSpPr txBox="1"/>
-          <p:nvPr/>
-        </p:nvSpPr>
-        <p:spPr>
-          <a:xfrm>
-            <a:off x="3712464" y="4736592"/>
-            <a:ext cx="3163824" cy="256032"/>
-          </a:xfrm>
-          <a:prstGeom prst="rect">
-            <a:avLst/>
-          </a:prstGeom>
-          <a:noFill/>
-        </p:spPr>
-        <p:txBody>
-          <a:bodyPr wrap="square" anchor="ctr" lIns="0" tIns="0" rIns="0" bIns="0">
-            <a:noAutofit/>
-          </a:bodyPr>
-          <a:lstStyle/>
-          <a:p>
-            <a:pPr algn="l" latinLnBrk="0">
-              <a:lnSpc>
-                <a:spcPct val="100000"/>
-              </a:lnSpc>
-              <a:spcBef>
-                <a:spcPts val="0"/>
-              </a:spcBef>
-              <a:spcAft>
-                <a:spcPts val="0"/>
-              </a:spcAft>
-            </a:pPr>
-            <a:r>
-              <a:rPr sz="1150" b="1">
-                <a:solidFill>
-                  <a:srgbClr val="0A2B45"/>
-                </a:solidFill>
-                <a:latin typeface="Microsoft YaHei"/>
-                <a:ea typeface="Microsoft YaHei"/>
-                <a:cs typeface="Microsoft YaHei"/>
-              </a:rPr>
-              <a:t>规划器</a:t>
-            </a:r>
-            <a:r>
-              <a:rPr sz="800" b="1">
-                <a:solidFill>
-                  <a:srgbClr val="C2570A"/>
-                </a:solidFill>
-                <a:latin typeface="Microsoft YaHei"/>
-                <a:ea typeface="Microsoft YaHei"/>
-                <a:cs typeface="Microsoft YaHei"/>
-              </a:rPr>
-              <a:t>　«component»　Codex 外部托管会话</a:t>
-            </a:r>
-          </a:p>
-        </p:txBody>
-      </p:sp>
-      <p:sp>
-        <p:nvSpPr>
-          <p:cNvPr id="108" name="Rounded Rectangle 107"/>
-          <p:cNvSpPr/>
-          <p:nvPr/>
-        </p:nvSpPr>
-        <p:spPr>
-          <a:xfrm>
-            <a:off x="7059168" y="4764024"/>
-            <a:ext cx="1499616" cy="201168"/>
-          </a:xfrm>
-          <a:prstGeom prst="roundRect">
-            <a:avLst>
-              <a:gd name="adj" fmla="val 50000"/>
-            </a:avLst>
-          </a:prstGeom>
-          <a:solidFill>
-            <a:srgbClr val="D2690C"/>
-          </a:solidFill>
-          <a:ln>
-            <a:noFill/>
-          </a:ln>
-        </p:spPr>
-        <p:txBody>
-          <a:bodyPr rtlCol="0" anchor="ctr" wrap="square" lIns="36576" tIns="0" rIns="36576" bIns="0">
-            <a:noAutofit/>
-          </a:bodyPr>
-          <a:lstStyle/>
-          <a:p>
-            <a:pPr algn="ctr" latinLnBrk="0">
-              <a:lnSpc>
-                <a:spcPct val="100000"/>
-              </a:lnSpc>
-              <a:spcBef>
-                <a:spcPts val="0"/>
-              </a:spcBef>
-              <a:spcAft>
-                <a:spcPts val="0"/>
-              </a:spcAft>
-            </a:pPr>
-            <a:r>
-              <a:rPr sz="750" b="1">
-                <a:solidFill>
-                  <a:srgbClr val="FFFFFF"/>
-                </a:solidFill>
-                <a:latin typeface="Microsoft YaHei"/>
-                <a:ea typeface="Microsoft YaHei"/>
-                <a:cs typeface="Microsoft YaHei"/>
-              </a:rPr>
-              <a:t>硬约束：不能自行宣告成功</a:t>
-            </a:r>
-          </a:p>
-        </p:txBody>
-      </p:sp>
-      <p:sp>
-        <p:nvSpPr>
-          <p:cNvPr id="109" name="TextBox 108"/>
-          <p:cNvSpPr txBox="1"/>
-          <p:nvPr/>
-        </p:nvSpPr>
-        <p:spPr>
-          <a:xfrm>
-            <a:off x="3712464" y="5010912"/>
-            <a:ext cx="5102351" cy="402336"/>
-          </a:xfrm>
-          <a:prstGeom prst="rect">
-            <a:avLst/>
-          </a:prstGeom>
-          <a:noFill/>
-        </p:spPr>
-        <p:txBody>
-          <a:bodyPr wrap="square" anchor="ctr" lIns="0" tIns="0" rIns="0" bIns="0">
-            <a:noAutofit/>
-          </a:bodyPr>
-          <a:lstStyle/>
-          <a:p>
-            <a:pPr algn="l" latinLnBrk="0">
-              <a:lnSpc>
-                <a:spcPct val="100000"/>
-              </a:lnSpc>
-              <a:spcBef>
-                <a:spcPts val="0"/>
-              </a:spcBef>
-              <a:spcAft>
-                <a:spcPts val="200"/>
-              </a:spcAft>
-            </a:pPr>
-            <a:r>
-              <a:rPr sz="850" b="0">
-                <a:solidFill>
-                  <a:srgbClr val="1B4D69"/>
-                </a:solidFill>
-                <a:latin typeface="Microsoft YaHei"/>
-                <a:ea typeface="Microsoft YaHei"/>
-                <a:cs typeface="Microsoft YaHei"/>
-              </a:rPr>
-              <a:t>读源码与冻结证据，形成假设，提出结构化动作；Skill 按需检索，每轮 ≤ 2 份</a:t>
-            </a:r>
-          </a:p>
-          <a:p>
-            <a:pPr algn="l" latinLnBrk="0">
-              <a:lnSpc>
-                <a:spcPct val="100000"/>
-              </a:lnSpc>
-              <a:spcBef>
-                <a:spcPts val="0"/>
-              </a:spcBef>
-              <a:spcAft>
-                <a:spcPts val="0"/>
-              </a:spcAft>
-            </a:pPr>
-            <a:r>
-              <a:rPr sz="850" b="0">
-                <a:solidFill>
-                  <a:srgbClr val="1B4D69"/>
-                </a:solidFill>
-                <a:latin typeface="Microsoft YaHei"/>
-                <a:ea typeface="Microsoft YaHei"/>
-                <a:cs typeface="Microsoft YaHei"/>
-              </a:rPr>
-              <a:t>动作限定：</a:t>
-            </a:r>
-            <a:r>
-              <a:rPr sz="800" b="0">
-                <a:solidFill>
-                  <a:srgbClr val="C2570A"/>
-                </a:solidFill>
-                <a:latin typeface="Consolas"/>
-                <a:ea typeface="Microsoft YaHei"/>
-                <a:cs typeface="Microsoft YaHei"/>
-              </a:rPr>
-              <a:t>read · search · list · probe · patch · stop</a:t>
-            </a:r>
-          </a:p>
-        </p:txBody>
-      </p:sp>
-      <p:sp>
-        <p:nvSpPr>
-          <p:cNvPr id="110" name="Cube 109"/>
-          <p:cNvSpPr/>
-          <p:nvPr/>
-        </p:nvSpPr>
-        <p:spPr>
-          <a:xfrm>
-            <a:off x="9875520" y="1627632"/>
-            <a:ext cx="1767535" cy="1682496"/>
-          </a:xfrm>
-          <a:prstGeom prst="cube">
-            <a:avLst>
-              <a:gd name="adj" fmla="val 6521"/>
-            </a:avLst>
-          </a:prstGeom>
-          <a:solidFill>
-            <a:srgbClr val="F2F8FD"/>
-          </a:solidFill>
-          <a:ln w="12700">
-            <a:solidFill>
-              <a:srgbClr val="0F62CE"/>
-            </a:solidFill>
-          </a:ln>
-        </p:spPr>
-        <p:txBody>
-          <a:bodyPr rtlCol="0" anchor="ctr"/>
-          <a:lstStyle/>
-          <a:p>
-            <a:pPr algn="ctr"/>
-          </a:p>
-        </p:txBody>
-      </p:sp>
-      <p:sp>
-        <p:nvSpPr>
-          <p:cNvPr id="111" name="TextBox 110"/>
-          <p:cNvSpPr txBox="1"/>
-          <p:nvPr/>
-        </p:nvSpPr>
-        <p:spPr>
-          <a:xfrm>
-            <a:off x="9985248" y="1773936"/>
-            <a:ext cx="1438351" cy="256032"/>
-          </a:xfrm>
-          <a:prstGeom prst="rect">
-            <a:avLst/>
-          </a:prstGeom>
-          <a:noFill/>
-        </p:spPr>
-        <p:txBody>
-          <a:bodyPr wrap="square" anchor="ctr" lIns="0" tIns="0" rIns="0" bIns="0">
-            <a:noAutofit/>
-          </a:bodyPr>
-          <a:lstStyle/>
-          <a:p>
-            <a:pPr algn="l" latinLnBrk="0">
-              <a:lnSpc>
-                <a:spcPct val="100000"/>
-              </a:lnSpc>
-              <a:spcBef>
-                <a:spcPts val="0"/>
-              </a:spcBef>
-              <a:spcAft>
-                <a:spcPts val="0"/>
-              </a:spcAft>
-            </a:pPr>
-            <a:r>
-              <a:rPr sz="1050" b="1">
-                <a:solidFill>
-                  <a:srgbClr val="0A2B45"/>
-                </a:solidFill>
-                <a:latin typeface="Microsoft YaHei"/>
-                <a:ea typeface="Microsoft YaHei"/>
-                <a:cs typeface="Microsoft YaHei"/>
-              </a:rPr>
-              <a:t>被测系统</a:t>
-            </a:r>
-            <a:r>
-              <a:rPr sz="700" b="0">
-                <a:solidFill>
-                  <a:srgbClr val="40708B"/>
-                </a:solidFill>
-                <a:latin typeface="Microsoft YaHei"/>
-                <a:ea typeface="Microsoft YaHei"/>
-                <a:cs typeface="Microsoft YaHei"/>
-              </a:rPr>
-              <a:t>　«external»</a:t>
-            </a:r>
-          </a:p>
-        </p:txBody>
-      </p:sp>
-      <p:sp>
-        <p:nvSpPr>
-          <p:cNvPr id="112" name="Rectangle 111"/>
-          <p:cNvSpPr/>
-          <p:nvPr/>
-        </p:nvSpPr>
-        <p:spPr>
-          <a:xfrm>
-            <a:off x="9985248" y="2084831"/>
-            <a:ext cx="1438351" cy="228600"/>
-          </a:xfrm>
-          <a:prstGeom prst="rect">
-            <a:avLst/>
-          </a:prstGeom>
-          <a:solidFill>
-            <a:srgbClr val="FFFFFF"/>
-          </a:solidFill>
-          <a:ln w="9525">
-            <a:solidFill>
-              <a:srgbClr val="AFCEE1"/>
-            </a:solidFill>
-          </a:ln>
-        </p:spPr>
-        <p:txBody>
-          <a:bodyPr rtlCol="0" anchor="ctr" wrap="square" lIns="36576" tIns="0" rIns="36576" bIns="0">
-            <a:noAutofit/>
-          </a:bodyPr>
-          <a:lstStyle/>
-          <a:p>
-            <a:pPr algn="ctr" latinLnBrk="0">
-              <a:lnSpc>
-                <a:spcPct val="100000"/>
-              </a:lnSpc>
-              <a:spcBef>
-                <a:spcPts val="0"/>
-              </a:spcBef>
-              <a:spcAft>
-                <a:spcPts val="0"/>
-              </a:spcAft>
-            </a:pPr>
-            <a:r>
-              <a:rPr sz="800" b="0">
-                <a:solidFill>
-                  <a:srgbClr val="123C5B"/>
-                </a:solidFill>
-                <a:latin typeface="Microsoft YaHei"/>
-                <a:ea typeface="Microsoft YaHei"/>
-                <a:cs typeface="Microsoft YaHei"/>
-              </a:rPr>
-              <a:t>SGLang 原仓库</a:t>
-            </a:r>
-          </a:p>
-        </p:txBody>
-      </p:sp>
-      <p:sp>
-        <p:nvSpPr>
-          <p:cNvPr id="113" name="Rectangle 112"/>
-          <p:cNvSpPr/>
-          <p:nvPr/>
-        </p:nvSpPr>
-        <p:spPr>
-          <a:xfrm>
-            <a:off x="9985248" y="2368296"/>
-            <a:ext cx="1438351" cy="228600"/>
-          </a:xfrm>
-          <a:prstGeom prst="rect">
-            <a:avLst/>
-          </a:prstGeom>
-          <a:solidFill>
-            <a:srgbClr val="FFFFFF"/>
-          </a:solidFill>
-          <a:ln w="9525">
-            <a:solidFill>
-              <a:srgbClr val="AFCEE1"/>
-            </a:solidFill>
-          </a:ln>
-        </p:spPr>
-        <p:txBody>
-          <a:bodyPr rtlCol="0" anchor="ctr" wrap="square" lIns="36576" tIns="0" rIns="36576" bIns="0">
-            <a:noAutofit/>
-          </a:bodyPr>
-          <a:lstStyle/>
-          <a:p>
-            <a:pPr algn="ctr" latinLnBrk="0">
-              <a:lnSpc>
-                <a:spcPct val="100000"/>
-              </a:lnSpc>
-              <a:spcBef>
-                <a:spcPts val="0"/>
-              </a:spcBef>
-              <a:spcAft>
-                <a:spcPts val="0"/>
-              </a:spcAft>
-            </a:pPr>
-            <a:r>
-              <a:rPr sz="800" b="0">
-                <a:solidFill>
-                  <a:srgbClr val="123C5B"/>
-                </a:solidFill>
-                <a:latin typeface="Microsoft YaHei"/>
-                <a:ea typeface="Microsoft YaHei"/>
-                <a:cs typeface="Microsoft YaHei"/>
-              </a:rPr>
-              <a:t>xInfer · xtorch_ops</a:t>
-            </a:r>
-          </a:p>
-        </p:txBody>
-      </p:sp>
-      <p:sp>
-        <p:nvSpPr>
-          <p:cNvPr id="114" name="Rectangle 113"/>
-          <p:cNvSpPr/>
-          <p:nvPr/>
-        </p:nvSpPr>
-        <p:spPr>
-          <a:xfrm>
-            <a:off x="9985248" y="2651760"/>
-            <a:ext cx="1438351" cy="228600"/>
-          </a:xfrm>
-          <a:prstGeom prst="rect">
-            <a:avLst/>
-          </a:prstGeom>
-          <a:solidFill>
-            <a:srgbClr val="FFFFFF"/>
-          </a:solidFill>
-          <a:ln w="9525">
-            <a:solidFill>
-              <a:srgbClr val="AFCEE1"/>
-            </a:solidFill>
-          </a:ln>
-        </p:spPr>
-        <p:txBody>
-          <a:bodyPr rtlCol="0" anchor="ctr" wrap="square" lIns="36576" tIns="0" rIns="36576" bIns="0">
-            <a:noAutofit/>
-          </a:bodyPr>
-          <a:lstStyle/>
-          <a:p>
-            <a:pPr algn="ctr" latinLnBrk="0">
-              <a:lnSpc>
-                <a:spcPct val="100000"/>
-              </a:lnSpc>
-              <a:spcBef>
-                <a:spcPts val="0"/>
-              </a:spcBef>
-              <a:spcAft>
-                <a:spcPts val="0"/>
-              </a:spcAft>
-            </a:pPr>
-            <a:r>
-              <a:rPr sz="800" b="0">
-                <a:solidFill>
-                  <a:srgbClr val="123C5B"/>
-                </a:solidFill>
-                <a:latin typeface="Microsoft YaHei"/>
-                <a:ea typeface="Microsoft YaHei"/>
-                <a:cs typeface="Microsoft YaHei"/>
-              </a:rPr>
-              <a:t>登记的算子组件</a:t>
-            </a:r>
-          </a:p>
-        </p:txBody>
-      </p:sp>
-      <p:sp>
-        <p:nvSpPr>
-          <p:cNvPr id="115" name="Rectangle 114"/>
-          <p:cNvSpPr/>
-          <p:nvPr/>
-        </p:nvSpPr>
-        <p:spPr>
-          <a:xfrm>
-            <a:off x="9985248" y="2935224"/>
-            <a:ext cx="1438351" cy="228600"/>
-          </a:xfrm>
-          <a:prstGeom prst="rect">
-            <a:avLst/>
-          </a:prstGeom>
-          <a:solidFill>
-            <a:srgbClr val="FFFFFF"/>
-          </a:solidFill>
-          <a:ln w="9525">
-            <a:solidFill>
-              <a:srgbClr val="AFCEE1"/>
-            </a:solidFill>
-          </a:ln>
-        </p:spPr>
-        <p:txBody>
-          <a:bodyPr rtlCol="0" anchor="ctr" wrap="square" lIns="36576" tIns="0" rIns="36576" bIns="0">
-            <a:noAutofit/>
-          </a:bodyPr>
-          <a:lstStyle/>
-          <a:p>
-            <a:pPr algn="ctr" latinLnBrk="0">
-              <a:lnSpc>
-                <a:spcPct val="100000"/>
-              </a:lnSpc>
-              <a:spcBef>
-                <a:spcPts val="0"/>
-              </a:spcBef>
-              <a:spcAft>
-                <a:spcPts val="0"/>
-              </a:spcAft>
-            </a:pPr>
-            <a:r>
-              <a:rPr sz="800" b="0">
-                <a:solidFill>
-                  <a:srgbClr val="123C5B"/>
-                </a:solidFill>
-                <a:latin typeface="Microsoft YaHei"/>
-                <a:ea typeface="Microsoft YaHei"/>
-                <a:cs typeface="Microsoft YaHei"/>
-              </a:rPr>
-              <a:t>M100 物理卡</a:t>
-            </a:r>
-          </a:p>
-        </p:txBody>
-      </p:sp>
-      <p:sp>
-        <p:nvSpPr>
-          <p:cNvPr id="116" name="Can 115"/>
-          <p:cNvSpPr/>
-          <p:nvPr/>
-        </p:nvSpPr>
-        <p:spPr>
-          <a:xfrm>
-            <a:off x="9875520" y="3621024"/>
-            <a:ext cx="1767535" cy="1847088"/>
-          </a:xfrm>
-          <a:prstGeom prst="can">
-            <a:avLst>
-              <a:gd name="adj" fmla="val 10346"/>
-            </a:avLst>
-          </a:prstGeom>
-          <a:solidFill>
-            <a:srgbClr val="FFFFFF"/>
-          </a:solidFill>
-          <a:ln w="12700">
-            <a:solidFill>
-              <a:srgbClr val="40708B"/>
-            </a:solidFill>
-          </a:ln>
-        </p:spPr>
-        <p:txBody>
-          <a:bodyPr rtlCol="0" anchor="ctr"/>
-          <a:lstStyle/>
-          <a:p>
-            <a:pPr algn="ctr"/>
-          </a:p>
-        </p:txBody>
-      </p:sp>
-      <p:sp>
-        <p:nvSpPr>
-          <p:cNvPr id="117" name="TextBox 116"/>
-          <p:cNvSpPr txBox="1"/>
-          <p:nvPr/>
-        </p:nvSpPr>
-        <p:spPr>
-          <a:xfrm>
-            <a:off x="10003536" y="3840480"/>
-            <a:ext cx="1511503" cy="237744"/>
-          </a:xfrm>
-          <a:prstGeom prst="rect">
-            <a:avLst/>
-          </a:prstGeom>
-          <a:noFill/>
-        </p:spPr>
-        <p:txBody>
-          <a:bodyPr wrap="square" anchor="ctr" lIns="0" tIns="0" rIns="0" bIns="0">
-            <a:noAutofit/>
-          </a:bodyPr>
-          <a:lstStyle/>
-          <a:p>
-            <a:pPr algn="l" latinLnBrk="0">
-              <a:lnSpc>
-                <a:spcPct val="100000"/>
-              </a:lnSpc>
-              <a:spcBef>
-                <a:spcPts val="0"/>
-              </a:spcBef>
-              <a:spcAft>
-                <a:spcPts val="0"/>
-              </a:spcAft>
-            </a:pPr>
-            <a:r>
-              <a:rPr sz="1050" b="1">
-                <a:solidFill>
-                  <a:srgbClr val="0A2B45"/>
-                </a:solidFill>
-                <a:latin typeface="Microsoft YaHei"/>
-                <a:ea typeface="Microsoft YaHei"/>
-                <a:cs typeface="Microsoft YaHei"/>
-              </a:rPr>
-              <a:t>证据产物库</a:t>
-            </a:r>
-            <a:r>
-              <a:rPr sz="700" b="0">
-                <a:solidFill>
-                  <a:srgbClr val="40708B"/>
-                </a:solidFill>
-                <a:latin typeface="Microsoft YaHei"/>
-                <a:ea typeface="Microsoft YaHei"/>
-                <a:cs typeface="Microsoft YaHei"/>
-              </a:rPr>
-              <a:t>　«datastore»</a:t>
-            </a:r>
-          </a:p>
-        </p:txBody>
-      </p:sp>
-      <p:sp>
-        <p:nvSpPr>
-          <p:cNvPr id="118" name="TextBox 117"/>
-          <p:cNvSpPr txBox="1"/>
-          <p:nvPr/>
-        </p:nvSpPr>
-        <p:spPr>
-          <a:xfrm>
-            <a:off x="10003536" y="4169664"/>
-            <a:ext cx="1511503" cy="228600"/>
-          </a:xfrm>
-          <a:prstGeom prst="rect">
-            <a:avLst/>
-          </a:prstGeom>
-          <a:noFill/>
-        </p:spPr>
-        <p:txBody>
-          <a:bodyPr wrap="square" anchor="ctr" lIns="0" tIns="0" rIns="0" bIns="0">
-            <a:noAutofit/>
-          </a:bodyPr>
-          <a:lstStyle/>
-          <a:p>
-            <a:pPr algn="l" latinLnBrk="0">
-              <a:lnSpc>
-                <a:spcPct val="100000"/>
-              </a:lnSpc>
-              <a:spcBef>
-                <a:spcPts val="0"/>
-              </a:spcBef>
-              <a:spcAft>
-                <a:spcPts val="0"/>
-              </a:spcAft>
-            </a:pPr>
-            <a:r>
-              <a:rPr sz="750" b="1">
-                <a:solidFill>
-                  <a:srgbClr val="0F62CE"/>
-                </a:solidFill>
-                <a:latin typeface="Consolas"/>
-                <a:ea typeface="Microsoft YaHei"/>
-                <a:cs typeface="Microsoft YaHei"/>
-              </a:rPr>
-              <a:t>attempts/</a:t>
-            </a:r>
-            <a:r>
-              <a:rPr sz="800" b="0">
-                <a:solidFill>
-                  <a:srgbClr val="1B4D69"/>
-                </a:solidFill>
-                <a:latin typeface="Microsoft YaHei"/>
-                <a:ea typeface="Microsoft YaHei"/>
-                <a:cs typeface="Microsoft YaHei"/>
-              </a:rPr>
-              <a:t>　35 次 trial</a:t>
-            </a:r>
-          </a:p>
-        </p:txBody>
-      </p:sp>
-      <p:sp>
-        <p:nvSpPr>
-          <p:cNvPr id="119" name="TextBox 118"/>
-          <p:cNvSpPr txBox="1"/>
-          <p:nvPr/>
-        </p:nvSpPr>
-        <p:spPr>
-          <a:xfrm>
-            <a:off x="10003536" y="4398264"/>
-            <a:ext cx="1511503" cy="228600"/>
-          </a:xfrm>
-          <a:prstGeom prst="rect">
-            <a:avLst/>
-          </a:prstGeom>
-          <a:noFill/>
-        </p:spPr>
-        <p:txBody>
-          <a:bodyPr wrap="square" anchor="ctr" lIns="0" tIns="0" rIns="0" bIns="0">
-            <a:noAutofit/>
-          </a:bodyPr>
-          <a:lstStyle/>
-          <a:p>
-            <a:pPr algn="l" latinLnBrk="0">
-              <a:lnSpc>
-                <a:spcPct val="100000"/>
-              </a:lnSpc>
-              <a:spcBef>
-                <a:spcPts val="0"/>
-              </a:spcBef>
-              <a:spcAft>
-                <a:spcPts val="0"/>
-              </a:spcAft>
-            </a:pPr>
-            <a:r>
-              <a:rPr sz="750" b="1">
-                <a:solidFill>
-                  <a:srgbClr val="0F62CE"/>
-                </a:solidFill>
-                <a:latin typeface="Consolas"/>
-                <a:ea typeface="Microsoft YaHei"/>
-                <a:cs typeface="Microsoft YaHei"/>
-              </a:rPr>
-              <a:t>planner/</a:t>
-            </a:r>
-            <a:r>
-              <a:rPr sz="800" b="0">
-                <a:solidFill>
-                  <a:srgbClr val="1B4D69"/>
-                </a:solidFill>
-                <a:latin typeface="Microsoft YaHei"/>
-                <a:ea typeface="Microsoft YaHei"/>
-                <a:cs typeface="Microsoft YaHei"/>
-              </a:rPr>
-              <a:t>　往来全量报文</a:t>
-            </a:r>
-          </a:p>
-        </p:txBody>
-      </p:sp>
-      <p:sp>
-        <p:nvSpPr>
-          <p:cNvPr id="120" name="TextBox 119"/>
-          <p:cNvSpPr txBox="1"/>
-          <p:nvPr/>
-        </p:nvSpPr>
-        <p:spPr>
-          <a:xfrm>
-            <a:off x="10003536" y="4626864"/>
-            <a:ext cx="1511503" cy="228600"/>
-          </a:xfrm>
-          <a:prstGeom prst="rect">
-            <a:avLst/>
-          </a:prstGeom>
-          <a:noFill/>
-        </p:spPr>
-        <p:txBody>
-          <a:bodyPr wrap="square" anchor="ctr" lIns="0" tIns="0" rIns="0" bIns="0">
-            <a:noAutofit/>
-          </a:bodyPr>
-          <a:lstStyle/>
-          <a:p>
-            <a:pPr algn="l" latinLnBrk="0">
-              <a:lnSpc>
-                <a:spcPct val="100000"/>
-              </a:lnSpc>
-              <a:spcBef>
-                <a:spcPts val="0"/>
-              </a:spcBef>
-              <a:spcAft>
-                <a:spcPts val="0"/>
-              </a:spcAft>
-            </a:pPr>
-            <a:r>
-              <a:rPr sz="750" b="1">
-                <a:solidFill>
-                  <a:srgbClr val="0F62CE"/>
-                </a:solidFill>
-                <a:latin typeface="Consolas"/>
-                <a:ea typeface="Microsoft YaHei"/>
-                <a:cs typeface="Microsoft YaHei"/>
-              </a:rPr>
-              <a:t>probes/</a:t>
-            </a:r>
-            <a:r>
-              <a:rPr sz="800" b="0">
-                <a:solidFill>
-                  <a:srgbClr val="1B4D69"/>
-                </a:solidFill>
-                <a:latin typeface="Microsoft YaHei"/>
-                <a:ea typeface="Microsoft YaHei"/>
-                <a:cs typeface="Microsoft YaHei"/>
-              </a:rPr>
-              <a:t>　≤ 64 KiB 诊断</a:t>
-            </a:r>
-          </a:p>
-        </p:txBody>
-      </p:sp>
-      <p:sp>
-        <p:nvSpPr>
-          <p:cNvPr id="121" name="TextBox 120"/>
-          <p:cNvSpPr txBox="1"/>
-          <p:nvPr/>
-        </p:nvSpPr>
-        <p:spPr>
-          <a:xfrm>
-            <a:off x="10003536" y="4855464"/>
-            <a:ext cx="1511503" cy="228600"/>
-          </a:xfrm>
-          <a:prstGeom prst="rect">
-            <a:avLst/>
-          </a:prstGeom>
-          <a:noFill/>
-        </p:spPr>
-        <p:txBody>
-          <a:bodyPr wrap="square" anchor="ctr" lIns="0" tIns="0" rIns="0" bIns="0">
-            <a:noAutofit/>
-          </a:bodyPr>
-          <a:lstStyle/>
-          <a:p>
-            <a:pPr algn="l" latinLnBrk="0">
-              <a:lnSpc>
-                <a:spcPct val="100000"/>
-              </a:lnSpc>
-              <a:spcBef>
-                <a:spcPts val="0"/>
-              </a:spcBef>
-              <a:spcAft>
-                <a:spcPts val="0"/>
-              </a:spcAft>
-            </a:pPr>
-            <a:r>
-              <a:rPr sz="750" b="1">
-                <a:solidFill>
-                  <a:srgbClr val="0F62CE"/>
-                </a:solidFill>
-                <a:latin typeface="Consolas"/>
-                <a:ea typeface="Microsoft YaHei"/>
-                <a:cs typeface="Microsoft YaHei"/>
-              </a:rPr>
-              <a:t>backup/</a:t>
-            </a:r>
-            <a:r>
-              <a:rPr sz="800" b="0">
-                <a:solidFill>
-                  <a:srgbClr val="1B4D69"/>
-                </a:solidFill>
-                <a:latin typeface="Microsoft YaHei"/>
-                <a:ea typeface="Microsoft YaHei"/>
-                <a:cs typeface="Microsoft YaHei"/>
-              </a:rPr>
-              <a:t>　冻结快照 + SHA</a:t>
-            </a:r>
-          </a:p>
-        </p:txBody>
-      </p:sp>
-      <p:sp>
-        <p:nvSpPr>
-          <p:cNvPr id="122" name="TextBox 121"/>
-          <p:cNvSpPr txBox="1"/>
-          <p:nvPr/>
-        </p:nvSpPr>
-        <p:spPr>
-          <a:xfrm>
-            <a:off x="10003536" y="5084064"/>
-            <a:ext cx="1511503" cy="228600"/>
-          </a:xfrm>
-          <a:prstGeom prst="rect">
-            <a:avLst/>
-          </a:prstGeom>
-          <a:noFill/>
-        </p:spPr>
-        <p:txBody>
-          <a:bodyPr wrap="square" anchor="ctr" lIns="0" tIns="0" rIns="0" bIns="0">
-            <a:noAutofit/>
-          </a:bodyPr>
-          <a:lstStyle/>
-          <a:p>
-            <a:pPr algn="l" latinLnBrk="0">
-              <a:lnSpc>
-                <a:spcPct val="100000"/>
-              </a:lnSpc>
-              <a:spcBef>
-                <a:spcPts val="0"/>
-              </a:spcBef>
-              <a:spcAft>
-                <a:spcPts val="0"/>
-              </a:spcAft>
-            </a:pPr>
-            <a:r>
-              <a:rPr sz="750" b="1">
-                <a:solidFill>
-                  <a:srgbClr val="0F62CE"/>
-                </a:solidFill>
-                <a:latin typeface="Consolas"/>
-                <a:ea typeface="Microsoft YaHei"/>
-                <a:cs typeface="Microsoft YaHei"/>
-              </a:rPr>
-              <a:t>events.jsonl</a:t>
-            </a:r>
-            <a:r>
-              <a:rPr sz="800" b="0">
-                <a:solidFill>
-                  <a:srgbClr val="1B4D69"/>
-                </a:solidFill>
-                <a:latin typeface="Microsoft YaHei"/>
-                <a:ea typeface="Microsoft YaHei"/>
-                <a:cs typeface="Microsoft YaHei"/>
-              </a:rPr>
-              <a:t>　追加写事件流</a:t>
-            </a:r>
-          </a:p>
-        </p:txBody>
-      </p:sp>
-      <p:sp>
-        <p:nvSpPr>
-          <p:cNvPr id="123" name="Freeform 122"/>
-          <p:cNvSpPr/>
-          <p:nvPr/>
-        </p:nvSpPr>
-        <p:spPr>
-          <a:xfrm>
-            <a:off x="2651760" y="2450592"/>
-            <a:ext cx="1042416" cy="475488"/>
+            <a:off x="1847088" y="5175504"/>
+            <a:ext cx="8326983" cy="530352"/>
           </a:xfrm>
           <a:custGeom>
             <a:avLst/>
@@ -35548,307 +32971,23 @@
             <a:cxnLst/>
             <a:rect l="l" t="t" r="r" b="b"/>
             <a:pathLst>
-              <a:path w="1042416" h="475488">
+              <a:path w="8326983" h="530352">
                 <a:moveTo>
-                  <a:pt x="0" y="0"/>
+                  <a:pt x="8326983" y="128016"/>
                 </a:moveTo>
                 <a:lnTo>
-                  <a:pt x="384048" y="0"/>
+                  <a:pt x="8326983" y="530352"/>
                 </a:lnTo>
                 <a:lnTo>
-                  <a:pt x="384048" y="475488"/>
+                  <a:pt x="0" y="530352"/>
                 </a:lnTo>
                 <a:lnTo>
-                  <a:pt x="1042416" y="475488"/>
+                  <a:pt x="0" y="0"/>
                 </a:lnTo>
               </a:path>
             </a:pathLst>
           </a:custGeom>
           <a:noFill/>
-          <a:ln w="19050">
-            <a:solidFill>
-              <a:srgbClr val="40708B"/>
-            </a:solidFill>
-            <a:tailEnd type="triangle" w="med" len="med"/>
-          </a:ln>
-        </p:spPr>
-        <p:txBody>
-          <a:bodyPr rtlCol="0" anchor="ctr"/>
-          <a:lstStyle/>
-          <a:p>
-            <a:pPr algn="ctr"/>
-          </a:p>
-        </p:txBody>
-      </p:sp>
-      <p:sp>
-        <p:nvSpPr>
-          <p:cNvPr id="124" name="Freeform 123"/>
-          <p:cNvSpPr/>
-          <p:nvPr/>
-        </p:nvSpPr>
-        <p:spPr>
-          <a:xfrm>
-            <a:off x="2660903" y="3127248"/>
-            <a:ext cx="1033273" cy="548639"/>
-          </a:xfrm>
-          <a:custGeom>
-            <a:avLst/>
-            <a:gdLst/>
-            <a:ahLst/>
-            <a:cxnLst/>
-            <a:rect l="l" t="t" r="r" b="b"/>
-            <a:pathLst>
-              <a:path w="1033273" h="548639">
-                <a:moveTo>
-                  <a:pt x="1033273" y="0"/>
-                </a:moveTo>
-                <a:lnTo>
-                  <a:pt x="374905" y="0"/>
-                </a:lnTo>
-                <a:lnTo>
-                  <a:pt x="374905" y="548639"/>
-                </a:lnTo>
-                <a:lnTo>
-                  <a:pt x="0" y="548639"/>
-                </a:lnTo>
-              </a:path>
-            </a:pathLst>
-          </a:custGeom>
-          <a:noFill/>
-          <a:ln w="19050">
-            <a:solidFill>
-              <a:srgbClr val="40708B"/>
-            </a:solidFill>
-            <a:tailEnd type="triangle" w="med" len="med"/>
-          </a:ln>
-        </p:spPr>
-        <p:txBody>
-          <a:bodyPr rtlCol="0" anchor="ctr"/>
-          <a:lstStyle/>
-          <a:p>
-            <a:pPr algn="ctr"/>
-          </a:p>
-        </p:txBody>
-      </p:sp>
-      <p:cxnSp>
-        <p:nvCxnSpPr>
-          <p:cNvPr id="125" name="Connector 124"/>
-          <p:cNvCxnSpPr/>
-          <p:nvPr/>
-        </p:nvCxnSpPr>
-        <p:spPr>
-          <a:xfrm>
-            <a:off x="2660903" y="5056632"/>
-            <a:ext cx="850393" cy="0"/>
-          </a:xfrm>
-          <a:prstGeom prst="line">
-            <a:avLst/>
-          </a:prstGeom>
-          <a:ln w="19050">
-            <a:solidFill>
-              <a:srgbClr val="D2690C"/>
-            </a:solidFill>
-            <a:headEnd type="triangle" w="med" len="med"/>
-            <a:tailEnd type="triangle" w="med" len="med"/>
-          </a:ln>
-        </p:spPr>
-      </p:cxnSp>
-      <p:cxnSp>
-        <p:nvCxnSpPr>
-          <p:cNvPr id="126" name="Connector 125"/>
-          <p:cNvCxnSpPr/>
-          <p:nvPr/>
-        </p:nvCxnSpPr>
-        <p:spPr>
-          <a:xfrm>
-            <a:off x="5989320" y="4215383"/>
-            <a:ext cx="0" cy="411481"/>
-          </a:xfrm>
-          <a:prstGeom prst="line">
-            <a:avLst/>
-          </a:prstGeom>
-          <a:ln w="19050">
-            <a:solidFill>
-              <a:srgbClr val="D2690C"/>
-            </a:solidFill>
-            <a:tailEnd type="triangle" w="med" len="med"/>
-          </a:ln>
-        </p:spPr>
-      </p:cxnSp>
-      <p:cxnSp>
-        <p:nvCxnSpPr>
-          <p:cNvPr id="127" name="Connector 126"/>
-          <p:cNvCxnSpPr/>
-          <p:nvPr/>
-        </p:nvCxnSpPr>
-        <p:spPr>
-          <a:xfrm flipV="1">
-            <a:off x="6537960" y="4215383"/>
-            <a:ext cx="0" cy="457201"/>
-          </a:xfrm>
-          <a:prstGeom prst="line">
-            <a:avLst/>
-          </a:prstGeom>
-          <a:ln w="19050">
-            <a:solidFill>
-              <a:srgbClr val="D2690C"/>
-            </a:solidFill>
-            <a:tailEnd type="triangle" w="med" len="med"/>
-          </a:ln>
-        </p:spPr>
-      </p:cxnSp>
-      <p:sp>
-        <p:nvSpPr>
-          <p:cNvPr id="128" name="TextBox 127"/>
-          <p:cNvSpPr txBox="1"/>
-          <p:nvPr/>
-        </p:nvSpPr>
-        <p:spPr>
-          <a:xfrm>
-            <a:off x="4645152" y="4315968"/>
-            <a:ext cx="1280160" cy="365760"/>
-          </a:xfrm>
-          <a:prstGeom prst="rect">
-            <a:avLst/>
-          </a:prstGeom>
-          <a:noFill/>
-        </p:spPr>
-        <p:txBody>
-          <a:bodyPr wrap="square" anchor="ctr" lIns="0" tIns="0" rIns="0" bIns="0">
-            <a:noAutofit/>
-          </a:bodyPr>
-          <a:lstStyle/>
-          <a:p>
-            <a:pPr algn="r" latinLnBrk="0">
-              <a:lnSpc>
-                <a:spcPct val="100000"/>
-              </a:lnSpc>
-              <a:spcBef>
-                <a:spcPts val="0"/>
-              </a:spcBef>
-              <a:spcAft>
-                <a:spcPts val="0"/>
-              </a:spcAft>
-            </a:pPr>
-            <a:r>
-              <a:rPr sz="750" b="1">
-                <a:solidFill>
-                  <a:srgbClr val="C2570A"/>
-                </a:solidFill>
-                <a:latin typeface="Microsoft YaHei"/>
-                <a:ea typeface="Microsoft YaHei"/>
-                <a:cs typeface="Microsoft YaHei"/>
-              </a:rPr>
-              <a:t>请求 ≤ 28 KB</a:t>
-            </a:r>
-          </a:p>
-        </p:txBody>
-      </p:sp>
-      <p:sp>
-        <p:nvSpPr>
-          <p:cNvPr id="129" name="TextBox 128"/>
-          <p:cNvSpPr txBox="1"/>
-          <p:nvPr/>
-        </p:nvSpPr>
-        <p:spPr>
-          <a:xfrm>
-            <a:off x="6601968" y="4315968"/>
-            <a:ext cx="1280160" cy="365760"/>
-          </a:xfrm>
-          <a:prstGeom prst="rect">
-            <a:avLst/>
-          </a:prstGeom>
-          <a:noFill/>
-        </p:spPr>
-        <p:txBody>
-          <a:bodyPr wrap="square" anchor="ctr" lIns="0" tIns="0" rIns="0" bIns="0">
-            <a:noAutofit/>
-          </a:bodyPr>
-          <a:lstStyle/>
-          <a:p>
-            <a:pPr algn="l" latinLnBrk="0">
-              <a:lnSpc>
-                <a:spcPct val="100000"/>
-              </a:lnSpc>
-              <a:spcBef>
-                <a:spcPts val="0"/>
-              </a:spcBef>
-              <a:spcAft>
-                <a:spcPts val="0"/>
-              </a:spcAft>
-            </a:pPr>
-            <a:r>
-              <a:rPr sz="750" b="1">
-                <a:solidFill>
-                  <a:srgbClr val="C2570A"/>
-                </a:solidFill>
-                <a:latin typeface="Microsoft YaHei"/>
-                <a:ea typeface="Microsoft YaHei"/>
-                <a:cs typeface="Microsoft YaHei"/>
-              </a:rPr>
-              <a:t>提案 + 证据引用</a:t>
-            </a:r>
-          </a:p>
-        </p:txBody>
-      </p:sp>
-      <p:cxnSp>
-        <p:nvCxnSpPr>
-          <p:cNvPr id="130" name="Connector 129"/>
-          <p:cNvCxnSpPr/>
-          <p:nvPr/>
-        </p:nvCxnSpPr>
-        <p:spPr>
-          <a:xfrm>
-            <a:off x="8833104" y="2276856"/>
-            <a:ext cx="1033272" cy="0"/>
-          </a:xfrm>
-          <a:prstGeom prst="line">
-            <a:avLst/>
-          </a:prstGeom>
-          <a:ln w="19050">
-            <a:solidFill>
-              <a:srgbClr val="0F62CE"/>
-            </a:solidFill>
-            <a:tailEnd type="triangle" w="med" len="med"/>
-          </a:ln>
-        </p:spPr>
-      </p:cxnSp>
-      <p:cxnSp>
-        <p:nvCxnSpPr>
-          <p:cNvPr id="131" name="Connector 130"/>
-          <p:cNvCxnSpPr/>
-          <p:nvPr/>
-        </p:nvCxnSpPr>
-        <p:spPr>
-          <a:xfrm flipH="1">
-            <a:off x="8833104" y="3026664"/>
-            <a:ext cx="1033272" cy="0"/>
-          </a:xfrm>
-          <a:prstGeom prst="line">
-            <a:avLst/>
-          </a:prstGeom>
-          <a:ln w="19050">
-            <a:solidFill>
-              <a:srgbClr val="0F62CE"/>
-            </a:solidFill>
-            <a:tailEnd type="triangle" w="med" len="med"/>
-          </a:ln>
-        </p:spPr>
-      </p:cxnSp>
-      <p:cxnSp>
-        <p:nvCxnSpPr>
-          <p:cNvPr id="132" name="Connector 131"/>
-          <p:cNvCxnSpPr/>
-          <p:nvPr/>
-        </p:nvCxnSpPr>
-        <p:spPr>
-          <a:xfrm flipH="1">
-            <a:off x="8833104" y="3867911"/>
-            <a:ext cx="1033272" cy="0"/>
-          </a:xfrm>
-          <a:prstGeom prst="line">
-            <a:avLst/>
-          </a:prstGeom>
           <a:ln w="15875">
             <a:solidFill>
               <a:srgbClr val="40708B"/>
@@ -35856,396 +32995,24 @@
             <a:tailEnd type="triangle" w="med" len="med"/>
           </a:ln>
         </p:spPr>
-      </p:cxnSp>
-      <p:cxnSp>
-        <p:nvCxnSpPr>
-          <p:cNvPr id="133" name="Connector 132"/>
-          <p:cNvCxnSpPr/>
-          <p:nvPr/>
-        </p:nvCxnSpPr>
-        <p:spPr>
-          <a:xfrm>
-            <a:off x="10704423" y="3319272"/>
-            <a:ext cx="0" cy="292608"/>
-          </a:xfrm>
-          <a:prstGeom prst="line">
-            <a:avLst/>
-          </a:prstGeom>
-          <a:ln w="19050">
-            <a:solidFill>
-              <a:srgbClr val="0F62CE"/>
-            </a:solidFill>
-            <a:tailEnd type="triangle" w="med" len="med"/>
-          </a:ln>
-        </p:spPr>
-      </p:cxnSp>
-      <p:sp>
-        <p:nvSpPr>
-          <p:cNvPr id="134" name="TextBox 133"/>
-          <p:cNvSpPr txBox="1"/>
-          <p:nvPr/>
-        </p:nvSpPr>
-        <p:spPr>
-          <a:xfrm>
-            <a:off x="10795863" y="3310128"/>
-            <a:ext cx="822960" cy="310895"/>
-          </a:xfrm>
-          <a:prstGeom prst="rect">
-            <a:avLst/>
-          </a:prstGeom>
-          <a:noFill/>
-        </p:spPr>
-        <p:txBody>
-          <a:bodyPr wrap="square" anchor="ctr" lIns="0" tIns="0" rIns="0" bIns="0">
-            <a:noAutofit/>
-          </a:bodyPr>
-          <a:lstStyle/>
-          <a:p>
-            <a:pPr algn="l" latinLnBrk="0">
-              <a:lnSpc>
-                <a:spcPct val="100000"/>
-              </a:lnSpc>
-              <a:spcBef>
-                <a:spcPts val="0"/>
-              </a:spcBef>
-              <a:spcAft>
-                <a:spcPts val="0"/>
-              </a:spcAft>
-            </a:pPr>
-            <a:r>
-              <a:rPr sz="750" b="1">
-                <a:solidFill>
-                  <a:srgbClr val="0F62CE"/>
-                </a:solidFill>
-                <a:latin typeface="Microsoft YaHei"/>
-                <a:ea typeface="Microsoft YaHei"/>
-                <a:cs typeface="Microsoft YaHei"/>
-              </a:rPr>
-              <a:t>结果落盘</a:t>
-            </a:r>
-          </a:p>
-        </p:txBody>
-      </p:sp>
-      <p:sp>
-        <p:nvSpPr>
-          <p:cNvPr id="135" name="Rectangle 134"/>
+        <p:txBody>
+          <a:bodyPr rtlCol="0" anchor="ctr"/>
+          <a:lstStyle/>
+          <a:p>
+            <a:pPr algn="ctr"/>
+          </a:p>
+        </p:txBody>
+      </p:sp>
+      <p:sp>
+        <p:nvSpPr>
+          <p:cNvPr id="52" name="Rounded Rectangle 51"/>
           <p:cNvSpPr/>
           <p:nvPr/>
         </p:nvSpPr>
         <p:spPr>
           <a:xfrm>
-            <a:off x="3520440" y="2880360"/>
-            <a:ext cx="91440" cy="91440"/>
-          </a:xfrm>
-          <a:prstGeom prst="rect">
-            <a:avLst/>
-          </a:prstGeom>
-          <a:solidFill>
-            <a:srgbClr val="FFFFFF"/>
-          </a:solidFill>
-          <a:ln w="12700">
-            <a:solidFill>
-              <a:srgbClr val="40708B"/>
-            </a:solidFill>
-          </a:ln>
-        </p:spPr>
-        <p:txBody>
-          <a:bodyPr rtlCol="0" anchor="ctr"/>
-          <a:lstStyle/>
-          <a:p>
-            <a:pPr algn="ctr"/>
-          </a:p>
-        </p:txBody>
-      </p:sp>
-      <p:sp>
-        <p:nvSpPr>
-          <p:cNvPr id="136" name="Rectangle 135"/>
-          <p:cNvSpPr/>
-          <p:nvPr/>
-        </p:nvSpPr>
-        <p:spPr>
-          <a:xfrm>
-            <a:off x="3520440" y="3081528"/>
-            <a:ext cx="91440" cy="91440"/>
-          </a:xfrm>
-          <a:prstGeom prst="rect">
-            <a:avLst/>
-          </a:prstGeom>
-          <a:solidFill>
-            <a:srgbClr val="FFFFFF"/>
-          </a:solidFill>
-          <a:ln w="12700">
-            <a:solidFill>
-              <a:srgbClr val="40708B"/>
-            </a:solidFill>
-          </a:ln>
-        </p:spPr>
-        <p:txBody>
-          <a:bodyPr rtlCol="0" anchor="ctr"/>
-          <a:lstStyle/>
-          <a:p>
-            <a:pPr algn="ctr"/>
-          </a:p>
-        </p:txBody>
-      </p:sp>
-      <p:sp>
-        <p:nvSpPr>
-          <p:cNvPr id="137" name="Rectangle 136"/>
-          <p:cNvSpPr/>
-          <p:nvPr/>
-        </p:nvSpPr>
-        <p:spPr>
-          <a:xfrm>
-            <a:off x="3520440" y="5010912"/>
-            <a:ext cx="91440" cy="91440"/>
-          </a:xfrm>
-          <a:prstGeom prst="rect">
-            <a:avLst/>
-          </a:prstGeom>
-          <a:solidFill>
-            <a:srgbClr val="FFFFFF"/>
-          </a:solidFill>
-          <a:ln w="12700">
-            <a:solidFill>
-              <a:srgbClr val="D2690C"/>
-            </a:solidFill>
-          </a:ln>
-        </p:spPr>
-        <p:txBody>
-          <a:bodyPr rtlCol="0" anchor="ctr"/>
-          <a:lstStyle/>
-          <a:p>
-            <a:pPr algn="ctr"/>
-          </a:p>
-        </p:txBody>
-      </p:sp>
-      <p:sp>
-        <p:nvSpPr>
-          <p:cNvPr id="138" name="Rectangle 137"/>
-          <p:cNvSpPr/>
-          <p:nvPr/>
-        </p:nvSpPr>
-        <p:spPr>
-          <a:xfrm>
-            <a:off x="8915400" y="2231136"/>
-            <a:ext cx="91440" cy="91440"/>
-          </a:xfrm>
-          <a:prstGeom prst="rect">
-            <a:avLst/>
-          </a:prstGeom>
-          <a:solidFill>
-            <a:srgbClr val="FFFFFF"/>
-          </a:solidFill>
-          <a:ln w="12700">
-            <a:solidFill>
-              <a:srgbClr val="0F62CE"/>
-            </a:solidFill>
-          </a:ln>
-        </p:spPr>
-        <p:txBody>
-          <a:bodyPr rtlCol="0" anchor="ctr"/>
-          <a:lstStyle/>
-          <a:p>
-            <a:pPr algn="ctr"/>
-          </a:p>
-        </p:txBody>
-      </p:sp>
-      <p:sp>
-        <p:nvSpPr>
-          <p:cNvPr id="139" name="Rectangle 138"/>
-          <p:cNvSpPr/>
-          <p:nvPr/>
-        </p:nvSpPr>
-        <p:spPr>
-          <a:xfrm>
-            <a:off x="8915400" y="2980944"/>
-            <a:ext cx="91440" cy="91440"/>
-          </a:xfrm>
-          <a:prstGeom prst="rect">
-            <a:avLst/>
-          </a:prstGeom>
-          <a:solidFill>
-            <a:srgbClr val="FFFFFF"/>
-          </a:solidFill>
-          <a:ln w="12700">
-            <a:solidFill>
-              <a:srgbClr val="0F62CE"/>
-            </a:solidFill>
-          </a:ln>
-        </p:spPr>
-        <p:txBody>
-          <a:bodyPr rtlCol="0" anchor="ctr"/>
-          <a:lstStyle/>
-          <a:p>
-            <a:pPr algn="ctr"/>
-          </a:p>
-        </p:txBody>
-      </p:sp>
-      <p:sp>
-        <p:nvSpPr>
-          <p:cNvPr id="140" name="Rectangle 139"/>
-          <p:cNvSpPr/>
-          <p:nvPr/>
-        </p:nvSpPr>
-        <p:spPr>
-          <a:xfrm>
-            <a:off x="8915400" y="3822191"/>
-            <a:ext cx="91440" cy="91440"/>
-          </a:xfrm>
-          <a:prstGeom prst="rect">
-            <a:avLst/>
-          </a:prstGeom>
-          <a:solidFill>
-            <a:srgbClr val="FFFFFF"/>
-          </a:solidFill>
-          <a:ln w="12700">
-            <a:solidFill>
-              <a:srgbClr val="40708B"/>
-            </a:solidFill>
-          </a:ln>
-        </p:spPr>
-        <p:txBody>
-          <a:bodyPr rtlCol="0" anchor="ctr"/>
-          <a:lstStyle/>
-          <a:p>
-            <a:pPr algn="ctr"/>
-          </a:p>
-        </p:txBody>
-      </p:sp>
-      <p:sp>
-        <p:nvSpPr>
-          <p:cNvPr id="141" name="Rectangle 140"/>
-          <p:cNvSpPr/>
-          <p:nvPr/>
-        </p:nvSpPr>
-        <p:spPr>
-          <a:xfrm>
-            <a:off x="5943600" y="4270248"/>
-            <a:ext cx="91440" cy="91440"/>
-          </a:xfrm>
-          <a:prstGeom prst="rect">
-            <a:avLst/>
-          </a:prstGeom>
-          <a:solidFill>
-            <a:srgbClr val="FFFFFF"/>
-          </a:solidFill>
-          <a:ln w="12700">
-            <a:solidFill>
-              <a:srgbClr val="D2690C"/>
-            </a:solidFill>
-          </a:ln>
-        </p:spPr>
-        <p:txBody>
-          <a:bodyPr rtlCol="0" anchor="ctr"/>
-          <a:lstStyle/>
-          <a:p>
-            <a:pPr algn="ctr"/>
-          </a:p>
-        </p:txBody>
-      </p:sp>
-      <p:sp>
-        <p:nvSpPr>
-          <p:cNvPr id="142" name="Rectangle 141"/>
-          <p:cNvSpPr/>
-          <p:nvPr/>
-        </p:nvSpPr>
-        <p:spPr>
-          <a:xfrm>
-            <a:off x="6492240" y="4270248"/>
-            <a:ext cx="91440" cy="91440"/>
-          </a:xfrm>
-          <a:prstGeom prst="rect">
-            <a:avLst/>
-          </a:prstGeom>
-          <a:solidFill>
-            <a:srgbClr val="FFFFFF"/>
-          </a:solidFill>
-          <a:ln w="12700">
-            <a:solidFill>
-              <a:srgbClr val="D2690C"/>
-            </a:solidFill>
-          </a:ln>
-        </p:spPr>
-        <p:txBody>
-          <a:bodyPr rtlCol="0" anchor="ctr"/>
-          <a:lstStyle/>
-          <a:p>
-            <a:pPr algn="ctr"/>
-          </a:p>
-        </p:txBody>
-      </p:sp>
-      <p:sp>
-        <p:nvSpPr>
-          <p:cNvPr id="143" name="Rectangle 142"/>
-          <p:cNvSpPr/>
-          <p:nvPr/>
-        </p:nvSpPr>
-        <p:spPr>
-          <a:xfrm>
-            <a:off x="5943600" y="4636008"/>
-            <a:ext cx="91440" cy="91440"/>
-          </a:xfrm>
-          <a:prstGeom prst="rect">
-            <a:avLst/>
-          </a:prstGeom>
-          <a:solidFill>
-            <a:srgbClr val="FFFFFF"/>
-          </a:solidFill>
-          <a:ln w="12700">
-            <a:solidFill>
-              <a:srgbClr val="D2690C"/>
-            </a:solidFill>
-          </a:ln>
-        </p:spPr>
-        <p:txBody>
-          <a:bodyPr rtlCol="0" anchor="ctr"/>
-          <a:lstStyle/>
-          <a:p>
-            <a:pPr algn="ctr"/>
-          </a:p>
-        </p:txBody>
-      </p:sp>
-      <p:sp>
-        <p:nvSpPr>
-          <p:cNvPr id="144" name="Rectangle 143"/>
-          <p:cNvSpPr/>
-          <p:nvPr/>
-        </p:nvSpPr>
-        <p:spPr>
-          <a:xfrm>
-            <a:off x="6492240" y="4636008"/>
-            <a:ext cx="91440" cy="91440"/>
-          </a:xfrm>
-          <a:prstGeom prst="rect">
-            <a:avLst/>
-          </a:prstGeom>
-          <a:solidFill>
-            <a:srgbClr val="FFFFFF"/>
-          </a:solidFill>
-          <a:ln w="12700">
-            <a:solidFill>
-              <a:srgbClr val="D2690C"/>
-            </a:solidFill>
-          </a:ln>
-        </p:spPr>
-        <p:txBody>
-          <a:bodyPr rtlCol="0" anchor="ctr"/>
-          <a:lstStyle/>
-          <a:p>
-            <a:pPr algn="ctr"/>
-          </a:p>
-        </p:txBody>
-      </p:sp>
-      <p:sp>
-        <p:nvSpPr>
-          <p:cNvPr id="145" name="Rounded Rectangle 144"/>
-          <p:cNvSpPr/>
-          <p:nvPr/>
-        </p:nvSpPr>
-        <p:spPr>
-          <a:xfrm>
-            <a:off x="2679192" y="2587752"/>
-            <a:ext cx="713232" cy="201168"/>
+            <a:off x="4681727" y="5605272"/>
+            <a:ext cx="2560320" cy="201168"/>
           </a:xfrm>
           <a:prstGeom prst="roundRect">
             <a:avLst>
@@ -36279,7 +33046,7 @@
               </a:spcAft>
             </a:pPr>
             <a:r>
-              <a:rPr sz="750" b="1">
+              <a:rPr sz="800" b="1">
                 <a:solidFill>
                   <a:srgbClr val="40708B"/>
                 </a:solidFill>
@@ -36287,294 +33054,14 @@
                 <a:ea typeface="Microsoft YaHei"/>
                 <a:cs typeface="Microsoft YaHei"/>
               </a:rPr>
-              <a:t>契约 · 授权</a:t>
-            </a:r>
-          </a:p>
-        </p:txBody>
-      </p:sp>
-      <p:sp>
-        <p:nvSpPr>
-          <p:cNvPr id="146" name="Rounded Rectangle 145"/>
-          <p:cNvSpPr/>
-          <p:nvPr/>
-        </p:nvSpPr>
-        <p:spPr>
-          <a:xfrm>
-            <a:off x="2679192" y="3300984"/>
-            <a:ext cx="713232" cy="201168"/>
-          </a:xfrm>
-          <a:prstGeom prst="roundRect">
-            <a:avLst>
-              <a:gd name="adj" fmla="val 50000"/>
-            </a:avLst>
-          </a:prstGeom>
-          <a:solidFill>
-            <a:srgbClr val="FFFFFF"/>
-          </a:solidFill>
-          <a:ln w="9525">
-            <a:solidFill>
-              <a:srgbClr val="40708B"/>
-            </a:solidFill>
-          </a:ln>
-        </p:spPr>
-        <p:txBody>
-          <a:bodyPr rtlCol="0" anchor="ctr" wrap="square" lIns="18288" tIns="0" rIns="18288" bIns="0">
-            <a:noAutofit/>
-          </a:bodyPr>
-          <a:lstStyle/>
-          <a:p>
-            <a:pPr algn="ctr" latinLnBrk="0">
-              <a:lnSpc>
-                <a:spcPct val="100000"/>
-              </a:lnSpc>
-              <a:spcBef>
-                <a:spcPts val="0"/>
-              </a:spcBef>
-              <a:spcAft>
-                <a:spcPts val="0"/>
-              </a:spcAft>
-            </a:pPr>
-            <a:r>
-              <a:rPr sz="750" b="1">
-                <a:solidFill>
-                  <a:srgbClr val="40708B"/>
-                </a:solidFill>
-                <a:latin typeface="Microsoft YaHei"/>
-                <a:ea typeface="Microsoft YaHei"/>
-                <a:cs typeface="Microsoft YaHei"/>
-              </a:rPr>
-              <a:t>报告 · 证据</a:t>
-            </a:r>
-          </a:p>
-        </p:txBody>
-      </p:sp>
-      <p:sp>
-        <p:nvSpPr>
-          <p:cNvPr id="147" name="Rounded Rectangle 146"/>
-          <p:cNvSpPr/>
-          <p:nvPr/>
-        </p:nvSpPr>
-        <p:spPr>
-          <a:xfrm>
-            <a:off x="2706624" y="4956048"/>
-            <a:ext cx="658368" cy="201168"/>
-          </a:xfrm>
-          <a:prstGeom prst="roundRect">
-            <a:avLst>
-              <a:gd name="adj" fmla="val 50000"/>
-            </a:avLst>
-          </a:prstGeom>
-          <a:solidFill>
-            <a:srgbClr val="FFFFFF"/>
-          </a:solidFill>
-          <a:ln w="9525">
-            <a:solidFill>
-              <a:srgbClr val="C2570A"/>
-            </a:solidFill>
-          </a:ln>
-        </p:spPr>
-        <p:txBody>
-          <a:bodyPr rtlCol="0" anchor="ctr" wrap="square" lIns="18288" tIns="0" rIns="18288" bIns="0">
-            <a:noAutofit/>
-          </a:bodyPr>
-          <a:lstStyle/>
-          <a:p>
-            <a:pPr algn="ctr" latinLnBrk="0">
-              <a:lnSpc>
-                <a:spcPct val="100000"/>
-              </a:lnSpc>
-              <a:spcBef>
-                <a:spcPts val="0"/>
-              </a:spcBef>
-              <a:spcAft>
-                <a:spcPts val="0"/>
-              </a:spcAft>
-            </a:pPr>
-            <a:r>
-              <a:rPr sz="750" b="1">
-                <a:solidFill>
-                  <a:srgbClr val="C2570A"/>
-                </a:solidFill>
-                <a:latin typeface="Microsoft YaHei"/>
-                <a:ea typeface="Microsoft YaHei"/>
-                <a:cs typeface="Microsoft YaHei"/>
-              </a:rPr>
-              <a:t>结对写补丁</a:t>
-            </a:r>
-          </a:p>
-        </p:txBody>
-      </p:sp>
-      <p:sp>
-        <p:nvSpPr>
-          <p:cNvPr id="148" name="Rounded Rectangle 147"/>
-          <p:cNvSpPr/>
-          <p:nvPr/>
-        </p:nvSpPr>
-        <p:spPr>
-          <a:xfrm>
-            <a:off x="9134856" y="2176272"/>
-            <a:ext cx="713232" cy="201168"/>
-          </a:xfrm>
-          <a:prstGeom prst="roundRect">
-            <a:avLst>
-              <a:gd name="adj" fmla="val 50000"/>
-            </a:avLst>
-          </a:prstGeom>
-          <a:solidFill>
-            <a:srgbClr val="FFFFFF"/>
-          </a:solidFill>
-          <a:ln w="9525">
-            <a:solidFill>
-              <a:srgbClr val="0F62CE"/>
-            </a:solidFill>
-          </a:ln>
-        </p:spPr>
-        <p:txBody>
-          <a:bodyPr rtlCol="0" anchor="ctr" wrap="square" lIns="18288" tIns="0" rIns="18288" bIns="0">
-            <a:noAutofit/>
-          </a:bodyPr>
-          <a:lstStyle/>
-          <a:p>
-            <a:pPr algn="ctr" latinLnBrk="0">
-              <a:lnSpc>
-                <a:spcPct val="100000"/>
-              </a:lnSpc>
-              <a:spcBef>
-                <a:spcPts val="0"/>
-              </a:spcBef>
-              <a:spcAft>
-                <a:spcPts val="0"/>
-              </a:spcAft>
-            </a:pPr>
-            <a:r>
-              <a:rPr sz="750" b="1">
-                <a:solidFill>
-                  <a:srgbClr val="0F62CE"/>
-                </a:solidFill>
-                <a:latin typeface="Microsoft YaHei"/>
-                <a:ea typeface="Microsoft YaHei"/>
-                <a:cs typeface="Microsoft YaHei"/>
-              </a:rPr>
-              <a:t>补丁 · 构建</a:t>
-            </a:r>
-          </a:p>
-        </p:txBody>
-      </p:sp>
-      <p:sp>
-        <p:nvSpPr>
-          <p:cNvPr id="149" name="Rounded Rectangle 148"/>
-          <p:cNvSpPr/>
-          <p:nvPr/>
-        </p:nvSpPr>
-        <p:spPr>
-          <a:xfrm>
-            <a:off x="9198864" y="2926080"/>
-            <a:ext cx="585216" cy="201168"/>
-          </a:xfrm>
-          <a:prstGeom prst="roundRect">
-            <a:avLst>
-              <a:gd name="adj" fmla="val 50000"/>
-            </a:avLst>
-          </a:prstGeom>
-          <a:solidFill>
-            <a:srgbClr val="FFFFFF"/>
-          </a:solidFill>
-          <a:ln w="9525">
-            <a:solidFill>
-              <a:srgbClr val="0F62CE"/>
-            </a:solidFill>
-          </a:ln>
-        </p:spPr>
-        <p:txBody>
-          <a:bodyPr rtlCol="0" anchor="ctr" wrap="square" lIns="18288" tIns="0" rIns="18288" bIns="0">
-            <a:noAutofit/>
-          </a:bodyPr>
-          <a:lstStyle/>
-          <a:p>
-            <a:pPr algn="ctr" latinLnBrk="0">
-              <a:lnSpc>
-                <a:spcPct val="100000"/>
-              </a:lnSpc>
-              <a:spcBef>
-                <a:spcPts val="0"/>
-              </a:spcBef>
-              <a:spcAft>
-                <a:spcPts val="0"/>
-              </a:spcAft>
-            </a:pPr>
-            <a:r>
-              <a:rPr sz="750" b="1">
-                <a:solidFill>
-                  <a:srgbClr val="0F62CE"/>
-                </a:solidFill>
-                <a:latin typeface="Microsoft YaHei"/>
-                <a:ea typeface="Microsoft YaHei"/>
-                <a:cs typeface="Microsoft YaHei"/>
-              </a:rPr>
-              <a:t>实测数据</a:t>
-            </a:r>
-          </a:p>
-        </p:txBody>
-      </p:sp>
-      <p:sp>
-        <p:nvSpPr>
-          <p:cNvPr id="150" name="Rounded Rectangle 149"/>
-          <p:cNvSpPr/>
-          <p:nvPr/>
-        </p:nvSpPr>
-        <p:spPr>
-          <a:xfrm>
-            <a:off x="9198864" y="3767327"/>
-            <a:ext cx="585216" cy="201168"/>
-          </a:xfrm>
-          <a:prstGeom prst="roundRect">
-            <a:avLst>
-              <a:gd name="adj" fmla="val 50000"/>
-            </a:avLst>
-          </a:prstGeom>
-          <a:solidFill>
-            <a:srgbClr val="FFFFFF"/>
-          </a:solidFill>
-          <a:ln w="9525">
-            <a:solidFill>
-              <a:srgbClr val="40708B"/>
-            </a:solidFill>
-          </a:ln>
-        </p:spPr>
-        <p:txBody>
-          <a:bodyPr rtlCol="0" anchor="ctr" wrap="square" lIns="18288" tIns="0" rIns="18288" bIns="0">
-            <a:noAutofit/>
-          </a:bodyPr>
-          <a:lstStyle/>
-          <a:p>
-            <a:pPr algn="ctr" latinLnBrk="0">
-              <a:lnSpc>
-                <a:spcPct val="100000"/>
-              </a:lnSpc>
-              <a:spcBef>
-                <a:spcPts val="0"/>
-              </a:spcBef>
-              <a:spcAft>
-                <a:spcPts val="0"/>
-              </a:spcAft>
-            </a:pPr>
-            <a:r>
-              <a:rPr sz="750" b="1">
-                <a:solidFill>
-                  <a:srgbClr val="40708B"/>
-                </a:solidFill>
-                <a:latin typeface="Microsoft YaHei"/>
-                <a:ea typeface="Microsoft YaHei"/>
-                <a:cs typeface="Microsoft YaHei"/>
-              </a:rPr>
-              <a:t>按需调取</a:t>
-            </a:r>
-          </a:p>
-        </p:txBody>
-      </p:sp>
-      <p:sp>
-        <p:nvSpPr>
-          <p:cNvPr id="151" name="Rectangle 150"/>
+              <a:t>回写：门禁判决 · 数值与质量偏差 · 实测耗时</a:t>
+            </a:r>
+          </a:p>
+        </p:txBody>
+      </p:sp>
+      <p:sp>
+        <p:nvSpPr>
+          <p:cNvPr id="53" name="Rectangle 52"/>
           <p:cNvSpPr/>
           <p:nvPr/>
         </p:nvSpPr>
@@ -36603,7 +33090,7 @@
       </p:sp>
       <p:sp>
         <p:nvSpPr>
-          <p:cNvPr id="152" name="Rectangle 151"/>
+          <p:cNvPr id="54" name="Rectangle 53"/>
           <p:cNvSpPr/>
           <p:nvPr/>
         </p:nvSpPr>
@@ -36632,7 +33119,7 @@
       </p:sp>
       <p:sp>
         <p:nvSpPr>
-          <p:cNvPr id="153" name="TextBox 152"/>
+          <p:cNvPr id="55" name="TextBox 54"/>
           <p:cNvSpPr txBox="1"/>
           <p:nvPr/>
         </p:nvSpPr>
@@ -36701,7 +33188,7 @@
       </p:sp>
       <p:sp>
         <p:nvSpPr>
-          <p:cNvPr id="154" name="TextBox 153"/>
+          <p:cNvPr id="56" name="TextBox 55"/>
           <p:cNvSpPr txBox="1"/>
           <p:nvPr/>
         </p:nvSpPr>

--- a/slides/m100_agent_final_deck.pptx
+++ b/slides/m100_agent_final_deck.pptx
@@ -30226,7 +30226,7 @@
                 <a:ea typeface="Microsoft YaHei"/>
                 <a:cs typeface="Microsoft YaHei"/>
               </a:rPr>
-              <a:t>M100 Agent：模型层内部组件与人机交互机制</a:t>
+              <a:t>M100 Agent：模型层内外双环与人机交互</a:t>
             </a:r>
           </a:p>
         </p:txBody>
@@ -30273,30 +30273,32 @@
                 <a:ea typeface="Microsoft YaHei"/>
                 <a:cs typeface="Microsoft YaHei"/>
               </a:rPr>
-              <a:t>基于「证据感知 — 假设推演 — 确定性核验」闭环；人只在契约下发、协同介入、终审验收三处交互</a:t>
-            </a:r>
-          </a:p>
-        </p:txBody>
-      </p:sp>
-      <p:sp>
-        <p:nvSpPr>
-          <p:cNvPr id="6" name="Rectangle 5"/>
+              <a:t>外环是确定性控制器（无模型），内环是一轮试验；人只在下发契约、结对补丁、终审验收三处接入，交互物全部落盘</a:t>
+            </a:r>
+          </a:p>
+        </p:txBody>
+      </p:sp>
+      <p:sp>
+        <p:nvSpPr>
+          <p:cNvPr id="6" name="Oval 5"/>
           <p:cNvSpPr/>
           <p:nvPr/>
         </p:nvSpPr>
         <p:spPr>
           <a:xfrm>
-            <a:off x="548640" y="1234440"/>
-            <a:ext cx="54864" cy="237744"/>
-          </a:xfrm>
-          <a:prstGeom prst="rect">
+            <a:off x="635508" y="1261872"/>
+            <a:ext cx="155448" cy="155448"/>
+          </a:xfrm>
+          <a:prstGeom prst="ellipse">
             <a:avLst/>
           </a:prstGeom>
           <a:solidFill>
-            <a:srgbClr val="40708B"/>
+            <a:srgbClr val="FFFFFF"/>
           </a:solidFill>
-          <a:ln>
-            <a:noFill/>
+          <a:ln w="15875">
+            <a:solidFill>
+              <a:srgbClr val="1B4D69"/>
+            </a:solidFill>
           </a:ln>
         </p:spPr>
         <p:txBody>
@@ -30307,16 +30309,100 @@
           </a:p>
         </p:txBody>
       </p:sp>
-      <p:sp>
-        <p:nvSpPr>
-          <p:cNvPr id="7" name="TextBox 6"/>
-          <p:cNvSpPr txBox="1"/>
-          <p:nvPr/>
-        </p:nvSpPr>
-        <p:spPr>
-          <a:xfrm>
-            <a:off x="694944" y="1207008"/>
-            <a:ext cx="2450591" cy="292608"/>
+      <p:cxnSp>
+        <p:nvCxnSpPr>
+          <p:cNvPr id="7" name="Connector 6"/>
+          <p:cNvCxnSpPr/>
+          <p:nvPr/>
+        </p:nvCxnSpPr>
+        <p:spPr>
+          <a:xfrm>
+            <a:off x="713232" y="1417319"/>
+            <a:ext cx="0" cy="91441"/>
+          </a:xfrm>
+          <a:prstGeom prst="line">
+            <a:avLst/>
+          </a:prstGeom>
+          <a:ln w="15875">
+            <a:solidFill>
+              <a:srgbClr val="1B4D69"/>
+            </a:solidFill>
+          </a:ln>
+        </p:spPr>
+      </p:cxnSp>
+      <p:cxnSp>
+        <p:nvCxnSpPr>
+          <p:cNvPr id="8" name="Connector 7"/>
+          <p:cNvCxnSpPr/>
+          <p:nvPr/>
+        </p:nvCxnSpPr>
+        <p:spPr>
+          <a:xfrm>
+            <a:off x="594360" y="1453895"/>
+            <a:ext cx="237744" cy="0"/>
+          </a:xfrm>
+          <a:prstGeom prst="line">
+            <a:avLst/>
+          </a:prstGeom>
+          <a:ln w="15875">
+            <a:solidFill>
+              <a:srgbClr val="1B4D69"/>
+            </a:solidFill>
+          </a:ln>
+        </p:spPr>
+      </p:cxnSp>
+      <p:cxnSp>
+        <p:nvCxnSpPr>
+          <p:cNvPr id="9" name="Connector 8"/>
+          <p:cNvCxnSpPr/>
+          <p:nvPr/>
+        </p:nvCxnSpPr>
+        <p:spPr>
+          <a:xfrm flipH="1">
+            <a:off x="621792" y="1508760"/>
+            <a:ext cx="91440" cy="100583"/>
+          </a:xfrm>
+          <a:prstGeom prst="line">
+            <a:avLst/>
+          </a:prstGeom>
+          <a:ln w="15875">
+            <a:solidFill>
+              <a:srgbClr val="1B4D69"/>
+            </a:solidFill>
+          </a:ln>
+        </p:spPr>
+      </p:cxnSp>
+      <p:cxnSp>
+        <p:nvCxnSpPr>
+          <p:cNvPr id="10" name="Connector 9"/>
+          <p:cNvCxnSpPr/>
+          <p:nvPr/>
+        </p:nvCxnSpPr>
+        <p:spPr>
+          <a:xfrm>
+            <a:off x="713232" y="1508760"/>
+            <a:ext cx="91440" cy="100583"/>
+          </a:xfrm>
+          <a:prstGeom prst="line">
+            <a:avLst/>
+          </a:prstGeom>
+          <a:ln w="15875">
+            <a:solidFill>
+              <a:srgbClr val="1B4D69"/>
+            </a:solidFill>
+          </a:ln>
+        </p:spPr>
+      </p:cxnSp>
+      <p:sp>
+        <p:nvSpPr>
+          <p:cNvPr id="11" name="TextBox 10"/>
+          <p:cNvSpPr txBox="1"/>
+          <p:nvPr/>
+        </p:nvSpPr>
+        <p:spPr>
+          <a:xfrm>
+            <a:off x="932688" y="1261872"/>
+            <a:ext cx="1682495" cy="347472"/>
           </a:xfrm>
           <a:prstGeom prst="rect">
             <a:avLst/>
@@ -30349,10 +30435,10 @@
                 <a:ea typeface="Microsoft YaHei"/>
                 <a:cs typeface="Microsoft YaHei"/>
               </a:rPr>
-              <a:t>人 · 契约与证据</a:t>
-            </a:r>
-            <a:r>
-              <a:rPr sz="850" b="1">
+              <a:t>人 · 任务负责人</a:t>
+            </a:r>
+            <a:r>
+              <a:rPr sz="800" b="1">
                 <a:solidFill>
                   <a:srgbClr val="40708B"/>
                 </a:solidFill>
@@ -30360,181 +30446,7 @@
                 <a:ea typeface="Microsoft YaHei"/>
                 <a:cs typeface="Microsoft YaHei"/>
               </a:rPr>
-              <a:t>　Human in the Loop</a:t>
-            </a:r>
-          </a:p>
-        </p:txBody>
-      </p:sp>
-      <p:sp>
-        <p:nvSpPr>
-          <p:cNvPr id="8" name="Rectangle 7"/>
-          <p:cNvSpPr/>
-          <p:nvPr/>
-        </p:nvSpPr>
-        <p:spPr>
-          <a:xfrm>
-            <a:off x="4041648" y="1234440"/>
-            <a:ext cx="54864" cy="237744"/>
-          </a:xfrm>
-          <a:prstGeom prst="rect">
-            <a:avLst/>
-          </a:prstGeom>
-          <a:solidFill>
-            <a:srgbClr val="D2690C"/>
-          </a:solidFill>
-          <a:ln>
-            <a:noFill/>
-          </a:ln>
-        </p:spPr>
-        <p:txBody>
-          <a:bodyPr rtlCol="0" anchor="ctr"/>
-          <a:lstStyle/>
-          <a:p>
-            <a:pPr algn="ctr"/>
-          </a:p>
-        </p:txBody>
-      </p:sp>
-      <p:sp>
-        <p:nvSpPr>
-          <p:cNvPr id="9" name="TextBox 8"/>
-          <p:cNvSpPr txBox="1"/>
-          <p:nvPr/>
-        </p:nvSpPr>
-        <p:spPr>
-          <a:xfrm>
-            <a:off x="4187952" y="1207008"/>
-            <a:ext cx="3694176" cy="292608"/>
-          </a:xfrm>
-          <a:prstGeom prst="rect">
-            <a:avLst/>
-          </a:prstGeom>
-          <a:noFill/>
-        </p:spPr>
-        <p:txBody>
-          <a:bodyPr wrap="square" anchor="ctr" lIns="0" tIns="0" rIns="0" bIns="0">
-            <a:noAutofit/>
-          </a:bodyPr>
-          <a:lstStyle/>
-          <a:p>
-            <a:pPr algn="l" latinLnBrk="0">
-              <a:lnSpc>
-                <a:spcPct val="100000"/>
-              </a:lnSpc>
-              <a:spcBef>
-                <a:spcPts val="0"/>
-              </a:spcBef>
-              <a:spcAft>
-                <a:spcPts val="0"/>
-              </a:spcAft>
-            </a:pPr>
-            <a:r>
-              <a:rPr sz="1100" b="1">
-                <a:solidFill>
-                  <a:srgbClr val="0A2B45"/>
-                </a:solidFill>
-                <a:latin typeface="Microsoft YaHei"/>
-                <a:ea typeface="Microsoft YaHei"/>
-                <a:cs typeface="Microsoft YaHei"/>
-              </a:rPr>
-              <a:t>模型层 Agent 内部</a:t>
-            </a:r>
-            <a:r>
-              <a:rPr sz="850" b="1">
-                <a:solidFill>
-                  <a:srgbClr val="D2690C"/>
-                </a:solidFill>
-                <a:latin typeface="Microsoft YaHei"/>
-                <a:ea typeface="Microsoft YaHei"/>
-                <a:cs typeface="Microsoft YaHei"/>
-              </a:rPr>
-              <a:t>　唯一引入大模型的位置</a:t>
-            </a:r>
-          </a:p>
-        </p:txBody>
-      </p:sp>
-      <p:sp>
-        <p:nvSpPr>
-          <p:cNvPr id="10" name="Rectangle 9"/>
-          <p:cNvSpPr/>
-          <p:nvPr/>
-        </p:nvSpPr>
-        <p:spPr>
-          <a:xfrm>
-            <a:off x="8705088" y="1234440"/>
-            <a:ext cx="54864" cy="237744"/>
-          </a:xfrm>
-          <a:prstGeom prst="rect">
-            <a:avLst/>
-          </a:prstGeom>
-          <a:solidFill>
-            <a:srgbClr val="0F62CE"/>
-          </a:solidFill>
-          <a:ln>
-            <a:noFill/>
-          </a:ln>
-        </p:spPr>
-        <p:txBody>
-          <a:bodyPr rtlCol="0" anchor="ctr"/>
-          <a:lstStyle/>
-          <a:p>
-            <a:pPr algn="ctr"/>
-          </a:p>
-        </p:txBody>
-      </p:sp>
-      <p:sp>
-        <p:nvSpPr>
-          <p:cNvPr id="11" name="TextBox 10"/>
-          <p:cNvSpPr txBox="1"/>
-          <p:nvPr/>
-        </p:nvSpPr>
-        <p:spPr>
-          <a:xfrm>
-            <a:off x="8851392" y="1207008"/>
-            <a:ext cx="2791663" cy="292608"/>
-          </a:xfrm>
-          <a:prstGeom prst="rect">
-            <a:avLst/>
-          </a:prstGeom>
-          <a:noFill/>
-        </p:spPr>
-        <p:txBody>
-          <a:bodyPr wrap="square" anchor="ctr" lIns="0" tIns="0" rIns="0" bIns="0">
-            <a:noAutofit/>
-          </a:bodyPr>
-          <a:lstStyle/>
-          <a:p>
-            <a:pPr algn="l" latinLnBrk="0">
-              <a:lnSpc>
-                <a:spcPct val="100000"/>
-              </a:lnSpc>
-              <a:spcBef>
-                <a:spcPts val="0"/>
-              </a:spcBef>
-              <a:spcAft>
-                <a:spcPts val="0"/>
-              </a:spcAft>
-            </a:pPr>
-            <a:r>
-              <a:rPr sz="1100" b="1">
-                <a:solidFill>
-                  <a:srgbClr val="0A2B45"/>
-                </a:solidFill>
-                <a:latin typeface="Microsoft YaHei"/>
-                <a:ea typeface="Microsoft YaHei"/>
-                <a:cs typeface="Microsoft YaHei"/>
-              </a:rPr>
-              <a:t>确定性工具与评测后端</a:t>
-            </a:r>
-            <a:r>
-              <a:rPr sz="850" b="1">
-                <a:solidFill>
-                  <a:srgbClr val="0F62CE"/>
-                </a:solidFill>
-                <a:latin typeface="Microsoft YaHei"/>
-                <a:ea typeface="Microsoft YaHei"/>
-                <a:cs typeface="Microsoft YaHei"/>
-              </a:rPr>
-              <a:t>　确定性执行 · 无模型</a:t>
+              <a:t>　Human</a:t>
             </a:r>
           </a:p>
         </p:txBody>
@@ -30547,8 +30459,8 @@
         </p:nvSpPr>
         <p:spPr>
           <a:xfrm>
-            <a:off x="548640" y="1572768"/>
-            <a:ext cx="2596896" cy="1225296"/>
+            <a:off x="548640" y="1700784"/>
+            <a:ext cx="2066543" cy="1316736"/>
           </a:xfrm>
           <a:prstGeom prst="rect">
             <a:avLst/>
@@ -30578,8 +30490,8 @@
         </p:nvSpPr>
         <p:spPr>
           <a:xfrm>
-            <a:off x="548640" y="1572768"/>
-            <a:ext cx="64008" cy="1225296"/>
+            <a:off x="548640" y="1700784"/>
+            <a:ext cx="64008" cy="1316736"/>
           </a:xfrm>
           <a:prstGeom prst="rect">
             <a:avLst/>
@@ -30607,8 +30519,8 @@
         </p:nvSpPr>
         <p:spPr>
           <a:xfrm>
-            <a:off x="731520" y="1618488"/>
-            <a:ext cx="2267712" cy="1133856"/>
+            <a:off x="713232" y="1746504"/>
+            <a:ext cx="1792223" cy="1225295"/>
           </a:xfrm>
           <a:prstGeom prst="rect">
             <a:avLst/>
@@ -30633,7 +30545,7 @@
               </a:spcAft>
             </a:pPr>
             <a:r>
-              <a:rPr sz="1050" b="1">
+              <a:rPr sz="1000" b="1">
                 <a:solidFill>
                   <a:srgbClr val="0A2B45"/>
                 </a:solidFill>
@@ -30641,18 +30553,66 @@
                 <a:ea typeface="Microsoft YaHei"/>
                 <a:cs typeface="Microsoft YaHei"/>
               </a:rPr>
-              <a:t>冻结契约</a:t>
+              <a:t>下发 · 冻结契约</a:t>
             </a:r>
             <a:r>
               <a:rPr sz="800" b="1">
                 <a:solidFill>
                   <a:srgbClr val="40708B"/>
                 </a:solidFill>
+                <a:latin typeface="Microsoft YaHei"/>
+                <a:ea typeface="Microsoft YaHei"/>
+                <a:cs typeface="Microsoft YaHei"/>
+              </a:rPr>
+              <a:t>　人 → Agent</a:t>
+            </a:r>
+          </a:p>
+          <a:p>
+            <a:pPr algn="l" latinLnBrk="0">
+              <a:lnSpc>
+                <a:spcPct val="100000"/>
+              </a:lnSpc>
+              <a:spcBef>
+                <a:spcPts val="0"/>
+              </a:spcBef>
+              <a:spcAft>
+                <a:spcPts val="0"/>
+              </a:spcAft>
+            </a:pPr>
+            <a:r>
+              <a:rPr sz="850" b="1">
+                <a:solidFill>
+                  <a:srgbClr val="123C5B"/>
+                </a:solidFill>
+                <a:latin typeface="Microsoft YaHei"/>
+                <a:ea typeface="Microsoft YaHei"/>
+                <a:cs typeface="Microsoft YaHei"/>
+              </a:rPr>
+              <a:t>·　优化任务</a:t>
+            </a:r>
+          </a:p>
+          <a:p>
+            <a:pPr algn="l" latinLnBrk="0">
+              <a:lnSpc>
+                <a:spcPct val="100000"/>
+              </a:lnSpc>
+              <a:spcBef>
+                <a:spcPts val="0"/>
+              </a:spcBef>
+              <a:spcAft>
+                <a:spcPts val="0"/>
+              </a:spcAft>
+            </a:pPr>
+            <a:r>
+              <a:rPr sz="750" b="0">
+                <a:solidFill>
+                  <a:srgbClr val="0F62CE"/>
+                </a:solidFill>
                 <a:latin typeface="Consolas"/>
                 <a:ea typeface="Microsoft YaHei"/>
                 <a:cs typeface="Microsoft YaHei"/>
               </a:rPr>
-              <a:t>　人 → Agent</a:t>
+              <a:t>　　optimization-task.json</a:t>
             </a:r>
           </a:p>
           <a:p>
@@ -30668,7 +30628,127 @@
               </a:spcAft>
             </a:pPr>
             <a:r>
-              <a:rPr sz="900" b="0">
+              <a:rPr sz="850" b="1">
+                <a:solidFill>
+                  <a:srgbClr val="123C5B"/>
+                </a:solidFill>
+                <a:latin typeface="Microsoft YaHei"/>
+                <a:ea typeface="Microsoft YaHei"/>
+                <a:cs typeface="Microsoft YaHei"/>
+              </a:rPr>
+              <a:t>·　质量契约</a:t>
+            </a:r>
+          </a:p>
+          <a:p>
+            <a:pPr algn="l" latinLnBrk="0">
+              <a:lnSpc>
+                <a:spcPct val="100000"/>
+              </a:lnSpc>
+              <a:spcBef>
+                <a:spcPts val="0"/>
+              </a:spcBef>
+              <a:spcAft>
+                <a:spcPts val="0"/>
+              </a:spcAft>
+            </a:pPr>
+            <a:r>
+              <a:rPr sz="750" b="0">
+                <a:solidFill>
+                  <a:srgbClr val="0F62CE"/>
+                </a:solidFill>
+                <a:latin typeface="Consolas"/>
+                <a:ea typeface="Microsoft YaHei"/>
+                <a:cs typeface="Microsoft YaHei"/>
+              </a:rPr>
+              <a:t>　　generation-task.json</a:t>
+            </a:r>
+          </a:p>
+          <a:p>
+            <a:pPr algn="l" latinLnBrk="0">
+              <a:lnSpc>
+                <a:spcPct val="100000"/>
+              </a:lnSpc>
+              <a:spcBef>
+                <a:spcPts val="0"/>
+              </a:spcBef>
+              <a:spcAft>
+                <a:spcPts val="0"/>
+              </a:spcAft>
+            </a:pPr>
+            <a:r>
+              <a:rPr sz="850" b="1">
+                <a:solidFill>
+                  <a:srgbClr val="123C5B"/>
+                </a:solidFill>
+                <a:latin typeface="Microsoft YaHei"/>
+                <a:ea typeface="Microsoft YaHei"/>
+                <a:cs typeface="Microsoft YaHei"/>
+              </a:rPr>
+              <a:t>·　调优知识</a:t>
+            </a:r>
+          </a:p>
+          <a:p>
+            <a:pPr algn="l" latinLnBrk="0">
+              <a:lnSpc>
+                <a:spcPct val="100000"/>
+              </a:lnSpc>
+              <a:spcBef>
+                <a:spcPts val="0"/>
+              </a:spcBef>
+              <a:spcAft>
+                <a:spcPts val="0"/>
+              </a:spcAft>
+            </a:pPr>
+            <a:r>
+              <a:rPr sz="750" b="0">
+                <a:solidFill>
+                  <a:srgbClr val="0F62CE"/>
+                </a:solidFill>
+                <a:latin typeface="Consolas"/>
+                <a:ea typeface="Microsoft YaHei"/>
+                <a:cs typeface="Microsoft YaHei"/>
+              </a:rPr>
+              <a:t>　　planner-skills/ × 10</a:t>
+            </a:r>
+          </a:p>
+          <a:p>
+            <a:pPr algn="l" latinLnBrk="0">
+              <a:lnSpc>
+                <a:spcPct val="100000"/>
+              </a:lnSpc>
+              <a:spcBef>
+                <a:spcPts val="0"/>
+              </a:spcBef>
+              <a:spcAft>
+                <a:spcPts val="0"/>
+              </a:spcAft>
+            </a:pPr>
+            <a:r>
+              <a:rPr sz="850" b="1">
+                <a:solidFill>
+                  <a:srgbClr val="123C5B"/>
+                </a:solidFill>
+                <a:latin typeface="Microsoft YaHei"/>
+                <a:ea typeface="Microsoft YaHei"/>
+                <a:cs typeface="Microsoft YaHei"/>
+              </a:rPr>
+              <a:t>·　授权边界</a:t>
+            </a:r>
+          </a:p>
+          <a:p>
+            <a:pPr algn="l" latinLnBrk="0">
+              <a:lnSpc>
+                <a:spcPct val="100000"/>
+              </a:lnSpc>
+              <a:spcBef>
+                <a:spcPts val="0"/>
+              </a:spcBef>
+              <a:spcAft>
+                <a:spcPts val="0"/>
+              </a:spcAft>
+            </a:pPr>
+            <a:r>
+              <a:rPr sz="800" b="0">
                 <a:solidFill>
                   <a:srgbClr val="1B4D69"/>
                 </a:solidFill>
@@ -30676,112 +30756,7 @@
                 <a:ea typeface="Microsoft YaHei"/>
                 <a:cs typeface="Microsoft YaHei"/>
               </a:rPr>
-              <a:t>·　优化任务</a:t>
-            </a:r>
-            <a:r>
-              <a:rPr sz="750" b="0">
-                <a:solidFill>
-                  <a:srgbClr val="0F62CE"/>
-                </a:solidFill>
-                <a:latin typeface="Consolas"/>
-                <a:ea typeface="Microsoft YaHei"/>
-                <a:cs typeface="Microsoft YaHei"/>
-              </a:rPr>
-              <a:t>　optimization-task.json</a:t>
-            </a:r>
-          </a:p>
-          <a:p>
-            <a:pPr algn="l" latinLnBrk="0">
-              <a:lnSpc>
-                <a:spcPct val="100000"/>
-              </a:lnSpc>
-              <a:spcBef>
-                <a:spcPts val="0"/>
-              </a:spcBef>
-              <a:spcAft>
-                <a:spcPts val="0"/>
-              </a:spcAft>
-            </a:pPr>
-            <a:r>
-              <a:rPr sz="900" b="0">
-                <a:solidFill>
-                  <a:srgbClr val="1B4D69"/>
-                </a:solidFill>
-                <a:latin typeface="Microsoft YaHei"/>
-                <a:ea typeface="Microsoft YaHei"/>
-                <a:cs typeface="Microsoft YaHei"/>
-              </a:rPr>
-              <a:t>·　质量契约</a:t>
-            </a:r>
-            <a:r>
-              <a:rPr sz="750" b="0">
-                <a:solidFill>
-                  <a:srgbClr val="0F62CE"/>
-                </a:solidFill>
-                <a:latin typeface="Consolas"/>
-                <a:ea typeface="Microsoft YaHei"/>
-                <a:cs typeface="Microsoft YaHei"/>
-              </a:rPr>
-              <a:t>　generation-task.json</a:t>
-            </a:r>
-          </a:p>
-          <a:p>
-            <a:pPr algn="l" latinLnBrk="0">
-              <a:lnSpc>
-                <a:spcPct val="100000"/>
-              </a:lnSpc>
-              <a:spcBef>
-                <a:spcPts val="0"/>
-              </a:spcBef>
-              <a:spcAft>
-                <a:spcPts val="0"/>
-              </a:spcAft>
-            </a:pPr>
-            <a:r>
-              <a:rPr sz="900" b="0">
-                <a:solidFill>
-                  <a:srgbClr val="1B4D69"/>
-                </a:solidFill>
-                <a:latin typeface="Microsoft YaHei"/>
-                <a:ea typeface="Microsoft YaHei"/>
-                <a:cs typeface="Microsoft YaHei"/>
-              </a:rPr>
-              <a:t>·　调优知识</a:t>
-            </a:r>
-            <a:r>
-              <a:rPr sz="750" b="0">
-                <a:solidFill>
-                  <a:srgbClr val="0F62CE"/>
-                </a:solidFill>
-                <a:latin typeface="Consolas"/>
-                <a:ea typeface="Microsoft YaHei"/>
-                <a:cs typeface="Microsoft YaHei"/>
-              </a:rPr>
-              <a:t>　planner-skills/ × 10</a:t>
-            </a:r>
-          </a:p>
-          <a:p>
-            <a:pPr algn="l" latinLnBrk="0">
-              <a:lnSpc>
-                <a:spcPct val="100000"/>
-              </a:lnSpc>
-              <a:spcBef>
-                <a:spcPts val="0"/>
-              </a:spcBef>
-              <a:spcAft>
-                <a:spcPts val="0"/>
-              </a:spcAft>
-            </a:pPr>
-            <a:r>
-              <a:rPr sz="900" b="0">
-                <a:solidFill>
-                  <a:srgbClr val="1B4D69"/>
-                </a:solidFill>
-                <a:latin typeface="Microsoft YaHei"/>
-                <a:ea typeface="Microsoft YaHei"/>
-                <a:cs typeface="Microsoft YaHei"/>
-              </a:rPr>
-              <a:t>·　授权边界：测试范围 · 可跳过项</a:t>
+              <a:t>　　测试范围 · 可跳过项</a:t>
             </a:r>
           </a:p>
         </p:txBody>
@@ -30794,8 +30769,8 @@
         </p:nvSpPr>
         <p:spPr>
           <a:xfrm>
-            <a:off x="548640" y="2926080"/>
-            <a:ext cx="2596896" cy="658368"/>
+            <a:off x="548640" y="3127248"/>
+            <a:ext cx="2066543" cy="841248"/>
           </a:xfrm>
           <a:prstGeom prst="rect">
             <a:avLst/>
@@ -30825,8 +30800,8 @@
         </p:nvSpPr>
         <p:spPr>
           <a:xfrm>
-            <a:off x="548640" y="2926080"/>
-            <a:ext cx="64008" cy="658368"/>
+            <a:off x="548640" y="3127248"/>
+            <a:ext cx="64008" cy="841248"/>
           </a:xfrm>
           <a:prstGeom prst="rect">
             <a:avLst/>
@@ -30854,8 +30829,8 @@
         </p:nvSpPr>
         <p:spPr>
           <a:xfrm>
-            <a:off x="731520" y="2971800"/>
-            <a:ext cx="2267712" cy="566928"/>
+            <a:off x="713232" y="3172968"/>
+            <a:ext cx="1792223" cy="749808"/>
           </a:xfrm>
           <a:prstGeom prst="rect">
             <a:avLst/>
@@ -30880,7 +30855,7 @@
               </a:spcAft>
             </a:pPr>
             <a:r>
-              <a:rPr sz="1050" b="1">
+              <a:rPr sz="1000" b="1">
                 <a:solidFill>
                   <a:srgbClr val="0A2B45"/>
                 </a:solidFill>
@@ -30888,18 +30863,66 @@
                 <a:ea typeface="Microsoft YaHei"/>
                 <a:cs typeface="Microsoft YaHei"/>
               </a:rPr>
-              <a:t>协同补丁</a:t>
+              <a:t>结对 · 协同补丁</a:t>
             </a:r>
             <a:r>
               <a:rPr sz="800" b="1">
                 <a:solidFill>
                   <a:srgbClr val="D2690C"/>
                 </a:solidFill>
+                <a:latin typeface="Microsoft YaHei"/>
+                <a:ea typeface="Microsoft YaHei"/>
+                <a:cs typeface="Microsoft YaHei"/>
+              </a:rPr>
+              <a:t>　人 ⇄ 规划器</a:t>
+            </a:r>
+          </a:p>
+          <a:p>
+            <a:pPr algn="l" latinLnBrk="0">
+              <a:lnSpc>
+                <a:spcPct val="100000"/>
+              </a:lnSpc>
+              <a:spcBef>
+                <a:spcPts val="0"/>
+              </a:spcBef>
+              <a:spcAft>
+                <a:spcPts val="0"/>
+              </a:spcAft>
+            </a:pPr>
+            <a:r>
+              <a:rPr sz="850" b="1">
+                <a:solidFill>
+                  <a:srgbClr val="123C5B"/>
+                </a:solidFill>
+                <a:latin typeface="Microsoft YaHei"/>
+                <a:ea typeface="Microsoft YaHei"/>
+                <a:cs typeface="Microsoft YaHei"/>
+              </a:rPr>
+              <a:t>·　复杂改动</a:t>
+            </a:r>
+          </a:p>
+          <a:p>
+            <a:pPr algn="l" latinLnBrk="0">
+              <a:lnSpc>
+                <a:spcPct val="100000"/>
+              </a:lnSpc>
+              <a:spcBef>
+                <a:spcPts val="0"/>
+              </a:spcBef>
+              <a:spcAft>
+                <a:spcPts val="0"/>
+              </a:spcAft>
+            </a:pPr>
+            <a:r>
+              <a:rPr sz="750" b="0">
+                <a:solidFill>
+                  <a:srgbClr val="0F62CE"/>
+                </a:solidFill>
                 <a:latin typeface="Consolas"/>
                 <a:ea typeface="Microsoft YaHei"/>
                 <a:cs typeface="Microsoft YaHei"/>
               </a:rPr>
-              <a:t>　人 ⇄ 规划器</a:t>
+              <a:t>　　changes.patch</a:t>
             </a:r>
           </a:p>
           <a:p>
@@ -30915,7 +30938,31 @@
               </a:spcAft>
             </a:pPr>
             <a:r>
-              <a:rPr sz="900" b="0">
+              <a:rPr sz="850" b="1">
+                <a:solidFill>
+                  <a:srgbClr val="123C5B"/>
+                </a:solidFill>
+                <a:latin typeface="Microsoft YaHei"/>
+                <a:ea typeface="Microsoft YaHei"/>
+                <a:cs typeface="Microsoft YaHei"/>
+              </a:rPr>
+              <a:t>·　同等准入</a:t>
+            </a:r>
+          </a:p>
+          <a:p>
+            <a:pPr algn="l" latinLnBrk="0">
+              <a:lnSpc>
+                <a:spcPct val="100000"/>
+              </a:lnSpc>
+              <a:spcBef>
+                <a:spcPts val="0"/>
+              </a:spcBef>
+              <a:spcAft>
+                <a:spcPts val="0"/>
+              </a:spcAft>
+            </a:pPr>
+            <a:r>
+              <a:rPr sz="800" b="0">
                 <a:solidFill>
                   <a:srgbClr val="1B4D69"/>
                 </a:solidFill>
@@ -30923,42 +30970,7 @@
                 <a:ea typeface="Microsoft YaHei"/>
                 <a:cs typeface="Microsoft YaHei"/>
               </a:rPr>
-              <a:t>·　结对补丁</a:t>
-            </a:r>
-            <a:r>
-              <a:rPr sz="750" b="0">
-                <a:solidFill>
-                  <a:srgbClr val="0F62CE"/>
-                </a:solidFill>
-                <a:latin typeface="Consolas"/>
-                <a:ea typeface="Microsoft YaHei"/>
-                <a:cs typeface="Microsoft YaHei"/>
-              </a:rPr>
-              <a:t>　changes.patch</a:t>
-            </a:r>
-          </a:p>
-          <a:p>
-            <a:pPr algn="l" latinLnBrk="0">
-              <a:lnSpc>
-                <a:spcPct val="100000"/>
-              </a:lnSpc>
-              <a:spcBef>
-                <a:spcPts val="0"/>
-              </a:spcBef>
-              <a:spcAft>
-                <a:spcPts val="0"/>
-              </a:spcAft>
-            </a:pPr>
-            <a:r>
-              <a:rPr sz="900" b="0">
-                <a:solidFill>
-                  <a:srgbClr val="1B4D69"/>
-                </a:solidFill>
-                <a:latin typeface="Microsoft YaHei"/>
-                <a:ea typeface="Microsoft YaHei"/>
-                <a:cs typeface="Microsoft YaHei"/>
-              </a:rPr>
-              <a:t>·　复杂改动由人主导，同样走四道门禁</a:t>
+              <a:t>　　同样走四道门禁</a:t>
             </a:r>
           </a:p>
         </p:txBody>
@@ -30972,7 +30984,7 @@
         <p:spPr>
           <a:xfrm>
             <a:off x="548640" y="4078224"/>
-            <a:ext cx="2596896" cy="1060704"/>
+            <a:ext cx="2066543" cy="1316736"/>
           </a:xfrm>
           <a:prstGeom prst="rect">
             <a:avLst/>
@@ -31003,7 +31015,7 @@
         <p:spPr>
           <a:xfrm>
             <a:off x="548640" y="4078224"/>
-            <a:ext cx="64008" cy="1060704"/>
+            <a:ext cx="64008" cy="1316736"/>
           </a:xfrm>
           <a:prstGeom prst="rect">
             <a:avLst/>
@@ -31031,8 +31043,8 @@
         </p:nvSpPr>
         <p:spPr>
           <a:xfrm>
-            <a:off x="731520" y="4123944"/>
-            <a:ext cx="2267712" cy="969263"/>
+            <a:off x="713232" y="4123944"/>
+            <a:ext cx="1792223" cy="1225295"/>
           </a:xfrm>
           <a:prstGeom prst="rect">
             <a:avLst/>
@@ -31057,7 +31069,7 @@
               </a:spcAft>
             </a:pPr>
             <a:r>
-              <a:rPr sz="1050" b="1">
+              <a:rPr sz="1000" b="1">
                 <a:solidFill>
                   <a:srgbClr val="0A2B45"/>
                 </a:solidFill>
@@ -31065,18 +31077,66 @@
                 <a:ea typeface="Microsoft YaHei"/>
                 <a:cs typeface="Microsoft YaHei"/>
               </a:rPr>
-              <a:t>判决与证据黑板</a:t>
+              <a:t>验收 · 判决报告</a:t>
             </a:r>
             <a:r>
               <a:rPr sz="800" b="1">
                 <a:solidFill>
                   <a:srgbClr val="40708B"/>
                 </a:solidFill>
+                <a:latin typeface="Microsoft YaHei"/>
+                <a:ea typeface="Microsoft YaHei"/>
+                <a:cs typeface="Microsoft YaHei"/>
+              </a:rPr>
+              <a:t>　Agent → 人</a:t>
+            </a:r>
+          </a:p>
+          <a:p>
+            <a:pPr algn="l" latinLnBrk="0">
+              <a:lnSpc>
+                <a:spcPct val="100000"/>
+              </a:lnSpc>
+              <a:spcBef>
+                <a:spcPts val="0"/>
+              </a:spcBef>
+              <a:spcAft>
+                <a:spcPts val="0"/>
+              </a:spcAft>
+            </a:pPr>
+            <a:r>
+              <a:rPr sz="850" b="1">
+                <a:solidFill>
+                  <a:srgbClr val="123C5B"/>
+                </a:solidFill>
+                <a:latin typeface="Microsoft YaHei"/>
+                <a:ea typeface="Microsoft YaHei"/>
+                <a:cs typeface="Microsoft YaHei"/>
+              </a:rPr>
+              <a:t>·　优化报告</a:t>
+            </a:r>
+          </a:p>
+          <a:p>
+            <a:pPr algn="l" latinLnBrk="0">
+              <a:lnSpc>
+                <a:spcPct val="100000"/>
+              </a:lnSpc>
+              <a:spcBef>
+                <a:spcPts val="0"/>
+              </a:spcBef>
+              <a:spcAft>
+                <a:spcPts val="0"/>
+              </a:spcAft>
+            </a:pPr>
+            <a:r>
+              <a:rPr sz="750" b="0">
+                <a:solidFill>
+                  <a:srgbClr val="0F62CE"/>
+                </a:solidFill>
                 <a:latin typeface="Consolas"/>
                 <a:ea typeface="Microsoft YaHei"/>
                 <a:cs typeface="Microsoft YaHei"/>
               </a:rPr>
-              <a:t>　Verdict Blackboard</a:t>
+              <a:t>　　optimization-report.md</a:t>
             </a:r>
           </a:p>
           <a:p>
@@ -31092,7 +31152,127 @@
               </a:spcAft>
             </a:pPr>
             <a:r>
-              <a:rPr sz="900" b="0">
+              <a:rPr sz="850" b="1">
+                <a:solidFill>
+                  <a:srgbClr val="123C5B"/>
+                </a:solidFill>
+                <a:latin typeface="Microsoft YaHei"/>
+                <a:ea typeface="Microsoft YaHei"/>
+                <a:cs typeface="Microsoft YaHei"/>
+              </a:rPr>
+              <a:t>·　最优版本</a:t>
+            </a:r>
+          </a:p>
+          <a:p>
+            <a:pPr algn="l" latinLnBrk="0">
+              <a:lnSpc>
+                <a:spcPct val="100000"/>
+              </a:lnSpc>
+              <a:spcBef>
+                <a:spcPts val="0"/>
+              </a:spcBef>
+              <a:spcAft>
+                <a:spcPts val="0"/>
+              </a:spcAft>
+            </a:pPr>
+            <a:r>
+              <a:rPr sz="750" b="0">
+                <a:solidFill>
+                  <a:srgbClr val="0F62CE"/>
+                </a:solidFill>
+                <a:latin typeface="Consolas"/>
+                <a:ea typeface="Microsoft YaHei"/>
+                <a:cs typeface="Microsoft YaHei"/>
+              </a:rPr>
+              <a:t>　　best.json</a:t>
+            </a:r>
+          </a:p>
+          <a:p>
+            <a:pPr algn="l" latinLnBrk="0">
+              <a:lnSpc>
+                <a:spcPct val="100000"/>
+              </a:lnSpc>
+              <a:spcBef>
+                <a:spcPts val="0"/>
+              </a:spcBef>
+              <a:spcAft>
+                <a:spcPts val="0"/>
+              </a:spcAft>
+            </a:pPr>
+            <a:r>
+              <a:rPr sz="850" b="1">
+                <a:solidFill>
+                  <a:srgbClr val="123C5B"/>
+                </a:solidFill>
+                <a:latin typeface="Microsoft YaHei"/>
+                <a:ea typeface="Microsoft YaHei"/>
+                <a:cs typeface="Microsoft YaHei"/>
+              </a:rPr>
+              <a:t>·　证据链</a:t>
+            </a:r>
+          </a:p>
+          <a:p>
+            <a:pPr algn="l" latinLnBrk="0">
+              <a:lnSpc>
+                <a:spcPct val="100000"/>
+              </a:lnSpc>
+              <a:spcBef>
+                <a:spcPts val="0"/>
+              </a:spcBef>
+              <a:spcAft>
+                <a:spcPts val="0"/>
+              </a:spcAft>
+            </a:pPr>
+            <a:r>
+              <a:rPr sz="750" b="0">
+                <a:solidFill>
+                  <a:srgbClr val="0F62CE"/>
+                </a:solidFill>
+                <a:latin typeface="Consolas"/>
+                <a:ea typeface="Microsoft YaHei"/>
+                <a:cs typeface="Microsoft YaHei"/>
+              </a:rPr>
+              <a:t>　　attempts/ · planner/</a:t>
+            </a:r>
+          </a:p>
+          <a:p>
+            <a:pPr algn="l" latinLnBrk="0">
+              <a:lnSpc>
+                <a:spcPct val="100000"/>
+              </a:lnSpc>
+              <a:spcBef>
+                <a:spcPts val="0"/>
+              </a:spcBef>
+              <a:spcAft>
+                <a:spcPts val="0"/>
+              </a:spcAft>
+            </a:pPr>
+            <a:r>
+              <a:rPr sz="850" b="1">
+                <a:solidFill>
+                  <a:srgbClr val="123C5B"/>
+                </a:solidFill>
+                <a:latin typeface="Microsoft YaHei"/>
+                <a:ea typeface="Microsoft YaHei"/>
+                <a:cs typeface="Microsoft YaHei"/>
+              </a:rPr>
+              <a:t>·　边界声明</a:t>
+            </a:r>
+          </a:p>
+          <a:p>
+            <a:pPr algn="l" latinLnBrk="0">
+              <a:lnSpc>
+                <a:spcPct val="100000"/>
+              </a:lnSpc>
+              <a:spcBef>
+                <a:spcPts val="0"/>
+              </a:spcBef>
+              <a:spcAft>
+                <a:spcPts val="0"/>
+              </a:spcAft>
+            </a:pPr>
+            <a:r>
+              <a:rPr sz="800" b="0">
                 <a:solidFill>
                   <a:srgbClr val="1B4D69"/>
                 </a:solidFill>
@@ -31100,79 +31280,33 @@
                 <a:ea typeface="Microsoft YaHei"/>
                 <a:cs typeface="Microsoft YaHei"/>
               </a:rPr>
-              <a:t>·　门禁判决与被拒原因</a:t>
-            </a:r>
-          </a:p>
-          <a:p>
-            <a:pPr algn="l" latinLnBrk="0">
-              <a:lnSpc>
-                <a:spcPct val="100000"/>
-              </a:lnSpc>
-              <a:spcBef>
-                <a:spcPts val="0"/>
-              </a:spcBef>
-              <a:spcAft>
-                <a:spcPts val="0"/>
-              </a:spcAft>
-            </a:pPr>
-            <a:r>
-              <a:rPr sz="900" b="0">
-                <a:solidFill>
-                  <a:srgbClr val="1B4D69"/>
-                </a:solidFill>
-                <a:latin typeface="Microsoft YaHei"/>
-                <a:ea typeface="Microsoft YaHei"/>
-                <a:cs typeface="Microsoft YaHei"/>
-              </a:rPr>
-              <a:t>·　数值与质量偏差详情</a:t>
-            </a:r>
-          </a:p>
-          <a:p>
-            <a:pPr algn="l" latinLnBrk="0">
-              <a:lnSpc>
-                <a:spcPct val="100000"/>
-              </a:lnSpc>
-              <a:spcBef>
-                <a:spcPts val="0"/>
-              </a:spcBef>
-              <a:spcAft>
-                <a:spcPts val="0"/>
-              </a:spcAft>
-            </a:pPr>
-            <a:r>
-              <a:rPr sz="900" b="0">
-                <a:solidFill>
-                  <a:srgbClr val="1B4D69"/>
-                </a:solidFill>
-                <a:latin typeface="Microsoft YaHei"/>
-                <a:ea typeface="Microsoft YaHei"/>
-                <a:cs typeface="Microsoft YaHei"/>
-              </a:rPr>
-              <a:t>·　实测耗时与下界差距</a:t>
-            </a:r>
-          </a:p>
-        </p:txBody>
-      </p:sp>
-      <p:sp>
-        <p:nvSpPr>
-          <p:cNvPr id="21" name="Rectangle 20"/>
+              <a:t>　　自检异常 · 适用范围</a:t>
+            </a:r>
+          </a:p>
+        </p:txBody>
+      </p:sp>
+      <p:sp>
+        <p:nvSpPr>
+          <p:cNvPr id="21" name="Rounded Rectangle 20"/>
           <p:cNvSpPr/>
           <p:nvPr/>
         </p:nvSpPr>
         <p:spPr>
           <a:xfrm>
-            <a:off x="8705088" y="1572768"/>
-            <a:ext cx="2937967" cy="1316736"/>
-          </a:xfrm>
-          <a:prstGeom prst="rect">
-            <a:avLst/>
+            <a:off x="2761488" y="1225296"/>
+            <a:ext cx="4206240" cy="4315968"/>
+          </a:xfrm>
+          <a:prstGeom prst="roundRect">
+            <a:avLst>
+              <a:gd name="adj" fmla="val 2000"/>
+            </a:avLst>
           </a:prstGeom>
           <a:solidFill>
-            <a:srgbClr val="FFFFFF"/>
+            <a:srgbClr val="F2F8FD"/>
           </a:solidFill>
-          <a:ln w="9525">
+          <a:ln w="12700">
             <a:solidFill>
-              <a:srgbClr val="CFE3F0"/>
+              <a:srgbClr val="7FA4BA"/>
             </a:solidFill>
           </a:ln>
         </p:spPr>
@@ -31192,14 +31326,14 @@
         </p:nvSpPr>
         <p:spPr>
           <a:xfrm>
-            <a:off x="8705088" y="1572768"/>
-            <a:ext cx="64008" cy="1316736"/>
+            <a:off x="2889504" y="1316736"/>
+            <a:ext cx="54864" cy="237744"/>
           </a:xfrm>
           <a:prstGeom prst="rect">
             <a:avLst/>
           </a:prstGeom>
           <a:solidFill>
-            <a:srgbClr val="0F62CE"/>
+            <a:srgbClr val="7FA4BA"/>
           </a:solidFill>
           <a:ln>
             <a:noFill/>
@@ -31221,8 +31355,8 @@
         </p:nvSpPr>
         <p:spPr>
           <a:xfrm>
-            <a:off x="8887967" y="1618488"/>
-            <a:ext cx="2608783" cy="1225295"/>
+            <a:off x="2999232" y="1280160"/>
+            <a:ext cx="3840479" cy="310896"/>
           </a:xfrm>
           <a:prstGeom prst="rect">
             <a:avLst/>
@@ -31243,11 +31377,11 @@
                 <a:spcPts val="0"/>
               </a:spcBef>
               <a:spcAft>
-                <a:spcPts val="300"/>
-              </a:spcAft>
-            </a:pPr>
-            <a:r>
-              <a:rPr sz="1050" b="1">
+                <a:spcPts val="0"/>
+              </a:spcAft>
+            </a:pPr>
+            <a:r>
+              <a:rPr sz="1100" b="1">
                 <a:solidFill>
                   <a:srgbClr val="0A2B45"/>
                 </a:solidFill>
@@ -31255,10 +31389,90 @@
                 <a:ea typeface="Microsoft YaHei"/>
                 <a:cs typeface="Microsoft YaHei"/>
               </a:rPr>
-              <a:t>源码与冻结证据</a:t>
-            </a:r>
-            <a:r>
-              <a:rPr sz="800" b="1">
+              <a:t>外环 · 确定性控制器</a:t>
+            </a:r>
+            <a:r>
+              <a:rPr sz="850" b="1">
+                <a:solidFill>
+                  <a:srgbClr val="7FA4BA"/>
+                </a:solidFill>
+                <a:latin typeface="Microsoft YaHei"/>
+                <a:ea typeface="Microsoft YaHei"/>
+                <a:cs typeface="Microsoft YaHei"/>
+              </a:rPr>
+              <a:t>　无模型 · 规则判决 · 逐轮核验</a:t>
+            </a:r>
+          </a:p>
+        </p:txBody>
+      </p:sp>
+      <p:sp>
+        <p:nvSpPr>
+          <p:cNvPr id="24" name="Rounded Rectangle 23"/>
+          <p:cNvSpPr/>
+          <p:nvPr/>
+        </p:nvSpPr>
+        <p:spPr>
+          <a:xfrm>
+            <a:off x="3054096" y="1700784"/>
+            <a:ext cx="1316736" cy="731520"/>
+          </a:xfrm>
+          <a:prstGeom prst="roundRect">
+            <a:avLst>
+              <a:gd name="adj" fmla="val 10000"/>
+            </a:avLst>
+          </a:prstGeom>
+          <a:solidFill>
+            <a:srgbClr val="E6F0FC"/>
+          </a:solidFill>
+          <a:ln w="12700">
+            <a:solidFill>
+              <a:srgbClr val="0F62CE"/>
+            </a:solidFill>
+          </a:ln>
+        </p:spPr>
+        <p:txBody>
+          <a:bodyPr rtlCol="0" anchor="ctr" wrap="square" tIns="36576" bIns="36576">
+            <a:noAutofit/>
+          </a:bodyPr>
+          <a:lstStyle/>
+          <a:p>
+            <a:pPr algn="ctr" latinLnBrk="0">
+              <a:lnSpc>
+                <a:spcPct val="100000"/>
+              </a:lnSpc>
+              <a:spcBef>
+                <a:spcPts val="0"/>
+              </a:spcBef>
+              <a:spcAft>
+                <a:spcPts val="0"/>
+              </a:spcAft>
+            </a:pPr>
+            <a:r>
+              <a:rPr sz="1000" b="1">
+                <a:solidFill>
+                  <a:srgbClr val="0A2B45"/>
+                </a:solidFill>
+                <a:latin typeface="Microsoft YaHei"/>
+                <a:ea typeface="Microsoft YaHei"/>
+                <a:cs typeface="Microsoft YaHei"/>
+              </a:rPr>
+              <a:t>状态机与编排</a:t>
+            </a:r>
+          </a:p>
+          <a:p>
+            <a:pPr algn="ctr" latinLnBrk="0">
+              <a:lnSpc>
+                <a:spcPct val="100000"/>
+              </a:lnSpc>
+              <a:spcBef>
+                <a:spcPts val="0"/>
+              </a:spcBef>
+              <a:spcAft>
+                <a:spcPts val="200"/>
+              </a:spcAft>
+            </a:pPr>
+            <a:r>
+              <a:rPr sz="750" b="0">
                 <a:solidFill>
                   <a:srgbClr val="0F62CE"/>
                 </a:solidFill>
@@ -31266,23 +31480,23 @@
                 <a:ea typeface="Microsoft YaHei"/>
                 <a:cs typeface="Microsoft YaHei"/>
               </a:rPr>
-              <a:t>　Source &amp; Evidence</a:t>
-            </a:r>
-          </a:p>
-          <a:p>
-            <a:pPr algn="l" latinLnBrk="0">
-              <a:lnSpc>
-                <a:spcPct val="100000"/>
-              </a:lnSpc>
-              <a:spcBef>
-                <a:spcPts val="0"/>
-              </a:spcBef>
-              <a:spcAft>
-                <a:spcPts val="0"/>
-              </a:spcAft>
-            </a:pPr>
-            <a:r>
-              <a:rPr sz="900" b="0">
+              <a:t>optimization.py</a:t>
+            </a:r>
+          </a:p>
+          <a:p>
+            <a:pPr algn="ctr" latinLnBrk="0">
+              <a:lnSpc>
+                <a:spcPct val="100000"/>
+              </a:lnSpc>
+              <a:spcBef>
+                <a:spcPts val="0"/>
+              </a:spcBef>
+              <a:spcAft>
+                <a:spcPts val="0"/>
+              </a:spcAft>
+            </a:pPr>
+            <a:r>
+              <a:rPr sz="800" b="0">
                 <a:solidFill>
                   <a:srgbClr val="1B4D69"/>
                 </a:solidFill>
@@ -31290,23 +31504,23 @@
                 <a:ea typeface="Microsoft YaHei"/>
                 <a:cs typeface="Microsoft YaHei"/>
               </a:rPr>
-              <a:t>·　SGLang 原仓库只读</a:t>
-            </a:r>
-          </a:p>
-          <a:p>
-            <a:pPr algn="l" latinLnBrk="0">
-              <a:lnSpc>
-                <a:spcPct val="100000"/>
-              </a:lnSpc>
-              <a:spcBef>
-                <a:spcPts val="0"/>
-              </a:spcBef>
-              <a:spcAft>
-                <a:spcPts val="0"/>
-              </a:spcAft>
-            </a:pPr>
-            <a:r>
-              <a:rPr sz="900" b="0">
+              <a:t>设备锁 · 状态流转</a:t>
+            </a:r>
+          </a:p>
+          <a:p>
+            <a:pPr algn="ctr" latinLnBrk="0">
+              <a:lnSpc>
+                <a:spcPct val="100000"/>
+              </a:lnSpc>
+              <a:spcBef>
+                <a:spcPts val="0"/>
+              </a:spcBef>
+              <a:spcAft>
+                <a:spcPts val="0"/>
+              </a:spcAft>
+            </a:pPr>
+            <a:r>
+              <a:rPr sz="800" b="0">
                 <a:solidFill>
                   <a:srgbClr val="1B4D69"/>
                 </a:solidFill>
@@ -31314,471 +31528,29 @@
                 <a:ea typeface="Microsoft YaHei"/>
                 <a:cs typeface="Microsoft YaHei"/>
               </a:rPr>
-              <a:t>·　有界探针</a:t>
-            </a:r>
-            <a:r>
-              <a:rPr sz="750" b="0">
-                <a:solidFill>
-                  <a:srgbClr val="0F62CE"/>
-                </a:solidFill>
-                <a:latin typeface="Consolas"/>
-                <a:ea typeface="Microsoft YaHei"/>
-                <a:cs typeface="Microsoft YaHei"/>
-              </a:rPr>
-              <a:t>　planner_diagnostics.py</a:t>
-            </a:r>
-          </a:p>
-          <a:p>
-            <a:pPr algn="l" latinLnBrk="0">
-              <a:lnSpc>
-                <a:spcPct val="100000"/>
-              </a:lnSpc>
-              <a:spcBef>
-                <a:spcPts val="0"/>
-              </a:spcBef>
-              <a:spcAft>
-                <a:spcPts val="0"/>
-              </a:spcAft>
-            </a:pPr>
-            <a:r>
-              <a:rPr sz="900" b="0">
-                <a:solidFill>
-                  <a:srgbClr val="1B4D69"/>
-                </a:solidFill>
-                <a:latin typeface="Microsoft YaHei"/>
-                <a:ea typeface="Microsoft YaHei"/>
-                <a:cs typeface="Microsoft YaHei"/>
-              </a:rPr>
-              <a:t>·　逐次留痕</a:t>
-            </a:r>
-            <a:r>
-              <a:rPr sz="750" b="0">
-                <a:solidFill>
-                  <a:srgbClr val="0F62CE"/>
-                </a:solidFill>
-                <a:latin typeface="Consolas"/>
-                <a:ea typeface="Microsoft YaHei"/>
-                <a:cs typeface="Microsoft YaHei"/>
-              </a:rPr>
-              <a:t>　attempts/ · planner/</a:t>
-            </a:r>
-          </a:p>
-          <a:p>
-            <a:pPr algn="l" latinLnBrk="0">
-              <a:lnSpc>
-                <a:spcPct val="100000"/>
-              </a:lnSpc>
-              <a:spcBef>
-                <a:spcPts val="0"/>
-              </a:spcBef>
-              <a:spcAft>
-                <a:spcPts val="0"/>
-              </a:spcAft>
-            </a:pPr>
-            <a:r>
-              <a:rPr sz="900" b="0">
-                <a:solidFill>
-                  <a:srgbClr val="1B4D69"/>
-                </a:solidFill>
-                <a:latin typeface="Microsoft YaHei"/>
-                <a:ea typeface="Microsoft YaHei"/>
-                <a:cs typeface="Microsoft YaHei"/>
-              </a:rPr>
-              <a:t>·　诊断产物 ≤ 64 KiB</a:t>
-            </a:r>
-            <a:r>
-              <a:rPr sz="750" b="0">
-                <a:solidFill>
-                  <a:srgbClr val="0F62CE"/>
-                </a:solidFill>
-                <a:latin typeface="Consolas"/>
-                <a:ea typeface="Microsoft YaHei"/>
-                <a:cs typeface="Microsoft YaHei"/>
-              </a:rPr>
-              <a:t>　probes/</a:t>
-            </a:r>
-          </a:p>
-          <a:p>
-            <a:pPr algn="l" latinLnBrk="0">
-              <a:lnSpc>
-                <a:spcPct val="100000"/>
-              </a:lnSpc>
-              <a:spcBef>
-                <a:spcPts val="0"/>
-              </a:spcBef>
-              <a:spcAft>
-                <a:spcPts val="0"/>
-              </a:spcAft>
-            </a:pPr>
-            <a:r>
-              <a:rPr sz="900" b="0">
-                <a:solidFill>
-                  <a:srgbClr val="1B4D69"/>
-                </a:solidFill>
-                <a:latin typeface="Microsoft YaHei"/>
-                <a:ea typeface="Microsoft YaHei"/>
-                <a:cs typeface="Microsoft YaHei"/>
-              </a:rPr>
-              <a:t>·　冻结快照 + SHA</a:t>
-            </a:r>
-            <a:r>
-              <a:rPr sz="750" b="0">
-                <a:solidFill>
-                  <a:srgbClr val="0F62CE"/>
-                </a:solidFill>
-                <a:latin typeface="Consolas"/>
-                <a:ea typeface="Microsoft YaHei"/>
-                <a:cs typeface="Microsoft YaHei"/>
-              </a:rPr>
-              <a:t>　backup/</a:t>
-            </a:r>
-          </a:p>
-        </p:txBody>
-      </p:sp>
-      <p:sp>
-        <p:nvSpPr>
-          <p:cNvPr id="24" name="Rectangle 23"/>
+              <a:t>中断恢复 · 版本晋升</a:t>
+            </a:r>
+          </a:p>
+        </p:txBody>
+      </p:sp>
+      <p:sp>
+        <p:nvSpPr>
+          <p:cNvPr id="25" name="Rounded Rectangle 24"/>
           <p:cNvSpPr/>
           <p:nvPr/>
         </p:nvSpPr>
         <p:spPr>
           <a:xfrm>
-            <a:off x="8705088" y="3895344"/>
-            <a:ext cx="2937967" cy="1371600"/>
-          </a:xfrm>
-          <a:prstGeom prst="rect">
-            <a:avLst/>
+            <a:off x="4956048" y="1645919"/>
+            <a:ext cx="1554480" cy="621792"/>
+          </a:xfrm>
+          <a:prstGeom prst="roundRect">
+            <a:avLst>
+              <a:gd name="adj" fmla="val 11764"/>
+            </a:avLst>
           </a:prstGeom>
           <a:solidFill>
             <a:srgbClr val="FFFFFF"/>
-          </a:solidFill>
-          <a:ln w="9525">
-            <a:solidFill>
-              <a:srgbClr val="CFE3F0"/>
-            </a:solidFill>
-          </a:ln>
-        </p:spPr>
-        <p:txBody>
-          <a:bodyPr rtlCol="0" anchor="ctr"/>
-          <a:lstStyle/>
-          <a:p>
-            <a:pPr algn="ctr"/>
-          </a:p>
-        </p:txBody>
-      </p:sp>
-      <p:sp>
-        <p:nvSpPr>
-          <p:cNvPr id="25" name="Rectangle 24"/>
-          <p:cNvSpPr/>
-          <p:nvPr/>
-        </p:nvSpPr>
-        <p:spPr>
-          <a:xfrm>
-            <a:off x="8705088" y="3895344"/>
-            <a:ext cx="64008" cy="1371600"/>
-          </a:xfrm>
-          <a:prstGeom prst="rect">
-            <a:avLst/>
-          </a:prstGeom>
-          <a:solidFill>
-            <a:srgbClr val="0F62CE"/>
-          </a:solidFill>
-          <a:ln>
-            <a:noFill/>
-          </a:ln>
-        </p:spPr>
-        <p:txBody>
-          <a:bodyPr rtlCol="0" anchor="ctr"/>
-          <a:lstStyle/>
-          <a:p>
-            <a:pPr algn="ctr"/>
-          </a:p>
-        </p:txBody>
-      </p:sp>
-      <p:sp>
-        <p:nvSpPr>
-          <p:cNvPr id="26" name="TextBox 25"/>
-          <p:cNvSpPr txBox="1"/>
-          <p:nvPr/>
-        </p:nvSpPr>
-        <p:spPr>
-          <a:xfrm>
-            <a:off x="8887967" y="3941063"/>
-            <a:ext cx="2608783" cy="1280160"/>
-          </a:xfrm>
-          <a:prstGeom prst="rect">
-            <a:avLst/>
-          </a:prstGeom>
-          <a:noFill/>
-        </p:spPr>
-        <p:txBody>
-          <a:bodyPr wrap="square" anchor="ctr" lIns="0" tIns="0" rIns="0" bIns="0">
-            <a:noAutofit/>
-          </a:bodyPr>
-          <a:lstStyle/>
-          <a:p>
-            <a:pPr algn="l" latinLnBrk="0">
-              <a:lnSpc>
-                <a:spcPct val="100000"/>
-              </a:lnSpc>
-              <a:spcBef>
-                <a:spcPts val="0"/>
-              </a:spcBef>
-              <a:spcAft>
-                <a:spcPts val="300"/>
-              </a:spcAft>
-            </a:pPr>
-            <a:r>
-              <a:rPr sz="1050" b="1">
-                <a:solidFill>
-                  <a:srgbClr val="0A2B45"/>
-                </a:solidFill>
-                <a:latin typeface="Microsoft YaHei"/>
-                <a:ea typeface="Microsoft YaHei"/>
-                <a:cs typeface="Microsoft YaHei"/>
-              </a:rPr>
-              <a:t>构建与真机评测</a:t>
-            </a:r>
-            <a:r>
-              <a:rPr sz="800" b="1">
-                <a:solidFill>
-                  <a:srgbClr val="0F62CE"/>
-                </a:solidFill>
-                <a:latin typeface="Consolas"/>
-                <a:ea typeface="Microsoft YaHei"/>
-                <a:cs typeface="Microsoft YaHei"/>
-              </a:rPr>
-              <a:t>　Build &amp; Bench</a:t>
-            </a:r>
-          </a:p>
-          <a:p>
-            <a:pPr algn="l" latinLnBrk="0">
-              <a:lnSpc>
-                <a:spcPct val="100000"/>
-              </a:lnSpc>
-              <a:spcBef>
-                <a:spcPts val="0"/>
-              </a:spcBef>
-              <a:spcAft>
-                <a:spcPts val="0"/>
-              </a:spcAft>
-            </a:pPr>
-            <a:r>
-              <a:rPr sz="900" b="0">
-                <a:solidFill>
-                  <a:srgbClr val="1B4D69"/>
-                </a:solidFill>
-                <a:latin typeface="Microsoft YaHei"/>
-                <a:ea typeface="Microsoft YaHei"/>
-                <a:cs typeface="Microsoft YaHei"/>
-              </a:rPr>
-              <a:t>·　原位建版本 · 精确重测</a:t>
-            </a:r>
-            <a:r>
-              <a:rPr sz="750" b="0">
-                <a:solidFill>
-                  <a:srgbClr val="0F62CE"/>
-                </a:solidFill>
-                <a:latin typeface="Consolas"/>
-                <a:ea typeface="Microsoft YaHei"/>
-                <a:cs typeface="Microsoft YaHei"/>
-              </a:rPr>
-              <a:t>　git_workspace.py</a:t>
-            </a:r>
-          </a:p>
-          <a:p>
-            <a:pPr algn="l" latinLnBrk="0">
-              <a:lnSpc>
-                <a:spcPct val="100000"/>
-              </a:lnSpc>
-              <a:spcBef>
-                <a:spcPts val="0"/>
-              </a:spcBef>
-              <a:spcAft>
-                <a:spcPts val="0"/>
-              </a:spcAft>
-            </a:pPr>
-            <a:r>
-              <a:rPr sz="900" b="0">
-                <a:solidFill>
-                  <a:srgbClr val="1B4D69"/>
-                </a:solidFill>
-                <a:latin typeface="Microsoft YaHei"/>
-                <a:ea typeface="Microsoft YaHei"/>
-                <a:cs typeface="Microsoft YaHei"/>
-              </a:rPr>
-              <a:t>·　四道门禁</a:t>
-            </a:r>
-            <a:r>
-              <a:rPr sz="750" b="0">
-                <a:solidFill>
-                  <a:srgbClr val="0F62CE"/>
-                </a:solidFill>
-                <a:latin typeface="Consolas"/>
-                <a:ea typeface="Microsoft YaHei"/>
-                <a:cs typeface="Microsoft YaHei"/>
-              </a:rPr>
-              <a:t>　selfiterate_gates.py</a:t>
-            </a:r>
-          </a:p>
-          <a:p>
-            <a:pPr algn="l" latinLnBrk="0">
-              <a:lnSpc>
-                <a:spcPct val="100000"/>
-              </a:lnSpc>
-              <a:spcBef>
-                <a:spcPts val="0"/>
-              </a:spcBef>
-              <a:spcAft>
-                <a:spcPts val="0"/>
-              </a:spcAft>
-            </a:pPr>
-            <a:r>
-              <a:rPr sz="900" b="0">
-                <a:solidFill>
-                  <a:srgbClr val="1B4D69"/>
-                </a:solidFill>
-                <a:latin typeface="Microsoft YaHei"/>
-                <a:ea typeface="Microsoft YaHei"/>
-                <a:cs typeface="Microsoft YaHei"/>
-              </a:rPr>
-              <a:t>·　C 设备微测 ≥ 2%　数值门 · 质量门</a:t>
-            </a:r>
-          </a:p>
-          <a:p>
-            <a:pPr algn="l" latinLnBrk="0">
-              <a:lnSpc>
-                <a:spcPct val="100000"/>
-              </a:lnSpc>
-              <a:spcBef>
-                <a:spcPts val="0"/>
-              </a:spcBef>
-              <a:spcAft>
-                <a:spcPts val="0"/>
-              </a:spcAft>
-            </a:pPr>
-            <a:r>
-              <a:rPr sz="900" b="0">
-                <a:solidFill>
-                  <a:srgbClr val="1B4D69"/>
-                </a:solidFill>
-                <a:latin typeface="Microsoft YaHei"/>
-                <a:ea typeface="Microsoft YaHei"/>
-                <a:cs typeface="Microsoft YaHei"/>
-              </a:rPr>
-              <a:t>·　D 整模三方 A/B 过噪声门</a:t>
-            </a:r>
-          </a:p>
-          <a:p>
-            <a:pPr algn="l" latinLnBrk="0">
-              <a:lnSpc>
-                <a:spcPct val="100000"/>
-              </a:lnSpc>
-              <a:spcBef>
-                <a:spcPts val="0"/>
-              </a:spcBef>
-              <a:spcAft>
-                <a:spcPts val="0"/>
-              </a:spcAft>
-            </a:pPr>
-            <a:r>
-              <a:rPr sz="900" b="0">
-                <a:solidFill>
-                  <a:srgbClr val="1B4D69"/>
-                </a:solidFill>
-                <a:latin typeface="Microsoft YaHei"/>
-                <a:ea typeface="Microsoft YaHei"/>
-                <a:cs typeface="Microsoft YaHei"/>
-              </a:rPr>
-              <a:t>·　下界账本 · ratio 自检</a:t>
-            </a:r>
-            <a:r>
-              <a:rPr sz="750" b="0">
-                <a:solidFill>
-                  <a:srgbClr val="0F62CE"/>
-                </a:solidFill>
-                <a:latin typeface="Consolas"/>
-                <a:ea typeface="Microsoft YaHei"/>
-                <a:cs typeface="Microsoft YaHei"/>
-              </a:rPr>
-              <a:t>　roofline.py</a:t>
-            </a:r>
-          </a:p>
-          <a:p>
-            <a:pPr algn="l" latinLnBrk="0">
-              <a:lnSpc>
-                <a:spcPct val="100000"/>
-              </a:lnSpc>
-              <a:spcBef>
-                <a:spcPts val="0"/>
-              </a:spcBef>
-              <a:spcAft>
-                <a:spcPts val="0"/>
-              </a:spcAft>
-            </a:pPr>
-            <a:r>
-              <a:rPr sz="900" b="0">
-                <a:solidFill>
-                  <a:srgbClr val="1B4D69"/>
-                </a:solidFill>
-                <a:latin typeface="Microsoft YaHei"/>
-                <a:ea typeface="Microsoft YaHei"/>
-                <a:cs typeface="Microsoft YaHei"/>
-              </a:rPr>
-              <a:t>·　M100 物理卡真机实测</a:t>
-            </a:r>
-          </a:p>
-        </p:txBody>
-      </p:sp>
-      <p:sp>
-        <p:nvSpPr>
-          <p:cNvPr id="27" name="Rectangle 26"/>
-          <p:cNvSpPr/>
-          <p:nvPr/>
-        </p:nvSpPr>
-        <p:spPr>
-          <a:xfrm>
-            <a:off x="4041648" y="1517904"/>
-            <a:ext cx="3840480" cy="3986783"/>
-          </a:xfrm>
-          <a:prstGeom prst="rect">
-            <a:avLst/>
-          </a:prstGeom>
-          <a:solidFill>
-            <a:srgbClr val="FFFFFF"/>
-          </a:solidFill>
-          <a:ln w="9525">
-            <a:solidFill>
-              <a:srgbClr val="AFCEE1"/>
-            </a:solidFill>
-          </a:ln>
-        </p:spPr>
-        <p:txBody>
-          <a:bodyPr rtlCol="0" anchor="ctr"/>
-          <a:lstStyle/>
-          <a:p>
-            <a:pPr algn="ctr"/>
-          </a:p>
-        </p:txBody>
-      </p:sp>
-      <p:sp>
-        <p:nvSpPr>
-          <p:cNvPr id="28" name="Rounded Rectangle 27"/>
-          <p:cNvSpPr/>
-          <p:nvPr/>
-        </p:nvSpPr>
-        <p:spPr>
-          <a:xfrm>
-            <a:off x="4272076" y="1572768"/>
-            <a:ext cx="3379622" cy="493776"/>
-          </a:xfrm>
-          <a:prstGeom prst="roundRect">
-            <a:avLst>
-              <a:gd name="adj" fmla="val 14814"/>
-            </a:avLst>
-          </a:prstGeom>
-          <a:solidFill>
-            <a:srgbClr val="E6F0FC"/>
           </a:solidFill>
           <a:ln w="9525">
             <a:solidFill>
@@ -31787,89 +31559,31 @@
           </a:ln>
         </p:spPr>
         <p:txBody>
-          <a:bodyPr rtlCol="0" anchor="ctr" wrap="square" tIns="36576" bIns="36576">
-            <a:noAutofit/>
-          </a:bodyPr>
-          <a:lstStyle/>
-          <a:p>
-            <a:pPr algn="ctr" latinLnBrk="0">
-              <a:lnSpc>
-                <a:spcPct val="100000"/>
-              </a:lnSpc>
-              <a:spcBef>
-                <a:spcPts val="0"/>
-              </a:spcBef>
-              <a:spcAft>
-                <a:spcPts val="200"/>
-              </a:spcAft>
-            </a:pPr>
-            <a:r>
-              <a:rPr sz="1100" b="1">
-                <a:solidFill>
-                  <a:srgbClr val="0A2B45"/>
-                </a:solidFill>
-                <a:latin typeface="Microsoft YaHei"/>
-                <a:ea typeface="Microsoft YaHei"/>
-                <a:cs typeface="Microsoft YaHei"/>
-              </a:rPr>
-              <a:t>状态机与编排</a:t>
-            </a:r>
-            <a:r>
-              <a:rPr sz="850" b="1">
-                <a:solidFill>
-                  <a:srgbClr val="0F62CE"/>
-                </a:solidFill>
-                <a:latin typeface="Consolas"/>
-                <a:ea typeface="Microsoft YaHei"/>
-                <a:cs typeface="Microsoft YaHei"/>
-              </a:rPr>
-              <a:t>　Orchestration</a:t>
-            </a:r>
-          </a:p>
-          <a:p>
-            <a:pPr algn="ctr" latinLnBrk="0">
-              <a:lnSpc>
-                <a:spcPct val="100000"/>
-              </a:lnSpc>
-              <a:spcBef>
-                <a:spcPts val="0"/>
-              </a:spcBef>
-              <a:spcAft>
-                <a:spcPts val="0"/>
-              </a:spcAft>
-            </a:pPr>
-            <a:r>
-              <a:rPr sz="850" b="0">
-                <a:solidFill>
-                  <a:srgbClr val="1B4D69"/>
-                </a:solidFill>
-                <a:latin typeface="Microsoft YaHei"/>
-                <a:ea typeface="Microsoft YaHei"/>
-                <a:cs typeface="Microsoft YaHei"/>
-              </a:rPr>
-              <a:t>optimization.py　设备锁 · 状态流转 · 中断恢复</a:t>
-            </a:r>
-          </a:p>
-        </p:txBody>
-      </p:sp>
-      <p:sp>
-        <p:nvSpPr>
-          <p:cNvPr id="29" name="Rounded Rectangle 28"/>
+          <a:bodyPr rtlCol="0" anchor="ctr"/>
+          <a:lstStyle/>
+          <a:p>
+            <a:pPr algn="ctr"/>
+          </a:p>
+        </p:txBody>
+      </p:sp>
+      <p:sp>
+        <p:nvSpPr>
+          <p:cNvPr id="26" name="Rounded Rectangle 25"/>
           <p:cNvSpPr/>
           <p:nvPr/>
         </p:nvSpPr>
         <p:spPr>
           <a:xfrm>
-            <a:off x="4272076" y="2194560"/>
-            <a:ext cx="3379622" cy="603504"/>
+            <a:off x="4901183" y="1700784"/>
+            <a:ext cx="1554480" cy="621792"/>
           </a:xfrm>
           <a:prstGeom prst="roundRect">
             <a:avLst>
-              <a:gd name="adj" fmla="val 12121"/>
+              <a:gd name="adj" fmla="val 11764"/>
             </a:avLst>
           </a:prstGeom>
           <a:solidFill>
-            <a:srgbClr val="E6F0FC"/>
+            <a:srgbClr val="FFFFFF"/>
           </a:solidFill>
           <a:ln w="9525">
             <a:solidFill>
@@ -31878,6 +31592,39 @@
           </a:ln>
         </p:spPr>
         <p:txBody>
+          <a:bodyPr rtlCol="0" anchor="ctr"/>
+          <a:lstStyle/>
+          <a:p>
+            <a:pPr algn="ctr"/>
+          </a:p>
+        </p:txBody>
+      </p:sp>
+      <p:sp>
+        <p:nvSpPr>
+          <p:cNvPr id="27" name="Rounded Rectangle 26"/>
+          <p:cNvSpPr/>
+          <p:nvPr/>
+        </p:nvSpPr>
+        <p:spPr>
+          <a:xfrm>
+            <a:off x="4846320" y="1755648"/>
+            <a:ext cx="1554480" cy="621792"/>
+          </a:xfrm>
+          <a:prstGeom prst="roundRect">
+            <a:avLst>
+              <a:gd name="adj" fmla="val 11764"/>
+            </a:avLst>
+          </a:prstGeom>
+          <a:solidFill>
+            <a:srgbClr val="E6F0FC"/>
+          </a:solidFill>
+          <a:ln w="12700">
+            <a:solidFill>
+              <a:srgbClr val="0F62CE"/>
+            </a:solidFill>
+          </a:ln>
+        </p:spPr>
+        <p:txBody>
           <a:bodyPr rtlCol="0" anchor="ctr" wrap="square" tIns="36576" bIns="36576">
             <a:noAutofit/>
           </a:bodyPr>
@@ -31891,11 +31638,11 @@
                 <a:spcPts val="0"/>
               </a:spcBef>
               <a:spcAft>
-                <a:spcPts val="200"/>
-              </a:spcAft>
-            </a:pPr>
-            <a:r>
-              <a:rPr sz="1100" b="1">
+                <a:spcPts val="0"/>
+              </a:spcAft>
+            </a:pPr>
+            <a:r>
+              <a:rPr sz="950" b="1">
                 <a:solidFill>
                   <a:srgbClr val="0A2B45"/>
                 </a:solidFill>
@@ -31903,10 +31650,23 @@
                 <a:ea typeface="Microsoft YaHei"/>
                 <a:cs typeface="Microsoft YaHei"/>
               </a:rPr>
-              <a:t>通信与记忆</a:t>
-            </a:r>
-            <a:r>
-              <a:rPr sz="850" b="1">
+              <a:t>试验队列</a:t>
+            </a:r>
+          </a:p>
+          <a:p>
+            <a:pPr algn="ctr" latinLnBrk="0">
+              <a:lnSpc>
+                <a:spcPct val="100000"/>
+              </a:lnSpc>
+              <a:spcBef>
+                <a:spcPts val="0"/>
+              </a:spcBef>
+              <a:spcAft>
+                <a:spcPts val="0"/>
+              </a:spcAft>
+            </a:pPr>
+            <a:r>
+              <a:rPr sz="850" b="0">
                 <a:solidFill>
                   <a:srgbClr val="0F62CE"/>
                 </a:solidFill>
@@ -31914,7 +31674,7 @@
                 <a:ea typeface="Microsoft YaHei"/>
                 <a:cs typeface="Microsoft YaHei"/>
               </a:rPr>
-              <a:t>　Mailbox / Memory</a:t>
+              <a:t>试验 1 … 试验 35</a:t>
             </a:r>
           </a:p>
           <a:p>
@@ -31930,53 +31690,29 @@
               </a:spcAft>
             </a:pPr>
             <a:r>
-              <a:rPr sz="850" b="0">
-                <a:solidFill>
-                  <a:srgbClr val="1B4D69"/>
-                </a:solidFill>
-                <a:latin typeface="Microsoft YaHei"/>
-                <a:ea typeface="Microsoft YaHei"/>
-                <a:cs typeface="Microsoft YaHei"/>
-              </a:rPr>
-              <a:t>planner_mailbox.py　UUID + SHA + schema</a:t>
-            </a:r>
-          </a:p>
-          <a:p>
-            <a:pPr algn="ctr" latinLnBrk="0">
-              <a:lnSpc>
-                <a:spcPct val="100000"/>
-              </a:lnSpc>
-              <a:spcBef>
-                <a:spcPts val="0"/>
-              </a:spcBef>
-              <a:spcAft>
-                <a:spcPts val="0"/>
-              </a:spcAft>
-            </a:pPr>
-            <a:r>
-              <a:rPr sz="850" b="0">
-                <a:solidFill>
-                  <a:srgbClr val="1B4D69"/>
-                </a:solidFill>
-                <a:latin typeface="Microsoft YaHei"/>
-                <a:ea typeface="Microsoft YaHei"/>
-                <a:cs typeface="Microsoft YaHei"/>
-              </a:rPr>
-              <a:t>planner_memory.py　摘要 + 被拒原因 ≤ 18 KB</a:t>
+              <a:rPr sz="750" b="0">
+                <a:solidFill>
+                  <a:srgbClr val="40708B"/>
+                </a:solidFill>
+                <a:latin typeface="Microsoft YaHei"/>
+                <a:ea typeface="Microsoft YaHei"/>
+                <a:cs typeface="Microsoft YaHei"/>
+              </a:rPr>
+              <a:t>attempts/ 全量留痕</a:t>
             </a:r>
           </a:p>
         </p:txBody>
       </p:sp>
       <p:cxnSp>
         <p:nvCxnSpPr>
-          <p:cNvPr id="30" name="Connector 29"/>
+          <p:cNvPr id="28" name="Connector 27"/>
           <p:cNvCxnSpPr/>
           <p:nvPr/>
         </p:nvCxnSpPr>
         <p:spPr>
           <a:xfrm>
-            <a:off x="5961888" y="2075687"/>
-            <a:ext cx="0" cy="109729"/>
+            <a:off x="4407407" y="2066544"/>
+            <a:ext cx="402337" cy="0"/>
           </a:xfrm>
           <a:prstGeom prst="line">
             <a:avLst/>
@@ -31991,24 +31727,837 @@
       </p:cxnSp>
       <p:sp>
         <p:nvSpPr>
-          <p:cNvPr id="31" name="Rounded Rectangle 30"/>
+          <p:cNvPr id="29" name="Rounded Rectangle 28"/>
           <p:cNvSpPr/>
           <p:nvPr/>
         </p:nvSpPr>
         <p:spPr>
           <a:xfrm>
-            <a:off x="4272076" y="2926080"/>
-            <a:ext cx="3379622" cy="1280160"/>
+            <a:off x="4398263" y="1965960"/>
+            <a:ext cx="420624" cy="201168"/>
           </a:xfrm>
           <a:prstGeom prst="roundRect">
             <a:avLst>
-              <a:gd name="adj" fmla="val 5714"/>
+              <a:gd name="adj" fmla="val 50000"/>
             </a:avLst>
           </a:prstGeom>
           <a:solidFill>
-            <a:srgbClr val="FBE6D4"/>
+            <a:srgbClr val="FFFFFF"/>
           </a:solidFill>
           <a:ln w="9525">
+            <a:solidFill>
+              <a:srgbClr val="0F62CE"/>
+            </a:solidFill>
+          </a:ln>
+        </p:spPr>
+        <p:txBody>
+          <a:bodyPr rtlCol="0" anchor="ctr" wrap="square" lIns="18288" tIns="0" rIns="18288" bIns="0">
+            <a:noAutofit/>
+          </a:bodyPr>
+          <a:lstStyle/>
+          <a:p>
+            <a:pPr algn="ctr" latinLnBrk="0">
+              <a:lnSpc>
+                <a:spcPct val="100000"/>
+              </a:lnSpc>
+              <a:spcBef>
+                <a:spcPts val="0"/>
+              </a:spcBef>
+              <a:spcAft>
+                <a:spcPts val="0"/>
+              </a:spcAft>
+            </a:pPr>
+            <a:r>
+              <a:rPr sz="750" b="1">
+                <a:solidFill>
+                  <a:srgbClr val="0F62CE"/>
+                </a:solidFill>
+                <a:latin typeface="Microsoft YaHei"/>
+                <a:ea typeface="Microsoft YaHei"/>
+                <a:cs typeface="Microsoft YaHei"/>
+              </a:rPr>
+              <a:t>拆解</a:t>
+            </a:r>
+          </a:p>
+        </p:txBody>
+      </p:sp>
+      <p:sp>
+        <p:nvSpPr>
+          <p:cNvPr id="30" name="TextBox 29"/>
+          <p:cNvSpPr txBox="1"/>
+          <p:nvPr/>
+        </p:nvSpPr>
+        <p:spPr>
+          <a:xfrm>
+            <a:off x="3054096" y="2542032"/>
+            <a:ext cx="3657599" cy="201168"/>
+          </a:xfrm>
+          <a:prstGeom prst="rect">
+            <a:avLst/>
+          </a:prstGeom>
+          <a:noFill/>
+        </p:spPr>
+        <p:txBody>
+          <a:bodyPr wrap="square" anchor="ctr" lIns="0" tIns="0" rIns="0" bIns="0">
+            <a:noAutofit/>
+          </a:bodyPr>
+          <a:lstStyle/>
+          <a:p>
+            <a:pPr algn="l" latinLnBrk="0">
+              <a:lnSpc>
+                <a:spcPct val="100000"/>
+              </a:lnSpc>
+              <a:spcBef>
+                <a:spcPts val="0"/>
+              </a:spcBef>
+              <a:spcAft>
+                <a:spcPts val="0"/>
+              </a:spcAft>
+            </a:pPr>
+            <a:r>
+              <a:rPr sz="900" b="1">
+                <a:solidFill>
+                  <a:srgbClr val="1B4D69"/>
+                </a:solidFill>
+                <a:latin typeface="Microsoft YaHei"/>
+                <a:ea typeface="Microsoft YaHei"/>
+                <a:cs typeface="Microsoft YaHei"/>
+              </a:rPr>
+              <a:t>判决后对试验队列的三类处置</a:t>
+            </a:r>
+          </a:p>
+        </p:txBody>
+      </p:sp>
+      <p:sp>
+        <p:nvSpPr>
+          <p:cNvPr id="31" name="TextBox 30"/>
+          <p:cNvSpPr txBox="1"/>
+          <p:nvPr/>
+        </p:nvSpPr>
+        <p:spPr>
+          <a:xfrm>
+            <a:off x="3108960" y="2724912"/>
+            <a:ext cx="1609344" cy="164592"/>
+          </a:xfrm>
+          <a:prstGeom prst="rect">
+            <a:avLst/>
+          </a:prstGeom>
+          <a:noFill/>
+        </p:spPr>
+        <p:txBody>
+          <a:bodyPr wrap="square" anchor="ctr" lIns="0" tIns="0" rIns="0" bIns="0">
+            <a:noAutofit/>
+          </a:bodyPr>
+          <a:lstStyle/>
+          <a:p>
+            <a:pPr algn="l" latinLnBrk="0">
+              <a:lnSpc>
+                <a:spcPct val="100000"/>
+              </a:lnSpc>
+              <a:spcBef>
+                <a:spcPts val="0"/>
+              </a:spcBef>
+              <a:spcAft>
+                <a:spcPts val="0"/>
+              </a:spcAft>
+            </a:pPr>
+            <a:r>
+              <a:rPr sz="900" b="1">
+                <a:solidFill>
+                  <a:srgbClr val="0A2B45"/>
+                </a:solidFill>
+                <a:latin typeface="Microsoft YaHei"/>
+                <a:ea typeface="Microsoft YaHei"/>
+                <a:cs typeface="Microsoft YaHei"/>
+              </a:rPr>
+              <a:t>晋升</a:t>
+            </a:r>
+            <a:r>
+              <a:rPr sz="750" b="1">
+                <a:solidFill>
+                  <a:srgbClr val="40708B"/>
+                </a:solidFill>
+                <a:latin typeface="Consolas"/>
+                <a:ea typeface="Microsoft YaHei"/>
+                <a:cs typeface="Microsoft YaHei"/>
+              </a:rPr>
+              <a:t>　Promotion</a:t>
+            </a:r>
+          </a:p>
+        </p:txBody>
+      </p:sp>
+      <p:sp>
+        <p:nvSpPr>
+          <p:cNvPr id="32" name="Rounded Rectangle 31"/>
+          <p:cNvSpPr/>
+          <p:nvPr/>
+        </p:nvSpPr>
+        <p:spPr>
+          <a:xfrm>
+            <a:off x="3163824" y="2944368"/>
+            <a:ext cx="1609344" cy="438912"/>
+          </a:xfrm>
+          <a:prstGeom prst="roundRect">
+            <a:avLst>
+              <a:gd name="adj" fmla="val 16666"/>
+            </a:avLst>
+          </a:prstGeom>
+          <a:solidFill>
+            <a:srgbClr val="FFFFFF"/>
+          </a:solidFill>
+          <a:ln w="9525">
+            <a:solidFill>
+              <a:srgbClr val="0F62CE"/>
+            </a:solidFill>
+          </a:ln>
+        </p:spPr>
+        <p:txBody>
+          <a:bodyPr rtlCol="0" anchor="ctr"/>
+          <a:lstStyle/>
+          <a:p>
+            <a:pPr algn="ctr"/>
+          </a:p>
+        </p:txBody>
+      </p:sp>
+      <p:sp>
+        <p:nvSpPr>
+          <p:cNvPr id="33" name="Rounded Rectangle 32"/>
+          <p:cNvSpPr/>
+          <p:nvPr/>
+        </p:nvSpPr>
+        <p:spPr>
+          <a:xfrm>
+            <a:off x="3108960" y="2999232"/>
+            <a:ext cx="1609344" cy="438912"/>
+          </a:xfrm>
+          <a:prstGeom prst="roundRect">
+            <a:avLst>
+              <a:gd name="adj" fmla="val 16666"/>
+            </a:avLst>
+          </a:prstGeom>
+          <a:solidFill>
+            <a:srgbClr val="E6F0FC"/>
+          </a:solidFill>
+          <a:ln w="12700">
+            <a:solidFill>
+              <a:srgbClr val="0F62CE"/>
+            </a:solidFill>
+          </a:ln>
+        </p:spPr>
+        <p:txBody>
+          <a:bodyPr rtlCol="0" anchor="ctr" wrap="square" tIns="36576" bIns="36576">
+            <a:noAutofit/>
+          </a:bodyPr>
+          <a:lstStyle/>
+          <a:p>
+            <a:pPr algn="ctr" latinLnBrk="0">
+              <a:lnSpc>
+                <a:spcPct val="100000"/>
+              </a:lnSpc>
+              <a:spcBef>
+                <a:spcPts val="0"/>
+              </a:spcBef>
+              <a:spcAft>
+                <a:spcPts val="0"/>
+              </a:spcAft>
+            </a:pPr>
+            <a:r>
+              <a:rPr sz="800" b="0">
+                <a:solidFill>
+                  <a:srgbClr val="123C5B"/>
+                </a:solidFill>
+                <a:latin typeface="Microsoft YaHei"/>
+                <a:ea typeface="Microsoft YaHei"/>
+                <a:cs typeface="Microsoft YaHei"/>
+              </a:rPr>
+              <a:t>过四道门禁 → 晋升基线</a:t>
+            </a:r>
+          </a:p>
+          <a:p>
+            <a:pPr algn="ctr" latinLnBrk="0">
+              <a:lnSpc>
+                <a:spcPct val="100000"/>
+              </a:lnSpc>
+              <a:spcBef>
+                <a:spcPts val="0"/>
+              </a:spcBef>
+              <a:spcAft>
+                <a:spcPts val="0"/>
+              </a:spcAft>
+            </a:pPr>
+            <a:r>
+              <a:rPr sz="750" b="0">
+                <a:solidFill>
+                  <a:srgbClr val="40708B"/>
+                </a:solidFill>
+                <a:latin typeface="Microsoft YaHei"/>
+                <a:ea typeface="Microsoft YaHei"/>
+                <a:cs typeface="Microsoft YaHei"/>
+              </a:rPr>
+              <a:t>best.json 更新</a:t>
+            </a:r>
+          </a:p>
+        </p:txBody>
+      </p:sp>
+      <p:sp>
+        <p:nvSpPr>
+          <p:cNvPr id="34" name="TextBox 33"/>
+          <p:cNvSpPr txBox="1"/>
+          <p:nvPr/>
+        </p:nvSpPr>
+        <p:spPr>
+          <a:xfrm>
+            <a:off x="3108960" y="3456432"/>
+            <a:ext cx="1609344" cy="164592"/>
+          </a:xfrm>
+          <a:prstGeom prst="rect">
+            <a:avLst/>
+          </a:prstGeom>
+          <a:noFill/>
+        </p:spPr>
+        <p:txBody>
+          <a:bodyPr wrap="square" anchor="ctr" lIns="0" tIns="0" rIns="0" bIns="0">
+            <a:noAutofit/>
+          </a:bodyPr>
+          <a:lstStyle/>
+          <a:p>
+            <a:pPr algn="l" latinLnBrk="0">
+              <a:lnSpc>
+                <a:spcPct val="100000"/>
+              </a:lnSpc>
+              <a:spcBef>
+                <a:spcPts val="0"/>
+              </a:spcBef>
+              <a:spcAft>
+                <a:spcPts val="0"/>
+              </a:spcAft>
+            </a:pPr>
+            <a:r>
+              <a:rPr sz="900" b="1">
+                <a:solidFill>
+                  <a:srgbClr val="0A2B45"/>
+                </a:solidFill>
+                <a:latin typeface="Microsoft YaHei"/>
+                <a:ea typeface="Microsoft YaHei"/>
+                <a:cs typeface="Microsoft YaHei"/>
+              </a:rPr>
+              <a:t>打回</a:t>
+            </a:r>
+            <a:r>
+              <a:rPr sz="750" b="1">
+                <a:solidFill>
+                  <a:srgbClr val="40708B"/>
+                </a:solidFill>
+                <a:latin typeface="Consolas"/>
+                <a:ea typeface="Microsoft YaHei"/>
+                <a:cs typeface="Microsoft YaHei"/>
+              </a:rPr>
+              <a:t>　Rejection</a:t>
+            </a:r>
+          </a:p>
+        </p:txBody>
+      </p:sp>
+      <p:sp>
+        <p:nvSpPr>
+          <p:cNvPr id="35" name="Rounded Rectangle 34"/>
+          <p:cNvSpPr/>
+          <p:nvPr/>
+        </p:nvSpPr>
+        <p:spPr>
+          <a:xfrm>
+            <a:off x="3163824" y="3675888"/>
+            <a:ext cx="1609344" cy="438912"/>
+          </a:xfrm>
+          <a:prstGeom prst="roundRect">
+            <a:avLst>
+              <a:gd name="adj" fmla="val 16666"/>
+            </a:avLst>
+          </a:prstGeom>
+          <a:solidFill>
+            <a:srgbClr val="FFFFFF"/>
+          </a:solidFill>
+          <a:ln w="9525">
+            <a:solidFill>
+              <a:srgbClr val="0F62CE"/>
+            </a:solidFill>
+          </a:ln>
+        </p:spPr>
+        <p:txBody>
+          <a:bodyPr rtlCol="0" anchor="ctr"/>
+          <a:lstStyle/>
+          <a:p>
+            <a:pPr algn="ctr"/>
+          </a:p>
+        </p:txBody>
+      </p:sp>
+      <p:sp>
+        <p:nvSpPr>
+          <p:cNvPr id="36" name="Rounded Rectangle 35"/>
+          <p:cNvSpPr/>
+          <p:nvPr/>
+        </p:nvSpPr>
+        <p:spPr>
+          <a:xfrm>
+            <a:off x="3108960" y="3730752"/>
+            <a:ext cx="1609344" cy="438912"/>
+          </a:xfrm>
+          <a:prstGeom prst="roundRect">
+            <a:avLst>
+              <a:gd name="adj" fmla="val 16666"/>
+            </a:avLst>
+          </a:prstGeom>
+          <a:solidFill>
+            <a:srgbClr val="E6F0FC"/>
+          </a:solidFill>
+          <a:ln w="12700">
+            <a:solidFill>
+              <a:srgbClr val="0F62CE"/>
+            </a:solidFill>
+          </a:ln>
+        </p:spPr>
+        <p:txBody>
+          <a:bodyPr rtlCol="0" anchor="ctr" wrap="square" tIns="36576" bIns="36576">
+            <a:noAutofit/>
+          </a:bodyPr>
+          <a:lstStyle/>
+          <a:p>
+            <a:pPr algn="ctr" latinLnBrk="0">
+              <a:lnSpc>
+                <a:spcPct val="100000"/>
+              </a:lnSpc>
+              <a:spcBef>
+                <a:spcPts val="0"/>
+              </a:spcBef>
+              <a:spcAft>
+                <a:spcPts val="0"/>
+              </a:spcAft>
+            </a:pPr>
+            <a:r>
+              <a:rPr sz="800" b="0">
+                <a:solidFill>
+                  <a:srgbClr val="123C5B"/>
+                </a:solidFill>
+                <a:latin typeface="Microsoft YaHei"/>
+                <a:ea typeface="Microsoft YaHei"/>
+                <a:cs typeface="Microsoft YaHei"/>
+              </a:rPr>
+              <a:t>未过门禁 → 被拒原因进记忆</a:t>
+            </a:r>
+          </a:p>
+          <a:p>
+            <a:pPr algn="ctr" latinLnBrk="0">
+              <a:lnSpc>
+                <a:spcPct val="100000"/>
+              </a:lnSpc>
+              <a:spcBef>
+                <a:spcPts val="0"/>
+              </a:spcBef>
+              <a:spcAft>
+                <a:spcPts val="0"/>
+              </a:spcAft>
+            </a:pPr>
+            <a:r>
+              <a:rPr sz="750" b="0">
+                <a:solidFill>
+                  <a:srgbClr val="40708B"/>
+                </a:solidFill>
+                <a:latin typeface="Microsoft YaHei"/>
+                <a:ea typeface="Microsoft YaHei"/>
+                <a:cs typeface="Microsoft YaHei"/>
+              </a:rPr>
+              <a:t>planner_memory.py 滚动压缩</a:t>
+            </a:r>
+          </a:p>
+        </p:txBody>
+      </p:sp>
+      <p:sp>
+        <p:nvSpPr>
+          <p:cNvPr id="37" name="TextBox 36"/>
+          <p:cNvSpPr txBox="1"/>
+          <p:nvPr/>
+        </p:nvSpPr>
+        <p:spPr>
+          <a:xfrm>
+            <a:off x="3108960" y="4187952"/>
+            <a:ext cx="1609344" cy="164592"/>
+          </a:xfrm>
+          <a:prstGeom prst="rect">
+            <a:avLst/>
+          </a:prstGeom>
+          <a:noFill/>
+        </p:spPr>
+        <p:txBody>
+          <a:bodyPr wrap="square" anchor="ctr" lIns="0" tIns="0" rIns="0" bIns="0">
+            <a:noAutofit/>
+          </a:bodyPr>
+          <a:lstStyle/>
+          <a:p>
+            <a:pPr algn="l" latinLnBrk="0">
+              <a:lnSpc>
+                <a:spcPct val="100000"/>
+              </a:lnSpc>
+              <a:spcBef>
+                <a:spcPts val="0"/>
+              </a:spcBef>
+              <a:spcAft>
+                <a:spcPts val="0"/>
+              </a:spcAft>
+            </a:pPr>
+            <a:r>
+              <a:rPr sz="900" b="1">
+                <a:solidFill>
+                  <a:srgbClr val="0A2B45"/>
+                </a:solidFill>
+                <a:latin typeface="Microsoft YaHei"/>
+                <a:ea typeface="Microsoft YaHei"/>
+                <a:cs typeface="Microsoft YaHei"/>
+              </a:rPr>
+              <a:t>回退</a:t>
+            </a:r>
+            <a:r>
+              <a:rPr sz="750" b="1">
+                <a:solidFill>
+                  <a:srgbClr val="40708B"/>
+                </a:solidFill>
+                <a:latin typeface="Consolas"/>
+                <a:ea typeface="Microsoft YaHei"/>
+                <a:cs typeface="Microsoft YaHei"/>
+              </a:rPr>
+              <a:t>　Rollback</a:t>
+            </a:r>
+          </a:p>
+        </p:txBody>
+      </p:sp>
+      <p:sp>
+        <p:nvSpPr>
+          <p:cNvPr id="38" name="Rounded Rectangle 37"/>
+          <p:cNvSpPr/>
+          <p:nvPr/>
+        </p:nvSpPr>
+        <p:spPr>
+          <a:xfrm>
+            <a:off x="3163824" y="4407408"/>
+            <a:ext cx="1609344" cy="438912"/>
+          </a:xfrm>
+          <a:prstGeom prst="roundRect">
+            <a:avLst>
+              <a:gd name="adj" fmla="val 16666"/>
+            </a:avLst>
+          </a:prstGeom>
+          <a:solidFill>
+            <a:srgbClr val="FFFFFF"/>
+          </a:solidFill>
+          <a:ln w="9525">
+            <a:solidFill>
+              <a:srgbClr val="0F62CE"/>
+            </a:solidFill>
+          </a:ln>
+        </p:spPr>
+        <p:txBody>
+          <a:bodyPr rtlCol="0" anchor="ctr"/>
+          <a:lstStyle/>
+          <a:p>
+            <a:pPr algn="ctr"/>
+          </a:p>
+        </p:txBody>
+      </p:sp>
+      <p:sp>
+        <p:nvSpPr>
+          <p:cNvPr id="39" name="Rounded Rectangle 38"/>
+          <p:cNvSpPr/>
+          <p:nvPr/>
+        </p:nvSpPr>
+        <p:spPr>
+          <a:xfrm>
+            <a:off x="3108960" y="4462272"/>
+            <a:ext cx="1609344" cy="438912"/>
+          </a:xfrm>
+          <a:prstGeom prst="roundRect">
+            <a:avLst>
+              <a:gd name="adj" fmla="val 16666"/>
+            </a:avLst>
+          </a:prstGeom>
+          <a:solidFill>
+            <a:srgbClr val="E6F0FC"/>
+          </a:solidFill>
+          <a:ln w="12700">
+            <a:solidFill>
+              <a:srgbClr val="0F62CE"/>
+            </a:solidFill>
+          </a:ln>
+        </p:spPr>
+        <p:txBody>
+          <a:bodyPr rtlCol="0" anchor="ctr" wrap="square" tIns="36576" bIns="36576">
+            <a:noAutofit/>
+          </a:bodyPr>
+          <a:lstStyle/>
+          <a:p>
+            <a:pPr algn="ctr" latinLnBrk="0">
+              <a:lnSpc>
+                <a:spcPct val="100000"/>
+              </a:lnSpc>
+              <a:spcBef>
+                <a:spcPts val="0"/>
+              </a:spcBef>
+              <a:spcAft>
+                <a:spcPts val="0"/>
+              </a:spcAft>
+            </a:pPr>
+            <a:r>
+              <a:rPr sz="800" b="0">
+                <a:solidFill>
+                  <a:srgbClr val="123C5B"/>
+                </a:solidFill>
+                <a:latin typeface="Microsoft YaHei"/>
+                <a:ea typeface="Microsoft YaHei"/>
+                <a:cs typeface="Microsoft YaHei"/>
+              </a:rPr>
+              <a:t>构建漂移 → 工作区回退</a:t>
+            </a:r>
+          </a:p>
+          <a:p>
+            <a:pPr algn="ctr" latinLnBrk="0">
+              <a:lnSpc>
+                <a:spcPct val="100000"/>
+              </a:lnSpc>
+              <a:spcBef>
+                <a:spcPts val="0"/>
+              </a:spcBef>
+              <a:spcAft>
+                <a:spcPts val="0"/>
+              </a:spcAft>
+            </a:pPr>
+            <a:r>
+              <a:rPr sz="750" b="0">
+                <a:solidFill>
+                  <a:srgbClr val="40708B"/>
+                </a:solidFill>
+                <a:latin typeface="Microsoft YaHei"/>
+                <a:ea typeface="Microsoft YaHei"/>
+                <a:cs typeface="Microsoft YaHei"/>
+              </a:rPr>
+              <a:t>精确重测后再判</a:t>
+            </a:r>
+          </a:p>
+        </p:txBody>
+      </p:sp>
+      <p:sp>
+        <p:nvSpPr>
+          <p:cNvPr id="40" name="Rounded Rectangle 39"/>
+          <p:cNvSpPr/>
+          <p:nvPr/>
+        </p:nvSpPr>
+        <p:spPr>
+          <a:xfrm>
+            <a:off x="5047488" y="3584448"/>
+            <a:ext cx="1792224" cy="731520"/>
+          </a:xfrm>
+          <a:prstGeom prst="roundRect">
+            <a:avLst>
+              <a:gd name="adj" fmla="val 10000"/>
+            </a:avLst>
+          </a:prstGeom>
+          <a:solidFill>
+            <a:srgbClr val="C9E1FC"/>
+          </a:solidFill>
+          <a:ln w="12700">
+            <a:solidFill>
+              <a:srgbClr val="0F62CE"/>
+            </a:solidFill>
+          </a:ln>
+        </p:spPr>
+        <p:txBody>
+          <a:bodyPr rtlCol="0" anchor="ctr" wrap="square" tIns="36576" bIns="36576">
+            <a:noAutofit/>
+          </a:bodyPr>
+          <a:lstStyle/>
+          <a:p>
+            <a:pPr algn="ctr" latinLnBrk="0">
+              <a:lnSpc>
+                <a:spcPct val="100000"/>
+              </a:lnSpc>
+              <a:spcBef>
+                <a:spcPts val="0"/>
+              </a:spcBef>
+              <a:spcAft>
+                <a:spcPts val="0"/>
+              </a:spcAft>
+            </a:pPr>
+            <a:r>
+              <a:rPr sz="1000" b="1">
+                <a:solidFill>
+                  <a:srgbClr val="0A2B45"/>
+                </a:solidFill>
+                <a:latin typeface="Microsoft YaHei"/>
+                <a:ea typeface="Microsoft YaHei"/>
+                <a:cs typeface="Microsoft YaHei"/>
+              </a:rPr>
+              <a:t>判决与晋升</a:t>
+            </a:r>
+          </a:p>
+          <a:p>
+            <a:pPr algn="ctr" latinLnBrk="0">
+              <a:lnSpc>
+                <a:spcPct val="100000"/>
+              </a:lnSpc>
+              <a:spcBef>
+                <a:spcPts val="0"/>
+              </a:spcBef>
+              <a:spcAft>
+                <a:spcPts val="200"/>
+              </a:spcAft>
+            </a:pPr>
+            <a:r>
+              <a:rPr sz="750" b="0">
+                <a:solidFill>
+                  <a:srgbClr val="0F62CE"/>
+                </a:solidFill>
+                <a:latin typeface="Consolas"/>
+                <a:ea typeface="Microsoft YaHei"/>
+                <a:cs typeface="Microsoft YaHei"/>
+              </a:rPr>
+              <a:t>selfiterate.py</a:t>
+            </a:r>
+          </a:p>
+          <a:p>
+            <a:pPr algn="ctr" latinLnBrk="0">
+              <a:lnSpc>
+                <a:spcPct val="100000"/>
+              </a:lnSpc>
+              <a:spcBef>
+                <a:spcPts val="0"/>
+              </a:spcBef>
+              <a:spcAft>
+                <a:spcPts val="0"/>
+              </a:spcAft>
+            </a:pPr>
+            <a:r>
+              <a:rPr sz="800" b="0">
+                <a:solidFill>
+                  <a:srgbClr val="1B4D69"/>
+                </a:solidFill>
+                <a:latin typeface="Microsoft YaHei"/>
+                <a:ea typeface="Microsoft YaHei"/>
+                <a:cs typeface="Microsoft YaHei"/>
+              </a:rPr>
+              <a:t>比对下界账本 · 核验真实收益</a:t>
+            </a:r>
+          </a:p>
+          <a:p>
+            <a:pPr algn="ctr" latinLnBrk="0">
+              <a:lnSpc>
+                <a:spcPct val="100000"/>
+              </a:lnSpc>
+              <a:spcBef>
+                <a:spcPts val="0"/>
+              </a:spcBef>
+              <a:spcAft>
+                <a:spcPts val="0"/>
+              </a:spcAft>
+            </a:pPr>
+            <a:r>
+              <a:rPr sz="800" b="0">
+                <a:solidFill>
+                  <a:srgbClr val="1B4D69"/>
+                </a:solidFill>
+                <a:latin typeface="Microsoft YaHei"/>
+                <a:ea typeface="Microsoft YaHei"/>
+                <a:cs typeface="Microsoft YaHei"/>
+              </a:rPr>
+              <a:t>晋升基线 · 生成判决报告</a:t>
+            </a:r>
+          </a:p>
+        </p:txBody>
+      </p:sp>
+      <p:cxnSp>
+        <p:nvCxnSpPr>
+          <p:cNvPr id="41" name="Connector 40"/>
+          <p:cNvCxnSpPr/>
+          <p:nvPr/>
+        </p:nvCxnSpPr>
+        <p:spPr>
+          <a:xfrm flipH="1" flipV="1">
+            <a:off x="4809744" y="3218687"/>
+            <a:ext cx="201168" cy="731521"/>
+          </a:xfrm>
+          <a:prstGeom prst="line">
+            <a:avLst/>
+          </a:prstGeom>
+          <a:ln w="15875">
+            <a:solidFill>
+              <a:srgbClr val="0F62CE"/>
+            </a:solidFill>
+            <a:headEnd type="triangle" w="med" len="med"/>
+            <a:tailEnd type="triangle" w="med" len="med"/>
+          </a:ln>
+        </p:spPr>
+      </p:cxnSp>
+      <p:cxnSp>
+        <p:nvCxnSpPr>
+          <p:cNvPr id="42" name="Connector 41"/>
+          <p:cNvCxnSpPr/>
+          <p:nvPr/>
+        </p:nvCxnSpPr>
+        <p:spPr>
+          <a:xfrm flipH="1">
+            <a:off x="4809744" y="3950208"/>
+            <a:ext cx="201168" cy="0"/>
+          </a:xfrm>
+          <a:prstGeom prst="line">
+            <a:avLst/>
+          </a:prstGeom>
+          <a:ln w="15875">
+            <a:solidFill>
+              <a:srgbClr val="0F62CE"/>
+            </a:solidFill>
+            <a:headEnd type="triangle" w="med" len="med"/>
+            <a:tailEnd type="triangle" w="med" len="med"/>
+          </a:ln>
+        </p:spPr>
+      </p:cxnSp>
+      <p:cxnSp>
+        <p:nvCxnSpPr>
+          <p:cNvPr id="43" name="Connector 42"/>
+          <p:cNvCxnSpPr/>
+          <p:nvPr/>
+        </p:nvCxnSpPr>
+        <p:spPr>
+          <a:xfrm flipH="1">
+            <a:off x="4809744" y="3950208"/>
+            <a:ext cx="201168" cy="731520"/>
+          </a:xfrm>
+          <a:prstGeom prst="line">
+            <a:avLst/>
+          </a:prstGeom>
+          <a:ln w="15875">
+            <a:solidFill>
+              <a:srgbClr val="0F62CE"/>
+            </a:solidFill>
+            <a:headEnd type="triangle" w="med" len="med"/>
+            <a:tailEnd type="triangle" w="med" len="med"/>
+          </a:ln>
+        </p:spPr>
+      </p:cxnSp>
+      <p:sp>
+        <p:nvSpPr>
+          <p:cNvPr id="44" name="Rounded Rectangle 43"/>
+          <p:cNvSpPr/>
+          <p:nvPr/>
+        </p:nvSpPr>
+        <p:spPr>
+          <a:xfrm>
+            <a:off x="8321040" y="1225296"/>
+            <a:ext cx="3322015" cy="4315968"/>
+          </a:xfrm>
+          <a:prstGeom prst="roundRect">
+            <a:avLst>
+              <a:gd name="adj" fmla="val 2000"/>
+            </a:avLst>
+          </a:prstGeom>
+          <a:solidFill>
+            <a:srgbClr val="F2F8FD"/>
+          </a:solidFill>
+          <a:ln w="12700">
             <a:solidFill>
               <a:srgbClr val="D2690C"/>
             </a:solidFill>
@@ -32024,77 +32573,17 @@
       </p:sp>
       <p:sp>
         <p:nvSpPr>
-          <p:cNvPr id="32" name="TextBox 31"/>
-          <p:cNvSpPr txBox="1"/>
-          <p:nvPr/>
-        </p:nvSpPr>
-        <p:spPr>
-          <a:xfrm>
-            <a:off x="4272076" y="2980944"/>
-            <a:ext cx="3379622" cy="237744"/>
-          </a:xfrm>
-          <a:prstGeom prst="rect">
-            <a:avLst/>
-          </a:prstGeom>
-          <a:noFill/>
-        </p:spPr>
-        <p:txBody>
-          <a:bodyPr wrap="square" anchor="ctr" lIns="0" tIns="0" rIns="0" bIns="0">
-            <a:noAutofit/>
-          </a:bodyPr>
-          <a:lstStyle/>
-          <a:p>
-            <a:pPr algn="ctr" latinLnBrk="0">
-              <a:lnSpc>
-                <a:spcPct val="100000"/>
-              </a:lnSpc>
-              <a:spcBef>
-                <a:spcPts val="0"/>
-              </a:spcBef>
-              <a:spcAft>
-                <a:spcPts val="200"/>
-              </a:spcAft>
-            </a:pPr>
-            <a:r>
-              <a:rPr sz="1150" b="1">
-                <a:solidFill>
-                  <a:srgbClr val="0A2B45"/>
-                </a:solidFill>
-                <a:latin typeface="Microsoft YaHei"/>
-                <a:ea typeface="Microsoft YaHei"/>
-                <a:cs typeface="Microsoft YaHei"/>
-              </a:rPr>
-              <a:t>规划器推演</a:t>
-            </a:r>
-            <a:r>
-              <a:rPr sz="850" b="1">
-                <a:solidFill>
-                  <a:srgbClr val="C2570A"/>
-                </a:solidFill>
-                <a:latin typeface="Consolas"/>
-                <a:ea typeface="Microsoft YaHei"/>
-                <a:cs typeface="Microsoft YaHei"/>
-              </a:rPr>
-              <a:t>　Thought　Codex 外部托管会话</a:t>
-            </a:r>
-          </a:p>
-        </p:txBody>
-      </p:sp>
-      <p:sp>
-        <p:nvSpPr>
-          <p:cNvPr id="33" name="Rounded Rectangle 32"/>
+          <p:cNvPr id="45" name="Rectangle 44"/>
           <p:cNvSpPr/>
           <p:nvPr/>
         </p:nvSpPr>
         <p:spPr>
           <a:xfrm>
-            <a:off x="5303520" y="3255264"/>
-            <a:ext cx="1316736" cy="219456"/>
-          </a:xfrm>
-          <a:prstGeom prst="roundRect">
-            <a:avLst>
-              <a:gd name="adj" fmla="val 50000"/>
-            </a:avLst>
+            <a:off x="8449056" y="1316736"/>
+            <a:ext cx="54864" cy="237744"/>
+          </a:xfrm>
+          <a:prstGeom prst="rect">
+            <a:avLst/>
           </a:prstGeom>
           <a:solidFill>
             <a:srgbClr val="D2690C"/>
@@ -32104,6 +32593,314 @@
           </a:ln>
         </p:spPr>
         <p:txBody>
+          <a:bodyPr rtlCol="0" anchor="ctr"/>
+          <a:lstStyle/>
+          <a:p>
+            <a:pPr algn="ctr"/>
+          </a:p>
+        </p:txBody>
+      </p:sp>
+      <p:sp>
+        <p:nvSpPr>
+          <p:cNvPr id="46" name="TextBox 45"/>
+          <p:cNvSpPr txBox="1"/>
+          <p:nvPr/>
+        </p:nvSpPr>
+        <p:spPr>
+          <a:xfrm>
+            <a:off x="8558784" y="1280160"/>
+            <a:ext cx="2956255" cy="310896"/>
+          </a:xfrm>
+          <a:prstGeom prst="rect">
+            <a:avLst/>
+          </a:prstGeom>
+          <a:noFill/>
+        </p:spPr>
+        <p:txBody>
+          <a:bodyPr wrap="square" anchor="ctr" lIns="0" tIns="0" rIns="0" bIns="0">
+            <a:noAutofit/>
+          </a:bodyPr>
+          <a:lstStyle/>
+          <a:p>
+            <a:pPr algn="l" latinLnBrk="0">
+              <a:lnSpc>
+                <a:spcPct val="100000"/>
+              </a:lnSpc>
+              <a:spcBef>
+                <a:spcPts val="0"/>
+              </a:spcBef>
+              <a:spcAft>
+                <a:spcPts val="0"/>
+              </a:spcAft>
+            </a:pPr>
+            <a:r>
+              <a:rPr sz="1100" b="1">
+                <a:solidFill>
+                  <a:srgbClr val="0A2B45"/>
+                </a:solidFill>
+                <a:latin typeface="Microsoft YaHei"/>
+                <a:ea typeface="Microsoft YaHei"/>
+                <a:cs typeface="Microsoft YaHei"/>
+              </a:rPr>
+              <a:t>内环 · 一轮试验</a:t>
+            </a:r>
+            <a:r>
+              <a:rPr sz="850" b="1">
+                <a:solidFill>
+                  <a:srgbClr val="D2690C"/>
+                </a:solidFill>
+                <a:latin typeface="Microsoft YaHei"/>
+                <a:ea typeface="Microsoft YaHei"/>
+                <a:cs typeface="Microsoft YaHei"/>
+              </a:rPr>
+              <a:t>　规划器是唯一引入大模型的位置</a:t>
+            </a:r>
+          </a:p>
+        </p:txBody>
+      </p:sp>
+      <p:sp>
+        <p:nvSpPr>
+          <p:cNvPr id="47" name="Rounded Rectangle 46"/>
+          <p:cNvSpPr/>
+          <p:nvPr/>
+        </p:nvSpPr>
+        <p:spPr>
+          <a:xfrm>
+            <a:off x="8449056" y="1755648"/>
+            <a:ext cx="3065983" cy="621792"/>
+          </a:xfrm>
+          <a:prstGeom prst="roundRect">
+            <a:avLst>
+              <a:gd name="adj" fmla="val 11764"/>
+            </a:avLst>
+          </a:prstGeom>
+          <a:solidFill>
+            <a:srgbClr val="E6F0FC"/>
+          </a:solidFill>
+          <a:ln w="12700">
+            <a:solidFill>
+              <a:srgbClr val="0F62CE"/>
+            </a:solidFill>
+          </a:ln>
+        </p:spPr>
+        <p:txBody>
+          <a:bodyPr rtlCol="0" anchor="ctr" wrap="square" tIns="36576" bIns="36576">
+            <a:noAutofit/>
+          </a:bodyPr>
+          <a:lstStyle/>
+          <a:p>
+            <a:pPr algn="ctr" latinLnBrk="0">
+              <a:lnSpc>
+                <a:spcPct val="100000"/>
+              </a:lnSpc>
+              <a:spcBef>
+                <a:spcPts val="0"/>
+              </a:spcBef>
+              <a:spcAft>
+                <a:spcPts val="0"/>
+              </a:spcAft>
+            </a:pPr>
+            <a:r>
+              <a:rPr sz="1000" b="1">
+                <a:solidFill>
+                  <a:srgbClr val="0A2B45"/>
+                </a:solidFill>
+                <a:latin typeface="Microsoft YaHei"/>
+                <a:ea typeface="Microsoft YaHei"/>
+                <a:cs typeface="Microsoft YaHei"/>
+              </a:rPr>
+              <a:t>取证与检索</a:t>
+            </a:r>
+          </a:p>
+          <a:p>
+            <a:pPr algn="ctr" latinLnBrk="0">
+              <a:lnSpc>
+                <a:spcPct val="100000"/>
+              </a:lnSpc>
+              <a:spcBef>
+                <a:spcPts val="0"/>
+              </a:spcBef>
+              <a:spcAft>
+                <a:spcPts val="200"/>
+              </a:spcAft>
+            </a:pPr>
+            <a:r>
+              <a:rPr sz="750" b="0">
+                <a:solidFill>
+                  <a:srgbClr val="0F62CE"/>
+                </a:solidFill>
+                <a:latin typeface="Consolas"/>
+                <a:ea typeface="Microsoft YaHei"/>
+                <a:cs typeface="Microsoft YaHei"/>
+              </a:rPr>
+              <a:t>planner_diagnostics.py</a:t>
+            </a:r>
+          </a:p>
+          <a:p>
+            <a:pPr algn="ctr" latinLnBrk="0">
+              <a:lnSpc>
+                <a:spcPct val="100000"/>
+              </a:lnSpc>
+              <a:spcBef>
+                <a:spcPts val="0"/>
+              </a:spcBef>
+              <a:spcAft>
+                <a:spcPts val="0"/>
+              </a:spcAft>
+            </a:pPr>
+            <a:r>
+              <a:rPr sz="800" b="0">
+                <a:solidFill>
+                  <a:srgbClr val="1B4D69"/>
+                </a:solidFill>
+                <a:latin typeface="Microsoft YaHei"/>
+                <a:ea typeface="Microsoft YaHei"/>
+                <a:cs typeface="Microsoft YaHei"/>
+              </a:rPr>
+              <a:t>源码只读 · attempts/ · planner/ · probes/ 按需调取</a:t>
+            </a:r>
+          </a:p>
+          <a:p>
+            <a:pPr algn="ctr" latinLnBrk="0">
+              <a:lnSpc>
+                <a:spcPct val="100000"/>
+              </a:lnSpc>
+              <a:spcBef>
+                <a:spcPts val="0"/>
+              </a:spcBef>
+              <a:spcAft>
+                <a:spcPts val="0"/>
+              </a:spcAft>
+            </a:pPr>
+            <a:r>
+              <a:rPr sz="800" b="0">
+                <a:solidFill>
+                  <a:srgbClr val="1B4D69"/>
+                </a:solidFill>
+                <a:latin typeface="Microsoft YaHei"/>
+                <a:ea typeface="Microsoft YaHei"/>
+                <a:cs typeface="Microsoft YaHei"/>
+              </a:rPr>
+              <a:t>有界探针：独立进程 · 产物 ≤ 64 KiB</a:t>
+            </a:r>
+          </a:p>
+        </p:txBody>
+      </p:sp>
+      <p:sp>
+        <p:nvSpPr>
+          <p:cNvPr id="48" name="Rounded Rectangle 47"/>
+          <p:cNvSpPr/>
+          <p:nvPr/>
+        </p:nvSpPr>
+        <p:spPr>
+          <a:xfrm>
+            <a:off x="8449056" y="2523744"/>
+            <a:ext cx="3065983" cy="1188720"/>
+          </a:xfrm>
+          <a:prstGeom prst="roundRect">
+            <a:avLst>
+              <a:gd name="adj" fmla="val 6153"/>
+            </a:avLst>
+          </a:prstGeom>
+          <a:solidFill>
+            <a:srgbClr val="FBE6D4"/>
+          </a:solidFill>
+          <a:ln w="15875">
+            <a:solidFill>
+              <a:srgbClr val="D2690C"/>
+            </a:solidFill>
+          </a:ln>
+        </p:spPr>
+        <p:txBody>
+          <a:bodyPr rtlCol="0" anchor="ctr"/>
+          <a:lstStyle/>
+          <a:p>
+            <a:pPr algn="ctr"/>
+          </a:p>
+        </p:txBody>
+      </p:sp>
+      <p:sp>
+        <p:nvSpPr>
+          <p:cNvPr id="49" name="TextBox 48"/>
+          <p:cNvSpPr txBox="1"/>
+          <p:nvPr/>
+        </p:nvSpPr>
+        <p:spPr>
+          <a:xfrm>
+            <a:off x="8449056" y="2569463"/>
+            <a:ext cx="3065983" cy="237744"/>
+          </a:xfrm>
+          <a:prstGeom prst="rect">
+            <a:avLst/>
+          </a:prstGeom>
+          <a:noFill/>
+        </p:spPr>
+        <p:txBody>
+          <a:bodyPr wrap="square" anchor="ctr" lIns="0" tIns="0" rIns="0" bIns="0">
+            <a:noAutofit/>
+          </a:bodyPr>
+          <a:lstStyle/>
+          <a:p>
+            <a:pPr algn="ctr" latinLnBrk="0">
+              <a:lnSpc>
+                <a:spcPct val="100000"/>
+              </a:lnSpc>
+              <a:spcBef>
+                <a:spcPts val="0"/>
+              </a:spcBef>
+              <a:spcAft>
+                <a:spcPts val="0"/>
+              </a:spcAft>
+            </a:pPr>
+            <a:r>
+              <a:rPr sz="1100" b="1">
+                <a:solidFill>
+                  <a:srgbClr val="0A2B45"/>
+                </a:solidFill>
+                <a:latin typeface="Microsoft YaHei"/>
+                <a:ea typeface="Microsoft YaHei"/>
+                <a:cs typeface="Microsoft YaHei"/>
+              </a:rPr>
+              <a:t>规划器</a:t>
+            </a:r>
+            <a:r>
+              <a:rPr sz="850" b="1">
+                <a:solidFill>
+                  <a:srgbClr val="C2570A"/>
+                </a:solidFill>
+                <a:latin typeface="Microsoft YaHei"/>
+                <a:ea typeface="Microsoft YaHei"/>
+                <a:cs typeface="Microsoft YaHei"/>
+              </a:rPr>
+              <a:t>　Codex 外部托管会话</a:t>
+            </a:r>
+          </a:p>
+        </p:txBody>
+      </p:sp>
+      <p:sp>
+        <p:nvSpPr>
+          <p:cNvPr id="50" name="Rounded Rectangle 49"/>
+          <p:cNvSpPr/>
+          <p:nvPr/>
+        </p:nvSpPr>
+        <p:spPr>
+          <a:xfrm>
+            <a:off x="9323679" y="2834639"/>
+            <a:ext cx="1316736" cy="219456"/>
+          </a:xfrm>
+          <a:prstGeom prst="roundRect">
+            <a:avLst>
+              <a:gd name="adj" fmla="val 50000"/>
+            </a:avLst>
+          </a:prstGeom>
+          <a:solidFill>
+            <a:srgbClr val="D2690C"/>
+          </a:solidFill>
+          <a:ln>
+            <a:noFill/>
+          </a:ln>
+        </p:spPr>
+        <p:txBody>
           <a:bodyPr rtlCol="0" anchor="ctr" wrap="square" lIns="36576" tIns="0" rIns="36576" bIns="0">
             <a:noAutofit/>
           </a:bodyPr>
@@ -32136,14 +32933,14 @@
       </p:sp>
       <p:sp>
         <p:nvSpPr>
-          <p:cNvPr id="34" name="TextBox 33"/>
-          <p:cNvSpPr txBox="1"/>
-          <p:nvPr/>
-        </p:nvSpPr>
-        <p:spPr>
-          <a:xfrm>
-            <a:off x="4326940" y="3511296"/>
-            <a:ext cx="3269894" cy="640080"/>
+          <p:cNvPr id="51" name="TextBox 50"/>
+          <p:cNvSpPr txBox="1"/>
+          <p:nvPr/>
+        </p:nvSpPr>
+        <p:spPr>
+          <a:xfrm>
+            <a:off x="8503920" y="3090672"/>
+            <a:ext cx="2956255" cy="566928"/>
           </a:xfrm>
           <a:prstGeom prst="rect">
             <a:avLst/>
@@ -32168,7 +32965,7 @@
               </a:spcAft>
             </a:pPr>
             <a:r>
-              <a:rPr sz="850" b="0">
+              <a:rPr sz="800" b="0">
                 <a:solidFill>
                   <a:srgbClr val="1B4D69"/>
                 </a:solidFill>
@@ -32176,7 +32973,7 @@
                 <a:ea typeface="Microsoft YaHei"/>
                 <a:cs typeface="Microsoft YaHei"/>
               </a:rPr>
-              <a:t>读源码与冻结证据，形成假设并提出结构化动作</a:t>
+              <a:t>读证据形成假设，提出结构化动作</a:t>
             </a:r>
           </a:p>
           <a:p>
@@ -32192,7 +32989,7 @@
               </a:spcAft>
             </a:pPr>
             <a:r>
-              <a:rPr sz="850" b="0">
+              <a:rPr sz="800" b="0">
                 <a:solidFill>
                   <a:srgbClr val="1B4D69"/>
                 </a:solidFill>
@@ -32200,7 +32997,7 @@
                 <a:ea typeface="Microsoft YaHei"/>
                 <a:cs typeface="Microsoft YaHei"/>
               </a:rPr>
-              <a:t>动作限定：</a:t>
+              <a:t>动作：</a:t>
             </a:r>
             <a:r>
               <a:rPr sz="750" b="0">
@@ -32227,7 +33024,7 @@
               </a:spcAft>
             </a:pPr>
             <a:r>
-              <a:rPr sz="850" b="1">
+              <a:rPr sz="800" b="1">
                 <a:solidFill>
                   <a:srgbClr val="C2570A"/>
                 </a:solidFill>
@@ -32242,14 +33039,14 @@
       </p:sp>
       <p:cxnSp>
         <p:nvCxnSpPr>
-          <p:cNvPr id="35" name="Connector 34"/>
+          <p:cNvPr id="52" name="Connector 51"/>
           <p:cNvCxnSpPr/>
           <p:nvPr/>
         </p:nvCxnSpPr>
         <p:spPr>
           <a:xfrm>
-            <a:off x="5961888" y="2807208"/>
-            <a:ext cx="0" cy="109728"/>
+            <a:off x="9982047" y="2386584"/>
+            <a:ext cx="0" cy="128016"/>
           </a:xfrm>
           <a:prstGeom prst="line">
             <a:avLst/>
@@ -32258,31 +33055,30 @@
             <a:solidFill>
               <a:srgbClr val="D2690C"/>
             </a:solidFill>
-            <a:headEnd type="triangle" w="med" len="med"/>
             <a:tailEnd type="triangle" w="med" len="med"/>
           </a:ln>
         </p:spPr>
       </p:cxnSp>
       <p:sp>
         <p:nvSpPr>
-          <p:cNvPr id="36" name="Rounded Rectangle 35"/>
+          <p:cNvPr id="53" name="Rounded Rectangle 52"/>
           <p:cNvSpPr/>
           <p:nvPr/>
         </p:nvSpPr>
         <p:spPr>
           <a:xfrm>
-            <a:off x="4272076" y="4334256"/>
-            <a:ext cx="3379622" cy="493776"/>
+            <a:off x="8449056" y="3858768"/>
+            <a:ext cx="3065983" cy="676656"/>
           </a:xfrm>
           <a:prstGeom prst="roundRect">
             <a:avLst>
-              <a:gd name="adj" fmla="val 14814"/>
+              <a:gd name="adj" fmla="val 10810"/>
             </a:avLst>
           </a:prstGeom>
           <a:solidFill>
             <a:srgbClr val="E6F0FC"/>
           </a:solidFill>
-          <a:ln w="9525">
+          <a:ln w="12700">
             <a:solidFill>
               <a:srgbClr val="0F62CE"/>
             </a:solidFill>
@@ -32302,22 +33098,35 @@
                 <a:spcPts val="0"/>
               </a:spcBef>
               <a:spcAft>
+                <a:spcPts val="0"/>
+              </a:spcAft>
+            </a:pPr>
+            <a:r>
+              <a:rPr sz="1000" b="1">
+                <a:solidFill>
+                  <a:srgbClr val="0A2B45"/>
+                </a:solidFill>
+                <a:latin typeface="Microsoft YaHei"/>
+                <a:ea typeface="Microsoft YaHei"/>
+                <a:cs typeface="Microsoft YaHei"/>
+              </a:rPr>
+              <a:t>构建与真机实测</a:t>
+            </a:r>
+          </a:p>
+          <a:p>
+            <a:pPr algn="ctr" latinLnBrk="0">
+              <a:lnSpc>
+                <a:spcPct val="100000"/>
+              </a:lnSpc>
+              <a:spcBef>
+                <a:spcPts val="0"/>
+              </a:spcBef>
+              <a:spcAft>
                 <a:spcPts val="200"/>
               </a:spcAft>
             </a:pPr>
             <a:r>
-              <a:rPr sz="1100" b="1">
-                <a:solidFill>
-                  <a:srgbClr val="0A2B45"/>
-                </a:solidFill>
-                <a:latin typeface="Microsoft YaHei"/>
-                <a:ea typeface="Microsoft YaHei"/>
-                <a:cs typeface="Microsoft YaHei"/>
-              </a:rPr>
-              <a:t>动作执行</a:t>
-            </a:r>
-            <a:r>
-              <a:rPr sz="850" b="1">
+              <a:rPr sz="750" b="0">
                 <a:solidFill>
                   <a:srgbClr val="0F62CE"/>
                 </a:solidFill>
@@ -32325,7 +33134,7 @@
                 <a:ea typeface="Microsoft YaHei"/>
                 <a:cs typeface="Microsoft YaHei"/>
               </a:rPr>
-              <a:t>　Action</a:t>
+              <a:t>git_workspace.py</a:t>
             </a:r>
           </a:p>
           <a:p>
@@ -32341,7 +33150,7 @@
               </a:spcAft>
             </a:pPr>
             <a:r>
-              <a:rPr sz="850" b="0">
+              <a:rPr sz="800" b="0">
                 <a:solidFill>
                   <a:srgbClr val="1B4D69"/>
                 </a:solidFill>
@@ -32349,21 +33158,45 @@
                 <a:ea typeface="Microsoft YaHei"/>
                 <a:cs typeface="Microsoft YaHei"/>
               </a:rPr>
-              <a:t>optimization_staging.py　打包补丁，触发构建与门禁</a:t>
+              <a:t>原位建版本 · 登记构建 · 起停服务</a:t>
+            </a:r>
+          </a:p>
+          <a:p>
+            <a:pPr algn="ctr" latinLnBrk="0">
+              <a:lnSpc>
+                <a:spcPct val="100000"/>
+              </a:lnSpc>
+              <a:spcBef>
+                <a:spcPts val="0"/>
+              </a:spcBef>
+              <a:spcAft>
+                <a:spcPts val="0"/>
+              </a:spcAft>
+            </a:pPr>
+            <a:r>
+              <a:rPr sz="800" b="0">
+                <a:solidFill>
+                  <a:srgbClr val="1B4D69"/>
+                </a:solidFill>
+                <a:latin typeface="Microsoft YaHei"/>
+                <a:ea typeface="Microsoft YaHei"/>
+                <a:cs typeface="Microsoft YaHei"/>
+              </a:rPr>
+              <a:t>M100 物理卡 · 精确重测</a:t>
             </a:r>
           </a:p>
         </p:txBody>
       </p:sp>
       <p:cxnSp>
         <p:nvCxnSpPr>
-          <p:cNvPr id="37" name="Connector 36"/>
+          <p:cNvPr id="54" name="Connector 53"/>
           <p:cNvCxnSpPr/>
           <p:nvPr/>
         </p:nvCxnSpPr>
         <p:spPr>
           <a:xfrm>
-            <a:off x="5961888" y="4215383"/>
-            <a:ext cx="0" cy="109729"/>
+            <a:off x="9982047" y="3721607"/>
+            <a:ext cx="0" cy="128017"/>
           </a:xfrm>
           <a:prstGeom prst="line">
             <a:avLst/>
@@ -32378,24 +33211,24 @@
       </p:cxnSp>
       <p:sp>
         <p:nvSpPr>
-          <p:cNvPr id="38" name="Rounded Rectangle 37"/>
+          <p:cNvPr id="55" name="Rounded Rectangle 54"/>
           <p:cNvSpPr/>
           <p:nvPr/>
         </p:nvSpPr>
         <p:spPr>
           <a:xfrm>
-            <a:off x="4272076" y="4974336"/>
-            <a:ext cx="3379622" cy="438912"/>
+            <a:off x="8449056" y="4681728"/>
+            <a:ext cx="3065983" cy="768096"/>
           </a:xfrm>
           <a:prstGeom prst="roundRect">
             <a:avLst>
-              <a:gd name="adj" fmla="val 16666"/>
+              <a:gd name="adj" fmla="val 9523"/>
             </a:avLst>
           </a:prstGeom>
           <a:solidFill>
             <a:srgbClr val="E6F0FC"/>
           </a:solidFill>
-          <a:ln w="9525">
+          <a:ln w="12700">
             <a:solidFill>
               <a:srgbClr val="0F62CE"/>
             </a:solidFill>
@@ -32419,39 +33252,100 @@
               </a:spcAft>
             </a:pPr>
             <a:r>
-              <a:rPr sz="1050" b="1">
+              <a:rPr sz="1000" b="1">
+                <a:solidFill>
+                  <a:srgbClr val="0A2B45"/>
+                </a:solidFill>
+                <a:latin typeface="Microsoft YaHei"/>
+                <a:ea typeface="Microsoft YaHei"/>
+                <a:cs typeface="Microsoft YaHei"/>
+              </a:rPr>
+              <a:t>四道门禁核验</a:t>
+            </a:r>
+          </a:p>
+          <a:p>
+            <a:pPr algn="ctr" latinLnBrk="0">
+              <a:lnSpc>
+                <a:spcPct val="100000"/>
+              </a:lnSpc>
+              <a:spcBef>
+                <a:spcPts val="0"/>
+              </a:spcBef>
+              <a:spcAft>
+                <a:spcPts val="200"/>
+              </a:spcAft>
+            </a:pPr>
+            <a:r>
+              <a:rPr sz="750" b="0">
                 <a:solidFill>
                   <a:srgbClr val="0F62CE"/>
                 </a:solidFill>
-                <a:latin typeface="Microsoft YaHei"/>
-                <a:ea typeface="Microsoft YaHei"/>
-                <a:cs typeface="Microsoft YaHei"/>
-              </a:rPr>
-              <a:t>判决报告 → 人</a:t>
-            </a:r>
-            <a:r>
-              <a:rPr sz="750" b="0">
+                <a:latin typeface="Consolas"/>
+                <a:ea typeface="Microsoft YaHei"/>
+                <a:cs typeface="Microsoft YaHei"/>
+              </a:rPr>
+              <a:t>selfiterate_gates.py</a:t>
+            </a:r>
+          </a:p>
+          <a:p>
+            <a:pPr algn="ctr" latinLnBrk="0">
+              <a:lnSpc>
+                <a:spcPct val="100000"/>
+              </a:lnSpc>
+              <a:spcBef>
+                <a:spcPts val="0"/>
+              </a:spcBef>
+              <a:spcAft>
+                <a:spcPts val="0"/>
+              </a:spcAft>
+            </a:pPr>
+            <a:r>
+              <a:rPr sz="800" b="0">
                 <a:solidFill>
                   <a:srgbClr val="1B4D69"/>
                 </a:solidFill>
-                <a:latin typeface="Consolas"/>
-                <a:ea typeface="Microsoft YaHei"/>
-                <a:cs typeface="Microsoft YaHei"/>
-              </a:rPr>
-              <a:t>　optimization-report.md · best.json</a:t>
+                <a:latin typeface="Microsoft YaHei"/>
+                <a:ea typeface="Microsoft YaHei"/>
+                <a:cs typeface="Microsoft YaHei"/>
+              </a:rPr>
+              <a:t>C 设备微测 ≥ 2%　① 数值门 ≤ 0.03</a:t>
+            </a:r>
+          </a:p>
+          <a:p>
+            <a:pPr algn="ctr" latinLnBrk="0">
+              <a:lnSpc>
+                <a:spcPct val="100000"/>
+              </a:lnSpc>
+              <a:spcBef>
+                <a:spcPts val="0"/>
+              </a:spcBef>
+              <a:spcAft>
+                <a:spcPts val="0"/>
+              </a:spcAft>
+            </a:pPr>
+            <a:r>
+              <a:rPr sz="800" b="0">
+                <a:solidFill>
+                  <a:srgbClr val="1B4D69"/>
+                </a:solidFill>
+                <a:latin typeface="Microsoft YaHei"/>
+                <a:ea typeface="Microsoft YaHei"/>
+                <a:cs typeface="Microsoft YaHei"/>
+              </a:rPr>
+              <a:t>② 质量门 不降　D 整模三方 A/B</a:t>
             </a:r>
           </a:p>
         </p:txBody>
       </p:sp>
       <p:cxnSp>
         <p:nvCxnSpPr>
-          <p:cNvPr id="39" name="Connector 38"/>
+          <p:cNvPr id="56" name="Connector 55"/>
           <p:cNvCxnSpPr/>
           <p:nvPr/>
         </p:nvCxnSpPr>
         <p:spPr>
           <a:xfrm>
-            <a:off x="5961888" y="4837176"/>
+            <a:off x="9982047" y="4544568"/>
             <a:ext cx="0" cy="128016"/>
           </a:xfrm>
           <a:prstGeom prst="line">
@@ -32465,63 +33359,16 @@
           </a:ln>
         </p:spPr>
       </p:cxnSp>
-      <p:sp>
-        <p:nvSpPr>
-          <p:cNvPr id="40" name="TextBox 39"/>
-          <p:cNvSpPr txBox="1"/>
-          <p:nvPr/>
-        </p:nvSpPr>
-        <p:spPr>
-          <a:xfrm>
-            <a:off x="6053327" y="4828032"/>
-            <a:ext cx="1005840" cy="146304"/>
-          </a:xfrm>
-          <a:prstGeom prst="rect">
-            <a:avLst/>
-          </a:prstGeom>
-          <a:noFill/>
-        </p:spPr>
-        <p:txBody>
-          <a:bodyPr wrap="square" anchor="ctr" lIns="0" tIns="0" rIns="0" bIns="0">
-            <a:noAutofit/>
-          </a:bodyPr>
-          <a:lstStyle/>
-          <a:p>
-            <a:pPr algn="l" latinLnBrk="0">
-              <a:lnSpc>
-                <a:spcPct val="100000"/>
-              </a:lnSpc>
-              <a:spcBef>
-                <a:spcPts val="0"/>
-              </a:spcBef>
-              <a:spcAft>
-                <a:spcPts val="0"/>
-              </a:spcAft>
-            </a:pPr>
-            <a:r>
-              <a:rPr sz="750" b="1">
-                <a:solidFill>
-                  <a:srgbClr val="0F62CE"/>
-                </a:solidFill>
-                <a:latin typeface="Microsoft YaHei"/>
-                <a:ea typeface="Microsoft YaHei"/>
-                <a:cs typeface="Microsoft YaHei"/>
-              </a:rPr>
-              <a:t>发布：终审验收</a:t>
-            </a:r>
-          </a:p>
-        </p:txBody>
-      </p:sp>
       <p:cxnSp>
         <p:nvCxnSpPr>
-          <p:cNvPr id="41" name="Connector 40"/>
+          <p:cNvPr id="57" name="Connector 56"/>
           <p:cNvCxnSpPr/>
           <p:nvPr/>
         </p:nvCxnSpPr>
         <p:spPr>
           <a:xfrm>
-            <a:off x="3145536" y="1819656"/>
-            <a:ext cx="1089964" cy="0"/>
+            <a:off x="2615184" y="2103120"/>
+            <a:ext cx="402336" cy="0"/>
           </a:xfrm>
           <a:prstGeom prst="line">
             <a:avLst/>
@@ -32536,14 +33383,286 @@
       </p:cxnSp>
       <p:sp>
         <p:nvSpPr>
-          <p:cNvPr id="42" name="Rounded Rectangle 41"/>
+          <p:cNvPr id="58" name="Freeform 57"/>
           <p:cNvSpPr/>
           <p:nvPr/>
         </p:nvSpPr>
         <p:spPr>
           <a:xfrm>
-            <a:off x="3236975" y="1719072"/>
-            <a:ext cx="713232" cy="201168"/>
+            <a:off x="2615184" y="2340864"/>
+            <a:ext cx="402336" cy="1207008"/>
+          </a:xfrm>
+          <a:custGeom>
+            <a:avLst/>
+            <a:gdLst/>
+            <a:ahLst/>
+            <a:cxnLst/>
+            <a:rect l="l" t="t" r="r" b="b"/>
+            <a:pathLst>
+              <a:path w="402336" h="1207008">
+                <a:moveTo>
+                  <a:pt x="0" y="1207008"/>
+                </a:moveTo>
+                <a:lnTo>
+                  <a:pt x="256032" y="1207008"/>
+                </a:lnTo>
+                <a:lnTo>
+                  <a:pt x="256032" y="0"/>
+                </a:lnTo>
+                <a:lnTo>
+                  <a:pt x="402336" y="0"/>
+                </a:lnTo>
+              </a:path>
+            </a:pathLst>
+          </a:custGeom>
+          <a:noFill/>
+          <a:ln w="19050">
+            <a:solidFill>
+              <a:srgbClr val="D2690C"/>
+            </a:solidFill>
+            <a:tailEnd type="triangle" w="med" len="med"/>
+          </a:ln>
+        </p:spPr>
+        <p:txBody>
+          <a:bodyPr rtlCol="0" anchor="ctr"/>
+          <a:lstStyle/>
+          <a:p>
+            <a:pPr algn="ctr"/>
+          </a:p>
+        </p:txBody>
+      </p:sp>
+      <p:cxnSp>
+        <p:nvCxnSpPr>
+          <p:cNvPr id="59" name="Connector 58"/>
+          <p:cNvCxnSpPr/>
+          <p:nvPr/>
+        </p:nvCxnSpPr>
+        <p:spPr>
+          <a:xfrm>
+            <a:off x="6547104" y="2066544"/>
+            <a:ext cx="1865376" cy="0"/>
+          </a:xfrm>
+          <a:prstGeom prst="line">
+            <a:avLst/>
+          </a:prstGeom>
+          <a:ln w="19050">
+            <a:solidFill>
+              <a:srgbClr val="0F62CE"/>
+            </a:solidFill>
+            <a:tailEnd type="triangle" w="med" len="med"/>
+          </a:ln>
+        </p:spPr>
+      </p:cxnSp>
+      <p:sp>
+        <p:nvSpPr>
+          <p:cNvPr id="60" name="TextBox 59"/>
+          <p:cNvSpPr txBox="1"/>
+          <p:nvPr/>
+        </p:nvSpPr>
+        <p:spPr>
+          <a:xfrm>
+            <a:off x="7031736" y="1700784"/>
+            <a:ext cx="1225296" cy="219456"/>
+          </a:xfrm>
+          <a:prstGeom prst="rect">
+            <a:avLst/>
+          </a:prstGeom>
+          <a:noFill/>
+        </p:spPr>
+        <p:txBody>
+          <a:bodyPr wrap="square" anchor="ctr" lIns="0" tIns="0" rIns="0" bIns="0">
+            <a:noAutofit/>
+          </a:bodyPr>
+          <a:lstStyle/>
+          <a:p>
+            <a:pPr algn="ctr" latinLnBrk="0">
+              <a:lnSpc>
+                <a:spcPct val="100000"/>
+              </a:lnSpc>
+              <a:spcBef>
+                <a:spcPts val="0"/>
+              </a:spcBef>
+              <a:spcAft>
+                <a:spcPts val="0"/>
+              </a:spcAft>
+            </a:pPr>
+            <a:r>
+              <a:rPr sz="1050" b="1">
+                <a:solidFill>
+                  <a:srgbClr val="0F62CE"/>
+                </a:solidFill>
+                <a:latin typeface="Microsoft YaHei"/>
+                <a:ea typeface="Microsoft YaHei"/>
+                <a:cs typeface="Microsoft YaHei"/>
+              </a:rPr>
+              <a:t>逐个试验</a:t>
+            </a:r>
+          </a:p>
+        </p:txBody>
+      </p:sp>
+      <p:sp>
+        <p:nvSpPr>
+          <p:cNvPr id="61" name="TextBox 60"/>
+          <p:cNvSpPr txBox="1"/>
+          <p:nvPr/>
+        </p:nvSpPr>
+        <p:spPr>
+          <a:xfrm>
+            <a:off x="7031736" y="2121408"/>
+            <a:ext cx="1225296" cy="201168"/>
+          </a:xfrm>
+          <a:prstGeom prst="rect">
+            <a:avLst/>
+          </a:prstGeom>
+          <a:noFill/>
+        </p:spPr>
+        <p:txBody>
+          <a:bodyPr wrap="square" anchor="ctr" lIns="0" tIns="0" rIns="0" bIns="0">
+            <a:noAutofit/>
+          </a:bodyPr>
+          <a:lstStyle/>
+          <a:p>
+            <a:pPr algn="ctr" latinLnBrk="0">
+              <a:lnSpc>
+                <a:spcPct val="100000"/>
+              </a:lnSpc>
+              <a:spcBef>
+                <a:spcPts val="0"/>
+              </a:spcBef>
+              <a:spcAft>
+                <a:spcPts val="0"/>
+              </a:spcAft>
+            </a:pPr>
+            <a:r>
+              <a:rPr sz="750" b="0">
+                <a:solidFill>
+                  <a:srgbClr val="40708B"/>
+                </a:solidFill>
+                <a:latin typeface="Consolas"/>
+                <a:ea typeface="Microsoft YaHei"/>
+                <a:cs typeface="Microsoft YaHei"/>
+              </a:rPr>
+              <a:t>mailbox 请求 ≤ 28 KB</a:t>
+            </a:r>
+          </a:p>
+        </p:txBody>
+      </p:sp>
+      <p:sp>
+        <p:nvSpPr>
+          <p:cNvPr id="62" name="Freeform 61"/>
+          <p:cNvSpPr/>
+          <p:nvPr/>
+        </p:nvSpPr>
+        <p:spPr>
+          <a:xfrm>
+            <a:off x="6876288" y="3950208"/>
+            <a:ext cx="1536192" cy="1115568"/>
+          </a:xfrm>
+          <a:custGeom>
+            <a:avLst/>
+            <a:gdLst/>
+            <a:ahLst/>
+            <a:cxnLst/>
+            <a:rect l="l" t="t" r="r" b="b"/>
+            <a:pathLst>
+              <a:path w="1536192" h="1115568">
+                <a:moveTo>
+                  <a:pt x="1536192" y="1115568"/>
+                </a:moveTo>
+                <a:lnTo>
+                  <a:pt x="768095" y="1115568"/>
+                </a:lnTo>
+                <a:lnTo>
+                  <a:pt x="768095" y="0"/>
+                </a:lnTo>
+                <a:lnTo>
+                  <a:pt x="0" y="0"/>
+                </a:lnTo>
+              </a:path>
+            </a:pathLst>
+          </a:custGeom>
+          <a:noFill/>
+          <a:ln w="19050">
+            <a:solidFill>
+              <a:srgbClr val="D2690C"/>
+            </a:solidFill>
+            <a:tailEnd type="triangle" w="med" len="med"/>
+          </a:ln>
+        </p:spPr>
+        <p:txBody>
+          <a:bodyPr rtlCol="0" anchor="ctr"/>
+          <a:lstStyle/>
+          <a:p>
+            <a:pPr algn="ctr"/>
+          </a:p>
+        </p:txBody>
+      </p:sp>
+      <p:sp>
+        <p:nvSpPr>
+          <p:cNvPr id="63" name="Rounded Rectangle 62"/>
+          <p:cNvSpPr/>
+          <p:nvPr/>
+        </p:nvSpPr>
+        <p:spPr>
+          <a:xfrm>
+            <a:off x="7406640" y="4261103"/>
+            <a:ext cx="475488" cy="201168"/>
+          </a:xfrm>
+          <a:prstGeom prst="roundRect">
+            <a:avLst>
+              <a:gd name="adj" fmla="val 50000"/>
+            </a:avLst>
+          </a:prstGeom>
+          <a:solidFill>
+            <a:srgbClr val="FFFFFF"/>
+          </a:solidFill>
+          <a:ln w="9525">
+            <a:solidFill>
+              <a:srgbClr val="C2570A"/>
+            </a:solidFill>
+          </a:ln>
+        </p:spPr>
+        <p:txBody>
+          <a:bodyPr rtlCol="0" anchor="ctr" wrap="square" lIns="18288" tIns="0" rIns="18288" bIns="0">
+            <a:noAutofit/>
+          </a:bodyPr>
+          <a:lstStyle/>
+          <a:p>
+            <a:pPr algn="ctr" latinLnBrk="0">
+              <a:lnSpc>
+                <a:spcPct val="100000"/>
+              </a:lnSpc>
+              <a:spcBef>
+                <a:spcPts val="0"/>
+              </a:spcBef>
+              <a:spcAft>
+                <a:spcPts val="0"/>
+              </a:spcAft>
+            </a:pPr>
+            <a:r>
+              <a:rPr sz="900" b="1">
+                <a:solidFill>
+                  <a:srgbClr val="C2570A"/>
+                </a:solidFill>
+                <a:latin typeface="Microsoft YaHei"/>
+                <a:ea typeface="Microsoft YaHei"/>
+                <a:cs typeface="Microsoft YaHei"/>
+              </a:rPr>
+              <a:t>回执</a:t>
+            </a:r>
+          </a:p>
+        </p:txBody>
+      </p:sp>
+      <p:sp>
+        <p:nvSpPr>
+          <p:cNvPr id="64" name="Rounded Rectangle 63"/>
+          <p:cNvSpPr/>
+          <p:nvPr/>
+        </p:nvSpPr>
+        <p:spPr>
+          <a:xfrm>
+            <a:off x="7095744" y="4535423"/>
+            <a:ext cx="1097280" cy="201168"/>
           </a:xfrm>
           <a:prstGeom prst="roundRect">
             <a:avLst>
@@ -32585,100 +33704,114 @@
                 <a:ea typeface="Microsoft YaHei"/>
                 <a:cs typeface="Microsoft YaHei"/>
               </a:rPr>
-              <a:t>契约 · 授权</a:t>
+              <a:t>门禁判决 · 被拒原因</a:t>
             </a:r>
           </a:p>
         </p:txBody>
       </p:sp>
       <p:cxnSp>
         <p:nvCxnSpPr>
-          <p:cNvPr id="43" name="Connector 42"/>
+          <p:cNvPr id="65" name="Connector 64"/>
           <p:cNvCxnSpPr/>
           <p:nvPr/>
         </p:nvCxnSpPr>
         <p:spPr>
-          <a:xfrm>
-            <a:off x="3145536" y="3255264"/>
-            <a:ext cx="1089964" cy="0"/>
+          <a:xfrm flipV="1">
+            <a:off x="5650992" y="2414016"/>
+            <a:ext cx="0" cy="1133856"/>
           </a:xfrm>
           <a:prstGeom prst="line">
             <a:avLst/>
           </a:prstGeom>
           <a:ln w="19050">
             <a:solidFill>
-              <a:srgbClr val="D2690C"/>
+              <a:srgbClr val="0F62CE"/>
             </a:solidFill>
-            <a:headEnd type="triangle" w="med" len="med"/>
             <a:tailEnd type="triangle" w="med" len="med"/>
           </a:ln>
         </p:spPr>
       </p:cxnSp>
       <p:sp>
         <p:nvSpPr>
-          <p:cNvPr id="44" name="Rounded Rectangle 43"/>
+          <p:cNvPr id="66" name="TextBox 65"/>
+          <p:cNvSpPr txBox="1"/>
+          <p:nvPr/>
+        </p:nvSpPr>
+        <p:spPr>
+          <a:xfrm>
+            <a:off x="5742431" y="2761488"/>
+            <a:ext cx="1097279" cy="548640"/>
+          </a:xfrm>
+          <a:prstGeom prst="rect">
+            <a:avLst/>
+          </a:prstGeom>
+          <a:noFill/>
+        </p:spPr>
+        <p:txBody>
+          <a:bodyPr wrap="square" anchor="ctr" lIns="0" tIns="0" rIns="0" bIns="0">
+            <a:noAutofit/>
+          </a:bodyPr>
+          <a:lstStyle/>
+          <a:p>
+            <a:pPr algn="l" latinLnBrk="0">
+              <a:lnSpc>
+                <a:spcPct val="100000"/>
+              </a:lnSpc>
+              <a:spcBef>
+                <a:spcPts val="0"/>
+              </a:spcBef>
+              <a:spcAft>
+                <a:spcPts val="200"/>
+              </a:spcAft>
+            </a:pPr>
+            <a:r>
+              <a:rPr sz="950" b="1">
+                <a:solidFill>
+                  <a:srgbClr val="0F62CE"/>
+                </a:solidFill>
+                <a:latin typeface="Microsoft YaHei"/>
+                <a:ea typeface="Microsoft YaHei"/>
+                <a:cs typeface="Microsoft YaHei"/>
+              </a:rPr>
+              <a:t>迭代 × 35 轮</a:t>
+            </a:r>
+          </a:p>
+          <a:p>
+            <a:pPr algn="l" latinLnBrk="0">
+              <a:lnSpc>
+                <a:spcPct val="100000"/>
+              </a:lnSpc>
+              <a:spcBef>
+                <a:spcPts val="0"/>
+              </a:spcBef>
+              <a:spcAft>
+                <a:spcPts val="0"/>
+              </a:spcAft>
+            </a:pPr>
+            <a:r>
+              <a:rPr sz="800" b="0">
+                <a:solidFill>
+                  <a:srgbClr val="1B4D69"/>
+                </a:solidFill>
+                <a:latin typeface="Microsoft YaHei"/>
+                <a:ea typeface="Microsoft YaHei"/>
+                <a:cs typeface="Microsoft YaHei"/>
+              </a:rPr>
+              <a:t>按新基线重排试验队列</a:t>
+            </a:r>
+          </a:p>
+        </p:txBody>
+      </p:sp>
+      <p:sp>
+        <p:nvSpPr>
+          <p:cNvPr id="67" name="Freeform 66"/>
           <p:cNvSpPr/>
           <p:nvPr/>
         </p:nvSpPr>
         <p:spPr>
           <a:xfrm>
-            <a:off x="3255263" y="3154680"/>
-            <a:ext cx="676656" cy="201168"/>
-          </a:xfrm>
-          <a:prstGeom prst="roundRect">
-            <a:avLst>
-              <a:gd name="adj" fmla="val 50000"/>
-            </a:avLst>
-          </a:prstGeom>
-          <a:solidFill>
-            <a:srgbClr val="FFFFFF"/>
-          </a:solidFill>
-          <a:ln w="9525">
-            <a:solidFill>
-              <a:srgbClr val="C2570A"/>
-            </a:solidFill>
-          </a:ln>
-        </p:spPr>
-        <p:txBody>
-          <a:bodyPr rtlCol="0" anchor="ctr" wrap="square" lIns="18288" tIns="0" rIns="18288" bIns="0">
-            <a:noAutofit/>
-          </a:bodyPr>
-          <a:lstStyle/>
-          <a:p>
-            <a:pPr algn="ctr" latinLnBrk="0">
-              <a:lnSpc>
-                <a:spcPct val="100000"/>
-              </a:lnSpc>
-              <a:spcBef>
-                <a:spcPts val="0"/>
-              </a:spcBef>
-              <a:spcAft>
-                <a:spcPts val="0"/>
-              </a:spcAft>
-            </a:pPr>
-            <a:r>
-              <a:rPr sz="750" b="1">
-                <a:solidFill>
-                  <a:srgbClr val="C2570A"/>
-                </a:solidFill>
-                <a:latin typeface="Microsoft YaHei"/>
-                <a:ea typeface="Microsoft YaHei"/>
-                <a:cs typeface="Microsoft YaHei"/>
-              </a:rPr>
-              <a:t>结对写补丁</a:t>
-            </a:r>
-          </a:p>
-        </p:txBody>
-      </p:sp>
-      <p:sp>
-        <p:nvSpPr>
-          <p:cNvPr id="45" name="Freeform 44"/>
-          <p:cNvSpPr/>
-          <p:nvPr/>
-        </p:nvSpPr>
-        <p:spPr>
-          <a:xfrm>
-            <a:off x="2816352" y="3840480"/>
-            <a:ext cx="1419148" cy="210311"/>
+            <a:off x="2615184" y="4352544"/>
+            <a:ext cx="3035808" cy="768096"/>
           </a:xfrm>
           <a:custGeom>
             <a:avLst/>
@@ -32687,15 +33820,15 @@
             <a:cxnLst/>
             <a:rect l="l" t="t" r="r" b="b"/>
             <a:pathLst>
-              <a:path w="1419148" h="210311">
+              <a:path w="3035808" h="768096">
                 <a:moveTo>
-                  <a:pt x="0" y="210311"/>
+                  <a:pt x="3035808" y="0"/>
                 </a:moveTo>
                 <a:lnTo>
-                  <a:pt x="0" y="0"/>
+                  <a:pt x="3035808" y="768096"/>
                 </a:lnTo>
                 <a:lnTo>
-                  <a:pt x="1419148" y="0"/>
+                  <a:pt x="0" y="768096"/>
                 </a:lnTo>
               </a:path>
             </a:pathLst>
@@ -32718,14 +33851,14 @@
       </p:sp>
       <p:sp>
         <p:nvSpPr>
-          <p:cNvPr id="46" name="Rounded Rectangle 45"/>
+          <p:cNvPr id="68" name="Rounded Rectangle 67"/>
           <p:cNvSpPr/>
           <p:nvPr/>
         </p:nvSpPr>
         <p:spPr>
           <a:xfrm>
-            <a:off x="3383279" y="3739896"/>
-            <a:ext cx="420624" cy="201168"/>
+            <a:off x="2999232" y="5020055"/>
+            <a:ext cx="822960" cy="201168"/>
           </a:xfrm>
           <a:prstGeom prst="roundRect">
             <a:avLst>
@@ -32759,7 +33892,7 @@
               </a:spcAft>
             </a:pPr>
             <a:r>
-              <a:rPr sz="750" b="1">
+              <a:rPr sz="800" b="1">
                 <a:solidFill>
                   <a:srgbClr val="40708B"/>
                 </a:solidFill>
@@ -32767,301 +33900,14 @@
                 <a:ea typeface="Microsoft YaHei"/>
                 <a:cs typeface="Microsoft YaHei"/>
               </a:rPr>
-              <a:t>观察</a:t>
-            </a:r>
-          </a:p>
-        </p:txBody>
-      </p:sp>
-      <p:sp>
-        <p:nvSpPr>
-          <p:cNvPr id="47" name="Freeform 46"/>
-          <p:cNvSpPr/>
-          <p:nvPr/>
-        </p:nvSpPr>
-        <p:spPr>
-          <a:xfrm>
-            <a:off x="7688275" y="2926080"/>
-            <a:ext cx="1419149" cy="640080"/>
-          </a:xfrm>
-          <a:custGeom>
-            <a:avLst/>
-            <a:gdLst/>
-            <a:ahLst/>
-            <a:cxnLst/>
-            <a:rect l="l" t="t" r="r" b="b"/>
-            <a:pathLst>
-              <a:path w="1419149" h="640080">
-                <a:moveTo>
-                  <a:pt x="0" y="640080"/>
-                </a:moveTo>
-                <a:lnTo>
-                  <a:pt x="1419149" y="640080"/>
-                </a:lnTo>
-                <a:lnTo>
-                  <a:pt x="1419149" y="0"/>
-                </a:lnTo>
-              </a:path>
-            </a:pathLst>
-          </a:custGeom>
-          <a:noFill/>
-          <a:ln w="19050">
-            <a:solidFill>
-              <a:srgbClr val="D2690C"/>
-            </a:solidFill>
-            <a:tailEnd type="triangle" w="med" len="med"/>
-          </a:ln>
-        </p:spPr>
-        <p:txBody>
-          <a:bodyPr rtlCol="0" anchor="ctr"/>
-          <a:lstStyle/>
-          <a:p>
-            <a:pPr algn="ctr"/>
-          </a:p>
-        </p:txBody>
-      </p:sp>
-      <p:sp>
-        <p:nvSpPr>
-          <p:cNvPr id="48" name="Rounded Rectangle 47"/>
-          <p:cNvSpPr/>
-          <p:nvPr/>
-        </p:nvSpPr>
-        <p:spPr>
-          <a:xfrm>
-            <a:off x="7991856" y="3465576"/>
-            <a:ext cx="603504" cy="201168"/>
-          </a:xfrm>
-          <a:prstGeom prst="roundRect">
-            <a:avLst>
-              <a:gd name="adj" fmla="val 50000"/>
-            </a:avLst>
-          </a:prstGeom>
-          <a:solidFill>
-            <a:srgbClr val="FFFFFF"/>
-          </a:solidFill>
-          <a:ln w="9525">
-            <a:solidFill>
-              <a:srgbClr val="C2570A"/>
-            </a:solidFill>
-          </a:ln>
-        </p:spPr>
-        <p:txBody>
-          <a:bodyPr rtlCol="0" anchor="ctr" wrap="square" lIns="18288" tIns="0" rIns="18288" bIns="0">
-            <a:noAutofit/>
-          </a:bodyPr>
-          <a:lstStyle/>
-          <a:p>
-            <a:pPr algn="ctr" latinLnBrk="0">
-              <a:lnSpc>
-                <a:spcPct val="100000"/>
-              </a:lnSpc>
-              <a:spcBef>
-                <a:spcPts val="0"/>
-              </a:spcBef>
-              <a:spcAft>
-                <a:spcPts val="0"/>
-              </a:spcAft>
-            </a:pPr>
-            <a:r>
-              <a:rPr sz="750" b="1">
-                <a:solidFill>
-                  <a:srgbClr val="C2570A"/>
-                </a:solidFill>
-                <a:latin typeface="Microsoft YaHei"/>
-                <a:ea typeface="Microsoft YaHei"/>
-                <a:cs typeface="Microsoft YaHei"/>
-              </a:rPr>
-              <a:t>按需调取</a:t>
-            </a:r>
-          </a:p>
-        </p:txBody>
-      </p:sp>
-      <p:cxnSp>
-        <p:nvCxnSpPr>
-          <p:cNvPr id="49" name="Connector 48"/>
-          <p:cNvCxnSpPr/>
-          <p:nvPr/>
-        </p:nvCxnSpPr>
-        <p:spPr>
-          <a:xfrm>
-            <a:off x="7688275" y="4581144"/>
-            <a:ext cx="980237" cy="0"/>
-          </a:xfrm>
-          <a:prstGeom prst="line">
-            <a:avLst/>
-          </a:prstGeom>
-          <a:ln w="19050">
-            <a:solidFill>
-              <a:srgbClr val="D2690C"/>
-            </a:solidFill>
-            <a:tailEnd type="triangle" w="med" len="med"/>
-          </a:ln>
-        </p:spPr>
-      </p:cxnSp>
-      <p:sp>
-        <p:nvSpPr>
-          <p:cNvPr id="50" name="Rounded Rectangle 49"/>
-          <p:cNvSpPr/>
-          <p:nvPr/>
-        </p:nvSpPr>
-        <p:spPr>
-          <a:xfrm>
-            <a:off x="7946136" y="4480559"/>
-            <a:ext cx="694944" cy="201168"/>
-          </a:xfrm>
-          <a:prstGeom prst="roundRect">
-            <a:avLst>
-              <a:gd name="adj" fmla="val 50000"/>
-            </a:avLst>
-          </a:prstGeom>
-          <a:solidFill>
-            <a:srgbClr val="FFFFFF"/>
-          </a:solidFill>
-          <a:ln w="9525">
-            <a:solidFill>
-              <a:srgbClr val="C2570A"/>
-            </a:solidFill>
-          </a:ln>
-        </p:spPr>
-        <p:txBody>
-          <a:bodyPr rtlCol="0" anchor="ctr" wrap="square" lIns="18288" tIns="0" rIns="18288" bIns="0">
-            <a:noAutofit/>
-          </a:bodyPr>
-          <a:lstStyle/>
-          <a:p>
-            <a:pPr algn="ctr" latinLnBrk="0">
-              <a:lnSpc>
-                <a:spcPct val="100000"/>
-              </a:lnSpc>
-              <a:spcBef>
-                <a:spcPts val="0"/>
-              </a:spcBef>
-              <a:spcAft>
-                <a:spcPts val="0"/>
-              </a:spcAft>
-            </a:pPr>
-            <a:r>
-              <a:rPr sz="750" b="1">
-                <a:solidFill>
-                  <a:srgbClr val="C2570A"/>
-                </a:solidFill>
-                <a:latin typeface="Microsoft YaHei"/>
-                <a:ea typeface="Microsoft YaHei"/>
-                <a:cs typeface="Microsoft YaHei"/>
-              </a:rPr>
-              <a:t>构建 · 门禁</a:t>
-            </a:r>
-          </a:p>
-        </p:txBody>
-      </p:sp>
-      <p:sp>
-        <p:nvSpPr>
-          <p:cNvPr id="51" name="Freeform 50"/>
-          <p:cNvSpPr/>
-          <p:nvPr/>
-        </p:nvSpPr>
-        <p:spPr>
-          <a:xfrm>
-            <a:off x="1847088" y="5175504"/>
-            <a:ext cx="8326983" cy="530352"/>
-          </a:xfrm>
-          <a:custGeom>
-            <a:avLst/>
-            <a:gdLst/>
-            <a:ahLst/>
-            <a:cxnLst/>
-            <a:rect l="l" t="t" r="r" b="b"/>
-            <a:pathLst>
-              <a:path w="8326983" h="530352">
-                <a:moveTo>
-                  <a:pt x="8326983" y="128016"/>
-                </a:moveTo>
-                <a:lnTo>
-                  <a:pt x="8326983" y="530352"/>
-                </a:lnTo>
-                <a:lnTo>
-                  <a:pt x="0" y="530352"/>
-                </a:lnTo>
-                <a:lnTo>
-                  <a:pt x="0" y="0"/>
-                </a:lnTo>
-              </a:path>
-            </a:pathLst>
-          </a:custGeom>
-          <a:noFill/>
-          <a:ln w="15875">
-            <a:solidFill>
-              <a:srgbClr val="40708B"/>
-            </a:solidFill>
-            <a:tailEnd type="triangle" w="med" len="med"/>
-          </a:ln>
-        </p:spPr>
-        <p:txBody>
-          <a:bodyPr rtlCol="0" anchor="ctr"/>
-          <a:lstStyle/>
-          <a:p>
-            <a:pPr algn="ctr"/>
-          </a:p>
-        </p:txBody>
-      </p:sp>
-      <p:sp>
-        <p:nvSpPr>
-          <p:cNvPr id="52" name="Rounded Rectangle 51"/>
-          <p:cNvSpPr/>
-          <p:nvPr/>
-        </p:nvSpPr>
-        <p:spPr>
-          <a:xfrm>
-            <a:off x="4681727" y="5605272"/>
-            <a:ext cx="2560320" cy="201168"/>
-          </a:xfrm>
-          <a:prstGeom prst="roundRect">
-            <a:avLst>
-              <a:gd name="adj" fmla="val 50000"/>
-            </a:avLst>
-          </a:prstGeom>
-          <a:solidFill>
-            <a:srgbClr val="FFFFFF"/>
-          </a:solidFill>
-          <a:ln w="9525">
-            <a:solidFill>
-              <a:srgbClr val="40708B"/>
-            </a:solidFill>
-          </a:ln>
-        </p:spPr>
-        <p:txBody>
-          <a:bodyPr rtlCol="0" anchor="ctr" wrap="square" lIns="18288" tIns="0" rIns="18288" bIns="0">
-            <a:noAutofit/>
-          </a:bodyPr>
-          <a:lstStyle/>
-          <a:p>
-            <a:pPr algn="ctr" latinLnBrk="0">
-              <a:lnSpc>
-                <a:spcPct val="100000"/>
-              </a:lnSpc>
-              <a:spcBef>
-                <a:spcPts val="0"/>
-              </a:spcBef>
-              <a:spcAft>
-                <a:spcPts val="0"/>
-              </a:spcAft>
-            </a:pPr>
-            <a:r>
-              <a:rPr sz="800" b="1">
-                <a:solidFill>
-                  <a:srgbClr val="40708B"/>
-                </a:solidFill>
-                <a:latin typeface="Microsoft YaHei"/>
-                <a:ea typeface="Microsoft YaHei"/>
-                <a:cs typeface="Microsoft YaHei"/>
-              </a:rPr>
-              <a:t>回写：门禁判决 · 数值与质量偏差 · 实测耗时</a:t>
-            </a:r>
-          </a:p>
-        </p:txBody>
-      </p:sp>
-      <p:sp>
-        <p:nvSpPr>
-          <p:cNvPr id="53" name="Rectangle 52"/>
+              <a:t>全部完成</a:t>
+            </a:r>
+          </a:p>
+        </p:txBody>
+      </p:sp>
+      <p:sp>
+        <p:nvSpPr>
+          <p:cNvPr id="69" name="Rectangle 68"/>
           <p:cNvSpPr/>
           <p:nvPr/>
         </p:nvSpPr>
@@ -33090,7 +33936,7 @@
       </p:sp>
       <p:sp>
         <p:nvSpPr>
-          <p:cNvPr id="54" name="Rectangle 53"/>
+          <p:cNvPr id="70" name="Rectangle 69"/>
           <p:cNvSpPr/>
           <p:nvPr/>
         </p:nvSpPr>
@@ -33119,7 +33965,7 @@
       </p:sp>
       <p:sp>
         <p:nvSpPr>
-          <p:cNvPr id="55" name="TextBox 54"/>
+          <p:cNvPr id="71" name="TextBox 70"/>
           <p:cNvSpPr txBox="1"/>
           <p:nvPr/>
         </p:nvSpPr>
@@ -33188,7 +34034,7 @@
       </p:sp>
       <p:sp>
         <p:nvSpPr>
-          <p:cNvPr id="56" name="TextBox 55"/>
+          <p:cNvPr id="72" name="TextBox 71"/>
           <p:cNvSpPr txBox="1"/>
           <p:nvPr/>
         </p:nvSpPr>

--- a/slides/m100_agent_final_deck.pptx
+++ b/slides/m100_agent_final_deck.pptx
@@ -27612,21 +27612,68 @@
                 <a:ea typeface="Microsoft YaHei"/>
                 <a:cs typeface="Microsoft YaHei"/>
               </a:rPr>
-              <a:t>M100 Agent：模型层Agent运行机制视图</a:t>
-            </a:r>
-          </a:p>
-        </p:txBody>
-      </p:sp>
-      <p:sp>
-        <p:nvSpPr>
-          <p:cNvPr id="5" name="Rectangle 4"/>
+              <a:t>M100 Agent：模型层 Agent 运行机制视图</a:t>
+            </a:r>
+          </a:p>
+        </p:txBody>
+      </p:sp>
+      <p:sp>
+        <p:nvSpPr>
+          <p:cNvPr id="5" name="TextBox 4"/>
+          <p:cNvSpPr txBox="1"/>
+          <p:nvPr/>
+        </p:nvSpPr>
+        <p:spPr>
+          <a:xfrm>
+            <a:off x="566928" y="859536"/>
+            <a:ext cx="9592056" cy="310896"/>
+          </a:xfrm>
+          <a:prstGeom prst="rect">
+            <a:avLst/>
+          </a:prstGeom>
+          <a:noFill/>
+        </p:spPr>
+        <p:txBody>
+          <a:bodyPr wrap="square" anchor="ctr" lIns="0" tIns="0" rIns="0" bIns="0">
+            <a:noAutofit/>
+          </a:bodyPr>
+          <a:lstStyle/>
+          <a:p>
+            <a:pPr algn="l" latinLnBrk="0">
+              <a:lnSpc>
+                <a:spcPct val="100000"/>
+              </a:lnSpc>
+              <a:spcBef>
+                <a:spcPts val="0"/>
+              </a:spcBef>
+              <a:spcAft>
+                <a:spcPts val="0"/>
+              </a:spcAft>
+            </a:pPr>
+            <a:r>
+              <a:rPr sz="1200" b="0">
+                <a:solidFill>
+                  <a:srgbClr val="1B4D69"/>
+                </a:solidFill>
+                <a:latin typeface="Microsoft YaHei"/>
+                <a:ea typeface="Microsoft YaHei"/>
+                <a:cs typeface="Microsoft YaHei"/>
+              </a:rPr>
+              <a:t>八步闭环：诊断取证 → 形成方案 → 确定性验收 → 更新基线，再开一轮</a:t>
+            </a:r>
+          </a:p>
+        </p:txBody>
+      </p:sp>
+      <p:sp>
+        <p:nvSpPr>
+          <p:cNvPr id="6" name="Rectangle 5"/>
           <p:cNvSpPr/>
           <p:nvPr/>
         </p:nvSpPr>
         <p:spPr>
           <a:xfrm>
-            <a:off x="548640" y="896112"/>
-            <a:ext cx="11094415" cy="603504"/>
+            <a:off x="548640" y="1207008"/>
+            <a:ext cx="11094415" cy="420624"/>
           </a:xfrm>
           <a:prstGeom prst="rect">
             <a:avLst/>
@@ -27651,14 +27698,14 @@
       </p:sp>
       <p:sp>
         <p:nvSpPr>
-          <p:cNvPr id="6" name="TextBox 5"/>
-          <p:cNvSpPr txBox="1"/>
-          <p:nvPr/>
-        </p:nvSpPr>
-        <p:spPr>
-          <a:xfrm>
-            <a:off x="786384" y="941832"/>
-            <a:ext cx="10637215" cy="237744"/>
+          <p:cNvPr id="7" name="TextBox 6"/>
+          <p:cNvSpPr txBox="1"/>
+          <p:nvPr/>
+        </p:nvSpPr>
+        <p:spPr>
+          <a:xfrm>
+            <a:off x="786384" y="1207008"/>
+            <a:ext cx="10637215" cy="420624"/>
           </a:xfrm>
           <a:prstGeom prst="rect">
             <a:avLst/>
@@ -27693,55 +27740,63 @@
               </a:rPr>
               <a:t>任务基准 · 锁定评测条件与版本</a:t>
             </a:r>
-          </a:p>
-        </p:txBody>
-      </p:sp>
-      <p:sp>
-        <p:nvSpPr>
-          <p:cNvPr id="7" name="TextBox 6"/>
-          <p:cNvSpPr txBox="1"/>
-          <p:nvPr/>
-        </p:nvSpPr>
-        <p:spPr>
-          <a:xfrm>
-            <a:off x="786384" y="1188720"/>
-            <a:ext cx="10637215" cy="274320"/>
-          </a:xfrm>
-          <a:prstGeom prst="rect">
-            <a:avLst/>
-          </a:prstGeom>
-          <a:noFill/>
-        </p:spPr>
-        <p:txBody>
-          <a:bodyPr wrap="square" anchor="ctr" lIns="0" tIns="0" rIns="0" bIns="0">
-            <a:noAutofit/>
-          </a:bodyPr>
-          <a:lstStyle/>
-          <a:p>
-            <a:pPr algn="l" latinLnBrk="0">
-              <a:lnSpc>
-                <a:spcPct val="100000"/>
-              </a:lnSpc>
-              <a:spcBef>
-                <a:spcPts val="0"/>
-              </a:spcBef>
-              <a:spcAft>
-                <a:spcPts val="0"/>
-              </a:spcAft>
-            </a:pPr>
-            <a:r>
-              <a:rPr sz="900" b="1">
+            <a:r>
+              <a:rPr sz="1000" b="0">
+                <a:solidFill>
+                  <a:srgbClr val="AFCEE1"/>
+                </a:solidFill>
+                <a:latin typeface="Microsoft YaHei"/>
+                <a:ea typeface="Microsoft YaHei"/>
+                <a:cs typeface="Microsoft YaHei"/>
+              </a:rPr>
+              <a:t>　｜　</a:t>
+            </a:r>
+            <a:r>
+              <a:rPr sz="950" b="1">
+                <a:solidFill>
+                  <a:srgbClr val="0F62CE"/>
+                </a:solidFill>
+                <a:latin typeface="Consolas"/>
+                <a:ea typeface="Microsoft YaHei"/>
+                <a:cs typeface="Microsoft YaHei"/>
+              </a:rPr>
+              <a:t>optimization-task.json</a:t>
+            </a:r>
+            <a:r>
+              <a:rPr sz="950" b="0">
                 <a:solidFill>
                   <a:srgbClr val="1B4D69"/>
                 </a:solidFill>
+                <a:latin typeface="Microsoft YaHei"/>
+                <a:ea typeface="Microsoft YaHei"/>
+                <a:cs typeface="Microsoft YaHei"/>
+              </a:rPr>
+              <a:t>　准入门槛</a:t>
+            </a:r>
+            <a:r>
+              <a:rPr sz="1000" b="0">
+                <a:solidFill>
+                  <a:srgbClr val="AFCEE1"/>
+                </a:solidFill>
+                <a:latin typeface="Microsoft YaHei"/>
+                <a:ea typeface="Microsoft YaHei"/>
+                <a:cs typeface="Microsoft YaHei"/>
+              </a:rPr>
+              <a:t>　｜　</a:t>
+            </a:r>
+            <a:r>
+              <a:rPr sz="950" b="1">
+                <a:solidFill>
+                  <a:srgbClr val="0F62CE"/>
+                </a:solidFill>
                 <a:latin typeface="Consolas"/>
                 <a:ea typeface="Microsoft YaHei"/>
                 <a:cs typeface="Microsoft YaHei"/>
               </a:rPr>
-              <a:t>optimization-task.json</a:t>
-            </a:r>
-            <a:r>
-              <a:rPr sz="900" b="0">
+              <a:t>generation-task.json</a:t>
+            </a:r>
+            <a:r>
+              <a:rPr sz="950" b="0">
                 <a:solidFill>
                   <a:srgbClr val="1B4D69"/>
                 </a:solidFill>
@@ -27749,10 +27804,10 @@
                 <a:ea typeface="Microsoft YaHei"/>
                 <a:cs typeface="Microsoft YaHei"/>
               </a:rPr>
-              <a:t>　确定模型、精度、负载、准入门槛</a:t>
-            </a:r>
-            <a:r>
-              <a:rPr sz="900" b="0">
+              <a:t>　质量达标</a:t>
+            </a:r>
+            <a:r>
+              <a:rPr sz="1000" b="0">
                 <a:solidFill>
                   <a:srgbClr val="AFCEE1"/>
                 </a:solidFill>
@@ -27763,59 +27818,26 @@
               <a:t>　｜　</a:t>
             </a:r>
             <a:r>
-              <a:rPr sz="900" b="1">
+              <a:rPr sz="950" b="1">
+                <a:solidFill>
+                  <a:srgbClr val="0F62CE"/>
+                </a:solidFill>
+                <a:latin typeface="Consolas"/>
+                <a:ea typeface="Microsoft YaHei"/>
+                <a:cs typeface="Microsoft YaHei"/>
+              </a:rPr>
+              <a:t>backup/</a:t>
+            </a:r>
+            <a:r>
+              <a:rPr sz="950" b="0">
                 <a:solidFill>
                   <a:srgbClr val="1B4D69"/>
                 </a:solidFill>
-                <a:latin typeface="Consolas"/>
-                <a:ea typeface="Microsoft YaHei"/>
-                <a:cs typeface="Microsoft YaHei"/>
-              </a:rPr>
-              <a:t>generation-task.json</a:t>
-            </a:r>
-            <a:r>
-              <a:rPr sz="900" b="0">
-                <a:solidFill>
-                  <a:srgbClr val="1B4D69"/>
-                </a:solidFill>
-                <a:latin typeface="Microsoft YaHei"/>
-                <a:ea typeface="Microsoft YaHei"/>
-                <a:cs typeface="Microsoft YaHei"/>
-              </a:rPr>
-              <a:t>　设定固定文本对齐测试与评测集达标要求</a:t>
-            </a:r>
-            <a:r>
-              <a:rPr sz="900" b="0">
-                <a:solidFill>
-                  <a:srgbClr val="AFCEE1"/>
-                </a:solidFill>
-                <a:latin typeface="Microsoft YaHei"/>
-                <a:ea typeface="Microsoft YaHei"/>
-                <a:cs typeface="Microsoft YaHei"/>
-              </a:rPr>
-              <a:t>　｜　</a:t>
-            </a:r>
-            <a:r>
-              <a:rPr sz="900" b="1">
-                <a:solidFill>
-                  <a:srgbClr val="1B4D69"/>
-                </a:solidFill>
-                <a:latin typeface="Consolas"/>
-                <a:ea typeface="Microsoft YaHei"/>
-                <a:cs typeface="Microsoft YaHei"/>
-              </a:rPr>
-              <a:t>backup/</a:t>
-            </a:r>
-            <a:r>
-              <a:rPr sz="900" b="0">
-                <a:solidFill>
-                  <a:srgbClr val="1B4D69"/>
-                </a:solidFill>
-                <a:latin typeface="Microsoft YaHei"/>
-                <a:ea typeface="Microsoft YaHei"/>
-                <a:cs typeface="Microsoft YaHei"/>
-              </a:rPr>
-              <a:t>　留存初始基线备份 + 加载调优知识库</a:t>
+                <a:latin typeface="Microsoft YaHei"/>
+                <a:ea typeface="Microsoft YaHei"/>
+                <a:cs typeface="Microsoft YaHei"/>
+              </a:rPr>
+              <a:t>　基线备份 + 调优知识库</a:t>
             </a:r>
           </a:p>
         </p:txBody>
@@ -27828,18 +27850,18 @@
         </p:nvSpPr>
         <p:spPr>
           <a:xfrm>
-            <a:off x="548640" y="1810512"/>
-            <a:ext cx="2212848" cy="1188720"/>
+            <a:off x="548640" y="1828800"/>
+            <a:ext cx="8182660" cy="1280160"/>
           </a:xfrm>
           <a:prstGeom prst="rect">
             <a:avLst/>
           </a:prstGeom>
           <a:solidFill>
-            <a:srgbClr val="FFFFFF"/>
+            <a:srgbClr val="F2F8FD"/>
           </a:solidFill>
           <a:ln w="9525">
             <a:solidFill>
-              <a:srgbClr val="CFE3F0"/>
+              <a:srgbClr val="AFCEE1"/>
             </a:solidFill>
           </a:ln>
         </p:spPr>
@@ -27859,8 +27881,8 @@
         </p:nvSpPr>
         <p:spPr>
           <a:xfrm>
-            <a:off x="548640" y="1810512"/>
-            <a:ext cx="64008" cy="1188720"/>
+            <a:off x="676656" y="1901952"/>
+            <a:ext cx="54864" cy="219456"/>
           </a:xfrm>
           <a:prstGeom prst="rect">
             <a:avLst/>
@@ -27888,8 +27910,8 @@
         </p:nvSpPr>
         <p:spPr>
           <a:xfrm>
-            <a:off x="731520" y="1856231"/>
-            <a:ext cx="1901952" cy="1097280"/>
+            <a:off x="822960" y="1874519"/>
+            <a:ext cx="7816900" cy="237744"/>
           </a:xfrm>
           <a:prstGeom prst="rect">
             <a:avLst/>
@@ -27910,54 +27932,30 @@
                 <a:spcPts val="0"/>
               </a:spcBef>
               <a:spcAft>
-                <a:spcPts val="200"/>
-              </a:spcAft>
-            </a:pPr>
-            <a:r>
-              <a:rPr sz="1100" b="1">
+                <a:spcPts val="0"/>
+              </a:spcAft>
+            </a:pPr>
+            <a:r>
+              <a:rPr sz="1050" b="1">
+                <a:solidFill>
+                  <a:srgbClr val="0A2B45"/>
+                </a:solidFill>
+                <a:latin typeface="Microsoft YaHei"/>
+                <a:ea typeface="Microsoft YaHei"/>
+                <a:cs typeface="Microsoft YaHei"/>
+              </a:rPr>
+              <a:t>诊断取证</a:t>
+            </a:r>
+            <a:r>
+              <a:rPr sz="800" b="1">
                 <a:solidFill>
                   <a:srgbClr val="17795F"/>
                 </a:solidFill>
-                <a:latin typeface="Microsoft YaHei"/>
-                <a:ea typeface="Microsoft YaHei"/>
-                <a:cs typeface="Microsoft YaHei"/>
-              </a:rPr>
-              <a:t>1 </a:t>
-            </a:r>
-            <a:r>
-              <a:rPr sz="1100" b="1">
-                <a:solidFill>
-                  <a:srgbClr val="0A2B45"/>
-                </a:solidFill>
-                <a:latin typeface="Microsoft YaHei"/>
-                <a:ea typeface="Microsoft YaHei"/>
-                <a:cs typeface="Microsoft YaHei"/>
-              </a:rPr>
-              <a:t>性能采样（Trace）</a:t>
-            </a:r>
-          </a:p>
-          <a:p>
-            <a:pPr algn="l" latinLnBrk="0">
-              <a:lnSpc>
-                <a:spcPct val="100000"/>
-              </a:lnSpc>
-              <a:spcBef>
-                <a:spcPts val="0"/>
-              </a:spcBef>
-              <a:spcAft>
-                <a:spcPts val="0"/>
-              </a:spcAft>
-            </a:pPr>
-            <a:r>
-              <a:rPr sz="1000" b="0">
-                <a:solidFill>
-                  <a:srgbClr val="1B4D69"/>
-                </a:solidFill>
-                <a:latin typeface="Microsoft YaHei"/>
-                <a:ea typeface="Microsoft YaHei"/>
-                <a:cs typeface="Microsoft YaHei"/>
-              </a:rPr>
-              <a:t>拉起一次性独立服务，通过profile接口获取性能数据</a:t>
+                <a:latin typeface="Consolas"/>
+                <a:ea typeface="Microsoft YaHei"/>
+                <a:cs typeface="Microsoft YaHei"/>
+              </a:rPr>
+              <a:t>　Diagnose</a:t>
             </a:r>
           </a:p>
         </p:txBody>
@@ -27970,8 +27968,244 @@
         </p:nvSpPr>
         <p:spPr>
           <a:xfrm>
-            <a:off x="3273552" y="1810512"/>
-            <a:ext cx="2212848" cy="1188720"/>
+            <a:off x="9411919" y="1828800"/>
+            <a:ext cx="2231135" cy="1280160"/>
+          </a:xfrm>
+          <a:prstGeom prst="rect">
+            <a:avLst/>
+          </a:prstGeom>
+          <a:solidFill>
+            <a:srgbClr val="FBE6D4"/>
+          </a:solidFill>
+          <a:ln w="12700">
+            <a:solidFill>
+              <a:srgbClr val="D2690C"/>
+            </a:solidFill>
+          </a:ln>
+        </p:spPr>
+        <p:txBody>
+          <a:bodyPr rtlCol="0" anchor="ctr"/>
+          <a:lstStyle/>
+          <a:p>
+            <a:pPr algn="ctr"/>
+          </a:p>
+        </p:txBody>
+      </p:sp>
+      <p:sp>
+        <p:nvSpPr>
+          <p:cNvPr id="12" name="Rectangle 11"/>
+          <p:cNvSpPr/>
+          <p:nvPr/>
+        </p:nvSpPr>
+        <p:spPr>
+          <a:xfrm>
+            <a:off x="9539935" y="1901952"/>
+            <a:ext cx="54864" cy="219456"/>
+          </a:xfrm>
+          <a:prstGeom prst="rect">
+            <a:avLst/>
+          </a:prstGeom>
+          <a:solidFill>
+            <a:srgbClr val="D2690C"/>
+          </a:solidFill>
+          <a:ln>
+            <a:noFill/>
+          </a:ln>
+        </p:spPr>
+        <p:txBody>
+          <a:bodyPr rtlCol="0" anchor="ctr"/>
+          <a:lstStyle/>
+          <a:p>
+            <a:pPr algn="ctr"/>
+          </a:p>
+        </p:txBody>
+      </p:sp>
+      <p:sp>
+        <p:nvSpPr>
+          <p:cNvPr id="13" name="TextBox 12"/>
+          <p:cNvSpPr txBox="1"/>
+          <p:nvPr/>
+        </p:nvSpPr>
+        <p:spPr>
+          <a:xfrm>
+            <a:off x="9686239" y="1874519"/>
+            <a:ext cx="1865375" cy="237744"/>
+          </a:xfrm>
+          <a:prstGeom prst="rect">
+            <a:avLst/>
+          </a:prstGeom>
+          <a:noFill/>
+        </p:spPr>
+        <p:txBody>
+          <a:bodyPr wrap="square" anchor="ctr" lIns="0" tIns="0" rIns="0" bIns="0">
+            <a:noAutofit/>
+          </a:bodyPr>
+          <a:lstStyle/>
+          <a:p>
+            <a:pPr algn="l" latinLnBrk="0">
+              <a:lnSpc>
+                <a:spcPct val="100000"/>
+              </a:lnSpc>
+              <a:spcBef>
+                <a:spcPts val="0"/>
+              </a:spcBef>
+              <a:spcAft>
+                <a:spcPts val="0"/>
+              </a:spcAft>
+            </a:pPr>
+            <a:r>
+              <a:rPr sz="1050" b="1">
+                <a:solidFill>
+                  <a:srgbClr val="0A2B45"/>
+                </a:solidFill>
+                <a:latin typeface="Microsoft YaHei"/>
+                <a:ea typeface="Microsoft YaHei"/>
+                <a:cs typeface="Microsoft YaHei"/>
+              </a:rPr>
+              <a:t>形成方案</a:t>
+            </a:r>
+            <a:r>
+              <a:rPr sz="800" b="1">
+                <a:solidFill>
+                  <a:srgbClr val="D2690C"/>
+                </a:solidFill>
+                <a:latin typeface="Consolas"/>
+                <a:ea typeface="Microsoft YaHei"/>
+                <a:cs typeface="Microsoft YaHei"/>
+              </a:rPr>
+              <a:t>　Plan</a:t>
+            </a:r>
+          </a:p>
+        </p:txBody>
+      </p:sp>
+      <p:sp>
+        <p:nvSpPr>
+          <p:cNvPr id="14" name="Rectangle 13"/>
+          <p:cNvSpPr/>
+          <p:nvPr/>
+        </p:nvSpPr>
+        <p:spPr>
+          <a:xfrm>
+            <a:off x="548640" y="4645152"/>
+            <a:ext cx="11094415" cy="1280160"/>
+          </a:xfrm>
+          <a:prstGeom prst="rect">
+            <a:avLst/>
+          </a:prstGeom>
+          <a:solidFill>
+            <a:srgbClr val="F2F8FD"/>
+          </a:solidFill>
+          <a:ln w="9525">
+            <a:solidFill>
+              <a:srgbClr val="AFCEE1"/>
+            </a:solidFill>
+          </a:ln>
+        </p:spPr>
+        <p:txBody>
+          <a:bodyPr rtlCol="0" anchor="ctr"/>
+          <a:lstStyle/>
+          <a:p>
+            <a:pPr algn="ctr"/>
+          </a:p>
+        </p:txBody>
+      </p:sp>
+      <p:sp>
+        <p:nvSpPr>
+          <p:cNvPr id="15" name="Rectangle 14"/>
+          <p:cNvSpPr/>
+          <p:nvPr/>
+        </p:nvSpPr>
+        <p:spPr>
+          <a:xfrm>
+            <a:off x="676656" y="4718304"/>
+            <a:ext cx="54864" cy="219456"/>
+          </a:xfrm>
+          <a:prstGeom prst="rect">
+            <a:avLst/>
+          </a:prstGeom>
+          <a:solidFill>
+            <a:srgbClr val="0F62CE"/>
+          </a:solidFill>
+          <a:ln>
+            <a:noFill/>
+          </a:ln>
+        </p:spPr>
+        <p:txBody>
+          <a:bodyPr rtlCol="0" anchor="ctr"/>
+          <a:lstStyle/>
+          <a:p>
+            <a:pPr algn="ctr"/>
+          </a:p>
+        </p:txBody>
+      </p:sp>
+      <p:sp>
+        <p:nvSpPr>
+          <p:cNvPr id="16" name="TextBox 15"/>
+          <p:cNvSpPr txBox="1"/>
+          <p:nvPr/>
+        </p:nvSpPr>
+        <p:spPr>
+          <a:xfrm>
+            <a:off x="822960" y="4690872"/>
+            <a:ext cx="10728655" cy="237744"/>
+          </a:xfrm>
+          <a:prstGeom prst="rect">
+            <a:avLst/>
+          </a:prstGeom>
+          <a:noFill/>
+        </p:spPr>
+        <p:txBody>
+          <a:bodyPr wrap="square" anchor="ctr" lIns="0" tIns="0" rIns="0" bIns="0">
+            <a:noAutofit/>
+          </a:bodyPr>
+          <a:lstStyle/>
+          <a:p>
+            <a:pPr algn="l" latinLnBrk="0">
+              <a:lnSpc>
+                <a:spcPct val="100000"/>
+              </a:lnSpc>
+              <a:spcBef>
+                <a:spcPts val="0"/>
+              </a:spcBef>
+              <a:spcAft>
+                <a:spcPts val="0"/>
+              </a:spcAft>
+            </a:pPr>
+            <a:r>
+              <a:rPr sz="1050" b="1">
+                <a:solidFill>
+                  <a:srgbClr val="0A2B45"/>
+                </a:solidFill>
+                <a:latin typeface="Microsoft YaHei"/>
+                <a:ea typeface="Microsoft YaHei"/>
+                <a:cs typeface="Microsoft YaHei"/>
+              </a:rPr>
+              <a:t>确定性验收</a:t>
+            </a:r>
+            <a:r>
+              <a:rPr sz="800" b="1">
+                <a:solidFill>
+                  <a:srgbClr val="0F62CE"/>
+                </a:solidFill>
+                <a:latin typeface="Consolas"/>
+                <a:ea typeface="Microsoft YaHei"/>
+                <a:cs typeface="Microsoft YaHei"/>
+              </a:rPr>
+              <a:t>　Verify</a:t>
+            </a:r>
+          </a:p>
+        </p:txBody>
+      </p:sp>
+      <p:sp>
+        <p:nvSpPr>
+          <p:cNvPr id="17" name="Rectangle 16"/>
+          <p:cNvSpPr/>
+          <p:nvPr/>
+        </p:nvSpPr>
+        <p:spPr>
+          <a:xfrm>
+            <a:off x="676656" y="2212848"/>
+            <a:ext cx="2103120" cy="768096"/>
           </a:xfrm>
           <a:prstGeom prst="rect">
             <a:avLst/>
@@ -27979,9 +28213,9 @@
           <a:solidFill>
             <a:srgbClr val="FFFFFF"/>
           </a:solidFill>
-          <a:ln w="9525">
+          <a:ln w="12700">
             <a:solidFill>
-              <a:srgbClr val="CFE3F0"/>
+              <a:srgbClr val="17795F"/>
             </a:solidFill>
           </a:ln>
         </p:spPr>
@@ -27995,16 +28229,16 @@
       </p:sp>
       <p:sp>
         <p:nvSpPr>
-          <p:cNvPr id="12" name="Rectangle 11"/>
+          <p:cNvPr id="18" name="Oval 17"/>
           <p:cNvSpPr/>
           <p:nvPr/>
         </p:nvSpPr>
         <p:spPr>
           <a:xfrm>
-            <a:off x="3273552" y="1810512"/>
-            <a:ext cx="64008" cy="1188720"/>
-          </a:xfrm>
-          <a:prstGeom prst="rect">
+            <a:off x="822960" y="2459736"/>
+            <a:ext cx="274320" cy="274320"/>
+          </a:xfrm>
+          <a:prstGeom prst="ellipse">
             <a:avLst/>
           </a:prstGeom>
           <a:solidFill>
@@ -28015,23 +28249,46 @@
           </a:ln>
         </p:spPr>
         <p:txBody>
-          <a:bodyPr rtlCol="0" anchor="ctr"/>
-          <a:lstStyle/>
-          <a:p>
-            <a:pPr algn="ctr"/>
-          </a:p>
-        </p:txBody>
-      </p:sp>
-      <p:sp>
-        <p:nvSpPr>
-          <p:cNvPr id="13" name="TextBox 12"/>
-          <p:cNvSpPr txBox="1"/>
-          <p:nvPr/>
-        </p:nvSpPr>
-        <p:spPr>
-          <a:xfrm>
-            <a:off x="3456432" y="1856231"/>
-            <a:ext cx="1901952" cy="1097280"/>
+          <a:bodyPr rtlCol="0" anchor="ctr" wrap="square" lIns="0" tIns="0" rIns="0" bIns="0">
+            <a:noAutofit/>
+          </a:bodyPr>
+          <a:lstStyle/>
+          <a:p>
+            <a:pPr algn="ctr" latinLnBrk="0">
+              <a:lnSpc>
+                <a:spcPct val="100000"/>
+              </a:lnSpc>
+              <a:spcBef>
+                <a:spcPts val="0"/>
+              </a:spcBef>
+              <a:spcAft>
+                <a:spcPts val="0"/>
+              </a:spcAft>
+            </a:pPr>
+            <a:r>
+              <a:rPr sz="1050" b="1">
+                <a:solidFill>
+                  <a:srgbClr val="FFFFFF"/>
+                </a:solidFill>
+                <a:latin typeface="Microsoft YaHei"/>
+                <a:ea typeface="Microsoft YaHei"/>
+                <a:cs typeface="Microsoft YaHei"/>
+              </a:rPr>
+              <a:t>1</a:t>
+            </a:r>
+          </a:p>
+        </p:txBody>
+      </p:sp>
+      <p:sp>
+        <p:nvSpPr>
+          <p:cNvPr id="19" name="TextBox 18"/>
+          <p:cNvSpPr txBox="1"/>
+          <p:nvPr/>
+        </p:nvSpPr>
+        <p:spPr>
+          <a:xfrm>
+            <a:off x="1170432" y="2212848"/>
+            <a:ext cx="1554479" cy="768096"/>
           </a:xfrm>
           <a:prstGeom prst="rect">
             <a:avLst/>
@@ -28052,22 +28309,11 @@
                 <a:spcPts val="0"/>
               </a:spcBef>
               <a:spcAft>
-                <a:spcPts val="200"/>
-              </a:spcAft>
-            </a:pPr>
-            <a:r>
-              <a:rPr sz="1100" b="1">
-                <a:solidFill>
-                  <a:srgbClr val="17795F"/>
-                </a:solidFill>
-                <a:latin typeface="Microsoft YaHei"/>
-                <a:ea typeface="Microsoft YaHei"/>
-                <a:cs typeface="Microsoft YaHei"/>
-              </a:rPr>
-              <a:t>2 </a:t>
-            </a:r>
-            <a:r>
-              <a:rPr sz="1100" b="1">
+                <a:spcPts val="0"/>
+              </a:spcAft>
+            </a:pPr>
+            <a:r>
+              <a:rPr sz="1200" b="1">
                 <a:solidFill>
                   <a:srgbClr val="0A2B45"/>
                 </a:solidFill>
@@ -28075,23 +28321,10 @@
                 <a:ea typeface="Microsoft YaHei"/>
                 <a:cs typeface="Microsoft YaHei"/>
               </a:rPr>
-              <a:t>耗时归因（对齐到代码）</a:t>
-            </a:r>
-          </a:p>
-          <a:p>
-            <a:pPr algn="l" latinLnBrk="0">
-              <a:lnSpc>
-                <a:spcPct val="100000"/>
-              </a:lnSpc>
-              <a:spcBef>
-                <a:spcPts val="0"/>
-              </a:spcBef>
-              <a:spcAft>
-                <a:spcPts val="0"/>
-              </a:spcAft>
-            </a:pPr>
-            <a:r>
-              <a:rPr sz="1000" b="0">
+              <a:t>性能采样</a:t>
+            </a:r>
+            <a:r>
+              <a:rPr sz="950" b="0">
                 <a:solidFill>
                   <a:srgbClr val="1B4D69"/>
                 </a:solidFill>
@@ -28099,21 +28332,21 @@
                 <a:ea typeface="Microsoft YaHei"/>
                 <a:cs typeface="Microsoft YaHei"/>
               </a:rPr>
-              <a:t>获取目标阶段（Prefill/Decode），将kernel耗时直接映射到模型代码层，加入累加等数值校验</a:t>
-            </a:r>
-          </a:p>
-        </p:txBody>
-      </p:sp>
-      <p:sp>
-        <p:nvSpPr>
-          <p:cNvPr id="14" name="Rectangle 13"/>
+              <a:t>（Trace）</a:t>
+            </a:r>
+          </a:p>
+        </p:txBody>
+      </p:sp>
+      <p:sp>
+        <p:nvSpPr>
+          <p:cNvPr id="20" name="Rectangle 19"/>
           <p:cNvSpPr/>
           <p:nvPr/>
         </p:nvSpPr>
         <p:spPr>
           <a:xfrm>
-            <a:off x="5998464" y="1810512"/>
-            <a:ext cx="2212848" cy="1188720"/>
+            <a:off x="3588410" y="2212848"/>
+            <a:ext cx="2103120" cy="768096"/>
           </a:xfrm>
           <a:prstGeom prst="rect">
             <a:avLst/>
@@ -28121,9 +28354,9 @@
           <a:solidFill>
             <a:srgbClr val="FFFFFF"/>
           </a:solidFill>
-          <a:ln w="9525">
+          <a:ln w="12700">
             <a:solidFill>
-              <a:srgbClr val="CFE3F0"/>
+              <a:srgbClr val="17795F"/>
             </a:solidFill>
           </a:ln>
         </p:spPr>
@@ -28137,16 +28370,16 @@
       </p:sp>
       <p:sp>
         <p:nvSpPr>
-          <p:cNvPr id="15" name="Rectangle 14"/>
+          <p:cNvPr id="21" name="Oval 20"/>
           <p:cNvSpPr/>
           <p:nvPr/>
         </p:nvSpPr>
         <p:spPr>
           <a:xfrm>
-            <a:off x="5998464" y="1810512"/>
-            <a:ext cx="64008" cy="1188720"/>
-          </a:xfrm>
-          <a:prstGeom prst="rect">
+            <a:off x="3734714" y="2459736"/>
+            <a:ext cx="274320" cy="274320"/>
+          </a:xfrm>
+          <a:prstGeom prst="ellipse">
             <a:avLst/>
           </a:prstGeom>
           <a:solidFill>
@@ -28157,23 +28390,46 @@
           </a:ln>
         </p:spPr>
         <p:txBody>
-          <a:bodyPr rtlCol="0" anchor="ctr"/>
-          <a:lstStyle/>
-          <a:p>
-            <a:pPr algn="ctr"/>
-          </a:p>
-        </p:txBody>
-      </p:sp>
-      <p:sp>
-        <p:nvSpPr>
-          <p:cNvPr id="16" name="TextBox 15"/>
-          <p:cNvSpPr txBox="1"/>
-          <p:nvPr/>
-        </p:nvSpPr>
-        <p:spPr>
-          <a:xfrm>
-            <a:off x="6181344" y="1856231"/>
-            <a:ext cx="1901952" cy="1097280"/>
+          <a:bodyPr rtlCol="0" anchor="ctr" wrap="square" lIns="0" tIns="0" rIns="0" bIns="0">
+            <a:noAutofit/>
+          </a:bodyPr>
+          <a:lstStyle/>
+          <a:p>
+            <a:pPr algn="ctr" latinLnBrk="0">
+              <a:lnSpc>
+                <a:spcPct val="100000"/>
+              </a:lnSpc>
+              <a:spcBef>
+                <a:spcPts val="0"/>
+              </a:spcBef>
+              <a:spcAft>
+                <a:spcPts val="0"/>
+              </a:spcAft>
+            </a:pPr>
+            <a:r>
+              <a:rPr sz="1050" b="1">
+                <a:solidFill>
+                  <a:srgbClr val="FFFFFF"/>
+                </a:solidFill>
+                <a:latin typeface="Microsoft YaHei"/>
+                <a:ea typeface="Microsoft YaHei"/>
+                <a:cs typeface="Microsoft YaHei"/>
+              </a:rPr>
+              <a:t>2</a:t>
+            </a:r>
+          </a:p>
+        </p:txBody>
+      </p:sp>
+      <p:sp>
+        <p:nvSpPr>
+          <p:cNvPr id="22" name="TextBox 21"/>
+          <p:cNvSpPr txBox="1"/>
+          <p:nvPr/>
+        </p:nvSpPr>
+        <p:spPr>
+          <a:xfrm>
+            <a:off x="4082186" y="2212848"/>
+            <a:ext cx="1554479" cy="768096"/>
           </a:xfrm>
           <a:prstGeom prst="rect">
             <a:avLst/>
@@ -28194,22 +28450,11 @@
                 <a:spcPts val="0"/>
               </a:spcBef>
               <a:spcAft>
-                <a:spcPts val="200"/>
-              </a:spcAft>
-            </a:pPr>
-            <a:r>
-              <a:rPr sz="1100" b="1">
-                <a:solidFill>
-                  <a:srgbClr val="17795F"/>
-                </a:solidFill>
-                <a:latin typeface="Microsoft YaHei"/>
-                <a:ea typeface="Microsoft YaHei"/>
-                <a:cs typeface="Microsoft YaHei"/>
-              </a:rPr>
-              <a:t>3 </a:t>
-            </a:r>
-            <a:r>
-              <a:rPr sz="1100" b="1">
+                <a:spcPts val="0"/>
+              </a:spcAft>
+            </a:pPr>
+            <a:r>
+              <a:rPr sz="1200" b="1">
                 <a:solidFill>
                   <a:srgbClr val="0A2B45"/>
                 </a:solidFill>
@@ -28217,23 +28462,10 @@
                 <a:ea typeface="Microsoft YaHei"/>
                 <a:cs typeface="Microsoft YaHei"/>
               </a:rPr>
-              <a:t>理论上限核算</a:t>
-            </a:r>
-          </a:p>
-          <a:p>
-            <a:pPr algn="l" latinLnBrk="0">
-              <a:lnSpc>
-                <a:spcPct val="100000"/>
-              </a:lnSpc>
-              <a:spcBef>
-                <a:spcPts val="0"/>
-              </a:spcBef>
-              <a:spcAft>
-                <a:spcPts val="0"/>
-              </a:spcAft>
-            </a:pPr>
-            <a:r>
-              <a:rPr sz="1000" b="0">
+              <a:t>耗时归因</a:t>
+            </a:r>
+            <a:r>
+              <a:rPr sz="950" b="0">
                 <a:solidFill>
                   <a:srgbClr val="1B4D69"/>
                 </a:solidFill>
@@ -28241,358 +28473,7 @@
                 <a:ea typeface="Microsoft YaHei"/>
                 <a:cs typeface="Microsoft YaHei"/>
               </a:rPr>
-              <a:t>解析模型配置 → 折算计算量与访存字节 → 推导理论耗时下界与差距倍数</a:t>
-            </a:r>
-          </a:p>
-        </p:txBody>
-      </p:sp>
-      <p:cxnSp>
-        <p:nvCxnSpPr>
-          <p:cNvPr id="17" name="Connector 16"/>
-          <p:cNvCxnSpPr/>
-          <p:nvPr/>
-        </p:nvCxnSpPr>
-        <p:spPr>
-          <a:xfrm>
-            <a:off x="2798064" y="2404872"/>
-            <a:ext cx="438912" cy="0"/>
-          </a:xfrm>
-          <a:prstGeom prst="line">
-            <a:avLst/>
-          </a:prstGeom>
-          <a:ln w="15875">
-            <a:solidFill>
-              <a:srgbClr val="40708B"/>
-            </a:solidFill>
-            <a:tailEnd type="triangle" w="med" len="med"/>
-          </a:ln>
-        </p:spPr>
-      </p:cxnSp>
-      <p:sp>
-        <p:nvSpPr>
-          <p:cNvPr id="18" name="TextBox 17"/>
-          <p:cNvSpPr txBox="1"/>
-          <p:nvPr/>
-        </p:nvSpPr>
-        <p:spPr>
-          <a:xfrm>
-            <a:off x="2798064" y="2450591"/>
-            <a:ext cx="438912" cy="530352"/>
-          </a:xfrm>
-          <a:prstGeom prst="rect">
-            <a:avLst/>
-          </a:prstGeom>
-          <a:noFill/>
-        </p:spPr>
-        <p:txBody>
-          <a:bodyPr wrap="square" anchor="t" lIns="0" tIns="0" rIns="0" bIns="0">
-            <a:noAutofit/>
-          </a:bodyPr>
-          <a:lstStyle/>
-          <a:p>
-            <a:pPr algn="l" latinLnBrk="0">
-              <a:lnSpc>
-                <a:spcPct val="100000"/>
-              </a:lnSpc>
-              <a:spcBef>
-                <a:spcPts val="0"/>
-              </a:spcBef>
-              <a:spcAft>
-                <a:spcPts val="0"/>
-              </a:spcAft>
-            </a:pPr>
-            <a:r>
-              <a:rPr sz="800" b="0">
-                <a:solidFill>
-                  <a:srgbClr val="40708B"/>
-                </a:solidFill>
-                <a:latin typeface="Microsoft YaHei"/>
-                <a:ea typeface="Microsoft YaHei"/>
-                <a:cs typeface="Microsoft YaHei"/>
-              </a:rPr>
-              <a:t>Trace</a:t>
-            </a:r>
-          </a:p>
-          <a:p>
-            <a:pPr algn="l" latinLnBrk="0">
-              <a:lnSpc>
-                <a:spcPct val="100000"/>
-              </a:lnSpc>
-              <a:spcBef>
-                <a:spcPts val="0"/>
-              </a:spcBef>
-              <a:spcAft>
-                <a:spcPts val="0"/>
-              </a:spcAft>
-            </a:pPr>
-            <a:r>
-              <a:rPr sz="800" b="0">
-                <a:solidFill>
-                  <a:srgbClr val="40708B"/>
-                </a:solidFill>
-                <a:latin typeface="Microsoft YaHei"/>
-                <a:ea typeface="Microsoft YaHei"/>
-                <a:cs typeface="Microsoft YaHei"/>
-              </a:rPr>
-              <a:t>文件</a:t>
-            </a:r>
-          </a:p>
-        </p:txBody>
-      </p:sp>
-      <p:cxnSp>
-        <p:nvCxnSpPr>
-          <p:cNvPr id="19" name="Connector 18"/>
-          <p:cNvCxnSpPr/>
-          <p:nvPr/>
-        </p:nvCxnSpPr>
-        <p:spPr>
-          <a:xfrm>
-            <a:off x="5522976" y="2404872"/>
-            <a:ext cx="438912" cy="0"/>
-          </a:xfrm>
-          <a:prstGeom prst="line">
-            <a:avLst/>
-          </a:prstGeom>
-          <a:ln w="15875">
-            <a:solidFill>
-              <a:srgbClr val="40708B"/>
-            </a:solidFill>
-            <a:tailEnd type="triangle" w="med" len="med"/>
-          </a:ln>
-        </p:spPr>
-      </p:cxnSp>
-      <p:sp>
-        <p:nvSpPr>
-          <p:cNvPr id="20" name="TextBox 19"/>
-          <p:cNvSpPr txBox="1"/>
-          <p:nvPr/>
-        </p:nvSpPr>
-        <p:spPr>
-          <a:xfrm>
-            <a:off x="5522976" y="2450591"/>
-            <a:ext cx="438911" cy="530352"/>
-          </a:xfrm>
-          <a:prstGeom prst="rect">
-            <a:avLst/>
-          </a:prstGeom>
-          <a:noFill/>
-        </p:spPr>
-        <p:txBody>
-          <a:bodyPr wrap="square" anchor="t" lIns="0" tIns="0" rIns="0" bIns="0">
-            <a:noAutofit/>
-          </a:bodyPr>
-          <a:lstStyle/>
-          <a:p>
-            <a:pPr algn="l" latinLnBrk="0">
-              <a:lnSpc>
-                <a:spcPct val="100000"/>
-              </a:lnSpc>
-              <a:spcBef>
-                <a:spcPts val="0"/>
-              </a:spcBef>
-              <a:spcAft>
-                <a:spcPts val="0"/>
-              </a:spcAft>
-            </a:pPr>
-            <a:r>
-              <a:rPr sz="800" b="0">
-                <a:solidFill>
-                  <a:srgbClr val="40708B"/>
-                </a:solidFill>
-                <a:latin typeface="Microsoft YaHei"/>
-                <a:ea typeface="Microsoft YaHei"/>
-                <a:cs typeface="Microsoft YaHei"/>
-              </a:rPr>
-              <a:t>各类算子</a:t>
-            </a:r>
-          </a:p>
-          <a:p>
-            <a:pPr algn="l" latinLnBrk="0">
-              <a:lnSpc>
-                <a:spcPct val="100000"/>
-              </a:lnSpc>
-              <a:spcBef>
-                <a:spcPts val="0"/>
-              </a:spcBef>
-              <a:spcAft>
-                <a:spcPts val="0"/>
-              </a:spcAft>
-            </a:pPr>
-            <a:r>
-              <a:rPr sz="800" b="0">
-                <a:solidFill>
-                  <a:srgbClr val="40708B"/>
-                </a:solidFill>
-                <a:latin typeface="Microsoft YaHei"/>
-                <a:ea typeface="Microsoft YaHei"/>
-                <a:cs typeface="Microsoft YaHei"/>
-              </a:rPr>
-              <a:t>耗时、</a:t>
-            </a:r>
-          </a:p>
-          <a:p>
-            <a:pPr algn="l" latinLnBrk="0">
-              <a:lnSpc>
-                <a:spcPct val="100000"/>
-              </a:lnSpc>
-              <a:spcBef>
-                <a:spcPts val="0"/>
-              </a:spcBef>
-              <a:spcAft>
-                <a:spcPts val="0"/>
-              </a:spcAft>
-            </a:pPr>
-            <a:r>
-              <a:rPr sz="800" b="0">
-                <a:solidFill>
-                  <a:srgbClr val="40708B"/>
-                </a:solidFill>
-                <a:latin typeface="Microsoft YaHei"/>
-                <a:ea typeface="Microsoft YaHei"/>
-                <a:cs typeface="Microsoft YaHei"/>
-              </a:rPr>
-              <a:t>调用频次</a:t>
-            </a:r>
-          </a:p>
-        </p:txBody>
-      </p:sp>
-      <p:cxnSp>
-        <p:nvCxnSpPr>
-          <p:cNvPr id="21" name="Connector 20"/>
-          <p:cNvCxnSpPr/>
-          <p:nvPr/>
-        </p:nvCxnSpPr>
-        <p:spPr>
-          <a:xfrm>
-            <a:off x="8247888" y="2404872"/>
-            <a:ext cx="438912" cy="0"/>
-          </a:xfrm>
-          <a:prstGeom prst="line">
-            <a:avLst/>
-          </a:prstGeom>
-          <a:ln w="15875">
-            <a:solidFill>
-              <a:srgbClr val="40708B"/>
-            </a:solidFill>
-            <a:tailEnd type="triangle" w="med" len="med"/>
-          </a:ln>
-        </p:spPr>
-      </p:cxnSp>
-      <p:sp>
-        <p:nvSpPr>
-          <p:cNvPr id="22" name="TextBox 21"/>
-          <p:cNvSpPr txBox="1"/>
-          <p:nvPr/>
-        </p:nvSpPr>
-        <p:spPr>
-          <a:xfrm>
-            <a:off x="8247888" y="2450591"/>
-            <a:ext cx="438911" cy="530352"/>
-          </a:xfrm>
-          <a:prstGeom prst="rect">
-            <a:avLst/>
-          </a:prstGeom>
-          <a:noFill/>
-        </p:spPr>
-        <p:txBody>
-          <a:bodyPr wrap="square" anchor="t" lIns="0" tIns="0" rIns="0" bIns="0">
-            <a:noAutofit/>
-          </a:bodyPr>
-          <a:lstStyle/>
-          <a:p>
-            <a:pPr algn="l" latinLnBrk="0">
-              <a:lnSpc>
-                <a:spcPct val="100000"/>
-              </a:lnSpc>
-              <a:spcBef>
-                <a:spcPts val="0"/>
-              </a:spcBef>
-              <a:spcAft>
-                <a:spcPts val="0"/>
-              </a:spcAft>
-            </a:pPr>
-            <a:r>
-              <a:rPr sz="800" b="0">
-                <a:solidFill>
-                  <a:srgbClr val="40708B"/>
-                </a:solidFill>
-                <a:latin typeface="Microsoft YaHei"/>
-                <a:ea typeface="Microsoft YaHei"/>
-                <a:cs typeface="Microsoft YaHei"/>
-              </a:rPr>
-              <a:t>瓶颈优先</a:t>
-            </a:r>
-          </a:p>
-          <a:p>
-            <a:pPr algn="l" latinLnBrk="0">
-              <a:lnSpc>
-                <a:spcPct val="100000"/>
-              </a:lnSpc>
-              <a:spcBef>
-                <a:spcPts val="0"/>
-              </a:spcBef>
-              <a:spcAft>
-                <a:spcPts val="0"/>
-              </a:spcAft>
-            </a:pPr>
-            <a:r>
-              <a:rPr sz="800" b="0">
-                <a:solidFill>
-                  <a:srgbClr val="40708B"/>
-                </a:solidFill>
-                <a:latin typeface="Microsoft YaHei"/>
-                <a:ea typeface="Microsoft YaHei"/>
-                <a:cs typeface="Microsoft YaHei"/>
-              </a:rPr>
-              <a:t>级列表、</a:t>
-            </a:r>
-          </a:p>
-          <a:p>
-            <a:pPr algn="l" latinLnBrk="0">
-              <a:lnSpc>
-                <a:spcPct val="100000"/>
-              </a:lnSpc>
-              <a:spcBef>
-                <a:spcPts val="0"/>
-              </a:spcBef>
-              <a:spcAft>
-                <a:spcPts val="0"/>
-              </a:spcAft>
-            </a:pPr>
-            <a:r>
-              <a:rPr sz="800" b="0">
-                <a:solidFill>
-                  <a:srgbClr val="40708B"/>
-                </a:solidFill>
-                <a:latin typeface="Microsoft YaHei"/>
-                <a:ea typeface="Microsoft YaHei"/>
-                <a:cs typeface="Microsoft YaHei"/>
-              </a:rPr>
-              <a:t>异常算子</a:t>
-            </a:r>
-          </a:p>
-          <a:p>
-            <a:pPr algn="l" latinLnBrk="0">
-              <a:lnSpc>
-                <a:spcPct val="100000"/>
-              </a:lnSpc>
-              <a:spcBef>
-                <a:spcPts val="0"/>
-              </a:spcBef>
-              <a:spcAft>
-                <a:spcPts val="0"/>
-              </a:spcAft>
-            </a:pPr>
-            <a:r>
-              <a:rPr sz="800" b="0">
-                <a:solidFill>
-                  <a:srgbClr val="40708B"/>
-                </a:solidFill>
-                <a:latin typeface="Microsoft YaHei"/>
-                <a:ea typeface="Microsoft YaHei"/>
-                <a:cs typeface="Microsoft YaHei"/>
-              </a:rPr>
-              <a:t>耗时</a:t>
+              <a:t>（对齐到代码）</a:t>
             </a:r>
           </a:p>
         </p:txBody>
@@ -28605,8 +28486,8 @@
         </p:nvSpPr>
         <p:spPr>
           <a:xfrm>
-            <a:off x="8723376" y="1810512"/>
-            <a:ext cx="2916936" cy="2630805"/>
+            <a:off x="6500164" y="2212848"/>
+            <a:ext cx="2103120" cy="768096"/>
           </a:xfrm>
           <a:prstGeom prst="rect">
             <a:avLst/>
@@ -28614,7 +28495,137 @@
           <a:solidFill>
             <a:srgbClr val="FFFFFF"/>
           </a:solidFill>
-          <a:ln w="19050">
+          <a:ln w="12700">
+            <a:solidFill>
+              <a:srgbClr val="17795F"/>
+            </a:solidFill>
+          </a:ln>
+        </p:spPr>
+        <p:txBody>
+          <a:bodyPr rtlCol="0" anchor="ctr"/>
+          <a:lstStyle/>
+          <a:p>
+            <a:pPr algn="ctr"/>
+          </a:p>
+        </p:txBody>
+      </p:sp>
+      <p:sp>
+        <p:nvSpPr>
+          <p:cNvPr id="24" name="Oval 23"/>
+          <p:cNvSpPr/>
+          <p:nvPr/>
+        </p:nvSpPr>
+        <p:spPr>
+          <a:xfrm>
+            <a:off x="6646468" y="2459736"/>
+            <a:ext cx="274320" cy="274320"/>
+          </a:xfrm>
+          <a:prstGeom prst="ellipse">
+            <a:avLst/>
+          </a:prstGeom>
+          <a:solidFill>
+            <a:srgbClr val="17795F"/>
+          </a:solidFill>
+          <a:ln>
+            <a:noFill/>
+          </a:ln>
+        </p:spPr>
+        <p:txBody>
+          <a:bodyPr rtlCol="0" anchor="ctr" wrap="square" lIns="0" tIns="0" rIns="0" bIns="0">
+            <a:noAutofit/>
+          </a:bodyPr>
+          <a:lstStyle/>
+          <a:p>
+            <a:pPr algn="ctr" latinLnBrk="0">
+              <a:lnSpc>
+                <a:spcPct val="100000"/>
+              </a:lnSpc>
+              <a:spcBef>
+                <a:spcPts val="0"/>
+              </a:spcBef>
+              <a:spcAft>
+                <a:spcPts val="0"/>
+              </a:spcAft>
+            </a:pPr>
+            <a:r>
+              <a:rPr sz="1050" b="1">
+                <a:solidFill>
+                  <a:srgbClr val="FFFFFF"/>
+                </a:solidFill>
+                <a:latin typeface="Microsoft YaHei"/>
+                <a:ea typeface="Microsoft YaHei"/>
+                <a:cs typeface="Microsoft YaHei"/>
+              </a:rPr>
+              <a:t>3</a:t>
+            </a:r>
+          </a:p>
+        </p:txBody>
+      </p:sp>
+      <p:sp>
+        <p:nvSpPr>
+          <p:cNvPr id="25" name="TextBox 24"/>
+          <p:cNvSpPr txBox="1"/>
+          <p:nvPr/>
+        </p:nvSpPr>
+        <p:spPr>
+          <a:xfrm>
+            <a:off x="6993940" y="2212848"/>
+            <a:ext cx="1554479" cy="768096"/>
+          </a:xfrm>
+          <a:prstGeom prst="rect">
+            <a:avLst/>
+          </a:prstGeom>
+          <a:noFill/>
+        </p:spPr>
+        <p:txBody>
+          <a:bodyPr wrap="square" anchor="ctr" lIns="0" tIns="0" rIns="0" bIns="0">
+            <a:noAutofit/>
+          </a:bodyPr>
+          <a:lstStyle/>
+          <a:p>
+            <a:pPr algn="l" latinLnBrk="0">
+              <a:lnSpc>
+                <a:spcPct val="100000"/>
+              </a:lnSpc>
+              <a:spcBef>
+                <a:spcPts val="0"/>
+              </a:spcBef>
+              <a:spcAft>
+                <a:spcPts val="0"/>
+              </a:spcAft>
+            </a:pPr>
+            <a:r>
+              <a:rPr sz="1200" b="1">
+                <a:solidFill>
+                  <a:srgbClr val="0A2B45"/>
+                </a:solidFill>
+                <a:latin typeface="Microsoft YaHei"/>
+                <a:ea typeface="Microsoft YaHei"/>
+                <a:cs typeface="Microsoft YaHei"/>
+              </a:rPr>
+              <a:t>理论上限核算</a:t>
+            </a:r>
+          </a:p>
+        </p:txBody>
+      </p:sp>
+      <p:sp>
+        <p:nvSpPr>
+          <p:cNvPr id="26" name="Rectangle 25"/>
+          <p:cNvSpPr/>
+          <p:nvPr/>
+        </p:nvSpPr>
+        <p:spPr>
+          <a:xfrm>
+            <a:off x="9539935" y="2212848"/>
+            <a:ext cx="1975103" cy="768096"/>
+          </a:xfrm>
+          <a:prstGeom prst="rect">
+            <a:avLst/>
+          </a:prstGeom>
+          <a:solidFill>
+            <a:srgbClr val="FFFFFF"/>
+          </a:solidFill>
+          <a:ln w="12700">
             <a:solidFill>
               <a:srgbClr val="D2690C"/>
             </a:solidFill>
@@ -28630,16 +28641,16 @@
       </p:sp>
       <p:sp>
         <p:nvSpPr>
-          <p:cNvPr id="24" name="Rectangle 23"/>
+          <p:cNvPr id="27" name="Oval 26"/>
           <p:cNvSpPr/>
           <p:nvPr/>
         </p:nvSpPr>
         <p:spPr>
           <a:xfrm>
-            <a:off x="8723376" y="1810512"/>
-            <a:ext cx="64008" cy="2630805"/>
-          </a:xfrm>
-          <a:prstGeom prst="rect">
+            <a:off x="9686239" y="2304288"/>
+            <a:ext cx="274320" cy="274320"/>
+          </a:xfrm>
+          <a:prstGeom prst="ellipse">
             <a:avLst/>
           </a:prstGeom>
           <a:solidFill>
@@ -28650,23 +28661,46 @@
           </a:ln>
         </p:spPr>
         <p:txBody>
-          <a:bodyPr rtlCol="0" anchor="ctr"/>
-          <a:lstStyle/>
-          <a:p>
-            <a:pPr algn="ctr"/>
-          </a:p>
-        </p:txBody>
-      </p:sp>
-      <p:sp>
-        <p:nvSpPr>
-          <p:cNvPr id="25" name="TextBox 24"/>
-          <p:cNvSpPr txBox="1"/>
-          <p:nvPr/>
-        </p:nvSpPr>
-        <p:spPr>
-          <a:xfrm>
-            <a:off x="8942832" y="1856231"/>
-            <a:ext cx="2532888" cy="274320"/>
+          <a:bodyPr rtlCol="0" anchor="ctr" wrap="square" lIns="0" tIns="0" rIns="0" bIns="0">
+            <a:noAutofit/>
+          </a:bodyPr>
+          <a:lstStyle/>
+          <a:p>
+            <a:pPr algn="ctr" latinLnBrk="0">
+              <a:lnSpc>
+                <a:spcPct val="100000"/>
+              </a:lnSpc>
+              <a:spcBef>
+                <a:spcPts val="0"/>
+              </a:spcBef>
+              <a:spcAft>
+                <a:spcPts val="0"/>
+              </a:spcAft>
+            </a:pPr>
+            <a:r>
+              <a:rPr sz="1050" b="1">
+                <a:solidFill>
+                  <a:srgbClr val="FFFFFF"/>
+                </a:solidFill>
+                <a:latin typeface="Microsoft YaHei"/>
+                <a:ea typeface="Microsoft YaHei"/>
+                <a:cs typeface="Microsoft YaHei"/>
+              </a:rPr>
+              <a:t>4</a:t>
+            </a:r>
+          </a:p>
+        </p:txBody>
+      </p:sp>
+      <p:sp>
+        <p:nvSpPr>
+          <p:cNvPr id="28" name="TextBox 27"/>
+          <p:cNvSpPr txBox="1"/>
+          <p:nvPr/>
+        </p:nvSpPr>
+        <p:spPr>
+          <a:xfrm>
+            <a:off x="10033711" y="2286000"/>
+            <a:ext cx="1408175" cy="310896"/>
           </a:xfrm>
           <a:prstGeom prst="rect">
             <a:avLst/>
@@ -28691,18 +28725,7 @@
               </a:spcAft>
             </a:pPr>
             <a:r>
-              <a:rPr sz="1150" b="1">
-                <a:solidFill>
-                  <a:srgbClr val="C2570A"/>
-                </a:solidFill>
-                <a:latin typeface="Microsoft YaHei"/>
-                <a:ea typeface="Microsoft YaHei"/>
-                <a:cs typeface="Microsoft YaHei"/>
-              </a:rPr>
-              <a:t>4 </a:t>
-            </a:r>
-            <a:r>
-              <a:rPr sz="1150" b="1">
+              <a:rPr sz="1200" b="1">
                 <a:solidFill>
                   <a:srgbClr val="0A2B45"/>
                 </a:solidFill>
@@ -28717,26 +28740,138 @@
       </p:sp>
       <p:sp>
         <p:nvSpPr>
-          <p:cNvPr id="26" name="Rectangle 25"/>
+          <p:cNvPr id="29" name="Rounded Rectangle 28"/>
           <p:cNvSpPr/>
           <p:nvPr/>
         </p:nvSpPr>
         <p:spPr>
           <a:xfrm>
-            <a:off x="8906255" y="2176272"/>
-            <a:ext cx="2551176" cy="1114679"/>
-          </a:xfrm>
-          <a:prstGeom prst="rect">
-            <a:avLst/>
+            <a:off x="9686239" y="2670048"/>
+            <a:ext cx="548640" cy="219456"/>
+          </a:xfrm>
+          <a:prstGeom prst="roundRect">
+            <a:avLst>
+              <a:gd name="adj" fmla="val 50000"/>
+            </a:avLst>
           </a:prstGeom>
           <a:solidFill>
-            <a:srgbClr val="F2F8FD"/>
+            <a:srgbClr val="D2690C"/>
           </a:solidFill>
           <a:ln>
             <a:noFill/>
           </a:ln>
         </p:spPr>
         <p:txBody>
+          <a:bodyPr rtlCol="0" anchor="ctr" wrap="square" lIns="18288" tIns="0" rIns="18288" bIns="0">
+            <a:noAutofit/>
+          </a:bodyPr>
+          <a:lstStyle/>
+          <a:p>
+            <a:pPr algn="ctr" latinLnBrk="0">
+              <a:lnSpc>
+                <a:spcPct val="100000"/>
+              </a:lnSpc>
+              <a:spcBef>
+                <a:spcPts val="0"/>
+              </a:spcBef>
+              <a:spcAft>
+                <a:spcPts val="0"/>
+              </a:spcAft>
+            </a:pPr>
+            <a:r>
+              <a:rPr sz="850" b="1">
+                <a:solidFill>
+                  <a:srgbClr val="FFFFFF"/>
+                </a:solidFill>
+                <a:latin typeface="Microsoft YaHei"/>
+                <a:ea typeface="Microsoft YaHei"/>
+                <a:cs typeface="Microsoft YaHei"/>
+              </a:rPr>
+              <a:t>规划器</a:t>
+            </a:r>
+          </a:p>
+        </p:txBody>
+      </p:sp>
+      <p:sp>
+        <p:nvSpPr>
+          <p:cNvPr id="30" name="Rounded Rectangle 29"/>
+          <p:cNvSpPr/>
+          <p:nvPr/>
+        </p:nvSpPr>
+        <p:spPr>
+          <a:xfrm>
+            <a:off x="10289743" y="2670048"/>
+            <a:ext cx="914400" cy="219456"/>
+          </a:xfrm>
+          <a:prstGeom prst="roundRect">
+            <a:avLst>
+              <a:gd name="adj" fmla="val 50000"/>
+            </a:avLst>
+          </a:prstGeom>
+          <a:solidFill>
+            <a:srgbClr val="FFFFFF"/>
+          </a:solidFill>
+          <a:ln w="9525">
+            <a:solidFill>
+              <a:srgbClr val="40708B"/>
+            </a:solidFill>
+          </a:ln>
+        </p:spPr>
+        <p:txBody>
+          <a:bodyPr rtlCol="0" anchor="ctr" wrap="square" lIns="18288" tIns="0" rIns="18288" bIns="0">
+            <a:noAutofit/>
+          </a:bodyPr>
+          <a:lstStyle/>
+          <a:p>
+            <a:pPr algn="ctr" latinLnBrk="0">
+              <a:lnSpc>
+                <a:spcPct val="100000"/>
+              </a:lnSpc>
+              <a:spcBef>
+                <a:spcPts val="0"/>
+              </a:spcBef>
+              <a:spcAft>
+                <a:spcPts val="0"/>
+              </a:spcAft>
+            </a:pPr>
+            <a:r>
+              <a:rPr sz="850" b="1">
+                <a:solidFill>
+                  <a:srgbClr val="1B4D69"/>
+                </a:solidFill>
+                <a:latin typeface="Microsoft YaHei"/>
+                <a:ea typeface="Microsoft YaHei"/>
+                <a:cs typeface="Microsoft YaHei"/>
+              </a:rPr>
+              <a:t>人 · 按需介入</a:t>
+            </a:r>
+          </a:p>
+        </p:txBody>
+      </p:sp>
+      <p:sp>
+        <p:nvSpPr>
+          <p:cNvPr id="31" name="Rectangle 30"/>
+          <p:cNvSpPr/>
+          <p:nvPr/>
+        </p:nvSpPr>
+        <p:spPr>
+          <a:xfrm>
+            <a:off x="676656" y="5029200"/>
+            <a:ext cx="2103120" cy="768096"/>
+          </a:xfrm>
+          <a:prstGeom prst="rect">
+            <a:avLst/>
+          </a:prstGeom>
+          <a:solidFill>
+            <a:srgbClr val="FFFFFF"/>
+          </a:solidFill>
+          <a:ln w="12700">
+            <a:solidFill>
+              <a:srgbClr val="0F62CE"/>
+            </a:solidFill>
+          </a:ln>
+        </p:spPr>
+        <p:txBody>
           <a:bodyPr rtlCol="0" anchor="ctr"/>
           <a:lstStyle/>
           <a:p>
@@ -28746,26 +28881,127 @@
       </p:sp>
       <p:sp>
         <p:nvSpPr>
-          <p:cNvPr id="27" name="Rectangle 26"/>
+          <p:cNvPr id="32" name="Oval 31"/>
           <p:cNvSpPr/>
           <p:nvPr/>
         </p:nvSpPr>
         <p:spPr>
           <a:xfrm>
-            <a:off x="8906255" y="2176272"/>
-            <a:ext cx="50292" cy="1114679"/>
-          </a:xfrm>
-          <a:prstGeom prst="rect">
+            <a:off x="822960" y="5276088"/>
+            <a:ext cx="274320" cy="274320"/>
+          </a:xfrm>
+          <a:prstGeom prst="ellipse">
             <a:avLst/>
           </a:prstGeom>
           <a:solidFill>
-            <a:srgbClr val="C2570A"/>
+            <a:srgbClr val="0F62CE"/>
           </a:solidFill>
           <a:ln>
             <a:noFill/>
           </a:ln>
         </p:spPr>
         <p:txBody>
+          <a:bodyPr rtlCol="0" anchor="ctr" wrap="square" lIns="0" tIns="0" rIns="0" bIns="0">
+            <a:noAutofit/>
+          </a:bodyPr>
+          <a:lstStyle/>
+          <a:p>
+            <a:pPr algn="ctr" latinLnBrk="0">
+              <a:lnSpc>
+                <a:spcPct val="100000"/>
+              </a:lnSpc>
+              <a:spcBef>
+                <a:spcPts val="0"/>
+              </a:spcBef>
+              <a:spcAft>
+                <a:spcPts val="0"/>
+              </a:spcAft>
+            </a:pPr>
+            <a:r>
+              <a:rPr sz="1050" b="1">
+                <a:solidFill>
+                  <a:srgbClr val="FFFFFF"/>
+                </a:solidFill>
+                <a:latin typeface="Microsoft YaHei"/>
+                <a:ea typeface="Microsoft YaHei"/>
+                <a:cs typeface="Microsoft YaHei"/>
+              </a:rPr>
+              <a:t>8</a:t>
+            </a:r>
+          </a:p>
+        </p:txBody>
+      </p:sp>
+      <p:sp>
+        <p:nvSpPr>
+          <p:cNvPr id="33" name="TextBox 32"/>
+          <p:cNvSpPr txBox="1"/>
+          <p:nvPr/>
+        </p:nvSpPr>
+        <p:spPr>
+          <a:xfrm>
+            <a:off x="1170432" y="5029200"/>
+            <a:ext cx="1554479" cy="768096"/>
+          </a:xfrm>
+          <a:prstGeom prst="rect">
+            <a:avLst/>
+          </a:prstGeom>
+          <a:noFill/>
+        </p:spPr>
+        <p:txBody>
+          <a:bodyPr wrap="square" anchor="ctr" lIns="0" tIns="0" rIns="0" bIns="0">
+            <a:noAutofit/>
+          </a:bodyPr>
+          <a:lstStyle/>
+          <a:p>
+            <a:pPr algn="l" latinLnBrk="0">
+              <a:lnSpc>
+                <a:spcPct val="100000"/>
+              </a:lnSpc>
+              <a:spcBef>
+                <a:spcPts val="0"/>
+              </a:spcBef>
+              <a:spcAft>
+                <a:spcPts val="0"/>
+              </a:spcAft>
+            </a:pPr>
+            <a:r>
+              <a:rPr sz="1200" b="1">
+                <a:solidFill>
+                  <a:srgbClr val="0A2B45"/>
+                </a:solidFill>
+                <a:latin typeface="Microsoft YaHei"/>
+                <a:ea typeface="Microsoft YaHei"/>
+                <a:cs typeface="Microsoft YaHei"/>
+              </a:rPr>
+              <a:t>端到端 A/B 对比实验</a:t>
+            </a:r>
+          </a:p>
+        </p:txBody>
+      </p:sp>
+      <p:sp>
+        <p:nvSpPr>
+          <p:cNvPr id="34" name="Rectangle 33"/>
+          <p:cNvSpPr/>
+          <p:nvPr/>
+        </p:nvSpPr>
+        <p:spPr>
+          <a:xfrm>
+            <a:off x="3588410" y="5029200"/>
+            <a:ext cx="2103120" cy="768096"/>
+          </a:xfrm>
+          <a:prstGeom prst="rect">
+            <a:avLst/>
+          </a:prstGeom>
+          <a:solidFill>
+            <a:srgbClr val="FFFFFF"/>
+          </a:solidFill>
+          <a:ln w="12700">
+            <a:solidFill>
+              <a:srgbClr val="0F62CE"/>
+            </a:solidFill>
+          </a:ln>
+        </p:spPr>
+        <p:txBody>
           <a:bodyPr rtlCol="0" anchor="ctr"/>
           <a:lstStyle/>
           <a:p>
@@ -28775,121 +29011,127 @@
       </p:sp>
       <p:sp>
         <p:nvSpPr>
-          <p:cNvPr id="28" name="TextBox 27"/>
-          <p:cNvSpPr txBox="1"/>
-          <p:nvPr/>
-        </p:nvSpPr>
-        <p:spPr>
-          <a:xfrm>
-            <a:off x="9070848" y="2212848"/>
-            <a:ext cx="2221991" cy="1041527"/>
-          </a:xfrm>
-          <a:prstGeom prst="rect">
-            <a:avLst/>
-          </a:prstGeom>
-          <a:noFill/>
-        </p:spPr>
-        <p:txBody>
-          <a:bodyPr wrap="square" anchor="ctr" lIns="0" tIns="0" rIns="0" bIns="0">
-            <a:noAutofit/>
-          </a:bodyPr>
-          <a:lstStyle/>
-          <a:p>
-            <a:pPr algn="l" latinLnBrk="0">
-              <a:lnSpc>
-                <a:spcPct val="100000"/>
-              </a:lnSpc>
-              <a:spcBef>
-                <a:spcPts val="0"/>
-              </a:spcBef>
-              <a:spcAft>
-                <a:spcPts val="200"/>
-              </a:spcAft>
-            </a:pPr>
-            <a:r>
-              <a:rPr sz="1100" b="1">
-                <a:solidFill>
-                  <a:srgbClr val="C2570A"/>
-                </a:solidFill>
-                <a:latin typeface="Microsoft YaHei"/>
-                <a:ea typeface="Microsoft YaHei"/>
-                <a:cs typeface="Microsoft YaHei"/>
-              </a:rPr>
-              <a:t>规划器</a:t>
-            </a:r>
-          </a:p>
-          <a:p>
-            <a:pPr algn="l" latinLnBrk="0">
-              <a:lnSpc>
-                <a:spcPct val="100000"/>
-              </a:lnSpc>
-              <a:spcBef>
-                <a:spcPts val="0"/>
-              </a:spcBef>
-              <a:spcAft>
-                <a:spcPts val="0"/>
-              </a:spcAft>
-            </a:pPr>
-            <a:r>
-              <a:rPr sz="950" b="0">
-                <a:solidFill>
-                  <a:srgbClr val="1B4D69"/>
-                </a:solidFill>
-                <a:latin typeface="Microsoft YaHei"/>
-                <a:ea typeface="Microsoft YaHei"/>
-                <a:cs typeface="Microsoft YaHei"/>
-              </a:rPr>
-              <a:t>看证据写代码：结合模型源码与锁定的诊断证据，提出优化假设并判断</a:t>
-            </a:r>
-          </a:p>
-          <a:p>
-            <a:pPr algn="l" latinLnBrk="0">
-              <a:lnSpc>
-                <a:spcPct val="100000"/>
-              </a:lnSpc>
-              <a:spcBef>
-                <a:spcPts val="0"/>
-              </a:spcBef>
-              <a:spcAft>
-                <a:spcPts val="0"/>
-              </a:spcAft>
-            </a:pPr>
-            <a:r>
-              <a:rPr sz="950" b="0">
-                <a:solidFill>
-                  <a:srgbClr val="1B4D69"/>
-                </a:solidFill>
-                <a:latin typeface="Microsoft YaHei"/>
-                <a:ea typeface="Microsoft YaHei"/>
-                <a:cs typeface="Microsoft YaHei"/>
-              </a:rPr>
-              <a:t>按需skills：默认只读目录索引，每轮最多按需调取 2 份专项调优指南（Skill），防上下文膨胀</a:t>
-            </a:r>
-          </a:p>
-        </p:txBody>
-      </p:sp>
-      <p:sp>
-        <p:nvSpPr>
-          <p:cNvPr id="29" name="Rectangle 28"/>
+          <p:cNvPr id="35" name="Oval 34"/>
           <p:cNvSpPr/>
           <p:nvPr/>
         </p:nvSpPr>
         <p:spPr>
           <a:xfrm>
-            <a:off x="8906255" y="3382391"/>
-            <a:ext cx="2551176" cy="967486"/>
-          </a:xfrm>
-          <a:prstGeom prst="rect">
+            <a:off x="3734714" y="5276088"/>
+            <a:ext cx="274320" cy="274320"/>
+          </a:xfrm>
+          <a:prstGeom prst="ellipse">
             <a:avLst/>
           </a:prstGeom>
           <a:solidFill>
-            <a:srgbClr val="F2F8FD"/>
+            <a:srgbClr val="0F62CE"/>
           </a:solidFill>
           <a:ln>
             <a:noFill/>
           </a:ln>
         </p:spPr>
         <p:txBody>
+          <a:bodyPr rtlCol="0" anchor="ctr" wrap="square" lIns="0" tIns="0" rIns="0" bIns="0">
+            <a:noAutofit/>
+          </a:bodyPr>
+          <a:lstStyle/>
+          <a:p>
+            <a:pPr algn="ctr" latinLnBrk="0">
+              <a:lnSpc>
+                <a:spcPct val="100000"/>
+              </a:lnSpc>
+              <a:spcBef>
+                <a:spcPts val="0"/>
+              </a:spcBef>
+              <a:spcAft>
+                <a:spcPts val="0"/>
+              </a:spcAft>
+            </a:pPr>
+            <a:r>
+              <a:rPr sz="1050" b="1">
+                <a:solidFill>
+                  <a:srgbClr val="FFFFFF"/>
+                </a:solidFill>
+                <a:latin typeface="Microsoft YaHei"/>
+                <a:ea typeface="Microsoft YaHei"/>
+                <a:cs typeface="Microsoft YaHei"/>
+              </a:rPr>
+              <a:t>7</a:t>
+            </a:r>
+          </a:p>
+        </p:txBody>
+      </p:sp>
+      <p:sp>
+        <p:nvSpPr>
+          <p:cNvPr id="36" name="TextBox 35"/>
+          <p:cNvSpPr txBox="1"/>
+          <p:nvPr/>
+        </p:nvSpPr>
+        <p:spPr>
+          <a:xfrm>
+            <a:off x="4082186" y="5029200"/>
+            <a:ext cx="1554479" cy="768096"/>
+          </a:xfrm>
+          <a:prstGeom prst="rect">
+            <a:avLst/>
+          </a:prstGeom>
+          <a:noFill/>
+        </p:spPr>
+        <p:txBody>
+          <a:bodyPr wrap="square" anchor="ctr" lIns="0" tIns="0" rIns="0" bIns="0">
+            <a:noAutofit/>
+          </a:bodyPr>
+          <a:lstStyle/>
+          <a:p>
+            <a:pPr algn="l" latinLnBrk="0">
+              <a:lnSpc>
+                <a:spcPct val="100000"/>
+              </a:lnSpc>
+              <a:spcBef>
+                <a:spcPts val="0"/>
+              </a:spcBef>
+              <a:spcAft>
+                <a:spcPts val="0"/>
+              </a:spcAft>
+            </a:pPr>
+            <a:r>
+              <a:rPr sz="1200" b="1">
+                <a:solidFill>
+                  <a:srgbClr val="0A2B45"/>
+                </a:solidFill>
+                <a:latin typeface="Microsoft YaHei"/>
+                <a:ea typeface="Microsoft YaHei"/>
+                <a:cs typeface="Microsoft YaHei"/>
+              </a:rPr>
+              <a:t>端到端质量评估</a:t>
+            </a:r>
+          </a:p>
+        </p:txBody>
+      </p:sp>
+      <p:sp>
+        <p:nvSpPr>
+          <p:cNvPr id="37" name="Rectangle 36"/>
+          <p:cNvSpPr/>
+          <p:nvPr/>
+        </p:nvSpPr>
+        <p:spPr>
+          <a:xfrm>
+            <a:off x="6500164" y="5029200"/>
+            <a:ext cx="2103120" cy="768096"/>
+          </a:xfrm>
+          <a:prstGeom prst="rect">
+            <a:avLst/>
+          </a:prstGeom>
+          <a:solidFill>
+            <a:srgbClr val="FFFFFF"/>
+          </a:solidFill>
+          <a:ln w="12700">
+            <a:solidFill>
+              <a:srgbClr val="0F62CE"/>
+            </a:solidFill>
+          </a:ln>
+        </p:spPr>
+        <p:txBody>
           <a:bodyPr rtlCol="0" anchor="ctr"/>
           <a:lstStyle/>
           <a:p>
@@ -28899,26 +29141,127 @@
       </p:sp>
       <p:sp>
         <p:nvSpPr>
-          <p:cNvPr id="30" name="Rectangle 29"/>
+          <p:cNvPr id="38" name="Oval 37"/>
           <p:cNvSpPr/>
           <p:nvPr/>
         </p:nvSpPr>
         <p:spPr>
           <a:xfrm>
-            <a:off x="8906255" y="3382391"/>
-            <a:ext cx="50292" cy="967486"/>
-          </a:xfrm>
-          <a:prstGeom prst="rect">
+            <a:off x="6646468" y="5276088"/>
+            <a:ext cx="274320" cy="274320"/>
+          </a:xfrm>
+          <a:prstGeom prst="ellipse">
             <a:avLst/>
           </a:prstGeom>
           <a:solidFill>
-            <a:srgbClr val="123C5B"/>
+            <a:srgbClr val="0F62CE"/>
           </a:solidFill>
           <a:ln>
             <a:noFill/>
           </a:ln>
         </p:spPr>
         <p:txBody>
+          <a:bodyPr rtlCol="0" anchor="ctr" wrap="square" lIns="0" tIns="0" rIns="0" bIns="0">
+            <a:noAutofit/>
+          </a:bodyPr>
+          <a:lstStyle/>
+          <a:p>
+            <a:pPr algn="ctr" latinLnBrk="0">
+              <a:lnSpc>
+                <a:spcPct val="100000"/>
+              </a:lnSpc>
+              <a:spcBef>
+                <a:spcPts val="0"/>
+              </a:spcBef>
+              <a:spcAft>
+                <a:spcPts val="0"/>
+              </a:spcAft>
+            </a:pPr>
+            <a:r>
+              <a:rPr sz="1050" b="1">
+                <a:solidFill>
+                  <a:srgbClr val="FFFFFF"/>
+                </a:solidFill>
+                <a:latin typeface="Microsoft YaHei"/>
+                <a:ea typeface="Microsoft YaHei"/>
+                <a:cs typeface="Microsoft YaHei"/>
+              </a:rPr>
+              <a:t>6</a:t>
+            </a:r>
+          </a:p>
+        </p:txBody>
+      </p:sp>
+      <p:sp>
+        <p:nvSpPr>
+          <p:cNvPr id="39" name="TextBox 38"/>
+          <p:cNvSpPr txBox="1"/>
+          <p:nvPr/>
+        </p:nvSpPr>
+        <p:spPr>
+          <a:xfrm>
+            <a:off x="6993940" y="5029200"/>
+            <a:ext cx="1554479" cy="768096"/>
+          </a:xfrm>
+          <a:prstGeom prst="rect">
+            <a:avLst/>
+          </a:prstGeom>
+          <a:noFill/>
+        </p:spPr>
+        <p:txBody>
+          <a:bodyPr wrap="square" anchor="ctr" lIns="0" tIns="0" rIns="0" bIns="0">
+            <a:noAutofit/>
+          </a:bodyPr>
+          <a:lstStyle/>
+          <a:p>
+            <a:pPr algn="l" latinLnBrk="0">
+              <a:lnSpc>
+                <a:spcPct val="100000"/>
+              </a:lnSpc>
+              <a:spcBef>
+                <a:spcPts val="0"/>
+              </a:spcBef>
+              <a:spcAft>
+                <a:spcPts val="0"/>
+              </a:spcAft>
+            </a:pPr>
+            <a:r>
+              <a:rPr sz="1200" b="1">
+                <a:solidFill>
+                  <a:srgbClr val="0A2B45"/>
+                </a:solidFill>
+                <a:latin typeface="Microsoft YaHei"/>
+                <a:ea typeface="Microsoft YaHei"/>
+                <a:cs typeface="Microsoft YaHei"/>
+              </a:rPr>
+              <a:t>单算子性能初筛</a:t>
+            </a:r>
+          </a:p>
+        </p:txBody>
+      </p:sp>
+      <p:sp>
+        <p:nvSpPr>
+          <p:cNvPr id="40" name="Rectangle 39"/>
+          <p:cNvSpPr/>
+          <p:nvPr/>
+        </p:nvSpPr>
+        <p:spPr>
+          <a:xfrm>
+            <a:off x="9411919" y="5029200"/>
+            <a:ext cx="2103120" cy="768096"/>
+          </a:xfrm>
+          <a:prstGeom prst="rect">
+            <a:avLst/>
+          </a:prstGeom>
+          <a:solidFill>
+            <a:srgbClr val="FFFFFF"/>
+          </a:solidFill>
+          <a:ln w="12700">
+            <a:solidFill>
+              <a:srgbClr val="0F62CE"/>
+            </a:solidFill>
+          </a:ln>
+        </p:spPr>
+        <p:txBody>
           <a:bodyPr rtlCol="0" anchor="ctr"/>
           <a:lstStyle/>
           <a:p>
@@ -28928,14 +29271,66 @@
       </p:sp>
       <p:sp>
         <p:nvSpPr>
-          <p:cNvPr id="31" name="TextBox 30"/>
-          <p:cNvSpPr txBox="1"/>
-          <p:nvPr/>
-        </p:nvSpPr>
-        <p:spPr>
-          <a:xfrm>
-            <a:off x="9070848" y="3418967"/>
-            <a:ext cx="2221991" cy="894334"/>
+          <p:cNvPr id="41" name="Oval 40"/>
+          <p:cNvSpPr/>
+          <p:nvPr/>
+        </p:nvSpPr>
+        <p:spPr>
+          <a:xfrm>
+            <a:off x="9558223" y="5276088"/>
+            <a:ext cx="274320" cy="274320"/>
+          </a:xfrm>
+          <a:prstGeom prst="ellipse">
+            <a:avLst/>
+          </a:prstGeom>
+          <a:solidFill>
+            <a:srgbClr val="0F62CE"/>
+          </a:solidFill>
+          <a:ln>
+            <a:noFill/>
+          </a:ln>
+        </p:spPr>
+        <p:txBody>
+          <a:bodyPr rtlCol="0" anchor="ctr" wrap="square" lIns="0" tIns="0" rIns="0" bIns="0">
+            <a:noAutofit/>
+          </a:bodyPr>
+          <a:lstStyle/>
+          <a:p>
+            <a:pPr algn="ctr" latinLnBrk="0">
+              <a:lnSpc>
+                <a:spcPct val="100000"/>
+              </a:lnSpc>
+              <a:spcBef>
+                <a:spcPts val="0"/>
+              </a:spcBef>
+              <a:spcAft>
+                <a:spcPts val="0"/>
+              </a:spcAft>
+            </a:pPr>
+            <a:r>
+              <a:rPr sz="1050" b="1">
+                <a:solidFill>
+                  <a:srgbClr val="FFFFFF"/>
+                </a:solidFill>
+                <a:latin typeface="Microsoft YaHei"/>
+                <a:ea typeface="Microsoft YaHei"/>
+                <a:cs typeface="Microsoft YaHei"/>
+              </a:rPr>
+              <a:t>5</a:t>
+            </a:r>
+          </a:p>
+        </p:txBody>
+      </p:sp>
+      <p:sp>
+        <p:nvSpPr>
+          <p:cNvPr id="42" name="TextBox 41"/>
+          <p:cNvSpPr txBox="1"/>
+          <p:nvPr/>
+        </p:nvSpPr>
+        <p:spPr>
+          <a:xfrm>
+            <a:off x="9905695" y="5029200"/>
+            <a:ext cx="1554479" cy="768096"/>
           </a:xfrm>
           <a:prstGeom prst="rect">
             <a:avLst/>
@@ -28956,81 +29351,736 @@
                 <a:spcPts val="0"/>
               </a:spcBef>
               <a:spcAft>
-                <a:spcPts val="200"/>
-              </a:spcAft>
-            </a:pPr>
-            <a:r>
-              <a:rPr sz="1100" b="1">
-                <a:solidFill>
-                  <a:srgbClr val="123C5B"/>
-                </a:solidFill>
-                <a:latin typeface="Microsoft YaHei"/>
-                <a:ea typeface="Microsoft YaHei"/>
-                <a:cs typeface="Microsoft YaHei"/>
-              </a:rPr>
-              <a:t>人 · 按需介入</a:t>
-            </a:r>
-          </a:p>
-          <a:p>
-            <a:pPr algn="l" latinLnBrk="0">
-              <a:lnSpc>
-                <a:spcPct val="100000"/>
-              </a:lnSpc>
-              <a:spcBef>
-                <a:spcPts val="0"/>
-              </a:spcBef>
-              <a:spcAft>
-                <a:spcPts val="0"/>
-              </a:spcAft>
-            </a:pPr>
-            <a:r>
-              <a:rPr sz="950" b="0">
-                <a:solidFill>
-                  <a:srgbClr val="1B4D69"/>
-                </a:solidFill>
-                <a:latin typeface="Microsoft YaHei"/>
-                <a:ea typeface="Microsoft YaHei"/>
-                <a:cs typeface="Microsoft YaHei"/>
-              </a:rPr>
-              <a:t>复杂场景由人直接修改，或与规划器协同实现</a:t>
-            </a:r>
-          </a:p>
-          <a:p>
-            <a:pPr algn="l" latinLnBrk="0">
-              <a:lnSpc>
-                <a:spcPct val="100000"/>
-              </a:lnSpc>
-              <a:spcBef>
-                <a:spcPts val="0"/>
-              </a:spcBef>
-              <a:spcAft>
-                <a:spcPts val="0"/>
-              </a:spcAft>
-            </a:pPr>
-            <a:r>
-              <a:rPr sz="950" b="0">
-                <a:solidFill>
-                  <a:srgbClr val="1B4D69"/>
-                </a:solidFill>
-                <a:latin typeface="Microsoft YaHei"/>
-                <a:ea typeface="Microsoft YaHei"/>
-                <a:cs typeface="Microsoft YaHei"/>
-              </a:rPr>
-              <a:t>人工介入不改变准入判定路径，同样须通过下方三道验收门禁</a:t>
-            </a:r>
-          </a:p>
-        </p:txBody>
-      </p:sp>
-      <p:sp>
-        <p:nvSpPr>
-          <p:cNvPr id="32" name="Rectangle 31"/>
+                <a:spcPts val="0"/>
+              </a:spcAft>
+            </a:pPr>
+            <a:r>
+              <a:rPr sz="1200" b="1">
+                <a:solidFill>
+                  <a:srgbClr val="0A2B45"/>
+                </a:solidFill>
+                <a:latin typeface="Microsoft YaHei"/>
+                <a:ea typeface="Microsoft YaHei"/>
+                <a:cs typeface="Microsoft YaHei"/>
+              </a:rPr>
+              <a:t>补丁合入与增量构建</a:t>
+            </a:r>
+          </a:p>
+        </p:txBody>
+      </p:sp>
+      <p:cxnSp>
+        <p:nvCxnSpPr>
+          <p:cNvPr id="43" name="Connector 42"/>
+          <p:cNvCxnSpPr/>
+          <p:nvPr/>
+        </p:nvCxnSpPr>
+        <p:spPr>
+          <a:xfrm>
+            <a:off x="2816352" y="2596896"/>
+            <a:ext cx="735482" cy="0"/>
+          </a:xfrm>
+          <a:prstGeom prst="line">
+            <a:avLst/>
+          </a:prstGeom>
+          <a:ln w="19050">
+            <a:solidFill>
+              <a:srgbClr val="40708B"/>
+            </a:solidFill>
+            <a:tailEnd type="triangle" w="med" len="med"/>
+          </a:ln>
+        </p:spPr>
+      </p:cxnSp>
+      <p:sp>
+        <p:nvSpPr>
+          <p:cNvPr id="44" name="Rounded Rectangle 43"/>
           <p:cNvSpPr/>
           <p:nvPr/>
         </p:nvSpPr>
         <p:spPr>
           <a:xfrm>
-            <a:off x="2542032" y="3182112"/>
-            <a:ext cx="5907024" cy="1719072"/>
+            <a:off x="2827477" y="2496312"/>
+            <a:ext cx="713232" cy="201168"/>
+          </a:xfrm>
+          <a:prstGeom prst="roundRect">
+            <a:avLst>
+              <a:gd name="adj" fmla="val 50000"/>
+            </a:avLst>
+          </a:prstGeom>
+          <a:solidFill>
+            <a:srgbClr val="FFFFFF"/>
+          </a:solidFill>
+          <a:ln w="9525">
+            <a:solidFill>
+              <a:srgbClr val="40708B"/>
+            </a:solidFill>
+          </a:ln>
+        </p:spPr>
+        <p:txBody>
+          <a:bodyPr rtlCol="0" anchor="ctr" wrap="square" lIns="18288" tIns="0" rIns="18288" bIns="0">
+            <a:noAutofit/>
+          </a:bodyPr>
+          <a:lstStyle/>
+          <a:p>
+            <a:pPr algn="ctr" latinLnBrk="0">
+              <a:lnSpc>
+                <a:spcPct val="100000"/>
+              </a:lnSpc>
+              <a:spcBef>
+                <a:spcPts val="0"/>
+              </a:spcBef>
+              <a:spcAft>
+                <a:spcPts val="0"/>
+              </a:spcAft>
+            </a:pPr>
+            <a:r>
+              <a:rPr sz="800" b="1">
+                <a:solidFill>
+                  <a:srgbClr val="40708B"/>
+                </a:solidFill>
+                <a:latin typeface="Microsoft YaHei"/>
+                <a:ea typeface="Microsoft YaHei"/>
+                <a:cs typeface="Microsoft YaHei"/>
+              </a:rPr>
+              <a:t>Trace 文件</a:t>
+            </a:r>
+          </a:p>
+        </p:txBody>
+      </p:sp>
+      <p:cxnSp>
+        <p:nvCxnSpPr>
+          <p:cNvPr id="45" name="Connector 44"/>
+          <p:cNvCxnSpPr/>
+          <p:nvPr/>
+        </p:nvCxnSpPr>
+        <p:spPr>
+          <a:xfrm>
+            <a:off x="5728106" y="2596896"/>
+            <a:ext cx="735482" cy="0"/>
+          </a:xfrm>
+          <a:prstGeom prst="line">
+            <a:avLst/>
+          </a:prstGeom>
+          <a:ln w="19050">
+            <a:solidFill>
+              <a:srgbClr val="40708B"/>
+            </a:solidFill>
+            <a:tailEnd type="triangle" w="med" len="med"/>
+          </a:ln>
+        </p:spPr>
+      </p:cxnSp>
+      <p:sp>
+        <p:nvSpPr>
+          <p:cNvPr id="46" name="Rounded Rectangle 45"/>
+          <p:cNvSpPr/>
+          <p:nvPr/>
+        </p:nvSpPr>
+        <p:spPr>
+          <a:xfrm>
+            <a:off x="5812383" y="2496312"/>
+            <a:ext cx="566928" cy="201168"/>
+          </a:xfrm>
+          <a:prstGeom prst="roundRect">
+            <a:avLst>
+              <a:gd name="adj" fmla="val 50000"/>
+            </a:avLst>
+          </a:prstGeom>
+          <a:solidFill>
+            <a:srgbClr val="FFFFFF"/>
+          </a:solidFill>
+          <a:ln w="9525">
+            <a:solidFill>
+              <a:srgbClr val="40708B"/>
+            </a:solidFill>
+          </a:ln>
+        </p:spPr>
+        <p:txBody>
+          <a:bodyPr rtlCol="0" anchor="ctr" wrap="square" lIns="18288" tIns="0" rIns="18288" bIns="0">
+            <a:noAutofit/>
+          </a:bodyPr>
+          <a:lstStyle/>
+          <a:p>
+            <a:pPr algn="ctr" latinLnBrk="0">
+              <a:lnSpc>
+                <a:spcPct val="100000"/>
+              </a:lnSpc>
+              <a:spcBef>
+                <a:spcPts val="0"/>
+              </a:spcBef>
+              <a:spcAft>
+                <a:spcPts val="0"/>
+              </a:spcAft>
+            </a:pPr>
+            <a:r>
+              <a:rPr sz="800" b="1">
+                <a:solidFill>
+                  <a:srgbClr val="40708B"/>
+                </a:solidFill>
+                <a:latin typeface="Microsoft YaHei"/>
+                <a:ea typeface="Microsoft YaHei"/>
+                <a:cs typeface="Microsoft YaHei"/>
+              </a:rPr>
+              <a:t>算子耗时</a:t>
+            </a:r>
+          </a:p>
+        </p:txBody>
+      </p:sp>
+      <p:cxnSp>
+        <p:nvCxnSpPr>
+          <p:cNvPr id="47" name="Connector 46"/>
+          <p:cNvCxnSpPr/>
+          <p:nvPr/>
+        </p:nvCxnSpPr>
+        <p:spPr>
+          <a:xfrm>
+            <a:off x="8639860" y="2596896"/>
+            <a:ext cx="863499" cy="0"/>
+          </a:xfrm>
+          <a:prstGeom prst="line">
+            <a:avLst/>
+          </a:prstGeom>
+          <a:ln w="19050">
+            <a:solidFill>
+              <a:srgbClr val="40708B"/>
+            </a:solidFill>
+            <a:tailEnd type="triangle" w="med" len="med"/>
+          </a:ln>
+        </p:spPr>
+      </p:cxnSp>
+      <p:sp>
+        <p:nvSpPr>
+          <p:cNvPr id="48" name="Rounded Rectangle 47"/>
+          <p:cNvSpPr/>
+          <p:nvPr/>
+        </p:nvSpPr>
+        <p:spPr>
+          <a:xfrm>
+            <a:off x="8788146" y="2496312"/>
+            <a:ext cx="566928" cy="201168"/>
+          </a:xfrm>
+          <a:prstGeom prst="roundRect">
+            <a:avLst>
+              <a:gd name="adj" fmla="val 50000"/>
+            </a:avLst>
+          </a:prstGeom>
+          <a:solidFill>
+            <a:srgbClr val="FFFFFF"/>
+          </a:solidFill>
+          <a:ln w="9525">
+            <a:solidFill>
+              <a:srgbClr val="40708B"/>
+            </a:solidFill>
+          </a:ln>
+        </p:spPr>
+        <p:txBody>
+          <a:bodyPr rtlCol="0" anchor="ctr" wrap="square" lIns="18288" tIns="0" rIns="18288" bIns="0">
+            <a:noAutofit/>
+          </a:bodyPr>
+          <a:lstStyle/>
+          <a:p>
+            <a:pPr algn="ctr" latinLnBrk="0">
+              <a:lnSpc>
+                <a:spcPct val="100000"/>
+              </a:lnSpc>
+              <a:spcBef>
+                <a:spcPts val="0"/>
+              </a:spcBef>
+              <a:spcAft>
+                <a:spcPts val="0"/>
+              </a:spcAft>
+            </a:pPr>
+            <a:r>
+              <a:rPr sz="800" b="1">
+                <a:solidFill>
+                  <a:srgbClr val="40708B"/>
+                </a:solidFill>
+                <a:latin typeface="Microsoft YaHei"/>
+                <a:ea typeface="Microsoft YaHei"/>
+                <a:cs typeface="Microsoft YaHei"/>
+              </a:rPr>
+              <a:t>瓶颈列表</a:t>
+            </a:r>
+          </a:p>
+        </p:txBody>
+      </p:sp>
+      <p:cxnSp>
+        <p:nvCxnSpPr>
+          <p:cNvPr id="49" name="Connector 48"/>
+          <p:cNvCxnSpPr/>
+          <p:nvPr/>
+        </p:nvCxnSpPr>
+        <p:spPr>
+          <a:xfrm flipH="1">
+            <a:off x="2816352" y="5413248"/>
+            <a:ext cx="735482" cy="0"/>
+          </a:xfrm>
+          <a:prstGeom prst="line">
+            <a:avLst/>
+          </a:prstGeom>
+          <a:ln w="19050">
+            <a:solidFill>
+              <a:srgbClr val="0F62CE"/>
+            </a:solidFill>
+            <a:tailEnd type="triangle" w="med" len="med"/>
+          </a:ln>
+        </p:spPr>
+      </p:cxnSp>
+      <p:sp>
+        <p:nvSpPr>
+          <p:cNvPr id="50" name="Rounded Rectangle 49"/>
+          <p:cNvSpPr/>
+          <p:nvPr/>
+        </p:nvSpPr>
+        <p:spPr>
+          <a:xfrm>
+            <a:off x="2900629" y="5312664"/>
+            <a:ext cx="566928" cy="201168"/>
+          </a:xfrm>
+          <a:prstGeom prst="roundRect">
+            <a:avLst>
+              <a:gd name="adj" fmla="val 50000"/>
+            </a:avLst>
+          </a:prstGeom>
+          <a:solidFill>
+            <a:srgbClr val="FFFFFF"/>
+          </a:solidFill>
+          <a:ln w="9525">
+            <a:solidFill>
+              <a:srgbClr val="0F62CE"/>
+            </a:solidFill>
+          </a:ln>
+        </p:spPr>
+        <p:txBody>
+          <a:bodyPr rtlCol="0" anchor="ctr" wrap="square" lIns="18288" tIns="0" rIns="18288" bIns="0">
+            <a:noAutofit/>
+          </a:bodyPr>
+          <a:lstStyle/>
+          <a:p>
+            <a:pPr algn="ctr" latinLnBrk="0">
+              <a:lnSpc>
+                <a:spcPct val="100000"/>
+              </a:lnSpc>
+              <a:spcBef>
+                <a:spcPts val="0"/>
+              </a:spcBef>
+              <a:spcAft>
+                <a:spcPts val="0"/>
+              </a:spcAft>
+            </a:pPr>
+            <a:r>
+              <a:rPr sz="800" b="1">
+                <a:solidFill>
+                  <a:srgbClr val="0F62CE"/>
+                </a:solidFill>
+                <a:latin typeface="Microsoft YaHei"/>
+                <a:ea typeface="Microsoft YaHei"/>
+                <a:cs typeface="Microsoft YaHei"/>
+              </a:rPr>
+              <a:t>质量不降</a:t>
+            </a:r>
+          </a:p>
+        </p:txBody>
+      </p:sp>
+      <p:cxnSp>
+        <p:nvCxnSpPr>
+          <p:cNvPr id="51" name="Connector 50"/>
+          <p:cNvCxnSpPr/>
+          <p:nvPr/>
+        </p:nvCxnSpPr>
+        <p:spPr>
+          <a:xfrm flipH="1">
+            <a:off x="5728106" y="5413248"/>
+            <a:ext cx="735482" cy="0"/>
+          </a:xfrm>
+          <a:prstGeom prst="line">
+            <a:avLst/>
+          </a:prstGeom>
+          <a:ln w="19050">
+            <a:solidFill>
+              <a:srgbClr val="0F62CE"/>
+            </a:solidFill>
+            <a:tailEnd type="triangle" w="med" len="med"/>
+          </a:ln>
+        </p:spPr>
+      </p:cxnSp>
+      <p:sp>
+        <p:nvSpPr>
+          <p:cNvPr id="52" name="Rounded Rectangle 51"/>
+          <p:cNvSpPr/>
+          <p:nvPr/>
+        </p:nvSpPr>
+        <p:spPr>
+          <a:xfrm>
+            <a:off x="5812383" y="5312664"/>
+            <a:ext cx="566928" cy="201168"/>
+          </a:xfrm>
+          <a:prstGeom prst="roundRect">
+            <a:avLst>
+              <a:gd name="adj" fmla="val 50000"/>
+            </a:avLst>
+          </a:prstGeom>
+          <a:solidFill>
+            <a:srgbClr val="FFFFFF"/>
+          </a:solidFill>
+          <a:ln w="9525">
+            <a:solidFill>
+              <a:srgbClr val="0F62CE"/>
+            </a:solidFill>
+          </a:ln>
+        </p:spPr>
+        <p:txBody>
+          <a:bodyPr rtlCol="0" anchor="ctr" wrap="square" lIns="18288" tIns="0" rIns="18288" bIns="0">
+            <a:noAutofit/>
+          </a:bodyPr>
+          <a:lstStyle/>
+          <a:p>
+            <a:pPr algn="ctr" latinLnBrk="0">
+              <a:lnSpc>
+                <a:spcPct val="100000"/>
+              </a:lnSpc>
+              <a:spcBef>
+                <a:spcPts val="0"/>
+              </a:spcBef>
+              <a:spcAft>
+                <a:spcPts val="0"/>
+              </a:spcAft>
+            </a:pPr>
+            <a:r>
+              <a:rPr sz="800" b="1">
+                <a:solidFill>
+                  <a:srgbClr val="0F62CE"/>
+                </a:solidFill>
+                <a:latin typeface="Microsoft YaHei"/>
+                <a:ea typeface="Microsoft YaHei"/>
+                <a:cs typeface="Microsoft YaHei"/>
+              </a:rPr>
+              <a:t>提速达标</a:t>
+            </a:r>
+          </a:p>
+        </p:txBody>
+      </p:sp>
+      <p:cxnSp>
+        <p:nvCxnSpPr>
+          <p:cNvPr id="53" name="Connector 52"/>
+          <p:cNvCxnSpPr/>
+          <p:nvPr/>
+        </p:nvCxnSpPr>
+        <p:spPr>
+          <a:xfrm flipH="1">
+            <a:off x="8639860" y="5413248"/>
+            <a:ext cx="735483" cy="0"/>
+          </a:xfrm>
+          <a:prstGeom prst="line">
+            <a:avLst/>
+          </a:prstGeom>
+          <a:ln w="19050">
+            <a:solidFill>
+              <a:srgbClr val="0F62CE"/>
+            </a:solidFill>
+            <a:tailEnd type="triangle" w="med" len="med"/>
+          </a:ln>
+        </p:spPr>
+      </p:cxnSp>
+      <p:sp>
+        <p:nvSpPr>
+          <p:cNvPr id="54" name="Rounded Rectangle 53"/>
+          <p:cNvSpPr/>
+          <p:nvPr/>
+        </p:nvSpPr>
+        <p:spPr>
+          <a:xfrm>
+            <a:off x="8678418" y="5312664"/>
+            <a:ext cx="658368" cy="201168"/>
+          </a:xfrm>
+          <a:prstGeom prst="roundRect">
+            <a:avLst>
+              <a:gd name="adj" fmla="val 50000"/>
+            </a:avLst>
+          </a:prstGeom>
+          <a:solidFill>
+            <a:srgbClr val="FFFFFF"/>
+          </a:solidFill>
+          <a:ln w="9525">
+            <a:solidFill>
+              <a:srgbClr val="0F62CE"/>
+            </a:solidFill>
+          </a:ln>
+        </p:spPr>
+        <p:txBody>
+          <a:bodyPr rtlCol="0" anchor="ctr" wrap="square" lIns="18288" tIns="0" rIns="18288" bIns="0">
+            <a:noAutofit/>
+          </a:bodyPr>
+          <a:lstStyle/>
+          <a:p>
+            <a:pPr algn="ctr" latinLnBrk="0">
+              <a:lnSpc>
+                <a:spcPct val="100000"/>
+              </a:lnSpc>
+              <a:spcBef>
+                <a:spcPts val="0"/>
+              </a:spcBef>
+              <a:spcAft>
+                <a:spcPts val="0"/>
+              </a:spcAft>
+            </a:pPr>
+            <a:r>
+              <a:rPr sz="800" b="1">
+                <a:solidFill>
+                  <a:srgbClr val="0F62CE"/>
+                </a:solidFill>
+                <a:latin typeface="Microsoft YaHei"/>
+                <a:ea typeface="Microsoft YaHei"/>
+                <a:cs typeface="Microsoft YaHei"/>
+              </a:rPr>
+              <a:t>新版本就绪</a:t>
+            </a:r>
+          </a:p>
+        </p:txBody>
+      </p:sp>
+      <p:cxnSp>
+        <p:nvCxnSpPr>
+          <p:cNvPr id="55" name="Connector 54"/>
+          <p:cNvCxnSpPr/>
+          <p:nvPr/>
+        </p:nvCxnSpPr>
+        <p:spPr>
+          <a:xfrm>
+            <a:off x="10972800" y="3145536"/>
+            <a:ext cx="0" cy="1463040"/>
+          </a:xfrm>
+          <a:prstGeom prst="line">
+            <a:avLst/>
+          </a:prstGeom>
+          <a:ln w="19050">
+            <a:solidFill>
+              <a:srgbClr val="D2690C"/>
+            </a:solidFill>
+            <a:tailEnd type="triangle" w="med" len="med"/>
+          </a:ln>
+        </p:spPr>
+      </p:cxnSp>
+      <p:sp>
+        <p:nvSpPr>
+          <p:cNvPr id="56" name="Rounded Rectangle 55"/>
+          <p:cNvSpPr/>
+          <p:nvPr/>
+        </p:nvSpPr>
+        <p:spPr>
+          <a:xfrm>
+            <a:off x="10506456" y="3429000"/>
+            <a:ext cx="932688" cy="201168"/>
+          </a:xfrm>
+          <a:prstGeom prst="roundRect">
+            <a:avLst>
+              <a:gd name="adj" fmla="val 50000"/>
+            </a:avLst>
+          </a:prstGeom>
+          <a:solidFill>
+            <a:srgbClr val="FFFFFF"/>
+          </a:solidFill>
+          <a:ln w="9525">
+            <a:solidFill>
+              <a:srgbClr val="C2570A"/>
+            </a:solidFill>
+          </a:ln>
+        </p:spPr>
+        <p:txBody>
+          <a:bodyPr rtlCol="0" anchor="ctr" wrap="square" lIns="18288" tIns="0" rIns="18288" bIns="0">
+            <a:noAutofit/>
+          </a:bodyPr>
+          <a:lstStyle/>
+          <a:p>
+            <a:pPr algn="ctr" latinLnBrk="0">
+              <a:lnSpc>
+                <a:spcPct val="100000"/>
+              </a:lnSpc>
+              <a:spcBef>
+                <a:spcPts val="0"/>
+              </a:spcBef>
+              <a:spcAft>
+                <a:spcPts val="0"/>
+              </a:spcAft>
+            </a:pPr>
+            <a:r>
+              <a:rPr sz="800" b="1">
+                <a:solidFill>
+                  <a:srgbClr val="C2570A"/>
+                </a:solidFill>
+                <a:latin typeface="Microsoft YaHei"/>
+                <a:ea typeface="Microsoft YaHei"/>
+                <a:cs typeface="Microsoft YaHei"/>
+              </a:rPr>
+              <a:t>补丁 + 证据引用</a:t>
+            </a:r>
+          </a:p>
+        </p:txBody>
+      </p:sp>
+      <p:cxnSp>
+        <p:nvCxnSpPr>
+          <p:cNvPr id="57" name="Connector 56"/>
+          <p:cNvCxnSpPr/>
+          <p:nvPr/>
+        </p:nvCxnSpPr>
+        <p:spPr>
+          <a:xfrm flipV="1">
+            <a:off x="9930384" y="3145536"/>
+            <a:ext cx="0" cy="1463040"/>
+          </a:xfrm>
+          <a:prstGeom prst="line">
+            <a:avLst/>
+          </a:prstGeom>
+          <a:ln w="15875">
+            <a:solidFill>
+              <a:srgbClr val="B4382F"/>
+            </a:solidFill>
+            <a:prstDash val="dash"/>
+            <a:tailEnd type="triangle" w="med" len="med"/>
+          </a:ln>
+        </p:spPr>
+      </p:cxnSp>
+      <p:sp>
+        <p:nvSpPr>
+          <p:cNvPr id="58" name="Rounded Rectangle 57"/>
+          <p:cNvSpPr/>
+          <p:nvPr/>
+        </p:nvSpPr>
+        <p:spPr>
+          <a:xfrm>
+            <a:off x="9390888" y="4123944"/>
+            <a:ext cx="1078992" cy="201168"/>
+          </a:xfrm>
+          <a:prstGeom prst="roundRect">
+            <a:avLst>
+              <a:gd name="adj" fmla="val 50000"/>
+            </a:avLst>
+          </a:prstGeom>
+          <a:solidFill>
+            <a:srgbClr val="FFFFFF"/>
+          </a:solidFill>
+          <a:ln w="9525">
+            <a:solidFill>
+              <a:srgbClr val="B4382F"/>
+            </a:solidFill>
+          </a:ln>
+        </p:spPr>
+        <p:txBody>
+          <a:bodyPr rtlCol="0" anchor="ctr" wrap="square" lIns="18288" tIns="0" rIns="18288" bIns="0">
+            <a:noAutofit/>
+          </a:bodyPr>
+          <a:lstStyle/>
+          <a:p>
+            <a:pPr algn="ctr" latinLnBrk="0">
+              <a:lnSpc>
+                <a:spcPct val="100000"/>
+              </a:lnSpc>
+              <a:spcBef>
+                <a:spcPts val="0"/>
+              </a:spcBef>
+              <a:spcAft>
+                <a:spcPts val="0"/>
+              </a:spcAft>
+            </a:pPr>
+            <a:r>
+              <a:rPr sz="800" b="1">
+                <a:solidFill>
+                  <a:srgbClr val="B4382F"/>
+                </a:solidFill>
+                <a:latin typeface="Microsoft YaHei"/>
+                <a:ea typeface="Microsoft YaHei"/>
+                <a:cs typeface="Microsoft YaHei"/>
+              </a:rPr>
+              <a:t>打回 · 原因入记忆</a:t>
+            </a:r>
+          </a:p>
+        </p:txBody>
+      </p:sp>
+      <p:cxnSp>
+        <p:nvCxnSpPr>
+          <p:cNvPr id="59" name="Connector 58"/>
+          <p:cNvCxnSpPr/>
+          <p:nvPr/>
+        </p:nvCxnSpPr>
+        <p:spPr>
+          <a:xfrm flipV="1">
+            <a:off x="1728216" y="3145536"/>
+            <a:ext cx="0" cy="1463040"/>
+          </a:xfrm>
+          <a:prstGeom prst="line">
+            <a:avLst/>
+          </a:prstGeom>
+          <a:ln w="19050">
+            <a:solidFill>
+              <a:srgbClr val="17795F"/>
+            </a:solidFill>
+            <a:tailEnd type="triangle" w="med" len="med"/>
+          </a:ln>
+        </p:spPr>
+      </p:cxnSp>
+      <p:sp>
+        <p:nvSpPr>
+          <p:cNvPr id="60" name="Rounded Rectangle 59"/>
+          <p:cNvSpPr/>
+          <p:nvPr/>
+        </p:nvSpPr>
+        <p:spPr>
+          <a:xfrm>
+            <a:off x="1143000" y="3776472"/>
+            <a:ext cx="1170432" cy="201168"/>
+          </a:xfrm>
+          <a:prstGeom prst="roundRect">
+            <a:avLst>
+              <a:gd name="adj" fmla="val 50000"/>
+            </a:avLst>
+          </a:prstGeom>
+          <a:solidFill>
+            <a:srgbClr val="FFFFFF"/>
+          </a:solidFill>
+          <a:ln w="9525">
+            <a:solidFill>
+              <a:srgbClr val="17795F"/>
+            </a:solidFill>
+          </a:ln>
+        </p:spPr>
+        <p:txBody>
+          <a:bodyPr rtlCol="0" anchor="ctr" wrap="square" lIns="18288" tIns="0" rIns="18288" bIns="0">
+            <a:noAutofit/>
+          </a:bodyPr>
+          <a:lstStyle/>
+          <a:p>
+            <a:pPr algn="ctr" latinLnBrk="0">
+              <a:lnSpc>
+                <a:spcPct val="100000"/>
+              </a:lnSpc>
+              <a:spcBef>
+                <a:spcPts val="0"/>
+              </a:spcBef>
+              <a:spcAft>
+                <a:spcPts val="0"/>
+              </a:spcAft>
+            </a:pPr>
+            <a:r>
+              <a:rPr sz="800" b="1">
+                <a:solidFill>
+                  <a:srgbClr val="17795F"/>
+                </a:solidFill>
+                <a:latin typeface="Microsoft YaHei"/>
+                <a:ea typeface="Microsoft YaHei"/>
+                <a:cs typeface="Microsoft YaHei"/>
+              </a:rPr>
+              <a:t>更新基线 · 再开一轮</a:t>
+            </a:r>
+          </a:p>
+        </p:txBody>
+      </p:sp>
+      <p:sp>
+        <p:nvSpPr>
+          <p:cNvPr id="61" name="Rectangle 60"/>
+          <p:cNvSpPr/>
+          <p:nvPr/>
+        </p:nvSpPr>
+        <p:spPr>
+          <a:xfrm>
+            <a:off x="3588410" y="3456432"/>
+            <a:ext cx="5014874" cy="841248"/>
           </a:xfrm>
           <a:prstGeom prst="rect">
             <a:avLst/>
@@ -29052,14 +30102,14 @@
       </p:sp>
       <p:sp>
         <p:nvSpPr>
-          <p:cNvPr id="33" name="Rectangle 32"/>
+          <p:cNvPr id="62" name="Rectangle 61"/>
           <p:cNvSpPr/>
           <p:nvPr/>
         </p:nvSpPr>
         <p:spPr>
           <a:xfrm>
-            <a:off x="2542032" y="3182112"/>
-            <a:ext cx="5907024" cy="54864"/>
+            <a:off x="3588410" y="3456432"/>
+            <a:ext cx="73152" cy="841248"/>
           </a:xfrm>
           <a:prstGeom prst="rect">
             <a:avLst/>
@@ -29081,22 +30131,22 @@
       </p:sp>
       <p:sp>
         <p:nvSpPr>
-          <p:cNvPr id="34" name="TextBox 33"/>
-          <p:cNvSpPr txBox="1"/>
-          <p:nvPr/>
-        </p:nvSpPr>
-        <p:spPr>
-          <a:xfrm>
-            <a:off x="2761487" y="3273552"/>
-            <a:ext cx="5486400" cy="1554480"/>
-          </a:xfrm>
-          <a:prstGeom prst="rect">
-            <a:avLst/>
-          </a:prstGeom>
-          <a:noFill/>
-        </p:spPr>
-        <p:txBody>
-          <a:bodyPr wrap="square" anchor="t" lIns="0" tIns="0" rIns="0" bIns="0">
+          <p:cNvPr id="63" name="TextBox 62"/>
+          <p:cNvSpPr txBox="1"/>
+          <p:nvPr/>
+        </p:nvSpPr>
+        <p:spPr>
+          <a:xfrm>
+            <a:off x="3844442" y="3529584"/>
+            <a:ext cx="4575962" cy="274320"/>
+          </a:xfrm>
+          <a:prstGeom prst="rect">
+            <a:avLst/>
+          </a:prstGeom>
+          <a:noFill/>
+        </p:spPr>
+        <p:txBody>
+          <a:bodyPr wrap="square" anchor="ctr" lIns="0" tIns="0" rIns="0" bIns="0">
             <a:noAutofit/>
           </a:bodyPr>
           <a:lstStyle/>
@@ -29109,7 +30159,7 @@
                 <a:spcPts val="0"/>
               </a:spcBef>
               <a:spcAft>
-                <a:spcPts val="200"/>
+                <a:spcPts val="0"/>
               </a:spcAft>
             </a:pPr>
             <a:r>
@@ -29123,21 +30173,8 @@
               </a:rPr>
               <a:t>控制器</a:t>
             </a:r>
-          </a:p>
-          <a:p>
-            <a:pPr algn="l" latinLnBrk="0">
-              <a:lnSpc>
-                <a:spcPct val="100000"/>
-              </a:lnSpc>
-              <a:spcBef>
-                <a:spcPts val="0"/>
-              </a:spcBef>
-              <a:spcAft>
-                <a:spcPts val="200"/>
-              </a:spcAft>
-            </a:pPr>
-            <a:r>
-              <a:rPr sz="950" b="0">
+            <a:r>
+              <a:rPr sz="900" b="0">
                 <a:solidFill>
                   <a:srgbClr val="1B4D69"/>
                 </a:solidFill>
@@ -29145,930 +30182,238 @@
                 <a:ea typeface="Microsoft YaHei"/>
                 <a:cs typeface="Microsoft YaHei"/>
               </a:rPr>
-              <a:t>确定性调度机制（Python）：统一接管硬件设备锁、状态机流转、故障恢复、准入验证与报告生成</a:t>
-            </a:r>
-          </a:p>
-          <a:p>
-            <a:pPr algn="l" latinLnBrk="0">
-              <a:lnSpc>
-                <a:spcPct val="100000"/>
-              </a:lnSpc>
-              <a:spcBef>
-                <a:spcPts val="0"/>
-              </a:spcBef>
-              <a:spcAft>
-                <a:spcPts val="200"/>
-              </a:spcAft>
-            </a:pPr>
-            <a:r>
-              <a:rPr sz="950" b="0">
-                <a:solidFill>
-                  <a:srgbClr val="1B4D69"/>
-                </a:solidFill>
-                <a:latin typeface="Microsoft YaHei"/>
-                <a:ea typeface="Microsoft YaHei"/>
-                <a:cs typeface="Microsoft YaHei"/>
-              </a:rPr>
-              <a:t>硬性约束：规划器无权自行宣告实验成功；数值精度、多模态生成质量及性能收益，全部由控制器独立核验</a:t>
-            </a:r>
-          </a:p>
-          <a:p>
-            <a:pPr algn="l" latinLnBrk="0">
-              <a:lnSpc>
-                <a:spcPct val="100000"/>
-              </a:lnSpc>
-              <a:spcBef>
-                <a:spcPts val="0"/>
-              </a:spcBef>
-              <a:spcAft>
-                <a:spcPts val="200"/>
-              </a:spcAft>
-            </a:pPr>
-            <a:r>
-              <a:rPr sz="950" b="0">
-                <a:solidFill>
-                  <a:srgbClr val="1B4D69"/>
-                </a:solidFill>
-                <a:latin typeface="Microsoft YaHei"/>
-                <a:ea typeface="Microsoft YaHei"/>
-                <a:cs typeface="Microsoft YaHei"/>
-              </a:rPr>
-              <a:t>全量实验追溯：每次实验尝试（Trial）均独立落盘记录，涵盖：候选评估、构建准备、基线测试、基线复核与最终复验</a:t>
-            </a:r>
-          </a:p>
-          <a:p>
-            <a:pPr algn="l" latinLnBrk="0">
-              <a:lnSpc>
-                <a:spcPct val="100000"/>
-              </a:lnSpc>
-              <a:spcBef>
-                <a:spcPts val="0"/>
-              </a:spcBef>
-              <a:spcAft>
-                <a:spcPts val="200"/>
-              </a:spcAft>
-            </a:pPr>
-            <a:r>
-              <a:rPr sz="950" b="0">
-                <a:solidFill>
-                  <a:srgbClr val="1B4D69"/>
-                </a:solidFill>
-                <a:latin typeface="Microsoft YaHei"/>
-                <a:ea typeface="Microsoft YaHei"/>
-                <a:cs typeface="Microsoft YaHei"/>
-              </a:rPr>
-              <a:t>闭环容错机制：方案被拒原因经历史记忆库（Memory）带回下一轮请求；底层基础设施中断不计入方案优化失败</a:t>
-            </a:r>
-          </a:p>
-        </p:txBody>
-      </p:sp>
-      <p:sp>
-        <p:nvSpPr>
-          <p:cNvPr id="35" name="Rectangle 34"/>
+              <a:t>　Python · 无模型 · 全流程接管</a:t>
+            </a:r>
+          </a:p>
+        </p:txBody>
+      </p:sp>
+      <p:sp>
+        <p:nvSpPr>
+          <p:cNvPr id="64" name="Rounded Rectangle 63"/>
           <p:cNvSpPr/>
           <p:nvPr/>
         </p:nvSpPr>
         <p:spPr>
           <a:xfrm>
-            <a:off x="548640" y="5029200"/>
-            <a:ext cx="2468880" cy="1115568"/>
-          </a:xfrm>
-          <a:prstGeom prst="rect">
-            <a:avLst/>
+            <a:off x="3844442" y="3895344"/>
+            <a:ext cx="1047978" cy="292608"/>
+          </a:xfrm>
+          <a:prstGeom prst="roundRect">
+            <a:avLst>
+              <a:gd name="adj" fmla="val 50000"/>
+            </a:avLst>
           </a:prstGeom>
           <a:solidFill>
             <a:srgbClr val="FFFFFF"/>
           </a:solidFill>
           <a:ln w="9525">
             <a:solidFill>
-              <a:srgbClr val="CFE3F0"/>
+              <a:srgbClr val="AFCEE1"/>
             </a:solidFill>
           </a:ln>
         </p:spPr>
         <p:txBody>
-          <a:bodyPr rtlCol="0" anchor="ctr"/>
-          <a:lstStyle/>
-          <a:p>
-            <a:pPr algn="ctr"/>
-          </a:p>
-        </p:txBody>
-      </p:sp>
-      <p:sp>
-        <p:nvSpPr>
-          <p:cNvPr id="36" name="Rectangle 35"/>
+          <a:bodyPr rtlCol="0" anchor="ctr" wrap="square" lIns="36576" tIns="0" rIns="36576" bIns="0">
+            <a:noAutofit/>
+          </a:bodyPr>
+          <a:lstStyle/>
+          <a:p>
+            <a:pPr algn="ctr" latinLnBrk="0">
+              <a:lnSpc>
+                <a:spcPct val="100000"/>
+              </a:lnSpc>
+              <a:spcBef>
+                <a:spcPts val="0"/>
+              </a:spcBef>
+              <a:spcAft>
+                <a:spcPts val="0"/>
+              </a:spcAft>
+            </a:pPr>
+            <a:r>
+              <a:rPr sz="1000" b="1">
+                <a:solidFill>
+                  <a:srgbClr val="123C5B"/>
+                </a:solidFill>
+                <a:latin typeface="Microsoft YaHei"/>
+                <a:ea typeface="Microsoft YaHei"/>
+                <a:cs typeface="Microsoft YaHei"/>
+              </a:rPr>
+              <a:t>确定性调度</a:t>
+            </a:r>
+          </a:p>
+        </p:txBody>
+      </p:sp>
+      <p:sp>
+        <p:nvSpPr>
+          <p:cNvPr id="65" name="Rounded Rectangle 64"/>
           <p:cNvSpPr/>
           <p:nvPr/>
         </p:nvSpPr>
         <p:spPr>
           <a:xfrm>
-            <a:off x="548640" y="5029200"/>
-            <a:ext cx="64008" cy="1115568"/>
-          </a:xfrm>
-          <a:prstGeom prst="rect">
-            <a:avLst/>
-          </a:prstGeom>
-          <a:solidFill>
-            <a:srgbClr val="0F62CE"/>
-          </a:solidFill>
-          <a:ln>
-            <a:noFill/>
-          </a:ln>
-        </p:spPr>
-        <p:txBody>
-          <a:bodyPr rtlCol="0" anchor="ctr"/>
-          <a:lstStyle/>
-          <a:p>
-            <a:pPr algn="ctr"/>
-          </a:p>
-        </p:txBody>
-      </p:sp>
-      <p:sp>
-        <p:nvSpPr>
-          <p:cNvPr id="37" name="TextBox 36"/>
-          <p:cNvSpPr txBox="1"/>
-          <p:nvPr/>
-        </p:nvSpPr>
-        <p:spPr>
-          <a:xfrm>
-            <a:off x="731520" y="5074920"/>
-            <a:ext cx="2157984" cy="1024127"/>
-          </a:xfrm>
-          <a:prstGeom prst="rect">
-            <a:avLst/>
-          </a:prstGeom>
-          <a:noFill/>
-        </p:spPr>
-        <p:txBody>
-          <a:bodyPr wrap="square" anchor="ctr" lIns="0" tIns="0" rIns="0" bIns="0">
-            <a:noAutofit/>
-          </a:bodyPr>
-          <a:lstStyle/>
-          <a:p>
-            <a:pPr algn="l" latinLnBrk="0">
-              <a:lnSpc>
-                <a:spcPct val="100000"/>
-              </a:lnSpc>
-              <a:spcBef>
-                <a:spcPts val="0"/>
-              </a:spcBef>
-              <a:spcAft>
-                <a:spcPts val="200"/>
-              </a:spcAft>
-            </a:pPr>
-            <a:r>
-              <a:rPr sz="1100" b="1">
-                <a:solidFill>
-                  <a:srgbClr val="0F62CE"/>
-                </a:solidFill>
-                <a:latin typeface="Microsoft YaHei"/>
-                <a:ea typeface="Microsoft YaHei"/>
-                <a:cs typeface="Microsoft YaHei"/>
-              </a:rPr>
-              <a:t>8 </a:t>
-            </a:r>
-            <a:r>
-              <a:rPr sz="1100" b="1">
-                <a:solidFill>
-                  <a:srgbClr val="0A2B45"/>
-                </a:solidFill>
-                <a:latin typeface="Microsoft YaHei"/>
-                <a:ea typeface="Microsoft YaHei"/>
-                <a:cs typeface="Microsoft YaHei"/>
-              </a:rPr>
-              <a:t>端到端A/B对比实验</a:t>
-            </a:r>
-          </a:p>
-          <a:p>
-            <a:pPr algn="l" latinLnBrk="0">
-              <a:lnSpc>
-                <a:spcPct val="100000"/>
-              </a:lnSpc>
-              <a:spcBef>
-                <a:spcPts val="0"/>
-              </a:spcBef>
-              <a:spcAft>
-                <a:spcPts val="0"/>
-              </a:spcAft>
-            </a:pPr>
-            <a:r>
-              <a:rPr sz="1000" b="0">
-                <a:solidFill>
-                  <a:srgbClr val="1B4D69"/>
-                </a:solidFill>
-                <a:latin typeface="Microsoft YaHei"/>
-                <a:ea typeface="Microsoft YaHei"/>
-                <a:cs typeface="Microsoft YaHei"/>
-              </a:rPr>
-              <a:t>多次压测取中位数，全程关闭性能剖析器（Profiler），增幅须跨越噪声门槛</a:t>
-            </a:r>
-          </a:p>
-        </p:txBody>
-      </p:sp>
-      <p:sp>
-        <p:nvSpPr>
-          <p:cNvPr id="38" name="Rectangle 37"/>
-          <p:cNvSpPr/>
-          <p:nvPr/>
-        </p:nvSpPr>
-        <p:spPr>
-          <a:xfrm>
-            <a:off x="3273552" y="5029200"/>
-            <a:ext cx="2468880" cy="1115568"/>
-          </a:xfrm>
-          <a:prstGeom prst="rect">
-            <a:avLst/>
+            <a:off x="5020437" y="3895344"/>
+            <a:ext cx="1047978" cy="292608"/>
+          </a:xfrm>
+          <a:prstGeom prst="roundRect">
+            <a:avLst>
+              <a:gd name="adj" fmla="val 50000"/>
+            </a:avLst>
           </a:prstGeom>
           <a:solidFill>
             <a:srgbClr val="FFFFFF"/>
           </a:solidFill>
           <a:ln w="9525">
             <a:solidFill>
-              <a:srgbClr val="CFE3F0"/>
+              <a:srgbClr val="AFCEE1"/>
             </a:solidFill>
           </a:ln>
         </p:spPr>
         <p:txBody>
-          <a:bodyPr rtlCol="0" anchor="ctr"/>
-          <a:lstStyle/>
-          <a:p>
-            <a:pPr algn="ctr"/>
-          </a:p>
-        </p:txBody>
-      </p:sp>
-      <p:sp>
-        <p:nvSpPr>
-          <p:cNvPr id="39" name="Rectangle 38"/>
+          <a:bodyPr rtlCol="0" anchor="ctr" wrap="square" lIns="36576" tIns="0" rIns="36576" bIns="0">
+            <a:noAutofit/>
+          </a:bodyPr>
+          <a:lstStyle/>
+          <a:p>
+            <a:pPr algn="ctr" latinLnBrk="0">
+              <a:lnSpc>
+                <a:spcPct val="100000"/>
+              </a:lnSpc>
+              <a:spcBef>
+                <a:spcPts val="0"/>
+              </a:spcBef>
+              <a:spcAft>
+                <a:spcPts val="0"/>
+              </a:spcAft>
+            </a:pPr>
+            <a:r>
+              <a:rPr sz="1000" b="1">
+                <a:solidFill>
+                  <a:srgbClr val="123C5B"/>
+                </a:solidFill>
+                <a:latin typeface="Microsoft YaHei"/>
+                <a:ea typeface="Microsoft YaHei"/>
+                <a:cs typeface="Microsoft YaHei"/>
+              </a:rPr>
+              <a:t>硬性约束</a:t>
+            </a:r>
+          </a:p>
+        </p:txBody>
+      </p:sp>
+      <p:sp>
+        <p:nvSpPr>
+          <p:cNvPr id="66" name="Rounded Rectangle 65"/>
           <p:cNvSpPr/>
           <p:nvPr/>
         </p:nvSpPr>
         <p:spPr>
           <a:xfrm>
-            <a:off x="3273552" y="5029200"/>
-            <a:ext cx="64008" cy="1115568"/>
-          </a:xfrm>
-          <a:prstGeom prst="rect">
-            <a:avLst/>
-          </a:prstGeom>
-          <a:solidFill>
-            <a:srgbClr val="0F62CE"/>
-          </a:solidFill>
-          <a:ln>
-            <a:noFill/>
-          </a:ln>
-        </p:spPr>
-        <p:txBody>
-          <a:bodyPr rtlCol="0" anchor="ctr"/>
-          <a:lstStyle/>
-          <a:p>
-            <a:pPr algn="ctr"/>
-          </a:p>
-        </p:txBody>
-      </p:sp>
-      <p:sp>
-        <p:nvSpPr>
-          <p:cNvPr id="40" name="TextBox 39"/>
-          <p:cNvSpPr txBox="1"/>
-          <p:nvPr/>
-        </p:nvSpPr>
-        <p:spPr>
-          <a:xfrm>
-            <a:off x="3456432" y="5074920"/>
-            <a:ext cx="2157984" cy="1024127"/>
-          </a:xfrm>
-          <a:prstGeom prst="rect">
-            <a:avLst/>
-          </a:prstGeom>
-          <a:noFill/>
-        </p:spPr>
-        <p:txBody>
-          <a:bodyPr wrap="square" anchor="ctr" lIns="0" tIns="0" rIns="0" bIns="0">
-            <a:noAutofit/>
-          </a:bodyPr>
-          <a:lstStyle/>
-          <a:p>
-            <a:pPr algn="l" latinLnBrk="0">
-              <a:lnSpc>
-                <a:spcPct val="100000"/>
-              </a:lnSpc>
-              <a:spcBef>
-                <a:spcPts val="0"/>
-              </a:spcBef>
-              <a:spcAft>
-                <a:spcPts val="200"/>
-              </a:spcAft>
-            </a:pPr>
-            <a:r>
-              <a:rPr sz="1100" b="1">
-                <a:solidFill>
-                  <a:srgbClr val="0F62CE"/>
-                </a:solidFill>
-                <a:latin typeface="Microsoft YaHei"/>
-                <a:ea typeface="Microsoft YaHei"/>
-                <a:cs typeface="Microsoft YaHei"/>
-              </a:rPr>
-              <a:t>7 </a:t>
-            </a:r>
-            <a:r>
-              <a:rPr sz="1100" b="1">
-                <a:solidFill>
-                  <a:srgbClr val="0A2B45"/>
-                </a:solidFill>
-                <a:latin typeface="Microsoft YaHei"/>
-                <a:ea typeface="Microsoft YaHei"/>
-                <a:cs typeface="Microsoft YaHei"/>
-              </a:rPr>
-              <a:t>端到端质量评估</a:t>
-            </a:r>
-          </a:p>
-          <a:p>
-            <a:pPr algn="l" latinLnBrk="0">
-              <a:lnSpc>
-                <a:spcPct val="100000"/>
-              </a:lnSpc>
-              <a:spcBef>
-                <a:spcPts val="0"/>
-              </a:spcBef>
-              <a:spcAft>
-                <a:spcPts val="0"/>
-              </a:spcAft>
-            </a:pPr>
-            <a:r>
-              <a:rPr sz="1000" b="0">
-                <a:solidFill>
-                  <a:srgbClr val="1B4D69"/>
-                </a:solidFill>
-                <a:latin typeface="Microsoft YaHei"/>
-                <a:ea typeface="Microsoft YaHei"/>
-                <a:cs typeface="Microsoft YaHei"/>
-              </a:rPr>
-              <a:t>数据集得分不降，格式解析失败与输出截断均严判计入</a:t>
-            </a:r>
-          </a:p>
-        </p:txBody>
-      </p:sp>
-      <p:sp>
-        <p:nvSpPr>
-          <p:cNvPr id="41" name="Rectangle 40"/>
-          <p:cNvSpPr/>
-          <p:nvPr/>
-        </p:nvSpPr>
-        <p:spPr>
-          <a:xfrm>
-            <a:off x="5998464" y="5029200"/>
-            <a:ext cx="2468880" cy="1115568"/>
-          </a:xfrm>
-          <a:prstGeom prst="rect">
-            <a:avLst/>
+            <a:off x="6196431" y="3895344"/>
+            <a:ext cx="1047978" cy="292608"/>
+          </a:xfrm>
+          <a:prstGeom prst="roundRect">
+            <a:avLst>
+              <a:gd name="adj" fmla="val 50000"/>
+            </a:avLst>
           </a:prstGeom>
           <a:solidFill>
             <a:srgbClr val="FFFFFF"/>
           </a:solidFill>
           <a:ln w="9525">
             <a:solidFill>
-              <a:srgbClr val="CFE3F0"/>
+              <a:srgbClr val="AFCEE1"/>
             </a:solidFill>
           </a:ln>
         </p:spPr>
         <p:txBody>
-          <a:bodyPr rtlCol="0" anchor="ctr"/>
-          <a:lstStyle/>
-          <a:p>
-            <a:pPr algn="ctr"/>
-          </a:p>
-        </p:txBody>
-      </p:sp>
-      <p:sp>
-        <p:nvSpPr>
-          <p:cNvPr id="42" name="Rectangle 41"/>
+          <a:bodyPr rtlCol="0" anchor="ctr" wrap="square" lIns="36576" tIns="0" rIns="36576" bIns="0">
+            <a:noAutofit/>
+          </a:bodyPr>
+          <a:lstStyle/>
+          <a:p>
+            <a:pPr algn="ctr" latinLnBrk="0">
+              <a:lnSpc>
+                <a:spcPct val="100000"/>
+              </a:lnSpc>
+              <a:spcBef>
+                <a:spcPts val="0"/>
+              </a:spcBef>
+              <a:spcAft>
+                <a:spcPts val="0"/>
+              </a:spcAft>
+            </a:pPr>
+            <a:r>
+              <a:rPr sz="1000" b="1">
+                <a:solidFill>
+                  <a:srgbClr val="123C5B"/>
+                </a:solidFill>
+                <a:latin typeface="Microsoft YaHei"/>
+                <a:ea typeface="Microsoft YaHei"/>
+                <a:cs typeface="Microsoft YaHei"/>
+              </a:rPr>
+              <a:t>全量实验追溯</a:t>
+            </a:r>
+          </a:p>
+        </p:txBody>
+      </p:sp>
+      <p:sp>
+        <p:nvSpPr>
+          <p:cNvPr id="67" name="Rounded Rectangle 66"/>
           <p:cNvSpPr/>
           <p:nvPr/>
         </p:nvSpPr>
         <p:spPr>
           <a:xfrm>
-            <a:off x="5998464" y="5029200"/>
-            <a:ext cx="64008" cy="1115568"/>
-          </a:xfrm>
-          <a:prstGeom prst="rect">
-            <a:avLst/>
-          </a:prstGeom>
-          <a:solidFill>
-            <a:srgbClr val="0F62CE"/>
-          </a:solidFill>
-          <a:ln>
-            <a:noFill/>
-          </a:ln>
-        </p:spPr>
-        <p:txBody>
-          <a:bodyPr rtlCol="0" anchor="ctr"/>
-          <a:lstStyle/>
-          <a:p>
-            <a:pPr algn="ctr"/>
-          </a:p>
-        </p:txBody>
-      </p:sp>
-      <p:sp>
-        <p:nvSpPr>
-          <p:cNvPr id="43" name="TextBox 42"/>
-          <p:cNvSpPr txBox="1"/>
-          <p:nvPr/>
-        </p:nvSpPr>
-        <p:spPr>
-          <a:xfrm>
-            <a:off x="6181344" y="5074920"/>
-            <a:ext cx="2157984" cy="1024127"/>
-          </a:xfrm>
-          <a:prstGeom prst="rect">
-            <a:avLst/>
-          </a:prstGeom>
-          <a:noFill/>
-        </p:spPr>
-        <p:txBody>
-          <a:bodyPr wrap="square" anchor="ctr" lIns="0" tIns="0" rIns="0" bIns="0">
-            <a:noAutofit/>
-          </a:bodyPr>
-          <a:lstStyle/>
-          <a:p>
-            <a:pPr algn="l" latinLnBrk="0">
-              <a:lnSpc>
-                <a:spcPct val="100000"/>
-              </a:lnSpc>
-              <a:spcBef>
-                <a:spcPts val="0"/>
-              </a:spcBef>
-              <a:spcAft>
-                <a:spcPts val="200"/>
-              </a:spcAft>
-            </a:pPr>
-            <a:r>
-              <a:rPr sz="1100" b="1">
-                <a:solidFill>
-                  <a:srgbClr val="0F62CE"/>
-                </a:solidFill>
-                <a:latin typeface="Microsoft YaHei"/>
-                <a:ea typeface="Microsoft YaHei"/>
-                <a:cs typeface="Microsoft YaHei"/>
-              </a:rPr>
-              <a:t>6 </a:t>
-            </a:r>
-            <a:r>
-              <a:rPr sz="1100" b="1">
-                <a:solidFill>
-                  <a:srgbClr val="0A2B45"/>
-                </a:solidFill>
-                <a:latin typeface="Microsoft YaHei"/>
-                <a:ea typeface="Microsoft YaHei"/>
-                <a:cs typeface="Microsoft YaHei"/>
-              </a:rPr>
-              <a:t>单算子性能初筛</a:t>
-            </a:r>
-          </a:p>
-          <a:p>
-            <a:pPr algn="l" latinLnBrk="0">
-              <a:lnSpc>
-                <a:spcPct val="100000"/>
-              </a:lnSpc>
-              <a:spcBef>
-                <a:spcPts val="0"/>
-              </a:spcBef>
-              <a:spcAft>
-                <a:spcPts val="0"/>
-              </a:spcAft>
-            </a:pPr>
-            <a:r>
-              <a:rPr sz="1000" b="0">
-                <a:solidFill>
-                  <a:srgbClr val="1B4D69"/>
-                </a:solidFill>
-                <a:latin typeface="Microsoft YaHei"/>
-                <a:ea typeface="Microsoft YaHei"/>
-                <a:cs typeface="Microsoft YaHei"/>
-              </a:rPr>
-              <a:t>隔离被改算子，直接测速</a:t>
-            </a:r>
-          </a:p>
-          <a:p>
-            <a:pPr algn="l" latinLnBrk="0">
-              <a:lnSpc>
-                <a:spcPct val="100000"/>
-              </a:lnSpc>
-              <a:spcBef>
-                <a:spcPts val="0"/>
-              </a:spcBef>
-              <a:spcAft>
-                <a:spcPts val="0"/>
-              </a:spcAft>
-            </a:pPr>
-            <a:r>
-              <a:rPr sz="1000" b="0">
-                <a:solidFill>
-                  <a:srgbClr val="1B4D69"/>
-                </a:solidFill>
-                <a:latin typeface="Microsoft YaHei"/>
-                <a:ea typeface="Microsoft YaHei"/>
-                <a:cs typeface="Microsoft YaHei"/>
-              </a:rPr>
-              <a:t>新旧版本同条件预热，确保对比公平</a:t>
-            </a:r>
-          </a:p>
-          <a:p>
-            <a:pPr algn="l" latinLnBrk="0">
-              <a:lnSpc>
-                <a:spcPct val="100000"/>
-              </a:lnSpc>
-              <a:spcBef>
-                <a:spcPts val="0"/>
-              </a:spcBef>
-              <a:spcAft>
-                <a:spcPts val="0"/>
-              </a:spcAft>
-            </a:pPr>
-            <a:r>
-              <a:rPr sz="1000" b="0">
-                <a:solidFill>
-                  <a:srgbClr val="1B4D69"/>
-                </a:solidFill>
-                <a:latin typeface="Microsoft YaHei"/>
-                <a:ea typeface="Microsoft YaHei"/>
-                <a:cs typeface="Microsoft YaHei"/>
-              </a:rPr>
-              <a:t>局部提速达标才进入整模型评测，快速淘汰无效补丁</a:t>
-            </a:r>
-          </a:p>
-        </p:txBody>
-      </p:sp>
-      <p:sp>
-        <p:nvSpPr>
-          <p:cNvPr id="44" name="Rectangle 43"/>
-          <p:cNvSpPr/>
-          <p:nvPr/>
-        </p:nvSpPr>
-        <p:spPr>
-          <a:xfrm>
-            <a:off x="8723376" y="5029200"/>
-            <a:ext cx="2916936" cy="1115568"/>
-          </a:xfrm>
-          <a:prstGeom prst="rect">
-            <a:avLst/>
+            <a:off x="7372426" y="3895344"/>
+            <a:ext cx="1047978" cy="292608"/>
+          </a:xfrm>
+          <a:prstGeom prst="roundRect">
+            <a:avLst>
+              <a:gd name="adj" fmla="val 50000"/>
+            </a:avLst>
           </a:prstGeom>
           <a:solidFill>
             <a:srgbClr val="FFFFFF"/>
           </a:solidFill>
           <a:ln w="9525">
             <a:solidFill>
-              <a:srgbClr val="CFE3F0"/>
+              <a:srgbClr val="AFCEE1"/>
             </a:solidFill>
           </a:ln>
         </p:spPr>
         <p:txBody>
-          <a:bodyPr rtlCol="0" anchor="ctr"/>
-          <a:lstStyle/>
-          <a:p>
-            <a:pPr algn="ctr"/>
-          </a:p>
-        </p:txBody>
-      </p:sp>
-      <p:sp>
-        <p:nvSpPr>
-          <p:cNvPr id="45" name="Rectangle 44"/>
-          <p:cNvSpPr/>
-          <p:nvPr/>
-        </p:nvSpPr>
-        <p:spPr>
-          <a:xfrm>
-            <a:off x="8723376" y="5029200"/>
-            <a:ext cx="64008" cy="1115568"/>
-          </a:xfrm>
-          <a:prstGeom prst="rect">
-            <a:avLst/>
-          </a:prstGeom>
-          <a:solidFill>
-            <a:srgbClr val="0F62CE"/>
-          </a:solidFill>
-          <a:ln>
-            <a:noFill/>
-          </a:ln>
-        </p:spPr>
-        <p:txBody>
-          <a:bodyPr rtlCol="0" anchor="ctr"/>
-          <a:lstStyle/>
-          <a:p>
-            <a:pPr algn="ctr"/>
-          </a:p>
-        </p:txBody>
-      </p:sp>
-      <p:sp>
-        <p:nvSpPr>
-          <p:cNvPr id="46" name="TextBox 45"/>
-          <p:cNvSpPr txBox="1"/>
-          <p:nvPr/>
-        </p:nvSpPr>
-        <p:spPr>
-          <a:xfrm>
-            <a:off x="8906255" y="5074920"/>
-            <a:ext cx="2606040" cy="1024127"/>
-          </a:xfrm>
-          <a:prstGeom prst="rect">
-            <a:avLst/>
-          </a:prstGeom>
-          <a:noFill/>
-        </p:spPr>
-        <p:txBody>
-          <a:bodyPr wrap="square" anchor="ctr" lIns="0" tIns="0" rIns="0" bIns="0">
-            <a:noAutofit/>
-          </a:bodyPr>
-          <a:lstStyle/>
-          <a:p>
-            <a:pPr algn="l" latinLnBrk="0">
-              <a:lnSpc>
-                <a:spcPct val="100000"/>
-              </a:lnSpc>
-              <a:spcBef>
-                <a:spcPts val="0"/>
-              </a:spcBef>
-              <a:spcAft>
-                <a:spcPts val="200"/>
-              </a:spcAft>
-            </a:pPr>
-            <a:r>
-              <a:rPr sz="1100" b="1">
-                <a:solidFill>
-                  <a:srgbClr val="0F62CE"/>
-                </a:solidFill>
-                <a:latin typeface="Microsoft YaHei"/>
-                <a:ea typeface="Microsoft YaHei"/>
-                <a:cs typeface="Microsoft YaHei"/>
-              </a:rPr>
-              <a:t>5 </a:t>
-            </a:r>
-            <a:r>
-              <a:rPr sz="1100" b="1">
-                <a:solidFill>
-                  <a:srgbClr val="0A2B45"/>
-                </a:solidFill>
-                <a:latin typeface="Microsoft YaHei"/>
-                <a:ea typeface="Microsoft YaHei"/>
-                <a:cs typeface="Microsoft YaHei"/>
-              </a:rPr>
-              <a:t>补丁合入与增量构建</a:t>
-            </a:r>
-          </a:p>
-          <a:p>
-            <a:pPr algn="l" latinLnBrk="0">
-              <a:lnSpc>
-                <a:spcPct val="100000"/>
-              </a:lnSpc>
-              <a:spcBef>
-                <a:spcPts val="0"/>
-              </a:spcBef>
-              <a:spcAft>
-                <a:spcPts val="0"/>
-              </a:spcAft>
-            </a:pPr>
-            <a:r>
-              <a:rPr sz="1000" b="0">
-                <a:solidFill>
-                  <a:srgbClr val="1B4D69"/>
-                </a:solidFill>
-                <a:latin typeface="Microsoft YaHei"/>
-                <a:ea typeface="Microsoft YaHei"/>
-                <a:cs typeface="Microsoft YaHei"/>
-              </a:rPr>
-              <a:t>在源码工作区执行原位构建，打入隔离补丁</a:t>
-            </a:r>
-          </a:p>
-        </p:txBody>
-      </p:sp>
-      <p:cxnSp>
-        <p:nvCxnSpPr>
-          <p:cNvPr id="47" name="Connector 46"/>
-          <p:cNvCxnSpPr/>
-          <p:nvPr/>
-        </p:nvCxnSpPr>
-        <p:spPr>
-          <a:xfrm>
-            <a:off x="11164824" y="4477893"/>
-            <a:ext cx="0" cy="514731"/>
-          </a:xfrm>
-          <a:prstGeom prst="line">
-            <a:avLst/>
-          </a:prstGeom>
-          <a:ln w="15875">
-            <a:solidFill>
-              <a:srgbClr val="40708B"/>
-            </a:solidFill>
-            <a:tailEnd type="triangle" w="med" len="med"/>
-          </a:ln>
-        </p:spPr>
-      </p:cxnSp>
-      <p:sp>
-        <p:nvSpPr>
-          <p:cNvPr id="48" name="TextBox 47"/>
-          <p:cNvSpPr txBox="1"/>
-          <p:nvPr/>
-        </p:nvSpPr>
-        <p:spPr>
-          <a:xfrm>
-            <a:off x="8814815" y="4532757"/>
-            <a:ext cx="2203704" cy="530352"/>
-          </a:xfrm>
-          <a:prstGeom prst="rect">
-            <a:avLst/>
-          </a:prstGeom>
-          <a:noFill/>
-        </p:spPr>
-        <p:txBody>
-          <a:bodyPr wrap="square" anchor="t" lIns="0" tIns="0" rIns="0" bIns="0">
-            <a:noAutofit/>
-          </a:bodyPr>
-          <a:lstStyle/>
-          <a:p>
-            <a:pPr algn="l" latinLnBrk="0">
-              <a:lnSpc>
-                <a:spcPct val="100000"/>
-              </a:lnSpc>
-              <a:spcBef>
-                <a:spcPts val="0"/>
-              </a:spcBef>
-              <a:spcAft>
-                <a:spcPts val="0"/>
-              </a:spcAft>
-            </a:pPr>
-            <a:r>
-              <a:rPr sz="800" b="0">
-                <a:solidFill>
-                  <a:srgbClr val="40708B"/>
-                </a:solidFill>
-                <a:latin typeface="Microsoft YaHei"/>
-                <a:ea typeface="Microsoft YaHei"/>
-                <a:cs typeface="Microsoft YaHei"/>
-              </a:rPr>
-              <a:t>提交规划方案：</a:t>
-            </a:r>
-          </a:p>
-          <a:p>
-            <a:pPr algn="l" latinLnBrk="0">
-              <a:lnSpc>
-                <a:spcPct val="100000"/>
-              </a:lnSpc>
-              <a:spcBef>
-                <a:spcPts val="0"/>
-              </a:spcBef>
-              <a:spcAft>
-                <a:spcPts val="0"/>
-              </a:spcAft>
-            </a:pPr>
-            <a:r>
-              <a:rPr sz="800" b="0">
-                <a:solidFill>
-                  <a:srgbClr val="40708B"/>
-                </a:solidFill>
-                <a:latin typeface="Microsoft YaHei"/>
-                <a:ea typeface="Microsoft YaHei"/>
-                <a:cs typeface="Microsoft YaHei"/>
-              </a:rPr>
-              <a:t>优化假设 + 代码补丁 + 证据引用</a:t>
-            </a:r>
-          </a:p>
-        </p:txBody>
-      </p:sp>
-      <p:cxnSp>
-        <p:nvCxnSpPr>
-          <p:cNvPr id="49" name="Connector 48"/>
-          <p:cNvCxnSpPr/>
-          <p:nvPr/>
-        </p:nvCxnSpPr>
-        <p:spPr>
-          <a:xfrm>
-            <a:off x="8503919" y="5586984"/>
-            <a:ext cx="182881" cy="0"/>
-          </a:xfrm>
-          <a:prstGeom prst="line">
-            <a:avLst/>
-          </a:prstGeom>
-          <a:ln w="15875">
-            <a:solidFill>
-              <a:srgbClr val="40708B"/>
-            </a:solidFill>
-            <a:tailEnd type="triangle" w="med" len="med"/>
-          </a:ln>
-        </p:spPr>
-      </p:cxnSp>
-      <p:cxnSp>
-        <p:nvCxnSpPr>
-          <p:cNvPr id="50" name="Connector 49"/>
-          <p:cNvCxnSpPr/>
-          <p:nvPr/>
-        </p:nvCxnSpPr>
-        <p:spPr>
-          <a:xfrm>
-            <a:off x="5779008" y="5586984"/>
-            <a:ext cx="182880" cy="0"/>
-          </a:xfrm>
-          <a:prstGeom prst="line">
-            <a:avLst/>
-          </a:prstGeom>
-          <a:ln w="15875">
-            <a:solidFill>
-              <a:srgbClr val="40708B"/>
-            </a:solidFill>
-            <a:tailEnd type="triangle" w="med" len="med"/>
-          </a:ln>
-        </p:spPr>
-      </p:cxnSp>
-      <p:cxnSp>
-        <p:nvCxnSpPr>
-          <p:cNvPr id="51" name="Connector 50"/>
-          <p:cNvCxnSpPr/>
-          <p:nvPr/>
-        </p:nvCxnSpPr>
-        <p:spPr>
-          <a:xfrm>
-            <a:off x="3054096" y="5586984"/>
-            <a:ext cx="182880" cy="0"/>
-          </a:xfrm>
-          <a:prstGeom prst="line">
-            <a:avLst/>
-          </a:prstGeom>
-          <a:ln w="15875">
-            <a:solidFill>
-              <a:srgbClr val="40708B"/>
-            </a:solidFill>
-            <a:tailEnd type="triangle" w="med" len="med"/>
-          </a:ln>
-        </p:spPr>
-      </p:cxnSp>
-      <p:cxnSp>
-        <p:nvCxnSpPr>
-          <p:cNvPr id="52" name="Connector 51"/>
-          <p:cNvCxnSpPr/>
-          <p:nvPr/>
-        </p:nvCxnSpPr>
-        <p:spPr>
-          <a:xfrm flipV="1">
-            <a:off x="1591056" y="3035808"/>
-            <a:ext cx="0" cy="1956816"/>
-          </a:xfrm>
-          <a:prstGeom prst="line">
-            <a:avLst/>
-          </a:prstGeom>
-          <a:ln w="15875">
-            <a:solidFill>
-              <a:srgbClr val="40708B"/>
-            </a:solidFill>
-            <a:tailEnd type="triangle" w="med" len="med"/>
-          </a:ln>
-        </p:spPr>
-      </p:cxnSp>
-      <p:sp>
-        <p:nvSpPr>
-          <p:cNvPr id="53" name="TextBox 52"/>
-          <p:cNvSpPr txBox="1"/>
-          <p:nvPr/>
-        </p:nvSpPr>
-        <p:spPr>
-          <a:xfrm>
-            <a:off x="566928" y="3474720"/>
-            <a:ext cx="932688" cy="914400"/>
-          </a:xfrm>
-          <a:prstGeom prst="rect">
-            <a:avLst/>
-          </a:prstGeom>
-          <a:noFill/>
-        </p:spPr>
-        <p:txBody>
-          <a:bodyPr wrap="square" anchor="ctr" lIns="0" tIns="0" rIns="0" bIns="0">
-            <a:noAutofit/>
-          </a:bodyPr>
-          <a:lstStyle/>
-          <a:p>
-            <a:pPr algn="r" latinLnBrk="0">
-              <a:lnSpc>
-                <a:spcPct val="100000"/>
-              </a:lnSpc>
-              <a:spcBef>
-                <a:spcPts val="0"/>
-              </a:spcBef>
-              <a:spcAft>
-                <a:spcPts val="0"/>
-              </a:spcAft>
-            </a:pPr>
-            <a:r>
-              <a:rPr sz="800" b="0">
-                <a:solidFill>
-                  <a:srgbClr val="40708B"/>
-                </a:solidFill>
-                <a:latin typeface="Microsoft YaHei"/>
-                <a:ea typeface="Microsoft YaHei"/>
-                <a:cs typeface="Microsoft YaHei"/>
-              </a:rPr>
-              <a:t>确认真实收益 → 更新为最新基线 → 触发新一轮采样</a:t>
-            </a:r>
-          </a:p>
-        </p:txBody>
-      </p:sp>
-      <p:sp>
-        <p:nvSpPr>
-          <p:cNvPr id="54" name="TextBox 53"/>
+          <a:bodyPr rtlCol="0" anchor="ctr" wrap="square" lIns="36576" tIns="0" rIns="36576" bIns="0">
+            <a:noAutofit/>
+          </a:bodyPr>
+          <a:lstStyle/>
+          <a:p>
+            <a:pPr algn="ctr" latinLnBrk="0">
+              <a:lnSpc>
+                <a:spcPct val="100000"/>
+              </a:lnSpc>
+              <a:spcBef>
+                <a:spcPts val="0"/>
+              </a:spcBef>
+              <a:spcAft>
+                <a:spcPts val="0"/>
+              </a:spcAft>
+            </a:pPr>
+            <a:r>
+              <a:rPr sz="1000" b="1">
+                <a:solidFill>
+                  <a:srgbClr val="123C5B"/>
+                </a:solidFill>
+                <a:latin typeface="Microsoft YaHei"/>
+                <a:ea typeface="Microsoft YaHei"/>
+                <a:cs typeface="Microsoft YaHei"/>
+              </a:rPr>
+              <a:t>闭环容错</a:t>
+            </a:r>
+          </a:p>
+        </p:txBody>
+      </p:sp>
+      <p:sp>
+        <p:nvSpPr>
+          <p:cNvPr id="68" name="TextBox 67"/>
           <p:cNvSpPr txBox="1"/>
           <p:nvPr/>
         </p:nvSpPr>

--- a/slides/m100_agent_final_deck.pptx
+++ b/slides/m100_agent_final_deck.pptx
@@ -30571,7 +30571,7 @@
                 <a:ea typeface="Microsoft YaHei"/>
                 <a:cs typeface="Microsoft YaHei"/>
               </a:rPr>
-              <a:t>M100 Agent：模型层内外双环与人机交互</a:t>
+              <a:t>模型层 Agent 设计方案</a:t>
             </a:r>
           </a:p>
         </p:txBody>
@@ -30610,7 +30610,7 @@
               </a:spcAft>
             </a:pPr>
             <a:r>
-              <a:rPr sz="1150" b="0">
+              <a:rPr sz="1200" b="0">
                 <a:solidFill>
                   <a:srgbClr val="1B4D69"/>
                 </a:solidFill>
@@ -30618,31 +30618,31 @@
                 <a:ea typeface="Microsoft YaHei"/>
                 <a:cs typeface="Microsoft YaHei"/>
               </a:rPr>
-              <a:t>外环是确定性控制器（无模型），内环是一轮试验；人只在下发契约、结对补丁、终审验收三处接入，交互物全部落盘</a:t>
-            </a:r>
-          </a:p>
-        </p:txBody>
-      </p:sp>
-      <p:sp>
-        <p:nvSpPr>
-          <p:cNvPr id="6" name="Oval 5"/>
+              <a:t>大模型只提方案，成败全部由确定性实测判定；人只在三处介入</a:t>
+            </a:r>
+          </a:p>
+        </p:txBody>
+      </p:sp>
+      <p:sp>
+        <p:nvSpPr>
+          <p:cNvPr id="6" name="Rectangle 5"/>
           <p:cNvSpPr/>
           <p:nvPr/>
         </p:nvSpPr>
         <p:spPr>
           <a:xfrm>
-            <a:off x="635508" y="1261872"/>
-            <a:ext cx="155448" cy="155448"/>
-          </a:xfrm>
-          <a:prstGeom prst="ellipse">
+            <a:off x="1444752" y="1280160"/>
+            <a:ext cx="10198303" cy="822959"/>
+          </a:xfrm>
+          <a:prstGeom prst="rect">
             <a:avLst/>
           </a:prstGeom>
           <a:solidFill>
-            <a:srgbClr val="FFFFFF"/>
+            <a:srgbClr val="F2F8FD"/>
           </a:solidFill>
-          <a:ln w="15875">
+          <a:ln w="9525">
             <a:solidFill>
-              <a:srgbClr val="1B4D69"/>
+              <a:srgbClr val="AFCEE1"/>
             </a:solidFill>
           </a:ln>
         </p:spPr>
@@ -30654,158 +30654,94 @@
           </a:p>
         </p:txBody>
       </p:sp>
-      <p:cxnSp>
-        <p:nvCxnSpPr>
-          <p:cNvPr id="7" name="Connector 6"/>
-          <p:cNvCxnSpPr/>
-          <p:nvPr/>
-        </p:nvCxnSpPr>
-        <p:spPr>
-          <a:xfrm>
-            <a:off x="713232" y="1417319"/>
-            <a:ext cx="0" cy="91441"/>
-          </a:xfrm>
-          <a:prstGeom prst="line">
-            <a:avLst/>
-          </a:prstGeom>
-          <a:ln w="15875">
+      <p:sp>
+        <p:nvSpPr>
+          <p:cNvPr id="7" name="Rectangle 6"/>
+          <p:cNvSpPr/>
+          <p:nvPr/>
+        </p:nvSpPr>
+        <p:spPr>
+          <a:xfrm>
+            <a:off x="548640" y="1280160"/>
+            <a:ext cx="896112" cy="822959"/>
+          </a:xfrm>
+          <a:prstGeom prst="rect">
+            <a:avLst/>
+          </a:prstGeom>
+          <a:solidFill>
+            <a:srgbClr val="1B4D69"/>
+          </a:solidFill>
+          <a:ln w="19050">
             <a:solidFill>
-              <a:srgbClr val="1B4D69"/>
+              <a:srgbClr val="FFFFFF"/>
             </a:solidFill>
           </a:ln>
         </p:spPr>
-      </p:cxnSp>
-      <p:cxnSp>
-        <p:nvCxnSpPr>
-          <p:cNvPr id="8" name="Connector 7"/>
-          <p:cNvCxnSpPr/>
-          <p:nvPr/>
-        </p:nvCxnSpPr>
-        <p:spPr>
-          <a:xfrm>
-            <a:off x="594360" y="1453895"/>
-            <a:ext cx="237744" cy="0"/>
-          </a:xfrm>
-          <a:prstGeom prst="line">
-            <a:avLst/>
-          </a:prstGeom>
-          <a:ln w="15875">
-            <a:solidFill>
-              <a:srgbClr val="1B4D69"/>
-            </a:solidFill>
-          </a:ln>
-        </p:spPr>
-      </p:cxnSp>
-      <p:cxnSp>
-        <p:nvCxnSpPr>
-          <p:cNvPr id="9" name="Connector 8"/>
-          <p:cNvCxnSpPr/>
-          <p:nvPr/>
-        </p:nvCxnSpPr>
-        <p:spPr>
-          <a:xfrm flipH="1">
-            <a:off x="621792" y="1508760"/>
-            <a:ext cx="91440" cy="100583"/>
-          </a:xfrm>
-          <a:prstGeom prst="line">
-            <a:avLst/>
-          </a:prstGeom>
-          <a:ln w="15875">
-            <a:solidFill>
-              <a:srgbClr val="1B4D69"/>
-            </a:solidFill>
-          </a:ln>
-        </p:spPr>
-      </p:cxnSp>
-      <p:cxnSp>
-        <p:nvCxnSpPr>
-          <p:cNvPr id="10" name="Connector 9"/>
-          <p:cNvCxnSpPr/>
-          <p:nvPr/>
-        </p:nvCxnSpPr>
-        <p:spPr>
-          <a:xfrm>
-            <a:off x="713232" y="1508760"/>
-            <a:ext cx="91440" cy="100583"/>
-          </a:xfrm>
-          <a:prstGeom prst="line">
-            <a:avLst/>
-          </a:prstGeom>
-          <a:ln w="15875">
-            <a:solidFill>
-              <a:srgbClr val="1B4D69"/>
-            </a:solidFill>
-          </a:ln>
-        </p:spPr>
-      </p:cxnSp>
-      <p:sp>
-        <p:nvSpPr>
-          <p:cNvPr id="11" name="TextBox 10"/>
-          <p:cNvSpPr txBox="1"/>
-          <p:nvPr/>
-        </p:nvSpPr>
-        <p:spPr>
-          <a:xfrm>
-            <a:off x="932688" y="1261872"/>
-            <a:ext cx="1682495" cy="347472"/>
-          </a:xfrm>
-          <a:prstGeom prst="rect">
-            <a:avLst/>
-          </a:prstGeom>
-          <a:noFill/>
-        </p:spPr>
-        <p:txBody>
-          <a:bodyPr wrap="square" anchor="ctr" lIns="0" tIns="0" rIns="0" bIns="0">
-            <a:noAutofit/>
-          </a:bodyPr>
-          <a:lstStyle/>
-          <a:p>
-            <a:pPr algn="l" latinLnBrk="0">
-              <a:lnSpc>
-                <a:spcPct val="100000"/>
-              </a:lnSpc>
-              <a:spcBef>
-                <a:spcPts val="0"/>
-              </a:spcBef>
-              <a:spcAft>
-                <a:spcPts val="0"/>
-              </a:spcAft>
-            </a:pPr>
-            <a:r>
-              <a:rPr sz="1100" b="1">
-                <a:solidFill>
-                  <a:srgbClr val="0A2B45"/>
-                </a:solidFill>
-                <a:latin typeface="Microsoft YaHei"/>
-                <a:ea typeface="Microsoft YaHei"/>
-                <a:cs typeface="Microsoft YaHei"/>
-              </a:rPr>
-              <a:t>人 · 任务负责人</a:t>
-            </a:r>
-            <a:r>
-              <a:rPr sz="800" b="1">
-                <a:solidFill>
-                  <a:srgbClr val="40708B"/>
-                </a:solidFill>
-                <a:latin typeface="Microsoft YaHei"/>
-                <a:ea typeface="Microsoft YaHei"/>
-                <a:cs typeface="Microsoft YaHei"/>
-              </a:rPr>
-              <a:t>　Human</a:t>
-            </a:r>
-          </a:p>
-        </p:txBody>
-      </p:sp>
-      <p:sp>
-        <p:nvSpPr>
-          <p:cNvPr id="12" name="Rectangle 11"/>
+        <p:txBody>
+          <a:bodyPr rtlCol="0" anchor="ctr" wrap="square" lIns="36576" tIns="0" rIns="36576" bIns="0">
+            <a:noAutofit/>
+          </a:bodyPr>
+          <a:lstStyle/>
+          <a:p>
+            <a:pPr algn="ctr" latinLnBrk="0">
+              <a:lnSpc>
+                <a:spcPct val="100000"/>
+              </a:lnSpc>
+              <a:spcBef>
+                <a:spcPts val="0"/>
+              </a:spcBef>
+              <a:spcAft>
+                <a:spcPts val="200"/>
+              </a:spcAft>
+            </a:pPr>
+            <a:r>
+              <a:rPr sz="1300" b="1">
+                <a:solidFill>
+                  <a:srgbClr val="FFFFFF"/>
+                </a:solidFill>
+                <a:latin typeface="Microsoft YaHei"/>
+                <a:ea typeface="Microsoft YaHei"/>
+                <a:cs typeface="Microsoft YaHei"/>
+              </a:rPr>
+              <a:t>人</a:t>
+            </a:r>
+          </a:p>
+          <a:p>
+            <a:pPr algn="ctr" latinLnBrk="0">
+              <a:lnSpc>
+                <a:spcPct val="100000"/>
+              </a:lnSpc>
+              <a:spcBef>
+                <a:spcPts val="0"/>
+              </a:spcBef>
+              <a:spcAft>
+                <a:spcPts val="0"/>
+              </a:spcAft>
+            </a:pPr>
+            <a:r>
+              <a:rPr sz="850" b="0">
+                <a:solidFill>
+                  <a:srgbClr val="FFFFFF"/>
+                </a:solidFill>
+                <a:latin typeface="Microsoft YaHei"/>
+                <a:ea typeface="Microsoft YaHei"/>
+                <a:cs typeface="Microsoft YaHei"/>
+              </a:rPr>
+              <a:t>三处介入</a:t>
+            </a:r>
+          </a:p>
+        </p:txBody>
+      </p:sp>
+      <p:sp>
+        <p:nvSpPr>
+          <p:cNvPr id="8" name="Rectangle 7"/>
           <p:cNvSpPr/>
           <p:nvPr/>
         </p:nvSpPr>
         <p:spPr>
           <a:xfrm>
-            <a:off x="548640" y="1700784"/>
-            <a:ext cx="2066543" cy="1316736"/>
+            <a:off x="1444752" y="2103120"/>
+            <a:ext cx="10198303" cy="1609343"/>
           </a:xfrm>
           <a:prstGeom prst="rect">
             <a:avLst/>
@@ -30815,7 +30751,7 @@
           </a:solidFill>
           <a:ln w="9525">
             <a:solidFill>
-              <a:srgbClr val="CFE3F0"/>
+              <a:srgbClr val="AFCEE1"/>
             </a:solidFill>
           </a:ln>
         </p:spPr>
@@ -30829,26 +30765,130 @@
       </p:sp>
       <p:sp>
         <p:nvSpPr>
-          <p:cNvPr id="13" name="Rectangle 12"/>
+          <p:cNvPr id="9" name="Rectangle 8"/>
           <p:cNvSpPr/>
           <p:nvPr/>
         </p:nvSpPr>
         <p:spPr>
           <a:xfrm>
-            <a:off x="548640" y="1700784"/>
-            <a:ext cx="64008" cy="1316736"/>
+            <a:off x="548640" y="2103120"/>
+            <a:ext cx="896112" cy="1609343"/>
           </a:xfrm>
           <a:prstGeom prst="rect">
             <a:avLst/>
           </a:prstGeom>
           <a:solidFill>
-            <a:srgbClr val="40708B"/>
+            <a:srgbClr val="D2690C"/>
           </a:solidFill>
-          <a:ln>
-            <a:noFill/>
+          <a:ln w="19050">
+            <a:solidFill>
+              <a:srgbClr val="FFFFFF"/>
+            </a:solidFill>
           </a:ln>
         </p:spPr>
         <p:txBody>
+          <a:bodyPr rtlCol="0" anchor="ctr" wrap="square" lIns="36576" tIns="0" rIns="36576" bIns="0">
+            <a:noAutofit/>
+          </a:bodyPr>
+          <a:lstStyle/>
+          <a:p>
+            <a:pPr algn="ctr" latinLnBrk="0">
+              <a:lnSpc>
+                <a:spcPct val="100000"/>
+              </a:lnSpc>
+              <a:spcBef>
+                <a:spcPts val="0"/>
+              </a:spcBef>
+              <a:spcAft>
+                <a:spcPts val="200"/>
+              </a:spcAft>
+            </a:pPr>
+            <a:r>
+              <a:rPr sz="1300" b="1">
+                <a:solidFill>
+                  <a:srgbClr val="FFFFFF"/>
+                </a:solidFill>
+                <a:latin typeface="Microsoft YaHei"/>
+                <a:ea typeface="Microsoft YaHei"/>
+                <a:cs typeface="Microsoft YaHei"/>
+              </a:rPr>
+              <a:t>规划器</a:t>
+            </a:r>
+          </a:p>
+          <a:p>
+            <a:pPr algn="ctr" latinLnBrk="0">
+              <a:lnSpc>
+                <a:spcPct val="100000"/>
+              </a:lnSpc>
+              <a:spcBef>
+                <a:spcPts val="0"/>
+              </a:spcBef>
+              <a:spcAft>
+                <a:spcPts val="0"/>
+              </a:spcAft>
+            </a:pPr>
+            <a:r>
+              <a:rPr sz="850" b="0">
+                <a:solidFill>
+                  <a:srgbClr val="FFFFFF"/>
+                </a:solidFill>
+                <a:latin typeface="Microsoft YaHei"/>
+                <a:ea typeface="Microsoft YaHei"/>
+                <a:cs typeface="Microsoft YaHei"/>
+              </a:rPr>
+              <a:t>大模型</a:t>
+            </a:r>
+          </a:p>
+          <a:p>
+            <a:pPr algn="ctr" latinLnBrk="0">
+              <a:lnSpc>
+                <a:spcPct val="100000"/>
+              </a:lnSpc>
+              <a:spcBef>
+                <a:spcPts val="0"/>
+              </a:spcBef>
+              <a:spcAft>
+                <a:spcPts val="0"/>
+              </a:spcAft>
+            </a:pPr>
+            <a:r>
+              <a:rPr sz="850" b="0">
+                <a:solidFill>
+                  <a:srgbClr val="FFFFFF"/>
+                </a:solidFill>
+                <a:latin typeface="Microsoft YaHei"/>
+                <a:ea typeface="Microsoft YaHei"/>
+                <a:cs typeface="Microsoft YaHei"/>
+              </a:rPr>
+              <a:t>只提方案</a:t>
+            </a:r>
+          </a:p>
+        </p:txBody>
+      </p:sp>
+      <p:sp>
+        <p:nvSpPr>
+          <p:cNvPr id="10" name="Rectangle 9"/>
+          <p:cNvSpPr/>
+          <p:nvPr/>
+        </p:nvSpPr>
+        <p:spPr>
+          <a:xfrm>
+            <a:off x="1444752" y="3712463"/>
+            <a:ext cx="10198303" cy="2560320"/>
+          </a:xfrm>
+          <a:prstGeom prst="rect">
+            <a:avLst/>
+          </a:prstGeom>
+          <a:solidFill>
+            <a:srgbClr val="F2F8FD"/>
+          </a:solidFill>
+          <a:ln w="9525">
+            <a:solidFill>
+              <a:srgbClr val="AFCEE1"/>
+            </a:solidFill>
+          </a:ln>
+        </p:spPr>
+        <p:txBody>
           <a:bodyPr rtlCol="0" anchor="ctr"/>
           <a:lstStyle/>
           <a:p>
@@ -30858,39 +30898,150 @@
       </p:sp>
       <p:sp>
         <p:nvSpPr>
-          <p:cNvPr id="14" name="TextBox 13"/>
-          <p:cNvSpPr txBox="1"/>
-          <p:nvPr/>
-        </p:nvSpPr>
-        <p:spPr>
-          <a:xfrm>
-            <a:off x="713232" y="1746504"/>
-            <a:ext cx="1792223" cy="1225295"/>
-          </a:xfrm>
-          <a:prstGeom prst="rect">
-            <a:avLst/>
-          </a:prstGeom>
-          <a:noFill/>
-        </p:spPr>
-        <p:txBody>
-          <a:bodyPr wrap="square" anchor="ctr" lIns="0" tIns="0" rIns="0" bIns="0">
-            <a:noAutofit/>
-          </a:bodyPr>
-          <a:lstStyle/>
-          <a:p>
-            <a:pPr algn="l" latinLnBrk="0">
-              <a:lnSpc>
-                <a:spcPct val="100000"/>
-              </a:lnSpc>
-              <a:spcBef>
-                <a:spcPts val="0"/>
-              </a:spcBef>
-              <a:spcAft>
-                <a:spcPts val="300"/>
-              </a:spcAft>
-            </a:pPr>
-            <a:r>
-              <a:rPr sz="1000" b="1">
+          <p:cNvPr id="11" name="Rectangle 10"/>
+          <p:cNvSpPr/>
+          <p:nvPr/>
+        </p:nvSpPr>
+        <p:spPr>
+          <a:xfrm>
+            <a:off x="548640" y="3712463"/>
+            <a:ext cx="896112" cy="2560320"/>
+          </a:xfrm>
+          <a:prstGeom prst="rect">
+            <a:avLst/>
+          </a:prstGeom>
+          <a:solidFill>
+            <a:srgbClr val="0F62CE"/>
+          </a:solidFill>
+          <a:ln w="19050">
+            <a:solidFill>
+              <a:srgbClr val="FFFFFF"/>
+            </a:solidFill>
+          </a:ln>
+        </p:spPr>
+        <p:txBody>
+          <a:bodyPr rtlCol="0" anchor="ctr" wrap="square" lIns="36576" tIns="0" rIns="36576" bIns="0">
+            <a:noAutofit/>
+          </a:bodyPr>
+          <a:lstStyle/>
+          <a:p>
+            <a:pPr algn="ctr" latinLnBrk="0">
+              <a:lnSpc>
+                <a:spcPct val="100000"/>
+              </a:lnSpc>
+              <a:spcBef>
+                <a:spcPts val="0"/>
+              </a:spcBef>
+              <a:spcAft>
+                <a:spcPts val="200"/>
+              </a:spcAft>
+            </a:pPr>
+            <a:r>
+              <a:rPr sz="1300" b="1">
+                <a:solidFill>
+                  <a:srgbClr val="FFFFFF"/>
+                </a:solidFill>
+                <a:latin typeface="Microsoft YaHei"/>
+                <a:ea typeface="Microsoft YaHei"/>
+                <a:cs typeface="Microsoft YaHei"/>
+              </a:rPr>
+              <a:t>控制器</a:t>
+            </a:r>
+          </a:p>
+          <a:p>
+            <a:pPr algn="ctr" latinLnBrk="0">
+              <a:lnSpc>
+                <a:spcPct val="100000"/>
+              </a:lnSpc>
+              <a:spcBef>
+                <a:spcPts val="0"/>
+              </a:spcBef>
+              <a:spcAft>
+                <a:spcPts val="0"/>
+              </a:spcAft>
+            </a:pPr>
+            <a:r>
+              <a:rPr sz="850" b="0">
+                <a:solidFill>
+                  <a:srgbClr val="FFFFFF"/>
+                </a:solidFill>
+                <a:latin typeface="Microsoft YaHei"/>
+                <a:ea typeface="Microsoft YaHei"/>
+                <a:cs typeface="Microsoft YaHei"/>
+              </a:rPr>
+              <a:t>确定性</a:t>
+            </a:r>
+          </a:p>
+          <a:p>
+            <a:pPr algn="ctr" latinLnBrk="0">
+              <a:lnSpc>
+                <a:spcPct val="100000"/>
+              </a:lnSpc>
+              <a:spcBef>
+                <a:spcPts val="0"/>
+              </a:spcBef>
+              <a:spcAft>
+                <a:spcPts val="0"/>
+              </a:spcAft>
+            </a:pPr>
+            <a:r>
+              <a:rPr sz="850" b="0">
+                <a:solidFill>
+                  <a:srgbClr val="FFFFFF"/>
+                </a:solidFill>
+                <a:latin typeface="Microsoft YaHei"/>
+                <a:ea typeface="Microsoft YaHei"/>
+                <a:cs typeface="Microsoft YaHei"/>
+              </a:rPr>
+              <a:t>判定成败</a:t>
+            </a:r>
+          </a:p>
+        </p:txBody>
+      </p:sp>
+      <p:sp>
+        <p:nvSpPr>
+          <p:cNvPr id="12" name="Rounded Rectangle 11"/>
+          <p:cNvSpPr/>
+          <p:nvPr/>
+        </p:nvSpPr>
+        <p:spPr>
+          <a:xfrm>
+            <a:off x="1627632" y="1389888"/>
+            <a:ext cx="1188720" cy="438912"/>
+          </a:xfrm>
+          <a:prstGeom prst="roundRect">
+            <a:avLst>
+              <a:gd name="adj" fmla="val 16666"/>
+            </a:avLst>
+          </a:prstGeom>
+          <a:solidFill>
+            <a:srgbClr val="FFFFFF"/>
+          </a:solidFill>
+          <a:ln w="12700">
+            <a:solidFill>
+              <a:srgbClr val="1B4D69"/>
+            </a:solidFill>
+          </a:ln>
+        </p:spPr>
+        <p:txBody>
+          <a:bodyPr rtlCol="0" anchor="ctr" wrap="square" lIns="54864" tIns="18288" rIns="54864" bIns="18288">
+            <a:noAutofit/>
+          </a:bodyPr>
+          <a:lstStyle/>
+          <a:p>
+            <a:pPr algn="ctr" latinLnBrk="0">
+              <a:lnSpc>
+                <a:spcPct val="100000"/>
+              </a:lnSpc>
+              <a:spcBef>
+                <a:spcPts val="0"/>
+              </a:spcBef>
+              <a:spcAft>
+                <a:spcPts val="0"/>
+              </a:spcAft>
+            </a:pPr>
+            <a:r>
+              <a:rPr sz="1100" b="1">
                 <a:solidFill>
                   <a:srgbClr val="0A2B45"/>
                 </a:solidFill>
@@ -30898,868 +31049,245 @@
                 <a:ea typeface="Microsoft YaHei"/>
                 <a:cs typeface="Microsoft YaHei"/>
               </a:rPr>
-              <a:t>下发 · 冻结契约</a:t>
-            </a:r>
-            <a:r>
-              <a:rPr sz="800" b="1">
-                <a:solidFill>
-                  <a:srgbClr val="40708B"/>
-                </a:solidFill>
-                <a:latin typeface="Microsoft YaHei"/>
-                <a:ea typeface="Microsoft YaHei"/>
-                <a:cs typeface="Microsoft YaHei"/>
-              </a:rPr>
-              <a:t>　人 → Agent</a:t>
-            </a:r>
-          </a:p>
-          <a:p>
-            <a:pPr algn="l" latinLnBrk="0">
-              <a:lnSpc>
-                <a:spcPct val="100000"/>
-              </a:lnSpc>
-              <a:spcBef>
-                <a:spcPts val="0"/>
-              </a:spcBef>
-              <a:spcAft>
-                <a:spcPts val="0"/>
-              </a:spcAft>
-            </a:pPr>
-            <a:r>
-              <a:rPr sz="850" b="1">
-                <a:solidFill>
-                  <a:srgbClr val="123C5B"/>
-                </a:solidFill>
-                <a:latin typeface="Microsoft YaHei"/>
-                <a:ea typeface="Microsoft YaHei"/>
-                <a:cs typeface="Microsoft YaHei"/>
-              </a:rPr>
-              <a:t>·　优化任务</a:t>
-            </a:r>
-          </a:p>
-          <a:p>
-            <a:pPr algn="l" latinLnBrk="0">
-              <a:lnSpc>
-                <a:spcPct val="100000"/>
-              </a:lnSpc>
-              <a:spcBef>
-                <a:spcPts val="0"/>
-              </a:spcBef>
-              <a:spcAft>
-                <a:spcPts val="0"/>
-              </a:spcAft>
-            </a:pPr>
-            <a:r>
-              <a:rPr sz="750" b="0">
-                <a:solidFill>
-                  <a:srgbClr val="0F62CE"/>
-                </a:solidFill>
-                <a:latin typeface="Consolas"/>
-                <a:ea typeface="Microsoft YaHei"/>
-                <a:cs typeface="Microsoft YaHei"/>
-              </a:rPr>
-              <a:t>　　optimization-task.json</a:t>
-            </a:r>
-          </a:p>
-          <a:p>
-            <a:pPr algn="l" latinLnBrk="0">
-              <a:lnSpc>
-                <a:spcPct val="100000"/>
-              </a:lnSpc>
-              <a:spcBef>
-                <a:spcPts val="0"/>
-              </a:spcBef>
-              <a:spcAft>
-                <a:spcPts val="0"/>
-              </a:spcAft>
-            </a:pPr>
-            <a:r>
-              <a:rPr sz="850" b="1">
-                <a:solidFill>
-                  <a:srgbClr val="123C5B"/>
-                </a:solidFill>
-                <a:latin typeface="Microsoft YaHei"/>
-                <a:ea typeface="Microsoft YaHei"/>
-                <a:cs typeface="Microsoft YaHei"/>
-              </a:rPr>
-              <a:t>·　质量契约</a:t>
-            </a:r>
-          </a:p>
-          <a:p>
-            <a:pPr algn="l" latinLnBrk="0">
-              <a:lnSpc>
-                <a:spcPct val="100000"/>
-              </a:lnSpc>
-              <a:spcBef>
-                <a:spcPts val="0"/>
-              </a:spcBef>
-              <a:spcAft>
-                <a:spcPts val="0"/>
-              </a:spcAft>
-            </a:pPr>
-            <a:r>
-              <a:rPr sz="750" b="0">
-                <a:solidFill>
-                  <a:srgbClr val="0F62CE"/>
-                </a:solidFill>
-                <a:latin typeface="Consolas"/>
-                <a:ea typeface="Microsoft YaHei"/>
-                <a:cs typeface="Microsoft YaHei"/>
-              </a:rPr>
-              <a:t>　　generation-task.json</a:t>
-            </a:r>
-          </a:p>
-          <a:p>
-            <a:pPr algn="l" latinLnBrk="0">
-              <a:lnSpc>
-                <a:spcPct val="100000"/>
-              </a:lnSpc>
-              <a:spcBef>
-                <a:spcPts val="0"/>
-              </a:spcBef>
-              <a:spcAft>
-                <a:spcPts val="0"/>
-              </a:spcAft>
-            </a:pPr>
-            <a:r>
-              <a:rPr sz="850" b="1">
-                <a:solidFill>
-                  <a:srgbClr val="123C5B"/>
-                </a:solidFill>
-                <a:latin typeface="Microsoft YaHei"/>
-                <a:ea typeface="Microsoft YaHei"/>
-                <a:cs typeface="Microsoft YaHei"/>
-              </a:rPr>
-              <a:t>·　调优知识</a:t>
-            </a:r>
-          </a:p>
-          <a:p>
-            <a:pPr algn="l" latinLnBrk="0">
-              <a:lnSpc>
-                <a:spcPct val="100000"/>
-              </a:lnSpc>
-              <a:spcBef>
-                <a:spcPts val="0"/>
-              </a:spcBef>
-              <a:spcAft>
-                <a:spcPts val="0"/>
-              </a:spcAft>
-            </a:pPr>
-            <a:r>
-              <a:rPr sz="750" b="0">
-                <a:solidFill>
-                  <a:srgbClr val="0F62CE"/>
-                </a:solidFill>
-                <a:latin typeface="Consolas"/>
-                <a:ea typeface="Microsoft YaHei"/>
-                <a:cs typeface="Microsoft YaHei"/>
-              </a:rPr>
-              <a:t>　　planner-skills/ × 10</a:t>
-            </a:r>
-          </a:p>
-          <a:p>
-            <a:pPr algn="l" latinLnBrk="0">
-              <a:lnSpc>
-                <a:spcPct val="100000"/>
-              </a:lnSpc>
-              <a:spcBef>
-                <a:spcPts val="0"/>
-              </a:spcBef>
-              <a:spcAft>
-                <a:spcPts val="0"/>
-              </a:spcAft>
-            </a:pPr>
-            <a:r>
-              <a:rPr sz="850" b="1">
-                <a:solidFill>
-                  <a:srgbClr val="123C5B"/>
-                </a:solidFill>
-                <a:latin typeface="Microsoft YaHei"/>
-                <a:ea typeface="Microsoft YaHei"/>
-                <a:cs typeface="Microsoft YaHei"/>
-              </a:rPr>
-              <a:t>·　授权边界</a:t>
-            </a:r>
-          </a:p>
-          <a:p>
-            <a:pPr algn="l" latinLnBrk="0">
-              <a:lnSpc>
-                <a:spcPct val="100000"/>
-              </a:lnSpc>
-              <a:spcBef>
-                <a:spcPts val="0"/>
-              </a:spcBef>
-              <a:spcAft>
-                <a:spcPts val="0"/>
-              </a:spcAft>
-            </a:pPr>
-            <a:r>
-              <a:rPr sz="800" b="0">
-                <a:solidFill>
-                  <a:srgbClr val="1B4D69"/>
-                </a:solidFill>
-                <a:latin typeface="Microsoft YaHei"/>
-                <a:ea typeface="Microsoft YaHei"/>
-                <a:cs typeface="Microsoft YaHei"/>
-              </a:rPr>
-              <a:t>　　测试范围 · 可跳过项</a:t>
-            </a:r>
-          </a:p>
-        </p:txBody>
-      </p:sp>
-      <p:sp>
-        <p:nvSpPr>
-          <p:cNvPr id="15" name="Rectangle 14"/>
+              <a:t>下达任务</a:t>
+            </a:r>
+          </a:p>
+        </p:txBody>
+      </p:sp>
+      <p:sp>
+        <p:nvSpPr>
+          <p:cNvPr id="13" name="Rounded Rectangle 12"/>
           <p:cNvSpPr/>
           <p:nvPr/>
         </p:nvSpPr>
         <p:spPr>
           <a:xfrm>
-            <a:off x="548640" y="3127248"/>
-            <a:ext cx="2066543" cy="841248"/>
-          </a:xfrm>
-          <a:prstGeom prst="rect">
-            <a:avLst/>
+            <a:off x="3227832" y="1389888"/>
+            <a:ext cx="1188720" cy="438912"/>
+          </a:xfrm>
+          <a:prstGeom prst="roundRect">
+            <a:avLst>
+              <a:gd name="adj" fmla="val 16666"/>
+            </a:avLst>
+          </a:prstGeom>
+          <a:solidFill>
+            <a:srgbClr val="FFFFFF"/>
+          </a:solidFill>
+          <a:ln w="12700">
+            <a:solidFill>
+              <a:srgbClr val="1B4D69"/>
+            </a:solidFill>
+          </a:ln>
+        </p:spPr>
+        <p:txBody>
+          <a:bodyPr rtlCol="0" anchor="ctr" wrap="square" lIns="54864" tIns="18288" rIns="54864" bIns="18288">
+            <a:noAutofit/>
+          </a:bodyPr>
+          <a:lstStyle/>
+          <a:p>
+            <a:pPr algn="ctr" latinLnBrk="0">
+              <a:lnSpc>
+                <a:spcPct val="100000"/>
+              </a:lnSpc>
+              <a:spcBef>
+                <a:spcPts val="0"/>
+              </a:spcBef>
+              <a:spcAft>
+                <a:spcPts val="0"/>
+              </a:spcAft>
+            </a:pPr>
+            <a:r>
+              <a:rPr sz="1100" b="1">
+                <a:solidFill>
+                  <a:srgbClr val="0A2B45"/>
+                </a:solidFill>
+                <a:latin typeface="Microsoft YaHei"/>
+                <a:ea typeface="Microsoft YaHei"/>
+                <a:cs typeface="Microsoft YaHei"/>
+              </a:rPr>
+              <a:t>按需介入</a:t>
+            </a:r>
+          </a:p>
+        </p:txBody>
+      </p:sp>
+      <p:sp>
+        <p:nvSpPr>
+          <p:cNvPr id="14" name="Rounded Rectangle 13"/>
+          <p:cNvSpPr/>
+          <p:nvPr/>
+        </p:nvSpPr>
+        <p:spPr>
+          <a:xfrm>
+            <a:off x="10314432" y="1389888"/>
+            <a:ext cx="1188720" cy="438912"/>
+          </a:xfrm>
+          <a:prstGeom prst="roundRect">
+            <a:avLst>
+              <a:gd name="adj" fmla="val 16666"/>
+            </a:avLst>
+          </a:prstGeom>
+          <a:solidFill>
+            <a:srgbClr val="FFFFFF"/>
+          </a:solidFill>
+          <a:ln w="12700">
+            <a:solidFill>
+              <a:srgbClr val="1B4D69"/>
+            </a:solidFill>
+          </a:ln>
+        </p:spPr>
+        <p:txBody>
+          <a:bodyPr rtlCol="0" anchor="ctr" wrap="square" lIns="54864" tIns="18288" rIns="54864" bIns="18288">
+            <a:noAutofit/>
+          </a:bodyPr>
+          <a:lstStyle/>
+          <a:p>
+            <a:pPr algn="ctr" latinLnBrk="0">
+              <a:lnSpc>
+                <a:spcPct val="100000"/>
+              </a:lnSpc>
+              <a:spcBef>
+                <a:spcPts val="0"/>
+              </a:spcBef>
+              <a:spcAft>
+                <a:spcPts val="0"/>
+              </a:spcAft>
+            </a:pPr>
+            <a:r>
+              <a:rPr sz="1100" b="1">
+                <a:solidFill>
+                  <a:srgbClr val="0A2B45"/>
+                </a:solidFill>
+                <a:latin typeface="Microsoft YaHei"/>
+                <a:ea typeface="Microsoft YaHei"/>
+                <a:cs typeface="Microsoft YaHei"/>
+              </a:rPr>
+              <a:t>终审验收</a:t>
+            </a:r>
+          </a:p>
+        </p:txBody>
+      </p:sp>
+      <p:sp>
+        <p:nvSpPr>
+          <p:cNvPr id="15" name="Rounded Rectangle 14"/>
+          <p:cNvSpPr/>
+          <p:nvPr/>
+        </p:nvSpPr>
+        <p:spPr>
+          <a:xfrm>
+            <a:off x="2633472" y="2542032"/>
+            <a:ext cx="2377440" cy="731520"/>
+          </a:xfrm>
+          <a:prstGeom prst="roundRect">
+            <a:avLst>
+              <a:gd name="adj" fmla="val 10000"/>
+            </a:avLst>
+          </a:prstGeom>
+          <a:solidFill>
+            <a:srgbClr val="FBE6D4"/>
+          </a:solidFill>
+          <a:ln w="15875">
+            <a:solidFill>
+              <a:srgbClr val="D2690C"/>
+            </a:solidFill>
+          </a:ln>
+        </p:spPr>
+        <p:txBody>
+          <a:bodyPr rtlCol="0" anchor="ctr" wrap="square" lIns="54864" tIns="18288" rIns="54864" bIns="18288">
+            <a:noAutofit/>
+          </a:bodyPr>
+          <a:lstStyle/>
+          <a:p>
+            <a:pPr algn="ctr" latinLnBrk="0">
+              <a:lnSpc>
+                <a:spcPct val="100000"/>
+              </a:lnSpc>
+              <a:spcBef>
+                <a:spcPts val="0"/>
+              </a:spcBef>
+              <a:spcAft>
+                <a:spcPts val="0"/>
+              </a:spcAft>
+            </a:pPr>
+            <a:r>
+              <a:rPr sz="1200" b="1">
+                <a:solidFill>
+                  <a:srgbClr val="0A2B45"/>
+                </a:solidFill>
+                <a:latin typeface="Microsoft YaHei"/>
+                <a:ea typeface="Microsoft YaHei"/>
+                <a:cs typeface="Microsoft YaHei"/>
+              </a:rPr>
+              <a:t>读证据，提方案</a:t>
+            </a:r>
+          </a:p>
+        </p:txBody>
+      </p:sp>
+      <p:sp>
+        <p:nvSpPr>
+          <p:cNvPr id="16" name="Rounded Rectangle 15"/>
+          <p:cNvSpPr/>
+          <p:nvPr/>
+        </p:nvSpPr>
+        <p:spPr>
+          <a:xfrm>
+            <a:off x="7205472" y="2724911"/>
+            <a:ext cx="1005840" cy="365760"/>
+          </a:xfrm>
+          <a:prstGeom prst="roundRect">
+            <a:avLst>
+              <a:gd name="adj" fmla="val 50000"/>
+            </a:avLst>
           </a:prstGeom>
           <a:solidFill>
             <a:srgbClr val="FFFFFF"/>
           </a:solidFill>
           <a:ln w="9525">
             <a:solidFill>
-              <a:srgbClr val="CFE3F0"/>
+              <a:srgbClr val="B4382F"/>
             </a:solidFill>
           </a:ln>
         </p:spPr>
         <p:txBody>
-          <a:bodyPr rtlCol="0" anchor="ctr"/>
-          <a:lstStyle/>
-          <a:p>
-            <a:pPr algn="ctr"/>
-          </a:p>
-        </p:txBody>
-      </p:sp>
-      <p:sp>
-        <p:nvSpPr>
-          <p:cNvPr id="16" name="Rectangle 15"/>
+          <a:bodyPr rtlCol="0" anchor="ctr" wrap="square" lIns="36576" tIns="0" rIns="36576" bIns="0">
+            <a:noAutofit/>
+          </a:bodyPr>
+          <a:lstStyle/>
+          <a:p>
+            <a:pPr algn="ctr" latinLnBrk="0">
+              <a:lnSpc>
+                <a:spcPct val="100000"/>
+              </a:lnSpc>
+              <a:spcBef>
+                <a:spcPts val="0"/>
+              </a:spcBef>
+              <a:spcAft>
+                <a:spcPts val="0"/>
+              </a:spcAft>
+            </a:pPr>
+            <a:r>
+              <a:rPr sz="1000" b="1">
+                <a:solidFill>
+                  <a:srgbClr val="B4382F"/>
+                </a:solidFill>
+                <a:latin typeface="Microsoft YaHei"/>
+                <a:ea typeface="Microsoft YaHei"/>
+                <a:cs typeface="Microsoft YaHei"/>
+              </a:rPr>
+              <a:t>记忆</a:t>
+            </a:r>
+          </a:p>
+        </p:txBody>
+      </p:sp>
+      <p:sp>
+        <p:nvSpPr>
+          <p:cNvPr id="17" name="Rounded Rectangle 16"/>
           <p:cNvSpPr/>
           <p:nvPr/>
         </p:nvSpPr>
         <p:spPr>
           <a:xfrm>
-            <a:off x="548640" y="3127248"/>
-            <a:ext cx="64008" cy="841248"/>
-          </a:xfrm>
-          <a:prstGeom prst="rect">
-            <a:avLst/>
-          </a:prstGeom>
-          <a:solidFill>
-            <a:srgbClr val="D2690C"/>
-          </a:solidFill>
-          <a:ln>
-            <a:noFill/>
-          </a:ln>
-        </p:spPr>
-        <p:txBody>
-          <a:bodyPr rtlCol="0" anchor="ctr"/>
-          <a:lstStyle/>
-          <a:p>
-            <a:pPr algn="ctr"/>
-          </a:p>
-        </p:txBody>
-      </p:sp>
-      <p:sp>
-        <p:nvSpPr>
-          <p:cNvPr id="17" name="TextBox 16"/>
-          <p:cNvSpPr txBox="1"/>
-          <p:nvPr/>
-        </p:nvSpPr>
-        <p:spPr>
-          <a:xfrm>
-            <a:off x="713232" y="3172968"/>
-            <a:ext cx="1792223" cy="749808"/>
-          </a:xfrm>
-          <a:prstGeom prst="rect">
-            <a:avLst/>
-          </a:prstGeom>
-          <a:noFill/>
-        </p:spPr>
-        <p:txBody>
-          <a:bodyPr wrap="square" anchor="ctr" lIns="0" tIns="0" rIns="0" bIns="0">
-            <a:noAutofit/>
-          </a:bodyPr>
-          <a:lstStyle/>
-          <a:p>
-            <a:pPr algn="l" latinLnBrk="0">
-              <a:lnSpc>
-                <a:spcPct val="100000"/>
-              </a:lnSpc>
-              <a:spcBef>
-                <a:spcPts val="0"/>
-              </a:spcBef>
-              <a:spcAft>
-                <a:spcPts val="300"/>
-              </a:spcAft>
-            </a:pPr>
-            <a:r>
-              <a:rPr sz="1000" b="1">
-                <a:solidFill>
-                  <a:srgbClr val="0A2B45"/>
-                </a:solidFill>
-                <a:latin typeface="Microsoft YaHei"/>
-                <a:ea typeface="Microsoft YaHei"/>
-                <a:cs typeface="Microsoft YaHei"/>
-              </a:rPr>
-              <a:t>结对 · 协同补丁</a:t>
-            </a:r>
-            <a:r>
-              <a:rPr sz="800" b="1">
-                <a:solidFill>
-                  <a:srgbClr val="D2690C"/>
-                </a:solidFill>
-                <a:latin typeface="Microsoft YaHei"/>
-                <a:ea typeface="Microsoft YaHei"/>
-                <a:cs typeface="Microsoft YaHei"/>
-              </a:rPr>
-              <a:t>　人 ⇄ 规划器</a:t>
-            </a:r>
-          </a:p>
-          <a:p>
-            <a:pPr algn="l" latinLnBrk="0">
-              <a:lnSpc>
-                <a:spcPct val="100000"/>
-              </a:lnSpc>
-              <a:spcBef>
-                <a:spcPts val="0"/>
-              </a:spcBef>
-              <a:spcAft>
-                <a:spcPts val="0"/>
-              </a:spcAft>
-            </a:pPr>
-            <a:r>
-              <a:rPr sz="850" b="1">
-                <a:solidFill>
-                  <a:srgbClr val="123C5B"/>
-                </a:solidFill>
-                <a:latin typeface="Microsoft YaHei"/>
-                <a:ea typeface="Microsoft YaHei"/>
-                <a:cs typeface="Microsoft YaHei"/>
-              </a:rPr>
-              <a:t>·　复杂改动</a:t>
-            </a:r>
-          </a:p>
-          <a:p>
-            <a:pPr algn="l" latinLnBrk="0">
-              <a:lnSpc>
-                <a:spcPct val="100000"/>
-              </a:lnSpc>
-              <a:spcBef>
-                <a:spcPts val="0"/>
-              </a:spcBef>
-              <a:spcAft>
-                <a:spcPts val="0"/>
-              </a:spcAft>
-            </a:pPr>
-            <a:r>
-              <a:rPr sz="750" b="0">
-                <a:solidFill>
-                  <a:srgbClr val="0F62CE"/>
-                </a:solidFill>
-                <a:latin typeface="Consolas"/>
-                <a:ea typeface="Microsoft YaHei"/>
-                <a:cs typeface="Microsoft YaHei"/>
-              </a:rPr>
-              <a:t>　　changes.patch</a:t>
-            </a:r>
-          </a:p>
-          <a:p>
-            <a:pPr algn="l" latinLnBrk="0">
-              <a:lnSpc>
-                <a:spcPct val="100000"/>
-              </a:lnSpc>
-              <a:spcBef>
-                <a:spcPts val="0"/>
-              </a:spcBef>
-              <a:spcAft>
-                <a:spcPts val="0"/>
-              </a:spcAft>
-            </a:pPr>
-            <a:r>
-              <a:rPr sz="850" b="1">
-                <a:solidFill>
-                  <a:srgbClr val="123C5B"/>
-                </a:solidFill>
-                <a:latin typeface="Microsoft YaHei"/>
-                <a:ea typeface="Microsoft YaHei"/>
-                <a:cs typeface="Microsoft YaHei"/>
-              </a:rPr>
-              <a:t>·　同等准入</a:t>
-            </a:r>
-          </a:p>
-          <a:p>
-            <a:pPr algn="l" latinLnBrk="0">
-              <a:lnSpc>
-                <a:spcPct val="100000"/>
-              </a:lnSpc>
-              <a:spcBef>
-                <a:spcPts val="0"/>
-              </a:spcBef>
-              <a:spcAft>
-                <a:spcPts val="0"/>
-              </a:spcAft>
-            </a:pPr>
-            <a:r>
-              <a:rPr sz="800" b="0">
-                <a:solidFill>
-                  <a:srgbClr val="1B4D69"/>
-                </a:solidFill>
-                <a:latin typeface="Microsoft YaHei"/>
-                <a:ea typeface="Microsoft YaHei"/>
-                <a:cs typeface="Microsoft YaHei"/>
-              </a:rPr>
-              <a:t>　　同样走四道门禁</a:t>
-            </a:r>
-          </a:p>
-        </p:txBody>
-      </p:sp>
-      <p:sp>
-        <p:nvSpPr>
-          <p:cNvPr id="18" name="Rectangle 17"/>
-          <p:cNvSpPr/>
-          <p:nvPr/>
-        </p:nvSpPr>
-        <p:spPr>
-          <a:xfrm>
-            <a:off x="548640" y="4078224"/>
-            <a:ext cx="2066543" cy="1316736"/>
-          </a:xfrm>
-          <a:prstGeom prst="rect">
-            <a:avLst/>
-          </a:prstGeom>
-          <a:solidFill>
-            <a:srgbClr val="FFFFFF"/>
-          </a:solidFill>
-          <a:ln w="9525">
-            <a:solidFill>
-              <a:srgbClr val="CFE3F0"/>
-            </a:solidFill>
-          </a:ln>
-        </p:spPr>
-        <p:txBody>
-          <a:bodyPr rtlCol="0" anchor="ctr"/>
-          <a:lstStyle/>
-          <a:p>
-            <a:pPr algn="ctr"/>
-          </a:p>
-        </p:txBody>
-      </p:sp>
-      <p:sp>
-        <p:nvSpPr>
-          <p:cNvPr id="19" name="Rectangle 18"/>
-          <p:cNvSpPr/>
-          <p:nvPr/>
-        </p:nvSpPr>
-        <p:spPr>
-          <a:xfrm>
-            <a:off x="548640" y="4078224"/>
-            <a:ext cx="64008" cy="1316736"/>
-          </a:xfrm>
-          <a:prstGeom prst="rect">
-            <a:avLst/>
-          </a:prstGeom>
-          <a:solidFill>
-            <a:srgbClr val="40708B"/>
-          </a:solidFill>
-          <a:ln>
-            <a:noFill/>
-          </a:ln>
-        </p:spPr>
-        <p:txBody>
-          <a:bodyPr rtlCol="0" anchor="ctr"/>
-          <a:lstStyle/>
-          <a:p>
-            <a:pPr algn="ctr"/>
-          </a:p>
-        </p:txBody>
-      </p:sp>
-      <p:sp>
-        <p:nvSpPr>
-          <p:cNvPr id="20" name="TextBox 19"/>
-          <p:cNvSpPr txBox="1"/>
-          <p:nvPr/>
-        </p:nvSpPr>
-        <p:spPr>
-          <a:xfrm>
-            <a:off x="713232" y="4123944"/>
-            <a:ext cx="1792223" cy="1225295"/>
-          </a:xfrm>
-          <a:prstGeom prst="rect">
-            <a:avLst/>
-          </a:prstGeom>
-          <a:noFill/>
-        </p:spPr>
-        <p:txBody>
-          <a:bodyPr wrap="square" anchor="ctr" lIns="0" tIns="0" rIns="0" bIns="0">
-            <a:noAutofit/>
-          </a:bodyPr>
-          <a:lstStyle/>
-          <a:p>
-            <a:pPr algn="l" latinLnBrk="0">
-              <a:lnSpc>
-                <a:spcPct val="100000"/>
-              </a:lnSpc>
-              <a:spcBef>
-                <a:spcPts val="0"/>
-              </a:spcBef>
-              <a:spcAft>
-                <a:spcPts val="300"/>
-              </a:spcAft>
-            </a:pPr>
-            <a:r>
-              <a:rPr sz="1000" b="1">
-                <a:solidFill>
-                  <a:srgbClr val="0A2B45"/>
-                </a:solidFill>
-                <a:latin typeface="Microsoft YaHei"/>
-                <a:ea typeface="Microsoft YaHei"/>
-                <a:cs typeface="Microsoft YaHei"/>
-              </a:rPr>
-              <a:t>验收 · 判决报告</a:t>
-            </a:r>
-            <a:r>
-              <a:rPr sz="800" b="1">
-                <a:solidFill>
-                  <a:srgbClr val="40708B"/>
-                </a:solidFill>
-                <a:latin typeface="Microsoft YaHei"/>
-                <a:ea typeface="Microsoft YaHei"/>
-                <a:cs typeface="Microsoft YaHei"/>
-              </a:rPr>
-              <a:t>　Agent → 人</a:t>
-            </a:r>
-          </a:p>
-          <a:p>
-            <a:pPr algn="l" latinLnBrk="0">
-              <a:lnSpc>
-                <a:spcPct val="100000"/>
-              </a:lnSpc>
-              <a:spcBef>
-                <a:spcPts val="0"/>
-              </a:spcBef>
-              <a:spcAft>
-                <a:spcPts val="0"/>
-              </a:spcAft>
-            </a:pPr>
-            <a:r>
-              <a:rPr sz="850" b="1">
-                <a:solidFill>
-                  <a:srgbClr val="123C5B"/>
-                </a:solidFill>
-                <a:latin typeface="Microsoft YaHei"/>
-                <a:ea typeface="Microsoft YaHei"/>
-                <a:cs typeface="Microsoft YaHei"/>
-              </a:rPr>
-              <a:t>·　优化报告</a:t>
-            </a:r>
-          </a:p>
-          <a:p>
-            <a:pPr algn="l" latinLnBrk="0">
-              <a:lnSpc>
-                <a:spcPct val="100000"/>
-              </a:lnSpc>
-              <a:spcBef>
-                <a:spcPts val="0"/>
-              </a:spcBef>
-              <a:spcAft>
-                <a:spcPts val="0"/>
-              </a:spcAft>
-            </a:pPr>
-            <a:r>
-              <a:rPr sz="750" b="0">
-                <a:solidFill>
-                  <a:srgbClr val="0F62CE"/>
-                </a:solidFill>
-                <a:latin typeface="Consolas"/>
-                <a:ea typeface="Microsoft YaHei"/>
-                <a:cs typeface="Microsoft YaHei"/>
-              </a:rPr>
-              <a:t>　　optimization-report.md</a:t>
-            </a:r>
-          </a:p>
-          <a:p>
-            <a:pPr algn="l" latinLnBrk="0">
-              <a:lnSpc>
-                <a:spcPct val="100000"/>
-              </a:lnSpc>
-              <a:spcBef>
-                <a:spcPts val="0"/>
-              </a:spcBef>
-              <a:spcAft>
-                <a:spcPts val="0"/>
-              </a:spcAft>
-            </a:pPr>
-            <a:r>
-              <a:rPr sz="850" b="1">
-                <a:solidFill>
-                  <a:srgbClr val="123C5B"/>
-                </a:solidFill>
-                <a:latin typeface="Microsoft YaHei"/>
-                <a:ea typeface="Microsoft YaHei"/>
-                <a:cs typeface="Microsoft YaHei"/>
-              </a:rPr>
-              <a:t>·　最优版本</a:t>
-            </a:r>
-          </a:p>
-          <a:p>
-            <a:pPr algn="l" latinLnBrk="0">
-              <a:lnSpc>
-                <a:spcPct val="100000"/>
-              </a:lnSpc>
-              <a:spcBef>
-                <a:spcPts val="0"/>
-              </a:spcBef>
-              <a:spcAft>
-                <a:spcPts val="0"/>
-              </a:spcAft>
-            </a:pPr>
-            <a:r>
-              <a:rPr sz="750" b="0">
-                <a:solidFill>
-                  <a:srgbClr val="0F62CE"/>
-                </a:solidFill>
-                <a:latin typeface="Consolas"/>
-                <a:ea typeface="Microsoft YaHei"/>
-                <a:cs typeface="Microsoft YaHei"/>
-              </a:rPr>
-              <a:t>　　best.json</a:t>
-            </a:r>
-          </a:p>
-          <a:p>
-            <a:pPr algn="l" latinLnBrk="0">
-              <a:lnSpc>
-                <a:spcPct val="100000"/>
-              </a:lnSpc>
-              <a:spcBef>
-                <a:spcPts val="0"/>
-              </a:spcBef>
-              <a:spcAft>
-                <a:spcPts val="0"/>
-              </a:spcAft>
-            </a:pPr>
-            <a:r>
-              <a:rPr sz="850" b="1">
-                <a:solidFill>
-                  <a:srgbClr val="123C5B"/>
-                </a:solidFill>
-                <a:latin typeface="Microsoft YaHei"/>
-                <a:ea typeface="Microsoft YaHei"/>
-                <a:cs typeface="Microsoft YaHei"/>
-              </a:rPr>
-              <a:t>·　证据链</a:t>
-            </a:r>
-          </a:p>
-          <a:p>
-            <a:pPr algn="l" latinLnBrk="0">
-              <a:lnSpc>
-                <a:spcPct val="100000"/>
-              </a:lnSpc>
-              <a:spcBef>
-                <a:spcPts val="0"/>
-              </a:spcBef>
-              <a:spcAft>
-                <a:spcPts val="0"/>
-              </a:spcAft>
-            </a:pPr>
-            <a:r>
-              <a:rPr sz="750" b="0">
-                <a:solidFill>
-                  <a:srgbClr val="0F62CE"/>
-                </a:solidFill>
-                <a:latin typeface="Consolas"/>
-                <a:ea typeface="Microsoft YaHei"/>
-                <a:cs typeface="Microsoft YaHei"/>
-              </a:rPr>
-              <a:t>　　attempts/ · planner/</a:t>
-            </a:r>
-          </a:p>
-          <a:p>
-            <a:pPr algn="l" latinLnBrk="0">
-              <a:lnSpc>
-                <a:spcPct val="100000"/>
-              </a:lnSpc>
-              <a:spcBef>
-                <a:spcPts val="0"/>
-              </a:spcBef>
-              <a:spcAft>
-                <a:spcPts val="0"/>
-              </a:spcAft>
-            </a:pPr>
-            <a:r>
-              <a:rPr sz="850" b="1">
-                <a:solidFill>
-                  <a:srgbClr val="123C5B"/>
-                </a:solidFill>
-                <a:latin typeface="Microsoft YaHei"/>
-                <a:ea typeface="Microsoft YaHei"/>
-                <a:cs typeface="Microsoft YaHei"/>
-              </a:rPr>
-              <a:t>·　边界声明</a:t>
-            </a:r>
-          </a:p>
-          <a:p>
-            <a:pPr algn="l" latinLnBrk="0">
-              <a:lnSpc>
-                <a:spcPct val="100000"/>
-              </a:lnSpc>
-              <a:spcBef>
-                <a:spcPts val="0"/>
-              </a:spcBef>
-              <a:spcAft>
-                <a:spcPts val="0"/>
-              </a:spcAft>
-            </a:pPr>
-            <a:r>
-              <a:rPr sz="800" b="0">
-                <a:solidFill>
-                  <a:srgbClr val="1B4D69"/>
-                </a:solidFill>
-                <a:latin typeface="Microsoft YaHei"/>
-                <a:ea typeface="Microsoft YaHei"/>
-                <a:cs typeface="Microsoft YaHei"/>
-              </a:rPr>
-              <a:t>　　自检异常 · 适用范围</a:t>
-            </a:r>
-          </a:p>
-        </p:txBody>
-      </p:sp>
-      <p:sp>
-        <p:nvSpPr>
-          <p:cNvPr id="21" name="Rounded Rectangle 20"/>
-          <p:cNvSpPr/>
-          <p:nvPr/>
-        </p:nvSpPr>
-        <p:spPr>
-          <a:xfrm>
-            <a:off x="2761488" y="1225296"/>
-            <a:ext cx="4206240" cy="4315968"/>
-          </a:xfrm>
-          <a:prstGeom prst="roundRect">
-            <a:avLst>
-              <a:gd name="adj" fmla="val 2000"/>
-            </a:avLst>
-          </a:prstGeom>
-          <a:solidFill>
-            <a:srgbClr val="F2F8FD"/>
-          </a:solidFill>
-          <a:ln w="12700">
-            <a:solidFill>
-              <a:srgbClr val="7FA4BA"/>
-            </a:solidFill>
-          </a:ln>
-        </p:spPr>
-        <p:txBody>
-          <a:bodyPr rtlCol="0" anchor="ctr"/>
-          <a:lstStyle/>
-          <a:p>
-            <a:pPr algn="ctr"/>
-          </a:p>
-        </p:txBody>
-      </p:sp>
-      <p:sp>
-        <p:nvSpPr>
-          <p:cNvPr id="22" name="Rectangle 21"/>
-          <p:cNvSpPr/>
-          <p:nvPr/>
-        </p:nvSpPr>
-        <p:spPr>
-          <a:xfrm>
-            <a:off x="2889504" y="1316736"/>
-            <a:ext cx="54864" cy="237744"/>
-          </a:xfrm>
-          <a:prstGeom prst="rect">
-            <a:avLst/>
-          </a:prstGeom>
-          <a:solidFill>
-            <a:srgbClr val="7FA4BA"/>
-          </a:solidFill>
-          <a:ln>
-            <a:noFill/>
-          </a:ln>
-        </p:spPr>
-        <p:txBody>
-          <a:bodyPr rtlCol="0" anchor="ctr"/>
-          <a:lstStyle/>
-          <a:p>
-            <a:pPr algn="ctr"/>
-          </a:p>
-        </p:txBody>
-      </p:sp>
-      <p:sp>
-        <p:nvSpPr>
-          <p:cNvPr id="23" name="TextBox 22"/>
-          <p:cNvSpPr txBox="1"/>
-          <p:nvPr/>
-        </p:nvSpPr>
-        <p:spPr>
-          <a:xfrm>
-            <a:off x="2999232" y="1280160"/>
-            <a:ext cx="3840479" cy="310896"/>
-          </a:xfrm>
-          <a:prstGeom prst="rect">
-            <a:avLst/>
-          </a:prstGeom>
-          <a:noFill/>
-        </p:spPr>
-        <p:txBody>
-          <a:bodyPr wrap="square" anchor="ctr" lIns="0" tIns="0" rIns="0" bIns="0">
-            <a:noAutofit/>
-          </a:bodyPr>
-          <a:lstStyle/>
-          <a:p>
-            <a:pPr algn="l" latinLnBrk="0">
-              <a:lnSpc>
-                <a:spcPct val="100000"/>
-              </a:lnSpc>
-              <a:spcBef>
-                <a:spcPts val="0"/>
-              </a:spcBef>
-              <a:spcAft>
-                <a:spcPts val="0"/>
-              </a:spcAft>
-            </a:pPr>
-            <a:r>
-              <a:rPr sz="1100" b="1">
-                <a:solidFill>
-                  <a:srgbClr val="0A2B45"/>
-                </a:solidFill>
-                <a:latin typeface="Microsoft YaHei"/>
-                <a:ea typeface="Microsoft YaHei"/>
-                <a:cs typeface="Microsoft YaHei"/>
-              </a:rPr>
-              <a:t>外环 · 确定性控制器</a:t>
-            </a:r>
-            <a:r>
-              <a:rPr sz="850" b="1">
-                <a:solidFill>
-                  <a:srgbClr val="7FA4BA"/>
-                </a:solidFill>
-                <a:latin typeface="Microsoft YaHei"/>
-                <a:ea typeface="Microsoft YaHei"/>
-                <a:cs typeface="Microsoft YaHei"/>
-              </a:rPr>
-              <a:t>　无模型 · 规则判决 · 逐轮核验</a:t>
-            </a:r>
-          </a:p>
-        </p:txBody>
-      </p:sp>
-      <p:sp>
-        <p:nvSpPr>
-          <p:cNvPr id="24" name="Rounded Rectangle 23"/>
-          <p:cNvSpPr/>
-          <p:nvPr/>
-        </p:nvSpPr>
-        <p:spPr>
-          <a:xfrm>
-            <a:off x="3054096" y="1700784"/>
-            <a:ext cx="1316736" cy="731520"/>
+            <a:off x="1627632" y="4443984"/>
+            <a:ext cx="1371600" cy="731520"/>
           </a:xfrm>
           <a:prstGeom prst="roundRect">
             <a:avLst>
@@ -31767,7 +31295,7 @@
             </a:avLst>
           </a:prstGeom>
           <a:solidFill>
-            <a:srgbClr val="E6F0FC"/>
+            <a:srgbClr val="FFFFFF"/>
           </a:solidFill>
           <a:ln w="12700">
             <a:solidFill>
@@ -31776,7 +31304,7 @@
           </a:ln>
         </p:spPr>
         <p:txBody>
-          <a:bodyPr rtlCol="0" anchor="ctr" wrap="square" tIns="36576" bIns="36576">
+          <a:bodyPr rtlCol="0" anchor="ctr" wrap="square" lIns="54864" tIns="18288" rIns="54864" bIns="18288">
             <a:noAutofit/>
           </a:bodyPr>
           <a:lstStyle/>
@@ -31793,7 +31321,7 @@
               </a:spcAft>
             </a:pPr>
             <a:r>
-              <a:rPr sz="1000" b="1">
+              <a:rPr sz="1200" b="1">
                 <a:solidFill>
                   <a:srgbClr val="0A2B45"/>
                 </a:solidFill>
@@ -31801,7 +31329,7 @@
                 <a:ea typeface="Microsoft YaHei"/>
                 <a:cs typeface="Microsoft YaHei"/>
               </a:rPr>
-              <a:t>状态机与编排</a:t>
+              <a:t>取证找瓶颈</a:t>
             </a:r>
           </a:p>
           <a:p>
@@ -31813,35 +31341,11 @@
                 <a:spcPts val="0"/>
               </a:spcBef>
               <a:spcAft>
-                <a:spcPts val="200"/>
-              </a:spcAft>
-            </a:pPr>
-            <a:r>
-              <a:rPr sz="750" b="0">
-                <a:solidFill>
-                  <a:srgbClr val="0F62CE"/>
-                </a:solidFill>
-                <a:latin typeface="Consolas"/>
-                <a:ea typeface="Microsoft YaHei"/>
-                <a:cs typeface="Microsoft YaHei"/>
-              </a:rPr>
-              <a:t>optimization.py</a:t>
-            </a:r>
-          </a:p>
-          <a:p>
-            <a:pPr algn="ctr" latinLnBrk="0">
-              <a:lnSpc>
-                <a:spcPct val="100000"/>
-              </a:lnSpc>
-              <a:spcBef>
-                <a:spcPts val="0"/>
-              </a:spcBef>
-              <a:spcAft>
-                <a:spcPts val="0"/>
-              </a:spcAft>
-            </a:pPr>
-            <a:r>
-              <a:rPr sz="800" b="0">
+                <a:spcPts val="0"/>
+              </a:spcAft>
+            </a:pPr>
+            <a:r>
+              <a:rPr sz="850" b="0">
                 <a:solidFill>
                   <a:srgbClr val="1B4D69"/>
                 </a:solidFill>
@@ -31849,49 +31353,1390 @@
                 <a:ea typeface="Microsoft YaHei"/>
                 <a:cs typeface="Microsoft YaHei"/>
               </a:rPr>
-              <a:t>设备锁 · 状态流转</a:t>
-            </a:r>
-          </a:p>
-          <a:p>
-            <a:pPr algn="ctr" latinLnBrk="0">
-              <a:lnSpc>
-                <a:spcPct val="100000"/>
-              </a:lnSpc>
-              <a:spcBef>
-                <a:spcPts val="0"/>
-              </a:spcBef>
-              <a:spcAft>
-                <a:spcPts val="0"/>
-              </a:spcAft>
-            </a:pPr>
-            <a:r>
-              <a:rPr sz="800" b="0">
-                <a:solidFill>
-                  <a:srgbClr val="1B4D69"/>
-                </a:solidFill>
-                <a:latin typeface="Microsoft YaHei"/>
-                <a:ea typeface="Microsoft YaHei"/>
-                <a:cs typeface="Microsoft YaHei"/>
-              </a:rPr>
-              <a:t>中断恢复 · 版本晋升</a:t>
-            </a:r>
-          </a:p>
-        </p:txBody>
-      </p:sp>
-      <p:sp>
-        <p:nvSpPr>
-          <p:cNvPr id="25" name="Rounded Rectangle 24"/>
+              <a:t>对比理论下界</a:t>
+            </a:r>
+          </a:p>
+        </p:txBody>
+      </p:sp>
+      <p:sp>
+        <p:nvSpPr>
+          <p:cNvPr id="18" name="Rounded Rectangle 17"/>
           <p:cNvSpPr/>
           <p:nvPr/>
         </p:nvSpPr>
         <p:spPr>
           <a:xfrm>
-            <a:off x="4956048" y="1645919"/>
-            <a:ext cx="1554480" cy="621792"/>
+            <a:off x="4005072" y="4443984"/>
+            <a:ext cx="1188720" cy="731520"/>
           </a:xfrm>
           <a:prstGeom prst="roundRect">
             <a:avLst>
-              <a:gd name="adj" fmla="val 11764"/>
+              <a:gd name="adj" fmla="val 10000"/>
+            </a:avLst>
+          </a:prstGeom>
+          <a:solidFill>
+            <a:srgbClr val="FFFFFF"/>
+          </a:solidFill>
+          <a:ln w="12700">
+            <a:solidFill>
+              <a:srgbClr val="0F62CE"/>
+            </a:solidFill>
+          </a:ln>
+        </p:spPr>
+        <p:txBody>
+          <a:bodyPr rtlCol="0" anchor="ctr" wrap="square" lIns="54864" tIns="18288" rIns="54864" bIns="18288">
+            <a:noAutofit/>
+          </a:bodyPr>
+          <a:lstStyle/>
+          <a:p>
+            <a:pPr algn="ctr" latinLnBrk="0">
+              <a:lnSpc>
+                <a:spcPct val="100000"/>
+              </a:lnSpc>
+              <a:spcBef>
+                <a:spcPts val="0"/>
+              </a:spcBef>
+              <a:spcAft>
+                <a:spcPts val="0"/>
+              </a:spcAft>
+            </a:pPr>
+            <a:r>
+              <a:rPr sz="1200" b="1">
+                <a:solidFill>
+                  <a:srgbClr val="0A2B45"/>
+                </a:solidFill>
+                <a:latin typeface="Microsoft YaHei"/>
+                <a:ea typeface="Microsoft YaHei"/>
+                <a:cs typeface="Microsoft YaHei"/>
+              </a:rPr>
+              <a:t>建版实测</a:t>
+            </a:r>
+          </a:p>
+          <a:p>
+            <a:pPr algn="ctr" latinLnBrk="0">
+              <a:lnSpc>
+                <a:spcPct val="100000"/>
+              </a:lnSpc>
+              <a:spcBef>
+                <a:spcPts val="0"/>
+              </a:spcBef>
+              <a:spcAft>
+                <a:spcPts val="0"/>
+              </a:spcAft>
+            </a:pPr>
+            <a:r>
+              <a:rPr sz="850" b="0">
+                <a:solidFill>
+                  <a:srgbClr val="1B4D69"/>
+                </a:solidFill>
+                <a:latin typeface="Microsoft YaHei"/>
+                <a:ea typeface="Microsoft YaHei"/>
+                <a:cs typeface="Microsoft YaHei"/>
+              </a:rPr>
+              <a:t>M100 真机</a:t>
+            </a:r>
+          </a:p>
+        </p:txBody>
+      </p:sp>
+      <p:sp>
+        <p:nvSpPr>
+          <p:cNvPr id="19" name="Rounded Rectangle 18"/>
+          <p:cNvSpPr/>
+          <p:nvPr/>
+        </p:nvSpPr>
+        <p:spPr>
+          <a:xfrm>
+            <a:off x="10268712" y="4443984"/>
+            <a:ext cx="1280160" cy="731520"/>
+          </a:xfrm>
+          <a:prstGeom prst="roundRect">
+            <a:avLst>
+              <a:gd name="adj" fmla="val 10000"/>
+            </a:avLst>
+          </a:prstGeom>
+          <a:solidFill>
+            <a:srgbClr val="FFFFFF"/>
+          </a:solidFill>
+          <a:ln w="15875">
+            <a:solidFill>
+              <a:srgbClr val="17795F"/>
+            </a:solidFill>
+          </a:ln>
+        </p:spPr>
+        <p:txBody>
+          <a:bodyPr rtlCol="0" anchor="ctr" wrap="square" lIns="54864" tIns="18288" rIns="54864" bIns="18288">
+            <a:noAutofit/>
+          </a:bodyPr>
+          <a:lstStyle/>
+          <a:p>
+            <a:pPr algn="ctr" latinLnBrk="0">
+              <a:lnSpc>
+                <a:spcPct val="100000"/>
+              </a:lnSpc>
+              <a:spcBef>
+                <a:spcPts val="0"/>
+              </a:spcBef>
+              <a:spcAft>
+                <a:spcPts val="0"/>
+              </a:spcAft>
+            </a:pPr>
+            <a:r>
+              <a:rPr sz="1200" b="1">
+                <a:solidFill>
+                  <a:srgbClr val="0A2B45"/>
+                </a:solidFill>
+                <a:latin typeface="Microsoft YaHei"/>
+                <a:ea typeface="Microsoft YaHei"/>
+                <a:cs typeface="Microsoft YaHei"/>
+              </a:rPr>
+              <a:t>晋升新基线</a:t>
+            </a:r>
+          </a:p>
+        </p:txBody>
+      </p:sp>
+      <p:sp>
+        <p:nvSpPr>
+          <p:cNvPr id="20" name="Diamond 19"/>
+          <p:cNvSpPr/>
+          <p:nvPr/>
+        </p:nvSpPr>
+        <p:spPr>
+          <a:xfrm>
+            <a:off x="5468112" y="4425696"/>
+            <a:ext cx="914400" cy="768096"/>
+          </a:xfrm>
+          <a:prstGeom prst="diamond">
+            <a:avLst/>
+          </a:prstGeom>
+          <a:solidFill>
+            <a:srgbClr val="FFFFFF"/>
+          </a:solidFill>
+          <a:ln w="15875">
+            <a:solidFill>
+              <a:srgbClr val="0F62CE"/>
+            </a:solidFill>
+          </a:ln>
+        </p:spPr>
+        <p:txBody>
+          <a:bodyPr rtlCol="0" anchor="ctr"/>
+          <a:lstStyle/>
+          <a:p>
+            <a:pPr algn="ctr"/>
+          </a:p>
+        </p:txBody>
+      </p:sp>
+      <p:sp>
+        <p:nvSpPr>
+          <p:cNvPr id="21" name="TextBox 20"/>
+          <p:cNvSpPr txBox="1"/>
+          <p:nvPr/>
+        </p:nvSpPr>
+        <p:spPr>
+          <a:xfrm>
+            <a:off x="5504688" y="4590288"/>
+            <a:ext cx="841248" cy="438912"/>
+          </a:xfrm>
+          <a:prstGeom prst="rect">
+            <a:avLst/>
+          </a:prstGeom>
+          <a:noFill/>
+        </p:spPr>
+        <p:txBody>
+          <a:bodyPr wrap="square" anchor="ctr" lIns="0" tIns="0" rIns="0" bIns="0">
+            <a:noAutofit/>
+          </a:bodyPr>
+          <a:lstStyle/>
+          <a:p>
+            <a:pPr algn="ctr" latinLnBrk="0">
+              <a:lnSpc>
+                <a:spcPct val="100000"/>
+              </a:lnSpc>
+              <a:spcBef>
+                <a:spcPts val="0"/>
+              </a:spcBef>
+              <a:spcAft>
+                <a:spcPts val="0"/>
+              </a:spcAft>
+            </a:pPr>
+            <a:r>
+              <a:rPr sz="900" b="1">
+                <a:solidFill>
+                  <a:srgbClr val="0A2B45"/>
+                </a:solidFill>
+                <a:latin typeface="Microsoft YaHei"/>
+                <a:ea typeface="Microsoft YaHei"/>
+                <a:cs typeface="Microsoft YaHei"/>
+              </a:rPr>
+              <a:t>局部提速</a:t>
+            </a:r>
+          </a:p>
+          <a:p>
+            <a:pPr algn="ctr" latinLnBrk="0">
+              <a:lnSpc>
+                <a:spcPct val="100000"/>
+              </a:lnSpc>
+              <a:spcBef>
+                <a:spcPts val="0"/>
+              </a:spcBef>
+              <a:spcAft>
+                <a:spcPts val="0"/>
+              </a:spcAft>
+            </a:pPr>
+            <a:r>
+              <a:rPr sz="800" b="1">
+                <a:solidFill>
+                  <a:srgbClr val="0F62CE"/>
+                </a:solidFill>
+                <a:latin typeface="Microsoft YaHei"/>
+                <a:ea typeface="Microsoft YaHei"/>
+                <a:cs typeface="Microsoft YaHei"/>
+              </a:rPr>
+              <a:t>≥ 2%</a:t>
+            </a:r>
+          </a:p>
+        </p:txBody>
+      </p:sp>
+      <p:cxnSp>
+        <p:nvCxnSpPr>
+          <p:cNvPr id="22" name="Connector 21"/>
+          <p:cNvCxnSpPr/>
+          <p:nvPr/>
+        </p:nvCxnSpPr>
+        <p:spPr>
+          <a:xfrm>
+            <a:off x="5221224" y="4809744"/>
+            <a:ext cx="219456" cy="0"/>
+          </a:xfrm>
+          <a:prstGeom prst="line">
+            <a:avLst/>
+          </a:prstGeom>
+          <a:ln w="19050">
+            <a:solidFill>
+              <a:srgbClr val="0F62CE"/>
+            </a:solidFill>
+            <a:tailEnd type="triangle" w="med" len="med"/>
+          </a:ln>
+        </p:spPr>
+      </p:cxnSp>
+      <p:sp>
+        <p:nvSpPr>
+          <p:cNvPr id="23" name="Diamond 22"/>
+          <p:cNvSpPr/>
+          <p:nvPr/>
+        </p:nvSpPr>
+        <p:spPr>
+          <a:xfrm>
+            <a:off x="6656832" y="4425696"/>
+            <a:ext cx="914400" cy="768096"/>
+          </a:xfrm>
+          <a:prstGeom prst="diamond">
+            <a:avLst/>
+          </a:prstGeom>
+          <a:solidFill>
+            <a:srgbClr val="FFFFFF"/>
+          </a:solidFill>
+          <a:ln w="15875">
+            <a:solidFill>
+              <a:srgbClr val="0F62CE"/>
+            </a:solidFill>
+          </a:ln>
+        </p:spPr>
+        <p:txBody>
+          <a:bodyPr rtlCol="0" anchor="ctr"/>
+          <a:lstStyle/>
+          <a:p>
+            <a:pPr algn="ctr"/>
+          </a:p>
+        </p:txBody>
+      </p:sp>
+      <p:sp>
+        <p:nvSpPr>
+          <p:cNvPr id="24" name="TextBox 23"/>
+          <p:cNvSpPr txBox="1"/>
+          <p:nvPr/>
+        </p:nvSpPr>
+        <p:spPr>
+          <a:xfrm>
+            <a:off x="6693408" y="4590288"/>
+            <a:ext cx="841248" cy="438912"/>
+          </a:xfrm>
+          <a:prstGeom prst="rect">
+            <a:avLst/>
+          </a:prstGeom>
+          <a:noFill/>
+        </p:spPr>
+        <p:txBody>
+          <a:bodyPr wrap="square" anchor="ctr" lIns="0" tIns="0" rIns="0" bIns="0">
+            <a:noAutofit/>
+          </a:bodyPr>
+          <a:lstStyle/>
+          <a:p>
+            <a:pPr algn="ctr" latinLnBrk="0">
+              <a:lnSpc>
+                <a:spcPct val="100000"/>
+              </a:lnSpc>
+              <a:spcBef>
+                <a:spcPts val="0"/>
+              </a:spcBef>
+              <a:spcAft>
+                <a:spcPts val="0"/>
+              </a:spcAft>
+            </a:pPr>
+            <a:r>
+              <a:rPr sz="900" b="1">
+                <a:solidFill>
+                  <a:srgbClr val="0A2B45"/>
+                </a:solidFill>
+                <a:latin typeface="Microsoft YaHei"/>
+                <a:ea typeface="Microsoft YaHei"/>
+                <a:cs typeface="Microsoft YaHei"/>
+              </a:rPr>
+              <a:t>数值误差</a:t>
+            </a:r>
+          </a:p>
+          <a:p>
+            <a:pPr algn="ctr" latinLnBrk="0">
+              <a:lnSpc>
+                <a:spcPct val="100000"/>
+              </a:lnSpc>
+              <a:spcBef>
+                <a:spcPts val="0"/>
+              </a:spcBef>
+              <a:spcAft>
+                <a:spcPts val="0"/>
+              </a:spcAft>
+            </a:pPr>
+            <a:r>
+              <a:rPr sz="800" b="1">
+                <a:solidFill>
+                  <a:srgbClr val="0F62CE"/>
+                </a:solidFill>
+                <a:latin typeface="Microsoft YaHei"/>
+                <a:ea typeface="Microsoft YaHei"/>
+                <a:cs typeface="Microsoft YaHei"/>
+              </a:rPr>
+              <a:t>≤ 0.03</a:t>
+            </a:r>
+          </a:p>
+        </p:txBody>
+      </p:sp>
+      <p:cxnSp>
+        <p:nvCxnSpPr>
+          <p:cNvPr id="25" name="Connector 24"/>
+          <p:cNvCxnSpPr/>
+          <p:nvPr/>
+        </p:nvCxnSpPr>
+        <p:spPr>
+          <a:xfrm>
+            <a:off x="6409944" y="4809744"/>
+            <a:ext cx="219456" cy="0"/>
+          </a:xfrm>
+          <a:prstGeom prst="line">
+            <a:avLst/>
+          </a:prstGeom>
+          <a:ln w="19050">
+            <a:solidFill>
+              <a:srgbClr val="0F62CE"/>
+            </a:solidFill>
+            <a:tailEnd type="triangle" w="med" len="med"/>
+          </a:ln>
+        </p:spPr>
+      </p:cxnSp>
+      <p:sp>
+        <p:nvSpPr>
+          <p:cNvPr id="26" name="Diamond 25"/>
+          <p:cNvSpPr/>
+          <p:nvPr/>
+        </p:nvSpPr>
+        <p:spPr>
+          <a:xfrm>
+            <a:off x="7845552" y="4425696"/>
+            <a:ext cx="914400" cy="768096"/>
+          </a:xfrm>
+          <a:prstGeom prst="diamond">
+            <a:avLst/>
+          </a:prstGeom>
+          <a:solidFill>
+            <a:srgbClr val="FFFFFF"/>
+          </a:solidFill>
+          <a:ln w="15875">
+            <a:solidFill>
+              <a:srgbClr val="0F62CE"/>
+            </a:solidFill>
+          </a:ln>
+        </p:spPr>
+        <p:txBody>
+          <a:bodyPr rtlCol="0" anchor="ctr"/>
+          <a:lstStyle/>
+          <a:p>
+            <a:pPr algn="ctr"/>
+          </a:p>
+        </p:txBody>
+      </p:sp>
+      <p:sp>
+        <p:nvSpPr>
+          <p:cNvPr id="27" name="TextBox 26"/>
+          <p:cNvSpPr txBox="1"/>
+          <p:nvPr/>
+        </p:nvSpPr>
+        <p:spPr>
+          <a:xfrm>
+            <a:off x="7882127" y="4590288"/>
+            <a:ext cx="841248" cy="438912"/>
+          </a:xfrm>
+          <a:prstGeom prst="rect">
+            <a:avLst/>
+          </a:prstGeom>
+          <a:noFill/>
+        </p:spPr>
+        <p:txBody>
+          <a:bodyPr wrap="square" anchor="ctr" lIns="0" tIns="0" rIns="0" bIns="0">
+            <a:noAutofit/>
+          </a:bodyPr>
+          <a:lstStyle/>
+          <a:p>
+            <a:pPr algn="ctr" latinLnBrk="0">
+              <a:lnSpc>
+                <a:spcPct val="100000"/>
+              </a:lnSpc>
+              <a:spcBef>
+                <a:spcPts val="0"/>
+              </a:spcBef>
+              <a:spcAft>
+                <a:spcPts val="0"/>
+              </a:spcAft>
+            </a:pPr>
+            <a:r>
+              <a:rPr sz="900" b="1">
+                <a:solidFill>
+                  <a:srgbClr val="0A2B45"/>
+                </a:solidFill>
+                <a:latin typeface="Microsoft YaHei"/>
+                <a:ea typeface="Microsoft YaHei"/>
+                <a:cs typeface="Microsoft YaHei"/>
+              </a:rPr>
+              <a:t>质量得分</a:t>
+            </a:r>
+          </a:p>
+          <a:p>
+            <a:pPr algn="ctr" latinLnBrk="0">
+              <a:lnSpc>
+                <a:spcPct val="100000"/>
+              </a:lnSpc>
+              <a:spcBef>
+                <a:spcPts val="0"/>
+              </a:spcBef>
+              <a:spcAft>
+                <a:spcPts val="0"/>
+              </a:spcAft>
+            </a:pPr>
+            <a:r>
+              <a:rPr sz="800" b="1">
+                <a:solidFill>
+                  <a:srgbClr val="0F62CE"/>
+                </a:solidFill>
+                <a:latin typeface="Microsoft YaHei"/>
+                <a:ea typeface="Microsoft YaHei"/>
+                <a:cs typeface="Microsoft YaHei"/>
+              </a:rPr>
+              <a:t>不降</a:t>
+            </a:r>
+          </a:p>
+        </p:txBody>
+      </p:sp>
+      <p:cxnSp>
+        <p:nvCxnSpPr>
+          <p:cNvPr id="28" name="Connector 27"/>
+          <p:cNvCxnSpPr/>
+          <p:nvPr/>
+        </p:nvCxnSpPr>
+        <p:spPr>
+          <a:xfrm>
+            <a:off x="7598664" y="4809744"/>
+            <a:ext cx="219456" cy="0"/>
+          </a:xfrm>
+          <a:prstGeom prst="line">
+            <a:avLst/>
+          </a:prstGeom>
+          <a:ln w="19050">
+            <a:solidFill>
+              <a:srgbClr val="0F62CE"/>
+            </a:solidFill>
+            <a:tailEnd type="triangle" w="med" len="med"/>
+          </a:ln>
+        </p:spPr>
+      </p:cxnSp>
+      <p:sp>
+        <p:nvSpPr>
+          <p:cNvPr id="29" name="Diamond 28"/>
+          <p:cNvSpPr/>
+          <p:nvPr/>
+        </p:nvSpPr>
+        <p:spPr>
+          <a:xfrm>
+            <a:off x="9034272" y="4425696"/>
+            <a:ext cx="914400" cy="768096"/>
+          </a:xfrm>
+          <a:prstGeom prst="diamond">
+            <a:avLst/>
+          </a:prstGeom>
+          <a:solidFill>
+            <a:srgbClr val="FFFFFF"/>
+          </a:solidFill>
+          <a:ln w="15875">
+            <a:solidFill>
+              <a:srgbClr val="0F62CE"/>
+            </a:solidFill>
+          </a:ln>
+        </p:spPr>
+        <p:txBody>
+          <a:bodyPr rtlCol="0" anchor="ctr"/>
+          <a:lstStyle/>
+          <a:p>
+            <a:pPr algn="ctr"/>
+          </a:p>
+        </p:txBody>
+      </p:sp>
+      <p:sp>
+        <p:nvSpPr>
+          <p:cNvPr id="30" name="TextBox 29"/>
+          <p:cNvSpPr txBox="1"/>
+          <p:nvPr/>
+        </p:nvSpPr>
+        <p:spPr>
+          <a:xfrm>
+            <a:off x="9070848" y="4590288"/>
+            <a:ext cx="841248" cy="438912"/>
+          </a:xfrm>
+          <a:prstGeom prst="rect">
+            <a:avLst/>
+          </a:prstGeom>
+          <a:noFill/>
+        </p:spPr>
+        <p:txBody>
+          <a:bodyPr wrap="square" anchor="ctr" lIns="0" tIns="0" rIns="0" bIns="0">
+            <a:noAutofit/>
+          </a:bodyPr>
+          <a:lstStyle/>
+          <a:p>
+            <a:pPr algn="ctr" latinLnBrk="0">
+              <a:lnSpc>
+                <a:spcPct val="100000"/>
+              </a:lnSpc>
+              <a:spcBef>
+                <a:spcPts val="0"/>
+              </a:spcBef>
+              <a:spcAft>
+                <a:spcPts val="0"/>
+              </a:spcAft>
+            </a:pPr>
+            <a:r>
+              <a:rPr sz="900" b="1">
+                <a:solidFill>
+                  <a:srgbClr val="0A2B45"/>
+                </a:solidFill>
+                <a:latin typeface="Microsoft YaHei"/>
+                <a:ea typeface="Microsoft YaHei"/>
+                <a:cs typeface="Microsoft YaHei"/>
+              </a:rPr>
+              <a:t>整模 A/B</a:t>
+            </a:r>
+          </a:p>
+          <a:p>
+            <a:pPr algn="ctr" latinLnBrk="0">
+              <a:lnSpc>
+                <a:spcPct val="100000"/>
+              </a:lnSpc>
+              <a:spcBef>
+                <a:spcPts val="0"/>
+              </a:spcBef>
+              <a:spcAft>
+                <a:spcPts val="0"/>
+              </a:spcAft>
+            </a:pPr>
+            <a:r>
+              <a:rPr sz="800" b="1">
+                <a:solidFill>
+                  <a:srgbClr val="0F62CE"/>
+                </a:solidFill>
+                <a:latin typeface="Microsoft YaHei"/>
+                <a:ea typeface="Microsoft YaHei"/>
+                <a:cs typeface="Microsoft YaHei"/>
+              </a:rPr>
+              <a:t>超出噪声</a:t>
+            </a:r>
+          </a:p>
+        </p:txBody>
+      </p:sp>
+      <p:cxnSp>
+        <p:nvCxnSpPr>
+          <p:cNvPr id="31" name="Connector 30"/>
+          <p:cNvCxnSpPr/>
+          <p:nvPr/>
+        </p:nvCxnSpPr>
+        <p:spPr>
+          <a:xfrm>
+            <a:off x="8787384" y="4809744"/>
+            <a:ext cx="219456" cy="0"/>
+          </a:xfrm>
+          <a:prstGeom prst="line">
+            <a:avLst/>
+          </a:prstGeom>
+          <a:ln w="19050">
+            <a:solidFill>
+              <a:srgbClr val="0F62CE"/>
+            </a:solidFill>
+            <a:tailEnd type="triangle" w="med" len="med"/>
+          </a:ln>
+        </p:spPr>
+      </p:cxnSp>
+      <p:cxnSp>
+        <p:nvCxnSpPr>
+          <p:cNvPr id="32" name="Connector 31"/>
+          <p:cNvCxnSpPr/>
+          <p:nvPr/>
+        </p:nvCxnSpPr>
+        <p:spPr>
+          <a:xfrm>
+            <a:off x="9976104" y="4809744"/>
+            <a:ext cx="256032" cy="0"/>
+          </a:xfrm>
+          <a:prstGeom prst="line">
+            <a:avLst/>
+          </a:prstGeom>
+          <a:ln w="19050">
+            <a:solidFill>
+              <a:srgbClr val="17795F"/>
+            </a:solidFill>
+            <a:tailEnd type="triangle" w="med" len="med"/>
+          </a:ln>
+        </p:spPr>
+      </p:cxnSp>
+      <p:sp>
+        <p:nvSpPr>
+          <p:cNvPr id="33" name="TextBox 32"/>
+          <p:cNvSpPr txBox="1"/>
+          <p:nvPr/>
+        </p:nvSpPr>
+        <p:spPr>
+          <a:xfrm>
+            <a:off x="9948672" y="4517136"/>
+            <a:ext cx="320039" cy="201168"/>
+          </a:xfrm>
+          <a:prstGeom prst="rect">
+            <a:avLst/>
+          </a:prstGeom>
+          <a:noFill/>
+        </p:spPr>
+        <p:txBody>
+          <a:bodyPr wrap="square" anchor="ctr" lIns="0" tIns="0" rIns="0" bIns="0">
+            <a:noAutofit/>
+          </a:bodyPr>
+          <a:lstStyle/>
+          <a:p>
+            <a:pPr algn="ctr" latinLnBrk="0">
+              <a:lnSpc>
+                <a:spcPct val="100000"/>
+              </a:lnSpc>
+              <a:spcBef>
+                <a:spcPts val="0"/>
+              </a:spcBef>
+              <a:spcAft>
+                <a:spcPts val="0"/>
+              </a:spcAft>
+            </a:pPr>
+            <a:r>
+              <a:rPr sz="800" b="1">
+                <a:solidFill>
+                  <a:srgbClr val="17795F"/>
+                </a:solidFill>
+                <a:latin typeface="Microsoft YaHei"/>
+                <a:ea typeface="Microsoft YaHei"/>
+                <a:cs typeface="Microsoft YaHei"/>
+              </a:rPr>
+              <a:t>通过</a:t>
+            </a:r>
+          </a:p>
+        </p:txBody>
+      </p:sp>
+      <p:sp>
+        <p:nvSpPr>
+          <p:cNvPr id="34" name="TextBox 33"/>
+          <p:cNvSpPr txBox="1"/>
+          <p:nvPr/>
+        </p:nvSpPr>
+        <p:spPr>
+          <a:xfrm>
+            <a:off x="5468112" y="5303520"/>
+            <a:ext cx="4480560" cy="219456"/>
+          </a:xfrm>
+          <a:prstGeom prst="rect">
+            <a:avLst/>
+          </a:prstGeom>
+          <a:noFill/>
+        </p:spPr>
+        <p:txBody>
+          <a:bodyPr wrap="square" anchor="ctr" lIns="0" tIns="0" rIns="0" bIns="0">
+            <a:noAutofit/>
+          </a:bodyPr>
+          <a:lstStyle/>
+          <a:p>
+            <a:pPr algn="ctr" latinLnBrk="0">
+              <a:lnSpc>
+                <a:spcPct val="100000"/>
+              </a:lnSpc>
+              <a:spcBef>
+                <a:spcPts val="0"/>
+              </a:spcBef>
+              <a:spcAft>
+                <a:spcPts val="0"/>
+              </a:spcAft>
+            </a:pPr>
+            <a:r>
+              <a:rPr sz="900" b="1">
+                <a:solidFill>
+                  <a:srgbClr val="1B4D69"/>
+                </a:solidFill>
+                <a:latin typeface="Microsoft YaHei"/>
+                <a:ea typeface="Microsoft YaHei"/>
+                <a:cs typeface="Microsoft YaHei"/>
+              </a:rPr>
+              <a:t>四道门禁：由快到慢，一票否决</a:t>
+            </a:r>
+          </a:p>
+        </p:txBody>
+      </p:sp>
+      <p:cxnSp>
+        <p:nvCxnSpPr>
+          <p:cNvPr id="35" name="Connector 34"/>
+          <p:cNvCxnSpPr/>
+          <p:nvPr/>
+        </p:nvCxnSpPr>
+        <p:spPr>
+          <a:xfrm flipV="1">
+            <a:off x="5925312" y="4041648"/>
+            <a:ext cx="0" cy="365760"/>
+          </a:xfrm>
+          <a:prstGeom prst="line">
+            <a:avLst/>
+          </a:prstGeom>
+          <a:ln w="15875">
+            <a:solidFill>
+              <a:srgbClr val="B4382F"/>
+            </a:solidFill>
+            <a:prstDash val="dash"/>
+          </a:ln>
+        </p:spPr>
+      </p:cxnSp>
+      <p:cxnSp>
+        <p:nvCxnSpPr>
+          <p:cNvPr id="36" name="Connector 35"/>
+          <p:cNvCxnSpPr/>
+          <p:nvPr/>
+        </p:nvCxnSpPr>
+        <p:spPr>
+          <a:xfrm flipV="1">
+            <a:off x="7114032" y="4041648"/>
+            <a:ext cx="0" cy="365760"/>
+          </a:xfrm>
+          <a:prstGeom prst="line">
+            <a:avLst/>
+          </a:prstGeom>
+          <a:ln w="15875">
+            <a:solidFill>
+              <a:srgbClr val="B4382F"/>
+            </a:solidFill>
+            <a:prstDash val="dash"/>
+          </a:ln>
+        </p:spPr>
+      </p:cxnSp>
+      <p:cxnSp>
+        <p:nvCxnSpPr>
+          <p:cNvPr id="37" name="Connector 36"/>
+          <p:cNvCxnSpPr/>
+          <p:nvPr/>
+        </p:nvCxnSpPr>
+        <p:spPr>
+          <a:xfrm flipV="1">
+            <a:off x="8302752" y="4041648"/>
+            <a:ext cx="0" cy="365760"/>
+          </a:xfrm>
+          <a:prstGeom prst="line">
+            <a:avLst/>
+          </a:prstGeom>
+          <a:ln w="15875">
+            <a:solidFill>
+              <a:srgbClr val="B4382F"/>
+            </a:solidFill>
+            <a:prstDash val="dash"/>
+          </a:ln>
+        </p:spPr>
+      </p:cxnSp>
+      <p:cxnSp>
+        <p:nvCxnSpPr>
+          <p:cNvPr id="38" name="Connector 37"/>
+          <p:cNvCxnSpPr/>
+          <p:nvPr/>
+        </p:nvCxnSpPr>
+        <p:spPr>
+          <a:xfrm flipV="1">
+            <a:off x="9491472" y="4041648"/>
+            <a:ext cx="0" cy="365760"/>
+          </a:xfrm>
+          <a:prstGeom prst="line">
+            <a:avLst/>
+          </a:prstGeom>
+          <a:ln w="15875">
+            <a:solidFill>
+              <a:srgbClr val="B4382F"/>
+            </a:solidFill>
+            <a:prstDash val="dash"/>
+          </a:ln>
+        </p:spPr>
+      </p:cxnSp>
+      <p:cxnSp>
+        <p:nvCxnSpPr>
+          <p:cNvPr id="39" name="Connector 38"/>
+          <p:cNvCxnSpPr/>
+          <p:nvPr/>
+        </p:nvCxnSpPr>
+        <p:spPr>
+          <a:xfrm>
+            <a:off x="5925312" y="4041648"/>
+            <a:ext cx="3566160" cy="0"/>
+          </a:xfrm>
+          <a:prstGeom prst="line">
+            <a:avLst/>
+          </a:prstGeom>
+          <a:ln w="15875">
+            <a:solidFill>
+              <a:srgbClr val="B4382F"/>
+            </a:solidFill>
+            <a:prstDash val="dash"/>
+          </a:ln>
+        </p:spPr>
+      </p:cxnSp>
+      <p:cxnSp>
+        <p:nvCxnSpPr>
+          <p:cNvPr id="40" name="Connector 39"/>
+          <p:cNvCxnSpPr/>
+          <p:nvPr/>
+        </p:nvCxnSpPr>
+        <p:spPr>
+          <a:xfrm flipV="1">
+            <a:off x="7708392" y="3127247"/>
+            <a:ext cx="0" cy="914401"/>
+          </a:xfrm>
+          <a:prstGeom prst="line">
+            <a:avLst/>
+          </a:prstGeom>
+          <a:ln w="15875">
+            <a:solidFill>
+              <a:srgbClr val="B4382F"/>
+            </a:solidFill>
+            <a:prstDash val="dash"/>
+            <a:tailEnd type="triangle" w="med" len="med"/>
+          </a:ln>
+        </p:spPr>
+      </p:cxnSp>
+      <p:sp>
+        <p:nvSpPr>
+          <p:cNvPr id="41" name="TextBox 40"/>
+          <p:cNvSpPr txBox="1"/>
+          <p:nvPr/>
+        </p:nvSpPr>
+        <p:spPr>
+          <a:xfrm>
+            <a:off x="5971032" y="4123944"/>
+            <a:ext cx="274320" cy="201168"/>
+          </a:xfrm>
+          <a:prstGeom prst="rect">
+            <a:avLst/>
+          </a:prstGeom>
+          <a:noFill/>
+        </p:spPr>
+        <p:txBody>
+          <a:bodyPr wrap="square" anchor="ctr" lIns="0" tIns="0" rIns="0" bIns="0">
+            <a:noAutofit/>
+          </a:bodyPr>
+          <a:lstStyle/>
+          <a:p>
+            <a:pPr algn="l" latinLnBrk="0">
+              <a:lnSpc>
+                <a:spcPct val="100000"/>
+              </a:lnSpc>
+              <a:spcBef>
+                <a:spcPts val="0"/>
+              </a:spcBef>
+              <a:spcAft>
+                <a:spcPts val="0"/>
+              </a:spcAft>
+            </a:pPr>
+            <a:r>
+              <a:rPr sz="800" b="1">
+                <a:solidFill>
+                  <a:srgbClr val="B4382F"/>
+                </a:solidFill>
+                <a:latin typeface="Microsoft YaHei"/>
+                <a:ea typeface="Microsoft YaHei"/>
+                <a:cs typeface="Microsoft YaHei"/>
+              </a:rPr>
+              <a:t>否</a:t>
+            </a:r>
+          </a:p>
+        </p:txBody>
+      </p:sp>
+      <p:sp>
+        <p:nvSpPr>
+          <p:cNvPr id="42" name="TextBox 41"/>
+          <p:cNvSpPr txBox="1"/>
+          <p:nvPr/>
+        </p:nvSpPr>
+        <p:spPr>
+          <a:xfrm>
+            <a:off x="7159752" y="4123944"/>
+            <a:ext cx="274320" cy="201168"/>
+          </a:xfrm>
+          <a:prstGeom prst="rect">
+            <a:avLst/>
+          </a:prstGeom>
+          <a:noFill/>
+        </p:spPr>
+        <p:txBody>
+          <a:bodyPr wrap="square" anchor="ctr" lIns="0" tIns="0" rIns="0" bIns="0">
+            <a:noAutofit/>
+          </a:bodyPr>
+          <a:lstStyle/>
+          <a:p>
+            <a:pPr algn="l" latinLnBrk="0">
+              <a:lnSpc>
+                <a:spcPct val="100000"/>
+              </a:lnSpc>
+              <a:spcBef>
+                <a:spcPts val="0"/>
+              </a:spcBef>
+              <a:spcAft>
+                <a:spcPts val="0"/>
+              </a:spcAft>
+            </a:pPr>
+            <a:r>
+              <a:rPr sz="800" b="1">
+                <a:solidFill>
+                  <a:srgbClr val="B4382F"/>
+                </a:solidFill>
+                <a:latin typeface="Microsoft YaHei"/>
+                <a:ea typeface="Microsoft YaHei"/>
+                <a:cs typeface="Microsoft YaHei"/>
+              </a:rPr>
+              <a:t>否</a:t>
+            </a:r>
+          </a:p>
+        </p:txBody>
+      </p:sp>
+      <p:sp>
+        <p:nvSpPr>
+          <p:cNvPr id="43" name="TextBox 42"/>
+          <p:cNvSpPr txBox="1"/>
+          <p:nvPr/>
+        </p:nvSpPr>
+        <p:spPr>
+          <a:xfrm>
+            <a:off x="8348472" y="4123944"/>
+            <a:ext cx="274320" cy="201168"/>
+          </a:xfrm>
+          <a:prstGeom prst="rect">
+            <a:avLst/>
+          </a:prstGeom>
+          <a:noFill/>
+        </p:spPr>
+        <p:txBody>
+          <a:bodyPr wrap="square" anchor="ctr" lIns="0" tIns="0" rIns="0" bIns="0">
+            <a:noAutofit/>
+          </a:bodyPr>
+          <a:lstStyle/>
+          <a:p>
+            <a:pPr algn="l" latinLnBrk="0">
+              <a:lnSpc>
+                <a:spcPct val="100000"/>
+              </a:lnSpc>
+              <a:spcBef>
+                <a:spcPts val="0"/>
+              </a:spcBef>
+              <a:spcAft>
+                <a:spcPts val="0"/>
+              </a:spcAft>
+            </a:pPr>
+            <a:r>
+              <a:rPr sz="800" b="1">
+                <a:solidFill>
+                  <a:srgbClr val="B4382F"/>
+                </a:solidFill>
+                <a:latin typeface="Microsoft YaHei"/>
+                <a:ea typeface="Microsoft YaHei"/>
+                <a:cs typeface="Microsoft YaHei"/>
+              </a:rPr>
+              <a:t>否</a:t>
+            </a:r>
+          </a:p>
+        </p:txBody>
+      </p:sp>
+      <p:sp>
+        <p:nvSpPr>
+          <p:cNvPr id="44" name="TextBox 43"/>
+          <p:cNvSpPr txBox="1"/>
+          <p:nvPr/>
+        </p:nvSpPr>
+        <p:spPr>
+          <a:xfrm>
+            <a:off x="9537192" y="4123944"/>
+            <a:ext cx="274320" cy="201168"/>
+          </a:xfrm>
+          <a:prstGeom prst="rect">
+            <a:avLst/>
+          </a:prstGeom>
+          <a:noFill/>
+        </p:spPr>
+        <p:txBody>
+          <a:bodyPr wrap="square" anchor="ctr" lIns="0" tIns="0" rIns="0" bIns="0">
+            <a:noAutofit/>
+          </a:bodyPr>
+          <a:lstStyle/>
+          <a:p>
+            <a:pPr algn="l" latinLnBrk="0">
+              <a:lnSpc>
+                <a:spcPct val="100000"/>
+              </a:lnSpc>
+              <a:spcBef>
+                <a:spcPts val="0"/>
+              </a:spcBef>
+              <a:spcAft>
+                <a:spcPts val="0"/>
+              </a:spcAft>
+            </a:pPr>
+            <a:r>
+              <a:rPr sz="800" b="1">
+                <a:solidFill>
+                  <a:srgbClr val="B4382F"/>
+                </a:solidFill>
+                <a:latin typeface="Microsoft YaHei"/>
+                <a:ea typeface="Microsoft YaHei"/>
+                <a:cs typeface="Microsoft YaHei"/>
+              </a:rPr>
+              <a:t>否</a:t>
+            </a:r>
+          </a:p>
+        </p:txBody>
+      </p:sp>
+      <p:cxnSp>
+        <p:nvCxnSpPr>
+          <p:cNvPr id="45" name="Connector 44"/>
+          <p:cNvCxnSpPr/>
+          <p:nvPr/>
+        </p:nvCxnSpPr>
+        <p:spPr>
+          <a:xfrm flipH="1">
+            <a:off x="5047488" y="2907791"/>
+            <a:ext cx="2121408" cy="0"/>
+          </a:xfrm>
+          <a:prstGeom prst="line">
+            <a:avLst/>
+          </a:prstGeom>
+          <a:ln w="15875">
+            <a:solidFill>
+              <a:srgbClr val="B4382F"/>
+            </a:solidFill>
+            <a:prstDash val="dash"/>
+            <a:tailEnd type="triangle" w="med" len="med"/>
+          </a:ln>
+        </p:spPr>
+      </p:cxnSp>
+      <p:cxnSp>
+        <p:nvCxnSpPr>
+          <p:cNvPr id="46" name="Connector 45"/>
+          <p:cNvCxnSpPr/>
+          <p:nvPr/>
+        </p:nvCxnSpPr>
+        <p:spPr>
+          <a:xfrm>
+            <a:off x="1920240" y="1865376"/>
+            <a:ext cx="0" cy="2542032"/>
+          </a:xfrm>
+          <a:prstGeom prst="line">
+            <a:avLst/>
+          </a:prstGeom>
+          <a:ln w="19050">
+            <a:solidFill>
+              <a:srgbClr val="1B4D69"/>
+            </a:solidFill>
+            <a:tailEnd type="triangle" w="med" len="med"/>
+          </a:ln>
+        </p:spPr>
+      </p:cxnSp>
+      <p:cxnSp>
+        <p:nvCxnSpPr>
+          <p:cNvPr id="47" name="Connector 46"/>
+          <p:cNvCxnSpPr/>
+          <p:nvPr/>
+        </p:nvCxnSpPr>
+        <p:spPr>
+          <a:xfrm>
+            <a:off x="3822191" y="1865376"/>
+            <a:ext cx="0" cy="640080"/>
+          </a:xfrm>
+          <a:prstGeom prst="line">
+            <a:avLst/>
+          </a:prstGeom>
+          <a:ln w="19050">
+            <a:solidFill>
+              <a:srgbClr val="1B4D69"/>
+            </a:solidFill>
+            <a:headEnd type="triangle" w="med" len="med"/>
+            <a:tailEnd type="triangle" w="med" len="med"/>
+          </a:ln>
+        </p:spPr>
+      </p:cxnSp>
+      <p:cxnSp>
+        <p:nvCxnSpPr>
+          <p:cNvPr id="48" name="Connector 47"/>
+          <p:cNvCxnSpPr/>
+          <p:nvPr/>
+        </p:nvCxnSpPr>
+        <p:spPr>
+          <a:xfrm flipV="1">
+            <a:off x="2816352" y="3310128"/>
+            <a:ext cx="0" cy="1097280"/>
+          </a:xfrm>
+          <a:prstGeom prst="line">
+            <a:avLst/>
+          </a:prstGeom>
+          <a:ln w="19050">
+            <a:solidFill>
+              <a:srgbClr val="0F62CE"/>
+            </a:solidFill>
+            <a:tailEnd type="triangle" w="med" len="med"/>
+          </a:ln>
+        </p:spPr>
+      </p:cxnSp>
+      <p:cxnSp>
+        <p:nvCxnSpPr>
+          <p:cNvPr id="49" name="Connector 48"/>
+          <p:cNvCxnSpPr/>
+          <p:nvPr/>
+        </p:nvCxnSpPr>
+        <p:spPr>
+          <a:xfrm>
+            <a:off x="4599432" y="3310128"/>
+            <a:ext cx="0" cy="1097280"/>
+          </a:xfrm>
+          <a:prstGeom prst="line">
+            <a:avLst/>
+          </a:prstGeom>
+          <a:ln w="19050">
+            <a:solidFill>
+              <a:srgbClr val="D2690C"/>
+            </a:solidFill>
+            <a:tailEnd type="triangle" w="med" len="med"/>
+          </a:ln>
+        </p:spPr>
+      </p:cxnSp>
+      <p:cxnSp>
+        <p:nvCxnSpPr>
+          <p:cNvPr id="50" name="Connector 49"/>
+          <p:cNvCxnSpPr/>
+          <p:nvPr/>
+        </p:nvCxnSpPr>
+        <p:spPr>
+          <a:xfrm flipV="1">
+            <a:off x="10908792" y="1865376"/>
+            <a:ext cx="0" cy="2542032"/>
+          </a:xfrm>
+          <a:prstGeom prst="line">
+            <a:avLst/>
+          </a:prstGeom>
+          <a:ln w="19050">
+            <a:solidFill>
+              <a:srgbClr val="0F62CE"/>
+            </a:solidFill>
+            <a:tailEnd type="triangle" w="med" len="med"/>
+          </a:ln>
+        </p:spPr>
+      </p:cxnSp>
+      <p:sp>
+        <p:nvSpPr>
+          <p:cNvPr id="51" name="Freeform 50"/>
+          <p:cNvSpPr/>
+          <p:nvPr/>
+        </p:nvSpPr>
+        <p:spPr>
+          <a:xfrm>
+            <a:off x="2313432" y="5212080"/>
+            <a:ext cx="8595360" cy="658368"/>
+          </a:xfrm>
+          <a:custGeom>
+            <a:avLst/>
+            <a:gdLst/>
+            <a:ahLst/>
+            <a:cxnLst/>
+            <a:rect l="l" t="t" r="r" b="b"/>
+            <a:pathLst>
+              <a:path w="8595360" h="658368">
+                <a:moveTo>
+                  <a:pt x="8595360" y="0"/>
+                </a:moveTo>
+                <a:lnTo>
+                  <a:pt x="8595360" y="658368"/>
+                </a:lnTo>
+                <a:lnTo>
+                  <a:pt x="0" y="658368"/>
+                </a:lnTo>
+                <a:lnTo>
+                  <a:pt x="0" y="0"/>
+                </a:lnTo>
+              </a:path>
+            </a:pathLst>
+          </a:custGeom>
+          <a:noFill/>
+          <a:ln w="19050">
+            <a:solidFill>
+              <a:srgbClr val="17795F"/>
+            </a:solidFill>
+            <a:tailEnd type="triangle" w="med" len="med"/>
+          </a:ln>
+        </p:spPr>
+        <p:txBody>
+          <a:bodyPr rtlCol="0" anchor="ctr"/>
+          <a:lstStyle/>
+          <a:p>
+            <a:pPr algn="ctr"/>
+          </a:p>
+        </p:txBody>
+      </p:sp>
+      <p:sp>
+        <p:nvSpPr>
+          <p:cNvPr id="52" name="Rounded Rectangle 51"/>
+          <p:cNvSpPr/>
+          <p:nvPr/>
+        </p:nvSpPr>
+        <p:spPr>
+          <a:xfrm>
+            <a:off x="1554480" y="2002536"/>
+            <a:ext cx="731520" cy="201168"/>
+          </a:xfrm>
+          <a:prstGeom prst="roundRect">
+            <a:avLst>
+              <a:gd name="adj" fmla="val 50000"/>
+            </a:avLst>
+          </a:prstGeom>
+          <a:solidFill>
+            <a:srgbClr val="FFFFFF"/>
+          </a:solidFill>
+          <a:ln w="9525">
+            <a:solidFill>
+              <a:srgbClr val="1B4D69"/>
+            </a:solidFill>
+          </a:ln>
+        </p:spPr>
+        <p:txBody>
+          <a:bodyPr rtlCol="0" anchor="ctr" wrap="square" lIns="18288" tIns="0" rIns="18288" bIns="0">
+            <a:noAutofit/>
+          </a:bodyPr>
+          <a:lstStyle/>
+          <a:p>
+            <a:pPr algn="ctr" latinLnBrk="0">
+              <a:lnSpc>
+                <a:spcPct val="100000"/>
+              </a:lnSpc>
+              <a:spcBef>
+                <a:spcPts val="0"/>
+              </a:spcBef>
+              <a:spcAft>
+                <a:spcPts val="0"/>
+              </a:spcAft>
+            </a:pPr>
+            <a:r>
+              <a:rPr sz="800" b="1">
+                <a:solidFill>
+                  <a:srgbClr val="1B4D69"/>
+                </a:solidFill>
+                <a:latin typeface="Microsoft YaHei"/>
+                <a:ea typeface="Microsoft YaHei"/>
+                <a:cs typeface="Microsoft YaHei"/>
+              </a:rPr>
+              <a:t>目标 + 标准</a:t>
+            </a:r>
+          </a:p>
+        </p:txBody>
+      </p:sp>
+      <p:sp>
+        <p:nvSpPr>
+          <p:cNvPr id="53" name="Rounded Rectangle 52"/>
+          <p:cNvSpPr/>
+          <p:nvPr/>
+        </p:nvSpPr>
+        <p:spPr>
+          <a:xfrm>
+            <a:off x="3593591" y="2002536"/>
+            <a:ext cx="457200" cy="201168"/>
+          </a:xfrm>
+          <a:prstGeom prst="roundRect">
+            <a:avLst>
+              <a:gd name="adj" fmla="val 50000"/>
+            </a:avLst>
+          </a:prstGeom>
+          <a:solidFill>
+            <a:srgbClr val="FFFFFF"/>
+          </a:solidFill>
+          <a:ln w="9525">
+            <a:solidFill>
+              <a:srgbClr val="1B4D69"/>
+            </a:solidFill>
+          </a:ln>
+        </p:spPr>
+        <p:txBody>
+          <a:bodyPr rtlCol="0" anchor="ctr" wrap="square" lIns="18288" tIns="0" rIns="18288" bIns="0">
+            <a:noAutofit/>
+          </a:bodyPr>
+          <a:lstStyle/>
+          <a:p>
+            <a:pPr algn="ctr" latinLnBrk="0">
+              <a:lnSpc>
+                <a:spcPct val="100000"/>
+              </a:lnSpc>
+              <a:spcBef>
+                <a:spcPts val="0"/>
+              </a:spcBef>
+              <a:spcAft>
+                <a:spcPts val="0"/>
+              </a:spcAft>
+            </a:pPr>
+            <a:r>
+              <a:rPr sz="800" b="1">
+                <a:solidFill>
+                  <a:srgbClr val="1B4D69"/>
+                </a:solidFill>
+                <a:latin typeface="Microsoft YaHei"/>
+                <a:ea typeface="Microsoft YaHei"/>
+                <a:cs typeface="Microsoft YaHei"/>
+              </a:rPr>
+              <a:t>协同</a:t>
+            </a:r>
+          </a:p>
+        </p:txBody>
+      </p:sp>
+      <p:sp>
+        <p:nvSpPr>
+          <p:cNvPr id="54" name="Rounded Rectangle 53"/>
+          <p:cNvSpPr/>
+          <p:nvPr/>
+        </p:nvSpPr>
+        <p:spPr>
+          <a:xfrm>
+            <a:off x="10405872" y="2002536"/>
+            <a:ext cx="1005840" cy="201168"/>
+          </a:xfrm>
+          <a:prstGeom prst="roundRect">
+            <a:avLst>
+              <a:gd name="adj" fmla="val 50000"/>
             </a:avLst>
           </a:prstGeom>
           <a:solidFill>
@@ -31904,27 +32749,50 @@
           </a:ln>
         </p:spPr>
         <p:txBody>
-          <a:bodyPr rtlCol="0" anchor="ctr"/>
-          <a:lstStyle/>
-          <a:p>
-            <a:pPr algn="ctr"/>
-          </a:p>
-        </p:txBody>
-      </p:sp>
-      <p:sp>
-        <p:nvSpPr>
-          <p:cNvPr id="26" name="Rounded Rectangle 25"/>
+          <a:bodyPr rtlCol="0" anchor="ctr" wrap="square" lIns="18288" tIns="0" rIns="18288" bIns="0">
+            <a:noAutofit/>
+          </a:bodyPr>
+          <a:lstStyle/>
+          <a:p>
+            <a:pPr algn="ctr" latinLnBrk="0">
+              <a:lnSpc>
+                <a:spcPct val="100000"/>
+              </a:lnSpc>
+              <a:spcBef>
+                <a:spcPts val="0"/>
+              </a:spcBef>
+              <a:spcAft>
+                <a:spcPts val="0"/>
+              </a:spcAft>
+            </a:pPr>
+            <a:r>
+              <a:rPr sz="800" b="1">
+                <a:solidFill>
+                  <a:srgbClr val="0F62CE"/>
+                </a:solidFill>
+                <a:latin typeface="Microsoft YaHei"/>
+                <a:ea typeface="Microsoft YaHei"/>
+                <a:cs typeface="Microsoft YaHei"/>
+              </a:rPr>
+              <a:t>最优版本 + 报告</a:t>
+            </a:r>
+          </a:p>
+        </p:txBody>
+      </p:sp>
+      <p:sp>
+        <p:nvSpPr>
+          <p:cNvPr id="55" name="Rounded Rectangle 54"/>
           <p:cNvSpPr/>
           <p:nvPr/>
         </p:nvSpPr>
         <p:spPr>
           <a:xfrm>
-            <a:off x="4901183" y="1700784"/>
-            <a:ext cx="1554480" cy="621792"/>
+            <a:off x="2432304" y="3611879"/>
+            <a:ext cx="768096" cy="201168"/>
           </a:xfrm>
           <a:prstGeom prst="roundRect">
             <a:avLst>
-              <a:gd name="adj" fmla="val 11764"/>
+              <a:gd name="adj" fmla="val 50000"/>
             </a:avLst>
           </a:prstGeom>
           <a:solidFill>
@@ -31937,2021 +32805,46 @@
           </a:ln>
         </p:spPr>
         <p:txBody>
-          <a:bodyPr rtlCol="0" anchor="ctr"/>
-          <a:lstStyle/>
-          <a:p>
-            <a:pPr algn="ctr"/>
-          </a:p>
-        </p:txBody>
-      </p:sp>
-      <p:sp>
-        <p:nvSpPr>
-          <p:cNvPr id="27" name="Rounded Rectangle 26"/>
+          <a:bodyPr rtlCol="0" anchor="ctr" wrap="square" lIns="18288" tIns="0" rIns="18288" bIns="0">
+            <a:noAutofit/>
+          </a:bodyPr>
+          <a:lstStyle/>
+          <a:p>
+            <a:pPr algn="ctr" latinLnBrk="0">
+              <a:lnSpc>
+                <a:spcPct val="100000"/>
+              </a:lnSpc>
+              <a:spcBef>
+                <a:spcPts val="0"/>
+              </a:spcBef>
+              <a:spcAft>
+                <a:spcPts val="0"/>
+              </a:spcAft>
+            </a:pPr>
+            <a:r>
+              <a:rPr sz="800" b="1">
+                <a:solidFill>
+                  <a:srgbClr val="0F62CE"/>
+                </a:solidFill>
+                <a:latin typeface="Microsoft YaHei"/>
+                <a:ea typeface="Microsoft YaHei"/>
+                <a:cs typeface="Microsoft YaHei"/>
+              </a:rPr>
+              <a:t>瓶颈 + 证据</a:t>
+            </a:r>
+          </a:p>
+        </p:txBody>
+      </p:sp>
+      <p:sp>
+        <p:nvSpPr>
+          <p:cNvPr id="56" name="Rounded Rectangle 55"/>
           <p:cNvSpPr/>
           <p:nvPr/>
         </p:nvSpPr>
         <p:spPr>
           <a:xfrm>
-            <a:off x="4846320" y="1755648"/>
-            <a:ext cx="1554480" cy="621792"/>
-          </a:xfrm>
-          <a:prstGeom prst="roundRect">
-            <a:avLst>
-              <a:gd name="adj" fmla="val 11764"/>
-            </a:avLst>
-          </a:prstGeom>
-          <a:solidFill>
-            <a:srgbClr val="E6F0FC"/>
-          </a:solidFill>
-          <a:ln w="12700">
-            <a:solidFill>
-              <a:srgbClr val="0F62CE"/>
-            </a:solidFill>
-          </a:ln>
-        </p:spPr>
-        <p:txBody>
-          <a:bodyPr rtlCol="0" anchor="ctr" wrap="square" tIns="36576" bIns="36576">
-            <a:noAutofit/>
-          </a:bodyPr>
-          <a:lstStyle/>
-          <a:p>
-            <a:pPr algn="ctr" latinLnBrk="0">
-              <a:lnSpc>
-                <a:spcPct val="100000"/>
-              </a:lnSpc>
-              <a:spcBef>
-                <a:spcPts val="0"/>
-              </a:spcBef>
-              <a:spcAft>
-                <a:spcPts val="0"/>
-              </a:spcAft>
-            </a:pPr>
-            <a:r>
-              <a:rPr sz="950" b="1">
-                <a:solidFill>
-                  <a:srgbClr val="0A2B45"/>
-                </a:solidFill>
-                <a:latin typeface="Microsoft YaHei"/>
-                <a:ea typeface="Microsoft YaHei"/>
-                <a:cs typeface="Microsoft YaHei"/>
-              </a:rPr>
-              <a:t>试验队列</a:t>
-            </a:r>
-          </a:p>
-          <a:p>
-            <a:pPr algn="ctr" latinLnBrk="0">
-              <a:lnSpc>
-                <a:spcPct val="100000"/>
-              </a:lnSpc>
-              <a:spcBef>
-                <a:spcPts val="0"/>
-              </a:spcBef>
-              <a:spcAft>
-                <a:spcPts val="0"/>
-              </a:spcAft>
-            </a:pPr>
-            <a:r>
-              <a:rPr sz="850" b="0">
-                <a:solidFill>
-                  <a:srgbClr val="0F62CE"/>
-                </a:solidFill>
-                <a:latin typeface="Consolas"/>
-                <a:ea typeface="Microsoft YaHei"/>
-                <a:cs typeface="Microsoft YaHei"/>
-              </a:rPr>
-              <a:t>试验 1 … 试验 35</a:t>
-            </a:r>
-          </a:p>
-          <a:p>
-            <a:pPr algn="ctr" latinLnBrk="0">
-              <a:lnSpc>
-                <a:spcPct val="100000"/>
-              </a:lnSpc>
-              <a:spcBef>
-                <a:spcPts val="0"/>
-              </a:spcBef>
-              <a:spcAft>
-                <a:spcPts val="0"/>
-              </a:spcAft>
-            </a:pPr>
-            <a:r>
-              <a:rPr sz="750" b="0">
-                <a:solidFill>
-                  <a:srgbClr val="40708B"/>
-                </a:solidFill>
-                <a:latin typeface="Microsoft YaHei"/>
-                <a:ea typeface="Microsoft YaHei"/>
-                <a:cs typeface="Microsoft YaHei"/>
-              </a:rPr>
-              <a:t>attempts/ 全量留痕</a:t>
-            </a:r>
-          </a:p>
-        </p:txBody>
-      </p:sp>
-      <p:cxnSp>
-        <p:nvCxnSpPr>
-          <p:cNvPr id="28" name="Connector 27"/>
-          <p:cNvCxnSpPr/>
-          <p:nvPr/>
-        </p:nvCxnSpPr>
-        <p:spPr>
-          <a:xfrm>
-            <a:off x="4407407" y="2066544"/>
-            <a:ext cx="402337" cy="0"/>
-          </a:xfrm>
-          <a:prstGeom prst="line">
-            <a:avLst/>
-          </a:prstGeom>
-          <a:ln w="19050">
-            <a:solidFill>
-              <a:srgbClr val="0F62CE"/>
-            </a:solidFill>
-            <a:tailEnd type="triangle" w="med" len="med"/>
-          </a:ln>
-        </p:spPr>
-      </p:cxnSp>
-      <p:sp>
-        <p:nvSpPr>
-          <p:cNvPr id="29" name="Rounded Rectangle 28"/>
-          <p:cNvSpPr/>
-          <p:nvPr/>
-        </p:nvSpPr>
-        <p:spPr>
-          <a:xfrm>
-            <a:off x="4398263" y="1965960"/>
-            <a:ext cx="420624" cy="201168"/>
-          </a:xfrm>
-          <a:prstGeom prst="roundRect">
-            <a:avLst>
-              <a:gd name="adj" fmla="val 50000"/>
-            </a:avLst>
-          </a:prstGeom>
-          <a:solidFill>
-            <a:srgbClr val="FFFFFF"/>
-          </a:solidFill>
-          <a:ln w="9525">
-            <a:solidFill>
-              <a:srgbClr val="0F62CE"/>
-            </a:solidFill>
-          </a:ln>
-        </p:spPr>
-        <p:txBody>
-          <a:bodyPr rtlCol="0" anchor="ctr" wrap="square" lIns="18288" tIns="0" rIns="18288" bIns="0">
-            <a:noAutofit/>
-          </a:bodyPr>
-          <a:lstStyle/>
-          <a:p>
-            <a:pPr algn="ctr" latinLnBrk="0">
-              <a:lnSpc>
-                <a:spcPct val="100000"/>
-              </a:lnSpc>
-              <a:spcBef>
-                <a:spcPts val="0"/>
-              </a:spcBef>
-              <a:spcAft>
-                <a:spcPts val="0"/>
-              </a:spcAft>
-            </a:pPr>
-            <a:r>
-              <a:rPr sz="750" b="1">
-                <a:solidFill>
-                  <a:srgbClr val="0F62CE"/>
-                </a:solidFill>
-                <a:latin typeface="Microsoft YaHei"/>
-                <a:ea typeface="Microsoft YaHei"/>
-                <a:cs typeface="Microsoft YaHei"/>
-              </a:rPr>
-              <a:t>拆解</a:t>
-            </a:r>
-          </a:p>
-        </p:txBody>
-      </p:sp>
-      <p:sp>
-        <p:nvSpPr>
-          <p:cNvPr id="30" name="TextBox 29"/>
-          <p:cNvSpPr txBox="1"/>
-          <p:nvPr/>
-        </p:nvSpPr>
-        <p:spPr>
-          <a:xfrm>
-            <a:off x="3054096" y="2542032"/>
-            <a:ext cx="3657599" cy="201168"/>
-          </a:xfrm>
-          <a:prstGeom prst="rect">
-            <a:avLst/>
-          </a:prstGeom>
-          <a:noFill/>
-        </p:spPr>
-        <p:txBody>
-          <a:bodyPr wrap="square" anchor="ctr" lIns="0" tIns="0" rIns="0" bIns="0">
-            <a:noAutofit/>
-          </a:bodyPr>
-          <a:lstStyle/>
-          <a:p>
-            <a:pPr algn="l" latinLnBrk="0">
-              <a:lnSpc>
-                <a:spcPct val="100000"/>
-              </a:lnSpc>
-              <a:spcBef>
-                <a:spcPts val="0"/>
-              </a:spcBef>
-              <a:spcAft>
-                <a:spcPts val="0"/>
-              </a:spcAft>
-            </a:pPr>
-            <a:r>
-              <a:rPr sz="900" b="1">
-                <a:solidFill>
-                  <a:srgbClr val="1B4D69"/>
-                </a:solidFill>
-                <a:latin typeface="Microsoft YaHei"/>
-                <a:ea typeface="Microsoft YaHei"/>
-                <a:cs typeface="Microsoft YaHei"/>
-              </a:rPr>
-              <a:t>判决后对试验队列的三类处置</a:t>
-            </a:r>
-          </a:p>
-        </p:txBody>
-      </p:sp>
-      <p:sp>
-        <p:nvSpPr>
-          <p:cNvPr id="31" name="TextBox 30"/>
-          <p:cNvSpPr txBox="1"/>
-          <p:nvPr/>
-        </p:nvSpPr>
-        <p:spPr>
-          <a:xfrm>
-            <a:off x="3108960" y="2724912"/>
-            <a:ext cx="1609344" cy="164592"/>
-          </a:xfrm>
-          <a:prstGeom prst="rect">
-            <a:avLst/>
-          </a:prstGeom>
-          <a:noFill/>
-        </p:spPr>
-        <p:txBody>
-          <a:bodyPr wrap="square" anchor="ctr" lIns="0" tIns="0" rIns="0" bIns="0">
-            <a:noAutofit/>
-          </a:bodyPr>
-          <a:lstStyle/>
-          <a:p>
-            <a:pPr algn="l" latinLnBrk="0">
-              <a:lnSpc>
-                <a:spcPct val="100000"/>
-              </a:lnSpc>
-              <a:spcBef>
-                <a:spcPts val="0"/>
-              </a:spcBef>
-              <a:spcAft>
-                <a:spcPts val="0"/>
-              </a:spcAft>
-            </a:pPr>
-            <a:r>
-              <a:rPr sz="900" b="1">
-                <a:solidFill>
-                  <a:srgbClr val="0A2B45"/>
-                </a:solidFill>
-                <a:latin typeface="Microsoft YaHei"/>
-                <a:ea typeface="Microsoft YaHei"/>
-                <a:cs typeface="Microsoft YaHei"/>
-              </a:rPr>
-              <a:t>晋升</a:t>
-            </a:r>
-            <a:r>
-              <a:rPr sz="750" b="1">
-                <a:solidFill>
-                  <a:srgbClr val="40708B"/>
-                </a:solidFill>
-                <a:latin typeface="Consolas"/>
-                <a:ea typeface="Microsoft YaHei"/>
-                <a:cs typeface="Microsoft YaHei"/>
-              </a:rPr>
-              <a:t>　Promotion</a:t>
-            </a:r>
-          </a:p>
-        </p:txBody>
-      </p:sp>
-      <p:sp>
-        <p:nvSpPr>
-          <p:cNvPr id="32" name="Rounded Rectangle 31"/>
-          <p:cNvSpPr/>
-          <p:nvPr/>
-        </p:nvSpPr>
-        <p:spPr>
-          <a:xfrm>
-            <a:off x="3163824" y="2944368"/>
-            <a:ext cx="1609344" cy="438912"/>
-          </a:xfrm>
-          <a:prstGeom prst="roundRect">
-            <a:avLst>
-              <a:gd name="adj" fmla="val 16666"/>
-            </a:avLst>
-          </a:prstGeom>
-          <a:solidFill>
-            <a:srgbClr val="FFFFFF"/>
-          </a:solidFill>
-          <a:ln w="9525">
-            <a:solidFill>
-              <a:srgbClr val="0F62CE"/>
-            </a:solidFill>
-          </a:ln>
-        </p:spPr>
-        <p:txBody>
-          <a:bodyPr rtlCol="0" anchor="ctr"/>
-          <a:lstStyle/>
-          <a:p>
-            <a:pPr algn="ctr"/>
-          </a:p>
-        </p:txBody>
-      </p:sp>
-      <p:sp>
-        <p:nvSpPr>
-          <p:cNvPr id="33" name="Rounded Rectangle 32"/>
-          <p:cNvSpPr/>
-          <p:nvPr/>
-        </p:nvSpPr>
-        <p:spPr>
-          <a:xfrm>
-            <a:off x="3108960" y="2999232"/>
-            <a:ext cx="1609344" cy="438912"/>
-          </a:xfrm>
-          <a:prstGeom prst="roundRect">
-            <a:avLst>
-              <a:gd name="adj" fmla="val 16666"/>
-            </a:avLst>
-          </a:prstGeom>
-          <a:solidFill>
-            <a:srgbClr val="E6F0FC"/>
-          </a:solidFill>
-          <a:ln w="12700">
-            <a:solidFill>
-              <a:srgbClr val="0F62CE"/>
-            </a:solidFill>
-          </a:ln>
-        </p:spPr>
-        <p:txBody>
-          <a:bodyPr rtlCol="0" anchor="ctr" wrap="square" tIns="36576" bIns="36576">
-            <a:noAutofit/>
-          </a:bodyPr>
-          <a:lstStyle/>
-          <a:p>
-            <a:pPr algn="ctr" latinLnBrk="0">
-              <a:lnSpc>
-                <a:spcPct val="100000"/>
-              </a:lnSpc>
-              <a:spcBef>
-                <a:spcPts val="0"/>
-              </a:spcBef>
-              <a:spcAft>
-                <a:spcPts val="0"/>
-              </a:spcAft>
-            </a:pPr>
-            <a:r>
-              <a:rPr sz="800" b="0">
-                <a:solidFill>
-                  <a:srgbClr val="123C5B"/>
-                </a:solidFill>
-                <a:latin typeface="Microsoft YaHei"/>
-                <a:ea typeface="Microsoft YaHei"/>
-                <a:cs typeface="Microsoft YaHei"/>
-              </a:rPr>
-              <a:t>过四道门禁 → 晋升基线</a:t>
-            </a:r>
-          </a:p>
-          <a:p>
-            <a:pPr algn="ctr" latinLnBrk="0">
-              <a:lnSpc>
-                <a:spcPct val="100000"/>
-              </a:lnSpc>
-              <a:spcBef>
-                <a:spcPts val="0"/>
-              </a:spcBef>
-              <a:spcAft>
-                <a:spcPts val="0"/>
-              </a:spcAft>
-            </a:pPr>
-            <a:r>
-              <a:rPr sz="750" b="0">
-                <a:solidFill>
-                  <a:srgbClr val="40708B"/>
-                </a:solidFill>
-                <a:latin typeface="Microsoft YaHei"/>
-                <a:ea typeface="Microsoft YaHei"/>
-                <a:cs typeface="Microsoft YaHei"/>
-              </a:rPr>
-              <a:t>best.json 更新</a:t>
-            </a:r>
-          </a:p>
-        </p:txBody>
-      </p:sp>
-      <p:sp>
-        <p:nvSpPr>
-          <p:cNvPr id="34" name="TextBox 33"/>
-          <p:cNvSpPr txBox="1"/>
-          <p:nvPr/>
-        </p:nvSpPr>
-        <p:spPr>
-          <a:xfrm>
-            <a:off x="3108960" y="3456432"/>
-            <a:ext cx="1609344" cy="164592"/>
-          </a:xfrm>
-          <a:prstGeom prst="rect">
-            <a:avLst/>
-          </a:prstGeom>
-          <a:noFill/>
-        </p:spPr>
-        <p:txBody>
-          <a:bodyPr wrap="square" anchor="ctr" lIns="0" tIns="0" rIns="0" bIns="0">
-            <a:noAutofit/>
-          </a:bodyPr>
-          <a:lstStyle/>
-          <a:p>
-            <a:pPr algn="l" latinLnBrk="0">
-              <a:lnSpc>
-                <a:spcPct val="100000"/>
-              </a:lnSpc>
-              <a:spcBef>
-                <a:spcPts val="0"/>
-              </a:spcBef>
-              <a:spcAft>
-                <a:spcPts val="0"/>
-              </a:spcAft>
-            </a:pPr>
-            <a:r>
-              <a:rPr sz="900" b="1">
-                <a:solidFill>
-                  <a:srgbClr val="0A2B45"/>
-                </a:solidFill>
-                <a:latin typeface="Microsoft YaHei"/>
-                <a:ea typeface="Microsoft YaHei"/>
-                <a:cs typeface="Microsoft YaHei"/>
-              </a:rPr>
-              <a:t>打回</a:t>
-            </a:r>
-            <a:r>
-              <a:rPr sz="750" b="1">
-                <a:solidFill>
-                  <a:srgbClr val="40708B"/>
-                </a:solidFill>
-                <a:latin typeface="Consolas"/>
-                <a:ea typeface="Microsoft YaHei"/>
-                <a:cs typeface="Microsoft YaHei"/>
-              </a:rPr>
-              <a:t>　Rejection</a:t>
-            </a:r>
-          </a:p>
-        </p:txBody>
-      </p:sp>
-      <p:sp>
-        <p:nvSpPr>
-          <p:cNvPr id="35" name="Rounded Rectangle 34"/>
-          <p:cNvSpPr/>
-          <p:nvPr/>
-        </p:nvSpPr>
-        <p:spPr>
-          <a:xfrm>
-            <a:off x="3163824" y="3675888"/>
-            <a:ext cx="1609344" cy="438912"/>
-          </a:xfrm>
-          <a:prstGeom prst="roundRect">
-            <a:avLst>
-              <a:gd name="adj" fmla="val 16666"/>
-            </a:avLst>
-          </a:prstGeom>
-          <a:solidFill>
-            <a:srgbClr val="FFFFFF"/>
-          </a:solidFill>
-          <a:ln w="9525">
-            <a:solidFill>
-              <a:srgbClr val="0F62CE"/>
-            </a:solidFill>
-          </a:ln>
-        </p:spPr>
-        <p:txBody>
-          <a:bodyPr rtlCol="0" anchor="ctr"/>
-          <a:lstStyle/>
-          <a:p>
-            <a:pPr algn="ctr"/>
-          </a:p>
-        </p:txBody>
-      </p:sp>
-      <p:sp>
-        <p:nvSpPr>
-          <p:cNvPr id="36" name="Rounded Rectangle 35"/>
-          <p:cNvSpPr/>
-          <p:nvPr/>
-        </p:nvSpPr>
-        <p:spPr>
-          <a:xfrm>
-            <a:off x="3108960" y="3730752"/>
-            <a:ext cx="1609344" cy="438912"/>
-          </a:xfrm>
-          <a:prstGeom prst="roundRect">
-            <a:avLst>
-              <a:gd name="adj" fmla="val 16666"/>
-            </a:avLst>
-          </a:prstGeom>
-          <a:solidFill>
-            <a:srgbClr val="E6F0FC"/>
-          </a:solidFill>
-          <a:ln w="12700">
-            <a:solidFill>
-              <a:srgbClr val="0F62CE"/>
-            </a:solidFill>
-          </a:ln>
-        </p:spPr>
-        <p:txBody>
-          <a:bodyPr rtlCol="0" anchor="ctr" wrap="square" tIns="36576" bIns="36576">
-            <a:noAutofit/>
-          </a:bodyPr>
-          <a:lstStyle/>
-          <a:p>
-            <a:pPr algn="ctr" latinLnBrk="0">
-              <a:lnSpc>
-                <a:spcPct val="100000"/>
-              </a:lnSpc>
-              <a:spcBef>
-                <a:spcPts val="0"/>
-              </a:spcBef>
-              <a:spcAft>
-                <a:spcPts val="0"/>
-              </a:spcAft>
-            </a:pPr>
-            <a:r>
-              <a:rPr sz="800" b="0">
-                <a:solidFill>
-                  <a:srgbClr val="123C5B"/>
-                </a:solidFill>
-                <a:latin typeface="Microsoft YaHei"/>
-                <a:ea typeface="Microsoft YaHei"/>
-                <a:cs typeface="Microsoft YaHei"/>
-              </a:rPr>
-              <a:t>未过门禁 → 被拒原因进记忆</a:t>
-            </a:r>
-          </a:p>
-          <a:p>
-            <a:pPr algn="ctr" latinLnBrk="0">
-              <a:lnSpc>
-                <a:spcPct val="100000"/>
-              </a:lnSpc>
-              <a:spcBef>
-                <a:spcPts val="0"/>
-              </a:spcBef>
-              <a:spcAft>
-                <a:spcPts val="0"/>
-              </a:spcAft>
-            </a:pPr>
-            <a:r>
-              <a:rPr sz="750" b="0">
-                <a:solidFill>
-                  <a:srgbClr val="40708B"/>
-                </a:solidFill>
-                <a:latin typeface="Microsoft YaHei"/>
-                <a:ea typeface="Microsoft YaHei"/>
-                <a:cs typeface="Microsoft YaHei"/>
-              </a:rPr>
-              <a:t>planner_memory.py 滚动压缩</a:t>
-            </a:r>
-          </a:p>
-        </p:txBody>
-      </p:sp>
-      <p:sp>
-        <p:nvSpPr>
-          <p:cNvPr id="37" name="TextBox 36"/>
-          <p:cNvSpPr txBox="1"/>
-          <p:nvPr/>
-        </p:nvSpPr>
-        <p:spPr>
-          <a:xfrm>
-            <a:off x="3108960" y="4187952"/>
-            <a:ext cx="1609344" cy="164592"/>
-          </a:xfrm>
-          <a:prstGeom prst="rect">
-            <a:avLst/>
-          </a:prstGeom>
-          <a:noFill/>
-        </p:spPr>
-        <p:txBody>
-          <a:bodyPr wrap="square" anchor="ctr" lIns="0" tIns="0" rIns="0" bIns="0">
-            <a:noAutofit/>
-          </a:bodyPr>
-          <a:lstStyle/>
-          <a:p>
-            <a:pPr algn="l" latinLnBrk="0">
-              <a:lnSpc>
-                <a:spcPct val="100000"/>
-              </a:lnSpc>
-              <a:spcBef>
-                <a:spcPts val="0"/>
-              </a:spcBef>
-              <a:spcAft>
-                <a:spcPts val="0"/>
-              </a:spcAft>
-            </a:pPr>
-            <a:r>
-              <a:rPr sz="900" b="1">
-                <a:solidFill>
-                  <a:srgbClr val="0A2B45"/>
-                </a:solidFill>
-                <a:latin typeface="Microsoft YaHei"/>
-                <a:ea typeface="Microsoft YaHei"/>
-                <a:cs typeface="Microsoft YaHei"/>
-              </a:rPr>
-              <a:t>回退</a:t>
-            </a:r>
-            <a:r>
-              <a:rPr sz="750" b="1">
-                <a:solidFill>
-                  <a:srgbClr val="40708B"/>
-                </a:solidFill>
-                <a:latin typeface="Consolas"/>
-                <a:ea typeface="Microsoft YaHei"/>
-                <a:cs typeface="Microsoft YaHei"/>
-              </a:rPr>
-              <a:t>　Rollback</a:t>
-            </a:r>
-          </a:p>
-        </p:txBody>
-      </p:sp>
-      <p:sp>
-        <p:nvSpPr>
-          <p:cNvPr id="38" name="Rounded Rectangle 37"/>
-          <p:cNvSpPr/>
-          <p:nvPr/>
-        </p:nvSpPr>
-        <p:spPr>
-          <a:xfrm>
-            <a:off x="3163824" y="4407408"/>
-            <a:ext cx="1609344" cy="438912"/>
-          </a:xfrm>
-          <a:prstGeom prst="roundRect">
-            <a:avLst>
-              <a:gd name="adj" fmla="val 16666"/>
-            </a:avLst>
-          </a:prstGeom>
-          <a:solidFill>
-            <a:srgbClr val="FFFFFF"/>
-          </a:solidFill>
-          <a:ln w="9525">
-            <a:solidFill>
-              <a:srgbClr val="0F62CE"/>
-            </a:solidFill>
-          </a:ln>
-        </p:spPr>
-        <p:txBody>
-          <a:bodyPr rtlCol="0" anchor="ctr"/>
-          <a:lstStyle/>
-          <a:p>
-            <a:pPr algn="ctr"/>
-          </a:p>
-        </p:txBody>
-      </p:sp>
-      <p:sp>
-        <p:nvSpPr>
-          <p:cNvPr id="39" name="Rounded Rectangle 38"/>
-          <p:cNvSpPr/>
-          <p:nvPr/>
-        </p:nvSpPr>
-        <p:spPr>
-          <a:xfrm>
-            <a:off x="3108960" y="4462272"/>
-            <a:ext cx="1609344" cy="438912"/>
-          </a:xfrm>
-          <a:prstGeom prst="roundRect">
-            <a:avLst>
-              <a:gd name="adj" fmla="val 16666"/>
-            </a:avLst>
-          </a:prstGeom>
-          <a:solidFill>
-            <a:srgbClr val="E6F0FC"/>
-          </a:solidFill>
-          <a:ln w="12700">
-            <a:solidFill>
-              <a:srgbClr val="0F62CE"/>
-            </a:solidFill>
-          </a:ln>
-        </p:spPr>
-        <p:txBody>
-          <a:bodyPr rtlCol="0" anchor="ctr" wrap="square" tIns="36576" bIns="36576">
-            <a:noAutofit/>
-          </a:bodyPr>
-          <a:lstStyle/>
-          <a:p>
-            <a:pPr algn="ctr" latinLnBrk="0">
-              <a:lnSpc>
-                <a:spcPct val="100000"/>
-              </a:lnSpc>
-              <a:spcBef>
-                <a:spcPts val="0"/>
-              </a:spcBef>
-              <a:spcAft>
-                <a:spcPts val="0"/>
-              </a:spcAft>
-            </a:pPr>
-            <a:r>
-              <a:rPr sz="800" b="0">
-                <a:solidFill>
-                  <a:srgbClr val="123C5B"/>
-                </a:solidFill>
-                <a:latin typeface="Microsoft YaHei"/>
-                <a:ea typeface="Microsoft YaHei"/>
-                <a:cs typeface="Microsoft YaHei"/>
-              </a:rPr>
-              <a:t>构建漂移 → 工作区回退</a:t>
-            </a:r>
-          </a:p>
-          <a:p>
-            <a:pPr algn="ctr" latinLnBrk="0">
-              <a:lnSpc>
-                <a:spcPct val="100000"/>
-              </a:lnSpc>
-              <a:spcBef>
-                <a:spcPts val="0"/>
-              </a:spcBef>
-              <a:spcAft>
-                <a:spcPts val="0"/>
-              </a:spcAft>
-            </a:pPr>
-            <a:r>
-              <a:rPr sz="750" b="0">
-                <a:solidFill>
-                  <a:srgbClr val="40708B"/>
-                </a:solidFill>
-                <a:latin typeface="Microsoft YaHei"/>
-                <a:ea typeface="Microsoft YaHei"/>
-                <a:cs typeface="Microsoft YaHei"/>
-              </a:rPr>
-              <a:t>精确重测后再判</a:t>
-            </a:r>
-          </a:p>
-        </p:txBody>
-      </p:sp>
-      <p:sp>
-        <p:nvSpPr>
-          <p:cNvPr id="40" name="Rounded Rectangle 39"/>
-          <p:cNvSpPr/>
-          <p:nvPr/>
-        </p:nvSpPr>
-        <p:spPr>
-          <a:xfrm>
-            <a:off x="5047488" y="3584448"/>
-            <a:ext cx="1792224" cy="731520"/>
-          </a:xfrm>
-          <a:prstGeom prst="roundRect">
-            <a:avLst>
-              <a:gd name="adj" fmla="val 10000"/>
-            </a:avLst>
-          </a:prstGeom>
-          <a:solidFill>
-            <a:srgbClr val="C9E1FC"/>
-          </a:solidFill>
-          <a:ln w="12700">
-            <a:solidFill>
-              <a:srgbClr val="0F62CE"/>
-            </a:solidFill>
-          </a:ln>
-        </p:spPr>
-        <p:txBody>
-          <a:bodyPr rtlCol="0" anchor="ctr" wrap="square" tIns="36576" bIns="36576">
-            <a:noAutofit/>
-          </a:bodyPr>
-          <a:lstStyle/>
-          <a:p>
-            <a:pPr algn="ctr" latinLnBrk="0">
-              <a:lnSpc>
-                <a:spcPct val="100000"/>
-              </a:lnSpc>
-              <a:spcBef>
-                <a:spcPts val="0"/>
-              </a:spcBef>
-              <a:spcAft>
-                <a:spcPts val="0"/>
-              </a:spcAft>
-            </a:pPr>
-            <a:r>
-              <a:rPr sz="1000" b="1">
-                <a:solidFill>
-                  <a:srgbClr val="0A2B45"/>
-                </a:solidFill>
-                <a:latin typeface="Microsoft YaHei"/>
-                <a:ea typeface="Microsoft YaHei"/>
-                <a:cs typeface="Microsoft YaHei"/>
-              </a:rPr>
-              <a:t>判决与晋升</a:t>
-            </a:r>
-          </a:p>
-          <a:p>
-            <a:pPr algn="ctr" latinLnBrk="0">
-              <a:lnSpc>
-                <a:spcPct val="100000"/>
-              </a:lnSpc>
-              <a:spcBef>
-                <a:spcPts val="0"/>
-              </a:spcBef>
-              <a:spcAft>
-                <a:spcPts val="200"/>
-              </a:spcAft>
-            </a:pPr>
-            <a:r>
-              <a:rPr sz="750" b="0">
-                <a:solidFill>
-                  <a:srgbClr val="0F62CE"/>
-                </a:solidFill>
-                <a:latin typeface="Consolas"/>
-                <a:ea typeface="Microsoft YaHei"/>
-                <a:cs typeface="Microsoft YaHei"/>
-              </a:rPr>
-              <a:t>selfiterate.py</a:t>
-            </a:r>
-          </a:p>
-          <a:p>
-            <a:pPr algn="ctr" latinLnBrk="0">
-              <a:lnSpc>
-                <a:spcPct val="100000"/>
-              </a:lnSpc>
-              <a:spcBef>
-                <a:spcPts val="0"/>
-              </a:spcBef>
-              <a:spcAft>
-                <a:spcPts val="0"/>
-              </a:spcAft>
-            </a:pPr>
-            <a:r>
-              <a:rPr sz="800" b="0">
-                <a:solidFill>
-                  <a:srgbClr val="1B4D69"/>
-                </a:solidFill>
-                <a:latin typeface="Microsoft YaHei"/>
-                <a:ea typeface="Microsoft YaHei"/>
-                <a:cs typeface="Microsoft YaHei"/>
-              </a:rPr>
-              <a:t>比对下界账本 · 核验真实收益</a:t>
-            </a:r>
-          </a:p>
-          <a:p>
-            <a:pPr algn="ctr" latinLnBrk="0">
-              <a:lnSpc>
-                <a:spcPct val="100000"/>
-              </a:lnSpc>
-              <a:spcBef>
-                <a:spcPts val="0"/>
-              </a:spcBef>
-              <a:spcAft>
-                <a:spcPts val="0"/>
-              </a:spcAft>
-            </a:pPr>
-            <a:r>
-              <a:rPr sz="800" b="0">
-                <a:solidFill>
-                  <a:srgbClr val="1B4D69"/>
-                </a:solidFill>
-                <a:latin typeface="Microsoft YaHei"/>
-                <a:ea typeface="Microsoft YaHei"/>
-                <a:cs typeface="Microsoft YaHei"/>
-              </a:rPr>
-              <a:t>晋升基线 · 生成判决报告</a:t>
-            </a:r>
-          </a:p>
-        </p:txBody>
-      </p:sp>
-      <p:cxnSp>
-        <p:nvCxnSpPr>
-          <p:cNvPr id="41" name="Connector 40"/>
-          <p:cNvCxnSpPr/>
-          <p:nvPr/>
-        </p:nvCxnSpPr>
-        <p:spPr>
-          <a:xfrm flipH="1" flipV="1">
-            <a:off x="4809744" y="3218687"/>
-            <a:ext cx="201168" cy="731521"/>
-          </a:xfrm>
-          <a:prstGeom prst="line">
-            <a:avLst/>
-          </a:prstGeom>
-          <a:ln w="15875">
-            <a:solidFill>
-              <a:srgbClr val="0F62CE"/>
-            </a:solidFill>
-            <a:headEnd type="triangle" w="med" len="med"/>
-            <a:tailEnd type="triangle" w="med" len="med"/>
-          </a:ln>
-        </p:spPr>
-      </p:cxnSp>
-      <p:cxnSp>
-        <p:nvCxnSpPr>
-          <p:cNvPr id="42" name="Connector 41"/>
-          <p:cNvCxnSpPr/>
-          <p:nvPr/>
-        </p:nvCxnSpPr>
-        <p:spPr>
-          <a:xfrm flipH="1">
-            <a:off x="4809744" y="3950208"/>
-            <a:ext cx="201168" cy="0"/>
-          </a:xfrm>
-          <a:prstGeom prst="line">
-            <a:avLst/>
-          </a:prstGeom>
-          <a:ln w="15875">
-            <a:solidFill>
-              <a:srgbClr val="0F62CE"/>
-            </a:solidFill>
-            <a:headEnd type="triangle" w="med" len="med"/>
-            <a:tailEnd type="triangle" w="med" len="med"/>
-          </a:ln>
-        </p:spPr>
-      </p:cxnSp>
-      <p:cxnSp>
-        <p:nvCxnSpPr>
-          <p:cNvPr id="43" name="Connector 42"/>
-          <p:cNvCxnSpPr/>
-          <p:nvPr/>
-        </p:nvCxnSpPr>
-        <p:spPr>
-          <a:xfrm flipH="1">
-            <a:off x="4809744" y="3950208"/>
-            <a:ext cx="201168" cy="731520"/>
-          </a:xfrm>
-          <a:prstGeom prst="line">
-            <a:avLst/>
-          </a:prstGeom>
-          <a:ln w="15875">
-            <a:solidFill>
-              <a:srgbClr val="0F62CE"/>
-            </a:solidFill>
-            <a:headEnd type="triangle" w="med" len="med"/>
-            <a:tailEnd type="triangle" w="med" len="med"/>
-          </a:ln>
-        </p:spPr>
-      </p:cxnSp>
-      <p:sp>
-        <p:nvSpPr>
-          <p:cNvPr id="44" name="Rounded Rectangle 43"/>
-          <p:cNvSpPr/>
-          <p:nvPr/>
-        </p:nvSpPr>
-        <p:spPr>
-          <a:xfrm>
-            <a:off x="8321040" y="1225296"/>
-            <a:ext cx="3322015" cy="4315968"/>
-          </a:xfrm>
-          <a:prstGeom prst="roundRect">
-            <a:avLst>
-              <a:gd name="adj" fmla="val 2000"/>
-            </a:avLst>
-          </a:prstGeom>
-          <a:solidFill>
-            <a:srgbClr val="F2F8FD"/>
-          </a:solidFill>
-          <a:ln w="12700">
-            <a:solidFill>
-              <a:srgbClr val="D2690C"/>
-            </a:solidFill>
-          </a:ln>
-        </p:spPr>
-        <p:txBody>
-          <a:bodyPr rtlCol="0" anchor="ctr"/>
-          <a:lstStyle/>
-          <a:p>
-            <a:pPr algn="ctr"/>
-          </a:p>
-        </p:txBody>
-      </p:sp>
-      <p:sp>
-        <p:nvSpPr>
-          <p:cNvPr id="45" name="Rectangle 44"/>
-          <p:cNvSpPr/>
-          <p:nvPr/>
-        </p:nvSpPr>
-        <p:spPr>
-          <a:xfrm>
-            <a:off x="8449056" y="1316736"/>
-            <a:ext cx="54864" cy="237744"/>
-          </a:xfrm>
-          <a:prstGeom prst="rect">
-            <a:avLst/>
-          </a:prstGeom>
-          <a:solidFill>
-            <a:srgbClr val="D2690C"/>
-          </a:solidFill>
-          <a:ln>
-            <a:noFill/>
-          </a:ln>
-        </p:spPr>
-        <p:txBody>
-          <a:bodyPr rtlCol="0" anchor="ctr"/>
-          <a:lstStyle/>
-          <a:p>
-            <a:pPr algn="ctr"/>
-          </a:p>
-        </p:txBody>
-      </p:sp>
-      <p:sp>
-        <p:nvSpPr>
-          <p:cNvPr id="46" name="TextBox 45"/>
-          <p:cNvSpPr txBox="1"/>
-          <p:nvPr/>
-        </p:nvSpPr>
-        <p:spPr>
-          <a:xfrm>
-            <a:off x="8558784" y="1280160"/>
-            <a:ext cx="2956255" cy="310896"/>
-          </a:xfrm>
-          <a:prstGeom prst="rect">
-            <a:avLst/>
-          </a:prstGeom>
-          <a:noFill/>
-        </p:spPr>
-        <p:txBody>
-          <a:bodyPr wrap="square" anchor="ctr" lIns="0" tIns="0" rIns="0" bIns="0">
-            <a:noAutofit/>
-          </a:bodyPr>
-          <a:lstStyle/>
-          <a:p>
-            <a:pPr algn="l" latinLnBrk="0">
-              <a:lnSpc>
-                <a:spcPct val="100000"/>
-              </a:lnSpc>
-              <a:spcBef>
-                <a:spcPts val="0"/>
-              </a:spcBef>
-              <a:spcAft>
-                <a:spcPts val="0"/>
-              </a:spcAft>
-            </a:pPr>
-            <a:r>
-              <a:rPr sz="1100" b="1">
-                <a:solidFill>
-                  <a:srgbClr val="0A2B45"/>
-                </a:solidFill>
-                <a:latin typeface="Microsoft YaHei"/>
-                <a:ea typeface="Microsoft YaHei"/>
-                <a:cs typeface="Microsoft YaHei"/>
-              </a:rPr>
-              <a:t>内环 · 一轮试验</a:t>
-            </a:r>
-            <a:r>
-              <a:rPr sz="850" b="1">
-                <a:solidFill>
-                  <a:srgbClr val="D2690C"/>
-                </a:solidFill>
-                <a:latin typeface="Microsoft YaHei"/>
-                <a:ea typeface="Microsoft YaHei"/>
-                <a:cs typeface="Microsoft YaHei"/>
-              </a:rPr>
-              <a:t>　规划器是唯一引入大模型的位置</a:t>
-            </a:r>
-          </a:p>
-        </p:txBody>
-      </p:sp>
-      <p:sp>
-        <p:nvSpPr>
-          <p:cNvPr id="47" name="Rounded Rectangle 46"/>
-          <p:cNvSpPr/>
-          <p:nvPr/>
-        </p:nvSpPr>
-        <p:spPr>
-          <a:xfrm>
-            <a:off x="8449056" y="1755648"/>
-            <a:ext cx="3065983" cy="621792"/>
-          </a:xfrm>
-          <a:prstGeom prst="roundRect">
-            <a:avLst>
-              <a:gd name="adj" fmla="val 11764"/>
-            </a:avLst>
-          </a:prstGeom>
-          <a:solidFill>
-            <a:srgbClr val="E6F0FC"/>
-          </a:solidFill>
-          <a:ln w="12700">
-            <a:solidFill>
-              <a:srgbClr val="0F62CE"/>
-            </a:solidFill>
-          </a:ln>
-        </p:spPr>
-        <p:txBody>
-          <a:bodyPr rtlCol="0" anchor="ctr" wrap="square" tIns="36576" bIns="36576">
-            <a:noAutofit/>
-          </a:bodyPr>
-          <a:lstStyle/>
-          <a:p>
-            <a:pPr algn="ctr" latinLnBrk="0">
-              <a:lnSpc>
-                <a:spcPct val="100000"/>
-              </a:lnSpc>
-              <a:spcBef>
-                <a:spcPts val="0"/>
-              </a:spcBef>
-              <a:spcAft>
-                <a:spcPts val="0"/>
-              </a:spcAft>
-            </a:pPr>
-            <a:r>
-              <a:rPr sz="1000" b="1">
-                <a:solidFill>
-                  <a:srgbClr val="0A2B45"/>
-                </a:solidFill>
-                <a:latin typeface="Microsoft YaHei"/>
-                <a:ea typeface="Microsoft YaHei"/>
-                <a:cs typeface="Microsoft YaHei"/>
-              </a:rPr>
-              <a:t>取证与检索</a:t>
-            </a:r>
-          </a:p>
-          <a:p>
-            <a:pPr algn="ctr" latinLnBrk="0">
-              <a:lnSpc>
-                <a:spcPct val="100000"/>
-              </a:lnSpc>
-              <a:spcBef>
-                <a:spcPts val="0"/>
-              </a:spcBef>
-              <a:spcAft>
-                <a:spcPts val="200"/>
-              </a:spcAft>
-            </a:pPr>
-            <a:r>
-              <a:rPr sz="750" b="0">
-                <a:solidFill>
-                  <a:srgbClr val="0F62CE"/>
-                </a:solidFill>
-                <a:latin typeface="Consolas"/>
-                <a:ea typeface="Microsoft YaHei"/>
-                <a:cs typeface="Microsoft YaHei"/>
-              </a:rPr>
-              <a:t>planner_diagnostics.py</a:t>
-            </a:r>
-          </a:p>
-          <a:p>
-            <a:pPr algn="ctr" latinLnBrk="0">
-              <a:lnSpc>
-                <a:spcPct val="100000"/>
-              </a:lnSpc>
-              <a:spcBef>
-                <a:spcPts val="0"/>
-              </a:spcBef>
-              <a:spcAft>
-                <a:spcPts val="0"/>
-              </a:spcAft>
-            </a:pPr>
-            <a:r>
-              <a:rPr sz="800" b="0">
-                <a:solidFill>
-                  <a:srgbClr val="1B4D69"/>
-                </a:solidFill>
-                <a:latin typeface="Microsoft YaHei"/>
-                <a:ea typeface="Microsoft YaHei"/>
-                <a:cs typeface="Microsoft YaHei"/>
-              </a:rPr>
-              <a:t>源码只读 · attempts/ · planner/ · probes/ 按需调取</a:t>
-            </a:r>
-          </a:p>
-          <a:p>
-            <a:pPr algn="ctr" latinLnBrk="0">
-              <a:lnSpc>
-                <a:spcPct val="100000"/>
-              </a:lnSpc>
-              <a:spcBef>
-                <a:spcPts val="0"/>
-              </a:spcBef>
-              <a:spcAft>
-                <a:spcPts val="0"/>
-              </a:spcAft>
-            </a:pPr>
-            <a:r>
-              <a:rPr sz="800" b="0">
-                <a:solidFill>
-                  <a:srgbClr val="1B4D69"/>
-                </a:solidFill>
-                <a:latin typeface="Microsoft YaHei"/>
-                <a:ea typeface="Microsoft YaHei"/>
-                <a:cs typeface="Microsoft YaHei"/>
-              </a:rPr>
-              <a:t>有界探针：独立进程 · 产物 ≤ 64 KiB</a:t>
-            </a:r>
-          </a:p>
-        </p:txBody>
-      </p:sp>
-      <p:sp>
-        <p:nvSpPr>
-          <p:cNvPr id="48" name="Rounded Rectangle 47"/>
-          <p:cNvSpPr/>
-          <p:nvPr/>
-        </p:nvSpPr>
-        <p:spPr>
-          <a:xfrm>
-            <a:off x="8449056" y="2523744"/>
-            <a:ext cx="3065983" cy="1188720"/>
-          </a:xfrm>
-          <a:prstGeom prst="roundRect">
-            <a:avLst>
-              <a:gd name="adj" fmla="val 6153"/>
-            </a:avLst>
-          </a:prstGeom>
-          <a:solidFill>
-            <a:srgbClr val="FBE6D4"/>
-          </a:solidFill>
-          <a:ln w="15875">
-            <a:solidFill>
-              <a:srgbClr val="D2690C"/>
-            </a:solidFill>
-          </a:ln>
-        </p:spPr>
-        <p:txBody>
-          <a:bodyPr rtlCol="0" anchor="ctr"/>
-          <a:lstStyle/>
-          <a:p>
-            <a:pPr algn="ctr"/>
-          </a:p>
-        </p:txBody>
-      </p:sp>
-      <p:sp>
-        <p:nvSpPr>
-          <p:cNvPr id="49" name="TextBox 48"/>
-          <p:cNvSpPr txBox="1"/>
-          <p:nvPr/>
-        </p:nvSpPr>
-        <p:spPr>
-          <a:xfrm>
-            <a:off x="8449056" y="2569463"/>
-            <a:ext cx="3065983" cy="237744"/>
-          </a:xfrm>
-          <a:prstGeom prst="rect">
-            <a:avLst/>
-          </a:prstGeom>
-          <a:noFill/>
-        </p:spPr>
-        <p:txBody>
-          <a:bodyPr wrap="square" anchor="ctr" lIns="0" tIns="0" rIns="0" bIns="0">
-            <a:noAutofit/>
-          </a:bodyPr>
-          <a:lstStyle/>
-          <a:p>
-            <a:pPr algn="ctr" latinLnBrk="0">
-              <a:lnSpc>
-                <a:spcPct val="100000"/>
-              </a:lnSpc>
-              <a:spcBef>
-                <a:spcPts val="0"/>
-              </a:spcBef>
-              <a:spcAft>
-                <a:spcPts val="0"/>
-              </a:spcAft>
-            </a:pPr>
-            <a:r>
-              <a:rPr sz="1100" b="1">
-                <a:solidFill>
-                  <a:srgbClr val="0A2B45"/>
-                </a:solidFill>
-                <a:latin typeface="Microsoft YaHei"/>
-                <a:ea typeface="Microsoft YaHei"/>
-                <a:cs typeface="Microsoft YaHei"/>
-              </a:rPr>
-              <a:t>规划器</a:t>
-            </a:r>
-            <a:r>
-              <a:rPr sz="850" b="1">
-                <a:solidFill>
-                  <a:srgbClr val="C2570A"/>
-                </a:solidFill>
-                <a:latin typeface="Microsoft YaHei"/>
-                <a:ea typeface="Microsoft YaHei"/>
-                <a:cs typeface="Microsoft YaHei"/>
-              </a:rPr>
-              <a:t>　Codex 外部托管会话</a:t>
-            </a:r>
-          </a:p>
-        </p:txBody>
-      </p:sp>
-      <p:sp>
-        <p:nvSpPr>
-          <p:cNvPr id="50" name="Rounded Rectangle 49"/>
-          <p:cNvSpPr/>
-          <p:nvPr/>
-        </p:nvSpPr>
-        <p:spPr>
-          <a:xfrm>
-            <a:off x="9323679" y="2834639"/>
-            <a:ext cx="1316736" cy="219456"/>
-          </a:xfrm>
-          <a:prstGeom prst="roundRect">
-            <a:avLst>
-              <a:gd name="adj" fmla="val 50000"/>
-            </a:avLst>
-          </a:prstGeom>
-          <a:solidFill>
-            <a:srgbClr val="D2690C"/>
-          </a:solidFill>
-          <a:ln>
-            <a:noFill/>
-          </a:ln>
-        </p:spPr>
-        <p:txBody>
-          <a:bodyPr rtlCol="0" anchor="ctr" wrap="square" lIns="36576" tIns="0" rIns="36576" bIns="0">
-            <a:noAutofit/>
-          </a:bodyPr>
-          <a:lstStyle/>
-          <a:p>
-            <a:pPr algn="ctr" latinLnBrk="0">
-              <a:lnSpc>
-                <a:spcPct val="100000"/>
-              </a:lnSpc>
-              <a:spcBef>
-                <a:spcPts val="0"/>
-              </a:spcBef>
-              <a:spcAft>
-                <a:spcPts val="0"/>
-              </a:spcAft>
-            </a:pPr>
-            <a:r>
-              <a:rPr sz="800" b="1">
-                <a:solidFill>
-                  <a:srgbClr val="FFFFFF"/>
-                </a:solidFill>
-                <a:latin typeface="Microsoft YaHei"/>
-                <a:ea typeface="Microsoft YaHei"/>
-                <a:cs typeface="Microsoft YaHei"/>
-              </a:rPr>
-              <a:t>大模型唯一介入点</a:t>
-            </a:r>
-          </a:p>
-        </p:txBody>
-      </p:sp>
-      <p:sp>
-        <p:nvSpPr>
-          <p:cNvPr id="51" name="TextBox 50"/>
-          <p:cNvSpPr txBox="1"/>
-          <p:nvPr/>
-        </p:nvSpPr>
-        <p:spPr>
-          <a:xfrm>
-            <a:off x="8503920" y="3090672"/>
-            <a:ext cx="2956255" cy="566928"/>
-          </a:xfrm>
-          <a:prstGeom prst="rect">
-            <a:avLst/>
-          </a:prstGeom>
-          <a:noFill/>
-        </p:spPr>
-        <p:txBody>
-          <a:bodyPr wrap="square" anchor="ctr" lIns="0" tIns="0" rIns="0" bIns="0">
-            <a:noAutofit/>
-          </a:bodyPr>
-          <a:lstStyle/>
-          <a:p>
-            <a:pPr algn="ctr" latinLnBrk="0">
-              <a:lnSpc>
-                <a:spcPct val="100000"/>
-              </a:lnSpc>
-              <a:spcBef>
-                <a:spcPts val="0"/>
-              </a:spcBef>
-              <a:spcAft>
-                <a:spcPts val="0"/>
-              </a:spcAft>
-            </a:pPr>
-            <a:r>
-              <a:rPr sz="800" b="0">
-                <a:solidFill>
-                  <a:srgbClr val="1B4D69"/>
-                </a:solidFill>
-                <a:latin typeface="Microsoft YaHei"/>
-                <a:ea typeface="Microsoft YaHei"/>
-                <a:cs typeface="Microsoft YaHei"/>
-              </a:rPr>
-              <a:t>读证据形成假设，提出结构化动作</a:t>
-            </a:r>
-          </a:p>
-          <a:p>
-            <a:pPr algn="ctr" latinLnBrk="0">
-              <a:lnSpc>
-                <a:spcPct val="100000"/>
-              </a:lnSpc>
-              <a:spcBef>
-                <a:spcPts val="0"/>
-              </a:spcBef>
-              <a:spcAft>
-                <a:spcPts val="0"/>
-              </a:spcAft>
-            </a:pPr>
-            <a:r>
-              <a:rPr sz="800" b="0">
-                <a:solidFill>
-                  <a:srgbClr val="1B4D69"/>
-                </a:solidFill>
-                <a:latin typeface="Microsoft YaHei"/>
-                <a:ea typeface="Microsoft YaHei"/>
-                <a:cs typeface="Microsoft YaHei"/>
-              </a:rPr>
-              <a:t>动作：</a:t>
-            </a:r>
-            <a:r>
-              <a:rPr sz="750" b="0">
-                <a:solidFill>
-                  <a:srgbClr val="C2570A"/>
-                </a:solidFill>
-                <a:latin typeface="Consolas"/>
-                <a:ea typeface="Microsoft YaHei"/>
-                <a:cs typeface="Microsoft YaHei"/>
-              </a:rPr>
-              <a:t>read · search · list · probe · patch · stop</a:t>
-            </a:r>
-          </a:p>
-          <a:p>
-            <a:pPr algn="ctr" latinLnBrk="0">
-              <a:lnSpc>
-                <a:spcPct val="100000"/>
-              </a:lnSpc>
-              <a:spcBef>
-                <a:spcPts val="0"/>
-              </a:spcBef>
-              <a:spcAft>
-                <a:spcPts val="0"/>
-              </a:spcAft>
-            </a:pPr>
-            <a:r>
-              <a:rPr sz="800" b="1">
-                <a:solidFill>
-                  <a:srgbClr val="C2570A"/>
-                </a:solidFill>
-                <a:latin typeface="Microsoft YaHei"/>
-                <a:ea typeface="Microsoft YaHei"/>
-                <a:cs typeface="Microsoft YaHei"/>
-              </a:rPr>
-              <a:t>硬约束：不能自行宣告成功</a:t>
-            </a:r>
-          </a:p>
-        </p:txBody>
-      </p:sp>
-      <p:cxnSp>
-        <p:nvCxnSpPr>
-          <p:cNvPr id="52" name="Connector 51"/>
-          <p:cNvCxnSpPr/>
-          <p:nvPr/>
-        </p:nvCxnSpPr>
-        <p:spPr>
-          <a:xfrm>
-            <a:off x="9982047" y="2386584"/>
-            <a:ext cx="0" cy="128016"/>
-          </a:xfrm>
-          <a:prstGeom prst="line">
-            <a:avLst/>
-          </a:prstGeom>
-          <a:ln w="19050">
-            <a:solidFill>
-              <a:srgbClr val="D2690C"/>
-            </a:solidFill>
-            <a:tailEnd type="triangle" w="med" len="med"/>
-          </a:ln>
-        </p:spPr>
-      </p:cxnSp>
-      <p:sp>
-        <p:nvSpPr>
-          <p:cNvPr id="53" name="Rounded Rectangle 52"/>
-          <p:cNvSpPr/>
-          <p:nvPr/>
-        </p:nvSpPr>
-        <p:spPr>
-          <a:xfrm>
-            <a:off x="8449056" y="3858768"/>
-            <a:ext cx="3065983" cy="676656"/>
-          </a:xfrm>
-          <a:prstGeom prst="roundRect">
-            <a:avLst>
-              <a:gd name="adj" fmla="val 10810"/>
-            </a:avLst>
-          </a:prstGeom>
-          <a:solidFill>
-            <a:srgbClr val="E6F0FC"/>
-          </a:solidFill>
-          <a:ln w="12700">
-            <a:solidFill>
-              <a:srgbClr val="0F62CE"/>
-            </a:solidFill>
-          </a:ln>
-        </p:spPr>
-        <p:txBody>
-          <a:bodyPr rtlCol="0" anchor="ctr" wrap="square" tIns="36576" bIns="36576">
-            <a:noAutofit/>
-          </a:bodyPr>
-          <a:lstStyle/>
-          <a:p>
-            <a:pPr algn="ctr" latinLnBrk="0">
-              <a:lnSpc>
-                <a:spcPct val="100000"/>
-              </a:lnSpc>
-              <a:spcBef>
-                <a:spcPts val="0"/>
-              </a:spcBef>
-              <a:spcAft>
-                <a:spcPts val="0"/>
-              </a:spcAft>
-            </a:pPr>
-            <a:r>
-              <a:rPr sz="1000" b="1">
-                <a:solidFill>
-                  <a:srgbClr val="0A2B45"/>
-                </a:solidFill>
-                <a:latin typeface="Microsoft YaHei"/>
-                <a:ea typeface="Microsoft YaHei"/>
-                <a:cs typeface="Microsoft YaHei"/>
-              </a:rPr>
-              <a:t>构建与真机实测</a:t>
-            </a:r>
-          </a:p>
-          <a:p>
-            <a:pPr algn="ctr" latinLnBrk="0">
-              <a:lnSpc>
-                <a:spcPct val="100000"/>
-              </a:lnSpc>
-              <a:spcBef>
-                <a:spcPts val="0"/>
-              </a:spcBef>
-              <a:spcAft>
-                <a:spcPts val="200"/>
-              </a:spcAft>
-            </a:pPr>
-            <a:r>
-              <a:rPr sz="750" b="0">
-                <a:solidFill>
-                  <a:srgbClr val="0F62CE"/>
-                </a:solidFill>
-                <a:latin typeface="Consolas"/>
-                <a:ea typeface="Microsoft YaHei"/>
-                <a:cs typeface="Microsoft YaHei"/>
-              </a:rPr>
-              <a:t>git_workspace.py</a:t>
-            </a:r>
-          </a:p>
-          <a:p>
-            <a:pPr algn="ctr" latinLnBrk="0">
-              <a:lnSpc>
-                <a:spcPct val="100000"/>
-              </a:lnSpc>
-              <a:spcBef>
-                <a:spcPts val="0"/>
-              </a:spcBef>
-              <a:spcAft>
-                <a:spcPts val="0"/>
-              </a:spcAft>
-            </a:pPr>
-            <a:r>
-              <a:rPr sz="800" b="0">
-                <a:solidFill>
-                  <a:srgbClr val="1B4D69"/>
-                </a:solidFill>
-                <a:latin typeface="Microsoft YaHei"/>
-                <a:ea typeface="Microsoft YaHei"/>
-                <a:cs typeface="Microsoft YaHei"/>
-              </a:rPr>
-              <a:t>原位建版本 · 登记构建 · 起停服务</a:t>
-            </a:r>
-          </a:p>
-          <a:p>
-            <a:pPr algn="ctr" latinLnBrk="0">
-              <a:lnSpc>
-                <a:spcPct val="100000"/>
-              </a:lnSpc>
-              <a:spcBef>
-                <a:spcPts val="0"/>
-              </a:spcBef>
-              <a:spcAft>
-                <a:spcPts val="0"/>
-              </a:spcAft>
-            </a:pPr>
-            <a:r>
-              <a:rPr sz="800" b="0">
-                <a:solidFill>
-                  <a:srgbClr val="1B4D69"/>
-                </a:solidFill>
-                <a:latin typeface="Microsoft YaHei"/>
-                <a:ea typeface="Microsoft YaHei"/>
-                <a:cs typeface="Microsoft YaHei"/>
-              </a:rPr>
-              <a:t>M100 物理卡 · 精确重测</a:t>
-            </a:r>
-          </a:p>
-        </p:txBody>
-      </p:sp>
-      <p:cxnSp>
-        <p:nvCxnSpPr>
-          <p:cNvPr id="54" name="Connector 53"/>
-          <p:cNvCxnSpPr/>
-          <p:nvPr/>
-        </p:nvCxnSpPr>
-        <p:spPr>
-          <a:xfrm>
-            <a:off x="9982047" y="3721607"/>
-            <a:ext cx="0" cy="128017"/>
-          </a:xfrm>
-          <a:prstGeom prst="line">
-            <a:avLst/>
-          </a:prstGeom>
-          <a:ln w="19050">
-            <a:solidFill>
-              <a:srgbClr val="0F62CE"/>
-            </a:solidFill>
-            <a:tailEnd type="triangle" w="med" len="med"/>
-          </a:ln>
-        </p:spPr>
-      </p:cxnSp>
-      <p:sp>
-        <p:nvSpPr>
-          <p:cNvPr id="55" name="Rounded Rectangle 54"/>
-          <p:cNvSpPr/>
-          <p:nvPr/>
-        </p:nvSpPr>
-        <p:spPr>
-          <a:xfrm>
-            <a:off x="8449056" y="4681728"/>
-            <a:ext cx="3065983" cy="768096"/>
-          </a:xfrm>
-          <a:prstGeom prst="roundRect">
-            <a:avLst>
-              <a:gd name="adj" fmla="val 9523"/>
-            </a:avLst>
-          </a:prstGeom>
-          <a:solidFill>
-            <a:srgbClr val="E6F0FC"/>
-          </a:solidFill>
-          <a:ln w="12700">
-            <a:solidFill>
-              <a:srgbClr val="0F62CE"/>
-            </a:solidFill>
-          </a:ln>
-        </p:spPr>
-        <p:txBody>
-          <a:bodyPr rtlCol="0" anchor="ctr" wrap="square" tIns="36576" bIns="36576">
-            <a:noAutofit/>
-          </a:bodyPr>
-          <a:lstStyle/>
-          <a:p>
-            <a:pPr algn="ctr" latinLnBrk="0">
-              <a:lnSpc>
-                <a:spcPct val="100000"/>
-              </a:lnSpc>
-              <a:spcBef>
-                <a:spcPts val="0"/>
-              </a:spcBef>
-              <a:spcAft>
-                <a:spcPts val="0"/>
-              </a:spcAft>
-            </a:pPr>
-            <a:r>
-              <a:rPr sz="1000" b="1">
-                <a:solidFill>
-                  <a:srgbClr val="0A2B45"/>
-                </a:solidFill>
-                <a:latin typeface="Microsoft YaHei"/>
-                <a:ea typeface="Microsoft YaHei"/>
-                <a:cs typeface="Microsoft YaHei"/>
-              </a:rPr>
-              <a:t>四道门禁核验</a:t>
-            </a:r>
-          </a:p>
-          <a:p>
-            <a:pPr algn="ctr" latinLnBrk="0">
-              <a:lnSpc>
-                <a:spcPct val="100000"/>
-              </a:lnSpc>
-              <a:spcBef>
-                <a:spcPts val="0"/>
-              </a:spcBef>
-              <a:spcAft>
-                <a:spcPts val="200"/>
-              </a:spcAft>
-            </a:pPr>
-            <a:r>
-              <a:rPr sz="750" b="0">
-                <a:solidFill>
-                  <a:srgbClr val="0F62CE"/>
-                </a:solidFill>
-                <a:latin typeface="Consolas"/>
-                <a:ea typeface="Microsoft YaHei"/>
-                <a:cs typeface="Microsoft YaHei"/>
-              </a:rPr>
-              <a:t>selfiterate_gates.py</a:t>
-            </a:r>
-          </a:p>
-          <a:p>
-            <a:pPr algn="ctr" latinLnBrk="0">
-              <a:lnSpc>
-                <a:spcPct val="100000"/>
-              </a:lnSpc>
-              <a:spcBef>
-                <a:spcPts val="0"/>
-              </a:spcBef>
-              <a:spcAft>
-                <a:spcPts val="0"/>
-              </a:spcAft>
-            </a:pPr>
-            <a:r>
-              <a:rPr sz="800" b="0">
-                <a:solidFill>
-                  <a:srgbClr val="1B4D69"/>
-                </a:solidFill>
-                <a:latin typeface="Microsoft YaHei"/>
-                <a:ea typeface="Microsoft YaHei"/>
-                <a:cs typeface="Microsoft YaHei"/>
-              </a:rPr>
-              <a:t>C 设备微测 ≥ 2%　① 数值门 ≤ 0.03</a:t>
-            </a:r>
-          </a:p>
-          <a:p>
-            <a:pPr algn="ctr" latinLnBrk="0">
-              <a:lnSpc>
-                <a:spcPct val="100000"/>
-              </a:lnSpc>
-              <a:spcBef>
-                <a:spcPts val="0"/>
-              </a:spcBef>
-              <a:spcAft>
-                <a:spcPts val="0"/>
-              </a:spcAft>
-            </a:pPr>
-            <a:r>
-              <a:rPr sz="800" b="0">
-                <a:solidFill>
-                  <a:srgbClr val="1B4D69"/>
-                </a:solidFill>
-                <a:latin typeface="Microsoft YaHei"/>
-                <a:ea typeface="Microsoft YaHei"/>
-                <a:cs typeface="Microsoft YaHei"/>
-              </a:rPr>
-              <a:t>② 质量门 不降　D 整模三方 A/B</a:t>
-            </a:r>
-          </a:p>
-        </p:txBody>
-      </p:sp>
-      <p:cxnSp>
-        <p:nvCxnSpPr>
-          <p:cNvPr id="56" name="Connector 55"/>
-          <p:cNvCxnSpPr/>
-          <p:nvPr/>
-        </p:nvCxnSpPr>
-        <p:spPr>
-          <a:xfrm>
-            <a:off x="9982047" y="4544568"/>
-            <a:ext cx="0" cy="128016"/>
-          </a:xfrm>
-          <a:prstGeom prst="line">
-            <a:avLst/>
-          </a:prstGeom>
-          <a:ln w="19050">
-            <a:solidFill>
-              <a:srgbClr val="0F62CE"/>
-            </a:solidFill>
-            <a:tailEnd type="triangle" w="med" len="med"/>
-          </a:ln>
-        </p:spPr>
-      </p:cxnSp>
-      <p:cxnSp>
-        <p:nvCxnSpPr>
-          <p:cNvPr id="57" name="Connector 56"/>
-          <p:cNvCxnSpPr/>
-          <p:nvPr/>
-        </p:nvCxnSpPr>
-        <p:spPr>
-          <a:xfrm>
-            <a:off x="2615184" y="2103120"/>
-            <a:ext cx="402336" cy="0"/>
-          </a:xfrm>
-          <a:prstGeom prst="line">
-            <a:avLst/>
-          </a:prstGeom>
-          <a:ln w="19050">
-            <a:solidFill>
-              <a:srgbClr val="40708B"/>
-            </a:solidFill>
-            <a:tailEnd type="triangle" w="med" len="med"/>
-          </a:ln>
-        </p:spPr>
-      </p:cxnSp>
-      <p:sp>
-        <p:nvSpPr>
-          <p:cNvPr id="58" name="Freeform 57"/>
-          <p:cNvSpPr/>
-          <p:nvPr/>
-        </p:nvSpPr>
-        <p:spPr>
-          <a:xfrm>
-            <a:off x="2615184" y="2340864"/>
-            <a:ext cx="402336" cy="1207008"/>
-          </a:xfrm>
-          <a:custGeom>
-            <a:avLst/>
-            <a:gdLst/>
-            <a:ahLst/>
-            <a:cxnLst/>
-            <a:rect l="l" t="t" r="r" b="b"/>
-            <a:pathLst>
-              <a:path w="402336" h="1207008">
-                <a:moveTo>
-                  <a:pt x="0" y="1207008"/>
-                </a:moveTo>
-                <a:lnTo>
-                  <a:pt x="256032" y="1207008"/>
-                </a:lnTo>
-                <a:lnTo>
-                  <a:pt x="256032" y="0"/>
-                </a:lnTo>
-                <a:lnTo>
-                  <a:pt x="402336" y="0"/>
-                </a:lnTo>
-              </a:path>
-            </a:pathLst>
-          </a:custGeom>
-          <a:noFill/>
-          <a:ln w="19050">
-            <a:solidFill>
-              <a:srgbClr val="D2690C"/>
-            </a:solidFill>
-            <a:tailEnd type="triangle" w="med" len="med"/>
-          </a:ln>
-        </p:spPr>
-        <p:txBody>
-          <a:bodyPr rtlCol="0" anchor="ctr"/>
-          <a:lstStyle/>
-          <a:p>
-            <a:pPr algn="ctr"/>
-          </a:p>
-        </p:txBody>
-      </p:sp>
-      <p:cxnSp>
-        <p:nvCxnSpPr>
-          <p:cNvPr id="59" name="Connector 58"/>
-          <p:cNvCxnSpPr/>
-          <p:nvPr/>
-        </p:nvCxnSpPr>
-        <p:spPr>
-          <a:xfrm>
-            <a:off x="6547104" y="2066544"/>
-            <a:ext cx="1865376" cy="0"/>
-          </a:xfrm>
-          <a:prstGeom prst="line">
-            <a:avLst/>
-          </a:prstGeom>
-          <a:ln w="19050">
-            <a:solidFill>
-              <a:srgbClr val="0F62CE"/>
-            </a:solidFill>
-            <a:tailEnd type="triangle" w="med" len="med"/>
-          </a:ln>
-        </p:spPr>
-      </p:cxnSp>
-      <p:sp>
-        <p:nvSpPr>
-          <p:cNvPr id="60" name="TextBox 59"/>
-          <p:cNvSpPr txBox="1"/>
-          <p:nvPr/>
-        </p:nvSpPr>
-        <p:spPr>
-          <a:xfrm>
-            <a:off x="7031736" y="1700784"/>
-            <a:ext cx="1225296" cy="219456"/>
-          </a:xfrm>
-          <a:prstGeom prst="rect">
-            <a:avLst/>
-          </a:prstGeom>
-          <a:noFill/>
-        </p:spPr>
-        <p:txBody>
-          <a:bodyPr wrap="square" anchor="ctr" lIns="0" tIns="0" rIns="0" bIns="0">
-            <a:noAutofit/>
-          </a:bodyPr>
-          <a:lstStyle/>
-          <a:p>
-            <a:pPr algn="ctr" latinLnBrk="0">
-              <a:lnSpc>
-                <a:spcPct val="100000"/>
-              </a:lnSpc>
-              <a:spcBef>
-                <a:spcPts val="0"/>
-              </a:spcBef>
-              <a:spcAft>
-                <a:spcPts val="0"/>
-              </a:spcAft>
-            </a:pPr>
-            <a:r>
-              <a:rPr sz="1050" b="1">
-                <a:solidFill>
-                  <a:srgbClr val="0F62CE"/>
-                </a:solidFill>
-                <a:latin typeface="Microsoft YaHei"/>
-                <a:ea typeface="Microsoft YaHei"/>
-                <a:cs typeface="Microsoft YaHei"/>
-              </a:rPr>
-              <a:t>逐个试验</a:t>
-            </a:r>
-          </a:p>
-        </p:txBody>
-      </p:sp>
-      <p:sp>
-        <p:nvSpPr>
-          <p:cNvPr id="61" name="TextBox 60"/>
-          <p:cNvSpPr txBox="1"/>
-          <p:nvPr/>
-        </p:nvSpPr>
-        <p:spPr>
-          <a:xfrm>
-            <a:off x="7031736" y="2121408"/>
-            <a:ext cx="1225296" cy="201168"/>
-          </a:xfrm>
-          <a:prstGeom prst="rect">
-            <a:avLst/>
-          </a:prstGeom>
-          <a:noFill/>
-        </p:spPr>
-        <p:txBody>
-          <a:bodyPr wrap="square" anchor="ctr" lIns="0" tIns="0" rIns="0" bIns="0">
-            <a:noAutofit/>
-          </a:bodyPr>
-          <a:lstStyle/>
-          <a:p>
-            <a:pPr algn="ctr" latinLnBrk="0">
-              <a:lnSpc>
-                <a:spcPct val="100000"/>
-              </a:lnSpc>
-              <a:spcBef>
-                <a:spcPts val="0"/>
-              </a:spcBef>
-              <a:spcAft>
-                <a:spcPts val="0"/>
-              </a:spcAft>
-            </a:pPr>
-            <a:r>
-              <a:rPr sz="750" b="0">
-                <a:solidFill>
-                  <a:srgbClr val="40708B"/>
-                </a:solidFill>
-                <a:latin typeface="Consolas"/>
-                <a:ea typeface="Microsoft YaHei"/>
-                <a:cs typeface="Microsoft YaHei"/>
-              </a:rPr>
-              <a:t>mailbox 请求 ≤ 28 KB</a:t>
-            </a:r>
-          </a:p>
-        </p:txBody>
-      </p:sp>
-      <p:sp>
-        <p:nvSpPr>
-          <p:cNvPr id="62" name="Freeform 61"/>
-          <p:cNvSpPr/>
-          <p:nvPr/>
-        </p:nvSpPr>
-        <p:spPr>
-          <a:xfrm>
-            <a:off x="6876288" y="3950208"/>
-            <a:ext cx="1536192" cy="1115568"/>
-          </a:xfrm>
-          <a:custGeom>
-            <a:avLst/>
-            <a:gdLst/>
-            <a:ahLst/>
-            <a:cxnLst/>
-            <a:rect l="l" t="t" r="r" b="b"/>
-            <a:pathLst>
-              <a:path w="1536192" h="1115568">
-                <a:moveTo>
-                  <a:pt x="1536192" y="1115568"/>
-                </a:moveTo>
-                <a:lnTo>
-                  <a:pt x="768095" y="1115568"/>
-                </a:lnTo>
-                <a:lnTo>
-                  <a:pt x="768095" y="0"/>
-                </a:lnTo>
-                <a:lnTo>
-                  <a:pt x="0" y="0"/>
-                </a:lnTo>
-              </a:path>
-            </a:pathLst>
-          </a:custGeom>
-          <a:noFill/>
-          <a:ln w="19050">
-            <a:solidFill>
-              <a:srgbClr val="D2690C"/>
-            </a:solidFill>
-            <a:tailEnd type="triangle" w="med" len="med"/>
-          </a:ln>
-        </p:spPr>
-        <p:txBody>
-          <a:bodyPr rtlCol="0" anchor="ctr"/>
-          <a:lstStyle/>
-          <a:p>
-            <a:pPr algn="ctr"/>
-          </a:p>
-        </p:txBody>
-      </p:sp>
-      <p:sp>
-        <p:nvSpPr>
-          <p:cNvPr id="63" name="Rounded Rectangle 62"/>
-          <p:cNvSpPr/>
-          <p:nvPr/>
-        </p:nvSpPr>
-        <p:spPr>
-          <a:xfrm>
-            <a:off x="7406640" y="4261103"/>
-            <a:ext cx="475488" cy="201168"/>
+            <a:off x="4215384" y="3611879"/>
+            <a:ext cx="768096" cy="201168"/>
           </a:xfrm>
           <a:prstGeom prst="roundRect">
             <a:avLst>
@@ -33985,7 +32878,7 @@
               </a:spcAft>
             </a:pPr>
             <a:r>
-              <a:rPr sz="900" b="1">
+              <a:rPr sz="800" b="1">
                 <a:solidFill>
                   <a:srgbClr val="C2570A"/>
                 </a:solidFill>
@@ -33993,21 +32886,21 @@
                 <a:ea typeface="Microsoft YaHei"/>
                 <a:cs typeface="Microsoft YaHei"/>
               </a:rPr>
-              <a:t>回执</a:t>
-            </a:r>
-          </a:p>
-        </p:txBody>
-      </p:sp>
-      <p:sp>
-        <p:nvSpPr>
-          <p:cNvPr id="64" name="Rounded Rectangle 63"/>
+              <a:t>方案 + 补丁</a:t>
+            </a:r>
+          </a:p>
+        </p:txBody>
+      </p:sp>
+      <p:sp>
+        <p:nvSpPr>
+          <p:cNvPr id="57" name="Rounded Rectangle 56"/>
           <p:cNvSpPr/>
           <p:nvPr/>
         </p:nvSpPr>
         <p:spPr>
           <a:xfrm>
-            <a:off x="7095744" y="4535423"/>
-            <a:ext cx="1097280" cy="201168"/>
+            <a:off x="7397496" y="3611879"/>
+            <a:ext cx="621792" cy="201168"/>
           </a:xfrm>
           <a:prstGeom prst="roundRect">
             <a:avLst>
@@ -34019,7 +32912,7 @@
           </a:solidFill>
           <a:ln w="9525">
             <a:solidFill>
-              <a:srgbClr val="40708B"/>
+              <a:srgbClr val="B4382F"/>
             </a:solidFill>
           </a:ln>
         </p:spPr>
@@ -34041,169 +32934,29 @@
               </a:spcAft>
             </a:pPr>
             <a:r>
-              <a:rPr sz="750" b="1">
-                <a:solidFill>
-                  <a:srgbClr val="40708B"/>
-                </a:solidFill>
-                <a:latin typeface="Microsoft YaHei"/>
-                <a:ea typeface="Microsoft YaHei"/>
-                <a:cs typeface="Microsoft YaHei"/>
-              </a:rPr>
-              <a:t>门禁判决 · 被拒原因</a:t>
-            </a:r>
-          </a:p>
-        </p:txBody>
-      </p:sp>
-      <p:cxnSp>
-        <p:nvCxnSpPr>
-          <p:cNvPr id="65" name="Connector 64"/>
-          <p:cNvCxnSpPr/>
-          <p:nvPr/>
-        </p:nvCxnSpPr>
-        <p:spPr>
-          <a:xfrm flipV="1">
-            <a:off x="5650992" y="2414016"/>
-            <a:ext cx="0" cy="1133856"/>
-          </a:xfrm>
-          <a:prstGeom prst="line">
-            <a:avLst/>
-          </a:prstGeom>
-          <a:ln w="19050">
-            <a:solidFill>
-              <a:srgbClr val="0F62CE"/>
-            </a:solidFill>
-            <a:tailEnd type="triangle" w="med" len="med"/>
-          </a:ln>
-        </p:spPr>
-      </p:cxnSp>
-      <p:sp>
-        <p:nvSpPr>
-          <p:cNvPr id="66" name="TextBox 65"/>
-          <p:cNvSpPr txBox="1"/>
-          <p:nvPr/>
-        </p:nvSpPr>
-        <p:spPr>
-          <a:xfrm>
-            <a:off x="5742431" y="2761488"/>
-            <a:ext cx="1097279" cy="548640"/>
-          </a:xfrm>
-          <a:prstGeom prst="rect">
-            <a:avLst/>
-          </a:prstGeom>
-          <a:noFill/>
-        </p:spPr>
-        <p:txBody>
-          <a:bodyPr wrap="square" anchor="ctr" lIns="0" tIns="0" rIns="0" bIns="0">
-            <a:noAutofit/>
-          </a:bodyPr>
-          <a:lstStyle/>
-          <a:p>
-            <a:pPr algn="l" latinLnBrk="0">
-              <a:lnSpc>
-                <a:spcPct val="100000"/>
-              </a:lnSpc>
-              <a:spcBef>
-                <a:spcPts val="0"/>
-              </a:spcBef>
-              <a:spcAft>
-                <a:spcPts val="200"/>
-              </a:spcAft>
-            </a:pPr>
-            <a:r>
-              <a:rPr sz="950" b="1">
-                <a:solidFill>
-                  <a:srgbClr val="0F62CE"/>
-                </a:solidFill>
-                <a:latin typeface="Microsoft YaHei"/>
-                <a:ea typeface="Microsoft YaHei"/>
-                <a:cs typeface="Microsoft YaHei"/>
-              </a:rPr>
-              <a:t>迭代 × 35 轮</a:t>
-            </a:r>
-          </a:p>
-          <a:p>
-            <a:pPr algn="l" latinLnBrk="0">
-              <a:lnSpc>
-                <a:spcPct val="100000"/>
-              </a:lnSpc>
-              <a:spcBef>
-                <a:spcPts val="0"/>
-              </a:spcBef>
-              <a:spcAft>
-                <a:spcPts val="0"/>
-              </a:spcAft>
-            </a:pPr>
-            <a:r>
-              <a:rPr sz="800" b="0">
-                <a:solidFill>
-                  <a:srgbClr val="1B4D69"/>
-                </a:solidFill>
-                <a:latin typeface="Microsoft YaHei"/>
-                <a:ea typeface="Microsoft YaHei"/>
-                <a:cs typeface="Microsoft YaHei"/>
-              </a:rPr>
-              <a:t>按新基线重排试验队列</a:t>
-            </a:r>
-          </a:p>
-        </p:txBody>
-      </p:sp>
-      <p:sp>
-        <p:nvSpPr>
-          <p:cNvPr id="67" name="Freeform 66"/>
+              <a:rPr sz="800" b="1">
+                <a:solidFill>
+                  <a:srgbClr val="B4382F"/>
+                </a:solidFill>
+                <a:latin typeface="Microsoft YaHei"/>
+                <a:ea typeface="Microsoft YaHei"/>
+                <a:cs typeface="Microsoft YaHei"/>
+              </a:rPr>
+              <a:t>被拒原因</a:t>
+            </a:r>
+          </a:p>
+        </p:txBody>
+      </p:sp>
+      <p:sp>
+        <p:nvSpPr>
+          <p:cNvPr id="58" name="Rounded Rectangle 57"/>
           <p:cNvSpPr/>
           <p:nvPr/>
         </p:nvSpPr>
         <p:spPr>
           <a:xfrm>
-            <a:off x="2615184" y="4352544"/>
-            <a:ext cx="3035808" cy="768096"/>
-          </a:xfrm>
-          <a:custGeom>
-            <a:avLst/>
-            <a:gdLst/>
-            <a:ahLst/>
-            <a:cxnLst/>
-            <a:rect l="l" t="t" r="r" b="b"/>
-            <a:pathLst>
-              <a:path w="3035808" h="768096">
-                <a:moveTo>
-                  <a:pt x="3035808" y="0"/>
-                </a:moveTo>
-                <a:lnTo>
-                  <a:pt x="3035808" y="768096"/>
-                </a:lnTo>
-                <a:lnTo>
-                  <a:pt x="0" y="768096"/>
-                </a:lnTo>
-              </a:path>
-            </a:pathLst>
-          </a:custGeom>
-          <a:noFill/>
-          <a:ln w="19050">
-            <a:solidFill>
-              <a:srgbClr val="40708B"/>
-            </a:solidFill>
-            <a:tailEnd type="triangle" w="med" len="med"/>
-          </a:ln>
-        </p:spPr>
-        <p:txBody>
-          <a:bodyPr rtlCol="0" anchor="ctr"/>
-          <a:lstStyle/>
-          <a:p>
-            <a:pPr algn="ctr"/>
-          </a:p>
-        </p:txBody>
-      </p:sp>
-      <p:sp>
-        <p:nvSpPr>
-          <p:cNvPr id="68" name="Rounded Rectangle 67"/>
-          <p:cNvSpPr/>
-          <p:nvPr/>
-        </p:nvSpPr>
-        <p:spPr>
-          <a:xfrm>
-            <a:off x="2999232" y="5020055"/>
-            <a:ext cx="822960" cy="201168"/>
+            <a:off x="6108192" y="5769864"/>
+            <a:ext cx="1005840" cy="201168"/>
           </a:xfrm>
           <a:prstGeom prst="roundRect">
             <a:avLst>
@@ -34215,7 +32968,7 @@
           </a:solidFill>
           <a:ln w="9525">
             <a:solidFill>
-              <a:srgbClr val="40708B"/>
+              <a:srgbClr val="17795F"/>
             </a:solidFill>
           </a:ln>
         </p:spPr>
@@ -34239,147 +32992,20 @@
             <a:r>
               <a:rPr sz="800" b="1">
                 <a:solidFill>
-                  <a:srgbClr val="40708B"/>
-                </a:solidFill>
-                <a:latin typeface="Microsoft YaHei"/>
-                <a:ea typeface="Microsoft YaHei"/>
-                <a:cs typeface="Microsoft YaHei"/>
-              </a:rPr>
-              <a:t>全部完成</a:t>
-            </a:r>
-          </a:p>
-        </p:txBody>
-      </p:sp>
-      <p:sp>
-        <p:nvSpPr>
-          <p:cNvPr id="69" name="Rectangle 68"/>
-          <p:cNvSpPr/>
-          <p:nvPr/>
-        </p:nvSpPr>
-        <p:spPr>
-          <a:xfrm>
-            <a:off x="548640" y="5907024"/>
-            <a:ext cx="11094415" cy="530352"/>
-          </a:xfrm>
-          <a:prstGeom prst="rect">
-            <a:avLst/>
-          </a:prstGeom>
-          <a:solidFill>
-            <a:srgbClr val="C9E1FC"/>
-          </a:solidFill>
-          <a:ln>
-            <a:noFill/>
-          </a:ln>
-        </p:spPr>
-        <p:txBody>
-          <a:bodyPr rtlCol="0" anchor="ctr"/>
-          <a:lstStyle/>
-          <a:p>
-            <a:pPr algn="ctr"/>
-          </a:p>
-        </p:txBody>
-      </p:sp>
-      <p:sp>
-        <p:nvSpPr>
-          <p:cNvPr id="70" name="Rectangle 69"/>
-          <p:cNvSpPr/>
-          <p:nvPr/>
-        </p:nvSpPr>
-        <p:spPr>
-          <a:xfrm>
-            <a:off x="548640" y="5907024"/>
-            <a:ext cx="73152" cy="530352"/>
-          </a:xfrm>
-          <a:prstGeom prst="rect">
-            <a:avLst/>
-          </a:prstGeom>
-          <a:solidFill>
-            <a:srgbClr val="0F62CE"/>
-          </a:solidFill>
-          <a:ln>
-            <a:noFill/>
-          </a:ln>
-        </p:spPr>
-        <p:txBody>
-          <a:bodyPr rtlCol="0" anchor="ctr"/>
-          <a:lstStyle/>
-          <a:p>
-            <a:pPr algn="ctr"/>
-          </a:p>
-        </p:txBody>
-      </p:sp>
-      <p:sp>
-        <p:nvSpPr>
-          <p:cNvPr id="71" name="TextBox 70"/>
-          <p:cNvSpPr txBox="1"/>
-          <p:nvPr/>
-        </p:nvSpPr>
-        <p:spPr>
-          <a:xfrm>
-            <a:off x="877824" y="5907024"/>
-            <a:ext cx="10436047" cy="530352"/>
-          </a:xfrm>
-          <a:prstGeom prst="rect">
-            <a:avLst/>
-          </a:prstGeom>
-          <a:noFill/>
-        </p:spPr>
-        <p:txBody>
-          <a:bodyPr wrap="square" anchor="ctr" lIns="0" tIns="0" rIns="0" bIns="0">
-            <a:noAutofit/>
-          </a:bodyPr>
-          <a:lstStyle/>
-          <a:p>
-            <a:pPr algn="l" latinLnBrk="0">
-              <a:lnSpc>
-                <a:spcPct val="100000"/>
-              </a:lnSpc>
-              <a:spcBef>
-                <a:spcPts val="0"/>
-              </a:spcBef>
-              <a:spcAft>
-                <a:spcPts val="0"/>
-              </a:spcAft>
-            </a:pPr>
-            <a:r>
-              <a:rPr sz="1200" b="1">
-                <a:solidFill>
-                  <a:srgbClr val="0F62CE"/>
-                </a:solidFill>
-                <a:latin typeface="Microsoft YaHei"/>
-                <a:ea typeface="Microsoft YaHei"/>
-                <a:cs typeface="Microsoft YaHei"/>
-              </a:rPr>
-              <a:t>核心设计</a:t>
-            </a:r>
-            <a:r>
-              <a:rPr sz="1200" b="0">
-                <a:solidFill>
-                  <a:srgbClr val="7FA4BA"/>
-                </a:solidFill>
-                <a:latin typeface="Microsoft YaHei"/>
-                <a:ea typeface="Microsoft YaHei"/>
-                <a:cs typeface="Microsoft YaHei"/>
-              </a:rPr>
-              <a:t>　｜　</a:t>
-            </a:r>
-            <a:r>
-              <a:rPr sz="1300" b="1">
-                <a:solidFill>
-                  <a:srgbClr val="0A2B45"/>
-                </a:solidFill>
-                <a:latin typeface="Microsoft YaHei"/>
-                <a:ea typeface="Microsoft YaHei"/>
-                <a:cs typeface="Microsoft YaHei"/>
-              </a:rPr>
-              <a:t>规划器只提假设与补丁；数值、质量与性能收益全部由控制器独立核验</a:t>
-            </a:r>
-          </a:p>
-        </p:txBody>
-      </p:sp>
-      <p:sp>
-        <p:nvSpPr>
-          <p:cNvPr id="72" name="TextBox 71"/>
+                  <a:srgbClr val="17795F"/>
+                </a:solidFill>
+                <a:latin typeface="Microsoft YaHei"/>
+                <a:ea typeface="Microsoft YaHei"/>
+                <a:cs typeface="Microsoft YaHei"/>
+              </a:rPr>
+              <a:t>新基线 · 下一轮</a:t>
+            </a:r>
+          </a:p>
+        </p:txBody>
+      </p:sp>
+      <p:sp>
+        <p:nvSpPr>
+          <p:cNvPr id="59" name="TextBox 58"/>
           <p:cNvSpPr txBox="1"/>
           <p:nvPr/>
         </p:nvSpPr>

--- a/slides/m100_agent_final_deck.pptx
+++ b/slides/m100_agent_final_deck.pptx
@@ -30618,7 +30618,7 @@
                 <a:ea typeface="Microsoft YaHei"/>
                 <a:cs typeface="Microsoft YaHei"/>
               </a:rPr>
-              <a:t>大模型只提方案，成败全部由确定性实测判定；人只在三处介入</a:t>
+              <a:t>规划器只提方案，取证、建版与判决全部由确定性的控制器完成；编号 1–8 对应上一页八步</a:t>
             </a:r>
           </a:p>
         </p:txBody>
@@ -30631,8 +30631,8 @@
         </p:nvSpPr>
         <p:spPr>
           <a:xfrm>
-            <a:off x="1444752" y="1280160"/>
-            <a:ext cx="10198303" cy="822959"/>
+            <a:off x="1005840" y="1298448"/>
+            <a:ext cx="10637215" cy="420624"/>
           </a:xfrm>
           <a:prstGeom prst="rect">
             <a:avLst/>
@@ -30662,8 +30662,8 @@
         </p:nvSpPr>
         <p:spPr>
           <a:xfrm>
-            <a:off x="548640" y="1280160"/>
-            <a:ext cx="896112" cy="822959"/>
+            <a:off x="548640" y="1298448"/>
+            <a:ext cx="457200" cy="420624"/>
           </a:xfrm>
           <a:prstGeom prst="rect">
             <a:avLst/>
@@ -30678,6 +30678,355 @@
           </a:ln>
         </p:spPr>
         <p:txBody>
+          <a:bodyPr rtlCol="0" anchor="ctr" wrap="square" lIns="18288" tIns="0" rIns="18288" bIns="0">
+            <a:noAutofit/>
+          </a:bodyPr>
+          <a:lstStyle/>
+          <a:p>
+            <a:pPr algn="ctr" latinLnBrk="0">
+              <a:lnSpc>
+                <a:spcPct val="100000"/>
+              </a:lnSpc>
+              <a:spcBef>
+                <a:spcPts val="0"/>
+              </a:spcBef>
+              <a:spcAft>
+                <a:spcPts val="0"/>
+              </a:spcAft>
+            </a:pPr>
+            <a:r>
+              <a:rPr sz="1200" b="1">
+                <a:solidFill>
+                  <a:srgbClr val="FFFFFF"/>
+                </a:solidFill>
+                <a:latin typeface="Microsoft YaHei"/>
+                <a:ea typeface="Microsoft YaHei"/>
+                <a:cs typeface="Microsoft YaHei"/>
+              </a:rPr>
+              <a:t>人</a:t>
+            </a:r>
+          </a:p>
+          <a:p>
+            <a:pPr algn="ctr" latinLnBrk="0">
+              <a:lnSpc>
+                <a:spcPct val="100000"/>
+              </a:lnSpc>
+              <a:spcBef>
+                <a:spcPts val="0"/>
+              </a:spcBef>
+              <a:spcAft>
+                <a:spcPts val="0"/>
+              </a:spcAft>
+            </a:pPr>
+            <a:r>
+              <a:rPr sz="750" b="0">
+                <a:solidFill>
+                  <a:srgbClr val="FFFFFF"/>
+                </a:solidFill>
+                <a:latin typeface="Microsoft YaHei"/>
+                <a:ea typeface="Microsoft YaHei"/>
+                <a:cs typeface="Microsoft YaHei"/>
+              </a:rPr>
+              <a:t>三处介入</a:t>
+            </a:r>
+          </a:p>
+        </p:txBody>
+      </p:sp>
+      <p:sp>
+        <p:nvSpPr>
+          <p:cNvPr id="8" name="Rounded Rectangle 7"/>
+          <p:cNvSpPr/>
+          <p:nvPr/>
+        </p:nvSpPr>
+        <p:spPr>
+          <a:xfrm>
+            <a:off x="1097280" y="1353312"/>
+            <a:ext cx="1280160" cy="310896"/>
+          </a:xfrm>
+          <a:prstGeom prst="roundRect">
+            <a:avLst>
+              <a:gd name="adj" fmla="val 17647"/>
+            </a:avLst>
+          </a:prstGeom>
+          <a:solidFill>
+            <a:srgbClr val="FFFFFF"/>
+          </a:solidFill>
+          <a:ln w="9525">
+            <a:solidFill>
+              <a:srgbClr val="1B4D69"/>
+            </a:solidFill>
+          </a:ln>
+        </p:spPr>
+        <p:txBody>
+          <a:bodyPr rtlCol="0" anchor="ctr" wrap="square" lIns="54864" tIns="0" rIns="54864" bIns="0">
+            <a:noAutofit/>
+          </a:bodyPr>
+          <a:lstStyle/>
+          <a:p>
+            <a:pPr algn="ctr" latinLnBrk="0">
+              <a:lnSpc>
+                <a:spcPct val="100000"/>
+              </a:lnSpc>
+              <a:spcBef>
+                <a:spcPts val="0"/>
+              </a:spcBef>
+              <a:spcAft>
+                <a:spcPts val="0"/>
+              </a:spcAft>
+            </a:pPr>
+            <a:r>
+              <a:rPr sz="1000" b="1">
+                <a:solidFill>
+                  <a:srgbClr val="0A2B45"/>
+                </a:solidFill>
+                <a:latin typeface="Microsoft YaHei"/>
+                <a:ea typeface="Microsoft YaHei"/>
+                <a:cs typeface="Microsoft YaHei"/>
+              </a:rPr>
+              <a:t>定并冻结任务合同</a:t>
+            </a:r>
+          </a:p>
+        </p:txBody>
+      </p:sp>
+      <p:sp>
+        <p:nvSpPr>
+          <p:cNvPr id="9" name="Rounded Rectangle 8"/>
+          <p:cNvSpPr/>
+          <p:nvPr/>
+        </p:nvSpPr>
+        <p:spPr>
+          <a:xfrm>
+            <a:off x="3204972" y="1353312"/>
+            <a:ext cx="1883664" cy="310896"/>
+          </a:xfrm>
+          <a:prstGeom prst="roundRect">
+            <a:avLst>
+              <a:gd name="adj" fmla="val 17647"/>
+            </a:avLst>
+          </a:prstGeom>
+          <a:solidFill>
+            <a:srgbClr val="FFFFFF"/>
+          </a:solidFill>
+          <a:ln w="9525">
+            <a:solidFill>
+              <a:srgbClr val="1B4D69"/>
+            </a:solidFill>
+          </a:ln>
+        </p:spPr>
+        <p:txBody>
+          <a:bodyPr rtlCol="0" anchor="ctr" wrap="square" lIns="54864" tIns="0" rIns="54864" bIns="0">
+            <a:noAutofit/>
+          </a:bodyPr>
+          <a:lstStyle/>
+          <a:p>
+            <a:pPr algn="ctr" latinLnBrk="0">
+              <a:lnSpc>
+                <a:spcPct val="100000"/>
+              </a:lnSpc>
+              <a:spcBef>
+                <a:spcPts val="0"/>
+              </a:spcBef>
+              <a:spcAft>
+                <a:spcPts val="0"/>
+              </a:spcAft>
+            </a:pPr>
+            <a:r>
+              <a:rPr sz="1000" b="1">
+                <a:solidFill>
+                  <a:srgbClr val="0A2B45"/>
+                </a:solidFill>
+                <a:latin typeface="Microsoft YaHei"/>
+                <a:ea typeface="Microsoft YaHei"/>
+                <a:cs typeface="Microsoft YaHei"/>
+              </a:rPr>
+              <a:t>协同复杂改动</a:t>
+            </a:r>
+            <a:r>
+              <a:rPr sz="850" b="0">
+                <a:solidFill>
+                  <a:srgbClr val="1B4D69"/>
+                </a:solidFill>
+                <a:latin typeface="Microsoft YaHei"/>
+                <a:ea typeface="Microsoft YaHei"/>
+                <a:cs typeface="Microsoft YaHei"/>
+              </a:rPr>
+              <a:t>　同样要过四道门</a:t>
+            </a:r>
+          </a:p>
+        </p:txBody>
+      </p:sp>
+      <p:sp>
+        <p:nvSpPr>
+          <p:cNvPr id="10" name="Rounded Rectangle 9"/>
+          <p:cNvSpPr/>
+          <p:nvPr/>
+        </p:nvSpPr>
+        <p:spPr>
+          <a:xfrm>
+            <a:off x="10058400" y="1353312"/>
+            <a:ext cx="1097280" cy="310896"/>
+          </a:xfrm>
+          <a:prstGeom prst="roundRect">
+            <a:avLst>
+              <a:gd name="adj" fmla="val 17647"/>
+            </a:avLst>
+          </a:prstGeom>
+          <a:solidFill>
+            <a:srgbClr val="FFFFFF"/>
+          </a:solidFill>
+          <a:ln w="9525">
+            <a:solidFill>
+              <a:srgbClr val="1B4D69"/>
+            </a:solidFill>
+          </a:ln>
+        </p:spPr>
+        <p:txBody>
+          <a:bodyPr rtlCol="0" anchor="ctr" wrap="square" lIns="54864" tIns="0" rIns="54864" bIns="0">
+            <a:noAutofit/>
+          </a:bodyPr>
+          <a:lstStyle/>
+          <a:p>
+            <a:pPr algn="ctr" latinLnBrk="0">
+              <a:lnSpc>
+                <a:spcPct val="100000"/>
+              </a:lnSpc>
+              <a:spcBef>
+                <a:spcPts val="0"/>
+              </a:spcBef>
+              <a:spcAft>
+                <a:spcPts val="0"/>
+              </a:spcAft>
+            </a:pPr>
+            <a:r>
+              <a:rPr sz="1000" b="1">
+                <a:solidFill>
+                  <a:srgbClr val="0A2B45"/>
+                </a:solidFill>
+                <a:latin typeface="Microsoft YaHei"/>
+                <a:ea typeface="Microsoft YaHei"/>
+                <a:cs typeface="Microsoft YaHei"/>
+              </a:rPr>
+              <a:t>验收最优版本</a:t>
+            </a:r>
+          </a:p>
+        </p:txBody>
+      </p:sp>
+      <p:sp>
+        <p:nvSpPr>
+          <p:cNvPr id="11" name="Rectangle 10"/>
+          <p:cNvSpPr/>
+          <p:nvPr/>
+        </p:nvSpPr>
+        <p:spPr>
+          <a:xfrm>
+            <a:off x="548640" y="1993392"/>
+            <a:ext cx="1709928" cy="1005840"/>
+          </a:xfrm>
+          <a:prstGeom prst="rect">
+            <a:avLst/>
+          </a:prstGeom>
+          <a:solidFill>
+            <a:srgbClr val="FFFFFF"/>
+          </a:solidFill>
+          <a:ln w="12700">
+            <a:solidFill>
+              <a:srgbClr val="7FA4BA"/>
+            </a:solidFill>
+            <a:prstDash val="dash"/>
+          </a:ln>
+        </p:spPr>
+        <p:txBody>
+          <a:bodyPr rtlCol="0" anchor="ctr"/>
+          <a:lstStyle/>
+          <a:p>
+            <a:pPr algn="ctr"/>
+          </a:p>
+        </p:txBody>
+      </p:sp>
+      <p:sp>
+        <p:nvSpPr>
+          <p:cNvPr id="12" name="TextBox 11"/>
+          <p:cNvSpPr txBox="1"/>
+          <p:nvPr/>
+        </p:nvSpPr>
+        <p:spPr>
+          <a:xfrm>
+            <a:off x="658368" y="2029968"/>
+            <a:ext cx="1563624" cy="237744"/>
+          </a:xfrm>
+          <a:prstGeom prst="rect">
+            <a:avLst/>
+          </a:prstGeom>
+          <a:noFill/>
+        </p:spPr>
+        <p:txBody>
+          <a:bodyPr wrap="square" anchor="ctr" lIns="0" tIns="0" rIns="0" bIns="0">
+            <a:noAutofit/>
+          </a:bodyPr>
+          <a:lstStyle/>
+          <a:p>
+            <a:pPr algn="l" latinLnBrk="0">
+              <a:lnSpc>
+                <a:spcPct val="100000"/>
+              </a:lnSpc>
+              <a:spcBef>
+                <a:spcPts val="0"/>
+              </a:spcBef>
+              <a:spcAft>
+                <a:spcPts val="0"/>
+              </a:spcAft>
+            </a:pPr>
+            <a:r>
+              <a:rPr sz="1100" b="1">
+                <a:solidFill>
+                  <a:srgbClr val="0A2B45"/>
+                </a:solidFill>
+                <a:latin typeface="Microsoft YaHei"/>
+                <a:ea typeface="Microsoft YaHei"/>
+                <a:cs typeface="Microsoft YaHei"/>
+              </a:rPr>
+              <a:t>任务合同</a:t>
+            </a:r>
+            <a:r>
+              <a:rPr sz="800" b="0">
+                <a:solidFill>
+                  <a:srgbClr val="40708B"/>
+                </a:solidFill>
+                <a:latin typeface="Microsoft YaHei"/>
+                <a:ea typeface="Microsoft YaHei"/>
+                <a:cs typeface="Microsoft YaHei"/>
+              </a:rPr>
+              <a:t>　冻结 · 哈希校验</a:t>
+            </a:r>
+          </a:p>
+        </p:txBody>
+      </p:sp>
+      <p:sp>
+        <p:nvSpPr>
+          <p:cNvPr id="13" name="Rounded Rectangle 12"/>
+          <p:cNvSpPr/>
+          <p:nvPr/>
+        </p:nvSpPr>
+        <p:spPr>
+          <a:xfrm>
+            <a:off x="658368" y="2304288"/>
+            <a:ext cx="1490472" cy="192024"/>
+          </a:xfrm>
+          <a:prstGeom prst="roundRect">
+            <a:avLst>
+              <a:gd name="adj" fmla="val 50000"/>
+            </a:avLst>
+          </a:prstGeom>
+          <a:solidFill>
+            <a:srgbClr val="F2F8FD"/>
+          </a:solidFill>
+          <a:ln w="9525">
+            <a:solidFill>
+              <a:srgbClr val="CFE3F0"/>
+            </a:solidFill>
+          </a:ln>
+        </p:spPr>
+        <p:txBody>
           <a:bodyPr rtlCol="0" anchor="ctr" wrap="square" lIns="36576" tIns="0" rIns="36576" bIns="0">
             <a:noAutofit/>
           </a:bodyPr>
@@ -30691,11 +31040,333 @@
                 <a:spcPts val="0"/>
               </a:spcBef>
               <a:spcAft>
-                <a:spcPts val="200"/>
-              </a:spcAft>
-            </a:pPr>
-            <a:r>
-              <a:rPr sz="1300" b="1">
+                <a:spcPts val="0"/>
+              </a:spcAft>
+            </a:pPr>
+            <a:r>
+              <a:rPr sz="850" b="0">
+                <a:solidFill>
+                  <a:srgbClr val="1B4D69"/>
+                </a:solidFill>
+                <a:latin typeface="Microsoft YaHei"/>
+                <a:ea typeface="Microsoft YaHei"/>
+                <a:cs typeface="Microsoft YaHei"/>
+              </a:rPr>
+              <a:t>模型 · 精度 · 负载</a:t>
+            </a:r>
+          </a:p>
+        </p:txBody>
+      </p:sp>
+      <p:sp>
+        <p:nvSpPr>
+          <p:cNvPr id="14" name="Rounded Rectangle 13"/>
+          <p:cNvSpPr/>
+          <p:nvPr/>
+        </p:nvSpPr>
+        <p:spPr>
+          <a:xfrm>
+            <a:off x="658368" y="2532888"/>
+            <a:ext cx="1490472" cy="192024"/>
+          </a:xfrm>
+          <a:prstGeom prst="roundRect">
+            <a:avLst>
+              <a:gd name="adj" fmla="val 50000"/>
+            </a:avLst>
+          </a:prstGeom>
+          <a:solidFill>
+            <a:srgbClr val="F2F8FD"/>
+          </a:solidFill>
+          <a:ln w="9525">
+            <a:solidFill>
+              <a:srgbClr val="CFE3F0"/>
+            </a:solidFill>
+          </a:ln>
+        </p:spPr>
+        <p:txBody>
+          <a:bodyPr rtlCol="0" anchor="ctr" wrap="square" lIns="36576" tIns="0" rIns="36576" bIns="0">
+            <a:noAutofit/>
+          </a:bodyPr>
+          <a:lstStyle/>
+          <a:p>
+            <a:pPr algn="ctr" latinLnBrk="0">
+              <a:lnSpc>
+                <a:spcPct val="100000"/>
+              </a:lnSpc>
+              <a:spcBef>
+                <a:spcPts val="0"/>
+              </a:spcBef>
+              <a:spcAft>
+                <a:spcPts val="0"/>
+              </a:spcAft>
+            </a:pPr>
+            <a:r>
+              <a:rPr sz="850" b="0">
+                <a:solidFill>
+                  <a:srgbClr val="1B4D69"/>
+                </a:solidFill>
+                <a:latin typeface="Microsoft YaHei"/>
+                <a:ea typeface="Microsoft YaHei"/>
+                <a:cs typeface="Microsoft YaHei"/>
+              </a:rPr>
+              <a:t>门限 · 预算</a:t>
+            </a:r>
+          </a:p>
+        </p:txBody>
+      </p:sp>
+      <p:sp>
+        <p:nvSpPr>
+          <p:cNvPr id="15" name="Rounded Rectangle 14"/>
+          <p:cNvSpPr/>
+          <p:nvPr/>
+        </p:nvSpPr>
+        <p:spPr>
+          <a:xfrm>
+            <a:off x="658368" y="2761488"/>
+            <a:ext cx="1490472" cy="192024"/>
+          </a:xfrm>
+          <a:prstGeom prst="roundRect">
+            <a:avLst>
+              <a:gd name="adj" fmla="val 50000"/>
+            </a:avLst>
+          </a:prstGeom>
+          <a:solidFill>
+            <a:srgbClr val="F2F8FD"/>
+          </a:solidFill>
+          <a:ln w="9525">
+            <a:solidFill>
+              <a:srgbClr val="CFE3F0"/>
+            </a:solidFill>
+          </a:ln>
+        </p:spPr>
+        <p:txBody>
+          <a:bodyPr rtlCol="0" anchor="ctr" wrap="square" lIns="36576" tIns="0" rIns="36576" bIns="0">
+            <a:noAutofit/>
+          </a:bodyPr>
+          <a:lstStyle/>
+          <a:p>
+            <a:pPr algn="ctr" latinLnBrk="0">
+              <a:lnSpc>
+                <a:spcPct val="100000"/>
+              </a:lnSpc>
+              <a:spcBef>
+                <a:spcPts val="0"/>
+              </a:spcBef>
+              <a:spcAft>
+                <a:spcPts val="0"/>
+              </a:spcAft>
+            </a:pPr>
+            <a:r>
+              <a:rPr sz="850" b="0">
+                <a:solidFill>
+                  <a:srgbClr val="1B4D69"/>
+                </a:solidFill>
+                <a:latin typeface="Microsoft YaHei"/>
+                <a:ea typeface="Microsoft YaHei"/>
+                <a:cs typeface="Microsoft YaHei"/>
+              </a:rPr>
+              <a:t>探针 · MMStar60 基准</a:t>
+            </a:r>
+          </a:p>
+        </p:txBody>
+      </p:sp>
+      <p:sp>
+        <p:nvSpPr>
+          <p:cNvPr id="16" name="Rounded Rectangle 15"/>
+          <p:cNvSpPr/>
+          <p:nvPr/>
+        </p:nvSpPr>
+        <p:spPr>
+          <a:xfrm>
+            <a:off x="2514600" y="1993392"/>
+            <a:ext cx="5989320" cy="1005840"/>
+          </a:xfrm>
+          <a:prstGeom prst="roundRect">
+            <a:avLst>
+              <a:gd name="adj" fmla="val 7272"/>
+            </a:avLst>
+          </a:prstGeom>
+          <a:solidFill>
+            <a:srgbClr val="FBE6D4"/>
+          </a:solidFill>
+          <a:ln w="15875">
+            <a:solidFill>
+              <a:srgbClr val="D2690C"/>
+            </a:solidFill>
+          </a:ln>
+        </p:spPr>
+        <p:txBody>
+          <a:bodyPr rtlCol="0" anchor="ctr"/>
+          <a:lstStyle/>
+          <a:p>
+            <a:pPr algn="ctr"/>
+          </a:p>
+        </p:txBody>
+      </p:sp>
+      <p:sp>
+        <p:nvSpPr>
+          <p:cNvPr id="17" name="TextBox 16"/>
+          <p:cNvSpPr txBox="1"/>
+          <p:nvPr/>
+        </p:nvSpPr>
+        <p:spPr>
+          <a:xfrm>
+            <a:off x="2642616" y="2020824"/>
+            <a:ext cx="5733288" cy="237744"/>
+          </a:xfrm>
+          <a:prstGeom prst="rect">
+            <a:avLst/>
+          </a:prstGeom>
+          <a:noFill/>
+        </p:spPr>
+        <p:txBody>
+          <a:bodyPr wrap="square" anchor="ctr" lIns="0" tIns="0" rIns="0" bIns="0">
+            <a:noAutofit/>
+          </a:bodyPr>
+          <a:lstStyle/>
+          <a:p>
+            <a:pPr algn="l" latinLnBrk="0">
+              <a:lnSpc>
+                <a:spcPct val="100000"/>
+              </a:lnSpc>
+              <a:spcBef>
+                <a:spcPts val="0"/>
+              </a:spcBef>
+              <a:spcAft>
+                <a:spcPts val="0"/>
+              </a:spcAft>
+            </a:pPr>
+            <a:r>
+              <a:rPr sz="1200" b="1">
+                <a:solidFill>
+                  <a:srgbClr val="C2570A"/>
+                </a:solidFill>
+                <a:latin typeface="Microsoft YaHei"/>
+                <a:ea typeface="Microsoft YaHei"/>
+                <a:cs typeface="Microsoft YaHei"/>
+              </a:rPr>
+              <a:t>规划器</a:t>
+            </a:r>
+            <a:r>
+              <a:rPr sz="850" b="0">
+                <a:solidFill>
+                  <a:srgbClr val="1B4D69"/>
+                </a:solidFill>
+                <a:latin typeface="Microsoft YaHei"/>
+                <a:ea typeface="Microsoft YaHei"/>
+                <a:cs typeface="Microsoft YaHei"/>
+              </a:rPr>
+              <a:t>　外部 Agent · 经 URL 接入，可长跑 · 全系统唯一用大模型</a:t>
+            </a:r>
+          </a:p>
+        </p:txBody>
+      </p:sp>
+      <p:sp>
+        <p:nvSpPr>
+          <p:cNvPr id="18" name="Rounded Rectangle 17"/>
+          <p:cNvSpPr/>
+          <p:nvPr/>
+        </p:nvSpPr>
+        <p:spPr>
+          <a:xfrm>
+            <a:off x="2624328" y="2295144"/>
+            <a:ext cx="3044952" cy="310896"/>
+          </a:xfrm>
+          <a:prstGeom prst="roundRect">
+            <a:avLst>
+              <a:gd name="adj" fmla="val 17647"/>
+            </a:avLst>
+          </a:prstGeom>
+          <a:solidFill>
+            <a:srgbClr val="FFFFFF"/>
+          </a:solidFill>
+          <a:ln w="9525">
+            <a:solidFill>
+              <a:srgbClr val="D2690C"/>
+            </a:solidFill>
+          </a:ln>
+        </p:spPr>
+        <p:txBody>
+          <a:bodyPr rtlCol="0" anchor="ctr" wrap="square" lIns="329184" tIns="0" rIns="54864" bIns="0">
+            <a:noAutofit/>
+          </a:bodyPr>
+          <a:lstStyle/>
+          <a:p>
+            <a:pPr algn="ctr" latinLnBrk="0">
+              <a:lnSpc>
+                <a:spcPct val="100000"/>
+              </a:lnSpc>
+              <a:spcBef>
+                <a:spcPts val="0"/>
+              </a:spcBef>
+              <a:spcAft>
+                <a:spcPts val="0"/>
+              </a:spcAft>
+            </a:pPr>
+            <a:r>
+              <a:rPr sz="1000" b="1">
+                <a:solidFill>
+                  <a:srgbClr val="0A2B45"/>
+                </a:solidFill>
+                <a:latin typeface="Microsoft YaHei"/>
+                <a:ea typeface="Microsoft YaHei"/>
+                <a:cs typeface="Microsoft YaHei"/>
+              </a:rPr>
+              <a:t>规划 Agent</a:t>
+            </a:r>
+            <a:r>
+              <a:rPr sz="850" b="0">
+                <a:solidFill>
+                  <a:srgbClr val="1B4D69"/>
+                </a:solidFill>
+                <a:latin typeface="Microsoft YaHei"/>
+                <a:ea typeface="Microsoft YaHei"/>
+                <a:cs typeface="Microsoft YaHei"/>
+              </a:rPr>
+              <a:t>　读源码与证据，提出假设与补丁</a:t>
+            </a:r>
+          </a:p>
+        </p:txBody>
+      </p:sp>
+      <p:sp>
+        <p:nvSpPr>
+          <p:cNvPr id="19" name="Oval 18"/>
+          <p:cNvSpPr/>
+          <p:nvPr/>
+        </p:nvSpPr>
+        <p:spPr>
+          <a:xfrm>
+            <a:off x="2697480" y="2340864"/>
+            <a:ext cx="219456" cy="219456"/>
+          </a:xfrm>
+          <a:prstGeom prst="ellipse">
+            <a:avLst/>
+          </a:prstGeom>
+          <a:solidFill>
+            <a:srgbClr val="D2690C"/>
+          </a:solidFill>
+          <a:ln>
+            <a:noFill/>
+          </a:ln>
+        </p:spPr>
+        <p:txBody>
+          <a:bodyPr rtlCol="0" anchor="ctr" wrap="square" lIns="0" tIns="0" rIns="0" bIns="0">
+            <a:noAutofit/>
+          </a:bodyPr>
+          <a:lstStyle/>
+          <a:p>
+            <a:pPr algn="ctr" latinLnBrk="0">
+              <a:lnSpc>
+                <a:spcPct val="100000"/>
+              </a:lnSpc>
+              <a:spcBef>
+                <a:spcPts val="0"/>
+              </a:spcBef>
+              <a:spcAft>
+                <a:spcPts val="0"/>
+              </a:spcAft>
+            </a:pPr>
+            <a:r>
+              <a:rPr sz="900" b="1">
                 <a:solidFill>
                   <a:srgbClr val="FFFFFF"/>
                 </a:solidFill>
@@ -30703,9 +31374,41 @@
                 <a:ea typeface="Microsoft YaHei"/>
                 <a:cs typeface="Microsoft YaHei"/>
               </a:rPr>
-              <a:t>人</a:t>
-            </a:r>
-          </a:p>
+              <a:t>4</a:t>
+            </a:r>
+          </a:p>
+        </p:txBody>
+      </p:sp>
+      <p:sp>
+        <p:nvSpPr>
+          <p:cNvPr id="20" name="Rounded Rectangle 19"/>
+          <p:cNvSpPr/>
+          <p:nvPr/>
+        </p:nvSpPr>
+        <p:spPr>
+          <a:xfrm>
+            <a:off x="5760720" y="2295144"/>
+            <a:ext cx="2633472" cy="310896"/>
+          </a:xfrm>
+          <a:prstGeom prst="roundRect">
+            <a:avLst>
+              <a:gd name="adj" fmla="val 17647"/>
+            </a:avLst>
+          </a:prstGeom>
+          <a:solidFill>
+            <a:srgbClr val="FFFFFF"/>
+          </a:solidFill>
+          <a:ln w="9525">
+            <a:solidFill>
+              <a:srgbClr val="D2690C"/>
+            </a:solidFill>
+          </a:ln>
+        </p:spPr>
+        <p:txBody>
+          <a:bodyPr rtlCol="0" anchor="ctr" wrap="square" lIns="54864" tIns="0" rIns="54864" bIns="0">
+            <a:noAutofit/>
+          </a:bodyPr>
+          <a:lstStyle/>
           <a:p>
             <a:pPr algn="ctr" latinLnBrk="0">
               <a:lnSpc>
@@ -30719,29 +31422,287 @@
               </a:spcAft>
             </a:pPr>
             <a:r>
+              <a:rPr sz="1000" b="1">
+                <a:solidFill>
+                  <a:srgbClr val="0A2B45"/>
+                </a:solidFill>
+                <a:latin typeface="Microsoft YaHei"/>
+                <a:ea typeface="Microsoft YaHei"/>
+                <a:cs typeface="Microsoft YaHei"/>
+              </a:rPr>
+              <a:t>skills 库</a:t>
+            </a:r>
+            <a:r>
               <a:rPr sz="850" b="0">
                 <a:solidFill>
-                  <a:srgbClr val="FFFFFF"/>
-                </a:solidFill>
-                <a:latin typeface="Microsoft YaHei"/>
-                <a:ea typeface="Microsoft YaHei"/>
-                <a:cs typeface="Microsoft YaHei"/>
-              </a:rPr>
-              <a:t>三处介入</a:t>
-            </a:r>
-          </a:p>
-        </p:txBody>
-      </p:sp>
-      <p:sp>
-        <p:nvSpPr>
-          <p:cNvPr id="8" name="Rectangle 7"/>
+                  <a:srgbClr val="1B4D69"/>
+                </a:solidFill>
+                <a:latin typeface="Microsoft YaHei"/>
+                <a:ea typeface="Microsoft YaHei"/>
+                <a:cs typeface="Microsoft YaHei"/>
+              </a:rPr>
+              <a:t>　按需检索，每轮 ≤ 2 份</a:t>
+            </a:r>
+          </a:p>
+        </p:txBody>
+      </p:sp>
+      <p:sp>
+        <p:nvSpPr>
+          <p:cNvPr id="21" name="Rounded Rectangle 20"/>
           <p:cNvSpPr/>
           <p:nvPr/>
         </p:nvSpPr>
         <p:spPr>
           <a:xfrm>
-            <a:off x="1444752" y="2103120"/>
-            <a:ext cx="10198303" cy="1609343"/>
+            <a:off x="2624328" y="2660904"/>
+            <a:ext cx="4325112" cy="274320"/>
+          </a:xfrm>
+          <a:prstGeom prst="roundRect">
+            <a:avLst>
+              <a:gd name="adj" fmla="val 20000"/>
+            </a:avLst>
+          </a:prstGeom>
+          <a:solidFill>
+            <a:srgbClr val="FFFFFF"/>
+          </a:solidFill>
+          <a:ln w="9525">
+            <a:solidFill>
+              <a:srgbClr val="D2690C"/>
+            </a:solidFill>
+          </a:ln>
+        </p:spPr>
+        <p:txBody>
+          <a:bodyPr rtlCol="0" anchor="ctr" wrap="square" lIns="54864" tIns="0" rIns="54864" bIns="0">
+            <a:noAutofit/>
+          </a:bodyPr>
+          <a:lstStyle/>
+          <a:p>
+            <a:pPr algn="ctr" latinLnBrk="0">
+              <a:lnSpc>
+                <a:spcPct val="100000"/>
+              </a:lnSpc>
+              <a:spcBef>
+                <a:spcPts val="0"/>
+              </a:spcBef>
+              <a:spcAft>
+                <a:spcPts val="0"/>
+              </a:spcAft>
+            </a:pPr>
+            <a:r>
+              <a:rPr sz="1000" b="1">
+                <a:solidFill>
+                  <a:srgbClr val="0A2B45"/>
+                </a:solidFill>
+                <a:latin typeface="Microsoft YaHei"/>
+                <a:ea typeface="Microsoft YaHei"/>
+                <a:cs typeface="Microsoft YaHei"/>
+              </a:rPr>
+              <a:t>信箱</a:t>
+            </a:r>
+            <a:r>
+              <a:rPr sz="850" b="0">
+                <a:solidFill>
+                  <a:srgbClr val="1B4D69"/>
+                </a:solidFill>
+                <a:latin typeface="Microsoft YaHei"/>
+                <a:ea typeface="Microsoft YaHei"/>
+                <a:cs typeface="Microsoft YaHei"/>
+              </a:rPr>
+              <a:t>　请求与回复逐条校验 ID · SHA · 格式，全部落盘</a:t>
+            </a:r>
+          </a:p>
+        </p:txBody>
+      </p:sp>
+      <p:sp>
+        <p:nvSpPr>
+          <p:cNvPr id="22" name="Rounded Rectangle 21"/>
+          <p:cNvSpPr/>
+          <p:nvPr/>
+        </p:nvSpPr>
+        <p:spPr>
+          <a:xfrm>
+            <a:off x="7040880" y="2660904"/>
+            <a:ext cx="1353312" cy="274320"/>
+          </a:xfrm>
+          <a:prstGeom prst="roundRect">
+            <a:avLst>
+              <a:gd name="adj" fmla="val 20000"/>
+            </a:avLst>
+          </a:prstGeom>
+          <a:solidFill>
+            <a:srgbClr val="FFFFFF"/>
+          </a:solidFill>
+          <a:ln w="9525">
+            <a:solidFill>
+              <a:srgbClr val="D2690C"/>
+            </a:solidFill>
+          </a:ln>
+        </p:spPr>
+        <p:txBody>
+          <a:bodyPr rtlCol="0" anchor="ctr" wrap="square" lIns="54864" tIns="0" rIns="54864" bIns="0">
+            <a:noAutofit/>
+          </a:bodyPr>
+          <a:lstStyle/>
+          <a:p>
+            <a:pPr algn="ctr" latinLnBrk="0">
+              <a:lnSpc>
+                <a:spcPct val="100000"/>
+              </a:lnSpc>
+              <a:spcBef>
+                <a:spcPts val="0"/>
+              </a:spcBef>
+              <a:spcAft>
+                <a:spcPts val="0"/>
+              </a:spcAft>
+            </a:pPr>
+            <a:r>
+              <a:rPr sz="1000" b="1">
+                <a:solidFill>
+                  <a:srgbClr val="0A2B45"/>
+                </a:solidFill>
+                <a:latin typeface="Microsoft YaHei"/>
+                <a:ea typeface="Microsoft YaHei"/>
+                <a:cs typeface="Microsoft YaHei"/>
+              </a:rPr>
+              <a:t>记忆</a:t>
+            </a:r>
+            <a:r>
+              <a:rPr sz="850" b="0">
+                <a:solidFill>
+                  <a:srgbClr val="1B4D69"/>
+                </a:solidFill>
+                <a:latin typeface="Microsoft YaHei"/>
+                <a:ea typeface="Microsoft YaHei"/>
+                <a:cs typeface="Microsoft YaHei"/>
+              </a:rPr>
+              <a:t>　摘要 + 被拒原因</a:t>
+            </a:r>
+          </a:p>
+        </p:txBody>
+      </p:sp>
+      <p:sp>
+        <p:nvSpPr>
+          <p:cNvPr id="23" name="Rounded Rectangle 22"/>
+          <p:cNvSpPr/>
+          <p:nvPr/>
+        </p:nvSpPr>
+        <p:spPr>
+          <a:xfrm>
+            <a:off x="548640" y="3383280"/>
+            <a:ext cx="11094415" cy="1975104"/>
+          </a:xfrm>
+          <a:prstGeom prst="roundRect">
+            <a:avLst>
+              <a:gd name="adj" fmla="val 4629"/>
+            </a:avLst>
+          </a:prstGeom>
+          <a:solidFill>
+            <a:srgbClr val="E6F0FC"/>
+          </a:solidFill>
+          <a:ln w="15875">
+            <a:solidFill>
+              <a:srgbClr val="0F62CE"/>
+            </a:solidFill>
+          </a:ln>
+        </p:spPr>
+        <p:txBody>
+          <a:bodyPr rtlCol="0" anchor="ctr"/>
+          <a:lstStyle/>
+          <a:p>
+            <a:pPr algn="ctr"/>
+          </a:p>
+        </p:txBody>
+      </p:sp>
+      <p:sp>
+        <p:nvSpPr>
+          <p:cNvPr id="24" name="TextBox 23"/>
+          <p:cNvSpPr txBox="1"/>
+          <p:nvPr/>
+        </p:nvSpPr>
+        <p:spPr>
+          <a:xfrm>
+            <a:off x="694944" y="3419856"/>
+            <a:ext cx="10801807" cy="256032"/>
+          </a:xfrm>
+          <a:prstGeom prst="rect">
+            <a:avLst/>
+          </a:prstGeom>
+          <a:noFill/>
+        </p:spPr>
+        <p:txBody>
+          <a:bodyPr wrap="square" anchor="ctr" lIns="0" tIns="0" rIns="0" bIns="0">
+            <a:noAutofit/>
+          </a:bodyPr>
+          <a:lstStyle/>
+          <a:p>
+            <a:pPr algn="l" latinLnBrk="0">
+              <a:lnSpc>
+                <a:spcPct val="100000"/>
+              </a:lnSpc>
+              <a:spcBef>
+                <a:spcPts val="0"/>
+              </a:spcBef>
+              <a:spcAft>
+                <a:spcPts val="0"/>
+              </a:spcAft>
+            </a:pPr>
+            <a:r>
+              <a:rPr sz="1250" b="1">
+                <a:solidFill>
+                  <a:srgbClr val="0F62CE"/>
+                </a:solidFill>
+                <a:latin typeface="Microsoft YaHei"/>
+                <a:ea typeface="Microsoft YaHei"/>
+                <a:cs typeface="Microsoft YaHei"/>
+              </a:rPr>
+              <a:t>控制器</a:t>
+            </a:r>
+            <a:r>
+              <a:rPr sz="850" b="0">
+                <a:solidFill>
+                  <a:srgbClr val="1B4D69"/>
+                </a:solidFill>
+                <a:latin typeface="Microsoft YaHei"/>
+                <a:ea typeface="Microsoft YaHei"/>
+                <a:cs typeface="Microsoft YaHei"/>
+              </a:rPr>
+              <a:t>　Python · 确定性 · 无大模型</a:t>
+            </a:r>
+            <a:r>
+              <a:rPr sz="900" b="0">
+                <a:solidFill>
+                  <a:srgbClr val="7FA4BA"/>
+                </a:solidFill>
+                <a:latin typeface="Microsoft YaHei"/>
+                <a:ea typeface="Microsoft YaHei"/>
+                <a:cs typeface="Microsoft YaHei"/>
+              </a:rPr>
+              <a:t>　｜　</a:t>
+            </a:r>
+            <a:r>
+              <a:rPr sz="850" b="0">
+                <a:solidFill>
+                  <a:srgbClr val="1B4D69"/>
+                </a:solidFill>
+                <a:latin typeface="Microsoft YaHei"/>
+                <a:ea typeface="Microsoft YaHei"/>
+                <a:cs typeface="Microsoft YaHei"/>
+              </a:rPr>
+              <a:t>调度状态机：设备锁 · 断点恢复 · 全部落盘 · 生成报告</a:t>
+            </a:r>
+          </a:p>
+        </p:txBody>
+      </p:sp>
+      <p:sp>
+        <p:nvSpPr>
+          <p:cNvPr id="25" name="Rectangle 24"/>
+          <p:cNvSpPr/>
+          <p:nvPr/>
+        </p:nvSpPr>
+        <p:spPr>
+          <a:xfrm>
+            <a:off x="658368" y="3730752"/>
+            <a:ext cx="4096512" cy="1554480"/>
           </a:xfrm>
           <a:prstGeom prst="rect">
             <a:avLst/>
@@ -30765,29 +31726,107 @@
       </p:sp>
       <p:sp>
         <p:nvSpPr>
-          <p:cNvPr id="9" name="Rectangle 8"/>
+          <p:cNvPr id="26" name="Rectangle 25"/>
           <p:cNvSpPr/>
           <p:nvPr/>
         </p:nvSpPr>
         <p:spPr>
           <a:xfrm>
-            <a:off x="548640" y="2103120"/>
-            <a:ext cx="896112" cy="1609343"/>
+            <a:off x="768096" y="3794760"/>
+            <a:ext cx="45720" cy="146304"/>
           </a:xfrm>
           <a:prstGeom prst="rect">
             <a:avLst/>
           </a:prstGeom>
           <a:solidFill>
-            <a:srgbClr val="D2690C"/>
+            <a:srgbClr val="17795F"/>
           </a:solidFill>
-          <a:ln w="19050">
+          <a:ln>
+            <a:noFill/>
+          </a:ln>
+        </p:spPr>
+        <p:txBody>
+          <a:bodyPr rtlCol="0" anchor="ctr"/>
+          <a:lstStyle/>
+          <a:p>
+            <a:pPr algn="ctr"/>
+          </a:p>
+        </p:txBody>
+      </p:sp>
+      <p:sp>
+        <p:nvSpPr>
+          <p:cNvPr id="27" name="TextBox 26"/>
+          <p:cNvSpPr txBox="1"/>
+          <p:nvPr/>
+        </p:nvSpPr>
+        <p:spPr>
+          <a:xfrm>
+            <a:off x="877824" y="3730752"/>
+            <a:ext cx="3803904" cy="256032"/>
+          </a:xfrm>
+          <a:prstGeom prst="rect">
+            <a:avLst/>
+          </a:prstGeom>
+          <a:noFill/>
+        </p:spPr>
+        <p:txBody>
+          <a:bodyPr wrap="square" anchor="ctr" lIns="0" tIns="0" rIns="0" bIns="0">
+            <a:noAutofit/>
+          </a:bodyPr>
+          <a:lstStyle/>
+          <a:p>
+            <a:pPr algn="l" latinLnBrk="0">
+              <a:lnSpc>
+                <a:spcPct val="100000"/>
+              </a:lnSpc>
+              <a:spcBef>
+                <a:spcPts val="0"/>
+              </a:spcBef>
+              <a:spcAft>
+                <a:spcPts val="0"/>
+              </a:spcAft>
+            </a:pPr>
+            <a:r>
+              <a:rPr sz="1000" b="1">
+                <a:solidFill>
+                  <a:srgbClr val="0A2B45"/>
+                </a:solidFill>
+                <a:latin typeface="Microsoft YaHei"/>
+                <a:ea typeface="Microsoft YaHei"/>
+                <a:cs typeface="Microsoft YaHei"/>
+              </a:rPr>
+              <a:t>取证分析（证据层）</a:t>
+            </a:r>
+          </a:p>
+        </p:txBody>
+      </p:sp>
+      <p:sp>
+        <p:nvSpPr>
+          <p:cNvPr id="28" name="Rounded Rectangle 27"/>
+          <p:cNvSpPr/>
+          <p:nvPr/>
+        </p:nvSpPr>
+        <p:spPr>
+          <a:xfrm>
+            <a:off x="786384" y="4078224"/>
+            <a:ext cx="1170432" cy="512064"/>
+          </a:xfrm>
+          <a:prstGeom prst="roundRect">
+            <a:avLst>
+              <a:gd name="adj" fmla="val 10714"/>
+            </a:avLst>
+          </a:prstGeom>
+          <a:solidFill>
+            <a:srgbClr val="FFFFFF"/>
+          </a:solidFill>
+          <a:ln w="9525">
             <a:solidFill>
-              <a:srgbClr val="FFFFFF"/>
+              <a:srgbClr val="17795F"/>
             </a:solidFill>
           </a:ln>
         </p:spPr>
         <p:txBody>
-          <a:bodyPr rtlCol="0" anchor="ctr" wrap="square" lIns="36576" tIns="0" rIns="36576" bIns="0">
+          <a:bodyPr rtlCol="0" anchor="ctr" wrap="square" lIns="128016" tIns="18288" rIns="36576" bIns="18288">
             <a:noAutofit/>
           </a:bodyPr>
           <a:lstStyle/>
@@ -30800,11 +31839,87 @@
                 <a:spcPts val="0"/>
               </a:spcBef>
               <a:spcAft>
-                <a:spcPts val="200"/>
-              </a:spcAft>
-            </a:pPr>
-            <a:r>
-              <a:rPr sz="1300" b="1">
+                <a:spcPts val="0"/>
+              </a:spcAft>
+            </a:pPr>
+            <a:r>
+              <a:rPr sz="950" b="1">
+                <a:solidFill>
+                  <a:srgbClr val="0A2B45"/>
+                </a:solidFill>
+                <a:latin typeface="Microsoft YaHei"/>
+                <a:ea typeface="Microsoft YaHei"/>
+                <a:cs typeface="Microsoft YaHei"/>
+              </a:rPr>
+              <a:t>性能采集</a:t>
+            </a:r>
+          </a:p>
+          <a:p>
+            <a:pPr algn="ctr" latinLnBrk="0">
+              <a:lnSpc>
+                <a:spcPct val="100000"/>
+              </a:lnSpc>
+              <a:spcBef>
+                <a:spcPts val="0"/>
+              </a:spcBef>
+              <a:spcAft>
+                <a:spcPts val="0"/>
+              </a:spcAft>
+            </a:pPr>
+            <a:r>
+              <a:rPr sz="800" b="0">
+                <a:solidFill>
+                  <a:srgbClr val="1B4D69"/>
+                </a:solidFill>
+                <a:latin typeface="Microsoft YaHei"/>
+                <a:ea typeface="Microsoft YaHei"/>
+                <a:cs typeface="Microsoft YaHei"/>
+              </a:rPr>
+              <a:t>Trace + 专家路由</a:t>
+            </a:r>
+          </a:p>
+        </p:txBody>
+      </p:sp>
+      <p:sp>
+        <p:nvSpPr>
+          <p:cNvPr id="29" name="Oval 28"/>
+          <p:cNvSpPr/>
+          <p:nvPr/>
+        </p:nvSpPr>
+        <p:spPr>
+          <a:xfrm>
+            <a:off x="704088" y="3995928"/>
+            <a:ext cx="219456" cy="219456"/>
+          </a:xfrm>
+          <a:prstGeom prst="ellipse">
+            <a:avLst/>
+          </a:prstGeom>
+          <a:solidFill>
+            <a:srgbClr val="17795F"/>
+          </a:solidFill>
+          <a:ln>
+            <a:noFill/>
+          </a:ln>
+        </p:spPr>
+        <p:txBody>
+          <a:bodyPr rtlCol="0" anchor="ctr" wrap="square" lIns="0" tIns="0" rIns="0" bIns="0">
+            <a:noAutofit/>
+          </a:bodyPr>
+          <a:lstStyle/>
+          <a:p>
+            <a:pPr algn="ctr" latinLnBrk="0">
+              <a:lnSpc>
+                <a:spcPct val="100000"/>
+              </a:lnSpc>
+              <a:spcBef>
+                <a:spcPts val="0"/>
+              </a:spcBef>
+              <a:spcAft>
+                <a:spcPts val="0"/>
+              </a:spcAft>
+            </a:pPr>
+            <a:r>
+              <a:rPr sz="900" b="1">
                 <a:solidFill>
                   <a:srgbClr val="FFFFFF"/>
                 </a:solidFill>
@@ -30812,9 +31927,41 @@
                 <a:ea typeface="Microsoft YaHei"/>
                 <a:cs typeface="Microsoft YaHei"/>
               </a:rPr>
-              <a:t>规划器</a:t>
-            </a:r>
-          </a:p>
+              <a:t>1</a:t>
+            </a:r>
+          </a:p>
+        </p:txBody>
+      </p:sp>
+      <p:sp>
+        <p:nvSpPr>
+          <p:cNvPr id="30" name="Rounded Rectangle 29"/>
+          <p:cNvSpPr/>
+          <p:nvPr/>
+        </p:nvSpPr>
+        <p:spPr>
+          <a:xfrm>
+            <a:off x="2139696" y="4078224"/>
+            <a:ext cx="1170432" cy="512064"/>
+          </a:xfrm>
+          <a:prstGeom prst="roundRect">
+            <a:avLst>
+              <a:gd name="adj" fmla="val 10714"/>
+            </a:avLst>
+          </a:prstGeom>
+          <a:solidFill>
+            <a:srgbClr val="FFFFFF"/>
+          </a:solidFill>
+          <a:ln w="9525">
+            <a:solidFill>
+              <a:srgbClr val="17795F"/>
+            </a:solidFill>
+          </a:ln>
+        </p:spPr>
+        <p:txBody>
+          <a:bodyPr rtlCol="0" anchor="ctr" wrap="square" lIns="128016" tIns="18288" rIns="36576" bIns="18288">
+            <a:noAutofit/>
+          </a:bodyPr>
+          <a:lstStyle/>
           <a:p>
             <a:pPr algn="ctr" latinLnBrk="0">
               <a:lnSpc>
@@ -30828,7 +31975,83 @@
               </a:spcAft>
             </a:pPr>
             <a:r>
-              <a:rPr sz="850" b="0">
+              <a:rPr sz="950" b="1">
+                <a:solidFill>
+                  <a:srgbClr val="0A2B45"/>
+                </a:solidFill>
+                <a:latin typeface="Microsoft YaHei"/>
+                <a:ea typeface="Microsoft YaHei"/>
+                <a:cs typeface="Microsoft YaHei"/>
+              </a:rPr>
+              <a:t>耗时归因</a:t>
+            </a:r>
+          </a:p>
+          <a:p>
+            <a:pPr algn="ctr" latinLnBrk="0">
+              <a:lnSpc>
+                <a:spcPct val="100000"/>
+              </a:lnSpc>
+              <a:spcBef>
+                <a:spcPts val="0"/>
+              </a:spcBef>
+              <a:spcAft>
+                <a:spcPts val="0"/>
+              </a:spcAft>
+            </a:pPr>
+            <a:r>
+              <a:rPr sz="800" b="0">
+                <a:solidFill>
+                  <a:srgbClr val="1B4D69"/>
+                </a:solidFill>
+                <a:latin typeface="Microsoft YaHei"/>
+                <a:ea typeface="Microsoft YaHei"/>
+                <a:cs typeface="Microsoft YaHei"/>
+              </a:rPr>
+              <a:t>kernel 对齐到源码</a:t>
+            </a:r>
+          </a:p>
+        </p:txBody>
+      </p:sp>
+      <p:sp>
+        <p:nvSpPr>
+          <p:cNvPr id="31" name="Oval 30"/>
+          <p:cNvSpPr/>
+          <p:nvPr/>
+        </p:nvSpPr>
+        <p:spPr>
+          <a:xfrm>
+            <a:off x="2057400" y="3995928"/>
+            <a:ext cx="219456" cy="219456"/>
+          </a:xfrm>
+          <a:prstGeom prst="ellipse">
+            <a:avLst/>
+          </a:prstGeom>
+          <a:solidFill>
+            <a:srgbClr val="17795F"/>
+          </a:solidFill>
+          <a:ln>
+            <a:noFill/>
+          </a:ln>
+        </p:spPr>
+        <p:txBody>
+          <a:bodyPr rtlCol="0" anchor="ctr" wrap="square" lIns="0" tIns="0" rIns="0" bIns="0">
+            <a:noAutofit/>
+          </a:bodyPr>
+          <a:lstStyle/>
+          <a:p>
+            <a:pPr algn="ctr" latinLnBrk="0">
+              <a:lnSpc>
+                <a:spcPct val="100000"/>
+              </a:lnSpc>
+              <a:spcBef>
+                <a:spcPts val="0"/>
+              </a:spcBef>
+              <a:spcAft>
+                <a:spcPts val="0"/>
+              </a:spcAft>
+            </a:pPr>
+            <a:r>
+              <a:rPr sz="900" b="1">
                 <a:solidFill>
                   <a:srgbClr val="FFFFFF"/>
                 </a:solidFill>
@@ -30836,9 +32059,63 @@
                 <a:ea typeface="Microsoft YaHei"/>
                 <a:cs typeface="Microsoft YaHei"/>
               </a:rPr>
-              <a:t>大模型</a:t>
-            </a:r>
-          </a:p>
+              <a:t>2</a:t>
+            </a:r>
+          </a:p>
+        </p:txBody>
+      </p:sp>
+      <p:cxnSp>
+        <p:nvCxnSpPr>
+          <p:cNvPr id="32" name="Connector 31"/>
+          <p:cNvCxnSpPr/>
+          <p:nvPr/>
+        </p:nvCxnSpPr>
+        <p:spPr>
+          <a:xfrm>
+            <a:off x="1984248" y="4334256"/>
+            <a:ext cx="128016" cy="0"/>
+          </a:xfrm>
+          <a:prstGeom prst="line">
+            <a:avLst/>
+          </a:prstGeom>
+          <a:ln w="15875">
+            <a:solidFill>
+              <a:srgbClr val="40708B"/>
+            </a:solidFill>
+            <a:tailEnd type="triangle" w="med" len="med"/>
+          </a:ln>
+        </p:spPr>
+      </p:cxnSp>
+      <p:sp>
+        <p:nvSpPr>
+          <p:cNvPr id="33" name="Rounded Rectangle 32"/>
+          <p:cNvSpPr/>
+          <p:nvPr/>
+        </p:nvSpPr>
+        <p:spPr>
+          <a:xfrm>
+            <a:off x="3493008" y="4078224"/>
+            <a:ext cx="1170432" cy="512064"/>
+          </a:xfrm>
+          <a:prstGeom prst="roundRect">
+            <a:avLst>
+              <a:gd name="adj" fmla="val 10714"/>
+            </a:avLst>
+          </a:prstGeom>
+          <a:solidFill>
+            <a:srgbClr val="FFFFFF"/>
+          </a:solidFill>
+          <a:ln w="9525">
+            <a:solidFill>
+              <a:srgbClr val="17795F"/>
+            </a:solidFill>
+          </a:ln>
+        </p:spPr>
+        <p:txBody>
+          <a:bodyPr rtlCol="0" anchor="ctr" wrap="square" lIns="128016" tIns="18288" rIns="36576" bIns="18288">
+            <a:noAutofit/>
+          </a:bodyPr>
+          <a:lstStyle/>
           <a:p>
             <a:pPr algn="ctr" latinLnBrk="0">
               <a:lnSpc>
@@ -30852,7 +32129,83 @@
               </a:spcAft>
             </a:pPr>
             <a:r>
-              <a:rPr sz="850" b="0">
+              <a:rPr sz="950" b="1">
+                <a:solidFill>
+                  <a:srgbClr val="0A2B45"/>
+                </a:solidFill>
+                <a:latin typeface="Microsoft YaHei"/>
+                <a:ea typeface="Microsoft YaHei"/>
+                <a:cs typeface="Microsoft YaHei"/>
+              </a:rPr>
+              <a:t>Roofline 账本</a:t>
+            </a:r>
+          </a:p>
+          <a:p>
+            <a:pPr algn="ctr" latinLnBrk="0">
+              <a:lnSpc>
+                <a:spcPct val="100000"/>
+              </a:lnSpc>
+              <a:spcBef>
+                <a:spcPts val="0"/>
+              </a:spcBef>
+              <a:spcAft>
+                <a:spcPts val="0"/>
+              </a:spcAft>
+            </a:pPr>
+            <a:r>
+              <a:rPr sz="800" b="0">
+                <a:solidFill>
+                  <a:srgbClr val="1B4D69"/>
+                </a:solidFill>
+                <a:latin typeface="Microsoft YaHei"/>
+                <a:ea typeface="Microsoft YaHei"/>
+                <a:cs typeface="Microsoft YaHei"/>
+              </a:rPr>
+              <a:t>下界 · 差距倍数</a:t>
+            </a:r>
+          </a:p>
+        </p:txBody>
+      </p:sp>
+      <p:sp>
+        <p:nvSpPr>
+          <p:cNvPr id="34" name="Oval 33"/>
+          <p:cNvSpPr/>
+          <p:nvPr/>
+        </p:nvSpPr>
+        <p:spPr>
+          <a:xfrm>
+            <a:off x="3410712" y="3995928"/>
+            <a:ext cx="219456" cy="219456"/>
+          </a:xfrm>
+          <a:prstGeom prst="ellipse">
+            <a:avLst/>
+          </a:prstGeom>
+          <a:solidFill>
+            <a:srgbClr val="17795F"/>
+          </a:solidFill>
+          <a:ln>
+            <a:noFill/>
+          </a:ln>
+        </p:spPr>
+        <p:txBody>
+          <a:bodyPr rtlCol="0" anchor="ctr" wrap="square" lIns="0" tIns="0" rIns="0" bIns="0">
+            <a:noAutofit/>
+          </a:bodyPr>
+          <a:lstStyle/>
+          <a:p>
+            <a:pPr algn="ctr" latinLnBrk="0">
+              <a:lnSpc>
+                <a:spcPct val="100000"/>
+              </a:lnSpc>
+              <a:spcBef>
+                <a:spcPts val="0"/>
+              </a:spcBef>
+              <a:spcAft>
+                <a:spcPts val="0"/>
+              </a:spcAft>
+            </a:pPr>
+            <a:r>
+              <a:rPr sz="900" b="1">
                 <a:solidFill>
                   <a:srgbClr val="FFFFFF"/>
                 </a:solidFill>
@@ -30860,21 +32213,1827 @@
                 <a:ea typeface="Microsoft YaHei"/>
                 <a:cs typeface="Microsoft YaHei"/>
               </a:rPr>
-              <a:t>只提方案</a:t>
-            </a:r>
-          </a:p>
-        </p:txBody>
-      </p:sp>
-      <p:sp>
-        <p:nvSpPr>
-          <p:cNvPr id="10" name="Rectangle 9"/>
+              <a:t>3</a:t>
+            </a:r>
+          </a:p>
+        </p:txBody>
+      </p:sp>
+      <p:cxnSp>
+        <p:nvCxnSpPr>
+          <p:cNvPr id="35" name="Connector 34"/>
+          <p:cNvCxnSpPr/>
+          <p:nvPr/>
+        </p:nvCxnSpPr>
+        <p:spPr>
+          <a:xfrm>
+            <a:off x="3337560" y="4334256"/>
+            <a:ext cx="128016" cy="0"/>
+          </a:xfrm>
+          <a:prstGeom prst="line">
+            <a:avLst/>
+          </a:prstGeom>
+          <a:ln w="15875">
+            <a:solidFill>
+              <a:srgbClr val="40708B"/>
+            </a:solidFill>
+            <a:tailEnd type="triangle" w="med" len="med"/>
+          </a:ln>
+        </p:spPr>
+      </p:cxnSp>
+      <p:sp>
+        <p:nvSpPr>
+          <p:cNvPr id="36" name="Rounded Rectangle 35"/>
           <p:cNvSpPr/>
           <p:nvPr/>
         </p:nvSpPr>
         <p:spPr>
           <a:xfrm>
-            <a:off x="1444752" y="3712463"/>
-            <a:ext cx="10198303" cy="2560320"/>
+            <a:off x="749808" y="4700016"/>
+            <a:ext cx="923544" cy="475488"/>
+          </a:xfrm>
+          <a:prstGeom prst="roundRect">
+            <a:avLst>
+              <a:gd name="adj" fmla="val 11538"/>
+            </a:avLst>
+          </a:prstGeom>
+          <a:solidFill>
+            <a:srgbClr val="FFFFFF"/>
+          </a:solidFill>
+          <a:ln w="9525">
+            <a:solidFill>
+              <a:srgbClr val="AFCEE1"/>
+            </a:solidFill>
+          </a:ln>
+        </p:spPr>
+        <p:txBody>
+          <a:bodyPr rtlCol="0" anchor="ctr" wrap="square" lIns="45720" tIns="18288" rIns="45720" bIns="18288">
+            <a:noAutofit/>
+          </a:bodyPr>
+          <a:lstStyle/>
+          <a:p>
+            <a:pPr algn="ctr" latinLnBrk="0">
+              <a:lnSpc>
+                <a:spcPct val="100000"/>
+              </a:lnSpc>
+              <a:spcBef>
+                <a:spcPts val="0"/>
+              </a:spcBef>
+              <a:spcAft>
+                <a:spcPts val="0"/>
+              </a:spcAft>
+            </a:pPr>
+            <a:r>
+              <a:rPr sz="950" b="1">
+                <a:solidFill>
+                  <a:srgbClr val="0A2B45"/>
+                </a:solidFill>
+                <a:latin typeface="Microsoft YaHei"/>
+                <a:ea typeface="Microsoft YaHei"/>
+                <a:cs typeface="Microsoft YaHei"/>
+              </a:rPr>
+              <a:t>硬件天花板</a:t>
+            </a:r>
+          </a:p>
+          <a:p>
+            <a:pPr algn="ctr" latinLnBrk="0">
+              <a:lnSpc>
+                <a:spcPct val="100000"/>
+              </a:lnSpc>
+              <a:spcBef>
+                <a:spcPts val="0"/>
+              </a:spcBef>
+              <a:spcAft>
+                <a:spcPts val="0"/>
+              </a:spcAft>
+            </a:pPr>
+            <a:r>
+              <a:rPr sz="800" b="0">
+                <a:solidFill>
+                  <a:srgbClr val="1B4D69"/>
+                </a:solidFill>
+                <a:latin typeface="Microsoft YaHei"/>
+                <a:ea typeface="Microsoft YaHei"/>
+                <a:cs typeface="Microsoft YaHei"/>
+              </a:rPr>
+              <a:t>带宽与算力上限</a:t>
+            </a:r>
+          </a:p>
+        </p:txBody>
+      </p:sp>
+      <p:sp>
+        <p:nvSpPr>
+          <p:cNvPr id="37" name="Rounded Rectangle 36"/>
+          <p:cNvSpPr/>
+          <p:nvPr/>
+        </p:nvSpPr>
+        <p:spPr>
+          <a:xfrm>
+            <a:off x="1746504" y="4700016"/>
+            <a:ext cx="923544" cy="475488"/>
+          </a:xfrm>
+          <a:prstGeom prst="roundRect">
+            <a:avLst>
+              <a:gd name="adj" fmla="val 11538"/>
+            </a:avLst>
+          </a:prstGeom>
+          <a:solidFill>
+            <a:srgbClr val="FFFFFF"/>
+          </a:solidFill>
+          <a:ln w="9525">
+            <a:solidFill>
+              <a:srgbClr val="AFCEE1"/>
+            </a:solidFill>
+          </a:ln>
+        </p:spPr>
+        <p:txBody>
+          <a:bodyPr rtlCol="0" anchor="ctr" wrap="square" lIns="45720" tIns="18288" rIns="45720" bIns="18288">
+            <a:noAutofit/>
+          </a:bodyPr>
+          <a:lstStyle/>
+          <a:p>
+            <a:pPr algn="ctr" latinLnBrk="0">
+              <a:lnSpc>
+                <a:spcPct val="100000"/>
+              </a:lnSpc>
+              <a:spcBef>
+                <a:spcPts val="0"/>
+              </a:spcBef>
+              <a:spcAft>
+                <a:spcPts val="0"/>
+              </a:spcAft>
+            </a:pPr>
+            <a:r>
+              <a:rPr sz="950" b="1">
+                <a:solidFill>
+                  <a:srgbClr val="0A2B45"/>
+                </a:solidFill>
+                <a:latin typeface="Microsoft YaHei"/>
+                <a:ea typeface="Microsoft YaHei"/>
+                <a:cs typeface="Microsoft YaHei"/>
+              </a:rPr>
+              <a:t>账本自检</a:t>
+            </a:r>
+          </a:p>
+          <a:p>
+            <a:pPr algn="ctr" latinLnBrk="0">
+              <a:lnSpc>
+                <a:spcPct val="100000"/>
+              </a:lnSpc>
+              <a:spcBef>
+                <a:spcPts val="0"/>
+              </a:spcBef>
+              <a:spcAft>
+                <a:spcPts val="0"/>
+              </a:spcAft>
+            </a:pPr>
+            <a:r>
+              <a:rPr sz="800" b="0">
+                <a:solidFill>
+                  <a:srgbClr val="1B4D69"/>
+                </a:solidFill>
+                <a:latin typeface="Microsoft YaHei"/>
+                <a:ea typeface="Microsoft YaHei"/>
+                <a:cs typeface="Microsoft YaHei"/>
+              </a:rPr>
+              <a:t>&lt; 0.9 即隔离</a:t>
+            </a:r>
+          </a:p>
+        </p:txBody>
+      </p:sp>
+      <p:sp>
+        <p:nvSpPr>
+          <p:cNvPr id="38" name="Rounded Rectangle 37"/>
+          <p:cNvSpPr/>
+          <p:nvPr/>
+        </p:nvSpPr>
+        <p:spPr>
+          <a:xfrm>
+            <a:off x="2743200" y="4700016"/>
+            <a:ext cx="923544" cy="475488"/>
+          </a:xfrm>
+          <a:prstGeom prst="roundRect">
+            <a:avLst>
+              <a:gd name="adj" fmla="val 11538"/>
+            </a:avLst>
+          </a:prstGeom>
+          <a:solidFill>
+            <a:srgbClr val="FFFFFF"/>
+          </a:solidFill>
+          <a:ln w="9525">
+            <a:solidFill>
+              <a:srgbClr val="AFCEE1"/>
+            </a:solidFill>
+          </a:ln>
+        </p:spPr>
+        <p:txBody>
+          <a:bodyPr rtlCol="0" anchor="ctr" wrap="square" lIns="45720" tIns="18288" rIns="45720" bIns="18288">
+            <a:noAutofit/>
+          </a:bodyPr>
+          <a:lstStyle/>
+          <a:p>
+            <a:pPr algn="ctr" latinLnBrk="0">
+              <a:lnSpc>
+                <a:spcPct val="100000"/>
+              </a:lnSpc>
+              <a:spcBef>
+                <a:spcPts val="0"/>
+              </a:spcBef>
+              <a:spcAft>
+                <a:spcPts val="0"/>
+              </a:spcAft>
+            </a:pPr>
+            <a:r>
+              <a:rPr sz="950" b="1">
+                <a:solidFill>
+                  <a:srgbClr val="0A2B45"/>
+                </a:solidFill>
+                <a:latin typeface="Microsoft YaHei"/>
+                <a:ea typeface="Microsoft YaHei"/>
+                <a:cs typeface="Microsoft YaHei"/>
+              </a:rPr>
+              <a:t>瓶颈排序</a:t>
+            </a:r>
+          </a:p>
+          <a:p>
+            <a:pPr algn="ctr" latinLnBrk="0">
+              <a:lnSpc>
+                <a:spcPct val="100000"/>
+              </a:lnSpc>
+              <a:spcBef>
+                <a:spcPts val="0"/>
+              </a:spcBef>
+              <a:spcAft>
+                <a:spcPts val="0"/>
+              </a:spcAft>
+            </a:pPr>
+            <a:r>
+              <a:rPr sz="800" b="0">
+                <a:solidFill>
+                  <a:srgbClr val="1B4D69"/>
+                </a:solidFill>
+                <a:latin typeface="Microsoft YaHei"/>
+                <a:ea typeface="Microsoft YaHei"/>
+                <a:cs typeface="Microsoft YaHei"/>
+              </a:rPr>
+              <a:t>按可压缩空间</a:t>
+            </a:r>
+          </a:p>
+        </p:txBody>
+      </p:sp>
+      <p:sp>
+        <p:nvSpPr>
+          <p:cNvPr id="39" name="Rounded Rectangle 38"/>
+          <p:cNvSpPr/>
+          <p:nvPr/>
+        </p:nvSpPr>
+        <p:spPr>
+          <a:xfrm>
+            <a:off x="3739896" y="4700016"/>
+            <a:ext cx="923544" cy="475488"/>
+          </a:xfrm>
+          <a:prstGeom prst="roundRect">
+            <a:avLst>
+              <a:gd name="adj" fmla="val 11538"/>
+            </a:avLst>
+          </a:prstGeom>
+          <a:solidFill>
+            <a:srgbClr val="FFFFFF"/>
+          </a:solidFill>
+          <a:ln w="9525">
+            <a:solidFill>
+              <a:srgbClr val="AFCEE1"/>
+            </a:solidFill>
+          </a:ln>
+        </p:spPr>
+        <p:txBody>
+          <a:bodyPr rtlCol="0" anchor="ctr" wrap="square" lIns="45720" tIns="18288" rIns="45720" bIns="18288">
+            <a:noAutofit/>
+          </a:bodyPr>
+          <a:lstStyle/>
+          <a:p>
+            <a:pPr algn="ctr" latinLnBrk="0">
+              <a:lnSpc>
+                <a:spcPct val="100000"/>
+              </a:lnSpc>
+              <a:spcBef>
+                <a:spcPts val="0"/>
+              </a:spcBef>
+              <a:spcAft>
+                <a:spcPts val="0"/>
+              </a:spcAft>
+            </a:pPr>
+            <a:r>
+              <a:rPr sz="950" b="1">
+                <a:solidFill>
+                  <a:srgbClr val="0A2B45"/>
+                </a:solidFill>
+                <a:latin typeface="Microsoft YaHei"/>
+                <a:ea typeface="Microsoft YaHei"/>
+                <a:cs typeface="Microsoft YaHei"/>
+              </a:rPr>
+              <a:t>probe 诊断</a:t>
+            </a:r>
+          </a:p>
+          <a:p>
+            <a:pPr algn="ctr" latinLnBrk="0">
+              <a:lnSpc>
+                <a:spcPct val="100000"/>
+              </a:lnSpc>
+              <a:spcBef>
+                <a:spcPts val="0"/>
+              </a:spcBef>
+              <a:spcAft>
+                <a:spcPts val="0"/>
+              </a:spcAft>
+            </a:pPr>
+            <a:r>
+              <a:rPr sz="800" b="0">
+                <a:solidFill>
+                  <a:srgbClr val="1B4D69"/>
+                </a:solidFill>
+                <a:latin typeface="Microsoft YaHei"/>
+                <a:ea typeface="Microsoft YaHei"/>
+                <a:cs typeface="Microsoft YaHei"/>
+              </a:rPr>
+              <a:t>证据不足时补测</a:t>
+            </a:r>
+          </a:p>
+        </p:txBody>
+      </p:sp>
+      <p:sp>
+        <p:nvSpPr>
+          <p:cNvPr id="40" name="Rectangle 39"/>
+          <p:cNvSpPr/>
+          <p:nvPr/>
+        </p:nvSpPr>
+        <p:spPr>
+          <a:xfrm>
+            <a:off x="4937760" y="3730752"/>
+            <a:ext cx="2560320" cy="1554480"/>
+          </a:xfrm>
+          <a:prstGeom prst="rect">
+            <a:avLst/>
+          </a:prstGeom>
+          <a:solidFill>
+            <a:srgbClr val="FFFFFF"/>
+          </a:solidFill>
+          <a:ln w="9525">
+            <a:solidFill>
+              <a:srgbClr val="AFCEE1"/>
+            </a:solidFill>
+          </a:ln>
+        </p:spPr>
+        <p:txBody>
+          <a:bodyPr rtlCol="0" anchor="ctr"/>
+          <a:lstStyle/>
+          <a:p>
+            <a:pPr algn="ctr"/>
+          </a:p>
+        </p:txBody>
+      </p:sp>
+      <p:sp>
+        <p:nvSpPr>
+          <p:cNvPr id="41" name="Rectangle 40"/>
+          <p:cNvSpPr/>
+          <p:nvPr/>
+        </p:nvSpPr>
+        <p:spPr>
+          <a:xfrm>
+            <a:off x="5047488" y="3794760"/>
+            <a:ext cx="45720" cy="146304"/>
+          </a:xfrm>
+          <a:prstGeom prst="rect">
+            <a:avLst/>
+          </a:prstGeom>
+          <a:solidFill>
+            <a:srgbClr val="0F62CE"/>
+          </a:solidFill>
+          <a:ln>
+            <a:noFill/>
+          </a:ln>
+        </p:spPr>
+        <p:txBody>
+          <a:bodyPr rtlCol="0" anchor="ctr"/>
+          <a:lstStyle/>
+          <a:p>
+            <a:pPr algn="ctr"/>
+          </a:p>
+        </p:txBody>
+      </p:sp>
+      <p:sp>
+        <p:nvSpPr>
+          <p:cNvPr id="42" name="TextBox 41"/>
+          <p:cNvSpPr txBox="1"/>
+          <p:nvPr/>
+        </p:nvSpPr>
+        <p:spPr>
+          <a:xfrm>
+            <a:off x="5157216" y="3730752"/>
+            <a:ext cx="2267712" cy="256032"/>
+          </a:xfrm>
+          <a:prstGeom prst="rect">
+            <a:avLst/>
+          </a:prstGeom>
+          <a:noFill/>
+        </p:spPr>
+        <p:txBody>
+          <a:bodyPr wrap="square" anchor="ctr" lIns="0" tIns="0" rIns="0" bIns="0">
+            <a:noAutofit/>
+          </a:bodyPr>
+          <a:lstStyle/>
+          <a:p>
+            <a:pPr algn="l" latinLnBrk="0">
+              <a:lnSpc>
+                <a:spcPct val="100000"/>
+              </a:lnSpc>
+              <a:spcBef>
+                <a:spcPts val="0"/>
+              </a:spcBef>
+              <a:spcAft>
+                <a:spcPts val="0"/>
+              </a:spcAft>
+            </a:pPr>
+            <a:r>
+              <a:rPr sz="1000" b="1">
+                <a:solidFill>
+                  <a:srgbClr val="0A2B45"/>
+                </a:solidFill>
+                <a:latin typeface="Microsoft YaHei"/>
+                <a:ea typeface="Microsoft YaHei"/>
+                <a:cs typeface="Microsoft YaHei"/>
+              </a:rPr>
+              <a:t>落地：建版与服务</a:t>
+            </a:r>
+          </a:p>
+        </p:txBody>
+      </p:sp>
+      <p:sp>
+        <p:nvSpPr>
+          <p:cNvPr id="43" name="Rounded Rectangle 42"/>
+          <p:cNvSpPr/>
+          <p:nvPr/>
+        </p:nvSpPr>
+        <p:spPr>
+          <a:xfrm>
+            <a:off x="5065776" y="4078224"/>
+            <a:ext cx="1078991" cy="512064"/>
+          </a:xfrm>
+          <a:prstGeom prst="roundRect">
+            <a:avLst>
+              <a:gd name="adj" fmla="val 10714"/>
+            </a:avLst>
+          </a:prstGeom>
+          <a:solidFill>
+            <a:srgbClr val="FFFFFF"/>
+          </a:solidFill>
+          <a:ln w="9525">
+            <a:solidFill>
+              <a:srgbClr val="7FA4BA"/>
+            </a:solidFill>
+          </a:ln>
+        </p:spPr>
+        <p:txBody>
+          <a:bodyPr rtlCol="0" anchor="ctr" wrap="square" lIns="45720" tIns="18288" rIns="45720" bIns="18288">
+            <a:noAutofit/>
+          </a:bodyPr>
+          <a:lstStyle/>
+          <a:p>
+            <a:pPr algn="ctr" latinLnBrk="0">
+              <a:lnSpc>
+                <a:spcPct val="100000"/>
+              </a:lnSpc>
+              <a:spcBef>
+                <a:spcPts val="0"/>
+              </a:spcBef>
+              <a:spcAft>
+                <a:spcPts val="0"/>
+              </a:spcAft>
+            </a:pPr>
+            <a:r>
+              <a:rPr sz="950" b="1">
+                <a:solidFill>
+                  <a:srgbClr val="0A2B45"/>
+                </a:solidFill>
+                <a:latin typeface="Microsoft YaHei"/>
+                <a:ea typeface="Microsoft YaHei"/>
+                <a:cs typeface="Microsoft YaHei"/>
+              </a:rPr>
+              <a:t>校验提案</a:t>
+            </a:r>
+          </a:p>
+          <a:p>
+            <a:pPr algn="ctr" latinLnBrk="0">
+              <a:lnSpc>
+                <a:spcPct val="100000"/>
+              </a:lnSpc>
+              <a:spcBef>
+                <a:spcPts val="0"/>
+              </a:spcBef>
+              <a:spcAft>
+                <a:spcPts val="0"/>
+              </a:spcAft>
+            </a:pPr>
+            <a:r>
+              <a:rPr sz="800" b="0">
+                <a:solidFill>
+                  <a:srgbClr val="1B4D69"/>
+                </a:solidFill>
+                <a:latin typeface="Microsoft YaHei"/>
+                <a:ea typeface="Microsoft YaHei"/>
+                <a:cs typeface="Microsoft YaHei"/>
+              </a:rPr>
+              <a:t>ID · SHA · 证据</a:t>
+            </a:r>
+          </a:p>
+        </p:txBody>
+      </p:sp>
+      <p:sp>
+        <p:nvSpPr>
+          <p:cNvPr id="44" name="Rounded Rectangle 43"/>
+          <p:cNvSpPr/>
+          <p:nvPr/>
+        </p:nvSpPr>
+        <p:spPr>
+          <a:xfrm>
+            <a:off x="6327648" y="4078224"/>
+            <a:ext cx="1078991" cy="512064"/>
+          </a:xfrm>
+          <a:prstGeom prst="roundRect">
+            <a:avLst>
+              <a:gd name="adj" fmla="val 10714"/>
+            </a:avLst>
+          </a:prstGeom>
+          <a:solidFill>
+            <a:srgbClr val="FFFFFF"/>
+          </a:solidFill>
+          <a:ln w="9525">
+            <a:solidFill>
+              <a:srgbClr val="0F62CE"/>
+            </a:solidFill>
+          </a:ln>
+        </p:spPr>
+        <p:txBody>
+          <a:bodyPr rtlCol="0" anchor="ctr" wrap="square" lIns="128016" tIns="18288" rIns="36576" bIns="18288">
+            <a:noAutofit/>
+          </a:bodyPr>
+          <a:lstStyle/>
+          <a:p>
+            <a:pPr algn="ctr" latinLnBrk="0">
+              <a:lnSpc>
+                <a:spcPct val="100000"/>
+              </a:lnSpc>
+              <a:spcBef>
+                <a:spcPts val="0"/>
+              </a:spcBef>
+              <a:spcAft>
+                <a:spcPts val="0"/>
+              </a:spcAft>
+            </a:pPr>
+            <a:r>
+              <a:rPr sz="950" b="1">
+                <a:solidFill>
+                  <a:srgbClr val="0A2B45"/>
+                </a:solidFill>
+                <a:latin typeface="Microsoft YaHei"/>
+                <a:ea typeface="Microsoft YaHei"/>
+                <a:cs typeface="Microsoft YaHei"/>
+              </a:rPr>
+              <a:t>建版构建</a:t>
+            </a:r>
+          </a:p>
+          <a:p>
+            <a:pPr algn="ctr" latinLnBrk="0">
+              <a:lnSpc>
+                <a:spcPct val="100000"/>
+              </a:lnSpc>
+              <a:spcBef>
+                <a:spcPts val="0"/>
+              </a:spcBef>
+              <a:spcAft>
+                <a:spcPts val="0"/>
+              </a:spcAft>
+            </a:pPr>
+            <a:r>
+              <a:rPr sz="800" b="0">
+                <a:solidFill>
+                  <a:srgbClr val="1B4D69"/>
+                </a:solidFill>
+                <a:latin typeface="Microsoft YaHei"/>
+                <a:ea typeface="Microsoft YaHei"/>
+                <a:cs typeface="Microsoft YaHei"/>
+              </a:rPr>
+              <a:t>原位 · 隔离补丁</a:t>
+            </a:r>
+          </a:p>
+        </p:txBody>
+      </p:sp>
+      <p:sp>
+        <p:nvSpPr>
+          <p:cNvPr id="45" name="Oval 44"/>
+          <p:cNvSpPr/>
+          <p:nvPr/>
+        </p:nvSpPr>
+        <p:spPr>
+          <a:xfrm>
+            <a:off x="6245352" y="3995928"/>
+            <a:ext cx="219456" cy="219456"/>
+          </a:xfrm>
+          <a:prstGeom prst="ellipse">
+            <a:avLst/>
+          </a:prstGeom>
+          <a:solidFill>
+            <a:srgbClr val="0F62CE"/>
+          </a:solidFill>
+          <a:ln>
+            <a:noFill/>
+          </a:ln>
+        </p:spPr>
+        <p:txBody>
+          <a:bodyPr rtlCol="0" anchor="ctr" wrap="square" lIns="0" tIns="0" rIns="0" bIns="0">
+            <a:noAutofit/>
+          </a:bodyPr>
+          <a:lstStyle/>
+          <a:p>
+            <a:pPr algn="ctr" latinLnBrk="0">
+              <a:lnSpc>
+                <a:spcPct val="100000"/>
+              </a:lnSpc>
+              <a:spcBef>
+                <a:spcPts val="0"/>
+              </a:spcBef>
+              <a:spcAft>
+                <a:spcPts val="0"/>
+              </a:spcAft>
+            </a:pPr>
+            <a:r>
+              <a:rPr sz="900" b="1">
+                <a:solidFill>
+                  <a:srgbClr val="FFFFFF"/>
+                </a:solidFill>
+                <a:latin typeface="Microsoft YaHei"/>
+                <a:ea typeface="Microsoft YaHei"/>
+                <a:cs typeface="Microsoft YaHei"/>
+              </a:rPr>
+              <a:t>5</a:t>
+            </a:r>
+          </a:p>
+        </p:txBody>
+      </p:sp>
+      <p:cxnSp>
+        <p:nvCxnSpPr>
+          <p:cNvPr id="46" name="Connector 45"/>
+          <p:cNvCxnSpPr/>
+          <p:nvPr/>
+        </p:nvCxnSpPr>
+        <p:spPr>
+          <a:xfrm>
+            <a:off x="6172200" y="4334256"/>
+            <a:ext cx="128016" cy="0"/>
+          </a:xfrm>
+          <a:prstGeom prst="line">
+            <a:avLst/>
+          </a:prstGeom>
+          <a:ln w="15875">
+            <a:solidFill>
+              <a:srgbClr val="40708B"/>
+            </a:solidFill>
+            <a:tailEnd type="triangle" w="med" len="med"/>
+          </a:ln>
+        </p:spPr>
+      </p:cxnSp>
+      <p:sp>
+        <p:nvSpPr>
+          <p:cNvPr id="47" name="Rounded Rectangle 46"/>
+          <p:cNvSpPr/>
+          <p:nvPr/>
+        </p:nvSpPr>
+        <p:spPr>
+          <a:xfrm>
+            <a:off x="5029200" y="4700016"/>
+            <a:ext cx="1152143" cy="475488"/>
+          </a:xfrm>
+          <a:prstGeom prst="roundRect">
+            <a:avLst>
+              <a:gd name="adj" fmla="val 11538"/>
+            </a:avLst>
+          </a:prstGeom>
+          <a:solidFill>
+            <a:srgbClr val="FFFFFF"/>
+          </a:solidFill>
+          <a:ln w="9525">
+            <a:solidFill>
+              <a:srgbClr val="AFCEE1"/>
+            </a:solidFill>
+          </a:ln>
+        </p:spPr>
+        <p:txBody>
+          <a:bodyPr rtlCol="0" anchor="ctr" wrap="square" lIns="45720" tIns="18288" rIns="45720" bIns="18288">
+            <a:noAutofit/>
+          </a:bodyPr>
+          <a:lstStyle/>
+          <a:p>
+            <a:pPr algn="ctr" latinLnBrk="0">
+              <a:lnSpc>
+                <a:spcPct val="100000"/>
+              </a:lnSpc>
+              <a:spcBef>
+                <a:spcPts val="0"/>
+              </a:spcBef>
+              <a:spcAft>
+                <a:spcPts val="0"/>
+              </a:spcAft>
+            </a:pPr>
+            <a:r>
+              <a:rPr sz="950" b="1">
+                <a:solidFill>
+                  <a:srgbClr val="0A2B45"/>
+                </a:solidFill>
+                <a:latin typeface="Microsoft YaHei"/>
+                <a:ea typeface="Microsoft YaHei"/>
+                <a:cs typeface="Microsoft YaHei"/>
+              </a:rPr>
+              <a:t>核对库 SHA</a:t>
+            </a:r>
+          </a:p>
+          <a:p>
+            <a:pPr algn="ctr" latinLnBrk="0">
+              <a:lnSpc>
+                <a:spcPct val="100000"/>
+              </a:lnSpc>
+              <a:spcBef>
+                <a:spcPts val="0"/>
+              </a:spcBef>
+              <a:spcAft>
+                <a:spcPts val="0"/>
+              </a:spcAft>
+            </a:pPr>
+            <a:r>
+              <a:rPr sz="800" b="0">
+                <a:solidFill>
+                  <a:srgbClr val="1B4D69"/>
+                </a:solidFill>
+                <a:latin typeface="Microsoft YaHei"/>
+                <a:ea typeface="Microsoft YaHei"/>
+                <a:cs typeface="Microsoft YaHei"/>
+              </a:rPr>
+              <a:t>不符则精确重测</a:t>
+            </a:r>
+          </a:p>
+        </p:txBody>
+      </p:sp>
+      <p:sp>
+        <p:nvSpPr>
+          <p:cNvPr id="48" name="Rounded Rectangle 47"/>
+          <p:cNvSpPr/>
+          <p:nvPr/>
+        </p:nvSpPr>
+        <p:spPr>
+          <a:xfrm>
+            <a:off x="6254496" y="4700016"/>
+            <a:ext cx="1152143" cy="475488"/>
+          </a:xfrm>
+          <a:prstGeom prst="roundRect">
+            <a:avLst>
+              <a:gd name="adj" fmla="val 11538"/>
+            </a:avLst>
+          </a:prstGeom>
+          <a:solidFill>
+            <a:srgbClr val="FFFFFF"/>
+          </a:solidFill>
+          <a:ln w="9525">
+            <a:solidFill>
+              <a:srgbClr val="AFCEE1"/>
+            </a:solidFill>
+          </a:ln>
+        </p:spPr>
+        <p:txBody>
+          <a:bodyPr rtlCol="0" anchor="ctr" wrap="square" lIns="45720" tIns="18288" rIns="45720" bIns="18288">
+            <a:noAutofit/>
+          </a:bodyPr>
+          <a:lstStyle/>
+          <a:p>
+            <a:pPr algn="ctr" latinLnBrk="0">
+              <a:lnSpc>
+                <a:spcPct val="100000"/>
+              </a:lnSpc>
+              <a:spcBef>
+                <a:spcPts val="0"/>
+              </a:spcBef>
+              <a:spcAft>
+                <a:spcPts val="0"/>
+              </a:spcAft>
+            </a:pPr>
+            <a:r>
+              <a:rPr sz="950" b="1">
+                <a:solidFill>
+                  <a:srgbClr val="0A2B45"/>
+                </a:solidFill>
+                <a:latin typeface="Microsoft YaHei"/>
+                <a:ea typeface="Microsoft YaHei"/>
+                <a:cs typeface="Microsoft YaHei"/>
+              </a:rPr>
+              <a:t>服务与压测</a:t>
+            </a:r>
+          </a:p>
+          <a:p>
+            <a:pPr algn="ctr" latinLnBrk="0">
+              <a:lnSpc>
+                <a:spcPct val="100000"/>
+              </a:lnSpc>
+              <a:spcBef>
+                <a:spcPts val="0"/>
+              </a:spcBef>
+              <a:spcAft>
+                <a:spcPts val="0"/>
+              </a:spcAft>
+            </a:pPr>
+            <a:r>
+              <a:rPr sz="800" b="0">
+                <a:solidFill>
+                  <a:srgbClr val="1B4D69"/>
+                </a:solidFill>
+                <a:latin typeface="Microsoft YaHei"/>
+                <a:ea typeface="Microsoft YaHei"/>
+                <a:cs typeface="Microsoft YaHei"/>
+              </a:rPr>
+              <a:t>起停 · 3 次取中位</a:t>
+            </a:r>
+          </a:p>
+        </p:txBody>
+      </p:sp>
+      <p:sp>
+        <p:nvSpPr>
+          <p:cNvPr id="49" name="Rectangle 48"/>
+          <p:cNvSpPr/>
+          <p:nvPr/>
+        </p:nvSpPr>
+        <p:spPr>
+          <a:xfrm>
+            <a:off x="7680960" y="3730752"/>
+            <a:ext cx="3852367" cy="1554480"/>
+          </a:xfrm>
+          <a:prstGeom prst="rect">
+            <a:avLst/>
+          </a:prstGeom>
+          <a:solidFill>
+            <a:srgbClr val="FFFFFF"/>
+          </a:solidFill>
+          <a:ln w="9525">
+            <a:solidFill>
+              <a:srgbClr val="AFCEE1"/>
+            </a:solidFill>
+          </a:ln>
+        </p:spPr>
+        <p:txBody>
+          <a:bodyPr rtlCol="0" anchor="ctr"/>
+          <a:lstStyle/>
+          <a:p>
+            <a:pPr algn="ctr"/>
+          </a:p>
+        </p:txBody>
+      </p:sp>
+      <p:sp>
+        <p:nvSpPr>
+          <p:cNvPr id="50" name="Rectangle 49"/>
+          <p:cNvSpPr/>
+          <p:nvPr/>
+        </p:nvSpPr>
+        <p:spPr>
+          <a:xfrm>
+            <a:off x="7790688" y="3794760"/>
+            <a:ext cx="45720" cy="146304"/>
+          </a:xfrm>
+          <a:prstGeom prst="rect">
+            <a:avLst/>
+          </a:prstGeom>
+          <a:solidFill>
+            <a:srgbClr val="0F62CE"/>
+          </a:solidFill>
+          <a:ln>
+            <a:noFill/>
+          </a:ln>
+        </p:spPr>
+        <p:txBody>
+          <a:bodyPr rtlCol="0" anchor="ctr"/>
+          <a:lstStyle/>
+          <a:p>
+            <a:pPr algn="ctr"/>
+          </a:p>
+        </p:txBody>
+      </p:sp>
+      <p:sp>
+        <p:nvSpPr>
+          <p:cNvPr id="51" name="TextBox 50"/>
+          <p:cNvSpPr txBox="1"/>
+          <p:nvPr/>
+        </p:nvSpPr>
+        <p:spPr>
+          <a:xfrm>
+            <a:off x="7900416" y="3730752"/>
+            <a:ext cx="3559759" cy="256032"/>
+          </a:xfrm>
+          <a:prstGeom prst="rect">
+            <a:avLst/>
+          </a:prstGeom>
+          <a:noFill/>
+        </p:spPr>
+        <p:txBody>
+          <a:bodyPr wrap="square" anchor="ctr" lIns="0" tIns="0" rIns="0" bIns="0">
+            <a:noAutofit/>
+          </a:bodyPr>
+          <a:lstStyle/>
+          <a:p>
+            <a:pPr algn="l" latinLnBrk="0">
+              <a:lnSpc>
+                <a:spcPct val="100000"/>
+              </a:lnSpc>
+              <a:spcBef>
+                <a:spcPts val="0"/>
+              </a:spcBef>
+              <a:spcAft>
+                <a:spcPts val="0"/>
+              </a:spcAft>
+            </a:pPr>
+            <a:r>
+              <a:rPr sz="1000" b="1">
+                <a:solidFill>
+                  <a:srgbClr val="0A2B45"/>
+                </a:solidFill>
+                <a:latin typeface="Microsoft YaHei"/>
+                <a:ea typeface="Microsoft YaHei"/>
+                <a:cs typeface="Microsoft YaHei"/>
+              </a:rPr>
+              <a:t>判决：四道门，由快到慢、一票否决</a:t>
+            </a:r>
+          </a:p>
+        </p:txBody>
+      </p:sp>
+      <p:sp>
+        <p:nvSpPr>
+          <p:cNvPr id="52" name="Rounded Rectangle 51"/>
+          <p:cNvSpPr/>
+          <p:nvPr/>
+        </p:nvSpPr>
+        <p:spPr>
+          <a:xfrm>
+            <a:off x="7808976" y="4078224"/>
+            <a:ext cx="812215" cy="512064"/>
+          </a:xfrm>
+          <a:prstGeom prst="roundRect">
+            <a:avLst>
+              <a:gd name="adj" fmla="val 10714"/>
+            </a:avLst>
+          </a:prstGeom>
+          <a:solidFill>
+            <a:srgbClr val="FFFFFF"/>
+          </a:solidFill>
+          <a:ln w="9525">
+            <a:solidFill>
+              <a:srgbClr val="0F62CE"/>
+            </a:solidFill>
+          </a:ln>
+        </p:spPr>
+        <p:txBody>
+          <a:bodyPr rtlCol="0" anchor="ctr" wrap="square" lIns="128016" tIns="18288" rIns="36576" bIns="18288">
+            <a:noAutofit/>
+          </a:bodyPr>
+          <a:lstStyle/>
+          <a:p>
+            <a:pPr algn="ctr" latinLnBrk="0">
+              <a:lnSpc>
+                <a:spcPct val="100000"/>
+              </a:lnSpc>
+              <a:spcBef>
+                <a:spcPts val="0"/>
+              </a:spcBef>
+              <a:spcAft>
+                <a:spcPts val="0"/>
+              </a:spcAft>
+            </a:pPr>
+            <a:r>
+              <a:rPr sz="950" b="1">
+                <a:solidFill>
+                  <a:srgbClr val="0A2B45"/>
+                </a:solidFill>
+                <a:latin typeface="Microsoft YaHei"/>
+                <a:ea typeface="Microsoft YaHei"/>
+                <a:cs typeface="Microsoft YaHei"/>
+              </a:rPr>
+              <a:t>单算子初筛</a:t>
+            </a:r>
+          </a:p>
+          <a:p>
+            <a:pPr algn="ctr" latinLnBrk="0">
+              <a:lnSpc>
+                <a:spcPct val="100000"/>
+              </a:lnSpc>
+              <a:spcBef>
+                <a:spcPts val="0"/>
+              </a:spcBef>
+              <a:spcAft>
+                <a:spcPts val="0"/>
+              </a:spcAft>
+            </a:pPr>
+            <a:r>
+              <a:rPr sz="850" b="1">
+                <a:solidFill>
+                  <a:srgbClr val="0F62CE"/>
+                </a:solidFill>
+                <a:latin typeface="Microsoft YaHei"/>
+                <a:ea typeface="Microsoft YaHei"/>
+                <a:cs typeface="Microsoft YaHei"/>
+              </a:rPr>
+              <a:t>≥ 2%</a:t>
+            </a:r>
+          </a:p>
+        </p:txBody>
+      </p:sp>
+      <p:sp>
+        <p:nvSpPr>
+          <p:cNvPr id="53" name="Oval 52"/>
+          <p:cNvSpPr/>
+          <p:nvPr/>
+        </p:nvSpPr>
+        <p:spPr>
+          <a:xfrm>
+            <a:off x="7726680" y="3995928"/>
+            <a:ext cx="219456" cy="219456"/>
+          </a:xfrm>
+          <a:prstGeom prst="ellipse">
+            <a:avLst/>
+          </a:prstGeom>
+          <a:solidFill>
+            <a:srgbClr val="0F62CE"/>
+          </a:solidFill>
+          <a:ln>
+            <a:noFill/>
+          </a:ln>
+        </p:spPr>
+        <p:txBody>
+          <a:bodyPr rtlCol="0" anchor="ctr" wrap="square" lIns="0" tIns="0" rIns="0" bIns="0">
+            <a:noAutofit/>
+          </a:bodyPr>
+          <a:lstStyle/>
+          <a:p>
+            <a:pPr algn="ctr" latinLnBrk="0">
+              <a:lnSpc>
+                <a:spcPct val="100000"/>
+              </a:lnSpc>
+              <a:spcBef>
+                <a:spcPts val="0"/>
+              </a:spcBef>
+              <a:spcAft>
+                <a:spcPts val="0"/>
+              </a:spcAft>
+            </a:pPr>
+            <a:r>
+              <a:rPr sz="900" b="1">
+                <a:solidFill>
+                  <a:srgbClr val="FFFFFF"/>
+                </a:solidFill>
+                <a:latin typeface="Microsoft YaHei"/>
+                <a:ea typeface="Microsoft YaHei"/>
+                <a:cs typeface="Microsoft YaHei"/>
+              </a:rPr>
+              <a:t>6</a:t>
+            </a:r>
+          </a:p>
+        </p:txBody>
+      </p:sp>
+      <p:sp>
+        <p:nvSpPr>
+          <p:cNvPr id="54" name="Rounded Rectangle 53"/>
+          <p:cNvSpPr/>
+          <p:nvPr/>
+        </p:nvSpPr>
+        <p:spPr>
+          <a:xfrm>
+            <a:off x="8749207" y="4078224"/>
+            <a:ext cx="812215" cy="512064"/>
+          </a:xfrm>
+          <a:prstGeom prst="roundRect">
+            <a:avLst>
+              <a:gd name="adj" fmla="val 10714"/>
+            </a:avLst>
+          </a:prstGeom>
+          <a:solidFill>
+            <a:srgbClr val="FFFFFF"/>
+          </a:solidFill>
+          <a:ln w="9525">
+            <a:solidFill>
+              <a:srgbClr val="0F62CE"/>
+            </a:solidFill>
+          </a:ln>
+        </p:spPr>
+        <p:txBody>
+          <a:bodyPr rtlCol="0" anchor="ctr" wrap="square" lIns="128016" tIns="18288" rIns="36576" bIns="18288">
+            <a:noAutofit/>
+          </a:bodyPr>
+          <a:lstStyle/>
+          <a:p>
+            <a:pPr algn="ctr" latinLnBrk="0">
+              <a:lnSpc>
+                <a:spcPct val="100000"/>
+              </a:lnSpc>
+              <a:spcBef>
+                <a:spcPts val="0"/>
+              </a:spcBef>
+              <a:spcAft>
+                <a:spcPts val="0"/>
+              </a:spcAft>
+            </a:pPr>
+            <a:r>
+              <a:rPr sz="950" b="1">
+                <a:solidFill>
+                  <a:srgbClr val="0A2B45"/>
+                </a:solidFill>
+                <a:latin typeface="Microsoft YaHei"/>
+                <a:ea typeface="Microsoft YaHei"/>
+                <a:cs typeface="Microsoft YaHei"/>
+              </a:rPr>
+              <a:t>数值误差</a:t>
+            </a:r>
+          </a:p>
+          <a:p>
+            <a:pPr algn="ctr" latinLnBrk="0">
+              <a:lnSpc>
+                <a:spcPct val="100000"/>
+              </a:lnSpc>
+              <a:spcBef>
+                <a:spcPts val="0"/>
+              </a:spcBef>
+              <a:spcAft>
+                <a:spcPts val="0"/>
+              </a:spcAft>
+            </a:pPr>
+            <a:r>
+              <a:rPr sz="850" b="1">
+                <a:solidFill>
+                  <a:srgbClr val="0F62CE"/>
+                </a:solidFill>
+                <a:latin typeface="Microsoft YaHei"/>
+                <a:ea typeface="Microsoft YaHei"/>
+                <a:cs typeface="Microsoft YaHei"/>
+              </a:rPr>
+              <a:t>≤ 0.03</a:t>
+            </a:r>
+          </a:p>
+        </p:txBody>
+      </p:sp>
+      <p:sp>
+        <p:nvSpPr>
+          <p:cNvPr id="55" name="Oval 54"/>
+          <p:cNvSpPr/>
+          <p:nvPr/>
+        </p:nvSpPr>
+        <p:spPr>
+          <a:xfrm>
+            <a:off x="8666911" y="3995928"/>
+            <a:ext cx="219456" cy="219456"/>
+          </a:xfrm>
+          <a:prstGeom prst="ellipse">
+            <a:avLst/>
+          </a:prstGeom>
+          <a:solidFill>
+            <a:srgbClr val="0F62CE"/>
+          </a:solidFill>
+          <a:ln>
+            <a:noFill/>
+          </a:ln>
+        </p:spPr>
+        <p:txBody>
+          <a:bodyPr rtlCol="0" anchor="ctr" wrap="square" lIns="0" tIns="0" rIns="0" bIns="0">
+            <a:noAutofit/>
+          </a:bodyPr>
+          <a:lstStyle/>
+          <a:p>
+            <a:pPr algn="ctr" latinLnBrk="0">
+              <a:lnSpc>
+                <a:spcPct val="100000"/>
+              </a:lnSpc>
+              <a:spcBef>
+                <a:spcPts val="0"/>
+              </a:spcBef>
+              <a:spcAft>
+                <a:spcPts val="0"/>
+              </a:spcAft>
+            </a:pPr>
+            <a:r>
+              <a:rPr sz="900" b="1">
+                <a:solidFill>
+                  <a:srgbClr val="FFFFFF"/>
+                </a:solidFill>
+                <a:latin typeface="Microsoft YaHei"/>
+                <a:ea typeface="Microsoft YaHei"/>
+                <a:cs typeface="Microsoft YaHei"/>
+              </a:rPr>
+              <a:t>7</a:t>
+            </a:r>
+          </a:p>
+        </p:txBody>
+      </p:sp>
+      <p:cxnSp>
+        <p:nvCxnSpPr>
+          <p:cNvPr id="56" name="Connector 55"/>
+          <p:cNvCxnSpPr/>
+          <p:nvPr/>
+        </p:nvCxnSpPr>
+        <p:spPr>
+          <a:xfrm>
+            <a:off x="8648623" y="4334256"/>
+            <a:ext cx="73152" cy="0"/>
+          </a:xfrm>
+          <a:prstGeom prst="line">
+            <a:avLst/>
+          </a:prstGeom>
+          <a:ln w="15875">
+            <a:solidFill>
+              <a:srgbClr val="0F62CE"/>
+            </a:solidFill>
+            <a:tailEnd type="triangle" w="med" len="med"/>
+          </a:ln>
+        </p:spPr>
+      </p:cxnSp>
+      <p:sp>
+        <p:nvSpPr>
+          <p:cNvPr id="57" name="Rounded Rectangle 56"/>
+          <p:cNvSpPr/>
+          <p:nvPr/>
+        </p:nvSpPr>
+        <p:spPr>
+          <a:xfrm>
+            <a:off x="9689439" y="4078224"/>
+            <a:ext cx="812215" cy="512064"/>
+          </a:xfrm>
+          <a:prstGeom prst="roundRect">
+            <a:avLst>
+              <a:gd name="adj" fmla="val 10714"/>
+            </a:avLst>
+          </a:prstGeom>
+          <a:solidFill>
+            <a:srgbClr val="FFFFFF"/>
+          </a:solidFill>
+          <a:ln w="9525">
+            <a:solidFill>
+              <a:srgbClr val="0F62CE"/>
+            </a:solidFill>
+          </a:ln>
+        </p:spPr>
+        <p:txBody>
+          <a:bodyPr rtlCol="0" anchor="ctr" wrap="square" lIns="128016" tIns="18288" rIns="36576" bIns="18288">
+            <a:noAutofit/>
+          </a:bodyPr>
+          <a:lstStyle/>
+          <a:p>
+            <a:pPr algn="ctr" latinLnBrk="0">
+              <a:lnSpc>
+                <a:spcPct val="100000"/>
+              </a:lnSpc>
+              <a:spcBef>
+                <a:spcPts val="0"/>
+              </a:spcBef>
+              <a:spcAft>
+                <a:spcPts val="0"/>
+              </a:spcAft>
+            </a:pPr>
+            <a:r>
+              <a:rPr sz="950" b="1">
+                <a:solidFill>
+                  <a:srgbClr val="0A2B45"/>
+                </a:solidFill>
+                <a:latin typeface="Microsoft YaHei"/>
+                <a:ea typeface="Microsoft YaHei"/>
+                <a:cs typeface="Microsoft YaHei"/>
+              </a:rPr>
+              <a:t>图文质量</a:t>
+            </a:r>
+          </a:p>
+          <a:p>
+            <a:pPr algn="ctr" latinLnBrk="0">
+              <a:lnSpc>
+                <a:spcPct val="100000"/>
+              </a:lnSpc>
+              <a:spcBef>
+                <a:spcPts val="0"/>
+              </a:spcBef>
+              <a:spcAft>
+                <a:spcPts val="0"/>
+              </a:spcAft>
+            </a:pPr>
+            <a:r>
+              <a:rPr sz="850" b="1">
+                <a:solidFill>
+                  <a:srgbClr val="0F62CE"/>
+                </a:solidFill>
+                <a:latin typeface="Microsoft YaHei"/>
+                <a:ea typeface="Microsoft YaHei"/>
+                <a:cs typeface="Microsoft YaHei"/>
+              </a:rPr>
+              <a:t>正确率不降</a:t>
+            </a:r>
+          </a:p>
+        </p:txBody>
+      </p:sp>
+      <p:sp>
+        <p:nvSpPr>
+          <p:cNvPr id="58" name="Oval 57"/>
+          <p:cNvSpPr/>
+          <p:nvPr/>
+        </p:nvSpPr>
+        <p:spPr>
+          <a:xfrm>
+            <a:off x="9607143" y="3995928"/>
+            <a:ext cx="219456" cy="219456"/>
+          </a:xfrm>
+          <a:prstGeom prst="ellipse">
+            <a:avLst/>
+          </a:prstGeom>
+          <a:solidFill>
+            <a:srgbClr val="0F62CE"/>
+          </a:solidFill>
+          <a:ln>
+            <a:noFill/>
+          </a:ln>
+        </p:spPr>
+        <p:txBody>
+          <a:bodyPr rtlCol="0" anchor="ctr" wrap="square" lIns="0" tIns="0" rIns="0" bIns="0">
+            <a:noAutofit/>
+          </a:bodyPr>
+          <a:lstStyle/>
+          <a:p>
+            <a:pPr algn="ctr" latinLnBrk="0">
+              <a:lnSpc>
+                <a:spcPct val="100000"/>
+              </a:lnSpc>
+              <a:spcBef>
+                <a:spcPts val="0"/>
+              </a:spcBef>
+              <a:spcAft>
+                <a:spcPts val="0"/>
+              </a:spcAft>
+            </a:pPr>
+            <a:r>
+              <a:rPr sz="900" b="1">
+                <a:solidFill>
+                  <a:srgbClr val="FFFFFF"/>
+                </a:solidFill>
+                <a:latin typeface="Microsoft YaHei"/>
+                <a:ea typeface="Microsoft YaHei"/>
+                <a:cs typeface="Microsoft YaHei"/>
+              </a:rPr>
+              <a:t>7</a:t>
+            </a:r>
+          </a:p>
+        </p:txBody>
+      </p:sp>
+      <p:cxnSp>
+        <p:nvCxnSpPr>
+          <p:cNvPr id="59" name="Connector 58"/>
+          <p:cNvCxnSpPr/>
+          <p:nvPr/>
+        </p:nvCxnSpPr>
+        <p:spPr>
+          <a:xfrm>
+            <a:off x="9588855" y="4334256"/>
+            <a:ext cx="73152" cy="0"/>
+          </a:xfrm>
+          <a:prstGeom prst="line">
+            <a:avLst/>
+          </a:prstGeom>
+          <a:ln w="15875">
+            <a:solidFill>
+              <a:srgbClr val="0F62CE"/>
+            </a:solidFill>
+            <a:tailEnd type="triangle" w="med" len="med"/>
+          </a:ln>
+        </p:spPr>
+      </p:cxnSp>
+      <p:sp>
+        <p:nvSpPr>
+          <p:cNvPr id="60" name="Rounded Rectangle 59"/>
+          <p:cNvSpPr/>
+          <p:nvPr/>
+        </p:nvSpPr>
+        <p:spPr>
+          <a:xfrm>
+            <a:off x="10629671" y="4078224"/>
+            <a:ext cx="812215" cy="512064"/>
+          </a:xfrm>
+          <a:prstGeom prst="roundRect">
+            <a:avLst>
+              <a:gd name="adj" fmla="val 10714"/>
+            </a:avLst>
+          </a:prstGeom>
+          <a:solidFill>
+            <a:srgbClr val="FFFFFF"/>
+          </a:solidFill>
+          <a:ln w="9525">
+            <a:solidFill>
+              <a:srgbClr val="0F62CE"/>
+            </a:solidFill>
+          </a:ln>
+        </p:spPr>
+        <p:txBody>
+          <a:bodyPr rtlCol="0" anchor="ctr" wrap="square" lIns="128016" tIns="18288" rIns="36576" bIns="18288">
+            <a:noAutofit/>
+          </a:bodyPr>
+          <a:lstStyle/>
+          <a:p>
+            <a:pPr algn="ctr" latinLnBrk="0">
+              <a:lnSpc>
+                <a:spcPct val="100000"/>
+              </a:lnSpc>
+              <a:spcBef>
+                <a:spcPts val="0"/>
+              </a:spcBef>
+              <a:spcAft>
+                <a:spcPts val="0"/>
+              </a:spcAft>
+            </a:pPr>
+            <a:r>
+              <a:rPr sz="950" b="1">
+                <a:solidFill>
+                  <a:srgbClr val="0A2B45"/>
+                </a:solidFill>
+                <a:latin typeface="Microsoft YaHei"/>
+                <a:ea typeface="Microsoft YaHei"/>
+                <a:cs typeface="Microsoft YaHei"/>
+              </a:rPr>
+              <a:t>整模 A/B</a:t>
+            </a:r>
+          </a:p>
+          <a:p>
+            <a:pPr algn="ctr" latinLnBrk="0">
+              <a:lnSpc>
+                <a:spcPct val="100000"/>
+              </a:lnSpc>
+              <a:spcBef>
+                <a:spcPts val="0"/>
+              </a:spcBef>
+              <a:spcAft>
+                <a:spcPts val="0"/>
+              </a:spcAft>
+            </a:pPr>
+            <a:r>
+              <a:rPr sz="850" b="1">
+                <a:solidFill>
+                  <a:srgbClr val="0F62CE"/>
+                </a:solidFill>
+                <a:latin typeface="Microsoft YaHei"/>
+                <a:ea typeface="Microsoft YaHei"/>
+                <a:cs typeface="Microsoft YaHei"/>
+              </a:rPr>
+              <a:t>超出噪声</a:t>
+            </a:r>
+          </a:p>
+        </p:txBody>
+      </p:sp>
+      <p:sp>
+        <p:nvSpPr>
+          <p:cNvPr id="61" name="Oval 60"/>
+          <p:cNvSpPr/>
+          <p:nvPr/>
+        </p:nvSpPr>
+        <p:spPr>
+          <a:xfrm>
+            <a:off x="10547375" y="3995928"/>
+            <a:ext cx="219456" cy="219456"/>
+          </a:xfrm>
+          <a:prstGeom prst="ellipse">
+            <a:avLst/>
+          </a:prstGeom>
+          <a:solidFill>
+            <a:srgbClr val="0F62CE"/>
+          </a:solidFill>
+          <a:ln>
+            <a:noFill/>
+          </a:ln>
+        </p:spPr>
+        <p:txBody>
+          <a:bodyPr rtlCol="0" anchor="ctr" wrap="square" lIns="0" tIns="0" rIns="0" bIns="0">
+            <a:noAutofit/>
+          </a:bodyPr>
+          <a:lstStyle/>
+          <a:p>
+            <a:pPr algn="ctr" latinLnBrk="0">
+              <a:lnSpc>
+                <a:spcPct val="100000"/>
+              </a:lnSpc>
+              <a:spcBef>
+                <a:spcPts val="0"/>
+              </a:spcBef>
+              <a:spcAft>
+                <a:spcPts val="0"/>
+              </a:spcAft>
+            </a:pPr>
+            <a:r>
+              <a:rPr sz="900" b="1">
+                <a:solidFill>
+                  <a:srgbClr val="FFFFFF"/>
+                </a:solidFill>
+                <a:latin typeface="Microsoft YaHei"/>
+                <a:ea typeface="Microsoft YaHei"/>
+                <a:cs typeface="Microsoft YaHei"/>
+              </a:rPr>
+              <a:t>8</a:t>
+            </a:r>
+          </a:p>
+        </p:txBody>
+      </p:sp>
+      <p:cxnSp>
+        <p:nvCxnSpPr>
+          <p:cNvPr id="62" name="Connector 61"/>
+          <p:cNvCxnSpPr/>
+          <p:nvPr/>
+        </p:nvCxnSpPr>
+        <p:spPr>
+          <a:xfrm>
+            <a:off x="10529087" y="4334256"/>
+            <a:ext cx="73152" cy="0"/>
+          </a:xfrm>
+          <a:prstGeom prst="line">
+            <a:avLst/>
+          </a:prstGeom>
+          <a:ln w="15875">
+            <a:solidFill>
+              <a:srgbClr val="0F62CE"/>
+            </a:solidFill>
+            <a:tailEnd type="triangle" w="med" len="med"/>
+          </a:ln>
+        </p:spPr>
+      </p:cxnSp>
+      <p:sp>
+        <p:nvSpPr>
+          <p:cNvPr id="63" name="Rounded Rectangle 62"/>
+          <p:cNvSpPr/>
+          <p:nvPr/>
+        </p:nvSpPr>
+        <p:spPr>
+          <a:xfrm>
+            <a:off x="7772400" y="4700016"/>
+            <a:ext cx="1174394" cy="475488"/>
+          </a:xfrm>
+          <a:prstGeom prst="roundRect">
+            <a:avLst>
+              <a:gd name="adj" fmla="val 11538"/>
+            </a:avLst>
+          </a:prstGeom>
+          <a:solidFill>
+            <a:srgbClr val="FFFFFF"/>
+          </a:solidFill>
+          <a:ln w="9525">
+            <a:solidFill>
+              <a:srgbClr val="B4382F"/>
+            </a:solidFill>
+          </a:ln>
+        </p:spPr>
+        <p:txBody>
+          <a:bodyPr rtlCol="0" anchor="ctr" wrap="square" lIns="45720" tIns="18288" rIns="45720" bIns="18288">
+            <a:noAutofit/>
+          </a:bodyPr>
+          <a:lstStyle/>
+          <a:p>
+            <a:pPr algn="ctr" latinLnBrk="0">
+              <a:lnSpc>
+                <a:spcPct val="100000"/>
+              </a:lnSpc>
+              <a:spcBef>
+                <a:spcPts val="0"/>
+              </a:spcBef>
+              <a:spcAft>
+                <a:spcPts val="0"/>
+              </a:spcAft>
+            </a:pPr>
+            <a:r>
+              <a:rPr sz="950" b="1">
+                <a:solidFill>
+                  <a:srgbClr val="B4382F"/>
+                </a:solidFill>
+                <a:latin typeface="Microsoft YaHei"/>
+                <a:ea typeface="Microsoft YaHei"/>
+                <a:cs typeface="Microsoft YaHei"/>
+              </a:rPr>
+              <a:t>打回</a:t>
+            </a:r>
+          </a:p>
+          <a:p>
+            <a:pPr algn="ctr" latinLnBrk="0">
+              <a:lnSpc>
+                <a:spcPct val="100000"/>
+              </a:lnSpc>
+              <a:spcBef>
+                <a:spcPts val="0"/>
+              </a:spcBef>
+              <a:spcAft>
+                <a:spcPts val="0"/>
+              </a:spcAft>
+            </a:pPr>
+            <a:r>
+              <a:rPr sz="800" b="0">
+                <a:solidFill>
+                  <a:srgbClr val="1B4D69"/>
+                </a:solidFill>
+                <a:latin typeface="Microsoft YaHei"/>
+                <a:ea typeface="Microsoft YaHei"/>
+                <a:cs typeface="Microsoft YaHei"/>
+              </a:rPr>
+              <a:t>任一不过，原因进记忆</a:t>
+            </a:r>
+          </a:p>
+        </p:txBody>
+      </p:sp>
+      <p:sp>
+        <p:nvSpPr>
+          <p:cNvPr id="64" name="Rounded Rectangle 63"/>
+          <p:cNvSpPr/>
+          <p:nvPr/>
+        </p:nvSpPr>
+        <p:spPr>
+          <a:xfrm>
+            <a:off x="9019946" y="4700016"/>
+            <a:ext cx="1174394" cy="475488"/>
+          </a:xfrm>
+          <a:prstGeom prst="roundRect">
+            <a:avLst>
+              <a:gd name="adj" fmla="val 11538"/>
+            </a:avLst>
+          </a:prstGeom>
+          <a:solidFill>
+            <a:srgbClr val="FFFFFF"/>
+          </a:solidFill>
+          <a:ln w="9525">
+            <a:solidFill>
+              <a:srgbClr val="0F62CE"/>
+            </a:solidFill>
+          </a:ln>
+        </p:spPr>
+        <p:txBody>
+          <a:bodyPr rtlCol="0" anchor="ctr" wrap="square" lIns="45720" tIns="18288" rIns="45720" bIns="18288">
+            <a:noAutofit/>
+          </a:bodyPr>
+          <a:lstStyle/>
+          <a:p>
+            <a:pPr algn="ctr" latinLnBrk="0">
+              <a:lnSpc>
+                <a:spcPct val="100000"/>
+              </a:lnSpc>
+              <a:spcBef>
+                <a:spcPts val="0"/>
+              </a:spcBef>
+              <a:spcAft>
+                <a:spcPts val="0"/>
+              </a:spcAft>
+            </a:pPr>
+            <a:r>
+              <a:rPr sz="950" b="1">
+                <a:solidFill>
+                  <a:srgbClr val="0F62CE"/>
+                </a:solidFill>
+                <a:latin typeface="Microsoft YaHei"/>
+                <a:ea typeface="Microsoft YaHei"/>
+                <a:cs typeface="Microsoft YaHei"/>
+              </a:rPr>
+              <a:t>叠加入包</a:t>
+            </a:r>
+          </a:p>
+          <a:p>
+            <a:pPr algn="ctr" latinLnBrk="0">
+              <a:lnSpc>
+                <a:spcPct val="100000"/>
+              </a:lnSpc>
+              <a:spcBef>
+                <a:spcPts val="0"/>
+              </a:spcBef>
+              <a:spcAft>
+                <a:spcPts val="0"/>
+              </a:spcAft>
+            </a:pPr>
+            <a:r>
+              <a:rPr sz="800" b="0">
+                <a:solidFill>
+                  <a:srgbClr val="1B4D69"/>
+                </a:solidFill>
+                <a:latin typeface="Microsoft YaHei"/>
+                <a:ea typeface="Microsoft YaHei"/>
+                <a:cs typeface="Microsoft YaHei"/>
+              </a:rPr>
+              <a:t>小收益先攒，整包验</a:t>
+            </a:r>
+          </a:p>
+        </p:txBody>
+      </p:sp>
+      <p:sp>
+        <p:nvSpPr>
+          <p:cNvPr id="65" name="Rounded Rectangle 64"/>
+          <p:cNvSpPr/>
+          <p:nvPr/>
+        </p:nvSpPr>
+        <p:spPr>
+          <a:xfrm>
+            <a:off x="10267492" y="4700016"/>
+            <a:ext cx="1174394" cy="475488"/>
+          </a:xfrm>
+          <a:prstGeom prst="roundRect">
+            <a:avLst>
+              <a:gd name="adj" fmla="val 11538"/>
+            </a:avLst>
+          </a:prstGeom>
+          <a:solidFill>
+            <a:srgbClr val="FFFFFF"/>
+          </a:solidFill>
+          <a:ln w="9525">
+            <a:solidFill>
+              <a:srgbClr val="17795F"/>
+            </a:solidFill>
+          </a:ln>
+        </p:spPr>
+        <p:txBody>
+          <a:bodyPr rtlCol="0" anchor="ctr" wrap="square" lIns="45720" tIns="18288" rIns="45720" bIns="18288">
+            <a:noAutofit/>
+          </a:bodyPr>
+          <a:lstStyle/>
+          <a:p>
+            <a:pPr algn="ctr" latinLnBrk="0">
+              <a:lnSpc>
+                <a:spcPct val="100000"/>
+              </a:lnSpc>
+              <a:spcBef>
+                <a:spcPts val="0"/>
+              </a:spcBef>
+              <a:spcAft>
+                <a:spcPts val="0"/>
+              </a:spcAft>
+            </a:pPr>
+            <a:r>
+              <a:rPr sz="950" b="1">
+                <a:solidFill>
+                  <a:srgbClr val="17795F"/>
+                </a:solidFill>
+                <a:latin typeface="Microsoft YaHei"/>
+                <a:ea typeface="Microsoft YaHei"/>
+                <a:cs typeface="Microsoft YaHei"/>
+              </a:rPr>
+              <a:t>晋升新基线</a:t>
+            </a:r>
+          </a:p>
+          <a:p>
+            <a:pPr algn="ctr" latinLnBrk="0">
+              <a:lnSpc>
+                <a:spcPct val="100000"/>
+              </a:lnSpc>
+              <a:spcBef>
+                <a:spcPts val="0"/>
+              </a:spcBef>
+              <a:spcAft>
+                <a:spcPts val="0"/>
+              </a:spcAft>
+            </a:pPr>
+            <a:r>
+              <a:rPr sz="800" b="0">
+                <a:solidFill>
+                  <a:srgbClr val="1B4D69"/>
+                </a:solidFill>
+                <a:latin typeface="Microsoft YaHei"/>
+                <a:ea typeface="Microsoft YaHei"/>
+                <a:cs typeface="Microsoft YaHei"/>
+              </a:rPr>
+              <a:t>全部通过，回到 1</a:t>
+            </a:r>
+          </a:p>
+        </p:txBody>
+      </p:sp>
+      <p:cxnSp>
+        <p:nvCxnSpPr>
+          <p:cNvPr id="66" name="Connector 65"/>
+          <p:cNvCxnSpPr/>
+          <p:nvPr/>
+        </p:nvCxnSpPr>
+        <p:spPr>
+          <a:xfrm>
+            <a:off x="7434071" y="4334256"/>
+            <a:ext cx="347473" cy="0"/>
+          </a:xfrm>
+          <a:prstGeom prst="line">
+            <a:avLst/>
+          </a:prstGeom>
+          <a:ln w="15875">
+            <a:solidFill>
+              <a:srgbClr val="0F62CE"/>
+            </a:solidFill>
+            <a:tailEnd type="triangle" w="med" len="med"/>
+          </a:ln>
+        </p:spPr>
+      </p:cxnSp>
+      <p:sp>
+        <p:nvSpPr>
+          <p:cNvPr id="67" name="Rectangle 66"/>
+          <p:cNvSpPr/>
+          <p:nvPr/>
+        </p:nvSpPr>
+        <p:spPr>
+          <a:xfrm>
+            <a:off x="1417319" y="5742432"/>
+            <a:ext cx="10225735" cy="475488"/>
           </a:xfrm>
           <a:prstGeom prst="rect">
             <a:avLst/>
@@ -30898,20 +34057,20 @@
       </p:sp>
       <p:sp>
         <p:nvSpPr>
-          <p:cNvPr id="11" name="Rectangle 10"/>
+          <p:cNvPr id="68" name="Rectangle 67"/>
           <p:cNvSpPr/>
           <p:nvPr/>
         </p:nvSpPr>
         <p:spPr>
           <a:xfrm>
-            <a:off x="548640" y="3712463"/>
-            <a:ext cx="896112" cy="2560320"/>
+            <a:off x="548640" y="5742432"/>
+            <a:ext cx="868680" cy="475488"/>
           </a:xfrm>
           <a:prstGeom prst="rect">
             <a:avLst/>
           </a:prstGeom>
           <a:solidFill>
-            <a:srgbClr val="0F62CE"/>
+            <a:srgbClr val="40708B"/>
           </a:solidFill>
           <a:ln w="19050">
             <a:solidFill>
@@ -30920,7 +34079,7 @@
           </a:ln>
         </p:spPr>
         <p:txBody>
-          <a:bodyPr rtlCol="0" anchor="ctr" wrap="square" lIns="36576" tIns="0" rIns="36576" bIns="0">
+          <a:bodyPr rtlCol="0" anchor="ctr" wrap="square" lIns="18288" tIns="0" rIns="18288" bIns="0">
             <a:noAutofit/>
           </a:bodyPr>
           <a:lstStyle/>
@@ -30933,11 +34092,11 @@
                 <a:spcPts val="0"/>
               </a:spcBef>
               <a:spcAft>
-                <a:spcPts val="200"/>
-              </a:spcAft>
-            </a:pPr>
-            <a:r>
-              <a:rPr sz="1300" b="1">
+                <a:spcPts val="0"/>
+              </a:spcAft>
+            </a:pPr>
+            <a:r>
+              <a:rPr sz="1200" b="1">
                 <a:solidFill>
                   <a:srgbClr val="FFFFFF"/>
                 </a:solidFill>
@@ -30945,142 +34104,329 @@
                 <a:ea typeface="Microsoft YaHei"/>
                 <a:cs typeface="Microsoft YaHei"/>
               </a:rPr>
-              <a:t>控制器</a:t>
-            </a:r>
-          </a:p>
-          <a:p>
-            <a:pPr algn="ctr" latinLnBrk="0">
-              <a:lnSpc>
-                <a:spcPct val="100000"/>
-              </a:lnSpc>
-              <a:spcBef>
-                <a:spcPts val="0"/>
-              </a:spcBef>
-              <a:spcAft>
-                <a:spcPts val="0"/>
-              </a:spcAft>
-            </a:pPr>
-            <a:r>
-              <a:rPr sz="850" b="0">
-                <a:solidFill>
-                  <a:srgbClr val="FFFFFF"/>
-                </a:solidFill>
-                <a:latin typeface="Microsoft YaHei"/>
-                <a:ea typeface="Microsoft YaHei"/>
-                <a:cs typeface="Microsoft YaHei"/>
-              </a:rPr>
-              <a:t>确定性</a:t>
-            </a:r>
-          </a:p>
-          <a:p>
-            <a:pPr algn="ctr" latinLnBrk="0">
-              <a:lnSpc>
-                <a:spcPct val="100000"/>
-              </a:lnSpc>
-              <a:spcBef>
-                <a:spcPts val="0"/>
-              </a:spcBef>
-              <a:spcAft>
-                <a:spcPts val="0"/>
-              </a:spcAft>
-            </a:pPr>
-            <a:r>
-              <a:rPr sz="850" b="0">
-                <a:solidFill>
-                  <a:srgbClr val="FFFFFF"/>
-                </a:solidFill>
-                <a:latin typeface="Microsoft YaHei"/>
-                <a:ea typeface="Microsoft YaHei"/>
-                <a:cs typeface="Microsoft YaHei"/>
-              </a:rPr>
-              <a:t>判定成败</a:t>
-            </a:r>
-          </a:p>
-        </p:txBody>
-      </p:sp>
-      <p:sp>
-        <p:nvSpPr>
-          <p:cNvPr id="12" name="Rounded Rectangle 11"/>
+              <a:t>被测系统</a:t>
+            </a:r>
+          </a:p>
+        </p:txBody>
+      </p:sp>
+      <p:sp>
+        <p:nvSpPr>
+          <p:cNvPr id="69" name="Rounded Rectangle 68"/>
           <p:cNvSpPr/>
           <p:nvPr/>
         </p:nvSpPr>
         <p:spPr>
           <a:xfrm>
-            <a:off x="1627632" y="1389888"/>
-            <a:ext cx="1188720" cy="438912"/>
+            <a:off x="1554479" y="5815584"/>
+            <a:ext cx="2282113" cy="329184"/>
           </a:xfrm>
           <a:prstGeom prst="roundRect">
             <a:avLst>
-              <a:gd name="adj" fmla="val 16666"/>
+              <a:gd name="adj" fmla="val 50000"/>
             </a:avLst>
           </a:prstGeom>
           <a:solidFill>
             <a:srgbClr val="FFFFFF"/>
           </a:solidFill>
-          <a:ln w="12700">
+          <a:ln w="9525">
+            <a:solidFill>
+              <a:srgbClr val="7FA4BA"/>
+            </a:solidFill>
+          </a:ln>
+        </p:spPr>
+        <p:txBody>
+          <a:bodyPr rtlCol="0" anchor="ctr" wrap="square" lIns="36576" tIns="0" rIns="36576" bIns="0">
+            <a:noAutofit/>
+          </a:bodyPr>
+          <a:lstStyle/>
+          <a:p>
+            <a:pPr algn="ctr" latinLnBrk="0">
+              <a:lnSpc>
+                <a:spcPct val="100000"/>
+              </a:lnSpc>
+              <a:spcBef>
+                <a:spcPts val="0"/>
+              </a:spcBef>
+              <a:spcAft>
+                <a:spcPts val="0"/>
+              </a:spcAft>
+            </a:pPr>
+            <a:r>
+              <a:rPr sz="950" b="1">
+                <a:solidFill>
+                  <a:srgbClr val="123C5B"/>
+                </a:solidFill>
+                <a:latin typeface="Microsoft YaHei"/>
+                <a:ea typeface="Microsoft YaHei"/>
+                <a:cs typeface="Microsoft YaHei"/>
+              </a:rPr>
+              <a:t>SGLang 原仓库</a:t>
+            </a:r>
+          </a:p>
+        </p:txBody>
+      </p:sp>
+      <p:sp>
+        <p:nvSpPr>
+          <p:cNvPr id="70" name="Rounded Rectangle 69"/>
+          <p:cNvSpPr/>
+          <p:nvPr/>
+        </p:nvSpPr>
+        <p:spPr>
+          <a:xfrm>
+            <a:off x="4110913" y="5815584"/>
+            <a:ext cx="2282113" cy="329184"/>
+          </a:xfrm>
+          <a:prstGeom prst="roundRect">
+            <a:avLst>
+              <a:gd name="adj" fmla="val 50000"/>
+            </a:avLst>
+          </a:prstGeom>
+          <a:solidFill>
+            <a:srgbClr val="FFFFFF"/>
+          </a:solidFill>
+          <a:ln w="9525">
+            <a:solidFill>
+              <a:srgbClr val="7FA4BA"/>
+            </a:solidFill>
+          </a:ln>
+        </p:spPr>
+        <p:txBody>
+          <a:bodyPr rtlCol="0" anchor="ctr" wrap="square" lIns="36576" tIns="0" rIns="36576" bIns="0">
+            <a:noAutofit/>
+          </a:bodyPr>
+          <a:lstStyle/>
+          <a:p>
+            <a:pPr algn="ctr" latinLnBrk="0">
+              <a:lnSpc>
+                <a:spcPct val="100000"/>
+              </a:lnSpc>
+              <a:spcBef>
+                <a:spcPts val="0"/>
+              </a:spcBef>
+              <a:spcAft>
+                <a:spcPts val="0"/>
+              </a:spcAft>
+            </a:pPr>
+            <a:r>
+              <a:rPr sz="950" b="1">
+                <a:solidFill>
+                  <a:srgbClr val="123C5B"/>
+                </a:solidFill>
+                <a:latin typeface="Microsoft YaHei"/>
+                <a:ea typeface="Microsoft YaHei"/>
+                <a:cs typeface="Microsoft YaHei"/>
+              </a:rPr>
+              <a:t>xInfer / xtorch_ops</a:t>
+            </a:r>
+          </a:p>
+        </p:txBody>
+      </p:sp>
+      <p:sp>
+        <p:nvSpPr>
+          <p:cNvPr id="71" name="Rounded Rectangle 70"/>
+          <p:cNvSpPr/>
+          <p:nvPr/>
+        </p:nvSpPr>
+        <p:spPr>
+          <a:xfrm>
+            <a:off x="6667347" y="5815584"/>
+            <a:ext cx="2282113" cy="329184"/>
+          </a:xfrm>
+          <a:prstGeom prst="roundRect">
+            <a:avLst>
+              <a:gd name="adj" fmla="val 50000"/>
+            </a:avLst>
+          </a:prstGeom>
+          <a:solidFill>
+            <a:srgbClr val="FFFFFF"/>
+          </a:solidFill>
+          <a:ln w="9525">
+            <a:solidFill>
+              <a:srgbClr val="7FA4BA"/>
+            </a:solidFill>
+          </a:ln>
+        </p:spPr>
+        <p:txBody>
+          <a:bodyPr rtlCol="0" anchor="ctr" wrap="square" lIns="36576" tIns="0" rIns="36576" bIns="0">
+            <a:noAutofit/>
+          </a:bodyPr>
+          <a:lstStyle/>
+          <a:p>
+            <a:pPr algn="ctr" latinLnBrk="0">
+              <a:lnSpc>
+                <a:spcPct val="100000"/>
+              </a:lnSpc>
+              <a:spcBef>
+                <a:spcPts val="0"/>
+              </a:spcBef>
+              <a:spcAft>
+                <a:spcPts val="0"/>
+              </a:spcAft>
+            </a:pPr>
+            <a:r>
+              <a:rPr sz="950" b="1">
+                <a:solidFill>
+                  <a:srgbClr val="123C5B"/>
+                </a:solidFill>
+                <a:latin typeface="Microsoft YaHei"/>
+                <a:ea typeface="Microsoft YaHei"/>
+                <a:cs typeface="Microsoft YaHei"/>
+              </a:rPr>
+              <a:t>登记的独立算子</a:t>
+            </a:r>
+          </a:p>
+        </p:txBody>
+      </p:sp>
+      <p:sp>
+        <p:nvSpPr>
+          <p:cNvPr id="72" name="Rounded Rectangle 71"/>
+          <p:cNvSpPr/>
+          <p:nvPr/>
+        </p:nvSpPr>
+        <p:spPr>
+          <a:xfrm>
+            <a:off x="9223781" y="5815584"/>
+            <a:ext cx="2282113" cy="329184"/>
+          </a:xfrm>
+          <a:prstGeom prst="roundRect">
+            <a:avLst>
+              <a:gd name="adj" fmla="val 50000"/>
+            </a:avLst>
+          </a:prstGeom>
+          <a:solidFill>
+            <a:srgbClr val="FFFFFF"/>
+          </a:solidFill>
+          <a:ln w="9525">
+            <a:solidFill>
+              <a:srgbClr val="7FA4BA"/>
+            </a:solidFill>
+          </a:ln>
+        </p:spPr>
+        <p:txBody>
+          <a:bodyPr rtlCol="0" anchor="ctr" wrap="square" lIns="36576" tIns="0" rIns="36576" bIns="0">
+            <a:noAutofit/>
+          </a:bodyPr>
+          <a:lstStyle/>
+          <a:p>
+            <a:pPr algn="ctr" latinLnBrk="0">
+              <a:lnSpc>
+                <a:spcPct val="100000"/>
+              </a:lnSpc>
+              <a:spcBef>
+                <a:spcPts val="0"/>
+              </a:spcBef>
+              <a:spcAft>
+                <a:spcPts val="0"/>
+              </a:spcAft>
+            </a:pPr>
+            <a:r>
+              <a:rPr sz="950" b="1">
+                <a:solidFill>
+                  <a:srgbClr val="123C5B"/>
+                </a:solidFill>
+                <a:latin typeface="Microsoft YaHei"/>
+                <a:ea typeface="Microsoft YaHei"/>
+                <a:cs typeface="Microsoft YaHei"/>
+              </a:rPr>
+              <a:t>M100 真机</a:t>
+            </a:r>
+          </a:p>
+        </p:txBody>
+      </p:sp>
+      <p:cxnSp>
+        <p:nvCxnSpPr>
+          <p:cNvPr id="73" name="Connector 72"/>
+          <p:cNvCxnSpPr/>
+          <p:nvPr/>
+        </p:nvCxnSpPr>
+        <p:spPr>
+          <a:xfrm>
+            <a:off x="1737360" y="1746504"/>
+            <a:ext cx="0" cy="219456"/>
+          </a:xfrm>
+          <a:prstGeom prst="line">
+            <a:avLst/>
+          </a:prstGeom>
+          <a:ln w="19050">
             <a:solidFill>
               <a:srgbClr val="1B4D69"/>
             </a:solidFill>
+            <a:tailEnd type="triangle" w="med" len="med"/>
           </a:ln>
         </p:spPr>
-        <p:txBody>
-          <a:bodyPr rtlCol="0" anchor="ctr" wrap="square" lIns="54864" tIns="18288" rIns="54864" bIns="18288">
-            <a:noAutofit/>
-          </a:bodyPr>
-          <a:lstStyle/>
-          <a:p>
-            <a:pPr algn="ctr" latinLnBrk="0">
-              <a:lnSpc>
-                <a:spcPct val="100000"/>
-              </a:lnSpc>
-              <a:spcBef>
-                <a:spcPts val="0"/>
-              </a:spcBef>
-              <a:spcAft>
-                <a:spcPts val="0"/>
-              </a:spcAft>
-            </a:pPr>
-            <a:r>
-              <a:rPr sz="1100" b="1">
-                <a:solidFill>
-                  <a:srgbClr val="0A2B45"/>
-                </a:solidFill>
-                <a:latin typeface="Microsoft YaHei"/>
-                <a:ea typeface="Microsoft YaHei"/>
-                <a:cs typeface="Microsoft YaHei"/>
-              </a:rPr>
-              <a:t>下达任务</a:t>
-            </a:r>
-          </a:p>
-        </p:txBody>
-      </p:sp>
-      <p:sp>
-        <p:nvSpPr>
-          <p:cNvPr id="13" name="Rounded Rectangle 12"/>
+      </p:cxnSp>
+      <p:cxnSp>
+        <p:nvCxnSpPr>
+          <p:cNvPr id="74" name="Connector 73"/>
+          <p:cNvCxnSpPr/>
+          <p:nvPr/>
+        </p:nvCxnSpPr>
+        <p:spPr>
+          <a:xfrm>
+            <a:off x="4146804" y="1746504"/>
+            <a:ext cx="0" cy="219456"/>
+          </a:xfrm>
+          <a:prstGeom prst="line">
+            <a:avLst/>
+          </a:prstGeom>
+          <a:ln w="19050">
+            <a:solidFill>
+              <a:srgbClr val="1B4D69"/>
+            </a:solidFill>
+            <a:headEnd type="triangle" w="med" len="med"/>
+            <a:tailEnd type="triangle" w="med" len="med"/>
+          </a:ln>
+        </p:spPr>
+      </p:cxnSp>
+      <p:cxnSp>
+        <p:nvCxnSpPr>
+          <p:cNvPr id="75" name="Connector 74"/>
+          <p:cNvCxnSpPr/>
+          <p:nvPr/>
+        </p:nvCxnSpPr>
+        <p:spPr>
+          <a:xfrm flipV="1">
+            <a:off x="10607040" y="1746504"/>
+            <a:ext cx="0" cy="1609344"/>
+          </a:xfrm>
+          <a:prstGeom prst="line">
+            <a:avLst/>
+          </a:prstGeom>
+          <a:ln w="19050">
+            <a:solidFill>
+              <a:srgbClr val="0F62CE"/>
+            </a:solidFill>
+            <a:tailEnd type="triangle" w="med" len="med"/>
+          </a:ln>
+        </p:spPr>
+      </p:cxnSp>
+      <p:sp>
+        <p:nvSpPr>
+          <p:cNvPr id="76" name="Rounded Rectangle 75"/>
           <p:cNvSpPr/>
           <p:nvPr/>
         </p:nvSpPr>
         <p:spPr>
           <a:xfrm>
-            <a:off x="3227832" y="1389888"/>
-            <a:ext cx="1188720" cy="438912"/>
+            <a:off x="10122408" y="2395728"/>
+            <a:ext cx="969264" cy="201168"/>
           </a:xfrm>
           <a:prstGeom prst="roundRect">
             <a:avLst>
-              <a:gd name="adj" fmla="val 16666"/>
+              <a:gd name="adj" fmla="val 50000"/>
             </a:avLst>
           </a:prstGeom>
           <a:solidFill>
             <a:srgbClr val="FFFFFF"/>
           </a:solidFill>
-          <a:ln w="12700">
+          <a:ln w="9525">
             <a:solidFill>
-              <a:srgbClr val="1B4D69"/>
+              <a:srgbClr val="0F62CE"/>
             </a:solidFill>
           </a:ln>
         </p:spPr>
         <p:txBody>
-          <a:bodyPr rtlCol="0" anchor="ctr" wrap="square" lIns="54864" tIns="18288" rIns="54864" bIns="18288">
+          <a:bodyPr rtlCol="0" anchor="ctr" wrap="square" lIns="18288" tIns="0" rIns="18288" bIns="0">
             <a:noAutofit/>
           </a:bodyPr>
           <a:lstStyle/>
@@ -31097,102 +34443,158 @@
               </a:spcAft>
             </a:pPr>
             <a:r>
-              <a:rPr sz="1100" b="1">
-                <a:solidFill>
-                  <a:srgbClr val="0A2B45"/>
-                </a:solidFill>
-                <a:latin typeface="Microsoft YaHei"/>
-                <a:ea typeface="Microsoft YaHei"/>
-                <a:cs typeface="Microsoft YaHei"/>
-              </a:rPr>
-              <a:t>按需介入</a:t>
-            </a:r>
-          </a:p>
-        </p:txBody>
-      </p:sp>
-      <p:sp>
-        <p:nvSpPr>
-          <p:cNvPr id="14" name="Rounded Rectangle 13"/>
-          <p:cNvSpPr/>
-          <p:nvPr/>
-        </p:nvSpPr>
-        <p:spPr>
-          <a:xfrm>
-            <a:off x="10314432" y="1389888"/>
-            <a:ext cx="1188720" cy="438912"/>
-          </a:xfrm>
-          <a:prstGeom prst="roundRect">
-            <a:avLst>
-              <a:gd name="adj" fmla="val 16666"/>
-            </a:avLst>
-          </a:prstGeom>
-          <a:solidFill>
-            <a:srgbClr val="FFFFFF"/>
-          </a:solidFill>
-          <a:ln w="12700">
+              <a:rPr sz="800" b="1">
+                <a:solidFill>
+                  <a:srgbClr val="0F62CE"/>
+                </a:solidFill>
+                <a:latin typeface="Microsoft YaHei"/>
+                <a:ea typeface="Microsoft YaHei"/>
+                <a:cs typeface="Microsoft YaHei"/>
+              </a:rPr>
+              <a:t>报告 + 最优版本</a:t>
+            </a:r>
+          </a:p>
+        </p:txBody>
+      </p:sp>
+      <p:cxnSp>
+        <p:nvCxnSpPr>
+          <p:cNvPr id="77" name="Connector 76"/>
+          <p:cNvCxnSpPr/>
+          <p:nvPr/>
+        </p:nvCxnSpPr>
+        <p:spPr>
+          <a:xfrm>
+            <a:off x="1403604" y="3026664"/>
+            <a:ext cx="0" cy="329184"/>
+          </a:xfrm>
+          <a:prstGeom prst="line">
+            <a:avLst/>
+          </a:prstGeom>
+          <a:ln w="19050">
             <a:solidFill>
-              <a:srgbClr val="1B4D69"/>
+              <a:srgbClr val="40708B"/>
             </a:solidFill>
+            <a:tailEnd type="triangle" w="med" len="med"/>
           </a:ln>
         </p:spPr>
-        <p:txBody>
-          <a:bodyPr rtlCol="0" anchor="ctr" wrap="square" lIns="54864" tIns="18288" rIns="54864" bIns="18288">
-            <a:noAutofit/>
-          </a:bodyPr>
-          <a:lstStyle/>
-          <a:p>
-            <a:pPr algn="ctr" latinLnBrk="0">
-              <a:lnSpc>
-                <a:spcPct val="100000"/>
-              </a:lnSpc>
-              <a:spcBef>
-                <a:spcPts val="0"/>
-              </a:spcBef>
-              <a:spcAft>
-                <a:spcPts val="0"/>
-              </a:spcAft>
-            </a:pPr>
-            <a:r>
-              <a:rPr sz="1100" b="1">
-                <a:solidFill>
-                  <a:srgbClr val="0A2B45"/>
-                </a:solidFill>
-                <a:latin typeface="Microsoft YaHei"/>
-                <a:ea typeface="Microsoft YaHei"/>
-                <a:cs typeface="Microsoft YaHei"/>
-              </a:rPr>
-              <a:t>终审验收</a:t>
-            </a:r>
-          </a:p>
-        </p:txBody>
-      </p:sp>
-      <p:sp>
-        <p:nvSpPr>
-          <p:cNvPr id="15" name="Rounded Rectangle 14"/>
-          <p:cNvSpPr/>
-          <p:nvPr/>
-        </p:nvSpPr>
-        <p:spPr>
-          <a:xfrm>
-            <a:off x="2633472" y="2542032"/>
-            <a:ext cx="2377440" cy="731520"/>
-          </a:xfrm>
-          <a:prstGeom prst="roundRect">
-            <a:avLst>
-              <a:gd name="adj" fmla="val 10000"/>
-            </a:avLst>
-          </a:prstGeom>
-          <a:solidFill>
-            <a:srgbClr val="FBE6D4"/>
-          </a:solidFill>
+      </p:cxnSp>
+      <p:cxnSp>
+        <p:nvCxnSpPr>
+          <p:cNvPr id="78" name="Connector 77"/>
+          <p:cNvCxnSpPr/>
+          <p:nvPr/>
+        </p:nvCxnSpPr>
+        <p:spPr>
+          <a:xfrm flipV="1">
+            <a:off x="2926080" y="3026664"/>
+            <a:ext cx="0" cy="329184"/>
+          </a:xfrm>
+          <a:prstGeom prst="line">
+            <a:avLst/>
+          </a:prstGeom>
+          <a:ln w="19050">
+            <a:solidFill>
+              <a:srgbClr val="0F62CE"/>
+            </a:solidFill>
+            <a:tailEnd type="triangle" w="med" len="med"/>
+          </a:ln>
+        </p:spPr>
+      </p:cxnSp>
+      <p:cxnSp>
+        <p:nvCxnSpPr>
+          <p:cNvPr id="79" name="Connector 78"/>
+          <p:cNvCxnSpPr/>
+          <p:nvPr/>
+        </p:nvCxnSpPr>
+        <p:spPr>
+          <a:xfrm>
+            <a:off x="4201668" y="3026664"/>
+            <a:ext cx="0" cy="329184"/>
+          </a:xfrm>
+          <a:prstGeom prst="line">
+            <a:avLst/>
+          </a:prstGeom>
           <a:ln w="15875">
             <a:solidFill>
               <a:srgbClr val="D2690C"/>
             </a:solidFill>
+            <a:prstDash val="dash"/>
+            <a:tailEnd type="triangle" w="med" len="med"/>
           </a:ln>
         </p:spPr>
-        <p:txBody>
-          <a:bodyPr rtlCol="0" anchor="ctr" wrap="square" lIns="54864" tIns="18288" rIns="54864" bIns="18288">
+      </p:cxnSp>
+      <p:cxnSp>
+        <p:nvCxnSpPr>
+          <p:cNvPr id="80" name="Connector 79"/>
+          <p:cNvCxnSpPr/>
+          <p:nvPr/>
+        </p:nvCxnSpPr>
+        <p:spPr>
+          <a:xfrm>
+            <a:off x="5605272" y="3026664"/>
+            <a:ext cx="0" cy="329184"/>
+          </a:xfrm>
+          <a:prstGeom prst="line">
+            <a:avLst/>
+          </a:prstGeom>
+          <a:ln w="19050">
+            <a:solidFill>
+              <a:srgbClr val="D2690C"/>
+            </a:solidFill>
+            <a:tailEnd type="triangle" w="med" len="med"/>
+          </a:ln>
+        </p:spPr>
+      </p:cxnSp>
+      <p:cxnSp>
+        <p:nvCxnSpPr>
+          <p:cNvPr id="81" name="Connector 80"/>
+          <p:cNvCxnSpPr/>
+          <p:nvPr/>
+        </p:nvCxnSpPr>
+        <p:spPr>
+          <a:xfrm flipV="1">
+            <a:off x="8092440" y="3026664"/>
+            <a:ext cx="0" cy="329184"/>
+          </a:xfrm>
+          <a:prstGeom prst="line">
+            <a:avLst/>
+          </a:prstGeom>
+          <a:ln w="15875">
+            <a:solidFill>
+              <a:srgbClr val="B4382F"/>
+            </a:solidFill>
+            <a:prstDash val="dash"/>
+            <a:tailEnd type="triangle" w="med" len="med"/>
+          </a:ln>
+        </p:spPr>
+      </p:cxnSp>
+      <p:sp>
+        <p:nvSpPr>
+          <p:cNvPr id="82" name="Rounded Rectangle 81"/>
+          <p:cNvSpPr/>
+          <p:nvPr/>
+        </p:nvSpPr>
+        <p:spPr>
+          <a:xfrm>
+            <a:off x="1092708" y="3090672"/>
+            <a:ext cx="621792" cy="201168"/>
+          </a:xfrm>
+          <a:prstGeom prst="roundRect">
+            <a:avLst>
+              <a:gd name="adj" fmla="val 50000"/>
+            </a:avLst>
+          </a:prstGeom>
+          <a:solidFill>
+            <a:srgbClr val="FFFFFF"/>
+          </a:solidFill>
+          <a:ln w="9525">
+            <a:solidFill>
+              <a:srgbClr val="40708B"/>
+            </a:solidFill>
+          </a:ln>
+        </p:spPr>
+        <p:txBody>
+          <a:bodyPr rtlCol="0" anchor="ctr" wrap="square" lIns="18288" tIns="0" rIns="18288" bIns="0">
             <a:noAutofit/>
           </a:bodyPr>
           <a:lstStyle/>
@@ -31209,29 +34611,197 @@
               </a:spcAft>
             </a:pPr>
             <a:r>
-              <a:rPr sz="1200" b="1">
-                <a:solidFill>
-                  <a:srgbClr val="0A2B45"/>
-                </a:solidFill>
-                <a:latin typeface="Microsoft YaHei"/>
-                <a:ea typeface="Microsoft YaHei"/>
-                <a:cs typeface="Microsoft YaHei"/>
-              </a:rPr>
-              <a:t>读证据，提方案</a:t>
-            </a:r>
-          </a:p>
-        </p:txBody>
-      </p:sp>
-      <p:sp>
-        <p:nvSpPr>
-          <p:cNvPr id="16" name="Rounded Rectangle 15"/>
+              <a:rPr sz="800" b="1">
+                <a:solidFill>
+                  <a:srgbClr val="40708B"/>
+                </a:solidFill>
+                <a:latin typeface="Microsoft YaHei"/>
+                <a:ea typeface="Microsoft YaHei"/>
+                <a:cs typeface="Microsoft YaHei"/>
+              </a:rPr>
+              <a:t>冻结配置</a:t>
+            </a:r>
+          </a:p>
+        </p:txBody>
+      </p:sp>
+      <p:sp>
+        <p:nvSpPr>
+          <p:cNvPr id="83" name="Rounded Rectangle 82"/>
           <p:cNvSpPr/>
           <p:nvPr/>
         </p:nvSpPr>
         <p:spPr>
           <a:xfrm>
-            <a:off x="7205472" y="2724911"/>
-            <a:ext cx="1005840" cy="365760"/>
+            <a:off x="2377440" y="3090672"/>
+            <a:ext cx="1097280" cy="201168"/>
+          </a:xfrm>
+          <a:prstGeom prst="roundRect">
+            <a:avLst>
+              <a:gd name="adj" fmla="val 50000"/>
+            </a:avLst>
+          </a:prstGeom>
+          <a:solidFill>
+            <a:srgbClr val="FFFFFF"/>
+          </a:solidFill>
+          <a:ln w="9525">
+            <a:solidFill>
+              <a:srgbClr val="0F62CE"/>
+            </a:solidFill>
+          </a:ln>
+        </p:spPr>
+        <p:txBody>
+          <a:bodyPr rtlCol="0" anchor="ctr" wrap="square" lIns="18288" tIns="0" rIns="18288" bIns="0">
+            <a:noAutofit/>
+          </a:bodyPr>
+          <a:lstStyle/>
+          <a:p>
+            <a:pPr algn="ctr" latinLnBrk="0">
+              <a:lnSpc>
+                <a:spcPct val="100000"/>
+              </a:lnSpc>
+              <a:spcBef>
+                <a:spcPts val="0"/>
+              </a:spcBef>
+              <a:spcAft>
+                <a:spcPts val="0"/>
+              </a:spcAft>
+            </a:pPr>
+            <a:r>
+              <a:rPr sz="800" b="1">
+                <a:solidFill>
+                  <a:srgbClr val="0F62CE"/>
+                </a:solidFill>
+                <a:latin typeface="Microsoft YaHei"/>
+                <a:ea typeface="Microsoft YaHei"/>
+                <a:cs typeface="Microsoft YaHei"/>
+              </a:rPr>
+              <a:t>账本 + 瓶颈 + 证据</a:t>
+            </a:r>
+          </a:p>
+        </p:txBody>
+      </p:sp>
+      <p:sp>
+        <p:nvSpPr>
+          <p:cNvPr id="84" name="Rounded Rectangle 83"/>
+          <p:cNvSpPr/>
+          <p:nvPr/>
+        </p:nvSpPr>
+        <p:spPr>
+          <a:xfrm>
+            <a:off x="3817620" y="3090672"/>
+            <a:ext cx="768096" cy="201168"/>
+          </a:xfrm>
+          <a:prstGeom prst="roundRect">
+            <a:avLst>
+              <a:gd name="adj" fmla="val 50000"/>
+            </a:avLst>
+          </a:prstGeom>
+          <a:solidFill>
+            <a:srgbClr val="FFFFFF"/>
+          </a:solidFill>
+          <a:ln w="9525">
+            <a:solidFill>
+              <a:srgbClr val="C2570A"/>
+            </a:solidFill>
+          </a:ln>
+        </p:spPr>
+        <p:txBody>
+          <a:bodyPr rtlCol="0" anchor="ctr" wrap="square" lIns="18288" tIns="0" rIns="18288" bIns="0">
+            <a:noAutofit/>
+          </a:bodyPr>
+          <a:lstStyle/>
+          <a:p>
+            <a:pPr algn="ctr" latinLnBrk="0">
+              <a:lnSpc>
+                <a:spcPct val="100000"/>
+              </a:lnSpc>
+              <a:spcBef>
+                <a:spcPts val="0"/>
+              </a:spcBef>
+              <a:spcAft>
+                <a:spcPts val="0"/>
+              </a:spcAft>
+            </a:pPr>
+            <a:r>
+              <a:rPr sz="800" b="1">
+                <a:solidFill>
+                  <a:srgbClr val="C2570A"/>
+                </a:solidFill>
+                <a:latin typeface="Microsoft YaHei"/>
+                <a:ea typeface="Microsoft YaHei"/>
+                <a:cs typeface="Microsoft YaHei"/>
+              </a:rPr>
+              <a:t>申请 probe</a:t>
+            </a:r>
+          </a:p>
+        </p:txBody>
+      </p:sp>
+      <p:sp>
+        <p:nvSpPr>
+          <p:cNvPr id="85" name="Rounded Rectangle 84"/>
+          <p:cNvSpPr/>
+          <p:nvPr/>
+        </p:nvSpPr>
+        <p:spPr>
+          <a:xfrm>
+            <a:off x="4956048" y="3090672"/>
+            <a:ext cx="1298448" cy="201168"/>
+          </a:xfrm>
+          <a:prstGeom prst="roundRect">
+            <a:avLst>
+              <a:gd name="adj" fmla="val 50000"/>
+            </a:avLst>
+          </a:prstGeom>
+          <a:solidFill>
+            <a:srgbClr val="FFFFFF"/>
+          </a:solidFill>
+          <a:ln w="9525">
+            <a:solidFill>
+              <a:srgbClr val="C2570A"/>
+            </a:solidFill>
+          </a:ln>
+        </p:spPr>
+        <p:txBody>
+          <a:bodyPr rtlCol="0" anchor="ctr" wrap="square" lIns="18288" tIns="0" rIns="18288" bIns="0">
+            <a:noAutofit/>
+          </a:bodyPr>
+          <a:lstStyle/>
+          <a:p>
+            <a:pPr algn="ctr" latinLnBrk="0">
+              <a:lnSpc>
+                <a:spcPct val="100000"/>
+              </a:lnSpc>
+              <a:spcBef>
+                <a:spcPts val="0"/>
+              </a:spcBef>
+              <a:spcAft>
+                <a:spcPts val="0"/>
+              </a:spcAft>
+            </a:pPr>
+            <a:r>
+              <a:rPr sz="800" b="1">
+                <a:solidFill>
+                  <a:srgbClr val="C2570A"/>
+                </a:solidFill>
+                <a:latin typeface="Microsoft YaHei"/>
+                <a:ea typeface="Microsoft YaHei"/>
+                <a:cs typeface="Microsoft YaHei"/>
+              </a:rPr>
+              <a:t>假设 + 补丁 + 证据引用</a:t>
+            </a:r>
+          </a:p>
+        </p:txBody>
+      </p:sp>
+      <p:sp>
+        <p:nvSpPr>
+          <p:cNvPr id="86" name="Rounded Rectangle 85"/>
+          <p:cNvSpPr/>
+          <p:nvPr/>
+        </p:nvSpPr>
+        <p:spPr>
+          <a:xfrm>
+            <a:off x="7781544" y="3090672"/>
+            <a:ext cx="621792" cy="201168"/>
           </a:xfrm>
           <a:prstGeom prst="roundRect">
             <a:avLst>
@@ -31248,7 +34818,7 @@
           </a:ln>
         </p:spPr>
         <p:txBody>
-          <a:bodyPr rtlCol="0" anchor="ctr" wrap="square" lIns="36576" tIns="0" rIns="36576" bIns="0">
+          <a:bodyPr rtlCol="0" anchor="ctr" wrap="square" lIns="18288" tIns="0" rIns="18288" bIns="0">
             <a:noAutofit/>
           </a:bodyPr>
           <a:lstStyle/>
@@ -31265,7 +34835,7 @@
               </a:spcAft>
             </a:pPr>
             <a:r>
-              <a:rPr sz="1000" b="1">
+              <a:rPr sz="800" b="1">
                 <a:solidFill>
                   <a:srgbClr val="B4382F"/>
                 </a:solidFill>
@@ -31273,38 +34843,60 @@
                 <a:ea typeface="Microsoft YaHei"/>
                 <a:cs typeface="Microsoft YaHei"/>
               </a:rPr>
-              <a:t>记忆</a:t>
-            </a:r>
-          </a:p>
-        </p:txBody>
-      </p:sp>
-      <p:sp>
-        <p:nvSpPr>
-          <p:cNvPr id="17" name="Rounded Rectangle 16"/>
+              <a:t>被拒原因</a:t>
+            </a:r>
+          </a:p>
+        </p:txBody>
+      </p:sp>
+      <p:cxnSp>
+        <p:nvCxnSpPr>
+          <p:cNvPr id="87" name="Connector 86"/>
+          <p:cNvCxnSpPr/>
+          <p:nvPr/>
+        </p:nvCxnSpPr>
+        <p:spPr>
+          <a:xfrm flipV="1">
+            <a:off x="2057400" y="5385816"/>
+            <a:ext cx="0" cy="329184"/>
+          </a:xfrm>
+          <a:prstGeom prst="line">
+            <a:avLst/>
+          </a:prstGeom>
+          <a:ln w="19050">
+            <a:solidFill>
+              <a:srgbClr val="40708B"/>
+            </a:solidFill>
+            <a:tailEnd type="triangle" w="med" len="med"/>
+          </a:ln>
+        </p:spPr>
+      </p:cxnSp>
+      <p:sp>
+        <p:nvSpPr>
+          <p:cNvPr id="88" name="Rounded Rectangle 87"/>
           <p:cNvSpPr/>
           <p:nvPr/>
         </p:nvSpPr>
         <p:spPr>
           <a:xfrm>
-            <a:off x="1627632" y="4443984"/>
-            <a:ext cx="1371600" cy="731520"/>
+            <a:off x="1609344" y="5449824"/>
+            <a:ext cx="896112" cy="201168"/>
           </a:xfrm>
           <a:prstGeom prst="roundRect">
             <a:avLst>
-              <a:gd name="adj" fmla="val 10000"/>
+              <a:gd name="adj" fmla="val 50000"/>
             </a:avLst>
           </a:prstGeom>
           <a:solidFill>
             <a:srgbClr val="FFFFFF"/>
           </a:solidFill>
-          <a:ln w="12700">
+          <a:ln w="9525">
             <a:solidFill>
-              <a:srgbClr val="0F62CE"/>
+              <a:srgbClr val="40708B"/>
             </a:solidFill>
           </a:ln>
         </p:spPr>
         <p:txBody>
-          <a:bodyPr rtlCol="0" anchor="ctr" wrap="square" lIns="54864" tIns="18288" rIns="54864" bIns="18288">
+          <a:bodyPr rtlCol="0" anchor="ctr" wrap="square" lIns="18288" tIns="0" rIns="18288" bIns="0">
             <a:noAutofit/>
           </a:bodyPr>
           <a:lstStyle/>
@@ -31321,70 +34913,68 @@
               </a:spcAft>
             </a:pPr>
             <a:r>
-              <a:rPr sz="1200" b="1">
-                <a:solidFill>
-                  <a:srgbClr val="0A2B45"/>
-                </a:solidFill>
-                <a:latin typeface="Microsoft YaHei"/>
-                <a:ea typeface="Microsoft YaHei"/>
-                <a:cs typeface="Microsoft YaHei"/>
-              </a:rPr>
-              <a:t>取证找瓶颈</a:t>
-            </a:r>
-          </a:p>
-          <a:p>
-            <a:pPr algn="ctr" latinLnBrk="0">
-              <a:lnSpc>
-                <a:spcPct val="100000"/>
-              </a:lnSpc>
-              <a:spcBef>
-                <a:spcPts val="0"/>
-              </a:spcBef>
-              <a:spcAft>
-                <a:spcPts val="0"/>
-              </a:spcAft>
-            </a:pPr>
-            <a:r>
-              <a:rPr sz="850" b="0">
-                <a:solidFill>
-                  <a:srgbClr val="1B4D69"/>
-                </a:solidFill>
-                <a:latin typeface="Microsoft YaHei"/>
-                <a:ea typeface="Microsoft YaHei"/>
-                <a:cs typeface="Microsoft YaHei"/>
-              </a:rPr>
-              <a:t>对比理论下界</a:t>
-            </a:r>
-          </a:p>
-        </p:txBody>
-      </p:sp>
-      <p:sp>
-        <p:nvSpPr>
-          <p:cNvPr id="18" name="Rounded Rectangle 17"/>
+              <a:rPr sz="800" b="1">
+                <a:solidFill>
+                  <a:srgbClr val="40708B"/>
+                </a:solidFill>
+                <a:latin typeface="Microsoft YaHei"/>
+                <a:ea typeface="Microsoft YaHei"/>
+                <a:cs typeface="Microsoft YaHei"/>
+              </a:rPr>
+              <a:t>Trace + 路由</a:t>
+            </a:r>
+          </a:p>
+        </p:txBody>
+      </p:sp>
+      <p:cxnSp>
+        <p:nvCxnSpPr>
+          <p:cNvPr id="89" name="Connector 88"/>
+          <p:cNvCxnSpPr/>
+          <p:nvPr/>
+        </p:nvCxnSpPr>
+        <p:spPr>
+          <a:xfrm flipV="1">
+            <a:off x="7086600" y="5385816"/>
+            <a:ext cx="0" cy="329184"/>
+          </a:xfrm>
+          <a:prstGeom prst="line">
+            <a:avLst/>
+          </a:prstGeom>
+          <a:ln w="19050">
+            <a:solidFill>
+              <a:srgbClr val="40708B"/>
+            </a:solidFill>
+            <a:tailEnd type="triangle" w="med" len="med"/>
+          </a:ln>
+        </p:spPr>
+      </p:cxnSp>
+      <p:sp>
+        <p:nvSpPr>
+          <p:cNvPr id="90" name="Rounded Rectangle 89"/>
           <p:cNvSpPr/>
           <p:nvPr/>
         </p:nvSpPr>
         <p:spPr>
           <a:xfrm>
-            <a:off x="4005072" y="4443984"/>
-            <a:ext cx="1188720" cy="731520"/>
+            <a:off x="6784848" y="5449824"/>
+            <a:ext cx="603504" cy="201168"/>
           </a:xfrm>
           <a:prstGeom prst="roundRect">
             <a:avLst>
-              <a:gd name="adj" fmla="val 10000"/>
+              <a:gd name="adj" fmla="val 50000"/>
             </a:avLst>
           </a:prstGeom>
           <a:solidFill>
             <a:srgbClr val="FFFFFF"/>
           </a:solidFill>
-          <a:ln w="12700">
+          <a:ln w="9525">
             <a:solidFill>
-              <a:srgbClr val="0F62CE"/>
+              <a:srgbClr val="40708B"/>
             </a:solidFill>
           </a:ln>
         </p:spPr>
         <p:txBody>
-          <a:bodyPr rtlCol="0" anchor="ctr" wrap="square" lIns="54864" tIns="18288" rIns="54864" bIns="18288">
+          <a:bodyPr rtlCol="0" anchor="ctr" wrap="square" lIns="18288" tIns="0" rIns="18288" bIns="0">
             <a:noAutofit/>
           </a:bodyPr>
           <a:lstStyle/>
@@ -31401,70 +34991,68 @@
               </a:spcAft>
             </a:pPr>
             <a:r>
-              <a:rPr sz="1200" b="1">
-                <a:solidFill>
-                  <a:srgbClr val="0A2B45"/>
-                </a:solidFill>
-                <a:latin typeface="Microsoft YaHei"/>
-                <a:ea typeface="Microsoft YaHei"/>
-                <a:cs typeface="Microsoft YaHei"/>
-              </a:rPr>
-              <a:t>建版实测</a:t>
-            </a:r>
-          </a:p>
-          <a:p>
-            <a:pPr algn="ctr" latinLnBrk="0">
-              <a:lnSpc>
-                <a:spcPct val="100000"/>
-              </a:lnSpc>
-              <a:spcBef>
-                <a:spcPts val="0"/>
-              </a:spcBef>
-              <a:spcAft>
-                <a:spcPts val="0"/>
-              </a:spcAft>
-            </a:pPr>
-            <a:r>
-              <a:rPr sz="850" b="0">
-                <a:solidFill>
-                  <a:srgbClr val="1B4D69"/>
-                </a:solidFill>
-                <a:latin typeface="Microsoft YaHei"/>
-                <a:ea typeface="Microsoft YaHei"/>
-                <a:cs typeface="Microsoft YaHei"/>
-              </a:rPr>
-              <a:t>M100 真机</a:t>
-            </a:r>
-          </a:p>
-        </p:txBody>
-      </p:sp>
-      <p:sp>
-        <p:nvSpPr>
-          <p:cNvPr id="19" name="Rounded Rectangle 18"/>
+              <a:rPr sz="800" b="1">
+                <a:solidFill>
+                  <a:srgbClr val="40708B"/>
+                </a:solidFill>
+                <a:latin typeface="Microsoft YaHei"/>
+                <a:ea typeface="Microsoft YaHei"/>
+                <a:cs typeface="Microsoft YaHei"/>
+              </a:rPr>
+              <a:t>库 SHA</a:t>
+            </a:r>
+          </a:p>
+        </p:txBody>
+      </p:sp>
+      <p:cxnSp>
+        <p:nvCxnSpPr>
+          <p:cNvPr id="91" name="Connector 90"/>
+          <p:cNvCxnSpPr/>
+          <p:nvPr/>
+        </p:nvCxnSpPr>
+        <p:spPr>
+          <a:xfrm flipV="1">
+            <a:off x="9601200" y="5385816"/>
+            <a:ext cx="0" cy="329184"/>
+          </a:xfrm>
+          <a:prstGeom prst="line">
+            <a:avLst/>
+          </a:prstGeom>
+          <a:ln w="19050">
+            <a:solidFill>
+              <a:srgbClr val="40708B"/>
+            </a:solidFill>
+            <a:tailEnd type="triangle" w="med" len="med"/>
+          </a:ln>
+        </p:spPr>
+      </p:cxnSp>
+      <p:sp>
+        <p:nvSpPr>
+          <p:cNvPr id="92" name="Rounded Rectangle 91"/>
           <p:cNvSpPr/>
           <p:nvPr/>
         </p:nvSpPr>
         <p:spPr>
           <a:xfrm>
-            <a:off x="10268712" y="4443984"/>
-            <a:ext cx="1280160" cy="731520"/>
+            <a:off x="8979408" y="5449824"/>
+            <a:ext cx="1243584" cy="201168"/>
           </a:xfrm>
           <a:prstGeom prst="roundRect">
             <a:avLst>
-              <a:gd name="adj" fmla="val 10000"/>
+              <a:gd name="adj" fmla="val 50000"/>
             </a:avLst>
           </a:prstGeom>
           <a:solidFill>
             <a:srgbClr val="FFFFFF"/>
           </a:solidFill>
-          <a:ln w="15875">
+          <a:ln w="9525">
             <a:solidFill>
-              <a:srgbClr val="17795F"/>
+              <a:srgbClr val="40708B"/>
             </a:solidFill>
           </a:ln>
         </p:spPr>
         <p:txBody>
-          <a:bodyPr rtlCol="0" anchor="ctr" wrap="square" lIns="54864" tIns="18288" rIns="54864" bIns="18288">
+          <a:bodyPr rtlCol="0" anchor="ctr" wrap="square" lIns="18288" tIns="0" rIns="18288" bIns="0">
             <a:noAutofit/>
           </a:bodyPr>
           <a:lstStyle/>
@@ -31481,131 +35069,29 @@
               </a:spcAft>
             </a:pPr>
             <a:r>
-              <a:rPr sz="1200" b="1">
-                <a:solidFill>
-                  <a:srgbClr val="0A2B45"/>
-                </a:solidFill>
-                <a:latin typeface="Microsoft YaHei"/>
-                <a:ea typeface="Microsoft YaHei"/>
-                <a:cs typeface="Microsoft YaHei"/>
-              </a:rPr>
-              <a:t>晋升新基线</a:t>
-            </a:r>
-          </a:p>
-        </p:txBody>
-      </p:sp>
-      <p:sp>
-        <p:nvSpPr>
-          <p:cNvPr id="20" name="Diamond 19"/>
-          <p:cNvSpPr/>
-          <p:nvPr/>
-        </p:nvSpPr>
-        <p:spPr>
-          <a:xfrm>
-            <a:off x="5468112" y="4425696"/>
-            <a:ext cx="914400" cy="768096"/>
-          </a:xfrm>
-          <a:prstGeom prst="diamond">
-            <a:avLst/>
-          </a:prstGeom>
-          <a:solidFill>
-            <a:srgbClr val="FFFFFF"/>
-          </a:solidFill>
-          <a:ln w="15875">
-            <a:solidFill>
-              <a:srgbClr val="0F62CE"/>
-            </a:solidFill>
-          </a:ln>
-        </p:spPr>
-        <p:txBody>
-          <a:bodyPr rtlCol="0" anchor="ctr"/>
-          <a:lstStyle/>
-          <a:p>
-            <a:pPr algn="ctr"/>
-          </a:p>
-        </p:txBody>
-      </p:sp>
-      <p:sp>
-        <p:nvSpPr>
-          <p:cNvPr id="21" name="TextBox 20"/>
-          <p:cNvSpPr txBox="1"/>
-          <p:nvPr/>
-        </p:nvSpPr>
-        <p:spPr>
-          <a:xfrm>
-            <a:off x="5504688" y="4590288"/>
-            <a:ext cx="841248" cy="438912"/>
-          </a:xfrm>
-          <a:prstGeom prst="rect">
-            <a:avLst/>
-          </a:prstGeom>
-          <a:noFill/>
-        </p:spPr>
-        <p:txBody>
-          <a:bodyPr wrap="square" anchor="ctr" lIns="0" tIns="0" rIns="0" bIns="0">
-            <a:noAutofit/>
-          </a:bodyPr>
-          <a:lstStyle/>
-          <a:p>
-            <a:pPr algn="ctr" latinLnBrk="0">
-              <a:lnSpc>
-                <a:spcPct val="100000"/>
-              </a:lnSpc>
-              <a:spcBef>
-                <a:spcPts val="0"/>
-              </a:spcBef>
-              <a:spcAft>
-                <a:spcPts val="0"/>
-              </a:spcAft>
-            </a:pPr>
-            <a:r>
-              <a:rPr sz="900" b="1">
-                <a:solidFill>
-                  <a:srgbClr val="0A2B45"/>
-                </a:solidFill>
-                <a:latin typeface="Microsoft YaHei"/>
-                <a:ea typeface="Microsoft YaHei"/>
-                <a:cs typeface="Microsoft YaHei"/>
-              </a:rPr>
-              <a:t>局部提速</a:t>
-            </a:r>
-          </a:p>
-          <a:p>
-            <a:pPr algn="ctr" latinLnBrk="0">
-              <a:lnSpc>
-                <a:spcPct val="100000"/>
-              </a:lnSpc>
-              <a:spcBef>
-                <a:spcPts val="0"/>
-              </a:spcBef>
-              <a:spcAft>
-                <a:spcPts val="0"/>
-              </a:spcAft>
-            </a:pPr>
-            <a:r>
               <a:rPr sz="800" b="1">
                 <a:solidFill>
-                  <a:srgbClr val="0F62CE"/>
-                </a:solidFill>
-                <a:latin typeface="Microsoft YaHei"/>
-                <a:ea typeface="Microsoft YaHei"/>
-                <a:cs typeface="Microsoft YaHei"/>
-              </a:rPr>
-              <a:t>≥ 2%</a:t>
+                  <a:srgbClr val="40708B"/>
+                </a:solidFill>
+                <a:latin typeface="Microsoft YaHei"/>
+                <a:ea typeface="Microsoft YaHei"/>
+                <a:cs typeface="Microsoft YaHei"/>
+              </a:rPr>
+              <a:t>数值 · 质量 · 吞吐</a:t>
             </a:r>
           </a:p>
         </p:txBody>
       </p:sp>
       <p:cxnSp>
         <p:nvCxnSpPr>
-          <p:cNvPr id="22" name="Connector 21"/>
+          <p:cNvPr id="93" name="Connector 92"/>
           <p:cNvCxnSpPr/>
           <p:nvPr/>
         </p:nvCxnSpPr>
         <p:spPr>
           <a:xfrm>
-            <a:off x="5221224" y="4809744"/>
-            <a:ext cx="219456" cy="0"/>
+            <a:off x="5852160" y="5385816"/>
+            <a:ext cx="0" cy="329184"/>
           </a:xfrm>
           <a:prstGeom prst="line">
             <a:avLst/>
@@ -31620,1119 +35106,14 @@
       </p:cxnSp>
       <p:sp>
         <p:nvSpPr>
-          <p:cNvPr id="23" name="Diamond 22"/>
+          <p:cNvPr id="94" name="Rounded Rectangle 93"/>
           <p:cNvSpPr/>
           <p:nvPr/>
         </p:nvSpPr>
         <p:spPr>
           <a:xfrm>
-            <a:off x="6656832" y="4425696"/>
-            <a:ext cx="914400" cy="768096"/>
-          </a:xfrm>
-          <a:prstGeom prst="diamond">
-            <a:avLst/>
-          </a:prstGeom>
-          <a:solidFill>
-            <a:srgbClr val="FFFFFF"/>
-          </a:solidFill>
-          <a:ln w="15875">
-            <a:solidFill>
-              <a:srgbClr val="0F62CE"/>
-            </a:solidFill>
-          </a:ln>
-        </p:spPr>
-        <p:txBody>
-          <a:bodyPr rtlCol="0" anchor="ctr"/>
-          <a:lstStyle/>
-          <a:p>
-            <a:pPr algn="ctr"/>
-          </a:p>
-        </p:txBody>
-      </p:sp>
-      <p:sp>
-        <p:nvSpPr>
-          <p:cNvPr id="24" name="TextBox 23"/>
-          <p:cNvSpPr txBox="1"/>
-          <p:nvPr/>
-        </p:nvSpPr>
-        <p:spPr>
-          <a:xfrm>
-            <a:off x="6693408" y="4590288"/>
-            <a:ext cx="841248" cy="438912"/>
-          </a:xfrm>
-          <a:prstGeom prst="rect">
-            <a:avLst/>
-          </a:prstGeom>
-          <a:noFill/>
-        </p:spPr>
-        <p:txBody>
-          <a:bodyPr wrap="square" anchor="ctr" lIns="0" tIns="0" rIns="0" bIns="0">
-            <a:noAutofit/>
-          </a:bodyPr>
-          <a:lstStyle/>
-          <a:p>
-            <a:pPr algn="ctr" latinLnBrk="0">
-              <a:lnSpc>
-                <a:spcPct val="100000"/>
-              </a:lnSpc>
-              <a:spcBef>
-                <a:spcPts val="0"/>
-              </a:spcBef>
-              <a:spcAft>
-                <a:spcPts val="0"/>
-              </a:spcAft>
-            </a:pPr>
-            <a:r>
-              <a:rPr sz="900" b="1">
-                <a:solidFill>
-                  <a:srgbClr val="0A2B45"/>
-                </a:solidFill>
-                <a:latin typeface="Microsoft YaHei"/>
-                <a:ea typeface="Microsoft YaHei"/>
-                <a:cs typeface="Microsoft YaHei"/>
-              </a:rPr>
-              <a:t>数值误差</a:t>
-            </a:r>
-          </a:p>
-          <a:p>
-            <a:pPr algn="ctr" latinLnBrk="0">
-              <a:lnSpc>
-                <a:spcPct val="100000"/>
-              </a:lnSpc>
-              <a:spcBef>
-                <a:spcPts val="0"/>
-              </a:spcBef>
-              <a:spcAft>
-                <a:spcPts val="0"/>
-              </a:spcAft>
-            </a:pPr>
-            <a:r>
-              <a:rPr sz="800" b="1">
-                <a:solidFill>
-                  <a:srgbClr val="0F62CE"/>
-                </a:solidFill>
-                <a:latin typeface="Microsoft YaHei"/>
-                <a:ea typeface="Microsoft YaHei"/>
-                <a:cs typeface="Microsoft YaHei"/>
-              </a:rPr>
-              <a:t>≤ 0.03</a:t>
-            </a:r>
-          </a:p>
-        </p:txBody>
-      </p:sp>
-      <p:cxnSp>
-        <p:nvCxnSpPr>
-          <p:cNvPr id="25" name="Connector 24"/>
-          <p:cNvCxnSpPr/>
-          <p:nvPr/>
-        </p:nvCxnSpPr>
-        <p:spPr>
-          <a:xfrm>
-            <a:off x="6409944" y="4809744"/>
-            <a:ext cx="219456" cy="0"/>
-          </a:xfrm>
-          <a:prstGeom prst="line">
-            <a:avLst/>
-          </a:prstGeom>
-          <a:ln w="19050">
-            <a:solidFill>
-              <a:srgbClr val="0F62CE"/>
-            </a:solidFill>
-            <a:tailEnd type="triangle" w="med" len="med"/>
-          </a:ln>
-        </p:spPr>
-      </p:cxnSp>
-      <p:sp>
-        <p:nvSpPr>
-          <p:cNvPr id="26" name="Diamond 25"/>
-          <p:cNvSpPr/>
-          <p:nvPr/>
-        </p:nvSpPr>
-        <p:spPr>
-          <a:xfrm>
-            <a:off x="7845552" y="4425696"/>
-            <a:ext cx="914400" cy="768096"/>
-          </a:xfrm>
-          <a:prstGeom prst="diamond">
-            <a:avLst/>
-          </a:prstGeom>
-          <a:solidFill>
-            <a:srgbClr val="FFFFFF"/>
-          </a:solidFill>
-          <a:ln w="15875">
-            <a:solidFill>
-              <a:srgbClr val="0F62CE"/>
-            </a:solidFill>
-          </a:ln>
-        </p:spPr>
-        <p:txBody>
-          <a:bodyPr rtlCol="0" anchor="ctr"/>
-          <a:lstStyle/>
-          <a:p>
-            <a:pPr algn="ctr"/>
-          </a:p>
-        </p:txBody>
-      </p:sp>
-      <p:sp>
-        <p:nvSpPr>
-          <p:cNvPr id="27" name="TextBox 26"/>
-          <p:cNvSpPr txBox="1"/>
-          <p:nvPr/>
-        </p:nvSpPr>
-        <p:spPr>
-          <a:xfrm>
-            <a:off x="7882127" y="4590288"/>
-            <a:ext cx="841248" cy="438912"/>
-          </a:xfrm>
-          <a:prstGeom prst="rect">
-            <a:avLst/>
-          </a:prstGeom>
-          <a:noFill/>
-        </p:spPr>
-        <p:txBody>
-          <a:bodyPr wrap="square" anchor="ctr" lIns="0" tIns="0" rIns="0" bIns="0">
-            <a:noAutofit/>
-          </a:bodyPr>
-          <a:lstStyle/>
-          <a:p>
-            <a:pPr algn="ctr" latinLnBrk="0">
-              <a:lnSpc>
-                <a:spcPct val="100000"/>
-              </a:lnSpc>
-              <a:spcBef>
-                <a:spcPts val="0"/>
-              </a:spcBef>
-              <a:spcAft>
-                <a:spcPts val="0"/>
-              </a:spcAft>
-            </a:pPr>
-            <a:r>
-              <a:rPr sz="900" b="1">
-                <a:solidFill>
-                  <a:srgbClr val="0A2B45"/>
-                </a:solidFill>
-                <a:latin typeface="Microsoft YaHei"/>
-                <a:ea typeface="Microsoft YaHei"/>
-                <a:cs typeface="Microsoft YaHei"/>
-              </a:rPr>
-              <a:t>质量得分</a:t>
-            </a:r>
-          </a:p>
-          <a:p>
-            <a:pPr algn="ctr" latinLnBrk="0">
-              <a:lnSpc>
-                <a:spcPct val="100000"/>
-              </a:lnSpc>
-              <a:spcBef>
-                <a:spcPts val="0"/>
-              </a:spcBef>
-              <a:spcAft>
-                <a:spcPts val="0"/>
-              </a:spcAft>
-            </a:pPr>
-            <a:r>
-              <a:rPr sz="800" b="1">
-                <a:solidFill>
-                  <a:srgbClr val="0F62CE"/>
-                </a:solidFill>
-                <a:latin typeface="Microsoft YaHei"/>
-                <a:ea typeface="Microsoft YaHei"/>
-                <a:cs typeface="Microsoft YaHei"/>
-              </a:rPr>
-              <a:t>不降</a:t>
-            </a:r>
-          </a:p>
-        </p:txBody>
-      </p:sp>
-      <p:cxnSp>
-        <p:nvCxnSpPr>
-          <p:cNvPr id="28" name="Connector 27"/>
-          <p:cNvCxnSpPr/>
-          <p:nvPr/>
-        </p:nvCxnSpPr>
-        <p:spPr>
-          <a:xfrm>
-            <a:off x="7598664" y="4809744"/>
-            <a:ext cx="219456" cy="0"/>
-          </a:xfrm>
-          <a:prstGeom prst="line">
-            <a:avLst/>
-          </a:prstGeom>
-          <a:ln w="19050">
-            <a:solidFill>
-              <a:srgbClr val="0F62CE"/>
-            </a:solidFill>
-            <a:tailEnd type="triangle" w="med" len="med"/>
-          </a:ln>
-        </p:spPr>
-      </p:cxnSp>
-      <p:sp>
-        <p:nvSpPr>
-          <p:cNvPr id="29" name="Diamond 28"/>
-          <p:cNvSpPr/>
-          <p:nvPr/>
-        </p:nvSpPr>
-        <p:spPr>
-          <a:xfrm>
-            <a:off x="9034272" y="4425696"/>
-            <a:ext cx="914400" cy="768096"/>
-          </a:xfrm>
-          <a:prstGeom prst="diamond">
-            <a:avLst/>
-          </a:prstGeom>
-          <a:solidFill>
-            <a:srgbClr val="FFFFFF"/>
-          </a:solidFill>
-          <a:ln w="15875">
-            <a:solidFill>
-              <a:srgbClr val="0F62CE"/>
-            </a:solidFill>
-          </a:ln>
-        </p:spPr>
-        <p:txBody>
-          <a:bodyPr rtlCol="0" anchor="ctr"/>
-          <a:lstStyle/>
-          <a:p>
-            <a:pPr algn="ctr"/>
-          </a:p>
-        </p:txBody>
-      </p:sp>
-      <p:sp>
-        <p:nvSpPr>
-          <p:cNvPr id="30" name="TextBox 29"/>
-          <p:cNvSpPr txBox="1"/>
-          <p:nvPr/>
-        </p:nvSpPr>
-        <p:spPr>
-          <a:xfrm>
-            <a:off x="9070848" y="4590288"/>
-            <a:ext cx="841248" cy="438912"/>
-          </a:xfrm>
-          <a:prstGeom prst="rect">
-            <a:avLst/>
-          </a:prstGeom>
-          <a:noFill/>
-        </p:spPr>
-        <p:txBody>
-          <a:bodyPr wrap="square" anchor="ctr" lIns="0" tIns="0" rIns="0" bIns="0">
-            <a:noAutofit/>
-          </a:bodyPr>
-          <a:lstStyle/>
-          <a:p>
-            <a:pPr algn="ctr" latinLnBrk="0">
-              <a:lnSpc>
-                <a:spcPct val="100000"/>
-              </a:lnSpc>
-              <a:spcBef>
-                <a:spcPts val="0"/>
-              </a:spcBef>
-              <a:spcAft>
-                <a:spcPts val="0"/>
-              </a:spcAft>
-            </a:pPr>
-            <a:r>
-              <a:rPr sz="900" b="1">
-                <a:solidFill>
-                  <a:srgbClr val="0A2B45"/>
-                </a:solidFill>
-                <a:latin typeface="Microsoft YaHei"/>
-                <a:ea typeface="Microsoft YaHei"/>
-                <a:cs typeface="Microsoft YaHei"/>
-              </a:rPr>
-              <a:t>整模 A/B</a:t>
-            </a:r>
-          </a:p>
-          <a:p>
-            <a:pPr algn="ctr" latinLnBrk="0">
-              <a:lnSpc>
-                <a:spcPct val="100000"/>
-              </a:lnSpc>
-              <a:spcBef>
-                <a:spcPts val="0"/>
-              </a:spcBef>
-              <a:spcAft>
-                <a:spcPts val="0"/>
-              </a:spcAft>
-            </a:pPr>
-            <a:r>
-              <a:rPr sz="800" b="1">
-                <a:solidFill>
-                  <a:srgbClr val="0F62CE"/>
-                </a:solidFill>
-                <a:latin typeface="Microsoft YaHei"/>
-                <a:ea typeface="Microsoft YaHei"/>
-                <a:cs typeface="Microsoft YaHei"/>
-              </a:rPr>
-              <a:t>超出噪声</a:t>
-            </a:r>
-          </a:p>
-        </p:txBody>
-      </p:sp>
-      <p:cxnSp>
-        <p:nvCxnSpPr>
-          <p:cNvPr id="31" name="Connector 30"/>
-          <p:cNvCxnSpPr/>
-          <p:nvPr/>
-        </p:nvCxnSpPr>
-        <p:spPr>
-          <a:xfrm>
-            <a:off x="8787384" y="4809744"/>
-            <a:ext cx="219456" cy="0"/>
-          </a:xfrm>
-          <a:prstGeom prst="line">
-            <a:avLst/>
-          </a:prstGeom>
-          <a:ln w="19050">
-            <a:solidFill>
-              <a:srgbClr val="0F62CE"/>
-            </a:solidFill>
-            <a:tailEnd type="triangle" w="med" len="med"/>
-          </a:ln>
-        </p:spPr>
-      </p:cxnSp>
-      <p:cxnSp>
-        <p:nvCxnSpPr>
-          <p:cNvPr id="32" name="Connector 31"/>
-          <p:cNvCxnSpPr/>
-          <p:nvPr/>
-        </p:nvCxnSpPr>
-        <p:spPr>
-          <a:xfrm>
-            <a:off x="9976104" y="4809744"/>
-            <a:ext cx="256032" cy="0"/>
-          </a:xfrm>
-          <a:prstGeom prst="line">
-            <a:avLst/>
-          </a:prstGeom>
-          <a:ln w="19050">
-            <a:solidFill>
-              <a:srgbClr val="17795F"/>
-            </a:solidFill>
-            <a:tailEnd type="triangle" w="med" len="med"/>
-          </a:ln>
-        </p:spPr>
-      </p:cxnSp>
-      <p:sp>
-        <p:nvSpPr>
-          <p:cNvPr id="33" name="TextBox 32"/>
-          <p:cNvSpPr txBox="1"/>
-          <p:nvPr/>
-        </p:nvSpPr>
-        <p:spPr>
-          <a:xfrm>
-            <a:off x="9948672" y="4517136"/>
-            <a:ext cx="320039" cy="201168"/>
-          </a:xfrm>
-          <a:prstGeom prst="rect">
-            <a:avLst/>
-          </a:prstGeom>
-          <a:noFill/>
-        </p:spPr>
-        <p:txBody>
-          <a:bodyPr wrap="square" anchor="ctr" lIns="0" tIns="0" rIns="0" bIns="0">
-            <a:noAutofit/>
-          </a:bodyPr>
-          <a:lstStyle/>
-          <a:p>
-            <a:pPr algn="ctr" latinLnBrk="0">
-              <a:lnSpc>
-                <a:spcPct val="100000"/>
-              </a:lnSpc>
-              <a:spcBef>
-                <a:spcPts val="0"/>
-              </a:spcBef>
-              <a:spcAft>
-                <a:spcPts val="0"/>
-              </a:spcAft>
-            </a:pPr>
-            <a:r>
-              <a:rPr sz="800" b="1">
-                <a:solidFill>
-                  <a:srgbClr val="17795F"/>
-                </a:solidFill>
-                <a:latin typeface="Microsoft YaHei"/>
-                <a:ea typeface="Microsoft YaHei"/>
-                <a:cs typeface="Microsoft YaHei"/>
-              </a:rPr>
-              <a:t>通过</a:t>
-            </a:r>
-          </a:p>
-        </p:txBody>
-      </p:sp>
-      <p:sp>
-        <p:nvSpPr>
-          <p:cNvPr id="34" name="TextBox 33"/>
-          <p:cNvSpPr txBox="1"/>
-          <p:nvPr/>
-        </p:nvSpPr>
-        <p:spPr>
-          <a:xfrm>
-            <a:off x="5468112" y="5303520"/>
-            <a:ext cx="4480560" cy="219456"/>
-          </a:xfrm>
-          <a:prstGeom prst="rect">
-            <a:avLst/>
-          </a:prstGeom>
-          <a:noFill/>
-        </p:spPr>
-        <p:txBody>
-          <a:bodyPr wrap="square" anchor="ctr" lIns="0" tIns="0" rIns="0" bIns="0">
-            <a:noAutofit/>
-          </a:bodyPr>
-          <a:lstStyle/>
-          <a:p>
-            <a:pPr algn="ctr" latinLnBrk="0">
-              <a:lnSpc>
-                <a:spcPct val="100000"/>
-              </a:lnSpc>
-              <a:spcBef>
-                <a:spcPts val="0"/>
-              </a:spcBef>
-              <a:spcAft>
-                <a:spcPts val="0"/>
-              </a:spcAft>
-            </a:pPr>
-            <a:r>
-              <a:rPr sz="900" b="1">
-                <a:solidFill>
-                  <a:srgbClr val="1B4D69"/>
-                </a:solidFill>
-                <a:latin typeface="Microsoft YaHei"/>
-                <a:ea typeface="Microsoft YaHei"/>
-                <a:cs typeface="Microsoft YaHei"/>
-              </a:rPr>
-              <a:t>四道门禁：由快到慢，一票否决</a:t>
-            </a:r>
-          </a:p>
-        </p:txBody>
-      </p:sp>
-      <p:cxnSp>
-        <p:nvCxnSpPr>
-          <p:cNvPr id="35" name="Connector 34"/>
-          <p:cNvCxnSpPr/>
-          <p:nvPr/>
-        </p:nvCxnSpPr>
-        <p:spPr>
-          <a:xfrm flipV="1">
-            <a:off x="5925312" y="4041648"/>
-            <a:ext cx="0" cy="365760"/>
-          </a:xfrm>
-          <a:prstGeom prst="line">
-            <a:avLst/>
-          </a:prstGeom>
-          <a:ln w="15875">
-            <a:solidFill>
-              <a:srgbClr val="B4382F"/>
-            </a:solidFill>
-            <a:prstDash val="dash"/>
-          </a:ln>
-        </p:spPr>
-      </p:cxnSp>
-      <p:cxnSp>
-        <p:nvCxnSpPr>
-          <p:cNvPr id="36" name="Connector 35"/>
-          <p:cNvCxnSpPr/>
-          <p:nvPr/>
-        </p:nvCxnSpPr>
-        <p:spPr>
-          <a:xfrm flipV="1">
-            <a:off x="7114032" y="4041648"/>
-            <a:ext cx="0" cy="365760"/>
-          </a:xfrm>
-          <a:prstGeom prst="line">
-            <a:avLst/>
-          </a:prstGeom>
-          <a:ln w="15875">
-            <a:solidFill>
-              <a:srgbClr val="B4382F"/>
-            </a:solidFill>
-            <a:prstDash val="dash"/>
-          </a:ln>
-        </p:spPr>
-      </p:cxnSp>
-      <p:cxnSp>
-        <p:nvCxnSpPr>
-          <p:cNvPr id="37" name="Connector 36"/>
-          <p:cNvCxnSpPr/>
-          <p:nvPr/>
-        </p:nvCxnSpPr>
-        <p:spPr>
-          <a:xfrm flipV="1">
-            <a:off x="8302752" y="4041648"/>
-            <a:ext cx="0" cy="365760"/>
-          </a:xfrm>
-          <a:prstGeom prst="line">
-            <a:avLst/>
-          </a:prstGeom>
-          <a:ln w="15875">
-            <a:solidFill>
-              <a:srgbClr val="B4382F"/>
-            </a:solidFill>
-            <a:prstDash val="dash"/>
-          </a:ln>
-        </p:spPr>
-      </p:cxnSp>
-      <p:cxnSp>
-        <p:nvCxnSpPr>
-          <p:cNvPr id="38" name="Connector 37"/>
-          <p:cNvCxnSpPr/>
-          <p:nvPr/>
-        </p:nvCxnSpPr>
-        <p:spPr>
-          <a:xfrm flipV="1">
-            <a:off x="9491472" y="4041648"/>
-            <a:ext cx="0" cy="365760"/>
-          </a:xfrm>
-          <a:prstGeom prst="line">
-            <a:avLst/>
-          </a:prstGeom>
-          <a:ln w="15875">
-            <a:solidFill>
-              <a:srgbClr val="B4382F"/>
-            </a:solidFill>
-            <a:prstDash val="dash"/>
-          </a:ln>
-        </p:spPr>
-      </p:cxnSp>
-      <p:cxnSp>
-        <p:nvCxnSpPr>
-          <p:cNvPr id="39" name="Connector 38"/>
-          <p:cNvCxnSpPr/>
-          <p:nvPr/>
-        </p:nvCxnSpPr>
-        <p:spPr>
-          <a:xfrm>
-            <a:off x="5925312" y="4041648"/>
-            <a:ext cx="3566160" cy="0"/>
-          </a:xfrm>
-          <a:prstGeom prst="line">
-            <a:avLst/>
-          </a:prstGeom>
-          <a:ln w="15875">
-            <a:solidFill>
-              <a:srgbClr val="B4382F"/>
-            </a:solidFill>
-            <a:prstDash val="dash"/>
-          </a:ln>
-        </p:spPr>
-      </p:cxnSp>
-      <p:cxnSp>
-        <p:nvCxnSpPr>
-          <p:cNvPr id="40" name="Connector 39"/>
-          <p:cNvCxnSpPr/>
-          <p:nvPr/>
-        </p:nvCxnSpPr>
-        <p:spPr>
-          <a:xfrm flipV="1">
-            <a:off x="7708392" y="3127247"/>
-            <a:ext cx="0" cy="914401"/>
-          </a:xfrm>
-          <a:prstGeom prst="line">
-            <a:avLst/>
-          </a:prstGeom>
-          <a:ln w="15875">
-            <a:solidFill>
-              <a:srgbClr val="B4382F"/>
-            </a:solidFill>
-            <a:prstDash val="dash"/>
-            <a:tailEnd type="triangle" w="med" len="med"/>
-          </a:ln>
-        </p:spPr>
-      </p:cxnSp>
-      <p:sp>
-        <p:nvSpPr>
-          <p:cNvPr id="41" name="TextBox 40"/>
-          <p:cNvSpPr txBox="1"/>
-          <p:nvPr/>
-        </p:nvSpPr>
-        <p:spPr>
-          <a:xfrm>
-            <a:off x="5971032" y="4123944"/>
-            <a:ext cx="274320" cy="201168"/>
-          </a:xfrm>
-          <a:prstGeom prst="rect">
-            <a:avLst/>
-          </a:prstGeom>
-          <a:noFill/>
-        </p:spPr>
-        <p:txBody>
-          <a:bodyPr wrap="square" anchor="ctr" lIns="0" tIns="0" rIns="0" bIns="0">
-            <a:noAutofit/>
-          </a:bodyPr>
-          <a:lstStyle/>
-          <a:p>
-            <a:pPr algn="l" latinLnBrk="0">
-              <a:lnSpc>
-                <a:spcPct val="100000"/>
-              </a:lnSpc>
-              <a:spcBef>
-                <a:spcPts val="0"/>
-              </a:spcBef>
-              <a:spcAft>
-                <a:spcPts val="0"/>
-              </a:spcAft>
-            </a:pPr>
-            <a:r>
-              <a:rPr sz="800" b="1">
-                <a:solidFill>
-                  <a:srgbClr val="B4382F"/>
-                </a:solidFill>
-                <a:latin typeface="Microsoft YaHei"/>
-                <a:ea typeface="Microsoft YaHei"/>
-                <a:cs typeface="Microsoft YaHei"/>
-              </a:rPr>
-              <a:t>否</a:t>
-            </a:r>
-          </a:p>
-        </p:txBody>
-      </p:sp>
-      <p:sp>
-        <p:nvSpPr>
-          <p:cNvPr id="42" name="TextBox 41"/>
-          <p:cNvSpPr txBox="1"/>
-          <p:nvPr/>
-        </p:nvSpPr>
-        <p:spPr>
-          <a:xfrm>
-            <a:off x="7159752" y="4123944"/>
-            <a:ext cx="274320" cy="201168"/>
-          </a:xfrm>
-          <a:prstGeom prst="rect">
-            <a:avLst/>
-          </a:prstGeom>
-          <a:noFill/>
-        </p:spPr>
-        <p:txBody>
-          <a:bodyPr wrap="square" anchor="ctr" lIns="0" tIns="0" rIns="0" bIns="0">
-            <a:noAutofit/>
-          </a:bodyPr>
-          <a:lstStyle/>
-          <a:p>
-            <a:pPr algn="l" latinLnBrk="0">
-              <a:lnSpc>
-                <a:spcPct val="100000"/>
-              </a:lnSpc>
-              <a:spcBef>
-                <a:spcPts val="0"/>
-              </a:spcBef>
-              <a:spcAft>
-                <a:spcPts val="0"/>
-              </a:spcAft>
-            </a:pPr>
-            <a:r>
-              <a:rPr sz="800" b="1">
-                <a:solidFill>
-                  <a:srgbClr val="B4382F"/>
-                </a:solidFill>
-                <a:latin typeface="Microsoft YaHei"/>
-                <a:ea typeface="Microsoft YaHei"/>
-                <a:cs typeface="Microsoft YaHei"/>
-              </a:rPr>
-              <a:t>否</a:t>
-            </a:r>
-          </a:p>
-        </p:txBody>
-      </p:sp>
-      <p:sp>
-        <p:nvSpPr>
-          <p:cNvPr id="43" name="TextBox 42"/>
-          <p:cNvSpPr txBox="1"/>
-          <p:nvPr/>
-        </p:nvSpPr>
-        <p:spPr>
-          <a:xfrm>
-            <a:off x="8348472" y="4123944"/>
-            <a:ext cx="274320" cy="201168"/>
-          </a:xfrm>
-          <a:prstGeom prst="rect">
-            <a:avLst/>
-          </a:prstGeom>
-          <a:noFill/>
-        </p:spPr>
-        <p:txBody>
-          <a:bodyPr wrap="square" anchor="ctr" lIns="0" tIns="0" rIns="0" bIns="0">
-            <a:noAutofit/>
-          </a:bodyPr>
-          <a:lstStyle/>
-          <a:p>
-            <a:pPr algn="l" latinLnBrk="0">
-              <a:lnSpc>
-                <a:spcPct val="100000"/>
-              </a:lnSpc>
-              <a:spcBef>
-                <a:spcPts val="0"/>
-              </a:spcBef>
-              <a:spcAft>
-                <a:spcPts val="0"/>
-              </a:spcAft>
-            </a:pPr>
-            <a:r>
-              <a:rPr sz="800" b="1">
-                <a:solidFill>
-                  <a:srgbClr val="B4382F"/>
-                </a:solidFill>
-                <a:latin typeface="Microsoft YaHei"/>
-                <a:ea typeface="Microsoft YaHei"/>
-                <a:cs typeface="Microsoft YaHei"/>
-              </a:rPr>
-              <a:t>否</a:t>
-            </a:r>
-          </a:p>
-        </p:txBody>
-      </p:sp>
-      <p:sp>
-        <p:nvSpPr>
-          <p:cNvPr id="44" name="TextBox 43"/>
-          <p:cNvSpPr txBox="1"/>
-          <p:nvPr/>
-        </p:nvSpPr>
-        <p:spPr>
-          <a:xfrm>
-            <a:off x="9537192" y="4123944"/>
-            <a:ext cx="274320" cy="201168"/>
-          </a:xfrm>
-          <a:prstGeom prst="rect">
-            <a:avLst/>
-          </a:prstGeom>
-          <a:noFill/>
-        </p:spPr>
-        <p:txBody>
-          <a:bodyPr wrap="square" anchor="ctr" lIns="0" tIns="0" rIns="0" bIns="0">
-            <a:noAutofit/>
-          </a:bodyPr>
-          <a:lstStyle/>
-          <a:p>
-            <a:pPr algn="l" latinLnBrk="0">
-              <a:lnSpc>
-                <a:spcPct val="100000"/>
-              </a:lnSpc>
-              <a:spcBef>
-                <a:spcPts val="0"/>
-              </a:spcBef>
-              <a:spcAft>
-                <a:spcPts val="0"/>
-              </a:spcAft>
-            </a:pPr>
-            <a:r>
-              <a:rPr sz="800" b="1">
-                <a:solidFill>
-                  <a:srgbClr val="B4382F"/>
-                </a:solidFill>
-                <a:latin typeface="Microsoft YaHei"/>
-                <a:ea typeface="Microsoft YaHei"/>
-                <a:cs typeface="Microsoft YaHei"/>
-              </a:rPr>
-              <a:t>否</a:t>
-            </a:r>
-          </a:p>
-        </p:txBody>
-      </p:sp>
-      <p:cxnSp>
-        <p:nvCxnSpPr>
-          <p:cNvPr id="45" name="Connector 44"/>
-          <p:cNvCxnSpPr/>
-          <p:nvPr/>
-        </p:nvCxnSpPr>
-        <p:spPr>
-          <a:xfrm flipH="1">
-            <a:off x="5047488" y="2907791"/>
-            <a:ext cx="2121408" cy="0"/>
-          </a:xfrm>
-          <a:prstGeom prst="line">
-            <a:avLst/>
-          </a:prstGeom>
-          <a:ln w="15875">
-            <a:solidFill>
-              <a:srgbClr val="B4382F"/>
-            </a:solidFill>
-            <a:prstDash val="dash"/>
-            <a:tailEnd type="triangle" w="med" len="med"/>
-          </a:ln>
-        </p:spPr>
-      </p:cxnSp>
-      <p:cxnSp>
-        <p:nvCxnSpPr>
-          <p:cNvPr id="46" name="Connector 45"/>
-          <p:cNvCxnSpPr/>
-          <p:nvPr/>
-        </p:nvCxnSpPr>
-        <p:spPr>
-          <a:xfrm>
-            <a:off x="1920240" y="1865376"/>
-            <a:ext cx="0" cy="2542032"/>
-          </a:xfrm>
-          <a:prstGeom prst="line">
-            <a:avLst/>
-          </a:prstGeom>
-          <a:ln w="19050">
-            <a:solidFill>
-              <a:srgbClr val="1B4D69"/>
-            </a:solidFill>
-            <a:tailEnd type="triangle" w="med" len="med"/>
-          </a:ln>
-        </p:spPr>
-      </p:cxnSp>
-      <p:cxnSp>
-        <p:nvCxnSpPr>
-          <p:cNvPr id="47" name="Connector 46"/>
-          <p:cNvCxnSpPr/>
-          <p:nvPr/>
-        </p:nvCxnSpPr>
-        <p:spPr>
-          <a:xfrm>
-            <a:off x="3822191" y="1865376"/>
-            <a:ext cx="0" cy="640080"/>
-          </a:xfrm>
-          <a:prstGeom prst="line">
-            <a:avLst/>
-          </a:prstGeom>
-          <a:ln w="19050">
-            <a:solidFill>
-              <a:srgbClr val="1B4D69"/>
-            </a:solidFill>
-            <a:headEnd type="triangle" w="med" len="med"/>
-            <a:tailEnd type="triangle" w="med" len="med"/>
-          </a:ln>
-        </p:spPr>
-      </p:cxnSp>
-      <p:cxnSp>
-        <p:nvCxnSpPr>
-          <p:cNvPr id="48" name="Connector 47"/>
-          <p:cNvCxnSpPr/>
-          <p:nvPr/>
-        </p:nvCxnSpPr>
-        <p:spPr>
-          <a:xfrm flipV="1">
-            <a:off x="2816352" y="3310128"/>
-            <a:ext cx="0" cy="1097280"/>
-          </a:xfrm>
-          <a:prstGeom prst="line">
-            <a:avLst/>
-          </a:prstGeom>
-          <a:ln w="19050">
-            <a:solidFill>
-              <a:srgbClr val="0F62CE"/>
-            </a:solidFill>
-            <a:tailEnd type="triangle" w="med" len="med"/>
-          </a:ln>
-        </p:spPr>
-      </p:cxnSp>
-      <p:cxnSp>
-        <p:nvCxnSpPr>
-          <p:cNvPr id="49" name="Connector 48"/>
-          <p:cNvCxnSpPr/>
-          <p:nvPr/>
-        </p:nvCxnSpPr>
-        <p:spPr>
-          <a:xfrm>
-            <a:off x="4599432" y="3310128"/>
-            <a:ext cx="0" cy="1097280"/>
-          </a:xfrm>
-          <a:prstGeom prst="line">
-            <a:avLst/>
-          </a:prstGeom>
-          <a:ln w="19050">
-            <a:solidFill>
-              <a:srgbClr val="D2690C"/>
-            </a:solidFill>
-            <a:tailEnd type="triangle" w="med" len="med"/>
-          </a:ln>
-        </p:spPr>
-      </p:cxnSp>
-      <p:cxnSp>
-        <p:nvCxnSpPr>
-          <p:cNvPr id="50" name="Connector 49"/>
-          <p:cNvCxnSpPr/>
-          <p:nvPr/>
-        </p:nvCxnSpPr>
-        <p:spPr>
-          <a:xfrm flipV="1">
-            <a:off x="10908792" y="1865376"/>
-            <a:ext cx="0" cy="2542032"/>
-          </a:xfrm>
-          <a:prstGeom prst="line">
-            <a:avLst/>
-          </a:prstGeom>
-          <a:ln w="19050">
-            <a:solidFill>
-              <a:srgbClr val="0F62CE"/>
-            </a:solidFill>
-            <a:tailEnd type="triangle" w="med" len="med"/>
-          </a:ln>
-        </p:spPr>
-      </p:cxnSp>
-      <p:sp>
-        <p:nvSpPr>
-          <p:cNvPr id="51" name="Freeform 50"/>
-          <p:cNvSpPr/>
-          <p:nvPr/>
-        </p:nvSpPr>
-        <p:spPr>
-          <a:xfrm>
-            <a:off x="2313432" y="5212080"/>
-            <a:ext cx="8595360" cy="658368"/>
-          </a:xfrm>
-          <a:custGeom>
-            <a:avLst/>
-            <a:gdLst/>
-            <a:ahLst/>
-            <a:cxnLst/>
-            <a:rect l="l" t="t" r="r" b="b"/>
-            <a:pathLst>
-              <a:path w="8595360" h="658368">
-                <a:moveTo>
-                  <a:pt x="8595360" y="0"/>
-                </a:moveTo>
-                <a:lnTo>
-                  <a:pt x="8595360" y="658368"/>
-                </a:lnTo>
-                <a:lnTo>
-                  <a:pt x="0" y="658368"/>
-                </a:lnTo>
-                <a:lnTo>
-                  <a:pt x="0" y="0"/>
-                </a:lnTo>
-              </a:path>
-            </a:pathLst>
-          </a:custGeom>
-          <a:noFill/>
-          <a:ln w="19050">
-            <a:solidFill>
-              <a:srgbClr val="17795F"/>
-            </a:solidFill>
-            <a:tailEnd type="triangle" w="med" len="med"/>
-          </a:ln>
-        </p:spPr>
-        <p:txBody>
-          <a:bodyPr rtlCol="0" anchor="ctr"/>
-          <a:lstStyle/>
-          <a:p>
-            <a:pPr algn="ctr"/>
-          </a:p>
-        </p:txBody>
-      </p:sp>
-      <p:sp>
-        <p:nvSpPr>
-          <p:cNvPr id="52" name="Rounded Rectangle 51"/>
-          <p:cNvSpPr/>
-          <p:nvPr/>
-        </p:nvSpPr>
-        <p:spPr>
-          <a:xfrm>
-            <a:off x="1554480" y="2002536"/>
-            <a:ext cx="731520" cy="201168"/>
-          </a:xfrm>
-          <a:prstGeom prst="roundRect">
-            <a:avLst>
-              <a:gd name="adj" fmla="val 50000"/>
-            </a:avLst>
-          </a:prstGeom>
-          <a:solidFill>
-            <a:srgbClr val="FFFFFF"/>
-          </a:solidFill>
-          <a:ln w="9525">
-            <a:solidFill>
-              <a:srgbClr val="1B4D69"/>
-            </a:solidFill>
-          </a:ln>
-        </p:spPr>
-        <p:txBody>
-          <a:bodyPr rtlCol="0" anchor="ctr" wrap="square" lIns="18288" tIns="0" rIns="18288" bIns="0">
-            <a:noAutofit/>
-          </a:bodyPr>
-          <a:lstStyle/>
-          <a:p>
-            <a:pPr algn="ctr" latinLnBrk="0">
-              <a:lnSpc>
-                <a:spcPct val="100000"/>
-              </a:lnSpc>
-              <a:spcBef>
-                <a:spcPts val="0"/>
-              </a:spcBef>
-              <a:spcAft>
-                <a:spcPts val="0"/>
-              </a:spcAft>
-            </a:pPr>
-            <a:r>
-              <a:rPr sz="800" b="1">
-                <a:solidFill>
-                  <a:srgbClr val="1B4D69"/>
-                </a:solidFill>
-                <a:latin typeface="Microsoft YaHei"/>
-                <a:ea typeface="Microsoft YaHei"/>
-                <a:cs typeface="Microsoft YaHei"/>
-              </a:rPr>
-              <a:t>目标 + 标准</a:t>
-            </a:r>
-          </a:p>
-        </p:txBody>
-      </p:sp>
-      <p:sp>
-        <p:nvSpPr>
-          <p:cNvPr id="53" name="Rounded Rectangle 52"/>
-          <p:cNvSpPr/>
-          <p:nvPr/>
-        </p:nvSpPr>
-        <p:spPr>
-          <a:xfrm>
-            <a:off x="3593591" y="2002536"/>
-            <a:ext cx="457200" cy="201168"/>
-          </a:xfrm>
-          <a:prstGeom prst="roundRect">
-            <a:avLst>
-              <a:gd name="adj" fmla="val 50000"/>
-            </a:avLst>
-          </a:prstGeom>
-          <a:solidFill>
-            <a:srgbClr val="FFFFFF"/>
-          </a:solidFill>
-          <a:ln w="9525">
-            <a:solidFill>
-              <a:srgbClr val="1B4D69"/>
-            </a:solidFill>
-          </a:ln>
-        </p:spPr>
-        <p:txBody>
-          <a:bodyPr rtlCol="0" anchor="ctr" wrap="square" lIns="18288" tIns="0" rIns="18288" bIns="0">
-            <a:noAutofit/>
-          </a:bodyPr>
-          <a:lstStyle/>
-          <a:p>
-            <a:pPr algn="ctr" latinLnBrk="0">
-              <a:lnSpc>
-                <a:spcPct val="100000"/>
-              </a:lnSpc>
-              <a:spcBef>
-                <a:spcPts val="0"/>
-              </a:spcBef>
-              <a:spcAft>
-                <a:spcPts val="0"/>
-              </a:spcAft>
-            </a:pPr>
-            <a:r>
-              <a:rPr sz="800" b="1">
-                <a:solidFill>
-                  <a:srgbClr val="1B4D69"/>
-                </a:solidFill>
-                <a:latin typeface="Microsoft YaHei"/>
-                <a:ea typeface="Microsoft YaHei"/>
-                <a:cs typeface="Microsoft YaHei"/>
-              </a:rPr>
-              <a:t>协同</a:t>
-            </a:r>
-          </a:p>
-        </p:txBody>
-      </p:sp>
-      <p:sp>
-        <p:nvSpPr>
-          <p:cNvPr id="54" name="Rounded Rectangle 53"/>
-          <p:cNvSpPr/>
-          <p:nvPr/>
-        </p:nvSpPr>
-        <p:spPr>
-          <a:xfrm>
-            <a:off x="10405872" y="2002536"/>
-            <a:ext cx="1005840" cy="201168"/>
+            <a:off x="5102352" y="5449824"/>
+            <a:ext cx="1499616" cy="201168"/>
           </a:xfrm>
           <a:prstGeom prst="roundRect">
             <a:avLst>
@@ -32774,238 +35155,14 @@
                 <a:ea typeface="Microsoft YaHei"/>
                 <a:cs typeface="Microsoft YaHei"/>
               </a:rPr>
-              <a:t>最优版本 + 报告</a:t>
-            </a:r>
-          </a:p>
-        </p:txBody>
-      </p:sp>
-      <p:sp>
-        <p:nvSpPr>
-          <p:cNvPr id="55" name="Rounded Rectangle 54"/>
-          <p:cNvSpPr/>
-          <p:nvPr/>
-        </p:nvSpPr>
-        <p:spPr>
-          <a:xfrm>
-            <a:off x="2432304" y="3611879"/>
-            <a:ext cx="768096" cy="201168"/>
-          </a:xfrm>
-          <a:prstGeom prst="roundRect">
-            <a:avLst>
-              <a:gd name="adj" fmla="val 50000"/>
-            </a:avLst>
-          </a:prstGeom>
-          <a:solidFill>
-            <a:srgbClr val="FFFFFF"/>
-          </a:solidFill>
-          <a:ln w="9525">
-            <a:solidFill>
-              <a:srgbClr val="0F62CE"/>
-            </a:solidFill>
-          </a:ln>
-        </p:spPr>
-        <p:txBody>
-          <a:bodyPr rtlCol="0" anchor="ctr" wrap="square" lIns="18288" tIns="0" rIns="18288" bIns="0">
-            <a:noAutofit/>
-          </a:bodyPr>
-          <a:lstStyle/>
-          <a:p>
-            <a:pPr algn="ctr" latinLnBrk="0">
-              <a:lnSpc>
-                <a:spcPct val="100000"/>
-              </a:lnSpc>
-              <a:spcBef>
-                <a:spcPts val="0"/>
-              </a:spcBef>
-              <a:spcAft>
-                <a:spcPts val="0"/>
-              </a:spcAft>
-            </a:pPr>
-            <a:r>
-              <a:rPr sz="800" b="1">
-                <a:solidFill>
-                  <a:srgbClr val="0F62CE"/>
-                </a:solidFill>
-                <a:latin typeface="Microsoft YaHei"/>
-                <a:ea typeface="Microsoft YaHei"/>
-                <a:cs typeface="Microsoft YaHei"/>
-              </a:rPr>
-              <a:t>瓶颈 + 证据</a:t>
-            </a:r>
-          </a:p>
-        </p:txBody>
-      </p:sp>
-      <p:sp>
-        <p:nvSpPr>
-          <p:cNvPr id="56" name="Rounded Rectangle 55"/>
-          <p:cNvSpPr/>
-          <p:nvPr/>
-        </p:nvSpPr>
-        <p:spPr>
-          <a:xfrm>
-            <a:off x="4215384" y="3611879"/>
-            <a:ext cx="768096" cy="201168"/>
-          </a:xfrm>
-          <a:prstGeom prst="roundRect">
-            <a:avLst>
-              <a:gd name="adj" fmla="val 50000"/>
-            </a:avLst>
-          </a:prstGeom>
-          <a:solidFill>
-            <a:srgbClr val="FFFFFF"/>
-          </a:solidFill>
-          <a:ln w="9525">
-            <a:solidFill>
-              <a:srgbClr val="C2570A"/>
-            </a:solidFill>
-          </a:ln>
-        </p:spPr>
-        <p:txBody>
-          <a:bodyPr rtlCol="0" anchor="ctr" wrap="square" lIns="18288" tIns="0" rIns="18288" bIns="0">
-            <a:noAutofit/>
-          </a:bodyPr>
-          <a:lstStyle/>
-          <a:p>
-            <a:pPr algn="ctr" latinLnBrk="0">
-              <a:lnSpc>
-                <a:spcPct val="100000"/>
-              </a:lnSpc>
-              <a:spcBef>
-                <a:spcPts val="0"/>
-              </a:spcBef>
-              <a:spcAft>
-                <a:spcPts val="0"/>
-              </a:spcAft>
-            </a:pPr>
-            <a:r>
-              <a:rPr sz="800" b="1">
-                <a:solidFill>
-                  <a:srgbClr val="C2570A"/>
-                </a:solidFill>
-                <a:latin typeface="Microsoft YaHei"/>
-                <a:ea typeface="Microsoft YaHei"/>
-                <a:cs typeface="Microsoft YaHei"/>
-              </a:rPr>
-              <a:t>方案 + 补丁</a:t>
-            </a:r>
-          </a:p>
-        </p:txBody>
-      </p:sp>
-      <p:sp>
-        <p:nvSpPr>
-          <p:cNvPr id="57" name="Rounded Rectangle 56"/>
-          <p:cNvSpPr/>
-          <p:nvPr/>
-        </p:nvSpPr>
-        <p:spPr>
-          <a:xfrm>
-            <a:off x="7397496" y="3611879"/>
-            <a:ext cx="621792" cy="201168"/>
-          </a:xfrm>
-          <a:prstGeom prst="roundRect">
-            <a:avLst>
-              <a:gd name="adj" fmla="val 50000"/>
-            </a:avLst>
-          </a:prstGeom>
-          <a:solidFill>
-            <a:srgbClr val="FFFFFF"/>
-          </a:solidFill>
-          <a:ln w="9525">
-            <a:solidFill>
-              <a:srgbClr val="B4382F"/>
-            </a:solidFill>
-          </a:ln>
-        </p:spPr>
-        <p:txBody>
-          <a:bodyPr rtlCol="0" anchor="ctr" wrap="square" lIns="18288" tIns="0" rIns="18288" bIns="0">
-            <a:noAutofit/>
-          </a:bodyPr>
-          <a:lstStyle/>
-          <a:p>
-            <a:pPr algn="ctr" latinLnBrk="0">
-              <a:lnSpc>
-                <a:spcPct val="100000"/>
-              </a:lnSpc>
-              <a:spcBef>
-                <a:spcPts val="0"/>
-              </a:spcBef>
-              <a:spcAft>
-                <a:spcPts val="0"/>
-              </a:spcAft>
-            </a:pPr>
-            <a:r>
-              <a:rPr sz="800" b="1">
-                <a:solidFill>
-                  <a:srgbClr val="B4382F"/>
-                </a:solidFill>
-                <a:latin typeface="Microsoft YaHei"/>
-                <a:ea typeface="Microsoft YaHei"/>
-                <a:cs typeface="Microsoft YaHei"/>
-              </a:rPr>
-              <a:t>被拒原因</a:t>
-            </a:r>
-          </a:p>
-        </p:txBody>
-      </p:sp>
-      <p:sp>
-        <p:nvSpPr>
-          <p:cNvPr id="58" name="Rounded Rectangle 57"/>
-          <p:cNvSpPr/>
-          <p:nvPr/>
-        </p:nvSpPr>
-        <p:spPr>
-          <a:xfrm>
-            <a:off x="6108192" y="5769864"/>
-            <a:ext cx="1005840" cy="201168"/>
-          </a:xfrm>
-          <a:prstGeom prst="roundRect">
-            <a:avLst>
-              <a:gd name="adj" fmla="val 50000"/>
-            </a:avLst>
-          </a:prstGeom>
-          <a:solidFill>
-            <a:srgbClr val="FFFFFF"/>
-          </a:solidFill>
-          <a:ln w="9525">
-            <a:solidFill>
-              <a:srgbClr val="17795F"/>
-            </a:solidFill>
-          </a:ln>
-        </p:spPr>
-        <p:txBody>
-          <a:bodyPr rtlCol="0" anchor="ctr" wrap="square" lIns="18288" tIns="0" rIns="18288" bIns="0">
-            <a:noAutofit/>
-          </a:bodyPr>
-          <a:lstStyle/>
-          <a:p>
-            <a:pPr algn="ctr" latinLnBrk="0">
-              <a:lnSpc>
-                <a:spcPct val="100000"/>
-              </a:lnSpc>
-              <a:spcBef>
-                <a:spcPts val="0"/>
-              </a:spcBef>
-              <a:spcAft>
-                <a:spcPts val="0"/>
-              </a:spcAft>
-            </a:pPr>
-            <a:r>
-              <a:rPr sz="800" b="1">
-                <a:solidFill>
-                  <a:srgbClr val="17795F"/>
-                </a:solidFill>
-                <a:latin typeface="Microsoft YaHei"/>
-                <a:ea typeface="Microsoft YaHei"/>
-                <a:cs typeface="Microsoft YaHei"/>
-              </a:rPr>
-              <a:t>新基线 · 下一轮</a:t>
-            </a:r>
-          </a:p>
-        </p:txBody>
-      </p:sp>
-      <p:sp>
-        <p:nvSpPr>
-          <p:cNvPr id="59" name="TextBox 58"/>
+              <a:t>补丁 · 构建 · 起停服务</a:t>
+            </a:r>
+          </a:p>
+        </p:txBody>
+      </p:sp>
+      <p:sp>
+        <p:nvSpPr>
+          <p:cNvPr id="95" name="TextBox 94"/>
           <p:cNvSpPr txBox="1"/>
           <p:nvPr/>
         </p:nvSpPr>

--- a/slides/m100_agent_final_deck.pptx
+++ b/slides/m100_agent_final_deck.pptx
@@ -30571,7 +30571,7 @@
                 <a:ea typeface="Microsoft YaHei"/>
                 <a:cs typeface="Microsoft YaHei"/>
               </a:rPr>
-              <a:t>模型层 Agent 设计方案</a:t>
+              <a:t>模型层 Agent：内部组件与人机交互</a:t>
             </a:r>
           </a:p>
         </p:txBody>
@@ -30610,7 +30610,7 @@
               </a:spcAft>
             </a:pPr>
             <a:r>
-              <a:rPr sz="1200" b="0">
+              <a:rPr sz="1150" b="0">
                 <a:solidFill>
                   <a:srgbClr val="1B4D69"/>
                 </a:solidFill>
@@ -30618,7 +30618,7 @@
                 <a:ea typeface="Microsoft YaHei"/>
                 <a:cs typeface="Microsoft YaHei"/>
               </a:rPr>
-              <a:t>规划器只提方案，取证、建版与判决全部由确定性的控制器完成；编号 1–8 对应上一页八步</a:t>
+              <a:t>证据感知 — 假设推演 — 确定性核验；人只在下发契约、协同改动、终审验收三处介入</a:t>
             </a:r>
           </a:p>
         </p:txBody>
@@ -30631,19 +30631,17 @@
         </p:nvSpPr>
         <p:spPr>
           <a:xfrm>
-            <a:off x="1005840" y="1298448"/>
-            <a:ext cx="10637215" cy="420624"/>
+            <a:off x="548640" y="1234440"/>
+            <a:ext cx="54864" cy="237744"/>
           </a:xfrm>
           <a:prstGeom prst="rect">
             <a:avLst/>
           </a:prstGeom>
           <a:solidFill>
-            <a:srgbClr val="F2F8FD"/>
+            <a:srgbClr val="40708B"/>
           </a:solidFill>
-          <a:ln w="9525">
-            <a:solidFill>
-              <a:srgbClr val="AFCEE1"/>
-            </a:solidFill>
+          <a:ln>
+            <a:noFill/>
           </a:ln>
         </p:spPr>
         <p:txBody>
@@ -30656,369 +30654,252 @@
       </p:sp>
       <p:sp>
         <p:nvSpPr>
-          <p:cNvPr id="7" name="Rectangle 6"/>
+          <p:cNvPr id="7" name="TextBox 6"/>
+          <p:cNvSpPr txBox="1"/>
+          <p:nvPr/>
+        </p:nvSpPr>
+        <p:spPr>
+          <a:xfrm>
+            <a:off x="694944" y="1207008"/>
+            <a:ext cx="2450591" cy="292608"/>
+          </a:xfrm>
+          <a:prstGeom prst="rect">
+            <a:avLst/>
+          </a:prstGeom>
+          <a:noFill/>
+        </p:spPr>
+        <p:txBody>
+          <a:bodyPr wrap="square" anchor="ctr" lIns="0" tIns="0" rIns="0" bIns="0">
+            <a:noAutofit/>
+          </a:bodyPr>
+          <a:lstStyle/>
+          <a:p>
+            <a:pPr algn="l" latinLnBrk="0">
+              <a:lnSpc>
+                <a:spcPct val="100000"/>
+              </a:lnSpc>
+              <a:spcBef>
+                <a:spcPts val="0"/>
+              </a:spcBef>
+              <a:spcAft>
+                <a:spcPts val="0"/>
+              </a:spcAft>
+            </a:pPr>
+            <a:r>
+              <a:rPr sz="1100" b="1">
+                <a:solidFill>
+                  <a:srgbClr val="0A2B45"/>
+                </a:solidFill>
+                <a:latin typeface="Microsoft YaHei"/>
+                <a:ea typeface="Microsoft YaHei"/>
+                <a:cs typeface="Microsoft YaHei"/>
+              </a:rPr>
+              <a:t>人 · 契约与证据</a:t>
+            </a:r>
+            <a:r>
+              <a:rPr sz="850" b="1">
+                <a:solidFill>
+                  <a:srgbClr val="40708B"/>
+                </a:solidFill>
+                <a:latin typeface="Microsoft YaHei"/>
+                <a:ea typeface="Microsoft YaHei"/>
+                <a:cs typeface="Microsoft YaHei"/>
+              </a:rPr>
+              <a:t>　Human in the Loop</a:t>
+            </a:r>
+          </a:p>
+        </p:txBody>
+      </p:sp>
+      <p:sp>
+        <p:nvSpPr>
+          <p:cNvPr id="8" name="Rectangle 7"/>
           <p:cNvSpPr/>
           <p:nvPr/>
         </p:nvSpPr>
         <p:spPr>
           <a:xfrm>
-            <a:off x="548640" y="1298448"/>
-            <a:ext cx="457200" cy="420624"/>
+            <a:off x="4041648" y="1234440"/>
+            <a:ext cx="54864" cy="237744"/>
           </a:xfrm>
           <a:prstGeom prst="rect">
             <a:avLst/>
           </a:prstGeom>
           <a:solidFill>
-            <a:srgbClr val="1B4D69"/>
+            <a:srgbClr val="D2690C"/>
           </a:solidFill>
-          <a:ln w="19050">
-            <a:solidFill>
-              <a:srgbClr val="FFFFFF"/>
-            </a:solidFill>
+          <a:ln>
+            <a:noFill/>
           </a:ln>
         </p:spPr>
         <p:txBody>
-          <a:bodyPr rtlCol="0" anchor="ctr" wrap="square" lIns="18288" tIns="0" rIns="18288" bIns="0">
-            <a:noAutofit/>
-          </a:bodyPr>
-          <a:lstStyle/>
-          <a:p>
-            <a:pPr algn="ctr" latinLnBrk="0">
-              <a:lnSpc>
-                <a:spcPct val="100000"/>
-              </a:lnSpc>
-              <a:spcBef>
-                <a:spcPts val="0"/>
-              </a:spcBef>
-              <a:spcAft>
-                <a:spcPts val="0"/>
-              </a:spcAft>
-            </a:pPr>
-            <a:r>
-              <a:rPr sz="1200" b="1">
-                <a:solidFill>
-                  <a:srgbClr val="FFFFFF"/>
-                </a:solidFill>
-                <a:latin typeface="Microsoft YaHei"/>
-                <a:ea typeface="Microsoft YaHei"/>
-                <a:cs typeface="Microsoft YaHei"/>
-              </a:rPr>
-              <a:t>人</a:t>
-            </a:r>
-          </a:p>
-          <a:p>
-            <a:pPr algn="ctr" latinLnBrk="0">
-              <a:lnSpc>
-                <a:spcPct val="100000"/>
-              </a:lnSpc>
-              <a:spcBef>
-                <a:spcPts val="0"/>
-              </a:spcBef>
-              <a:spcAft>
-                <a:spcPts val="0"/>
-              </a:spcAft>
-            </a:pPr>
-            <a:r>
-              <a:rPr sz="750" b="0">
-                <a:solidFill>
-                  <a:srgbClr val="FFFFFF"/>
-                </a:solidFill>
-                <a:latin typeface="Microsoft YaHei"/>
-                <a:ea typeface="Microsoft YaHei"/>
-                <a:cs typeface="Microsoft YaHei"/>
-              </a:rPr>
-              <a:t>三处介入</a:t>
-            </a:r>
-          </a:p>
-        </p:txBody>
-      </p:sp>
-      <p:sp>
-        <p:nvSpPr>
-          <p:cNvPr id="8" name="Rounded Rectangle 7"/>
+          <a:bodyPr rtlCol="0" anchor="ctr"/>
+          <a:lstStyle/>
+          <a:p>
+            <a:pPr algn="ctr"/>
+          </a:p>
+        </p:txBody>
+      </p:sp>
+      <p:sp>
+        <p:nvSpPr>
+          <p:cNvPr id="9" name="TextBox 8"/>
+          <p:cNvSpPr txBox="1"/>
+          <p:nvPr/>
+        </p:nvSpPr>
+        <p:spPr>
+          <a:xfrm>
+            <a:off x="4187952" y="1207008"/>
+            <a:ext cx="3694176" cy="292608"/>
+          </a:xfrm>
+          <a:prstGeom prst="rect">
+            <a:avLst/>
+          </a:prstGeom>
+          <a:noFill/>
+        </p:spPr>
+        <p:txBody>
+          <a:bodyPr wrap="square" anchor="ctr" lIns="0" tIns="0" rIns="0" bIns="0">
+            <a:noAutofit/>
+          </a:bodyPr>
+          <a:lstStyle/>
+          <a:p>
+            <a:pPr algn="l" latinLnBrk="0">
+              <a:lnSpc>
+                <a:spcPct val="100000"/>
+              </a:lnSpc>
+              <a:spcBef>
+                <a:spcPts val="0"/>
+              </a:spcBef>
+              <a:spcAft>
+                <a:spcPts val="0"/>
+              </a:spcAft>
+            </a:pPr>
+            <a:r>
+              <a:rPr sz="1100" b="1">
+                <a:solidFill>
+                  <a:srgbClr val="0A2B45"/>
+                </a:solidFill>
+                <a:latin typeface="Microsoft YaHei"/>
+                <a:ea typeface="Microsoft YaHei"/>
+                <a:cs typeface="Microsoft YaHei"/>
+              </a:rPr>
+              <a:t>模型层 Agent 内部</a:t>
+            </a:r>
+            <a:r>
+              <a:rPr sz="850" b="1">
+                <a:solidFill>
+                  <a:srgbClr val="D2690C"/>
+                </a:solidFill>
+                <a:latin typeface="Microsoft YaHei"/>
+                <a:ea typeface="Microsoft YaHei"/>
+                <a:cs typeface="Microsoft YaHei"/>
+              </a:rPr>
+              <a:t>　唯一引入大模型的位置</a:t>
+            </a:r>
+          </a:p>
+        </p:txBody>
+      </p:sp>
+      <p:sp>
+        <p:nvSpPr>
+          <p:cNvPr id="10" name="Rectangle 9"/>
           <p:cNvSpPr/>
           <p:nvPr/>
         </p:nvSpPr>
         <p:spPr>
           <a:xfrm>
-            <a:off x="1097280" y="1353312"/>
-            <a:ext cx="1280160" cy="310896"/>
-          </a:xfrm>
-          <a:prstGeom prst="roundRect">
-            <a:avLst>
-              <a:gd name="adj" fmla="val 17647"/>
-            </a:avLst>
+            <a:off x="8705088" y="1234440"/>
+            <a:ext cx="54864" cy="237744"/>
+          </a:xfrm>
+          <a:prstGeom prst="rect">
+            <a:avLst/>
+          </a:prstGeom>
+          <a:solidFill>
+            <a:srgbClr val="0F62CE"/>
+          </a:solidFill>
+          <a:ln>
+            <a:noFill/>
+          </a:ln>
+        </p:spPr>
+        <p:txBody>
+          <a:bodyPr rtlCol="0" anchor="ctr"/>
+          <a:lstStyle/>
+          <a:p>
+            <a:pPr algn="ctr"/>
+          </a:p>
+        </p:txBody>
+      </p:sp>
+      <p:sp>
+        <p:nvSpPr>
+          <p:cNvPr id="11" name="TextBox 10"/>
+          <p:cNvSpPr txBox="1"/>
+          <p:nvPr/>
+        </p:nvSpPr>
+        <p:spPr>
+          <a:xfrm>
+            <a:off x="8851392" y="1207008"/>
+            <a:ext cx="2791663" cy="292608"/>
+          </a:xfrm>
+          <a:prstGeom prst="rect">
+            <a:avLst/>
+          </a:prstGeom>
+          <a:noFill/>
+        </p:spPr>
+        <p:txBody>
+          <a:bodyPr wrap="square" anchor="ctr" lIns="0" tIns="0" rIns="0" bIns="0">
+            <a:noAutofit/>
+          </a:bodyPr>
+          <a:lstStyle/>
+          <a:p>
+            <a:pPr algn="l" latinLnBrk="0">
+              <a:lnSpc>
+                <a:spcPct val="100000"/>
+              </a:lnSpc>
+              <a:spcBef>
+                <a:spcPts val="0"/>
+              </a:spcBef>
+              <a:spcAft>
+                <a:spcPts val="0"/>
+              </a:spcAft>
+            </a:pPr>
+            <a:r>
+              <a:rPr sz="1100" b="1">
+                <a:solidFill>
+                  <a:srgbClr val="0A2B45"/>
+                </a:solidFill>
+                <a:latin typeface="Microsoft YaHei"/>
+                <a:ea typeface="Microsoft YaHei"/>
+                <a:cs typeface="Microsoft YaHei"/>
+              </a:rPr>
+              <a:t>确定性工具与评测</a:t>
+            </a:r>
+            <a:r>
+              <a:rPr sz="850" b="1">
+                <a:solidFill>
+                  <a:srgbClr val="0F62CE"/>
+                </a:solidFill>
+                <a:latin typeface="Microsoft YaHei"/>
+                <a:ea typeface="Microsoft YaHei"/>
+                <a:cs typeface="Microsoft YaHei"/>
+              </a:rPr>
+              <a:t>　无大模型</a:t>
+            </a:r>
+          </a:p>
+        </p:txBody>
+      </p:sp>
+      <p:sp>
+        <p:nvSpPr>
+          <p:cNvPr id="12" name="Rectangle 11"/>
+          <p:cNvSpPr/>
+          <p:nvPr/>
+        </p:nvSpPr>
+        <p:spPr>
+          <a:xfrm>
+            <a:off x="548640" y="1609344"/>
+            <a:ext cx="2596896" cy="987552"/>
+          </a:xfrm>
+          <a:prstGeom prst="rect">
+            <a:avLst/>
           </a:prstGeom>
           <a:solidFill>
             <a:srgbClr val="FFFFFF"/>
-          </a:solidFill>
-          <a:ln w="9525">
-            <a:solidFill>
-              <a:srgbClr val="1B4D69"/>
-            </a:solidFill>
-          </a:ln>
-        </p:spPr>
-        <p:txBody>
-          <a:bodyPr rtlCol="0" anchor="ctr" wrap="square" lIns="54864" tIns="0" rIns="54864" bIns="0">
-            <a:noAutofit/>
-          </a:bodyPr>
-          <a:lstStyle/>
-          <a:p>
-            <a:pPr algn="ctr" latinLnBrk="0">
-              <a:lnSpc>
-                <a:spcPct val="100000"/>
-              </a:lnSpc>
-              <a:spcBef>
-                <a:spcPts val="0"/>
-              </a:spcBef>
-              <a:spcAft>
-                <a:spcPts val="0"/>
-              </a:spcAft>
-            </a:pPr>
-            <a:r>
-              <a:rPr sz="1000" b="1">
-                <a:solidFill>
-                  <a:srgbClr val="0A2B45"/>
-                </a:solidFill>
-                <a:latin typeface="Microsoft YaHei"/>
-                <a:ea typeface="Microsoft YaHei"/>
-                <a:cs typeface="Microsoft YaHei"/>
-              </a:rPr>
-              <a:t>定并冻结任务合同</a:t>
-            </a:r>
-          </a:p>
-        </p:txBody>
-      </p:sp>
-      <p:sp>
-        <p:nvSpPr>
-          <p:cNvPr id="9" name="Rounded Rectangle 8"/>
-          <p:cNvSpPr/>
-          <p:nvPr/>
-        </p:nvSpPr>
-        <p:spPr>
-          <a:xfrm>
-            <a:off x="3204972" y="1353312"/>
-            <a:ext cx="1883664" cy="310896"/>
-          </a:xfrm>
-          <a:prstGeom prst="roundRect">
-            <a:avLst>
-              <a:gd name="adj" fmla="val 17647"/>
-            </a:avLst>
-          </a:prstGeom>
-          <a:solidFill>
-            <a:srgbClr val="FFFFFF"/>
-          </a:solidFill>
-          <a:ln w="9525">
-            <a:solidFill>
-              <a:srgbClr val="1B4D69"/>
-            </a:solidFill>
-          </a:ln>
-        </p:spPr>
-        <p:txBody>
-          <a:bodyPr rtlCol="0" anchor="ctr" wrap="square" lIns="54864" tIns="0" rIns="54864" bIns="0">
-            <a:noAutofit/>
-          </a:bodyPr>
-          <a:lstStyle/>
-          <a:p>
-            <a:pPr algn="ctr" latinLnBrk="0">
-              <a:lnSpc>
-                <a:spcPct val="100000"/>
-              </a:lnSpc>
-              <a:spcBef>
-                <a:spcPts val="0"/>
-              </a:spcBef>
-              <a:spcAft>
-                <a:spcPts val="0"/>
-              </a:spcAft>
-            </a:pPr>
-            <a:r>
-              <a:rPr sz="1000" b="1">
-                <a:solidFill>
-                  <a:srgbClr val="0A2B45"/>
-                </a:solidFill>
-                <a:latin typeface="Microsoft YaHei"/>
-                <a:ea typeface="Microsoft YaHei"/>
-                <a:cs typeface="Microsoft YaHei"/>
-              </a:rPr>
-              <a:t>协同复杂改动</a:t>
-            </a:r>
-            <a:r>
-              <a:rPr sz="850" b="0">
-                <a:solidFill>
-                  <a:srgbClr val="1B4D69"/>
-                </a:solidFill>
-                <a:latin typeface="Microsoft YaHei"/>
-                <a:ea typeface="Microsoft YaHei"/>
-                <a:cs typeface="Microsoft YaHei"/>
-              </a:rPr>
-              <a:t>　同样要过四道门</a:t>
-            </a:r>
-          </a:p>
-        </p:txBody>
-      </p:sp>
-      <p:sp>
-        <p:nvSpPr>
-          <p:cNvPr id="10" name="Rounded Rectangle 9"/>
-          <p:cNvSpPr/>
-          <p:nvPr/>
-        </p:nvSpPr>
-        <p:spPr>
-          <a:xfrm>
-            <a:off x="10058400" y="1353312"/>
-            <a:ext cx="1097280" cy="310896"/>
-          </a:xfrm>
-          <a:prstGeom prst="roundRect">
-            <a:avLst>
-              <a:gd name="adj" fmla="val 17647"/>
-            </a:avLst>
-          </a:prstGeom>
-          <a:solidFill>
-            <a:srgbClr val="FFFFFF"/>
-          </a:solidFill>
-          <a:ln w="9525">
-            <a:solidFill>
-              <a:srgbClr val="1B4D69"/>
-            </a:solidFill>
-          </a:ln>
-        </p:spPr>
-        <p:txBody>
-          <a:bodyPr rtlCol="0" anchor="ctr" wrap="square" lIns="54864" tIns="0" rIns="54864" bIns="0">
-            <a:noAutofit/>
-          </a:bodyPr>
-          <a:lstStyle/>
-          <a:p>
-            <a:pPr algn="ctr" latinLnBrk="0">
-              <a:lnSpc>
-                <a:spcPct val="100000"/>
-              </a:lnSpc>
-              <a:spcBef>
-                <a:spcPts val="0"/>
-              </a:spcBef>
-              <a:spcAft>
-                <a:spcPts val="0"/>
-              </a:spcAft>
-            </a:pPr>
-            <a:r>
-              <a:rPr sz="1000" b="1">
-                <a:solidFill>
-                  <a:srgbClr val="0A2B45"/>
-                </a:solidFill>
-                <a:latin typeface="Microsoft YaHei"/>
-                <a:ea typeface="Microsoft YaHei"/>
-                <a:cs typeface="Microsoft YaHei"/>
-              </a:rPr>
-              <a:t>验收最优版本</a:t>
-            </a:r>
-          </a:p>
-        </p:txBody>
-      </p:sp>
-      <p:sp>
-        <p:nvSpPr>
-          <p:cNvPr id="11" name="Rectangle 10"/>
-          <p:cNvSpPr/>
-          <p:nvPr/>
-        </p:nvSpPr>
-        <p:spPr>
-          <a:xfrm>
-            <a:off x="548640" y="1993392"/>
-            <a:ext cx="1709928" cy="1005840"/>
-          </a:xfrm>
-          <a:prstGeom prst="rect">
-            <a:avLst/>
-          </a:prstGeom>
-          <a:solidFill>
-            <a:srgbClr val="FFFFFF"/>
-          </a:solidFill>
-          <a:ln w="12700">
-            <a:solidFill>
-              <a:srgbClr val="7FA4BA"/>
-            </a:solidFill>
-            <a:prstDash val="dash"/>
-          </a:ln>
-        </p:spPr>
-        <p:txBody>
-          <a:bodyPr rtlCol="0" anchor="ctr"/>
-          <a:lstStyle/>
-          <a:p>
-            <a:pPr algn="ctr"/>
-          </a:p>
-        </p:txBody>
-      </p:sp>
-      <p:sp>
-        <p:nvSpPr>
-          <p:cNvPr id="12" name="TextBox 11"/>
-          <p:cNvSpPr txBox="1"/>
-          <p:nvPr/>
-        </p:nvSpPr>
-        <p:spPr>
-          <a:xfrm>
-            <a:off x="658368" y="2029968"/>
-            <a:ext cx="1563624" cy="237744"/>
-          </a:xfrm>
-          <a:prstGeom prst="rect">
-            <a:avLst/>
-          </a:prstGeom>
-          <a:noFill/>
-        </p:spPr>
-        <p:txBody>
-          <a:bodyPr wrap="square" anchor="ctr" lIns="0" tIns="0" rIns="0" bIns="0">
-            <a:noAutofit/>
-          </a:bodyPr>
-          <a:lstStyle/>
-          <a:p>
-            <a:pPr algn="l" latinLnBrk="0">
-              <a:lnSpc>
-                <a:spcPct val="100000"/>
-              </a:lnSpc>
-              <a:spcBef>
-                <a:spcPts val="0"/>
-              </a:spcBef>
-              <a:spcAft>
-                <a:spcPts val="0"/>
-              </a:spcAft>
-            </a:pPr>
-            <a:r>
-              <a:rPr sz="1100" b="1">
-                <a:solidFill>
-                  <a:srgbClr val="0A2B45"/>
-                </a:solidFill>
-                <a:latin typeface="Microsoft YaHei"/>
-                <a:ea typeface="Microsoft YaHei"/>
-                <a:cs typeface="Microsoft YaHei"/>
-              </a:rPr>
-              <a:t>任务合同</a:t>
-            </a:r>
-            <a:r>
-              <a:rPr sz="800" b="0">
-                <a:solidFill>
-                  <a:srgbClr val="40708B"/>
-                </a:solidFill>
-                <a:latin typeface="Microsoft YaHei"/>
-                <a:ea typeface="Microsoft YaHei"/>
-                <a:cs typeface="Microsoft YaHei"/>
-              </a:rPr>
-              <a:t>　冻结 · 哈希校验</a:t>
-            </a:r>
-          </a:p>
-        </p:txBody>
-      </p:sp>
-      <p:sp>
-        <p:nvSpPr>
-          <p:cNvPr id="13" name="Rounded Rectangle 12"/>
-          <p:cNvSpPr/>
-          <p:nvPr/>
-        </p:nvSpPr>
-        <p:spPr>
-          <a:xfrm>
-            <a:off x="658368" y="2304288"/>
-            <a:ext cx="1490472" cy="192024"/>
-          </a:xfrm>
-          <a:prstGeom prst="roundRect">
-            <a:avLst>
-              <a:gd name="adj" fmla="val 50000"/>
-            </a:avLst>
-          </a:prstGeom>
-          <a:solidFill>
-            <a:srgbClr val="F2F8FD"/>
           </a:solidFill>
           <a:ln w="9525">
             <a:solidFill>
@@ -31027,24 +30908,112 @@
           </a:ln>
         </p:spPr>
         <p:txBody>
-          <a:bodyPr rtlCol="0" anchor="ctr" wrap="square" lIns="36576" tIns="0" rIns="36576" bIns="0">
-            <a:noAutofit/>
-          </a:bodyPr>
-          <a:lstStyle/>
-          <a:p>
-            <a:pPr algn="ctr" latinLnBrk="0">
-              <a:lnSpc>
-                <a:spcPct val="100000"/>
-              </a:lnSpc>
-              <a:spcBef>
-                <a:spcPts val="0"/>
-              </a:spcBef>
-              <a:spcAft>
-                <a:spcPts val="0"/>
-              </a:spcAft>
-            </a:pPr>
-            <a:r>
-              <a:rPr sz="850" b="0">
+          <a:bodyPr rtlCol="0" anchor="ctr"/>
+          <a:lstStyle/>
+          <a:p>
+            <a:pPr algn="ctr"/>
+          </a:p>
+        </p:txBody>
+      </p:sp>
+      <p:sp>
+        <p:nvSpPr>
+          <p:cNvPr id="13" name="Rectangle 12"/>
+          <p:cNvSpPr/>
+          <p:nvPr/>
+        </p:nvSpPr>
+        <p:spPr>
+          <a:xfrm>
+            <a:off x="548640" y="1609344"/>
+            <a:ext cx="64008" cy="987552"/>
+          </a:xfrm>
+          <a:prstGeom prst="rect">
+            <a:avLst/>
+          </a:prstGeom>
+          <a:solidFill>
+            <a:srgbClr val="40708B"/>
+          </a:solidFill>
+          <a:ln>
+            <a:noFill/>
+          </a:ln>
+        </p:spPr>
+        <p:txBody>
+          <a:bodyPr rtlCol="0" anchor="ctr"/>
+          <a:lstStyle/>
+          <a:p>
+            <a:pPr algn="ctr"/>
+          </a:p>
+        </p:txBody>
+      </p:sp>
+      <p:sp>
+        <p:nvSpPr>
+          <p:cNvPr id="14" name="TextBox 13"/>
+          <p:cNvSpPr txBox="1"/>
+          <p:nvPr/>
+        </p:nvSpPr>
+        <p:spPr>
+          <a:xfrm>
+            <a:off x="731520" y="1655064"/>
+            <a:ext cx="2267712" cy="896112"/>
+          </a:xfrm>
+          <a:prstGeom prst="rect">
+            <a:avLst/>
+          </a:prstGeom>
+          <a:noFill/>
+        </p:spPr>
+        <p:txBody>
+          <a:bodyPr wrap="square" anchor="ctr" lIns="0" tIns="0" rIns="0" bIns="0">
+            <a:noAutofit/>
+          </a:bodyPr>
+          <a:lstStyle/>
+          <a:p>
+            <a:pPr algn="l" latinLnBrk="0">
+              <a:lnSpc>
+                <a:spcPct val="100000"/>
+              </a:lnSpc>
+              <a:spcBef>
+                <a:spcPts val="0"/>
+              </a:spcBef>
+              <a:spcAft>
+                <a:spcPts val="300"/>
+              </a:spcAft>
+            </a:pPr>
+            <a:r>
+              <a:rPr sz="1050" b="1">
+                <a:solidFill>
+                  <a:srgbClr val="0A2B45"/>
+                </a:solidFill>
+                <a:latin typeface="Microsoft YaHei"/>
+                <a:ea typeface="Microsoft YaHei"/>
+                <a:cs typeface="Microsoft YaHei"/>
+              </a:rPr>
+              <a:t>冻结契约</a:t>
+            </a:r>
+            <a:r>
+              <a:rPr sz="800" b="1">
+                <a:solidFill>
+                  <a:srgbClr val="40708B"/>
+                </a:solidFill>
+                <a:latin typeface="Consolas"/>
+                <a:ea typeface="Microsoft YaHei"/>
+                <a:cs typeface="Microsoft YaHei"/>
+              </a:rPr>
+              <a:t>　人 → Agent</a:t>
+            </a:r>
+          </a:p>
+          <a:p>
+            <a:pPr algn="l" latinLnBrk="0">
+              <a:lnSpc>
+                <a:spcPct val="100000"/>
+              </a:lnSpc>
+              <a:spcBef>
+                <a:spcPts val="0"/>
+              </a:spcBef>
+              <a:spcAft>
+                <a:spcPts val="0"/>
+              </a:spcAft>
+            </a:pPr>
+            <a:r>
+              <a:rPr sz="900" b="0">
                 <a:solidFill>
                   <a:srgbClr val="1B4D69"/>
                 </a:solidFill>
@@ -31052,29 +31021,75 @@
                 <a:ea typeface="Microsoft YaHei"/>
                 <a:cs typeface="Microsoft YaHei"/>
               </a:rPr>
-              <a:t>模型 · 精度 · 负载</a:t>
-            </a:r>
-          </a:p>
-        </p:txBody>
-      </p:sp>
-      <p:sp>
-        <p:nvSpPr>
-          <p:cNvPr id="14" name="Rounded Rectangle 13"/>
+              <a:t>·　模型 · 精度 · 负载</a:t>
+            </a:r>
+          </a:p>
+          <a:p>
+            <a:pPr algn="l" latinLnBrk="0">
+              <a:lnSpc>
+                <a:spcPct val="100000"/>
+              </a:lnSpc>
+              <a:spcBef>
+                <a:spcPts val="0"/>
+              </a:spcBef>
+              <a:spcAft>
+                <a:spcPts val="0"/>
+              </a:spcAft>
+            </a:pPr>
+            <a:r>
+              <a:rPr sz="900" b="0">
+                <a:solidFill>
+                  <a:srgbClr val="1B4D69"/>
+                </a:solidFill>
+                <a:latin typeface="Microsoft YaHei"/>
+                <a:ea typeface="Microsoft YaHei"/>
+                <a:cs typeface="Microsoft YaHei"/>
+              </a:rPr>
+              <a:t>·　门限 · 预算</a:t>
+            </a:r>
+          </a:p>
+          <a:p>
+            <a:pPr algn="l" latinLnBrk="0">
+              <a:lnSpc>
+                <a:spcPct val="100000"/>
+              </a:lnSpc>
+              <a:spcBef>
+                <a:spcPts val="0"/>
+              </a:spcBef>
+              <a:spcAft>
+                <a:spcPts val="0"/>
+              </a:spcAft>
+            </a:pPr>
+            <a:r>
+              <a:rPr sz="900" b="0">
+                <a:solidFill>
+                  <a:srgbClr val="1B4D69"/>
+                </a:solidFill>
+                <a:latin typeface="Microsoft YaHei"/>
+                <a:ea typeface="Microsoft YaHei"/>
+                <a:cs typeface="Microsoft YaHei"/>
+              </a:rPr>
+              <a:t>·　调优知识库</a:t>
+            </a:r>
+          </a:p>
+        </p:txBody>
+      </p:sp>
+      <p:sp>
+        <p:nvSpPr>
+          <p:cNvPr id="15" name="Rectangle 14"/>
           <p:cNvSpPr/>
           <p:nvPr/>
         </p:nvSpPr>
         <p:spPr>
           <a:xfrm>
-            <a:off x="658368" y="2532888"/>
-            <a:ext cx="1490472" cy="192024"/>
-          </a:xfrm>
-          <a:prstGeom prst="roundRect">
-            <a:avLst>
-              <a:gd name="adj" fmla="val 50000"/>
-            </a:avLst>
+            <a:off x="548640" y="2962656"/>
+            <a:ext cx="2596896" cy="694944"/>
+          </a:xfrm>
+          <a:prstGeom prst="rect">
+            <a:avLst/>
           </a:prstGeom>
           <a:solidFill>
-            <a:srgbClr val="F2F8FD"/>
+            <a:srgbClr val="FFFFFF"/>
           </a:solidFill>
           <a:ln w="9525">
             <a:solidFill>
@@ -31083,24 +31098,112 @@
           </a:ln>
         </p:spPr>
         <p:txBody>
-          <a:bodyPr rtlCol="0" anchor="ctr" wrap="square" lIns="36576" tIns="0" rIns="36576" bIns="0">
-            <a:noAutofit/>
-          </a:bodyPr>
-          <a:lstStyle/>
-          <a:p>
-            <a:pPr algn="ctr" latinLnBrk="0">
-              <a:lnSpc>
-                <a:spcPct val="100000"/>
-              </a:lnSpc>
-              <a:spcBef>
-                <a:spcPts val="0"/>
-              </a:spcBef>
-              <a:spcAft>
-                <a:spcPts val="0"/>
-              </a:spcAft>
-            </a:pPr>
-            <a:r>
-              <a:rPr sz="850" b="0">
+          <a:bodyPr rtlCol="0" anchor="ctr"/>
+          <a:lstStyle/>
+          <a:p>
+            <a:pPr algn="ctr"/>
+          </a:p>
+        </p:txBody>
+      </p:sp>
+      <p:sp>
+        <p:nvSpPr>
+          <p:cNvPr id="16" name="Rectangle 15"/>
+          <p:cNvSpPr/>
+          <p:nvPr/>
+        </p:nvSpPr>
+        <p:spPr>
+          <a:xfrm>
+            <a:off x="548640" y="2962656"/>
+            <a:ext cx="64008" cy="694944"/>
+          </a:xfrm>
+          <a:prstGeom prst="rect">
+            <a:avLst/>
+          </a:prstGeom>
+          <a:solidFill>
+            <a:srgbClr val="D2690C"/>
+          </a:solidFill>
+          <a:ln>
+            <a:noFill/>
+          </a:ln>
+        </p:spPr>
+        <p:txBody>
+          <a:bodyPr rtlCol="0" anchor="ctr"/>
+          <a:lstStyle/>
+          <a:p>
+            <a:pPr algn="ctr"/>
+          </a:p>
+        </p:txBody>
+      </p:sp>
+      <p:sp>
+        <p:nvSpPr>
+          <p:cNvPr id="17" name="TextBox 16"/>
+          <p:cNvSpPr txBox="1"/>
+          <p:nvPr/>
+        </p:nvSpPr>
+        <p:spPr>
+          <a:xfrm>
+            <a:off x="731520" y="3008376"/>
+            <a:ext cx="2267712" cy="603504"/>
+          </a:xfrm>
+          <a:prstGeom prst="rect">
+            <a:avLst/>
+          </a:prstGeom>
+          <a:noFill/>
+        </p:spPr>
+        <p:txBody>
+          <a:bodyPr wrap="square" anchor="ctr" lIns="0" tIns="0" rIns="0" bIns="0">
+            <a:noAutofit/>
+          </a:bodyPr>
+          <a:lstStyle/>
+          <a:p>
+            <a:pPr algn="l" latinLnBrk="0">
+              <a:lnSpc>
+                <a:spcPct val="100000"/>
+              </a:lnSpc>
+              <a:spcBef>
+                <a:spcPts val="0"/>
+              </a:spcBef>
+              <a:spcAft>
+                <a:spcPts val="300"/>
+              </a:spcAft>
+            </a:pPr>
+            <a:r>
+              <a:rPr sz="1050" b="1">
+                <a:solidFill>
+                  <a:srgbClr val="0A2B45"/>
+                </a:solidFill>
+                <a:latin typeface="Microsoft YaHei"/>
+                <a:ea typeface="Microsoft YaHei"/>
+                <a:cs typeface="Microsoft YaHei"/>
+              </a:rPr>
+              <a:t>协同补丁</a:t>
+            </a:r>
+            <a:r>
+              <a:rPr sz="800" b="1">
+                <a:solidFill>
+                  <a:srgbClr val="D2690C"/>
+                </a:solidFill>
+                <a:latin typeface="Consolas"/>
+                <a:ea typeface="Microsoft YaHei"/>
+                <a:cs typeface="Microsoft YaHei"/>
+              </a:rPr>
+              <a:t>　人 ⇄ 规划器</a:t>
+            </a:r>
+          </a:p>
+          <a:p>
+            <a:pPr algn="l" latinLnBrk="0">
+              <a:lnSpc>
+                <a:spcPct val="100000"/>
+              </a:lnSpc>
+              <a:spcBef>
+                <a:spcPts val="0"/>
+              </a:spcBef>
+              <a:spcAft>
+                <a:spcPts val="0"/>
+              </a:spcAft>
+            </a:pPr>
+            <a:r>
+              <a:rPr sz="900" b="0">
                 <a:solidFill>
                   <a:srgbClr val="1B4D69"/>
                 </a:solidFill>
@@ -31108,29 +31211,51 @@
                 <a:ea typeface="Microsoft YaHei"/>
                 <a:cs typeface="Microsoft YaHei"/>
               </a:rPr>
-              <a:t>门限 · 预算</a:t>
-            </a:r>
-          </a:p>
-        </p:txBody>
-      </p:sp>
-      <p:sp>
-        <p:nvSpPr>
-          <p:cNvPr id="15" name="Rounded Rectangle 14"/>
+              <a:t>·　复杂改动由人主导</a:t>
+            </a:r>
+          </a:p>
+          <a:p>
+            <a:pPr algn="l" latinLnBrk="0">
+              <a:lnSpc>
+                <a:spcPct val="100000"/>
+              </a:lnSpc>
+              <a:spcBef>
+                <a:spcPts val="0"/>
+              </a:spcBef>
+              <a:spcAft>
+                <a:spcPts val="0"/>
+              </a:spcAft>
+            </a:pPr>
+            <a:r>
+              <a:rPr sz="900" b="0">
+                <a:solidFill>
+                  <a:srgbClr val="1B4D69"/>
+                </a:solidFill>
+                <a:latin typeface="Microsoft YaHei"/>
+                <a:ea typeface="Microsoft YaHei"/>
+                <a:cs typeface="Microsoft YaHei"/>
+              </a:rPr>
+              <a:t>·　同样要过四道门禁</a:t>
+            </a:r>
+          </a:p>
+        </p:txBody>
+      </p:sp>
+      <p:sp>
+        <p:nvSpPr>
+          <p:cNvPr id="18" name="Rectangle 17"/>
           <p:cNvSpPr/>
           <p:nvPr/>
         </p:nvSpPr>
         <p:spPr>
           <a:xfrm>
-            <a:off x="658368" y="2761488"/>
-            <a:ext cx="1490472" cy="192024"/>
-          </a:xfrm>
-          <a:prstGeom prst="roundRect">
-            <a:avLst>
-              <a:gd name="adj" fmla="val 50000"/>
-            </a:avLst>
+            <a:off x="548640" y="3986784"/>
+            <a:ext cx="2596896" cy="987552"/>
+          </a:xfrm>
+          <a:prstGeom prst="rect">
+            <a:avLst/>
           </a:prstGeom>
           <a:solidFill>
-            <a:srgbClr val="F2F8FD"/>
+            <a:srgbClr val="FFFFFF"/>
           </a:solidFill>
           <a:ln w="9525">
             <a:solidFill>
@@ -31139,24 +31264,112 @@
           </a:ln>
         </p:spPr>
         <p:txBody>
-          <a:bodyPr rtlCol="0" anchor="ctr" wrap="square" lIns="36576" tIns="0" rIns="36576" bIns="0">
-            <a:noAutofit/>
-          </a:bodyPr>
-          <a:lstStyle/>
-          <a:p>
-            <a:pPr algn="ctr" latinLnBrk="0">
-              <a:lnSpc>
-                <a:spcPct val="100000"/>
-              </a:lnSpc>
-              <a:spcBef>
-                <a:spcPts val="0"/>
-              </a:spcBef>
-              <a:spcAft>
-                <a:spcPts val="0"/>
-              </a:spcAft>
-            </a:pPr>
-            <a:r>
-              <a:rPr sz="850" b="0">
+          <a:bodyPr rtlCol="0" anchor="ctr"/>
+          <a:lstStyle/>
+          <a:p>
+            <a:pPr algn="ctr"/>
+          </a:p>
+        </p:txBody>
+      </p:sp>
+      <p:sp>
+        <p:nvSpPr>
+          <p:cNvPr id="19" name="Rectangle 18"/>
+          <p:cNvSpPr/>
+          <p:nvPr/>
+        </p:nvSpPr>
+        <p:spPr>
+          <a:xfrm>
+            <a:off x="548640" y="3986784"/>
+            <a:ext cx="64008" cy="987552"/>
+          </a:xfrm>
+          <a:prstGeom prst="rect">
+            <a:avLst/>
+          </a:prstGeom>
+          <a:solidFill>
+            <a:srgbClr val="40708B"/>
+          </a:solidFill>
+          <a:ln>
+            <a:noFill/>
+          </a:ln>
+        </p:spPr>
+        <p:txBody>
+          <a:bodyPr rtlCol="0" anchor="ctr"/>
+          <a:lstStyle/>
+          <a:p>
+            <a:pPr algn="ctr"/>
+          </a:p>
+        </p:txBody>
+      </p:sp>
+      <p:sp>
+        <p:nvSpPr>
+          <p:cNvPr id="20" name="TextBox 19"/>
+          <p:cNvSpPr txBox="1"/>
+          <p:nvPr/>
+        </p:nvSpPr>
+        <p:spPr>
+          <a:xfrm>
+            <a:off x="731520" y="4032504"/>
+            <a:ext cx="2267712" cy="896112"/>
+          </a:xfrm>
+          <a:prstGeom prst="rect">
+            <a:avLst/>
+          </a:prstGeom>
+          <a:noFill/>
+        </p:spPr>
+        <p:txBody>
+          <a:bodyPr wrap="square" anchor="ctr" lIns="0" tIns="0" rIns="0" bIns="0">
+            <a:noAutofit/>
+          </a:bodyPr>
+          <a:lstStyle/>
+          <a:p>
+            <a:pPr algn="l" latinLnBrk="0">
+              <a:lnSpc>
+                <a:spcPct val="100000"/>
+              </a:lnSpc>
+              <a:spcBef>
+                <a:spcPts val="0"/>
+              </a:spcBef>
+              <a:spcAft>
+                <a:spcPts val="300"/>
+              </a:spcAft>
+            </a:pPr>
+            <a:r>
+              <a:rPr sz="1050" b="1">
+                <a:solidFill>
+                  <a:srgbClr val="0A2B45"/>
+                </a:solidFill>
+                <a:latin typeface="Microsoft YaHei"/>
+                <a:ea typeface="Microsoft YaHei"/>
+                <a:cs typeface="Microsoft YaHei"/>
+              </a:rPr>
+              <a:t>判决与证据黑板</a:t>
+            </a:r>
+            <a:r>
+              <a:rPr sz="800" b="1">
+                <a:solidFill>
+                  <a:srgbClr val="40708B"/>
+                </a:solidFill>
+                <a:latin typeface="Consolas"/>
+                <a:ea typeface="Microsoft YaHei"/>
+                <a:cs typeface="Microsoft YaHei"/>
+              </a:rPr>
+              <a:t>　Verdict</a:t>
+            </a:r>
+          </a:p>
+          <a:p>
+            <a:pPr algn="l" latinLnBrk="0">
+              <a:lnSpc>
+                <a:spcPct val="100000"/>
+              </a:lnSpc>
+              <a:spcBef>
+                <a:spcPts val="0"/>
+              </a:spcBef>
+              <a:spcAft>
+                <a:spcPts val="0"/>
+              </a:spcAft>
+            </a:pPr>
+            <a:r>
+              <a:rPr sz="900" b="0">
                 <a:solidFill>
                   <a:srgbClr val="1B4D69"/>
                 </a:solidFill>
@@ -31164,532 +31377,301 @@
                 <a:ea typeface="Microsoft YaHei"/>
                 <a:cs typeface="Microsoft YaHei"/>
               </a:rPr>
-              <a:t>探针 · MMStar60 基准</a:t>
-            </a:r>
-          </a:p>
-        </p:txBody>
-      </p:sp>
-      <p:sp>
-        <p:nvSpPr>
-          <p:cNvPr id="16" name="Rounded Rectangle 15"/>
+              <a:t>·　门禁判决与被拒原因</a:t>
+            </a:r>
+          </a:p>
+          <a:p>
+            <a:pPr algn="l" latinLnBrk="0">
+              <a:lnSpc>
+                <a:spcPct val="100000"/>
+              </a:lnSpc>
+              <a:spcBef>
+                <a:spcPts val="0"/>
+              </a:spcBef>
+              <a:spcAft>
+                <a:spcPts val="0"/>
+              </a:spcAft>
+            </a:pPr>
+            <a:r>
+              <a:rPr sz="900" b="0">
+                <a:solidFill>
+                  <a:srgbClr val="1B4D69"/>
+                </a:solidFill>
+                <a:latin typeface="Microsoft YaHei"/>
+                <a:ea typeface="Microsoft YaHei"/>
+                <a:cs typeface="Microsoft YaHei"/>
+              </a:rPr>
+              <a:t>·　数值与质量偏差</a:t>
+            </a:r>
+          </a:p>
+          <a:p>
+            <a:pPr algn="l" latinLnBrk="0">
+              <a:lnSpc>
+                <a:spcPct val="100000"/>
+              </a:lnSpc>
+              <a:spcBef>
+                <a:spcPts val="0"/>
+              </a:spcBef>
+              <a:spcAft>
+                <a:spcPts val="0"/>
+              </a:spcAft>
+            </a:pPr>
+            <a:r>
+              <a:rPr sz="900" b="0">
+                <a:solidFill>
+                  <a:srgbClr val="1B4D69"/>
+                </a:solidFill>
+                <a:latin typeface="Microsoft YaHei"/>
+                <a:ea typeface="Microsoft YaHei"/>
+                <a:cs typeface="Microsoft YaHei"/>
+              </a:rPr>
+              <a:t>·　实测与下界的差距</a:t>
+            </a:r>
+          </a:p>
+        </p:txBody>
+      </p:sp>
+      <p:sp>
+        <p:nvSpPr>
+          <p:cNvPr id="21" name="Rectangle 20"/>
           <p:cNvSpPr/>
           <p:nvPr/>
         </p:nvSpPr>
         <p:spPr>
           <a:xfrm>
-            <a:off x="2514600" y="1993392"/>
-            <a:ext cx="5989320" cy="1005840"/>
-          </a:xfrm>
-          <a:prstGeom prst="roundRect">
-            <a:avLst>
-              <a:gd name="adj" fmla="val 7272"/>
-            </a:avLst>
-          </a:prstGeom>
-          <a:solidFill>
-            <a:srgbClr val="FBE6D4"/>
-          </a:solidFill>
-          <a:ln w="15875">
-            <a:solidFill>
-              <a:srgbClr val="D2690C"/>
-            </a:solidFill>
-          </a:ln>
-        </p:spPr>
-        <p:txBody>
-          <a:bodyPr rtlCol="0" anchor="ctr"/>
-          <a:lstStyle/>
-          <a:p>
-            <a:pPr algn="ctr"/>
-          </a:p>
-        </p:txBody>
-      </p:sp>
-      <p:sp>
-        <p:nvSpPr>
-          <p:cNvPr id="17" name="TextBox 16"/>
-          <p:cNvSpPr txBox="1"/>
-          <p:nvPr/>
-        </p:nvSpPr>
-        <p:spPr>
-          <a:xfrm>
-            <a:off x="2642616" y="2020824"/>
-            <a:ext cx="5733288" cy="237744"/>
-          </a:xfrm>
-          <a:prstGeom prst="rect">
-            <a:avLst/>
-          </a:prstGeom>
-          <a:noFill/>
-        </p:spPr>
-        <p:txBody>
-          <a:bodyPr wrap="square" anchor="ctr" lIns="0" tIns="0" rIns="0" bIns="0">
-            <a:noAutofit/>
-          </a:bodyPr>
-          <a:lstStyle/>
-          <a:p>
-            <a:pPr algn="l" latinLnBrk="0">
-              <a:lnSpc>
-                <a:spcPct val="100000"/>
-              </a:lnSpc>
-              <a:spcBef>
-                <a:spcPts val="0"/>
-              </a:spcBef>
-              <a:spcAft>
-                <a:spcPts val="0"/>
-              </a:spcAft>
-            </a:pPr>
-            <a:r>
-              <a:rPr sz="1200" b="1">
-                <a:solidFill>
-                  <a:srgbClr val="C2570A"/>
-                </a:solidFill>
-                <a:latin typeface="Microsoft YaHei"/>
-                <a:ea typeface="Microsoft YaHei"/>
-                <a:cs typeface="Microsoft YaHei"/>
-              </a:rPr>
-              <a:t>规划器</a:t>
-            </a:r>
-            <a:r>
-              <a:rPr sz="850" b="0">
-                <a:solidFill>
-                  <a:srgbClr val="1B4D69"/>
-                </a:solidFill>
-                <a:latin typeface="Microsoft YaHei"/>
-                <a:ea typeface="Microsoft YaHei"/>
-                <a:cs typeface="Microsoft YaHei"/>
-              </a:rPr>
-              <a:t>　外部 Agent · 经 URL 接入，可长跑 · 全系统唯一用大模型</a:t>
-            </a:r>
-          </a:p>
-        </p:txBody>
-      </p:sp>
-      <p:sp>
-        <p:nvSpPr>
-          <p:cNvPr id="18" name="Rounded Rectangle 17"/>
-          <p:cNvSpPr/>
-          <p:nvPr/>
-        </p:nvSpPr>
-        <p:spPr>
-          <a:xfrm>
-            <a:off x="2624328" y="2295144"/>
-            <a:ext cx="3044952" cy="310896"/>
-          </a:xfrm>
-          <a:prstGeom prst="roundRect">
-            <a:avLst>
-              <a:gd name="adj" fmla="val 17647"/>
-            </a:avLst>
+            <a:off x="8705088" y="1609344"/>
+            <a:ext cx="2937967" cy="1060704"/>
+          </a:xfrm>
+          <a:prstGeom prst="rect">
+            <a:avLst/>
           </a:prstGeom>
           <a:solidFill>
             <a:srgbClr val="FFFFFF"/>
           </a:solidFill>
           <a:ln w="9525">
             <a:solidFill>
-              <a:srgbClr val="D2690C"/>
+              <a:srgbClr val="CFE3F0"/>
             </a:solidFill>
           </a:ln>
         </p:spPr>
         <p:txBody>
-          <a:bodyPr rtlCol="0" anchor="ctr" wrap="square" lIns="329184" tIns="0" rIns="54864" bIns="0">
-            <a:noAutofit/>
-          </a:bodyPr>
-          <a:lstStyle/>
-          <a:p>
-            <a:pPr algn="ctr" latinLnBrk="0">
-              <a:lnSpc>
-                <a:spcPct val="100000"/>
-              </a:lnSpc>
-              <a:spcBef>
-                <a:spcPts val="0"/>
-              </a:spcBef>
-              <a:spcAft>
-                <a:spcPts val="0"/>
-              </a:spcAft>
-            </a:pPr>
-            <a:r>
-              <a:rPr sz="1000" b="1">
-                <a:solidFill>
-                  <a:srgbClr val="0A2B45"/>
-                </a:solidFill>
-                <a:latin typeface="Microsoft YaHei"/>
-                <a:ea typeface="Microsoft YaHei"/>
-                <a:cs typeface="Microsoft YaHei"/>
-              </a:rPr>
-              <a:t>规划 Agent</a:t>
-            </a:r>
-            <a:r>
-              <a:rPr sz="850" b="0">
-                <a:solidFill>
-                  <a:srgbClr val="1B4D69"/>
-                </a:solidFill>
-                <a:latin typeface="Microsoft YaHei"/>
-                <a:ea typeface="Microsoft YaHei"/>
-                <a:cs typeface="Microsoft YaHei"/>
-              </a:rPr>
-              <a:t>　读源码与证据，提出假设与补丁</a:t>
-            </a:r>
-          </a:p>
-        </p:txBody>
-      </p:sp>
-      <p:sp>
-        <p:nvSpPr>
-          <p:cNvPr id="19" name="Oval 18"/>
+          <a:bodyPr rtlCol="0" anchor="ctr"/>
+          <a:lstStyle/>
+          <a:p>
+            <a:pPr algn="ctr"/>
+          </a:p>
+        </p:txBody>
+      </p:sp>
+      <p:sp>
+        <p:nvSpPr>
+          <p:cNvPr id="22" name="Rectangle 21"/>
           <p:cNvSpPr/>
           <p:nvPr/>
         </p:nvSpPr>
         <p:spPr>
           <a:xfrm>
-            <a:off x="2697480" y="2340864"/>
-            <a:ext cx="219456" cy="219456"/>
-          </a:xfrm>
-          <a:prstGeom prst="ellipse">
+            <a:off x="8705088" y="1609344"/>
+            <a:ext cx="64008" cy="1060704"/>
+          </a:xfrm>
+          <a:prstGeom prst="rect">
             <a:avLst/>
           </a:prstGeom>
           <a:solidFill>
-            <a:srgbClr val="D2690C"/>
+            <a:srgbClr val="0F62CE"/>
           </a:solidFill>
           <a:ln>
             <a:noFill/>
           </a:ln>
         </p:spPr>
         <p:txBody>
-          <a:bodyPr rtlCol="0" anchor="ctr" wrap="square" lIns="0" tIns="0" rIns="0" bIns="0">
-            <a:noAutofit/>
-          </a:bodyPr>
-          <a:lstStyle/>
-          <a:p>
-            <a:pPr algn="ctr" latinLnBrk="0">
-              <a:lnSpc>
-                <a:spcPct val="100000"/>
-              </a:lnSpc>
-              <a:spcBef>
-                <a:spcPts val="0"/>
-              </a:spcBef>
-              <a:spcAft>
-                <a:spcPts val="0"/>
-              </a:spcAft>
-            </a:pPr>
-            <a:r>
-              <a:rPr sz="900" b="1">
-                <a:solidFill>
-                  <a:srgbClr val="FFFFFF"/>
-                </a:solidFill>
-                <a:latin typeface="Microsoft YaHei"/>
-                <a:ea typeface="Microsoft YaHei"/>
-                <a:cs typeface="Microsoft YaHei"/>
-              </a:rPr>
-              <a:t>4</a:t>
-            </a:r>
-          </a:p>
-        </p:txBody>
-      </p:sp>
-      <p:sp>
-        <p:nvSpPr>
-          <p:cNvPr id="20" name="Rounded Rectangle 19"/>
+          <a:bodyPr rtlCol="0" anchor="ctr"/>
+          <a:lstStyle/>
+          <a:p>
+            <a:pPr algn="ctr"/>
+          </a:p>
+        </p:txBody>
+      </p:sp>
+      <p:sp>
+        <p:nvSpPr>
+          <p:cNvPr id="23" name="TextBox 22"/>
+          <p:cNvSpPr txBox="1"/>
+          <p:nvPr/>
+        </p:nvSpPr>
+        <p:spPr>
+          <a:xfrm>
+            <a:off x="8887967" y="1655064"/>
+            <a:ext cx="2608783" cy="969263"/>
+          </a:xfrm>
+          <a:prstGeom prst="rect">
+            <a:avLst/>
+          </a:prstGeom>
+          <a:noFill/>
+        </p:spPr>
+        <p:txBody>
+          <a:bodyPr wrap="square" anchor="ctr" lIns="0" tIns="0" rIns="0" bIns="0">
+            <a:noAutofit/>
+          </a:bodyPr>
+          <a:lstStyle/>
+          <a:p>
+            <a:pPr algn="l" latinLnBrk="0">
+              <a:lnSpc>
+                <a:spcPct val="100000"/>
+              </a:lnSpc>
+              <a:spcBef>
+                <a:spcPts val="0"/>
+              </a:spcBef>
+              <a:spcAft>
+                <a:spcPts val="300"/>
+              </a:spcAft>
+            </a:pPr>
+            <a:r>
+              <a:rPr sz="1050" b="1">
+                <a:solidFill>
+                  <a:srgbClr val="0A2B45"/>
+                </a:solidFill>
+                <a:latin typeface="Microsoft YaHei"/>
+                <a:ea typeface="Microsoft YaHei"/>
+                <a:cs typeface="Microsoft YaHei"/>
+              </a:rPr>
+              <a:t>源码与冻结证据</a:t>
+            </a:r>
+            <a:r>
+              <a:rPr sz="800" b="1">
+                <a:solidFill>
+                  <a:srgbClr val="0F62CE"/>
+                </a:solidFill>
+                <a:latin typeface="Consolas"/>
+                <a:ea typeface="Microsoft YaHei"/>
+                <a:cs typeface="Microsoft YaHei"/>
+              </a:rPr>
+              <a:t>　Source &amp; Evidence</a:t>
+            </a:r>
+          </a:p>
+          <a:p>
+            <a:pPr algn="l" latinLnBrk="0">
+              <a:lnSpc>
+                <a:spcPct val="100000"/>
+              </a:lnSpc>
+              <a:spcBef>
+                <a:spcPts val="0"/>
+              </a:spcBef>
+              <a:spcAft>
+                <a:spcPts val="0"/>
+              </a:spcAft>
+            </a:pPr>
+            <a:r>
+              <a:rPr sz="900" b="0">
+                <a:solidFill>
+                  <a:srgbClr val="1B4D69"/>
+                </a:solidFill>
+                <a:latin typeface="Microsoft YaHei"/>
+                <a:ea typeface="Microsoft YaHei"/>
+                <a:cs typeface="Microsoft YaHei"/>
+              </a:rPr>
+              <a:t>·　原仓库只读</a:t>
+            </a:r>
+          </a:p>
+          <a:p>
+            <a:pPr algn="l" latinLnBrk="0">
+              <a:lnSpc>
+                <a:spcPct val="100000"/>
+              </a:lnSpc>
+              <a:spcBef>
+                <a:spcPts val="0"/>
+              </a:spcBef>
+              <a:spcAft>
+                <a:spcPts val="0"/>
+              </a:spcAft>
+            </a:pPr>
+            <a:r>
+              <a:rPr sz="900" b="0">
+                <a:solidFill>
+                  <a:srgbClr val="1B4D69"/>
+                </a:solidFill>
+                <a:latin typeface="Microsoft YaHei"/>
+                <a:ea typeface="Microsoft YaHei"/>
+                <a:cs typeface="Microsoft YaHei"/>
+              </a:rPr>
+              <a:t>·　探针按需补测</a:t>
+            </a:r>
+          </a:p>
+          <a:p>
+            <a:pPr algn="l" latinLnBrk="0">
+              <a:lnSpc>
+                <a:spcPct val="100000"/>
+              </a:lnSpc>
+              <a:spcBef>
+                <a:spcPts val="0"/>
+              </a:spcBef>
+              <a:spcAft>
+                <a:spcPts val="0"/>
+              </a:spcAft>
+            </a:pPr>
+            <a:r>
+              <a:rPr sz="900" b="0">
+                <a:solidFill>
+                  <a:srgbClr val="1B4D69"/>
+                </a:solidFill>
+                <a:latin typeface="Microsoft YaHei"/>
+                <a:ea typeface="Microsoft YaHei"/>
+                <a:cs typeface="Microsoft YaHei"/>
+              </a:rPr>
+              <a:t>·　全程留痕落盘</a:t>
+            </a:r>
+          </a:p>
+          <a:p>
+            <a:pPr algn="l" latinLnBrk="0">
+              <a:lnSpc>
+                <a:spcPct val="100000"/>
+              </a:lnSpc>
+              <a:spcBef>
+                <a:spcPts val="0"/>
+              </a:spcBef>
+              <a:spcAft>
+                <a:spcPts val="0"/>
+              </a:spcAft>
+            </a:pPr>
+            <a:r>
+              <a:rPr sz="900" b="0">
+                <a:solidFill>
+                  <a:srgbClr val="1B4D69"/>
+                </a:solidFill>
+                <a:latin typeface="Microsoft YaHei"/>
+                <a:ea typeface="Microsoft YaHei"/>
+                <a:cs typeface="Microsoft YaHei"/>
+              </a:rPr>
+              <a:t>·　冻结快照 + SHA</a:t>
+            </a:r>
+          </a:p>
+        </p:txBody>
+      </p:sp>
+      <p:sp>
+        <p:nvSpPr>
+          <p:cNvPr id="24" name="Rectangle 23"/>
           <p:cNvSpPr/>
           <p:nvPr/>
         </p:nvSpPr>
         <p:spPr>
           <a:xfrm>
-            <a:off x="5760720" y="2295144"/>
-            <a:ext cx="2633472" cy="310896"/>
-          </a:xfrm>
-          <a:prstGeom prst="roundRect">
-            <a:avLst>
-              <a:gd name="adj" fmla="val 17647"/>
-            </a:avLst>
+            <a:off x="8705088" y="3602736"/>
+            <a:ext cx="2937967" cy="1371600"/>
+          </a:xfrm>
+          <a:prstGeom prst="rect">
+            <a:avLst/>
           </a:prstGeom>
           <a:solidFill>
             <a:srgbClr val="FFFFFF"/>
           </a:solidFill>
           <a:ln w="9525">
             <a:solidFill>
-              <a:srgbClr val="D2690C"/>
+              <a:srgbClr val="CFE3F0"/>
             </a:solidFill>
           </a:ln>
         </p:spPr>
         <p:txBody>
-          <a:bodyPr rtlCol="0" anchor="ctr" wrap="square" lIns="54864" tIns="0" rIns="54864" bIns="0">
-            <a:noAutofit/>
-          </a:bodyPr>
-          <a:lstStyle/>
-          <a:p>
-            <a:pPr algn="ctr" latinLnBrk="0">
-              <a:lnSpc>
-                <a:spcPct val="100000"/>
-              </a:lnSpc>
-              <a:spcBef>
-                <a:spcPts val="0"/>
-              </a:spcBef>
-              <a:spcAft>
-                <a:spcPts val="0"/>
-              </a:spcAft>
-            </a:pPr>
-            <a:r>
-              <a:rPr sz="1000" b="1">
-                <a:solidFill>
-                  <a:srgbClr val="0A2B45"/>
-                </a:solidFill>
-                <a:latin typeface="Microsoft YaHei"/>
-                <a:ea typeface="Microsoft YaHei"/>
-                <a:cs typeface="Microsoft YaHei"/>
-              </a:rPr>
-              <a:t>skills 库</a:t>
-            </a:r>
-            <a:r>
-              <a:rPr sz="850" b="0">
-                <a:solidFill>
-                  <a:srgbClr val="1B4D69"/>
-                </a:solidFill>
-                <a:latin typeface="Microsoft YaHei"/>
-                <a:ea typeface="Microsoft YaHei"/>
-                <a:cs typeface="Microsoft YaHei"/>
-              </a:rPr>
-              <a:t>　按需检索，每轮 ≤ 2 份</a:t>
-            </a:r>
-          </a:p>
-        </p:txBody>
-      </p:sp>
-      <p:sp>
-        <p:nvSpPr>
-          <p:cNvPr id="21" name="Rounded Rectangle 20"/>
-          <p:cNvSpPr/>
-          <p:nvPr/>
-        </p:nvSpPr>
-        <p:spPr>
-          <a:xfrm>
-            <a:off x="2624328" y="2660904"/>
-            <a:ext cx="4325112" cy="274320"/>
-          </a:xfrm>
-          <a:prstGeom prst="roundRect">
-            <a:avLst>
-              <a:gd name="adj" fmla="val 20000"/>
-            </a:avLst>
-          </a:prstGeom>
-          <a:solidFill>
-            <a:srgbClr val="FFFFFF"/>
-          </a:solidFill>
-          <a:ln w="9525">
-            <a:solidFill>
-              <a:srgbClr val="D2690C"/>
-            </a:solidFill>
-          </a:ln>
-        </p:spPr>
-        <p:txBody>
-          <a:bodyPr rtlCol="0" anchor="ctr" wrap="square" lIns="54864" tIns="0" rIns="54864" bIns="0">
-            <a:noAutofit/>
-          </a:bodyPr>
-          <a:lstStyle/>
-          <a:p>
-            <a:pPr algn="ctr" latinLnBrk="0">
-              <a:lnSpc>
-                <a:spcPct val="100000"/>
-              </a:lnSpc>
-              <a:spcBef>
-                <a:spcPts val="0"/>
-              </a:spcBef>
-              <a:spcAft>
-                <a:spcPts val="0"/>
-              </a:spcAft>
-            </a:pPr>
-            <a:r>
-              <a:rPr sz="1000" b="1">
-                <a:solidFill>
-                  <a:srgbClr val="0A2B45"/>
-                </a:solidFill>
-                <a:latin typeface="Microsoft YaHei"/>
-                <a:ea typeface="Microsoft YaHei"/>
-                <a:cs typeface="Microsoft YaHei"/>
-              </a:rPr>
-              <a:t>信箱</a:t>
-            </a:r>
-            <a:r>
-              <a:rPr sz="850" b="0">
-                <a:solidFill>
-                  <a:srgbClr val="1B4D69"/>
-                </a:solidFill>
-                <a:latin typeface="Microsoft YaHei"/>
-                <a:ea typeface="Microsoft YaHei"/>
-                <a:cs typeface="Microsoft YaHei"/>
-              </a:rPr>
-              <a:t>　请求与回复逐条校验 ID · SHA · 格式，全部落盘</a:t>
-            </a:r>
-          </a:p>
-        </p:txBody>
-      </p:sp>
-      <p:sp>
-        <p:nvSpPr>
-          <p:cNvPr id="22" name="Rounded Rectangle 21"/>
-          <p:cNvSpPr/>
-          <p:nvPr/>
-        </p:nvSpPr>
-        <p:spPr>
-          <a:xfrm>
-            <a:off x="7040880" y="2660904"/>
-            <a:ext cx="1353312" cy="274320"/>
-          </a:xfrm>
-          <a:prstGeom prst="roundRect">
-            <a:avLst>
-              <a:gd name="adj" fmla="val 20000"/>
-            </a:avLst>
-          </a:prstGeom>
-          <a:solidFill>
-            <a:srgbClr val="FFFFFF"/>
-          </a:solidFill>
-          <a:ln w="9525">
-            <a:solidFill>
-              <a:srgbClr val="D2690C"/>
-            </a:solidFill>
-          </a:ln>
-        </p:spPr>
-        <p:txBody>
-          <a:bodyPr rtlCol="0" anchor="ctr" wrap="square" lIns="54864" tIns="0" rIns="54864" bIns="0">
-            <a:noAutofit/>
-          </a:bodyPr>
-          <a:lstStyle/>
-          <a:p>
-            <a:pPr algn="ctr" latinLnBrk="0">
-              <a:lnSpc>
-                <a:spcPct val="100000"/>
-              </a:lnSpc>
-              <a:spcBef>
-                <a:spcPts val="0"/>
-              </a:spcBef>
-              <a:spcAft>
-                <a:spcPts val="0"/>
-              </a:spcAft>
-            </a:pPr>
-            <a:r>
-              <a:rPr sz="1000" b="1">
-                <a:solidFill>
-                  <a:srgbClr val="0A2B45"/>
-                </a:solidFill>
-                <a:latin typeface="Microsoft YaHei"/>
-                <a:ea typeface="Microsoft YaHei"/>
-                <a:cs typeface="Microsoft YaHei"/>
-              </a:rPr>
-              <a:t>记忆</a:t>
-            </a:r>
-            <a:r>
-              <a:rPr sz="850" b="0">
-                <a:solidFill>
-                  <a:srgbClr val="1B4D69"/>
-                </a:solidFill>
-                <a:latin typeface="Microsoft YaHei"/>
-                <a:ea typeface="Microsoft YaHei"/>
-                <a:cs typeface="Microsoft YaHei"/>
-              </a:rPr>
-              <a:t>　摘要 + 被拒原因</a:t>
-            </a:r>
-          </a:p>
-        </p:txBody>
-      </p:sp>
-      <p:sp>
-        <p:nvSpPr>
-          <p:cNvPr id="23" name="Rounded Rectangle 22"/>
-          <p:cNvSpPr/>
-          <p:nvPr/>
-        </p:nvSpPr>
-        <p:spPr>
-          <a:xfrm>
-            <a:off x="548640" y="3383280"/>
-            <a:ext cx="11094415" cy="1975104"/>
-          </a:xfrm>
-          <a:prstGeom prst="roundRect">
-            <a:avLst>
-              <a:gd name="adj" fmla="val 4629"/>
-            </a:avLst>
-          </a:prstGeom>
-          <a:solidFill>
-            <a:srgbClr val="E6F0FC"/>
-          </a:solidFill>
-          <a:ln w="15875">
-            <a:solidFill>
-              <a:srgbClr val="0F62CE"/>
-            </a:solidFill>
-          </a:ln>
-        </p:spPr>
-        <p:txBody>
           <a:bodyPr rtlCol="0" anchor="ctr"/>
           <a:lstStyle/>
           <a:p>
             <a:pPr algn="ctr"/>
-          </a:p>
-        </p:txBody>
-      </p:sp>
-      <p:sp>
-        <p:nvSpPr>
-          <p:cNvPr id="24" name="TextBox 23"/>
-          <p:cNvSpPr txBox="1"/>
-          <p:nvPr/>
-        </p:nvSpPr>
-        <p:spPr>
-          <a:xfrm>
-            <a:off x="694944" y="3419856"/>
-            <a:ext cx="10801807" cy="256032"/>
-          </a:xfrm>
-          <a:prstGeom prst="rect">
-            <a:avLst/>
-          </a:prstGeom>
-          <a:noFill/>
-        </p:spPr>
-        <p:txBody>
-          <a:bodyPr wrap="square" anchor="ctr" lIns="0" tIns="0" rIns="0" bIns="0">
-            <a:noAutofit/>
-          </a:bodyPr>
-          <a:lstStyle/>
-          <a:p>
-            <a:pPr algn="l" latinLnBrk="0">
-              <a:lnSpc>
-                <a:spcPct val="100000"/>
-              </a:lnSpc>
-              <a:spcBef>
-                <a:spcPts val="0"/>
-              </a:spcBef>
-              <a:spcAft>
-                <a:spcPts val="0"/>
-              </a:spcAft>
-            </a:pPr>
-            <a:r>
-              <a:rPr sz="1250" b="1">
-                <a:solidFill>
-                  <a:srgbClr val="0F62CE"/>
-                </a:solidFill>
-                <a:latin typeface="Microsoft YaHei"/>
-                <a:ea typeface="Microsoft YaHei"/>
-                <a:cs typeface="Microsoft YaHei"/>
-              </a:rPr>
-              <a:t>控制器</a:t>
-            </a:r>
-            <a:r>
-              <a:rPr sz="850" b="0">
-                <a:solidFill>
-                  <a:srgbClr val="1B4D69"/>
-                </a:solidFill>
-                <a:latin typeface="Microsoft YaHei"/>
-                <a:ea typeface="Microsoft YaHei"/>
-                <a:cs typeface="Microsoft YaHei"/>
-              </a:rPr>
-              <a:t>　Python · 确定性 · 无大模型</a:t>
-            </a:r>
-            <a:r>
-              <a:rPr sz="900" b="0">
-                <a:solidFill>
-                  <a:srgbClr val="7FA4BA"/>
-                </a:solidFill>
-                <a:latin typeface="Microsoft YaHei"/>
-                <a:ea typeface="Microsoft YaHei"/>
-                <a:cs typeface="Microsoft YaHei"/>
-              </a:rPr>
-              <a:t>　｜　</a:t>
-            </a:r>
-            <a:r>
-              <a:rPr sz="850" b="0">
-                <a:solidFill>
-                  <a:srgbClr val="1B4D69"/>
-                </a:solidFill>
-                <a:latin typeface="Microsoft YaHei"/>
-                <a:ea typeface="Microsoft YaHei"/>
-                <a:cs typeface="Microsoft YaHei"/>
-              </a:rPr>
-              <a:t>调度状态机：设备锁 · 断点恢复 · 全部落盘 · 生成报告</a:t>
-            </a:r>
           </a:p>
         </p:txBody>
       </p:sp>
@@ -31701,8 +31683,215 @@
         </p:nvSpPr>
         <p:spPr>
           <a:xfrm>
-            <a:off x="658368" y="3730752"/>
-            <a:ext cx="4096512" cy="1554480"/>
+            <a:off x="8705088" y="3602736"/>
+            <a:ext cx="64008" cy="1371600"/>
+          </a:xfrm>
+          <a:prstGeom prst="rect">
+            <a:avLst/>
+          </a:prstGeom>
+          <a:solidFill>
+            <a:srgbClr val="0F62CE"/>
+          </a:solidFill>
+          <a:ln>
+            <a:noFill/>
+          </a:ln>
+        </p:spPr>
+        <p:txBody>
+          <a:bodyPr rtlCol="0" anchor="ctr"/>
+          <a:lstStyle/>
+          <a:p>
+            <a:pPr algn="ctr"/>
+          </a:p>
+        </p:txBody>
+      </p:sp>
+      <p:sp>
+        <p:nvSpPr>
+          <p:cNvPr id="26" name="TextBox 25"/>
+          <p:cNvSpPr txBox="1"/>
+          <p:nvPr/>
+        </p:nvSpPr>
+        <p:spPr>
+          <a:xfrm>
+            <a:off x="8887967" y="3648456"/>
+            <a:ext cx="2608783" cy="1280160"/>
+          </a:xfrm>
+          <a:prstGeom prst="rect">
+            <a:avLst/>
+          </a:prstGeom>
+          <a:noFill/>
+        </p:spPr>
+        <p:txBody>
+          <a:bodyPr wrap="square" anchor="ctr" lIns="0" tIns="0" rIns="0" bIns="0">
+            <a:noAutofit/>
+          </a:bodyPr>
+          <a:lstStyle/>
+          <a:p>
+            <a:pPr algn="l" latinLnBrk="0">
+              <a:lnSpc>
+                <a:spcPct val="100000"/>
+              </a:lnSpc>
+              <a:spcBef>
+                <a:spcPts val="0"/>
+              </a:spcBef>
+              <a:spcAft>
+                <a:spcPts val="300"/>
+              </a:spcAft>
+            </a:pPr>
+            <a:r>
+              <a:rPr sz="1050" b="1">
+                <a:solidFill>
+                  <a:srgbClr val="0A2B45"/>
+                </a:solidFill>
+                <a:latin typeface="Microsoft YaHei"/>
+                <a:ea typeface="Microsoft YaHei"/>
+                <a:cs typeface="Microsoft YaHei"/>
+              </a:rPr>
+              <a:t>构建与真机评测</a:t>
+            </a:r>
+            <a:r>
+              <a:rPr sz="800" b="1">
+                <a:solidFill>
+                  <a:srgbClr val="0F62CE"/>
+                </a:solidFill>
+                <a:latin typeface="Consolas"/>
+                <a:ea typeface="Microsoft YaHei"/>
+                <a:cs typeface="Microsoft YaHei"/>
+              </a:rPr>
+              <a:t>　Build &amp; Bench</a:t>
+            </a:r>
+          </a:p>
+          <a:p>
+            <a:pPr algn="l" latinLnBrk="0">
+              <a:lnSpc>
+                <a:spcPct val="100000"/>
+              </a:lnSpc>
+              <a:spcBef>
+                <a:spcPts val="0"/>
+              </a:spcBef>
+              <a:spcAft>
+                <a:spcPts val="0"/>
+              </a:spcAft>
+            </a:pPr>
+            <a:r>
+              <a:rPr sz="900" b="0">
+                <a:solidFill>
+                  <a:srgbClr val="1B4D69"/>
+                </a:solidFill>
+                <a:latin typeface="Microsoft YaHei"/>
+                <a:ea typeface="Microsoft YaHei"/>
+                <a:cs typeface="Microsoft YaHei"/>
+              </a:rPr>
+              <a:t>·　原位建版 · 精确重测</a:t>
+            </a:r>
+          </a:p>
+          <a:p>
+            <a:pPr algn="l" latinLnBrk="0">
+              <a:lnSpc>
+                <a:spcPct val="100000"/>
+              </a:lnSpc>
+              <a:spcBef>
+                <a:spcPts val="0"/>
+              </a:spcBef>
+              <a:spcAft>
+                <a:spcPts val="0"/>
+              </a:spcAft>
+            </a:pPr>
+            <a:r>
+              <a:rPr sz="900" b="0">
+                <a:solidFill>
+                  <a:srgbClr val="1B4D69"/>
+                </a:solidFill>
+                <a:latin typeface="Microsoft YaHei"/>
+                <a:ea typeface="Microsoft YaHei"/>
+                <a:cs typeface="Microsoft YaHei"/>
+              </a:rPr>
+              <a:t>·　四道门禁，一票否决</a:t>
+            </a:r>
+          </a:p>
+          <a:p>
+            <a:pPr algn="l" latinLnBrk="0">
+              <a:lnSpc>
+                <a:spcPct val="100000"/>
+              </a:lnSpc>
+              <a:spcBef>
+                <a:spcPts val="0"/>
+              </a:spcBef>
+              <a:spcAft>
+                <a:spcPts val="0"/>
+              </a:spcAft>
+            </a:pPr>
+            <a:r>
+              <a:rPr sz="900" b="0">
+                <a:solidFill>
+                  <a:srgbClr val="1B4D69"/>
+                </a:solidFill>
+                <a:latin typeface="Microsoft YaHei"/>
+                <a:ea typeface="Microsoft YaHei"/>
+                <a:cs typeface="Microsoft YaHei"/>
+              </a:rPr>
+              <a:t>·　单算子 ≥ 2% · 数值 ≤ 0.03</a:t>
+            </a:r>
+          </a:p>
+          <a:p>
+            <a:pPr algn="l" latinLnBrk="0">
+              <a:lnSpc>
+                <a:spcPct val="100000"/>
+              </a:lnSpc>
+              <a:spcBef>
+                <a:spcPts val="0"/>
+              </a:spcBef>
+              <a:spcAft>
+                <a:spcPts val="0"/>
+              </a:spcAft>
+            </a:pPr>
+            <a:r>
+              <a:rPr sz="900" b="0">
+                <a:solidFill>
+                  <a:srgbClr val="1B4D69"/>
+                </a:solidFill>
+                <a:latin typeface="Microsoft YaHei"/>
+                <a:ea typeface="Microsoft YaHei"/>
+                <a:cs typeface="Microsoft YaHei"/>
+              </a:rPr>
+              <a:t>·　整模 A/B 超出噪声</a:t>
+            </a:r>
+          </a:p>
+          <a:p>
+            <a:pPr algn="l" latinLnBrk="0">
+              <a:lnSpc>
+                <a:spcPct val="100000"/>
+              </a:lnSpc>
+              <a:spcBef>
+                <a:spcPts val="0"/>
+              </a:spcBef>
+              <a:spcAft>
+                <a:spcPts val="0"/>
+              </a:spcAft>
+            </a:pPr>
+            <a:r>
+              <a:rPr sz="900" b="0">
+                <a:solidFill>
+                  <a:srgbClr val="1B4D69"/>
+                </a:solidFill>
+                <a:latin typeface="Microsoft YaHei"/>
+                <a:ea typeface="Microsoft YaHei"/>
+                <a:cs typeface="Microsoft YaHei"/>
+              </a:rPr>
+              <a:t>·　M100 真机实测</a:t>
+            </a:r>
+          </a:p>
+        </p:txBody>
+      </p:sp>
+      <p:sp>
+        <p:nvSpPr>
+          <p:cNvPr id="27" name="Rectangle 26"/>
+          <p:cNvSpPr/>
+          <p:nvPr/>
+        </p:nvSpPr>
+        <p:spPr>
+          <a:xfrm>
+            <a:off x="4041648" y="1517904"/>
+            <a:ext cx="3840480" cy="4005072"/>
           </a:xfrm>
           <a:prstGeom prst="rect">
             <a:avLst/>
@@ -31726,1045 +31915,22 @@
       </p:sp>
       <p:sp>
         <p:nvSpPr>
-          <p:cNvPr id="26" name="Rectangle 25"/>
-          <p:cNvSpPr/>
-          <p:nvPr/>
-        </p:nvSpPr>
-        <p:spPr>
-          <a:xfrm>
-            <a:off x="768096" y="3794760"/>
-            <a:ext cx="45720" cy="146304"/>
-          </a:xfrm>
-          <a:prstGeom prst="rect">
-            <a:avLst/>
-          </a:prstGeom>
-          <a:solidFill>
-            <a:srgbClr val="17795F"/>
-          </a:solidFill>
-          <a:ln>
-            <a:noFill/>
-          </a:ln>
-        </p:spPr>
-        <p:txBody>
-          <a:bodyPr rtlCol="0" anchor="ctr"/>
-          <a:lstStyle/>
-          <a:p>
-            <a:pPr algn="ctr"/>
-          </a:p>
-        </p:txBody>
-      </p:sp>
-      <p:sp>
-        <p:nvSpPr>
-          <p:cNvPr id="27" name="TextBox 26"/>
-          <p:cNvSpPr txBox="1"/>
-          <p:nvPr/>
-        </p:nvSpPr>
-        <p:spPr>
-          <a:xfrm>
-            <a:off x="877824" y="3730752"/>
-            <a:ext cx="3803904" cy="256032"/>
-          </a:xfrm>
-          <a:prstGeom prst="rect">
-            <a:avLst/>
-          </a:prstGeom>
-          <a:noFill/>
-        </p:spPr>
-        <p:txBody>
-          <a:bodyPr wrap="square" anchor="ctr" lIns="0" tIns="0" rIns="0" bIns="0">
-            <a:noAutofit/>
-          </a:bodyPr>
-          <a:lstStyle/>
-          <a:p>
-            <a:pPr algn="l" latinLnBrk="0">
-              <a:lnSpc>
-                <a:spcPct val="100000"/>
-              </a:lnSpc>
-              <a:spcBef>
-                <a:spcPts val="0"/>
-              </a:spcBef>
-              <a:spcAft>
-                <a:spcPts val="0"/>
-              </a:spcAft>
-            </a:pPr>
-            <a:r>
-              <a:rPr sz="1000" b="1">
-                <a:solidFill>
-                  <a:srgbClr val="0A2B45"/>
-                </a:solidFill>
-                <a:latin typeface="Microsoft YaHei"/>
-                <a:ea typeface="Microsoft YaHei"/>
-                <a:cs typeface="Microsoft YaHei"/>
-              </a:rPr>
-              <a:t>取证分析（证据层）</a:t>
-            </a:r>
-          </a:p>
-        </p:txBody>
-      </p:sp>
-      <p:sp>
-        <p:nvSpPr>
           <p:cNvPr id="28" name="Rounded Rectangle 27"/>
           <p:cNvSpPr/>
           <p:nvPr/>
         </p:nvSpPr>
         <p:spPr>
           <a:xfrm>
-            <a:off x="786384" y="4078224"/>
-            <a:ext cx="1170432" cy="512064"/>
+            <a:off x="4272076" y="1609344"/>
+            <a:ext cx="3379622" cy="475488"/>
           </a:xfrm>
           <a:prstGeom prst="roundRect">
             <a:avLst>
-              <a:gd name="adj" fmla="val 10714"/>
+              <a:gd name="adj" fmla="val 15384"/>
             </a:avLst>
           </a:prstGeom>
           <a:solidFill>
-            <a:srgbClr val="FFFFFF"/>
-          </a:solidFill>
-          <a:ln w="9525">
-            <a:solidFill>
-              <a:srgbClr val="17795F"/>
-            </a:solidFill>
-          </a:ln>
-        </p:spPr>
-        <p:txBody>
-          <a:bodyPr rtlCol="0" anchor="ctr" wrap="square" lIns="128016" tIns="18288" rIns="36576" bIns="18288">
-            <a:noAutofit/>
-          </a:bodyPr>
-          <a:lstStyle/>
-          <a:p>
-            <a:pPr algn="ctr" latinLnBrk="0">
-              <a:lnSpc>
-                <a:spcPct val="100000"/>
-              </a:lnSpc>
-              <a:spcBef>
-                <a:spcPts val="0"/>
-              </a:spcBef>
-              <a:spcAft>
-                <a:spcPts val="0"/>
-              </a:spcAft>
-            </a:pPr>
-            <a:r>
-              <a:rPr sz="950" b="1">
-                <a:solidFill>
-                  <a:srgbClr val="0A2B45"/>
-                </a:solidFill>
-                <a:latin typeface="Microsoft YaHei"/>
-                <a:ea typeface="Microsoft YaHei"/>
-                <a:cs typeface="Microsoft YaHei"/>
-              </a:rPr>
-              <a:t>性能采集</a:t>
-            </a:r>
-          </a:p>
-          <a:p>
-            <a:pPr algn="ctr" latinLnBrk="0">
-              <a:lnSpc>
-                <a:spcPct val="100000"/>
-              </a:lnSpc>
-              <a:spcBef>
-                <a:spcPts val="0"/>
-              </a:spcBef>
-              <a:spcAft>
-                <a:spcPts val="0"/>
-              </a:spcAft>
-            </a:pPr>
-            <a:r>
-              <a:rPr sz="800" b="0">
-                <a:solidFill>
-                  <a:srgbClr val="1B4D69"/>
-                </a:solidFill>
-                <a:latin typeface="Microsoft YaHei"/>
-                <a:ea typeface="Microsoft YaHei"/>
-                <a:cs typeface="Microsoft YaHei"/>
-              </a:rPr>
-              <a:t>Trace + 专家路由</a:t>
-            </a:r>
-          </a:p>
-        </p:txBody>
-      </p:sp>
-      <p:sp>
-        <p:nvSpPr>
-          <p:cNvPr id="29" name="Oval 28"/>
-          <p:cNvSpPr/>
-          <p:nvPr/>
-        </p:nvSpPr>
-        <p:spPr>
-          <a:xfrm>
-            <a:off x="704088" y="3995928"/>
-            <a:ext cx="219456" cy="219456"/>
-          </a:xfrm>
-          <a:prstGeom prst="ellipse">
-            <a:avLst/>
-          </a:prstGeom>
-          <a:solidFill>
-            <a:srgbClr val="17795F"/>
-          </a:solidFill>
-          <a:ln>
-            <a:noFill/>
-          </a:ln>
-        </p:spPr>
-        <p:txBody>
-          <a:bodyPr rtlCol="0" anchor="ctr" wrap="square" lIns="0" tIns="0" rIns="0" bIns="0">
-            <a:noAutofit/>
-          </a:bodyPr>
-          <a:lstStyle/>
-          <a:p>
-            <a:pPr algn="ctr" latinLnBrk="0">
-              <a:lnSpc>
-                <a:spcPct val="100000"/>
-              </a:lnSpc>
-              <a:spcBef>
-                <a:spcPts val="0"/>
-              </a:spcBef>
-              <a:spcAft>
-                <a:spcPts val="0"/>
-              </a:spcAft>
-            </a:pPr>
-            <a:r>
-              <a:rPr sz="900" b="1">
-                <a:solidFill>
-                  <a:srgbClr val="FFFFFF"/>
-                </a:solidFill>
-                <a:latin typeface="Microsoft YaHei"/>
-                <a:ea typeface="Microsoft YaHei"/>
-                <a:cs typeface="Microsoft YaHei"/>
-              </a:rPr>
-              <a:t>1</a:t>
-            </a:r>
-          </a:p>
-        </p:txBody>
-      </p:sp>
-      <p:sp>
-        <p:nvSpPr>
-          <p:cNvPr id="30" name="Rounded Rectangle 29"/>
-          <p:cNvSpPr/>
-          <p:nvPr/>
-        </p:nvSpPr>
-        <p:spPr>
-          <a:xfrm>
-            <a:off x="2139696" y="4078224"/>
-            <a:ext cx="1170432" cy="512064"/>
-          </a:xfrm>
-          <a:prstGeom prst="roundRect">
-            <a:avLst>
-              <a:gd name="adj" fmla="val 10714"/>
-            </a:avLst>
-          </a:prstGeom>
-          <a:solidFill>
-            <a:srgbClr val="FFFFFF"/>
-          </a:solidFill>
-          <a:ln w="9525">
-            <a:solidFill>
-              <a:srgbClr val="17795F"/>
-            </a:solidFill>
-          </a:ln>
-        </p:spPr>
-        <p:txBody>
-          <a:bodyPr rtlCol="0" anchor="ctr" wrap="square" lIns="128016" tIns="18288" rIns="36576" bIns="18288">
-            <a:noAutofit/>
-          </a:bodyPr>
-          <a:lstStyle/>
-          <a:p>
-            <a:pPr algn="ctr" latinLnBrk="0">
-              <a:lnSpc>
-                <a:spcPct val="100000"/>
-              </a:lnSpc>
-              <a:spcBef>
-                <a:spcPts val="0"/>
-              </a:spcBef>
-              <a:spcAft>
-                <a:spcPts val="0"/>
-              </a:spcAft>
-            </a:pPr>
-            <a:r>
-              <a:rPr sz="950" b="1">
-                <a:solidFill>
-                  <a:srgbClr val="0A2B45"/>
-                </a:solidFill>
-                <a:latin typeface="Microsoft YaHei"/>
-                <a:ea typeface="Microsoft YaHei"/>
-                <a:cs typeface="Microsoft YaHei"/>
-              </a:rPr>
-              <a:t>耗时归因</a:t>
-            </a:r>
-          </a:p>
-          <a:p>
-            <a:pPr algn="ctr" latinLnBrk="0">
-              <a:lnSpc>
-                <a:spcPct val="100000"/>
-              </a:lnSpc>
-              <a:spcBef>
-                <a:spcPts val="0"/>
-              </a:spcBef>
-              <a:spcAft>
-                <a:spcPts val="0"/>
-              </a:spcAft>
-            </a:pPr>
-            <a:r>
-              <a:rPr sz="800" b="0">
-                <a:solidFill>
-                  <a:srgbClr val="1B4D69"/>
-                </a:solidFill>
-                <a:latin typeface="Microsoft YaHei"/>
-                <a:ea typeface="Microsoft YaHei"/>
-                <a:cs typeface="Microsoft YaHei"/>
-              </a:rPr>
-              <a:t>kernel 对齐到源码</a:t>
-            </a:r>
-          </a:p>
-        </p:txBody>
-      </p:sp>
-      <p:sp>
-        <p:nvSpPr>
-          <p:cNvPr id="31" name="Oval 30"/>
-          <p:cNvSpPr/>
-          <p:nvPr/>
-        </p:nvSpPr>
-        <p:spPr>
-          <a:xfrm>
-            <a:off x="2057400" y="3995928"/>
-            <a:ext cx="219456" cy="219456"/>
-          </a:xfrm>
-          <a:prstGeom prst="ellipse">
-            <a:avLst/>
-          </a:prstGeom>
-          <a:solidFill>
-            <a:srgbClr val="17795F"/>
-          </a:solidFill>
-          <a:ln>
-            <a:noFill/>
-          </a:ln>
-        </p:spPr>
-        <p:txBody>
-          <a:bodyPr rtlCol="0" anchor="ctr" wrap="square" lIns="0" tIns="0" rIns="0" bIns="0">
-            <a:noAutofit/>
-          </a:bodyPr>
-          <a:lstStyle/>
-          <a:p>
-            <a:pPr algn="ctr" latinLnBrk="0">
-              <a:lnSpc>
-                <a:spcPct val="100000"/>
-              </a:lnSpc>
-              <a:spcBef>
-                <a:spcPts val="0"/>
-              </a:spcBef>
-              <a:spcAft>
-                <a:spcPts val="0"/>
-              </a:spcAft>
-            </a:pPr>
-            <a:r>
-              <a:rPr sz="900" b="1">
-                <a:solidFill>
-                  <a:srgbClr val="FFFFFF"/>
-                </a:solidFill>
-                <a:latin typeface="Microsoft YaHei"/>
-                <a:ea typeface="Microsoft YaHei"/>
-                <a:cs typeface="Microsoft YaHei"/>
-              </a:rPr>
-              <a:t>2</a:t>
-            </a:r>
-          </a:p>
-        </p:txBody>
-      </p:sp>
-      <p:cxnSp>
-        <p:nvCxnSpPr>
-          <p:cNvPr id="32" name="Connector 31"/>
-          <p:cNvCxnSpPr/>
-          <p:nvPr/>
-        </p:nvCxnSpPr>
-        <p:spPr>
-          <a:xfrm>
-            <a:off x="1984248" y="4334256"/>
-            <a:ext cx="128016" cy="0"/>
-          </a:xfrm>
-          <a:prstGeom prst="line">
-            <a:avLst/>
-          </a:prstGeom>
-          <a:ln w="15875">
-            <a:solidFill>
-              <a:srgbClr val="40708B"/>
-            </a:solidFill>
-            <a:tailEnd type="triangle" w="med" len="med"/>
-          </a:ln>
-        </p:spPr>
-      </p:cxnSp>
-      <p:sp>
-        <p:nvSpPr>
-          <p:cNvPr id="33" name="Rounded Rectangle 32"/>
-          <p:cNvSpPr/>
-          <p:nvPr/>
-        </p:nvSpPr>
-        <p:spPr>
-          <a:xfrm>
-            <a:off x="3493008" y="4078224"/>
-            <a:ext cx="1170432" cy="512064"/>
-          </a:xfrm>
-          <a:prstGeom prst="roundRect">
-            <a:avLst>
-              <a:gd name="adj" fmla="val 10714"/>
-            </a:avLst>
-          </a:prstGeom>
-          <a:solidFill>
-            <a:srgbClr val="FFFFFF"/>
-          </a:solidFill>
-          <a:ln w="9525">
-            <a:solidFill>
-              <a:srgbClr val="17795F"/>
-            </a:solidFill>
-          </a:ln>
-        </p:spPr>
-        <p:txBody>
-          <a:bodyPr rtlCol="0" anchor="ctr" wrap="square" lIns="128016" tIns="18288" rIns="36576" bIns="18288">
-            <a:noAutofit/>
-          </a:bodyPr>
-          <a:lstStyle/>
-          <a:p>
-            <a:pPr algn="ctr" latinLnBrk="0">
-              <a:lnSpc>
-                <a:spcPct val="100000"/>
-              </a:lnSpc>
-              <a:spcBef>
-                <a:spcPts val="0"/>
-              </a:spcBef>
-              <a:spcAft>
-                <a:spcPts val="0"/>
-              </a:spcAft>
-            </a:pPr>
-            <a:r>
-              <a:rPr sz="950" b="1">
-                <a:solidFill>
-                  <a:srgbClr val="0A2B45"/>
-                </a:solidFill>
-                <a:latin typeface="Microsoft YaHei"/>
-                <a:ea typeface="Microsoft YaHei"/>
-                <a:cs typeface="Microsoft YaHei"/>
-              </a:rPr>
-              <a:t>Roofline 账本</a:t>
-            </a:r>
-          </a:p>
-          <a:p>
-            <a:pPr algn="ctr" latinLnBrk="0">
-              <a:lnSpc>
-                <a:spcPct val="100000"/>
-              </a:lnSpc>
-              <a:spcBef>
-                <a:spcPts val="0"/>
-              </a:spcBef>
-              <a:spcAft>
-                <a:spcPts val="0"/>
-              </a:spcAft>
-            </a:pPr>
-            <a:r>
-              <a:rPr sz="800" b="0">
-                <a:solidFill>
-                  <a:srgbClr val="1B4D69"/>
-                </a:solidFill>
-                <a:latin typeface="Microsoft YaHei"/>
-                <a:ea typeface="Microsoft YaHei"/>
-                <a:cs typeface="Microsoft YaHei"/>
-              </a:rPr>
-              <a:t>下界 · 差距倍数</a:t>
-            </a:r>
-          </a:p>
-        </p:txBody>
-      </p:sp>
-      <p:sp>
-        <p:nvSpPr>
-          <p:cNvPr id="34" name="Oval 33"/>
-          <p:cNvSpPr/>
-          <p:nvPr/>
-        </p:nvSpPr>
-        <p:spPr>
-          <a:xfrm>
-            <a:off x="3410712" y="3995928"/>
-            <a:ext cx="219456" cy="219456"/>
-          </a:xfrm>
-          <a:prstGeom prst="ellipse">
-            <a:avLst/>
-          </a:prstGeom>
-          <a:solidFill>
-            <a:srgbClr val="17795F"/>
-          </a:solidFill>
-          <a:ln>
-            <a:noFill/>
-          </a:ln>
-        </p:spPr>
-        <p:txBody>
-          <a:bodyPr rtlCol="0" anchor="ctr" wrap="square" lIns="0" tIns="0" rIns="0" bIns="0">
-            <a:noAutofit/>
-          </a:bodyPr>
-          <a:lstStyle/>
-          <a:p>
-            <a:pPr algn="ctr" latinLnBrk="0">
-              <a:lnSpc>
-                <a:spcPct val="100000"/>
-              </a:lnSpc>
-              <a:spcBef>
-                <a:spcPts val="0"/>
-              </a:spcBef>
-              <a:spcAft>
-                <a:spcPts val="0"/>
-              </a:spcAft>
-            </a:pPr>
-            <a:r>
-              <a:rPr sz="900" b="1">
-                <a:solidFill>
-                  <a:srgbClr val="FFFFFF"/>
-                </a:solidFill>
-                <a:latin typeface="Microsoft YaHei"/>
-                <a:ea typeface="Microsoft YaHei"/>
-                <a:cs typeface="Microsoft YaHei"/>
-              </a:rPr>
-              <a:t>3</a:t>
-            </a:r>
-          </a:p>
-        </p:txBody>
-      </p:sp>
-      <p:cxnSp>
-        <p:nvCxnSpPr>
-          <p:cNvPr id="35" name="Connector 34"/>
-          <p:cNvCxnSpPr/>
-          <p:nvPr/>
-        </p:nvCxnSpPr>
-        <p:spPr>
-          <a:xfrm>
-            <a:off x="3337560" y="4334256"/>
-            <a:ext cx="128016" cy="0"/>
-          </a:xfrm>
-          <a:prstGeom prst="line">
-            <a:avLst/>
-          </a:prstGeom>
-          <a:ln w="15875">
-            <a:solidFill>
-              <a:srgbClr val="40708B"/>
-            </a:solidFill>
-            <a:tailEnd type="triangle" w="med" len="med"/>
-          </a:ln>
-        </p:spPr>
-      </p:cxnSp>
-      <p:sp>
-        <p:nvSpPr>
-          <p:cNvPr id="36" name="Rounded Rectangle 35"/>
-          <p:cNvSpPr/>
-          <p:nvPr/>
-        </p:nvSpPr>
-        <p:spPr>
-          <a:xfrm>
-            <a:off x="749808" y="4700016"/>
-            <a:ext cx="923544" cy="475488"/>
-          </a:xfrm>
-          <a:prstGeom prst="roundRect">
-            <a:avLst>
-              <a:gd name="adj" fmla="val 11538"/>
-            </a:avLst>
-          </a:prstGeom>
-          <a:solidFill>
-            <a:srgbClr val="FFFFFF"/>
-          </a:solidFill>
-          <a:ln w="9525">
-            <a:solidFill>
-              <a:srgbClr val="AFCEE1"/>
-            </a:solidFill>
-          </a:ln>
-        </p:spPr>
-        <p:txBody>
-          <a:bodyPr rtlCol="0" anchor="ctr" wrap="square" lIns="45720" tIns="18288" rIns="45720" bIns="18288">
-            <a:noAutofit/>
-          </a:bodyPr>
-          <a:lstStyle/>
-          <a:p>
-            <a:pPr algn="ctr" latinLnBrk="0">
-              <a:lnSpc>
-                <a:spcPct val="100000"/>
-              </a:lnSpc>
-              <a:spcBef>
-                <a:spcPts val="0"/>
-              </a:spcBef>
-              <a:spcAft>
-                <a:spcPts val="0"/>
-              </a:spcAft>
-            </a:pPr>
-            <a:r>
-              <a:rPr sz="950" b="1">
-                <a:solidFill>
-                  <a:srgbClr val="0A2B45"/>
-                </a:solidFill>
-                <a:latin typeface="Microsoft YaHei"/>
-                <a:ea typeface="Microsoft YaHei"/>
-                <a:cs typeface="Microsoft YaHei"/>
-              </a:rPr>
-              <a:t>硬件天花板</a:t>
-            </a:r>
-          </a:p>
-          <a:p>
-            <a:pPr algn="ctr" latinLnBrk="0">
-              <a:lnSpc>
-                <a:spcPct val="100000"/>
-              </a:lnSpc>
-              <a:spcBef>
-                <a:spcPts val="0"/>
-              </a:spcBef>
-              <a:spcAft>
-                <a:spcPts val="0"/>
-              </a:spcAft>
-            </a:pPr>
-            <a:r>
-              <a:rPr sz="800" b="0">
-                <a:solidFill>
-                  <a:srgbClr val="1B4D69"/>
-                </a:solidFill>
-                <a:latin typeface="Microsoft YaHei"/>
-                <a:ea typeface="Microsoft YaHei"/>
-                <a:cs typeface="Microsoft YaHei"/>
-              </a:rPr>
-              <a:t>带宽与算力上限</a:t>
-            </a:r>
-          </a:p>
-        </p:txBody>
-      </p:sp>
-      <p:sp>
-        <p:nvSpPr>
-          <p:cNvPr id="37" name="Rounded Rectangle 36"/>
-          <p:cNvSpPr/>
-          <p:nvPr/>
-        </p:nvSpPr>
-        <p:spPr>
-          <a:xfrm>
-            <a:off x="1746504" y="4700016"/>
-            <a:ext cx="923544" cy="475488"/>
-          </a:xfrm>
-          <a:prstGeom prst="roundRect">
-            <a:avLst>
-              <a:gd name="adj" fmla="val 11538"/>
-            </a:avLst>
-          </a:prstGeom>
-          <a:solidFill>
-            <a:srgbClr val="FFFFFF"/>
-          </a:solidFill>
-          <a:ln w="9525">
-            <a:solidFill>
-              <a:srgbClr val="AFCEE1"/>
-            </a:solidFill>
-          </a:ln>
-        </p:spPr>
-        <p:txBody>
-          <a:bodyPr rtlCol="0" anchor="ctr" wrap="square" lIns="45720" tIns="18288" rIns="45720" bIns="18288">
-            <a:noAutofit/>
-          </a:bodyPr>
-          <a:lstStyle/>
-          <a:p>
-            <a:pPr algn="ctr" latinLnBrk="0">
-              <a:lnSpc>
-                <a:spcPct val="100000"/>
-              </a:lnSpc>
-              <a:spcBef>
-                <a:spcPts val="0"/>
-              </a:spcBef>
-              <a:spcAft>
-                <a:spcPts val="0"/>
-              </a:spcAft>
-            </a:pPr>
-            <a:r>
-              <a:rPr sz="950" b="1">
-                <a:solidFill>
-                  <a:srgbClr val="0A2B45"/>
-                </a:solidFill>
-                <a:latin typeface="Microsoft YaHei"/>
-                <a:ea typeface="Microsoft YaHei"/>
-                <a:cs typeface="Microsoft YaHei"/>
-              </a:rPr>
-              <a:t>账本自检</a:t>
-            </a:r>
-          </a:p>
-          <a:p>
-            <a:pPr algn="ctr" latinLnBrk="0">
-              <a:lnSpc>
-                <a:spcPct val="100000"/>
-              </a:lnSpc>
-              <a:spcBef>
-                <a:spcPts val="0"/>
-              </a:spcBef>
-              <a:spcAft>
-                <a:spcPts val="0"/>
-              </a:spcAft>
-            </a:pPr>
-            <a:r>
-              <a:rPr sz="800" b="0">
-                <a:solidFill>
-                  <a:srgbClr val="1B4D69"/>
-                </a:solidFill>
-                <a:latin typeface="Microsoft YaHei"/>
-                <a:ea typeface="Microsoft YaHei"/>
-                <a:cs typeface="Microsoft YaHei"/>
-              </a:rPr>
-              <a:t>&lt; 0.9 即隔离</a:t>
-            </a:r>
-          </a:p>
-        </p:txBody>
-      </p:sp>
-      <p:sp>
-        <p:nvSpPr>
-          <p:cNvPr id="38" name="Rounded Rectangle 37"/>
-          <p:cNvSpPr/>
-          <p:nvPr/>
-        </p:nvSpPr>
-        <p:spPr>
-          <a:xfrm>
-            <a:off x="2743200" y="4700016"/>
-            <a:ext cx="923544" cy="475488"/>
-          </a:xfrm>
-          <a:prstGeom prst="roundRect">
-            <a:avLst>
-              <a:gd name="adj" fmla="val 11538"/>
-            </a:avLst>
-          </a:prstGeom>
-          <a:solidFill>
-            <a:srgbClr val="FFFFFF"/>
-          </a:solidFill>
-          <a:ln w="9525">
-            <a:solidFill>
-              <a:srgbClr val="AFCEE